--- a/20_Projects/海音_心体の調律/単発/仁部あきえさん/20261028_仁部あきえさん_お金のブロック単発セッション.pptx
+++ b/20_Projects/海音_心体の調律/単発/仁部あきえさん/20261028_仁部あきえさん_お金のブロック単発セッション.pptx
@@ -149,13 +149,13 @@
   <p:extLst>
     <p:ext uri="{521415D9-36F7-43E2-AB2F-B90AF26B5E84}">
       <p14:sectionLst xmlns:p14="http://schemas.microsoft.com/office/powerpoint/2010/main">
-        <p14:section name="はじめに" id="{c5f64f7b-71b8-2c73-1dc5-165558c27fc8}">
+        <p14:section name="はじめに" id="{a56feee0-a017-b48e-5897-9bb269e84c75}">
           <p14:sldIdLst>
             <p14:sldId id="256"/>
             <p14:sldId id="257"/>
           </p14:sldIdLst>
         </p14:section>
-        <p14:section name="第1部 頭の構造を知る" id="{32f75552-3800-1132-deb1-f97fdc15def9}">
+        <p14:section name="第1部 頭の構造を知る" id="{3b67756c-a508-0d1d-b7ef-033a4d1d21b8}">
           <p14:sldIdLst>
             <p14:sldId id="258"/>
             <p14:sldId id="259"/>
@@ -171,7 +171,7 @@
             <p14:sldId id="269"/>
           </p14:sldIdLst>
         </p14:section>
-        <p14:section name="第2部 魂の傷を聴く" id="{6165f41b-4489-eedd-f79e-4ab11796609d}">
+        <p14:section name="第2部 魂の傷を聴く" id="{49e6202e-49ac-64cd-61dd-166a779eeb37}">
           <p14:sldIdLst>
             <p14:sldId id="270"/>
             <p14:sldId id="271"/>
@@ -185,7 +185,7 @@
             <p14:sldId id="279"/>
           </p14:sldIdLst>
         </p14:section>
-        <p14:section name="ワーク 思い込みを書き換える" id="{5025f4cc-da11-86c0-f245-c0672eeb4a28}">
+        <p14:section name="ワーク 思い込みを書き換える" id="{de1cc901-7318-68ab-fb8b-071e7aa6f602}">
           <p14:sldIdLst>
             <p14:sldId id="280"/>
             <p14:sldId id="281"/>
@@ -203,12 +203,12 @@
             <p14:sldId id="293"/>
           </p14:sldIdLst>
         </p14:section>
-        <p14:section name="エネルギー" id="{1b592ad0-fe54-509b-1cfb-65a8b76ff4ac}">
+        <p14:section name="エネルギー" id="{ce9b6a62-2052-c7fe-1f0c-cdc52b5960f1}">
           <p14:sldIdLst>
             <p14:sldId id="294"/>
           </p14:sldIdLst>
         </p14:section>
-        <p14:section name="まとめ" id="{5ca1488f-66e3-0728-fec7-00212696f5ce}">
+        <p14:section name="まとめ" id="{533ddf20-9507-8e27-1960-4944860f21fc}">
           <p14:sldIdLst>
             <p14:sldId id="295"/>
             <p14:sldId id="296"/>
@@ -17872,30 +17872,208 @@
           <a:chExt cx="0" cy="0"/>
         </a:xfrm>
       </p:grpSpPr>
-      <p:pic>
-        <p:nvPicPr>
-          <p:cNvPr id="2" name="Image 0" descr="絶対的安心感">    </p:cNvPr>
-          <p:cNvPicPr>
-            <a:picLocks noChangeAspect="1"/>
-          </p:cNvPicPr>
+      <p:sp>
+        <p:nvSpPr>
+          <p:cNvPr id="2" name="base_head"/>
+          <p:cNvSpPr txBox="1"/>
           <p:nvPr/>
-        </p:nvPicPr>
-        <p:blipFill>
-          <a:blip r:embed="rId1"/>
-          <a:stretch>
-            <a:fillRect/>
-          </a:stretch>
-        </p:blipFill>
-        <p:spPr>
-          <a:xfrm>
-            <a:off x="0" y="20003"/>
-            <a:ext cx="9144000" cy="5103495"/>
-          </a:xfrm>
-          <a:prstGeom prst="rect">
-            <a:avLst/>
-          </a:prstGeom>
-        </p:spPr>
-      </p:pic>
+        </p:nvSpPr>
+        <p:spPr>
+          <a:xfrm>
+            <a:off x="731520" y="548640"/>
+            <a:ext cx="7680960" cy="457200"/>
+          </a:xfrm>
+          <a:prstGeom prst="rect">
+            <a:avLst/>
+          </a:prstGeom>
+          <a:noFill/>
+          <a:ln/>
+        </p:spPr>
+        <p:txBody>
+          <a:bodyPr wrap="square" lIns="1016" tIns="1016" rIns="1016" bIns="1016" rtlCol="0" anchor="t"/>
+          <a:lstStyle/>
+          <a:p>
+            <a:pPr algn="ctr" indent="0" marL="0">
+              <a:buNone/>
+            </a:pPr>
+            <a:r>
+              <a:rPr lang="en-US" sz="1800" b="1" dirty="0">
+                <a:solidFill>
+                  <a:schemeClr val="accent2"/>
+                </a:solidFill>
+              </a:rPr>
+              <a:t>すべての土台：「絶対的安心感」</a:t>
+            </a:r>
+            <a:endParaRPr lang="en-US" sz="1800" dirty="0"/>
+          </a:p>
+        </p:txBody>
+      </p:sp>
+      <p:sp>
+        <p:nvSpPr>
+          <p:cNvPr id="3" name="base_main"/>
+          <p:cNvSpPr txBox="1"/>
+          <p:nvPr/>
+        </p:nvSpPr>
+        <p:spPr>
+          <a:xfrm>
+            <a:off x="548640" y="1280160"/>
+            <a:ext cx="8046720" cy="1645920"/>
+          </a:xfrm>
+          <a:prstGeom prst="rect">
+            <a:avLst/>
+          </a:prstGeom>
+          <a:noFill/>
+          <a:ln/>
+        </p:spPr>
+        <p:txBody>
+          <a:bodyPr wrap="square" rtlCol="0" anchor="ctr"/>
+          <a:lstStyle/>
+          <a:p>
+            <a:pPr algn="ctr" indent="0" marL="0">
+              <a:buNone/>
+            </a:pPr>
+            <a:r>
+              <a:rPr lang="en-US" sz="3000" b="1" dirty="0">
+                <a:solidFill>
+                  <a:schemeClr val="tx2"/>
+                </a:solidFill>
+                <a:latin typeface="Yu Mincho" pitchFamily="34" charset="0"/>
+                <a:ea typeface="Yu Mincho" pitchFamily="34" charset="-122"/>
+                <a:cs typeface="Yu Mincho" pitchFamily="34" charset="-120"/>
+              </a:rPr>
+              <a:t>「何をやっても、やらなくても大丈夫。」</a:t>
+            </a:r>
+            <a:endParaRPr lang="en-US" sz="3000" dirty="0"/>
+          </a:p>
+          <a:p>
+            <a:pPr algn="ctr" indent="0" marL="0">
+              <a:buNone/>
+            </a:pPr>
+            <a:r>
+              <a:rPr lang="en-US" sz="3000" b="1" dirty="0">
+                <a:solidFill>
+                  <a:schemeClr val="tx2"/>
+                </a:solidFill>
+                <a:latin typeface="Yu Mincho" pitchFamily="34" charset="0"/>
+                <a:ea typeface="Yu Mincho" pitchFamily="34" charset="-122"/>
+                <a:cs typeface="Yu Mincho" pitchFamily="34" charset="-120"/>
+              </a:rPr>
+              <a:t>「嫌なことをやめても、愛される。」</a:t>
+            </a:r>
+            <a:endParaRPr lang="en-US" sz="3000" dirty="0"/>
+          </a:p>
+        </p:txBody>
+      </p:sp>
+      <p:sp>
+        <p:nvSpPr>
+          <p:cNvPr id="4" name="base_sub"/>
+          <p:cNvSpPr txBox="1"/>
+          <p:nvPr/>
+        </p:nvSpPr>
+        <p:spPr>
+          <a:xfrm>
+            <a:off x="731520" y="3154680"/>
+            <a:ext cx="7680960" cy="914400"/>
+          </a:xfrm>
+          <a:prstGeom prst="rect">
+            <a:avLst/>
+          </a:prstGeom>
+          <a:noFill/>
+          <a:ln/>
+        </p:spPr>
+        <p:txBody>
+          <a:bodyPr wrap="square" rtlCol="0" anchor="t"/>
+          <a:lstStyle/>
+          <a:p>
+            <a:pPr algn="ctr" indent="0" marL="0">
+              <a:buNone/>
+            </a:pPr>
+            <a:r>
+              <a:rPr lang="en-US" sz="1600" b="1" dirty="0">
+                <a:solidFill>
+                  <a:schemeClr val="tx2"/>
+                </a:solidFill>
+              </a:rPr>
+              <a:t>この根拠のない自信があるからこそ、</a:t>
+            </a:r>
+            <a:endParaRPr lang="en-US" sz="1600" dirty="0"/>
+          </a:p>
+          <a:p>
+            <a:pPr algn="ctr" indent="0" marL="0">
+              <a:buNone/>
+            </a:pPr>
+            <a:r>
+              <a:rPr lang="en-US" sz="1600" b="1" dirty="0">
+                <a:solidFill>
+                  <a:schemeClr val="tx2"/>
+                </a:solidFill>
+              </a:rPr>
+              <a:t>人はリスクを取り、大きく成長することができます。</a:t>
+            </a:r>
+            <a:endParaRPr lang="en-US" sz="1600" dirty="0"/>
+          </a:p>
+        </p:txBody>
+      </p:sp>
+      <p:sp>
+        <p:nvSpPr>
+          <p:cNvPr id="6" name="Text 0"/>
+          <p:cNvSpPr/>
+          <p:nvPr>
+            <p:ph idx="100" type="title" hasCustomPrompt="1"/>
+          </p:nvPr>
+        </p:nvSpPr>
+        <p:spPr>
+          <a:xfrm>
+            <a:off x="731520" y="1417320"/>
+            <a:ext cx="7680960" cy="1188720"/>
+          </a:xfrm>
+          <a:prstGeom prst="rect">
+            <a:avLst/>
+          </a:prstGeom>
+          <a:noFill/>
+          <a:ln/>
+        </p:spPr>
+        <p:txBody>
+          <a:bodyPr wrap="square" rtlCol="0" anchor="ctr"/>
+          <a:lstStyle/>
+          <a:p>
+            <a:pPr algn="ctr" indent="0" marL="0">
+              <a:buNone/>
+            </a:pPr>
+            <a:endParaRPr lang="en-US" sz="3800" dirty="0"/>
+          </a:p>
+        </p:txBody>
+      </p:sp>
+      <p:sp>
+        <p:nvSpPr>
+          <p:cNvPr id="7" name="Text 0"/>
+          <p:cNvSpPr/>
+          <p:nvPr>
+            <p:ph idx="101" type="body" hasCustomPrompt="1"/>
+          </p:nvPr>
+        </p:nvSpPr>
+        <p:spPr>
+          <a:xfrm>
+            <a:off x="731520" y="2697480"/>
+            <a:ext cx="7680960" cy="1097280"/>
+          </a:xfrm>
+          <a:prstGeom prst="rect">
+            <a:avLst/>
+          </a:prstGeom>
+          <a:noFill/>
+          <a:ln/>
+        </p:spPr>
+        <p:txBody>
+          <a:bodyPr wrap="square" rtlCol="0" anchor="t"/>
+          <a:lstStyle/>
+          <a:p>
+            <a:pPr algn="ctr" indent="0" marL="0">
+              <a:buNone/>
+            </a:pPr>
+            <a:endParaRPr lang="en-US" sz="1600" dirty="0"/>
+          </a:p>
+        </p:txBody>
+      </p:sp>
     </p:spTree>
   </p:cSld>
   <p:clrMapOvr>

--- a/20_Projects/海音_心体の調律/単発/仁部あきえさん/20261028_仁部あきえさん_お金のブロック単発セッション.pptx
+++ b/20_Projects/海音_心体の調律/単発/仁部あきえさん/20261028_仁部あきえさん_お金のブロック単発セッション.pptx
@@ -48,9 +48,10 @@
     <p:sldId id="296" r:id="rId42"/>
     <p:sldId id="297" r:id="rId43"/>
     <p:sldId id="298" r:id="rId44"/>
+    <p:sldId id="299" r:id="rId45"/>
   </p:sldIdLst>
   <p:notesMasterIdLst>
-    <p:notesMasterId r:id="rId45"/>
+    <p:notesMasterId r:id="rId46"/>
   </p:notesMasterIdLst>
   <p:sldSz cx="9144000" cy="5143500"/>
   <p:notesSz cx="5143500" cy="9144000"/>
@@ -149,13 +150,13 @@
   <p:extLst>
     <p:ext uri="{521415D9-36F7-43E2-AB2F-B90AF26B5E84}">
       <p14:sectionLst xmlns:p14="http://schemas.microsoft.com/office/powerpoint/2010/main">
-        <p14:section name="はじめに" id="{a56feee0-a017-b48e-5897-9bb269e84c75}">
+        <p14:section name="はじめに" id="{cb299c38-d775-ea71-59dc-cb55245f6f32}">
           <p14:sldIdLst>
             <p14:sldId id="256"/>
             <p14:sldId id="257"/>
           </p14:sldIdLst>
         </p14:section>
-        <p14:section name="第1部 頭の構造を知る" id="{3b67756c-a508-0d1d-b7ef-033a4d1d21b8}">
+        <p14:section name="第1部 頭の構造を知る" id="{454724ae-7ed3-e88b-01ae-bf208f97311f}">
           <p14:sldIdLst>
             <p14:sldId id="258"/>
             <p14:sldId id="259"/>
@@ -171,7 +172,7 @@
             <p14:sldId id="269"/>
           </p14:sldIdLst>
         </p14:section>
-        <p14:section name="第2部 魂の傷を聴く" id="{49e6202e-49ac-64cd-61dd-166a779eeb37}">
+        <p14:section name="第2部 魂の傷を聴く" id="{a20efd1d-16d0-05c8-283a-1c418d24a55e}">
           <p14:sldIdLst>
             <p14:sldId id="270"/>
             <p14:sldId id="271"/>
@@ -185,7 +186,7 @@
             <p14:sldId id="279"/>
           </p14:sldIdLst>
         </p14:section>
-        <p14:section name="ワーク 思い込みを書き換える" id="{de1cc901-7318-68ab-fb8b-071e7aa6f602}">
+        <p14:section name="ワーク 思い込みを書き換える" id="{6769ab74-5dad-73b0-6749-3762d60a06d9}">
           <p14:sldIdLst>
             <p14:sldId id="280"/>
             <p14:sldId id="281"/>
@@ -201,19 +202,20 @@
             <p14:sldId id="291"/>
             <p14:sldId id="292"/>
             <p14:sldId id="293"/>
-          </p14:sldIdLst>
-        </p14:section>
-        <p14:section name="エネルギー" id="{ce9b6a62-2052-c7fe-1f0c-cdc52b5960f1}">
-          <p14:sldIdLst>
             <p14:sldId id="294"/>
           </p14:sldIdLst>
         </p14:section>
-        <p14:section name="まとめ" id="{533ddf20-9507-8e27-1960-4944860f21fc}">
+        <p14:section name="エネルギー" id="{fa29f07b-77d1-01dc-6921-5e36c1ee69a5}">
           <p14:sldIdLst>
             <p14:sldId id="295"/>
+          </p14:sldIdLst>
+        </p14:section>
+        <p14:section name="まとめ" id="{4d758b7d-0759-e784-5a86-29f6c3abb76a}">
+          <p14:sldIdLst>
             <p14:sldId id="296"/>
             <p14:sldId id="297"/>
             <p14:sldId id="298"/>
+            <p14:sldId id="299"/>
           </p14:sldIdLst>
         </p14:section>
       </p14:sectionLst>
@@ -2204,7 +2206,7 @@
           <a:p>
             <a:r>
               <a:rPr lang="en-US" dirty="0"/>
-              <a:t>例：「私は豊かにお金を受け取りたい！ただ…」。目標の言葉は仁部さんと決める。</a:t>
+              <a:t>ワークに入る前に伝える。今日で全部終わらせようとしなくていい、というメッセージ。</a:t>
             </a:r>
             <a:endParaRPr lang="en-US" dirty="0"/>
           </a:p>
@@ -2292,7 +2294,7 @@
           <a:p>
             <a:r>
               <a:rPr lang="en-US" dirty="0"/>
-              <a:t>1階層目を5つ以上。出てきたものは次の表に打ち込む。</a:t>
+              <a:t>例：「私は豊かにお金を受け取りたい！ただ…」。目標の言葉は仁部さんと決める。</a:t>
             </a:r>
             <a:endParaRPr lang="en-US" dirty="0"/>
           </a:p>
@@ -2380,7 +2382,7 @@
           <a:p>
             <a:r>
               <a:rPr lang="en-US" dirty="0"/>
-              <a:t>由香が画面共有したまま表に打ち込む。仁部さんは話すだけでOK。10個くらい出たら次へ。</a:t>
+              <a:t>1階層目を5つ以上。出てきたものは次の表に打ち込む。</a:t>
             </a:r>
             <a:endParaRPr lang="en-US" dirty="0"/>
           </a:p>
@@ -2468,7 +2470,7 @@
           <a:p>
             <a:r>
               <a:rPr lang="en-US" dirty="0"/>
-              <a:t>表の上位3つに印をつける→その中で一番邪魔しているものを1つ。</a:t>
+              <a:t>由香が画面共有したまま表に打ち込む。仁部さんは話すだけでOK。10個くらい出たら次へ。</a:t>
             </a:r>
             <a:endParaRPr lang="en-US" dirty="0"/>
           </a:p>
@@ -2644,7 +2646,7 @@
           <a:p>
             <a:r>
               <a:rPr lang="en-US" dirty="0"/>
-              <a:t>YESなら、その思い込みでSTEP4へ。</a:t>
+              <a:t>表の上位3つに印をつける→その中で一番邪魔しているものを1つ。</a:t>
             </a:r>
             <a:endParaRPr lang="en-US" dirty="0"/>
           </a:p>
@@ -2732,7 +2734,7 @@
           <a:p>
             <a:r>
               <a:rPr lang="en-US" dirty="0"/>
-              <a:t>VAKという言葉は使わず「何が見える？何が聞こえる？体はどんな感じ？」と聞く。お父さんのお酒・両親の喧嘩の場面が出る可能性が高い。感情が強く出たら止めて呼吸に戻す。ポジ変をしない。</a:t>
+              <a:t>YESなら、その思い込みでSTEP4へ。</a:t>
             </a:r>
             <a:endParaRPr lang="en-US" dirty="0"/>
           </a:p>
@@ -2820,7 +2822,7 @@
           <a:p>
             <a:r>
               <a:rPr lang="en-US" dirty="0"/>
-              <a:t>ポジションの外から、子どもの頃の自分を見ながら。</a:t>
+              <a:t>VAKという言葉は使わず「何が見える？何が聞こえる？体はどんな感じ？」と聞く。お父さんのお酒・両親の喧嘩の場面が出る可能性が高い。感情が強く出たら止めて呼吸に戻す。ポジ変をしない。</a:t>
             </a:r>
             <a:endParaRPr lang="en-US" dirty="0"/>
           </a:p>
@@ -2908,7 +2910,7 @@
           <a:p>
             <a:r>
               <a:rPr lang="en-US" dirty="0"/>
-              <a:t/>
+              <a:t>ポジションの外から、子どもの頃の自分を見ながら。</a:t>
             </a:r>
             <a:endParaRPr lang="en-US" dirty="0"/>
           </a:p>
@@ -2996,7 +2998,7 @@
           <a:p>
             <a:r>
               <a:rPr lang="en-US" dirty="0"/>
-              <a:t>怒鳴る・泣く・大声を出す・体を大きく動かす・殴るなどしてOK。相手が聞いてくれている・謝っているイメージで。出し切るまで待つ。</a:t>
+              <a:t/>
             </a:r>
             <a:endParaRPr lang="en-US" dirty="0"/>
           </a:p>
@@ -3084,7 +3086,7 @@
           <a:p>
             <a:r>
               <a:rPr lang="en-US" dirty="0"/>
-              <a:t>このあと和解の質問を1つずつ。</a:t>
+              <a:t>怒鳴る・泣く・大声を出す・体を大きく動かす・殴るなどしてOK。相手が聞いてくれている・謝っているイメージで。出し切るまで待つ。</a:t>
             </a:r>
             <a:endParaRPr lang="en-US" dirty="0"/>
           </a:p>
@@ -3172,7 +3174,7 @@
           <a:p>
             <a:r>
               <a:rPr lang="en-US" dirty="0"/>
-              <a:t>相手の立場を4次元でゆらしながら感じる。</a:t>
+              <a:t>このあと和解の質問を1つずつ。</a:t>
             </a:r>
             <a:endParaRPr lang="en-US" dirty="0"/>
           </a:p>
@@ -3260,7 +3262,7 @@
           <a:p>
             <a:r>
               <a:rPr lang="en-US" dirty="0"/>
-              <a:t>相手が目指していたゴールと自分のゴールを統合する（色・形・イメージなどで）。</a:t>
+              <a:t>相手の立場を4次元でゆらしながら感じる。</a:t>
             </a:r>
             <a:endParaRPr lang="en-US" dirty="0"/>
           </a:p>
@@ -3348,7 +3350,7 @@
           <a:p>
             <a:r>
               <a:rPr lang="en-US" dirty="0"/>
-              <a:t>見える・聞こえる・体の感じを2倍・3倍に大きくしていく。5次元・現在ポジションで具体的に何をしているかも聴く。</a:t>
+              <a:t>相手が目指していたゴールと自分のゴールを統合する（色・形・イメージなどで）。</a:t>
             </a:r>
             <a:endParaRPr lang="en-US" dirty="0"/>
           </a:p>
@@ -3436,7 +3438,7 @@
           <a:p>
             <a:r>
               <a:rPr lang="en-US" dirty="0"/>
-              <a:t>ワークで残ったものをエネルギーで取り除く。</a:t>
+              <a:t>見える・聞こえる・体の感じを2倍・3倍に大きくしていく。5次元・現在ポジションで具体的に何をしているかも聴く。</a:t>
             </a:r>
             <a:endParaRPr lang="en-US" dirty="0"/>
           </a:p>
@@ -3612,7 +3614,7 @@
           <a:p>
             <a:r>
               <a:rPr lang="en-US" dirty="0"/>
-              <a:t>はじめの点数といまの点数を並べて、変化を目で見てもらう。終わったらこのスライドを画像にしてLINEで送れる。</a:t>
+              <a:t>ワークで残ったものをエネルギーで取り除く。</a:t>
             </a:r>
             <a:endParaRPr lang="en-US" dirty="0"/>
           </a:p>
@@ -3700,7 +3702,7 @@
           <a:p>
             <a:r>
               <a:rPr lang="en-US" dirty="0"/>
-              <a:t>本人の言葉で言ってもらう。</a:t>
+              <a:t>はじめの点数といまの点数を並べて、変化を目で見てもらう。終わったらこのスライドを画像にしてLINEで送れる。</a:t>
             </a:r>
             <a:endParaRPr lang="en-US" dirty="0"/>
           </a:p>
@@ -3788,7 +3790,7 @@
           <a:p>
             <a:r>
               <a:rPr lang="en-US" dirty="0"/>
-              <a:t>すべての土台は絶対的安心感。「何をやっても、やらなくても大丈夫」「嫌なことをやめても、愛される」。</a:t>
+              <a:t>本人の言葉で言ってもらう。</a:t>
             </a:r>
             <a:endParaRPr lang="en-US" dirty="0"/>
           </a:p>
@@ -3876,7 +3878,7 @@
           <a:p>
             <a:r>
               <a:rPr lang="en-US" dirty="0"/>
-              <a:t>終了。</a:t>
+              <a:t>すべての土台は絶対的安心感。「何をやっても、やらなくても大丈夫」「嫌なことをやめても、愛される」。</a:t>
             </a:r>
             <a:endParaRPr lang="en-US" dirty="0"/>
           </a:p>
@@ -3900,6 +3902,94 @@
             <a:fld id="{F7021451-1387-4CA6-816F-3879F97B5CBC}" type="slidenum">
               <a:rPr lang="en-US"/>
               <a:t>43</a:t>
+            </a:fld>
+            <a:endParaRPr lang="en-US"/>
+          </a:p>
+        </p:txBody>
+      </p:sp>
+    </p:spTree>
+    <p:extLst>
+      <p:ext uri="{BB962C8B-B14F-4D97-AF65-F5344CB8AC3E}">
+        <p14:creationId xmlns:p14="http://schemas.microsoft.com/office/powerpoint/2010/main" val="1024086991"/>
+      </p:ext>
+    </p:extLst>
+  </p:cSld>
+  <p:clrMapOvr>
+    <a:masterClrMapping/>
+  </p:clrMapOvr>
+</p:notes>
+</file>
+
+<file path=ppt/notesSlides/notesSlide44.xml><?xml version="1.0" encoding="utf-8"?>
+<p:notes xmlns:a="http://schemas.openxmlformats.org/drawingml/2006/main" xmlns:r="http://schemas.openxmlformats.org/officeDocument/2006/relationships" xmlns:p="http://schemas.openxmlformats.org/presentationml/2006/main">
+  <p:cSld>
+    <p:spTree>
+      <p:nvGrpSpPr>
+        <p:cNvPr id="1" name=""/>
+        <p:cNvGrpSpPr/>
+        <p:nvPr/>
+      </p:nvGrpSpPr>
+      <p:grpSpPr>
+        <a:xfrm>
+          <a:off x="0" y="0"/>
+          <a:ext cx="0" cy="0"/>
+          <a:chOff x="0" y="0"/>
+          <a:chExt cx="0" cy="0"/>
+        </a:xfrm>
+      </p:grpSpPr>
+      <p:sp>
+        <p:nvSpPr>
+          <p:cNvPr id="2" name="Slide Image Placeholder 1"/>
+          <p:cNvSpPr>
+            <a:spLocks noGrp="1" noRot="1" noChangeAspect="1"/>
+          </p:cNvSpPr>
+          <p:nvPr>
+            <p:ph type="sldImg"/>
+          </p:nvPr>
+        </p:nvSpPr>
+        <p:spPr/>
+      </p:sp>
+      <p:sp>
+        <p:nvSpPr>
+          <p:cNvPr id="3" name="Notes Placeholder 2"/>
+          <p:cNvSpPr>
+            <a:spLocks noGrp="1"/>
+          </p:cNvSpPr>
+          <p:nvPr>
+            <p:ph type="body" idx="1"/>
+          </p:nvPr>
+        </p:nvSpPr>
+        <p:spPr/>
+        <p:txBody>
+          <a:bodyPr/>
+          <a:lstStyle/>
+          <a:p>
+            <a:r>
+              <a:rPr lang="en-US" dirty="0"/>
+              <a:t>終了。</a:t>
+            </a:r>
+            <a:endParaRPr lang="en-US" dirty="0"/>
+          </a:p>
+        </p:txBody>
+      </p:sp>
+      <p:sp>
+        <p:nvSpPr>
+          <p:cNvPr id="4" name="Slide Number Placeholder 3"/>
+          <p:cNvSpPr>
+            <a:spLocks noGrp="1"/>
+          </p:cNvSpPr>
+          <p:nvPr>
+            <p:ph type="sldNum" sz="quarter" idx="10"/>
+          </p:nvPr>
+        </p:nvSpPr>
+        <p:spPr/>
+        <p:txBody>
+          <a:bodyPr/>
+          <a:lstStyle/>
+          <a:p>
+            <a:fld id="{F7021451-1387-4CA6-816F-3879F97B5CBC}" type="slidenum">
+              <a:rPr lang="en-US"/>
+              <a:t>44</a:t>
             </a:fld>
             <a:endParaRPr lang="en-US"/>
           </a:p>
@@ -10319,16 +10409,36 @@
       </p:grpSpPr>
       <p:sp>
         <p:nvSpPr>
-          <p:cNvPr id="2" name="Text 0"/>
+          <p:cNvPr id="2" name="frame"/>
           <p:cNvSpPr/>
-          <p:nvPr>
-            <p:ph idx="100" type="title" hasCustomPrompt="1"/>
-          </p:nvPr>
-        </p:nvSpPr>
-        <p:spPr>
-          <a:xfrm>
-            <a:off x="457200" y="457200"/>
-            <a:ext cx="8229600" cy="594360"/>
+          <p:nvPr/>
+        </p:nvSpPr>
+        <p:spPr>
+          <a:xfrm>
+            <a:off x="228600" y="137160"/>
+            <a:ext cx="8686800" cy="4526280"/>
+          </a:xfrm>
+          <a:prstGeom prst="rect">
+            <a:avLst/>
+          </a:prstGeom>
+          <a:ln w="12700">
+            <a:solidFill>
+              <a:srgbClr val="B08A4E"/>
+            </a:solidFill>
+            <a:prstDash val="solid"/>
+          </a:ln>
+        </p:spPr>
+      </p:sp>
+      <p:sp>
+        <p:nvSpPr>
+          <p:cNvPr id="3" name="qlabel"/>
+          <p:cNvSpPr txBox="1"/>
+          <p:nvPr/>
+        </p:nvSpPr>
+        <p:spPr>
+          <a:xfrm>
+            <a:off x="457200" y="320040"/>
+            <a:ext cx="8229600" cy="365760"/>
           </a:xfrm>
           <a:prstGeom prst="rect">
             <a:avLst/>
@@ -10337,80 +10447,67 @@
           <a:ln/>
         </p:spPr>
         <p:txBody>
-          <a:bodyPr wrap="square" lIns="0" tIns="0" rIns="0" bIns="0" rtlCol="0" anchor="ctr"/>
-          <a:lstStyle/>
-          <a:p>
-            <a:pPr algn="l" indent="0" marL="0">
-              <a:buNone/>
-            </a:pPr>
-            <a:r>
-              <a:rPr lang="en-US" sz="2400" b="1" dirty="0">
+          <a:bodyPr wrap="square" lIns="0" tIns="0" rIns="0" bIns="0" rtlCol="0" anchor="t"/>
+          <a:lstStyle/>
+          <a:p>
+            <a:pPr algn="ctr" indent="0" marL="0">
+              <a:buNone/>
+            </a:pPr>
+            <a:r>
+              <a:rPr lang="en-US" sz="1300" b="1" dirty="0">
                 <a:solidFill>
                   <a:schemeClr val="accent2"/>
+                </a:solidFill>
+              </a:rPr>
+              <a:t>ワークの前に</a:t>
+            </a:r>
+            <a:endParaRPr lang="en-US" sz="1300" dirty="0"/>
+          </a:p>
+        </p:txBody>
+      </p:sp>
+      <p:sp>
+        <p:nvSpPr>
+          <p:cNvPr id="4" name="pre_main"/>
+          <p:cNvSpPr txBox="1"/>
+          <p:nvPr/>
+        </p:nvSpPr>
+        <p:spPr>
+          <a:xfrm>
+            <a:off x="731520" y="1097280"/>
+            <a:ext cx="7680960" cy="1280160"/>
+          </a:xfrm>
+          <a:prstGeom prst="rect">
+            <a:avLst/>
+          </a:prstGeom>
+          <a:noFill/>
+          <a:ln/>
+        </p:spPr>
+        <p:txBody>
+          <a:bodyPr wrap="square" lIns="1016" tIns="1016" rIns="1016" bIns="1016" rtlCol="0" anchor="ctr"/>
+          <a:lstStyle/>
+          <a:p>
+            <a:pPr algn="ctr" indent="0" marL="0">
+              <a:buNone/>
+            </a:pPr>
+            <a:r>
+              <a:rPr lang="en-US" sz="2800" b="1" dirty="0">
+                <a:solidFill>
+                  <a:schemeClr val="tx2"/>
                 </a:solidFill>
                 <a:latin typeface="Yu Mincho" pitchFamily="34" charset="0"/>
                 <a:ea typeface="Yu Mincho" pitchFamily="34" charset="-122"/>
                 <a:cs typeface="Yu Mincho" pitchFamily="34" charset="-120"/>
               </a:rPr>
-              <a:t>STEP 1　お金の思い込みを見つける</a:t>
-            </a:r>
-            <a:endParaRPr lang="en-US" sz="2400" dirty="0"/>
-          </a:p>
-        </p:txBody>
-      </p:sp>
-      <p:sp>
-        <p:nvSpPr>
-          <p:cNvPr id="3" name="s1_goal"/>
-          <p:cNvSpPr/>
-          <p:nvPr/>
-        </p:nvSpPr>
-        <p:spPr>
-          <a:xfrm>
-            <a:off x="457200" y="1234440"/>
-            <a:ext cx="5120640" cy="1371600"/>
-          </a:xfrm>
-          <a:prstGeom prst="roundRect">
-            <a:avLst>
-              <a:gd name="adj" fmla="val 8000"/>
-            </a:avLst>
-          </a:prstGeom>
-          <a:solidFill>
-            <a:srgbClr val="FDFAF4"/>
-          </a:solidFill>
-          <a:ln w="9525">
-            <a:solidFill>
-              <a:srgbClr val="E9D9B6"/>
-            </a:solidFill>
-            <a:prstDash val="solid"/>
-          </a:ln>
-        </p:spPr>
-      </p:sp>
-      <p:sp>
-        <p:nvSpPr>
-          <p:cNvPr id="4" name="s1_goal_t"/>
-          <p:cNvSpPr txBox="1"/>
-          <p:nvPr/>
-        </p:nvSpPr>
-        <p:spPr>
-          <a:xfrm>
-            <a:off x="640080" y="1325880"/>
-            <a:ext cx="4846320" cy="1188720"/>
-          </a:xfrm>
-          <a:prstGeom prst="rect">
-            <a:avLst/>
-          </a:prstGeom>
-          <a:noFill/>
-          <a:ln/>
-        </p:spPr>
-        <p:txBody>
-          <a:bodyPr wrap="square" lIns="1016" tIns="1016" rIns="1016" bIns="1016" rtlCol="0" anchor="ctr"/>
-          <a:lstStyle/>
-          <a:p>
-            <a:pPr indent="0" marL="0">
-              <a:buNone/>
-            </a:pPr>
-            <a:r>
-              <a:rPr lang="en-US" sz="1700" b="1" dirty="0">
+              <a:t>今回、一番大きいと感じる思い込みに</a:t>
+            </a:r>
+            <a:endParaRPr lang="en-US" sz="2800" dirty="0"/>
+          </a:p>
+          <a:p>
+            <a:pPr algn="ctr" indent="0" marL="0">
+              <a:buNone/>
+            </a:pPr>
+            <a:r>
+              <a:rPr lang="en-US" sz="2800" b="1" dirty="0">
                 <a:solidFill>
                   <a:schemeClr val="tx2"/>
                 </a:solidFill>
@@ -10418,83 +10515,22 @@
                 <a:ea typeface="Yu Mincho" pitchFamily="34" charset="-122"/>
                 <a:cs typeface="Yu Mincho" pitchFamily="34" charset="-120"/>
               </a:rPr>
-              <a:t>「私は〇〇を達成したい！</a:t>
-            </a:r>
-            <a:endParaRPr lang="en-US" sz="1700" dirty="0"/>
-          </a:p>
-          <a:p>
-            <a:pPr indent="0" marL="0">
-              <a:buNone/>
-            </a:pPr>
-            <a:r>
-              <a:rPr lang="en-US" sz="1700" b="1" dirty="0">
-                <a:solidFill>
-                  <a:schemeClr val="accent2"/>
-                </a:solidFill>
-                <a:latin typeface="Yu Mincho" pitchFamily="34" charset="0"/>
-                <a:ea typeface="Yu Mincho" pitchFamily="34" charset="-122"/>
-                <a:cs typeface="Yu Mincho" pitchFamily="34" charset="-120"/>
-              </a:rPr>
-              <a:t>ただ、〇〇ができないかもしれない！</a:t>
-            </a:r>
-            <a:endParaRPr lang="en-US" sz="1700" dirty="0"/>
-          </a:p>
-          <a:p>
-            <a:pPr indent="0" marL="0">
-              <a:buNone/>
-            </a:pPr>
-            <a:r>
-              <a:rPr lang="en-US" sz="1700" b="1" dirty="0">
-                <a:solidFill>
-                  <a:schemeClr val="accent2"/>
-                </a:solidFill>
-                <a:latin typeface="Yu Mincho" pitchFamily="34" charset="0"/>
-                <a:ea typeface="Yu Mincho" pitchFamily="34" charset="-122"/>
-                <a:cs typeface="Yu Mincho" pitchFamily="34" charset="-120"/>
-              </a:rPr>
-              <a:t>きついかもしれない…」</a:t>
-            </a:r>
-            <a:endParaRPr lang="en-US" sz="1700" dirty="0"/>
-          </a:p>
-        </p:txBody>
-      </p:sp>
-      <p:sp>
-        <p:nvSpPr>
-          <p:cNvPr id="5" name="s1_q"/>
-          <p:cNvSpPr/>
-          <p:nvPr/>
-        </p:nvSpPr>
-        <p:spPr>
-          <a:xfrm>
-            <a:off x="457200" y="2788920"/>
-            <a:ext cx="5120640" cy="1280160"/>
-          </a:xfrm>
-          <a:prstGeom prst="roundRect">
-            <a:avLst>
-              <a:gd name="adj" fmla="val 8571"/>
-            </a:avLst>
-          </a:prstGeom>
-          <a:solidFill>
-            <a:srgbClr val="EFE8F6"/>
-          </a:solidFill>
-          <a:ln w="9525">
-            <a:solidFill>
-              <a:srgbClr val="E9D9B6"/>
-            </a:solidFill>
-            <a:prstDash val="solid"/>
-          </a:ln>
-        </p:spPr>
-      </p:sp>
-      <p:sp>
-        <p:nvSpPr>
-          <p:cNvPr id="6" name="s1_q_t"/>
+              <a:t>向き合っていきます</a:t>
+            </a:r>
+            <a:endParaRPr lang="en-US" sz="2800" dirty="0"/>
+          </a:p>
+        </p:txBody>
+      </p:sp>
+      <p:sp>
+        <p:nvSpPr>
+          <p:cNvPr id="5" name="pre_sub"/>
           <p:cNvSpPr txBox="1"/>
           <p:nvPr/>
         </p:nvSpPr>
         <p:spPr>
           <a:xfrm>
-            <a:off x="640080" y="2880360"/>
-            <a:ext cx="4846320" cy="1097280"/>
+            <a:off x="731520" y="2606040"/>
+            <a:ext cx="7680960" cy="1371600"/>
           </a:xfrm>
           <a:prstGeom prst="rect">
             <a:avLst/>
@@ -10503,62 +10539,121 @@
           <a:ln/>
         </p:spPr>
         <p:txBody>
-          <a:bodyPr wrap="square" lIns="1016" tIns="1016" rIns="1016" bIns="1016" rtlCol="0" anchor="ctr"/>
-          <a:lstStyle/>
-          <a:p>
-            <a:pPr indent="0" marL="0">
-              <a:buNone/>
-            </a:pPr>
-            <a:r>
-              <a:rPr lang="en-US" sz="1500" dirty="0">
+          <a:bodyPr wrap="square" lIns="1016" tIns="1016" rIns="1016" bIns="1016" rtlCol="0" anchor="t"/>
+          <a:lstStyle/>
+          <a:p>
+            <a:pPr algn="ctr" indent="0" marL="0">
+              <a:lnSpc>
+                <a:spcPct val="130000"/>
+              </a:lnSpc>
+              <a:buNone/>
+            </a:pPr>
+            <a:r>
+              <a:rPr lang="en-US" sz="1600" dirty="0">
                 <a:solidFill>
                   <a:schemeClr val="tx1"/>
                 </a:solidFill>
               </a:rPr>
-              <a:t>この言葉のあとに出てくる気持ちが</a:t>
-            </a:r>
+              <a:t>ただ、それが整理されると、次の思い込みや感情に気づくこともあります。</a:t>
+            </a:r>
+            <a:endParaRPr lang="en-US" sz="1600" dirty="0"/>
+          </a:p>
+          <a:p>
+            <a:pPr algn="ctr" indent="0" marL="0">
+              <a:lnSpc>
+                <a:spcPct val="130000"/>
+              </a:lnSpc>
+              <a:buNone/>
+            </a:pPr>
+            <a:r>
+              <a:rPr lang="en-US" sz="1600" dirty="0">
+                <a:solidFill>
+                  <a:schemeClr val="tx1"/>
+                </a:solidFill>
+              </a:rPr>
+              <a:t>だからこそ、一度で終わりではなく、</a:t>
+            </a:r>
+            <a:endParaRPr lang="en-US" sz="1600" dirty="0"/>
+          </a:p>
+          <a:p>
+            <a:pPr algn="ctr" indent="0" marL="0">
+              <a:lnSpc>
+                <a:spcPct val="130000"/>
+              </a:lnSpc>
+              <a:buNone/>
+            </a:pPr>
+            <a:r>
+              <a:rPr lang="en-US" sz="1600" dirty="0">
+                <a:solidFill>
+                  <a:schemeClr val="tx1"/>
+                </a:solidFill>
+              </a:rPr>
+              <a:t>自分自身で繰り返し向き合っていくことが大切です。</a:t>
+            </a:r>
+            <a:endParaRPr lang="en-US" sz="1600" dirty="0"/>
+          </a:p>
+        </p:txBody>
+      </p:sp>
+      <p:sp>
+        <p:nvSpPr>
+          <p:cNvPr id="7" name="Text 0"/>
+          <p:cNvSpPr/>
+          <p:nvPr>
+            <p:ph idx="100" type="title" hasCustomPrompt="1"/>
+          </p:nvPr>
+        </p:nvSpPr>
+        <p:spPr>
+          <a:xfrm>
+            <a:off x="914400" y="1554480"/>
+            <a:ext cx="7315200" cy="1554480"/>
+          </a:xfrm>
+          <a:prstGeom prst="rect">
+            <a:avLst/>
+          </a:prstGeom>
+          <a:noFill/>
+          <a:ln/>
+        </p:spPr>
+        <p:txBody>
+          <a:bodyPr wrap="square" rtlCol="0" anchor="ctr"/>
+          <a:lstStyle/>
+          <a:p>
+            <a:pPr algn="ctr" indent="0" marL="0">
+              <a:buNone/>
+            </a:pPr>
+            <a:endParaRPr lang="en-US" sz="3200" dirty="0"/>
+          </a:p>
+        </p:txBody>
+      </p:sp>
+      <p:sp>
+        <p:nvSpPr>
+          <p:cNvPr id="8" name="Text 0"/>
+          <p:cNvSpPr/>
+          <p:nvPr>
+            <p:ph idx="101" type="body" hasCustomPrompt="1"/>
+          </p:nvPr>
+        </p:nvSpPr>
+        <p:spPr>
+          <a:xfrm>
+            <a:off x="914400" y="3200400"/>
+            <a:ext cx="7315200" cy="731520"/>
+          </a:xfrm>
+          <a:prstGeom prst="rect">
+            <a:avLst/>
+          </a:prstGeom>
+          <a:noFill/>
+          <a:ln/>
+        </p:spPr>
+        <p:txBody>
+          <a:bodyPr wrap="square" rtlCol="0" anchor="t"/>
+          <a:lstStyle/>
+          <a:p>
+            <a:pPr algn="ctr" indent="0" marL="0">
+              <a:buNone/>
+            </a:pPr>
             <a:endParaRPr lang="en-US" sz="1500" dirty="0"/>
           </a:p>
-          <a:p>
-            <a:pPr indent="0" marL="0">
-              <a:buNone/>
-            </a:pPr>
-            <a:r>
-              <a:rPr lang="en-US" sz="1500" b="1" dirty="0">
-                <a:solidFill>
-                  <a:schemeClr val="tx1"/>
-                </a:solidFill>
-              </a:rPr>
-              <a:t>「お金の思い込み」の入り口です</a:t>
-            </a:r>
-            <a:endParaRPr lang="en-US" sz="1500" dirty="0"/>
-          </a:p>
-        </p:txBody>
-      </p:sp>
-      <p:pic>
-        <p:nvPicPr>
-          <p:cNvPr id="7" name="Image 0" descr="ガイドブック43ページ">    </p:cNvPr>
-          <p:cNvPicPr>
-            <a:picLocks noChangeAspect="1"/>
-          </p:cNvPicPr>
-          <p:nvPr/>
-        </p:nvPicPr>
-        <p:blipFill>
-          <a:blip r:embed="rId1"/>
-          <a:stretch>
-            <a:fillRect/>
-          </a:stretch>
-        </p:blipFill>
-        <p:spPr>
-          <a:xfrm>
-            <a:off x="5989320" y="1143000"/>
-            <a:ext cx="2377440" cy="3364992"/>
-          </a:xfrm>
-          <a:prstGeom prst="rect">
-            <a:avLst/>
-          </a:prstGeom>
-        </p:spPr>
-      </p:pic>
+        </p:txBody>
+      </p:sp>
       <p:sp>
         <p:nvSpPr>
           <p:cNvPr id="25" name="Slide Number Placeholder 0"/>
@@ -10631,21 +10726,67 @@
       </p:grpSpPr>
       <p:sp>
         <p:nvSpPr>
-          <p:cNvPr id="2" name="frame"/>
+          <p:cNvPr id="2" name="Text 0"/>
+          <p:cNvSpPr/>
+          <p:nvPr>
+            <p:ph idx="100" type="title" hasCustomPrompt="1"/>
+          </p:nvPr>
+        </p:nvSpPr>
+        <p:spPr>
+          <a:xfrm>
+            <a:off x="457200" y="457200"/>
+            <a:ext cx="8229600" cy="594360"/>
+          </a:xfrm>
+          <a:prstGeom prst="rect">
+            <a:avLst/>
+          </a:prstGeom>
+          <a:noFill/>
+          <a:ln/>
+        </p:spPr>
+        <p:txBody>
+          <a:bodyPr wrap="square" lIns="0" tIns="0" rIns="0" bIns="0" rtlCol="0" anchor="ctr"/>
+          <a:lstStyle/>
+          <a:p>
+            <a:pPr algn="l" indent="0" marL="0">
+              <a:buNone/>
+            </a:pPr>
+            <a:r>
+              <a:rPr lang="en-US" sz="2400" b="1" dirty="0">
+                <a:solidFill>
+                  <a:schemeClr val="accent2"/>
+                </a:solidFill>
+                <a:latin typeface="Yu Mincho" pitchFamily="34" charset="0"/>
+                <a:ea typeface="Yu Mincho" pitchFamily="34" charset="-122"/>
+                <a:cs typeface="Yu Mincho" pitchFamily="34" charset="-120"/>
+              </a:rPr>
+              <a:t>STEP 1　お金の思い込みを見つける</a:t>
+            </a:r>
+            <a:endParaRPr lang="en-US" sz="2400" dirty="0"/>
+          </a:p>
+        </p:txBody>
+      </p:sp>
+      <p:sp>
+        <p:nvSpPr>
+          <p:cNvPr id="3" name="s1_goal"/>
           <p:cNvSpPr/>
           <p:nvPr/>
         </p:nvSpPr>
         <p:spPr>
           <a:xfrm>
-            <a:off x="228600" y="137160"/>
-            <a:ext cx="8686800" cy="4526280"/>
-          </a:xfrm>
-          <a:prstGeom prst="rect">
-            <a:avLst/>
-          </a:prstGeom>
-          <a:ln w="12700">
+            <a:off x="457200" y="1234440"/>
+            <a:ext cx="5120640" cy="1371600"/>
+          </a:xfrm>
+          <a:prstGeom prst="roundRect">
+            <a:avLst>
+              <a:gd name="adj" fmla="val 8000"/>
+            </a:avLst>
+          </a:prstGeom>
+          <a:solidFill>
+            <a:srgbClr val="FDFAF4"/>
+          </a:solidFill>
+          <a:ln w="9525">
             <a:solidFill>
-              <a:srgbClr val="B08A4E"/>
+              <a:srgbClr val="E9D9B6"/>
             </a:solidFill>
             <a:prstDash val="solid"/>
           </a:ln>
@@ -10653,14 +10794,14 @@
       </p:sp>
       <p:sp>
         <p:nvSpPr>
-          <p:cNvPr id="3" name="qlabel"/>
+          <p:cNvPr id="4" name="s1_goal_t"/>
           <p:cNvSpPr txBox="1"/>
           <p:nvPr/>
         </p:nvSpPr>
         <p:spPr>
           <a:xfrm>
-            <a:off x="457200" y="320040"/>
-            <a:ext cx="8229600" cy="365760"/>
+            <a:off x="640080" y="1325880"/>
+            <a:ext cx="4846320" cy="1188720"/>
           </a:xfrm>
           <a:prstGeom prst="rect">
             <a:avLst/>
@@ -10669,52 +10810,14 @@
           <a:ln/>
         </p:spPr>
         <p:txBody>
-          <a:bodyPr wrap="square" lIns="0" tIns="0" rIns="0" bIns="0" rtlCol="0" anchor="t"/>
-          <a:lstStyle/>
-          <a:p>
-            <a:pPr algn="ctr" indent="0" marL="0">
-              <a:buNone/>
-            </a:pPr>
-            <a:r>
-              <a:rPr lang="en-US" sz="1300" b="1" dirty="0">
-                <a:solidFill>
-                  <a:schemeClr val="accent2"/>
-                </a:solidFill>
-              </a:rPr>
-              <a:t>STEP 1　すごい質問</a:t>
-            </a:r>
-            <a:endParaRPr lang="en-US" sz="1300" dirty="0"/>
-          </a:p>
-        </p:txBody>
-      </p:sp>
-      <p:sp>
-        <p:nvSpPr>
-          <p:cNvPr id="4" name="Text 0"/>
-          <p:cNvSpPr/>
-          <p:nvPr>
-            <p:ph idx="100" type="title" hasCustomPrompt="1"/>
-          </p:nvPr>
-        </p:nvSpPr>
-        <p:spPr>
-          <a:xfrm>
-            <a:off x="914400" y="1554480"/>
-            <a:ext cx="7315200" cy="1554480"/>
-          </a:xfrm>
-          <a:prstGeom prst="rect">
-            <a:avLst/>
-          </a:prstGeom>
-          <a:noFill/>
-          <a:ln/>
-        </p:spPr>
-        <p:txBody>
-          <a:bodyPr wrap="square" rtlCol="0" anchor="ctr"/>
-          <a:lstStyle/>
-          <a:p>
-            <a:pPr algn="ctr" indent="0" marL="0">
-              <a:buNone/>
-            </a:pPr>
-            <a:r>
-              <a:rPr lang="en-US" sz="3200" b="1" dirty="0">
+          <a:bodyPr wrap="square" lIns="1016" tIns="1016" rIns="1016" bIns="1016" rtlCol="0" anchor="ctr"/>
+          <a:lstStyle/>
+          <a:p>
+            <a:pPr indent="0" marL="0">
+              <a:buNone/>
+            </a:pPr>
+            <a:r>
+              <a:rPr lang="en-US" sz="1700" b="1" dirty="0">
                 <a:solidFill>
                   <a:schemeClr val="tx2"/>
                 </a:solidFill>
@@ -10722,41 +10825,83 @@
                 <a:ea typeface="Yu Mincho" pitchFamily="34" charset="-122"/>
                 <a:cs typeface="Yu Mincho" pitchFamily="34" charset="-120"/>
               </a:rPr>
-              <a:t>何があなたを</a:t>
-            </a:r>
-            <a:endParaRPr lang="en-US" sz="3200" dirty="0"/>
-          </a:p>
-          <a:p>
-            <a:pPr algn="ctr" indent="0" marL="0">
-              <a:buNone/>
-            </a:pPr>
-            <a:r>
-              <a:rPr lang="en-US" sz="3200" b="1" dirty="0">
-                <a:solidFill>
-                  <a:schemeClr val="tx2"/>
+              <a:t>「私は〇〇を達成したい！</a:t>
+            </a:r>
+            <a:endParaRPr lang="en-US" sz="1700" dirty="0"/>
+          </a:p>
+          <a:p>
+            <a:pPr indent="0" marL="0">
+              <a:buNone/>
+            </a:pPr>
+            <a:r>
+              <a:rPr lang="en-US" sz="1700" b="1" dirty="0">
+                <a:solidFill>
+                  <a:schemeClr val="accent2"/>
                 </a:solidFill>
                 <a:latin typeface="Yu Mincho" pitchFamily="34" charset="0"/>
                 <a:ea typeface="Yu Mincho" pitchFamily="34" charset="-122"/>
                 <a:cs typeface="Yu Mincho" pitchFamily="34" charset="-120"/>
               </a:rPr>
-              <a:t>そう思わせるのですか？</a:t>
-            </a:r>
-            <a:endParaRPr lang="en-US" sz="3200" dirty="0"/>
-          </a:p>
-        </p:txBody>
-      </p:sp>
-      <p:sp>
-        <p:nvSpPr>
-          <p:cNvPr id="5" name="Text 0"/>
+              <a:t>ただ、〇〇ができないかもしれない！</a:t>
+            </a:r>
+            <a:endParaRPr lang="en-US" sz="1700" dirty="0"/>
+          </a:p>
+          <a:p>
+            <a:pPr indent="0" marL="0">
+              <a:buNone/>
+            </a:pPr>
+            <a:r>
+              <a:rPr lang="en-US" sz="1700" b="1" dirty="0">
+                <a:solidFill>
+                  <a:schemeClr val="accent2"/>
+                </a:solidFill>
+                <a:latin typeface="Yu Mincho" pitchFamily="34" charset="0"/>
+                <a:ea typeface="Yu Mincho" pitchFamily="34" charset="-122"/>
+                <a:cs typeface="Yu Mincho" pitchFamily="34" charset="-120"/>
+              </a:rPr>
+              <a:t>きついかもしれない…」</a:t>
+            </a:r>
+            <a:endParaRPr lang="en-US" sz="1700" dirty="0"/>
+          </a:p>
+        </p:txBody>
+      </p:sp>
+      <p:sp>
+        <p:nvSpPr>
+          <p:cNvPr id="5" name="s1_q"/>
           <p:cNvSpPr/>
-          <p:nvPr>
-            <p:ph idx="101" type="body" hasCustomPrompt="1"/>
-          </p:nvPr>
-        </p:nvSpPr>
-        <p:spPr>
-          <a:xfrm>
-            <a:off x="914400" y="3200400"/>
-            <a:ext cx="7315200" cy="731520"/>
+          <p:nvPr/>
+        </p:nvSpPr>
+        <p:spPr>
+          <a:xfrm>
+            <a:off x="457200" y="2788920"/>
+            <a:ext cx="5120640" cy="1280160"/>
+          </a:xfrm>
+          <a:prstGeom prst="roundRect">
+            <a:avLst>
+              <a:gd name="adj" fmla="val 8571"/>
+            </a:avLst>
+          </a:prstGeom>
+          <a:solidFill>
+            <a:srgbClr val="EFE8F6"/>
+          </a:solidFill>
+          <a:ln w="9525">
+            <a:solidFill>
+              <a:srgbClr val="E9D9B6"/>
+            </a:solidFill>
+            <a:prstDash val="solid"/>
+          </a:ln>
+        </p:spPr>
+      </p:sp>
+      <p:sp>
+        <p:nvSpPr>
+          <p:cNvPr id="6" name="s1_q_t"/>
+          <p:cNvSpPr txBox="1"/>
+          <p:nvPr/>
+        </p:nvSpPr>
+        <p:spPr>
+          <a:xfrm>
+            <a:off x="640080" y="2880360"/>
+            <a:ext cx="4846320" cy="1097280"/>
           </a:xfrm>
           <a:prstGeom prst="rect">
             <a:avLst/>
@@ -10765,24 +10910,62 @@
           <a:ln/>
         </p:spPr>
         <p:txBody>
-          <a:bodyPr wrap="square" rtlCol="0" anchor="t"/>
-          <a:lstStyle/>
-          <a:p>
-            <a:pPr algn="ctr" indent="0" marL="0">
+          <a:bodyPr wrap="square" lIns="1016" tIns="1016" rIns="1016" bIns="1016" rtlCol="0" anchor="ctr"/>
+          <a:lstStyle/>
+          <a:p>
+            <a:pPr indent="0" marL="0">
               <a:buNone/>
             </a:pPr>
             <a:r>
               <a:rPr lang="en-US" sz="1500" dirty="0">
                 <a:solidFill>
-                  <a:schemeClr val="accent2"/>
-                </a:solidFill>
-              </a:rPr>
-              <a:t>何が見えますか？　何が聞こえますか？　体はどんな感じがしますか？</a:t>
+                  <a:schemeClr val="tx1"/>
+                </a:solidFill>
+              </a:rPr>
+              <a:t>この言葉のあとに出てくる気持ちが</a:t>
             </a:r>
             <a:endParaRPr lang="en-US" sz="1500" dirty="0"/>
           </a:p>
-        </p:txBody>
-      </p:sp>
+          <a:p>
+            <a:pPr indent="0" marL="0">
+              <a:buNone/>
+            </a:pPr>
+            <a:r>
+              <a:rPr lang="en-US" sz="1500" b="1" dirty="0">
+                <a:solidFill>
+                  <a:schemeClr val="tx1"/>
+                </a:solidFill>
+              </a:rPr>
+              <a:t>「お金の思い込み」の入り口です</a:t>
+            </a:r>
+            <a:endParaRPr lang="en-US" sz="1500" dirty="0"/>
+          </a:p>
+        </p:txBody>
+      </p:sp>
+      <p:pic>
+        <p:nvPicPr>
+          <p:cNvPr id="7" name="Image 0" descr="ガイドブック43ページ">    </p:cNvPr>
+          <p:cNvPicPr>
+            <a:picLocks noChangeAspect="1"/>
+          </p:cNvPicPr>
+          <p:nvPr/>
+        </p:nvPicPr>
+        <p:blipFill>
+          <a:blip r:embed="rId1"/>
+          <a:stretch>
+            <a:fillRect/>
+          </a:stretch>
+        </p:blipFill>
+        <p:spPr>
+          <a:xfrm>
+            <a:off x="5989320" y="1143000"/>
+            <a:ext cx="2377440" cy="3364992"/>
+          </a:xfrm>
+          <a:prstGeom prst="rect">
+            <a:avLst/>
+          </a:prstGeom>
+        </p:spPr>
+      </p:pic>
       <p:sp>
         <p:nvSpPr>
           <p:cNvPr id="25" name="Slide Number Placeholder 0"/>
@@ -10855,16 +11038,36 @@
       </p:grpSpPr>
       <p:sp>
         <p:nvSpPr>
-          <p:cNvPr id="2" name="Text 0"/>
+          <p:cNvPr id="2" name="frame"/>
           <p:cNvSpPr/>
-          <p:nvPr>
-            <p:ph idx="100" type="title" hasCustomPrompt="1"/>
-          </p:nvPr>
-        </p:nvSpPr>
-        <p:spPr>
-          <a:xfrm>
-            <a:off x="457200" y="457200"/>
-            <a:ext cx="8229600" cy="594360"/>
+          <p:nvPr/>
+        </p:nvSpPr>
+        <p:spPr>
+          <a:xfrm>
+            <a:off x="228600" y="137160"/>
+            <a:ext cx="8686800" cy="4526280"/>
+          </a:xfrm>
+          <a:prstGeom prst="rect">
+            <a:avLst/>
+          </a:prstGeom>
+          <a:ln w="12700">
+            <a:solidFill>
+              <a:srgbClr val="B08A4E"/>
+            </a:solidFill>
+            <a:prstDash val="solid"/>
+          </a:ln>
+        </p:spPr>
+      </p:sp>
+      <p:sp>
+        <p:nvSpPr>
+          <p:cNvPr id="3" name="qlabel"/>
+          <p:cNvSpPr txBox="1"/>
+          <p:nvPr/>
+        </p:nvSpPr>
+        <p:spPr>
+          <a:xfrm>
+            <a:off x="457200" y="320040"/>
+            <a:ext cx="8229600" cy="365760"/>
           </a:xfrm>
           <a:prstGeom prst="rect">
             <a:avLst/>
@@ -10873,21 +11076,225 @@
           <a:ln/>
         </p:spPr>
         <p:txBody>
-          <a:bodyPr wrap="square" lIns="0" tIns="0" rIns="0" bIns="0" rtlCol="0" anchor="ctr"/>
-          <a:lstStyle/>
-          <a:p>
-            <a:pPr algn="l" indent="0" marL="0">
-              <a:buNone/>
-            </a:pPr>
-            <a:r>
-              <a:rPr lang="en-US" sz="2400" b="1" dirty="0">
+          <a:bodyPr wrap="square" lIns="0" tIns="0" rIns="0" bIns="0" rtlCol="0" anchor="t"/>
+          <a:lstStyle/>
+          <a:p>
+            <a:pPr algn="ctr" indent="0" marL="0">
+              <a:buNone/>
+            </a:pPr>
+            <a:r>
+              <a:rPr lang="en-US" sz="1300" b="1" dirty="0">
                 <a:solidFill>
                   <a:schemeClr val="accent2"/>
+                </a:solidFill>
+              </a:rPr>
+              <a:t>STEP 1　すごい質問</a:t>
+            </a:r>
+            <a:endParaRPr lang="en-US" sz="1300" dirty="0"/>
+          </a:p>
+        </p:txBody>
+      </p:sp>
+      <p:sp>
+        <p:nvSpPr>
+          <p:cNvPr id="4" name="Text 0"/>
+          <p:cNvSpPr/>
+          <p:nvPr>
+            <p:ph idx="100" type="title" hasCustomPrompt="1"/>
+          </p:nvPr>
+        </p:nvSpPr>
+        <p:spPr>
+          <a:xfrm>
+            <a:off x="914400" y="1554480"/>
+            <a:ext cx="7315200" cy="1554480"/>
+          </a:xfrm>
+          <a:prstGeom prst="rect">
+            <a:avLst/>
+          </a:prstGeom>
+          <a:noFill/>
+          <a:ln/>
+        </p:spPr>
+        <p:txBody>
+          <a:bodyPr wrap="square" rtlCol="0" anchor="ctr"/>
+          <a:lstStyle/>
+          <a:p>
+            <a:pPr algn="ctr" indent="0" marL="0">
+              <a:buNone/>
+            </a:pPr>
+            <a:r>
+              <a:rPr lang="en-US" sz="3200" b="1" dirty="0">
+                <a:solidFill>
+                  <a:schemeClr val="tx2"/>
                 </a:solidFill>
                 <a:latin typeface="Yu Mincho" pitchFamily="34" charset="0"/>
                 <a:ea typeface="Yu Mincho" pitchFamily="34" charset="-122"/>
                 <a:cs typeface="Yu Mincho" pitchFamily="34" charset="-120"/>
               </a:rPr>
+              <a:t>何があなたを</a:t>
+            </a:r>
+            <a:endParaRPr lang="en-US" sz="3200" dirty="0"/>
+          </a:p>
+          <a:p>
+            <a:pPr algn="ctr" indent="0" marL="0">
+              <a:buNone/>
+            </a:pPr>
+            <a:r>
+              <a:rPr lang="en-US" sz="3200" b="1" dirty="0">
+                <a:solidFill>
+                  <a:schemeClr val="tx2"/>
+                </a:solidFill>
+                <a:latin typeface="Yu Mincho" pitchFamily="34" charset="0"/>
+                <a:ea typeface="Yu Mincho" pitchFamily="34" charset="-122"/>
+                <a:cs typeface="Yu Mincho" pitchFamily="34" charset="-120"/>
+              </a:rPr>
+              <a:t>そう思わせるのですか？</a:t>
+            </a:r>
+            <a:endParaRPr lang="en-US" sz="3200" dirty="0"/>
+          </a:p>
+        </p:txBody>
+      </p:sp>
+      <p:sp>
+        <p:nvSpPr>
+          <p:cNvPr id="5" name="Text 0"/>
+          <p:cNvSpPr/>
+          <p:nvPr>
+            <p:ph idx="101" type="body" hasCustomPrompt="1"/>
+          </p:nvPr>
+        </p:nvSpPr>
+        <p:spPr>
+          <a:xfrm>
+            <a:off x="914400" y="3200400"/>
+            <a:ext cx="7315200" cy="731520"/>
+          </a:xfrm>
+          <a:prstGeom prst="rect">
+            <a:avLst/>
+          </a:prstGeom>
+          <a:noFill/>
+          <a:ln/>
+        </p:spPr>
+        <p:txBody>
+          <a:bodyPr wrap="square" rtlCol="0" anchor="t"/>
+          <a:lstStyle/>
+          <a:p>
+            <a:pPr algn="ctr" indent="0" marL="0">
+              <a:buNone/>
+            </a:pPr>
+            <a:r>
+              <a:rPr lang="en-US" sz="1500" dirty="0">
+                <a:solidFill>
+                  <a:schemeClr val="accent2"/>
+                </a:solidFill>
+              </a:rPr>
+              <a:t>何が見えますか？　何が聞こえますか？　体はどんな感じがしますか？</a:t>
+            </a:r>
+            <a:endParaRPr lang="en-US" sz="1500" dirty="0"/>
+          </a:p>
+        </p:txBody>
+      </p:sp>
+      <p:sp>
+        <p:nvSpPr>
+          <p:cNvPr id="25" name="Slide Number Placeholder 0"/>
+          <p:cNvSpPr>
+            <a:spLocks noGrp="1"/>
+          </p:cNvSpPr>
+          <p:nvPr>
+            <p:ph type="sldNum" sz="quarter" idx="4294967295"/>
+          </p:nvPr>
+        </p:nvSpPr>
+        <p:spPr>
+          <a:xfrm>
+            <a:off x="8229600" y="4754880"/>
+            <a:ext cx="457200" cy="274320"/>
+          </a:xfrm>
+          <a:prstGeom prst="rect">
+            <a:avLst/>
+          </a:prstGeom>
+          <a:extLst>
+            <a:ext uri="{C572A759-6A51-4108-AA02-DFA0A04FC94B}">
+              <ma14:wrappingTextBoxFlag xmlns:ma14="http://schemas.microsoft.com/office/mac/drawingml/2011/main" val="0"/>
+            </a:ext>
+          </a:extLst>
+        </p:spPr>
+        <p:txBody>
+          <a:bodyPr/>
+          <a:lstStyle>
+            <a:lvl1pPr>
+              <a:defRPr sz="900">
+                <a:solidFill>
+                  <a:srgbClr val="B08A4E"/>
+                </a:solidFill>
+              </a:defRPr>
+            </a:lvl1pPr>
+          </a:lstStyle>
+          <a:p>
+            <a:pPr algn="r"/>
+            <a:fld id="{F7021451-1387-4CA6-816F-3879F97B5CBC}" type="slidenum">
+              <a:rPr b="0" lang="en-US"/>
+              <a:t>28</a:t>
+            </a:fld>
+            <a:endParaRPr lang="en-US"/>
+          </a:p>
+        </p:txBody>
+      </p:sp>
+    </p:spTree>
+  </p:cSld>
+  <p:clrMapOvr>
+    <a:masterClrMapping/>
+  </p:clrMapOvr>
+</p:sld>
+</file>
+
+<file path=ppt/slides/slide29.xml><?xml version="1.0" encoding="utf-8"?>
+<p:sld xmlns:a="http://schemas.openxmlformats.org/drawingml/2006/main" xmlns:r="http://schemas.openxmlformats.org/officeDocument/2006/relationships" xmlns:p="http://schemas.openxmlformats.org/presentationml/2006/main">
+  <p:cSld name="Slide 29">
+    <p:spTree>
+      <p:nvGrpSpPr>
+        <p:cNvPr id="1" name=""/>
+        <p:cNvGrpSpPr/>
+        <p:nvPr/>
+      </p:nvGrpSpPr>
+      <p:grpSpPr>
+        <a:xfrm>
+          <a:off x="0" y="0"/>
+          <a:ext cx="0" cy="0"/>
+          <a:chOff x="0" y="0"/>
+          <a:chExt cx="0" cy="0"/>
+        </a:xfrm>
+      </p:grpSpPr>
+      <p:sp>
+        <p:nvSpPr>
+          <p:cNvPr id="2" name="Text 0"/>
+          <p:cNvSpPr/>
+          <p:nvPr>
+            <p:ph idx="100" type="title" hasCustomPrompt="1"/>
+          </p:nvPr>
+        </p:nvSpPr>
+        <p:spPr>
+          <a:xfrm>
+            <a:off x="457200" y="457200"/>
+            <a:ext cx="8229600" cy="594360"/>
+          </a:xfrm>
+          <a:prstGeom prst="rect">
+            <a:avLst/>
+          </a:prstGeom>
+          <a:noFill/>
+          <a:ln/>
+        </p:spPr>
+        <p:txBody>
+          <a:bodyPr wrap="square" lIns="0" tIns="0" rIns="0" bIns="0" rtlCol="0" anchor="ctr"/>
+          <a:lstStyle/>
+          <a:p>
+            <a:pPr algn="l" indent="0" marL="0">
+              <a:buNone/>
+            </a:pPr>
+            <a:r>
+              <a:rPr lang="en-US" sz="2400" b="1" dirty="0">
+                <a:solidFill>
+                  <a:schemeClr val="accent2"/>
+                </a:solidFill>
+                <a:latin typeface="Yu Mincho" pitchFamily="34" charset="0"/>
+                <a:ea typeface="Yu Mincho" pitchFamily="34" charset="-122"/>
+                <a:cs typeface="Yu Mincho" pitchFamily="34" charset="-120"/>
+              </a:rPr>
               <a:t>STEP 2　思い込みに点数をつける（100点満点）</a:t>
             </a:r>
             <a:endParaRPr lang="en-US" sz="2400" dirty="0"/>
@@ -10896,7 +11303,7 @@
       </p:sp>
       <p:graphicFrame>
         <p:nvGraphicFramePr>
-          <p:cNvPr id="29" name="Table 0"/>
+          <p:cNvPr id="30" name="Table 0"/>
           <p:cNvGraphicFramePr>
             <a:graphicFrameLocks noGrp="1"/>
           </p:cNvGraphicFramePr>
@@ -13057,451 +13464,6 @@
             <a:pPr algn="r"/>
             <a:fld id="{F7021451-1387-4CA6-816F-3879F97B5CBC}" type="slidenum">
               <a:rPr b="0" lang="en-US"/>
-              <a:t>28</a:t>
-            </a:fld>
-            <a:endParaRPr lang="en-US"/>
-          </a:p>
-        </p:txBody>
-      </p:sp>
-    </p:spTree>
-  </p:cSld>
-  <p:clrMapOvr>
-    <a:masterClrMapping/>
-  </p:clrMapOvr>
-</p:sld>
-</file>
-
-<file path=ppt/slides/slide29.xml><?xml version="1.0" encoding="utf-8"?>
-<p:sld xmlns:a="http://schemas.openxmlformats.org/drawingml/2006/main" xmlns:r="http://schemas.openxmlformats.org/officeDocument/2006/relationships" xmlns:p="http://schemas.openxmlformats.org/presentationml/2006/main">
-  <p:cSld name="Slide 29">
-    <p:spTree>
-      <p:nvGrpSpPr>
-        <p:cNvPr id="1" name=""/>
-        <p:cNvGrpSpPr/>
-        <p:nvPr/>
-      </p:nvGrpSpPr>
-      <p:grpSpPr>
-        <a:xfrm>
-          <a:off x="0" y="0"/>
-          <a:ext cx="0" cy="0"/>
-          <a:chOff x="0" y="0"/>
-          <a:chExt cx="0" cy="0"/>
-        </a:xfrm>
-      </p:grpSpPr>
-      <p:sp>
-        <p:nvSpPr>
-          <p:cNvPr id="2" name="Text 0"/>
-          <p:cNvSpPr/>
-          <p:nvPr>
-            <p:ph idx="100" type="title" hasCustomPrompt="1"/>
-          </p:nvPr>
-        </p:nvSpPr>
-        <p:spPr>
-          <a:xfrm>
-            <a:off x="457200" y="457200"/>
-            <a:ext cx="8229600" cy="594360"/>
-          </a:xfrm>
-          <a:prstGeom prst="rect">
-            <a:avLst/>
-          </a:prstGeom>
-          <a:noFill/>
-          <a:ln/>
-        </p:spPr>
-        <p:txBody>
-          <a:bodyPr wrap="square" lIns="0" tIns="0" rIns="0" bIns="0" rtlCol="0" anchor="ctr"/>
-          <a:lstStyle/>
-          <a:p>
-            <a:pPr algn="l" indent="0" marL="0">
-              <a:buNone/>
-            </a:pPr>
-            <a:r>
-              <a:rPr lang="en-US" sz="2400" b="1" dirty="0">
-                <a:solidFill>
-                  <a:schemeClr val="accent2"/>
-                </a:solidFill>
-                <a:latin typeface="Yu Mincho" pitchFamily="34" charset="0"/>
-                <a:ea typeface="Yu Mincho" pitchFamily="34" charset="-122"/>
-                <a:cs typeface="Yu Mincho" pitchFamily="34" charset="-120"/>
-              </a:rPr>
-              <a:t>STEP 3　一番邪魔している思い込みを決める</a:t>
-            </a:r>
-            <a:endParaRPr lang="en-US" sz="2400" dirty="0"/>
-          </a:p>
-        </p:txBody>
-      </p:sp>
-      <p:sp>
-        <p:nvSpPr>
-          <p:cNvPr id="3" name="s3_card0"/>
-          <p:cNvSpPr/>
-          <p:nvPr/>
-        </p:nvSpPr>
-        <p:spPr>
-          <a:xfrm>
-            <a:off x="457200" y="1234440"/>
-            <a:ext cx="5120640" cy="914400"/>
-          </a:xfrm>
-          <a:prstGeom prst="roundRect">
-            <a:avLst>
-              <a:gd name="adj" fmla="val 12000"/>
-            </a:avLst>
-          </a:prstGeom>
-          <a:solidFill>
-            <a:srgbClr val="FDFAF4"/>
-          </a:solidFill>
-          <a:ln w="9525">
-            <a:solidFill>
-              <a:srgbClr val="E9D9B6"/>
-            </a:solidFill>
-            <a:prstDash val="solid"/>
-          </a:ln>
-        </p:spPr>
-      </p:sp>
-      <p:sp>
-        <p:nvSpPr>
-          <p:cNvPr id="4" name="s30_c"/>
-          <p:cNvSpPr/>
-          <p:nvPr/>
-        </p:nvSpPr>
-        <p:spPr>
-          <a:xfrm>
-            <a:off x="621792" y="1499616"/>
-            <a:ext cx="384048" cy="384048"/>
-          </a:xfrm>
-          <a:prstGeom prst="ellipse">
-            <a:avLst/>
-          </a:prstGeom>
-          <a:solidFill>
-            <a:srgbClr val="B08A4E"/>
-          </a:solidFill>
-          <a:ln/>
-        </p:spPr>
-      </p:sp>
-      <p:sp>
-        <p:nvSpPr>
-          <p:cNvPr id="5" name="s30_n"/>
-          <p:cNvSpPr txBox="1"/>
-          <p:nvPr/>
-        </p:nvSpPr>
-        <p:spPr>
-          <a:xfrm>
-            <a:off x="621792" y="1499616"/>
-            <a:ext cx="384048" cy="384048"/>
-          </a:xfrm>
-          <a:prstGeom prst="rect">
-            <a:avLst/>
-          </a:prstGeom>
-          <a:noFill/>
-          <a:ln/>
-        </p:spPr>
-        <p:txBody>
-          <a:bodyPr wrap="square" lIns="0" tIns="0" rIns="0" bIns="0" rtlCol="0" anchor="ctr"/>
-          <a:lstStyle/>
-          <a:p>
-            <a:pPr algn="ctr" indent="0" marL="0">
-              <a:buNone/>
-            </a:pPr>
-            <a:r>
-              <a:rPr lang="en-US" sz="1500" b="1" dirty="0">
-                <a:solidFill>
-                  <a:schemeClr val="bg1"/>
-                </a:solidFill>
-              </a:rPr>
-              <a:t>1</a:t>
-            </a:r>
-            <a:endParaRPr lang="en-US" sz="1500" dirty="0"/>
-          </a:p>
-        </p:txBody>
-      </p:sp>
-      <p:sp>
-        <p:nvSpPr>
-          <p:cNvPr id="6" name="s3_head0"/>
-          <p:cNvSpPr txBox="1"/>
-          <p:nvPr/>
-        </p:nvSpPr>
-        <p:spPr>
-          <a:xfrm>
-            <a:off x="1143000" y="1325880"/>
-            <a:ext cx="4297680" cy="347472"/>
-          </a:xfrm>
-          <a:prstGeom prst="rect">
-            <a:avLst/>
-          </a:prstGeom>
-          <a:noFill/>
-          <a:ln/>
-        </p:spPr>
-        <p:txBody>
-          <a:bodyPr wrap="square" lIns="1016" tIns="1016" rIns="1016" bIns="1016" rtlCol="0" anchor="t"/>
-          <a:lstStyle/>
-          <a:p>
-            <a:pPr indent="0" marL="0">
-              <a:buNone/>
-            </a:pPr>
-            <a:r>
-              <a:rPr lang="en-US" sz="1500" b="1" dirty="0">
-                <a:solidFill>
-                  <a:schemeClr val="tx2"/>
-                </a:solidFill>
-              </a:rPr>
-              <a:t>情動が強いもの上位3つを選ぶ</a:t>
-            </a:r>
-            <a:endParaRPr lang="en-US" sz="1500" dirty="0"/>
-          </a:p>
-        </p:txBody>
-      </p:sp>
-      <p:sp>
-        <p:nvSpPr>
-          <p:cNvPr id="7" name="s3_body0"/>
-          <p:cNvSpPr txBox="1"/>
-          <p:nvPr/>
-        </p:nvSpPr>
-        <p:spPr>
-          <a:xfrm>
-            <a:off x="1143000" y="1691640"/>
-            <a:ext cx="4297680" cy="365760"/>
-          </a:xfrm>
-          <a:prstGeom prst="rect">
-            <a:avLst/>
-          </a:prstGeom>
-          <a:noFill/>
-          <a:ln/>
-        </p:spPr>
-        <p:txBody>
-          <a:bodyPr wrap="square" lIns="1016" tIns="1016" rIns="1016" bIns="1016" rtlCol="0" anchor="t"/>
-          <a:lstStyle/>
-          <a:p>
-            <a:pPr indent="0" marL="0">
-              <a:buNone/>
-            </a:pPr>
-            <a:r>
-              <a:rPr lang="en-US" sz="1300" dirty="0">
-                <a:solidFill>
-                  <a:schemeClr val="tx1"/>
-                </a:solidFill>
-              </a:rPr>
-              <a:t>全体を見て、点数の高いものから</a:t>
-            </a:r>
-            <a:endParaRPr lang="en-US" sz="1300" dirty="0"/>
-          </a:p>
-        </p:txBody>
-      </p:sp>
-      <p:sp>
-        <p:nvSpPr>
-          <p:cNvPr id="8" name="s3_card1"/>
-          <p:cNvSpPr/>
-          <p:nvPr/>
-        </p:nvSpPr>
-        <p:spPr>
-          <a:xfrm>
-            <a:off x="457200" y="2331720"/>
-            <a:ext cx="5120640" cy="914400"/>
-          </a:xfrm>
-          <a:prstGeom prst="roundRect">
-            <a:avLst>
-              <a:gd name="adj" fmla="val 12000"/>
-            </a:avLst>
-          </a:prstGeom>
-          <a:solidFill>
-            <a:srgbClr val="FDFAF4"/>
-          </a:solidFill>
-          <a:ln w="9525">
-            <a:solidFill>
-              <a:srgbClr val="E9D9B6"/>
-            </a:solidFill>
-            <a:prstDash val="solid"/>
-          </a:ln>
-        </p:spPr>
-      </p:sp>
-      <p:sp>
-        <p:nvSpPr>
-          <p:cNvPr id="9" name="s31_c"/>
-          <p:cNvSpPr/>
-          <p:nvPr/>
-        </p:nvSpPr>
-        <p:spPr>
-          <a:xfrm>
-            <a:off x="621792" y="2596896"/>
-            <a:ext cx="384048" cy="384048"/>
-          </a:xfrm>
-          <a:prstGeom prst="ellipse">
-            <a:avLst/>
-          </a:prstGeom>
-          <a:solidFill>
-            <a:srgbClr val="B08A4E"/>
-          </a:solidFill>
-          <a:ln/>
-        </p:spPr>
-      </p:sp>
-      <p:sp>
-        <p:nvSpPr>
-          <p:cNvPr id="10" name="s31_n"/>
-          <p:cNvSpPr txBox="1"/>
-          <p:nvPr/>
-        </p:nvSpPr>
-        <p:spPr>
-          <a:xfrm>
-            <a:off x="621792" y="2596896"/>
-            <a:ext cx="384048" cy="384048"/>
-          </a:xfrm>
-          <a:prstGeom prst="rect">
-            <a:avLst/>
-          </a:prstGeom>
-          <a:noFill/>
-          <a:ln/>
-        </p:spPr>
-        <p:txBody>
-          <a:bodyPr wrap="square" lIns="0" tIns="0" rIns="0" bIns="0" rtlCol="0" anchor="ctr"/>
-          <a:lstStyle/>
-          <a:p>
-            <a:pPr algn="ctr" indent="0" marL="0">
-              <a:buNone/>
-            </a:pPr>
-            <a:r>
-              <a:rPr lang="en-US" sz="1500" b="1" dirty="0">
-                <a:solidFill>
-                  <a:schemeClr val="bg1"/>
-                </a:solidFill>
-              </a:rPr>
-              <a:t>2</a:t>
-            </a:r>
-            <a:endParaRPr lang="en-US" sz="1500" dirty="0"/>
-          </a:p>
-        </p:txBody>
-      </p:sp>
-      <p:sp>
-        <p:nvSpPr>
-          <p:cNvPr id="11" name="s3_head1"/>
-          <p:cNvSpPr txBox="1"/>
-          <p:nvPr/>
-        </p:nvSpPr>
-        <p:spPr>
-          <a:xfrm>
-            <a:off x="1143000" y="2423160"/>
-            <a:ext cx="4297680" cy="347472"/>
-          </a:xfrm>
-          <a:prstGeom prst="rect">
-            <a:avLst/>
-          </a:prstGeom>
-          <a:noFill/>
-          <a:ln/>
-        </p:spPr>
-        <p:txBody>
-          <a:bodyPr wrap="square" lIns="1016" tIns="1016" rIns="1016" bIns="1016" rtlCol="0" anchor="t"/>
-          <a:lstStyle/>
-          <a:p>
-            <a:pPr indent="0" marL="0">
-              <a:buNone/>
-            </a:pPr>
-            <a:r>
-              <a:rPr lang="en-US" sz="1500" b="1" dirty="0">
-                <a:solidFill>
-                  <a:schemeClr val="tx2"/>
-                </a:solidFill>
-              </a:rPr>
-              <a:t>一番邪魔している思い込みを1つ決める</a:t>
-            </a:r>
-            <a:endParaRPr lang="en-US" sz="1500" dirty="0"/>
-          </a:p>
-        </p:txBody>
-      </p:sp>
-      <p:sp>
-        <p:nvSpPr>
-          <p:cNvPr id="12" name="s3_body1"/>
-          <p:cNvSpPr txBox="1"/>
-          <p:nvPr/>
-        </p:nvSpPr>
-        <p:spPr>
-          <a:xfrm>
-            <a:off x="1143000" y="2788920"/>
-            <a:ext cx="4297680" cy="365760"/>
-          </a:xfrm>
-          <a:prstGeom prst="rect">
-            <a:avLst/>
-          </a:prstGeom>
-          <a:noFill/>
-          <a:ln/>
-        </p:spPr>
-        <p:txBody>
-          <a:bodyPr wrap="square" lIns="1016" tIns="1016" rIns="1016" bIns="1016" rtlCol="0" anchor="t"/>
-          <a:lstStyle/>
-          <a:p>
-            <a:pPr indent="0" marL="0">
-              <a:buNone/>
-            </a:pPr>
-            <a:r>
-              <a:rPr lang="en-US" sz="1300" dirty="0">
-                <a:solidFill>
-                  <a:schemeClr val="tx1"/>
-                </a:solidFill>
-              </a:rPr>
-              <a:t>判断できない時はOリング・筋肉反射で</a:t>
-            </a:r>
-            <a:endParaRPr lang="en-US" sz="1300" dirty="0"/>
-          </a:p>
-        </p:txBody>
-      </p:sp>
-      <p:pic>
-        <p:nvPicPr>
-          <p:cNvPr id="13" name="Image 0" descr="ガイドブック44ページ">    </p:cNvPr>
-          <p:cNvPicPr>
-            <a:picLocks noChangeAspect="1"/>
-          </p:cNvPicPr>
-          <p:nvPr/>
-        </p:nvPicPr>
-        <p:blipFill>
-          <a:blip r:embed="rId1"/>
-          <a:stretch>
-            <a:fillRect/>
-          </a:stretch>
-        </p:blipFill>
-        <p:spPr>
-          <a:xfrm>
-            <a:off x="5989320" y="1143000"/>
-            <a:ext cx="2377440" cy="3364992"/>
-          </a:xfrm>
-          <a:prstGeom prst="rect">
-            <a:avLst/>
-          </a:prstGeom>
-        </p:spPr>
-      </p:pic>
-      <p:sp>
-        <p:nvSpPr>
-          <p:cNvPr id="25" name="Slide Number Placeholder 0"/>
-          <p:cNvSpPr>
-            <a:spLocks noGrp="1"/>
-          </p:cNvSpPr>
-          <p:nvPr>
-            <p:ph type="sldNum" sz="quarter" idx="4294967295"/>
-          </p:nvPr>
-        </p:nvSpPr>
-        <p:spPr>
-          <a:xfrm>
-            <a:off x="8229600" y="4754880"/>
-            <a:ext cx="457200" cy="274320"/>
-          </a:xfrm>
-          <a:prstGeom prst="rect">
-            <a:avLst/>
-          </a:prstGeom>
-          <a:extLst>
-            <a:ext uri="{C572A759-6A51-4108-AA02-DFA0A04FC94B}">
-              <ma14:wrappingTextBoxFlag xmlns:ma14="http://schemas.microsoft.com/office/mac/drawingml/2011/main" val="0"/>
-            </a:ext>
-          </a:extLst>
-        </p:spPr>
-        <p:txBody>
-          <a:bodyPr/>
-          <a:lstStyle>
-            <a:lvl1pPr>
-              <a:defRPr sz="900">
-                <a:solidFill>
-                  <a:srgbClr val="B08A4E"/>
-                </a:solidFill>
-              </a:defRPr>
-            </a:lvl1pPr>
-          </a:lstStyle>
-          <a:p>
-            <a:pPr algn="r"/>
-            <a:fld id="{F7021451-1387-4CA6-816F-3879F97B5CBC}" type="slidenum">
-              <a:rPr b="0" lang="en-US"/>
               <a:t>29</a:t>
             </a:fld>
             <a:endParaRPr lang="en-US"/>
@@ -13639,21 +13601,67 @@
       </p:grpSpPr>
       <p:sp>
         <p:nvSpPr>
-          <p:cNvPr id="2" name="frame"/>
+          <p:cNvPr id="2" name="Text 0"/>
+          <p:cNvSpPr/>
+          <p:nvPr>
+            <p:ph idx="100" type="title" hasCustomPrompt="1"/>
+          </p:nvPr>
+        </p:nvSpPr>
+        <p:spPr>
+          <a:xfrm>
+            <a:off x="457200" y="457200"/>
+            <a:ext cx="8229600" cy="594360"/>
+          </a:xfrm>
+          <a:prstGeom prst="rect">
+            <a:avLst/>
+          </a:prstGeom>
+          <a:noFill/>
+          <a:ln/>
+        </p:spPr>
+        <p:txBody>
+          <a:bodyPr wrap="square" lIns="0" tIns="0" rIns="0" bIns="0" rtlCol="0" anchor="ctr"/>
+          <a:lstStyle/>
+          <a:p>
+            <a:pPr algn="l" indent="0" marL="0">
+              <a:buNone/>
+            </a:pPr>
+            <a:r>
+              <a:rPr lang="en-US" sz="2400" b="1" dirty="0">
+                <a:solidFill>
+                  <a:schemeClr val="accent2"/>
+                </a:solidFill>
+                <a:latin typeface="Yu Mincho" pitchFamily="34" charset="0"/>
+                <a:ea typeface="Yu Mincho" pitchFamily="34" charset="-122"/>
+                <a:cs typeface="Yu Mincho" pitchFamily="34" charset="-120"/>
+              </a:rPr>
+              <a:t>STEP 3　一番邪魔している思い込みを決める</a:t>
+            </a:r>
+            <a:endParaRPr lang="en-US" sz="2400" dirty="0"/>
+          </a:p>
+        </p:txBody>
+      </p:sp>
+      <p:sp>
+        <p:nvSpPr>
+          <p:cNvPr id="3" name="s3_card0"/>
           <p:cNvSpPr/>
           <p:nvPr/>
         </p:nvSpPr>
         <p:spPr>
           <a:xfrm>
-            <a:off x="228600" y="137160"/>
-            <a:ext cx="8686800" cy="4526280"/>
-          </a:xfrm>
-          <a:prstGeom prst="rect">
-            <a:avLst/>
-          </a:prstGeom>
-          <a:ln w="12700">
+            <a:off x="457200" y="1234440"/>
+            <a:ext cx="5120640" cy="914400"/>
+          </a:xfrm>
+          <a:prstGeom prst="roundRect">
+            <a:avLst>
+              <a:gd name="adj" fmla="val 12000"/>
+            </a:avLst>
+          </a:prstGeom>
+          <a:solidFill>
+            <a:srgbClr val="FDFAF4"/>
+          </a:solidFill>
+          <a:ln w="9525">
             <a:solidFill>
-              <a:srgbClr val="B08A4E"/>
+              <a:srgbClr val="E9D9B6"/>
             </a:solidFill>
             <a:prstDash val="solid"/>
           </a:ln>
@@ -13661,14 +13669,34 @@
       </p:sp>
       <p:sp>
         <p:nvSpPr>
-          <p:cNvPr id="3" name="qlabel"/>
+          <p:cNvPr id="4" name="s30_c"/>
+          <p:cNvSpPr/>
+          <p:nvPr/>
+        </p:nvSpPr>
+        <p:spPr>
+          <a:xfrm>
+            <a:off x="621792" y="1499616"/>
+            <a:ext cx="384048" cy="384048"/>
+          </a:xfrm>
+          <a:prstGeom prst="ellipse">
+            <a:avLst/>
+          </a:prstGeom>
+          <a:solidFill>
+            <a:srgbClr val="B08A4E"/>
+          </a:solidFill>
+          <a:ln/>
+        </p:spPr>
+      </p:sp>
+      <p:sp>
+        <p:nvSpPr>
+          <p:cNvPr id="5" name="s30_n"/>
           <p:cNvSpPr txBox="1"/>
           <p:nvPr/>
         </p:nvSpPr>
         <p:spPr>
           <a:xfrm>
-            <a:off x="457200" y="320040"/>
-            <a:ext cx="8229600" cy="365760"/>
+            <a:off x="621792" y="1499616"/>
+            <a:ext cx="384048" cy="384048"/>
           </a:xfrm>
           <a:prstGeom prst="rect">
             <a:avLst/>
@@ -13677,36 +13705,34 @@
           <a:ln/>
         </p:spPr>
         <p:txBody>
-          <a:bodyPr wrap="square" lIns="0" tIns="0" rIns="0" bIns="0" rtlCol="0" anchor="t"/>
+          <a:bodyPr wrap="square" lIns="0" tIns="0" rIns="0" bIns="0" rtlCol="0" anchor="ctr"/>
           <a:lstStyle/>
           <a:p>
             <a:pPr algn="ctr" indent="0" marL="0">
               <a:buNone/>
             </a:pPr>
             <a:r>
-              <a:rPr lang="en-US" sz="1300" b="1" dirty="0">
-                <a:solidFill>
-                  <a:schemeClr val="accent2"/>
-                </a:solidFill>
-              </a:rPr>
-              <a:t>STEP 3　確認の質問</a:t>
-            </a:r>
-            <a:endParaRPr lang="en-US" sz="1300" dirty="0"/>
-          </a:p>
-        </p:txBody>
-      </p:sp>
-      <p:sp>
-        <p:nvSpPr>
-          <p:cNvPr id="4" name="Text 0"/>
-          <p:cNvSpPr/>
-          <p:nvPr>
-            <p:ph idx="100" type="title" hasCustomPrompt="1"/>
-          </p:nvPr>
-        </p:nvSpPr>
-        <p:spPr>
-          <a:xfrm>
-            <a:off x="914400" y="1554480"/>
-            <a:ext cx="7315200" cy="1554480"/>
+              <a:rPr lang="en-US" sz="1500" b="1" dirty="0">
+                <a:solidFill>
+                  <a:schemeClr val="bg1"/>
+                </a:solidFill>
+              </a:rPr>
+              <a:t>1</a:t>
+            </a:r>
+            <a:endParaRPr lang="en-US" sz="1500" dirty="0"/>
+          </a:p>
+        </p:txBody>
+      </p:sp>
+      <p:sp>
+        <p:nvSpPr>
+          <p:cNvPr id="6" name="s3_head0"/>
+          <p:cNvSpPr txBox="1"/>
+          <p:nvPr/>
+        </p:nvSpPr>
+        <p:spPr>
+          <a:xfrm>
+            <a:off x="1143000" y="1325880"/>
+            <a:ext cx="4297680" cy="347472"/>
           </a:xfrm>
           <a:prstGeom prst="rect">
             <a:avLst/>
@@ -13715,73 +13741,34 @@
           <a:ln/>
         </p:spPr>
         <p:txBody>
-          <a:bodyPr wrap="square" rtlCol="0" anchor="ctr"/>
-          <a:lstStyle/>
-          <a:p>
-            <a:pPr algn="ctr" indent="0" marL="0">
-              <a:buNone/>
-            </a:pPr>
-            <a:r>
-              <a:rPr lang="en-US" sz="3200" b="1" dirty="0">
+          <a:bodyPr wrap="square" lIns="1016" tIns="1016" rIns="1016" bIns="1016" rtlCol="0" anchor="t"/>
+          <a:lstStyle/>
+          <a:p>
+            <a:pPr indent="0" marL="0">
+              <a:buNone/>
+            </a:pPr>
+            <a:r>
+              <a:rPr lang="en-US" sz="1500" b="1" dirty="0">
                 <a:solidFill>
                   <a:schemeClr val="tx2"/>
                 </a:solidFill>
-                <a:latin typeface="Yu Mincho" pitchFamily="34" charset="0"/>
-                <a:ea typeface="Yu Mincho" pitchFamily="34" charset="-122"/>
-                <a:cs typeface="Yu Mincho" pitchFamily="34" charset="-120"/>
-              </a:rPr>
-              <a:t>その思い込みが“ゆるんだら”、</a:t>
-            </a:r>
-            <a:endParaRPr lang="en-US" sz="3200" dirty="0"/>
-          </a:p>
-          <a:p>
-            <a:pPr algn="ctr" indent="0" marL="0">
-              <a:buNone/>
-            </a:pPr>
-            <a:r>
-              <a:rPr lang="en-US" sz="3200" b="1" dirty="0">
-                <a:solidFill>
-                  <a:schemeClr val="tx2"/>
-                </a:solidFill>
-                <a:latin typeface="Yu Mincho" pitchFamily="34" charset="0"/>
-                <a:ea typeface="Yu Mincho" pitchFamily="34" charset="-122"/>
-                <a:cs typeface="Yu Mincho" pitchFamily="34" charset="-120"/>
-              </a:rPr>
-              <a:t>目標達成によい影響が</a:t>
-            </a:r>
-            <a:endParaRPr lang="en-US" sz="3200" dirty="0"/>
-          </a:p>
-          <a:p>
-            <a:pPr algn="ctr" indent="0" marL="0">
-              <a:buNone/>
-            </a:pPr>
-            <a:r>
-              <a:rPr lang="en-US" sz="3200" b="1" dirty="0">
-                <a:solidFill>
-                  <a:schemeClr val="tx2"/>
-                </a:solidFill>
-                <a:latin typeface="Yu Mincho" pitchFamily="34" charset="0"/>
-                <a:ea typeface="Yu Mincho" pitchFamily="34" charset="-122"/>
-                <a:cs typeface="Yu Mincho" pitchFamily="34" charset="-120"/>
-              </a:rPr>
-              <a:t>出そうですか？</a:t>
-            </a:r>
-            <a:endParaRPr lang="en-US" sz="3200" dirty="0"/>
-          </a:p>
-        </p:txBody>
-      </p:sp>
-      <p:sp>
-        <p:nvSpPr>
-          <p:cNvPr id="6" name="Text 0"/>
-          <p:cNvSpPr/>
-          <p:nvPr>
-            <p:ph idx="101" type="body" hasCustomPrompt="1"/>
-          </p:nvPr>
-        </p:nvSpPr>
-        <p:spPr>
-          <a:xfrm>
-            <a:off x="914400" y="3200400"/>
-            <a:ext cx="7315200" cy="731520"/>
+              </a:rPr>
+              <a:t>情動が強いもの上位3つを選ぶ</a:t>
+            </a:r>
+            <a:endParaRPr lang="en-US" sz="1500" dirty="0"/>
+          </a:p>
+        </p:txBody>
+      </p:sp>
+      <p:sp>
+        <p:nvSpPr>
+          <p:cNvPr id="7" name="s3_body0"/>
+          <p:cNvSpPr txBox="1"/>
+          <p:nvPr/>
+        </p:nvSpPr>
+        <p:spPr>
+          <a:xfrm>
+            <a:off x="1143000" y="1691640"/>
+            <a:ext cx="4297680" cy="365760"/>
           </a:xfrm>
           <a:prstGeom prst="rect">
             <a:avLst/>
@@ -13790,16 +13777,203 @@
           <a:ln/>
         </p:spPr>
         <p:txBody>
-          <a:bodyPr wrap="square" rtlCol="0" anchor="t"/>
+          <a:bodyPr wrap="square" lIns="1016" tIns="1016" rIns="1016" bIns="1016" rtlCol="0" anchor="t"/>
+          <a:lstStyle/>
+          <a:p>
+            <a:pPr indent="0" marL="0">
+              <a:buNone/>
+            </a:pPr>
+            <a:r>
+              <a:rPr lang="en-US" sz="1300" dirty="0">
+                <a:solidFill>
+                  <a:schemeClr val="tx1"/>
+                </a:solidFill>
+              </a:rPr>
+              <a:t>全体を見て、点数の高いものから</a:t>
+            </a:r>
+            <a:endParaRPr lang="en-US" sz="1300" dirty="0"/>
+          </a:p>
+        </p:txBody>
+      </p:sp>
+      <p:sp>
+        <p:nvSpPr>
+          <p:cNvPr id="8" name="s3_card1"/>
+          <p:cNvSpPr/>
+          <p:nvPr/>
+        </p:nvSpPr>
+        <p:spPr>
+          <a:xfrm>
+            <a:off x="457200" y="2331720"/>
+            <a:ext cx="5120640" cy="914400"/>
+          </a:xfrm>
+          <a:prstGeom prst="roundRect">
+            <a:avLst>
+              <a:gd name="adj" fmla="val 12000"/>
+            </a:avLst>
+          </a:prstGeom>
+          <a:solidFill>
+            <a:srgbClr val="FDFAF4"/>
+          </a:solidFill>
+          <a:ln w="9525">
+            <a:solidFill>
+              <a:srgbClr val="E9D9B6"/>
+            </a:solidFill>
+            <a:prstDash val="solid"/>
+          </a:ln>
+        </p:spPr>
+      </p:sp>
+      <p:sp>
+        <p:nvSpPr>
+          <p:cNvPr id="9" name="s31_c"/>
+          <p:cNvSpPr/>
+          <p:nvPr/>
+        </p:nvSpPr>
+        <p:spPr>
+          <a:xfrm>
+            <a:off x="621792" y="2596896"/>
+            <a:ext cx="384048" cy="384048"/>
+          </a:xfrm>
+          <a:prstGeom prst="ellipse">
+            <a:avLst/>
+          </a:prstGeom>
+          <a:solidFill>
+            <a:srgbClr val="B08A4E"/>
+          </a:solidFill>
+          <a:ln/>
+        </p:spPr>
+      </p:sp>
+      <p:sp>
+        <p:nvSpPr>
+          <p:cNvPr id="10" name="s31_n"/>
+          <p:cNvSpPr txBox="1"/>
+          <p:nvPr/>
+        </p:nvSpPr>
+        <p:spPr>
+          <a:xfrm>
+            <a:off x="621792" y="2596896"/>
+            <a:ext cx="384048" cy="384048"/>
+          </a:xfrm>
+          <a:prstGeom prst="rect">
+            <a:avLst/>
+          </a:prstGeom>
+          <a:noFill/>
+          <a:ln/>
+        </p:spPr>
+        <p:txBody>
+          <a:bodyPr wrap="square" lIns="0" tIns="0" rIns="0" bIns="0" rtlCol="0" anchor="ctr"/>
           <a:lstStyle/>
           <a:p>
             <a:pPr algn="ctr" indent="0" marL="0">
               <a:buNone/>
             </a:pPr>
+            <a:r>
+              <a:rPr lang="en-US" sz="1500" b="1" dirty="0">
+                <a:solidFill>
+                  <a:schemeClr val="bg1"/>
+                </a:solidFill>
+              </a:rPr>
+              <a:t>2</a:t>
+            </a:r>
             <a:endParaRPr lang="en-US" sz="1500" dirty="0"/>
           </a:p>
         </p:txBody>
       </p:sp>
+      <p:sp>
+        <p:nvSpPr>
+          <p:cNvPr id="11" name="s3_head1"/>
+          <p:cNvSpPr txBox="1"/>
+          <p:nvPr/>
+        </p:nvSpPr>
+        <p:spPr>
+          <a:xfrm>
+            <a:off x="1143000" y="2423160"/>
+            <a:ext cx="4297680" cy="347472"/>
+          </a:xfrm>
+          <a:prstGeom prst="rect">
+            <a:avLst/>
+          </a:prstGeom>
+          <a:noFill/>
+          <a:ln/>
+        </p:spPr>
+        <p:txBody>
+          <a:bodyPr wrap="square" lIns="1016" tIns="1016" rIns="1016" bIns="1016" rtlCol="0" anchor="t"/>
+          <a:lstStyle/>
+          <a:p>
+            <a:pPr indent="0" marL="0">
+              <a:buNone/>
+            </a:pPr>
+            <a:r>
+              <a:rPr lang="en-US" sz="1500" b="1" dirty="0">
+                <a:solidFill>
+                  <a:schemeClr val="tx2"/>
+                </a:solidFill>
+              </a:rPr>
+              <a:t>一番邪魔している思い込みを1つ決める</a:t>
+            </a:r>
+            <a:endParaRPr lang="en-US" sz="1500" dirty="0"/>
+          </a:p>
+        </p:txBody>
+      </p:sp>
+      <p:sp>
+        <p:nvSpPr>
+          <p:cNvPr id="12" name="s3_body1"/>
+          <p:cNvSpPr txBox="1"/>
+          <p:nvPr/>
+        </p:nvSpPr>
+        <p:spPr>
+          <a:xfrm>
+            <a:off x="1143000" y="2788920"/>
+            <a:ext cx="4297680" cy="365760"/>
+          </a:xfrm>
+          <a:prstGeom prst="rect">
+            <a:avLst/>
+          </a:prstGeom>
+          <a:noFill/>
+          <a:ln/>
+        </p:spPr>
+        <p:txBody>
+          <a:bodyPr wrap="square" lIns="1016" tIns="1016" rIns="1016" bIns="1016" rtlCol="0" anchor="t"/>
+          <a:lstStyle/>
+          <a:p>
+            <a:pPr indent="0" marL="0">
+              <a:buNone/>
+            </a:pPr>
+            <a:r>
+              <a:rPr lang="en-US" sz="1300" dirty="0">
+                <a:solidFill>
+                  <a:schemeClr val="tx1"/>
+                </a:solidFill>
+              </a:rPr>
+              <a:t>判断できない時はOリング・筋肉反射で</a:t>
+            </a:r>
+            <a:endParaRPr lang="en-US" sz="1300" dirty="0"/>
+          </a:p>
+        </p:txBody>
+      </p:sp>
+      <p:pic>
+        <p:nvPicPr>
+          <p:cNvPr id="13" name="Image 0" descr="ガイドブック44ページ">    </p:cNvPr>
+          <p:cNvPicPr>
+            <a:picLocks noChangeAspect="1"/>
+          </p:cNvPicPr>
+          <p:nvPr/>
+        </p:nvPicPr>
+        <p:blipFill>
+          <a:blip r:embed="rId1"/>
+          <a:stretch>
+            <a:fillRect/>
+          </a:stretch>
+        </p:blipFill>
+        <p:spPr>
+          <a:xfrm>
+            <a:off x="5989320" y="1143000"/>
+            <a:ext cx="2377440" cy="3364992"/>
+          </a:xfrm>
+          <a:prstGeom prst="rect">
+            <a:avLst/>
+          </a:prstGeom>
+        </p:spPr>
+      </p:pic>
       <p:sp>
         <p:nvSpPr>
           <p:cNvPr id="25" name="Slide Number Placeholder 0"/>
@@ -13872,16 +14046,36 @@
       </p:grpSpPr>
       <p:sp>
         <p:nvSpPr>
-          <p:cNvPr id="2" name="Text 0"/>
+          <p:cNvPr id="2" name="frame"/>
           <p:cNvSpPr/>
-          <p:nvPr>
-            <p:ph idx="100" type="title" hasCustomPrompt="1"/>
-          </p:nvPr>
-        </p:nvSpPr>
-        <p:spPr>
-          <a:xfrm>
-            <a:off x="457200" y="457200"/>
-            <a:ext cx="8229600" cy="594360"/>
+          <p:nvPr/>
+        </p:nvSpPr>
+        <p:spPr>
+          <a:xfrm>
+            <a:off x="228600" y="137160"/>
+            <a:ext cx="8686800" cy="4526280"/>
+          </a:xfrm>
+          <a:prstGeom prst="rect">
+            <a:avLst/>
+          </a:prstGeom>
+          <a:ln w="12700">
+            <a:solidFill>
+              <a:srgbClr val="B08A4E"/>
+            </a:solidFill>
+            <a:prstDash val="solid"/>
+          </a:ln>
+        </p:spPr>
+      </p:sp>
+      <p:sp>
+        <p:nvSpPr>
+          <p:cNvPr id="3" name="qlabel"/>
+          <p:cNvSpPr txBox="1"/>
+          <p:nvPr/>
+        </p:nvSpPr>
+        <p:spPr>
+          <a:xfrm>
+            <a:off x="457200" y="320040"/>
+            <a:ext cx="8229600" cy="365760"/>
           </a:xfrm>
           <a:prstGeom prst="rect">
             <a:avLst/>
@@ -13890,84 +14084,111 @@
           <a:ln/>
         </p:spPr>
         <p:txBody>
-          <a:bodyPr wrap="square" lIns="0" tIns="0" rIns="0" bIns="0" rtlCol="0" anchor="ctr"/>
-          <a:lstStyle/>
-          <a:p>
-            <a:pPr algn="l" indent="0" marL="0">
-              <a:buNone/>
-            </a:pPr>
-            <a:r>
-              <a:rPr lang="en-US" sz="2400" b="1" dirty="0">
+          <a:bodyPr wrap="square" lIns="0" tIns="0" rIns="0" bIns="0" rtlCol="0" anchor="t"/>
+          <a:lstStyle/>
+          <a:p>
+            <a:pPr algn="ctr" indent="0" marL="0">
+              <a:buNone/>
+            </a:pPr>
+            <a:r>
+              <a:rPr lang="en-US" sz="1300" b="1" dirty="0">
                 <a:solidFill>
                   <a:schemeClr val="accent2"/>
+                </a:solidFill>
+              </a:rPr>
+              <a:t>STEP 3　確認の質問</a:t>
+            </a:r>
+            <a:endParaRPr lang="en-US" sz="1300" dirty="0"/>
+          </a:p>
+        </p:txBody>
+      </p:sp>
+      <p:sp>
+        <p:nvSpPr>
+          <p:cNvPr id="4" name="Text 0"/>
+          <p:cNvSpPr/>
+          <p:nvPr>
+            <p:ph idx="100" type="title" hasCustomPrompt="1"/>
+          </p:nvPr>
+        </p:nvSpPr>
+        <p:spPr>
+          <a:xfrm>
+            <a:off x="914400" y="1554480"/>
+            <a:ext cx="7315200" cy="1554480"/>
+          </a:xfrm>
+          <a:prstGeom prst="rect">
+            <a:avLst/>
+          </a:prstGeom>
+          <a:noFill/>
+          <a:ln/>
+        </p:spPr>
+        <p:txBody>
+          <a:bodyPr wrap="square" rtlCol="0" anchor="ctr"/>
+          <a:lstStyle/>
+          <a:p>
+            <a:pPr algn="ctr" indent="0" marL="0">
+              <a:buNone/>
+            </a:pPr>
+            <a:r>
+              <a:rPr lang="en-US" sz="3200" b="1" dirty="0">
+                <a:solidFill>
+                  <a:schemeClr val="tx2"/>
                 </a:solidFill>
                 <a:latin typeface="Yu Mincho" pitchFamily="34" charset="0"/>
                 <a:ea typeface="Yu Mincho" pitchFamily="34" charset="-122"/>
                 <a:cs typeface="Yu Mincho" pitchFamily="34" charset="-120"/>
               </a:rPr>
-              <a:t>STEP 4　思い込みが生まれた場面へ（解放）</a:t>
-            </a:r>
-            <a:endParaRPr lang="en-US" sz="2400" dirty="0"/>
-          </a:p>
-        </p:txBody>
-      </p:sp>
-      <p:sp>
-        <p:nvSpPr>
-          <p:cNvPr id="3" name="s4_card0"/>
+              <a:t>その思い込みが“ゆるんだら”、</a:t>
+            </a:r>
+            <a:endParaRPr lang="en-US" sz="3200" dirty="0"/>
+          </a:p>
+          <a:p>
+            <a:pPr algn="ctr" indent="0" marL="0">
+              <a:buNone/>
+            </a:pPr>
+            <a:r>
+              <a:rPr lang="en-US" sz="3200" b="1" dirty="0">
+                <a:solidFill>
+                  <a:schemeClr val="tx2"/>
+                </a:solidFill>
+                <a:latin typeface="Yu Mincho" pitchFamily="34" charset="0"/>
+                <a:ea typeface="Yu Mincho" pitchFamily="34" charset="-122"/>
+                <a:cs typeface="Yu Mincho" pitchFamily="34" charset="-120"/>
+              </a:rPr>
+              <a:t>目標達成によい影響が</a:t>
+            </a:r>
+            <a:endParaRPr lang="en-US" sz="3200" dirty="0"/>
+          </a:p>
+          <a:p>
+            <a:pPr algn="ctr" indent="0" marL="0">
+              <a:buNone/>
+            </a:pPr>
+            <a:r>
+              <a:rPr lang="en-US" sz="3200" b="1" dirty="0">
+                <a:solidFill>
+                  <a:schemeClr val="tx2"/>
+                </a:solidFill>
+                <a:latin typeface="Yu Mincho" pitchFamily="34" charset="0"/>
+                <a:ea typeface="Yu Mincho" pitchFamily="34" charset="-122"/>
+                <a:cs typeface="Yu Mincho" pitchFamily="34" charset="-120"/>
+              </a:rPr>
+              <a:t>出そうですか？</a:t>
+            </a:r>
+            <a:endParaRPr lang="en-US" sz="3200" dirty="0"/>
+          </a:p>
+        </p:txBody>
+      </p:sp>
+      <p:sp>
+        <p:nvSpPr>
+          <p:cNvPr id="6" name="Text 0"/>
           <p:cNvSpPr/>
-          <p:nvPr/>
-        </p:nvSpPr>
-        <p:spPr>
-          <a:xfrm>
-            <a:off x="457200" y="1188720"/>
-            <a:ext cx="5669280" cy="676656"/>
-          </a:xfrm>
-          <a:prstGeom prst="roundRect">
-            <a:avLst>
-              <a:gd name="adj" fmla="val 16216"/>
-            </a:avLst>
-          </a:prstGeom>
-          <a:solidFill>
-            <a:srgbClr val="FDFAF4"/>
-          </a:solidFill>
-          <a:ln w="9525">
-            <a:solidFill>
-              <a:srgbClr val="E9D9B6"/>
-            </a:solidFill>
-            <a:prstDash val="solid"/>
-          </a:ln>
-        </p:spPr>
-      </p:sp>
-      <p:sp>
-        <p:nvSpPr>
-          <p:cNvPr id="4" name="s40_c"/>
-          <p:cNvSpPr/>
-          <p:nvPr/>
-        </p:nvSpPr>
-        <p:spPr>
-          <a:xfrm>
-            <a:off x="603504" y="1335024"/>
-            <a:ext cx="384048" cy="384048"/>
-          </a:xfrm>
-          <a:prstGeom prst="ellipse">
-            <a:avLst/>
-          </a:prstGeom>
-          <a:solidFill>
-            <a:srgbClr val="B08A4E"/>
-          </a:solidFill>
-          <a:ln/>
-        </p:spPr>
-      </p:sp>
-      <p:sp>
-        <p:nvSpPr>
-          <p:cNvPr id="5" name="s40_n"/>
-          <p:cNvSpPr txBox="1"/>
-          <p:nvPr/>
-        </p:nvSpPr>
-        <p:spPr>
-          <a:xfrm>
-            <a:off x="603504" y="1335024"/>
-            <a:ext cx="384048" cy="384048"/>
+          <p:nvPr>
+            <p:ph idx="101" type="body" hasCustomPrompt="1"/>
+          </p:nvPr>
+        </p:nvSpPr>
+        <p:spPr>
+          <a:xfrm>
+            <a:off x="914400" y="3200400"/>
+            <a:ext cx="7315200" cy="731520"/>
           </a:xfrm>
           <a:prstGeom prst="rect">
             <a:avLst/>
@@ -13976,709 +14197,13 @@
           <a:ln/>
         </p:spPr>
         <p:txBody>
-          <a:bodyPr wrap="square" lIns="0" tIns="0" rIns="0" bIns="0" rtlCol="0" anchor="ctr"/>
+          <a:bodyPr wrap="square" rtlCol="0" anchor="t"/>
           <a:lstStyle/>
           <a:p>
             <a:pPr algn="ctr" indent="0" marL="0">
               <a:buNone/>
             </a:pPr>
-            <a:r>
-              <a:rPr lang="en-US" sz="1500" b="1" dirty="0">
-                <a:solidFill>
-                  <a:schemeClr val="bg1"/>
-                </a:solidFill>
-              </a:rPr>
-              <a:t>1</a:t>
-            </a:r>
             <a:endParaRPr lang="en-US" sz="1500" dirty="0"/>
-          </a:p>
-        </p:txBody>
-      </p:sp>
-      <p:sp>
-        <p:nvSpPr>
-          <p:cNvPr id="6" name="s4_head0"/>
-          <p:cNvSpPr txBox="1"/>
-          <p:nvPr/>
-        </p:nvSpPr>
-        <p:spPr>
-          <a:xfrm>
-            <a:off x="1097280" y="1216152"/>
-            <a:ext cx="4937760" cy="310896"/>
-          </a:xfrm>
-          <a:prstGeom prst="rect">
-            <a:avLst/>
-          </a:prstGeom>
-          <a:noFill/>
-          <a:ln/>
-        </p:spPr>
-        <p:txBody>
-          <a:bodyPr wrap="square" lIns="1016" tIns="1016" rIns="1016" bIns="1016" rtlCol="0" anchor="t"/>
-          <a:lstStyle/>
-          <a:p>
-            <a:pPr indent="0" marL="0">
-              <a:buNone/>
-            </a:pPr>
-            <a:r>
-              <a:rPr lang="en-US" sz="1400" b="1" dirty="0">
-                <a:solidFill>
-                  <a:schemeClr val="tx2"/>
-                </a:solidFill>
-              </a:rPr>
-              <a:t>今の自分の場所に立つ</a:t>
-            </a:r>
-            <a:endParaRPr lang="en-US" sz="1400" dirty="0"/>
-          </a:p>
-        </p:txBody>
-      </p:sp>
-      <p:sp>
-        <p:nvSpPr>
-          <p:cNvPr id="7" name="s4_body0"/>
-          <p:cNvSpPr txBox="1"/>
-          <p:nvPr/>
-        </p:nvSpPr>
-        <p:spPr>
-          <a:xfrm>
-            <a:off x="1097280" y="1517904"/>
-            <a:ext cx="4937760" cy="329184"/>
-          </a:xfrm>
-          <a:prstGeom prst="rect">
-            <a:avLst/>
-          </a:prstGeom>
-          <a:noFill/>
-          <a:ln/>
-        </p:spPr>
-        <p:txBody>
-          <a:bodyPr wrap="square" lIns="1016" tIns="1016" rIns="1016" bIns="1016" rtlCol="0" anchor="t"/>
-          <a:lstStyle/>
-          <a:p>
-            <a:pPr indent="0" marL="0">
-              <a:buNone/>
-            </a:pPr>
-            <a:r>
-              <a:rPr lang="en-US" sz="1200" dirty="0">
-                <a:solidFill>
-                  <a:schemeClr val="tx1"/>
-                </a:solidFill>
-              </a:rPr>
-              <a:t>今の気持ちを、見えるもの・聞こえるもの・体の感じで話す</a:t>
-            </a:r>
-            <a:endParaRPr lang="en-US" sz="1200" dirty="0"/>
-          </a:p>
-        </p:txBody>
-      </p:sp>
-      <p:sp>
-        <p:nvSpPr>
-          <p:cNvPr id="8" name="s4_card1"/>
-          <p:cNvSpPr/>
-          <p:nvPr/>
-        </p:nvSpPr>
-        <p:spPr>
-          <a:xfrm>
-            <a:off x="457200" y="1975104"/>
-            <a:ext cx="5669280" cy="676656"/>
-          </a:xfrm>
-          <a:prstGeom prst="roundRect">
-            <a:avLst>
-              <a:gd name="adj" fmla="val 16216"/>
-            </a:avLst>
-          </a:prstGeom>
-          <a:solidFill>
-            <a:srgbClr val="FDFAF4"/>
-          </a:solidFill>
-          <a:ln w="9525">
-            <a:solidFill>
-              <a:srgbClr val="E9D9B6"/>
-            </a:solidFill>
-            <a:prstDash val="solid"/>
-          </a:ln>
-        </p:spPr>
-      </p:sp>
-      <p:sp>
-        <p:nvSpPr>
-          <p:cNvPr id="9" name="s41_c"/>
-          <p:cNvSpPr/>
-          <p:nvPr/>
-        </p:nvSpPr>
-        <p:spPr>
-          <a:xfrm>
-            <a:off x="603504" y="2121408"/>
-            <a:ext cx="384048" cy="384048"/>
-          </a:xfrm>
-          <a:prstGeom prst="ellipse">
-            <a:avLst/>
-          </a:prstGeom>
-          <a:solidFill>
-            <a:srgbClr val="B08A4E"/>
-          </a:solidFill>
-          <a:ln/>
-        </p:spPr>
-      </p:sp>
-      <p:sp>
-        <p:nvSpPr>
-          <p:cNvPr id="10" name="s41_n"/>
-          <p:cNvSpPr txBox="1"/>
-          <p:nvPr/>
-        </p:nvSpPr>
-        <p:spPr>
-          <a:xfrm>
-            <a:off x="603504" y="2121408"/>
-            <a:ext cx="384048" cy="384048"/>
-          </a:xfrm>
-          <a:prstGeom prst="rect">
-            <a:avLst/>
-          </a:prstGeom>
-          <a:noFill/>
-          <a:ln/>
-        </p:spPr>
-        <p:txBody>
-          <a:bodyPr wrap="square" lIns="0" tIns="0" rIns="0" bIns="0" rtlCol="0" anchor="ctr"/>
-          <a:lstStyle/>
-          <a:p>
-            <a:pPr algn="ctr" indent="0" marL="0">
-              <a:buNone/>
-            </a:pPr>
-            <a:r>
-              <a:rPr lang="en-US" sz="1500" b="1" dirty="0">
-                <a:solidFill>
-                  <a:schemeClr val="bg1"/>
-                </a:solidFill>
-              </a:rPr>
-              <a:t>2</a:t>
-            </a:r>
-            <a:endParaRPr lang="en-US" sz="1500" dirty="0"/>
-          </a:p>
-        </p:txBody>
-      </p:sp>
-      <p:sp>
-        <p:nvSpPr>
-          <p:cNvPr id="11" name="s4_head1"/>
-          <p:cNvSpPr txBox="1"/>
-          <p:nvPr/>
-        </p:nvSpPr>
-        <p:spPr>
-          <a:xfrm>
-            <a:off x="1097280" y="2002536"/>
-            <a:ext cx="4937760" cy="310896"/>
-          </a:xfrm>
-          <a:prstGeom prst="rect">
-            <a:avLst/>
-          </a:prstGeom>
-          <a:noFill/>
-          <a:ln/>
-        </p:spPr>
-        <p:txBody>
-          <a:bodyPr wrap="square" lIns="1016" tIns="1016" rIns="1016" bIns="1016" rtlCol="0" anchor="t"/>
-          <a:lstStyle/>
-          <a:p>
-            <a:pPr indent="0" marL="0">
-              <a:buNone/>
-            </a:pPr>
-            <a:r>
-              <a:rPr lang="en-US" sz="1400" b="1" dirty="0">
-                <a:solidFill>
-                  <a:schemeClr val="tx2"/>
-                </a:solidFill>
-              </a:rPr>
-              <a:t>思い込みが生まれた過去の場面へ移動</a:t>
-            </a:r>
-            <a:endParaRPr lang="en-US" sz="1400" dirty="0"/>
-          </a:p>
-        </p:txBody>
-      </p:sp>
-      <p:sp>
-        <p:nvSpPr>
-          <p:cNvPr id="12" name="s4_body1"/>
-          <p:cNvSpPr txBox="1"/>
-          <p:nvPr/>
-        </p:nvSpPr>
-        <p:spPr>
-          <a:xfrm>
-            <a:off x="1097280" y="2304288"/>
-            <a:ext cx="4937760" cy="329184"/>
-          </a:xfrm>
-          <a:prstGeom prst="rect">
-            <a:avLst/>
-          </a:prstGeom>
-          <a:noFill/>
-          <a:ln/>
-        </p:spPr>
-        <p:txBody>
-          <a:bodyPr wrap="square" lIns="1016" tIns="1016" rIns="1016" bIns="1016" rtlCol="0" anchor="t"/>
-          <a:lstStyle/>
-          <a:p>
-            <a:pPr indent="0" marL="0">
-              <a:buNone/>
-            </a:pPr>
-            <a:r>
-              <a:rPr lang="en-US" sz="1200" dirty="0">
-                <a:solidFill>
-                  <a:schemeClr val="tx1"/>
-                </a:solidFill>
-              </a:rPr>
-              <a:t>その場面で、何が見えて、何が聞こえて、体はどんな感じか</a:t>
-            </a:r>
-            <a:endParaRPr lang="en-US" sz="1200" dirty="0"/>
-          </a:p>
-        </p:txBody>
-      </p:sp>
-      <p:sp>
-        <p:nvSpPr>
-          <p:cNvPr id="13" name="s4_card2"/>
-          <p:cNvSpPr/>
-          <p:nvPr/>
-        </p:nvSpPr>
-        <p:spPr>
-          <a:xfrm>
-            <a:off x="457200" y="2761488"/>
-            <a:ext cx="5669280" cy="676656"/>
-          </a:xfrm>
-          <a:prstGeom prst="roundRect">
-            <a:avLst>
-              <a:gd name="adj" fmla="val 16216"/>
-            </a:avLst>
-          </a:prstGeom>
-          <a:solidFill>
-            <a:srgbClr val="FDFAF4"/>
-          </a:solidFill>
-          <a:ln w="9525">
-            <a:solidFill>
-              <a:srgbClr val="E9D9B6"/>
-            </a:solidFill>
-            <a:prstDash val="solid"/>
-          </a:ln>
-        </p:spPr>
-      </p:sp>
-      <p:sp>
-        <p:nvSpPr>
-          <p:cNvPr id="14" name="s42_c"/>
-          <p:cNvSpPr/>
-          <p:nvPr/>
-        </p:nvSpPr>
-        <p:spPr>
-          <a:xfrm>
-            <a:off x="603504" y="2907792"/>
-            <a:ext cx="384048" cy="384048"/>
-          </a:xfrm>
-          <a:prstGeom prst="ellipse">
-            <a:avLst/>
-          </a:prstGeom>
-          <a:solidFill>
-            <a:srgbClr val="B08A4E"/>
-          </a:solidFill>
-          <a:ln/>
-        </p:spPr>
-      </p:sp>
-      <p:sp>
-        <p:nvSpPr>
-          <p:cNvPr id="15" name="s42_n"/>
-          <p:cNvSpPr txBox="1"/>
-          <p:nvPr/>
-        </p:nvSpPr>
-        <p:spPr>
-          <a:xfrm>
-            <a:off x="603504" y="2907792"/>
-            <a:ext cx="384048" cy="384048"/>
-          </a:xfrm>
-          <a:prstGeom prst="rect">
-            <a:avLst/>
-          </a:prstGeom>
-          <a:noFill/>
-          <a:ln/>
-        </p:spPr>
-        <p:txBody>
-          <a:bodyPr wrap="square" lIns="0" tIns="0" rIns="0" bIns="0" rtlCol="0" anchor="ctr"/>
-          <a:lstStyle/>
-          <a:p>
-            <a:pPr algn="ctr" indent="0" marL="0">
-              <a:buNone/>
-            </a:pPr>
-            <a:r>
-              <a:rPr lang="en-US" sz="1500" b="1" dirty="0">
-                <a:solidFill>
-                  <a:schemeClr val="bg1"/>
-                </a:solidFill>
-              </a:rPr>
-              <a:t>3</a:t>
-            </a:r>
-            <a:endParaRPr lang="en-US" sz="1500" dirty="0"/>
-          </a:p>
-        </p:txBody>
-      </p:sp>
-      <p:sp>
-        <p:nvSpPr>
-          <p:cNvPr id="16" name="s4_head2"/>
-          <p:cNvSpPr txBox="1"/>
-          <p:nvPr/>
-        </p:nvSpPr>
-        <p:spPr>
-          <a:xfrm>
-            <a:off x="1097280" y="2788920"/>
-            <a:ext cx="4937760" cy="310896"/>
-          </a:xfrm>
-          <a:prstGeom prst="rect">
-            <a:avLst/>
-          </a:prstGeom>
-          <a:noFill/>
-          <a:ln/>
-        </p:spPr>
-        <p:txBody>
-          <a:bodyPr wrap="square" lIns="1016" tIns="1016" rIns="1016" bIns="1016" rtlCol="0" anchor="t"/>
-          <a:lstStyle/>
-          <a:p>
-            <a:pPr indent="0" marL="0">
-              <a:buNone/>
-            </a:pPr>
-            <a:r>
-              <a:rPr lang="en-US" sz="1400" b="1" dirty="0">
-                <a:solidFill>
-                  <a:schemeClr val="tx2"/>
-                </a:solidFill>
-              </a:rPr>
-              <a:t>その場所から出て、自分を外から見る</a:t>
-            </a:r>
-            <a:endParaRPr lang="en-US" sz="1400" dirty="0"/>
-          </a:p>
-        </p:txBody>
-      </p:sp>
-      <p:sp>
-        <p:nvSpPr>
-          <p:cNvPr id="17" name="s4_body2"/>
-          <p:cNvSpPr txBox="1"/>
-          <p:nvPr/>
-        </p:nvSpPr>
-        <p:spPr>
-          <a:xfrm>
-            <a:off x="1097280" y="3090672"/>
-            <a:ext cx="4937760" cy="329184"/>
-          </a:xfrm>
-          <a:prstGeom prst="rect">
-            <a:avLst/>
-          </a:prstGeom>
-          <a:noFill/>
-          <a:ln/>
-        </p:spPr>
-        <p:txBody>
-          <a:bodyPr wrap="square" lIns="1016" tIns="1016" rIns="1016" bIns="1016" rtlCol="0" anchor="t"/>
-          <a:lstStyle/>
-          <a:p>
-            <a:pPr indent="0" marL="0">
-              <a:buNone/>
-            </a:pPr>
-            <a:r>
-              <a:rPr lang="en-US" sz="1200" dirty="0">
-                <a:solidFill>
-                  <a:schemeClr val="tx1"/>
-                </a:solidFill>
-              </a:rPr>
-              <a:t>次の2つの質問を、1つずつ聴いていく</a:t>
-            </a:r>
-            <a:endParaRPr lang="en-US" sz="1200" dirty="0"/>
-          </a:p>
-        </p:txBody>
-      </p:sp>
-      <p:sp>
-        <p:nvSpPr>
-          <p:cNvPr id="18" name="s4_card3"/>
-          <p:cNvSpPr/>
-          <p:nvPr/>
-        </p:nvSpPr>
-        <p:spPr>
-          <a:xfrm>
-            <a:off x="457200" y="3547872"/>
-            <a:ext cx="5669280" cy="676656"/>
-          </a:xfrm>
-          <a:prstGeom prst="roundRect">
-            <a:avLst>
-              <a:gd name="adj" fmla="val 16216"/>
-            </a:avLst>
-          </a:prstGeom>
-          <a:solidFill>
-            <a:srgbClr val="F8EBEE"/>
-          </a:solidFill>
-          <a:ln w="9525">
-            <a:solidFill>
-              <a:srgbClr val="E9D9B6"/>
-            </a:solidFill>
-            <a:prstDash val="solid"/>
-          </a:ln>
-        </p:spPr>
-      </p:sp>
-      <p:sp>
-        <p:nvSpPr>
-          <p:cNvPr id="19" name="s43_c"/>
-          <p:cNvSpPr/>
-          <p:nvPr/>
-        </p:nvSpPr>
-        <p:spPr>
-          <a:xfrm>
-            <a:off x="603504" y="3694176"/>
-            <a:ext cx="384048" cy="384048"/>
-          </a:xfrm>
-          <a:prstGeom prst="ellipse">
-            <a:avLst/>
-          </a:prstGeom>
-          <a:solidFill>
-            <a:srgbClr val="B08A4E"/>
-          </a:solidFill>
-          <a:ln/>
-        </p:spPr>
-      </p:sp>
-      <p:sp>
-        <p:nvSpPr>
-          <p:cNvPr id="20" name="s43_n"/>
-          <p:cNvSpPr txBox="1"/>
-          <p:nvPr/>
-        </p:nvSpPr>
-        <p:spPr>
-          <a:xfrm>
-            <a:off x="603504" y="3694176"/>
-            <a:ext cx="384048" cy="384048"/>
-          </a:xfrm>
-          <a:prstGeom prst="rect">
-            <a:avLst/>
-          </a:prstGeom>
-          <a:noFill/>
-          <a:ln/>
-        </p:spPr>
-        <p:txBody>
-          <a:bodyPr wrap="square" lIns="0" tIns="0" rIns="0" bIns="0" rtlCol="0" anchor="ctr"/>
-          <a:lstStyle/>
-          <a:p>
-            <a:pPr algn="ctr" indent="0" marL="0">
-              <a:buNone/>
-            </a:pPr>
-            <a:r>
-              <a:rPr lang="en-US" sz="1500" b="1" dirty="0">
-                <a:solidFill>
-                  <a:schemeClr val="bg1"/>
-                </a:solidFill>
-              </a:rPr>
-              <a:t>4</a:t>
-            </a:r>
-            <a:endParaRPr lang="en-US" sz="1500" dirty="0"/>
-          </a:p>
-        </p:txBody>
-      </p:sp>
-      <p:sp>
-        <p:nvSpPr>
-          <p:cNvPr id="21" name="s4_head3"/>
-          <p:cNvSpPr txBox="1"/>
-          <p:nvPr/>
-        </p:nvSpPr>
-        <p:spPr>
-          <a:xfrm>
-            <a:off x="1097280" y="3575304"/>
-            <a:ext cx="4937760" cy="310896"/>
-          </a:xfrm>
-          <a:prstGeom prst="rect">
-            <a:avLst/>
-          </a:prstGeom>
-          <a:noFill/>
-          <a:ln/>
-        </p:spPr>
-        <p:txBody>
-          <a:bodyPr wrap="square" lIns="1016" tIns="1016" rIns="1016" bIns="1016" rtlCol="0" anchor="t"/>
-          <a:lstStyle/>
-          <a:p>
-            <a:pPr indent="0" marL="0">
-              <a:buNone/>
-            </a:pPr>
-            <a:r>
-              <a:rPr lang="en-US" sz="1400" b="1" dirty="0">
-                <a:solidFill>
-                  <a:schemeClr val="tx2"/>
-                </a:solidFill>
-              </a:rPr>
-              <a:t>もう一度その場所に戻り、全部吐き出す</a:t>
-            </a:r>
-            <a:endParaRPr lang="en-US" sz="1400" dirty="0"/>
-          </a:p>
-        </p:txBody>
-      </p:sp>
-      <p:sp>
-        <p:nvSpPr>
-          <p:cNvPr id="22" name="s4_body3"/>
-          <p:cNvSpPr txBox="1"/>
-          <p:nvPr/>
-        </p:nvSpPr>
-        <p:spPr>
-          <a:xfrm>
-            <a:off x="1097280" y="3877056"/>
-            <a:ext cx="4937760" cy="329184"/>
-          </a:xfrm>
-          <a:prstGeom prst="rect">
-            <a:avLst/>
-          </a:prstGeom>
-          <a:noFill/>
-          <a:ln/>
-        </p:spPr>
-        <p:txBody>
-          <a:bodyPr wrap="square" lIns="1016" tIns="1016" rIns="1016" bIns="1016" rtlCol="0" anchor="t"/>
-          <a:lstStyle/>
-          <a:p>
-            <a:pPr indent="0" marL="0">
-              <a:buNone/>
-            </a:pPr>
-            <a:r>
-              <a:rPr lang="en-US" sz="1200" dirty="0">
-                <a:solidFill>
-                  <a:schemeClr val="tx1"/>
-                </a:solidFill>
-              </a:rPr>
-              <a:t>怒鳴る・泣く・大声・体を動かすなどOK</a:t>
-            </a:r>
-            <a:endParaRPr lang="en-US" sz="1200" dirty="0"/>
-          </a:p>
-        </p:txBody>
-      </p:sp>
-      <p:sp>
-        <p:nvSpPr>
-          <p:cNvPr id="23" name="s4_safe"/>
-          <p:cNvSpPr/>
-          <p:nvPr/>
-        </p:nvSpPr>
-        <p:spPr>
-          <a:xfrm>
-            <a:off x="6355080" y="1188720"/>
-            <a:ext cx="2331720" cy="3035808"/>
-          </a:xfrm>
-          <a:prstGeom prst="roundRect">
-            <a:avLst>
-              <a:gd name="adj" fmla="val 4706"/>
-            </a:avLst>
-          </a:prstGeom>
-          <a:solidFill>
-            <a:srgbClr val="E6F3EF"/>
-          </a:solidFill>
-          <a:ln w="9525">
-            <a:solidFill>
-              <a:srgbClr val="E9D9B6"/>
-            </a:solidFill>
-            <a:prstDash val="solid"/>
-          </a:ln>
-        </p:spPr>
-      </p:sp>
-      <p:sp>
-        <p:nvSpPr>
-          <p:cNvPr id="24" name="s4_safe_t"/>
-          <p:cNvSpPr txBox="1"/>
-          <p:nvPr/>
-        </p:nvSpPr>
-        <p:spPr>
-          <a:xfrm>
-            <a:off x="6492240" y="1325880"/>
-            <a:ext cx="2057400" cy="2788920"/>
-          </a:xfrm>
-          <a:prstGeom prst="rect">
-            <a:avLst/>
-          </a:prstGeom>
-          <a:noFill/>
-          <a:ln/>
-        </p:spPr>
-        <p:txBody>
-          <a:bodyPr wrap="square" lIns="1016" tIns="1016" rIns="1016" bIns="1016" rtlCol="0" anchor="t"/>
-          <a:lstStyle/>
-          <a:p>
-            <a:pPr indent="0" marL="0">
-              <a:spcAft>
-                <a:spcPts val="400"/>
-              </a:spcAft>
-              <a:buNone/>
-            </a:pPr>
-            <a:r>
-              <a:rPr lang="en-US" sz="1400" b="1" dirty="0">
-                <a:solidFill>
-                  <a:schemeClr val="accent2"/>
-                </a:solidFill>
-              </a:rPr>
-              <a:t>苦しくなったら</a:t>
-            </a:r>
-            <a:endParaRPr lang="en-US" sz="1400" dirty="0"/>
-          </a:p>
-          <a:p>
-            <a:pPr indent="0" marL="0">
-              <a:spcAft>
-                <a:spcPts val="400"/>
-              </a:spcAft>
-              <a:buNone/>
-            </a:pPr>
-            <a:r>
-              <a:rPr lang="en-US" sz="1400" dirty="0">
-                <a:solidFill>
-                  <a:schemeClr val="tx1"/>
-                </a:solidFill>
-              </a:rPr>
-              <a:t>いったん止めて、息を完全に吐き切る</a:t>
-            </a:r>
-            <a:endParaRPr lang="en-US" sz="1400" dirty="0"/>
-          </a:p>
-          <a:p>
-            <a:pPr indent="0" marL="0">
-              <a:spcAft>
-                <a:spcPts val="400"/>
-              </a:spcAft>
-              <a:buNone/>
-            </a:pPr>
-            <a:r>
-              <a:rPr lang="en-US" sz="1400" dirty="0">
-                <a:solidFill>
-                  <a:schemeClr val="tx1"/>
-                </a:solidFill>
-              </a:rPr>
-              <a:t> </a:t>
-            </a:r>
-            <a:endParaRPr lang="en-US" sz="1400" dirty="0"/>
-          </a:p>
-          <a:p>
-            <a:pPr indent="0" marL="0">
-              <a:spcAft>
-                <a:spcPts val="400"/>
-              </a:spcAft>
-              <a:buNone/>
-            </a:pPr>
-            <a:r>
-              <a:rPr lang="en-US" sz="1400" dirty="0">
-                <a:solidFill>
-                  <a:schemeClr val="tx1"/>
-                </a:solidFill>
-              </a:rPr>
-              <a:t>相手が聞いてくれて</a:t>
-            </a:r>
-            <a:endParaRPr lang="en-US" sz="1400" dirty="0"/>
-          </a:p>
-          <a:p>
-            <a:pPr indent="0" marL="0">
-              <a:spcAft>
-                <a:spcPts val="400"/>
-              </a:spcAft>
-              <a:buNone/>
-            </a:pPr>
-            <a:r>
-              <a:rPr lang="en-US" sz="1400" dirty="0">
-                <a:solidFill>
-                  <a:schemeClr val="tx1"/>
-                </a:solidFill>
-              </a:rPr>
-              <a:t>謝っている</a:t>
-            </a:r>
-            <a:endParaRPr lang="en-US" sz="1400" dirty="0"/>
-          </a:p>
-          <a:p>
-            <a:pPr indent="0" marL="0">
-              <a:spcAft>
-                <a:spcPts val="400"/>
-              </a:spcAft>
-              <a:buNone/>
-            </a:pPr>
-            <a:r>
-              <a:rPr lang="en-US" sz="1400" dirty="0">
-                <a:solidFill>
-                  <a:schemeClr val="tx1"/>
-                </a:solidFill>
-              </a:rPr>
-              <a:t>イメージで</a:t>
-            </a:r>
-            <a:endParaRPr lang="en-US" sz="1400" dirty="0"/>
           </a:p>
         </p:txBody>
       </p:sp>
@@ -14754,21 +14279,67 @@
       </p:grpSpPr>
       <p:sp>
         <p:nvSpPr>
-          <p:cNvPr id="2" name="frame"/>
+          <p:cNvPr id="2" name="Text 0"/>
+          <p:cNvSpPr/>
+          <p:nvPr>
+            <p:ph idx="100" type="title" hasCustomPrompt="1"/>
+          </p:nvPr>
+        </p:nvSpPr>
+        <p:spPr>
+          <a:xfrm>
+            <a:off x="457200" y="457200"/>
+            <a:ext cx="8229600" cy="594360"/>
+          </a:xfrm>
+          <a:prstGeom prst="rect">
+            <a:avLst/>
+          </a:prstGeom>
+          <a:noFill/>
+          <a:ln/>
+        </p:spPr>
+        <p:txBody>
+          <a:bodyPr wrap="square" lIns="0" tIns="0" rIns="0" bIns="0" rtlCol="0" anchor="ctr"/>
+          <a:lstStyle/>
+          <a:p>
+            <a:pPr algn="l" indent="0" marL="0">
+              <a:buNone/>
+            </a:pPr>
+            <a:r>
+              <a:rPr lang="en-US" sz="2400" b="1" dirty="0">
+                <a:solidFill>
+                  <a:schemeClr val="accent2"/>
+                </a:solidFill>
+                <a:latin typeface="Yu Mincho" pitchFamily="34" charset="0"/>
+                <a:ea typeface="Yu Mincho" pitchFamily="34" charset="-122"/>
+                <a:cs typeface="Yu Mincho" pitchFamily="34" charset="-120"/>
+              </a:rPr>
+              <a:t>STEP 4　思い込みが生まれた場面へ（解放）</a:t>
+            </a:r>
+            <a:endParaRPr lang="en-US" sz="2400" dirty="0"/>
+          </a:p>
+        </p:txBody>
+      </p:sp>
+      <p:sp>
+        <p:nvSpPr>
+          <p:cNvPr id="3" name="s4_card0"/>
           <p:cNvSpPr/>
           <p:nvPr/>
         </p:nvSpPr>
         <p:spPr>
           <a:xfrm>
-            <a:off x="228600" y="137160"/>
-            <a:ext cx="8686800" cy="4526280"/>
-          </a:xfrm>
-          <a:prstGeom prst="rect">
-            <a:avLst/>
-          </a:prstGeom>
-          <a:ln w="12700">
+            <a:off x="457200" y="1188720"/>
+            <a:ext cx="5669280" cy="676656"/>
+          </a:xfrm>
+          <a:prstGeom prst="roundRect">
+            <a:avLst>
+              <a:gd name="adj" fmla="val 16216"/>
+            </a:avLst>
+          </a:prstGeom>
+          <a:solidFill>
+            <a:srgbClr val="FDFAF4"/>
+          </a:solidFill>
+          <a:ln w="9525">
             <a:solidFill>
-              <a:srgbClr val="B08A4E"/>
+              <a:srgbClr val="E9D9B6"/>
             </a:solidFill>
             <a:prstDash val="solid"/>
           </a:ln>
@@ -14776,14 +14347,34 @@
       </p:sp>
       <p:sp>
         <p:nvSpPr>
-          <p:cNvPr id="3" name="qlabel"/>
+          <p:cNvPr id="4" name="s40_c"/>
+          <p:cNvSpPr/>
+          <p:nvPr/>
+        </p:nvSpPr>
+        <p:spPr>
+          <a:xfrm>
+            <a:off x="603504" y="1335024"/>
+            <a:ext cx="384048" cy="384048"/>
+          </a:xfrm>
+          <a:prstGeom prst="ellipse">
+            <a:avLst/>
+          </a:prstGeom>
+          <a:solidFill>
+            <a:srgbClr val="B08A4E"/>
+          </a:solidFill>
+          <a:ln/>
+        </p:spPr>
+      </p:sp>
+      <p:sp>
+        <p:nvSpPr>
+          <p:cNvPr id="5" name="s40_n"/>
           <p:cNvSpPr txBox="1"/>
           <p:nvPr/>
         </p:nvSpPr>
         <p:spPr>
           <a:xfrm>
-            <a:off x="457200" y="320040"/>
-            <a:ext cx="8229600" cy="365760"/>
+            <a:off x="603504" y="1335024"/>
+            <a:ext cx="384048" cy="384048"/>
           </a:xfrm>
           <a:prstGeom prst="rect">
             <a:avLst/>
@@ -14792,36 +14383,34 @@
           <a:ln/>
         </p:spPr>
         <p:txBody>
-          <a:bodyPr wrap="square" lIns="0" tIns="0" rIns="0" bIns="0" rtlCol="0" anchor="t"/>
+          <a:bodyPr wrap="square" lIns="0" tIns="0" rIns="0" bIns="0" rtlCol="0" anchor="ctr"/>
           <a:lstStyle/>
           <a:p>
             <a:pPr algn="ctr" indent="0" marL="0">
               <a:buNone/>
             </a:pPr>
             <a:r>
-              <a:rPr lang="en-US" sz="1300" b="1" dirty="0">
-                <a:solidFill>
-                  <a:schemeClr val="accent2"/>
-                </a:solidFill>
-              </a:rPr>
-              <a:t>STEP 4　外から見ながら</a:t>
-            </a:r>
-            <a:endParaRPr lang="en-US" sz="1300" dirty="0"/>
-          </a:p>
-        </p:txBody>
-      </p:sp>
-      <p:sp>
-        <p:nvSpPr>
-          <p:cNvPr id="4" name="Text 0"/>
-          <p:cNvSpPr/>
-          <p:nvPr>
-            <p:ph idx="100" type="title" hasCustomPrompt="1"/>
-          </p:nvPr>
-        </p:nvSpPr>
-        <p:spPr>
-          <a:xfrm>
-            <a:off x="914400" y="1554480"/>
-            <a:ext cx="7315200" cy="1554480"/>
+              <a:rPr lang="en-US" sz="1500" b="1" dirty="0">
+                <a:solidFill>
+                  <a:schemeClr val="bg1"/>
+                </a:solidFill>
+              </a:rPr>
+              <a:t>1</a:t>
+            </a:r>
+            <a:endParaRPr lang="en-US" sz="1500" dirty="0"/>
+          </a:p>
+        </p:txBody>
+      </p:sp>
+      <p:sp>
+        <p:nvSpPr>
+          <p:cNvPr id="6" name="s4_head0"/>
+          <p:cNvSpPr txBox="1"/>
+          <p:nvPr/>
+        </p:nvSpPr>
+        <p:spPr>
+          <a:xfrm>
+            <a:off x="1097280" y="1216152"/>
+            <a:ext cx="4937760" cy="310896"/>
           </a:xfrm>
           <a:prstGeom prst="rect">
             <a:avLst/>
@@ -14830,56 +14419,34 @@
           <a:ln/>
         </p:spPr>
         <p:txBody>
-          <a:bodyPr wrap="square" rtlCol="0" anchor="ctr"/>
-          <a:lstStyle/>
-          <a:p>
-            <a:pPr algn="ctr" indent="0" marL="0">
-              <a:buNone/>
-            </a:pPr>
-            <a:r>
-              <a:rPr lang="en-US" sz="3200" b="1" dirty="0">
+          <a:bodyPr wrap="square" lIns="1016" tIns="1016" rIns="1016" bIns="1016" rtlCol="0" anchor="t"/>
+          <a:lstStyle/>
+          <a:p>
+            <a:pPr indent="0" marL="0">
+              <a:buNone/>
+            </a:pPr>
+            <a:r>
+              <a:rPr lang="en-US" sz="1400" b="1" dirty="0">
                 <a:solidFill>
                   <a:schemeClr val="tx2"/>
                 </a:solidFill>
-                <a:latin typeface="Yu Mincho" pitchFamily="34" charset="0"/>
-                <a:ea typeface="Yu Mincho" pitchFamily="34" charset="-122"/>
-                <a:cs typeface="Yu Mincho" pitchFamily="34" charset="-120"/>
-              </a:rPr>
-              <a:t>本当は、</a:t>
-            </a:r>
-            <a:endParaRPr lang="en-US" sz="3200" dirty="0"/>
-          </a:p>
-          <a:p>
-            <a:pPr algn="ctr" indent="0" marL="0">
-              <a:buNone/>
-            </a:pPr>
-            <a:r>
-              <a:rPr lang="en-US" sz="3200" b="1" dirty="0">
-                <a:solidFill>
-                  <a:schemeClr val="tx2"/>
-                </a:solidFill>
-                <a:latin typeface="Yu Mincho" pitchFamily="34" charset="0"/>
-                <a:ea typeface="Yu Mincho" pitchFamily="34" charset="-122"/>
-                <a:cs typeface="Yu Mincho" pitchFamily="34" charset="-120"/>
-              </a:rPr>
-              <a:t>どうして欲しかったの？</a:t>
-            </a:r>
-            <a:endParaRPr lang="en-US" sz="3200" dirty="0"/>
-          </a:p>
-        </p:txBody>
-      </p:sp>
-      <p:sp>
-        <p:nvSpPr>
-          <p:cNvPr id="5" name="Text 0"/>
-          <p:cNvSpPr/>
-          <p:nvPr>
-            <p:ph idx="101" type="body" hasCustomPrompt="1"/>
-          </p:nvPr>
-        </p:nvSpPr>
-        <p:spPr>
-          <a:xfrm>
-            <a:off x="914400" y="3200400"/>
-            <a:ext cx="7315200" cy="731520"/>
+              </a:rPr>
+              <a:t>今の自分の場所に立つ</a:t>
+            </a:r>
+            <a:endParaRPr lang="en-US" sz="1400" dirty="0"/>
+          </a:p>
+        </p:txBody>
+      </p:sp>
+      <p:sp>
+        <p:nvSpPr>
+          <p:cNvPr id="7" name="s4_body0"/>
+          <p:cNvSpPr txBox="1"/>
+          <p:nvPr/>
+        </p:nvSpPr>
+        <p:spPr>
+          <a:xfrm>
+            <a:off x="1097280" y="1517904"/>
+            <a:ext cx="4937760" cy="329184"/>
           </a:xfrm>
           <a:prstGeom prst="rect">
             <a:avLst/>
@@ -14888,21 +14455,637 @@
           <a:ln/>
         </p:spPr>
         <p:txBody>
-          <a:bodyPr wrap="square" rtlCol="0" anchor="t"/>
+          <a:bodyPr wrap="square" lIns="1016" tIns="1016" rIns="1016" bIns="1016" rtlCol="0" anchor="t"/>
+          <a:lstStyle/>
+          <a:p>
+            <a:pPr indent="0" marL="0">
+              <a:buNone/>
+            </a:pPr>
+            <a:r>
+              <a:rPr lang="en-US" sz="1200" dirty="0">
+                <a:solidFill>
+                  <a:schemeClr val="tx1"/>
+                </a:solidFill>
+              </a:rPr>
+              <a:t>今の気持ちを、見えるもの・聞こえるもの・体の感じで話す</a:t>
+            </a:r>
+            <a:endParaRPr lang="en-US" sz="1200" dirty="0"/>
+          </a:p>
+        </p:txBody>
+      </p:sp>
+      <p:sp>
+        <p:nvSpPr>
+          <p:cNvPr id="8" name="s4_card1"/>
+          <p:cNvSpPr/>
+          <p:nvPr/>
+        </p:nvSpPr>
+        <p:spPr>
+          <a:xfrm>
+            <a:off x="457200" y="1975104"/>
+            <a:ext cx="5669280" cy="676656"/>
+          </a:xfrm>
+          <a:prstGeom prst="roundRect">
+            <a:avLst>
+              <a:gd name="adj" fmla="val 16216"/>
+            </a:avLst>
+          </a:prstGeom>
+          <a:solidFill>
+            <a:srgbClr val="FDFAF4"/>
+          </a:solidFill>
+          <a:ln w="9525">
+            <a:solidFill>
+              <a:srgbClr val="E9D9B6"/>
+            </a:solidFill>
+            <a:prstDash val="solid"/>
+          </a:ln>
+        </p:spPr>
+      </p:sp>
+      <p:sp>
+        <p:nvSpPr>
+          <p:cNvPr id="9" name="s41_c"/>
+          <p:cNvSpPr/>
+          <p:nvPr/>
+        </p:nvSpPr>
+        <p:spPr>
+          <a:xfrm>
+            <a:off x="603504" y="2121408"/>
+            <a:ext cx="384048" cy="384048"/>
+          </a:xfrm>
+          <a:prstGeom prst="ellipse">
+            <a:avLst/>
+          </a:prstGeom>
+          <a:solidFill>
+            <a:srgbClr val="B08A4E"/>
+          </a:solidFill>
+          <a:ln/>
+        </p:spPr>
+      </p:sp>
+      <p:sp>
+        <p:nvSpPr>
+          <p:cNvPr id="10" name="s41_n"/>
+          <p:cNvSpPr txBox="1"/>
+          <p:nvPr/>
+        </p:nvSpPr>
+        <p:spPr>
+          <a:xfrm>
+            <a:off x="603504" y="2121408"/>
+            <a:ext cx="384048" cy="384048"/>
+          </a:xfrm>
+          <a:prstGeom prst="rect">
+            <a:avLst/>
+          </a:prstGeom>
+          <a:noFill/>
+          <a:ln/>
+        </p:spPr>
+        <p:txBody>
+          <a:bodyPr wrap="square" lIns="0" tIns="0" rIns="0" bIns="0" rtlCol="0" anchor="ctr"/>
           <a:lstStyle/>
           <a:p>
             <a:pPr algn="ctr" indent="0" marL="0">
               <a:buNone/>
             </a:pPr>
             <a:r>
-              <a:rPr lang="en-US" sz="1500" dirty="0">
+              <a:rPr lang="en-US" sz="1500" b="1" dirty="0">
+                <a:solidFill>
+                  <a:schemeClr val="bg1"/>
+                </a:solidFill>
+              </a:rPr>
+              <a:t>2</a:t>
+            </a:r>
+            <a:endParaRPr lang="en-US" sz="1500" dirty="0"/>
+          </a:p>
+        </p:txBody>
+      </p:sp>
+      <p:sp>
+        <p:nvSpPr>
+          <p:cNvPr id="11" name="s4_head1"/>
+          <p:cNvSpPr txBox="1"/>
+          <p:nvPr/>
+        </p:nvSpPr>
+        <p:spPr>
+          <a:xfrm>
+            <a:off x="1097280" y="2002536"/>
+            <a:ext cx="4937760" cy="310896"/>
+          </a:xfrm>
+          <a:prstGeom prst="rect">
+            <a:avLst/>
+          </a:prstGeom>
+          <a:noFill/>
+          <a:ln/>
+        </p:spPr>
+        <p:txBody>
+          <a:bodyPr wrap="square" lIns="1016" tIns="1016" rIns="1016" bIns="1016" rtlCol="0" anchor="t"/>
+          <a:lstStyle/>
+          <a:p>
+            <a:pPr indent="0" marL="0">
+              <a:buNone/>
+            </a:pPr>
+            <a:r>
+              <a:rPr lang="en-US" sz="1400" b="1" dirty="0">
+                <a:solidFill>
+                  <a:schemeClr val="tx2"/>
+                </a:solidFill>
+              </a:rPr>
+              <a:t>思い込みが生まれた過去の場面へ移動</a:t>
+            </a:r>
+            <a:endParaRPr lang="en-US" sz="1400" dirty="0"/>
+          </a:p>
+        </p:txBody>
+      </p:sp>
+      <p:sp>
+        <p:nvSpPr>
+          <p:cNvPr id="12" name="s4_body1"/>
+          <p:cNvSpPr txBox="1"/>
+          <p:nvPr/>
+        </p:nvSpPr>
+        <p:spPr>
+          <a:xfrm>
+            <a:off x="1097280" y="2304288"/>
+            <a:ext cx="4937760" cy="329184"/>
+          </a:xfrm>
+          <a:prstGeom prst="rect">
+            <a:avLst/>
+          </a:prstGeom>
+          <a:noFill/>
+          <a:ln/>
+        </p:spPr>
+        <p:txBody>
+          <a:bodyPr wrap="square" lIns="1016" tIns="1016" rIns="1016" bIns="1016" rtlCol="0" anchor="t"/>
+          <a:lstStyle/>
+          <a:p>
+            <a:pPr indent="0" marL="0">
+              <a:buNone/>
+            </a:pPr>
+            <a:r>
+              <a:rPr lang="en-US" sz="1200" dirty="0">
+                <a:solidFill>
+                  <a:schemeClr val="tx1"/>
+                </a:solidFill>
+              </a:rPr>
+              <a:t>その場面で、何が見えて、何が聞こえて、体はどんな感じか</a:t>
+            </a:r>
+            <a:endParaRPr lang="en-US" sz="1200" dirty="0"/>
+          </a:p>
+        </p:txBody>
+      </p:sp>
+      <p:sp>
+        <p:nvSpPr>
+          <p:cNvPr id="13" name="s4_card2"/>
+          <p:cNvSpPr/>
+          <p:nvPr/>
+        </p:nvSpPr>
+        <p:spPr>
+          <a:xfrm>
+            <a:off x="457200" y="2761488"/>
+            <a:ext cx="5669280" cy="676656"/>
+          </a:xfrm>
+          <a:prstGeom prst="roundRect">
+            <a:avLst>
+              <a:gd name="adj" fmla="val 16216"/>
+            </a:avLst>
+          </a:prstGeom>
+          <a:solidFill>
+            <a:srgbClr val="FDFAF4"/>
+          </a:solidFill>
+          <a:ln w="9525">
+            <a:solidFill>
+              <a:srgbClr val="E9D9B6"/>
+            </a:solidFill>
+            <a:prstDash val="solid"/>
+          </a:ln>
+        </p:spPr>
+      </p:sp>
+      <p:sp>
+        <p:nvSpPr>
+          <p:cNvPr id="14" name="s42_c"/>
+          <p:cNvSpPr/>
+          <p:nvPr/>
+        </p:nvSpPr>
+        <p:spPr>
+          <a:xfrm>
+            <a:off x="603504" y="2907792"/>
+            <a:ext cx="384048" cy="384048"/>
+          </a:xfrm>
+          <a:prstGeom prst="ellipse">
+            <a:avLst/>
+          </a:prstGeom>
+          <a:solidFill>
+            <a:srgbClr val="B08A4E"/>
+          </a:solidFill>
+          <a:ln/>
+        </p:spPr>
+      </p:sp>
+      <p:sp>
+        <p:nvSpPr>
+          <p:cNvPr id="15" name="s42_n"/>
+          <p:cNvSpPr txBox="1"/>
+          <p:nvPr/>
+        </p:nvSpPr>
+        <p:spPr>
+          <a:xfrm>
+            <a:off x="603504" y="2907792"/>
+            <a:ext cx="384048" cy="384048"/>
+          </a:xfrm>
+          <a:prstGeom prst="rect">
+            <a:avLst/>
+          </a:prstGeom>
+          <a:noFill/>
+          <a:ln/>
+        </p:spPr>
+        <p:txBody>
+          <a:bodyPr wrap="square" lIns="0" tIns="0" rIns="0" bIns="0" rtlCol="0" anchor="ctr"/>
+          <a:lstStyle/>
+          <a:p>
+            <a:pPr algn="ctr" indent="0" marL="0">
+              <a:buNone/>
+            </a:pPr>
+            <a:r>
+              <a:rPr lang="en-US" sz="1500" b="1" dirty="0">
+                <a:solidFill>
+                  <a:schemeClr val="bg1"/>
+                </a:solidFill>
+              </a:rPr>
+              <a:t>3</a:t>
+            </a:r>
+            <a:endParaRPr lang="en-US" sz="1500" dirty="0"/>
+          </a:p>
+        </p:txBody>
+      </p:sp>
+      <p:sp>
+        <p:nvSpPr>
+          <p:cNvPr id="16" name="s4_head2"/>
+          <p:cNvSpPr txBox="1"/>
+          <p:nvPr/>
+        </p:nvSpPr>
+        <p:spPr>
+          <a:xfrm>
+            <a:off x="1097280" y="2788920"/>
+            <a:ext cx="4937760" cy="310896"/>
+          </a:xfrm>
+          <a:prstGeom prst="rect">
+            <a:avLst/>
+          </a:prstGeom>
+          <a:noFill/>
+          <a:ln/>
+        </p:spPr>
+        <p:txBody>
+          <a:bodyPr wrap="square" lIns="1016" tIns="1016" rIns="1016" bIns="1016" rtlCol="0" anchor="t"/>
+          <a:lstStyle/>
+          <a:p>
+            <a:pPr indent="0" marL="0">
+              <a:buNone/>
+            </a:pPr>
+            <a:r>
+              <a:rPr lang="en-US" sz="1400" b="1" dirty="0">
+                <a:solidFill>
+                  <a:schemeClr val="tx2"/>
+                </a:solidFill>
+              </a:rPr>
+              <a:t>その場所から出て、自分を外から見る</a:t>
+            </a:r>
+            <a:endParaRPr lang="en-US" sz="1400" dirty="0"/>
+          </a:p>
+        </p:txBody>
+      </p:sp>
+      <p:sp>
+        <p:nvSpPr>
+          <p:cNvPr id="17" name="s4_body2"/>
+          <p:cNvSpPr txBox="1"/>
+          <p:nvPr/>
+        </p:nvSpPr>
+        <p:spPr>
+          <a:xfrm>
+            <a:off x="1097280" y="3090672"/>
+            <a:ext cx="4937760" cy="329184"/>
+          </a:xfrm>
+          <a:prstGeom prst="rect">
+            <a:avLst/>
+          </a:prstGeom>
+          <a:noFill/>
+          <a:ln/>
+        </p:spPr>
+        <p:txBody>
+          <a:bodyPr wrap="square" lIns="1016" tIns="1016" rIns="1016" bIns="1016" rtlCol="0" anchor="t"/>
+          <a:lstStyle/>
+          <a:p>
+            <a:pPr indent="0" marL="0">
+              <a:buNone/>
+            </a:pPr>
+            <a:r>
+              <a:rPr lang="en-US" sz="1200" dirty="0">
+                <a:solidFill>
+                  <a:schemeClr val="tx1"/>
+                </a:solidFill>
+              </a:rPr>
+              <a:t>次の2つの質問を、1つずつ聴いていく</a:t>
+            </a:r>
+            <a:endParaRPr lang="en-US" sz="1200" dirty="0"/>
+          </a:p>
+        </p:txBody>
+      </p:sp>
+      <p:sp>
+        <p:nvSpPr>
+          <p:cNvPr id="18" name="s4_card3"/>
+          <p:cNvSpPr/>
+          <p:nvPr/>
+        </p:nvSpPr>
+        <p:spPr>
+          <a:xfrm>
+            <a:off x="457200" y="3547872"/>
+            <a:ext cx="5669280" cy="676656"/>
+          </a:xfrm>
+          <a:prstGeom prst="roundRect">
+            <a:avLst>
+              <a:gd name="adj" fmla="val 16216"/>
+            </a:avLst>
+          </a:prstGeom>
+          <a:solidFill>
+            <a:srgbClr val="F8EBEE"/>
+          </a:solidFill>
+          <a:ln w="9525">
+            <a:solidFill>
+              <a:srgbClr val="E9D9B6"/>
+            </a:solidFill>
+            <a:prstDash val="solid"/>
+          </a:ln>
+        </p:spPr>
+      </p:sp>
+      <p:sp>
+        <p:nvSpPr>
+          <p:cNvPr id="19" name="s43_c"/>
+          <p:cNvSpPr/>
+          <p:nvPr/>
+        </p:nvSpPr>
+        <p:spPr>
+          <a:xfrm>
+            <a:off x="603504" y="3694176"/>
+            <a:ext cx="384048" cy="384048"/>
+          </a:xfrm>
+          <a:prstGeom prst="ellipse">
+            <a:avLst/>
+          </a:prstGeom>
+          <a:solidFill>
+            <a:srgbClr val="B08A4E"/>
+          </a:solidFill>
+          <a:ln/>
+        </p:spPr>
+      </p:sp>
+      <p:sp>
+        <p:nvSpPr>
+          <p:cNvPr id="20" name="s43_n"/>
+          <p:cNvSpPr txBox="1"/>
+          <p:nvPr/>
+        </p:nvSpPr>
+        <p:spPr>
+          <a:xfrm>
+            <a:off x="603504" y="3694176"/>
+            <a:ext cx="384048" cy="384048"/>
+          </a:xfrm>
+          <a:prstGeom prst="rect">
+            <a:avLst/>
+          </a:prstGeom>
+          <a:noFill/>
+          <a:ln/>
+        </p:spPr>
+        <p:txBody>
+          <a:bodyPr wrap="square" lIns="0" tIns="0" rIns="0" bIns="0" rtlCol="0" anchor="ctr"/>
+          <a:lstStyle/>
+          <a:p>
+            <a:pPr algn="ctr" indent="0" marL="0">
+              <a:buNone/>
+            </a:pPr>
+            <a:r>
+              <a:rPr lang="en-US" sz="1500" b="1" dirty="0">
+                <a:solidFill>
+                  <a:schemeClr val="bg1"/>
+                </a:solidFill>
+              </a:rPr>
+              <a:t>4</a:t>
+            </a:r>
+            <a:endParaRPr lang="en-US" sz="1500" dirty="0"/>
+          </a:p>
+        </p:txBody>
+      </p:sp>
+      <p:sp>
+        <p:nvSpPr>
+          <p:cNvPr id="21" name="s4_head3"/>
+          <p:cNvSpPr txBox="1"/>
+          <p:nvPr/>
+        </p:nvSpPr>
+        <p:spPr>
+          <a:xfrm>
+            <a:off x="1097280" y="3575304"/>
+            <a:ext cx="4937760" cy="310896"/>
+          </a:xfrm>
+          <a:prstGeom prst="rect">
+            <a:avLst/>
+          </a:prstGeom>
+          <a:noFill/>
+          <a:ln/>
+        </p:spPr>
+        <p:txBody>
+          <a:bodyPr wrap="square" lIns="1016" tIns="1016" rIns="1016" bIns="1016" rtlCol="0" anchor="t"/>
+          <a:lstStyle/>
+          <a:p>
+            <a:pPr indent="0" marL="0">
+              <a:buNone/>
+            </a:pPr>
+            <a:r>
+              <a:rPr lang="en-US" sz="1400" b="1" dirty="0">
+                <a:solidFill>
+                  <a:schemeClr val="tx2"/>
+                </a:solidFill>
+              </a:rPr>
+              <a:t>もう一度その場所に戻り、全部吐き出す</a:t>
+            </a:r>
+            <a:endParaRPr lang="en-US" sz="1400" dirty="0"/>
+          </a:p>
+        </p:txBody>
+      </p:sp>
+      <p:sp>
+        <p:nvSpPr>
+          <p:cNvPr id="22" name="s4_body3"/>
+          <p:cNvSpPr txBox="1"/>
+          <p:nvPr/>
+        </p:nvSpPr>
+        <p:spPr>
+          <a:xfrm>
+            <a:off x="1097280" y="3877056"/>
+            <a:ext cx="4937760" cy="329184"/>
+          </a:xfrm>
+          <a:prstGeom prst="rect">
+            <a:avLst/>
+          </a:prstGeom>
+          <a:noFill/>
+          <a:ln/>
+        </p:spPr>
+        <p:txBody>
+          <a:bodyPr wrap="square" lIns="1016" tIns="1016" rIns="1016" bIns="1016" rtlCol="0" anchor="t"/>
+          <a:lstStyle/>
+          <a:p>
+            <a:pPr indent="0" marL="0">
+              <a:buNone/>
+            </a:pPr>
+            <a:r>
+              <a:rPr lang="en-US" sz="1200" dirty="0">
+                <a:solidFill>
+                  <a:schemeClr val="tx1"/>
+                </a:solidFill>
+              </a:rPr>
+              <a:t>怒鳴る・泣く・大声・体を動かすなどOK</a:t>
+            </a:r>
+            <a:endParaRPr lang="en-US" sz="1200" dirty="0"/>
+          </a:p>
+        </p:txBody>
+      </p:sp>
+      <p:sp>
+        <p:nvSpPr>
+          <p:cNvPr id="23" name="s4_safe"/>
+          <p:cNvSpPr/>
+          <p:nvPr/>
+        </p:nvSpPr>
+        <p:spPr>
+          <a:xfrm>
+            <a:off x="6355080" y="1188720"/>
+            <a:ext cx="2331720" cy="3035808"/>
+          </a:xfrm>
+          <a:prstGeom prst="roundRect">
+            <a:avLst>
+              <a:gd name="adj" fmla="val 4706"/>
+            </a:avLst>
+          </a:prstGeom>
+          <a:solidFill>
+            <a:srgbClr val="E6F3EF"/>
+          </a:solidFill>
+          <a:ln w="9525">
+            <a:solidFill>
+              <a:srgbClr val="E9D9B6"/>
+            </a:solidFill>
+            <a:prstDash val="solid"/>
+          </a:ln>
+        </p:spPr>
+      </p:sp>
+      <p:sp>
+        <p:nvSpPr>
+          <p:cNvPr id="24" name="s4_safe_t"/>
+          <p:cNvSpPr txBox="1"/>
+          <p:nvPr/>
+        </p:nvSpPr>
+        <p:spPr>
+          <a:xfrm>
+            <a:off x="6492240" y="1325880"/>
+            <a:ext cx="2057400" cy="2788920"/>
+          </a:xfrm>
+          <a:prstGeom prst="rect">
+            <a:avLst/>
+          </a:prstGeom>
+          <a:noFill/>
+          <a:ln/>
+        </p:spPr>
+        <p:txBody>
+          <a:bodyPr wrap="square" lIns="1016" tIns="1016" rIns="1016" bIns="1016" rtlCol="0" anchor="t"/>
+          <a:lstStyle/>
+          <a:p>
+            <a:pPr indent="0" marL="0">
+              <a:spcAft>
+                <a:spcPts val="400"/>
+              </a:spcAft>
+              <a:buNone/>
+            </a:pPr>
+            <a:r>
+              <a:rPr lang="en-US" sz="1400" b="1" dirty="0">
                 <a:solidFill>
                   <a:schemeClr val="accent2"/>
                 </a:solidFill>
               </a:rPr>
-              <a:t>「満たされていない想い」を、言葉にしていきます</a:t>
-            </a:r>
-            <a:endParaRPr lang="en-US" sz="1500" dirty="0"/>
+              <a:t>苦しくなったら</a:t>
+            </a:r>
+            <a:endParaRPr lang="en-US" sz="1400" dirty="0"/>
+          </a:p>
+          <a:p>
+            <a:pPr indent="0" marL="0">
+              <a:spcAft>
+                <a:spcPts val="400"/>
+              </a:spcAft>
+              <a:buNone/>
+            </a:pPr>
+            <a:r>
+              <a:rPr lang="en-US" sz="1400" dirty="0">
+                <a:solidFill>
+                  <a:schemeClr val="tx1"/>
+                </a:solidFill>
+              </a:rPr>
+              <a:t>いったん止めて、息を完全に吐き切る</a:t>
+            </a:r>
+            <a:endParaRPr lang="en-US" sz="1400" dirty="0"/>
+          </a:p>
+          <a:p>
+            <a:pPr indent="0" marL="0">
+              <a:spcAft>
+                <a:spcPts val="400"/>
+              </a:spcAft>
+              <a:buNone/>
+            </a:pPr>
+            <a:r>
+              <a:rPr lang="en-US" sz="1400" dirty="0">
+                <a:solidFill>
+                  <a:schemeClr val="tx1"/>
+                </a:solidFill>
+              </a:rPr>
+              <a:t> </a:t>
+            </a:r>
+            <a:endParaRPr lang="en-US" sz="1400" dirty="0"/>
+          </a:p>
+          <a:p>
+            <a:pPr indent="0" marL="0">
+              <a:spcAft>
+                <a:spcPts val="400"/>
+              </a:spcAft>
+              <a:buNone/>
+            </a:pPr>
+            <a:r>
+              <a:rPr lang="en-US" sz="1400" dirty="0">
+                <a:solidFill>
+                  <a:schemeClr val="tx1"/>
+                </a:solidFill>
+              </a:rPr>
+              <a:t>相手が聞いてくれて</a:t>
+            </a:r>
+            <a:endParaRPr lang="en-US" sz="1400" dirty="0"/>
+          </a:p>
+          <a:p>
+            <a:pPr indent="0" marL="0">
+              <a:spcAft>
+                <a:spcPts val="400"/>
+              </a:spcAft>
+              <a:buNone/>
+            </a:pPr>
+            <a:r>
+              <a:rPr lang="en-US" sz="1400" dirty="0">
+                <a:solidFill>
+                  <a:schemeClr val="tx1"/>
+                </a:solidFill>
+              </a:rPr>
+              <a:t>謝っている</a:t>
+            </a:r>
+            <a:endParaRPr lang="en-US" sz="1400" dirty="0"/>
+          </a:p>
+          <a:p>
+            <a:pPr indent="0" marL="0">
+              <a:spcAft>
+                <a:spcPts val="400"/>
+              </a:spcAft>
+              <a:buNone/>
+            </a:pPr>
+            <a:r>
+              <a:rPr lang="en-US" sz="1400" dirty="0">
+                <a:solidFill>
+                  <a:schemeClr val="tx1"/>
+                </a:solidFill>
+              </a:rPr>
+              <a:t>イメージで</a:t>
+            </a:r>
+            <a:endParaRPr lang="en-US" sz="1400" dirty="0"/>
           </a:p>
         </p:txBody>
       </p:sp>
@@ -15086,7 +15269,7 @@
                 <a:ea typeface="Yu Mincho" pitchFamily="34" charset="-122"/>
                 <a:cs typeface="Yu Mincho" pitchFamily="34" charset="-120"/>
               </a:rPr>
-              <a:t>どうしたかったの？</a:t>
+              <a:t>どうして欲しかったの？</a:t>
             </a:r>
             <a:endParaRPr lang="en-US" sz="3200" dirty="0"/>
           </a:p>
@@ -15094,7 +15277,7 @@
       </p:sp>
       <p:sp>
         <p:nvSpPr>
-          <p:cNvPr id="6" name="Text 0"/>
+          <p:cNvPr id="5" name="Text 0"/>
           <p:cNvSpPr/>
           <p:nvPr>
             <p:ph idx="101" type="body" hasCustomPrompt="1"/>
@@ -15118,6 +15301,14 @@
             <a:pPr algn="ctr" indent="0" marL="0">
               <a:buNone/>
             </a:pPr>
+            <a:r>
+              <a:rPr lang="en-US" sz="1500" dirty="0">
+                <a:solidFill>
+                  <a:schemeClr val="accent2"/>
+                </a:solidFill>
+              </a:rPr>
+              <a:t>「満たされていない想い」を、言葉にしていきます</a:t>
+            </a:r>
             <a:endParaRPr lang="en-US" sz="1500" dirty="0"/>
           </a:p>
         </p:txBody>
@@ -15244,7 +15435,7 @@
                   <a:schemeClr val="accent2"/>
                 </a:solidFill>
               </a:rPr>
-              <a:t>STEP 4　もう一度その場所に戻って</a:t>
+              <a:t>STEP 4　外から見ながら</a:t>
             </a:r>
             <a:endParaRPr lang="en-US" sz="1300" dirty="0"/>
           </a:p>
@@ -15285,7 +15476,7 @@
                 <a:ea typeface="Yu Mincho" pitchFamily="34" charset="-122"/>
                 <a:cs typeface="Yu Mincho" pitchFamily="34" charset="-120"/>
               </a:rPr>
-              <a:t>言いたかったことを、</a:t>
+              <a:t>本当は、</a:t>
             </a:r>
             <a:endParaRPr lang="en-US" sz="3200" dirty="0"/>
           </a:p>
@@ -15302,7 +15493,7 @@
                 <a:ea typeface="Yu Mincho" pitchFamily="34" charset="-122"/>
                 <a:cs typeface="Yu Mincho" pitchFamily="34" charset="-120"/>
               </a:rPr>
-              <a:t>全部吐き出しましょう</a:t>
+              <a:t>どうしたかったの？</a:t>
             </a:r>
             <a:endParaRPr lang="en-US" sz="3200" dirty="0"/>
           </a:p>
@@ -15310,7 +15501,7 @@
       </p:sp>
       <p:sp>
         <p:nvSpPr>
-          <p:cNvPr id="5" name="Text 0"/>
+          <p:cNvPr id="6" name="Text 0"/>
           <p:cNvSpPr/>
           <p:nvPr>
             <p:ph idx="101" type="body" hasCustomPrompt="1"/>
@@ -15334,14 +15525,6 @@
             <a:pPr algn="ctr" indent="0" marL="0">
               <a:buNone/>
             </a:pPr>
-            <a:r>
-              <a:rPr lang="en-US" sz="1500" dirty="0">
-                <a:solidFill>
-                  <a:schemeClr val="accent2"/>
-                </a:solidFill>
-              </a:rPr>
-              <a:t>100％出せましたか？</a:t>
-            </a:r>
             <a:endParaRPr lang="en-US" sz="1500" dirty="0"/>
           </a:p>
         </p:txBody>
@@ -15418,16 +15601,36 @@
       </p:grpSpPr>
       <p:sp>
         <p:nvSpPr>
-          <p:cNvPr id="2" name="Text 0"/>
+          <p:cNvPr id="2" name="frame"/>
           <p:cNvSpPr/>
-          <p:nvPr>
-            <p:ph idx="100" type="title" hasCustomPrompt="1"/>
-          </p:nvPr>
-        </p:nvSpPr>
-        <p:spPr>
-          <a:xfrm>
-            <a:off x="457200" y="457200"/>
-            <a:ext cx="8229600" cy="594360"/>
+          <p:nvPr/>
+        </p:nvSpPr>
+        <p:spPr>
+          <a:xfrm>
+            <a:off x="228600" y="137160"/>
+            <a:ext cx="8686800" cy="4526280"/>
+          </a:xfrm>
+          <a:prstGeom prst="rect">
+            <a:avLst/>
+          </a:prstGeom>
+          <a:ln w="12700">
+            <a:solidFill>
+              <a:srgbClr val="B08A4E"/>
+            </a:solidFill>
+            <a:prstDash val="solid"/>
+          </a:ln>
+        </p:spPr>
+      </p:sp>
+      <p:sp>
+        <p:nvSpPr>
+          <p:cNvPr id="3" name="qlabel"/>
+          <p:cNvSpPr txBox="1"/>
+          <p:nvPr/>
+        </p:nvSpPr>
+        <p:spPr>
+          <a:xfrm>
+            <a:off x="457200" y="320040"/>
+            <a:ext cx="8229600" cy="365760"/>
           </a:xfrm>
           <a:prstGeom prst="rect">
             <a:avLst/>
@@ -15436,64 +15639,94 @@
           <a:ln/>
         </p:spPr>
         <p:txBody>
-          <a:bodyPr wrap="square" lIns="0" tIns="0" rIns="0" bIns="0" rtlCol="0" anchor="ctr"/>
-          <a:lstStyle/>
-          <a:p>
-            <a:pPr algn="l" indent="0" marL="0">
-              <a:buNone/>
-            </a:pPr>
-            <a:r>
-              <a:rPr lang="en-US" sz="2400" b="1" dirty="0">
+          <a:bodyPr wrap="square" lIns="0" tIns="0" rIns="0" bIns="0" rtlCol="0" anchor="t"/>
+          <a:lstStyle/>
+          <a:p>
+            <a:pPr algn="ctr" indent="0" marL="0">
+              <a:buNone/>
+            </a:pPr>
+            <a:r>
+              <a:rPr lang="en-US" sz="1300" b="1" dirty="0">
                 <a:solidFill>
                   <a:schemeClr val="accent2"/>
+                </a:solidFill>
+              </a:rPr>
+              <a:t>STEP 4　もう一度その場所に戻って</a:t>
+            </a:r>
+            <a:endParaRPr lang="en-US" sz="1300" dirty="0"/>
+          </a:p>
+        </p:txBody>
+      </p:sp>
+      <p:sp>
+        <p:nvSpPr>
+          <p:cNvPr id="4" name="Text 0"/>
+          <p:cNvSpPr/>
+          <p:nvPr>
+            <p:ph idx="100" type="title" hasCustomPrompt="1"/>
+          </p:nvPr>
+        </p:nvSpPr>
+        <p:spPr>
+          <a:xfrm>
+            <a:off x="914400" y="1554480"/>
+            <a:ext cx="7315200" cy="1554480"/>
+          </a:xfrm>
+          <a:prstGeom prst="rect">
+            <a:avLst/>
+          </a:prstGeom>
+          <a:noFill/>
+          <a:ln/>
+        </p:spPr>
+        <p:txBody>
+          <a:bodyPr wrap="square" rtlCol="0" anchor="ctr"/>
+          <a:lstStyle/>
+          <a:p>
+            <a:pPr algn="ctr" indent="0" marL="0">
+              <a:buNone/>
+            </a:pPr>
+            <a:r>
+              <a:rPr lang="en-US" sz="3200" b="1" dirty="0">
+                <a:solidFill>
+                  <a:schemeClr val="tx2"/>
                 </a:solidFill>
                 <a:latin typeface="Yu Mincho" pitchFamily="34" charset="0"/>
                 <a:ea typeface="Yu Mincho" pitchFamily="34" charset="-122"/>
                 <a:cs typeface="Yu Mincho" pitchFamily="34" charset="-120"/>
               </a:rPr>
-              <a:t>STEP 5　和解と許し → 理想の未来へ</a:t>
-            </a:r>
-            <a:endParaRPr lang="en-US" sz="2400" dirty="0"/>
-          </a:p>
-        </p:txBody>
-      </p:sp>
-      <p:sp>
-        <p:nvSpPr>
-          <p:cNvPr id="3" name="s5_a"/>
+              <a:t>言いたかったことを、</a:t>
+            </a:r>
+            <a:endParaRPr lang="en-US" sz="3200" dirty="0"/>
+          </a:p>
+          <a:p>
+            <a:pPr algn="ctr" indent="0" marL="0">
+              <a:buNone/>
+            </a:pPr>
+            <a:r>
+              <a:rPr lang="en-US" sz="3200" b="1" dirty="0">
+                <a:solidFill>
+                  <a:schemeClr val="tx2"/>
+                </a:solidFill>
+                <a:latin typeface="Yu Mincho" pitchFamily="34" charset="0"/>
+                <a:ea typeface="Yu Mincho" pitchFamily="34" charset="-122"/>
+                <a:cs typeface="Yu Mincho" pitchFamily="34" charset="-120"/>
+              </a:rPr>
+              <a:t>全部吐き出しましょう</a:t>
+            </a:r>
+            <a:endParaRPr lang="en-US" sz="3200" dirty="0"/>
+          </a:p>
+        </p:txBody>
+      </p:sp>
+      <p:sp>
+        <p:nvSpPr>
+          <p:cNvPr id="5" name="Text 0"/>
           <p:cNvSpPr/>
-          <p:nvPr/>
-        </p:nvSpPr>
-        <p:spPr>
-          <a:xfrm>
-            <a:off x="457200" y="1234440"/>
-            <a:ext cx="5120640" cy="1371600"/>
-          </a:xfrm>
-          <a:prstGeom prst="roundRect">
-            <a:avLst>
-              <a:gd name="adj" fmla="val 8000"/>
-            </a:avLst>
-          </a:prstGeom>
-          <a:solidFill>
-            <a:srgbClr val="F8EBEE"/>
-          </a:solidFill>
-          <a:ln w="9525">
-            <a:solidFill>
-              <a:srgbClr val="E9D9B6"/>
-            </a:solidFill>
-            <a:prstDash val="solid"/>
-          </a:ln>
-        </p:spPr>
-      </p:sp>
-      <p:sp>
-        <p:nvSpPr>
-          <p:cNvPr id="4" name="s5_a_t"/>
-          <p:cNvSpPr txBox="1"/>
-          <p:nvPr/>
-        </p:nvSpPr>
-        <p:spPr>
-          <a:xfrm>
-            <a:off x="640080" y="1325880"/>
-            <a:ext cx="4846320" cy="1188720"/>
+          <p:nvPr>
+            <p:ph idx="101" type="body" hasCustomPrompt="1"/>
+          </p:nvPr>
+        </p:nvSpPr>
+        <p:spPr>
+          <a:xfrm>
+            <a:off x="914400" y="3200400"/>
+            <a:ext cx="7315200" cy="731520"/>
           </a:xfrm>
           <a:prstGeom prst="rect">
             <a:avLst/>
@@ -15502,189 +15735,24 @@
           <a:ln/>
         </p:spPr>
         <p:txBody>
-          <a:bodyPr wrap="square" lIns="1016" tIns="1016" rIns="1016" bIns="1016" rtlCol="0" anchor="t"/>
-          <a:lstStyle/>
-          <a:p>
-            <a:pPr indent="0" marL="0">
-              <a:spcAft>
-                <a:spcPts val="400"/>
-              </a:spcAft>
-              <a:buNone/>
-            </a:pPr>
-            <a:r>
-              <a:rPr lang="en-US" sz="1400" b="1" dirty="0">
+          <a:bodyPr wrap="square" rtlCol="0" anchor="t"/>
+          <a:lstStyle/>
+          <a:p>
+            <a:pPr algn="ctr" indent="0" marL="0">
+              <a:buNone/>
+            </a:pPr>
+            <a:r>
+              <a:rPr lang="en-US" sz="1500" dirty="0">
                 <a:solidFill>
                   <a:schemeClr val="accent2"/>
                 </a:solidFill>
               </a:rPr>
-              <a:t>和解と許し</a:t>
-            </a:r>
-            <a:endParaRPr lang="en-US" sz="1400" dirty="0"/>
-          </a:p>
-          <a:p>
-            <a:pPr marL="342900" indent="-342900">
-              <a:spcAft>
-                <a:spcPts val="400"/>
-              </a:spcAft>
-              <a:buSzPct val="100000"/>
-              <a:buChar char="•"/>
-            </a:pPr>
-            <a:r>
-              <a:rPr lang="en-US" sz="1400" dirty="0">
-                <a:solidFill>
-                  <a:schemeClr val="tx1"/>
-                </a:solidFill>
-              </a:rPr>
-              <a:t>相手の中に入って、相手の立場を感じてみる</a:t>
-            </a:r>
-            <a:endParaRPr lang="en-US" sz="1400" dirty="0"/>
-          </a:p>
-          <a:p>
-            <a:pPr marL="342900" indent="-342900">
-              <a:spcAft>
-                <a:spcPts val="400"/>
-              </a:spcAft>
-              <a:buSzPct val="100000"/>
-              <a:buChar char="•"/>
-            </a:pPr>
-            <a:r>
-              <a:rPr lang="en-US" sz="1400" dirty="0">
-                <a:solidFill>
-                  <a:schemeClr val="tx1"/>
-                </a:solidFill>
-              </a:rPr>
-              <a:t>和解は100％でなくてもOK</a:t>
-            </a:r>
-            <a:endParaRPr lang="en-US" sz="1400" dirty="0"/>
-          </a:p>
-        </p:txBody>
-      </p:sp>
-      <p:sp>
-        <p:nvSpPr>
-          <p:cNvPr id="5" name="s5_b"/>
-          <p:cNvSpPr/>
-          <p:nvPr/>
-        </p:nvSpPr>
-        <p:spPr>
-          <a:xfrm>
-            <a:off x="457200" y="2788920"/>
-            <a:ext cx="5120640" cy="1280160"/>
-          </a:xfrm>
-          <a:prstGeom prst="roundRect">
-            <a:avLst>
-              <a:gd name="adj" fmla="val 8571"/>
-            </a:avLst>
-          </a:prstGeom>
-          <a:solidFill>
-            <a:srgbClr val="EFE8F6"/>
-          </a:solidFill>
-          <a:ln w="9525">
-            <a:solidFill>
-              <a:srgbClr val="E9D9B6"/>
-            </a:solidFill>
-            <a:prstDash val="solid"/>
-          </a:ln>
-        </p:spPr>
-      </p:sp>
-      <p:sp>
-        <p:nvSpPr>
-          <p:cNvPr id="6" name="s5_b_t"/>
-          <p:cNvSpPr txBox="1"/>
-          <p:nvPr/>
-        </p:nvSpPr>
-        <p:spPr>
-          <a:xfrm>
-            <a:off x="640080" y="2880360"/>
-            <a:ext cx="4846320" cy="1097280"/>
-          </a:xfrm>
-          <a:prstGeom prst="rect">
-            <a:avLst/>
-          </a:prstGeom>
-          <a:noFill/>
-          <a:ln/>
-        </p:spPr>
-        <p:txBody>
-          <a:bodyPr wrap="square" lIns="1016" tIns="1016" rIns="1016" bIns="1016" rtlCol="0" anchor="t"/>
-          <a:lstStyle/>
-          <a:p>
-            <a:pPr indent="0" marL="0">
-              <a:spcAft>
-                <a:spcPts val="400"/>
-              </a:spcAft>
-              <a:buNone/>
-            </a:pPr>
-            <a:r>
-              <a:rPr lang="en-US" sz="1400" b="1" dirty="0">
-                <a:solidFill>
-                  <a:schemeClr val="accent2"/>
-                </a:solidFill>
-              </a:rPr>
-              <a:t>理想の未来から、自分を信じる力を育てる</a:t>
-            </a:r>
-            <a:endParaRPr lang="en-US" sz="1400" dirty="0"/>
-          </a:p>
-          <a:p>
-            <a:pPr marL="342900" indent="-342900">
-              <a:spcAft>
-                <a:spcPts val="400"/>
-              </a:spcAft>
-              <a:buSzPct val="100000"/>
-              <a:buChar char="•"/>
-            </a:pPr>
-            <a:r>
-              <a:rPr lang="en-US" sz="1400" dirty="0">
-                <a:solidFill>
-                  <a:schemeClr val="tx1"/>
-                </a:solidFill>
-              </a:rPr>
-              <a:t>大成功している未来の自分になってみる</a:t>
-            </a:r>
-            <a:endParaRPr lang="en-US" sz="1400" dirty="0"/>
-          </a:p>
-          <a:p>
-            <a:pPr marL="342900" indent="-342900">
-              <a:spcAft>
-                <a:spcPts val="400"/>
-              </a:spcAft>
-              <a:buSzPct val="100000"/>
-              <a:buChar char="•"/>
-            </a:pPr>
-            <a:r>
-              <a:rPr lang="en-US" sz="1400" dirty="0">
-                <a:solidFill>
-                  <a:schemeClr val="tx1"/>
-                </a:solidFill>
-              </a:rPr>
-              <a:t>見える景色・聞こえる声・体の感じを大きく</a:t>
-            </a:r>
-            <a:endParaRPr lang="en-US" sz="1400" dirty="0"/>
-          </a:p>
-        </p:txBody>
-      </p:sp>
-      <p:pic>
-        <p:nvPicPr>
-          <p:cNvPr id="7" name="Image 0" descr="ガイドブック45ページ">    </p:cNvPr>
-          <p:cNvPicPr>
-            <a:picLocks noChangeAspect="1"/>
-          </p:cNvPicPr>
-          <p:nvPr/>
-        </p:nvPicPr>
-        <p:blipFill>
-          <a:blip r:embed="rId1"/>
-          <a:stretch>
-            <a:fillRect/>
-          </a:stretch>
-        </p:blipFill>
-        <p:spPr>
-          <a:xfrm>
-            <a:off x="5989320" y="1143000"/>
-            <a:ext cx="2377440" cy="3364992"/>
-          </a:xfrm>
-          <a:prstGeom prst="rect">
-            <a:avLst/>
-          </a:prstGeom>
-        </p:spPr>
-      </p:pic>
+              <a:t>100％出せましたか？</a:t>
+            </a:r>
+            <a:endParaRPr lang="en-US" sz="1500" dirty="0"/>
+          </a:p>
+        </p:txBody>
+      </p:sp>
       <p:sp>
         <p:nvSpPr>
           <p:cNvPr id="25" name="Slide Number Placeholder 0"/>
@@ -15757,21 +15825,67 @@
       </p:grpSpPr>
       <p:sp>
         <p:nvSpPr>
-          <p:cNvPr id="2" name="frame"/>
+          <p:cNvPr id="2" name="Text 0"/>
+          <p:cNvSpPr/>
+          <p:nvPr>
+            <p:ph idx="100" type="title" hasCustomPrompt="1"/>
+          </p:nvPr>
+        </p:nvSpPr>
+        <p:spPr>
+          <a:xfrm>
+            <a:off x="457200" y="457200"/>
+            <a:ext cx="8229600" cy="594360"/>
+          </a:xfrm>
+          <a:prstGeom prst="rect">
+            <a:avLst/>
+          </a:prstGeom>
+          <a:noFill/>
+          <a:ln/>
+        </p:spPr>
+        <p:txBody>
+          <a:bodyPr wrap="square" lIns="0" tIns="0" rIns="0" bIns="0" rtlCol="0" anchor="ctr"/>
+          <a:lstStyle/>
+          <a:p>
+            <a:pPr algn="l" indent="0" marL="0">
+              <a:buNone/>
+            </a:pPr>
+            <a:r>
+              <a:rPr lang="en-US" sz="2400" b="1" dirty="0">
+                <a:solidFill>
+                  <a:schemeClr val="accent2"/>
+                </a:solidFill>
+                <a:latin typeface="Yu Mincho" pitchFamily="34" charset="0"/>
+                <a:ea typeface="Yu Mincho" pitchFamily="34" charset="-122"/>
+                <a:cs typeface="Yu Mincho" pitchFamily="34" charset="-120"/>
+              </a:rPr>
+              <a:t>STEP 5　和解と許し → 理想の未来へ</a:t>
+            </a:r>
+            <a:endParaRPr lang="en-US" sz="2400" dirty="0"/>
+          </a:p>
+        </p:txBody>
+      </p:sp>
+      <p:sp>
+        <p:nvSpPr>
+          <p:cNvPr id="3" name="s5_a"/>
           <p:cNvSpPr/>
           <p:nvPr/>
         </p:nvSpPr>
         <p:spPr>
           <a:xfrm>
-            <a:off x="228600" y="137160"/>
-            <a:ext cx="8686800" cy="4526280"/>
-          </a:xfrm>
-          <a:prstGeom prst="rect">
-            <a:avLst/>
-          </a:prstGeom>
-          <a:ln w="12700">
+            <a:off x="457200" y="1234440"/>
+            <a:ext cx="5120640" cy="1371600"/>
+          </a:xfrm>
+          <a:prstGeom prst="roundRect">
+            <a:avLst>
+              <a:gd name="adj" fmla="val 8000"/>
+            </a:avLst>
+          </a:prstGeom>
+          <a:solidFill>
+            <a:srgbClr val="F8EBEE"/>
+          </a:solidFill>
+          <a:ln w="9525">
             <a:solidFill>
-              <a:srgbClr val="B08A4E"/>
+              <a:srgbClr val="E9D9B6"/>
             </a:solidFill>
             <a:prstDash val="solid"/>
           </a:ln>
@@ -15779,14 +15893,14 @@
       </p:sp>
       <p:sp>
         <p:nvSpPr>
-          <p:cNvPr id="3" name="qlabel"/>
+          <p:cNvPr id="4" name="s5_a_t"/>
           <p:cNvSpPr txBox="1"/>
           <p:nvPr/>
         </p:nvSpPr>
         <p:spPr>
           <a:xfrm>
-            <a:off x="457200" y="320040"/>
-            <a:ext cx="8229600" cy="365760"/>
+            <a:off x="640080" y="1325880"/>
+            <a:ext cx="4846320" cy="1188720"/>
           </a:xfrm>
           <a:prstGeom prst="rect">
             <a:avLst/>
@@ -15795,36 +15909,100 @@
           <a:ln/>
         </p:spPr>
         <p:txBody>
-          <a:bodyPr wrap="square" lIns="0" tIns="0" rIns="0" bIns="0" rtlCol="0" anchor="t"/>
-          <a:lstStyle/>
-          <a:p>
-            <a:pPr algn="ctr" indent="0" marL="0">
-              <a:buNone/>
-            </a:pPr>
-            <a:r>
-              <a:rPr lang="en-US" sz="1300" b="1" dirty="0">
+          <a:bodyPr wrap="square" lIns="1016" tIns="1016" rIns="1016" bIns="1016" rtlCol="0" anchor="t"/>
+          <a:lstStyle/>
+          <a:p>
+            <a:pPr indent="0" marL="0">
+              <a:spcAft>
+                <a:spcPts val="400"/>
+              </a:spcAft>
+              <a:buNone/>
+            </a:pPr>
+            <a:r>
+              <a:rPr lang="en-US" sz="1400" b="1" dirty="0">
                 <a:solidFill>
                   <a:schemeClr val="accent2"/>
                 </a:solidFill>
               </a:rPr>
-              <a:t>STEP 5　和解と許し</a:t>
-            </a:r>
-            <a:endParaRPr lang="en-US" sz="1300" dirty="0"/>
-          </a:p>
-        </p:txBody>
-      </p:sp>
-      <p:sp>
-        <p:nvSpPr>
-          <p:cNvPr id="4" name="Text 0"/>
+              <a:t>和解と許し</a:t>
+            </a:r>
+            <a:endParaRPr lang="en-US" sz="1400" dirty="0"/>
+          </a:p>
+          <a:p>
+            <a:pPr marL="342900" indent="-342900">
+              <a:spcAft>
+                <a:spcPts val="400"/>
+              </a:spcAft>
+              <a:buSzPct val="100000"/>
+              <a:buChar char="•"/>
+            </a:pPr>
+            <a:r>
+              <a:rPr lang="en-US" sz="1400" dirty="0">
+                <a:solidFill>
+                  <a:schemeClr val="tx1"/>
+                </a:solidFill>
+              </a:rPr>
+              <a:t>相手の中に入って、相手の立場を感じてみる</a:t>
+            </a:r>
+            <a:endParaRPr lang="en-US" sz="1400" dirty="0"/>
+          </a:p>
+          <a:p>
+            <a:pPr marL="342900" indent="-342900">
+              <a:spcAft>
+                <a:spcPts val="400"/>
+              </a:spcAft>
+              <a:buSzPct val="100000"/>
+              <a:buChar char="•"/>
+            </a:pPr>
+            <a:r>
+              <a:rPr lang="en-US" sz="1400" dirty="0">
+                <a:solidFill>
+                  <a:schemeClr val="tx1"/>
+                </a:solidFill>
+              </a:rPr>
+              <a:t>和解は100％でなくてもOK</a:t>
+            </a:r>
+            <a:endParaRPr lang="en-US" sz="1400" dirty="0"/>
+          </a:p>
+        </p:txBody>
+      </p:sp>
+      <p:sp>
+        <p:nvSpPr>
+          <p:cNvPr id="5" name="s5_b"/>
           <p:cNvSpPr/>
-          <p:nvPr>
-            <p:ph idx="100" type="title" hasCustomPrompt="1"/>
-          </p:nvPr>
-        </p:nvSpPr>
-        <p:spPr>
-          <a:xfrm>
-            <a:off x="914400" y="1554480"/>
-            <a:ext cx="7315200" cy="1554480"/>
+          <p:nvPr/>
+        </p:nvSpPr>
+        <p:spPr>
+          <a:xfrm>
+            <a:off x="457200" y="2788920"/>
+            <a:ext cx="5120640" cy="1280160"/>
+          </a:xfrm>
+          <a:prstGeom prst="roundRect">
+            <a:avLst>
+              <a:gd name="adj" fmla="val 8571"/>
+            </a:avLst>
+          </a:prstGeom>
+          <a:solidFill>
+            <a:srgbClr val="EFE8F6"/>
+          </a:solidFill>
+          <a:ln w="9525">
+            <a:solidFill>
+              <a:srgbClr val="E9D9B6"/>
+            </a:solidFill>
+            <a:prstDash val="solid"/>
+          </a:ln>
+        </p:spPr>
+      </p:sp>
+      <p:sp>
+        <p:nvSpPr>
+          <p:cNvPr id="6" name="s5_b_t"/>
+          <p:cNvSpPr txBox="1"/>
+          <p:nvPr/>
+        </p:nvSpPr>
+        <p:spPr>
+          <a:xfrm>
+            <a:off x="640080" y="2880360"/>
+            <a:ext cx="4846320" cy="1097280"/>
           </a:xfrm>
           <a:prstGeom prst="rect">
             <a:avLst/>
@@ -15833,82 +16011,87 @@
           <a:ln/>
         </p:spPr>
         <p:txBody>
-          <a:bodyPr wrap="square" rtlCol="0" anchor="ctr"/>
-          <a:lstStyle/>
-          <a:p>
-            <a:pPr algn="ctr" indent="0" marL="0">
-              <a:buNone/>
-            </a:pPr>
-            <a:r>
-              <a:rPr lang="en-US" sz="3200" b="1" dirty="0">
-                <a:solidFill>
-                  <a:schemeClr val="tx2"/>
-                </a:solidFill>
-                <a:latin typeface="Yu Mincho" pitchFamily="34" charset="0"/>
-                <a:ea typeface="Yu Mincho" pitchFamily="34" charset="-122"/>
-                <a:cs typeface="Yu Mincho" pitchFamily="34" charset="-120"/>
-              </a:rPr>
-              <a:t>相手の信念・価値観は、</a:t>
-            </a:r>
-            <a:endParaRPr lang="en-US" sz="3200" dirty="0"/>
-          </a:p>
-          <a:p>
-            <a:pPr algn="ctr" indent="0" marL="0">
-              <a:buNone/>
-            </a:pPr>
-            <a:r>
-              <a:rPr lang="en-US" sz="3200" b="1" dirty="0">
-                <a:solidFill>
-                  <a:schemeClr val="tx2"/>
-                </a:solidFill>
-                <a:latin typeface="Yu Mincho" pitchFamily="34" charset="0"/>
-                <a:ea typeface="Yu Mincho" pitchFamily="34" charset="-122"/>
-                <a:cs typeface="Yu Mincho" pitchFamily="34" charset="-120"/>
-              </a:rPr>
-              <a:t>いつできたのでしょう？</a:t>
-            </a:r>
-            <a:endParaRPr lang="en-US" sz="3200" dirty="0"/>
-          </a:p>
-        </p:txBody>
-      </p:sp>
-      <p:sp>
-        <p:nvSpPr>
-          <p:cNvPr id="5" name="Text 0"/>
-          <p:cNvSpPr/>
-          <p:nvPr>
-            <p:ph idx="101" type="body" hasCustomPrompt="1"/>
-          </p:nvPr>
-        </p:nvSpPr>
-        <p:spPr>
-          <a:xfrm>
-            <a:off x="914400" y="3200400"/>
-            <a:ext cx="7315200" cy="731520"/>
-          </a:xfrm>
-          <a:prstGeom prst="rect">
-            <a:avLst/>
-          </a:prstGeom>
-          <a:noFill/>
-          <a:ln/>
-        </p:spPr>
-        <p:txBody>
-          <a:bodyPr wrap="square" rtlCol="0" anchor="t"/>
-          <a:lstStyle/>
-          <a:p>
-            <a:pPr algn="ctr" indent="0" marL="0">
-              <a:buNone/>
-            </a:pPr>
-            <a:r>
-              <a:rPr lang="en-US" sz="1500" dirty="0">
+          <a:bodyPr wrap="square" lIns="1016" tIns="1016" rIns="1016" bIns="1016" rtlCol="0" anchor="t"/>
+          <a:lstStyle/>
+          <a:p>
+            <a:pPr indent="0" marL="0">
+              <a:spcAft>
+                <a:spcPts val="400"/>
+              </a:spcAft>
+              <a:buNone/>
+            </a:pPr>
+            <a:r>
+              <a:rPr lang="en-US" sz="1400" b="1" dirty="0">
                 <a:solidFill>
                   <a:schemeClr val="accent2"/>
                 </a:solidFill>
               </a:rPr>
-              <a:t>相手の中に入って、感じてみてください</a:t>
-            </a:r>
-            <a:endParaRPr lang="en-US" sz="1500" dirty="0"/>
-          </a:p>
-        </p:txBody>
-      </p:sp>
+              <a:t>理想の未来から、自分を信じる力を育てる</a:t>
+            </a:r>
+            <a:endParaRPr lang="en-US" sz="1400" dirty="0"/>
+          </a:p>
+          <a:p>
+            <a:pPr marL="342900" indent="-342900">
+              <a:spcAft>
+                <a:spcPts val="400"/>
+              </a:spcAft>
+              <a:buSzPct val="100000"/>
+              <a:buChar char="•"/>
+            </a:pPr>
+            <a:r>
+              <a:rPr lang="en-US" sz="1400" dirty="0">
+                <a:solidFill>
+                  <a:schemeClr val="tx1"/>
+                </a:solidFill>
+              </a:rPr>
+              <a:t>大成功している未来の自分になってみる</a:t>
+            </a:r>
+            <a:endParaRPr lang="en-US" sz="1400" dirty="0"/>
+          </a:p>
+          <a:p>
+            <a:pPr marL="342900" indent="-342900">
+              <a:spcAft>
+                <a:spcPts val="400"/>
+              </a:spcAft>
+              <a:buSzPct val="100000"/>
+              <a:buChar char="•"/>
+            </a:pPr>
+            <a:r>
+              <a:rPr lang="en-US" sz="1400" dirty="0">
+                <a:solidFill>
+                  <a:schemeClr val="tx1"/>
+                </a:solidFill>
+              </a:rPr>
+              <a:t>見える景色・聞こえる声・体の感じを大きく</a:t>
+            </a:r>
+            <a:endParaRPr lang="en-US" sz="1400" dirty="0"/>
+          </a:p>
+        </p:txBody>
+      </p:sp>
+      <p:pic>
+        <p:nvPicPr>
+          <p:cNvPr id="7" name="Image 0" descr="ガイドブック45ページ">    </p:cNvPr>
+          <p:cNvPicPr>
+            <a:picLocks noChangeAspect="1"/>
+          </p:cNvPicPr>
+          <p:nvPr/>
+        </p:nvPicPr>
+        <p:blipFill>
+          <a:blip r:embed="rId1"/>
+          <a:stretch>
+            <a:fillRect/>
+          </a:stretch>
+        </p:blipFill>
+        <p:spPr>
+          <a:xfrm>
+            <a:off x="5989320" y="1143000"/>
+            <a:ext cx="2377440" cy="3364992"/>
+          </a:xfrm>
+          <a:prstGeom prst="rect">
+            <a:avLst/>
+          </a:prstGeom>
+        </p:spPr>
+      </p:pic>
       <p:sp>
         <p:nvSpPr>
           <p:cNvPr id="25" name="Slide Number Placeholder 0"/>
@@ -16072,7 +16255,7 @@
                 <a:ea typeface="Yu Mincho" pitchFamily="34" charset="-122"/>
                 <a:cs typeface="Yu Mincho" pitchFamily="34" charset="-120"/>
               </a:rPr>
-              <a:t>相手は本当は、</a:t>
+              <a:t>相手の信念・価値観は、</a:t>
             </a:r>
             <a:endParaRPr lang="en-US" sz="3200" dirty="0"/>
           </a:p>
@@ -16089,7 +16272,7 @@
                 <a:ea typeface="Yu Mincho" pitchFamily="34" charset="-122"/>
                 <a:cs typeface="Yu Mincho" pitchFamily="34" charset="-120"/>
               </a:rPr>
-              <a:t>どうしたかったのでしょう？</a:t>
+              <a:t>いつできたのでしょう？</a:t>
             </a:r>
             <a:endParaRPr lang="en-US" sz="3200" dirty="0"/>
           </a:p>
@@ -16127,7 +16310,7 @@
                   <a:schemeClr val="accent2"/>
                 </a:solidFill>
               </a:rPr>
-              <a:t>なぜ、そんな行為をしてしまったのでしょう？</a:t>
+              <a:t>相手の中に入って、感じてみてください</a:t>
             </a:r>
             <a:endParaRPr lang="en-US" sz="1500" dirty="0"/>
           </a:p>
@@ -16255,7 +16438,7 @@
                   <a:schemeClr val="accent2"/>
                 </a:solidFill>
               </a:rPr>
-              <a:t>STEP 5　理想の未来から</a:t>
+              <a:t>STEP 5　和解と許し</a:t>
             </a:r>
             <a:endParaRPr lang="en-US" sz="1300" dirty="0"/>
           </a:p>
@@ -16296,7 +16479,7 @@
                 <a:ea typeface="Yu Mincho" pitchFamily="34" charset="-122"/>
                 <a:cs typeface="Yu Mincho" pitchFamily="34" charset="-120"/>
               </a:rPr>
-              <a:t>大成功しているあなたは、</a:t>
+              <a:t>相手は本当は、</a:t>
             </a:r>
             <a:endParaRPr lang="en-US" sz="3200" dirty="0"/>
           </a:p>
@@ -16313,32 +16496,15 @@
                 <a:ea typeface="Yu Mincho" pitchFamily="34" charset="-122"/>
                 <a:cs typeface="Yu Mincho" pitchFamily="34" charset="-120"/>
               </a:rPr>
-              <a:t>何が見えて、何が聞こえて、</a:t>
+              <a:t>どうしたかったのでしょう？</a:t>
             </a:r>
             <a:endParaRPr lang="en-US" sz="3200" dirty="0"/>
           </a:p>
-          <a:p>
-            <a:pPr algn="ctr" indent="0" marL="0">
-              <a:buNone/>
-            </a:pPr>
-            <a:r>
-              <a:rPr lang="en-US" sz="3200" b="1" dirty="0">
-                <a:solidFill>
-                  <a:schemeClr val="tx2"/>
-                </a:solidFill>
-                <a:latin typeface="Yu Mincho" pitchFamily="34" charset="0"/>
-                <a:ea typeface="Yu Mincho" pitchFamily="34" charset="-122"/>
-                <a:cs typeface="Yu Mincho" pitchFamily="34" charset="-120"/>
-              </a:rPr>
-              <a:t>どんな感じがしますか？</a:t>
-            </a:r>
-            <a:endParaRPr lang="en-US" sz="3200" dirty="0"/>
-          </a:p>
-        </p:txBody>
-      </p:sp>
-      <p:sp>
-        <p:nvSpPr>
-          <p:cNvPr id="6" name="Text 0"/>
+        </p:txBody>
+      </p:sp>
+      <p:sp>
+        <p:nvSpPr>
+          <p:cNvPr id="5" name="Text 0"/>
           <p:cNvSpPr/>
           <p:nvPr>
             <p:ph idx="101" type="body" hasCustomPrompt="1"/>
@@ -16362,6 +16528,14 @@
             <a:pPr algn="ctr" indent="0" marL="0">
               <a:buNone/>
             </a:pPr>
+            <a:r>
+              <a:rPr lang="en-US" sz="1500" dirty="0">
+                <a:solidFill>
+                  <a:schemeClr val="accent2"/>
+                </a:solidFill>
+              </a:rPr>
+              <a:t>なぜ、そんな行為をしてしまったのでしょう？</a:t>
+            </a:r>
             <a:endParaRPr lang="en-US" sz="1500" dirty="0"/>
           </a:p>
         </p:txBody>
@@ -16438,16 +16612,36 @@
       </p:grpSpPr>
       <p:sp>
         <p:nvSpPr>
-          <p:cNvPr id="2" name="Text 0"/>
+          <p:cNvPr id="2" name="frame"/>
           <p:cNvSpPr/>
-          <p:nvPr>
-            <p:ph idx="100" type="title" hasCustomPrompt="1"/>
-          </p:nvPr>
-        </p:nvSpPr>
-        <p:spPr>
-          <a:xfrm>
-            <a:off x="731520" y="1828800"/>
-            <a:ext cx="7680960" cy="914400"/>
+          <p:nvPr/>
+        </p:nvSpPr>
+        <p:spPr>
+          <a:xfrm>
+            <a:off x="228600" y="137160"/>
+            <a:ext cx="8686800" cy="4526280"/>
+          </a:xfrm>
+          <a:prstGeom prst="rect">
+            <a:avLst/>
+          </a:prstGeom>
+          <a:ln w="12700">
+            <a:solidFill>
+              <a:srgbClr val="B08A4E"/>
+            </a:solidFill>
+            <a:prstDash val="solid"/>
+          </a:ln>
+        </p:spPr>
+      </p:sp>
+      <p:sp>
+        <p:nvSpPr>
+          <p:cNvPr id="3" name="qlabel"/>
+          <p:cNvSpPr txBox="1"/>
+          <p:nvPr/>
+        </p:nvSpPr>
+        <p:spPr>
+          <a:xfrm>
+            <a:off x="457200" y="320040"/>
+            <a:ext cx="8229600" cy="365760"/>
           </a:xfrm>
           <a:prstGeom prst="rect">
             <a:avLst/>
@@ -16456,6 +16650,44 @@
           <a:ln/>
         </p:spPr>
         <p:txBody>
+          <a:bodyPr wrap="square" lIns="0" tIns="0" rIns="0" bIns="0" rtlCol="0" anchor="t"/>
+          <a:lstStyle/>
+          <a:p>
+            <a:pPr algn="ctr" indent="0" marL="0">
+              <a:buNone/>
+            </a:pPr>
+            <a:r>
+              <a:rPr lang="en-US" sz="1300" b="1" dirty="0">
+                <a:solidFill>
+                  <a:schemeClr val="accent2"/>
+                </a:solidFill>
+              </a:rPr>
+              <a:t>STEP 5　理想の未来から</a:t>
+            </a:r>
+            <a:endParaRPr lang="en-US" sz="1300" dirty="0"/>
+          </a:p>
+        </p:txBody>
+      </p:sp>
+      <p:sp>
+        <p:nvSpPr>
+          <p:cNvPr id="4" name="Text 0"/>
+          <p:cNvSpPr/>
+          <p:nvPr>
+            <p:ph idx="100" type="title" hasCustomPrompt="1"/>
+          </p:nvPr>
+        </p:nvSpPr>
+        <p:spPr>
+          <a:xfrm>
+            <a:off x="914400" y="1554480"/>
+            <a:ext cx="7315200" cy="1554480"/>
+          </a:xfrm>
+          <a:prstGeom prst="rect">
+            <a:avLst/>
+          </a:prstGeom>
+          <a:noFill/>
+          <a:ln/>
+        </p:spPr>
+        <p:txBody>
           <a:bodyPr wrap="square" rtlCol="0" anchor="ctr"/>
           <a:lstStyle/>
           <a:p>
@@ -16463,23 +16695,57 @@
               <a:buNone/>
             </a:pPr>
             <a:r>
-              <a:rPr lang="en-US" sz="3600" b="1" dirty="0">
-                <a:solidFill>
-                  <a:schemeClr val="accent2"/>
+              <a:rPr lang="en-US" sz="3200" b="1" dirty="0">
+                <a:solidFill>
+                  <a:schemeClr val="tx2"/>
                 </a:solidFill>
                 <a:latin typeface="Yu Mincho" pitchFamily="34" charset="0"/>
                 <a:ea typeface="Yu Mincho" pitchFamily="34" charset="-122"/>
                 <a:cs typeface="Yu Mincho" pitchFamily="34" charset="-120"/>
               </a:rPr>
-              <a:t>エネルギーで取り除く</a:t>
-            </a:r>
-            <a:endParaRPr lang="en-US" sz="3600" dirty="0"/>
-          </a:p>
-        </p:txBody>
-      </p:sp>
-      <p:sp>
-        <p:nvSpPr>
-          <p:cNvPr id="3" name="Text 0"/>
+              <a:t>大成功しているあなたは、</a:t>
+            </a:r>
+            <a:endParaRPr lang="en-US" sz="3200" dirty="0"/>
+          </a:p>
+          <a:p>
+            <a:pPr algn="ctr" indent="0" marL="0">
+              <a:buNone/>
+            </a:pPr>
+            <a:r>
+              <a:rPr lang="en-US" sz="3200" b="1" dirty="0">
+                <a:solidFill>
+                  <a:schemeClr val="tx2"/>
+                </a:solidFill>
+                <a:latin typeface="Yu Mincho" pitchFamily="34" charset="0"/>
+                <a:ea typeface="Yu Mincho" pitchFamily="34" charset="-122"/>
+                <a:cs typeface="Yu Mincho" pitchFamily="34" charset="-120"/>
+              </a:rPr>
+              <a:t>何が見えて、何が聞こえて、</a:t>
+            </a:r>
+            <a:endParaRPr lang="en-US" sz="3200" dirty="0"/>
+          </a:p>
+          <a:p>
+            <a:pPr algn="ctr" indent="0" marL="0">
+              <a:buNone/>
+            </a:pPr>
+            <a:r>
+              <a:rPr lang="en-US" sz="3200" b="1" dirty="0">
+                <a:solidFill>
+                  <a:schemeClr val="tx2"/>
+                </a:solidFill>
+                <a:latin typeface="Yu Mincho" pitchFamily="34" charset="0"/>
+                <a:ea typeface="Yu Mincho" pitchFamily="34" charset="-122"/>
+                <a:cs typeface="Yu Mincho" pitchFamily="34" charset="-120"/>
+              </a:rPr>
+              <a:t>どんな感じがしますか？</a:t>
+            </a:r>
+            <a:endParaRPr lang="en-US" sz="3200" dirty="0"/>
+          </a:p>
+        </p:txBody>
+      </p:sp>
+      <p:sp>
+        <p:nvSpPr>
+          <p:cNvPr id="6" name="Text 0"/>
           <p:cNvSpPr/>
           <p:nvPr>
             <p:ph idx="101" type="body" hasCustomPrompt="1"/>
@@ -16487,8 +16753,8 @@
         </p:nvSpPr>
         <p:spPr>
           <a:xfrm>
-            <a:off x="731520" y="2788920"/>
-            <a:ext cx="7680960" cy="822960"/>
+            <a:off x="914400" y="3200400"/>
+            <a:ext cx="7315200" cy="731520"/>
           </a:xfrm>
           <a:prstGeom prst="rect">
             <a:avLst/>
@@ -16503,15 +16769,52 @@
             <a:pPr algn="ctr" indent="0" marL="0">
               <a:buNone/>
             </a:pPr>
-            <a:r>
-              <a:rPr lang="en-US" sz="1600" dirty="0">
-                <a:solidFill>
-                  <a:schemeClr val="tx1"/>
-                </a:solidFill>
-              </a:rPr>
-              <a:t>残っているものを、やさしく手放していきます（75〜85分）</a:t>
-            </a:r>
-            <a:endParaRPr lang="en-US" sz="1600" dirty="0"/>
+            <a:endParaRPr lang="en-US" sz="1500" dirty="0"/>
+          </a:p>
+        </p:txBody>
+      </p:sp>
+      <p:sp>
+        <p:nvSpPr>
+          <p:cNvPr id="25" name="Slide Number Placeholder 0"/>
+          <p:cNvSpPr>
+            <a:spLocks noGrp="1"/>
+          </p:cNvSpPr>
+          <p:nvPr>
+            <p:ph type="sldNum" sz="quarter" idx="4294967295"/>
+          </p:nvPr>
+        </p:nvSpPr>
+        <p:spPr>
+          <a:xfrm>
+            <a:off x="8229600" y="4754880"/>
+            <a:ext cx="457200" cy="274320"/>
+          </a:xfrm>
+          <a:prstGeom prst="rect">
+            <a:avLst/>
+          </a:prstGeom>
+          <a:extLst>
+            <a:ext uri="{C572A759-6A51-4108-AA02-DFA0A04FC94B}">
+              <ma14:wrappingTextBoxFlag xmlns:ma14="http://schemas.microsoft.com/office/mac/drawingml/2011/main" val="0"/>
+            </a:ext>
+          </a:extLst>
+        </p:spPr>
+        <p:txBody>
+          <a:bodyPr/>
+          <a:lstStyle>
+            <a:lvl1pPr>
+              <a:defRPr sz="900">
+                <a:solidFill>
+                  <a:srgbClr val="B08A4E"/>
+                </a:solidFill>
+              </a:defRPr>
+            </a:lvl1pPr>
+          </a:lstStyle>
+          <a:p>
+            <a:pPr algn="r"/>
+            <a:fld id="{F7021451-1387-4CA6-816F-3879F97B5CBC}" type="slidenum">
+              <a:rPr b="0" lang="en-US"/>
+              <a:t>39</a:t>
+            </a:fld>
+            <a:endParaRPr lang="en-US"/>
           </a:p>
         </p:txBody>
       </p:sp>
@@ -16791,8 +17094,8 @@
         </p:nvSpPr>
         <p:spPr>
           <a:xfrm>
-            <a:off x="457200" y="457200"/>
-            <a:ext cx="8229600" cy="594360"/>
+            <a:off x="731520" y="1828800"/>
+            <a:ext cx="7680960" cy="914400"/>
           </a:xfrm>
           <a:prstGeom prst="rect">
             <a:avLst/>
@@ -16801,14 +17104,14 @@
           <a:ln/>
         </p:spPr>
         <p:txBody>
-          <a:bodyPr wrap="square" lIns="0" tIns="0" rIns="0" bIns="0" rtlCol="0" anchor="ctr"/>
-          <a:lstStyle/>
-          <a:p>
-            <a:pPr algn="l" indent="0" marL="0">
-              <a:buNone/>
-            </a:pPr>
-            <a:r>
-              <a:rPr lang="en-US" sz="2400" b="1" dirty="0">
+          <a:bodyPr wrap="square" rtlCol="0" anchor="ctr"/>
+          <a:lstStyle/>
+          <a:p>
+            <a:pPr algn="ctr" indent="0" marL="0">
+              <a:buNone/>
+            </a:pPr>
+            <a:r>
+              <a:rPr lang="en-US" sz="3600" b="1" dirty="0">
                 <a:solidFill>
                   <a:schemeClr val="accent2"/>
                 </a:solidFill>
@@ -16816,6 +17119,110 @@
                 <a:ea typeface="Yu Mincho" pitchFamily="34" charset="-122"/>
                 <a:cs typeface="Yu Mincho" pitchFamily="34" charset="-120"/>
               </a:rPr>
+              <a:t>エネルギーで取り除く</a:t>
+            </a:r>
+            <a:endParaRPr lang="en-US" sz="3600" dirty="0"/>
+          </a:p>
+        </p:txBody>
+      </p:sp>
+      <p:sp>
+        <p:nvSpPr>
+          <p:cNvPr id="3" name="Text 0"/>
+          <p:cNvSpPr/>
+          <p:nvPr>
+            <p:ph idx="101" type="body" hasCustomPrompt="1"/>
+          </p:nvPr>
+        </p:nvSpPr>
+        <p:spPr>
+          <a:xfrm>
+            <a:off x="731520" y="2788920"/>
+            <a:ext cx="7680960" cy="822960"/>
+          </a:xfrm>
+          <a:prstGeom prst="rect">
+            <a:avLst/>
+          </a:prstGeom>
+          <a:noFill/>
+          <a:ln/>
+        </p:spPr>
+        <p:txBody>
+          <a:bodyPr wrap="square" rtlCol="0" anchor="t"/>
+          <a:lstStyle/>
+          <a:p>
+            <a:pPr algn="ctr" indent="0" marL="0">
+              <a:buNone/>
+            </a:pPr>
+            <a:r>
+              <a:rPr lang="en-US" sz="1600" dirty="0">
+                <a:solidFill>
+                  <a:schemeClr val="tx1"/>
+                </a:solidFill>
+              </a:rPr>
+              <a:t>残っているものを、やさしく手放していきます（75〜85分）</a:t>
+            </a:r>
+            <a:endParaRPr lang="en-US" sz="1600" dirty="0"/>
+          </a:p>
+        </p:txBody>
+      </p:sp>
+    </p:spTree>
+  </p:cSld>
+  <p:clrMapOvr>
+    <a:masterClrMapping/>
+  </p:clrMapOvr>
+</p:sld>
+</file>
+
+<file path=ppt/slides/slide41.xml><?xml version="1.0" encoding="utf-8"?>
+<p:sld xmlns:a="http://schemas.openxmlformats.org/drawingml/2006/main" xmlns:r="http://schemas.openxmlformats.org/officeDocument/2006/relationships" xmlns:p="http://schemas.openxmlformats.org/presentationml/2006/main">
+  <p:cSld name="Slide 41">
+    <p:spTree>
+      <p:nvGrpSpPr>
+        <p:cNvPr id="1" name=""/>
+        <p:cNvGrpSpPr/>
+        <p:nvPr/>
+      </p:nvGrpSpPr>
+      <p:grpSpPr>
+        <a:xfrm>
+          <a:off x="0" y="0"/>
+          <a:ext cx="0" cy="0"/>
+          <a:chOff x="0" y="0"/>
+          <a:chExt cx="0" cy="0"/>
+        </a:xfrm>
+      </p:grpSpPr>
+      <p:sp>
+        <p:nvSpPr>
+          <p:cNvPr id="2" name="Text 0"/>
+          <p:cNvSpPr/>
+          <p:nvPr>
+            <p:ph idx="100" type="title" hasCustomPrompt="1"/>
+          </p:nvPr>
+        </p:nvSpPr>
+        <p:spPr>
+          <a:xfrm>
+            <a:off x="457200" y="457200"/>
+            <a:ext cx="8229600" cy="594360"/>
+          </a:xfrm>
+          <a:prstGeom prst="rect">
+            <a:avLst/>
+          </a:prstGeom>
+          <a:noFill/>
+          <a:ln/>
+        </p:spPr>
+        <p:txBody>
+          <a:bodyPr wrap="square" lIns="0" tIns="0" rIns="0" bIns="0" rtlCol="0" anchor="ctr"/>
+          <a:lstStyle/>
+          <a:p>
+            <a:pPr algn="l" indent="0" marL="0">
+              <a:buNone/>
+            </a:pPr>
+            <a:r>
+              <a:rPr lang="en-US" sz="2400" b="1" dirty="0">
+                <a:solidFill>
+                  <a:schemeClr val="accent2"/>
+                </a:solidFill>
+                <a:latin typeface="Yu Mincho" pitchFamily="34" charset="0"/>
+                <a:ea typeface="Yu Mincho" pitchFamily="34" charset="-122"/>
+                <a:cs typeface="Yu Mincho" pitchFamily="34" charset="-120"/>
+              </a:rPr>
               <a:t>点数をつけ直してみましょう</a:t>
             </a:r>
             <a:endParaRPr lang="en-US" sz="2400" dirty="0"/>
@@ -16824,7 +17231,7 @@
       </p:sp>
       <p:graphicFrame>
         <p:nvGraphicFramePr>
-          <p:cNvPr id="41" name="Table 0"/>
+          <p:cNvPr id="42" name="Table 0"/>
           <p:cNvGraphicFramePr>
             <a:graphicFrameLocks noGrp="1"/>
           </p:cNvGraphicFramePr>
@@ -17608,239 +18015,6 @@
             <a:pPr algn="r"/>
             <a:fld id="{F7021451-1387-4CA6-816F-3879F97B5CBC}" type="slidenum">
               <a:rPr b="0" lang="en-US"/>
-              <a:t>40</a:t>
-            </a:fld>
-            <a:endParaRPr lang="en-US"/>
-          </a:p>
-        </p:txBody>
-      </p:sp>
-    </p:spTree>
-  </p:cSld>
-  <p:clrMapOvr>
-    <a:masterClrMapping/>
-  </p:clrMapOvr>
-</p:sld>
-</file>
-
-<file path=ppt/slides/slide41.xml><?xml version="1.0" encoding="utf-8"?>
-<p:sld xmlns:a="http://schemas.openxmlformats.org/drawingml/2006/main" xmlns:r="http://schemas.openxmlformats.org/officeDocument/2006/relationships" xmlns:p="http://schemas.openxmlformats.org/presentationml/2006/main">
-  <p:cSld name="Slide 41">
-    <p:spTree>
-      <p:nvGrpSpPr>
-        <p:cNvPr id="1" name=""/>
-        <p:cNvGrpSpPr/>
-        <p:nvPr/>
-      </p:nvGrpSpPr>
-      <p:grpSpPr>
-        <a:xfrm>
-          <a:off x="0" y="0"/>
-          <a:ext cx="0" cy="0"/>
-          <a:chOff x="0" y="0"/>
-          <a:chExt cx="0" cy="0"/>
-        </a:xfrm>
-      </p:grpSpPr>
-      <p:sp>
-        <p:nvSpPr>
-          <p:cNvPr id="2" name="frame"/>
-          <p:cNvSpPr/>
-          <p:nvPr/>
-        </p:nvSpPr>
-        <p:spPr>
-          <a:xfrm>
-            <a:off x="228600" y="137160"/>
-            <a:ext cx="8686800" cy="4526280"/>
-          </a:xfrm>
-          <a:prstGeom prst="rect">
-            <a:avLst/>
-          </a:prstGeom>
-          <a:ln w="12700">
-            <a:solidFill>
-              <a:srgbClr val="B08A4E"/>
-            </a:solidFill>
-            <a:prstDash val="solid"/>
-          </a:ln>
-        </p:spPr>
-      </p:sp>
-      <p:sp>
-        <p:nvSpPr>
-          <p:cNvPr id="3" name="qlabel"/>
-          <p:cNvSpPr txBox="1"/>
-          <p:nvPr/>
-        </p:nvSpPr>
-        <p:spPr>
-          <a:xfrm>
-            <a:off x="457200" y="320040"/>
-            <a:ext cx="8229600" cy="365760"/>
-          </a:xfrm>
-          <a:prstGeom prst="rect">
-            <a:avLst/>
-          </a:prstGeom>
-          <a:noFill/>
-          <a:ln/>
-        </p:spPr>
-        <p:txBody>
-          <a:bodyPr wrap="square" lIns="0" tIns="0" rIns="0" bIns="0" rtlCol="0" anchor="t"/>
-          <a:lstStyle/>
-          <a:p>
-            <a:pPr algn="ctr" indent="0" marL="0">
-              <a:buNone/>
-            </a:pPr>
-            <a:r>
-              <a:rPr lang="en-US" sz="1300" b="1" dirty="0">
-                <a:solidFill>
-                  <a:schemeClr val="accent2"/>
-                </a:solidFill>
-              </a:rPr>
-              <a:t>ふり返り</a:t>
-            </a:r>
-            <a:endParaRPr lang="en-US" sz="1300" dirty="0"/>
-          </a:p>
-        </p:txBody>
-      </p:sp>
-      <p:sp>
-        <p:nvSpPr>
-          <p:cNvPr id="4" name="Text 0"/>
-          <p:cNvSpPr/>
-          <p:nvPr>
-            <p:ph idx="100" type="title" hasCustomPrompt="1"/>
-          </p:nvPr>
-        </p:nvSpPr>
-        <p:spPr>
-          <a:xfrm>
-            <a:off x="914400" y="1554480"/>
-            <a:ext cx="7315200" cy="1554480"/>
-          </a:xfrm>
-          <a:prstGeom prst="rect">
-            <a:avLst/>
-          </a:prstGeom>
-          <a:noFill/>
-          <a:ln/>
-        </p:spPr>
-        <p:txBody>
-          <a:bodyPr wrap="square" rtlCol="0" anchor="ctr"/>
-          <a:lstStyle/>
-          <a:p>
-            <a:pPr algn="ctr" indent="0" marL="0">
-              <a:buNone/>
-            </a:pPr>
-            <a:r>
-              <a:rPr lang="en-US" sz="3200" b="1" dirty="0">
-                <a:solidFill>
-                  <a:schemeClr val="tx2"/>
-                </a:solidFill>
-                <a:latin typeface="Yu Mincho" pitchFamily="34" charset="0"/>
-                <a:ea typeface="Yu Mincho" pitchFamily="34" charset="-122"/>
-                <a:cs typeface="Yu Mincho" pitchFamily="34" charset="-120"/>
-              </a:rPr>
-              <a:t>今日、いちばん</a:t>
-            </a:r>
-            <a:endParaRPr lang="en-US" sz="3200" dirty="0"/>
-          </a:p>
-          <a:p>
-            <a:pPr algn="ctr" indent="0" marL="0">
-              <a:buNone/>
-            </a:pPr>
-            <a:r>
-              <a:rPr lang="en-US" sz="3200" b="1" dirty="0">
-                <a:solidFill>
-                  <a:schemeClr val="tx2"/>
-                </a:solidFill>
-                <a:latin typeface="Yu Mincho" pitchFamily="34" charset="0"/>
-                <a:ea typeface="Yu Mincho" pitchFamily="34" charset="-122"/>
-                <a:cs typeface="Yu Mincho" pitchFamily="34" charset="-120"/>
-              </a:rPr>
-              <a:t>変わったと感じることは</a:t>
-            </a:r>
-            <a:endParaRPr lang="en-US" sz="3200" dirty="0"/>
-          </a:p>
-          <a:p>
-            <a:pPr algn="ctr" indent="0" marL="0">
-              <a:buNone/>
-            </a:pPr>
-            <a:r>
-              <a:rPr lang="en-US" sz="3200" b="1" dirty="0">
-                <a:solidFill>
-                  <a:schemeClr val="tx2"/>
-                </a:solidFill>
-                <a:latin typeface="Yu Mincho" pitchFamily="34" charset="0"/>
-                <a:ea typeface="Yu Mincho" pitchFamily="34" charset="-122"/>
-                <a:cs typeface="Yu Mincho" pitchFamily="34" charset="-120"/>
-              </a:rPr>
-              <a:t>何ですか？</a:t>
-            </a:r>
-            <a:endParaRPr lang="en-US" sz="3200" dirty="0"/>
-          </a:p>
-        </p:txBody>
-      </p:sp>
-      <p:sp>
-        <p:nvSpPr>
-          <p:cNvPr id="6" name="Text 0"/>
-          <p:cNvSpPr/>
-          <p:nvPr>
-            <p:ph idx="101" type="body" hasCustomPrompt="1"/>
-          </p:nvPr>
-        </p:nvSpPr>
-        <p:spPr>
-          <a:xfrm>
-            <a:off x="914400" y="3200400"/>
-            <a:ext cx="7315200" cy="731520"/>
-          </a:xfrm>
-          <a:prstGeom prst="rect">
-            <a:avLst/>
-          </a:prstGeom>
-          <a:noFill/>
-          <a:ln/>
-        </p:spPr>
-        <p:txBody>
-          <a:bodyPr wrap="square" rtlCol="0" anchor="t"/>
-          <a:lstStyle/>
-          <a:p>
-            <a:pPr algn="ctr" indent="0" marL="0">
-              <a:buNone/>
-            </a:pPr>
-            <a:endParaRPr lang="en-US" sz="1500" dirty="0"/>
-          </a:p>
-        </p:txBody>
-      </p:sp>
-      <p:sp>
-        <p:nvSpPr>
-          <p:cNvPr id="25" name="Slide Number Placeholder 0"/>
-          <p:cNvSpPr>
-            <a:spLocks noGrp="1"/>
-          </p:cNvSpPr>
-          <p:nvPr>
-            <p:ph type="sldNum" sz="quarter" idx="4294967295"/>
-          </p:nvPr>
-        </p:nvSpPr>
-        <p:spPr>
-          <a:xfrm>
-            <a:off x="8229600" y="4754880"/>
-            <a:ext cx="457200" cy="274320"/>
-          </a:xfrm>
-          <a:prstGeom prst="rect">
-            <a:avLst/>
-          </a:prstGeom>
-          <a:extLst>
-            <a:ext uri="{C572A759-6A51-4108-AA02-DFA0A04FC94B}">
-              <ma14:wrappingTextBoxFlag xmlns:ma14="http://schemas.microsoft.com/office/mac/drawingml/2011/main" val="0"/>
-            </a:ext>
-          </a:extLst>
-        </p:spPr>
-        <p:txBody>
-          <a:bodyPr/>
-          <a:lstStyle>
-            <a:lvl1pPr>
-              <a:defRPr sz="900">
-                <a:solidFill>
-                  <a:srgbClr val="B08A4E"/>
-                </a:solidFill>
-              </a:defRPr>
-            </a:lvl1pPr>
-          </a:lstStyle>
-          <a:p>
-            <a:pPr algn="r"/>
-            <a:fld id="{F7021451-1387-4CA6-816F-3879F97B5CBC}" type="slidenum">
-              <a:rPr b="0" lang="en-US"/>
               <a:t>41</a:t>
             </a:fld>
             <a:endParaRPr lang="en-US"/>
@@ -17874,14 +18048,36 @@
       </p:grpSpPr>
       <p:sp>
         <p:nvSpPr>
-          <p:cNvPr id="2" name="base_head"/>
+          <p:cNvPr id="2" name="frame"/>
+          <p:cNvSpPr/>
+          <p:nvPr/>
+        </p:nvSpPr>
+        <p:spPr>
+          <a:xfrm>
+            <a:off x="228600" y="137160"/>
+            <a:ext cx="8686800" cy="4526280"/>
+          </a:xfrm>
+          <a:prstGeom prst="rect">
+            <a:avLst/>
+          </a:prstGeom>
+          <a:ln w="12700">
+            <a:solidFill>
+              <a:srgbClr val="B08A4E"/>
+            </a:solidFill>
+            <a:prstDash val="solid"/>
+          </a:ln>
+        </p:spPr>
+      </p:sp>
+      <p:sp>
+        <p:nvSpPr>
+          <p:cNvPr id="3" name="qlabel"/>
           <p:cNvSpPr txBox="1"/>
           <p:nvPr/>
         </p:nvSpPr>
         <p:spPr>
           <a:xfrm>
-            <a:off x="731520" y="548640"/>
-            <a:ext cx="7680960" cy="457200"/>
+            <a:off x="457200" y="320040"/>
+            <a:ext cx="8229600" cy="365760"/>
           </a:xfrm>
           <a:prstGeom prst="rect">
             <a:avLst/>
@@ -17890,34 +18086,36 @@
           <a:ln/>
         </p:spPr>
         <p:txBody>
-          <a:bodyPr wrap="square" lIns="1016" tIns="1016" rIns="1016" bIns="1016" rtlCol="0" anchor="t"/>
+          <a:bodyPr wrap="square" lIns="0" tIns="0" rIns="0" bIns="0" rtlCol="0" anchor="t"/>
           <a:lstStyle/>
           <a:p>
             <a:pPr algn="ctr" indent="0" marL="0">
               <a:buNone/>
             </a:pPr>
             <a:r>
-              <a:rPr lang="en-US" sz="1800" b="1" dirty="0">
+              <a:rPr lang="en-US" sz="1300" b="1" dirty="0">
                 <a:solidFill>
                   <a:schemeClr val="accent2"/>
                 </a:solidFill>
               </a:rPr>
-              <a:t>すべての土台：「絶対的安心感」</a:t>
-            </a:r>
-            <a:endParaRPr lang="en-US" sz="1800" dirty="0"/>
-          </a:p>
-        </p:txBody>
-      </p:sp>
-      <p:sp>
-        <p:nvSpPr>
-          <p:cNvPr id="3" name="base_main"/>
-          <p:cNvSpPr txBox="1"/>
-          <p:nvPr/>
-        </p:nvSpPr>
-        <p:spPr>
-          <a:xfrm>
-            <a:off x="548640" y="1280160"/>
-            <a:ext cx="8046720" cy="1645920"/>
+              <a:t>ふり返り</a:t>
+            </a:r>
+            <a:endParaRPr lang="en-US" sz="1300" dirty="0"/>
+          </a:p>
+        </p:txBody>
+      </p:sp>
+      <p:sp>
+        <p:nvSpPr>
+          <p:cNvPr id="4" name="Text 0"/>
+          <p:cNvSpPr/>
+          <p:nvPr>
+            <p:ph idx="100" type="title" hasCustomPrompt="1"/>
+          </p:nvPr>
+        </p:nvSpPr>
+        <p:spPr>
+          <a:xfrm>
+            <a:off x="914400" y="1554480"/>
+            <a:ext cx="7315200" cy="1554480"/>
           </a:xfrm>
           <a:prstGeom prst="rect">
             <a:avLst/>
@@ -17933,7 +18131,7 @@
               <a:buNone/>
             </a:pPr>
             <a:r>
-              <a:rPr lang="en-US" sz="3000" b="1" dirty="0">
+              <a:rPr lang="en-US" sz="3200" b="1" dirty="0">
                 <a:solidFill>
                   <a:schemeClr val="tx2"/>
                 </a:solidFill>
@@ -17941,16 +18139,16 @@
                 <a:ea typeface="Yu Mincho" pitchFamily="34" charset="-122"/>
                 <a:cs typeface="Yu Mincho" pitchFamily="34" charset="-120"/>
               </a:rPr>
-              <a:t>「何をやっても、やらなくても大丈夫。」</a:t>
-            </a:r>
-            <a:endParaRPr lang="en-US" sz="3000" dirty="0"/>
+              <a:t>今日、いちばん</a:t>
+            </a:r>
+            <a:endParaRPr lang="en-US" sz="3200" dirty="0"/>
           </a:p>
           <a:p>
             <a:pPr algn="ctr" indent="0" marL="0">
               <a:buNone/>
             </a:pPr>
             <a:r>
-              <a:rPr lang="en-US" sz="3000" b="1" dirty="0">
+              <a:rPr lang="en-US" sz="3200" b="1" dirty="0">
                 <a:solidFill>
                   <a:schemeClr val="tx2"/>
                 </a:solidFill>
@@ -17958,22 +18156,41 @@
                 <a:ea typeface="Yu Mincho" pitchFamily="34" charset="-122"/>
                 <a:cs typeface="Yu Mincho" pitchFamily="34" charset="-120"/>
               </a:rPr>
-              <a:t>「嫌なことをやめても、愛される。」</a:t>
-            </a:r>
-            <a:endParaRPr lang="en-US" sz="3000" dirty="0"/>
-          </a:p>
-        </p:txBody>
-      </p:sp>
-      <p:sp>
-        <p:nvSpPr>
-          <p:cNvPr id="4" name="base_sub"/>
-          <p:cNvSpPr txBox="1"/>
-          <p:nvPr/>
-        </p:nvSpPr>
-        <p:spPr>
-          <a:xfrm>
-            <a:off x="731520" y="3154680"/>
-            <a:ext cx="7680960" cy="914400"/>
+              <a:t>変わったと感じることは</a:t>
+            </a:r>
+            <a:endParaRPr lang="en-US" sz="3200" dirty="0"/>
+          </a:p>
+          <a:p>
+            <a:pPr algn="ctr" indent="0" marL="0">
+              <a:buNone/>
+            </a:pPr>
+            <a:r>
+              <a:rPr lang="en-US" sz="3200" b="1" dirty="0">
+                <a:solidFill>
+                  <a:schemeClr val="tx2"/>
+                </a:solidFill>
+                <a:latin typeface="Yu Mincho" pitchFamily="34" charset="0"/>
+                <a:ea typeface="Yu Mincho" pitchFamily="34" charset="-122"/>
+                <a:cs typeface="Yu Mincho" pitchFamily="34" charset="-120"/>
+              </a:rPr>
+              <a:t>何ですか？</a:t>
+            </a:r>
+            <a:endParaRPr lang="en-US" sz="3200" dirty="0"/>
+          </a:p>
+        </p:txBody>
+      </p:sp>
+      <p:sp>
+        <p:nvSpPr>
+          <p:cNvPr id="6" name="Text 0"/>
+          <p:cNvSpPr/>
+          <p:nvPr>
+            <p:ph idx="101" type="body" hasCustomPrompt="1"/>
+          </p:nvPr>
+        </p:nvSpPr>
+        <p:spPr>
+          <a:xfrm>
+            <a:off x="914400" y="3200400"/>
+            <a:ext cx="7315200" cy="731520"/>
           </a:xfrm>
           <a:prstGeom prst="rect">
             <a:avLst/>
@@ -17988,89 +18205,52 @@
             <a:pPr algn="ctr" indent="0" marL="0">
               <a:buNone/>
             </a:pPr>
-            <a:r>
-              <a:rPr lang="en-US" sz="1600" b="1" dirty="0">
-                <a:solidFill>
-                  <a:schemeClr val="tx2"/>
-                </a:solidFill>
-              </a:rPr>
-              <a:t>この根拠のない自信があるからこそ、</a:t>
-            </a:r>
-            <a:endParaRPr lang="en-US" sz="1600" dirty="0"/>
-          </a:p>
-          <a:p>
-            <a:pPr algn="ctr" indent="0" marL="0">
-              <a:buNone/>
-            </a:pPr>
-            <a:r>
-              <a:rPr lang="en-US" sz="1600" b="1" dirty="0">
-                <a:solidFill>
-                  <a:schemeClr val="tx2"/>
-                </a:solidFill>
-              </a:rPr>
-              <a:t>人はリスクを取り、大きく成長することができます。</a:t>
-            </a:r>
-            <a:endParaRPr lang="en-US" sz="1600" dirty="0"/>
-          </a:p>
-        </p:txBody>
-      </p:sp>
-      <p:sp>
-        <p:nvSpPr>
-          <p:cNvPr id="6" name="Text 0"/>
-          <p:cNvSpPr/>
-          <p:nvPr>
-            <p:ph idx="100" type="title" hasCustomPrompt="1"/>
-          </p:nvPr>
-        </p:nvSpPr>
-        <p:spPr>
-          <a:xfrm>
-            <a:off x="731520" y="1417320"/>
-            <a:ext cx="7680960" cy="1188720"/>
-          </a:xfrm>
-          <a:prstGeom prst="rect">
-            <a:avLst/>
-          </a:prstGeom>
-          <a:noFill/>
-          <a:ln/>
-        </p:spPr>
-        <p:txBody>
-          <a:bodyPr wrap="square" rtlCol="0" anchor="ctr"/>
-          <a:lstStyle/>
-          <a:p>
-            <a:pPr algn="ctr" indent="0" marL="0">
-              <a:buNone/>
-            </a:pPr>
-            <a:endParaRPr lang="en-US" sz="3800" dirty="0"/>
-          </a:p>
-        </p:txBody>
-      </p:sp>
-      <p:sp>
-        <p:nvSpPr>
-          <p:cNvPr id="7" name="Text 0"/>
-          <p:cNvSpPr/>
-          <p:nvPr>
-            <p:ph idx="101" type="body" hasCustomPrompt="1"/>
-          </p:nvPr>
-        </p:nvSpPr>
-        <p:spPr>
-          <a:xfrm>
-            <a:off x="731520" y="2697480"/>
-            <a:ext cx="7680960" cy="1097280"/>
-          </a:xfrm>
-          <a:prstGeom prst="rect">
-            <a:avLst/>
-          </a:prstGeom>
-          <a:noFill/>
-          <a:ln/>
-        </p:spPr>
-        <p:txBody>
-          <a:bodyPr wrap="square" rtlCol="0" anchor="t"/>
-          <a:lstStyle/>
-          <a:p>
-            <a:pPr algn="ctr" indent="0" marL="0">
-              <a:buNone/>
-            </a:pPr>
-            <a:endParaRPr lang="en-US" sz="1600" dirty="0"/>
+            <a:endParaRPr lang="en-US" sz="1500" dirty="0"/>
+          </a:p>
+        </p:txBody>
+      </p:sp>
+      <p:sp>
+        <p:nvSpPr>
+          <p:cNvPr id="25" name="Slide Number Placeholder 0"/>
+          <p:cNvSpPr>
+            <a:spLocks noGrp="1"/>
+          </p:cNvSpPr>
+          <p:nvPr>
+            <p:ph type="sldNum" sz="quarter" idx="4294967295"/>
+          </p:nvPr>
+        </p:nvSpPr>
+        <p:spPr>
+          <a:xfrm>
+            <a:off x="8229600" y="4754880"/>
+            <a:ext cx="457200" cy="274320"/>
+          </a:xfrm>
+          <a:prstGeom prst="rect">
+            <a:avLst/>
+          </a:prstGeom>
+          <a:extLst>
+            <a:ext uri="{C572A759-6A51-4108-AA02-DFA0A04FC94B}">
+              <ma14:wrappingTextBoxFlag xmlns:ma14="http://schemas.microsoft.com/office/mac/drawingml/2011/main" val="0"/>
+            </a:ext>
+          </a:extLst>
+        </p:spPr>
+        <p:txBody>
+          <a:bodyPr/>
+          <a:lstStyle>
+            <a:lvl1pPr>
+              <a:defRPr sz="900">
+                <a:solidFill>
+                  <a:srgbClr val="B08A4E"/>
+                </a:solidFill>
+              </a:defRPr>
+            </a:lvl1pPr>
+          </a:lstStyle>
+          <a:p>
+            <a:pPr algn="r"/>
+            <a:fld id="{F7021451-1387-4CA6-816F-3879F97B5CBC}" type="slidenum">
+              <a:rPr b="0" lang="en-US"/>
+              <a:t>42</a:t>
+            </a:fld>
+            <a:endParaRPr lang="en-US"/>
           </a:p>
         </p:txBody>
       </p:sp>
@@ -18085,6 +18265,233 @@
 <file path=ppt/slides/slide43.xml><?xml version="1.0" encoding="utf-8"?>
 <p:sld xmlns:a="http://schemas.openxmlformats.org/drawingml/2006/main" xmlns:r="http://schemas.openxmlformats.org/officeDocument/2006/relationships" xmlns:p="http://schemas.openxmlformats.org/presentationml/2006/main">
   <p:cSld name="Slide 43">
+    <p:spTree>
+      <p:nvGrpSpPr>
+        <p:cNvPr id="1" name=""/>
+        <p:cNvGrpSpPr/>
+        <p:nvPr/>
+      </p:nvGrpSpPr>
+      <p:grpSpPr>
+        <a:xfrm>
+          <a:off x="0" y="0"/>
+          <a:ext cx="0" cy="0"/>
+          <a:chOff x="0" y="0"/>
+          <a:chExt cx="0" cy="0"/>
+        </a:xfrm>
+      </p:grpSpPr>
+      <p:sp>
+        <p:nvSpPr>
+          <p:cNvPr id="2" name="base_head"/>
+          <p:cNvSpPr txBox="1"/>
+          <p:nvPr/>
+        </p:nvSpPr>
+        <p:spPr>
+          <a:xfrm>
+            <a:off x="731520" y="548640"/>
+            <a:ext cx="7680960" cy="457200"/>
+          </a:xfrm>
+          <a:prstGeom prst="rect">
+            <a:avLst/>
+          </a:prstGeom>
+          <a:noFill/>
+          <a:ln/>
+        </p:spPr>
+        <p:txBody>
+          <a:bodyPr wrap="square" lIns="1016" tIns="1016" rIns="1016" bIns="1016" rtlCol="0" anchor="t"/>
+          <a:lstStyle/>
+          <a:p>
+            <a:pPr algn="ctr" indent="0" marL="0">
+              <a:buNone/>
+            </a:pPr>
+            <a:r>
+              <a:rPr lang="en-US" sz="1800" b="1" dirty="0">
+                <a:solidFill>
+                  <a:schemeClr val="accent2"/>
+                </a:solidFill>
+              </a:rPr>
+              <a:t>すべての土台：「絶対的安心感」</a:t>
+            </a:r>
+            <a:endParaRPr lang="en-US" sz="1800" dirty="0"/>
+          </a:p>
+        </p:txBody>
+      </p:sp>
+      <p:sp>
+        <p:nvSpPr>
+          <p:cNvPr id="3" name="base_main"/>
+          <p:cNvSpPr txBox="1"/>
+          <p:nvPr/>
+        </p:nvSpPr>
+        <p:spPr>
+          <a:xfrm>
+            <a:off x="548640" y="1280160"/>
+            <a:ext cx="8046720" cy="1645920"/>
+          </a:xfrm>
+          <a:prstGeom prst="rect">
+            <a:avLst/>
+          </a:prstGeom>
+          <a:noFill/>
+          <a:ln/>
+        </p:spPr>
+        <p:txBody>
+          <a:bodyPr wrap="square" rtlCol="0" anchor="ctr"/>
+          <a:lstStyle/>
+          <a:p>
+            <a:pPr algn="ctr" indent="0" marL="0">
+              <a:buNone/>
+            </a:pPr>
+            <a:r>
+              <a:rPr lang="en-US" sz="3000" b="1" dirty="0">
+                <a:solidFill>
+                  <a:schemeClr val="tx2"/>
+                </a:solidFill>
+                <a:latin typeface="Yu Mincho" pitchFamily="34" charset="0"/>
+                <a:ea typeface="Yu Mincho" pitchFamily="34" charset="-122"/>
+                <a:cs typeface="Yu Mincho" pitchFamily="34" charset="-120"/>
+              </a:rPr>
+              <a:t>「何をやっても、やらなくても大丈夫。」</a:t>
+            </a:r>
+            <a:endParaRPr lang="en-US" sz="3000" dirty="0"/>
+          </a:p>
+          <a:p>
+            <a:pPr algn="ctr" indent="0" marL="0">
+              <a:buNone/>
+            </a:pPr>
+            <a:r>
+              <a:rPr lang="en-US" sz="3000" b="1" dirty="0">
+                <a:solidFill>
+                  <a:schemeClr val="tx2"/>
+                </a:solidFill>
+                <a:latin typeface="Yu Mincho" pitchFamily="34" charset="0"/>
+                <a:ea typeface="Yu Mincho" pitchFamily="34" charset="-122"/>
+                <a:cs typeface="Yu Mincho" pitchFamily="34" charset="-120"/>
+              </a:rPr>
+              <a:t>「嫌なことをやめても、愛される。」</a:t>
+            </a:r>
+            <a:endParaRPr lang="en-US" sz="3000" dirty="0"/>
+          </a:p>
+        </p:txBody>
+      </p:sp>
+      <p:sp>
+        <p:nvSpPr>
+          <p:cNvPr id="4" name="base_sub"/>
+          <p:cNvSpPr txBox="1"/>
+          <p:nvPr/>
+        </p:nvSpPr>
+        <p:spPr>
+          <a:xfrm>
+            <a:off x="731520" y="3154680"/>
+            <a:ext cx="7680960" cy="914400"/>
+          </a:xfrm>
+          <a:prstGeom prst="rect">
+            <a:avLst/>
+          </a:prstGeom>
+          <a:noFill/>
+          <a:ln/>
+        </p:spPr>
+        <p:txBody>
+          <a:bodyPr wrap="square" rtlCol="0" anchor="t"/>
+          <a:lstStyle/>
+          <a:p>
+            <a:pPr algn="ctr" indent="0" marL="0">
+              <a:buNone/>
+            </a:pPr>
+            <a:r>
+              <a:rPr lang="en-US" sz="1600" b="1" dirty="0">
+                <a:solidFill>
+                  <a:schemeClr val="tx2"/>
+                </a:solidFill>
+              </a:rPr>
+              <a:t>この根拠のない自信があるからこそ、</a:t>
+            </a:r>
+            <a:endParaRPr lang="en-US" sz="1600" dirty="0"/>
+          </a:p>
+          <a:p>
+            <a:pPr algn="ctr" indent="0" marL="0">
+              <a:buNone/>
+            </a:pPr>
+            <a:r>
+              <a:rPr lang="en-US" sz="1600" b="1" dirty="0">
+                <a:solidFill>
+                  <a:schemeClr val="tx2"/>
+                </a:solidFill>
+              </a:rPr>
+              <a:t>人はリスクを取り、大きく成長することができます。</a:t>
+            </a:r>
+            <a:endParaRPr lang="en-US" sz="1600" dirty="0"/>
+          </a:p>
+        </p:txBody>
+      </p:sp>
+      <p:sp>
+        <p:nvSpPr>
+          <p:cNvPr id="6" name="Text 0"/>
+          <p:cNvSpPr/>
+          <p:nvPr>
+            <p:ph idx="100" type="title" hasCustomPrompt="1"/>
+          </p:nvPr>
+        </p:nvSpPr>
+        <p:spPr>
+          <a:xfrm>
+            <a:off x="731520" y="1417320"/>
+            <a:ext cx="7680960" cy="1188720"/>
+          </a:xfrm>
+          <a:prstGeom prst="rect">
+            <a:avLst/>
+          </a:prstGeom>
+          <a:noFill/>
+          <a:ln/>
+        </p:spPr>
+        <p:txBody>
+          <a:bodyPr wrap="square" rtlCol="0" anchor="ctr"/>
+          <a:lstStyle/>
+          <a:p>
+            <a:pPr algn="ctr" indent="0" marL="0">
+              <a:buNone/>
+            </a:pPr>
+            <a:endParaRPr lang="en-US" sz="3800" dirty="0"/>
+          </a:p>
+        </p:txBody>
+      </p:sp>
+      <p:sp>
+        <p:nvSpPr>
+          <p:cNvPr id="7" name="Text 0"/>
+          <p:cNvSpPr/>
+          <p:nvPr>
+            <p:ph idx="101" type="body" hasCustomPrompt="1"/>
+          </p:nvPr>
+        </p:nvSpPr>
+        <p:spPr>
+          <a:xfrm>
+            <a:off x="731520" y="2697480"/>
+            <a:ext cx="7680960" cy="1097280"/>
+          </a:xfrm>
+          <a:prstGeom prst="rect">
+            <a:avLst/>
+          </a:prstGeom>
+          <a:noFill/>
+          <a:ln/>
+        </p:spPr>
+        <p:txBody>
+          <a:bodyPr wrap="square" rtlCol="0" anchor="t"/>
+          <a:lstStyle/>
+          <a:p>
+            <a:pPr algn="ctr" indent="0" marL="0">
+              <a:buNone/>
+            </a:pPr>
+            <a:endParaRPr lang="en-US" sz="1600" dirty="0"/>
+          </a:p>
+        </p:txBody>
+      </p:sp>
+    </p:spTree>
+  </p:cSld>
+  <p:clrMapOvr>
+    <a:masterClrMapping/>
+  </p:clrMapOvr>
+</p:sld>
+</file>
+
+<file path=ppt/slides/slide44.xml><?xml version="1.0" encoding="utf-8"?>
+<p:sld xmlns:a="http://schemas.openxmlformats.org/drawingml/2006/main" xmlns:r="http://schemas.openxmlformats.org/officeDocument/2006/relationships" xmlns:p="http://schemas.openxmlformats.org/presentationml/2006/main">
+  <p:cSld name="Slide 44">
     <p:spTree>
       <p:nvGrpSpPr>
         <p:cNvPr id="1" name=""/>

--- a/20_Projects/海音_心体の調律/単発/仁部あきえさん/20261028_仁部あきえさん_お金のブロック単発セッション.pptx
+++ b/20_Projects/海音_心体の調律/単発/仁部あきえさん/20261028_仁部あきえさん_お金のブロック単発セッション.pptx
@@ -150,13 +150,13 @@
   <p:extLst>
     <p:ext uri="{521415D9-36F7-43E2-AB2F-B90AF26B5E84}">
       <p14:sectionLst xmlns:p14="http://schemas.microsoft.com/office/powerpoint/2010/main">
-        <p14:section name="はじめに" id="{cb299c38-d775-ea71-59dc-cb55245f6f32}">
+        <p14:section name="はじめに" id="{db7303c2-d1f6-bc41-3e52-bc85478aef1d}">
           <p14:sldIdLst>
             <p14:sldId id="256"/>
             <p14:sldId id="257"/>
           </p14:sldIdLst>
         </p14:section>
-        <p14:section name="第1部 頭の構造を知る" id="{454724ae-7ed3-e88b-01ae-bf208f97311f}">
+        <p14:section name="第1部 頭の構造を知る" id="{6e469429-a5da-10bc-bd9f-5563cf2e5cfa}">
           <p14:sldIdLst>
             <p14:sldId id="258"/>
             <p14:sldId id="259"/>
@@ -172,7 +172,7 @@
             <p14:sldId id="269"/>
           </p14:sldIdLst>
         </p14:section>
-        <p14:section name="第2部 魂の傷を聴く" id="{a20efd1d-16d0-05c8-283a-1c418d24a55e}">
+        <p14:section name="第2部 魂の傷を聴く" id="{bfb71d27-1946-33ab-aeca-b6b7b24b4dbb}">
           <p14:sldIdLst>
             <p14:sldId id="270"/>
             <p14:sldId id="271"/>
@@ -186,7 +186,7 @@
             <p14:sldId id="279"/>
           </p14:sldIdLst>
         </p14:section>
-        <p14:section name="ワーク 思い込みを書き換える" id="{6769ab74-5dad-73b0-6749-3762d60a06d9}">
+        <p14:section name="ワーク 思い込みを書き換える" id="{90ca4c45-07ce-a1fd-029a-9256af6fedc0}">
           <p14:sldIdLst>
             <p14:sldId id="280"/>
             <p14:sldId id="281"/>
@@ -205,12 +205,12 @@
             <p14:sldId id="294"/>
           </p14:sldIdLst>
         </p14:section>
-        <p14:section name="エネルギー" id="{fa29f07b-77d1-01dc-6921-5e36c1ee69a5}">
+        <p14:section name="エネルギー" id="{b2c00bd7-5b52-7a1c-1f78-a2ceb934ee77}">
           <p14:sldIdLst>
             <p14:sldId id="295"/>
           </p14:sldIdLst>
         </p14:section>
-        <p14:section name="まとめ" id="{4d758b7d-0759-e784-5a86-29f6c3abb76a}">
+        <p14:section name="まとめ" id="{406f9160-dad5-8a50-4393-b5ef833bcbf1}">
           <p14:sldIdLst>
             <p14:sldId id="296"/>
             <p14:sldId id="297"/>
@@ -18279,208 +18279,30 @@
           <a:chExt cx="0" cy="0"/>
         </a:xfrm>
       </p:grpSpPr>
-      <p:sp>
-        <p:nvSpPr>
-          <p:cNvPr id="2" name="base_head"/>
-          <p:cNvSpPr txBox="1"/>
+      <p:pic>
+        <p:nvPicPr>
+          <p:cNvPr id="2" name="Image 0" descr="絶対的安心感">    </p:cNvPr>
+          <p:cNvPicPr>
+            <a:picLocks noChangeAspect="1"/>
+          </p:cNvPicPr>
           <p:nvPr/>
-        </p:nvSpPr>
-        <p:spPr>
-          <a:xfrm>
-            <a:off x="731520" y="548640"/>
-            <a:ext cx="7680960" cy="457200"/>
-          </a:xfrm>
-          <a:prstGeom prst="rect">
-            <a:avLst/>
-          </a:prstGeom>
-          <a:noFill/>
-          <a:ln/>
-        </p:spPr>
-        <p:txBody>
-          <a:bodyPr wrap="square" lIns="1016" tIns="1016" rIns="1016" bIns="1016" rtlCol="0" anchor="t"/>
-          <a:lstStyle/>
-          <a:p>
-            <a:pPr algn="ctr" indent="0" marL="0">
-              <a:buNone/>
-            </a:pPr>
-            <a:r>
-              <a:rPr lang="en-US" sz="1800" b="1" dirty="0">
-                <a:solidFill>
-                  <a:schemeClr val="accent2"/>
-                </a:solidFill>
-              </a:rPr>
-              <a:t>すべての土台：「絶対的安心感」</a:t>
-            </a:r>
-            <a:endParaRPr lang="en-US" sz="1800" dirty="0"/>
-          </a:p>
-        </p:txBody>
-      </p:sp>
-      <p:sp>
-        <p:nvSpPr>
-          <p:cNvPr id="3" name="base_main"/>
-          <p:cNvSpPr txBox="1"/>
-          <p:nvPr/>
-        </p:nvSpPr>
-        <p:spPr>
-          <a:xfrm>
-            <a:off x="548640" y="1280160"/>
-            <a:ext cx="8046720" cy="1645920"/>
-          </a:xfrm>
-          <a:prstGeom prst="rect">
-            <a:avLst/>
-          </a:prstGeom>
-          <a:noFill/>
-          <a:ln/>
-        </p:spPr>
-        <p:txBody>
-          <a:bodyPr wrap="square" rtlCol="0" anchor="ctr"/>
-          <a:lstStyle/>
-          <a:p>
-            <a:pPr algn="ctr" indent="0" marL="0">
-              <a:buNone/>
-            </a:pPr>
-            <a:r>
-              <a:rPr lang="en-US" sz="3000" b="1" dirty="0">
-                <a:solidFill>
-                  <a:schemeClr val="tx2"/>
-                </a:solidFill>
-                <a:latin typeface="Yu Mincho" pitchFamily="34" charset="0"/>
-                <a:ea typeface="Yu Mincho" pitchFamily="34" charset="-122"/>
-                <a:cs typeface="Yu Mincho" pitchFamily="34" charset="-120"/>
-              </a:rPr>
-              <a:t>「何をやっても、やらなくても大丈夫。」</a:t>
-            </a:r>
-            <a:endParaRPr lang="en-US" sz="3000" dirty="0"/>
-          </a:p>
-          <a:p>
-            <a:pPr algn="ctr" indent="0" marL="0">
-              <a:buNone/>
-            </a:pPr>
-            <a:r>
-              <a:rPr lang="en-US" sz="3000" b="1" dirty="0">
-                <a:solidFill>
-                  <a:schemeClr val="tx2"/>
-                </a:solidFill>
-                <a:latin typeface="Yu Mincho" pitchFamily="34" charset="0"/>
-                <a:ea typeface="Yu Mincho" pitchFamily="34" charset="-122"/>
-                <a:cs typeface="Yu Mincho" pitchFamily="34" charset="-120"/>
-              </a:rPr>
-              <a:t>「嫌なことをやめても、愛される。」</a:t>
-            </a:r>
-            <a:endParaRPr lang="en-US" sz="3000" dirty="0"/>
-          </a:p>
-        </p:txBody>
-      </p:sp>
-      <p:sp>
-        <p:nvSpPr>
-          <p:cNvPr id="4" name="base_sub"/>
-          <p:cNvSpPr txBox="1"/>
-          <p:nvPr/>
-        </p:nvSpPr>
-        <p:spPr>
-          <a:xfrm>
-            <a:off x="731520" y="3154680"/>
-            <a:ext cx="7680960" cy="914400"/>
-          </a:xfrm>
-          <a:prstGeom prst="rect">
-            <a:avLst/>
-          </a:prstGeom>
-          <a:noFill/>
-          <a:ln/>
-        </p:spPr>
-        <p:txBody>
-          <a:bodyPr wrap="square" rtlCol="0" anchor="t"/>
-          <a:lstStyle/>
-          <a:p>
-            <a:pPr algn="ctr" indent="0" marL="0">
-              <a:buNone/>
-            </a:pPr>
-            <a:r>
-              <a:rPr lang="en-US" sz="1600" b="1" dirty="0">
-                <a:solidFill>
-                  <a:schemeClr val="tx2"/>
-                </a:solidFill>
-              </a:rPr>
-              <a:t>この根拠のない自信があるからこそ、</a:t>
-            </a:r>
-            <a:endParaRPr lang="en-US" sz="1600" dirty="0"/>
-          </a:p>
-          <a:p>
-            <a:pPr algn="ctr" indent="0" marL="0">
-              <a:buNone/>
-            </a:pPr>
-            <a:r>
-              <a:rPr lang="en-US" sz="1600" b="1" dirty="0">
-                <a:solidFill>
-                  <a:schemeClr val="tx2"/>
-                </a:solidFill>
-              </a:rPr>
-              <a:t>人はリスクを取り、大きく成長することができます。</a:t>
-            </a:r>
-            <a:endParaRPr lang="en-US" sz="1600" dirty="0"/>
-          </a:p>
-        </p:txBody>
-      </p:sp>
-      <p:sp>
-        <p:nvSpPr>
-          <p:cNvPr id="6" name="Text 0"/>
-          <p:cNvSpPr/>
-          <p:nvPr>
-            <p:ph idx="100" type="title" hasCustomPrompt="1"/>
-          </p:nvPr>
-        </p:nvSpPr>
-        <p:spPr>
-          <a:xfrm>
-            <a:off x="731520" y="1417320"/>
-            <a:ext cx="7680960" cy="1188720"/>
-          </a:xfrm>
-          <a:prstGeom prst="rect">
-            <a:avLst/>
-          </a:prstGeom>
-          <a:noFill/>
-          <a:ln/>
-        </p:spPr>
-        <p:txBody>
-          <a:bodyPr wrap="square" rtlCol="0" anchor="ctr"/>
-          <a:lstStyle/>
-          <a:p>
-            <a:pPr algn="ctr" indent="0" marL="0">
-              <a:buNone/>
-            </a:pPr>
-            <a:endParaRPr lang="en-US" sz="3800" dirty="0"/>
-          </a:p>
-        </p:txBody>
-      </p:sp>
-      <p:sp>
-        <p:nvSpPr>
-          <p:cNvPr id="7" name="Text 0"/>
-          <p:cNvSpPr/>
-          <p:nvPr>
-            <p:ph idx="101" type="body" hasCustomPrompt="1"/>
-          </p:nvPr>
-        </p:nvSpPr>
-        <p:spPr>
-          <a:xfrm>
-            <a:off x="731520" y="2697480"/>
-            <a:ext cx="7680960" cy="1097280"/>
-          </a:xfrm>
-          <a:prstGeom prst="rect">
-            <a:avLst/>
-          </a:prstGeom>
-          <a:noFill/>
-          <a:ln/>
-        </p:spPr>
-        <p:txBody>
-          <a:bodyPr wrap="square" rtlCol="0" anchor="t"/>
-          <a:lstStyle/>
-          <a:p>
-            <a:pPr algn="ctr" indent="0" marL="0">
-              <a:buNone/>
-            </a:pPr>
-            <a:endParaRPr lang="en-US" sz="1600" dirty="0"/>
-          </a:p>
-        </p:txBody>
-      </p:sp>
+        </p:nvPicPr>
+        <p:blipFill>
+          <a:blip r:embed="rId1"/>
+          <a:stretch>
+            <a:fillRect/>
+          </a:stretch>
+        </p:blipFill>
+        <p:spPr>
+          <a:xfrm>
+            <a:off x="0" y="20003"/>
+            <a:ext cx="9144000" cy="5103495"/>
+          </a:xfrm>
+          <a:prstGeom prst="rect">
+            <a:avLst/>
+          </a:prstGeom>
+        </p:spPr>
+      </p:pic>
     </p:spTree>
   </p:cSld>
   <p:clrMapOvr>

--- a/20_Projects/海音_心体の調律/単発/仁部あきえさん/20261028_仁部あきえさん_お金のブロック単発セッション.pptx
+++ b/20_Projects/海音_心体の調律/単発/仁部あきえさん/20261028_仁部あきえさん_お金のブロック単発セッション.pptx
@@ -8067,36 +8067,6 @@
       </p:sp>
       <p:sp>
         <p:nvSpPr>
-          <p:cNvPr id="6" name="Text 0"/>
-          <p:cNvSpPr/>
-          <p:nvPr>
-            <p:ph idx="101" type="body" hasCustomPrompt="1"/>
-          </p:nvPr>
-        </p:nvSpPr>
-        <p:spPr>
-          <a:xfrm>
-            <a:off x="914400" y="3200400"/>
-            <a:ext cx="7315200" cy="731520"/>
-          </a:xfrm>
-          <a:prstGeom prst="rect">
-            <a:avLst/>
-          </a:prstGeom>
-          <a:noFill/>
-          <a:ln/>
-        </p:spPr>
-        <p:txBody>
-          <a:bodyPr wrap="square" rtlCol="0" anchor="t"/>
-          <a:lstStyle/>
-          <a:p>
-            <a:pPr algn="ctr" indent="0" marL="0">
-              <a:buNone/>
-            </a:pPr>
-            <a:endParaRPr lang="en-US" sz="1500" dirty="0"/>
-          </a:p>
-        </p:txBody>
-      </p:sp>
-      <p:sp>
-        <p:nvSpPr>
           <p:cNvPr id="25" name="Slide Number Placeholder 0"/>
           <p:cNvSpPr>
             <a:spLocks noGrp="1"/>
@@ -8266,36 +8236,6 @@
       </p:sp>
       <p:sp>
         <p:nvSpPr>
-          <p:cNvPr id="6" name="Text 0"/>
-          <p:cNvSpPr/>
-          <p:nvPr>
-            <p:ph idx="101" type="body" hasCustomPrompt="1"/>
-          </p:nvPr>
-        </p:nvSpPr>
-        <p:spPr>
-          <a:xfrm>
-            <a:off x="914400" y="3200400"/>
-            <a:ext cx="7315200" cy="731520"/>
-          </a:xfrm>
-          <a:prstGeom prst="rect">
-            <a:avLst/>
-          </a:prstGeom>
-          <a:noFill/>
-          <a:ln/>
-        </p:spPr>
-        <p:txBody>
-          <a:bodyPr wrap="square" rtlCol="0" anchor="t"/>
-          <a:lstStyle/>
-          <a:p>
-            <a:pPr algn="ctr" indent="0" marL="0">
-              <a:buNone/>
-            </a:pPr>
-            <a:endParaRPr lang="en-US" sz="1500" dirty="0"/>
-          </a:p>
-        </p:txBody>
-      </p:sp>
-      <p:sp>
-        <p:nvSpPr>
           <p:cNvPr id="25" name="Slide Number Placeholder 0"/>
           <p:cNvSpPr>
             <a:spLocks noGrp="1"/>
@@ -9325,36 +9265,6 @@
       </p:sp>
       <p:sp>
         <p:nvSpPr>
-          <p:cNvPr id="6" name="Text 0"/>
-          <p:cNvSpPr/>
-          <p:nvPr>
-            <p:ph idx="101" type="body" hasCustomPrompt="1"/>
-          </p:nvPr>
-        </p:nvSpPr>
-        <p:spPr>
-          <a:xfrm>
-            <a:off x="914400" y="3200400"/>
-            <a:ext cx="7315200" cy="731520"/>
-          </a:xfrm>
-          <a:prstGeom prst="rect">
-            <a:avLst/>
-          </a:prstGeom>
-          <a:noFill/>
-          <a:ln/>
-        </p:spPr>
-        <p:txBody>
-          <a:bodyPr wrap="square" rtlCol="0" anchor="t"/>
-          <a:lstStyle/>
-          <a:p>
-            <a:pPr algn="ctr" indent="0" marL="0">
-              <a:buNone/>
-            </a:pPr>
-            <a:endParaRPr lang="en-US" sz="1500" dirty="0"/>
-          </a:p>
-        </p:txBody>
-      </p:sp>
-      <p:sp>
-        <p:nvSpPr>
           <p:cNvPr id="25" name="Slide Number Placeholder 0"/>
           <p:cNvSpPr>
             <a:spLocks noGrp="1"/>
@@ -9765,36 +9675,6 @@
       </p:sp>
       <p:sp>
         <p:nvSpPr>
-          <p:cNvPr id="6" name="Text 0"/>
-          <p:cNvSpPr/>
-          <p:nvPr>
-            <p:ph idx="101" type="body" hasCustomPrompt="1"/>
-          </p:nvPr>
-        </p:nvSpPr>
-        <p:spPr>
-          <a:xfrm>
-            <a:off x="914400" y="3200400"/>
-            <a:ext cx="7315200" cy="731520"/>
-          </a:xfrm>
-          <a:prstGeom prst="rect">
-            <a:avLst/>
-          </a:prstGeom>
-          <a:noFill/>
-          <a:ln/>
-        </p:spPr>
-        <p:txBody>
-          <a:bodyPr wrap="square" rtlCol="0" anchor="t"/>
-          <a:lstStyle/>
-          <a:p>
-            <a:pPr algn="ctr" indent="0" marL="0">
-              <a:buNone/>
-            </a:pPr>
-            <a:endParaRPr lang="en-US" sz="1500" dirty="0"/>
-          </a:p>
-        </p:txBody>
-      </p:sp>
-      <p:sp>
-        <p:nvSpPr>
           <p:cNvPr id="25" name="Slide Number Placeholder 0"/>
           <p:cNvSpPr>
             <a:spLocks noGrp="1"/>
@@ -9981,36 +9861,6 @@
       </p:sp>
       <p:sp>
         <p:nvSpPr>
-          <p:cNvPr id="6" name="Text 0"/>
-          <p:cNvSpPr/>
-          <p:nvPr>
-            <p:ph idx="101" type="body" hasCustomPrompt="1"/>
-          </p:nvPr>
-        </p:nvSpPr>
-        <p:spPr>
-          <a:xfrm>
-            <a:off x="914400" y="3200400"/>
-            <a:ext cx="7315200" cy="731520"/>
-          </a:xfrm>
-          <a:prstGeom prst="rect">
-            <a:avLst/>
-          </a:prstGeom>
-          <a:noFill/>
-          <a:ln/>
-        </p:spPr>
-        <p:txBody>
-          <a:bodyPr wrap="square" rtlCol="0" anchor="t"/>
-          <a:lstStyle/>
-          <a:p>
-            <a:pPr algn="ctr" indent="0" marL="0">
-              <a:buNone/>
-            </a:pPr>
-            <a:endParaRPr lang="en-US" sz="1500" dirty="0"/>
-          </a:p>
-        </p:txBody>
-      </p:sp>
-      <p:sp>
-        <p:nvSpPr>
           <p:cNvPr id="25" name="Slide Number Placeholder 0"/>
           <p:cNvSpPr>
             <a:spLocks noGrp="1"/>
@@ -10591,66 +10441,6 @@
               <a:t>自分自身で繰り返し向き合っていくことが大切です。</a:t>
             </a:r>
             <a:endParaRPr lang="en-US" sz="1600" dirty="0"/>
-          </a:p>
-        </p:txBody>
-      </p:sp>
-      <p:sp>
-        <p:nvSpPr>
-          <p:cNvPr id="7" name="Text 0"/>
-          <p:cNvSpPr/>
-          <p:nvPr>
-            <p:ph idx="100" type="title" hasCustomPrompt="1"/>
-          </p:nvPr>
-        </p:nvSpPr>
-        <p:spPr>
-          <a:xfrm>
-            <a:off x="914400" y="1554480"/>
-            <a:ext cx="7315200" cy="1554480"/>
-          </a:xfrm>
-          <a:prstGeom prst="rect">
-            <a:avLst/>
-          </a:prstGeom>
-          <a:noFill/>
-          <a:ln/>
-        </p:spPr>
-        <p:txBody>
-          <a:bodyPr wrap="square" rtlCol="0" anchor="ctr"/>
-          <a:lstStyle/>
-          <a:p>
-            <a:pPr algn="ctr" indent="0" marL="0">
-              <a:buNone/>
-            </a:pPr>
-            <a:endParaRPr lang="en-US" sz="3200" dirty="0"/>
-          </a:p>
-        </p:txBody>
-      </p:sp>
-      <p:sp>
-        <p:nvSpPr>
-          <p:cNvPr id="8" name="Text 0"/>
-          <p:cNvSpPr/>
-          <p:nvPr>
-            <p:ph idx="101" type="body" hasCustomPrompt="1"/>
-          </p:nvPr>
-        </p:nvSpPr>
-        <p:spPr>
-          <a:xfrm>
-            <a:off x="914400" y="3200400"/>
-            <a:ext cx="7315200" cy="731520"/>
-          </a:xfrm>
-          <a:prstGeom prst="rect">
-            <a:avLst/>
-          </a:prstGeom>
-          <a:noFill/>
-          <a:ln/>
-        </p:spPr>
-        <p:txBody>
-          <a:bodyPr wrap="square" rtlCol="0" anchor="t"/>
-          <a:lstStyle/>
-          <a:p>
-            <a:pPr algn="ctr" indent="0" marL="0">
-              <a:buNone/>
-            </a:pPr>
-            <a:endParaRPr lang="en-US" sz="1500" dirty="0"/>
           </a:p>
         </p:txBody>
       </p:sp>
@@ -14179,36 +13969,6 @@
       </p:sp>
       <p:sp>
         <p:nvSpPr>
-          <p:cNvPr id="6" name="Text 0"/>
-          <p:cNvSpPr/>
-          <p:nvPr>
-            <p:ph idx="101" type="body" hasCustomPrompt="1"/>
-          </p:nvPr>
-        </p:nvSpPr>
-        <p:spPr>
-          <a:xfrm>
-            <a:off x="914400" y="3200400"/>
-            <a:ext cx="7315200" cy="731520"/>
-          </a:xfrm>
-          <a:prstGeom prst="rect">
-            <a:avLst/>
-          </a:prstGeom>
-          <a:noFill/>
-          <a:ln/>
-        </p:spPr>
-        <p:txBody>
-          <a:bodyPr wrap="square" rtlCol="0" anchor="t"/>
-          <a:lstStyle/>
-          <a:p>
-            <a:pPr algn="ctr" indent="0" marL="0">
-              <a:buNone/>
-            </a:pPr>
-            <a:endParaRPr lang="en-US" sz="1500" dirty="0"/>
-          </a:p>
-        </p:txBody>
-      </p:sp>
-      <p:sp>
-        <p:nvSpPr>
           <p:cNvPr id="25" name="Slide Number Placeholder 0"/>
           <p:cNvSpPr>
             <a:spLocks noGrp="1"/>
@@ -15501,36 +15261,6 @@
       </p:sp>
       <p:sp>
         <p:nvSpPr>
-          <p:cNvPr id="6" name="Text 0"/>
-          <p:cNvSpPr/>
-          <p:nvPr>
-            <p:ph idx="101" type="body" hasCustomPrompt="1"/>
-          </p:nvPr>
-        </p:nvSpPr>
-        <p:spPr>
-          <a:xfrm>
-            <a:off x="914400" y="3200400"/>
-            <a:ext cx="7315200" cy="731520"/>
-          </a:xfrm>
-          <a:prstGeom prst="rect">
-            <a:avLst/>
-          </a:prstGeom>
-          <a:noFill/>
-          <a:ln/>
-        </p:spPr>
-        <p:txBody>
-          <a:bodyPr wrap="square" rtlCol="0" anchor="t"/>
-          <a:lstStyle/>
-          <a:p>
-            <a:pPr algn="ctr" indent="0" marL="0">
-              <a:buNone/>
-            </a:pPr>
-            <a:endParaRPr lang="en-US" sz="1500" dirty="0"/>
-          </a:p>
-        </p:txBody>
-      </p:sp>
-      <p:sp>
-        <p:nvSpPr>
           <p:cNvPr id="25" name="Slide Number Placeholder 0"/>
           <p:cNvSpPr>
             <a:spLocks noGrp="1"/>
@@ -16740,36 +16470,6 @@
               <a:t>どんな感じがしますか？</a:t>
             </a:r>
             <a:endParaRPr lang="en-US" sz="3200" dirty="0"/>
-          </a:p>
-        </p:txBody>
-      </p:sp>
-      <p:sp>
-        <p:nvSpPr>
-          <p:cNvPr id="6" name="Text 0"/>
-          <p:cNvSpPr/>
-          <p:nvPr>
-            <p:ph idx="101" type="body" hasCustomPrompt="1"/>
-          </p:nvPr>
-        </p:nvSpPr>
-        <p:spPr>
-          <a:xfrm>
-            <a:off x="914400" y="3200400"/>
-            <a:ext cx="7315200" cy="731520"/>
-          </a:xfrm>
-          <a:prstGeom prst="rect">
-            <a:avLst/>
-          </a:prstGeom>
-          <a:noFill/>
-          <a:ln/>
-        </p:spPr>
-        <p:txBody>
-          <a:bodyPr wrap="square" rtlCol="0" anchor="t"/>
-          <a:lstStyle/>
-          <a:p>
-            <a:pPr algn="ctr" indent="0" marL="0">
-              <a:buNone/>
-            </a:pPr>
-            <a:endParaRPr lang="en-US" sz="1500" dirty="0"/>
           </a:p>
         </p:txBody>
       </p:sp>
@@ -18181,36 +17881,6 @@
       </p:sp>
       <p:sp>
         <p:nvSpPr>
-          <p:cNvPr id="6" name="Text 0"/>
-          <p:cNvSpPr/>
-          <p:nvPr>
-            <p:ph idx="101" type="body" hasCustomPrompt="1"/>
-          </p:nvPr>
-        </p:nvSpPr>
-        <p:spPr>
-          <a:xfrm>
-            <a:off x="914400" y="3200400"/>
-            <a:ext cx="7315200" cy="731520"/>
-          </a:xfrm>
-          <a:prstGeom prst="rect">
-            <a:avLst/>
-          </a:prstGeom>
-          <a:noFill/>
-          <a:ln/>
-        </p:spPr>
-        <p:txBody>
-          <a:bodyPr wrap="square" rtlCol="0" anchor="t"/>
-          <a:lstStyle/>
-          <a:p>
-            <a:pPr algn="ctr" indent="0" marL="0">
-              <a:buNone/>
-            </a:pPr>
-            <a:endParaRPr lang="en-US" sz="1500" dirty="0"/>
-          </a:p>
-        </p:txBody>
-      </p:sp>
-      <p:sp>
-        <p:nvSpPr>
           <p:cNvPr id="25" name="Slide Number Placeholder 0"/>
           <p:cNvSpPr>
             <a:spLocks noGrp="1"/>
@@ -18806,36 +18476,6 @@
               <a:t>ピンクの象</a:t>
             </a:r>
             <a:endParaRPr lang="en-US" sz="3200" dirty="0"/>
-          </a:p>
-        </p:txBody>
-      </p:sp>
-      <p:sp>
-        <p:nvSpPr>
-          <p:cNvPr id="5" name="Text 0"/>
-          <p:cNvSpPr/>
-          <p:nvPr>
-            <p:ph idx="101" type="body" hasCustomPrompt="1"/>
-          </p:nvPr>
-        </p:nvSpPr>
-        <p:spPr>
-          <a:xfrm>
-            <a:off x="914400" y="3200400"/>
-            <a:ext cx="7315200" cy="731520"/>
-          </a:xfrm>
-          <a:prstGeom prst="rect">
-            <a:avLst/>
-          </a:prstGeom>
-          <a:noFill/>
-          <a:ln/>
-        </p:spPr>
-        <p:txBody>
-          <a:bodyPr wrap="square" rtlCol="0" anchor="t"/>
-          <a:lstStyle/>
-          <a:p>
-            <a:pPr algn="ctr" indent="0" marL="0">
-              <a:buNone/>
-            </a:pPr>
-            <a:endParaRPr lang="en-US" sz="1500" dirty="0"/>
           </a:p>
         </p:txBody>
       </p:sp>

--- a/20_Projects/海音_心体の調律/単発/仁部あきえさん/20261028_仁部あきえさん_お金のブロック単発セッション.pptx
+++ b/20_Projects/海音_心体の調律/単発/仁部あきえさん/20261028_仁部あきえさん_お金のブロック単発セッション.pptx
@@ -49,9 +49,10 @@
     <p:sldId id="297" r:id="rId43"/>
     <p:sldId id="298" r:id="rId44"/>
     <p:sldId id="299" r:id="rId45"/>
+    <p:sldId id="300" r:id="rId46"/>
   </p:sldIdLst>
   <p:notesMasterIdLst>
-    <p:notesMasterId r:id="rId46"/>
+    <p:notesMasterId r:id="rId47"/>
   </p:notesMasterIdLst>
   <p:sldSz cx="9144000" cy="5143500"/>
   <p:notesSz cx="5143500" cy="9144000"/>
@@ -150,13 +151,13 @@
   <p:extLst>
     <p:ext uri="{521415D9-36F7-43E2-AB2F-B90AF26B5E84}">
       <p14:sectionLst xmlns:p14="http://schemas.microsoft.com/office/powerpoint/2010/main">
-        <p14:section name="はじめに" id="{db7303c2-d1f6-bc41-3e52-bc85478aef1d}">
+        <p14:section name="はじめに" id="{7904d192-6ae0-8592-4839-ca7589e6d20f}">
           <p14:sldIdLst>
             <p14:sldId id="256"/>
             <p14:sldId id="257"/>
           </p14:sldIdLst>
         </p14:section>
-        <p14:section name="第1部 頭の構造を知る" id="{6e469429-a5da-10bc-bd9f-5563cf2e5cfa}">
+        <p14:section name="第1部 頭の構造を知る" id="{02aba7f1-c769-9817-c6ee-4dbe9100dd79}">
           <p14:sldIdLst>
             <p14:sldId id="258"/>
             <p14:sldId id="259"/>
@@ -169,11 +170,11 @@
             <p14:sldId id="266"/>
             <p14:sldId id="267"/>
             <p14:sldId id="268"/>
-            <p14:sldId id="269"/>
           </p14:sldIdLst>
         </p14:section>
-        <p14:section name="第2部 魂の傷を聴く" id="{bfb71d27-1946-33ab-aeca-b6b7b24b4dbb}">
+        <p14:section name="第2部 魂の傷を聴く" id="{a47196da-5486-192b-2ef9-a52298a7ac30}">
           <p14:sldIdLst>
+            <p14:sldId id="269"/>
             <p14:sldId id="270"/>
             <p14:sldId id="271"/>
             <p14:sldId id="272"/>
@@ -182,12 +183,12 @@
             <p14:sldId id="275"/>
             <p14:sldId id="276"/>
             <p14:sldId id="277"/>
+          </p14:sldIdLst>
+        </p14:section>
+        <p14:section name="ワーク 思い込みを書き換える" id="{843922a2-3b40-979d-3631-227b7ccaf2b0}">
+          <p14:sldIdLst>
             <p14:sldId id="278"/>
             <p14:sldId id="279"/>
-          </p14:sldIdLst>
-        </p14:section>
-        <p14:section name="ワーク 思い込みを書き換える" id="{90ca4c45-07ce-a1fd-029a-9256af6fedc0}">
-          <p14:sldIdLst>
             <p14:sldId id="280"/>
             <p14:sldId id="281"/>
             <p14:sldId id="282"/>
@@ -205,17 +206,18 @@
             <p14:sldId id="294"/>
           </p14:sldIdLst>
         </p14:section>
-        <p14:section name="エネルギー" id="{b2c00bd7-5b52-7a1c-1f78-a2ceb934ee77}">
+        <p14:section name="エネルギー" id="{b336da47-e2aa-f7dd-7992-5349af1812dc}">
           <p14:sldIdLst>
             <p14:sldId id="295"/>
           </p14:sldIdLst>
         </p14:section>
-        <p14:section name="まとめ" id="{406f9160-dad5-8a50-4393-b5ef833bcbf1}">
+        <p14:section name="まとめ" id="{223775f9-408f-cd83-d160-29840293eef1}">
           <p14:sldIdLst>
             <p14:sldId id="296"/>
             <p14:sldId id="297"/>
             <p14:sldId id="298"/>
             <p14:sldId id="299"/>
+            <p14:sldId id="300"/>
           </p14:sldIdLst>
         </p14:section>
       </p14:sectionLst>
@@ -710,7 +712,7 @@
           <a:p>
             <a:r>
               <a:rPr lang="en-US" dirty="0"/>
-              <a:t>ゴールデンエイジまでの言われ方・見てきたことが、そのまま今の基準になっている。由香さんの言葉で補足する。</a:t>
+              <a:t>メロンちょっと食べた→この人の「ちょっと」はどのくらい？　普通＝当たり前は人それぞれ。みんなの当たり前は同じではない。</a:t>
             </a:r>
             <a:endParaRPr lang="en-US" dirty="0"/>
           </a:p>
@@ -798,7 +800,7 @@
           <a:p>
             <a:r>
               <a:rPr lang="en-US" dirty="0"/>
-              <a:t>メロンちょっと食べた→この人の「ちょっと」はどのくらい？　普通＝当たり前は人それぞれ。みんなの当たり前は同じではない。</a:t>
+              <a:t>ネガティブ＝情報の入れ替えができない、自分の正しさに固執する。ポジティブ＝入れ替えができる、他の正しさを認められる。</a:t>
             </a:r>
             <a:endParaRPr lang="en-US" dirty="0"/>
           </a:p>
@@ -886,7 +888,7 @@
           <a:p>
             <a:r>
               <a:rPr lang="en-US" dirty="0"/>
-              <a:t>ネガティブ＝情報の入れ替えができない、自分の正しさに固執する。ポジティブ＝入れ替えができる、他の正しさを認められる。</a:t>
+              <a:t>焦り・無価値観→嫉妬・怒り→悲しみ→絶対的安心感。スキップせずに順番に感じることで癒える。無理にポジティブに変えない（ポジ変禁止）。</a:t>
             </a:r>
             <a:endParaRPr lang="en-US" dirty="0"/>
           </a:p>
@@ -974,7 +976,7 @@
           <a:p>
             <a:r>
               <a:rPr lang="en-US" dirty="0"/>
-              <a:t>焦り・無価値観→嫉妬・怒り→悲しみ→絶対的安心感。スキップせずに順番に感じることで癒える。無理にポジティブに変えない（ポジ変禁止）。</a:t>
+              <a:t>物語のしめくくり。第2部につなぐ。</a:t>
             </a:r>
             <a:endParaRPr lang="en-US" dirty="0"/>
           </a:p>
@@ -1062,7 +1064,7 @@
           <a:p>
             <a:r>
               <a:rPr lang="en-US" dirty="0"/>
-              <a:t>物語のしめくくり。第2部につなぐ。</a:t>
+              <a:t>ここから20分。1問ずつ、ゆっくり聴く。</a:t>
             </a:r>
             <a:endParaRPr lang="en-US" dirty="0"/>
           </a:p>
@@ -1150,7 +1152,7 @@
           <a:p>
             <a:r>
               <a:rPr lang="en-US" dirty="0"/>
-              <a:t>ここから20分。1問ずつ、ゆっくり聴く。</a:t>
+              <a:t>お金のブロックについて、本人の言葉で。</a:t>
             </a:r>
             <a:endParaRPr lang="en-US" dirty="0"/>
           </a:p>
@@ -1238,7 +1240,7 @@
           <a:p>
             <a:r>
               <a:rPr lang="en-US" dirty="0"/>
-              <a:t>お金のブロックについて、本人の言葉で。</a:t>
+              <a:t/>
             </a:r>
             <a:endParaRPr lang="en-US" dirty="0"/>
           </a:p>
@@ -1326,7 +1328,7 @@
           <a:p>
             <a:r>
               <a:rPr lang="en-US" dirty="0"/>
-              <a:t/>
+              <a:t>数字をメモしておく（最後の変化の確認にも使える）。</a:t>
             </a:r>
             <a:endParaRPr lang="en-US" dirty="0"/>
           </a:p>
@@ -1414,7 +1416,7 @@
           <a:p>
             <a:r>
               <a:rPr lang="en-US" dirty="0"/>
-              <a:t>数字をメモしておく（最後の変化の確認にも使える）。</a:t>
+              <a:t/>
             </a:r>
             <a:endParaRPr lang="en-US" dirty="0"/>
           </a:p>
@@ -1678,7 +1680,7 @@
           <a:p>
             <a:r>
               <a:rPr lang="en-US" dirty="0"/>
-              <a:t/>
+              <a:t>お父さんのお酒・家にお金を入れない・毎日の大喧嘩の話が出たら、ワークの場面候補としてメモ。</a:t>
             </a:r>
             <a:endParaRPr lang="en-US" dirty="0"/>
           </a:p>
@@ -1766,7 +1768,7 @@
           <a:p>
             <a:r>
               <a:rPr lang="en-US" dirty="0"/>
-              <a:t/>
+              <a:t>ここは特にゆっくり。出てきた言葉はワークのSTEP4で使える。</a:t>
             </a:r>
             <a:endParaRPr lang="en-US" dirty="0"/>
           </a:p>
@@ -1854,7 +1856,7 @@
           <a:p>
             <a:r>
               <a:rPr lang="en-US" dirty="0"/>
-              <a:t>お父さんのお酒・家にお金を入れない・毎日の大喧嘩の話が出たら、ワークの場面候補としてメモ。</a:t>
+              <a:t>仁部さんが話してくれたエピソード。怖かった？悲しかった？怒り？寂しさ？と、気持ちに名前をつける手伝いをする。</a:t>
             </a:r>
             <a:endParaRPr lang="en-US" dirty="0"/>
           </a:p>
@@ -1942,7 +1944,7 @@
           <a:p>
             <a:r>
               <a:rPr lang="en-US" dirty="0"/>
-              <a:t>ここは特にゆっくり。出てきた言葉はワークのSTEP4で使える。</a:t>
+              <a:t>アートシフトワーク その18（エフィカシーを上げる5次元タイムライン）。画面では「5次元」「VAK」「ポジション」の言葉は使わない。ここから40分。思い込みは20個ではなく、1階層目5つ＋2階層目まで（10個くらい）にしぼる。書き込みは由香が画面の表に打ち込む。</a:t>
             </a:r>
             <a:endParaRPr lang="en-US" dirty="0"/>
           </a:p>
@@ -2030,7 +2032,7 @@
           <a:p>
             <a:r>
               <a:rPr lang="en-US" dirty="0"/>
-              <a:t/>
+              <a:t>ワークに入る前に伝える。今日で全部終わらせようとしなくていい、というメッセージ。</a:t>
             </a:r>
             <a:endParaRPr lang="en-US" dirty="0"/>
           </a:p>
@@ -2118,7 +2120,7 @@
           <a:p>
             <a:r>
               <a:rPr lang="en-US" dirty="0"/>
-              <a:t>アートシフトワーク その18（エフィカシーを上げる5次元タイムライン）。画面では「5次元」「VAK」「ポジション」の言葉は使わない。ここから40分。思い込みは20個ではなく、1階層目5つ＋2階層目まで（10個くらい）にしぼる。書き込みは由香が画面の表に打ち込む。</a:t>
+              <a:t>見せないスライド。画面共有を止めてから読む。読んだら次のスライドで共有を再開。</a:t>
             </a:r>
             <a:endParaRPr lang="en-US" dirty="0"/>
           </a:p>
@@ -2206,7 +2208,7 @@
           <a:p>
             <a:r>
               <a:rPr lang="en-US" dirty="0"/>
-              <a:t>ワークに入る前に伝える。今日で全部終わらせようとしなくていい、というメッセージ。</a:t>
+              <a:t>由香が＿＿の所に本人の言葉を打ち込む。ここで出た言葉が、思い込みの入口（ガイドブックの「私は〇〇を達成したい！ただ…」の代わり）。</a:t>
             </a:r>
             <a:endParaRPr lang="en-US" dirty="0"/>
           </a:p>
@@ -2294,7 +2296,7 @@
           <a:p>
             <a:r>
               <a:rPr lang="en-US" dirty="0"/>
-              <a:t>例：「私は豊かにお金を受け取りたい！ただ…」。目標の言葉は仁部さんと決める。</a:t>
+              <a:t>どちらでもOK。守ってくれていたなら、まずそれを認めてから次へ。</a:t>
             </a:r>
             <a:endParaRPr lang="en-US" dirty="0"/>
           </a:p>
@@ -2470,7 +2472,7 @@
           <a:p>
             <a:r>
               <a:rPr lang="en-US" dirty="0"/>
-              <a:t>由香が画面共有したまま表に打ち込む。仁部さんは話すだけでOK。10個くらい出たら次へ。</a:t>
+              <a:t>由香が画面共有したまま表に打ち込む。仁部さんは話すだけでOK。10個くらい出たら次へ。1階層目で一番強いものを軸に、2階層目も同じ質問で出す。点数がわからない時はOリング・筋肉反射で。例：情報発信が魅力的でない50点／批判されるのが嫌だ75点。</a:t>
             </a:r>
             <a:endParaRPr lang="en-US" dirty="0"/>
           </a:p>
@@ -2646,7 +2648,7 @@
           <a:p>
             <a:r>
               <a:rPr lang="en-US" dirty="0"/>
-              <a:t>表の上位3つに印をつける→その中で一番邪魔しているものを1つ。</a:t>
+              <a:t>見せないスライド。画面共有を止めてから読む。読んだら次のスライドで共有を再開。</a:t>
             </a:r>
             <a:endParaRPr lang="en-US" dirty="0"/>
           </a:p>
@@ -2734,7 +2736,7 @@
           <a:p>
             <a:r>
               <a:rPr lang="en-US" dirty="0"/>
-              <a:t>YESなら、その思い込みでSTEP4へ。</a:t>
+              <a:t>表の上位3つに印をつける→その中で一番邪魔しているものを1つ。判断できない時はOリング・筋肉反射で。</a:t>
             </a:r>
             <a:endParaRPr lang="en-US" dirty="0"/>
           </a:p>
@@ -2822,7 +2824,7 @@
           <a:p>
             <a:r>
               <a:rPr lang="en-US" dirty="0"/>
-              <a:t>VAKという言葉は使わず「何が見える？何が聞こえる？体はどんな感じ？」と聞く。お父さんのお酒・両親の喧嘩の場面が出る可能性が高い。感情が強く出たら止めて呼吸に戻す。ポジ変をしない。</a:t>
+              <a:t>YESなら、その思い込みでSTEP4へ。</a:t>
             </a:r>
             <a:endParaRPr lang="en-US" dirty="0"/>
           </a:p>
@@ -2910,7 +2912,7 @@
           <a:p>
             <a:r>
               <a:rPr lang="en-US" dirty="0"/>
-              <a:t>ポジションの外から、子どもの頃の自分を見ながら。</a:t>
+              <a:t>手順：①今の自分の場所に立ち、今の気持ちを話す ②思い込みが生まれた過去の場面へ移動し、見える・色・聞こえる・体の感じで話す ③その場所から出て、自分を外から見る→次の2つの質問 ④もう一度その場所に戻り、全部吐き出す。VAKという言葉は使わない。お父さんのお酒・両親の喧嘩の場面が出る可能性が高い。感情が強く出たら止めて呼吸に戻す。ポジ変をしない。</a:t>
             </a:r>
             <a:endParaRPr lang="en-US" dirty="0"/>
           </a:p>
@@ -2998,7 +3000,7 @@
           <a:p>
             <a:r>
               <a:rPr lang="en-US" dirty="0"/>
-              <a:t/>
+              <a:t>ポジションの外から、子どもの頃の自分を見ながら。</a:t>
             </a:r>
             <a:endParaRPr lang="en-US" dirty="0"/>
           </a:p>
@@ -3086,7 +3088,7 @@
           <a:p>
             <a:r>
               <a:rPr lang="en-US" dirty="0"/>
-              <a:t>怒鳴る・泣く・大声を出す・体を大きく動かす・殴るなどしてOK。相手が聞いてくれている・謝っているイメージで。出し切るまで待つ。</a:t>
+              <a:t/>
             </a:r>
             <a:endParaRPr lang="en-US" dirty="0"/>
           </a:p>
@@ -3174,7 +3176,7 @@
           <a:p>
             <a:r>
               <a:rPr lang="en-US" dirty="0"/>
-              <a:t>このあと和解の質問を1つずつ。</a:t>
+              <a:t>＿＿に本人の言葉を打ち込む。言いたかったことを全部吐き出す（100％出たか？）。怒鳴る・泣く・大声を出す・体を大きく動かす・殴るなどしてOK。相手が聞いてくれている・謝っているイメージで。出し切るまで待つ。</a:t>
             </a:r>
             <a:endParaRPr lang="en-US" dirty="0"/>
           </a:p>
@@ -3262,7 +3264,7 @@
           <a:p>
             <a:r>
               <a:rPr lang="en-US" dirty="0"/>
-              <a:t>相手の立場を4次元でゆらしながら感じる。</a:t>
+              <a:t>見せないスライド。画面共有を止めてから読む。読んだら次のスライドで共有を再開。</a:t>
             </a:r>
             <a:endParaRPr lang="en-US" dirty="0"/>
           </a:p>
@@ -3350,7 +3352,7 @@
           <a:p>
             <a:r>
               <a:rPr lang="en-US" dirty="0"/>
-              <a:t>相手が目指していたゴールと自分のゴールを統合する（色・形・イメージなどで）。</a:t>
+              <a:t>見える・聞こえる・体の感じを2倍・3倍に大きくしていく。5次元・現在ポジションで具体的に何をしているかも聴く。</a:t>
             </a:r>
             <a:endParaRPr lang="en-US" dirty="0"/>
           </a:p>
@@ -3438,7 +3440,7 @@
           <a:p>
             <a:r>
               <a:rPr lang="en-US" dirty="0"/>
-              <a:t>見える・聞こえる・体の感じを2倍・3倍に大きくしていく。5次元・現在ポジションで具体的に何をしているかも聴く。</a:t>
+              <a:t>由香が本人の言葉をそのまま打ち込む。言葉は本人が決める（由香が作らない）。</a:t>
             </a:r>
             <a:endParaRPr lang="en-US" dirty="0"/>
           </a:p>
@@ -3878,7 +3880,7 @@
           <a:p>
             <a:r>
               <a:rPr lang="en-US" dirty="0"/>
-              <a:t>すべての土台は絶対的安心感。「何をやっても、やらなくても大丈夫」「嫌なことをやめても、愛される」。</a:t>
+              <a:t>「一度で終わりではなく、繰り返し向き合う」につなげる。</a:t>
             </a:r>
             <a:endParaRPr lang="en-US" dirty="0"/>
           </a:p>
@@ -3966,7 +3968,7 @@
           <a:p>
             <a:r>
               <a:rPr lang="en-US" dirty="0"/>
-              <a:t>終了。</a:t>
+              <a:t>すべての土台は絶対的安心感。「何をやっても、やらなくても大丈夫」「嫌なことをやめても、愛される」。</a:t>
             </a:r>
             <a:endParaRPr lang="en-US" dirty="0"/>
           </a:p>
@@ -3990,6 +3992,94 @@
             <a:fld id="{F7021451-1387-4CA6-816F-3879F97B5CBC}" type="slidenum">
               <a:rPr lang="en-US"/>
               <a:t>44</a:t>
+            </a:fld>
+            <a:endParaRPr lang="en-US"/>
+          </a:p>
+        </p:txBody>
+      </p:sp>
+    </p:spTree>
+    <p:extLst>
+      <p:ext uri="{BB962C8B-B14F-4D97-AF65-F5344CB8AC3E}">
+        <p14:creationId xmlns:p14="http://schemas.microsoft.com/office/powerpoint/2010/main" val="1024086991"/>
+      </p:ext>
+    </p:extLst>
+  </p:cSld>
+  <p:clrMapOvr>
+    <a:masterClrMapping/>
+  </p:clrMapOvr>
+</p:notes>
+</file>
+
+<file path=ppt/notesSlides/notesSlide45.xml><?xml version="1.0" encoding="utf-8"?>
+<p:notes xmlns:a="http://schemas.openxmlformats.org/drawingml/2006/main" xmlns:r="http://schemas.openxmlformats.org/officeDocument/2006/relationships" xmlns:p="http://schemas.openxmlformats.org/presentationml/2006/main">
+  <p:cSld>
+    <p:spTree>
+      <p:nvGrpSpPr>
+        <p:cNvPr id="1" name=""/>
+        <p:cNvGrpSpPr/>
+        <p:nvPr/>
+      </p:nvGrpSpPr>
+      <p:grpSpPr>
+        <a:xfrm>
+          <a:off x="0" y="0"/>
+          <a:ext cx="0" cy="0"/>
+          <a:chOff x="0" y="0"/>
+          <a:chExt cx="0" cy="0"/>
+        </a:xfrm>
+      </p:grpSpPr>
+      <p:sp>
+        <p:nvSpPr>
+          <p:cNvPr id="2" name="Slide Image Placeholder 1"/>
+          <p:cNvSpPr>
+            <a:spLocks noGrp="1" noRot="1" noChangeAspect="1"/>
+          </p:cNvSpPr>
+          <p:nvPr>
+            <p:ph type="sldImg"/>
+          </p:nvPr>
+        </p:nvSpPr>
+        <p:spPr/>
+      </p:sp>
+      <p:sp>
+        <p:nvSpPr>
+          <p:cNvPr id="3" name="Notes Placeholder 2"/>
+          <p:cNvSpPr>
+            <a:spLocks noGrp="1"/>
+          </p:cNvSpPr>
+          <p:nvPr>
+            <p:ph type="body" idx="1"/>
+          </p:nvPr>
+        </p:nvSpPr>
+        <p:spPr/>
+        <p:txBody>
+          <a:bodyPr/>
+          <a:lstStyle/>
+          <a:p>
+            <a:r>
+              <a:rPr lang="en-US" dirty="0"/>
+              <a:t>終了。1週間後にLINEで「その後いかがですか？」と連絡する。</a:t>
+            </a:r>
+            <a:endParaRPr lang="en-US" dirty="0"/>
+          </a:p>
+        </p:txBody>
+      </p:sp>
+      <p:sp>
+        <p:nvSpPr>
+          <p:cNvPr id="4" name="Slide Number Placeholder 3"/>
+          <p:cNvSpPr>
+            <a:spLocks noGrp="1"/>
+          </p:cNvSpPr>
+          <p:nvPr>
+            <p:ph type="sldNum" sz="quarter" idx="10"/>
+          </p:nvPr>
+        </p:nvSpPr>
+        <p:spPr/>
+        <p:txBody>
+          <a:bodyPr/>
+          <a:lstStyle/>
+          <a:p>
+            <a:fld id="{F7021451-1387-4CA6-816F-3879F97B5CBC}" type="slidenum">
+              <a:rPr lang="en-US"/>
+              <a:t>45</a:t>
             </a:fld>
             <a:endParaRPr lang="en-US"/>
           </a:p>
@@ -4318,7 +4408,7 @@
           <a:p>
             <a:r>
               <a:rPr lang="en-US" dirty="0"/>
-              <a:t>1日6万回考え、80％はネガティブ、95％は昨日と同じ。これは自分を守るための防衛本能（ホメオスタシス）。悪いことではない。</a:t>
+              <a:t>強い出来事はトラウマ化して、タグ付きファイルとして保存される。脳は過去のマイナス体験を一般化して未来を予測する。→では、その強い思いはいつ刻まれるのか？</a:t>
             </a:r>
             <a:endParaRPr lang="en-US" dirty="0"/>
           </a:p>
@@ -4406,7 +4496,7 @@
           <a:p>
             <a:r>
               <a:rPr lang="en-US" dirty="0"/>
-              <a:t>強い出来事はトラウマ化して、タグ付きファイルとして保存される。脳は過去のマイナス体験を一般化して未来を予測する。→では、その強い思いはいつ刻まれるのか？</a:t>
+              <a:t>ゴールデンエイジまでの言われ方・見てきたことが、そのまま今の基準になっている。由香さんの言葉で補足する。</a:t>
             </a:r>
             <a:endParaRPr lang="en-US" dirty="0"/>
           </a:p>
@@ -5639,7 +5729,7 @@
                   <a:schemeClr val="accent1"/>
                 </a:solidFill>
               </a:rPr>
-              <a:t>第1部　頭の構造を知る ｜ 5 / 8</a:t>
+              <a:t>第1部　頭の構造を知る ｜ 5 / 7</a:t>
             </a:r>
             <a:endParaRPr lang="en-US" sz="1100" dirty="0"/>
           </a:p>
@@ -5680,336 +5770,50 @@
                 <a:ea typeface="Yu Mincho" pitchFamily="34" charset="-122"/>
                 <a:cs typeface="Yu Mincho" pitchFamily="34" charset="-120"/>
               </a:rPr>
-              <a:t>その「強い思い」が刻まれるのが、ゴールデンエイジ</a:t>
+              <a:t>でも、その「当たり前」は人によって全然ちがう</a:t>
             </a:r>
             <a:endParaRPr lang="en-US" sz="2400" dirty="0"/>
           </a:p>
         </p:txBody>
       </p:sp>
-      <p:sp>
-        <p:nvSpPr>
-          <p:cNvPr id="4" name="ga_card0"/>
+      <p:pic>
+        <p:nvPicPr>
+          <p:cNvPr id="4" name="Image 0" descr="講座スライド">    </p:cNvPr>
+          <p:cNvPicPr>
+            <a:picLocks noChangeAspect="1"/>
+          </p:cNvPicPr>
+          <p:nvPr/>
+        </p:nvPicPr>
+        <p:blipFill>
+          <a:blip r:embed="rId1"/>
+          <a:stretch>
+            <a:fillRect/>
+          </a:stretch>
+        </p:blipFill>
+        <p:spPr>
+          <a:xfrm>
+            <a:off x="457200" y="1234440"/>
+            <a:ext cx="5120640" cy="2880360"/>
+          </a:xfrm>
+          <a:prstGeom prst="rect">
+            <a:avLst/>
+          </a:prstGeom>
+        </p:spPr>
+      </p:pic>
+      <p:sp>
+        <p:nvSpPr>
+          <p:cNvPr id="5" name="money_card"/>
           <p:cNvSpPr/>
           <p:nvPr/>
         </p:nvSpPr>
         <p:spPr>
           <a:xfrm>
-            <a:off x="457200" y="1234440"/>
-            <a:ext cx="5120640" cy="822960"/>
+            <a:off x="5806440" y="1234440"/>
+            <a:ext cx="2880360" cy="2880360"/>
           </a:xfrm>
           <a:prstGeom prst="roundRect">
             <a:avLst>
-              <a:gd name="adj" fmla="val 13333"/>
-            </a:avLst>
-          </a:prstGeom>
-          <a:solidFill>
-            <a:srgbClr val="FDFAF4"/>
-          </a:solidFill>
-          <a:ln w="9525">
-            <a:solidFill>
-              <a:srgbClr val="E9D9B6"/>
-            </a:solidFill>
-            <a:prstDash val="solid"/>
-          </a:ln>
-        </p:spPr>
-      </p:sp>
-      <p:sp>
-        <p:nvSpPr>
-          <p:cNvPr id="5" name="ga0_c"/>
-          <p:cNvSpPr/>
-          <p:nvPr/>
-        </p:nvSpPr>
-        <p:spPr>
-          <a:xfrm>
-            <a:off x="621792" y="1453896"/>
-            <a:ext cx="384048" cy="384048"/>
-          </a:xfrm>
-          <a:prstGeom prst="ellipse">
-            <a:avLst/>
-          </a:prstGeom>
-          <a:solidFill>
-            <a:srgbClr val="B08A4E"/>
-          </a:solidFill>
-          <a:ln/>
-        </p:spPr>
-      </p:sp>
-      <p:sp>
-        <p:nvSpPr>
-          <p:cNvPr id="6" name="ga0_n"/>
-          <p:cNvSpPr txBox="1"/>
-          <p:nvPr/>
-        </p:nvSpPr>
-        <p:spPr>
-          <a:xfrm>
-            <a:off x="621792" y="1453896"/>
-            <a:ext cx="384048" cy="384048"/>
-          </a:xfrm>
-          <a:prstGeom prst="rect">
-            <a:avLst/>
-          </a:prstGeom>
-          <a:noFill/>
-          <a:ln/>
-        </p:spPr>
-        <p:txBody>
-          <a:bodyPr wrap="square" lIns="0" tIns="0" rIns="0" bIns="0" rtlCol="0" anchor="ctr"/>
-          <a:lstStyle/>
-          <a:p>
-            <a:pPr algn="ctr" indent="0" marL="0">
-              <a:buNone/>
-            </a:pPr>
-            <a:r>
-              <a:rPr lang="en-US" sz="1500" b="1" dirty="0">
-                <a:solidFill>
-                  <a:schemeClr val="bg1"/>
-                </a:solidFill>
-              </a:rPr>
-              <a:t>1</a:t>
-            </a:r>
-            <a:endParaRPr lang="en-US" sz="1500" dirty="0"/>
-          </a:p>
-        </p:txBody>
-      </p:sp>
-      <p:sp>
-        <p:nvSpPr>
-          <p:cNvPr id="7" name="ga_head0"/>
-          <p:cNvSpPr txBox="1"/>
-          <p:nvPr/>
-        </p:nvSpPr>
-        <p:spPr>
-          <a:xfrm>
-            <a:off x="1143000" y="1298448"/>
-            <a:ext cx="4297680" cy="347472"/>
-          </a:xfrm>
-          <a:prstGeom prst="rect">
-            <a:avLst/>
-          </a:prstGeom>
-          <a:noFill/>
-          <a:ln/>
-        </p:spPr>
-        <p:txBody>
-          <a:bodyPr wrap="square" lIns="1016" tIns="1016" rIns="1016" bIns="1016" rtlCol="0" anchor="t"/>
-          <a:lstStyle/>
-          <a:p>
-            <a:pPr indent="0" marL="0">
-              <a:buNone/>
-            </a:pPr>
-            <a:r>
-              <a:rPr lang="en-US" sz="1600" b="1" dirty="0">
-                <a:solidFill>
-                  <a:schemeClr val="tx2"/>
-                </a:solidFill>
-              </a:rPr>
-              <a:t>子どもの頃</a:t>
-            </a:r>
-            <a:endParaRPr lang="en-US" sz="1600" dirty="0"/>
-          </a:p>
-        </p:txBody>
-      </p:sp>
-      <p:sp>
-        <p:nvSpPr>
-          <p:cNvPr id="8" name="ga_body0"/>
-          <p:cNvSpPr txBox="1"/>
-          <p:nvPr/>
-        </p:nvSpPr>
-        <p:spPr>
-          <a:xfrm>
-            <a:off x="1143000" y="1645920"/>
-            <a:ext cx="4297680" cy="365760"/>
-          </a:xfrm>
-          <a:prstGeom prst="rect">
-            <a:avLst/>
-          </a:prstGeom>
-          <a:noFill/>
-          <a:ln/>
-        </p:spPr>
-        <p:txBody>
-          <a:bodyPr wrap="square" lIns="1016" tIns="1016" rIns="1016" bIns="1016" rtlCol="0" anchor="t"/>
-          <a:lstStyle/>
-          <a:p>
-            <a:pPr indent="0" marL="0">
-              <a:buNone/>
-            </a:pPr>
-            <a:r>
-              <a:rPr lang="en-US" sz="1400" dirty="0">
-                <a:solidFill>
-                  <a:schemeClr val="tx1"/>
-                </a:solidFill>
-              </a:rPr>
-              <a:t>家の中で見たこと・聞いた言葉・言われ方</a:t>
-            </a:r>
-            <a:endParaRPr lang="en-US" sz="1400" dirty="0"/>
-          </a:p>
-        </p:txBody>
-      </p:sp>
-      <p:sp>
-        <p:nvSpPr>
-          <p:cNvPr id="9" name="ga_card1"/>
-          <p:cNvSpPr/>
-          <p:nvPr/>
-        </p:nvSpPr>
-        <p:spPr>
-          <a:xfrm>
-            <a:off x="457200" y="2221992"/>
-            <a:ext cx="5120640" cy="822960"/>
-          </a:xfrm>
-          <a:prstGeom prst="roundRect">
-            <a:avLst>
-              <a:gd name="adj" fmla="val 13333"/>
-            </a:avLst>
-          </a:prstGeom>
-          <a:solidFill>
-            <a:srgbClr val="FDFAF4"/>
-          </a:solidFill>
-          <a:ln w="9525">
-            <a:solidFill>
-              <a:srgbClr val="E9D9B6"/>
-            </a:solidFill>
-            <a:prstDash val="solid"/>
-          </a:ln>
-        </p:spPr>
-      </p:sp>
-      <p:sp>
-        <p:nvSpPr>
-          <p:cNvPr id="10" name="ga1_c"/>
-          <p:cNvSpPr/>
-          <p:nvPr/>
-        </p:nvSpPr>
-        <p:spPr>
-          <a:xfrm>
-            <a:off x="621792" y="2441448"/>
-            <a:ext cx="384048" cy="384048"/>
-          </a:xfrm>
-          <a:prstGeom prst="ellipse">
-            <a:avLst/>
-          </a:prstGeom>
-          <a:solidFill>
-            <a:srgbClr val="B08A4E"/>
-          </a:solidFill>
-          <a:ln/>
-        </p:spPr>
-      </p:sp>
-      <p:sp>
-        <p:nvSpPr>
-          <p:cNvPr id="11" name="ga1_n"/>
-          <p:cNvSpPr txBox="1"/>
-          <p:nvPr/>
-        </p:nvSpPr>
-        <p:spPr>
-          <a:xfrm>
-            <a:off x="621792" y="2441448"/>
-            <a:ext cx="384048" cy="384048"/>
-          </a:xfrm>
-          <a:prstGeom prst="rect">
-            <a:avLst/>
-          </a:prstGeom>
-          <a:noFill/>
-          <a:ln/>
-        </p:spPr>
-        <p:txBody>
-          <a:bodyPr wrap="square" lIns="0" tIns="0" rIns="0" bIns="0" rtlCol="0" anchor="ctr"/>
-          <a:lstStyle/>
-          <a:p>
-            <a:pPr algn="ctr" indent="0" marL="0">
-              <a:buNone/>
-            </a:pPr>
-            <a:r>
-              <a:rPr lang="en-US" sz="1500" b="1" dirty="0">
-                <a:solidFill>
-                  <a:schemeClr val="bg1"/>
-                </a:solidFill>
-              </a:rPr>
-              <a:t>2</a:t>
-            </a:r>
-            <a:endParaRPr lang="en-US" sz="1500" dirty="0"/>
-          </a:p>
-        </p:txBody>
-      </p:sp>
-      <p:sp>
-        <p:nvSpPr>
-          <p:cNvPr id="12" name="ga_head1"/>
-          <p:cNvSpPr txBox="1"/>
-          <p:nvPr/>
-        </p:nvSpPr>
-        <p:spPr>
-          <a:xfrm>
-            <a:off x="1143000" y="2286000"/>
-            <a:ext cx="4297680" cy="347472"/>
-          </a:xfrm>
-          <a:prstGeom prst="rect">
-            <a:avLst/>
-          </a:prstGeom>
-          <a:noFill/>
-          <a:ln/>
-        </p:spPr>
-        <p:txBody>
-          <a:bodyPr wrap="square" lIns="1016" tIns="1016" rIns="1016" bIns="1016" rtlCol="0" anchor="t"/>
-          <a:lstStyle/>
-          <a:p>
-            <a:pPr indent="0" marL="0">
-              <a:buNone/>
-            </a:pPr>
-            <a:r>
-              <a:rPr lang="en-US" sz="1600" b="1" dirty="0">
-                <a:solidFill>
-                  <a:schemeClr val="tx2"/>
-                </a:solidFill>
-              </a:rPr>
-              <a:t>脳が保存</a:t>
-            </a:r>
-            <a:endParaRPr lang="en-US" sz="1600" dirty="0"/>
-          </a:p>
-        </p:txBody>
-      </p:sp>
-      <p:sp>
-        <p:nvSpPr>
-          <p:cNvPr id="13" name="ga_body1"/>
-          <p:cNvSpPr txBox="1"/>
-          <p:nvPr/>
-        </p:nvSpPr>
-        <p:spPr>
-          <a:xfrm>
-            <a:off x="1143000" y="2633472"/>
-            <a:ext cx="4297680" cy="365760"/>
-          </a:xfrm>
-          <a:prstGeom prst="rect">
-            <a:avLst/>
-          </a:prstGeom>
-          <a:noFill/>
-          <a:ln/>
-        </p:spPr>
-        <p:txBody>
-          <a:bodyPr wrap="square" lIns="1016" tIns="1016" rIns="1016" bIns="1016" rtlCol="0" anchor="t"/>
-          <a:lstStyle/>
-          <a:p>
-            <a:pPr indent="0" marL="0">
-              <a:buNone/>
-            </a:pPr>
-            <a:r>
-              <a:rPr lang="en-US" sz="1400" dirty="0">
-                <a:solidFill>
-                  <a:schemeClr val="tx1"/>
-                </a:solidFill>
-              </a:rPr>
-              <a:t>「これが当たり前」として記憶する</a:t>
-            </a:r>
-            <a:endParaRPr lang="en-US" sz="1400" dirty="0"/>
-          </a:p>
-        </p:txBody>
-      </p:sp>
-      <p:sp>
-        <p:nvSpPr>
-          <p:cNvPr id="14" name="ga_card2"/>
-          <p:cNvSpPr/>
-          <p:nvPr/>
-        </p:nvSpPr>
-        <p:spPr>
-          <a:xfrm>
-            <a:off x="457200" y="3209544"/>
-            <a:ext cx="5120640" cy="822960"/>
-          </a:xfrm>
-          <a:prstGeom prst="roundRect">
-            <a:avLst>
-              <a:gd name="adj" fmla="val 13333"/>
+              <a:gd name="adj" fmla="val 3810"/>
             </a:avLst>
           </a:prstGeom>
           <a:solidFill>
@@ -6022,37 +5826,21 @@
             <a:prstDash val="solid"/>
           </a:ln>
         </p:spPr>
-      </p:sp>
-      <p:sp>
-        <p:nvSpPr>
-          <p:cNvPr id="15" name="ga2_c"/>
-          <p:cNvSpPr/>
-          <p:nvPr/>
-        </p:nvSpPr>
-        <p:spPr>
-          <a:xfrm>
-            <a:off x="621792" y="3429000"/>
-            <a:ext cx="384048" cy="384048"/>
-          </a:xfrm>
-          <a:prstGeom prst="ellipse">
-            <a:avLst/>
-          </a:prstGeom>
-          <a:solidFill>
-            <a:srgbClr val="B08A4E"/>
-          </a:solidFill>
-          <a:ln/>
-        </p:spPr>
-      </p:sp>
-      <p:sp>
-        <p:nvSpPr>
-          <p:cNvPr id="16" name="ga2_n"/>
+        <p:txBody>
+          <a:bodyPr/>
+          <a:p/>
+        </p:txBody>
+      </p:sp>
+      <p:sp>
+        <p:nvSpPr>
+          <p:cNvPr id="6" name="money_head"/>
           <p:cNvSpPr txBox="1"/>
           <p:nvPr/>
         </p:nvSpPr>
         <p:spPr>
           <a:xfrm>
-            <a:off x="621792" y="3429000"/>
-            <a:ext cx="384048" cy="384048"/>
+            <a:off x="5989320" y="1371600"/>
+            <a:ext cx="2560320" cy="365760"/>
           </a:xfrm>
           <a:prstGeom prst="rect">
             <a:avLst/>
@@ -6061,19 +5849,19 @@
           <a:ln/>
         </p:spPr>
         <p:txBody>
-          <a:bodyPr wrap="square" lIns="0" tIns="0" rIns="0" bIns="0" rtlCol="0" anchor="ctr"/>
-          <a:lstStyle/>
-          <a:p>
-            <a:pPr algn="ctr" indent="0" marL="0">
+          <a:bodyPr wrap="square" lIns="1016" tIns="1016" rIns="1016" bIns="1016" rtlCol="0" anchor="t"/>
+          <a:lstStyle/>
+          <a:p>
+            <a:pPr indent="0" marL="0">
               <a:buNone/>
             </a:pPr>
             <a:r>
               <a:rPr lang="en-US" sz="1500" b="1" dirty="0">
                 <a:solidFill>
-                  <a:schemeClr val="bg1"/>
-                </a:solidFill>
-              </a:rPr>
-              <a:t>3</a:t>
+                  <a:schemeClr val="accent2"/>
+                </a:solidFill>
+              </a:rPr>
+              <a:t>お金で言うと…</a:t>
             </a:r>
             <a:endParaRPr lang="en-US" sz="1500" dirty="0"/>
           </a:p>
@@ -6081,14 +5869,14 @@
       </p:sp>
       <p:sp>
         <p:nvSpPr>
-          <p:cNvPr id="17" name="ga_head2"/>
+          <p:cNvPr id="7" name="money_body"/>
           <p:cNvSpPr txBox="1"/>
           <p:nvPr/>
         </p:nvSpPr>
         <p:spPr>
           <a:xfrm>
-            <a:off x="1143000" y="3273552"/>
-            <a:ext cx="4297680" cy="347472"/>
+            <a:off x="5989320" y="1783080"/>
+            <a:ext cx="2560320" cy="2240280"/>
           </a:xfrm>
           <a:prstGeom prst="rect">
             <a:avLst/>
@@ -6101,42 +5889,26 @@
           <a:lstStyle/>
           <a:p>
             <a:pPr indent="0" marL="0">
-              <a:buNone/>
-            </a:pPr>
-            <a:r>
-              <a:rPr lang="en-US" sz="1600" b="1" dirty="0">
-                <a:solidFill>
-                  <a:schemeClr val="tx2"/>
-                </a:solidFill>
-              </a:rPr>
-              <a:t>大人になった今</a:t>
-            </a:r>
-            <a:endParaRPr lang="en-US" sz="1600" dirty="0"/>
-          </a:p>
-        </p:txBody>
-      </p:sp>
-      <p:sp>
-        <p:nvSpPr>
-          <p:cNvPr id="18" name="ga_body2"/>
-          <p:cNvSpPr txBox="1"/>
-          <p:nvPr/>
-        </p:nvSpPr>
-        <p:spPr>
-          <a:xfrm>
-            <a:off x="1143000" y="3621024"/>
-            <a:ext cx="4297680" cy="365760"/>
-          </a:xfrm>
-          <a:prstGeom prst="rect">
-            <a:avLst/>
-          </a:prstGeom>
-          <a:noFill/>
-          <a:ln/>
-        </p:spPr>
-        <p:txBody>
-          <a:bodyPr wrap="square" lIns="1016" tIns="1016" rIns="1016" bIns="1016" rtlCol="0" anchor="t"/>
-          <a:lstStyle/>
+              <a:spcAft>
+                <a:spcPts val="600"/>
+              </a:spcAft>
+              <a:buNone/>
+            </a:pPr>
+            <a:r>
+              <a:rPr lang="en-US" sz="1400" dirty="0">
+                <a:solidFill>
+                  <a:schemeClr val="tx1"/>
+                </a:solidFill>
+              </a:rPr>
+              <a:t>あなたの「お金の当たり前」は、あなたの家で作られたもの。</a:t>
+            </a:r>
+            <a:endParaRPr lang="en-US" sz="1400" dirty="0"/>
+          </a:p>
           <a:p>
             <a:pPr indent="0" marL="0">
+              <a:spcAft>
+                <a:spcPts val="600"/>
+              </a:spcAft>
               <a:buNone/>
             </a:pPr>
             <a:r>
@@ -6145,106 +5917,7 @@
                   <a:schemeClr val="tx1"/>
                 </a:solidFill>
               </a:rPr>
-              <a:t>その当たり前が、自分の基準として動き続ける</a:t>
-            </a:r>
-            <a:endParaRPr lang="en-US" sz="1400" dirty="0"/>
-          </a:p>
-        </p:txBody>
-      </p:sp>
-      <p:sp>
-        <p:nvSpPr>
-          <p:cNvPr id="19" name="money_card"/>
-          <p:cNvSpPr/>
-          <p:nvPr/>
-        </p:nvSpPr>
-        <p:spPr>
-          <a:xfrm>
-            <a:off x="5806440" y="1234440"/>
-            <a:ext cx="2880360" cy="2798064"/>
-          </a:xfrm>
-          <a:prstGeom prst="roundRect">
-            <a:avLst>
-              <a:gd name="adj" fmla="val 3922"/>
-            </a:avLst>
-          </a:prstGeom>
-          <a:solidFill>
-            <a:srgbClr val="F8EBEE"/>
-          </a:solidFill>
-          <a:ln w="9525">
-            <a:solidFill>
-              <a:srgbClr val="E9D9B6"/>
-            </a:solidFill>
-            <a:prstDash val="solid"/>
-          </a:ln>
-        </p:spPr>
-      </p:sp>
-      <p:sp>
-        <p:nvSpPr>
-          <p:cNvPr id="20" name="money_head"/>
-          <p:cNvSpPr txBox="1"/>
-          <p:nvPr/>
-        </p:nvSpPr>
-        <p:spPr>
-          <a:xfrm>
-            <a:off x="5989320" y="1371600"/>
-            <a:ext cx="2560320" cy="365760"/>
-          </a:xfrm>
-          <a:prstGeom prst="rect">
-            <a:avLst/>
-          </a:prstGeom>
-          <a:noFill/>
-          <a:ln/>
-        </p:spPr>
-        <p:txBody>
-          <a:bodyPr wrap="square" lIns="1016" tIns="1016" rIns="1016" bIns="1016" rtlCol="0" anchor="t"/>
-          <a:lstStyle/>
-          <a:p>
-            <a:pPr indent="0" marL="0">
-              <a:buNone/>
-            </a:pPr>
-            <a:r>
-              <a:rPr lang="en-US" sz="1500" b="1" dirty="0">
-                <a:solidFill>
-                  <a:schemeClr val="accent2"/>
-                </a:solidFill>
-              </a:rPr>
-              <a:t>お金で言うと…</a:t>
-            </a:r>
-            <a:endParaRPr lang="en-US" sz="1500" dirty="0"/>
-          </a:p>
-        </p:txBody>
-      </p:sp>
-      <p:sp>
-        <p:nvSpPr>
-          <p:cNvPr id="21" name="money_body"/>
-          <p:cNvSpPr txBox="1"/>
-          <p:nvPr/>
-        </p:nvSpPr>
-        <p:spPr>
-          <a:xfrm>
-            <a:off x="5989320" y="1783080"/>
-            <a:ext cx="2560320" cy="2103120"/>
-          </a:xfrm>
-          <a:prstGeom prst="rect">
-            <a:avLst/>
-          </a:prstGeom>
-          <a:noFill/>
-          <a:ln/>
-        </p:spPr>
-        <p:txBody>
-          <a:bodyPr wrap="square" lIns="1016" tIns="1016" rIns="1016" bIns="1016" rtlCol="0" anchor="t"/>
-          <a:lstStyle/>
-          <a:p>
-            <a:pPr indent="0" marL="0">
-              <a:buNone/>
-            </a:pPr>
-            <a:r>
-              <a:rPr lang="en-US" sz="1400" dirty="0">
-                <a:solidFill>
-                  <a:schemeClr val="tx1"/>
-                </a:solidFill>
-              </a:rPr>
-              <a:t>子どもの頃に、お金のまわりで見たこと・聞いたことが、今の「お金の当たり前」になっています。</a:t>
+              <a:t>作られたものだから、書き換えられます。</a:t>
             </a:r>
             <a:endParaRPr lang="en-US" sz="1400" dirty="0"/>
           </a:p>
@@ -6350,7 +6023,7 @@
                   <a:schemeClr val="accent1"/>
                 </a:solidFill>
               </a:rPr>
-              <a:t>第1部　頭の構造を知る ｜ 6 / 8</a:t>
+              <a:t>第1部　頭の構造を知る ｜ 6 / 7</a:t>
             </a:r>
             <a:endParaRPr lang="en-US" sz="1100" dirty="0"/>
           </a:p>
@@ -6391,7 +6064,7 @@
                 <a:ea typeface="Yu Mincho" pitchFamily="34" charset="-122"/>
                 <a:cs typeface="Yu Mincho" pitchFamily="34" charset="-120"/>
               </a:rPr>
-              <a:t>でも、その「当たり前」は人によって全然ちがう</a:t>
+              <a:t>ポジティブとは「入れ替えられる」こと</a:t>
             </a:r>
             <a:endParaRPr lang="en-US" sz="2400" dirty="0"/>
           </a:p>
@@ -6447,6 +6120,10 @@
             <a:prstDash val="solid"/>
           </a:ln>
         </p:spPr>
+        <p:txBody>
+          <a:bodyPr/>
+          <a:p/>
+        </p:txBody>
       </p:sp>
       <p:sp>
         <p:nvSpPr>
@@ -6517,7 +6194,7 @@
                   <a:schemeClr val="tx1"/>
                 </a:solidFill>
               </a:rPr>
-              <a:t>あなたの「お金の当たり前」は、あなたの家で作られたもの。</a:t>
+              <a:t>「お金は怖い」を無理に「お金が好き」に変えることではありません。</a:t>
             </a:r>
             <a:endParaRPr lang="en-US" sz="1400" dirty="0"/>
           </a:p>
@@ -6534,7 +6211,7 @@
                   <a:schemeClr val="tx1"/>
                 </a:solidFill>
               </a:rPr>
-              <a:t>作られたものだから、書き換えられます。</a:t>
+              <a:t>古い情報を、新しい情報に入れ替えられる状態のことです。</a:t>
             </a:r>
             <a:endParaRPr lang="en-US" sz="1400" dirty="0"/>
           </a:p>
@@ -6640,7 +6317,7 @@
                   <a:schemeClr val="accent1"/>
                 </a:solidFill>
               </a:rPr>
-              <a:t>第1部　頭の構造を知る ｜ 7 / 8</a:t>
+              <a:t>第1部　頭の構造を知る ｜ 7 / 7</a:t>
             </a:r>
             <a:endParaRPr lang="en-US" sz="1100" dirty="0"/>
           </a:p>
@@ -6681,7 +6358,7 @@
                 <a:ea typeface="Yu Mincho" pitchFamily="34" charset="-122"/>
                 <a:cs typeface="Yu Mincho" pitchFamily="34" charset="-120"/>
               </a:rPr>
-              <a:t>ポジティブとは「入れ替えられる」こと</a:t>
+              <a:t>入れ替えるには、感情を順番に感じ切る</a:t>
             </a:r>
             <a:endParaRPr lang="en-US" sz="2400" dirty="0"/>
           </a:p>
@@ -6704,7 +6381,7 @@
         <p:spPr>
           <a:xfrm>
             <a:off x="457200" y="1234440"/>
-            <a:ext cx="5120640" cy="2880360"/>
+            <a:ext cx="5120640" cy="2857957"/>
           </a:xfrm>
           <a:prstGeom prst="rect">
             <a:avLst/>
@@ -6720,11 +6397,11 @@
         <p:spPr>
           <a:xfrm>
             <a:off x="5806440" y="1234440"/>
-            <a:ext cx="2880360" cy="2880360"/>
+            <a:ext cx="2880360" cy="2857957"/>
           </a:xfrm>
           <a:prstGeom prst="roundRect">
             <a:avLst>
-              <a:gd name="adj" fmla="val 3810"/>
+              <a:gd name="adj" fmla="val 3839"/>
             </a:avLst>
           </a:prstGeom>
           <a:solidFill>
@@ -6737,6 +6414,10 @@
             <a:prstDash val="solid"/>
           </a:ln>
         </p:spPr>
+        <p:txBody>
+          <a:bodyPr/>
+          <a:p/>
+        </p:txBody>
       </p:sp>
       <p:sp>
         <p:nvSpPr>
@@ -6783,7 +6464,7 @@
         <p:spPr>
           <a:xfrm>
             <a:off x="5989320" y="1783080"/>
-            <a:ext cx="2560320" cy="2240280"/>
+            <a:ext cx="2560320" cy="2217877"/>
           </a:xfrm>
           <a:prstGeom prst="rect">
             <a:avLst/>
@@ -6807,7 +6488,7 @@
                   <a:schemeClr val="tx1"/>
                 </a:solidFill>
               </a:rPr>
-              <a:t>「お金は怖い」を無理に「お金が好き」に変えることではありません。</a:t>
+              <a:t>怒りや悲しみが出てきても大丈夫。</a:t>
             </a:r>
             <a:endParaRPr lang="en-US" sz="1400" dirty="0"/>
           </a:p>
@@ -6824,7 +6505,7 @@
                   <a:schemeClr val="tx1"/>
                 </a:solidFill>
               </a:rPr>
-              <a:t>古い情報を、新しい情報に入れ替えられる状態のことです。</a:t>
+              <a:t>それは消化が進んでいるサインです。</a:t>
             </a:r>
             <a:endParaRPr lang="en-US" sz="1400" dirty="0"/>
           </a:p>
@@ -6902,14 +6583,40 @@
       </p:grpSpPr>
       <p:sp>
         <p:nvSpPr>
-          <p:cNvPr id="2" name="label"/>
+          <p:cNvPr id="2" name="frame"/>
+          <p:cNvSpPr/>
+          <p:nvPr/>
+        </p:nvSpPr>
+        <p:spPr>
+          <a:xfrm>
+            <a:off x="228600" y="137160"/>
+            <a:ext cx="8686800" cy="4526280"/>
+          </a:xfrm>
+          <a:prstGeom prst="rect">
+            <a:avLst/>
+          </a:prstGeom>
+          <a:ln w="12700">
+            <a:solidFill>
+              <a:srgbClr val="B08A4E"/>
+            </a:solidFill>
+            <a:prstDash val="solid"/>
+          </a:ln>
+        </p:spPr>
+        <p:txBody>
+          <a:bodyPr/>
+          <a:p/>
+        </p:txBody>
+      </p:sp>
+      <p:sp>
+        <p:nvSpPr>
+          <p:cNvPr id="3" name="qlabel"/>
           <p:cNvSpPr txBox="1"/>
           <p:nvPr/>
         </p:nvSpPr>
         <p:spPr>
           <a:xfrm>
-            <a:off x="457200" y="182880"/>
-            <a:ext cx="5486400" cy="274320"/>
+            <a:off x="457200" y="320040"/>
+            <a:ext cx="8229600" cy="365760"/>
           </a:xfrm>
           <a:prstGeom prst="rect">
             <a:avLst/>
@@ -6921,24 +6628,24 @@
           <a:bodyPr wrap="square" lIns="0" tIns="0" rIns="0" bIns="0" rtlCol="0" anchor="t"/>
           <a:lstStyle/>
           <a:p>
-            <a:pPr indent="0" marL="0">
-              <a:buNone/>
-            </a:pPr>
-            <a:r>
-              <a:rPr lang="en-US" sz="1100" b="1" dirty="0">
-                <a:solidFill>
-                  <a:schemeClr val="accent1"/>
-                </a:solidFill>
-              </a:rPr>
-              <a:t>第1部　頭の構造を知る ｜ 8 / 8</a:t>
-            </a:r>
-            <a:endParaRPr lang="en-US" sz="1100" dirty="0"/>
-          </a:p>
-        </p:txBody>
-      </p:sp>
-      <p:sp>
-        <p:nvSpPr>
-          <p:cNvPr id="3" name="Text 0"/>
+            <a:pPr algn="ctr" indent="0" marL="0">
+              <a:buNone/>
+            </a:pPr>
+            <a:r>
+              <a:rPr lang="en-US" sz="1300" b="1" dirty="0">
+                <a:solidFill>
+                  <a:schemeClr val="accent2"/>
+                </a:solidFill>
+              </a:rPr>
+              <a:t>第2部へ</a:t>
+            </a:r>
+            <a:endParaRPr lang="en-US" sz="1300" dirty="0"/>
+          </a:p>
+        </p:txBody>
+      </p:sp>
+      <p:sp>
+        <p:nvSpPr>
+          <p:cNvPr id="4" name="Text 0"/>
           <p:cNvSpPr/>
           <p:nvPr>
             <p:ph idx="100" type="title" hasCustomPrompt="1"/>
@@ -6946,8 +6653,8 @@
         </p:nvSpPr>
         <p:spPr>
           <a:xfrm>
-            <a:off x="457200" y="457200"/>
-            <a:ext cx="8229600" cy="594360"/>
+            <a:off x="914400" y="1554480"/>
+            <a:ext cx="7315200" cy="1554480"/>
           </a:xfrm>
           <a:prstGeom prst="rect">
             <a:avLst/>
@@ -6956,88 +6663,56 @@
           <a:ln/>
         </p:spPr>
         <p:txBody>
-          <a:bodyPr wrap="square" lIns="0" tIns="0" rIns="0" bIns="0" rtlCol="0" anchor="ctr"/>
-          <a:lstStyle/>
-          <a:p>
-            <a:pPr algn="l" indent="0" marL="0">
-              <a:buNone/>
-            </a:pPr>
-            <a:r>
-              <a:rPr lang="en-US" sz="2400" b="1" dirty="0">
-                <a:solidFill>
-                  <a:schemeClr val="accent2"/>
+          <a:bodyPr wrap="square" rtlCol="0" anchor="ctr"/>
+          <a:lstStyle/>
+          <a:p>
+            <a:pPr algn="ctr" indent="0" marL="0">
+              <a:buNone/>
+            </a:pPr>
+            <a:r>
+              <a:rPr lang="en-US" sz="3200" b="1" dirty="0">
+                <a:solidFill>
+                  <a:schemeClr val="tx2"/>
                 </a:solidFill>
                 <a:latin typeface="Yu Mincho" pitchFamily="34" charset="0"/>
                 <a:ea typeface="Yu Mincho" pitchFamily="34" charset="-122"/>
                 <a:cs typeface="Yu Mincho" pitchFamily="34" charset="-120"/>
               </a:rPr>
-              <a:t>入れ替えるには、感情を順番に感じ切る</a:t>
-            </a:r>
-            <a:endParaRPr lang="en-US" sz="2400" dirty="0"/>
-          </a:p>
-        </p:txBody>
-      </p:sp>
-      <p:pic>
-        <p:nvPicPr>
-          <p:cNvPr id="4" name="Image 0" descr="講座スライド">    </p:cNvPr>
-          <p:cNvPicPr>
-            <a:picLocks noChangeAspect="1"/>
-          </p:cNvPicPr>
-          <p:nvPr/>
-        </p:nvPicPr>
-        <p:blipFill>
-          <a:blip r:embed="rId1"/>
-          <a:stretch>
-            <a:fillRect/>
-          </a:stretch>
-        </p:blipFill>
-        <p:spPr>
-          <a:xfrm>
-            <a:off x="457200" y="1234440"/>
-            <a:ext cx="5120640" cy="2857957"/>
-          </a:xfrm>
-          <a:prstGeom prst="rect">
-            <a:avLst/>
-          </a:prstGeom>
-        </p:spPr>
-      </p:pic>
-      <p:sp>
-        <p:nvSpPr>
-          <p:cNvPr id="5" name="money_card"/>
+              <a:t>では、あなたの「お金の当たり前」は</a:t>
+            </a:r>
+            <a:endParaRPr lang="en-US" sz="3200" dirty="0"/>
+          </a:p>
+          <a:p>
+            <a:pPr algn="ctr" indent="0" marL="0">
+              <a:buNone/>
+            </a:pPr>
+            <a:r>
+              <a:rPr lang="en-US" sz="3200" b="1" dirty="0">
+                <a:solidFill>
+                  <a:schemeClr val="tx2"/>
+                </a:solidFill>
+                <a:latin typeface="Yu Mincho" pitchFamily="34" charset="0"/>
+                <a:ea typeface="Yu Mincho" pitchFamily="34" charset="-122"/>
+                <a:cs typeface="Yu Mincho" pitchFamily="34" charset="-120"/>
+              </a:rPr>
+              <a:t>どこで作られたのでしょう？</a:t>
+            </a:r>
+            <a:endParaRPr lang="en-US" sz="3200" dirty="0"/>
+          </a:p>
+        </p:txBody>
+      </p:sp>
+      <p:sp>
+        <p:nvSpPr>
+          <p:cNvPr id="5" name="Text 0"/>
           <p:cNvSpPr/>
-          <p:nvPr/>
-        </p:nvSpPr>
-        <p:spPr>
-          <a:xfrm>
-            <a:off x="5806440" y="1234440"/>
-            <a:ext cx="2880360" cy="2857957"/>
-          </a:xfrm>
-          <a:prstGeom prst="roundRect">
-            <a:avLst>
-              <a:gd name="adj" fmla="val 3839"/>
-            </a:avLst>
-          </a:prstGeom>
-          <a:solidFill>
-            <a:srgbClr val="F8EBEE"/>
-          </a:solidFill>
-          <a:ln w="9525">
-            <a:solidFill>
-              <a:srgbClr val="E9D9B6"/>
-            </a:solidFill>
-            <a:prstDash val="solid"/>
-          </a:ln>
-        </p:spPr>
-      </p:sp>
-      <p:sp>
-        <p:nvSpPr>
-          <p:cNvPr id="6" name="money_head"/>
-          <p:cNvSpPr txBox="1"/>
-          <p:nvPr/>
-        </p:nvSpPr>
-        <p:spPr>
-          <a:xfrm>
-            <a:off x="5989320" y="1371600"/>
-            <a:ext cx="2560320" cy="365760"/>
+          <p:nvPr>
+            <p:ph idx="101" type="body" hasCustomPrompt="1"/>
+          </p:nvPr>
+        </p:nvSpPr>
+        <p:spPr>
+          <a:xfrm>
+            <a:off x="914400" y="3200400"/>
+            <a:ext cx="7315200" cy="731520"/>
           </a:xfrm>
           <a:prstGeom prst="rect">
             <a:avLst/>
@@ -7046,77 +6721,21 @@
           <a:ln/>
         </p:spPr>
         <p:txBody>
-          <a:bodyPr wrap="square" lIns="1016" tIns="1016" rIns="1016" bIns="1016" rtlCol="0" anchor="t"/>
-          <a:lstStyle/>
-          <a:p>
-            <a:pPr indent="0" marL="0">
-              <a:buNone/>
-            </a:pPr>
-            <a:r>
-              <a:rPr lang="en-US" sz="1500" b="1" dirty="0">
+          <a:bodyPr wrap="square" rtlCol="0" anchor="t"/>
+          <a:lstStyle/>
+          <a:p>
+            <a:pPr algn="ctr" indent="0" marL="0">
+              <a:buNone/>
+            </a:pPr>
+            <a:r>
+              <a:rPr lang="en-US" sz="1500" dirty="0">
                 <a:solidFill>
                   <a:schemeClr val="accent2"/>
                 </a:solidFill>
               </a:rPr>
-              <a:t>お金で言うと…</a:t>
+              <a:t>ここからは、お話を聴かせてください</a:t>
             </a:r>
             <a:endParaRPr lang="en-US" sz="1500" dirty="0"/>
-          </a:p>
-        </p:txBody>
-      </p:sp>
-      <p:sp>
-        <p:nvSpPr>
-          <p:cNvPr id="7" name="money_body"/>
-          <p:cNvSpPr txBox="1"/>
-          <p:nvPr/>
-        </p:nvSpPr>
-        <p:spPr>
-          <a:xfrm>
-            <a:off x="5989320" y="1783080"/>
-            <a:ext cx="2560320" cy="2217877"/>
-          </a:xfrm>
-          <a:prstGeom prst="rect">
-            <a:avLst/>
-          </a:prstGeom>
-          <a:noFill/>
-          <a:ln/>
-        </p:spPr>
-        <p:txBody>
-          <a:bodyPr wrap="square" lIns="1016" tIns="1016" rIns="1016" bIns="1016" rtlCol="0" anchor="t"/>
-          <a:lstStyle/>
-          <a:p>
-            <a:pPr indent="0" marL="0">
-              <a:spcAft>
-                <a:spcPts val="600"/>
-              </a:spcAft>
-              <a:buNone/>
-            </a:pPr>
-            <a:r>
-              <a:rPr lang="en-US" sz="1400" dirty="0">
-                <a:solidFill>
-                  <a:schemeClr val="tx1"/>
-                </a:solidFill>
-              </a:rPr>
-              <a:t>怒りや悲しみが出てきても大丈夫。</a:t>
-            </a:r>
-            <a:endParaRPr lang="en-US" sz="1400" dirty="0"/>
-          </a:p>
-          <a:p>
-            <a:pPr indent="0" marL="0">
-              <a:spcAft>
-                <a:spcPts val="600"/>
-              </a:spcAft>
-              <a:buNone/>
-            </a:pPr>
-            <a:r>
-              <a:rPr lang="en-US" sz="1400" dirty="0">
-                <a:solidFill>
-                  <a:schemeClr val="tx1"/>
-                </a:solidFill>
-              </a:rPr>
-              <a:t>それは消化が進んでいるサインです。</a:t>
-            </a:r>
-            <a:endParaRPr lang="en-US" sz="1400" dirty="0"/>
           </a:p>
         </p:txBody>
       </p:sp>
@@ -7192,36 +6811,16 @@
       </p:grpSpPr>
       <p:sp>
         <p:nvSpPr>
-          <p:cNvPr id="2" name="frame"/>
+          <p:cNvPr id="2" name="Text 0"/>
           <p:cNvSpPr/>
-          <p:nvPr/>
-        </p:nvSpPr>
-        <p:spPr>
-          <a:xfrm>
-            <a:off x="228600" y="137160"/>
-            <a:ext cx="8686800" cy="4526280"/>
-          </a:xfrm>
-          <a:prstGeom prst="rect">
-            <a:avLst/>
-          </a:prstGeom>
-          <a:ln w="12700">
-            <a:solidFill>
-              <a:srgbClr val="B08A4E"/>
-            </a:solidFill>
-            <a:prstDash val="solid"/>
-          </a:ln>
-        </p:spPr>
-      </p:sp>
-      <p:sp>
-        <p:nvSpPr>
-          <p:cNvPr id="3" name="qlabel"/>
-          <p:cNvSpPr txBox="1"/>
-          <p:nvPr/>
-        </p:nvSpPr>
-        <p:spPr>
-          <a:xfrm>
-            <a:off x="457200" y="320040"/>
-            <a:ext cx="8229600" cy="365760"/>
+          <p:nvPr>
+            <p:ph idx="100" type="title" hasCustomPrompt="1"/>
+          </p:nvPr>
+        </p:nvSpPr>
+        <p:spPr>
+          <a:xfrm>
+            <a:off x="731520" y="1828800"/>
+            <a:ext cx="7680960" cy="914400"/>
           </a:xfrm>
           <a:prstGeom prst="rect">
             <a:avLst/>
@@ -7230,85 +6829,30 @@
           <a:ln/>
         </p:spPr>
         <p:txBody>
-          <a:bodyPr wrap="square" lIns="0" tIns="0" rIns="0" bIns="0" rtlCol="0" anchor="t"/>
+          <a:bodyPr wrap="square" rtlCol="0" anchor="ctr"/>
           <a:lstStyle/>
           <a:p>
             <a:pPr algn="ctr" indent="0" marL="0">
               <a:buNone/>
             </a:pPr>
             <a:r>
-              <a:rPr lang="en-US" sz="1300" b="1" dirty="0">
+              <a:rPr lang="en-US" sz="3600" b="1" dirty="0">
                 <a:solidFill>
                   <a:schemeClr val="accent2"/>
-                </a:solidFill>
-              </a:rPr>
-              <a:t>第2部へ</a:t>
-            </a:r>
-            <a:endParaRPr lang="en-US" sz="1300" dirty="0"/>
-          </a:p>
-        </p:txBody>
-      </p:sp>
-      <p:sp>
-        <p:nvSpPr>
-          <p:cNvPr id="4" name="Text 0"/>
-          <p:cNvSpPr/>
-          <p:nvPr>
-            <p:ph idx="100" type="title" hasCustomPrompt="1"/>
-          </p:nvPr>
-        </p:nvSpPr>
-        <p:spPr>
-          <a:xfrm>
-            <a:off x="914400" y="1554480"/>
-            <a:ext cx="7315200" cy="1554480"/>
-          </a:xfrm>
-          <a:prstGeom prst="rect">
-            <a:avLst/>
-          </a:prstGeom>
-          <a:noFill/>
-          <a:ln/>
-        </p:spPr>
-        <p:txBody>
-          <a:bodyPr wrap="square" rtlCol="0" anchor="ctr"/>
-          <a:lstStyle/>
-          <a:p>
-            <a:pPr algn="ctr" indent="0" marL="0">
-              <a:buNone/>
-            </a:pPr>
-            <a:r>
-              <a:rPr lang="en-US" sz="3200" b="1" dirty="0">
-                <a:solidFill>
-                  <a:schemeClr val="tx2"/>
                 </a:solidFill>
                 <a:latin typeface="Yu Mincho" pitchFamily="34" charset="0"/>
                 <a:ea typeface="Yu Mincho" pitchFamily="34" charset="-122"/>
                 <a:cs typeface="Yu Mincho" pitchFamily="34" charset="-120"/>
               </a:rPr>
-              <a:t>では、あなたの「お金の当たり前」は</a:t>
-            </a:r>
-            <a:endParaRPr lang="en-US" sz="3200" dirty="0"/>
-          </a:p>
-          <a:p>
-            <a:pPr algn="ctr" indent="0" marL="0">
-              <a:buNone/>
-            </a:pPr>
-            <a:r>
-              <a:rPr lang="en-US" sz="3200" b="1" dirty="0">
-                <a:solidFill>
-                  <a:schemeClr val="tx2"/>
-                </a:solidFill>
-                <a:latin typeface="Yu Mincho" pitchFamily="34" charset="0"/>
-                <a:ea typeface="Yu Mincho" pitchFamily="34" charset="-122"/>
-                <a:cs typeface="Yu Mincho" pitchFamily="34" charset="-120"/>
-              </a:rPr>
-              <a:t>どこで作られたのでしょう？</a:t>
-            </a:r>
-            <a:endParaRPr lang="en-US" sz="3200" dirty="0"/>
-          </a:p>
-        </p:txBody>
-      </p:sp>
-      <p:sp>
-        <p:nvSpPr>
-          <p:cNvPr id="5" name="Text 0"/>
+              <a:t>第2部　魂の傷を聴く</a:t>
+            </a:r>
+            <a:endParaRPr lang="en-US" sz="3600" dirty="0"/>
+          </a:p>
+        </p:txBody>
+      </p:sp>
+      <p:sp>
+        <p:nvSpPr>
+          <p:cNvPr id="3" name="Text 0"/>
           <p:cNvSpPr/>
           <p:nvPr>
             <p:ph idx="101" type="body" hasCustomPrompt="1"/>
@@ -7316,8 +6860,8 @@
         </p:nvSpPr>
         <p:spPr>
           <a:xfrm>
-            <a:off x="914400" y="3200400"/>
-            <a:ext cx="7315200" cy="731520"/>
+            <a:off x="731520" y="2788920"/>
+            <a:ext cx="7680960" cy="822960"/>
           </a:xfrm>
           <a:prstGeom prst="rect">
             <a:avLst/>
@@ -7333,59 +6877,28 @@
               <a:buNone/>
             </a:pPr>
             <a:r>
-              <a:rPr lang="en-US" sz="1500" dirty="0">
-                <a:solidFill>
-                  <a:schemeClr val="accent2"/>
-                </a:solidFill>
-              </a:rPr>
-              <a:t>ここからは、お話を聴かせてください</a:t>
-            </a:r>
-            <a:endParaRPr lang="en-US" sz="1500" dirty="0"/>
-          </a:p>
-        </p:txBody>
-      </p:sp>
-      <p:sp>
-        <p:nvSpPr>
-          <p:cNvPr id="25" name="Slide Number Placeholder 0"/>
-          <p:cNvSpPr>
-            <a:spLocks noGrp="1"/>
-          </p:cNvSpPr>
-          <p:nvPr>
-            <p:ph type="sldNum" sz="quarter" idx="4294967295"/>
-          </p:nvPr>
-        </p:nvSpPr>
-        <p:spPr>
-          <a:xfrm>
-            <a:off x="8229600" y="4754880"/>
-            <a:ext cx="457200" cy="274320"/>
-          </a:xfrm>
-          <a:prstGeom prst="rect">
-            <a:avLst/>
-          </a:prstGeom>
-          <a:extLst>
-            <a:ext uri="{C572A759-6A51-4108-AA02-DFA0A04FC94B}">
-              <ma14:wrappingTextBoxFlag xmlns:ma14="http://schemas.microsoft.com/office/mac/drawingml/2011/main" val="0"/>
-            </a:ext>
-          </a:extLst>
-        </p:spPr>
-        <p:txBody>
-          <a:bodyPr/>
-          <a:lstStyle>
-            <a:lvl1pPr>
-              <a:defRPr sz="900">
-                <a:solidFill>
-                  <a:srgbClr val="B08A4E"/>
-                </a:solidFill>
-              </a:defRPr>
-            </a:lvl1pPr>
-          </a:lstStyle>
-          <a:p>
-            <a:pPr algn="r"/>
-            <a:fld id="{F7021451-1387-4CA6-816F-3879F97B5CBC}" type="slidenum">
-              <a:rPr b="0" lang="en-US"/>
-              <a:t>14</a:t>
-            </a:fld>
-            <a:endParaRPr lang="en-US"/>
+              <a:rPr lang="en-US" sz="1600" dirty="0">
+                <a:solidFill>
+                  <a:schemeClr val="tx1"/>
+                </a:solidFill>
+              </a:rPr>
+              <a:t>直感でおしえてください（15〜35分）</a:t>
+            </a:r>
+            <a:endParaRPr lang="en-US" sz="1600" dirty="0"/>
+          </a:p>
+          <a:p>
+            <a:pPr algn="ctr" indent="0" marL="0">
+              <a:buNone/>
+            </a:pPr>
+            <a:r>
+              <a:rPr lang="en-US" sz="1600" dirty="0">
+                <a:solidFill>
+                  <a:schemeClr val="tx1"/>
+                </a:solidFill>
+              </a:rPr>
+              <a:t>答えたくない質問は、飛ばして大丈夫です</a:t>
+            </a:r>
+            <a:endParaRPr lang="en-US" sz="1600" dirty="0"/>
           </a:p>
         </p:txBody>
       </p:sp>
@@ -7416,16 +6929,40 @@
       </p:grpSpPr>
       <p:sp>
         <p:nvSpPr>
-          <p:cNvPr id="2" name="Text 0"/>
+          <p:cNvPr id="2" name="frame"/>
           <p:cNvSpPr/>
-          <p:nvPr>
-            <p:ph idx="100" type="title" hasCustomPrompt="1"/>
-          </p:nvPr>
-        </p:nvSpPr>
-        <p:spPr>
-          <a:xfrm>
-            <a:off x="731520" y="1828800"/>
-            <a:ext cx="7680960" cy="914400"/>
+          <p:nvPr/>
+        </p:nvSpPr>
+        <p:spPr>
+          <a:xfrm>
+            <a:off x="228600" y="137160"/>
+            <a:ext cx="8686800" cy="4526280"/>
+          </a:xfrm>
+          <a:prstGeom prst="rect">
+            <a:avLst/>
+          </a:prstGeom>
+          <a:ln w="12700">
+            <a:solidFill>
+              <a:srgbClr val="B08A4E"/>
+            </a:solidFill>
+            <a:prstDash val="solid"/>
+          </a:ln>
+        </p:spPr>
+        <p:txBody>
+          <a:bodyPr/>
+          <a:p/>
+        </p:txBody>
+      </p:sp>
+      <p:sp>
+        <p:nvSpPr>
+          <p:cNvPr id="3" name="qlabel"/>
+          <p:cNvSpPr txBox="1"/>
+          <p:nvPr/>
+        </p:nvSpPr>
+        <p:spPr>
+          <a:xfrm>
+            <a:off x="457200" y="320040"/>
+            <a:ext cx="8229600" cy="365760"/>
           </a:xfrm>
           <a:prstGeom prst="rect">
             <a:avLst/>
@@ -7434,6 +6971,44 @@
           <a:ln/>
         </p:spPr>
         <p:txBody>
+          <a:bodyPr wrap="square" lIns="0" tIns="0" rIns="0" bIns="0" rtlCol="0" anchor="t"/>
+          <a:lstStyle/>
+          <a:p>
+            <a:pPr algn="ctr" indent="0" marL="0">
+              <a:buNone/>
+            </a:pPr>
+            <a:r>
+              <a:rPr lang="en-US" sz="1300" b="1" dirty="0">
+                <a:solidFill>
+                  <a:schemeClr val="accent2"/>
+                </a:solidFill>
+              </a:rPr>
+              <a:t>どのような事でお悩みですか？</a:t>
+            </a:r>
+            <a:endParaRPr lang="en-US" sz="1300" dirty="0"/>
+          </a:p>
+        </p:txBody>
+      </p:sp>
+      <p:sp>
+        <p:nvSpPr>
+          <p:cNvPr id="4" name="Text 0"/>
+          <p:cNvSpPr/>
+          <p:nvPr>
+            <p:ph idx="100" type="title" hasCustomPrompt="1"/>
+          </p:nvPr>
+        </p:nvSpPr>
+        <p:spPr>
+          <a:xfrm>
+            <a:off x="914400" y="1554480"/>
+            <a:ext cx="7315200" cy="1554480"/>
+          </a:xfrm>
+          <a:prstGeom prst="rect">
+            <a:avLst/>
+          </a:prstGeom>
+          <a:noFill/>
+          <a:ln/>
+        </p:spPr>
+        <p:txBody>
           <a:bodyPr wrap="square" rtlCol="0" anchor="ctr"/>
           <a:lstStyle/>
           <a:p>
@@ -7441,23 +7016,40 @@
               <a:buNone/>
             </a:pPr>
             <a:r>
-              <a:rPr lang="en-US" sz="3600" b="1" dirty="0">
-                <a:solidFill>
-                  <a:schemeClr val="accent2"/>
+              <a:rPr lang="en-US" sz="3200" b="1" dirty="0">
+                <a:solidFill>
+                  <a:schemeClr val="tx2"/>
                 </a:solidFill>
                 <a:latin typeface="Yu Mincho" pitchFamily="34" charset="0"/>
                 <a:ea typeface="Yu Mincho" pitchFamily="34" charset="-122"/>
                 <a:cs typeface="Yu Mincho" pitchFamily="34" charset="-120"/>
               </a:rPr>
-              <a:t>第2部　魂の傷を聴く</a:t>
-            </a:r>
-            <a:endParaRPr lang="en-US" sz="3600" dirty="0"/>
-          </a:p>
-        </p:txBody>
-      </p:sp>
-      <p:sp>
-        <p:nvSpPr>
-          <p:cNvPr id="3" name="Text 0"/>
+              <a:t>お悩みの内容を</a:t>
+            </a:r>
+            <a:endParaRPr lang="en-US" sz="3200" dirty="0"/>
+          </a:p>
+          <a:p>
+            <a:pPr algn="ctr" indent="0" marL="0">
+              <a:buNone/>
+            </a:pPr>
+            <a:r>
+              <a:rPr lang="en-US" sz="3200" b="1" dirty="0">
+                <a:solidFill>
+                  <a:schemeClr val="tx2"/>
+                </a:solidFill>
+                <a:latin typeface="Yu Mincho" pitchFamily="34" charset="0"/>
+                <a:ea typeface="Yu Mincho" pitchFamily="34" charset="-122"/>
+                <a:cs typeface="Yu Mincho" pitchFamily="34" charset="-120"/>
+              </a:rPr>
+              <a:t>おしえてください</a:t>
+            </a:r>
+            <a:endParaRPr lang="en-US" sz="3200" dirty="0"/>
+          </a:p>
+        </p:txBody>
+      </p:sp>
+      <p:sp>
+        <p:nvSpPr>
+          <p:cNvPr id="5" name="Text 0"/>
           <p:cNvSpPr/>
           <p:nvPr>
             <p:ph idx="101" type="body" hasCustomPrompt="1"/>
@@ -7465,8 +7057,8 @@
         </p:nvSpPr>
         <p:spPr>
           <a:xfrm>
-            <a:off x="731520" y="2788920"/>
-            <a:ext cx="7680960" cy="822960"/>
+            <a:off x="914400" y="3200400"/>
+            <a:ext cx="7315200" cy="731520"/>
           </a:xfrm>
           <a:prstGeom prst="rect">
             <a:avLst/>
@@ -7482,14 +7074,59 @@
               <a:buNone/>
             </a:pPr>
             <a:r>
-              <a:rPr lang="en-US" sz="1600" dirty="0">
-                <a:solidFill>
-                  <a:schemeClr val="tx1"/>
-                </a:solidFill>
-              </a:rPr>
-              <a:t>直感でおしえてください（15〜35分）</a:t>
-            </a:r>
-            <a:endParaRPr lang="en-US" sz="1600" dirty="0"/>
+              <a:rPr lang="en-US" sz="1500" dirty="0">
+                <a:solidFill>
+                  <a:schemeClr val="accent2"/>
+                </a:solidFill>
+              </a:rPr>
+              <a:t>直感で大丈夫です</a:t>
+            </a:r>
+            <a:endParaRPr lang="en-US" sz="1500" dirty="0"/>
+          </a:p>
+        </p:txBody>
+      </p:sp>
+      <p:sp>
+        <p:nvSpPr>
+          <p:cNvPr id="25" name="Slide Number Placeholder 0"/>
+          <p:cNvSpPr>
+            <a:spLocks noGrp="1"/>
+          </p:cNvSpPr>
+          <p:nvPr>
+            <p:ph type="sldNum" sz="quarter" idx="4294967295"/>
+          </p:nvPr>
+        </p:nvSpPr>
+        <p:spPr>
+          <a:xfrm>
+            <a:off x="8229600" y="4754880"/>
+            <a:ext cx="457200" cy="274320"/>
+          </a:xfrm>
+          <a:prstGeom prst="rect">
+            <a:avLst/>
+          </a:prstGeom>
+          <a:extLst>
+            <a:ext uri="{C572A759-6A51-4108-AA02-DFA0A04FC94B}">
+              <ma14:wrappingTextBoxFlag xmlns:ma14="http://schemas.microsoft.com/office/mac/drawingml/2011/main" val="0"/>
+            </a:ext>
+          </a:extLst>
+        </p:spPr>
+        <p:txBody>
+          <a:bodyPr/>
+          <a:lstStyle>
+            <a:lvl1pPr>
+              <a:defRPr sz="900">
+                <a:solidFill>
+                  <a:srgbClr val="B08A4E"/>
+                </a:solidFill>
+              </a:defRPr>
+            </a:lvl1pPr>
+          </a:lstStyle>
+          <a:p>
+            <a:pPr algn="r"/>
+            <a:fld id="{F7021451-1387-4CA6-816F-3879F97B5CBC}" type="slidenum">
+              <a:rPr b="0" lang="en-US"/>
+              <a:t>15</a:t>
+            </a:fld>
+            <a:endParaRPr lang="en-US"/>
           </a:p>
         </p:txBody>
       </p:sp>
@@ -7539,6 +7176,10 @@
             <a:prstDash val="solid"/>
           </a:ln>
         </p:spPr>
+        <p:txBody>
+          <a:bodyPr/>
+          <a:p/>
+        </p:txBody>
       </p:sp>
       <p:sp>
         <p:nvSpPr>
@@ -7611,24 +7252,7 @@
                 <a:ea typeface="Yu Mincho" pitchFamily="34" charset="-122"/>
                 <a:cs typeface="Yu Mincho" pitchFamily="34" charset="-120"/>
               </a:rPr>
-              <a:t>お悩みの内容を</a:t>
-            </a:r>
-            <a:endParaRPr lang="en-US" sz="3200" dirty="0"/>
-          </a:p>
-          <a:p>
-            <a:pPr algn="ctr" indent="0" marL="0">
-              <a:buNone/>
-            </a:pPr>
-            <a:r>
-              <a:rPr lang="en-US" sz="3200" b="1" dirty="0">
-                <a:solidFill>
-                  <a:schemeClr val="tx2"/>
-                </a:solidFill>
-                <a:latin typeface="Yu Mincho" pitchFamily="34" charset="0"/>
-                <a:ea typeface="Yu Mincho" pitchFamily="34" charset="-122"/>
-                <a:cs typeface="Yu Mincho" pitchFamily="34" charset="-120"/>
-              </a:rPr>
-              <a:t>おしえてください</a:t>
+              <a:t>それは、いつからですか？</a:t>
             </a:r>
             <a:endParaRPr lang="en-US" sz="3200" dirty="0"/>
           </a:p>
@@ -7666,7 +7290,7 @@
                   <a:schemeClr val="accent2"/>
                 </a:solidFill>
               </a:rPr>
-              <a:t>直感で大丈夫です</a:t>
+              <a:t>どのくらいの期間、続いていますか？</a:t>
             </a:r>
             <a:endParaRPr lang="en-US" sz="1500" dirty="0"/>
           </a:p>
@@ -7763,6 +7387,10 @@
             <a:prstDash val="solid"/>
           </a:ln>
         </p:spPr>
+        <p:txBody>
+          <a:bodyPr/>
+          <a:p/>
+        </p:txBody>
       </p:sp>
       <p:sp>
         <p:nvSpPr>
@@ -7835,47 +7463,26 @@
                 <a:ea typeface="Yu Mincho" pitchFamily="34" charset="-122"/>
                 <a:cs typeface="Yu Mincho" pitchFamily="34" charset="-120"/>
               </a:rPr>
-              <a:t>それは、いつからですか？</a:t>
+              <a:t>1〜10で言うと、</a:t>
             </a:r>
             <a:endParaRPr lang="en-US" sz="3200" dirty="0"/>
           </a:p>
-        </p:txBody>
-      </p:sp>
-      <p:sp>
-        <p:nvSpPr>
-          <p:cNvPr id="5" name="Text 0"/>
-          <p:cNvSpPr/>
-          <p:nvPr>
-            <p:ph idx="101" type="body" hasCustomPrompt="1"/>
-          </p:nvPr>
-        </p:nvSpPr>
-        <p:spPr>
-          <a:xfrm>
-            <a:off x="914400" y="3200400"/>
-            <a:ext cx="7315200" cy="731520"/>
-          </a:xfrm>
-          <a:prstGeom prst="rect">
-            <a:avLst/>
-          </a:prstGeom>
-          <a:noFill/>
-          <a:ln/>
-        </p:spPr>
-        <p:txBody>
-          <a:bodyPr wrap="square" rtlCol="0" anchor="t"/>
-          <a:lstStyle/>
           <a:p>
             <a:pPr algn="ctr" indent="0" marL="0">
               <a:buNone/>
             </a:pPr>
             <a:r>
-              <a:rPr lang="en-US" sz="1500" dirty="0">
-                <a:solidFill>
-                  <a:schemeClr val="accent2"/>
-                </a:solidFill>
-              </a:rPr>
-              <a:t>どのくらいの期間、続いていますか？</a:t>
-            </a:r>
-            <a:endParaRPr lang="en-US" sz="1500" dirty="0"/>
+              <a:rPr lang="en-US" sz="3200" b="1" dirty="0">
+                <a:solidFill>
+                  <a:schemeClr val="tx2"/>
+                </a:solidFill>
+                <a:latin typeface="Yu Mincho" pitchFamily="34" charset="0"/>
+                <a:ea typeface="Yu Mincho" pitchFamily="34" charset="-122"/>
+                <a:cs typeface="Yu Mincho" pitchFamily="34" charset="-120"/>
+              </a:rPr>
+              <a:t>今どの段階ですか？</a:t>
+            </a:r>
+            <a:endParaRPr lang="en-US" sz="3200" dirty="0"/>
           </a:p>
         </p:txBody>
       </p:sp>
@@ -7970,6 +7577,10 @@
             <a:prstDash val="solid"/>
           </a:ln>
         </p:spPr>
+        <p:txBody>
+          <a:bodyPr/>
+          <a:p/>
+        </p:txBody>
       </p:sp>
       <p:sp>
         <p:nvSpPr>
@@ -8042,7 +7653,7 @@
                 <a:ea typeface="Yu Mincho" pitchFamily="34" charset="-122"/>
                 <a:cs typeface="Yu Mincho" pitchFamily="34" charset="-120"/>
               </a:rPr>
-              <a:t>1〜10で言うと、</a:t>
+              <a:t>その悩みは、あなたの人生に</a:t>
             </a:r>
             <a:endParaRPr lang="en-US" sz="3200" dirty="0"/>
           </a:p>
@@ -8059,7 +7670,7 @@
                 <a:ea typeface="Yu Mincho" pitchFamily="34" charset="-122"/>
                 <a:cs typeface="Yu Mincho" pitchFamily="34" charset="-120"/>
               </a:rPr>
-              <a:t>今どの段階ですか？</a:t>
+              <a:t>どのような影響がありますか？</a:t>
             </a:r>
             <a:endParaRPr lang="en-US" sz="3200" dirty="0"/>
           </a:p>
@@ -8156,6 +7767,10 @@
             <a:prstDash val="solid"/>
           </a:ln>
         </p:spPr>
+        <p:txBody>
+          <a:bodyPr/>
+          <a:p/>
+        </p:txBody>
       </p:sp>
       <p:sp>
         <p:nvSpPr>
@@ -8187,7 +7802,7 @@
                   <a:schemeClr val="accent2"/>
                 </a:solidFill>
               </a:rPr>
-              <a:t>どのような事でお悩みですか？</a:t>
+              <a:t>問題の心理状況：幼少期の影響</a:t>
             </a:r>
             <a:endParaRPr lang="en-US" sz="1300" dirty="0"/>
           </a:p>
@@ -8228,9 +7843,64 @@
                 <a:ea typeface="Yu Mincho" pitchFamily="34" charset="-122"/>
                 <a:cs typeface="Yu Mincho" pitchFamily="34" charset="-120"/>
               </a:rPr>
-              <a:t>何故、悩んでいますか？</a:t>
+              <a:t>どのような</a:t>
             </a:r>
             <a:endParaRPr lang="en-US" sz="3200" dirty="0"/>
+          </a:p>
+          <a:p>
+            <a:pPr algn="ctr" indent="0" marL="0">
+              <a:buNone/>
+            </a:pPr>
+            <a:r>
+              <a:rPr lang="en-US" sz="3200" b="1" dirty="0">
+                <a:solidFill>
+                  <a:schemeClr val="tx2"/>
+                </a:solidFill>
+                <a:latin typeface="Yu Mincho" pitchFamily="34" charset="0"/>
+                <a:ea typeface="Yu Mincho" pitchFamily="34" charset="-122"/>
+                <a:cs typeface="Yu Mincho" pitchFamily="34" charset="-120"/>
+              </a:rPr>
+              <a:t>お子さんでしたか？</a:t>
+            </a:r>
+            <a:endParaRPr lang="en-US" sz="3200" dirty="0"/>
+          </a:p>
+        </p:txBody>
+      </p:sp>
+      <p:sp>
+        <p:nvSpPr>
+          <p:cNvPr id="5" name="Text 0"/>
+          <p:cNvSpPr/>
+          <p:nvPr>
+            <p:ph idx="101" type="body" hasCustomPrompt="1"/>
+          </p:nvPr>
+        </p:nvSpPr>
+        <p:spPr>
+          <a:xfrm>
+            <a:off x="914400" y="3200400"/>
+            <a:ext cx="7315200" cy="731520"/>
+          </a:xfrm>
+          <a:prstGeom prst="rect">
+            <a:avLst/>
+          </a:prstGeom>
+          <a:noFill/>
+          <a:ln/>
+        </p:spPr>
+        <p:txBody>
+          <a:bodyPr wrap="square" rtlCol="0" anchor="t"/>
+          <a:lstStyle/>
+          <a:p>
+            <a:pPr algn="ctr" indent="0" marL="0">
+              <a:buNone/>
+            </a:pPr>
+            <a:r>
+              <a:rPr lang="en-US" sz="1500" dirty="0">
+                <a:solidFill>
+                  <a:schemeClr val="accent2"/>
+                </a:solidFill>
+              </a:rPr>
+              <a:t>私たちの問題は、幼少期の影響を受けていることが多いです</a:t>
+            </a:r>
+            <a:endParaRPr lang="en-US" sz="1500" dirty="0"/>
           </a:p>
         </p:txBody>
       </p:sp>
@@ -8371,6 +8041,10 @@
             <a:prstDash val="solid"/>
           </a:ln>
         </p:spPr>
+        <p:txBody>
+          <a:bodyPr/>
+          <a:p/>
+        </p:txBody>
       </p:sp>
       <p:sp>
         <p:nvSpPr>
@@ -8509,6 +8183,10 @@
             <a:prstDash val="solid"/>
           </a:ln>
         </p:spPr>
+        <p:txBody>
+          <a:bodyPr/>
+          <a:p/>
+        </p:txBody>
       </p:sp>
       <p:sp>
         <p:nvSpPr>
@@ -8647,6 +8325,10 @@
             <a:prstDash val="solid"/>
           </a:ln>
         </p:spPr>
+        <p:txBody>
+          <a:bodyPr/>
+          <a:p/>
+        </p:txBody>
       </p:sp>
       <p:sp>
         <p:nvSpPr>
@@ -8799,6 +8481,10 @@
             <a:prstDash val="solid"/>
           </a:ln>
         </p:spPr>
+        <p:txBody>
+          <a:bodyPr/>
+          <a:p/>
+        </p:txBody>
       </p:sp>
       <p:sp>
         <p:nvSpPr>
@@ -8951,6 +8637,10 @@
             <a:prstDash val="solid"/>
           </a:ln>
         </p:spPr>
+        <p:txBody>
+          <a:bodyPr/>
+          <a:p/>
+        </p:txBody>
       </p:sp>
       <p:sp>
         <p:nvSpPr>
@@ -9168,6 +8858,10 @@
             <a:prstDash val="solid"/>
           </a:ln>
         </p:spPr>
+        <p:txBody>
+          <a:bodyPr/>
+          <a:p/>
+        </p:txBody>
       </p:sp>
       <p:sp>
         <p:nvSpPr>
@@ -9199,7 +8893,7 @@
                   <a:schemeClr val="accent2"/>
                 </a:solidFill>
               </a:rPr>
-              <a:t>どのような事でお悩みですか？</a:t>
+              <a:t>問題の心理状況：幼少期の影響</a:t>
             </a:r>
             <a:endParaRPr lang="en-US" sz="1300" dirty="0"/>
           </a:p>
@@ -9240,7 +8934,7 @@
                 <a:ea typeface="Yu Mincho" pitchFamily="34" charset="-122"/>
                 <a:cs typeface="Yu Mincho" pitchFamily="34" charset="-120"/>
               </a:rPr>
-              <a:t>その悩みは、あなたの人生に</a:t>
+              <a:t>ご両親は、厳しかったですか？</a:t>
             </a:r>
             <a:endParaRPr lang="en-US" sz="3200" dirty="0"/>
           </a:p>
@@ -9257,7 +8951,7 @@
                 <a:ea typeface="Yu Mincho" pitchFamily="34" charset="-122"/>
                 <a:cs typeface="Yu Mincho" pitchFamily="34" charset="-120"/>
               </a:rPr>
-              <a:t>どのような影響がありますか？</a:t>
+              <a:t>優しかったですか？</a:t>
             </a:r>
             <a:endParaRPr lang="en-US" sz="3200" dirty="0"/>
           </a:p>
@@ -9354,6 +9048,10 @@
             <a:prstDash val="solid"/>
           </a:ln>
         </p:spPr>
+        <p:txBody>
+          <a:bodyPr/>
+          <a:p/>
+        </p:txBody>
       </p:sp>
       <p:sp>
         <p:nvSpPr>
@@ -9426,7 +9124,7 @@
                 <a:ea typeface="Yu Mincho" pitchFamily="34" charset="-122"/>
                 <a:cs typeface="Yu Mincho" pitchFamily="34" charset="-120"/>
               </a:rPr>
-              <a:t>どのような</a:t>
+              <a:t>ご両親に、かけてほしかった</a:t>
             </a:r>
             <a:endParaRPr lang="en-US" sz="3200" dirty="0"/>
           </a:p>
@@ -9443,47 +9141,9 @@
                 <a:ea typeface="Yu Mincho" pitchFamily="34" charset="-122"/>
                 <a:cs typeface="Yu Mincho" pitchFamily="34" charset="-120"/>
               </a:rPr>
-              <a:t>お子さんでしたか？</a:t>
+              <a:t>言葉はありますか？</a:t>
             </a:r>
             <a:endParaRPr lang="en-US" sz="3200" dirty="0"/>
-          </a:p>
-        </p:txBody>
-      </p:sp>
-      <p:sp>
-        <p:nvSpPr>
-          <p:cNvPr id="5" name="Text 0"/>
-          <p:cNvSpPr/>
-          <p:nvPr>
-            <p:ph idx="101" type="body" hasCustomPrompt="1"/>
-          </p:nvPr>
-        </p:nvSpPr>
-        <p:spPr>
-          <a:xfrm>
-            <a:off x="914400" y="3200400"/>
-            <a:ext cx="7315200" cy="731520"/>
-          </a:xfrm>
-          <a:prstGeom prst="rect">
-            <a:avLst/>
-          </a:prstGeom>
-          <a:noFill/>
-          <a:ln/>
-        </p:spPr>
-        <p:txBody>
-          <a:bodyPr wrap="square" rtlCol="0" anchor="t"/>
-          <a:lstStyle/>
-          <a:p>
-            <a:pPr algn="ctr" indent="0" marL="0">
-              <a:buNone/>
-            </a:pPr>
-            <a:r>
-              <a:rPr lang="en-US" sz="1500" dirty="0">
-                <a:solidFill>
-                  <a:schemeClr val="accent2"/>
-                </a:solidFill>
-              </a:rPr>
-              <a:t>私たちの問題は、幼少期の影響を受けていることが多いです</a:t>
-            </a:r>
-            <a:endParaRPr lang="en-US" sz="1500" dirty="0"/>
           </a:p>
         </p:txBody>
       </p:sp>
@@ -9578,6 +9238,10 @@
             <a:prstDash val="solid"/>
           </a:ln>
         </p:spPr>
+        <p:txBody>
+          <a:bodyPr/>
+          <a:p/>
+        </p:txBody>
       </p:sp>
       <p:sp>
         <p:nvSpPr>
@@ -9609,7 +9273,7 @@
                   <a:schemeClr val="accent2"/>
                 </a:solidFill>
               </a:rPr>
-              <a:t>問題の心理状況：幼少期の影響</a:t>
+              <a:t>幼少期のお金の記憶</a:t>
             </a:r>
             <a:endParaRPr lang="en-US" sz="1300" dirty="0"/>
           </a:p>
@@ -9650,7 +9314,7 @@
                 <a:ea typeface="Yu Mincho" pitchFamily="34" charset="-122"/>
                 <a:cs typeface="Yu Mincho" pitchFamily="34" charset="-120"/>
               </a:rPr>
-              <a:t>ご両親は、厳しかったですか？</a:t>
+              <a:t>「お金がない」</a:t>
             </a:r>
             <a:endParaRPr lang="en-US" sz="3200" dirty="0"/>
           </a:p>
@@ -9667,9 +9331,64 @@
                 <a:ea typeface="Yu Mincho" pitchFamily="34" charset="-122"/>
                 <a:cs typeface="Yu Mincho" pitchFamily="34" charset="-120"/>
               </a:rPr>
-              <a:t>優しかったですか？</a:t>
+              <a:t>「家にお金を入れない」</a:t>
             </a:r>
             <a:endParaRPr lang="en-US" sz="3200" dirty="0"/>
+          </a:p>
+          <a:p>
+            <a:pPr algn="ctr" indent="0" marL="0">
+              <a:buNone/>
+            </a:pPr>
+            <a:r>
+              <a:rPr lang="en-US" sz="3200" b="1" dirty="0">
+                <a:solidFill>
+                  <a:schemeClr val="tx2"/>
+                </a:solidFill>
+                <a:latin typeface="Yu Mincho" pitchFamily="34" charset="0"/>
+                <a:ea typeface="Yu Mincho" pitchFamily="34" charset="-122"/>
+                <a:cs typeface="Yu Mincho" pitchFamily="34" charset="-120"/>
+              </a:rPr>
+              <a:t>その頃、何を感じていましたか？</a:t>
+            </a:r>
+            <a:endParaRPr lang="en-US" sz="3200" dirty="0"/>
+          </a:p>
+        </p:txBody>
+      </p:sp>
+      <p:sp>
+        <p:nvSpPr>
+          <p:cNvPr id="5" name="Text 0"/>
+          <p:cNvSpPr/>
+          <p:nvPr>
+            <p:ph idx="101" type="body" hasCustomPrompt="1"/>
+          </p:nvPr>
+        </p:nvSpPr>
+        <p:spPr>
+          <a:xfrm>
+            <a:off x="914400" y="3200400"/>
+            <a:ext cx="7315200" cy="731520"/>
+          </a:xfrm>
+          <a:prstGeom prst="rect">
+            <a:avLst/>
+          </a:prstGeom>
+          <a:noFill/>
+          <a:ln/>
+        </p:spPr>
+        <p:txBody>
+          <a:bodyPr wrap="square" rtlCol="0" anchor="t"/>
+          <a:lstStyle/>
+          <a:p>
+            <a:pPr algn="ctr" indent="0" marL="0">
+              <a:buNone/>
+            </a:pPr>
+            <a:r>
+              <a:rPr lang="en-US" sz="1500" dirty="0">
+                <a:solidFill>
+                  <a:schemeClr val="accent2"/>
+                </a:solidFill>
+              </a:rPr>
+              <a:t>ご両親を責めるのではなく、当時のあなたの気持ちを大切にします</a:t>
+            </a:r>
+            <a:endParaRPr lang="en-US" sz="1500" dirty="0"/>
           </a:p>
         </p:txBody>
       </p:sp>
@@ -9745,36 +9464,16 @@
       </p:grpSpPr>
       <p:sp>
         <p:nvSpPr>
-          <p:cNvPr id="2" name="frame"/>
+          <p:cNvPr id="2" name="Text 0"/>
           <p:cNvSpPr/>
-          <p:nvPr/>
-        </p:nvSpPr>
-        <p:spPr>
-          <a:xfrm>
-            <a:off x="228600" y="137160"/>
-            <a:ext cx="8686800" cy="4526280"/>
-          </a:xfrm>
-          <a:prstGeom prst="rect">
-            <a:avLst/>
-          </a:prstGeom>
-          <a:ln w="12700">
-            <a:solidFill>
-              <a:srgbClr val="B08A4E"/>
-            </a:solidFill>
-            <a:prstDash val="solid"/>
-          </a:ln>
-        </p:spPr>
-      </p:sp>
-      <p:sp>
-        <p:nvSpPr>
-          <p:cNvPr id="3" name="qlabel"/>
-          <p:cNvSpPr txBox="1"/>
-          <p:nvPr/>
-        </p:nvSpPr>
-        <p:spPr>
-          <a:xfrm>
-            <a:off x="457200" y="320040"/>
-            <a:ext cx="8229600" cy="365760"/>
+          <p:nvPr>
+            <p:ph idx="100" type="title" hasCustomPrompt="1"/>
+          </p:nvPr>
+        </p:nvSpPr>
+        <p:spPr>
+          <a:xfrm>
+            <a:off x="731520" y="1828800"/>
+            <a:ext cx="7680960" cy="914400"/>
           </a:xfrm>
           <a:prstGeom prst="rect">
             <a:avLst/>
@@ -9783,124 +9482,62 @@
           <a:ln/>
         </p:spPr>
         <p:txBody>
-          <a:bodyPr wrap="square" lIns="0" tIns="0" rIns="0" bIns="0" rtlCol="0" anchor="t"/>
+          <a:bodyPr wrap="square" rtlCol="0" anchor="ctr"/>
           <a:lstStyle/>
           <a:p>
             <a:pPr algn="ctr" indent="0" marL="0">
               <a:buNone/>
             </a:pPr>
             <a:r>
-              <a:rPr lang="en-US" sz="1300" b="1" dirty="0">
+              <a:rPr lang="en-US" sz="3600" b="1" dirty="0">
                 <a:solidFill>
                   <a:schemeClr val="accent2"/>
-                </a:solidFill>
-              </a:rPr>
-              <a:t>問題の心理状況：幼少期の影響</a:t>
-            </a:r>
-            <a:endParaRPr lang="en-US" sz="1300" dirty="0"/>
-          </a:p>
-        </p:txBody>
-      </p:sp>
-      <p:sp>
-        <p:nvSpPr>
-          <p:cNvPr id="4" name="Text 0"/>
-          <p:cNvSpPr/>
-          <p:nvPr>
-            <p:ph idx="100" type="title" hasCustomPrompt="1"/>
-          </p:nvPr>
-        </p:nvSpPr>
-        <p:spPr>
-          <a:xfrm>
-            <a:off x="914400" y="1554480"/>
-            <a:ext cx="7315200" cy="1554480"/>
-          </a:xfrm>
-          <a:prstGeom prst="rect">
-            <a:avLst/>
-          </a:prstGeom>
-          <a:noFill/>
-          <a:ln/>
-        </p:spPr>
-        <p:txBody>
-          <a:bodyPr wrap="square" rtlCol="0" anchor="ctr"/>
-          <a:lstStyle/>
-          <a:p>
-            <a:pPr algn="ctr" indent="0" marL="0">
-              <a:buNone/>
-            </a:pPr>
-            <a:r>
-              <a:rPr lang="en-US" sz="3200" b="1" dirty="0">
-                <a:solidFill>
-                  <a:schemeClr val="tx2"/>
                 </a:solidFill>
                 <a:latin typeface="Yu Mincho" pitchFamily="34" charset="0"/>
                 <a:ea typeface="Yu Mincho" pitchFamily="34" charset="-122"/>
                 <a:cs typeface="Yu Mincho" pitchFamily="34" charset="-120"/>
               </a:rPr>
-              <a:t>ご両親に、かけてほしかった</a:t>
-            </a:r>
-            <a:endParaRPr lang="en-US" sz="3200" dirty="0"/>
-          </a:p>
+              <a:t>ワーク　思い込みを書き換える</a:t>
+            </a:r>
+            <a:endParaRPr lang="en-US" sz="3600" dirty="0"/>
+          </a:p>
+        </p:txBody>
+      </p:sp>
+      <p:sp>
+        <p:nvSpPr>
+          <p:cNvPr id="3" name="Text 0"/>
+          <p:cNvSpPr/>
+          <p:nvPr>
+            <p:ph idx="101" type="body" hasCustomPrompt="1"/>
+          </p:nvPr>
+        </p:nvSpPr>
+        <p:spPr>
+          <a:xfrm>
+            <a:off x="731520" y="2788920"/>
+            <a:ext cx="7680960" cy="822960"/>
+          </a:xfrm>
+          <a:prstGeom prst="rect">
+            <a:avLst/>
+          </a:prstGeom>
+          <a:noFill/>
+          <a:ln/>
+        </p:spPr>
+        <p:txBody>
+          <a:bodyPr wrap="square" rtlCol="0" anchor="t"/>
+          <a:lstStyle/>
           <a:p>
             <a:pPr algn="ctr" indent="0" marL="0">
               <a:buNone/>
             </a:pPr>
             <a:r>
-              <a:rPr lang="en-US" sz="3200" b="1" dirty="0">
-                <a:solidFill>
-                  <a:schemeClr val="tx2"/>
-                </a:solidFill>
-                <a:latin typeface="Yu Mincho" pitchFamily="34" charset="0"/>
-                <a:ea typeface="Yu Mincho" pitchFamily="34" charset="-122"/>
-                <a:cs typeface="Yu Mincho" pitchFamily="34" charset="-120"/>
-              </a:rPr>
-              <a:t>言葉はありますか？</a:t>
-            </a:r>
-            <a:endParaRPr lang="en-US" sz="3200" dirty="0"/>
-          </a:p>
-        </p:txBody>
-      </p:sp>
-      <p:sp>
-        <p:nvSpPr>
-          <p:cNvPr id="25" name="Slide Number Placeholder 0"/>
-          <p:cNvSpPr>
-            <a:spLocks noGrp="1"/>
-          </p:cNvSpPr>
-          <p:nvPr>
-            <p:ph type="sldNum" sz="quarter" idx="4294967295"/>
-          </p:nvPr>
-        </p:nvSpPr>
-        <p:spPr>
-          <a:xfrm>
-            <a:off x="8229600" y="4754880"/>
-            <a:ext cx="457200" cy="274320"/>
-          </a:xfrm>
-          <a:prstGeom prst="rect">
-            <a:avLst/>
-          </a:prstGeom>
-          <a:extLst>
-            <a:ext uri="{C572A759-6A51-4108-AA02-DFA0A04FC94B}">
-              <ma14:wrappingTextBoxFlag xmlns:ma14="http://schemas.microsoft.com/office/mac/drawingml/2011/main" val="0"/>
-            </a:ext>
-          </a:extLst>
-        </p:spPr>
-        <p:txBody>
-          <a:bodyPr/>
-          <a:lstStyle>
-            <a:lvl1pPr>
-              <a:defRPr sz="900">
-                <a:solidFill>
-                  <a:srgbClr val="B08A4E"/>
-                </a:solidFill>
-              </a:defRPr>
-            </a:lvl1pPr>
-          </a:lstStyle>
-          <a:p>
-            <a:pPr algn="r"/>
-            <a:fld id="{F7021451-1387-4CA6-816F-3879F97B5CBC}" type="slidenum">
-              <a:rPr b="0" lang="en-US"/>
-              <a:t>23</a:t>
-            </a:fld>
-            <a:endParaRPr lang="en-US"/>
+              <a:rPr lang="en-US" sz="1600" dirty="0">
+                <a:solidFill>
+                  <a:schemeClr val="tx1"/>
+                </a:solidFill>
+              </a:rPr>
+              <a:t>思い込みが生まれた場面に戻って、書き換えていきます（35〜75分）</a:t>
+            </a:r>
+            <a:endParaRPr lang="en-US" sz="1600" dirty="0"/>
           </a:p>
         </p:txBody>
       </p:sp>
@@ -9950,6 +9587,10 @@
             <a:prstDash val="solid"/>
           </a:ln>
         </p:spPr>
+        <p:txBody>
+          <a:bodyPr/>
+          <a:p/>
+        </p:txBody>
       </p:sp>
       <p:sp>
         <p:nvSpPr>
@@ -9981,7 +9622,7 @@
                   <a:schemeClr val="accent2"/>
                 </a:solidFill>
               </a:rPr>
-              <a:t>問題の心理状況：幼少期の影響</a:t>
+              <a:t>ワークの前に</a:t>
             </a:r>
             <a:endParaRPr lang="en-US" sz="1300" dirty="0"/>
           </a:p>
@@ -9989,16 +9630,14 @@
       </p:sp>
       <p:sp>
         <p:nvSpPr>
-          <p:cNvPr id="4" name="Text 0"/>
-          <p:cNvSpPr/>
-          <p:nvPr>
-            <p:ph idx="100" type="title" hasCustomPrompt="1"/>
-          </p:nvPr>
-        </p:nvSpPr>
-        <p:spPr>
-          <a:xfrm>
-            <a:off x="914400" y="1554480"/>
-            <a:ext cx="7315200" cy="1554480"/>
+          <p:cNvPr id="4" name="pre_main"/>
+          <p:cNvSpPr txBox="1"/>
+          <p:nvPr/>
+        </p:nvSpPr>
+        <p:spPr>
+          <a:xfrm>
+            <a:off x="731520" y="1097280"/>
+            <a:ext cx="7680960" cy="1280160"/>
           </a:xfrm>
           <a:prstGeom prst="rect">
             <a:avLst/>
@@ -10007,14 +9646,14 @@
           <a:ln/>
         </p:spPr>
         <p:txBody>
-          <a:bodyPr wrap="square" rtlCol="0" anchor="ctr"/>
+          <a:bodyPr wrap="square" lIns="1016" tIns="1016" rIns="1016" bIns="1016" rtlCol="0" anchor="ctr"/>
           <a:lstStyle/>
           <a:p>
             <a:pPr algn="ctr" indent="0" marL="0">
               <a:buNone/>
             </a:pPr>
             <a:r>
-              <a:rPr lang="en-US" sz="3200" b="1" dirty="0">
+              <a:rPr lang="en-US" sz="2800" b="1" dirty="0">
                 <a:solidFill>
                   <a:schemeClr val="tx2"/>
                 </a:solidFill>
@@ -10022,16 +9661,16 @@
                 <a:ea typeface="Yu Mincho" pitchFamily="34" charset="-122"/>
                 <a:cs typeface="Yu Mincho" pitchFamily="34" charset="-120"/>
               </a:rPr>
-              <a:t>今のお悩みに、幼少期の影響が</a:t>
-            </a:r>
-            <a:endParaRPr lang="en-US" sz="3200" dirty="0"/>
+              <a:t>今回、一番大きいと感じる思い込みに</a:t>
+            </a:r>
+            <a:endParaRPr lang="en-US" sz="2800" dirty="0"/>
           </a:p>
           <a:p>
             <a:pPr algn="ctr" indent="0" marL="0">
               <a:buNone/>
             </a:pPr>
             <a:r>
-              <a:rPr lang="en-US" sz="3200" b="1" dirty="0">
+              <a:rPr lang="en-US" sz="2800" b="1" dirty="0">
                 <a:solidFill>
                   <a:schemeClr val="tx2"/>
                 </a:solidFill>
@@ -10039,24 +9678,22 @@
                 <a:ea typeface="Yu Mincho" pitchFamily="34" charset="-122"/>
                 <a:cs typeface="Yu Mincho" pitchFamily="34" charset="-120"/>
               </a:rPr>
-              <a:t>あると思われますか？</a:t>
-            </a:r>
-            <a:endParaRPr lang="en-US" sz="3200" dirty="0"/>
-          </a:p>
-        </p:txBody>
-      </p:sp>
-      <p:sp>
-        <p:nvSpPr>
-          <p:cNvPr id="5" name="Text 0"/>
-          <p:cNvSpPr/>
-          <p:nvPr>
-            <p:ph idx="101" type="body" hasCustomPrompt="1"/>
-          </p:nvPr>
-        </p:nvSpPr>
-        <p:spPr>
-          <a:xfrm>
-            <a:off x="914400" y="3200400"/>
-            <a:ext cx="7315200" cy="731520"/>
+              <a:t>向き合っていきます</a:t>
+            </a:r>
+            <a:endParaRPr lang="en-US" sz="2800" dirty="0"/>
+          </a:p>
+        </p:txBody>
+      </p:sp>
+      <p:sp>
+        <p:nvSpPr>
+          <p:cNvPr id="5" name="pre_sub"/>
+          <p:cNvSpPr txBox="1"/>
+          <p:nvPr/>
+        </p:nvSpPr>
+        <p:spPr>
+          <a:xfrm>
+            <a:off x="731520" y="2606040"/>
+            <a:ext cx="7680960" cy="1371600"/>
           </a:xfrm>
           <a:prstGeom prst="rect">
             <a:avLst/>
@@ -10065,21 +9702,58 @@
           <a:ln/>
         </p:spPr>
         <p:txBody>
-          <a:bodyPr wrap="square" rtlCol="0" anchor="t"/>
+          <a:bodyPr wrap="square" lIns="1016" tIns="1016" rIns="1016" bIns="1016" rtlCol="0" anchor="t"/>
           <a:lstStyle/>
           <a:p>
             <a:pPr algn="ctr" indent="0" marL="0">
-              <a:buNone/>
-            </a:pPr>
-            <a:r>
-              <a:rPr lang="en-US" sz="1500" dirty="0">
-                <a:solidFill>
-                  <a:schemeClr val="accent2"/>
-                </a:solidFill>
-              </a:rPr>
-              <a:t>あるなーと思っても、思わなくても、どちらでも大丈夫です</a:t>
-            </a:r>
-            <a:endParaRPr lang="en-US" sz="1500" dirty="0"/>
+              <a:lnSpc>
+                <a:spcPct val="130000"/>
+              </a:lnSpc>
+              <a:buNone/>
+            </a:pPr>
+            <a:r>
+              <a:rPr lang="en-US" sz="1600" dirty="0">
+                <a:solidFill>
+                  <a:schemeClr val="tx1"/>
+                </a:solidFill>
+              </a:rPr>
+              <a:t>ただ、それが整理されると、次の思い込みや感情に気づくこともあります。</a:t>
+            </a:r>
+            <a:endParaRPr lang="en-US" sz="1600" dirty="0"/>
+          </a:p>
+          <a:p>
+            <a:pPr algn="ctr" indent="0" marL="0">
+              <a:lnSpc>
+                <a:spcPct val="130000"/>
+              </a:lnSpc>
+              <a:buNone/>
+            </a:pPr>
+            <a:r>
+              <a:rPr lang="en-US" sz="1600" dirty="0">
+                <a:solidFill>
+                  <a:schemeClr val="tx1"/>
+                </a:solidFill>
+              </a:rPr>
+              <a:t>だからこそ、一度で終わりではなく、</a:t>
+            </a:r>
+            <a:endParaRPr lang="en-US" sz="1600" dirty="0"/>
+          </a:p>
+          <a:p>
+            <a:pPr algn="ctr" indent="0" marL="0">
+              <a:lnSpc>
+                <a:spcPct val="130000"/>
+              </a:lnSpc>
+              <a:buNone/>
+            </a:pPr>
+            <a:r>
+              <a:rPr lang="en-US" sz="1600" dirty="0">
+                <a:solidFill>
+                  <a:schemeClr val="tx1"/>
+                </a:solidFill>
+              </a:rPr>
+              <a:t>自分自身で繰り返し向き合っていくことが大切です。</a:t>
+            </a:r>
+            <a:endParaRPr lang="en-US" sz="1600" dirty="0"/>
           </a:p>
         </p:txBody>
       </p:sp>
@@ -10155,16 +9829,40 @@
       </p:grpSpPr>
       <p:sp>
         <p:nvSpPr>
-          <p:cNvPr id="2" name="Text 0"/>
+          <p:cNvPr id="2" name="misenai_band"/>
           <p:cNvSpPr/>
-          <p:nvPr>
-            <p:ph idx="100" type="title" hasCustomPrompt="1"/>
-          </p:nvPr>
-        </p:nvSpPr>
-        <p:spPr>
-          <a:xfrm>
-            <a:off x="731520" y="1828800"/>
-            <a:ext cx="7680960" cy="914400"/>
+          <p:nvPr/>
+        </p:nvSpPr>
+        <p:spPr>
+          <a:xfrm>
+            <a:off x="457200" y="182880"/>
+            <a:ext cx="8229600" cy="502920"/>
+          </a:xfrm>
+          <a:prstGeom prst="roundRect">
+            <a:avLst>
+              <a:gd name="adj" fmla="val 18182"/>
+            </a:avLst>
+          </a:prstGeom>
+          <a:solidFill>
+            <a:srgbClr val="8C6A34"/>
+          </a:solidFill>
+          <a:ln/>
+        </p:spPr>
+        <p:txBody>
+          <a:bodyPr/>
+          <a:p/>
+        </p:txBody>
+      </p:sp>
+      <p:sp>
+        <p:nvSpPr>
+          <p:cNvPr id="3" name="misenai"/>
+          <p:cNvSpPr txBox="1"/>
+          <p:nvPr/>
+        </p:nvSpPr>
+        <p:spPr>
+          <a:xfrm>
+            <a:off x="457200" y="182880"/>
+            <a:ext cx="8229600" cy="502920"/>
           </a:xfrm>
           <a:prstGeom prst="rect">
             <a:avLst/>
@@ -10173,14 +9871,50 @@
           <a:ln/>
         </p:spPr>
         <p:txBody>
-          <a:bodyPr wrap="square" rtlCol="0" anchor="ctr"/>
+          <a:bodyPr wrap="square" lIns="0" tIns="0" rIns="0" bIns="0" rtlCol="0" anchor="ctr"/>
           <a:lstStyle/>
           <a:p>
             <a:pPr algn="ctr" indent="0" marL="0">
               <a:buNone/>
             </a:pPr>
             <a:r>
-              <a:rPr lang="en-US" sz="3600" b="1" dirty="0">
+              <a:rPr lang="en-US" sz="1800" b="1" dirty="0">
+                <a:solidFill>
+                  <a:schemeClr val="bg1"/>
+                </a:solidFill>
+              </a:rPr>
+              <a:t>【共有停止】</a:t>
+            </a:r>
+            <a:endParaRPr lang="en-US" sz="1800" dirty="0"/>
+          </a:p>
+        </p:txBody>
+      </p:sp>
+      <p:sp>
+        <p:nvSpPr>
+          <p:cNvPr id="4" name="facil_title"/>
+          <p:cNvSpPr txBox="1"/>
+          <p:nvPr/>
+        </p:nvSpPr>
+        <p:spPr>
+          <a:xfrm>
+            <a:off x="457200" y="777240"/>
+            <a:ext cx="8229600" cy="411480"/>
+          </a:xfrm>
+          <a:prstGeom prst="rect">
+            <a:avLst/>
+          </a:prstGeom>
+          <a:noFill/>
+          <a:ln/>
+        </p:spPr>
+        <p:txBody>
+          <a:bodyPr wrap="square" lIns="0" tIns="0" rIns="0" bIns="0" rtlCol="0" anchor="t"/>
+          <a:lstStyle/>
+          <a:p>
+            <a:pPr indent="0" marL="0">
+              <a:buNone/>
+            </a:pPr>
+            <a:r>
+              <a:rPr lang="en-US" sz="2200" b="1" dirty="0">
                 <a:solidFill>
                   <a:schemeClr val="accent2"/>
                 </a:solidFill>
@@ -10188,24 +9922,53 @@
                 <a:ea typeface="Yu Mincho" pitchFamily="34" charset="-122"/>
                 <a:cs typeface="Yu Mincho" pitchFamily="34" charset="-120"/>
               </a:rPr>
-              <a:t>ワーク　思い込みを書き換える</a:t>
-            </a:r>
-            <a:endParaRPr lang="en-US" sz="3600" dirty="0"/>
-          </a:p>
-        </p:txBody>
-      </p:sp>
-      <p:sp>
-        <p:nvSpPr>
-          <p:cNvPr id="3" name="Text 0"/>
+              <a:t>STEP 1〜2 の進め方</a:t>
+            </a:r>
+            <a:endParaRPr lang="en-US" sz="2200" dirty="0"/>
+          </a:p>
+        </p:txBody>
+      </p:sp>
+      <p:sp>
+        <p:nvSpPr>
+          <p:cNvPr id="5" name="facil_card"/>
           <p:cNvSpPr/>
-          <p:nvPr>
-            <p:ph idx="101" type="body" hasCustomPrompt="1"/>
-          </p:nvPr>
-        </p:nvSpPr>
-        <p:spPr>
-          <a:xfrm>
-            <a:off x="731520" y="2788920"/>
-            <a:ext cx="7680960" cy="822960"/>
+          <p:nvPr/>
+        </p:nvSpPr>
+        <p:spPr>
+          <a:xfrm>
+            <a:off x="457200" y="1188720"/>
+            <a:ext cx="5394960" cy="3383280"/>
+          </a:xfrm>
+          <a:prstGeom prst="roundRect">
+            <a:avLst>
+              <a:gd name="adj" fmla="val 3243"/>
+            </a:avLst>
+          </a:prstGeom>
+          <a:solidFill>
+            <a:srgbClr val="FFF8E8"/>
+          </a:solidFill>
+          <a:ln w="9525">
+            <a:solidFill>
+              <a:srgbClr val="E9D9B6"/>
+            </a:solidFill>
+            <a:prstDash val="solid"/>
+          </a:ln>
+        </p:spPr>
+        <p:txBody>
+          <a:bodyPr/>
+          <a:p/>
+        </p:txBody>
+      </p:sp>
+      <p:sp>
+        <p:nvSpPr>
+          <p:cNvPr id="6" name="facil_list"/>
+          <p:cNvSpPr txBox="1"/>
+          <p:nvPr/>
+        </p:nvSpPr>
+        <p:spPr>
+          <a:xfrm>
+            <a:off x="594360" y="1280160"/>
+            <a:ext cx="5120640" cy="3200400"/>
           </a:xfrm>
           <a:prstGeom prst="rect">
             <a:avLst/>
@@ -10214,21 +9977,190 @@
           <a:ln/>
         </p:spPr>
         <p:txBody>
-          <a:bodyPr wrap="square" rtlCol="0" anchor="t"/>
-          <a:lstStyle/>
-          <a:p>
-            <a:pPr algn="ctr" indent="0" marL="0">
-              <a:buNone/>
-            </a:pPr>
-            <a:r>
-              <a:rPr lang="en-US" sz="1600" dirty="0">
+          <a:bodyPr wrap="square" lIns="1016" tIns="1016" rIns="1016" bIns="1016" rtlCol="0" anchor="t"/>
+          <a:lstStyle/>
+          <a:p>
+            <a:pPr marL="342900" indent="-342900">
+              <a:spcAft>
+                <a:spcPts val="300"/>
+              </a:spcAft>
+              <a:buSzPct val="100000"/>
+              <a:buFont typeface="+mj-lt"/>
+              <a:buAutoNum type="arabicPeriod" startAt="1"/>
+            </a:pPr>
+            <a:r>
+              <a:rPr lang="en-US" sz="1200" dirty="0">
                 <a:solidFill>
                   <a:schemeClr val="tx1"/>
                 </a:solidFill>
               </a:rPr>
-              <a:t>思い込みが生まれた場面に戻って、書き換えていきます（35〜75分）</a:t>
-            </a:r>
-            <a:endParaRPr lang="en-US" sz="1600" dirty="0"/>
+              <a:t>穴埋め「お金とは、＿」「お金を受け取る私は、＿」→本人の言葉を打ち込む</a:t>
+            </a:r>
+            <a:endParaRPr lang="en-US" sz="1200" dirty="0"/>
+          </a:p>
+          <a:p>
+            <a:pPr marL="342900" indent="-342900">
+              <a:spcAft>
+                <a:spcPts val="300"/>
+              </a:spcAft>
+              <a:buSzPct val="100000"/>
+              <a:buFont typeface="+mj-lt"/>
+              <a:buAutoNum type="arabicPeriod" startAt="1"/>
+            </a:pPr>
+            <a:r>
+              <a:rPr lang="en-US" sz="1200" dirty="0">
+                <a:solidFill>
+                  <a:schemeClr val="tx1"/>
+                </a:solidFill>
+              </a:rPr>
+              <a:t>「その言葉は、守っている？選択を狭めている？」</a:t>
+            </a:r>
+            <a:endParaRPr lang="en-US" sz="1200" dirty="0"/>
+          </a:p>
+          <a:p>
+            <a:pPr marL="342900" indent="-342900">
+              <a:spcAft>
+                <a:spcPts val="300"/>
+              </a:spcAft>
+              <a:buSzPct val="100000"/>
+              <a:buFont typeface="+mj-lt"/>
+              <a:buAutoNum type="arabicPeriod" startAt="1"/>
+            </a:pPr>
+            <a:r>
+              <a:rPr lang="en-US" sz="1200" dirty="0">
+                <a:solidFill>
+                  <a:schemeClr val="tx1"/>
+                </a:solidFill>
+              </a:rPr>
+              <a:t>すごい質問「何があなたをそう思わせるのですか？」（見える・色・聞こえる・体の感じ）</a:t>
+            </a:r>
+            <a:endParaRPr lang="en-US" sz="1200" dirty="0"/>
+          </a:p>
+          <a:p>
+            <a:pPr marL="342900" indent="-342900">
+              <a:spcAft>
+                <a:spcPts val="300"/>
+              </a:spcAft>
+              <a:buSzPct val="100000"/>
+              <a:buFont typeface="+mj-lt"/>
+              <a:buAutoNum type="arabicPeriod" startAt="1"/>
+            </a:pPr>
+            <a:r>
+              <a:rPr lang="en-US" sz="1200" dirty="0">
+                <a:solidFill>
+                  <a:schemeClr val="tx1"/>
+                </a:solidFill>
+              </a:rPr>
+              <a:t>1階層目を5つ以上 → 表に打ち込み、100点満点で点数</a:t>
+            </a:r>
+            <a:endParaRPr lang="en-US" sz="1200" dirty="0"/>
+          </a:p>
+          <a:p>
+            <a:pPr marL="342900" indent="-342900">
+              <a:spcAft>
+                <a:spcPts val="300"/>
+              </a:spcAft>
+              <a:buSzPct val="100000"/>
+              <a:buFont typeface="+mj-lt"/>
+              <a:buAutoNum type="arabicPeriod" startAt="1"/>
+            </a:pPr>
+            <a:r>
+              <a:rPr lang="en-US" sz="1200" dirty="0">
+                <a:solidFill>
+                  <a:schemeClr val="tx1"/>
+                </a:solidFill>
+              </a:rPr>
+              <a:t>1階層目で一番強いものを軸に、2階層目も同じ質問で（全部で10個くらい）</a:t>
+            </a:r>
+            <a:endParaRPr lang="en-US" sz="1200" dirty="0"/>
+          </a:p>
+          <a:p>
+            <a:pPr marL="342900" indent="-342900">
+              <a:spcAft>
+                <a:spcPts val="300"/>
+              </a:spcAft>
+              <a:buSzPct val="100000"/>
+              <a:buFont typeface="+mj-lt"/>
+              <a:buAutoNum type="arabicPeriod" startAt="1"/>
+            </a:pPr>
+            <a:r>
+              <a:rPr lang="en-US" sz="1200" dirty="0">
+                <a:solidFill>
+                  <a:schemeClr val="tx1"/>
+                </a:solidFill>
+              </a:rPr>
+              <a:t>点数がわからない時はOリング・筋肉反射</a:t>
+            </a:r>
+            <a:endParaRPr lang="en-US" sz="1200" dirty="0"/>
+          </a:p>
+        </p:txBody>
+      </p:sp>
+      <p:pic>
+        <p:nvPicPr>
+          <p:cNvPr id="7" name="Image 0" descr="ガイドブック">    </p:cNvPr>
+          <p:cNvPicPr>
+            <a:picLocks noChangeAspect="1"/>
+          </p:cNvPicPr>
+          <p:nvPr/>
+        </p:nvPicPr>
+        <p:blipFill>
+          <a:blip r:embed="rId1"/>
+          <a:stretch>
+            <a:fillRect/>
+          </a:stretch>
+        </p:blipFill>
+        <p:spPr>
+          <a:xfrm>
+            <a:off x="6126480" y="1188720"/>
+            <a:ext cx="2377440" cy="3364992"/>
+          </a:xfrm>
+          <a:prstGeom prst="rect">
+            <a:avLst/>
+          </a:prstGeom>
+        </p:spPr>
+      </p:pic>
+      <p:sp>
+        <p:nvSpPr>
+          <p:cNvPr id="25" name="Slide Number Placeholder 0"/>
+          <p:cNvSpPr>
+            <a:spLocks noGrp="1"/>
+          </p:cNvSpPr>
+          <p:nvPr>
+            <p:ph type="sldNum" sz="quarter" idx="4294967295"/>
+          </p:nvPr>
+        </p:nvSpPr>
+        <p:spPr>
+          <a:xfrm>
+            <a:off x="8229600" y="4754880"/>
+            <a:ext cx="457200" cy="274320"/>
+          </a:xfrm>
+          <a:prstGeom prst="rect">
+            <a:avLst/>
+          </a:prstGeom>
+          <a:extLst>
+            <a:ext uri="{C572A759-6A51-4108-AA02-DFA0A04FC94B}">
+              <ma14:wrappingTextBoxFlag xmlns:ma14="http://schemas.microsoft.com/office/mac/drawingml/2011/main" val="0"/>
+            </a:ext>
+          </a:extLst>
+        </p:spPr>
+        <p:txBody>
+          <a:bodyPr/>
+          <a:lstStyle>
+            <a:lvl1pPr>
+              <a:defRPr sz="900">
+                <a:solidFill>
+                  <a:srgbClr val="B08A4E"/>
+                </a:solidFill>
+              </a:defRPr>
+            </a:lvl1pPr>
+          </a:lstStyle>
+          <a:p>
+            <a:pPr algn="r"/>
+            <a:fld id="{F7021451-1387-4CA6-816F-3879F97B5CBC}" type="slidenum">
+              <a:rPr b="0" lang="en-US"/>
+              <a:t>25</a:t>
+            </a:fld>
+            <a:endParaRPr lang="en-US"/>
           </a:p>
         </p:txBody>
       </p:sp>
@@ -10278,6 +10210,10 @@
             <a:prstDash val="solid"/>
           </a:ln>
         </p:spPr>
+        <p:txBody>
+          <a:bodyPr/>
+          <a:p/>
+        </p:txBody>
       </p:sp>
       <p:sp>
         <p:nvSpPr>
@@ -10309,7 +10245,7 @@
                   <a:schemeClr val="accent2"/>
                 </a:solidFill>
               </a:rPr>
-              <a:t>ワークの前に</a:t>
+              <a:t>STEP 1　お金の思い込みを言葉にする</a:t>
             </a:r>
             <a:endParaRPr lang="en-US" sz="1300" dirty="0"/>
           </a:p>
@@ -10317,14 +10253,14 @@
       </p:sp>
       <p:sp>
         <p:nvSpPr>
-          <p:cNvPr id="4" name="pre_main"/>
+          <p:cNvPr id="4" name="fill1"/>
           <p:cNvSpPr txBox="1"/>
           <p:nvPr/>
         </p:nvSpPr>
         <p:spPr>
           <a:xfrm>
-            <a:off x="731520" y="1097280"/>
-            <a:ext cx="7680960" cy="1280160"/>
+            <a:off x="731520" y="1188720"/>
+            <a:ext cx="7680960" cy="822960"/>
           </a:xfrm>
           <a:prstGeom prst="rect">
             <a:avLst/>
@@ -10340,7 +10276,7 @@
               <a:buNone/>
             </a:pPr>
             <a:r>
-              <a:rPr lang="en-US" sz="2800" b="1" dirty="0">
+              <a:rPr lang="en-US" sz="3000" b="1" dirty="0">
                 <a:solidFill>
                   <a:schemeClr val="tx2"/>
                 </a:solidFill>
@@ -10348,16 +10284,38 @@
                 <a:ea typeface="Yu Mincho" pitchFamily="34" charset="-122"/>
                 <a:cs typeface="Yu Mincho" pitchFamily="34" charset="-120"/>
               </a:rPr>
-              <a:t>今回、一番大きいと感じる思い込みに</a:t>
-            </a:r>
-            <a:endParaRPr lang="en-US" sz="2800" dirty="0"/>
-          </a:p>
+              <a:t>「お金とは、＿＿＿＿＿＿＿＿」</a:t>
+            </a:r>
+            <a:endParaRPr lang="en-US" sz="3000" dirty="0"/>
+          </a:p>
+        </p:txBody>
+      </p:sp>
+      <p:sp>
+        <p:nvSpPr>
+          <p:cNvPr id="5" name="fill2"/>
+          <p:cNvSpPr txBox="1"/>
+          <p:nvPr/>
+        </p:nvSpPr>
+        <p:spPr>
+          <a:xfrm>
+            <a:off x="731520" y="2103120"/>
+            <a:ext cx="7680960" cy="822960"/>
+          </a:xfrm>
+          <a:prstGeom prst="rect">
+            <a:avLst/>
+          </a:prstGeom>
+          <a:noFill/>
+          <a:ln/>
+        </p:spPr>
+        <p:txBody>
+          <a:bodyPr wrap="square" lIns="1016" tIns="1016" rIns="1016" bIns="1016" rtlCol="0" anchor="ctr"/>
+          <a:lstStyle/>
           <a:p>
             <a:pPr algn="ctr" indent="0" marL="0">
               <a:buNone/>
             </a:pPr>
             <a:r>
-              <a:rPr lang="en-US" sz="2800" b="1" dirty="0">
+              <a:rPr lang="en-US" sz="3000" b="1" dirty="0">
                 <a:solidFill>
                   <a:schemeClr val="tx2"/>
                 </a:solidFill>
@@ -10365,22 +10323,22 @@
                 <a:ea typeface="Yu Mincho" pitchFamily="34" charset="-122"/>
                 <a:cs typeface="Yu Mincho" pitchFamily="34" charset="-120"/>
               </a:rPr>
-              <a:t>向き合っていきます</a:t>
-            </a:r>
-            <a:endParaRPr lang="en-US" sz="2800" dirty="0"/>
-          </a:p>
-        </p:txBody>
-      </p:sp>
-      <p:sp>
-        <p:nvSpPr>
-          <p:cNvPr id="5" name="pre_sub"/>
+              <a:t>「お金を受け取る私は、＿＿＿＿＿＿＿＿」</a:t>
+            </a:r>
+            <a:endParaRPr lang="en-US" sz="3000" dirty="0"/>
+          </a:p>
+        </p:txBody>
+      </p:sp>
+      <p:sp>
+        <p:nvSpPr>
+          <p:cNvPr id="6" name="fill_hint"/>
           <p:cNvSpPr txBox="1"/>
           <p:nvPr/>
         </p:nvSpPr>
         <p:spPr>
           <a:xfrm>
-            <a:off x="731520" y="2606040"/>
-            <a:ext cx="7680960" cy="1371600"/>
+            <a:off x="731520" y="3200400"/>
+            <a:ext cx="7680960" cy="457200"/>
           </a:xfrm>
           <a:prstGeom prst="rect">
             <a:avLst/>
@@ -10393,54 +10351,17 @@
           <a:lstStyle/>
           <a:p>
             <a:pPr algn="ctr" indent="0" marL="0">
-              <a:lnSpc>
-                <a:spcPct val="130000"/>
-              </a:lnSpc>
-              <a:buNone/>
-            </a:pPr>
-            <a:r>
-              <a:rPr lang="en-US" sz="1600" dirty="0">
-                <a:solidFill>
-                  <a:schemeClr val="tx1"/>
-                </a:solidFill>
-              </a:rPr>
-              <a:t>ただ、それが整理されると、次の思い込みや感情に気づくこともあります。</a:t>
-            </a:r>
-            <a:endParaRPr lang="en-US" sz="1600" dirty="0"/>
-          </a:p>
-          <a:p>
-            <a:pPr algn="ctr" indent="0" marL="0">
-              <a:lnSpc>
-                <a:spcPct val="130000"/>
-              </a:lnSpc>
-              <a:buNone/>
-            </a:pPr>
-            <a:r>
-              <a:rPr lang="en-US" sz="1600" dirty="0">
-                <a:solidFill>
-                  <a:schemeClr val="tx1"/>
-                </a:solidFill>
-              </a:rPr>
-              <a:t>だからこそ、一度で終わりではなく、</a:t>
-            </a:r>
-            <a:endParaRPr lang="en-US" sz="1600" dirty="0"/>
-          </a:p>
-          <a:p>
-            <a:pPr algn="ctr" indent="0" marL="0">
-              <a:lnSpc>
-                <a:spcPct val="130000"/>
-              </a:lnSpc>
-              <a:buNone/>
-            </a:pPr>
-            <a:r>
-              <a:rPr lang="en-US" sz="1600" dirty="0">
-                <a:solidFill>
-                  <a:schemeClr val="tx1"/>
-                </a:solidFill>
-              </a:rPr>
-              <a:t>自分自身で繰り返し向き合っていくことが大切です。</a:t>
-            </a:r>
-            <a:endParaRPr lang="en-US" sz="1600" dirty="0"/>
+              <a:buNone/>
+            </a:pPr>
+            <a:r>
+              <a:rPr lang="en-US" sz="1500" dirty="0">
+                <a:solidFill>
+                  <a:schemeClr val="accent2"/>
+                </a:solidFill>
+              </a:rPr>
+              <a:t>正解を探さず、浮かんだ言葉をそのまま</a:t>
+            </a:r>
+            <a:endParaRPr lang="en-US" sz="1500" dirty="0"/>
           </a:p>
         </p:txBody>
       </p:sp>
@@ -10516,16 +10437,40 @@
       </p:grpSpPr>
       <p:sp>
         <p:nvSpPr>
-          <p:cNvPr id="2" name="Text 0"/>
+          <p:cNvPr id="2" name="frame"/>
           <p:cNvSpPr/>
-          <p:nvPr>
-            <p:ph idx="100" type="title" hasCustomPrompt="1"/>
-          </p:nvPr>
-        </p:nvSpPr>
-        <p:spPr>
-          <a:xfrm>
-            <a:off x="457200" y="457200"/>
-            <a:ext cx="8229600" cy="594360"/>
+          <p:nvPr/>
+        </p:nvSpPr>
+        <p:spPr>
+          <a:xfrm>
+            <a:off x="228600" y="137160"/>
+            <a:ext cx="8686800" cy="4526280"/>
+          </a:xfrm>
+          <a:prstGeom prst="rect">
+            <a:avLst/>
+          </a:prstGeom>
+          <a:ln w="12700">
+            <a:solidFill>
+              <a:srgbClr val="B08A4E"/>
+            </a:solidFill>
+            <a:prstDash val="solid"/>
+          </a:ln>
+        </p:spPr>
+        <p:txBody>
+          <a:bodyPr/>
+          <a:p/>
+        </p:txBody>
+      </p:sp>
+      <p:sp>
+        <p:nvSpPr>
+          <p:cNvPr id="3" name="qlabel"/>
+          <p:cNvSpPr txBox="1"/>
+          <p:nvPr/>
+        </p:nvSpPr>
+        <p:spPr>
+          <a:xfrm>
+            <a:off x="457200" y="320040"/>
+            <a:ext cx="8229600" cy="365760"/>
           </a:xfrm>
           <a:prstGeom prst="rect">
             <a:avLst/>
@@ -10534,80 +10479,69 @@
           <a:ln/>
         </p:spPr>
         <p:txBody>
-          <a:bodyPr wrap="square" lIns="0" tIns="0" rIns="0" bIns="0" rtlCol="0" anchor="ctr"/>
-          <a:lstStyle/>
-          <a:p>
-            <a:pPr algn="l" indent="0" marL="0">
-              <a:buNone/>
-            </a:pPr>
-            <a:r>
-              <a:rPr lang="en-US" sz="2400" b="1" dirty="0">
+          <a:bodyPr wrap="square" lIns="0" tIns="0" rIns="0" bIns="0" rtlCol="0" anchor="t"/>
+          <a:lstStyle/>
+          <a:p>
+            <a:pPr algn="ctr" indent="0" marL="0">
+              <a:buNone/>
+            </a:pPr>
+            <a:r>
+              <a:rPr lang="en-US" sz="1300" b="1" dirty="0">
                 <a:solidFill>
                   <a:schemeClr val="accent2"/>
+                </a:solidFill>
+              </a:rPr>
+              <a:t>STEP 1</a:t>
+            </a:r>
+            <a:endParaRPr lang="en-US" sz="1300" dirty="0"/>
+          </a:p>
+        </p:txBody>
+      </p:sp>
+      <p:sp>
+        <p:nvSpPr>
+          <p:cNvPr id="4" name="Text 0"/>
+          <p:cNvSpPr/>
+          <p:nvPr>
+            <p:ph idx="100" type="title" hasCustomPrompt="1"/>
+          </p:nvPr>
+        </p:nvSpPr>
+        <p:spPr>
+          <a:xfrm>
+            <a:off x="914400" y="1554480"/>
+            <a:ext cx="7315200" cy="1554480"/>
+          </a:xfrm>
+          <a:prstGeom prst="rect">
+            <a:avLst/>
+          </a:prstGeom>
+          <a:noFill/>
+          <a:ln/>
+        </p:spPr>
+        <p:txBody>
+          <a:bodyPr wrap="square" rtlCol="0" anchor="ctr"/>
+          <a:lstStyle/>
+          <a:p>
+            <a:pPr algn="ctr" indent="0" marL="0">
+              <a:buNone/>
+            </a:pPr>
+            <a:r>
+              <a:rPr lang="en-US" sz="3200" b="1" dirty="0">
+                <a:solidFill>
+                  <a:schemeClr val="tx2"/>
                 </a:solidFill>
                 <a:latin typeface="Yu Mincho" pitchFamily="34" charset="0"/>
                 <a:ea typeface="Yu Mincho" pitchFamily="34" charset="-122"/>
                 <a:cs typeface="Yu Mincho" pitchFamily="34" charset="-120"/>
               </a:rPr>
-              <a:t>STEP 1　お金の思い込みを見つける</a:t>
-            </a:r>
-            <a:endParaRPr lang="en-US" sz="2400" dirty="0"/>
-          </a:p>
-        </p:txBody>
-      </p:sp>
-      <p:sp>
-        <p:nvSpPr>
-          <p:cNvPr id="3" name="s1_goal"/>
-          <p:cNvSpPr/>
-          <p:nvPr/>
-        </p:nvSpPr>
-        <p:spPr>
-          <a:xfrm>
-            <a:off x="457200" y="1234440"/>
-            <a:ext cx="5120640" cy="1371600"/>
-          </a:xfrm>
-          <a:prstGeom prst="roundRect">
-            <a:avLst>
-              <a:gd name="adj" fmla="val 8000"/>
-            </a:avLst>
-          </a:prstGeom>
-          <a:solidFill>
-            <a:srgbClr val="FDFAF4"/>
-          </a:solidFill>
-          <a:ln w="9525">
-            <a:solidFill>
-              <a:srgbClr val="E9D9B6"/>
-            </a:solidFill>
-            <a:prstDash val="solid"/>
-          </a:ln>
-        </p:spPr>
-      </p:sp>
-      <p:sp>
-        <p:nvSpPr>
-          <p:cNvPr id="4" name="s1_goal_t"/>
-          <p:cNvSpPr txBox="1"/>
-          <p:nvPr/>
-        </p:nvSpPr>
-        <p:spPr>
-          <a:xfrm>
-            <a:off x="640080" y="1325880"/>
-            <a:ext cx="4846320" cy="1188720"/>
-          </a:xfrm>
-          <a:prstGeom prst="rect">
-            <a:avLst/>
-          </a:prstGeom>
-          <a:noFill/>
-          <a:ln/>
-        </p:spPr>
-        <p:txBody>
-          <a:bodyPr wrap="square" lIns="1016" tIns="1016" rIns="1016" bIns="1016" rtlCol="0" anchor="ctr"/>
-          <a:lstStyle/>
-          <a:p>
-            <a:pPr indent="0" marL="0">
-              <a:buNone/>
-            </a:pPr>
-            <a:r>
-              <a:rPr lang="en-US" sz="1700" b="1" dirty="0">
+              <a:t>その言葉は、今のあなたを</a:t>
+            </a:r>
+            <a:endParaRPr lang="en-US" sz="3200" dirty="0"/>
+          </a:p>
+          <a:p>
+            <a:pPr algn="ctr" indent="0" marL="0">
+              <a:buNone/>
+            </a:pPr>
+            <a:r>
+              <a:rPr lang="en-US" sz="3200" b="1" dirty="0">
                 <a:solidFill>
                   <a:schemeClr val="tx2"/>
                 </a:solidFill>
@@ -10615,147 +10549,29 @@
                 <a:ea typeface="Yu Mincho" pitchFamily="34" charset="-122"/>
                 <a:cs typeface="Yu Mincho" pitchFamily="34" charset="-120"/>
               </a:rPr>
-              <a:t>「私は〇〇を達成したい！</a:t>
-            </a:r>
-            <a:endParaRPr lang="en-US" sz="1700" dirty="0"/>
-          </a:p>
-          <a:p>
-            <a:pPr indent="0" marL="0">
-              <a:buNone/>
-            </a:pPr>
-            <a:r>
-              <a:rPr lang="en-US" sz="1700" b="1" dirty="0">
-                <a:solidFill>
-                  <a:schemeClr val="accent2"/>
+              <a:t>守っていますか？</a:t>
+            </a:r>
+            <a:endParaRPr lang="en-US" sz="3200" dirty="0"/>
+          </a:p>
+          <a:p>
+            <a:pPr algn="ctr" indent="0" marL="0">
+              <a:buNone/>
+            </a:pPr>
+            <a:r>
+              <a:rPr lang="en-US" sz="3200" b="1" dirty="0">
+                <a:solidFill>
+                  <a:schemeClr val="tx2"/>
                 </a:solidFill>
                 <a:latin typeface="Yu Mincho" pitchFamily="34" charset="0"/>
                 <a:ea typeface="Yu Mincho" pitchFamily="34" charset="-122"/>
                 <a:cs typeface="Yu Mincho" pitchFamily="34" charset="-120"/>
               </a:rPr>
-              <a:t>ただ、〇〇ができないかもしれない！</a:t>
-            </a:r>
-            <a:endParaRPr lang="en-US" sz="1700" dirty="0"/>
-          </a:p>
-          <a:p>
-            <a:pPr indent="0" marL="0">
-              <a:buNone/>
-            </a:pPr>
-            <a:r>
-              <a:rPr lang="en-US" sz="1700" b="1" dirty="0">
-                <a:solidFill>
-                  <a:schemeClr val="accent2"/>
-                </a:solidFill>
-                <a:latin typeface="Yu Mincho" pitchFamily="34" charset="0"/>
-                <a:ea typeface="Yu Mincho" pitchFamily="34" charset="-122"/>
-                <a:cs typeface="Yu Mincho" pitchFamily="34" charset="-120"/>
-              </a:rPr>
-              <a:t>きついかもしれない…」</a:t>
-            </a:r>
-            <a:endParaRPr lang="en-US" sz="1700" dirty="0"/>
-          </a:p>
-        </p:txBody>
-      </p:sp>
-      <p:sp>
-        <p:nvSpPr>
-          <p:cNvPr id="5" name="s1_q"/>
-          <p:cNvSpPr/>
-          <p:nvPr/>
-        </p:nvSpPr>
-        <p:spPr>
-          <a:xfrm>
-            <a:off x="457200" y="2788920"/>
-            <a:ext cx="5120640" cy="1280160"/>
-          </a:xfrm>
-          <a:prstGeom prst="roundRect">
-            <a:avLst>
-              <a:gd name="adj" fmla="val 8571"/>
-            </a:avLst>
-          </a:prstGeom>
-          <a:solidFill>
-            <a:srgbClr val="EFE8F6"/>
-          </a:solidFill>
-          <a:ln w="9525">
-            <a:solidFill>
-              <a:srgbClr val="E9D9B6"/>
-            </a:solidFill>
-            <a:prstDash val="solid"/>
-          </a:ln>
-        </p:spPr>
-      </p:sp>
-      <p:sp>
-        <p:nvSpPr>
-          <p:cNvPr id="6" name="s1_q_t"/>
-          <p:cNvSpPr txBox="1"/>
-          <p:nvPr/>
-        </p:nvSpPr>
-        <p:spPr>
-          <a:xfrm>
-            <a:off x="640080" y="2880360"/>
-            <a:ext cx="4846320" cy="1097280"/>
-          </a:xfrm>
-          <a:prstGeom prst="rect">
-            <a:avLst/>
-          </a:prstGeom>
-          <a:noFill/>
-          <a:ln/>
-        </p:spPr>
-        <p:txBody>
-          <a:bodyPr wrap="square" lIns="1016" tIns="1016" rIns="1016" bIns="1016" rtlCol="0" anchor="ctr"/>
-          <a:lstStyle/>
-          <a:p>
-            <a:pPr indent="0" marL="0">
-              <a:buNone/>
-            </a:pPr>
-            <a:r>
-              <a:rPr lang="en-US" sz="1500" dirty="0">
-                <a:solidFill>
-                  <a:schemeClr val="tx1"/>
-                </a:solidFill>
-              </a:rPr>
-              <a:t>この言葉のあとに出てくる気持ちが</a:t>
-            </a:r>
-            <a:endParaRPr lang="en-US" sz="1500" dirty="0"/>
-          </a:p>
-          <a:p>
-            <a:pPr indent="0" marL="0">
-              <a:buNone/>
-            </a:pPr>
-            <a:r>
-              <a:rPr lang="en-US" sz="1500" b="1" dirty="0">
-                <a:solidFill>
-                  <a:schemeClr val="tx1"/>
-                </a:solidFill>
-              </a:rPr>
-              <a:t>「お金の思い込み」の入り口です</a:t>
-            </a:r>
-            <a:endParaRPr lang="en-US" sz="1500" dirty="0"/>
-          </a:p>
-        </p:txBody>
-      </p:sp>
-      <p:pic>
-        <p:nvPicPr>
-          <p:cNvPr id="7" name="Image 0" descr="ガイドブック43ページ">    </p:cNvPr>
-          <p:cNvPicPr>
-            <a:picLocks noChangeAspect="1"/>
-          </p:cNvPicPr>
-          <p:nvPr/>
-        </p:nvPicPr>
-        <p:blipFill>
-          <a:blip r:embed="rId1"/>
-          <a:stretch>
-            <a:fillRect/>
-          </a:stretch>
-        </p:blipFill>
-        <p:spPr>
-          <a:xfrm>
-            <a:off x="5989320" y="1143000"/>
-            <a:ext cx="2377440" cy="3364992"/>
-          </a:xfrm>
-          <a:prstGeom prst="rect">
-            <a:avLst/>
-          </a:prstGeom>
-        </p:spPr>
-      </p:pic>
+              <a:t>それとも、選択を狭めていますか？</a:t>
+            </a:r>
+            <a:endParaRPr lang="en-US" sz="3200" dirty="0"/>
+          </a:p>
+        </p:txBody>
+      </p:sp>
       <p:sp>
         <p:nvSpPr>
           <p:cNvPr id="25" name="Slide Number Placeholder 0"/>
@@ -10847,6 +10663,10 @@
             <a:prstDash val="solid"/>
           </a:ln>
         </p:spPr>
+        <p:txBody>
+          <a:bodyPr/>
+          <a:p/>
+        </p:txBody>
       </p:sp>
       <p:sp>
         <p:nvSpPr>
@@ -10974,7 +10794,21 @@
                   <a:schemeClr val="accent2"/>
                 </a:solidFill>
               </a:rPr>
-              <a:t>何が見えますか？　何が聞こえますか？　体はどんな感じがしますか？</a:t>
+              <a:t>何が見えますか？　どんな色ですか？</a:t>
+            </a:r>
+            <a:endParaRPr lang="en-US" sz="1500" dirty="0"/>
+          </a:p>
+          <a:p>
+            <a:pPr algn="ctr" indent="0" marL="0">
+              <a:buNone/>
+            </a:pPr>
+            <a:r>
+              <a:rPr lang="en-US" sz="1500" dirty="0">
+                <a:solidFill>
+                  <a:schemeClr val="accent2"/>
+                </a:solidFill>
+              </a:rPr>
+              <a:t>何が聞こえますか？　体はどんな感じがしますか？</a:t>
             </a:r>
             <a:endParaRPr lang="en-US" sz="1500" dirty="0"/>
           </a:p>
@@ -13103,6 +12937,10 @@
             <a:prstDash val="solid"/>
           </a:ln>
         </p:spPr>
+        <p:txBody>
+          <a:bodyPr/>
+          <a:p/>
+        </p:txBody>
       </p:sp>
       <p:sp>
         <p:nvSpPr>
@@ -13127,91 +12965,53 @@
           <a:p>
             <a:pPr indent="0" marL="0">
               <a:spcAft>
-                <a:spcPts val="600"/>
+                <a:spcPts val="1000"/>
               </a:spcAft>
               <a:buNone/>
             </a:pPr>
             <a:r>
-              <a:rPr lang="en-US" sz="1300" b="1" dirty="0">
+              <a:rPr lang="en-US" sz="1400" b="1" dirty="0">
                 <a:solidFill>
                   <a:schemeClr val="accent2"/>
                 </a:solidFill>
               </a:rPr>
-              <a:t>例</a:t>
-            </a:r>
-            <a:endParaRPr lang="en-US" sz="1300" dirty="0"/>
-          </a:p>
-          <a:p>
-            <a:pPr marL="342900" indent="-342900">
+              <a:t>思いつくまま、いくつでも</a:t>
+            </a:r>
+            <a:endParaRPr lang="en-US" sz="1400" dirty="0"/>
+          </a:p>
+          <a:p>
+            <a:pPr indent="0" marL="0">
               <a:spcAft>
-                <a:spcPts val="600"/>
+                <a:spcPts val="1000"/>
               </a:spcAft>
-              <a:buSzPct val="100000"/>
-              <a:buChar char="•"/>
-            </a:pPr>
-            <a:r>
-              <a:rPr lang="en-US" sz="1300" dirty="0">
+              <a:buNone/>
+            </a:pPr>
+            <a:r>
+              <a:rPr lang="en-US" sz="1400" dirty="0">
                 <a:solidFill>
                   <a:schemeClr val="tx1"/>
                 </a:solidFill>
               </a:rPr>
-              <a:t>情報発信が魅力的でない 50点</a:t>
-            </a:r>
-            <a:endParaRPr lang="en-US" sz="1300" dirty="0"/>
-          </a:p>
-          <a:p>
-            <a:pPr marL="342900" indent="-342900">
+              <a:t>点数は、直感で大丈夫です</a:t>
+            </a:r>
+            <a:endParaRPr lang="en-US" sz="1400" dirty="0"/>
+          </a:p>
+          <a:p>
+            <a:pPr indent="0" marL="0">
               <a:spcAft>
-                <a:spcPts val="600"/>
+                <a:spcPts val="1000"/>
               </a:spcAft>
-              <a:buSzPct val="100000"/>
-              <a:buChar char="•"/>
-            </a:pPr>
-            <a:r>
-              <a:rPr lang="en-US" sz="1300" dirty="0">
+              <a:buNone/>
+            </a:pPr>
+            <a:r>
+              <a:rPr lang="en-US" sz="1400" dirty="0">
                 <a:solidFill>
                   <a:schemeClr val="tx1"/>
                 </a:solidFill>
               </a:rPr>
-              <a:t>批判されるのが嫌だ 75点</a:t>
-            </a:r>
-            <a:endParaRPr lang="en-US" sz="1300" dirty="0"/>
-          </a:p>
-          <a:p>
-            <a:pPr marL="342900" indent="-342900">
-              <a:spcAft>
-                <a:spcPts val="600"/>
-              </a:spcAft>
-              <a:buSzPct val="100000"/>
-              <a:buChar char="•"/>
-            </a:pPr>
-            <a:r>
-              <a:rPr lang="en-US" sz="1300" dirty="0">
-                <a:solidFill>
-                  <a:schemeClr val="tx1"/>
-                </a:solidFill>
-              </a:rPr>
-              <a:t>1階層目で一番強いものを軸に、2階層目も同じ質問で出す</a:t>
-            </a:r>
-            <a:endParaRPr lang="en-US" sz="1300" dirty="0"/>
-          </a:p>
-          <a:p>
-            <a:pPr marL="342900" indent="-342900">
-              <a:spcAft>
-                <a:spcPts val="600"/>
-              </a:spcAft>
-              <a:buSzPct val="100000"/>
-              <a:buChar char="•"/>
-            </a:pPr>
-            <a:r>
-              <a:rPr lang="en-US" sz="1300" dirty="0">
-                <a:solidFill>
-                  <a:schemeClr val="tx1"/>
-                </a:solidFill>
-              </a:rPr>
-              <a:t>点数がわからない時はOリング・筋肉反射で</a:t>
-            </a:r>
-            <a:endParaRPr lang="en-US" sz="1300" dirty="0"/>
+              <a:t>正解・不正解はありません</a:t>
+            </a:r>
+            <a:endParaRPr lang="en-US" sz="1400" dirty="0"/>
           </a:p>
         </p:txBody>
       </p:sp>
@@ -13391,16 +13191,40 @@
       </p:grpSpPr>
       <p:sp>
         <p:nvSpPr>
-          <p:cNvPr id="2" name="Text 0"/>
+          <p:cNvPr id="2" name="misenai_band"/>
           <p:cNvSpPr/>
-          <p:nvPr>
-            <p:ph idx="100" type="title" hasCustomPrompt="1"/>
-          </p:nvPr>
-        </p:nvSpPr>
-        <p:spPr>
-          <a:xfrm>
-            <a:off x="457200" y="457200"/>
-            <a:ext cx="8229600" cy="594360"/>
+          <p:nvPr/>
+        </p:nvSpPr>
+        <p:spPr>
+          <a:xfrm>
+            <a:off x="457200" y="182880"/>
+            <a:ext cx="8229600" cy="502920"/>
+          </a:xfrm>
+          <a:prstGeom prst="roundRect">
+            <a:avLst>
+              <a:gd name="adj" fmla="val 18182"/>
+            </a:avLst>
+          </a:prstGeom>
+          <a:solidFill>
+            <a:srgbClr val="8C6A34"/>
+          </a:solidFill>
+          <a:ln/>
+        </p:spPr>
+        <p:txBody>
+          <a:bodyPr/>
+          <a:p/>
+        </p:txBody>
+      </p:sp>
+      <p:sp>
+        <p:nvSpPr>
+          <p:cNvPr id="3" name="misenai"/>
+          <p:cNvSpPr txBox="1"/>
+          <p:nvPr/>
+        </p:nvSpPr>
+        <p:spPr>
+          <a:xfrm>
+            <a:off x="457200" y="182880"/>
+            <a:ext cx="8229600" cy="502920"/>
           </a:xfrm>
           <a:prstGeom prst="rect">
             <a:avLst/>
@@ -13412,11 +13236,47 @@
           <a:bodyPr wrap="square" lIns="0" tIns="0" rIns="0" bIns="0" rtlCol="0" anchor="ctr"/>
           <a:lstStyle/>
           <a:p>
-            <a:pPr algn="l" indent="0" marL="0">
-              <a:buNone/>
-            </a:pPr>
-            <a:r>
-              <a:rPr lang="en-US" sz="2400" b="1" dirty="0">
+            <a:pPr algn="ctr" indent="0" marL="0">
+              <a:buNone/>
+            </a:pPr>
+            <a:r>
+              <a:rPr lang="en-US" sz="1800" b="1" dirty="0">
+                <a:solidFill>
+                  <a:schemeClr val="bg1"/>
+                </a:solidFill>
+              </a:rPr>
+              <a:t>【共有停止】</a:t>
+            </a:r>
+            <a:endParaRPr lang="en-US" sz="1800" dirty="0"/>
+          </a:p>
+        </p:txBody>
+      </p:sp>
+      <p:sp>
+        <p:nvSpPr>
+          <p:cNvPr id="4" name="facil_title"/>
+          <p:cNvSpPr txBox="1"/>
+          <p:nvPr/>
+        </p:nvSpPr>
+        <p:spPr>
+          <a:xfrm>
+            <a:off x="457200" y="777240"/>
+            <a:ext cx="8229600" cy="411480"/>
+          </a:xfrm>
+          <a:prstGeom prst="rect">
+            <a:avLst/>
+          </a:prstGeom>
+          <a:noFill/>
+          <a:ln/>
+        </p:spPr>
+        <p:txBody>
+          <a:bodyPr wrap="square" lIns="0" tIns="0" rIns="0" bIns="0" rtlCol="0" anchor="t"/>
+          <a:lstStyle/>
+          <a:p>
+            <a:pPr indent="0" marL="0">
+              <a:buNone/>
+            </a:pPr>
+            <a:r>
+              <a:rPr lang="en-US" sz="2200" b="1" dirty="0">
                 <a:solidFill>
                   <a:schemeClr val="accent2"/>
                 </a:solidFill>
@@ -13424,30 +13284,30 @@
                 <a:ea typeface="Yu Mincho" pitchFamily="34" charset="-122"/>
                 <a:cs typeface="Yu Mincho" pitchFamily="34" charset="-120"/>
               </a:rPr>
-              <a:t>STEP 3　一番邪魔している思い込みを決める</a:t>
-            </a:r>
-            <a:endParaRPr lang="en-US" sz="2400" dirty="0"/>
-          </a:p>
-        </p:txBody>
-      </p:sp>
-      <p:sp>
-        <p:nvSpPr>
-          <p:cNvPr id="3" name="s3_card0"/>
+              <a:t>STEP 3〜4 の進め方</a:t>
+            </a:r>
+            <a:endParaRPr lang="en-US" sz="2200" dirty="0"/>
+          </a:p>
+        </p:txBody>
+      </p:sp>
+      <p:sp>
+        <p:nvSpPr>
+          <p:cNvPr id="5" name="facil_card"/>
           <p:cNvSpPr/>
           <p:nvPr/>
         </p:nvSpPr>
         <p:spPr>
           <a:xfrm>
-            <a:off x="457200" y="1234440"/>
-            <a:ext cx="5120640" cy="914400"/>
+            <a:off x="457200" y="1188720"/>
+            <a:ext cx="5394960" cy="3383280"/>
           </a:xfrm>
           <a:prstGeom prst="roundRect">
             <a:avLst>
-              <a:gd name="adj" fmla="val 12000"/>
+              <a:gd name="adj" fmla="val 3243"/>
             </a:avLst>
           </a:prstGeom>
           <a:solidFill>
-            <a:srgbClr val="FDFAF4"/>
+            <a:srgbClr val="FFF8E8"/>
           </a:solidFill>
           <a:ln w="9525">
             <a:solidFill>
@@ -13456,37 +13316,21 @@
             <a:prstDash val="solid"/>
           </a:ln>
         </p:spPr>
-      </p:sp>
-      <p:sp>
-        <p:nvSpPr>
-          <p:cNvPr id="4" name="s30_c"/>
-          <p:cNvSpPr/>
-          <p:nvPr/>
-        </p:nvSpPr>
-        <p:spPr>
-          <a:xfrm>
-            <a:off x="621792" y="1499616"/>
-            <a:ext cx="384048" cy="384048"/>
-          </a:xfrm>
-          <a:prstGeom prst="ellipse">
-            <a:avLst/>
-          </a:prstGeom>
-          <a:solidFill>
-            <a:srgbClr val="B08A4E"/>
-          </a:solidFill>
-          <a:ln/>
-        </p:spPr>
-      </p:sp>
-      <p:sp>
-        <p:nvSpPr>
-          <p:cNvPr id="5" name="s30_n"/>
+        <p:txBody>
+          <a:bodyPr/>
+          <a:p/>
+        </p:txBody>
+      </p:sp>
+      <p:sp>
+        <p:nvSpPr>
+          <p:cNvPr id="6" name="facil_list"/>
           <p:cNvSpPr txBox="1"/>
           <p:nvPr/>
         </p:nvSpPr>
         <p:spPr>
           <a:xfrm>
-            <a:off x="621792" y="1499616"/>
-            <a:ext cx="384048" cy="384048"/>
+            <a:off x="594360" y="1280160"/>
+            <a:ext cx="5120640" cy="3200400"/>
           </a:xfrm>
           <a:prstGeom prst="rect">
             <a:avLst/>
@@ -13495,254 +13339,146 @@
           <a:ln/>
         </p:spPr>
         <p:txBody>
-          <a:bodyPr wrap="square" lIns="0" tIns="0" rIns="0" bIns="0" rtlCol="0" anchor="ctr"/>
-          <a:lstStyle/>
-          <a:p>
-            <a:pPr algn="ctr" indent="0" marL="0">
-              <a:buNone/>
-            </a:pPr>
-            <a:r>
-              <a:rPr lang="en-US" sz="1500" b="1" dirty="0">
-                <a:solidFill>
-                  <a:schemeClr val="bg1"/>
-                </a:solidFill>
-              </a:rPr>
-              <a:t>1</a:t>
-            </a:r>
-            <a:endParaRPr lang="en-US" sz="1500" dirty="0"/>
-          </a:p>
-        </p:txBody>
-      </p:sp>
-      <p:sp>
-        <p:nvSpPr>
-          <p:cNvPr id="6" name="s3_head0"/>
-          <p:cNvSpPr txBox="1"/>
-          <p:nvPr/>
-        </p:nvSpPr>
-        <p:spPr>
-          <a:xfrm>
-            <a:off x="1143000" y="1325880"/>
-            <a:ext cx="4297680" cy="347472"/>
-          </a:xfrm>
-          <a:prstGeom prst="rect">
-            <a:avLst/>
-          </a:prstGeom>
-          <a:noFill/>
-          <a:ln/>
-        </p:spPr>
-        <p:txBody>
           <a:bodyPr wrap="square" lIns="1016" tIns="1016" rIns="1016" bIns="1016" rtlCol="0" anchor="t"/>
           <a:lstStyle/>
           <a:p>
-            <a:pPr indent="0" marL="0">
-              <a:buNone/>
-            </a:pPr>
-            <a:r>
-              <a:rPr lang="en-US" sz="1500" b="1" dirty="0">
-                <a:solidFill>
-                  <a:schemeClr val="tx2"/>
-                </a:solidFill>
-              </a:rPr>
-              <a:t>情動が強いもの上位3つを選ぶ</a:t>
-            </a:r>
-            <a:endParaRPr lang="en-US" sz="1500" dirty="0"/>
-          </a:p>
-        </p:txBody>
-      </p:sp>
-      <p:sp>
-        <p:nvSpPr>
-          <p:cNvPr id="7" name="s3_body0"/>
-          <p:cNvSpPr txBox="1"/>
-          <p:nvPr/>
-        </p:nvSpPr>
-        <p:spPr>
-          <a:xfrm>
-            <a:off x="1143000" y="1691640"/>
-            <a:ext cx="4297680" cy="365760"/>
-          </a:xfrm>
-          <a:prstGeom prst="rect">
-            <a:avLst/>
-          </a:prstGeom>
-          <a:noFill/>
-          <a:ln/>
-        </p:spPr>
-        <p:txBody>
-          <a:bodyPr wrap="square" lIns="1016" tIns="1016" rIns="1016" bIns="1016" rtlCol="0" anchor="t"/>
-          <a:lstStyle/>
-          <a:p>
-            <a:pPr indent="0" marL="0">
-              <a:buNone/>
-            </a:pPr>
-            <a:r>
-              <a:rPr lang="en-US" sz="1300" dirty="0">
+            <a:pPr marL="342900" indent="-342900">
+              <a:spcAft>
+                <a:spcPts val="300"/>
+              </a:spcAft>
+              <a:buSzPct val="100000"/>
+              <a:buFont typeface="+mj-lt"/>
+              <a:buAutoNum type="arabicPeriod" startAt="1"/>
+            </a:pPr>
+            <a:r>
+              <a:rPr lang="en-US" sz="1200" dirty="0">
                 <a:solidFill>
                   <a:schemeClr val="tx1"/>
                 </a:solidFill>
               </a:rPr>
-              <a:t>全体を見て、点数の高いものから</a:t>
-            </a:r>
-            <a:endParaRPr lang="en-US" sz="1300" dirty="0"/>
-          </a:p>
-        </p:txBody>
-      </p:sp>
-      <p:sp>
-        <p:nvSpPr>
-          <p:cNvPr id="8" name="s3_card1"/>
-          <p:cNvSpPr/>
-          <p:nvPr/>
-        </p:nvSpPr>
-        <p:spPr>
-          <a:xfrm>
-            <a:off x="457200" y="2331720"/>
-            <a:ext cx="5120640" cy="914400"/>
-          </a:xfrm>
-          <a:prstGeom prst="roundRect">
-            <a:avLst>
-              <a:gd name="adj" fmla="val 12000"/>
-            </a:avLst>
-          </a:prstGeom>
-          <a:solidFill>
-            <a:srgbClr val="FDFAF4"/>
-          </a:solidFill>
-          <a:ln w="9525">
-            <a:solidFill>
-              <a:srgbClr val="E9D9B6"/>
-            </a:solidFill>
-            <a:prstDash val="solid"/>
-          </a:ln>
-        </p:spPr>
-      </p:sp>
-      <p:sp>
-        <p:nvSpPr>
-          <p:cNvPr id="9" name="s31_c"/>
-          <p:cNvSpPr/>
-          <p:nvPr/>
-        </p:nvSpPr>
-        <p:spPr>
-          <a:xfrm>
-            <a:off x="621792" y="2596896"/>
-            <a:ext cx="384048" cy="384048"/>
-          </a:xfrm>
-          <a:prstGeom prst="ellipse">
-            <a:avLst/>
-          </a:prstGeom>
-          <a:solidFill>
-            <a:srgbClr val="B08A4E"/>
-          </a:solidFill>
-          <a:ln/>
-        </p:spPr>
-      </p:sp>
-      <p:sp>
-        <p:nvSpPr>
-          <p:cNvPr id="10" name="s31_n"/>
-          <p:cNvSpPr txBox="1"/>
-          <p:nvPr/>
-        </p:nvSpPr>
-        <p:spPr>
-          <a:xfrm>
-            <a:off x="621792" y="2596896"/>
-            <a:ext cx="384048" cy="384048"/>
-          </a:xfrm>
-          <a:prstGeom prst="rect">
-            <a:avLst/>
-          </a:prstGeom>
-          <a:noFill/>
-          <a:ln/>
-        </p:spPr>
-        <p:txBody>
-          <a:bodyPr wrap="square" lIns="0" tIns="0" rIns="0" bIns="0" rtlCol="0" anchor="ctr"/>
-          <a:lstStyle/>
-          <a:p>
-            <a:pPr algn="ctr" indent="0" marL="0">
-              <a:buNone/>
-            </a:pPr>
-            <a:r>
-              <a:rPr lang="en-US" sz="1500" b="1" dirty="0">
-                <a:solidFill>
-                  <a:schemeClr val="bg1"/>
-                </a:solidFill>
-              </a:rPr>
-              <a:t>2</a:t>
-            </a:r>
-            <a:endParaRPr lang="en-US" sz="1500" dirty="0"/>
-          </a:p>
-        </p:txBody>
-      </p:sp>
-      <p:sp>
-        <p:nvSpPr>
-          <p:cNvPr id="11" name="s3_head1"/>
-          <p:cNvSpPr txBox="1"/>
-          <p:nvPr/>
-        </p:nvSpPr>
-        <p:spPr>
-          <a:xfrm>
-            <a:off x="1143000" y="2423160"/>
-            <a:ext cx="4297680" cy="347472"/>
-          </a:xfrm>
-          <a:prstGeom prst="rect">
-            <a:avLst/>
-          </a:prstGeom>
-          <a:noFill/>
-          <a:ln/>
-        </p:spPr>
-        <p:txBody>
-          <a:bodyPr wrap="square" lIns="1016" tIns="1016" rIns="1016" bIns="1016" rtlCol="0" anchor="t"/>
-          <a:lstStyle/>
-          <a:p>
-            <a:pPr indent="0" marL="0">
-              <a:buNone/>
-            </a:pPr>
-            <a:r>
-              <a:rPr lang="en-US" sz="1500" b="1" dirty="0">
-                <a:solidFill>
-                  <a:schemeClr val="tx2"/>
-                </a:solidFill>
-              </a:rPr>
-              <a:t>一番邪魔している思い込みを1つ決める</a:t>
-            </a:r>
-            <a:endParaRPr lang="en-US" sz="1500" dirty="0"/>
-          </a:p>
-        </p:txBody>
-      </p:sp>
-      <p:sp>
-        <p:nvSpPr>
-          <p:cNvPr id="12" name="s3_body1"/>
-          <p:cNvSpPr txBox="1"/>
-          <p:nvPr/>
-        </p:nvSpPr>
-        <p:spPr>
-          <a:xfrm>
-            <a:off x="1143000" y="2788920"/>
-            <a:ext cx="4297680" cy="365760"/>
-          </a:xfrm>
-          <a:prstGeom prst="rect">
-            <a:avLst/>
-          </a:prstGeom>
-          <a:noFill/>
-          <a:ln/>
-        </p:spPr>
-        <p:txBody>
-          <a:bodyPr wrap="square" lIns="1016" tIns="1016" rIns="1016" bIns="1016" rtlCol="0" anchor="t"/>
-          <a:lstStyle/>
-          <a:p>
-            <a:pPr indent="0" marL="0">
-              <a:buNone/>
-            </a:pPr>
-            <a:r>
-              <a:rPr lang="en-US" sz="1300" dirty="0">
+              <a:t>点数の高い上位3つに印 → 一番邪魔している思い込みを1つ（Oリング可）</a:t>
+            </a:r>
+            <a:endParaRPr lang="en-US" sz="1200" dirty="0"/>
+          </a:p>
+          <a:p>
+            <a:pPr marL="342900" indent="-342900">
+              <a:spcAft>
+                <a:spcPts val="300"/>
+              </a:spcAft>
+              <a:buSzPct val="100000"/>
+              <a:buFont typeface="+mj-lt"/>
+              <a:buAutoNum type="arabicPeriod" startAt="1"/>
+            </a:pPr>
+            <a:r>
+              <a:rPr lang="en-US" sz="1200" dirty="0">
                 <a:solidFill>
                   <a:schemeClr val="tx1"/>
                 </a:solidFill>
               </a:rPr>
-              <a:t>判断できない時はOリング・筋肉反射で</a:t>
-            </a:r>
-            <a:endParaRPr lang="en-US" sz="1300" dirty="0"/>
+              <a:t>確認「ゆるんだら、目標達成によい影響が出そう？」</a:t>
+            </a:r>
+            <a:endParaRPr lang="en-US" sz="1200" dirty="0"/>
+          </a:p>
+          <a:p>
+            <a:pPr marL="342900" indent="-342900">
+              <a:spcAft>
+                <a:spcPts val="300"/>
+              </a:spcAft>
+              <a:buSzPct val="100000"/>
+              <a:buFont typeface="+mj-lt"/>
+              <a:buAutoNum type="arabicPeriod" startAt="1"/>
+            </a:pPr>
+            <a:r>
+              <a:rPr lang="en-US" sz="1200" dirty="0">
+                <a:solidFill>
+                  <a:schemeClr val="tx1"/>
+                </a:solidFill>
+              </a:rPr>
+              <a:t>今の自分の場所に立ち、今の気持ちを話してもらう</a:t>
+            </a:r>
+            <a:endParaRPr lang="en-US" sz="1200" dirty="0"/>
+          </a:p>
+          <a:p>
+            <a:pPr marL="342900" indent="-342900">
+              <a:spcAft>
+                <a:spcPts val="300"/>
+              </a:spcAft>
+              <a:buSzPct val="100000"/>
+              <a:buFont typeface="+mj-lt"/>
+              <a:buAutoNum type="arabicPeriod" startAt="1"/>
+            </a:pPr>
+            <a:r>
+              <a:rPr lang="en-US" sz="1200" dirty="0">
+                <a:solidFill>
+                  <a:schemeClr val="tx1"/>
+                </a:solidFill>
+              </a:rPr>
+              <a:t>思い込みが生まれた過去の場面へ（見える・色・聞こえる・体の感じ）</a:t>
+            </a:r>
+            <a:endParaRPr lang="en-US" sz="1200" dirty="0"/>
+          </a:p>
+          <a:p>
+            <a:pPr marL="342900" indent="-342900">
+              <a:spcAft>
+                <a:spcPts val="300"/>
+              </a:spcAft>
+              <a:buSzPct val="100000"/>
+              <a:buFont typeface="+mj-lt"/>
+              <a:buAutoNum type="arabicPeriod" startAt="1"/>
+            </a:pPr>
+            <a:r>
+              <a:rPr lang="en-US" sz="1200" dirty="0">
+                <a:solidFill>
+                  <a:schemeClr val="tx1"/>
+                </a:solidFill>
+              </a:rPr>
+              <a:t>その場所から出て外から見る「本当はどうして欲しかった？」「本当はどうしたかった？」</a:t>
+            </a:r>
+            <a:endParaRPr lang="en-US" sz="1200" dirty="0"/>
+          </a:p>
+          <a:p>
+            <a:pPr marL="342900" indent="-342900">
+              <a:spcAft>
+                <a:spcPts val="300"/>
+              </a:spcAft>
+              <a:buSzPct val="100000"/>
+              <a:buFont typeface="+mj-lt"/>
+              <a:buAutoNum type="arabicPeriod" startAt="1"/>
+            </a:pPr>
+            <a:r>
+              <a:rPr lang="en-US" sz="1200" dirty="0">
+                <a:solidFill>
+                  <a:schemeClr val="tx1"/>
+                </a:solidFill>
+              </a:rPr>
+              <a:t>もう一度戻って、言いたかったことを全部吐き出す（100％出たか？）</a:t>
+            </a:r>
+            <a:endParaRPr lang="en-US" sz="1200" dirty="0"/>
+          </a:p>
+          <a:p>
+            <a:pPr marL="342900" indent="-342900">
+              <a:spcAft>
+                <a:spcPts val="300"/>
+              </a:spcAft>
+              <a:buSzPct val="100000"/>
+              <a:buFont typeface="+mj-lt"/>
+              <a:buAutoNum type="arabicPeriod" startAt="1"/>
+            </a:pPr>
+            <a:r>
+              <a:rPr lang="en-US" sz="1200" dirty="0">
+                <a:solidFill>
+                  <a:schemeClr val="tx1"/>
+                </a:solidFill>
+              </a:rPr>
+              <a:t>苦しくなったら止めて息を吐き切る。ポジ変しない</a:t>
+            </a:r>
+            <a:endParaRPr lang="en-US" sz="1200" dirty="0"/>
           </a:p>
         </p:txBody>
       </p:sp>
       <p:pic>
         <p:nvPicPr>
-          <p:cNvPr id="13" name="Image 0" descr="ガイドブック44ページ">    </p:cNvPr>
+          <p:cNvPr id="7" name="Image 0" descr="ガイドブック">    </p:cNvPr>
           <p:cNvPicPr>
             <a:picLocks noChangeAspect="1"/>
           </p:cNvPicPr>
@@ -13756,7 +13492,7 @@
         </p:blipFill>
         <p:spPr>
           <a:xfrm>
-            <a:off x="5989320" y="1143000"/>
+            <a:off x="6126480" y="1188720"/>
             <a:ext cx="2377440" cy="3364992"/>
           </a:xfrm>
           <a:prstGeom prst="rect">
@@ -13855,6 +13591,10 @@
             <a:prstDash val="solid"/>
           </a:ln>
         </p:spPr>
+        <p:txBody>
+          <a:bodyPr/>
+          <a:p/>
+        </p:txBody>
       </p:sp>
       <p:sp>
         <p:nvSpPr>
@@ -13886,7 +13626,7 @@
                   <a:schemeClr val="accent2"/>
                 </a:solidFill>
               </a:rPr>
-              <a:t>STEP 3　確認の質問</a:t>
+              <a:t>STEP 3</a:t>
             </a:r>
             <a:endParaRPr lang="en-US" sz="1300" dirty="0"/>
           </a:p>
@@ -13927,7 +13667,7 @@
                 <a:ea typeface="Yu Mincho" pitchFamily="34" charset="-122"/>
                 <a:cs typeface="Yu Mincho" pitchFamily="34" charset="-120"/>
               </a:rPr>
-              <a:t>その思い込みが“ゆるんだら”、</a:t>
+              <a:t>一番、邪魔している思い込みは</a:t>
             </a:r>
             <a:endParaRPr lang="en-US" sz="3200" dirty="0"/>
           </a:p>
@@ -13944,26 +13684,47 @@
                 <a:ea typeface="Yu Mincho" pitchFamily="34" charset="-122"/>
                 <a:cs typeface="Yu Mincho" pitchFamily="34" charset="-120"/>
               </a:rPr>
-              <a:t>目標達成によい影響が</a:t>
+              <a:t>どれですか？</a:t>
             </a:r>
             <a:endParaRPr lang="en-US" sz="3200" dirty="0"/>
           </a:p>
+        </p:txBody>
+      </p:sp>
+      <p:sp>
+        <p:nvSpPr>
+          <p:cNvPr id="5" name="Text 0"/>
+          <p:cNvSpPr/>
+          <p:nvPr>
+            <p:ph idx="101" type="body" hasCustomPrompt="1"/>
+          </p:nvPr>
+        </p:nvSpPr>
+        <p:spPr>
+          <a:xfrm>
+            <a:off x="914400" y="3200400"/>
+            <a:ext cx="7315200" cy="731520"/>
+          </a:xfrm>
+          <a:prstGeom prst="rect">
+            <a:avLst/>
+          </a:prstGeom>
+          <a:noFill/>
+          <a:ln/>
+        </p:spPr>
+        <p:txBody>
+          <a:bodyPr wrap="square" rtlCol="0" anchor="t"/>
+          <a:lstStyle/>
           <a:p>
             <a:pPr algn="ctr" indent="0" marL="0">
               <a:buNone/>
             </a:pPr>
             <a:r>
-              <a:rPr lang="en-US" sz="3200" b="1" dirty="0">
-                <a:solidFill>
-                  <a:schemeClr val="tx2"/>
-                </a:solidFill>
-                <a:latin typeface="Yu Mincho" pitchFamily="34" charset="0"/>
-                <a:ea typeface="Yu Mincho" pitchFamily="34" charset="-122"/>
-                <a:cs typeface="Yu Mincho" pitchFamily="34" charset="-120"/>
-              </a:rPr>
-              <a:t>出そうですか？</a:t>
-            </a:r>
-            <a:endParaRPr lang="en-US" sz="3200" dirty="0"/>
+              <a:rPr lang="en-US" sz="1500" dirty="0">
+                <a:solidFill>
+                  <a:schemeClr val="accent2"/>
+                </a:solidFill>
+              </a:rPr>
+              <a:t>点数の高い上位3つの中から、1つ選びます</a:t>
+            </a:r>
+            <a:endParaRPr lang="en-US" sz="1500" dirty="0"/>
           </a:p>
         </p:txBody>
       </p:sp>
@@ -14039,16 +13800,40 @@
       </p:grpSpPr>
       <p:sp>
         <p:nvSpPr>
-          <p:cNvPr id="2" name="Text 0"/>
+          <p:cNvPr id="2" name="frame"/>
           <p:cNvSpPr/>
-          <p:nvPr>
-            <p:ph idx="100" type="title" hasCustomPrompt="1"/>
-          </p:nvPr>
-        </p:nvSpPr>
-        <p:spPr>
-          <a:xfrm>
-            <a:off x="457200" y="457200"/>
-            <a:ext cx="8229600" cy="594360"/>
+          <p:nvPr/>
+        </p:nvSpPr>
+        <p:spPr>
+          <a:xfrm>
+            <a:off x="228600" y="137160"/>
+            <a:ext cx="8686800" cy="4526280"/>
+          </a:xfrm>
+          <a:prstGeom prst="rect">
+            <a:avLst/>
+          </a:prstGeom>
+          <a:ln w="12700">
+            <a:solidFill>
+              <a:srgbClr val="B08A4E"/>
+            </a:solidFill>
+            <a:prstDash val="solid"/>
+          </a:ln>
+        </p:spPr>
+        <p:txBody>
+          <a:bodyPr/>
+          <a:p/>
+        </p:txBody>
+      </p:sp>
+      <p:sp>
+        <p:nvSpPr>
+          <p:cNvPr id="3" name="qlabel"/>
+          <p:cNvSpPr txBox="1"/>
+          <p:nvPr/>
+        </p:nvSpPr>
+        <p:spPr>
+          <a:xfrm>
+            <a:off x="457200" y="320040"/>
+            <a:ext cx="8229600" cy="365760"/>
           </a:xfrm>
           <a:prstGeom prst="rect">
             <a:avLst/>
@@ -14057,795 +13842,96 @@
           <a:ln/>
         </p:spPr>
         <p:txBody>
-          <a:bodyPr wrap="square" lIns="0" tIns="0" rIns="0" bIns="0" rtlCol="0" anchor="ctr"/>
-          <a:lstStyle/>
-          <a:p>
-            <a:pPr algn="l" indent="0" marL="0">
-              <a:buNone/>
-            </a:pPr>
-            <a:r>
-              <a:rPr lang="en-US" sz="2400" b="1" dirty="0">
+          <a:bodyPr wrap="square" lIns="0" tIns="0" rIns="0" bIns="0" rtlCol="0" anchor="t"/>
+          <a:lstStyle/>
+          <a:p>
+            <a:pPr algn="ctr" indent="0" marL="0">
+              <a:buNone/>
+            </a:pPr>
+            <a:r>
+              <a:rPr lang="en-US" sz="1300" b="1" dirty="0">
                 <a:solidFill>
                   <a:schemeClr val="accent2"/>
+                </a:solidFill>
+              </a:rPr>
+              <a:t>STEP 3　確認の質問</a:t>
+            </a:r>
+            <a:endParaRPr lang="en-US" sz="1300" dirty="0"/>
+          </a:p>
+        </p:txBody>
+      </p:sp>
+      <p:sp>
+        <p:nvSpPr>
+          <p:cNvPr id="4" name="Text 0"/>
+          <p:cNvSpPr/>
+          <p:nvPr>
+            <p:ph idx="100" type="title" hasCustomPrompt="1"/>
+          </p:nvPr>
+        </p:nvSpPr>
+        <p:spPr>
+          <a:xfrm>
+            <a:off x="914400" y="1554480"/>
+            <a:ext cx="7315200" cy="1554480"/>
+          </a:xfrm>
+          <a:prstGeom prst="rect">
+            <a:avLst/>
+          </a:prstGeom>
+          <a:noFill/>
+          <a:ln/>
+        </p:spPr>
+        <p:txBody>
+          <a:bodyPr wrap="square" rtlCol="0" anchor="ctr"/>
+          <a:lstStyle/>
+          <a:p>
+            <a:pPr algn="ctr" indent="0" marL="0">
+              <a:buNone/>
+            </a:pPr>
+            <a:r>
+              <a:rPr lang="en-US" sz="3200" b="1" dirty="0">
+                <a:solidFill>
+                  <a:schemeClr val="tx2"/>
                 </a:solidFill>
                 <a:latin typeface="Yu Mincho" pitchFamily="34" charset="0"/>
                 <a:ea typeface="Yu Mincho" pitchFamily="34" charset="-122"/>
                 <a:cs typeface="Yu Mincho" pitchFamily="34" charset="-120"/>
               </a:rPr>
-              <a:t>STEP 4　思い込みが生まれた場面へ（解放）</a:t>
-            </a:r>
-            <a:endParaRPr lang="en-US" sz="2400" dirty="0"/>
-          </a:p>
-        </p:txBody>
-      </p:sp>
-      <p:sp>
-        <p:nvSpPr>
-          <p:cNvPr id="3" name="s4_card0"/>
-          <p:cNvSpPr/>
-          <p:nvPr/>
-        </p:nvSpPr>
-        <p:spPr>
-          <a:xfrm>
-            <a:off x="457200" y="1188720"/>
-            <a:ext cx="5669280" cy="676656"/>
-          </a:xfrm>
-          <a:prstGeom prst="roundRect">
-            <a:avLst>
-              <a:gd name="adj" fmla="val 16216"/>
-            </a:avLst>
-          </a:prstGeom>
-          <a:solidFill>
-            <a:srgbClr val="FDFAF4"/>
-          </a:solidFill>
-          <a:ln w="9525">
-            <a:solidFill>
-              <a:srgbClr val="E9D9B6"/>
-            </a:solidFill>
-            <a:prstDash val="solid"/>
-          </a:ln>
-        </p:spPr>
-      </p:sp>
-      <p:sp>
-        <p:nvSpPr>
-          <p:cNvPr id="4" name="s40_c"/>
-          <p:cNvSpPr/>
-          <p:nvPr/>
-        </p:nvSpPr>
-        <p:spPr>
-          <a:xfrm>
-            <a:off x="603504" y="1335024"/>
-            <a:ext cx="384048" cy="384048"/>
-          </a:xfrm>
-          <a:prstGeom prst="ellipse">
-            <a:avLst/>
-          </a:prstGeom>
-          <a:solidFill>
-            <a:srgbClr val="B08A4E"/>
-          </a:solidFill>
-          <a:ln/>
-        </p:spPr>
-      </p:sp>
-      <p:sp>
-        <p:nvSpPr>
-          <p:cNvPr id="5" name="s40_n"/>
-          <p:cNvSpPr txBox="1"/>
-          <p:nvPr/>
-        </p:nvSpPr>
-        <p:spPr>
-          <a:xfrm>
-            <a:off x="603504" y="1335024"/>
-            <a:ext cx="384048" cy="384048"/>
-          </a:xfrm>
-          <a:prstGeom prst="rect">
-            <a:avLst/>
-          </a:prstGeom>
-          <a:noFill/>
-          <a:ln/>
-        </p:spPr>
-        <p:txBody>
-          <a:bodyPr wrap="square" lIns="0" tIns="0" rIns="0" bIns="0" rtlCol="0" anchor="ctr"/>
-          <a:lstStyle/>
+              <a:t>その思い込みが“ゆるんだら”、</a:t>
+            </a:r>
+            <a:endParaRPr lang="en-US" sz="3200" dirty="0"/>
+          </a:p>
           <a:p>
             <a:pPr algn="ctr" indent="0" marL="0">
               <a:buNone/>
             </a:pPr>
             <a:r>
-              <a:rPr lang="en-US" sz="1500" b="1" dirty="0">
-                <a:solidFill>
-                  <a:schemeClr val="bg1"/>
-                </a:solidFill>
-              </a:rPr>
-              <a:t>1</a:t>
-            </a:r>
-            <a:endParaRPr lang="en-US" sz="1500" dirty="0"/>
-          </a:p>
-        </p:txBody>
-      </p:sp>
-      <p:sp>
-        <p:nvSpPr>
-          <p:cNvPr id="6" name="s4_head0"/>
-          <p:cNvSpPr txBox="1"/>
-          <p:nvPr/>
-        </p:nvSpPr>
-        <p:spPr>
-          <a:xfrm>
-            <a:off x="1097280" y="1216152"/>
-            <a:ext cx="4937760" cy="310896"/>
-          </a:xfrm>
-          <a:prstGeom prst="rect">
-            <a:avLst/>
-          </a:prstGeom>
-          <a:noFill/>
-          <a:ln/>
-        </p:spPr>
-        <p:txBody>
-          <a:bodyPr wrap="square" lIns="1016" tIns="1016" rIns="1016" bIns="1016" rtlCol="0" anchor="t"/>
-          <a:lstStyle/>
-          <a:p>
-            <a:pPr indent="0" marL="0">
-              <a:buNone/>
-            </a:pPr>
-            <a:r>
-              <a:rPr lang="en-US" sz="1400" b="1" dirty="0">
+              <a:rPr lang="en-US" sz="3200" b="1" dirty="0">
                 <a:solidFill>
                   <a:schemeClr val="tx2"/>
                 </a:solidFill>
-              </a:rPr>
-              <a:t>今の自分の場所に立つ</a:t>
-            </a:r>
-            <a:endParaRPr lang="en-US" sz="1400" dirty="0"/>
-          </a:p>
-        </p:txBody>
-      </p:sp>
-      <p:sp>
-        <p:nvSpPr>
-          <p:cNvPr id="7" name="s4_body0"/>
-          <p:cNvSpPr txBox="1"/>
-          <p:nvPr/>
-        </p:nvSpPr>
-        <p:spPr>
-          <a:xfrm>
-            <a:off x="1097280" y="1517904"/>
-            <a:ext cx="4937760" cy="329184"/>
-          </a:xfrm>
-          <a:prstGeom prst="rect">
-            <a:avLst/>
-          </a:prstGeom>
-          <a:noFill/>
-          <a:ln/>
-        </p:spPr>
-        <p:txBody>
-          <a:bodyPr wrap="square" lIns="1016" tIns="1016" rIns="1016" bIns="1016" rtlCol="0" anchor="t"/>
-          <a:lstStyle/>
-          <a:p>
-            <a:pPr indent="0" marL="0">
-              <a:buNone/>
-            </a:pPr>
-            <a:r>
-              <a:rPr lang="en-US" sz="1200" dirty="0">
-                <a:solidFill>
-                  <a:schemeClr val="tx1"/>
-                </a:solidFill>
-              </a:rPr>
-              <a:t>今の気持ちを、見えるもの・聞こえるもの・体の感じで話す</a:t>
-            </a:r>
-            <a:endParaRPr lang="en-US" sz="1200" dirty="0"/>
-          </a:p>
-        </p:txBody>
-      </p:sp>
-      <p:sp>
-        <p:nvSpPr>
-          <p:cNvPr id="8" name="s4_card1"/>
-          <p:cNvSpPr/>
-          <p:nvPr/>
-        </p:nvSpPr>
-        <p:spPr>
-          <a:xfrm>
-            <a:off x="457200" y="1975104"/>
-            <a:ext cx="5669280" cy="676656"/>
-          </a:xfrm>
-          <a:prstGeom prst="roundRect">
-            <a:avLst>
-              <a:gd name="adj" fmla="val 16216"/>
-            </a:avLst>
-          </a:prstGeom>
-          <a:solidFill>
-            <a:srgbClr val="FDFAF4"/>
-          </a:solidFill>
-          <a:ln w="9525">
-            <a:solidFill>
-              <a:srgbClr val="E9D9B6"/>
-            </a:solidFill>
-            <a:prstDash val="solid"/>
-          </a:ln>
-        </p:spPr>
-      </p:sp>
-      <p:sp>
-        <p:nvSpPr>
-          <p:cNvPr id="9" name="s41_c"/>
-          <p:cNvSpPr/>
-          <p:nvPr/>
-        </p:nvSpPr>
-        <p:spPr>
-          <a:xfrm>
-            <a:off x="603504" y="2121408"/>
-            <a:ext cx="384048" cy="384048"/>
-          </a:xfrm>
-          <a:prstGeom prst="ellipse">
-            <a:avLst/>
-          </a:prstGeom>
-          <a:solidFill>
-            <a:srgbClr val="B08A4E"/>
-          </a:solidFill>
-          <a:ln/>
-        </p:spPr>
-      </p:sp>
-      <p:sp>
-        <p:nvSpPr>
-          <p:cNvPr id="10" name="s41_n"/>
-          <p:cNvSpPr txBox="1"/>
-          <p:nvPr/>
-        </p:nvSpPr>
-        <p:spPr>
-          <a:xfrm>
-            <a:off x="603504" y="2121408"/>
-            <a:ext cx="384048" cy="384048"/>
-          </a:xfrm>
-          <a:prstGeom prst="rect">
-            <a:avLst/>
-          </a:prstGeom>
-          <a:noFill/>
-          <a:ln/>
-        </p:spPr>
-        <p:txBody>
-          <a:bodyPr wrap="square" lIns="0" tIns="0" rIns="0" bIns="0" rtlCol="0" anchor="ctr"/>
-          <a:lstStyle/>
+                <a:latin typeface="Yu Mincho" pitchFamily="34" charset="0"/>
+                <a:ea typeface="Yu Mincho" pitchFamily="34" charset="-122"/>
+                <a:cs typeface="Yu Mincho" pitchFamily="34" charset="-120"/>
+              </a:rPr>
+              <a:t>目標達成によい影響が</a:t>
+            </a:r>
+            <a:endParaRPr lang="en-US" sz="3200" dirty="0"/>
+          </a:p>
           <a:p>
             <a:pPr algn="ctr" indent="0" marL="0">
               <a:buNone/>
             </a:pPr>
             <a:r>
-              <a:rPr lang="en-US" sz="1500" b="1" dirty="0">
-                <a:solidFill>
-                  <a:schemeClr val="bg1"/>
-                </a:solidFill>
-              </a:rPr>
-              <a:t>2</a:t>
-            </a:r>
-            <a:endParaRPr lang="en-US" sz="1500" dirty="0"/>
-          </a:p>
-        </p:txBody>
-      </p:sp>
-      <p:sp>
-        <p:nvSpPr>
-          <p:cNvPr id="11" name="s4_head1"/>
-          <p:cNvSpPr txBox="1"/>
-          <p:nvPr/>
-        </p:nvSpPr>
-        <p:spPr>
-          <a:xfrm>
-            <a:off x="1097280" y="2002536"/>
-            <a:ext cx="4937760" cy="310896"/>
-          </a:xfrm>
-          <a:prstGeom prst="rect">
-            <a:avLst/>
-          </a:prstGeom>
-          <a:noFill/>
-          <a:ln/>
-        </p:spPr>
-        <p:txBody>
-          <a:bodyPr wrap="square" lIns="1016" tIns="1016" rIns="1016" bIns="1016" rtlCol="0" anchor="t"/>
-          <a:lstStyle/>
-          <a:p>
-            <a:pPr indent="0" marL="0">
-              <a:buNone/>
-            </a:pPr>
-            <a:r>
-              <a:rPr lang="en-US" sz="1400" b="1" dirty="0">
+              <a:rPr lang="en-US" sz="3200" b="1" dirty="0">
                 <a:solidFill>
                   <a:schemeClr val="tx2"/>
                 </a:solidFill>
-              </a:rPr>
-              <a:t>思い込みが生まれた過去の場面へ移動</a:t>
-            </a:r>
-            <a:endParaRPr lang="en-US" sz="1400" dirty="0"/>
-          </a:p>
-        </p:txBody>
-      </p:sp>
-      <p:sp>
-        <p:nvSpPr>
-          <p:cNvPr id="12" name="s4_body1"/>
-          <p:cNvSpPr txBox="1"/>
-          <p:nvPr/>
-        </p:nvSpPr>
-        <p:spPr>
-          <a:xfrm>
-            <a:off x="1097280" y="2304288"/>
-            <a:ext cx="4937760" cy="329184"/>
-          </a:xfrm>
-          <a:prstGeom prst="rect">
-            <a:avLst/>
-          </a:prstGeom>
-          <a:noFill/>
-          <a:ln/>
-        </p:spPr>
-        <p:txBody>
-          <a:bodyPr wrap="square" lIns="1016" tIns="1016" rIns="1016" bIns="1016" rtlCol="0" anchor="t"/>
-          <a:lstStyle/>
-          <a:p>
-            <a:pPr indent="0" marL="0">
-              <a:buNone/>
-            </a:pPr>
-            <a:r>
-              <a:rPr lang="en-US" sz="1200" dirty="0">
-                <a:solidFill>
-                  <a:schemeClr val="tx1"/>
-                </a:solidFill>
-              </a:rPr>
-              <a:t>その場面で、何が見えて、何が聞こえて、体はどんな感じか</a:t>
-            </a:r>
-            <a:endParaRPr lang="en-US" sz="1200" dirty="0"/>
-          </a:p>
-        </p:txBody>
-      </p:sp>
-      <p:sp>
-        <p:nvSpPr>
-          <p:cNvPr id="13" name="s4_card2"/>
-          <p:cNvSpPr/>
-          <p:nvPr/>
-        </p:nvSpPr>
-        <p:spPr>
-          <a:xfrm>
-            <a:off x="457200" y="2761488"/>
-            <a:ext cx="5669280" cy="676656"/>
-          </a:xfrm>
-          <a:prstGeom prst="roundRect">
-            <a:avLst>
-              <a:gd name="adj" fmla="val 16216"/>
-            </a:avLst>
-          </a:prstGeom>
-          <a:solidFill>
-            <a:srgbClr val="FDFAF4"/>
-          </a:solidFill>
-          <a:ln w="9525">
-            <a:solidFill>
-              <a:srgbClr val="E9D9B6"/>
-            </a:solidFill>
-            <a:prstDash val="solid"/>
-          </a:ln>
-        </p:spPr>
-      </p:sp>
-      <p:sp>
-        <p:nvSpPr>
-          <p:cNvPr id="14" name="s42_c"/>
-          <p:cNvSpPr/>
-          <p:nvPr/>
-        </p:nvSpPr>
-        <p:spPr>
-          <a:xfrm>
-            <a:off x="603504" y="2907792"/>
-            <a:ext cx="384048" cy="384048"/>
-          </a:xfrm>
-          <a:prstGeom prst="ellipse">
-            <a:avLst/>
-          </a:prstGeom>
-          <a:solidFill>
-            <a:srgbClr val="B08A4E"/>
-          </a:solidFill>
-          <a:ln/>
-        </p:spPr>
-      </p:sp>
-      <p:sp>
-        <p:nvSpPr>
-          <p:cNvPr id="15" name="s42_n"/>
-          <p:cNvSpPr txBox="1"/>
-          <p:nvPr/>
-        </p:nvSpPr>
-        <p:spPr>
-          <a:xfrm>
-            <a:off x="603504" y="2907792"/>
-            <a:ext cx="384048" cy="384048"/>
-          </a:xfrm>
-          <a:prstGeom prst="rect">
-            <a:avLst/>
-          </a:prstGeom>
-          <a:noFill/>
-          <a:ln/>
-        </p:spPr>
-        <p:txBody>
-          <a:bodyPr wrap="square" lIns="0" tIns="0" rIns="0" bIns="0" rtlCol="0" anchor="ctr"/>
-          <a:lstStyle/>
-          <a:p>
-            <a:pPr algn="ctr" indent="0" marL="0">
-              <a:buNone/>
-            </a:pPr>
-            <a:r>
-              <a:rPr lang="en-US" sz="1500" b="1" dirty="0">
-                <a:solidFill>
-                  <a:schemeClr val="bg1"/>
-                </a:solidFill>
-              </a:rPr>
-              <a:t>3</a:t>
-            </a:r>
-            <a:endParaRPr lang="en-US" sz="1500" dirty="0"/>
-          </a:p>
-        </p:txBody>
-      </p:sp>
-      <p:sp>
-        <p:nvSpPr>
-          <p:cNvPr id="16" name="s4_head2"/>
-          <p:cNvSpPr txBox="1"/>
-          <p:nvPr/>
-        </p:nvSpPr>
-        <p:spPr>
-          <a:xfrm>
-            <a:off x="1097280" y="2788920"/>
-            <a:ext cx="4937760" cy="310896"/>
-          </a:xfrm>
-          <a:prstGeom prst="rect">
-            <a:avLst/>
-          </a:prstGeom>
-          <a:noFill/>
-          <a:ln/>
-        </p:spPr>
-        <p:txBody>
-          <a:bodyPr wrap="square" lIns="1016" tIns="1016" rIns="1016" bIns="1016" rtlCol="0" anchor="t"/>
-          <a:lstStyle/>
-          <a:p>
-            <a:pPr indent="0" marL="0">
-              <a:buNone/>
-            </a:pPr>
-            <a:r>
-              <a:rPr lang="en-US" sz="1400" b="1" dirty="0">
-                <a:solidFill>
-                  <a:schemeClr val="tx2"/>
-                </a:solidFill>
-              </a:rPr>
-              <a:t>その場所から出て、自分を外から見る</a:t>
-            </a:r>
-            <a:endParaRPr lang="en-US" sz="1400" dirty="0"/>
-          </a:p>
-        </p:txBody>
-      </p:sp>
-      <p:sp>
-        <p:nvSpPr>
-          <p:cNvPr id="17" name="s4_body2"/>
-          <p:cNvSpPr txBox="1"/>
-          <p:nvPr/>
-        </p:nvSpPr>
-        <p:spPr>
-          <a:xfrm>
-            <a:off x="1097280" y="3090672"/>
-            <a:ext cx="4937760" cy="329184"/>
-          </a:xfrm>
-          <a:prstGeom prst="rect">
-            <a:avLst/>
-          </a:prstGeom>
-          <a:noFill/>
-          <a:ln/>
-        </p:spPr>
-        <p:txBody>
-          <a:bodyPr wrap="square" lIns="1016" tIns="1016" rIns="1016" bIns="1016" rtlCol="0" anchor="t"/>
-          <a:lstStyle/>
-          <a:p>
-            <a:pPr indent="0" marL="0">
-              <a:buNone/>
-            </a:pPr>
-            <a:r>
-              <a:rPr lang="en-US" sz="1200" dirty="0">
-                <a:solidFill>
-                  <a:schemeClr val="tx1"/>
-                </a:solidFill>
-              </a:rPr>
-              <a:t>次の2つの質問を、1つずつ聴いていく</a:t>
-            </a:r>
-            <a:endParaRPr lang="en-US" sz="1200" dirty="0"/>
-          </a:p>
-        </p:txBody>
-      </p:sp>
-      <p:sp>
-        <p:nvSpPr>
-          <p:cNvPr id="18" name="s4_card3"/>
-          <p:cNvSpPr/>
-          <p:nvPr/>
-        </p:nvSpPr>
-        <p:spPr>
-          <a:xfrm>
-            <a:off x="457200" y="3547872"/>
-            <a:ext cx="5669280" cy="676656"/>
-          </a:xfrm>
-          <a:prstGeom prst="roundRect">
-            <a:avLst>
-              <a:gd name="adj" fmla="val 16216"/>
-            </a:avLst>
-          </a:prstGeom>
-          <a:solidFill>
-            <a:srgbClr val="F8EBEE"/>
-          </a:solidFill>
-          <a:ln w="9525">
-            <a:solidFill>
-              <a:srgbClr val="E9D9B6"/>
-            </a:solidFill>
-            <a:prstDash val="solid"/>
-          </a:ln>
-        </p:spPr>
-      </p:sp>
-      <p:sp>
-        <p:nvSpPr>
-          <p:cNvPr id="19" name="s43_c"/>
-          <p:cNvSpPr/>
-          <p:nvPr/>
-        </p:nvSpPr>
-        <p:spPr>
-          <a:xfrm>
-            <a:off x="603504" y="3694176"/>
-            <a:ext cx="384048" cy="384048"/>
-          </a:xfrm>
-          <a:prstGeom prst="ellipse">
-            <a:avLst/>
-          </a:prstGeom>
-          <a:solidFill>
-            <a:srgbClr val="B08A4E"/>
-          </a:solidFill>
-          <a:ln/>
-        </p:spPr>
-      </p:sp>
-      <p:sp>
-        <p:nvSpPr>
-          <p:cNvPr id="20" name="s43_n"/>
-          <p:cNvSpPr txBox="1"/>
-          <p:nvPr/>
-        </p:nvSpPr>
-        <p:spPr>
-          <a:xfrm>
-            <a:off x="603504" y="3694176"/>
-            <a:ext cx="384048" cy="384048"/>
-          </a:xfrm>
-          <a:prstGeom prst="rect">
-            <a:avLst/>
-          </a:prstGeom>
-          <a:noFill/>
-          <a:ln/>
-        </p:spPr>
-        <p:txBody>
-          <a:bodyPr wrap="square" lIns="0" tIns="0" rIns="0" bIns="0" rtlCol="0" anchor="ctr"/>
-          <a:lstStyle/>
-          <a:p>
-            <a:pPr algn="ctr" indent="0" marL="0">
-              <a:buNone/>
-            </a:pPr>
-            <a:r>
-              <a:rPr lang="en-US" sz="1500" b="1" dirty="0">
-                <a:solidFill>
-                  <a:schemeClr val="bg1"/>
-                </a:solidFill>
-              </a:rPr>
-              <a:t>4</a:t>
-            </a:r>
-            <a:endParaRPr lang="en-US" sz="1500" dirty="0"/>
-          </a:p>
-        </p:txBody>
-      </p:sp>
-      <p:sp>
-        <p:nvSpPr>
-          <p:cNvPr id="21" name="s4_head3"/>
-          <p:cNvSpPr txBox="1"/>
-          <p:nvPr/>
-        </p:nvSpPr>
-        <p:spPr>
-          <a:xfrm>
-            <a:off x="1097280" y="3575304"/>
-            <a:ext cx="4937760" cy="310896"/>
-          </a:xfrm>
-          <a:prstGeom prst="rect">
-            <a:avLst/>
-          </a:prstGeom>
-          <a:noFill/>
-          <a:ln/>
-        </p:spPr>
-        <p:txBody>
-          <a:bodyPr wrap="square" lIns="1016" tIns="1016" rIns="1016" bIns="1016" rtlCol="0" anchor="t"/>
-          <a:lstStyle/>
-          <a:p>
-            <a:pPr indent="0" marL="0">
-              <a:buNone/>
-            </a:pPr>
-            <a:r>
-              <a:rPr lang="en-US" sz="1400" b="1" dirty="0">
-                <a:solidFill>
-                  <a:schemeClr val="tx2"/>
-                </a:solidFill>
-              </a:rPr>
-              <a:t>もう一度その場所に戻り、全部吐き出す</a:t>
-            </a:r>
-            <a:endParaRPr lang="en-US" sz="1400" dirty="0"/>
-          </a:p>
-        </p:txBody>
-      </p:sp>
-      <p:sp>
-        <p:nvSpPr>
-          <p:cNvPr id="22" name="s4_body3"/>
-          <p:cNvSpPr txBox="1"/>
-          <p:nvPr/>
-        </p:nvSpPr>
-        <p:spPr>
-          <a:xfrm>
-            <a:off x="1097280" y="3877056"/>
-            <a:ext cx="4937760" cy="329184"/>
-          </a:xfrm>
-          <a:prstGeom prst="rect">
-            <a:avLst/>
-          </a:prstGeom>
-          <a:noFill/>
-          <a:ln/>
-        </p:spPr>
-        <p:txBody>
-          <a:bodyPr wrap="square" lIns="1016" tIns="1016" rIns="1016" bIns="1016" rtlCol="0" anchor="t"/>
-          <a:lstStyle/>
-          <a:p>
-            <a:pPr indent="0" marL="0">
-              <a:buNone/>
-            </a:pPr>
-            <a:r>
-              <a:rPr lang="en-US" sz="1200" dirty="0">
-                <a:solidFill>
-                  <a:schemeClr val="tx1"/>
-                </a:solidFill>
-              </a:rPr>
-              <a:t>怒鳴る・泣く・大声・体を動かすなどOK</a:t>
-            </a:r>
-            <a:endParaRPr lang="en-US" sz="1200" dirty="0"/>
-          </a:p>
-        </p:txBody>
-      </p:sp>
-      <p:sp>
-        <p:nvSpPr>
-          <p:cNvPr id="23" name="s4_safe"/>
-          <p:cNvSpPr/>
-          <p:nvPr/>
-        </p:nvSpPr>
-        <p:spPr>
-          <a:xfrm>
-            <a:off x="6355080" y="1188720"/>
-            <a:ext cx="2331720" cy="3035808"/>
-          </a:xfrm>
-          <a:prstGeom prst="roundRect">
-            <a:avLst>
-              <a:gd name="adj" fmla="val 4706"/>
-            </a:avLst>
-          </a:prstGeom>
-          <a:solidFill>
-            <a:srgbClr val="E6F3EF"/>
-          </a:solidFill>
-          <a:ln w="9525">
-            <a:solidFill>
-              <a:srgbClr val="E9D9B6"/>
-            </a:solidFill>
-            <a:prstDash val="solid"/>
-          </a:ln>
-        </p:spPr>
-      </p:sp>
-      <p:sp>
-        <p:nvSpPr>
-          <p:cNvPr id="24" name="s4_safe_t"/>
-          <p:cNvSpPr txBox="1"/>
-          <p:nvPr/>
-        </p:nvSpPr>
-        <p:spPr>
-          <a:xfrm>
-            <a:off x="6492240" y="1325880"/>
-            <a:ext cx="2057400" cy="2788920"/>
-          </a:xfrm>
-          <a:prstGeom prst="rect">
-            <a:avLst/>
-          </a:prstGeom>
-          <a:noFill/>
-          <a:ln/>
-        </p:spPr>
-        <p:txBody>
-          <a:bodyPr wrap="square" lIns="1016" tIns="1016" rIns="1016" bIns="1016" rtlCol="0" anchor="t"/>
-          <a:lstStyle/>
-          <a:p>
-            <a:pPr indent="0" marL="0">
-              <a:spcAft>
-                <a:spcPts val="400"/>
-              </a:spcAft>
-              <a:buNone/>
-            </a:pPr>
-            <a:r>
-              <a:rPr lang="en-US" sz="1400" b="1" dirty="0">
-                <a:solidFill>
-                  <a:schemeClr val="accent2"/>
-                </a:solidFill>
-              </a:rPr>
-              <a:t>苦しくなったら</a:t>
-            </a:r>
-            <a:endParaRPr lang="en-US" sz="1400" dirty="0"/>
-          </a:p>
-          <a:p>
-            <a:pPr indent="0" marL="0">
-              <a:spcAft>
-                <a:spcPts val="400"/>
-              </a:spcAft>
-              <a:buNone/>
-            </a:pPr>
-            <a:r>
-              <a:rPr lang="en-US" sz="1400" dirty="0">
-                <a:solidFill>
-                  <a:schemeClr val="tx1"/>
-                </a:solidFill>
-              </a:rPr>
-              <a:t>いったん止めて、息を完全に吐き切る</a:t>
-            </a:r>
-            <a:endParaRPr lang="en-US" sz="1400" dirty="0"/>
-          </a:p>
-          <a:p>
-            <a:pPr indent="0" marL="0">
-              <a:spcAft>
-                <a:spcPts val="400"/>
-              </a:spcAft>
-              <a:buNone/>
-            </a:pPr>
-            <a:r>
-              <a:rPr lang="en-US" sz="1400" dirty="0">
-                <a:solidFill>
-                  <a:schemeClr val="tx1"/>
-                </a:solidFill>
-              </a:rPr>
-              <a:t> </a:t>
-            </a:r>
-            <a:endParaRPr lang="en-US" sz="1400" dirty="0"/>
-          </a:p>
-          <a:p>
-            <a:pPr indent="0" marL="0">
-              <a:spcAft>
-                <a:spcPts val="400"/>
-              </a:spcAft>
-              <a:buNone/>
-            </a:pPr>
-            <a:r>
-              <a:rPr lang="en-US" sz="1400" dirty="0">
-                <a:solidFill>
-                  <a:schemeClr val="tx1"/>
-                </a:solidFill>
-              </a:rPr>
-              <a:t>相手が聞いてくれて</a:t>
-            </a:r>
-            <a:endParaRPr lang="en-US" sz="1400" dirty="0"/>
-          </a:p>
-          <a:p>
-            <a:pPr indent="0" marL="0">
-              <a:spcAft>
-                <a:spcPts val="400"/>
-              </a:spcAft>
-              <a:buNone/>
-            </a:pPr>
-            <a:r>
-              <a:rPr lang="en-US" sz="1400" dirty="0">
-                <a:solidFill>
-                  <a:schemeClr val="tx1"/>
-                </a:solidFill>
-              </a:rPr>
-              <a:t>謝っている</a:t>
-            </a:r>
-            <a:endParaRPr lang="en-US" sz="1400" dirty="0"/>
-          </a:p>
-          <a:p>
-            <a:pPr indent="0" marL="0">
-              <a:spcAft>
-                <a:spcPts val="400"/>
-              </a:spcAft>
-              <a:buNone/>
-            </a:pPr>
-            <a:r>
-              <a:rPr lang="en-US" sz="1400" dirty="0">
-                <a:solidFill>
-                  <a:schemeClr val="tx1"/>
-                </a:solidFill>
-              </a:rPr>
-              <a:t>イメージで</a:t>
-            </a:r>
-            <a:endParaRPr lang="en-US" sz="1400" dirty="0"/>
+                <a:latin typeface="Yu Mincho" pitchFamily="34" charset="0"/>
+                <a:ea typeface="Yu Mincho" pitchFamily="34" charset="-122"/>
+                <a:cs typeface="Yu Mincho" pitchFamily="34" charset="-120"/>
+              </a:rPr>
+              <a:t>出そうですか？</a:t>
+            </a:r>
+            <a:endParaRPr lang="en-US" sz="3200" dirty="0"/>
           </a:p>
         </p:txBody>
       </p:sp>
@@ -14940,6 +14026,10 @@
             <a:prstDash val="solid"/>
           </a:ln>
         </p:spPr>
+        <p:txBody>
+          <a:bodyPr/>
+          <a:p/>
+        </p:txBody>
       </p:sp>
       <p:sp>
         <p:nvSpPr>
@@ -14971,7 +14061,7 @@
                   <a:schemeClr val="accent2"/>
                 </a:solidFill>
               </a:rPr>
-              <a:t>STEP 4　外から見ながら</a:t>
+              <a:t>STEP 4</a:t>
             </a:r>
             <a:endParaRPr lang="en-US" sz="1300" dirty="0"/>
           </a:p>
@@ -15012,7 +14102,7 @@
                 <a:ea typeface="Yu Mincho" pitchFamily="34" charset="-122"/>
                 <a:cs typeface="Yu Mincho" pitchFamily="34" charset="-120"/>
               </a:rPr>
-              <a:t>本当は、</a:t>
+              <a:t>その思い込みが生まれた場面に</a:t>
             </a:r>
             <a:endParaRPr lang="en-US" sz="3200" dirty="0"/>
           </a:p>
@@ -15029,7 +14119,7 @@
                 <a:ea typeface="Yu Mincho" pitchFamily="34" charset="-122"/>
                 <a:cs typeface="Yu Mincho" pitchFamily="34" charset="-120"/>
               </a:rPr>
-              <a:t>どうして欲しかったの？</a:t>
+              <a:t>戻ってみましょう</a:t>
             </a:r>
             <a:endParaRPr lang="en-US" sz="3200" dirty="0"/>
           </a:p>
@@ -15067,7 +14157,21 @@
                   <a:schemeClr val="accent2"/>
                 </a:solidFill>
               </a:rPr>
-              <a:t>「満たされていない想い」を、言葉にしていきます</a:t>
+              <a:t>何が見えますか？　どんな色ですか？</a:t>
+            </a:r>
+            <a:endParaRPr lang="en-US" sz="1500" dirty="0"/>
+          </a:p>
+          <a:p>
+            <a:pPr algn="ctr" indent="0" marL="0">
+              <a:buNone/>
+            </a:pPr>
+            <a:r>
+              <a:rPr lang="en-US" sz="1500" dirty="0">
+                <a:solidFill>
+                  <a:schemeClr val="accent2"/>
+                </a:solidFill>
+              </a:rPr>
+              <a:t>何が聞こえますか？　体はどんな感じがしますか？</a:t>
             </a:r>
             <a:endParaRPr lang="en-US" sz="1500" dirty="0"/>
           </a:p>
@@ -15164,6 +14268,10 @@
             <a:prstDash val="solid"/>
           </a:ln>
         </p:spPr>
+        <p:txBody>
+          <a:bodyPr/>
+          <a:p/>
+        </p:txBody>
       </p:sp>
       <p:sp>
         <p:nvSpPr>
@@ -15253,9 +14361,47 @@
                 <a:ea typeface="Yu Mincho" pitchFamily="34" charset="-122"/>
                 <a:cs typeface="Yu Mincho" pitchFamily="34" charset="-120"/>
               </a:rPr>
-              <a:t>どうしたかったの？</a:t>
+              <a:t>どうして欲しかったの？</a:t>
             </a:r>
             <a:endParaRPr lang="en-US" sz="3200" dirty="0"/>
+          </a:p>
+        </p:txBody>
+      </p:sp>
+      <p:sp>
+        <p:nvSpPr>
+          <p:cNvPr id="5" name="Text 0"/>
+          <p:cNvSpPr/>
+          <p:nvPr>
+            <p:ph idx="101" type="body" hasCustomPrompt="1"/>
+          </p:nvPr>
+        </p:nvSpPr>
+        <p:spPr>
+          <a:xfrm>
+            <a:off x="914400" y="3200400"/>
+            <a:ext cx="7315200" cy="731520"/>
+          </a:xfrm>
+          <a:prstGeom prst="rect">
+            <a:avLst/>
+          </a:prstGeom>
+          <a:noFill/>
+          <a:ln/>
+        </p:spPr>
+        <p:txBody>
+          <a:bodyPr wrap="square" rtlCol="0" anchor="t"/>
+          <a:lstStyle/>
+          <a:p>
+            <a:pPr algn="ctr" indent="0" marL="0">
+              <a:buNone/>
+            </a:pPr>
+            <a:r>
+              <a:rPr lang="en-US" sz="1500" dirty="0">
+                <a:solidFill>
+                  <a:schemeClr val="accent2"/>
+                </a:solidFill>
+              </a:rPr>
+              <a:t>「満たされていない想い」を、言葉にしていきます</a:t>
+            </a:r>
+            <a:endParaRPr lang="en-US" sz="1500" dirty="0"/>
           </a:p>
         </p:txBody>
       </p:sp>
@@ -15350,6 +14496,10 @@
             <a:prstDash val="solid"/>
           </a:ln>
         </p:spPr>
+        <p:txBody>
+          <a:bodyPr/>
+          <a:p/>
+        </p:txBody>
       </p:sp>
       <p:sp>
         <p:nvSpPr>
@@ -15381,7 +14531,7 @@
                   <a:schemeClr val="accent2"/>
                 </a:solidFill>
               </a:rPr>
-              <a:t>STEP 4　もう一度その場所に戻って</a:t>
+              <a:t>STEP 4　外から見ながら</a:t>
             </a:r>
             <a:endParaRPr lang="en-US" sz="1300" dirty="0"/>
           </a:p>
@@ -15422,7 +14572,7 @@
                 <a:ea typeface="Yu Mincho" pitchFamily="34" charset="-122"/>
                 <a:cs typeface="Yu Mincho" pitchFamily="34" charset="-120"/>
               </a:rPr>
-              <a:t>言いたかったことを、</a:t>
+              <a:t>本当は、</a:t>
             </a:r>
             <a:endParaRPr lang="en-US" sz="3200" dirty="0"/>
           </a:p>
@@ -15439,47 +14589,9 @@
                 <a:ea typeface="Yu Mincho" pitchFamily="34" charset="-122"/>
                 <a:cs typeface="Yu Mincho" pitchFamily="34" charset="-120"/>
               </a:rPr>
-              <a:t>全部吐き出しましょう</a:t>
+              <a:t>どうしたかったの？</a:t>
             </a:r>
             <a:endParaRPr lang="en-US" sz="3200" dirty="0"/>
-          </a:p>
-        </p:txBody>
-      </p:sp>
-      <p:sp>
-        <p:nvSpPr>
-          <p:cNvPr id="5" name="Text 0"/>
-          <p:cNvSpPr/>
-          <p:nvPr>
-            <p:ph idx="101" type="body" hasCustomPrompt="1"/>
-          </p:nvPr>
-        </p:nvSpPr>
-        <p:spPr>
-          <a:xfrm>
-            <a:off x="914400" y="3200400"/>
-            <a:ext cx="7315200" cy="731520"/>
-          </a:xfrm>
-          <a:prstGeom prst="rect">
-            <a:avLst/>
-          </a:prstGeom>
-          <a:noFill/>
-          <a:ln/>
-        </p:spPr>
-        <p:txBody>
-          <a:bodyPr wrap="square" rtlCol="0" anchor="t"/>
-          <a:lstStyle/>
-          <a:p>
-            <a:pPr algn="ctr" indent="0" marL="0">
-              <a:buNone/>
-            </a:pPr>
-            <a:r>
-              <a:rPr lang="en-US" sz="1500" dirty="0">
-                <a:solidFill>
-                  <a:schemeClr val="accent2"/>
-                </a:solidFill>
-              </a:rPr>
-              <a:t>100％出せましたか？</a:t>
-            </a:r>
-            <a:endParaRPr lang="en-US" sz="1500" dirty="0"/>
           </a:p>
         </p:txBody>
       </p:sp>
@@ -15555,16 +14667,40 @@
       </p:grpSpPr>
       <p:sp>
         <p:nvSpPr>
-          <p:cNvPr id="2" name="Text 0"/>
+          <p:cNvPr id="2" name="frame"/>
           <p:cNvSpPr/>
-          <p:nvPr>
-            <p:ph idx="100" type="title" hasCustomPrompt="1"/>
-          </p:nvPr>
-        </p:nvSpPr>
-        <p:spPr>
-          <a:xfrm>
-            <a:off x="457200" y="457200"/>
-            <a:ext cx="8229600" cy="594360"/>
+          <p:nvPr/>
+        </p:nvSpPr>
+        <p:spPr>
+          <a:xfrm>
+            <a:off x="228600" y="137160"/>
+            <a:ext cx="8686800" cy="4526280"/>
+          </a:xfrm>
+          <a:prstGeom prst="rect">
+            <a:avLst/>
+          </a:prstGeom>
+          <a:ln w="12700">
+            <a:solidFill>
+              <a:srgbClr val="B08A4E"/>
+            </a:solidFill>
+            <a:prstDash val="solid"/>
+          </a:ln>
+        </p:spPr>
+        <p:txBody>
+          <a:bodyPr/>
+          <a:p/>
+        </p:txBody>
+      </p:sp>
+      <p:sp>
+        <p:nvSpPr>
+          <p:cNvPr id="3" name="qlabel"/>
+          <p:cNvSpPr txBox="1"/>
+          <p:nvPr/>
+        </p:nvSpPr>
+        <p:spPr>
+          <a:xfrm>
+            <a:off x="457200" y="320040"/>
+            <a:ext cx="8229600" cy="365760"/>
           </a:xfrm>
           <a:prstGeom prst="rect">
             <a:avLst/>
@@ -15573,64 +14709,94 @@
           <a:ln/>
         </p:spPr>
         <p:txBody>
-          <a:bodyPr wrap="square" lIns="0" tIns="0" rIns="0" bIns="0" rtlCol="0" anchor="ctr"/>
-          <a:lstStyle/>
-          <a:p>
-            <a:pPr algn="l" indent="0" marL="0">
-              <a:buNone/>
-            </a:pPr>
-            <a:r>
-              <a:rPr lang="en-US" sz="2400" b="1" dirty="0">
+          <a:bodyPr wrap="square" lIns="0" tIns="0" rIns="0" bIns="0" rtlCol="0" anchor="t"/>
+          <a:lstStyle/>
+          <a:p>
+            <a:pPr algn="ctr" indent="0" marL="0">
+              <a:buNone/>
+            </a:pPr>
+            <a:r>
+              <a:rPr lang="en-US" sz="1300" b="1" dirty="0">
                 <a:solidFill>
                   <a:schemeClr val="accent2"/>
+                </a:solidFill>
+              </a:rPr>
+              <a:t>STEP 4　もう一度その場所に戻って</a:t>
+            </a:r>
+            <a:endParaRPr lang="en-US" sz="1300" dirty="0"/>
+          </a:p>
+        </p:txBody>
+      </p:sp>
+      <p:sp>
+        <p:nvSpPr>
+          <p:cNvPr id="4" name="Text 0"/>
+          <p:cNvSpPr/>
+          <p:nvPr>
+            <p:ph idx="100" type="title" hasCustomPrompt="1"/>
+          </p:nvPr>
+        </p:nvSpPr>
+        <p:spPr>
+          <a:xfrm>
+            <a:off x="914400" y="1554480"/>
+            <a:ext cx="7315200" cy="1554480"/>
+          </a:xfrm>
+          <a:prstGeom prst="rect">
+            <a:avLst/>
+          </a:prstGeom>
+          <a:noFill/>
+          <a:ln/>
+        </p:spPr>
+        <p:txBody>
+          <a:bodyPr wrap="square" rtlCol="0" anchor="ctr"/>
+          <a:lstStyle/>
+          <a:p>
+            <a:pPr algn="ctr" indent="0" marL="0">
+              <a:buNone/>
+            </a:pPr>
+            <a:r>
+              <a:rPr lang="en-US" sz="3200" b="1" dirty="0">
+                <a:solidFill>
+                  <a:schemeClr val="tx2"/>
                 </a:solidFill>
                 <a:latin typeface="Yu Mincho" pitchFamily="34" charset="0"/>
                 <a:ea typeface="Yu Mincho" pitchFamily="34" charset="-122"/>
                 <a:cs typeface="Yu Mincho" pitchFamily="34" charset="-120"/>
               </a:rPr>
-              <a:t>STEP 5　和解と許し → 理想の未来へ</a:t>
-            </a:r>
-            <a:endParaRPr lang="en-US" sz="2400" dirty="0"/>
-          </a:p>
-        </p:txBody>
-      </p:sp>
-      <p:sp>
-        <p:nvSpPr>
-          <p:cNvPr id="3" name="s5_a"/>
+              <a:t>あの時のあなたへ、</a:t>
+            </a:r>
+            <a:endParaRPr lang="en-US" sz="3200" dirty="0"/>
+          </a:p>
+          <a:p>
+            <a:pPr algn="ctr" indent="0" marL="0">
+              <a:buNone/>
+            </a:pPr>
+            <a:r>
+              <a:rPr lang="en-US" sz="3200" b="1" dirty="0">
+                <a:solidFill>
+                  <a:schemeClr val="tx2"/>
+                </a:solidFill>
+                <a:latin typeface="Yu Mincho" pitchFamily="34" charset="0"/>
+                <a:ea typeface="Yu Mincho" pitchFamily="34" charset="-122"/>
+                <a:cs typeface="Yu Mincho" pitchFamily="34" charset="-120"/>
+              </a:rPr>
+              <a:t>＿＿＿＿＿＿＿＿</a:t>
+            </a:r>
+            <a:endParaRPr lang="en-US" sz="3200" dirty="0"/>
+          </a:p>
+        </p:txBody>
+      </p:sp>
+      <p:sp>
+        <p:nvSpPr>
+          <p:cNvPr id="5" name="Text 0"/>
           <p:cNvSpPr/>
-          <p:nvPr/>
-        </p:nvSpPr>
-        <p:spPr>
-          <a:xfrm>
-            <a:off x="457200" y="1234440"/>
-            <a:ext cx="5120640" cy="1371600"/>
-          </a:xfrm>
-          <a:prstGeom prst="roundRect">
-            <a:avLst>
-              <a:gd name="adj" fmla="val 8000"/>
-            </a:avLst>
-          </a:prstGeom>
-          <a:solidFill>
-            <a:srgbClr val="F8EBEE"/>
-          </a:solidFill>
-          <a:ln w="9525">
-            <a:solidFill>
-              <a:srgbClr val="E9D9B6"/>
-            </a:solidFill>
-            <a:prstDash val="solid"/>
-          </a:ln>
-        </p:spPr>
-      </p:sp>
-      <p:sp>
-        <p:nvSpPr>
-          <p:cNvPr id="4" name="s5_a_t"/>
-          <p:cNvSpPr txBox="1"/>
-          <p:nvPr/>
-        </p:nvSpPr>
-        <p:spPr>
-          <a:xfrm>
-            <a:off x="640080" y="1325880"/>
-            <a:ext cx="4846320" cy="1188720"/>
+          <p:nvPr>
+            <p:ph idx="101" type="body" hasCustomPrompt="1"/>
+          </p:nvPr>
+        </p:nvSpPr>
+        <p:spPr>
+          <a:xfrm>
+            <a:off x="914400" y="3200400"/>
+            <a:ext cx="7315200" cy="731520"/>
           </a:xfrm>
           <a:prstGeom prst="rect">
             <a:avLst/>
@@ -15639,189 +14805,24 @@
           <a:ln/>
         </p:spPr>
         <p:txBody>
-          <a:bodyPr wrap="square" lIns="1016" tIns="1016" rIns="1016" bIns="1016" rtlCol="0" anchor="t"/>
-          <a:lstStyle/>
-          <a:p>
-            <a:pPr indent="0" marL="0">
-              <a:spcAft>
-                <a:spcPts val="400"/>
-              </a:spcAft>
-              <a:buNone/>
-            </a:pPr>
-            <a:r>
-              <a:rPr lang="en-US" sz="1400" b="1" dirty="0">
+          <a:bodyPr wrap="square" rtlCol="0" anchor="t"/>
+          <a:lstStyle/>
+          <a:p>
+            <a:pPr algn="ctr" indent="0" marL="0">
+              <a:buNone/>
+            </a:pPr>
+            <a:r>
+              <a:rPr lang="en-US" sz="1500" dirty="0">
                 <a:solidFill>
                   <a:schemeClr val="accent2"/>
                 </a:solidFill>
               </a:rPr>
-              <a:t>和解と許し</a:t>
-            </a:r>
-            <a:endParaRPr lang="en-US" sz="1400" dirty="0"/>
-          </a:p>
-          <a:p>
-            <a:pPr marL="342900" indent="-342900">
-              <a:spcAft>
-                <a:spcPts val="400"/>
-              </a:spcAft>
-              <a:buSzPct val="100000"/>
-              <a:buChar char="•"/>
-            </a:pPr>
-            <a:r>
-              <a:rPr lang="en-US" sz="1400" dirty="0">
-                <a:solidFill>
-                  <a:schemeClr val="tx1"/>
-                </a:solidFill>
-              </a:rPr>
-              <a:t>相手の中に入って、相手の立場を感じてみる</a:t>
-            </a:r>
-            <a:endParaRPr lang="en-US" sz="1400" dirty="0"/>
-          </a:p>
-          <a:p>
-            <a:pPr marL="342900" indent="-342900">
-              <a:spcAft>
-                <a:spcPts val="400"/>
-              </a:spcAft>
-              <a:buSzPct val="100000"/>
-              <a:buChar char="•"/>
-            </a:pPr>
-            <a:r>
-              <a:rPr lang="en-US" sz="1400" dirty="0">
-                <a:solidFill>
-                  <a:schemeClr val="tx1"/>
-                </a:solidFill>
-              </a:rPr>
-              <a:t>和解は100％でなくてもOK</a:t>
-            </a:r>
-            <a:endParaRPr lang="en-US" sz="1400" dirty="0"/>
-          </a:p>
-        </p:txBody>
-      </p:sp>
-      <p:sp>
-        <p:nvSpPr>
-          <p:cNvPr id="5" name="s5_b"/>
-          <p:cNvSpPr/>
-          <p:nvPr/>
-        </p:nvSpPr>
-        <p:spPr>
-          <a:xfrm>
-            <a:off x="457200" y="2788920"/>
-            <a:ext cx="5120640" cy="1280160"/>
-          </a:xfrm>
-          <a:prstGeom prst="roundRect">
-            <a:avLst>
-              <a:gd name="adj" fmla="val 8571"/>
-            </a:avLst>
-          </a:prstGeom>
-          <a:solidFill>
-            <a:srgbClr val="EFE8F6"/>
-          </a:solidFill>
-          <a:ln w="9525">
-            <a:solidFill>
-              <a:srgbClr val="E9D9B6"/>
-            </a:solidFill>
-            <a:prstDash val="solid"/>
-          </a:ln>
-        </p:spPr>
-      </p:sp>
-      <p:sp>
-        <p:nvSpPr>
-          <p:cNvPr id="6" name="s5_b_t"/>
-          <p:cNvSpPr txBox="1"/>
-          <p:nvPr/>
-        </p:nvSpPr>
-        <p:spPr>
-          <a:xfrm>
-            <a:off x="640080" y="2880360"/>
-            <a:ext cx="4846320" cy="1097280"/>
-          </a:xfrm>
-          <a:prstGeom prst="rect">
-            <a:avLst/>
-          </a:prstGeom>
-          <a:noFill/>
-          <a:ln/>
-        </p:spPr>
-        <p:txBody>
-          <a:bodyPr wrap="square" lIns="1016" tIns="1016" rIns="1016" bIns="1016" rtlCol="0" anchor="t"/>
-          <a:lstStyle/>
-          <a:p>
-            <a:pPr indent="0" marL="0">
-              <a:spcAft>
-                <a:spcPts val="400"/>
-              </a:spcAft>
-              <a:buNone/>
-            </a:pPr>
-            <a:r>
-              <a:rPr lang="en-US" sz="1400" b="1" dirty="0">
-                <a:solidFill>
-                  <a:schemeClr val="accent2"/>
-                </a:solidFill>
-              </a:rPr>
-              <a:t>理想の未来から、自分を信じる力を育てる</a:t>
-            </a:r>
-            <a:endParaRPr lang="en-US" sz="1400" dirty="0"/>
-          </a:p>
-          <a:p>
-            <a:pPr marL="342900" indent="-342900">
-              <a:spcAft>
-                <a:spcPts val="400"/>
-              </a:spcAft>
-              <a:buSzPct val="100000"/>
-              <a:buChar char="•"/>
-            </a:pPr>
-            <a:r>
-              <a:rPr lang="en-US" sz="1400" dirty="0">
-                <a:solidFill>
-                  <a:schemeClr val="tx1"/>
-                </a:solidFill>
-              </a:rPr>
-              <a:t>大成功している未来の自分になってみる</a:t>
-            </a:r>
-            <a:endParaRPr lang="en-US" sz="1400" dirty="0"/>
-          </a:p>
-          <a:p>
-            <a:pPr marL="342900" indent="-342900">
-              <a:spcAft>
-                <a:spcPts val="400"/>
-              </a:spcAft>
-              <a:buSzPct val="100000"/>
-              <a:buChar char="•"/>
-            </a:pPr>
-            <a:r>
-              <a:rPr lang="en-US" sz="1400" dirty="0">
-                <a:solidFill>
-                  <a:schemeClr val="tx1"/>
-                </a:solidFill>
-              </a:rPr>
-              <a:t>見える景色・聞こえる声・体の感じを大きく</a:t>
-            </a:r>
-            <a:endParaRPr lang="en-US" sz="1400" dirty="0"/>
-          </a:p>
-        </p:txBody>
-      </p:sp>
-      <p:pic>
-        <p:nvPicPr>
-          <p:cNvPr id="7" name="Image 0" descr="ガイドブック45ページ">    </p:cNvPr>
-          <p:cNvPicPr>
-            <a:picLocks noChangeAspect="1"/>
-          </p:cNvPicPr>
-          <p:nvPr/>
-        </p:nvPicPr>
-        <p:blipFill>
-          <a:blip r:embed="rId1"/>
-          <a:stretch>
-            <a:fillRect/>
-          </a:stretch>
-        </p:blipFill>
-        <p:spPr>
-          <a:xfrm>
-            <a:off x="5989320" y="1143000"/>
-            <a:ext cx="2377440" cy="3364992"/>
-          </a:xfrm>
-          <a:prstGeom prst="rect">
-            <a:avLst/>
-          </a:prstGeom>
-        </p:spPr>
-      </p:pic>
+              <a:t>苦しくなったら、いったん止めて、息を吐き切りましょう</a:t>
+            </a:r>
+            <a:endParaRPr lang="en-US" sz="1500" dirty="0"/>
+          </a:p>
+        </p:txBody>
+      </p:sp>
       <p:sp>
         <p:nvSpPr>
           <p:cNvPr id="25" name="Slide Number Placeholder 0"/>
@@ -15894,36 +14895,146 @@
       </p:grpSpPr>
       <p:sp>
         <p:nvSpPr>
-          <p:cNvPr id="2" name="frame"/>
+          <p:cNvPr id="2" name="misenai_band"/>
           <p:cNvSpPr/>
           <p:nvPr/>
         </p:nvSpPr>
         <p:spPr>
           <a:xfrm>
-            <a:off x="228600" y="137160"/>
-            <a:ext cx="8686800" cy="4526280"/>
-          </a:xfrm>
-          <a:prstGeom prst="rect">
-            <a:avLst/>
-          </a:prstGeom>
-          <a:ln w="12700">
+            <a:off x="457200" y="182880"/>
+            <a:ext cx="8229600" cy="502920"/>
+          </a:xfrm>
+          <a:prstGeom prst="roundRect">
+            <a:avLst>
+              <a:gd name="adj" fmla="val 18182"/>
+            </a:avLst>
+          </a:prstGeom>
+          <a:solidFill>
+            <a:srgbClr val="8C6A34"/>
+          </a:solidFill>
+          <a:ln/>
+        </p:spPr>
+        <p:txBody>
+          <a:bodyPr/>
+          <a:p/>
+        </p:txBody>
+      </p:sp>
+      <p:sp>
+        <p:nvSpPr>
+          <p:cNvPr id="3" name="misenai"/>
+          <p:cNvSpPr txBox="1"/>
+          <p:nvPr/>
+        </p:nvSpPr>
+        <p:spPr>
+          <a:xfrm>
+            <a:off x="457200" y="182880"/>
+            <a:ext cx="8229600" cy="502920"/>
+          </a:xfrm>
+          <a:prstGeom prst="rect">
+            <a:avLst/>
+          </a:prstGeom>
+          <a:noFill/>
+          <a:ln/>
+        </p:spPr>
+        <p:txBody>
+          <a:bodyPr wrap="square" lIns="0" tIns="0" rIns="0" bIns="0" rtlCol="0" anchor="ctr"/>
+          <a:lstStyle/>
+          <a:p>
+            <a:pPr algn="ctr" indent="0" marL="0">
+              <a:buNone/>
+            </a:pPr>
+            <a:r>
+              <a:rPr lang="en-US" sz="1800" b="1" dirty="0">
+                <a:solidFill>
+                  <a:schemeClr val="bg1"/>
+                </a:solidFill>
+              </a:rPr>
+              <a:t>【共有停止】</a:t>
+            </a:r>
+            <a:endParaRPr lang="en-US" sz="1800" dirty="0"/>
+          </a:p>
+        </p:txBody>
+      </p:sp>
+      <p:sp>
+        <p:nvSpPr>
+          <p:cNvPr id="4" name="facil_title"/>
+          <p:cNvSpPr txBox="1"/>
+          <p:nvPr/>
+        </p:nvSpPr>
+        <p:spPr>
+          <a:xfrm>
+            <a:off x="457200" y="777240"/>
+            <a:ext cx="8229600" cy="411480"/>
+          </a:xfrm>
+          <a:prstGeom prst="rect">
+            <a:avLst/>
+          </a:prstGeom>
+          <a:noFill/>
+          <a:ln/>
+        </p:spPr>
+        <p:txBody>
+          <a:bodyPr wrap="square" lIns="0" tIns="0" rIns="0" bIns="0" rtlCol="0" anchor="t"/>
+          <a:lstStyle/>
+          <a:p>
+            <a:pPr indent="0" marL="0">
+              <a:buNone/>
+            </a:pPr>
+            <a:r>
+              <a:rPr lang="en-US" sz="2200" b="1" dirty="0">
+                <a:solidFill>
+                  <a:schemeClr val="accent2"/>
+                </a:solidFill>
+                <a:latin typeface="Yu Mincho" pitchFamily="34" charset="0"/>
+                <a:ea typeface="Yu Mincho" pitchFamily="34" charset="-122"/>
+                <a:cs typeface="Yu Mincho" pitchFamily="34" charset="-120"/>
+              </a:rPr>
+              <a:t>STEP 5 の進め方（理想の未来へ）</a:t>
+            </a:r>
+            <a:endParaRPr lang="en-US" sz="2200" dirty="0"/>
+          </a:p>
+        </p:txBody>
+      </p:sp>
+      <p:sp>
+        <p:nvSpPr>
+          <p:cNvPr id="5" name="facil_card"/>
+          <p:cNvSpPr/>
+          <p:nvPr/>
+        </p:nvSpPr>
+        <p:spPr>
+          <a:xfrm>
+            <a:off x="457200" y="1188720"/>
+            <a:ext cx="5394960" cy="3383280"/>
+          </a:xfrm>
+          <a:prstGeom prst="roundRect">
+            <a:avLst>
+              <a:gd name="adj" fmla="val 3243"/>
+            </a:avLst>
+          </a:prstGeom>
+          <a:solidFill>
+            <a:srgbClr val="FFF8E8"/>
+          </a:solidFill>
+          <a:ln w="9525">
             <a:solidFill>
-              <a:srgbClr val="B08A4E"/>
+              <a:srgbClr val="E9D9B6"/>
             </a:solidFill>
             <a:prstDash val="solid"/>
           </a:ln>
         </p:spPr>
-      </p:sp>
-      <p:sp>
-        <p:nvSpPr>
-          <p:cNvPr id="3" name="qlabel"/>
+        <p:txBody>
+          <a:bodyPr/>
+          <a:p/>
+        </p:txBody>
+      </p:sp>
+      <p:sp>
+        <p:nvSpPr>
+          <p:cNvPr id="6" name="facil_list"/>
           <p:cNvSpPr txBox="1"/>
           <p:nvPr/>
         </p:nvSpPr>
         <p:spPr>
           <a:xfrm>
-            <a:off x="457200" y="320040"/>
-            <a:ext cx="8229600" cy="365760"/>
+            <a:off x="594360" y="1280160"/>
+            <a:ext cx="5120640" cy="3200400"/>
           </a:xfrm>
           <a:prstGeom prst="rect">
             <a:avLst/>
@@ -15932,120 +15043,72 @@
           <a:ln/>
         </p:spPr>
         <p:txBody>
-          <a:bodyPr wrap="square" lIns="0" tIns="0" rIns="0" bIns="0" rtlCol="0" anchor="t"/>
-          <a:lstStyle/>
-          <a:p>
-            <a:pPr algn="ctr" indent="0" marL="0">
-              <a:buNone/>
-            </a:pPr>
-            <a:r>
-              <a:rPr lang="en-US" sz="1300" b="1" dirty="0">
-                <a:solidFill>
-                  <a:schemeClr val="accent2"/>
-                </a:solidFill>
-              </a:rPr>
-              <a:t>STEP 5　和解と許し</a:t>
-            </a:r>
-            <a:endParaRPr lang="en-US" sz="1300" dirty="0"/>
-          </a:p>
-        </p:txBody>
-      </p:sp>
-      <p:sp>
-        <p:nvSpPr>
-          <p:cNvPr id="4" name="Text 0"/>
-          <p:cNvSpPr/>
-          <p:nvPr>
-            <p:ph idx="100" type="title" hasCustomPrompt="1"/>
-          </p:nvPr>
-        </p:nvSpPr>
-        <p:spPr>
-          <a:xfrm>
-            <a:off x="914400" y="1554480"/>
-            <a:ext cx="7315200" cy="1554480"/>
-          </a:xfrm>
-          <a:prstGeom prst="rect">
-            <a:avLst/>
-          </a:prstGeom>
-          <a:noFill/>
-          <a:ln/>
-        </p:spPr>
-        <p:txBody>
-          <a:bodyPr wrap="square" rtlCol="0" anchor="ctr"/>
-          <a:lstStyle/>
-          <a:p>
-            <a:pPr algn="ctr" indent="0" marL="0">
-              <a:buNone/>
-            </a:pPr>
-            <a:r>
-              <a:rPr lang="en-US" sz="3200" b="1" dirty="0">
-                <a:solidFill>
-                  <a:schemeClr val="tx2"/>
-                </a:solidFill>
-                <a:latin typeface="Yu Mincho" pitchFamily="34" charset="0"/>
-                <a:ea typeface="Yu Mincho" pitchFamily="34" charset="-122"/>
-                <a:cs typeface="Yu Mincho" pitchFamily="34" charset="-120"/>
-              </a:rPr>
-              <a:t>相手の信念・価値観は、</a:t>
-            </a:r>
-            <a:endParaRPr lang="en-US" sz="3200" dirty="0"/>
-          </a:p>
-          <a:p>
-            <a:pPr algn="ctr" indent="0" marL="0">
-              <a:buNone/>
-            </a:pPr>
-            <a:r>
-              <a:rPr lang="en-US" sz="3200" b="1" dirty="0">
-                <a:solidFill>
-                  <a:schemeClr val="tx2"/>
-                </a:solidFill>
-                <a:latin typeface="Yu Mincho" pitchFamily="34" charset="0"/>
-                <a:ea typeface="Yu Mincho" pitchFamily="34" charset="-122"/>
-                <a:cs typeface="Yu Mincho" pitchFamily="34" charset="-120"/>
-              </a:rPr>
-              <a:t>いつできたのでしょう？</a:t>
-            </a:r>
-            <a:endParaRPr lang="en-US" sz="3200" dirty="0"/>
-          </a:p>
-        </p:txBody>
-      </p:sp>
-      <p:sp>
-        <p:nvSpPr>
-          <p:cNvPr id="5" name="Text 0"/>
-          <p:cNvSpPr/>
-          <p:nvPr>
-            <p:ph idx="101" type="body" hasCustomPrompt="1"/>
-          </p:nvPr>
-        </p:nvSpPr>
-        <p:spPr>
-          <a:xfrm>
-            <a:off x="914400" y="3200400"/>
-            <a:ext cx="7315200" cy="731520"/>
-          </a:xfrm>
-          <a:prstGeom prst="rect">
-            <a:avLst/>
-          </a:prstGeom>
-          <a:noFill/>
-          <a:ln/>
-        </p:spPr>
-        <p:txBody>
-          <a:bodyPr wrap="square" rtlCol="0" anchor="t"/>
-          <a:lstStyle/>
-          <a:p>
-            <a:pPr algn="ctr" indent="0" marL="0">
-              <a:buNone/>
-            </a:pPr>
-            <a:r>
-              <a:rPr lang="en-US" sz="1500" dirty="0">
-                <a:solidFill>
-                  <a:schemeClr val="accent2"/>
-                </a:solidFill>
-              </a:rPr>
-              <a:t>相手の中に入って、感じてみてください</a:t>
-            </a:r>
-            <a:endParaRPr lang="en-US" sz="1500" dirty="0"/>
-          </a:p>
-        </p:txBody>
-      </p:sp>
+          <a:bodyPr wrap="square" lIns="1016" tIns="1016" rIns="1016" bIns="1016" rtlCol="0" anchor="t"/>
+          <a:lstStyle/>
+          <a:p>
+            <a:pPr marL="342900" indent="-342900">
+              <a:spcAft>
+                <a:spcPts val="300"/>
+              </a:spcAft>
+              <a:buSzPct val="100000"/>
+              <a:buFont typeface="+mj-lt"/>
+              <a:buAutoNum type="arabicPeriod" startAt="1"/>
+            </a:pPr>
+            <a:r>
+              <a:rPr lang="en-US" sz="1200" dirty="0">
+                <a:solidFill>
+                  <a:schemeClr val="tx1"/>
+                </a:solidFill>
+              </a:rPr>
+              <a:t>大成功している理想の未来の自分へ（見える・色・聞こえる・体の感じを2倍・3倍に）</a:t>
+            </a:r>
+            <a:endParaRPr lang="en-US" sz="1200" dirty="0"/>
+          </a:p>
+          <a:p>
+            <a:pPr marL="342900" indent="-342900">
+              <a:spcAft>
+                <a:spcPts val="300"/>
+              </a:spcAft>
+              <a:buSzPct val="100000"/>
+              <a:buFont typeface="+mj-lt"/>
+              <a:buAutoNum type="arabicPeriod" startAt="1"/>
+            </a:pPr>
+            <a:r>
+              <a:rPr lang="en-US" sz="1200" dirty="0">
+                <a:solidFill>
+                  <a:schemeClr val="tx1"/>
+                </a:solidFill>
+              </a:rPr>
+              <a:t>「これから選びたいお金の考え」を本人の言葉で決める（由香が打ち込む）</a:t>
+            </a:r>
+            <a:endParaRPr lang="en-US" sz="1200" dirty="0"/>
+          </a:p>
+        </p:txBody>
+      </p:sp>
+      <p:pic>
+        <p:nvPicPr>
+          <p:cNvPr id="7" name="Image 0" descr="ガイドブック">    </p:cNvPr>
+          <p:cNvPicPr>
+            <a:picLocks noChangeAspect="1"/>
+          </p:cNvPicPr>
+          <p:nvPr/>
+        </p:nvPicPr>
+        <p:blipFill>
+          <a:blip r:embed="rId1"/>
+          <a:stretch>
+            <a:fillRect/>
+          </a:stretch>
+        </p:blipFill>
+        <p:spPr>
+          <a:xfrm>
+            <a:off x="6126480" y="1188720"/>
+            <a:ext cx="2377440" cy="3364992"/>
+          </a:xfrm>
+          <a:prstGeom prst="rect">
+            <a:avLst/>
+          </a:prstGeom>
+        </p:spPr>
+      </p:pic>
       <p:sp>
         <p:nvSpPr>
           <p:cNvPr id="25" name="Slide Number Placeholder 0"/>
@@ -16137,6 +15200,10 @@
             <a:prstDash val="solid"/>
           </a:ln>
         </p:spPr>
+        <p:txBody>
+          <a:bodyPr/>
+          <a:p/>
+        </p:txBody>
       </p:sp>
       <p:sp>
         <p:nvSpPr>
@@ -16168,7 +15235,7 @@
                   <a:schemeClr val="accent2"/>
                 </a:solidFill>
               </a:rPr>
-              <a:t>STEP 5　和解と許し</a:t>
+              <a:t>STEP 5　理想の未来から</a:t>
             </a:r>
             <a:endParaRPr lang="en-US" sz="1300" dirty="0"/>
           </a:p>
@@ -16209,7 +15276,7 @@
                 <a:ea typeface="Yu Mincho" pitchFamily="34" charset="-122"/>
                 <a:cs typeface="Yu Mincho" pitchFamily="34" charset="-120"/>
               </a:rPr>
-              <a:t>相手は本当は、</a:t>
+              <a:t>大成功しているあなたには、</a:t>
             </a:r>
             <a:endParaRPr lang="en-US" sz="3200" dirty="0"/>
           </a:p>
@@ -16226,7 +15293,24 @@
                 <a:ea typeface="Yu Mincho" pitchFamily="34" charset="-122"/>
                 <a:cs typeface="Yu Mincho" pitchFamily="34" charset="-120"/>
               </a:rPr>
-              <a:t>どうしたかったのでしょう？</a:t>
+              <a:t>何が見えて、どんな色で、</a:t>
+            </a:r>
+            <a:endParaRPr lang="en-US" sz="3200" dirty="0"/>
+          </a:p>
+          <a:p>
+            <a:pPr algn="ctr" indent="0" marL="0">
+              <a:buNone/>
+            </a:pPr>
+            <a:r>
+              <a:rPr lang="en-US" sz="3200" b="1" dirty="0">
+                <a:solidFill>
+                  <a:schemeClr val="tx2"/>
+                </a:solidFill>
+                <a:latin typeface="Yu Mincho" pitchFamily="34" charset="0"/>
+                <a:ea typeface="Yu Mincho" pitchFamily="34" charset="-122"/>
+                <a:cs typeface="Yu Mincho" pitchFamily="34" charset="-120"/>
+              </a:rPr>
+              <a:t>何が聞こえますか？</a:t>
             </a:r>
             <a:endParaRPr lang="en-US" sz="3200" dirty="0"/>
           </a:p>
@@ -16264,7 +15348,7 @@
                   <a:schemeClr val="accent2"/>
                 </a:solidFill>
               </a:rPr>
-              <a:t>なぜ、そんな行為をしてしまったのでしょう？</a:t>
+              <a:t>体はどんな感じがしますか？</a:t>
             </a:r>
             <a:endParaRPr lang="en-US" sz="1500" dirty="0"/>
           </a:p>
@@ -16342,36 +15426,86 @@
       </p:grpSpPr>
       <p:sp>
         <p:nvSpPr>
-          <p:cNvPr id="2" name="frame"/>
+          <p:cNvPr id="2" name="Text 0"/>
+          <p:cNvSpPr/>
+          <p:nvPr>
+            <p:ph idx="100" type="title" hasCustomPrompt="1"/>
+          </p:nvPr>
+        </p:nvSpPr>
+        <p:spPr>
+          <a:xfrm>
+            <a:off x="457200" y="457200"/>
+            <a:ext cx="8229600" cy="594360"/>
+          </a:xfrm>
+          <a:prstGeom prst="rect">
+            <a:avLst/>
+          </a:prstGeom>
+          <a:noFill/>
+          <a:ln/>
+        </p:spPr>
+        <p:txBody>
+          <a:bodyPr wrap="square" lIns="0" tIns="0" rIns="0" bIns="0" rtlCol="0" anchor="ctr"/>
+          <a:lstStyle/>
+          <a:p>
+            <a:pPr algn="l" indent="0" marL="0">
+              <a:buNone/>
+            </a:pPr>
+            <a:r>
+              <a:rPr lang="en-US" sz="2400" b="1" dirty="0">
+                <a:solidFill>
+                  <a:schemeClr val="accent2"/>
+                </a:solidFill>
+                <a:latin typeface="Yu Mincho" pitchFamily="34" charset="0"/>
+                <a:ea typeface="Yu Mincho" pitchFamily="34" charset="-122"/>
+                <a:cs typeface="Yu Mincho" pitchFamily="34" charset="-120"/>
+              </a:rPr>
+              <a:t>これから選びたい、お金の考え</a:t>
+            </a:r>
+            <a:endParaRPr lang="en-US" sz="2400" dirty="0"/>
+          </a:p>
+        </p:txBody>
+      </p:sp>
+      <p:sp>
+        <p:nvSpPr>
+          <p:cNvPr id="3" name="old_card"/>
           <p:cNvSpPr/>
           <p:nvPr/>
         </p:nvSpPr>
         <p:spPr>
           <a:xfrm>
-            <a:off x="228600" y="137160"/>
-            <a:ext cx="8686800" cy="4526280"/>
-          </a:xfrm>
-          <a:prstGeom prst="rect">
-            <a:avLst/>
-          </a:prstGeom>
-          <a:ln w="12700">
+            <a:off x="457200" y="1280160"/>
+            <a:ext cx="3977640" cy="2468880"/>
+          </a:xfrm>
+          <a:prstGeom prst="roundRect">
+            <a:avLst>
+              <a:gd name="adj" fmla="val 4444"/>
+            </a:avLst>
+          </a:prstGeom>
+          <a:solidFill>
+            <a:srgbClr val="FDFAF4"/>
+          </a:solidFill>
+          <a:ln w="9525">
             <a:solidFill>
-              <a:srgbClr val="B08A4E"/>
+              <a:srgbClr val="E9D9B6"/>
             </a:solidFill>
             <a:prstDash val="solid"/>
           </a:ln>
         </p:spPr>
-      </p:sp>
-      <p:sp>
-        <p:nvSpPr>
-          <p:cNvPr id="3" name="qlabel"/>
+        <p:txBody>
+          <a:bodyPr/>
+          <a:p/>
+        </p:txBody>
+      </p:sp>
+      <p:sp>
+        <p:nvSpPr>
+          <p:cNvPr id="4" name="old_head"/>
           <p:cNvSpPr txBox="1"/>
           <p:nvPr/>
         </p:nvSpPr>
         <p:spPr>
           <a:xfrm>
-            <a:off x="457200" y="320040"/>
-            <a:ext cx="8229600" cy="365760"/>
+            <a:off x="640080" y="1417320"/>
+            <a:ext cx="3657600" cy="365760"/>
           </a:xfrm>
           <a:prstGeom prst="rect">
             <a:avLst/>
@@ -16380,36 +15514,34 @@
           <a:ln/>
         </p:spPr>
         <p:txBody>
-          <a:bodyPr wrap="square" lIns="0" tIns="0" rIns="0" bIns="0" rtlCol="0" anchor="t"/>
-          <a:lstStyle/>
-          <a:p>
-            <a:pPr algn="ctr" indent="0" marL="0">
-              <a:buNone/>
-            </a:pPr>
-            <a:r>
-              <a:rPr lang="en-US" sz="1300" b="1" dirty="0">
+          <a:bodyPr wrap="square" lIns="1016" tIns="1016" rIns="1016" bIns="1016" rtlCol="0" anchor="t"/>
+          <a:lstStyle/>
+          <a:p>
+            <a:pPr indent="0" marL="0">
+              <a:buNone/>
+            </a:pPr>
+            <a:r>
+              <a:rPr lang="en-US" sz="1600" b="1" dirty="0">
                 <a:solidFill>
                   <a:schemeClr val="accent2"/>
                 </a:solidFill>
               </a:rPr>
-              <a:t>STEP 5　理想の未来から</a:t>
-            </a:r>
-            <a:endParaRPr lang="en-US" sz="1300" dirty="0"/>
-          </a:p>
-        </p:txBody>
-      </p:sp>
-      <p:sp>
-        <p:nvSpPr>
-          <p:cNvPr id="4" name="Text 0"/>
-          <p:cNvSpPr/>
-          <p:nvPr>
-            <p:ph idx="100" type="title" hasCustomPrompt="1"/>
-          </p:nvPr>
-        </p:nvSpPr>
-        <p:spPr>
-          <a:xfrm>
-            <a:off x="914400" y="1554480"/>
-            <a:ext cx="7315200" cy="1554480"/>
+              <a:t>今までの考え</a:t>
+            </a:r>
+            <a:endParaRPr lang="en-US" sz="1600" dirty="0"/>
+          </a:p>
+        </p:txBody>
+      </p:sp>
+      <p:sp>
+        <p:nvSpPr>
+          <p:cNvPr id="5" name="old_body"/>
+          <p:cNvSpPr txBox="1"/>
+          <p:nvPr/>
+        </p:nvSpPr>
+        <p:spPr>
+          <a:xfrm>
+            <a:off x="640080" y="1874520"/>
+            <a:ext cx="3657600" cy="1737360"/>
           </a:xfrm>
           <a:prstGeom prst="rect">
             <a:avLst/>
@@ -16418,58 +15550,144 @@
           <a:ln/>
         </p:spPr>
         <p:txBody>
-          <a:bodyPr wrap="square" rtlCol="0" anchor="ctr"/>
-          <a:lstStyle/>
-          <a:p>
-            <a:pPr algn="ctr" indent="0" marL="0">
-              <a:buNone/>
-            </a:pPr>
-            <a:r>
-              <a:rPr lang="en-US" sz="3200" b="1" dirty="0">
-                <a:solidFill>
-                  <a:schemeClr val="tx2"/>
-                </a:solidFill>
-                <a:latin typeface="Yu Mincho" pitchFamily="34" charset="0"/>
-                <a:ea typeface="Yu Mincho" pitchFamily="34" charset="-122"/>
-                <a:cs typeface="Yu Mincho" pitchFamily="34" charset="-120"/>
-              </a:rPr>
-              <a:t>大成功しているあなたは、</a:t>
-            </a:r>
-            <a:endParaRPr lang="en-US" sz="3200" dirty="0"/>
-          </a:p>
-          <a:p>
-            <a:pPr algn="ctr" indent="0" marL="0">
-              <a:buNone/>
-            </a:pPr>
-            <a:r>
-              <a:rPr lang="en-US" sz="3200" b="1" dirty="0">
-                <a:solidFill>
-                  <a:schemeClr val="tx2"/>
-                </a:solidFill>
-                <a:latin typeface="Yu Mincho" pitchFamily="34" charset="0"/>
-                <a:ea typeface="Yu Mincho" pitchFamily="34" charset="-122"/>
-                <a:cs typeface="Yu Mincho" pitchFamily="34" charset="-120"/>
-              </a:rPr>
-              <a:t>何が見えて、何が聞こえて、</a:t>
-            </a:r>
-            <a:endParaRPr lang="en-US" sz="3200" dirty="0"/>
-          </a:p>
-          <a:p>
-            <a:pPr algn="ctr" indent="0" marL="0">
-              <a:buNone/>
-            </a:pPr>
-            <a:r>
-              <a:rPr lang="en-US" sz="3200" b="1" dirty="0">
-                <a:solidFill>
-                  <a:schemeClr val="tx2"/>
-                </a:solidFill>
-                <a:latin typeface="Yu Mincho" pitchFamily="34" charset="0"/>
-                <a:ea typeface="Yu Mincho" pitchFamily="34" charset="-122"/>
-                <a:cs typeface="Yu Mincho" pitchFamily="34" charset="-120"/>
-              </a:rPr>
-              <a:t>どんな感じがしますか？</a:t>
-            </a:r>
-            <a:endParaRPr lang="en-US" sz="3200" dirty="0"/>
+          <a:bodyPr wrap="square" lIns="1016" tIns="1016" rIns="1016" bIns="1016" rtlCol="0" anchor="t"/>
+          <a:lstStyle/>
+          <a:p>
+            <a:pPr indent="0" marL="0">
+              <a:buNone/>
+            </a:pPr>
+            <a:endParaRPr lang="en-US" sz="1800" dirty="0"/>
+          </a:p>
+        </p:txBody>
+      </p:sp>
+      <p:sp>
+        <p:nvSpPr>
+          <p:cNvPr id="6" name="new_card"/>
+          <p:cNvSpPr/>
+          <p:nvPr/>
+        </p:nvSpPr>
+        <p:spPr>
+          <a:xfrm>
+            <a:off x="4709160" y="1280160"/>
+            <a:ext cx="3977640" cy="2468880"/>
+          </a:xfrm>
+          <a:prstGeom prst="roundRect">
+            <a:avLst>
+              <a:gd name="adj" fmla="val 4444"/>
+            </a:avLst>
+          </a:prstGeom>
+          <a:solidFill>
+            <a:srgbClr val="F8EBEE"/>
+          </a:solidFill>
+          <a:ln w="9525">
+            <a:solidFill>
+              <a:srgbClr val="E9D9B6"/>
+            </a:solidFill>
+            <a:prstDash val="solid"/>
+          </a:ln>
+        </p:spPr>
+        <p:txBody>
+          <a:bodyPr/>
+          <a:p/>
+        </p:txBody>
+      </p:sp>
+      <p:sp>
+        <p:nvSpPr>
+          <p:cNvPr id="7" name="new_head"/>
+          <p:cNvSpPr txBox="1"/>
+          <p:nvPr/>
+        </p:nvSpPr>
+        <p:spPr>
+          <a:xfrm>
+            <a:off x="4892040" y="1417320"/>
+            <a:ext cx="3657600" cy="365760"/>
+          </a:xfrm>
+          <a:prstGeom prst="rect">
+            <a:avLst/>
+          </a:prstGeom>
+          <a:noFill/>
+          <a:ln/>
+        </p:spPr>
+        <p:txBody>
+          <a:bodyPr wrap="square" lIns="1016" tIns="1016" rIns="1016" bIns="1016" rtlCol="0" anchor="t"/>
+          <a:lstStyle/>
+          <a:p>
+            <a:pPr indent="0" marL="0">
+              <a:buNone/>
+            </a:pPr>
+            <a:r>
+              <a:rPr lang="en-US" sz="1600" b="1" dirty="0">
+                <a:solidFill>
+                  <a:schemeClr val="accent2"/>
+                </a:solidFill>
+              </a:rPr>
+              <a:t>これから選びたい考え</a:t>
+            </a:r>
+            <a:endParaRPr lang="en-US" sz="1600" dirty="0"/>
+          </a:p>
+        </p:txBody>
+      </p:sp>
+      <p:sp>
+        <p:nvSpPr>
+          <p:cNvPr id="8" name="new_body"/>
+          <p:cNvSpPr txBox="1"/>
+          <p:nvPr/>
+        </p:nvSpPr>
+        <p:spPr>
+          <a:xfrm>
+            <a:off x="4892040" y="1874520"/>
+            <a:ext cx="3657600" cy="1737360"/>
+          </a:xfrm>
+          <a:prstGeom prst="rect">
+            <a:avLst/>
+          </a:prstGeom>
+          <a:noFill/>
+          <a:ln/>
+        </p:spPr>
+        <p:txBody>
+          <a:bodyPr wrap="square" lIns="1016" tIns="1016" rIns="1016" bIns="1016" rtlCol="0" anchor="t"/>
+          <a:lstStyle/>
+          <a:p>
+            <a:pPr indent="0" marL="0">
+              <a:buNone/>
+            </a:pPr>
+            <a:endParaRPr lang="en-US" sz="1800" dirty="0"/>
+          </a:p>
+        </p:txBody>
+      </p:sp>
+      <p:sp>
+        <p:nvSpPr>
+          <p:cNvPr id="9" name="new_note"/>
+          <p:cNvSpPr txBox="1"/>
+          <p:nvPr/>
+        </p:nvSpPr>
+        <p:spPr>
+          <a:xfrm>
+            <a:off x="457200" y="3931920"/>
+            <a:ext cx="8229600" cy="411480"/>
+          </a:xfrm>
+          <a:prstGeom prst="rect">
+            <a:avLst/>
+          </a:prstGeom>
+          <a:noFill/>
+          <a:ln/>
+        </p:spPr>
+        <p:txBody>
+          <a:bodyPr wrap="square" lIns="1016" tIns="1016" rIns="1016" bIns="1016" rtlCol="0" anchor="t"/>
+          <a:lstStyle/>
+          <a:p>
+            <a:pPr indent="0" marL="0">
+              <a:buNone/>
+            </a:pPr>
+            <a:r>
+              <a:rPr lang="en-US" sz="1400" dirty="0">
+                <a:solidFill>
+                  <a:schemeClr val="tx1"/>
+                </a:solidFill>
+              </a:rPr>
+              <a:t>無理にポジティブな言葉にせず、自分が納得できる言葉で</a:t>
+            </a:r>
+            <a:endParaRPr lang="en-US" sz="1400" dirty="0"/>
           </a:p>
         </p:txBody>
       </p:sp>
@@ -16564,6 +15782,10 @@
             <a:prstDash val="solid"/>
           </a:ln>
         </p:spPr>
+        <p:txBody>
+          <a:bodyPr/>
+          <a:p/>
+        </p:txBody>
       </p:sp>
       <p:sp>
         <p:nvSpPr>
@@ -16858,6 +16080,20 @@
                 </a:solidFill>
               </a:rPr>
               <a:t>残っているものを、やさしく手放していきます（75〜85分）</a:t>
+            </a:r>
+            <a:endParaRPr lang="en-US" sz="1600" dirty="0"/>
+          </a:p>
+          <a:p>
+            <a:pPr algn="ctr" indent="0" marL="0">
+              <a:buNone/>
+            </a:pPr>
+            <a:r>
+              <a:rPr lang="en-US" sz="1600" dirty="0">
+                <a:solidFill>
+                  <a:schemeClr val="tx1"/>
+                </a:solidFill>
+              </a:rPr>
+              <a:t>はじめる前に、今の気持ちと体の感じを確かめます。終わったら、感じたことを言葉にしてみましょう</a:t>
             </a:r>
             <a:endParaRPr lang="en-US" sz="1600" dirty="0"/>
           </a:p>
@@ -17767,6 +17003,10 @@
             <a:prstDash val="solid"/>
           </a:ln>
         </p:spPr>
+        <p:txBody>
+          <a:bodyPr/>
+          <a:p/>
+        </p:txBody>
       </p:sp>
       <p:sp>
         <p:nvSpPr>
@@ -17935,6 +17175,251 @@
 <file path=ppt/slides/slide43.xml><?xml version="1.0" encoding="utf-8"?>
 <p:sld xmlns:a="http://schemas.openxmlformats.org/drawingml/2006/main" xmlns:r="http://schemas.openxmlformats.org/officeDocument/2006/relationships" xmlns:p="http://schemas.openxmlformats.org/presentationml/2006/main">
   <p:cSld name="Slide 43">
+    <p:spTree>
+      <p:nvGrpSpPr>
+        <p:cNvPr id="1" name=""/>
+        <p:cNvGrpSpPr/>
+        <p:nvPr/>
+      </p:nvGrpSpPr>
+      <p:grpSpPr>
+        <a:xfrm>
+          <a:off x="0" y="0"/>
+          <a:ext cx="0" cy="0"/>
+          <a:chOff x="0" y="0"/>
+          <a:chExt cx="0" cy="0"/>
+        </a:xfrm>
+      </p:grpSpPr>
+      <p:sp>
+        <p:nvSpPr>
+          <p:cNvPr id="2" name="frame"/>
+          <p:cNvSpPr/>
+          <p:nvPr/>
+        </p:nvSpPr>
+        <p:spPr>
+          <a:xfrm>
+            <a:off x="228600" y="137160"/>
+            <a:ext cx="8686800" cy="4526280"/>
+          </a:xfrm>
+          <a:prstGeom prst="rect">
+            <a:avLst/>
+          </a:prstGeom>
+          <a:ln w="12700">
+            <a:solidFill>
+              <a:srgbClr val="B08A4E"/>
+            </a:solidFill>
+            <a:prstDash val="solid"/>
+          </a:ln>
+        </p:spPr>
+        <p:txBody>
+          <a:bodyPr/>
+          <a:p/>
+        </p:txBody>
+      </p:sp>
+      <p:sp>
+        <p:nvSpPr>
+          <p:cNvPr id="3" name="qlabel"/>
+          <p:cNvSpPr txBox="1"/>
+          <p:nvPr/>
+        </p:nvSpPr>
+        <p:spPr>
+          <a:xfrm>
+            <a:off x="457200" y="320040"/>
+            <a:ext cx="8229600" cy="365760"/>
+          </a:xfrm>
+          <a:prstGeom prst="rect">
+            <a:avLst/>
+          </a:prstGeom>
+          <a:noFill/>
+          <a:ln/>
+        </p:spPr>
+        <p:txBody>
+          <a:bodyPr wrap="square" lIns="0" tIns="0" rIns="0" bIns="0" rtlCol="0" anchor="t"/>
+          <a:lstStyle/>
+          <a:p>
+            <a:pPr algn="ctr" indent="0" marL="0">
+              <a:buNone/>
+            </a:pPr>
+            <a:r>
+              <a:rPr lang="en-US" sz="1300" b="1" dirty="0">
+                <a:solidFill>
+                  <a:schemeClr val="accent2"/>
+                </a:solidFill>
+              </a:rPr>
+              <a:t>これから</a:t>
+            </a:r>
+            <a:endParaRPr lang="en-US" sz="1300" dirty="0"/>
+          </a:p>
+        </p:txBody>
+      </p:sp>
+      <p:sp>
+        <p:nvSpPr>
+          <p:cNvPr id="4" name="Text 0"/>
+          <p:cNvSpPr/>
+          <p:nvPr>
+            <p:ph idx="100" type="title" hasCustomPrompt="1"/>
+          </p:nvPr>
+        </p:nvSpPr>
+        <p:spPr>
+          <a:xfrm>
+            <a:off x="914400" y="1554480"/>
+            <a:ext cx="7315200" cy="1554480"/>
+          </a:xfrm>
+          <a:prstGeom prst="rect">
+            <a:avLst/>
+          </a:prstGeom>
+          <a:noFill/>
+          <a:ln/>
+        </p:spPr>
+        <p:txBody>
+          <a:bodyPr wrap="square" rtlCol="0" anchor="ctr"/>
+          <a:lstStyle/>
+          <a:p>
+            <a:pPr algn="ctr" indent="0" marL="0">
+              <a:buNone/>
+            </a:pPr>
+            <a:r>
+              <a:rPr lang="en-US" sz="3200" b="1" dirty="0">
+                <a:solidFill>
+                  <a:schemeClr val="tx2"/>
+                </a:solidFill>
+                <a:latin typeface="Yu Mincho" pitchFamily="34" charset="0"/>
+                <a:ea typeface="Yu Mincho" pitchFamily="34" charset="-122"/>
+                <a:cs typeface="Yu Mincho" pitchFamily="34" charset="-120"/>
+              </a:rPr>
+              <a:t>次に同じ感情が出てきたら、</a:t>
+            </a:r>
+            <a:endParaRPr lang="en-US" sz="3200" dirty="0"/>
+          </a:p>
+          <a:p>
+            <a:pPr algn="ctr" indent="0" marL="0">
+              <a:buNone/>
+            </a:pPr>
+            <a:r>
+              <a:rPr lang="en-US" sz="3200" b="1" dirty="0">
+                <a:solidFill>
+                  <a:schemeClr val="tx2"/>
+                </a:solidFill>
+                <a:latin typeface="Yu Mincho" pitchFamily="34" charset="0"/>
+                <a:ea typeface="Yu Mincho" pitchFamily="34" charset="-122"/>
+                <a:cs typeface="Yu Mincho" pitchFamily="34" charset="-120"/>
+              </a:rPr>
+              <a:t>自分にどんな言葉を</a:t>
+            </a:r>
+            <a:endParaRPr lang="en-US" sz="3200" dirty="0"/>
+          </a:p>
+          <a:p>
+            <a:pPr algn="ctr" indent="0" marL="0">
+              <a:buNone/>
+            </a:pPr>
+            <a:r>
+              <a:rPr lang="en-US" sz="3200" b="1" dirty="0">
+                <a:solidFill>
+                  <a:schemeClr val="tx2"/>
+                </a:solidFill>
+                <a:latin typeface="Yu Mincho" pitchFamily="34" charset="0"/>
+                <a:ea typeface="Yu Mincho" pitchFamily="34" charset="-122"/>
+                <a:cs typeface="Yu Mincho" pitchFamily="34" charset="-120"/>
+              </a:rPr>
+              <a:t>かけてあげたいですか？</a:t>
+            </a:r>
+            <a:endParaRPr lang="en-US" sz="3200" dirty="0"/>
+          </a:p>
+        </p:txBody>
+      </p:sp>
+      <p:sp>
+        <p:nvSpPr>
+          <p:cNvPr id="5" name="Text 0"/>
+          <p:cNvSpPr/>
+          <p:nvPr>
+            <p:ph idx="101" type="body" hasCustomPrompt="1"/>
+          </p:nvPr>
+        </p:nvSpPr>
+        <p:spPr>
+          <a:xfrm>
+            <a:off x="914400" y="3200400"/>
+            <a:ext cx="7315200" cy="731520"/>
+          </a:xfrm>
+          <a:prstGeom prst="rect">
+            <a:avLst/>
+          </a:prstGeom>
+          <a:noFill/>
+          <a:ln/>
+        </p:spPr>
+        <p:txBody>
+          <a:bodyPr wrap="square" rtlCol="0" anchor="t"/>
+          <a:lstStyle/>
+          <a:p>
+            <a:pPr algn="ctr" indent="0" marL="0">
+              <a:buNone/>
+            </a:pPr>
+            <a:r>
+              <a:rPr lang="en-US" sz="1500" dirty="0">
+                <a:solidFill>
+                  <a:schemeClr val="accent2"/>
+                </a:solidFill>
+              </a:rPr>
+              <a:t>気づいたら、責めずに見つめる。そして、今の自分で選び直す</a:t>
+            </a:r>
+            <a:endParaRPr lang="en-US" sz="1500" dirty="0"/>
+          </a:p>
+        </p:txBody>
+      </p:sp>
+      <p:sp>
+        <p:nvSpPr>
+          <p:cNvPr id="25" name="Slide Number Placeholder 0"/>
+          <p:cNvSpPr>
+            <a:spLocks noGrp="1"/>
+          </p:cNvSpPr>
+          <p:nvPr>
+            <p:ph type="sldNum" sz="quarter" idx="4294967295"/>
+          </p:nvPr>
+        </p:nvSpPr>
+        <p:spPr>
+          <a:xfrm>
+            <a:off x="8229600" y="4754880"/>
+            <a:ext cx="457200" cy="274320"/>
+          </a:xfrm>
+          <a:prstGeom prst="rect">
+            <a:avLst/>
+          </a:prstGeom>
+          <a:extLst>
+            <a:ext uri="{C572A759-6A51-4108-AA02-DFA0A04FC94B}">
+              <ma14:wrappingTextBoxFlag xmlns:ma14="http://schemas.microsoft.com/office/mac/drawingml/2011/main" val="0"/>
+            </a:ext>
+          </a:extLst>
+        </p:spPr>
+        <p:txBody>
+          <a:bodyPr/>
+          <a:lstStyle>
+            <a:lvl1pPr>
+              <a:defRPr sz="900">
+                <a:solidFill>
+                  <a:srgbClr val="B08A4E"/>
+                </a:solidFill>
+              </a:defRPr>
+            </a:lvl1pPr>
+          </a:lstStyle>
+          <a:p>
+            <a:pPr algn="r"/>
+            <a:fld id="{F7021451-1387-4CA6-816F-3879F97B5CBC}" type="slidenum">
+              <a:rPr b="0" lang="en-US"/>
+              <a:t>43</a:t>
+            </a:fld>
+            <a:endParaRPr lang="en-US"/>
+          </a:p>
+        </p:txBody>
+      </p:sp>
+    </p:spTree>
+  </p:cSld>
+  <p:clrMapOvr>
+    <a:masterClrMapping/>
+  </p:clrMapOvr>
+</p:sld>
+</file>
+
+<file path=ppt/slides/slide44.xml><?xml version="1.0" encoding="utf-8"?>
+<p:sld xmlns:a="http://schemas.openxmlformats.org/drawingml/2006/main" xmlns:r="http://schemas.openxmlformats.org/officeDocument/2006/relationships" xmlns:p="http://schemas.openxmlformats.org/presentationml/2006/main">
+  <p:cSld name="Slide 44">
     <p:spTree>
       <p:nvGrpSpPr>
         <p:cNvPr id="1" name=""/>
@@ -17981,9 +17466,9 @@
 </p:sld>
 </file>
 
-<file path=ppt/slides/slide44.xml><?xml version="1.0" encoding="utf-8"?>
+<file path=ppt/slides/slide45.xml><?xml version="1.0" encoding="utf-8"?>
 <p:sld xmlns:a="http://schemas.openxmlformats.org/drawingml/2006/main" xmlns:r="http://schemas.openxmlformats.org/officeDocument/2006/relationships" xmlns:p="http://schemas.openxmlformats.org/presentationml/2006/main">
-  <p:cSld name="Slide 44">
+  <p:cSld name="Slide 45">
     <p:spTree>
       <p:nvGrpSpPr>
         <p:cNvPr id="1" name=""/>
@@ -18095,6 +17580,20 @@
                   <a:schemeClr val="tx2"/>
                 </a:solidFill>
               </a:rPr>
+              <a:t>1週間後に、LINEでその後のご様子をお伺いします</a:t>
+            </a:r>
+            <a:endParaRPr lang="en-US" sz="1600" dirty="0"/>
+          </a:p>
+          <a:p>
+            <a:pPr algn="ctr" indent="0" marL="0">
+              <a:buNone/>
+            </a:pPr>
+            <a:r>
+              <a:rPr lang="en-US" sz="1600" b="1" dirty="0">
+                <a:solidFill>
+                  <a:schemeClr val="tx2"/>
+                </a:solidFill>
+              </a:rPr>
               <a:t>海音（かのん）〜心体の調律〜　髙橋 由香</a:t>
             </a:r>
             <a:endParaRPr lang="en-US" sz="1600" dirty="0"/>
@@ -18156,7 +17655,7 @@
                   <a:schemeClr val="accent1"/>
                 </a:solidFill>
               </a:rPr>
-              <a:t>第1部　頭の構造を知る ｜ 1 / 8</a:t>
+              <a:t>第1部　頭の構造を知る ｜ 1 / 7</a:t>
             </a:r>
             <a:endParaRPr lang="en-US" sz="1100" dirty="0"/>
           </a:p>
@@ -18253,6 +17752,10 @@
             <a:prstDash val="solid"/>
           </a:ln>
         </p:spPr>
+        <p:txBody>
+          <a:bodyPr/>
+          <a:p/>
+        </p:txBody>
       </p:sp>
       <p:sp>
         <p:nvSpPr>
@@ -18437,6 +17940,10 @@
             <a:prstDash val="solid"/>
           </a:ln>
         </p:spPr>
+        <p:txBody>
+          <a:bodyPr/>
+          <a:p/>
+        </p:txBody>
       </p:sp>
       <p:sp>
         <p:nvSpPr>
@@ -18579,7 +18086,7 @@
                   <a:schemeClr val="accent1"/>
                 </a:solidFill>
               </a:rPr>
-              <a:t>第1部　頭の構造を知る ｜ 2 / 8</a:t>
+              <a:t>第1部　頭の構造を知る ｜ 2 / 7</a:t>
             </a:r>
             <a:endParaRPr lang="en-US" sz="1100" dirty="0"/>
           </a:p>
@@ -18676,6 +18183,10 @@
             <a:prstDash val="solid"/>
           </a:ln>
         </p:spPr>
+        <p:txBody>
+          <a:bodyPr/>
+          <a:p/>
+        </p:txBody>
       </p:sp>
       <p:sp>
         <p:nvSpPr>
@@ -18852,7 +18363,7 @@
                   <a:schemeClr val="accent1"/>
                 </a:solidFill>
               </a:rPr>
-              <a:t>第1部　頭の構造を知る ｜ 3 / 8</a:t>
+              <a:t>第1部　頭の構造を知る ｜ 3 / 7</a:t>
             </a:r>
             <a:endParaRPr lang="en-US" sz="1100" dirty="0"/>
           </a:p>
@@ -18893,7 +18404,7 @@
                 <a:ea typeface="Yu Mincho" pitchFamily="34" charset="-122"/>
                 <a:cs typeface="Yu Mincho" pitchFamily="34" charset="-120"/>
               </a:rPr>
-              <a:t>脳のクセ②　放っておくと、昨日と同じことを考える</a:t>
+              <a:t>脳のクセ②　過去の「強い思い」に引っ張られる</a:t>
             </a:r>
             <a:endParaRPr lang="en-US" sz="2400" dirty="0"/>
           </a:p>
@@ -18949,6 +18460,10 @@
             <a:prstDash val="solid"/>
           </a:ln>
         </p:spPr>
+        <p:txBody>
+          <a:bodyPr/>
+          <a:p/>
+        </p:txBody>
       </p:sp>
       <p:sp>
         <p:nvSpPr>
@@ -19019,7 +18534,7 @@
                   <a:schemeClr val="tx1"/>
                 </a:solidFill>
               </a:rPr>
-              <a:t>何もしなければ、お金への考え方も、昨日と同じものが毎日くり返されます。</a:t>
+              <a:t>子どもの頃の強い体験は「二度と触れるな」と保存されて、今のお金の判断にブレーキをかけます。</a:t>
             </a:r>
             <a:endParaRPr lang="en-US" sz="1400" dirty="0"/>
           </a:p>
@@ -19125,7 +18640,7 @@
                   <a:schemeClr val="accent1"/>
                 </a:solidFill>
               </a:rPr>
-              <a:t>第1部　頭の構造を知る ｜ 4 / 8</a:t>
+              <a:t>第1部　頭の構造を知る ｜ 4 / 7</a:t>
             </a:r>
             <a:endParaRPr lang="en-US" sz="1100" dirty="0"/>
           </a:p>
@@ -19166,50 +18681,352 @@
                 <a:ea typeface="Yu Mincho" pitchFamily="34" charset="-122"/>
                 <a:cs typeface="Yu Mincho" pitchFamily="34" charset="-120"/>
               </a:rPr>
-              <a:t>脳のクセ③　過去の「強い思い」に引っ張られる</a:t>
+              <a:t>その「強い思い」が刻まれるのが、ゴールデンエイジ</a:t>
             </a:r>
             <a:endParaRPr lang="en-US" sz="2400" dirty="0"/>
           </a:p>
         </p:txBody>
       </p:sp>
-      <p:pic>
-        <p:nvPicPr>
-          <p:cNvPr id="4" name="Image 0" descr="講座スライド">    </p:cNvPr>
-          <p:cNvPicPr>
-            <a:picLocks noChangeAspect="1"/>
-          </p:cNvPicPr>
-          <p:nvPr/>
-        </p:nvPicPr>
-        <p:blipFill>
-          <a:blip r:embed="rId1"/>
-          <a:stretch>
-            <a:fillRect/>
-          </a:stretch>
-        </p:blipFill>
-        <p:spPr>
-          <a:xfrm>
-            <a:off x="457200" y="1234440"/>
-            <a:ext cx="5120640" cy="2880360"/>
-          </a:xfrm>
-          <a:prstGeom prst="rect">
-            <a:avLst/>
-          </a:prstGeom>
-        </p:spPr>
-      </p:pic>
-      <p:sp>
-        <p:nvSpPr>
-          <p:cNvPr id="5" name="money_card"/>
+      <p:sp>
+        <p:nvSpPr>
+          <p:cNvPr id="4" name="ga_card0"/>
           <p:cNvSpPr/>
           <p:nvPr/>
         </p:nvSpPr>
         <p:spPr>
           <a:xfrm>
-            <a:off x="5806440" y="1234440"/>
-            <a:ext cx="2880360" cy="2880360"/>
+            <a:off x="457200" y="1234440"/>
+            <a:ext cx="5120640" cy="822960"/>
           </a:xfrm>
           <a:prstGeom prst="roundRect">
             <a:avLst>
-              <a:gd name="adj" fmla="val 3810"/>
+              <a:gd name="adj" fmla="val 13333"/>
+            </a:avLst>
+          </a:prstGeom>
+          <a:solidFill>
+            <a:srgbClr val="FDFAF4"/>
+          </a:solidFill>
+          <a:ln w="9525">
+            <a:solidFill>
+              <a:srgbClr val="E9D9B6"/>
+            </a:solidFill>
+            <a:prstDash val="solid"/>
+          </a:ln>
+        </p:spPr>
+        <p:txBody>
+          <a:bodyPr/>
+          <a:p/>
+        </p:txBody>
+      </p:sp>
+      <p:sp>
+        <p:nvSpPr>
+          <p:cNvPr id="5" name="ga0_c"/>
+          <p:cNvSpPr/>
+          <p:nvPr/>
+        </p:nvSpPr>
+        <p:spPr>
+          <a:xfrm>
+            <a:off x="621792" y="1453896"/>
+            <a:ext cx="384048" cy="384048"/>
+          </a:xfrm>
+          <a:prstGeom prst="ellipse">
+            <a:avLst/>
+          </a:prstGeom>
+          <a:solidFill>
+            <a:srgbClr val="B08A4E"/>
+          </a:solidFill>
+          <a:ln/>
+        </p:spPr>
+        <p:txBody>
+          <a:bodyPr/>
+          <a:p/>
+        </p:txBody>
+      </p:sp>
+      <p:sp>
+        <p:nvSpPr>
+          <p:cNvPr id="6" name="ga0_n"/>
+          <p:cNvSpPr txBox="1"/>
+          <p:nvPr/>
+        </p:nvSpPr>
+        <p:spPr>
+          <a:xfrm>
+            <a:off x="621792" y="1453896"/>
+            <a:ext cx="384048" cy="384048"/>
+          </a:xfrm>
+          <a:prstGeom prst="rect">
+            <a:avLst/>
+          </a:prstGeom>
+          <a:noFill/>
+          <a:ln/>
+        </p:spPr>
+        <p:txBody>
+          <a:bodyPr wrap="square" lIns="0" tIns="0" rIns="0" bIns="0" rtlCol="0" anchor="ctr"/>
+          <a:lstStyle/>
+          <a:p>
+            <a:pPr algn="ctr" indent="0" marL="0">
+              <a:buNone/>
+            </a:pPr>
+            <a:r>
+              <a:rPr lang="en-US" sz="1500" b="1" dirty="0">
+                <a:solidFill>
+                  <a:schemeClr val="bg1"/>
+                </a:solidFill>
+              </a:rPr>
+              <a:t>1</a:t>
+            </a:r>
+            <a:endParaRPr lang="en-US" sz="1500" dirty="0"/>
+          </a:p>
+        </p:txBody>
+      </p:sp>
+      <p:sp>
+        <p:nvSpPr>
+          <p:cNvPr id="7" name="ga_head0"/>
+          <p:cNvSpPr txBox="1"/>
+          <p:nvPr/>
+        </p:nvSpPr>
+        <p:spPr>
+          <a:xfrm>
+            <a:off x="1143000" y="1298448"/>
+            <a:ext cx="4297680" cy="347472"/>
+          </a:xfrm>
+          <a:prstGeom prst="rect">
+            <a:avLst/>
+          </a:prstGeom>
+          <a:noFill/>
+          <a:ln/>
+        </p:spPr>
+        <p:txBody>
+          <a:bodyPr wrap="square" lIns="1016" tIns="1016" rIns="1016" bIns="1016" rtlCol="0" anchor="t"/>
+          <a:lstStyle/>
+          <a:p>
+            <a:pPr indent="0" marL="0">
+              <a:buNone/>
+            </a:pPr>
+            <a:r>
+              <a:rPr lang="en-US" sz="1600" b="1" dirty="0">
+                <a:solidFill>
+                  <a:schemeClr val="tx2"/>
+                </a:solidFill>
+              </a:rPr>
+              <a:t>子どもの頃</a:t>
+            </a:r>
+            <a:endParaRPr lang="en-US" sz="1600" dirty="0"/>
+          </a:p>
+        </p:txBody>
+      </p:sp>
+      <p:sp>
+        <p:nvSpPr>
+          <p:cNvPr id="8" name="ga_body0"/>
+          <p:cNvSpPr txBox="1"/>
+          <p:nvPr/>
+        </p:nvSpPr>
+        <p:spPr>
+          <a:xfrm>
+            <a:off x="1143000" y="1645920"/>
+            <a:ext cx="4297680" cy="365760"/>
+          </a:xfrm>
+          <a:prstGeom prst="rect">
+            <a:avLst/>
+          </a:prstGeom>
+          <a:noFill/>
+          <a:ln/>
+        </p:spPr>
+        <p:txBody>
+          <a:bodyPr wrap="square" lIns="1016" tIns="1016" rIns="1016" bIns="1016" rtlCol="0" anchor="t"/>
+          <a:lstStyle/>
+          <a:p>
+            <a:pPr indent="0" marL="0">
+              <a:buNone/>
+            </a:pPr>
+            <a:r>
+              <a:rPr lang="en-US" sz="1400" dirty="0">
+                <a:solidFill>
+                  <a:schemeClr val="tx1"/>
+                </a:solidFill>
+              </a:rPr>
+              <a:t>家の中で見たこと・聞いた言葉・言われ方</a:t>
+            </a:r>
+            <a:endParaRPr lang="en-US" sz="1400" dirty="0"/>
+          </a:p>
+        </p:txBody>
+      </p:sp>
+      <p:sp>
+        <p:nvSpPr>
+          <p:cNvPr id="9" name="ga_card1"/>
+          <p:cNvSpPr/>
+          <p:nvPr/>
+        </p:nvSpPr>
+        <p:spPr>
+          <a:xfrm>
+            <a:off x="457200" y="2221992"/>
+            <a:ext cx="5120640" cy="822960"/>
+          </a:xfrm>
+          <a:prstGeom prst="roundRect">
+            <a:avLst>
+              <a:gd name="adj" fmla="val 13333"/>
+            </a:avLst>
+          </a:prstGeom>
+          <a:solidFill>
+            <a:srgbClr val="FDFAF4"/>
+          </a:solidFill>
+          <a:ln w="9525">
+            <a:solidFill>
+              <a:srgbClr val="E9D9B6"/>
+            </a:solidFill>
+            <a:prstDash val="solid"/>
+          </a:ln>
+        </p:spPr>
+        <p:txBody>
+          <a:bodyPr/>
+          <a:p/>
+        </p:txBody>
+      </p:sp>
+      <p:sp>
+        <p:nvSpPr>
+          <p:cNvPr id="10" name="ga1_c"/>
+          <p:cNvSpPr/>
+          <p:nvPr/>
+        </p:nvSpPr>
+        <p:spPr>
+          <a:xfrm>
+            <a:off x="621792" y="2441448"/>
+            <a:ext cx="384048" cy="384048"/>
+          </a:xfrm>
+          <a:prstGeom prst="ellipse">
+            <a:avLst/>
+          </a:prstGeom>
+          <a:solidFill>
+            <a:srgbClr val="B08A4E"/>
+          </a:solidFill>
+          <a:ln/>
+        </p:spPr>
+        <p:txBody>
+          <a:bodyPr/>
+          <a:p/>
+        </p:txBody>
+      </p:sp>
+      <p:sp>
+        <p:nvSpPr>
+          <p:cNvPr id="11" name="ga1_n"/>
+          <p:cNvSpPr txBox="1"/>
+          <p:nvPr/>
+        </p:nvSpPr>
+        <p:spPr>
+          <a:xfrm>
+            <a:off x="621792" y="2441448"/>
+            <a:ext cx="384048" cy="384048"/>
+          </a:xfrm>
+          <a:prstGeom prst="rect">
+            <a:avLst/>
+          </a:prstGeom>
+          <a:noFill/>
+          <a:ln/>
+        </p:spPr>
+        <p:txBody>
+          <a:bodyPr wrap="square" lIns="0" tIns="0" rIns="0" bIns="0" rtlCol="0" anchor="ctr"/>
+          <a:lstStyle/>
+          <a:p>
+            <a:pPr algn="ctr" indent="0" marL="0">
+              <a:buNone/>
+            </a:pPr>
+            <a:r>
+              <a:rPr lang="en-US" sz="1500" b="1" dirty="0">
+                <a:solidFill>
+                  <a:schemeClr val="bg1"/>
+                </a:solidFill>
+              </a:rPr>
+              <a:t>2</a:t>
+            </a:r>
+            <a:endParaRPr lang="en-US" sz="1500" dirty="0"/>
+          </a:p>
+        </p:txBody>
+      </p:sp>
+      <p:sp>
+        <p:nvSpPr>
+          <p:cNvPr id="12" name="ga_head1"/>
+          <p:cNvSpPr txBox="1"/>
+          <p:nvPr/>
+        </p:nvSpPr>
+        <p:spPr>
+          <a:xfrm>
+            <a:off x="1143000" y="2286000"/>
+            <a:ext cx="4297680" cy="347472"/>
+          </a:xfrm>
+          <a:prstGeom prst="rect">
+            <a:avLst/>
+          </a:prstGeom>
+          <a:noFill/>
+          <a:ln/>
+        </p:spPr>
+        <p:txBody>
+          <a:bodyPr wrap="square" lIns="1016" tIns="1016" rIns="1016" bIns="1016" rtlCol="0" anchor="t"/>
+          <a:lstStyle/>
+          <a:p>
+            <a:pPr indent="0" marL="0">
+              <a:buNone/>
+            </a:pPr>
+            <a:r>
+              <a:rPr lang="en-US" sz="1600" b="1" dirty="0">
+                <a:solidFill>
+                  <a:schemeClr val="tx2"/>
+                </a:solidFill>
+              </a:rPr>
+              <a:t>脳が保存</a:t>
+            </a:r>
+            <a:endParaRPr lang="en-US" sz="1600" dirty="0"/>
+          </a:p>
+        </p:txBody>
+      </p:sp>
+      <p:sp>
+        <p:nvSpPr>
+          <p:cNvPr id="13" name="ga_body1"/>
+          <p:cNvSpPr txBox="1"/>
+          <p:nvPr/>
+        </p:nvSpPr>
+        <p:spPr>
+          <a:xfrm>
+            <a:off x="1143000" y="2633472"/>
+            <a:ext cx="4297680" cy="365760"/>
+          </a:xfrm>
+          <a:prstGeom prst="rect">
+            <a:avLst/>
+          </a:prstGeom>
+          <a:noFill/>
+          <a:ln/>
+        </p:spPr>
+        <p:txBody>
+          <a:bodyPr wrap="square" lIns="1016" tIns="1016" rIns="1016" bIns="1016" rtlCol="0" anchor="t"/>
+          <a:lstStyle/>
+          <a:p>
+            <a:pPr indent="0" marL="0">
+              <a:buNone/>
+            </a:pPr>
+            <a:r>
+              <a:rPr lang="en-US" sz="1400" dirty="0">
+                <a:solidFill>
+                  <a:schemeClr val="tx1"/>
+                </a:solidFill>
+              </a:rPr>
+              <a:t>「これが当たり前」として記憶する</a:t>
+            </a:r>
+            <a:endParaRPr lang="en-US" sz="1400" dirty="0"/>
+          </a:p>
+        </p:txBody>
+      </p:sp>
+      <p:sp>
+        <p:nvSpPr>
+          <p:cNvPr id="14" name="ga_card2"/>
+          <p:cNvSpPr/>
+          <p:nvPr/>
+        </p:nvSpPr>
+        <p:spPr>
+          <a:xfrm>
+            <a:off x="457200" y="3209544"/>
+            <a:ext cx="5120640" cy="822960"/>
+          </a:xfrm>
+          <a:prstGeom prst="roundRect">
+            <a:avLst>
+              <a:gd name="adj" fmla="val 13333"/>
             </a:avLst>
           </a:prstGeom>
           <a:solidFill>
@@ -19222,15 +19039,182 @@
             <a:prstDash val="solid"/>
           </a:ln>
         </p:spPr>
-      </p:sp>
-      <p:sp>
-        <p:nvSpPr>
-          <p:cNvPr id="6" name="money_head"/>
+        <p:txBody>
+          <a:bodyPr/>
+          <a:p/>
+        </p:txBody>
+      </p:sp>
+      <p:sp>
+        <p:nvSpPr>
+          <p:cNvPr id="15" name="ga2_c"/>
+          <p:cNvSpPr/>
+          <p:nvPr/>
+        </p:nvSpPr>
+        <p:spPr>
+          <a:xfrm>
+            <a:off x="621792" y="3429000"/>
+            <a:ext cx="384048" cy="384048"/>
+          </a:xfrm>
+          <a:prstGeom prst="ellipse">
+            <a:avLst/>
+          </a:prstGeom>
+          <a:solidFill>
+            <a:srgbClr val="B08A4E"/>
+          </a:solidFill>
+          <a:ln/>
+        </p:spPr>
+        <p:txBody>
+          <a:bodyPr/>
+          <a:p/>
+        </p:txBody>
+      </p:sp>
+      <p:sp>
+        <p:nvSpPr>
+          <p:cNvPr id="16" name="ga2_n"/>
           <p:cNvSpPr txBox="1"/>
           <p:nvPr/>
         </p:nvSpPr>
         <p:spPr>
           <a:xfrm>
+            <a:off x="621792" y="3429000"/>
+            <a:ext cx="384048" cy="384048"/>
+          </a:xfrm>
+          <a:prstGeom prst="rect">
+            <a:avLst/>
+          </a:prstGeom>
+          <a:noFill/>
+          <a:ln/>
+        </p:spPr>
+        <p:txBody>
+          <a:bodyPr wrap="square" lIns="0" tIns="0" rIns="0" bIns="0" rtlCol="0" anchor="ctr"/>
+          <a:lstStyle/>
+          <a:p>
+            <a:pPr algn="ctr" indent="0" marL="0">
+              <a:buNone/>
+            </a:pPr>
+            <a:r>
+              <a:rPr lang="en-US" sz="1500" b="1" dirty="0">
+                <a:solidFill>
+                  <a:schemeClr val="bg1"/>
+                </a:solidFill>
+              </a:rPr>
+              <a:t>3</a:t>
+            </a:r>
+            <a:endParaRPr lang="en-US" sz="1500" dirty="0"/>
+          </a:p>
+        </p:txBody>
+      </p:sp>
+      <p:sp>
+        <p:nvSpPr>
+          <p:cNvPr id="17" name="ga_head2"/>
+          <p:cNvSpPr txBox="1"/>
+          <p:nvPr/>
+        </p:nvSpPr>
+        <p:spPr>
+          <a:xfrm>
+            <a:off x="1143000" y="3273552"/>
+            <a:ext cx="4297680" cy="347472"/>
+          </a:xfrm>
+          <a:prstGeom prst="rect">
+            <a:avLst/>
+          </a:prstGeom>
+          <a:noFill/>
+          <a:ln/>
+        </p:spPr>
+        <p:txBody>
+          <a:bodyPr wrap="square" lIns="1016" tIns="1016" rIns="1016" bIns="1016" rtlCol="0" anchor="t"/>
+          <a:lstStyle/>
+          <a:p>
+            <a:pPr indent="0" marL="0">
+              <a:buNone/>
+            </a:pPr>
+            <a:r>
+              <a:rPr lang="en-US" sz="1600" b="1" dirty="0">
+                <a:solidFill>
+                  <a:schemeClr val="tx2"/>
+                </a:solidFill>
+              </a:rPr>
+              <a:t>大人になった今</a:t>
+            </a:r>
+            <a:endParaRPr lang="en-US" sz="1600" dirty="0"/>
+          </a:p>
+        </p:txBody>
+      </p:sp>
+      <p:sp>
+        <p:nvSpPr>
+          <p:cNvPr id="18" name="ga_body2"/>
+          <p:cNvSpPr txBox="1"/>
+          <p:nvPr/>
+        </p:nvSpPr>
+        <p:spPr>
+          <a:xfrm>
+            <a:off x="1143000" y="3621024"/>
+            <a:ext cx="4297680" cy="365760"/>
+          </a:xfrm>
+          <a:prstGeom prst="rect">
+            <a:avLst/>
+          </a:prstGeom>
+          <a:noFill/>
+          <a:ln/>
+        </p:spPr>
+        <p:txBody>
+          <a:bodyPr wrap="square" lIns="1016" tIns="1016" rIns="1016" bIns="1016" rtlCol="0" anchor="t"/>
+          <a:lstStyle/>
+          <a:p>
+            <a:pPr indent="0" marL="0">
+              <a:buNone/>
+            </a:pPr>
+            <a:r>
+              <a:rPr lang="en-US" sz="1400" dirty="0">
+                <a:solidFill>
+                  <a:schemeClr val="tx1"/>
+                </a:solidFill>
+              </a:rPr>
+              <a:t>その当たり前が、自分の基準として動き続ける</a:t>
+            </a:r>
+            <a:endParaRPr lang="en-US" sz="1400" dirty="0"/>
+          </a:p>
+        </p:txBody>
+      </p:sp>
+      <p:sp>
+        <p:nvSpPr>
+          <p:cNvPr id="19" name="money_card"/>
+          <p:cNvSpPr/>
+          <p:nvPr/>
+        </p:nvSpPr>
+        <p:spPr>
+          <a:xfrm>
+            <a:off x="5806440" y="1234440"/>
+            <a:ext cx="2880360" cy="2798064"/>
+          </a:xfrm>
+          <a:prstGeom prst="roundRect">
+            <a:avLst>
+              <a:gd name="adj" fmla="val 3922"/>
+            </a:avLst>
+          </a:prstGeom>
+          <a:solidFill>
+            <a:srgbClr val="F8EBEE"/>
+          </a:solidFill>
+          <a:ln w="9525">
+            <a:solidFill>
+              <a:srgbClr val="E9D9B6"/>
+            </a:solidFill>
+            <a:prstDash val="solid"/>
+          </a:ln>
+        </p:spPr>
+        <p:txBody>
+          <a:bodyPr/>
+          <a:p/>
+        </p:txBody>
+      </p:sp>
+      <p:sp>
+        <p:nvSpPr>
+          <p:cNvPr id="20" name="money_head"/>
+          <p:cNvSpPr txBox="1"/>
+          <p:nvPr/>
+        </p:nvSpPr>
+        <p:spPr>
+          <a:xfrm>
             <a:off x="5989320" y="1371600"/>
             <a:ext cx="2560320" cy="365760"/>
           </a:xfrm>
@@ -19261,14 +19245,14 @@
       </p:sp>
       <p:sp>
         <p:nvSpPr>
-          <p:cNvPr id="7" name="money_body"/>
+          <p:cNvPr id="21" name="money_body"/>
           <p:cNvSpPr txBox="1"/>
           <p:nvPr/>
         </p:nvSpPr>
         <p:spPr>
           <a:xfrm>
             <a:off x="5989320" y="1783080"/>
-            <a:ext cx="2560320" cy="2240280"/>
+            <a:ext cx="2560320" cy="2103120"/>
           </a:xfrm>
           <a:prstGeom prst="rect">
             <a:avLst/>
@@ -19281,9 +19265,6 @@
           <a:lstStyle/>
           <a:p>
             <a:pPr indent="0" marL="0">
-              <a:spcAft>
-                <a:spcPts val="600"/>
-              </a:spcAft>
               <a:buNone/>
             </a:pPr>
             <a:r>
@@ -19292,7 +19273,7 @@
                   <a:schemeClr val="tx1"/>
                 </a:solidFill>
               </a:rPr>
-              <a:t>子どもの頃の強い体験は「二度と触れるな」と保存されて、今のお金の判断にブレーキをかけます。</a:t>
+              <a:t>子どもの頃に、お金のまわりで見たこと・聞いたことが、今の「お金の当たり前」になっています。</a:t>
             </a:r>
             <a:endParaRPr lang="en-US" sz="1400" dirty="0"/>
           </a:p>

--- a/20_Projects/海音_心体の調律/単発/仁部あきえさん/20261028_仁部あきえさん_お金のブロック単発セッション.pptx
+++ b/20_Projects/海音_心体の調律/単発/仁部あきえさん/20261028_仁部あきえさん_お金のブロック単発セッション.pptx
@@ -52,9 +52,12 @@
     <p:sldId id="300" r:id="rId46"/>
     <p:sldId id="301" r:id="rId47"/>
     <p:sldId id="302" r:id="rId48"/>
+    <p:sldId id="303" r:id="rId49"/>
+    <p:sldId id="304" r:id="rId50"/>
+    <p:sldId id="305" r:id="rId51"/>
   </p:sldIdLst>
   <p:notesMasterIdLst>
-    <p:notesMasterId r:id="rId49"/>
+    <p:notesMasterId r:id="rId52"/>
   </p:notesMasterIdLst>
   <p:sldSz cx="9144000" cy="5143500"/>
   <p:notesSz cx="5143500" cy="9144000"/>
@@ -153,14 +156,14 @@
   <p:extLst>
     <p:ext uri="{521415D9-36F7-43E2-AB2F-B90AF26B5E84}">
       <p14:sectionLst xmlns:p14="http://schemas.microsoft.com/office/powerpoint/2010/main">
-        <p14:section name="はじめに" id="{9a079e63-c7b7-f6c4-d33b-35eaddd956c0}">
+        <p14:section name="はじめに" id="{d0cac06e-906d-6021-e1e4-4d7f773f100e}">
           <p14:sldIdLst>
             <p14:sldId id="256"/>
             <p14:sldId id="257"/>
             <p14:sldId id="258"/>
           </p14:sldIdLst>
         </p14:section>
-        <p14:section name="第1部 魂の傷を聴く" id="{9348fde1-77b6-1bba-82e4-77dd57a0e2a0}">
+        <p14:section name="第1部 魂の傷を聴く" id="{eddc714c-afaa-b959-45c3-2d96981615d7}">
           <p14:sldIdLst>
             <p14:sldId id="259"/>
             <p14:sldId id="260"/>
@@ -172,12 +175,12 @@
             <p14:sldId id="266"/>
             <p14:sldId id="267"/>
             <p14:sldId id="268"/>
+            <p14:sldId id="269"/>
+            <p14:sldId id="270"/>
           </p14:sldIdLst>
         </p14:section>
-        <p14:section name="第2部 頭の構造を知る" id="{a1ff41c5-c840-0624-8437-9af491bacc80}">
+        <p14:section name="第2部 頭の構造を知る" id="{51247acd-4ad0-caec-f7e5-e54a33cb2d17}">
           <p14:sldIdLst>
-            <p14:sldId id="269"/>
-            <p14:sldId id="270"/>
             <p14:sldId id="271"/>
             <p14:sldId id="272"/>
             <p14:sldId id="273"/>
@@ -186,12 +189,12 @@
             <p14:sldId id="276"/>
             <p14:sldId id="277"/>
             <p14:sldId id="278"/>
+            <p14:sldId id="279"/>
+            <p14:sldId id="280"/>
           </p14:sldIdLst>
         </p14:section>
-        <p14:section name="ワーク 思い込みを書き換える" id="{fc9de5bf-519b-ba58-febe-14e025fbe465}">
+        <p14:section name="ワーク 思い込みを書き換える" id="{e5cc6f21-c594-09ad-bba9-21a9fc39b0d1}">
           <p14:sldIdLst>
-            <p14:sldId id="279"/>
-            <p14:sldId id="280"/>
             <p14:sldId id="281"/>
             <p14:sldId id="282"/>
             <p14:sldId id="283"/>
@@ -207,21 +210,24 @@
             <p14:sldId id="293"/>
             <p14:sldId id="294"/>
             <p14:sldId id="295"/>
+            <p14:sldId id="296"/>
+            <p14:sldId id="297"/>
+            <p14:sldId id="298"/>
           </p14:sldIdLst>
         </p14:section>
-        <p14:section name="エネルギー" id="{152ddb06-840b-ecf6-c230-c3be5b39d7bf}">
+        <p14:section name="エネルギー" id="{40e4ae45-d2be-1820-2065-db5ee4916db6}">
           <p14:sldIdLst>
-            <p14:sldId id="296"/>
+            <p14:sldId id="299"/>
           </p14:sldIdLst>
         </p14:section>
-        <p14:section name="まとめ" id="{06060af9-3070-4b73-e807-548d563975e2}">
+        <p14:section name="まとめ" id="{8043cf5a-6f2c-b32d-8851-a39ef9177907}">
           <p14:sldIdLst>
-            <p14:sldId id="297"/>
-            <p14:sldId id="298"/>
-            <p14:sldId id="299"/>
             <p14:sldId id="300"/>
             <p14:sldId id="301"/>
             <p14:sldId id="302"/>
+            <p14:sldId id="303"/>
+            <p14:sldId id="304"/>
+            <p14:sldId id="305"/>
           </p14:sldIdLst>
         </p14:section>
       </p14:sectionLst>
@@ -716,7 +722,7 @@
           <a:p>
             <a:r>
               <a:rPr lang="en-US" dirty="0"/>
-              <a:t>お父さんのお酒・家にお金を入れない・毎日の大喧嘩の話が出たら、ワークの場面候補としてメモ。</a:t>
+              <a:t>本人のOKをもらってから、幼少期の質問へ。</a:t>
             </a:r>
             <a:endParaRPr lang="en-US" dirty="0"/>
           </a:p>
@@ -804,7 +810,7 @@
           <a:p>
             <a:r>
               <a:rPr lang="en-US" dirty="0"/>
-              <a:t>ここは特にゆっくり。出てきた言葉はワークのSTEP4で使える。</a:t>
+              <a:t/>
             </a:r>
             <a:endParaRPr lang="en-US" dirty="0"/>
           </a:p>
@@ -892,7 +898,7 @@
           <a:p>
             <a:r>
               <a:rPr lang="en-US" dirty="0"/>
-              <a:t>仁部さんが話してくれたエピソード。怖かった？悲しかった？怒り？寂しさ？と、気持ちに名前をつける手伝いをする。</a:t>
+              <a:t>お父さんのお酒・家にお金を入れない・毎日の大喧嘩の話が出たら、ワークの場面候補としてメモ。</a:t>
             </a:r>
             <a:endParaRPr lang="en-US" dirty="0"/>
           </a:p>
@@ -980,7 +986,7 @@
           <a:p>
             <a:r>
               <a:rPr lang="en-US" dirty="0"/>
-              <a:t>聴いたお話を受け取ってから、講座へ。講座の途中で、いま聴いた話（お父さんのお酒・両親の喧嘩など）につなげて話す。</a:t>
+              <a:t>ここは特にゆっくり。出てきた言葉はワークのSTEP4で使える。</a:t>
             </a:r>
             <a:endParaRPr lang="en-US" dirty="0"/>
           </a:p>
@@ -1068,7 +1074,7 @@
           <a:p>
             <a:r>
               <a:rPr lang="en-US" dirty="0"/>
-              <a:t>ここから15分。1枚ずつの説明ではなく、ひとつのお話としてつなげて話す。</a:t>
+              <a:t>仁部さんが話してくれたエピソード。怖かった？悲しかった？怒り？寂しさ？と、気持ちに名前をつける手伝いをする。</a:t>
             </a:r>
             <a:endParaRPr lang="en-US" dirty="0"/>
           </a:p>
@@ -1156,7 +1162,7 @@
           <a:p>
             <a:r>
               <a:rPr lang="en-US" dirty="0"/>
-              <a:t>物語の入り口。「それはあなたの意志が弱いからではなく、頭（脳）の仕組みだから」と伝えて、次へ。</a:t>
+              <a:t>聴いたお話を受け取ってから、講座へ。講座の途中で、いま聴いた話（お父さんのお酒・両親の喧嘩など）につなげて話す。</a:t>
             </a:r>
             <a:endParaRPr lang="en-US" dirty="0"/>
           </a:p>
@@ -1244,7 +1250,7 @@
           <a:p>
             <a:r>
               <a:rPr lang="en-US" dirty="0"/>
-              <a:t>感情がないと行動は起きない。理性はエネルギーを使う。理論は後付け。→だから、お金の行動を変えるには、理屈ではなく感情に触れる必要がある。次は、その感情を動かしている脳の3つのクセ。</a:t>
+              <a:t>ここから15分。1枚ずつの説明ではなく、ひとつのお話としてつなげて話す。</a:t>
             </a:r>
             <a:endParaRPr lang="en-US" dirty="0"/>
           </a:p>
@@ -1332,7 +1338,7 @@
           <a:p>
             <a:r>
               <a:rPr lang="en-US" dirty="0"/>
-              <a:t>言葉だけを見せて、少し間を置く。「ピンクの象を想像しないでください」と言ってから次のスライドへ。</a:t>
+              <a:t>物語の入り口。第1部で聴いた仁部さんの話を受けて「それはあなたの意志が弱いからではなく、頭（脳）の仕組みだから」と伝えて、次へ。</a:t>
             </a:r>
             <a:endParaRPr lang="en-US" dirty="0"/>
           </a:p>
@@ -1420,7 +1426,7 @@
           <a:p>
             <a:r>
               <a:rPr lang="en-US" dirty="0"/>
-              <a:t>ピンクの象を想像しないでください→想像してしまう。脳は否定語を受け付けない。新しいことを嫌い、変わらない言い訳を上手に作る。</a:t>
+              <a:t>感情がないと行動は起きない。理性はエネルギーを使う。理論は後付け。→だから、お金の行動を変えるには、理屈ではなく感情に触れる必要がある。次は、その感情を動かしている脳の3つのクセ。</a:t>
             </a:r>
             <a:endParaRPr lang="en-US" dirty="0"/>
           </a:p>
@@ -1508,7 +1514,7 @@
           <a:p>
             <a:r>
               <a:rPr lang="en-US" dirty="0"/>
-              <a:t>強い出来事はトラウマ化して、タグ付きファイルとして保存される。脳は過去のマイナス体験を一般化して未来を予測する。→第1部で聴いたお父さん・お母さんの話は、ここにつながる。では、その強い思いはいつ刻まれるのか？</a:t>
+              <a:t>言葉だけを見せて、少し間を置く。「ピンクの象を想像しないでください」と言ってから次のスライドへ。</a:t>
             </a:r>
             <a:endParaRPr lang="en-US" dirty="0"/>
           </a:p>
@@ -1684,7 +1690,7 @@
           <a:p>
             <a:r>
               <a:rPr lang="en-US" dirty="0"/>
-              <a:t>ゴールデンエイジまでの言われ方・見てきたことが、そのまま今の基準になっている。由香さんの言葉で補足する。</a:t>
+              <a:t>ピンクの象を想像しないでください→想像してしまう。脳は否定語を受け付けない。新しいことを嫌い、変わらない言い訳を上手に作る。</a:t>
             </a:r>
             <a:endParaRPr lang="en-US" dirty="0"/>
           </a:p>
@@ -1772,7 +1778,7 @@
           <a:p>
             <a:r>
               <a:rPr lang="en-US" dirty="0"/>
-              <a:t>メロンちょっと食べた→この人の「ちょっと」はどのくらい？　普通＝当たり前は人それぞれ。みんなの当たり前は同じではない。</a:t>
+              <a:t>強い出来事はトラウマ化して、タグ付きファイルとして保存される。脳は過去のマイナス体験を一般化して未来を予測する。→第1部で聴いたお父さん・お母さんの話は、ここにつながる。では、その強い思いはいつ刻まれるのか？</a:t>
             </a:r>
             <a:endParaRPr lang="en-US" dirty="0"/>
           </a:p>
@@ -1860,7 +1866,7 @@
           <a:p>
             <a:r>
               <a:rPr lang="en-US" dirty="0"/>
-              <a:t>ネガティブ＝情報の入れ替えができない、自分の正しさに固執する。ポジティブ＝入れ替えができる、他の正しさを認められる。</a:t>
+              <a:t>第1部で少し話したゴールデンエイジの、くわしい話。言われ方・見てきたことが、そのまま今の基準になっている。由香さんの言葉で補足する。</a:t>
             </a:r>
             <a:endParaRPr lang="en-US" dirty="0"/>
           </a:p>
@@ -1948,7 +1954,7 @@
           <a:p>
             <a:r>
               <a:rPr lang="en-US" dirty="0"/>
-              <a:t>焦り・無価値観→嫉妬・怒り→悲しみ→絶対的安心感。「だから、今から感じ切るワークをしましょう」とワークへ。スキップせずに順番に感じることで癒える。無理にポジティブに変えない（ポジ変禁止）。</a:t>
+              <a:t>メロンちょっと食べた→この人の「ちょっと」はどのくらい？　普通＝当たり前は人それぞれ。みんなの当たり前は同じではない。</a:t>
             </a:r>
             <a:endParaRPr lang="en-US" dirty="0"/>
           </a:p>
@@ -2036,7 +2042,7 @@
           <a:p>
             <a:r>
               <a:rPr lang="en-US" dirty="0"/>
-              <a:t>アートシフトワーク その18（エフィカシーを上げる5次元タイムライン）。画面では「5次元」「VAK」「ポジション」の言葉は使わない。ここから40分。思い込みは20個ではなく、1階層目5つ＋2階層目まで（10個くらい）にしぼる。書き込みは由香が画面の表に打ち込む。</a:t>
+              <a:t>ネガティブ＝情報の入れ替えができない、自分の正しさに固執する。ポジティブ＝入れ替えができる、他の正しさを認められる。</a:t>
             </a:r>
             <a:endParaRPr lang="en-US" dirty="0"/>
           </a:p>
@@ -2124,7 +2130,7 @@
           <a:p>
             <a:r>
               <a:rPr lang="en-US" dirty="0"/>
-              <a:t>ワークに入る前に伝える。今日で全部終わらせようとしなくていい、というメッセージ。</a:t>
+              <a:t>焦り・無価値観→嫉妬・怒り→悲しみ→絶対的安心感。「だから、今から感じ切るワークをしましょう」とワークへ。スキップせずに順番に感じることで癒える。無理にポジティブに変えない（ポジ変禁止）。</a:t>
             </a:r>
             <a:endParaRPr lang="en-US" dirty="0"/>
           </a:p>
@@ -2212,7 +2218,7 @@
           <a:p>
             <a:r>
               <a:rPr lang="en-US" dirty="0"/>
-              <a:t>見せないスライド。画面共有を止めてから読む。読んだら次のスライドで共有を再開。</a:t>
+              <a:t>アートシフトワーク その18（エフィカシーを上げる5次元タイムライン）。画面では「5次元」「VAK」「ポジション」の言葉は使わない。ここから40分。思い込みは20個ではなく、1階層目5つ＋2階層目まで（10個くらい）にしぼる。書き込みは由香が画面の表に打ち込む。</a:t>
             </a:r>
             <a:endParaRPr lang="en-US" dirty="0"/>
           </a:p>
@@ -2300,7 +2306,7 @@
           <a:p>
             <a:r>
               <a:rPr lang="en-US" dirty="0"/>
-              <a:t>由香が＿＿の所に本人の言葉を打ち込む。ここで出た言葉が、思い込みの入口（ガイドブックの「私は〇〇を達成したい！ただ…」の代わり）。</a:t>
+              <a:t>ワークに入る前に伝える。今日で全部終わらせようとしなくていい、というメッセージ。</a:t>
             </a:r>
             <a:endParaRPr lang="en-US" dirty="0"/>
           </a:p>
@@ -2388,7 +2394,7 @@
           <a:p>
             <a:r>
               <a:rPr lang="en-US" dirty="0"/>
-              <a:t>どちらでもOK。守ってくれていたなら、まずそれを認めてから次へ。</a:t>
+              <a:t>見せないスライド。画面共有を止めてから読む。読んだら次のスライドで共有を再開。</a:t>
             </a:r>
             <a:endParaRPr lang="en-US" dirty="0"/>
           </a:p>
@@ -2476,7 +2482,7 @@
           <a:p>
             <a:r>
               <a:rPr lang="en-US" dirty="0"/>
-              <a:t>1階層目を5つ以上。出てきたものは次の表に打ち込む。</a:t>
+              <a:t>由香が＿＿の所に本人の言葉を打ち込む。ここで出た言葉が、思い込みの入口（ガイドブックの「私は〇〇を達成したい！ただ…」の代わり）。</a:t>
             </a:r>
             <a:endParaRPr lang="en-US" dirty="0"/>
           </a:p>
@@ -2652,7 +2658,7 @@
           <a:p>
             <a:r>
               <a:rPr lang="en-US" dirty="0"/>
-              <a:t>由香が画面共有したまま表に打ち込む。仁部さんは話すだけでOK。10個くらい出たら次へ。1階層目で一番強いものを軸に、2階層目も同じ質問で出す。点数がわからない時はOリング・筋肉反射で。例：情報発信が魅力的でない50点／批判されるのが嫌だ75点。</a:t>
+              <a:t>どちらでもOK。守ってくれていたなら、まずそれを認めてから次へ。</a:t>
             </a:r>
             <a:endParaRPr lang="en-US" dirty="0"/>
           </a:p>
@@ -2740,7 +2746,7 @@
           <a:p>
             <a:r>
               <a:rPr lang="en-US" dirty="0"/>
-              <a:t>見せないスライド。画面共有を止めてから読む。読んだら次のスライドで共有を再開。</a:t>
+              <a:t>1階層目を5つ以上。出てきたものは次の表に打ち込む。</a:t>
             </a:r>
             <a:endParaRPr lang="en-US" dirty="0"/>
           </a:p>
@@ -2828,7 +2834,7 @@
           <a:p>
             <a:r>
               <a:rPr lang="en-US" dirty="0"/>
-              <a:t>表の上位3つに印をつける→その中で一番邪魔しているものを1つ。判断できない時はOリング・筋肉反射で。</a:t>
+              <a:t>由香が画面共有したまま表に打ち込む。仁部さんは話すだけでOK。10個くらい出たら次へ。1階層目で一番強いものを軸に、2階層目も同じ質問で出す。点数がわからない時はOリング・筋肉反射で。例：情報発信が魅力的でない50点／批判されるのが嫌だ75点。</a:t>
             </a:r>
             <a:endParaRPr lang="en-US" dirty="0"/>
           </a:p>
@@ -2916,7 +2922,7 @@
           <a:p>
             <a:r>
               <a:rPr lang="en-US" dirty="0"/>
-              <a:t>YESなら、その思い込みでSTEP4へ。</a:t>
+              <a:t>見せないスライド。画面共有を止めてから読む。読んだら次のスライドで共有を再開。</a:t>
             </a:r>
             <a:endParaRPr lang="en-US" dirty="0"/>
           </a:p>
@@ -3004,7 +3010,7 @@
           <a:p>
             <a:r>
               <a:rPr lang="en-US" dirty="0"/>
-              <a:t>手順：①今の自分の場所に立ち、今の気持ちを話す ②思い込みが生まれた過去の場面へ移動し、見える・色・聞こえる・体の感じで話す ③その場所から出て、自分を外から見る→次の2つの質問 ④もう一度その場所に戻り、全部吐き出す。VAKという言葉は使わない。お父さんのお酒・両親の喧嘩の場面が出る可能性が高い。感情が強く出たら止めて呼吸に戻す。ポジ変をしない。</a:t>
+              <a:t>表の上位3つに印をつける→その中で一番邪魔しているものを1つ。判断できない時はOリング・筋肉反射で。</a:t>
             </a:r>
             <a:endParaRPr lang="en-US" dirty="0"/>
           </a:p>
@@ -3092,7 +3098,7 @@
           <a:p>
             <a:r>
               <a:rPr lang="en-US" dirty="0"/>
-              <a:t>ポジションの外から、子どもの頃の自分を見ながら。</a:t>
+              <a:t>YESなら、その思い込みでSTEP4へ。</a:t>
             </a:r>
             <a:endParaRPr lang="en-US" dirty="0"/>
           </a:p>
@@ -3180,7 +3186,7 @@
           <a:p>
             <a:r>
               <a:rPr lang="en-US" dirty="0"/>
-              <a:t/>
+              <a:t>手順：①今の自分の場所に立ち、今の気持ちを話す ②思い込みが生まれた過去の場面へ移動し、見える・色・聞こえる・体の感じで話す ③その場所から出て、自分を外から見る→次の2つの質問 ④もう一度その場所に戻り、全部吐き出す。VAKという言葉は使わない。お父さんのお酒・両親の喧嘩の場面が出る可能性が高い。感情が強く出たら止めて呼吸に戻す。ポジ変をしない。</a:t>
             </a:r>
             <a:endParaRPr lang="en-US" dirty="0"/>
           </a:p>
@@ -3268,7 +3274,7 @@
           <a:p>
             <a:r>
               <a:rPr lang="en-US" dirty="0"/>
-              <a:t>＿＿に本人の言葉を打ち込む。言いたかったことを全部吐き出す（100％出たか？）。怒鳴る・泣く・大声を出す・体を大きく動かす・殴るなどしてOK。相手が聞いてくれている・謝っているイメージで。出し切るまで待つ。</a:t>
+              <a:t>ポジションの外から、子どもの頃の自分を見ながら。</a:t>
             </a:r>
             <a:endParaRPr lang="en-US" dirty="0"/>
           </a:p>
@@ -3356,7 +3362,7 @@
           <a:p>
             <a:r>
               <a:rPr lang="en-US" dirty="0"/>
-              <a:t>見せないスライド。画面共有を止めてから読む。読んだら次のスライドで共有を再開。</a:t>
+              <a:t/>
             </a:r>
             <a:endParaRPr lang="en-US" dirty="0"/>
           </a:p>
@@ -3444,7 +3450,7 @@
           <a:p>
             <a:r>
               <a:rPr lang="en-US" dirty="0"/>
-              <a:t>見える・聞こえる・体の感じを2倍・3倍に大きくしていく。5次元・現在ポジションで具体的に何をしているかも聴く。</a:t>
+              <a:t>見える・色・聞こえる・体の感じで、理想の自分をはっきりさせる。その理想のあなたから、次のスライドで「あの時のあなた」に言葉をかける。</a:t>
             </a:r>
             <a:endParaRPr lang="en-US" dirty="0"/>
           </a:p>
@@ -3620,7 +3626,7 @@
           <a:p>
             <a:r>
               <a:rPr lang="en-US" dirty="0"/>
-              <a:t>由香が本人の言葉をそのまま打ち込む。言葉は本人が決める（由香が作らない）。</a:t>
+              <a:t>＿＿に本人の言葉を打ち込む。言いたかったことを全部吐き出す（100％出たか？）。怒鳴る・泣く・大声を出す・体を大きく動かす・殴るなどしてOK。相手が聞いてくれている・謝っているイメージで。出し切るまで待つ。</a:t>
             </a:r>
             <a:endParaRPr lang="en-US" dirty="0"/>
           </a:p>
@@ -3708,7 +3714,7 @@
           <a:p>
             <a:r>
               <a:rPr lang="en-US" dirty="0"/>
-              <a:t>ワークで残ったものをエネルギーで取り除く。</a:t>
+              <a:t>見せないスライド。画面共有を止めてから読む。読んだら次のスライドで共有を再開。</a:t>
             </a:r>
             <a:endParaRPr lang="en-US" dirty="0"/>
           </a:p>
@@ -3796,7 +3802,7 @@
           <a:p>
             <a:r>
               <a:rPr lang="en-US" dirty="0"/>
-              <a:t>はじめの点数といまの点数を並べて、変化を目で見てもらう。終わったらこのスライドを画像にしてLINEで送れる。</a:t>
+              <a:t>見える・聞こえる・体の感じを2倍・3倍に大きくしていく。5次元・現在ポジションで具体的に何をしているかも聴く。</a:t>
             </a:r>
             <a:endParaRPr lang="en-US" dirty="0"/>
           </a:p>
@@ -3884,7 +3890,7 @@
           <a:p>
             <a:r>
               <a:rPr lang="en-US" dirty="0"/>
-              <a:t>本人の言葉で言ってもらう。</a:t>
+              <a:t>由香が本人の言葉をそのまま打ち込む。言葉は本人が決める（由香が作らない）。</a:t>
             </a:r>
             <a:endParaRPr lang="en-US" dirty="0"/>
           </a:p>
@@ -3972,7 +3978,7 @@
           <a:p>
             <a:r>
               <a:rPr lang="en-US" dirty="0"/>
-              <a:t>3つを1つずつ聴いて、由香が各カードの下に本人の言葉を打ち込む。最初の一歩は、明日できるくらい小さいことでOK。</a:t>
+              <a:t>ワークで残ったものをエネルギーで取り除く。</a:t>
             </a:r>
             <a:endParaRPr lang="en-US" dirty="0"/>
           </a:p>
@@ -4060,7 +4066,7 @@
           <a:p>
             <a:r>
               <a:rPr lang="en-US" dirty="0"/>
-              <a:t>「一度で終わりではなく、繰り返し向き合う」につなげる。</a:t>
+              <a:t>はじめの点数といまの点数を並べて、変化を目で見てもらう。終わったらこのスライドを画像にしてLINEで送れる。</a:t>
             </a:r>
             <a:endParaRPr lang="en-US" dirty="0"/>
           </a:p>
@@ -4148,7 +4154,7 @@
           <a:p>
             <a:r>
               <a:rPr lang="en-US" dirty="0"/>
-              <a:t>すべての土台は絶対的安心感。「何をやっても、やらなくても大丈夫」「嫌なことをやめても、愛される」。</a:t>
+              <a:t>本人の言葉で言ってもらう。</a:t>
             </a:r>
             <a:endParaRPr lang="en-US" dirty="0"/>
           </a:p>
@@ -4236,7 +4242,7 @@
           <a:p>
             <a:r>
               <a:rPr lang="en-US" dirty="0"/>
-              <a:t>終了。1週間後にLINEで「その後いかがですか？」と連絡する。</a:t>
+              <a:t>3つを1つずつ聴いて、由香が各カードの下に本人の言葉を打ち込む。最初の一歩は、明日できるくらい小さいことでOK。</a:t>
             </a:r>
             <a:endParaRPr lang="en-US" dirty="0"/>
           </a:p>
@@ -4260,6 +4266,182 @@
             <a:fld id="{F7021451-1387-4CA6-816F-3879F97B5CBC}" type="slidenum">
               <a:rPr lang="en-US"/>
               <a:t>47</a:t>
+            </a:fld>
+            <a:endParaRPr lang="en-US"/>
+          </a:p>
+        </p:txBody>
+      </p:sp>
+    </p:spTree>
+    <p:extLst>
+      <p:ext uri="{BB962C8B-B14F-4D97-AF65-F5344CB8AC3E}">
+        <p14:creationId xmlns:p14="http://schemas.microsoft.com/office/powerpoint/2010/main" val="1024086991"/>
+      </p:ext>
+    </p:extLst>
+  </p:cSld>
+  <p:clrMapOvr>
+    <a:masterClrMapping/>
+  </p:clrMapOvr>
+</p:notes>
+</file>
+
+<file path=ppt/notesSlides/notesSlide48.xml><?xml version="1.0" encoding="utf-8"?>
+<p:notes xmlns:a="http://schemas.openxmlformats.org/drawingml/2006/main" xmlns:r="http://schemas.openxmlformats.org/officeDocument/2006/relationships" xmlns:p="http://schemas.openxmlformats.org/presentationml/2006/main">
+  <p:cSld>
+    <p:spTree>
+      <p:nvGrpSpPr>
+        <p:cNvPr id="1" name=""/>
+        <p:cNvGrpSpPr/>
+        <p:nvPr/>
+      </p:nvGrpSpPr>
+      <p:grpSpPr>
+        <a:xfrm>
+          <a:off x="0" y="0"/>
+          <a:ext cx="0" cy="0"/>
+          <a:chOff x="0" y="0"/>
+          <a:chExt cx="0" cy="0"/>
+        </a:xfrm>
+      </p:grpSpPr>
+      <p:sp>
+        <p:nvSpPr>
+          <p:cNvPr id="2" name="Slide Image Placeholder 1"/>
+          <p:cNvSpPr>
+            <a:spLocks noGrp="1" noRot="1" noChangeAspect="1"/>
+          </p:cNvSpPr>
+          <p:nvPr>
+            <p:ph type="sldImg"/>
+          </p:nvPr>
+        </p:nvSpPr>
+        <p:spPr/>
+      </p:sp>
+      <p:sp>
+        <p:nvSpPr>
+          <p:cNvPr id="3" name="Notes Placeholder 2"/>
+          <p:cNvSpPr>
+            <a:spLocks noGrp="1"/>
+          </p:cNvSpPr>
+          <p:nvPr>
+            <p:ph type="body" idx="1"/>
+          </p:nvPr>
+        </p:nvSpPr>
+        <p:spPr/>
+        <p:txBody>
+          <a:bodyPr/>
+          <a:lstStyle/>
+          <a:p>
+            <a:r>
+              <a:rPr lang="en-US" dirty="0"/>
+              <a:t>「一度で終わりではなく、繰り返し向き合う」につなげる。</a:t>
+            </a:r>
+            <a:endParaRPr lang="en-US" dirty="0"/>
+          </a:p>
+        </p:txBody>
+      </p:sp>
+      <p:sp>
+        <p:nvSpPr>
+          <p:cNvPr id="4" name="Slide Number Placeholder 3"/>
+          <p:cNvSpPr>
+            <a:spLocks noGrp="1"/>
+          </p:cNvSpPr>
+          <p:nvPr>
+            <p:ph type="sldNum" sz="quarter" idx="10"/>
+          </p:nvPr>
+        </p:nvSpPr>
+        <p:spPr/>
+        <p:txBody>
+          <a:bodyPr/>
+          <a:lstStyle/>
+          <a:p>
+            <a:fld id="{F7021451-1387-4CA6-816F-3879F97B5CBC}" type="slidenum">
+              <a:rPr lang="en-US"/>
+              <a:t>48</a:t>
+            </a:fld>
+            <a:endParaRPr lang="en-US"/>
+          </a:p>
+        </p:txBody>
+      </p:sp>
+    </p:spTree>
+    <p:extLst>
+      <p:ext uri="{BB962C8B-B14F-4D97-AF65-F5344CB8AC3E}">
+        <p14:creationId xmlns:p14="http://schemas.microsoft.com/office/powerpoint/2010/main" val="1024086991"/>
+      </p:ext>
+    </p:extLst>
+  </p:cSld>
+  <p:clrMapOvr>
+    <a:masterClrMapping/>
+  </p:clrMapOvr>
+</p:notes>
+</file>
+
+<file path=ppt/notesSlides/notesSlide49.xml><?xml version="1.0" encoding="utf-8"?>
+<p:notes xmlns:a="http://schemas.openxmlformats.org/drawingml/2006/main" xmlns:r="http://schemas.openxmlformats.org/officeDocument/2006/relationships" xmlns:p="http://schemas.openxmlformats.org/presentationml/2006/main">
+  <p:cSld>
+    <p:spTree>
+      <p:nvGrpSpPr>
+        <p:cNvPr id="1" name=""/>
+        <p:cNvGrpSpPr/>
+        <p:nvPr/>
+      </p:nvGrpSpPr>
+      <p:grpSpPr>
+        <a:xfrm>
+          <a:off x="0" y="0"/>
+          <a:ext cx="0" cy="0"/>
+          <a:chOff x="0" y="0"/>
+          <a:chExt cx="0" cy="0"/>
+        </a:xfrm>
+      </p:grpSpPr>
+      <p:sp>
+        <p:nvSpPr>
+          <p:cNvPr id="2" name="Slide Image Placeholder 1"/>
+          <p:cNvSpPr>
+            <a:spLocks noGrp="1" noRot="1" noChangeAspect="1"/>
+          </p:cNvSpPr>
+          <p:nvPr>
+            <p:ph type="sldImg"/>
+          </p:nvPr>
+        </p:nvSpPr>
+        <p:spPr/>
+      </p:sp>
+      <p:sp>
+        <p:nvSpPr>
+          <p:cNvPr id="3" name="Notes Placeholder 2"/>
+          <p:cNvSpPr>
+            <a:spLocks noGrp="1"/>
+          </p:cNvSpPr>
+          <p:nvPr>
+            <p:ph type="body" idx="1"/>
+          </p:nvPr>
+        </p:nvSpPr>
+        <p:spPr/>
+        <p:txBody>
+          <a:bodyPr/>
+          <a:lstStyle/>
+          <a:p>
+            <a:r>
+              <a:rPr lang="en-US" dirty="0"/>
+              <a:t>すべての土台は絶対的安心感。「何をやっても、やらなくても大丈夫」「嫌なことをやめても、愛される」。</a:t>
+            </a:r>
+            <a:endParaRPr lang="en-US" dirty="0"/>
+          </a:p>
+        </p:txBody>
+      </p:sp>
+      <p:sp>
+        <p:nvSpPr>
+          <p:cNvPr id="4" name="Slide Number Placeholder 3"/>
+          <p:cNvSpPr>
+            <a:spLocks noGrp="1"/>
+          </p:cNvSpPr>
+          <p:nvPr>
+            <p:ph type="sldNum" sz="quarter" idx="10"/>
+          </p:nvPr>
+        </p:nvSpPr>
+        <p:spPr/>
+        <p:txBody>
+          <a:bodyPr/>
+          <a:lstStyle/>
+          <a:p>
+            <a:fld id="{F7021451-1387-4CA6-816F-3879F97B5CBC}" type="slidenum">
+              <a:rPr lang="en-US"/>
+              <a:t>49</a:t>
             </a:fld>
             <a:endParaRPr lang="en-US"/>
           </a:p>
@@ -4366,6 +4548,94 @@
 </p:notes>
 </file>
 
+<file path=ppt/notesSlides/notesSlide50.xml><?xml version="1.0" encoding="utf-8"?>
+<p:notes xmlns:a="http://schemas.openxmlformats.org/drawingml/2006/main" xmlns:r="http://schemas.openxmlformats.org/officeDocument/2006/relationships" xmlns:p="http://schemas.openxmlformats.org/presentationml/2006/main">
+  <p:cSld>
+    <p:spTree>
+      <p:nvGrpSpPr>
+        <p:cNvPr id="1" name=""/>
+        <p:cNvGrpSpPr/>
+        <p:nvPr/>
+      </p:nvGrpSpPr>
+      <p:grpSpPr>
+        <a:xfrm>
+          <a:off x="0" y="0"/>
+          <a:ext cx="0" cy="0"/>
+          <a:chOff x="0" y="0"/>
+          <a:chExt cx="0" cy="0"/>
+        </a:xfrm>
+      </p:grpSpPr>
+      <p:sp>
+        <p:nvSpPr>
+          <p:cNvPr id="2" name="Slide Image Placeholder 1"/>
+          <p:cNvSpPr>
+            <a:spLocks noGrp="1" noRot="1" noChangeAspect="1"/>
+          </p:cNvSpPr>
+          <p:nvPr>
+            <p:ph type="sldImg"/>
+          </p:nvPr>
+        </p:nvSpPr>
+        <p:spPr/>
+      </p:sp>
+      <p:sp>
+        <p:nvSpPr>
+          <p:cNvPr id="3" name="Notes Placeholder 2"/>
+          <p:cNvSpPr>
+            <a:spLocks noGrp="1"/>
+          </p:cNvSpPr>
+          <p:nvPr>
+            <p:ph type="body" idx="1"/>
+          </p:nvPr>
+        </p:nvSpPr>
+        <p:spPr/>
+        <p:txBody>
+          <a:bodyPr/>
+          <a:lstStyle/>
+          <a:p>
+            <a:r>
+              <a:rPr lang="en-US" dirty="0"/>
+              <a:t>終了。1週間後にLINEで「その後いかがですか？」と連絡する。</a:t>
+            </a:r>
+            <a:endParaRPr lang="en-US" dirty="0"/>
+          </a:p>
+        </p:txBody>
+      </p:sp>
+      <p:sp>
+        <p:nvSpPr>
+          <p:cNvPr id="4" name="Slide Number Placeholder 3"/>
+          <p:cNvSpPr>
+            <a:spLocks noGrp="1"/>
+          </p:cNvSpPr>
+          <p:nvPr>
+            <p:ph type="sldNum" sz="quarter" idx="10"/>
+          </p:nvPr>
+        </p:nvSpPr>
+        <p:spPr/>
+        <p:txBody>
+          <a:bodyPr/>
+          <a:lstStyle/>
+          <a:p>
+            <a:fld id="{F7021451-1387-4CA6-816F-3879F97B5CBC}" type="slidenum">
+              <a:rPr lang="en-US"/>
+              <a:t>50</a:t>
+            </a:fld>
+            <a:endParaRPr lang="en-US"/>
+          </a:p>
+        </p:txBody>
+      </p:sp>
+    </p:spTree>
+    <p:extLst>
+      <p:ext uri="{BB962C8B-B14F-4D97-AF65-F5344CB8AC3E}">
+        <p14:creationId xmlns:p14="http://schemas.microsoft.com/office/powerpoint/2010/main" val="1024086991"/>
+      </p:ext>
+    </p:extLst>
+  </p:cSld>
+  <p:clrMapOvr>
+    <a:masterClrMapping/>
+  </p:clrMapOvr>
+</p:notes>
+</file>
+
 <file path=ppt/notesSlides/notesSlide6.xml><?xml version="1.0" encoding="utf-8"?>
 <p:notes xmlns:a="http://schemas.openxmlformats.org/drawingml/2006/main" xmlns:r="http://schemas.openxmlformats.org/officeDocument/2006/relationships" xmlns:p="http://schemas.openxmlformats.org/presentationml/2006/main">
   <p:cSld>
@@ -4676,7 +4946,7 @@
           <a:p>
             <a:r>
               <a:rPr lang="en-US" dirty="0"/>
-              <a:t/>
+              <a:t>ここでは短く一言だけ。くわしくは第2部の「ゴールデンエイジ」のスライドで話す。</a:t>
             </a:r>
             <a:endParaRPr lang="en-US" dirty="0"/>
           </a:p>
@@ -5935,7 +6205,7 @@
                   <a:schemeClr val="accent2"/>
                 </a:solidFill>
               </a:rPr>
-              <a:t>問題の心理状況：幼少期の影響</a:t>
+              <a:t>幼少期のこと</a:t>
             </a:r>
             <a:endParaRPr lang="en-US" sz="1300" dirty="0"/>
           </a:p>
@@ -5976,7 +6246,7 @@
                 <a:ea typeface="Yu Mincho" pitchFamily="34" charset="-122"/>
                 <a:cs typeface="Yu Mincho" pitchFamily="34" charset="-120"/>
               </a:rPr>
-              <a:t>ご両親は、厳しかったですか？</a:t>
+              <a:t>子ども時代のことも、</a:t>
             </a:r>
             <a:endParaRPr lang="en-US" sz="3200" dirty="0"/>
           </a:p>
@@ -5993,9 +6263,78 @@
                 <a:ea typeface="Yu Mincho" pitchFamily="34" charset="-122"/>
                 <a:cs typeface="Yu Mincho" pitchFamily="34" charset="-120"/>
               </a:rPr>
-              <a:t>優しかったですか？</a:t>
+              <a:t>聴かせていただいても</a:t>
             </a:r>
             <a:endParaRPr lang="en-US" sz="3200" dirty="0"/>
+          </a:p>
+          <a:p>
+            <a:pPr algn="ctr" indent="0" marL="0">
+              <a:buNone/>
+            </a:pPr>
+            <a:r>
+              <a:rPr lang="en-US" sz="3200" b="1" dirty="0">
+                <a:solidFill>
+                  <a:schemeClr val="tx2"/>
+                </a:solidFill>
+                <a:latin typeface="Yu Mincho" pitchFamily="34" charset="0"/>
+                <a:ea typeface="Yu Mincho" pitchFamily="34" charset="-122"/>
+                <a:cs typeface="Yu Mincho" pitchFamily="34" charset="-120"/>
+              </a:rPr>
+              <a:t>いいですか？</a:t>
+            </a:r>
+            <a:endParaRPr lang="en-US" sz="3200" dirty="0"/>
+          </a:p>
+        </p:txBody>
+      </p:sp>
+      <p:sp>
+        <p:nvSpPr>
+          <p:cNvPr id="5" name="Text 0"/>
+          <p:cNvSpPr/>
+          <p:nvPr>
+            <p:ph idx="101" type="body" hasCustomPrompt="1"/>
+          </p:nvPr>
+        </p:nvSpPr>
+        <p:spPr>
+          <a:xfrm>
+            <a:off x="914400" y="3200400"/>
+            <a:ext cx="7315200" cy="731520"/>
+          </a:xfrm>
+          <a:prstGeom prst="rect">
+            <a:avLst/>
+          </a:prstGeom>
+          <a:noFill/>
+          <a:ln/>
+        </p:spPr>
+        <p:txBody>
+          <a:bodyPr wrap="square" rtlCol="0" anchor="t"/>
+          <a:lstStyle/>
+          <a:p>
+            <a:pPr algn="ctr" indent="0" marL="0">
+              <a:buNone/>
+            </a:pPr>
+            <a:r>
+              <a:rPr lang="en-US" sz="1500" dirty="0">
+                <a:solidFill>
+                  <a:schemeClr val="accent2"/>
+                </a:solidFill>
+              </a:rPr>
+              <a:t>事前にいただいたメッセージにも、子どもの頃のことがありましたね</a:t>
+            </a:r>
+            <a:endParaRPr lang="en-US" sz="1500" dirty="0"/>
+          </a:p>
+          <a:p>
+            <a:pPr algn="ctr" indent="0" marL="0">
+              <a:buNone/>
+            </a:pPr>
+            <a:r>
+              <a:rPr lang="en-US" sz="1500" dirty="0">
+                <a:solidFill>
+                  <a:schemeClr val="accent2"/>
+                </a:solidFill>
+              </a:rPr>
+              <a:t>話したくないことは、話さなくて大丈夫です</a:t>
+            </a:r>
+            <a:endParaRPr lang="en-US" sz="1500" dirty="0"/>
           </a:p>
         </p:txBody>
       </p:sp>
@@ -6166,7 +6505,7 @@
                 <a:ea typeface="Yu Mincho" pitchFamily="34" charset="-122"/>
                 <a:cs typeface="Yu Mincho" pitchFamily="34" charset="-120"/>
               </a:rPr>
-              <a:t>ご両親に、かけてほしかった</a:t>
+              <a:t>どのような</a:t>
             </a:r>
             <a:endParaRPr lang="en-US" sz="3200" dirty="0"/>
           </a:p>
@@ -6183,7 +6522,7 @@
                 <a:ea typeface="Yu Mincho" pitchFamily="34" charset="-122"/>
                 <a:cs typeface="Yu Mincho" pitchFamily="34" charset="-120"/>
               </a:rPr>
-              <a:t>言葉はありますか？</a:t>
+              <a:t>お子さんでしたか？</a:t>
             </a:r>
             <a:endParaRPr lang="en-US" sz="3200" dirty="0"/>
           </a:p>
@@ -6315,7 +6654,7 @@
                   <a:schemeClr val="accent2"/>
                 </a:solidFill>
               </a:rPr>
-              <a:t>幼少期のお金の記憶</a:t>
+              <a:t>問題の心理状況：幼少期の影響</a:t>
             </a:r>
             <a:endParaRPr lang="en-US" sz="1300" dirty="0"/>
           </a:p>
@@ -6356,7 +6695,7 @@
                 <a:ea typeface="Yu Mincho" pitchFamily="34" charset="-122"/>
                 <a:cs typeface="Yu Mincho" pitchFamily="34" charset="-120"/>
               </a:rPr>
-              <a:t>「お金がない」</a:t>
+              <a:t>ご両親は、厳しかったですか？</a:t>
             </a:r>
             <a:endParaRPr lang="en-US" sz="3200" dirty="0"/>
           </a:p>
@@ -6373,64 +6712,9 @@
                 <a:ea typeface="Yu Mincho" pitchFamily="34" charset="-122"/>
                 <a:cs typeface="Yu Mincho" pitchFamily="34" charset="-120"/>
               </a:rPr>
-              <a:t>「家にお金を入れない」</a:t>
+              <a:t>優しかったですか？</a:t>
             </a:r>
             <a:endParaRPr lang="en-US" sz="3200" dirty="0"/>
-          </a:p>
-          <a:p>
-            <a:pPr algn="ctr" indent="0" marL="0">
-              <a:buNone/>
-            </a:pPr>
-            <a:r>
-              <a:rPr lang="en-US" sz="3200" b="1" dirty="0">
-                <a:solidFill>
-                  <a:schemeClr val="tx2"/>
-                </a:solidFill>
-                <a:latin typeface="Yu Mincho" pitchFamily="34" charset="0"/>
-                <a:ea typeface="Yu Mincho" pitchFamily="34" charset="-122"/>
-                <a:cs typeface="Yu Mincho" pitchFamily="34" charset="-120"/>
-              </a:rPr>
-              <a:t>その頃、何を感じていましたか？</a:t>
-            </a:r>
-            <a:endParaRPr lang="en-US" sz="3200" dirty="0"/>
-          </a:p>
-        </p:txBody>
-      </p:sp>
-      <p:sp>
-        <p:nvSpPr>
-          <p:cNvPr id="5" name="Text 0"/>
-          <p:cNvSpPr/>
-          <p:nvPr>
-            <p:ph idx="101" type="body" hasCustomPrompt="1"/>
-          </p:nvPr>
-        </p:nvSpPr>
-        <p:spPr>
-          <a:xfrm>
-            <a:off x="914400" y="3200400"/>
-            <a:ext cx="7315200" cy="731520"/>
-          </a:xfrm>
-          <a:prstGeom prst="rect">
-            <a:avLst/>
-          </a:prstGeom>
-          <a:noFill/>
-          <a:ln/>
-        </p:spPr>
-        <p:txBody>
-          <a:bodyPr wrap="square" rtlCol="0" anchor="t"/>
-          <a:lstStyle/>
-          <a:p>
-            <a:pPr algn="ctr" indent="0" marL="0">
-              <a:buNone/>
-            </a:pPr>
-            <a:r>
-              <a:rPr lang="en-US" sz="1500" dirty="0">
-                <a:solidFill>
-                  <a:schemeClr val="accent2"/>
-                </a:solidFill>
-              </a:rPr>
-              <a:t>ご両親を責めるのではなく、当時のあなたの気持ちを大切にします</a:t>
-            </a:r>
-            <a:endParaRPr lang="en-US" sz="1500" dirty="0"/>
           </a:p>
         </p:txBody>
       </p:sp>
@@ -6560,7 +6844,7 @@
                   <a:schemeClr val="accent2"/>
                 </a:solidFill>
               </a:rPr>
-              <a:t>第2部へ</a:t>
+              <a:t>問題の心理状況：幼少期の影響</a:t>
             </a:r>
             <a:endParaRPr lang="en-US" sz="1300" dirty="0"/>
           </a:p>
@@ -6601,7 +6885,7 @@
                 <a:ea typeface="Yu Mincho" pitchFamily="34" charset="-122"/>
                 <a:cs typeface="Yu Mincho" pitchFamily="34" charset="-120"/>
               </a:rPr>
-              <a:t>お話を聴かせてくださって、</a:t>
+              <a:t>ご両親に、かけてほしかった</a:t>
             </a:r>
             <a:endParaRPr lang="en-US" sz="3200" dirty="0"/>
           </a:p>
@@ -6618,47 +6902,9 @@
                 <a:ea typeface="Yu Mincho" pitchFamily="34" charset="-122"/>
                 <a:cs typeface="Yu Mincho" pitchFamily="34" charset="-120"/>
               </a:rPr>
-              <a:t>ありがとうございます</a:t>
+              <a:t>言葉はありますか？</a:t>
             </a:r>
             <a:endParaRPr lang="en-US" sz="3200" dirty="0"/>
-          </a:p>
-        </p:txBody>
-      </p:sp>
-      <p:sp>
-        <p:nvSpPr>
-          <p:cNvPr id="5" name="Text 0"/>
-          <p:cNvSpPr/>
-          <p:nvPr>
-            <p:ph idx="101" type="body" hasCustomPrompt="1"/>
-          </p:nvPr>
-        </p:nvSpPr>
-        <p:spPr>
-          <a:xfrm>
-            <a:off x="914400" y="3200400"/>
-            <a:ext cx="7315200" cy="731520"/>
-          </a:xfrm>
-          <a:prstGeom prst="rect">
-            <a:avLst/>
-          </a:prstGeom>
-          <a:noFill/>
-          <a:ln/>
-        </p:spPr>
-        <p:txBody>
-          <a:bodyPr wrap="square" rtlCol="0" anchor="t"/>
-          <a:lstStyle/>
-          <a:p>
-            <a:pPr algn="ctr" indent="0" marL="0">
-              <a:buNone/>
-            </a:pPr>
-            <a:r>
-              <a:rPr lang="en-US" sz="1500" dirty="0">
-                <a:solidFill>
-                  <a:schemeClr val="accent2"/>
-                </a:solidFill>
-              </a:rPr>
-              <a:t>ここで少し、頭の仕組みのお話をさせてください</a:t>
-            </a:r>
-            <a:endParaRPr lang="en-US" sz="1500" dirty="0"/>
           </a:p>
         </p:txBody>
       </p:sp>
@@ -6734,16 +6980,40 @@
       </p:grpSpPr>
       <p:sp>
         <p:nvSpPr>
-          <p:cNvPr id="2" name="Text 0"/>
+          <p:cNvPr id="2" name="frame"/>
           <p:cNvSpPr/>
-          <p:nvPr>
-            <p:ph idx="100" type="title" hasCustomPrompt="1"/>
-          </p:nvPr>
-        </p:nvSpPr>
-        <p:spPr>
-          <a:xfrm>
-            <a:off x="731520" y="1828800"/>
-            <a:ext cx="7680960" cy="914400"/>
+          <p:nvPr/>
+        </p:nvSpPr>
+        <p:spPr>
+          <a:xfrm>
+            <a:off x="228600" y="137160"/>
+            <a:ext cx="8686800" cy="4526280"/>
+          </a:xfrm>
+          <a:prstGeom prst="rect">
+            <a:avLst/>
+          </a:prstGeom>
+          <a:ln w="12700">
+            <a:solidFill>
+              <a:srgbClr val="B08A4E"/>
+            </a:solidFill>
+            <a:prstDash val="solid"/>
+          </a:ln>
+        </p:spPr>
+        <p:txBody>
+          <a:bodyPr/>
+          <a:p/>
+        </p:txBody>
+      </p:sp>
+      <p:sp>
+        <p:nvSpPr>
+          <p:cNvPr id="3" name="qlabel"/>
+          <p:cNvSpPr txBox="1"/>
+          <p:nvPr/>
+        </p:nvSpPr>
+        <p:spPr>
+          <a:xfrm>
+            <a:off x="457200" y="320040"/>
+            <a:ext cx="8229600" cy="365760"/>
           </a:xfrm>
           <a:prstGeom prst="rect">
             <a:avLst/>
@@ -6752,6 +7022,44 @@
           <a:ln/>
         </p:spPr>
         <p:txBody>
+          <a:bodyPr wrap="square" lIns="0" tIns="0" rIns="0" bIns="0" rtlCol="0" anchor="t"/>
+          <a:lstStyle/>
+          <a:p>
+            <a:pPr algn="ctr" indent="0" marL="0">
+              <a:buNone/>
+            </a:pPr>
+            <a:r>
+              <a:rPr lang="en-US" sz="1300" b="1" dirty="0">
+                <a:solidFill>
+                  <a:schemeClr val="accent2"/>
+                </a:solidFill>
+              </a:rPr>
+              <a:t>幼少期のお金の記憶</a:t>
+            </a:r>
+            <a:endParaRPr lang="en-US" sz="1300" dirty="0"/>
+          </a:p>
+        </p:txBody>
+      </p:sp>
+      <p:sp>
+        <p:nvSpPr>
+          <p:cNvPr id="4" name="Text 0"/>
+          <p:cNvSpPr/>
+          <p:nvPr>
+            <p:ph idx="100" type="title" hasCustomPrompt="1"/>
+          </p:nvPr>
+        </p:nvSpPr>
+        <p:spPr>
+          <a:xfrm>
+            <a:off x="914400" y="1554480"/>
+            <a:ext cx="7315200" cy="1554480"/>
+          </a:xfrm>
+          <a:prstGeom prst="rect">
+            <a:avLst/>
+          </a:prstGeom>
+          <a:noFill/>
+          <a:ln/>
+        </p:spPr>
+        <p:txBody>
           <a:bodyPr wrap="square" rtlCol="0" anchor="ctr"/>
           <a:lstStyle/>
           <a:p>
@@ -6759,23 +7067,57 @@
               <a:buNone/>
             </a:pPr>
             <a:r>
-              <a:rPr lang="en-US" sz="3600" b="1" dirty="0">
-                <a:solidFill>
-                  <a:schemeClr val="accent2"/>
+              <a:rPr lang="en-US" sz="3200" b="1" dirty="0">
+                <a:solidFill>
+                  <a:schemeClr val="tx2"/>
                 </a:solidFill>
                 <a:latin typeface="Yu Mincho" pitchFamily="34" charset="0"/>
                 <a:ea typeface="Yu Mincho" pitchFamily="34" charset="-122"/>
                 <a:cs typeface="Yu Mincho" pitchFamily="34" charset="-120"/>
               </a:rPr>
-              <a:t>第2部　頭の構造を知る</a:t>
-            </a:r>
-            <a:endParaRPr lang="en-US" sz="3600" dirty="0"/>
-          </a:p>
-        </p:txBody>
-      </p:sp>
-      <p:sp>
-        <p:nvSpPr>
-          <p:cNvPr id="3" name="Text 0"/>
+              <a:t>「お金がない」</a:t>
+            </a:r>
+            <a:endParaRPr lang="en-US" sz="3200" dirty="0"/>
+          </a:p>
+          <a:p>
+            <a:pPr algn="ctr" indent="0" marL="0">
+              <a:buNone/>
+            </a:pPr>
+            <a:r>
+              <a:rPr lang="en-US" sz="3200" b="1" dirty="0">
+                <a:solidFill>
+                  <a:schemeClr val="tx2"/>
+                </a:solidFill>
+                <a:latin typeface="Yu Mincho" pitchFamily="34" charset="0"/>
+                <a:ea typeface="Yu Mincho" pitchFamily="34" charset="-122"/>
+                <a:cs typeface="Yu Mincho" pitchFamily="34" charset="-120"/>
+              </a:rPr>
+              <a:t>「家にお金を入れない」</a:t>
+            </a:r>
+            <a:endParaRPr lang="en-US" sz="3200" dirty="0"/>
+          </a:p>
+          <a:p>
+            <a:pPr algn="ctr" indent="0" marL="0">
+              <a:buNone/>
+            </a:pPr>
+            <a:r>
+              <a:rPr lang="en-US" sz="3200" b="1" dirty="0">
+                <a:solidFill>
+                  <a:schemeClr val="tx2"/>
+                </a:solidFill>
+                <a:latin typeface="Yu Mincho" pitchFamily="34" charset="0"/>
+                <a:ea typeface="Yu Mincho" pitchFamily="34" charset="-122"/>
+                <a:cs typeface="Yu Mincho" pitchFamily="34" charset="-120"/>
+              </a:rPr>
+              <a:t>その頃、何を感じていましたか？</a:t>
+            </a:r>
+            <a:endParaRPr lang="en-US" sz="3200" dirty="0"/>
+          </a:p>
+        </p:txBody>
+      </p:sp>
+      <p:sp>
+        <p:nvSpPr>
+          <p:cNvPr id="5" name="Text 0"/>
           <p:cNvSpPr/>
           <p:nvPr>
             <p:ph idx="101" type="body" hasCustomPrompt="1"/>
@@ -6783,8 +7125,8 @@
         </p:nvSpPr>
         <p:spPr>
           <a:xfrm>
-            <a:off x="731520" y="2788920"/>
-            <a:ext cx="7680960" cy="822960"/>
+            <a:off x="914400" y="3200400"/>
+            <a:ext cx="7315200" cy="731520"/>
           </a:xfrm>
           <a:prstGeom prst="rect">
             <a:avLst/>
@@ -6800,14 +7142,59 @@
               <a:buNone/>
             </a:pPr>
             <a:r>
-              <a:rPr lang="en-US" sz="1600" dirty="0">
-                <a:solidFill>
-                  <a:schemeClr val="tx1"/>
-                </a:solidFill>
-              </a:rPr>
-              <a:t>なぜ「わかっているのに」変われないのか（20〜35分）</a:t>
-            </a:r>
-            <a:endParaRPr lang="en-US" sz="1600" dirty="0"/>
+              <a:rPr lang="en-US" sz="1500" dirty="0">
+                <a:solidFill>
+                  <a:schemeClr val="accent2"/>
+                </a:solidFill>
+              </a:rPr>
+              <a:t>ご両親を責めるのではなく、当時のあなたの気持ちを大切にします</a:t>
+            </a:r>
+            <a:endParaRPr lang="en-US" sz="1500" dirty="0"/>
+          </a:p>
+        </p:txBody>
+      </p:sp>
+      <p:sp>
+        <p:nvSpPr>
+          <p:cNvPr id="25" name="Slide Number Placeholder 0"/>
+          <p:cNvSpPr>
+            <a:spLocks noGrp="1"/>
+          </p:cNvSpPr>
+          <p:nvPr>
+            <p:ph type="sldNum" sz="quarter" idx="4294967295"/>
+          </p:nvPr>
+        </p:nvSpPr>
+        <p:spPr>
+          <a:xfrm>
+            <a:off x="8229600" y="4754880"/>
+            <a:ext cx="457200" cy="274320"/>
+          </a:xfrm>
+          <a:prstGeom prst="rect">
+            <a:avLst/>
+          </a:prstGeom>
+          <a:extLst>
+            <a:ext uri="{C572A759-6A51-4108-AA02-DFA0A04FC94B}">
+              <ma14:wrappingTextBoxFlag xmlns:ma14="http://schemas.microsoft.com/office/mac/drawingml/2011/main" val="0"/>
+            </a:ext>
+          </a:extLst>
+        </p:spPr>
+        <p:txBody>
+          <a:bodyPr/>
+          <a:lstStyle>
+            <a:lvl1pPr>
+              <a:defRPr sz="900">
+                <a:solidFill>
+                  <a:srgbClr val="B08A4E"/>
+                </a:solidFill>
+              </a:defRPr>
+            </a:lvl1pPr>
+          </a:lstStyle>
+          <a:p>
+            <a:pPr algn="r"/>
+            <a:fld id="{F7021451-1387-4CA6-816F-3879F97B5CBC}" type="slidenum">
+              <a:rPr b="0" lang="en-US"/>
+              <a:t>14</a:t>
+            </a:fld>
+            <a:endParaRPr lang="en-US"/>
           </a:p>
         </p:txBody>
       </p:sp>
@@ -6892,7 +7279,7 @@
                   <a:schemeClr val="accent2"/>
                 </a:solidFill>
               </a:rPr>
-              <a:t>第2部のはじめに</a:t>
+              <a:t>第2部へ</a:t>
             </a:r>
             <a:endParaRPr lang="en-US" sz="1300" dirty="0"/>
           </a:p>
@@ -6933,7 +7320,7 @@
                 <a:ea typeface="Yu Mincho" pitchFamily="34" charset="-122"/>
                 <a:cs typeface="Yu Mincho" pitchFamily="34" charset="-120"/>
               </a:rPr>
-              <a:t>頭ではわかっているのに、</a:t>
+              <a:t>お話を聴かせてくださって、</a:t>
             </a:r>
             <a:endParaRPr lang="en-US" sz="3200" dirty="0"/>
           </a:p>
@@ -6950,24 +7337,7 @@
                 <a:ea typeface="Yu Mincho" pitchFamily="34" charset="-122"/>
                 <a:cs typeface="Yu Mincho" pitchFamily="34" charset="-120"/>
               </a:rPr>
-              <a:t>お金のことになると、</a:t>
-            </a:r>
-            <a:endParaRPr lang="en-US" sz="3200" dirty="0"/>
-          </a:p>
-          <a:p>
-            <a:pPr algn="ctr" indent="0" marL="0">
-              <a:buNone/>
-            </a:pPr>
-            <a:r>
-              <a:rPr lang="en-US" sz="3200" b="1" dirty="0">
-                <a:solidFill>
-                  <a:schemeClr val="tx2"/>
-                </a:solidFill>
-                <a:latin typeface="Yu Mincho" pitchFamily="34" charset="0"/>
-                <a:ea typeface="Yu Mincho" pitchFamily="34" charset="-122"/>
-                <a:cs typeface="Yu Mincho" pitchFamily="34" charset="-120"/>
-              </a:rPr>
-              <a:t>なぜか同じところで止まってしまう</a:t>
+              <a:t>ありがとうございます</a:t>
             </a:r>
             <a:endParaRPr lang="en-US" sz="3200" dirty="0"/>
           </a:p>
@@ -7005,7 +7375,7 @@
                   <a:schemeClr val="accent2"/>
                 </a:solidFill>
               </a:rPr>
-              <a:t>そんなこと、ありませんか？</a:t>
+              <a:t>ここで少し、頭の仕組みのお話をさせてください</a:t>
             </a:r>
             <a:endParaRPr lang="en-US" sz="1500" dirty="0"/>
           </a:p>
@@ -7083,14 +7453,16 @@
       </p:grpSpPr>
       <p:sp>
         <p:nvSpPr>
-          <p:cNvPr id="2" name="label"/>
-          <p:cNvSpPr txBox="1"/>
-          <p:nvPr/>
-        </p:nvSpPr>
-        <p:spPr>
-          <a:xfrm>
-            <a:off x="457200" y="182880"/>
-            <a:ext cx="5486400" cy="274320"/>
+          <p:cNvPr id="2" name="Text 0"/>
+          <p:cNvSpPr/>
+          <p:nvPr>
+            <p:ph idx="100" type="title" hasCustomPrompt="1"/>
+          </p:nvPr>
+        </p:nvSpPr>
+        <p:spPr>
+          <a:xfrm>
+            <a:off x="731520" y="1828800"/>
+            <a:ext cx="7680960" cy="914400"/>
           </a:xfrm>
           <a:prstGeom prst="rect">
             <a:avLst/>
@@ -7099,52 +7471,14 @@
           <a:ln/>
         </p:spPr>
         <p:txBody>
-          <a:bodyPr wrap="square" lIns="0" tIns="0" rIns="0" bIns="0" rtlCol="0" anchor="t"/>
-          <a:lstStyle/>
-          <a:p>
-            <a:pPr indent="0" marL="0">
-              <a:buNone/>
-            </a:pPr>
-            <a:r>
-              <a:rPr lang="en-US" sz="1100" b="1" dirty="0">
-                <a:solidFill>
-                  <a:schemeClr val="accent1"/>
-                </a:solidFill>
-              </a:rPr>
-              <a:t>第2部　頭の構造を知る ｜ 1 / 7</a:t>
-            </a:r>
-            <a:endParaRPr lang="en-US" sz="1100" dirty="0"/>
-          </a:p>
-        </p:txBody>
-      </p:sp>
-      <p:sp>
-        <p:nvSpPr>
-          <p:cNvPr id="3" name="Text 0"/>
-          <p:cNvSpPr/>
-          <p:nvPr>
-            <p:ph idx="100" type="title" hasCustomPrompt="1"/>
-          </p:nvPr>
-        </p:nvSpPr>
-        <p:spPr>
-          <a:xfrm>
-            <a:off x="457200" y="457200"/>
-            <a:ext cx="8229600" cy="594360"/>
-          </a:xfrm>
-          <a:prstGeom prst="rect">
-            <a:avLst/>
-          </a:prstGeom>
-          <a:noFill/>
-          <a:ln/>
-        </p:spPr>
-        <p:txBody>
-          <a:bodyPr wrap="square" lIns="0" tIns="0" rIns="0" bIns="0" rtlCol="0" anchor="ctr"/>
-          <a:lstStyle/>
-          <a:p>
-            <a:pPr algn="l" indent="0" marL="0">
-              <a:buNone/>
-            </a:pPr>
-            <a:r>
-              <a:rPr lang="en-US" sz="2400" b="1" dirty="0">
+          <a:bodyPr wrap="square" rtlCol="0" anchor="ctr"/>
+          <a:lstStyle/>
+          <a:p>
+            <a:pPr algn="ctr" indent="0" marL="0">
+              <a:buNone/>
+            </a:pPr>
+            <a:r>
+              <a:rPr lang="en-US" sz="3600" b="1" dirty="0">
                 <a:solidFill>
                   <a:schemeClr val="accent2"/>
                 </a:solidFill>
@@ -7152,77 +7486,24 @@
                 <a:ea typeface="Yu Mincho" pitchFamily="34" charset="-122"/>
                 <a:cs typeface="Yu Mincho" pitchFamily="34" charset="-120"/>
               </a:rPr>
-              <a:t>人は「頭」ではなく「感情」で動いている</a:t>
-            </a:r>
-            <a:endParaRPr lang="en-US" sz="2400" dirty="0"/>
-          </a:p>
-        </p:txBody>
-      </p:sp>
-      <p:pic>
-        <p:nvPicPr>
-          <p:cNvPr id="4" name="Image 0" descr="講座スライド">    </p:cNvPr>
-          <p:cNvPicPr>
-            <a:picLocks noChangeAspect="1"/>
-          </p:cNvPicPr>
-          <p:nvPr/>
-        </p:nvPicPr>
-        <p:blipFill>
-          <a:blip r:embed="rId1"/>
-          <a:stretch>
-            <a:fillRect/>
-          </a:stretch>
-        </p:blipFill>
-        <p:spPr>
-          <a:xfrm>
-            <a:off x="457200" y="1234440"/>
-            <a:ext cx="5120640" cy="2880360"/>
-          </a:xfrm>
-          <a:prstGeom prst="rect">
-            <a:avLst/>
-          </a:prstGeom>
-        </p:spPr>
-      </p:pic>
-      <p:sp>
-        <p:nvSpPr>
-          <p:cNvPr id="5" name="money_card"/>
+              <a:t>第2部　頭の構造を知る</a:t>
+            </a:r>
+            <a:endParaRPr lang="en-US" sz="3600" dirty="0"/>
+          </a:p>
+        </p:txBody>
+      </p:sp>
+      <p:sp>
+        <p:nvSpPr>
+          <p:cNvPr id="3" name="Text 0"/>
           <p:cNvSpPr/>
-          <p:nvPr/>
-        </p:nvSpPr>
-        <p:spPr>
-          <a:xfrm>
-            <a:off x="5806440" y="1234440"/>
-            <a:ext cx="2880360" cy="2880360"/>
-          </a:xfrm>
-          <a:prstGeom prst="roundRect">
-            <a:avLst>
-              <a:gd name="adj" fmla="val 3810"/>
-            </a:avLst>
-          </a:prstGeom>
-          <a:solidFill>
-            <a:srgbClr val="F8EBEE"/>
-          </a:solidFill>
-          <a:ln w="9525">
-            <a:solidFill>
-              <a:srgbClr val="E9D9B6"/>
-            </a:solidFill>
-            <a:prstDash val="solid"/>
-          </a:ln>
-        </p:spPr>
-        <p:txBody>
-          <a:bodyPr/>
-          <a:p/>
-        </p:txBody>
-      </p:sp>
-      <p:sp>
-        <p:nvSpPr>
-          <p:cNvPr id="6" name="money_head"/>
-          <p:cNvSpPr txBox="1"/>
-          <p:nvPr/>
-        </p:nvSpPr>
-        <p:spPr>
-          <a:xfrm>
-            <a:off x="5989320" y="1371600"/>
-            <a:ext cx="2560320" cy="365760"/>
+          <p:nvPr>
+            <p:ph idx="101" type="body" hasCustomPrompt="1"/>
+          </p:nvPr>
+        </p:nvSpPr>
+        <p:spPr>
+          <a:xfrm>
+            <a:off x="731520" y="2788920"/>
+            <a:ext cx="7680960" cy="822960"/>
           </a:xfrm>
           <a:prstGeom prst="rect">
             <a:avLst/>
@@ -7231,122 +7512,21 @@
           <a:ln/>
         </p:spPr>
         <p:txBody>
-          <a:bodyPr wrap="square" lIns="1016" tIns="1016" rIns="1016" bIns="1016" rtlCol="0" anchor="t"/>
-          <a:lstStyle/>
-          <a:p>
-            <a:pPr indent="0" marL="0">
-              <a:buNone/>
-            </a:pPr>
-            <a:r>
-              <a:rPr lang="en-US" sz="1500" b="1" dirty="0">
-                <a:solidFill>
-                  <a:schemeClr val="accent2"/>
-                </a:solidFill>
-              </a:rPr>
-              <a:t>お金で言うと…</a:t>
-            </a:r>
-            <a:endParaRPr lang="en-US" sz="1500" dirty="0"/>
-          </a:p>
-        </p:txBody>
-      </p:sp>
-      <p:sp>
-        <p:nvSpPr>
-          <p:cNvPr id="7" name="money_body"/>
-          <p:cNvSpPr txBox="1"/>
-          <p:nvPr/>
-        </p:nvSpPr>
-        <p:spPr>
-          <a:xfrm>
-            <a:off x="5989320" y="1783080"/>
-            <a:ext cx="2560320" cy="2240280"/>
-          </a:xfrm>
-          <a:prstGeom prst="rect">
-            <a:avLst/>
-          </a:prstGeom>
-          <a:noFill/>
-          <a:ln/>
-        </p:spPr>
-        <p:txBody>
-          <a:bodyPr wrap="square" lIns="1016" tIns="1016" rIns="1016" bIns="1016" rtlCol="0" anchor="t"/>
-          <a:lstStyle/>
-          <a:p>
-            <a:pPr indent="0" marL="0">
-              <a:spcAft>
-                <a:spcPts val="600"/>
-              </a:spcAft>
-              <a:buNone/>
-            </a:pPr>
-            <a:r>
-              <a:rPr lang="en-US" sz="1400" dirty="0">
+          <a:bodyPr wrap="square" rtlCol="0" anchor="t"/>
+          <a:lstStyle/>
+          <a:p>
+            <a:pPr algn="ctr" indent="0" marL="0">
+              <a:buNone/>
+            </a:pPr>
+            <a:r>
+              <a:rPr lang="en-US" sz="1600" dirty="0">
                 <a:solidFill>
                   <a:schemeClr val="tx1"/>
                 </a:solidFill>
               </a:rPr>
-              <a:t>「わかっているのに変われない」のは、意志が弱いからではありません。</a:t>
-            </a:r>
-            <a:endParaRPr lang="en-US" sz="1400" dirty="0"/>
-          </a:p>
-          <a:p>
-            <a:pPr indent="0" marL="0">
-              <a:spcAft>
-                <a:spcPts val="600"/>
-              </a:spcAft>
-              <a:buNone/>
-            </a:pPr>
-            <a:r>
-              <a:rPr lang="en-US" sz="1400" dirty="0">
-                <a:solidFill>
-                  <a:schemeClr val="tx1"/>
-                </a:solidFill>
-              </a:rPr>
-              <a:t>頭で考えるより先に、感情が動いているからです。</a:t>
-            </a:r>
-            <a:endParaRPr lang="en-US" sz="1400" dirty="0"/>
-          </a:p>
-        </p:txBody>
-      </p:sp>
-      <p:sp>
-        <p:nvSpPr>
-          <p:cNvPr id="25" name="Slide Number Placeholder 0"/>
-          <p:cNvSpPr>
-            <a:spLocks noGrp="1"/>
-          </p:cNvSpPr>
-          <p:nvPr>
-            <p:ph type="sldNum" sz="quarter" idx="4294967295"/>
-          </p:nvPr>
-        </p:nvSpPr>
-        <p:spPr>
-          <a:xfrm>
-            <a:off x="8229600" y="4754880"/>
-            <a:ext cx="457200" cy="274320"/>
-          </a:xfrm>
-          <a:prstGeom prst="rect">
-            <a:avLst/>
-          </a:prstGeom>
-          <a:extLst>
-            <a:ext uri="{C572A759-6A51-4108-AA02-DFA0A04FC94B}">
-              <ma14:wrappingTextBoxFlag xmlns:ma14="http://schemas.microsoft.com/office/mac/drawingml/2011/main" val="0"/>
-            </a:ext>
-          </a:extLst>
-        </p:spPr>
-        <p:txBody>
-          <a:bodyPr/>
-          <a:lstStyle>
-            <a:lvl1pPr>
-              <a:defRPr sz="900">
-                <a:solidFill>
-                  <a:srgbClr val="B08A4E"/>
-                </a:solidFill>
-              </a:defRPr>
-            </a:lvl1pPr>
-          </a:lstStyle>
-          <a:p>
-            <a:pPr algn="r"/>
-            <a:fld id="{F7021451-1387-4CA6-816F-3879F97B5CBC}" type="slidenum">
-              <a:rPr b="0" lang="en-US"/>
-              <a:t>16</a:t>
-            </a:fld>
-            <a:endParaRPr lang="en-US"/>
+              <a:t>なぜ「わかっているのに」変われないのか（20〜35分）</a:t>
+            </a:r>
+            <a:endParaRPr lang="en-US" sz="1600" dirty="0"/>
           </a:p>
         </p:txBody>
       </p:sp>
@@ -7403,7 +7583,43 @@
       </p:sp>
       <p:sp>
         <p:nvSpPr>
-          <p:cNvPr id="3" name="Text 0"/>
+          <p:cNvPr id="3" name="qlabel"/>
+          <p:cNvSpPr txBox="1"/>
+          <p:nvPr/>
+        </p:nvSpPr>
+        <p:spPr>
+          <a:xfrm>
+            <a:off x="457200" y="320040"/>
+            <a:ext cx="8229600" cy="365760"/>
+          </a:xfrm>
+          <a:prstGeom prst="rect">
+            <a:avLst/>
+          </a:prstGeom>
+          <a:noFill/>
+          <a:ln/>
+        </p:spPr>
+        <p:txBody>
+          <a:bodyPr wrap="square" lIns="0" tIns="0" rIns="0" bIns="0" rtlCol="0" anchor="t"/>
+          <a:lstStyle/>
+          <a:p>
+            <a:pPr algn="ctr" indent="0" marL="0">
+              <a:buNone/>
+            </a:pPr>
+            <a:r>
+              <a:rPr lang="en-US" sz="1300" b="1" dirty="0">
+                <a:solidFill>
+                  <a:schemeClr val="accent2"/>
+                </a:solidFill>
+              </a:rPr>
+              <a:t>第2部のはじめに</a:t>
+            </a:r>
+            <a:endParaRPr lang="en-US" sz="1300" dirty="0"/>
+          </a:p>
+        </p:txBody>
+      </p:sp>
+      <p:sp>
+        <p:nvSpPr>
+          <p:cNvPr id="4" name="Text 0"/>
           <p:cNvSpPr/>
           <p:nvPr>
             <p:ph idx="100" type="title" hasCustomPrompt="1"/>
@@ -7436,9 +7652,81 @@
                 <a:ea typeface="Yu Mincho" pitchFamily="34" charset="-122"/>
                 <a:cs typeface="Yu Mincho" pitchFamily="34" charset="-120"/>
               </a:rPr>
-              <a:t>ピンクの象</a:t>
+              <a:t>頭ではわかっているのに、</a:t>
             </a:r>
             <a:endParaRPr lang="en-US" sz="3200" dirty="0"/>
+          </a:p>
+          <a:p>
+            <a:pPr algn="ctr" indent="0" marL="0">
+              <a:buNone/>
+            </a:pPr>
+            <a:r>
+              <a:rPr lang="en-US" sz="3200" b="1" dirty="0">
+                <a:solidFill>
+                  <a:schemeClr val="tx2"/>
+                </a:solidFill>
+                <a:latin typeface="Yu Mincho" pitchFamily="34" charset="0"/>
+                <a:ea typeface="Yu Mincho" pitchFamily="34" charset="-122"/>
+                <a:cs typeface="Yu Mincho" pitchFamily="34" charset="-120"/>
+              </a:rPr>
+              <a:t>お金のことになると、</a:t>
+            </a:r>
+            <a:endParaRPr lang="en-US" sz="3200" dirty="0"/>
+          </a:p>
+          <a:p>
+            <a:pPr algn="ctr" indent="0" marL="0">
+              <a:buNone/>
+            </a:pPr>
+            <a:r>
+              <a:rPr lang="en-US" sz="3200" b="1" dirty="0">
+                <a:solidFill>
+                  <a:schemeClr val="tx2"/>
+                </a:solidFill>
+                <a:latin typeface="Yu Mincho" pitchFamily="34" charset="0"/>
+                <a:ea typeface="Yu Mincho" pitchFamily="34" charset="-122"/>
+                <a:cs typeface="Yu Mincho" pitchFamily="34" charset="-120"/>
+              </a:rPr>
+              <a:t>なぜか同じところで止まってしまう</a:t>
+            </a:r>
+            <a:endParaRPr lang="en-US" sz="3200" dirty="0"/>
+          </a:p>
+        </p:txBody>
+      </p:sp>
+      <p:sp>
+        <p:nvSpPr>
+          <p:cNvPr id="5" name="Text 0"/>
+          <p:cNvSpPr/>
+          <p:nvPr>
+            <p:ph idx="101" type="body" hasCustomPrompt="1"/>
+          </p:nvPr>
+        </p:nvSpPr>
+        <p:spPr>
+          <a:xfrm>
+            <a:off x="914400" y="3200400"/>
+            <a:ext cx="7315200" cy="731520"/>
+          </a:xfrm>
+          <a:prstGeom prst="rect">
+            <a:avLst/>
+          </a:prstGeom>
+          <a:noFill/>
+          <a:ln/>
+        </p:spPr>
+        <p:txBody>
+          <a:bodyPr wrap="square" rtlCol="0" anchor="t"/>
+          <a:lstStyle/>
+          <a:p>
+            <a:pPr algn="ctr" indent="0" marL="0">
+              <a:buNone/>
+            </a:pPr>
+            <a:r>
+              <a:rPr lang="en-US" sz="1500" dirty="0">
+                <a:solidFill>
+                  <a:schemeClr val="accent2"/>
+                </a:solidFill>
+              </a:rPr>
+              <a:t>その理由を、頭の仕組みからお話しします</a:t>
+            </a:r>
+            <a:endParaRPr lang="en-US" sz="1500" dirty="0"/>
           </a:p>
         </p:txBody>
       </p:sp>
@@ -7542,7 +7830,7 @@
                   <a:schemeClr val="accent1"/>
                 </a:solidFill>
               </a:rPr>
-              <a:t>第2部　頭の構造を知る ｜ 2 / 7</a:t>
+              <a:t>第2部　頭の構造を知る ｜ 1 / 7</a:t>
             </a:r>
             <a:endParaRPr lang="en-US" sz="1100" dirty="0"/>
           </a:p>
@@ -7583,7 +7871,7 @@
                 <a:ea typeface="Yu Mincho" pitchFamily="34" charset="-122"/>
                 <a:cs typeface="Yu Mincho" pitchFamily="34" charset="-120"/>
               </a:rPr>
-              <a:t>脳のクセ①　「〜しない」がわからない</a:t>
+              <a:t>人は「頭」ではなく「感情」で動いている</a:t>
             </a:r>
             <a:endParaRPr lang="en-US" sz="2400" dirty="0"/>
           </a:p>
@@ -7713,7 +8001,24 @@
                   <a:schemeClr val="tx1"/>
                 </a:solidFill>
               </a:rPr>
-              <a:t>「お金で困らないように」と思うほど、脳は「困る」場面を思い描いてしまいます。</a:t>
+              <a:t>「わかっているのに変われない」のは、意志が弱いからではありません。</a:t>
+            </a:r>
+            <a:endParaRPr lang="en-US" sz="1400" dirty="0"/>
+          </a:p>
+          <a:p>
+            <a:pPr indent="0" marL="0">
+              <a:spcAft>
+                <a:spcPts val="600"/>
+              </a:spcAft>
+              <a:buNone/>
+            </a:pPr>
+            <a:r>
+              <a:rPr lang="en-US" sz="1400" dirty="0">
+                <a:solidFill>
+                  <a:schemeClr val="tx1"/>
+                </a:solidFill>
+              </a:rPr>
+              <a:t>頭で考えるより先に、感情が動いているからです。</a:t>
             </a:r>
             <a:endParaRPr lang="en-US" sz="1400" dirty="0"/>
           </a:p>
@@ -7791,14 +8096,42 @@
       </p:grpSpPr>
       <p:sp>
         <p:nvSpPr>
-          <p:cNvPr id="2" name="label"/>
-          <p:cNvSpPr txBox="1"/>
+          <p:cNvPr id="2" name="frame"/>
+          <p:cNvSpPr/>
           <p:nvPr/>
         </p:nvSpPr>
         <p:spPr>
           <a:xfrm>
-            <a:off x="457200" y="182880"/>
-            <a:ext cx="5486400" cy="274320"/>
+            <a:off x="228600" y="137160"/>
+            <a:ext cx="8686800" cy="4526280"/>
+          </a:xfrm>
+          <a:prstGeom prst="rect">
+            <a:avLst/>
+          </a:prstGeom>
+          <a:ln w="12700">
+            <a:solidFill>
+              <a:srgbClr val="B08A4E"/>
+            </a:solidFill>
+            <a:prstDash val="solid"/>
+          </a:ln>
+        </p:spPr>
+        <p:txBody>
+          <a:bodyPr/>
+          <a:p/>
+        </p:txBody>
+      </p:sp>
+      <p:sp>
+        <p:nvSpPr>
+          <p:cNvPr id="3" name="Text 0"/>
+          <p:cNvSpPr/>
+          <p:nvPr>
+            <p:ph idx="100" type="title" hasCustomPrompt="1"/>
+          </p:nvPr>
+        </p:nvSpPr>
+        <p:spPr>
+          <a:xfrm>
+            <a:off x="914400" y="1554480"/>
+            <a:ext cx="7315200" cy="1554480"/>
           </a:xfrm>
           <a:prstGeom prst="rect">
             <a:avLst/>
@@ -7807,192 +8140,24 @@
           <a:ln/>
         </p:spPr>
         <p:txBody>
-          <a:bodyPr wrap="square" lIns="0" tIns="0" rIns="0" bIns="0" rtlCol="0" anchor="t"/>
-          <a:lstStyle/>
-          <a:p>
-            <a:pPr indent="0" marL="0">
-              <a:buNone/>
-            </a:pPr>
-            <a:r>
-              <a:rPr lang="en-US" sz="1100" b="1" dirty="0">
-                <a:solidFill>
-                  <a:schemeClr val="accent1"/>
-                </a:solidFill>
-              </a:rPr>
-              <a:t>第2部　頭の構造を知る ｜ 3 / 7</a:t>
-            </a:r>
-            <a:endParaRPr lang="en-US" sz="1100" dirty="0"/>
-          </a:p>
-        </p:txBody>
-      </p:sp>
-      <p:sp>
-        <p:nvSpPr>
-          <p:cNvPr id="3" name="Text 0"/>
-          <p:cNvSpPr/>
-          <p:nvPr>
-            <p:ph idx="100" type="title" hasCustomPrompt="1"/>
-          </p:nvPr>
-        </p:nvSpPr>
-        <p:spPr>
-          <a:xfrm>
-            <a:off x="457200" y="457200"/>
-            <a:ext cx="8229600" cy="594360"/>
-          </a:xfrm>
-          <a:prstGeom prst="rect">
-            <a:avLst/>
-          </a:prstGeom>
-          <a:noFill/>
-          <a:ln/>
-        </p:spPr>
-        <p:txBody>
-          <a:bodyPr wrap="square" lIns="0" tIns="0" rIns="0" bIns="0" rtlCol="0" anchor="ctr"/>
-          <a:lstStyle/>
-          <a:p>
-            <a:pPr algn="l" indent="0" marL="0">
-              <a:buNone/>
-            </a:pPr>
-            <a:r>
-              <a:rPr lang="en-US" sz="2400" b="1" dirty="0">
-                <a:solidFill>
-                  <a:schemeClr val="accent2"/>
+          <a:bodyPr wrap="square" rtlCol="0" anchor="ctr"/>
+          <a:lstStyle/>
+          <a:p>
+            <a:pPr algn="ctr" indent="0" marL="0">
+              <a:buNone/>
+            </a:pPr>
+            <a:r>
+              <a:rPr lang="en-US" sz="3200" b="1" dirty="0">
+                <a:solidFill>
+                  <a:schemeClr val="tx2"/>
                 </a:solidFill>
                 <a:latin typeface="Yu Mincho" pitchFamily="34" charset="0"/>
                 <a:ea typeface="Yu Mincho" pitchFamily="34" charset="-122"/>
                 <a:cs typeface="Yu Mincho" pitchFamily="34" charset="-120"/>
               </a:rPr>
-              <a:t>脳のクセ②　過去の「強い思い」に引っ張られる</a:t>
-            </a:r>
-            <a:endParaRPr lang="en-US" sz="2400" dirty="0"/>
-          </a:p>
-        </p:txBody>
-      </p:sp>
-      <p:pic>
-        <p:nvPicPr>
-          <p:cNvPr id="4" name="Image 0" descr="講座スライド">    </p:cNvPr>
-          <p:cNvPicPr>
-            <a:picLocks noChangeAspect="1"/>
-          </p:cNvPicPr>
-          <p:nvPr/>
-        </p:nvPicPr>
-        <p:blipFill>
-          <a:blip r:embed="rId1"/>
-          <a:stretch>
-            <a:fillRect/>
-          </a:stretch>
-        </p:blipFill>
-        <p:spPr>
-          <a:xfrm>
-            <a:off x="457200" y="1234440"/>
-            <a:ext cx="5120640" cy="2880360"/>
-          </a:xfrm>
-          <a:prstGeom prst="rect">
-            <a:avLst/>
-          </a:prstGeom>
-        </p:spPr>
-      </p:pic>
-      <p:sp>
-        <p:nvSpPr>
-          <p:cNvPr id="5" name="money_card"/>
-          <p:cNvSpPr/>
-          <p:nvPr/>
-        </p:nvSpPr>
-        <p:spPr>
-          <a:xfrm>
-            <a:off x="5806440" y="1234440"/>
-            <a:ext cx="2880360" cy="2880360"/>
-          </a:xfrm>
-          <a:prstGeom prst="roundRect">
-            <a:avLst>
-              <a:gd name="adj" fmla="val 3810"/>
-            </a:avLst>
-          </a:prstGeom>
-          <a:solidFill>
-            <a:srgbClr val="F8EBEE"/>
-          </a:solidFill>
-          <a:ln w="9525">
-            <a:solidFill>
-              <a:srgbClr val="E9D9B6"/>
-            </a:solidFill>
-            <a:prstDash val="solid"/>
-          </a:ln>
-        </p:spPr>
-        <p:txBody>
-          <a:bodyPr/>
-          <a:p/>
-        </p:txBody>
-      </p:sp>
-      <p:sp>
-        <p:nvSpPr>
-          <p:cNvPr id="6" name="money_head"/>
-          <p:cNvSpPr txBox="1"/>
-          <p:nvPr/>
-        </p:nvSpPr>
-        <p:spPr>
-          <a:xfrm>
-            <a:off x="5989320" y="1371600"/>
-            <a:ext cx="2560320" cy="365760"/>
-          </a:xfrm>
-          <a:prstGeom prst="rect">
-            <a:avLst/>
-          </a:prstGeom>
-          <a:noFill/>
-          <a:ln/>
-        </p:spPr>
-        <p:txBody>
-          <a:bodyPr wrap="square" lIns="1016" tIns="1016" rIns="1016" bIns="1016" rtlCol="0" anchor="t"/>
-          <a:lstStyle/>
-          <a:p>
-            <a:pPr indent="0" marL="0">
-              <a:buNone/>
-            </a:pPr>
-            <a:r>
-              <a:rPr lang="en-US" sz="1500" b="1" dirty="0">
-                <a:solidFill>
-                  <a:schemeClr val="accent2"/>
-                </a:solidFill>
-              </a:rPr>
-              <a:t>お金で言うと…</a:t>
-            </a:r>
-            <a:endParaRPr lang="en-US" sz="1500" dirty="0"/>
-          </a:p>
-        </p:txBody>
-      </p:sp>
-      <p:sp>
-        <p:nvSpPr>
-          <p:cNvPr id="7" name="money_body"/>
-          <p:cNvSpPr txBox="1"/>
-          <p:nvPr/>
-        </p:nvSpPr>
-        <p:spPr>
-          <a:xfrm>
-            <a:off x="5989320" y="1783080"/>
-            <a:ext cx="2560320" cy="2240280"/>
-          </a:xfrm>
-          <a:prstGeom prst="rect">
-            <a:avLst/>
-          </a:prstGeom>
-          <a:noFill/>
-          <a:ln/>
-        </p:spPr>
-        <p:txBody>
-          <a:bodyPr wrap="square" lIns="1016" tIns="1016" rIns="1016" bIns="1016" rtlCol="0" anchor="t"/>
-          <a:lstStyle/>
-          <a:p>
-            <a:pPr indent="0" marL="0">
-              <a:spcAft>
-                <a:spcPts val="600"/>
-              </a:spcAft>
-              <a:buNone/>
-            </a:pPr>
-            <a:r>
-              <a:rPr lang="en-US" sz="1400" dirty="0">
-                <a:solidFill>
-                  <a:schemeClr val="tx1"/>
-                </a:solidFill>
-              </a:rPr>
-              <a:t>子どもの頃の強い体験は「二度と触れるな」と保存されて、今のお金の判断にブレーキをかけます。</a:t>
-            </a:r>
-            <a:endParaRPr lang="en-US" sz="1400" dirty="0"/>
+              <a:t>ピンクの象</a:t>
+            </a:r>
+            <a:endParaRPr lang="en-US" sz="3200" dirty="0"/>
           </a:p>
         </p:txBody>
       </p:sp>
@@ -8959,7 +9124,7 @@
                   <a:schemeClr val="accent1"/>
                 </a:solidFill>
               </a:rPr>
-              <a:t>第2部　頭の構造を知る ｜ 4 / 7</a:t>
+              <a:t>第2部　頭の構造を知る ｜ 2 / 7</a:t>
             </a:r>
             <a:endParaRPr lang="en-US" sz="1100" dirty="0"/>
           </a:p>
@@ -9000,352 +9165,50 @@
                 <a:ea typeface="Yu Mincho" pitchFamily="34" charset="-122"/>
                 <a:cs typeface="Yu Mincho" pitchFamily="34" charset="-120"/>
               </a:rPr>
-              <a:t>その「強い思い」が刻まれるのが、ゴールデンエイジ</a:t>
+              <a:t>脳のクセ①　「〜しない」がわからない</a:t>
             </a:r>
             <a:endParaRPr lang="en-US" sz="2400" dirty="0"/>
           </a:p>
         </p:txBody>
       </p:sp>
-      <p:sp>
-        <p:nvSpPr>
-          <p:cNvPr id="4" name="ga_card0"/>
+      <p:pic>
+        <p:nvPicPr>
+          <p:cNvPr id="4" name="Image 0" descr="講座スライド">    </p:cNvPr>
+          <p:cNvPicPr>
+            <a:picLocks noChangeAspect="1"/>
+          </p:cNvPicPr>
+          <p:nvPr/>
+        </p:nvPicPr>
+        <p:blipFill>
+          <a:blip r:embed="rId1"/>
+          <a:stretch>
+            <a:fillRect/>
+          </a:stretch>
+        </p:blipFill>
+        <p:spPr>
+          <a:xfrm>
+            <a:off x="457200" y="1234440"/>
+            <a:ext cx="5120640" cy="2880360"/>
+          </a:xfrm>
+          <a:prstGeom prst="rect">
+            <a:avLst/>
+          </a:prstGeom>
+        </p:spPr>
+      </p:pic>
+      <p:sp>
+        <p:nvSpPr>
+          <p:cNvPr id="5" name="money_card"/>
           <p:cNvSpPr/>
           <p:nvPr/>
         </p:nvSpPr>
         <p:spPr>
           <a:xfrm>
-            <a:off x="457200" y="1234440"/>
-            <a:ext cx="5120640" cy="822960"/>
+            <a:off x="5806440" y="1234440"/>
+            <a:ext cx="2880360" cy="2880360"/>
           </a:xfrm>
           <a:prstGeom prst="roundRect">
             <a:avLst>
-              <a:gd name="adj" fmla="val 13333"/>
-            </a:avLst>
-          </a:prstGeom>
-          <a:solidFill>
-            <a:srgbClr val="FDFAF4"/>
-          </a:solidFill>
-          <a:ln w="9525">
-            <a:solidFill>
-              <a:srgbClr val="E9D9B6"/>
-            </a:solidFill>
-            <a:prstDash val="solid"/>
-          </a:ln>
-        </p:spPr>
-        <p:txBody>
-          <a:bodyPr/>
-          <a:p/>
-        </p:txBody>
-      </p:sp>
-      <p:sp>
-        <p:nvSpPr>
-          <p:cNvPr id="5" name="ga0_c"/>
-          <p:cNvSpPr/>
-          <p:nvPr/>
-        </p:nvSpPr>
-        <p:spPr>
-          <a:xfrm>
-            <a:off x="621792" y="1453896"/>
-            <a:ext cx="384048" cy="384048"/>
-          </a:xfrm>
-          <a:prstGeom prst="ellipse">
-            <a:avLst/>
-          </a:prstGeom>
-          <a:solidFill>
-            <a:srgbClr val="B08A4E"/>
-          </a:solidFill>
-          <a:ln/>
-        </p:spPr>
-        <p:txBody>
-          <a:bodyPr/>
-          <a:p/>
-        </p:txBody>
-      </p:sp>
-      <p:sp>
-        <p:nvSpPr>
-          <p:cNvPr id="6" name="ga0_n"/>
-          <p:cNvSpPr txBox="1"/>
-          <p:nvPr/>
-        </p:nvSpPr>
-        <p:spPr>
-          <a:xfrm>
-            <a:off x="621792" y="1453896"/>
-            <a:ext cx="384048" cy="384048"/>
-          </a:xfrm>
-          <a:prstGeom prst="rect">
-            <a:avLst/>
-          </a:prstGeom>
-          <a:noFill/>
-          <a:ln/>
-        </p:spPr>
-        <p:txBody>
-          <a:bodyPr wrap="square" lIns="0" tIns="0" rIns="0" bIns="0" rtlCol="0" anchor="ctr"/>
-          <a:lstStyle/>
-          <a:p>
-            <a:pPr algn="ctr" indent="0" marL="0">
-              <a:buNone/>
-            </a:pPr>
-            <a:r>
-              <a:rPr lang="en-US" sz="1500" b="1" dirty="0">
-                <a:solidFill>
-                  <a:schemeClr val="bg1"/>
-                </a:solidFill>
-              </a:rPr>
-              <a:t>1</a:t>
-            </a:r>
-            <a:endParaRPr lang="en-US" sz="1500" dirty="0"/>
-          </a:p>
-        </p:txBody>
-      </p:sp>
-      <p:sp>
-        <p:nvSpPr>
-          <p:cNvPr id="7" name="ga_head0"/>
-          <p:cNvSpPr txBox="1"/>
-          <p:nvPr/>
-        </p:nvSpPr>
-        <p:spPr>
-          <a:xfrm>
-            <a:off x="1143000" y="1298448"/>
-            <a:ext cx="4297680" cy="347472"/>
-          </a:xfrm>
-          <a:prstGeom prst="rect">
-            <a:avLst/>
-          </a:prstGeom>
-          <a:noFill/>
-          <a:ln/>
-        </p:spPr>
-        <p:txBody>
-          <a:bodyPr wrap="square" lIns="1016" tIns="1016" rIns="1016" bIns="1016" rtlCol="0" anchor="t"/>
-          <a:lstStyle/>
-          <a:p>
-            <a:pPr indent="0" marL="0">
-              <a:buNone/>
-            </a:pPr>
-            <a:r>
-              <a:rPr lang="en-US" sz="1600" b="1" dirty="0">
-                <a:solidFill>
-                  <a:schemeClr val="tx2"/>
-                </a:solidFill>
-              </a:rPr>
-              <a:t>子どもの頃</a:t>
-            </a:r>
-            <a:endParaRPr lang="en-US" sz="1600" dirty="0"/>
-          </a:p>
-        </p:txBody>
-      </p:sp>
-      <p:sp>
-        <p:nvSpPr>
-          <p:cNvPr id="8" name="ga_body0"/>
-          <p:cNvSpPr txBox="1"/>
-          <p:nvPr/>
-        </p:nvSpPr>
-        <p:spPr>
-          <a:xfrm>
-            <a:off x="1143000" y="1645920"/>
-            <a:ext cx="4297680" cy="365760"/>
-          </a:xfrm>
-          <a:prstGeom prst="rect">
-            <a:avLst/>
-          </a:prstGeom>
-          <a:noFill/>
-          <a:ln/>
-        </p:spPr>
-        <p:txBody>
-          <a:bodyPr wrap="square" lIns="1016" tIns="1016" rIns="1016" bIns="1016" rtlCol="0" anchor="t"/>
-          <a:lstStyle/>
-          <a:p>
-            <a:pPr indent="0" marL="0">
-              <a:buNone/>
-            </a:pPr>
-            <a:r>
-              <a:rPr lang="en-US" sz="1400" dirty="0">
-                <a:solidFill>
-                  <a:schemeClr val="tx1"/>
-                </a:solidFill>
-              </a:rPr>
-              <a:t>家の中で見たこと・聞いた言葉・言われ方</a:t>
-            </a:r>
-            <a:endParaRPr lang="en-US" sz="1400" dirty="0"/>
-          </a:p>
-        </p:txBody>
-      </p:sp>
-      <p:sp>
-        <p:nvSpPr>
-          <p:cNvPr id="9" name="ga_card1"/>
-          <p:cNvSpPr/>
-          <p:nvPr/>
-        </p:nvSpPr>
-        <p:spPr>
-          <a:xfrm>
-            <a:off x="457200" y="2221992"/>
-            <a:ext cx="5120640" cy="822960"/>
-          </a:xfrm>
-          <a:prstGeom prst="roundRect">
-            <a:avLst>
-              <a:gd name="adj" fmla="val 13333"/>
-            </a:avLst>
-          </a:prstGeom>
-          <a:solidFill>
-            <a:srgbClr val="FDFAF4"/>
-          </a:solidFill>
-          <a:ln w="9525">
-            <a:solidFill>
-              <a:srgbClr val="E9D9B6"/>
-            </a:solidFill>
-            <a:prstDash val="solid"/>
-          </a:ln>
-        </p:spPr>
-        <p:txBody>
-          <a:bodyPr/>
-          <a:p/>
-        </p:txBody>
-      </p:sp>
-      <p:sp>
-        <p:nvSpPr>
-          <p:cNvPr id="10" name="ga1_c"/>
-          <p:cNvSpPr/>
-          <p:nvPr/>
-        </p:nvSpPr>
-        <p:spPr>
-          <a:xfrm>
-            <a:off x="621792" y="2441448"/>
-            <a:ext cx="384048" cy="384048"/>
-          </a:xfrm>
-          <a:prstGeom prst="ellipse">
-            <a:avLst/>
-          </a:prstGeom>
-          <a:solidFill>
-            <a:srgbClr val="B08A4E"/>
-          </a:solidFill>
-          <a:ln/>
-        </p:spPr>
-        <p:txBody>
-          <a:bodyPr/>
-          <a:p/>
-        </p:txBody>
-      </p:sp>
-      <p:sp>
-        <p:nvSpPr>
-          <p:cNvPr id="11" name="ga1_n"/>
-          <p:cNvSpPr txBox="1"/>
-          <p:nvPr/>
-        </p:nvSpPr>
-        <p:spPr>
-          <a:xfrm>
-            <a:off x="621792" y="2441448"/>
-            <a:ext cx="384048" cy="384048"/>
-          </a:xfrm>
-          <a:prstGeom prst="rect">
-            <a:avLst/>
-          </a:prstGeom>
-          <a:noFill/>
-          <a:ln/>
-        </p:spPr>
-        <p:txBody>
-          <a:bodyPr wrap="square" lIns="0" tIns="0" rIns="0" bIns="0" rtlCol="0" anchor="ctr"/>
-          <a:lstStyle/>
-          <a:p>
-            <a:pPr algn="ctr" indent="0" marL="0">
-              <a:buNone/>
-            </a:pPr>
-            <a:r>
-              <a:rPr lang="en-US" sz="1500" b="1" dirty="0">
-                <a:solidFill>
-                  <a:schemeClr val="bg1"/>
-                </a:solidFill>
-              </a:rPr>
-              <a:t>2</a:t>
-            </a:r>
-            <a:endParaRPr lang="en-US" sz="1500" dirty="0"/>
-          </a:p>
-        </p:txBody>
-      </p:sp>
-      <p:sp>
-        <p:nvSpPr>
-          <p:cNvPr id="12" name="ga_head1"/>
-          <p:cNvSpPr txBox="1"/>
-          <p:nvPr/>
-        </p:nvSpPr>
-        <p:spPr>
-          <a:xfrm>
-            <a:off x="1143000" y="2286000"/>
-            <a:ext cx="4297680" cy="347472"/>
-          </a:xfrm>
-          <a:prstGeom prst="rect">
-            <a:avLst/>
-          </a:prstGeom>
-          <a:noFill/>
-          <a:ln/>
-        </p:spPr>
-        <p:txBody>
-          <a:bodyPr wrap="square" lIns="1016" tIns="1016" rIns="1016" bIns="1016" rtlCol="0" anchor="t"/>
-          <a:lstStyle/>
-          <a:p>
-            <a:pPr indent="0" marL="0">
-              <a:buNone/>
-            </a:pPr>
-            <a:r>
-              <a:rPr lang="en-US" sz="1600" b="1" dirty="0">
-                <a:solidFill>
-                  <a:schemeClr val="tx2"/>
-                </a:solidFill>
-              </a:rPr>
-              <a:t>脳が保存</a:t>
-            </a:r>
-            <a:endParaRPr lang="en-US" sz="1600" dirty="0"/>
-          </a:p>
-        </p:txBody>
-      </p:sp>
-      <p:sp>
-        <p:nvSpPr>
-          <p:cNvPr id="13" name="ga_body1"/>
-          <p:cNvSpPr txBox="1"/>
-          <p:nvPr/>
-        </p:nvSpPr>
-        <p:spPr>
-          <a:xfrm>
-            <a:off x="1143000" y="2633472"/>
-            <a:ext cx="4297680" cy="365760"/>
-          </a:xfrm>
-          <a:prstGeom prst="rect">
-            <a:avLst/>
-          </a:prstGeom>
-          <a:noFill/>
-          <a:ln/>
-        </p:spPr>
-        <p:txBody>
-          <a:bodyPr wrap="square" lIns="1016" tIns="1016" rIns="1016" bIns="1016" rtlCol="0" anchor="t"/>
-          <a:lstStyle/>
-          <a:p>
-            <a:pPr indent="0" marL="0">
-              <a:buNone/>
-            </a:pPr>
-            <a:r>
-              <a:rPr lang="en-US" sz="1400" dirty="0">
-                <a:solidFill>
-                  <a:schemeClr val="tx1"/>
-                </a:solidFill>
-              </a:rPr>
-              <a:t>「これが当たり前」として記憶する</a:t>
-            </a:r>
-            <a:endParaRPr lang="en-US" sz="1400" dirty="0"/>
-          </a:p>
-        </p:txBody>
-      </p:sp>
-      <p:sp>
-        <p:nvSpPr>
-          <p:cNvPr id="14" name="ga_card2"/>
-          <p:cNvSpPr/>
-          <p:nvPr/>
-        </p:nvSpPr>
-        <p:spPr>
-          <a:xfrm>
-            <a:off x="457200" y="3209544"/>
-            <a:ext cx="5120640" cy="822960"/>
-          </a:xfrm>
-          <a:prstGeom prst="roundRect">
-            <a:avLst>
-              <a:gd name="adj" fmla="val 13333"/>
+              <a:gd name="adj" fmla="val 3810"/>
             </a:avLst>
           </a:prstGeom>
           <a:solidFill>
@@ -9365,38 +9228,14 @@
       </p:sp>
       <p:sp>
         <p:nvSpPr>
-          <p:cNvPr id="15" name="ga2_c"/>
-          <p:cNvSpPr/>
-          <p:nvPr/>
-        </p:nvSpPr>
-        <p:spPr>
-          <a:xfrm>
-            <a:off x="621792" y="3429000"/>
-            <a:ext cx="384048" cy="384048"/>
-          </a:xfrm>
-          <a:prstGeom prst="ellipse">
-            <a:avLst/>
-          </a:prstGeom>
-          <a:solidFill>
-            <a:srgbClr val="B08A4E"/>
-          </a:solidFill>
-          <a:ln/>
-        </p:spPr>
-        <p:txBody>
-          <a:bodyPr/>
-          <a:p/>
-        </p:txBody>
-      </p:sp>
-      <p:sp>
-        <p:nvSpPr>
-          <p:cNvPr id="16" name="ga2_n"/>
+          <p:cNvPr id="6" name="money_head"/>
           <p:cNvSpPr txBox="1"/>
           <p:nvPr/>
         </p:nvSpPr>
         <p:spPr>
           <a:xfrm>
-            <a:off x="621792" y="3429000"/>
-            <a:ext cx="384048" cy="384048"/>
+            <a:off x="5989320" y="1371600"/>
+            <a:ext cx="2560320" cy="365760"/>
           </a:xfrm>
           <a:prstGeom prst="rect">
             <a:avLst/>
@@ -9405,19 +9244,19 @@
           <a:ln/>
         </p:spPr>
         <p:txBody>
-          <a:bodyPr wrap="square" lIns="0" tIns="0" rIns="0" bIns="0" rtlCol="0" anchor="ctr"/>
-          <a:lstStyle/>
-          <a:p>
-            <a:pPr algn="ctr" indent="0" marL="0">
+          <a:bodyPr wrap="square" lIns="1016" tIns="1016" rIns="1016" bIns="1016" rtlCol="0" anchor="t"/>
+          <a:lstStyle/>
+          <a:p>
+            <a:pPr indent="0" marL="0">
               <a:buNone/>
             </a:pPr>
             <a:r>
               <a:rPr lang="en-US" sz="1500" b="1" dirty="0">
                 <a:solidFill>
-                  <a:schemeClr val="bg1"/>
-                </a:solidFill>
-              </a:rPr>
-              <a:t>3</a:t>
+                  <a:schemeClr val="accent2"/>
+                </a:solidFill>
+              </a:rPr>
+              <a:t>お金で言うと…</a:t>
             </a:r>
             <a:endParaRPr lang="en-US" sz="1500" dirty="0"/>
           </a:p>
@@ -9425,14 +9264,14 @@
       </p:sp>
       <p:sp>
         <p:nvSpPr>
-          <p:cNvPr id="17" name="ga_head2"/>
+          <p:cNvPr id="7" name="money_body"/>
           <p:cNvSpPr txBox="1"/>
           <p:nvPr/>
         </p:nvSpPr>
         <p:spPr>
           <a:xfrm>
-            <a:off x="1143000" y="3273552"/>
-            <a:ext cx="4297680" cy="347472"/>
+            <a:off x="5989320" y="1783080"/>
+            <a:ext cx="2560320" cy="2240280"/>
           </a:xfrm>
           <a:prstGeom prst="rect">
             <a:avLst/>
@@ -9445,42 +9284,9 @@
           <a:lstStyle/>
           <a:p>
             <a:pPr indent="0" marL="0">
-              <a:buNone/>
-            </a:pPr>
-            <a:r>
-              <a:rPr lang="en-US" sz="1600" b="1" dirty="0">
-                <a:solidFill>
-                  <a:schemeClr val="tx2"/>
-                </a:solidFill>
-              </a:rPr>
-              <a:t>大人になった今</a:t>
-            </a:r>
-            <a:endParaRPr lang="en-US" sz="1600" dirty="0"/>
-          </a:p>
-        </p:txBody>
-      </p:sp>
-      <p:sp>
-        <p:nvSpPr>
-          <p:cNvPr id="18" name="ga_body2"/>
-          <p:cNvSpPr txBox="1"/>
-          <p:nvPr/>
-        </p:nvSpPr>
-        <p:spPr>
-          <a:xfrm>
-            <a:off x="1143000" y="3621024"/>
-            <a:ext cx="4297680" cy="365760"/>
-          </a:xfrm>
-          <a:prstGeom prst="rect">
-            <a:avLst/>
-          </a:prstGeom>
-          <a:noFill/>
-          <a:ln/>
-        </p:spPr>
-        <p:txBody>
-          <a:bodyPr wrap="square" lIns="1016" tIns="1016" rIns="1016" bIns="1016" rtlCol="0" anchor="t"/>
-          <a:lstStyle/>
-          <a:p>
-            <a:pPr indent="0" marL="0">
+              <a:spcAft>
+                <a:spcPts val="600"/>
+              </a:spcAft>
               <a:buNone/>
             </a:pPr>
             <a:r>
@@ -9489,110 +9295,7 @@
                   <a:schemeClr val="tx1"/>
                 </a:solidFill>
               </a:rPr>
-              <a:t>その当たり前が、自分の基準として動き続ける</a:t>
-            </a:r>
-            <a:endParaRPr lang="en-US" sz="1400" dirty="0"/>
-          </a:p>
-        </p:txBody>
-      </p:sp>
-      <p:sp>
-        <p:nvSpPr>
-          <p:cNvPr id="19" name="money_card"/>
-          <p:cNvSpPr/>
-          <p:nvPr/>
-        </p:nvSpPr>
-        <p:spPr>
-          <a:xfrm>
-            <a:off x="5806440" y="1234440"/>
-            <a:ext cx="2880360" cy="2798064"/>
-          </a:xfrm>
-          <a:prstGeom prst="roundRect">
-            <a:avLst>
-              <a:gd name="adj" fmla="val 3922"/>
-            </a:avLst>
-          </a:prstGeom>
-          <a:solidFill>
-            <a:srgbClr val="F8EBEE"/>
-          </a:solidFill>
-          <a:ln w="9525">
-            <a:solidFill>
-              <a:srgbClr val="E9D9B6"/>
-            </a:solidFill>
-            <a:prstDash val="solid"/>
-          </a:ln>
-        </p:spPr>
-        <p:txBody>
-          <a:bodyPr/>
-          <a:p/>
-        </p:txBody>
-      </p:sp>
-      <p:sp>
-        <p:nvSpPr>
-          <p:cNvPr id="20" name="money_head"/>
-          <p:cNvSpPr txBox="1"/>
-          <p:nvPr/>
-        </p:nvSpPr>
-        <p:spPr>
-          <a:xfrm>
-            <a:off x="5989320" y="1371600"/>
-            <a:ext cx="2560320" cy="365760"/>
-          </a:xfrm>
-          <a:prstGeom prst="rect">
-            <a:avLst/>
-          </a:prstGeom>
-          <a:noFill/>
-          <a:ln/>
-        </p:spPr>
-        <p:txBody>
-          <a:bodyPr wrap="square" lIns="1016" tIns="1016" rIns="1016" bIns="1016" rtlCol="0" anchor="t"/>
-          <a:lstStyle/>
-          <a:p>
-            <a:pPr indent="0" marL="0">
-              <a:buNone/>
-            </a:pPr>
-            <a:r>
-              <a:rPr lang="en-US" sz="1500" b="1" dirty="0">
-                <a:solidFill>
-                  <a:schemeClr val="accent2"/>
-                </a:solidFill>
-              </a:rPr>
-              <a:t>お金で言うと…</a:t>
-            </a:r>
-            <a:endParaRPr lang="en-US" sz="1500" dirty="0"/>
-          </a:p>
-        </p:txBody>
-      </p:sp>
-      <p:sp>
-        <p:nvSpPr>
-          <p:cNvPr id="21" name="money_body"/>
-          <p:cNvSpPr txBox="1"/>
-          <p:nvPr/>
-        </p:nvSpPr>
-        <p:spPr>
-          <a:xfrm>
-            <a:off x="5989320" y="1783080"/>
-            <a:ext cx="2560320" cy="2103120"/>
-          </a:xfrm>
-          <a:prstGeom prst="rect">
-            <a:avLst/>
-          </a:prstGeom>
-          <a:noFill/>
-          <a:ln/>
-        </p:spPr>
-        <p:txBody>
-          <a:bodyPr wrap="square" lIns="1016" tIns="1016" rIns="1016" bIns="1016" rtlCol="0" anchor="t"/>
-          <a:lstStyle/>
-          <a:p>
-            <a:pPr indent="0" marL="0">
-              <a:buNone/>
-            </a:pPr>
-            <a:r>
-              <a:rPr lang="en-US" sz="1400" dirty="0">
-                <a:solidFill>
-                  <a:schemeClr val="tx1"/>
-                </a:solidFill>
-              </a:rPr>
-              <a:t>子どもの頃に、お金のまわりで見たこと・聞いたことが、今の「お金の当たり前」になっています。</a:t>
+              <a:t>「お金で困らないように」と思うほど、脳は「困る」場面を思い描いてしまいます。</a:t>
             </a:r>
             <a:endParaRPr lang="en-US" sz="1400" dirty="0"/>
           </a:p>
@@ -9698,7 +9401,7 @@
                   <a:schemeClr val="accent1"/>
                 </a:solidFill>
               </a:rPr>
-              <a:t>第2部　頭の構造を知る ｜ 5 / 7</a:t>
+              <a:t>第2部　頭の構造を知る ｜ 3 / 7</a:t>
             </a:r>
             <a:endParaRPr lang="en-US" sz="1100" dirty="0"/>
           </a:p>
@@ -9739,7 +9442,7 @@
                 <a:ea typeface="Yu Mincho" pitchFamily="34" charset="-122"/>
                 <a:cs typeface="Yu Mincho" pitchFamily="34" charset="-120"/>
               </a:rPr>
-              <a:t>でも、その「当たり前」は人によって全然ちがう</a:t>
+              <a:t>脳のクセ②　過去の「強い思い」に引っ張られる</a:t>
             </a:r>
             <a:endParaRPr lang="en-US" sz="2400" dirty="0"/>
           </a:p>
@@ -9869,24 +9572,7 @@
                   <a:schemeClr val="tx1"/>
                 </a:solidFill>
               </a:rPr>
-              <a:t>あなたの「お金の当たり前」は、あなたの家で作られたもの。</a:t>
-            </a:r>
-            <a:endParaRPr lang="en-US" sz="1400" dirty="0"/>
-          </a:p>
-          <a:p>
-            <a:pPr indent="0" marL="0">
-              <a:spcAft>
-                <a:spcPts val="600"/>
-              </a:spcAft>
-              <a:buNone/>
-            </a:pPr>
-            <a:r>
-              <a:rPr lang="en-US" sz="1400" dirty="0">
-                <a:solidFill>
-                  <a:schemeClr val="tx1"/>
-                </a:solidFill>
-              </a:rPr>
-              <a:t>作られたものだから、書き換えられます。</a:t>
+              <a:t>子どもの頃の強い体験は「二度と触れるな」と保存されて、今のお金の判断にブレーキをかけます。</a:t>
             </a:r>
             <a:endParaRPr lang="en-US" sz="1400" dirty="0"/>
           </a:p>
@@ -9992,7 +9678,7 @@
                   <a:schemeClr val="accent1"/>
                 </a:solidFill>
               </a:rPr>
-              <a:t>第2部　頭の構造を知る ｜ 6 / 7</a:t>
+              <a:t>第2部　頭の構造を知る ｜ 4 / 7</a:t>
             </a:r>
             <a:endParaRPr lang="en-US" sz="1100" dirty="0"/>
           </a:p>
@@ -10033,50 +9719,352 @@
                 <a:ea typeface="Yu Mincho" pitchFamily="34" charset="-122"/>
                 <a:cs typeface="Yu Mincho" pitchFamily="34" charset="-120"/>
               </a:rPr>
-              <a:t>ポジティブとは「入れ替えられる」こと</a:t>
+              <a:t>その「強い思い」が刻まれるのが、ゴールデンエイジ</a:t>
             </a:r>
             <a:endParaRPr lang="en-US" sz="2400" dirty="0"/>
           </a:p>
         </p:txBody>
       </p:sp>
-      <p:pic>
-        <p:nvPicPr>
-          <p:cNvPr id="4" name="Image 0" descr="講座スライド">    </p:cNvPr>
-          <p:cNvPicPr>
-            <a:picLocks noChangeAspect="1"/>
-          </p:cNvPicPr>
-          <p:nvPr/>
-        </p:nvPicPr>
-        <p:blipFill>
-          <a:blip r:embed="rId1"/>
-          <a:stretch>
-            <a:fillRect/>
-          </a:stretch>
-        </p:blipFill>
-        <p:spPr>
-          <a:xfrm>
-            <a:off x="457200" y="1234440"/>
-            <a:ext cx="5120640" cy="2880360"/>
-          </a:xfrm>
-          <a:prstGeom prst="rect">
-            <a:avLst/>
-          </a:prstGeom>
-        </p:spPr>
-      </p:pic>
-      <p:sp>
-        <p:nvSpPr>
-          <p:cNvPr id="5" name="money_card"/>
+      <p:sp>
+        <p:nvSpPr>
+          <p:cNvPr id="4" name="ga_card0"/>
           <p:cNvSpPr/>
           <p:nvPr/>
         </p:nvSpPr>
         <p:spPr>
           <a:xfrm>
-            <a:off x="5806440" y="1234440"/>
-            <a:ext cx="2880360" cy="2880360"/>
+            <a:off x="457200" y="1234440"/>
+            <a:ext cx="5120640" cy="822960"/>
           </a:xfrm>
           <a:prstGeom prst="roundRect">
             <a:avLst>
-              <a:gd name="adj" fmla="val 3810"/>
+              <a:gd name="adj" fmla="val 13333"/>
+            </a:avLst>
+          </a:prstGeom>
+          <a:solidFill>
+            <a:srgbClr val="FDFAF4"/>
+          </a:solidFill>
+          <a:ln w="9525">
+            <a:solidFill>
+              <a:srgbClr val="E9D9B6"/>
+            </a:solidFill>
+            <a:prstDash val="solid"/>
+          </a:ln>
+        </p:spPr>
+        <p:txBody>
+          <a:bodyPr/>
+          <a:p/>
+        </p:txBody>
+      </p:sp>
+      <p:sp>
+        <p:nvSpPr>
+          <p:cNvPr id="5" name="ga0_c"/>
+          <p:cNvSpPr/>
+          <p:nvPr/>
+        </p:nvSpPr>
+        <p:spPr>
+          <a:xfrm>
+            <a:off x="621792" y="1453896"/>
+            <a:ext cx="384048" cy="384048"/>
+          </a:xfrm>
+          <a:prstGeom prst="ellipse">
+            <a:avLst/>
+          </a:prstGeom>
+          <a:solidFill>
+            <a:srgbClr val="B08A4E"/>
+          </a:solidFill>
+          <a:ln/>
+        </p:spPr>
+        <p:txBody>
+          <a:bodyPr/>
+          <a:p/>
+        </p:txBody>
+      </p:sp>
+      <p:sp>
+        <p:nvSpPr>
+          <p:cNvPr id="6" name="ga0_n"/>
+          <p:cNvSpPr txBox="1"/>
+          <p:nvPr/>
+        </p:nvSpPr>
+        <p:spPr>
+          <a:xfrm>
+            <a:off x="621792" y="1453896"/>
+            <a:ext cx="384048" cy="384048"/>
+          </a:xfrm>
+          <a:prstGeom prst="rect">
+            <a:avLst/>
+          </a:prstGeom>
+          <a:noFill/>
+          <a:ln/>
+        </p:spPr>
+        <p:txBody>
+          <a:bodyPr wrap="square" lIns="0" tIns="0" rIns="0" bIns="0" rtlCol="0" anchor="ctr"/>
+          <a:lstStyle/>
+          <a:p>
+            <a:pPr algn="ctr" indent="0" marL="0">
+              <a:buNone/>
+            </a:pPr>
+            <a:r>
+              <a:rPr lang="en-US" sz="1500" b="1" dirty="0">
+                <a:solidFill>
+                  <a:schemeClr val="bg1"/>
+                </a:solidFill>
+              </a:rPr>
+              <a:t>1</a:t>
+            </a:r>
+            <a:endParaRPr lang="en-US" sz="1500" dirty="0"/>
+          </a:p>
+        </p:txBody>
+      </p:sp>
+      <p:sp>
+        <p:nvSpPr>
+          <p:cNvPr id="7" name="ga_head0"/>
+          <p:cNvSpPr txBox="1"/>
+          <p:nvPr/>
+        </p:nvSpPr>
+        <p:spPr>
+          <a:xfrm>
+            <a:off x="1143000" y="1298448"/>
+            <a:ext cx="4297680" cy="347472"/>
+          </a:xfrm>
+          <a:prstGeom prst="rect">
+            <a:avLst/>
+          </a:prstGeom>
+          <a:noFill/>
+          <a:ln/>
+        </p:spPr>
+        <p:txBody>
+          <a:bodyPr wrap="square" lIns="1016" tIns="1016" rIns="1016" bIns="1016" rtlCol="0" anchor="t"/>
+          <a:lstStyle/>
+          <a:p>
+            <a:pPr indent="0" marL="0">
+              <a:buNone/>
+            </a:pPr>
+            <a:r>
+              <a:rPr lang="en-US" sz="1600" b="1" dirty="0">
+                <a:solidFill>
+                  <a:schemeClr val="tx2"/>
+                </a:solidFill>
+              </a:rPr>
+              <a:t>子どもの頃</a:t>
+            </a:r>
+            <a:endParaRPr lang="en-US" sz="1600" dirty="0"/>
+          </a:p>
+        </p:txBody>
+      </p:sp>
+      <p:sp>
+        <p:nvSpPr>
+          <p:cNvPr id="8" name="ga_body0"/>
+          <p:cNvSpPr txBox="1"/>
+          <p:nvPr/>
+        </p:nvSpPr>
+        <p:spPr>
+          <a:xfrm>
+            <a:off x="1143000" y="1645920"/>
+            <a:ext cx="4297680" cy="365760"/>
+          </a:xfrm>
+          <a:prstGeom prst="rect">
+            <a:avLst/>
+          </a:prstGeom>
+          <a:noFill/>
+          <a:ln/>
+        </p:spPr>
+        <p:txBody>
+          <a:bodyPr wrap="square" lIns="1016" tIns="1016" rIns="1016" bIns="1016" rtlCol="0" anchor="t"/>
+          <a:lstStyle/>
+          <a:p>
+            <a:pPr indent="0" marL="0">
+              <a:buNone/>
+            </a:pPr>
+            <a:r>
+              <a:rPr lang="en-US" sz="1400" dirty="0">
+                <a:solidFill>
+                  <a:schemeClr val="tx1"/>
+                </a:solidFill>
+              </a:rPr>
+              <a:t>家の中で見たこと・聞いた言葉・言われ方</a:t>
+            </a:r>
+            <a:endParaRPr lang="en-US" sz="1400" dirty="0"/>
+          </a:p>
+        </p:txBody>
+      </p:sp>
+      <p:sp>
+        <p:nvSpPr>
+          <p:cNvPr id="9" name="ga_card1"/>
+          <p:cNvSpPr/>
+          <p:nvPr/>
+        </p:nvSpPr>
+        <p:spPr>
+          <a:xfrm>
+            <a:off x="457200" y="2221992"/>
+            <a:ext cx="5120640" cy="822960"/>
+          </a:xfrm>
+          <a:prstGeom prst="roundRect">
+            <a:avLst>
+              <a:gd name="adj" fmla="val 13333"/>
+            </a:avLst>
+          </a:prstGeom>
+          <a:solidFill>
+            <a:srgbClr val="FDFAF4"/>
+          </a:solidFill>
+          <a:ln w="9525">
+            <a:solidFill>
+              <a:srgbClr val="E9D9B6"/>
+            </a:solidFill>
+            <a:prstDash val="solid"/>
+          </a:ln>
+        </p:spPr>
+        <p:txBody>
+          <a:bodyPr/>
+          <a:p/>
+        </p:txBody>
+      </p:sp>
+      <p:sp>
+        <p:nvSpPr>
+          <p:cNvPr id="10" name="ga1_c"/>
+          <p:cNvSpPr/>
+          <p:nvPr/>
+        </p:nvSpPr>
+        <p:spPr>
+          <a:xfrm>
+            <a:off x="621792" y="2441448"/>
+            <a:ext cx="384048" cy="384048"/>
+          </a:xfrm>
+          <a:prstGeom prst="ellipse">
+            <a:avLst/>
+          </a:prstGeom>
+          <a:solidFill>
+            <a:srgbClr val="B08A4E"/>
+          </a:solidFill>
+          <a:ln/>
+        </p:spPr>
+        <p:txBody>
+          <a:bodyPr/>
+          <a:p/>
+        </p:txBody>
+      </p:sp>
+      <p:sp>
+        <p:nvSpPr>
+          <p:cNvPr id="11" name="ga1_n"/>
+          <p:cNvSpPr txBox="1"/>
+          <p:nvPr/>
+        </p:nvSpPr>
+        <p:spPr>
+          <a:xfrm>
+            <a:off x="621792" y="2441448"/>
+            <a:ext cx="384048" cy="384048"/>
+          </a:xfrm>
+          <a:prstGeom prst="rect">
+            <a:avLst/>
+          </a:prstGeom>
+          <a:noFill/>
+          <a:ln/>
+        </p:spPr>
+        <p:txBody>
+          <a:bodyPr wrap="square" lIns="0" tIns="0" rIns="0" bIns="0" rtlCol="0" anchor="ctr"/>
+          <a:lstStyle/>
+          <a:p>
+            <a:pPr algn="ctr" indent="0" marL="0">
+              <a:buNone/>
+            </a:pPr>
+            <a:r>
+              <a:rPr lang="en-US" sz="1500" b="1" dirty="0">
+                <a:solidFill>
+                  <a:schemeClr val="bg1"/>
+                </a:solidFill>
+              </a:rPr>
+              <a:t>2</a:t>
+            </a:r>
+            <a:endParaRPr lang="en-US" sz="1500" dirty="0"/>
+          </a:p>
+        </p:txBody>
+      </p:sp>
+      <p:sp>
+        <p:nvSpPr>
+          <p:cNvPr id="12" name="ga_head1"/>
+          <p:cNvSpPr txBox="1"/>
+          <p:nvPr/>
+        </p:nvSpPr>
+        <p:spPr>
+          <a:xfrm>
+            <a:off x="1143000" y="2286000"/>
+            <a:ext cx="4297680" cy="347472"/>
+          </a:xfrm>
+          <a:prstGeom prst="rect">
+            <a:avLst/>
+          </a:prstGeom>
+          <a:noFill/>
+          <a:ln/>
+        </p:spPr>
+        <p:txBody>
+          <a:bodyPr wrap="square" lIns="1016" tIns="1016" rIns="1016" bIns="1016" rtlCol="0" anchor="t"/>
+          <a:lstStyle/>
+          <a:p>
+            <a:pPr indent="0" marL="0">
+              <a:buNone/>
+            </a:pPr>
+            <a:r>
+              <a:rPr lang="en-US" sz="1600" b="1" dirty="0">
+                <a:solidFill>
+                  <a:schemeClr val="tx2"/>
+                </a:solidFill>
+              </a:rPr>
+              <a:t>脳が保存</a:t>
+            </a:r>
+            <a:endParaRPr lang="en-US" sz="1600" dirty="0"/>
+          </a:p>
+        </p:txBody>
+      </p:sp>
+      <p:sp>
+        <p:nvSpPr>
+          <p:cNvPr id="13" name="ga_body1"/>
+          <p:cNvSpPr txBox="1"/>
+          <p:nvPr/>
+        </p:nvSpPr>
+        <p:spPr>
+          <a:xfrm>
+            <a:off x="1143000" y="2633472"/>
+            <a:ext cx="4297680" cy="365760"/>
+          </a:xfrm>
+          <a:prstGeom prst="rect">
+            <a:avLst/>
+          </a:prstGeom>
+          <a:noFill/>
+          <a:ln/>
+        </p:spPr>
+        <p:txBody>
+          <a:bodyPr wrap="square" lIns="1016" tIns="1016" rIns="1016" bIns="1016" rtlCol="0" anchor="t"/>
+          <a:lstStyle/>
+          <a:p>
+            <a:pPr indent="0" marL="0">
+              <a:buNone/>
+            </a:pPr>
+            <a:r>
+              <a:rPr lang="en-US" sz="1400" dirty="0">
+                <a:solidFill>
+                  <a:schemeClr val="tx1"/>
+                </a:solidFill>
+              </a:rPr>
+              <a:t>「これが当たり前」として記憶する</a:t>
+            </a:r>
+            <a:endParaRPr lang="en-US" sz="1400" dirty="0"/>
+          </a:p>
+        </p:txBody>
+      </p:sp>
+      <p:sp>
+        <p:nvSpPr>
+          <p:cNvPr id="14" name="ga_card2"/>
+          <p:cNvSpPr/>
+          <p:nvPr/>
+        </p:nvSpPr>
+        <p:spPr>
+          <a:xfrm>
+            <a:off x="457200" y="3209544"/>
+            <a:ext cx="5120640" cy="822960"/>
+          </a:xfrm>
+          <a:prstGeom prst="roundRect">
+            <a:avLst>
+              <a:gd name="adj" fmla="val 13333"/>
             </a:avLst>
           </a:prstGeom>
           <a:solidFill>
@@ -10096,12 +10084,175 @@
       </p:sp>
       <p:sp>
         <p:nvSpPr>
-          <p:cNvPr id="6" name="money_head"/>
+          <p:cNvPr id="15" name="ga2_c"/>
+          <p:cNvSpPr/>
+          <p:nvPr/>
+        </p:nvSpPr>
+        <p:spPr>
+          <a:xfrm>
+            <a:off x="621792" y="3429000"/>
+            <a:ext cx="384048" cy="384048"/>
+          </a:xfrm>
+          <a:prstGeom prst="ellipse">
+            <a:avLst/>
+          </a:prstGeom>
+          <a:solidFill>
+            <a:srgbClr val="B08A4E"/>
+          </a:solidFill>
+          <a:ln/>
+        </p:spPr>
+        <p:txBody>
+          <a:bodyPr/>
+          <a:p/>
+        </p:txBody>
+      </p:sp>
+      <p:sp>
+        <p:nvSpPr>
+          <p:cNvPr id="16" name="ga2_n"/>
           <p:cNvSpPr txBox="1"/>
           <p:nvPr/>
         </p:nvSpPr>
         <p:spPr>
           <a:xfrm>
+            <a:off x="621792" y="3429000"/>
+            <a:ext cx="384048" cy="384048"/>
+          </a:xfrm>
+          <a:prstGeom prst="rect">
+            <a:avLst/>
+          </a:prstGeom>
+          <a:noFill/>
+          <a:ln/>
+        </p:spPr>
+        <p:txBody>
+          <a:bodyPr wrap="square" lIns="0" tIns="0" rIns="0" bIns="0" rtlCol="0" anchor="ctr"/>
+          <a:lstStyle/>
+          <a:p>
+            <a:pPr algn="ctr" indent="0" marL="0">
+              <a:buNone/>
+            </a:pPr>
+            <a:r>
+              <a:rPr lang="en-US" sz="1500" b="1" dirty="0">
+                <a:solidFill>
+                  <a:schemeClr val="bg1"/>
+                </a:solidFill>
+              </a:rPr>
+              <a:t>3</a:t>
+            </a:r>
+            <a:endParaRPr lang="en-US" sz="1500" dirty="0"/>
+          </a:p>
+        </p:txBody>
+      </p:sp>
+      <p:sp>
+        <p:nvSpPr>
+          <p:cNvPr id="17" name="ga_head2"/>
+          <p:cNvSpPr txBox="1"/>
+          <p:nvPr/>
+        </p:nvSpPr>
+        <p:spPr>
+          <a:xfrm>
+            <a:off x="1143000" y="3273552"/>
+            <a:ext cx="4297680" cy="347472"/>
+          </a:xfrm>
+          <a:prstGeom prst="rect">
+            <a:avLst/>
+          </a:prstGeom>
+          <a:noFill/>
+          <a:ln/>
+        </p:spPr>
+        <p:txBody>
+          <a:bodyPr wrap="square" lIns="1016" tIns="1016" rIns="1016" bIns="1016" rtlCol="0" anchor="t"/>
+          <a:lstStyle/>
+          <a:p>
+            <a:pPr indent="0" marL="0">
+              <a:buNone/>
+            </a:pPr>
+            <a:r>
+              <a:rPr lang="en-US" sz="1600" b="1" dirty="0">
+                <a:solidFill>
+                  <a:schemeClr val="tx2"/>
+                </a:solidFill>
+              </a:rPr>
+              <a:t>大人になった今</a:t>
+            </a:r>
+            <a:endParaRPr lang="en-US" sz="1600" dirty="0"/>
+          </a:p>
+        </p:txBody>
+      </p:sp>
+      <p:sp>
+        <p:nvSpPr>
+          <p:cNvPr id="18" name="ga_body2"/>
+          <p:cNvSpPr txBox="1"/>
+          <p:nvPr/>
+        </p:nvSpPr>
+        <p:spPr>
+          <a:xfrm>
+            <a:off x="1143000" y="3621024"/>
+            <a:ext cx="4297680" cy="365760"/>
+          </a:xfrm>
+          <a:prstGeom prst="rect">
+            <a:avLst/>
+          </a:prstGeom>
+          <a:noFill/>
+          <a:ln/>
+        </p:spPr>
+        <p:txBody>
+          <a:bodyPr wrap="square" lIns="1016" tIns="1016" rIns="1016" bIns="1016" rtlCol="0" anchor="t"/>
+          <a:lstStyle/>
+          <a:p>
+            <a:pPr indent="0" marL="0">
+              <a:buNone/>
+            </a:pPr>
+            <a:r>
+              <a:rPr lang="en-US" sz="1400" dirty="0">
+                <a:solidFill>
+                  <a:schemeClr val="tx1"/>
+                </a:solidFill>
+              </a:rPr>
+              <a:t>その当たり前が、自分の基準として動き続ける</a:t>
+            </a:r>
+            <a:endParaRPr lang="en-US" sz="1400" dirty="0"/>
+          </a:p>
+        </p:txBody>
+      </p:sp>
+      <p:sp>
+        <p:nvSpPr>
+          <p:cNvPr id="19" name="money_card"/>
+          <p:cNvSpPr/>
+          <p:nvPr/>
+        </p:nvSpPr>
+        <p:spPr>
+          <a:xfrm>
+            <a:off x="5806440" y="1234440"/>
+            <a:ext cx="2880360" cy="2798064"/>
+          </a:xfrm>
+          <a:prstGeom prst="roundRect">
+            <a:avLst>
+              <a:gd name="adj" fmla="val 3922"/>
+            </a:avLst>
+          </a:prstGeom>
+          <a:solidFill>
+            <a:srgbClr val="F8EBEE"/>
+          </a:solidFill>
+          <a:ln w="9525">
+            <a:solidFill>
+              <a:srgbClr val="E9D9B6"/>
+            </a:solidFill>
+            <a:prstDash val="solid"/>
+          </a:ln>
+        </p:spPr>
+        <p:txBody>
+          <a:bodyPr/>
+          <a:p/>
+        </p:txBody>
+      </p:sp>
+      <p:sp>
+        <p:nvSpPr>
+          <p:cNvPr id="20" name="money_head"/>
+          <p:cNvSpPr txBox="1"/>
+          <p:nvPr/>
+        </p:nvSpPr>
+        <p:spPr>
+          <a:xfrm>
             <a:off x="5989320" y="1371600"/>
             <a:ext cx="2560320" cy="365760"/>
           </a:xfrm>
@@ -10132,14 +10283,14 @@
       </p:sp>
       <p:sp>
         <p:nvSpPr>
-          <p:cNvPr id="7" name="money_body"/>
+          <p:cNvPr id="21" name="money_body"/>
           <p:cNvSpPr txBox="1"/>
           <p:nvPr/>
         </p:nvSpPr>
         <p:spPr>
           <a:xfrm>
             <a:off x="5989320" y="1783080"/>
-            <a:ext cx="2560320" cy="2240280"/>
+            <a:ext cx="2560320" cy="2103120"/>
           </a:xfrm>
           <a:prstGeom prst="rect">
             <a:avLst/>
@@ -10152,9 +10303,6 @@
           <a:lstStyle/>
           <a:p>
             <a:pPr indent="0" marL="0">
-              <a:spcAft>
-                <a:spcPts val="600"/>
-              </a:spcAft>
               <a:buNone/>
             </a:pPr>
             <a:r>
@@ -10163,24 +10311,7 @@
                   <a:schemeClr val="tx1"/>
                 </a:solidFill>
               </a:rPr>
-              <a:t>「お金は怖い」を無理に「お金が好き」に変えることではありません。</a:t>
-            </a:r>
-            <a:endParaRPr lang="en-US" sz="1400" dirty="0"/>
-          </a:p>
-          <a:p>
-            <a:pPr indent="0" marL="0">
-              <a:spcAft>
-                <a:spcPts val="600"/>
-              </a:spcAft>
-              <a:buNone/>
-            </a:pPr>
-            <a:r>
-              <a:rPr lang="en-US" sz="1400" dirty="0">
-                <a:solidFill>
-                  <a:schemeClr val="tx1"/>
-                </a:solidFill>
-              </a:rPr>
-              <a:t>古い情報を、新しい情報に入れ替えられる状態のことです。</a:t>
+              <a:t>子どもの頃に、お金のまわりで見たこと・聞いたことが、今の「お金の当たり前」になっています。</a:t>
             </a:r>
             <a:endParaRPr lang="en-US" sz="1400" dirty="0"/>
           </a:p>
@@ -10286,7 +10417,7 @@
                   <a:schemeClr val="accent1"/>
                 </a:solidFill>
               </a:rPr>
-              <a:t>第2部　頭の構造を知る ｜ 7 / 7</a:t>
+              <a:t>第2部　頭の構造を知る ｜ 5 / 7</a:t>
             </a:r>
             <a:endParaRPr lang="en-US" sz="1100" dirty="0"/>
           </a:p>
@@ -10327,7 +10458,7 @@
                 <a:ea typeface="Yu Mincho" pitchFamily="34" charset="-122"/>
                 <a:cs typeface="Yu Mincho" pitchFamily="34" charset="-120"/>
               </a:rPr>
-              <a:t>入れ替えるには、感情を順番に感じ切る</a:t>
+              <a:t>でも、その「当たり前」は人によって全然ちがう</a:t>
             </a:r>
             <a:endParaRPr lang="en-US" sz="2400" dirty="0"/>
           </a:p>
@@ -10350,7 +10481,7 @@
         <p:spPr>
           <a:xfrm>
             <a:off x="457200" y="1234440"/>
-            <a:ext cx="5120640" cy="2857957"/>
+            <a:ext cx="5120640" cy="2880360"/>
           </a:xfrm>
           <a:prstGeom prst="rect">
             <a:avLst/>
@@ -10366,11 +10497,11 @@
         <p:spPr>
           <a:xfrm>
             <a:off x="5806440" y="1234440"/>
-            <a:ext cx="2880360" cy="2857957"/>
+            <a:ext cx="2880360" cy="2880360"/>
           </a:xfrm>
           <a:prstGeom prst="roundRect">
             <a:avLst>
-              <a:gd name="adj" fmla="val 3839"/>
+              <a:gd name="adj" fmla="val 3810"/>
             </a:avLst>
           </a:prstGeom>
           <a:solidFill>
@@ -10433,7 +10564,7 @@
         <p:spPr>
           <a:xfrm>
             <a:off x="5989320" y="1783080"/>
-            <a:ext cx="2560320" cy="2217877"/>
+            <a:ext cx="2560320" cy="2240280"/>
           </a:xfrm>
           <a:prstGeom prst="rect">
             <a:avLst/>
@@ -10457,7 +10588,7 @@
                   <a:schemeClr val="tx1"/>
                 </a:solidFill>
               </a:rPr>
-              <a:t>怒りや悲しみが出てきても大丈夫。</a:t>
+              <a:t>あなたの「お金の当たり前」は、あなたの家で作られたもの。</a:t>
             </a:r>
             <a:endParaRPr lang="en-US" sz="1400" dirty="0"/>
           </a:p>
@@ -10474,7 +10605,7 @@
                   <a:schemeClr val="tx1"/>
                 </a:solidFill>
               </a:rPr>
-              <a:t>それは消化が進んでいるサインです。</a:t>
+              <a:t>作られたものだから、書き換えられます。</a:t>
             </a:r>
             <a:endParaRPr lang="en-US" sz="1400" dirty="0"/>
           </a:p>
@@ -10552,16 +10683,14 @@
       </p:grpSpPr>
       <p:sp>
         <p:nvSpPr>
-          <p:cNvPr id="2" name="Text 0"/>
-          <p:cNvSpPr/>
-          <p:nvPr>
-            <p:ph idx="100" type="title" hasCustomPrompt="1"/>
-          </p:nvPr>
-        </p:nvSpPr>
-        <p:spPr>
-          <a:xfrm>
-            <a:off x="731520" y="1828800"/>
-            <a:ext cx="7680960" cy="914400"/>
+          <p:cNvPr id="2" name="label"/>
+          <p:cNvSpPr txBox="1"/>
+          <p:nvPr/>
+        </p:nvSpPr>
+        <p:spPr>
+          <a:xfrm>
+            <a:off x="457200" y="182880"/>
+            <a:ext cx="5486400" cy="274320"/>
           </a:xfrm>
           <a:prstGeom prst="rect">
             <a:avLst/>
@@ -10570,14 +10699,52 @@
           <a:ln/>
         </p:spPr>
         <p:txBody>
-          <a:bodyPr wrap="square" rtlCol="0" anchor="ctr"/>
-          <a:lstStyle/>
-          <a:p>
-            <a:pPr algn="ctr" indent="0" marL="0">
-              <a:buNone/>
-            </a:pPr>
-            <a:r>
-              <a:rPr lang="en-US" sz="3600" b="1" dirty="0">
+          <a:bodyPr wrap="square" lIns="0" tIns="0" rIns="0" bIns="0" rtlCol="0" anchor="t"/>
+          <a:lstStyle/>
+          <a:p>
+            <a:pPr indent="0" marL="0">
+              <a:buNone/>
+            </a:pPr>
+            <a:r>
+              <a:rPr lang="en-US" sz="1100" b="1" dirty="0">
+                <a:solidFill>
+                  <a:schemeClr val="accent1"/>
+                </a:solidFill>
+              </a:rPr>
+              <a:t>第2部　頭の構造を知る ｜ 6 / 7</a:t>
+            </a:r>
+            <a:endParaRPr lang="en-US" sz="1100" dirty="0"/>
+          </a:p>
+        </p:txBody>
+      </p:sp>
+      <p:sp>
+        <p:nvSpPr>
+          <p:cNvPr id="3" name="Text 0"/>
+          <p:cNvSpPr/>
+          <p:nvPr>
+            <p:ph idx="100" type="title" hasCustomPrompt="1"/>
+          </p:nvPr>
+        </p:nvSpPr>
+        <p:spPr>
+          <a:xfrm>
+            <a:off x="457200" y="457200"/>
+            <a:ext cx="8229600" cy="594360"/>
+          </a:xfrm>
+          <a:prstGeom prst="rect">
+            <a:avLst/>
+          </a:prstGeom>
+          <a:noFill/>
+          <a:ln/>
+        </p:spPr>
+        <p:txBody>
+          <a:bodyPr wrap="square" lIns="0" tIns="0" rIns="0" bIns="0" rtlCol="0" anchor="ctr"/>
+          <a:lstStyle/>
+          <a:p>
+            <a:pPr algn="l" indent="0" marL="0">
+              <a:buNone/>
+            </a:pPr>
+            <a:r>
+              <a:rPr lang="en-US" sz="2400" b="1" dirty="0">
                 <a:solidFill>
                   <a:schemeClr val="accent2"/>
                 </a:solidFill>
@@ -10585,24 +10752,77 @@
                 <a:ea typeface="Yu Mincho" pitchFamily="34" charset="-122"/>
                 <a:cs typeface="Yu Mincho" pitchFamily="34" charset="-120"/>
               </a:rPr>
-              <a:t>ワーク　思い込みを書き換える</a:t>
-            </a:r>
-            <a:endParaRPr lang="en-US" sz="3600" dirty="0"/>
-          </a:p>
-        </p:txBody>
-      </p:sp>
-      <p:sp>
-        <p:nvSpPr>
-          <p:cNvPr id="3" name="Text 0"/>
+              <a:t>ポジティブとは「入れ替えられる」こと</a:t>
+            </a:r>
+            <a:endParaRPr lang="en-US" sz="2400" dirty="0"/>
+          </a:p>
+        </p:txBody>
+      </p:sp>
+      <p:pic>
+        <p:nvPicPr>
+          <p:cNvPr id="4" name="Image 0" descr="講座スライド">    </p:cNvPr>
+          <p:cNvPicPr>
+            <a:picLocks noChangeAspect="1"/>
+          </p:cNvPicPr>
+          <p:nvPr/>
+        </p:nvPicPr>
+        <p:blipFill>
+          <a:blip r:embed="rId1"/>
+          <a:stretch>
+            <a:fillRect/>
+          </a:stretch>
+        </p:blipFill>
+        <p:spPr>
+          <a:xfrm>
+            <a:off x="457200" y="1234440"/>
+            <a:ext cx="5120640" cy="2880360"/>
+          </a:xfrm>
+          <a:prstGeom prst="rect">
+            <a:avLst/>
+          </a:prstGeom>
+        </p:spPr>
+      </p:pic>
+      <p:sp>
+        <p:nvSpPr>
+          <p:cNvPr id="5" name="money_card"/>
           <p:cNvSpPr/>
-          <p:nvPr>
-            <p:ph idx="101" type="body" hasCustomPrompt="1"/>
-          </p:nvPr>
-        </p:nvSpPr>
-        <p:spPr>
-          <a:xfrm>
-            <a:off x="731520" y="2788920"/>
-            <a:ext cx="7680960" cy="822960"/>
+          <p:nvPr/>
+        </p:nvSpPr>
+        <p:spPr>
+          <a:xfrm>
+            <a:off x="5806440" y="1234440"/>
+            <a:ext cx="2880360" cy="2880360"/>
+          </a:xfrm>
+          <a:prstGeom prst="roundRect">
+            <a:avLst>
+              <a:gd name="adj" fmla="val 3810"/>
+            </a:avLst>
+          </a:prstGeom>
+          <a:solidFill>
+            <a:srgbClr val="F8EBEE"/>
+          </a:solidFill>
+          <a:ln w="9525">
+            <a:solidFill>
+              <a:srgbClr val="E9D9B6"/>
+            </a:solidFill>
+            <a:prstDash val="solid"/>
+          </a:ln>
+        </p:spPr>
+        <p:txBody>
+          <a:bodyPr/>
+          <a:p/>
+        </p:txBody>
+      </p:sp>
+      <p:sp>
+        <p:nvSpPr>
+          <p:cNvPr id="6" name="money_head"/>
+          <p:cNvSpPr txBox="1"/>
+          <p:nvPr/>
+        </p:nvSpPr>
+        <p:spPr>
+          <a:xfrm>
+            <a:off x="5989320" y="1371600"/>
+            <a:ext cx="2560320" cy="365760"/>
           </a:xfrm>
           <a:prstGeom prst="rect">
             <a:avLst/>
@@ -10611,21 +10831,122 @@
           <a:ln/>
         </p:spPr>
         <p:txBody>
-          <a:bodyPr wrap="square" rtlCol="0" anchor="t"/>
-          <a:lstStyle/>
-          <a:p>
-            <a:pPr algn="ctr" indent="0" marL="0">
-              <a:buNone/>
-            </a:pPr>
-            <a:r>
-              <a:rPr lang="en-US" sz="1600" dirty="0">
+          <a:bodyPr wrap="square" lIns="1016" tIns="1016" rIns="1016" bIns="1016" rtlCol="0" anchor="t"/>
+          <a:lstStyle/>
+          <a:p>
+            <a:pPr indent="0" marL="0">
+              <a:buNone/>
+            </a:pPr>
+            <a:r>
+              <a:rPr lang="en-US" sz="1500" b="1" dirty="0">
+                <a:solidFill>
+                  <a:schemeClr val="accent2"/>
+                </a:solidFill>
+              </a:rPr>
+              <a:t>お金で言うと…</a:t>
+            </a:r>
+            <a:endParaRPr lang="en-US" sz="1500" dirty="0"/>
+          </a:p>
+        </p:txBody>
+      </p:sp>
+      <p:sp>
+        <p:nvSpPr>
+          <p:cNvPr id="7" name="money_body"/>
+          <p:cNvSpPr txBox="1"/>
+          <p:nvPr/>
+        </p:nvSpPr>
+        <p:spPr>
+          <a:xfrm>
+            <a:off x="5989320" y="1783080"/>
+            <a:ext cx="2560320" cy="2240280"/>
+          </a:xfrm>
+          <a:prstGeom prst="rect">
+            <a:avLst/>
+          </a:prstGeom>
+          <a:noFill/>
+          <a:ln/>
+        </p:spPr>
+        <p:txBody>
+          <a:bodyPr wrap="square" lIns="1016" tIns="1016" rIns="1016" bIns="1016" rtlCol="0" anchor="t"/>
+          <a:lstStyle/>
+          <a:p>
+            <a:pPr indent="0" marL="0">
+              <a:spcAft>
+                <a:spcPts val="600"/>
+              </a:spcAft>
+              <a:buNone/>
+            </a:pPr>
+            <a:r>
+              <a:rPr lang="en-US" sz="1400" dirty="0">
                 <a:solidFill>
                   <a:schemeClr val="tx1"/>
                 </a:solidFill>
               </a:rPr>
-              <a:t>思い込みが生まれた場面に戻って、書き換えていきます（35〜75分）</a:t>
-            </a:r>
-            <a:endParaRPr lang="en-US" sz="1600" dirty="0"/>
+              <a:t>「お金は怖い」を無理に「お金が好き」に変えることではありません。</a:t>
+            </a:r>
+            <a:endParaRPr lang="en-US" sz="1400" dirty="0"/>
+          </a:p>
+          <a:p>
+            <a:pPr indent="0" marL="0">
+              <a:spcAft>
+                <a:spcPts val="600"/>
+              </a:spcAft>
+              <a:buNone/>
+            </a:pPr>
+            <a:r>
+              <a:rPr lang="en-US" sz="1400" dirty="0">
+                <a:solidFill>
+                  <a:schemeClr val="tx1"/>
+                </a:solidFill>
+              </a:rPr>
+              <a:t>古い情報を、新しい情報に入れ替えられる状態のことです。</a:t>
+            </a:r>
+            <a:endParaRPr lang="en-US" sz="1400" dirty="0"/>
+          </a:p>
+        </p:txBody>
+      </p:sp>
+      <p:sp>
+        <p:nvSpPr>
+          <p:cNvPr id="25" name="Slide Number Placeholder 0"/>
+          <p:cNvSpPr>
+            <a:spLocks noGrp="1"/>
+          </p:cNvSpPr>
+          <p:nvPr>
+            <p:ph type="sldNum" sz="quarter" idx="4294967295"/>
+          </p:nvPr>
+        </p:nvSpPr>
+        <p:spPr>
+          <a:xfrm>
+            <a:off x="8229600" y="4754880"/>
+            <a:ext cx="457200" cy="274320"/>
+          </a:xfrm>
+          <a:prstGeom prst="rect">
+            <a:avLst/>
+          </a:prstGeom>
+          <a:extLst>
+            <a:ext uri="{C572A759-6A51-4108-AA02-DFA0A04FC94B}">
+              <ma14:wrappingTextBoxFlag xmlns:ma14="http://schemas.microsoft.com/office/mac/drawingml/2011/main" val="0"/>
+            </a:ext>
+          </a:extLst>
+        </p:spPr>
+        <p:txBody>
+          <a:bodyPr/>
+          <a:lstStyle>
+            <a:lvl1pPr>
+              <a:defRPr sz="900">
+                <a:solidFill>
+                  <a:srgbClr val="B08A4E"/>
+                </a:solidFill>
+              </a:defRPr>
+            </a:lvl1pPr>
+          </a:lstStyle>
+          <a:p>
+            <a:pPr algn="r"/>
+            <a:fld id="{F7021451-1387-4CA6-816F-3879F97B5CBC}" type="slidenum">
+              <a:rPr b="0" lang="en-US"/>
+              <a:t>24</a:t>
+            </a:fld>
+            <a:endParaRPr lang="en-US"/>
           </a:p>
         </p:txBody>
       </p:sp>
@@ -10656,21 +10977,127 @@
       </p:grpSpPr>
       <p:sp>
         <p:nvSpPr>
-          <p:cNvPr id="2" name="frame"/>
+          <p:cNvPr id="2" name="label"/>
+          <p:cNvSpPr txBox="1"/>
+          <p:nvPr/>
+        </p:nvSpPr>
+        <p:spPr>
+          <a:xfrm>
+            <a:off x="457200" y="182880"/>
+            <a:ext cx="5486400" cy="274320"/>
+          </a:xfrm>
+          <a:prstGeom prst="rect">
+            <a:avLst/>
+          </a:prstGeom>
+          <a:noFill/>
+          <a:ln/>
+        </p:spPr>
+        <p:txBody>
+          <a:bodyPr wrap="square" lIns="0" tIns="0" rIns="0" bIns="0" rtlCol="0" anchor="t"/>
+          <a:lstStyle/>
+          <a:p>
+            <a:pPr indent="0" marL="0">
+              <a:buNone/>
+            </a:pPr>
+            <a:r>
+              <a:rPr lang="en-US" sz="1100" b="1" dirty="0">
+                <a:solidFill>
+                  <a:schemeClr val="accent1"/>
+                </a:solidFill>
+              </a:rPr>
+              <a:t>第2部　頭の構造を知る ｜ 7 / 7</a:t>
+            </a:r>
+            <a:endParaRPr lang="en-US" sz="1100" dirty="0"/>
+          </a:p>
+        </p:txBody>
+      </p:sp>
+      <p:sp>
+        <p:nvSpPr>
+          <p:cNvPr id="3" name="Text 0"/>
+          <p:cNvSpPr/>
+          <p:nvPr>
+            <p:ph idx="100" type="title" hasCustomPrompt="1"/>
+          </p:nvPr>
+        </p:nvSpPr>
+        <p:spPr>
+          <a:xfrm>
+            <a:off x="457200" y="457200"/>
+            <a:ext cx="8229600" cy="594360"/>
+          </a:xfrm>
+          <a:prstGeom prst="rect">
+            <a:avLst/>
+          </a:prstGeom>
+          <a:noFill/>
+          <a:ln/>
+        </p:spPr>
+        <p:txBody>
+          <a:bodyPr wrap="square" lIns="0" tIns="0" rIns="0" bIns="0" rtlCol="0" anchor="ctr"/>
+          <a:lstStyle/>
+          <a:p>
+            <a:pPr algn="l" indent="0" marL="0">
+              <a:buNone/>
+            </a:pPr>
+            <a:r>
+              <a:rPr lang="en-US" sz="2400" b="1" dirty="0">
+                <a:solidFill>
+                  <a:schemeClr val="accent2"/>
+                </a:solidFill>
+                <a:latin typeface="Yu Mincho" pitchFamily="34" charset="0"/>
+                <a:ea typeface="Yu Mincho" pitchFamily="34" charset="-122"/>
+                <a:cs typeface="Yu Mincho" pitchFamily="34" charset="-120"/>
+              </a:rPr>
+              <a:t>入れ替えるには、感情を順番に感じ切る</a:t>
+            </a:r>
+            <a:endParaRPr lang="en-US" sz="2400" dirty="0"/>
+          </a:p>
+        </p:txBody>
+      </p:sp>
+      <p:pic>
+        <p:nvPicPr>
+          <p:cNvPr id="4" name="Image 0" descr="講座スライド">    </p:cNvPr>
+          <p:cNvPicPr>
+            <a:picLocks noChangeAspect="1"/>
+          </p:cNvPicPr>
+          <p:nvPr/>
+        </p:nvPicPr>
+        <p:blipFill>
+          <a:blip r:embed="rId1"/>
+          <a:stretch>
+            <a:fillRect/>
+          </a:stretch>
+        </p:blipFill>
+        <p:spPr>
+          <a:xfrm>
+            <a:off x="457200" y="1234440"/>
+            <a:ext cx="5120640" cy="2857957"/>
+          </a:xfrm>
+          <a:prstGeom prst="rect">
+            <a:avLst/>
+          </a:prstGeom>
+        </p:spPr>
+      </p:pic>
+      <p:sp>
+        <p:nvSpPr>
+          <p:cNvPr id="5" name="money_card"/>
           <p:cNvSpPr/>
           <p:nvPr/>
         </p:nvSpPr>
         <p:spPr>
           <a:xfrm>
-            <a:off x="228600" y="137160"/>
-            <a:ext cx="8686800" cy="4526280"/>
-          </a:xfrm>
-          <a:prstGeom prst="rect">
-            <a:avLst/>
-          </a:prstGeom>
-          <a:ln w="12700">
+            <a:off x="5806440" y="1234440"/>
+            <a:ext cx="2880360" cy="2857957"/>
+          </a:xfrm>
+          <a:prstGeom prst="roundRect">
+            <a:avLst>
+              <a:gd name="adj" fmla="val 3839"/>
+            </a:avLst>
+          </a:prstGeom>
+          <a:solidFill>
+            <a:srgbClr val="F8EBEE"/>
+          </a:solidFill>
+          <a:ln w="9525">
             <a:solidFill>
-              <a:srgbClr val="B08A4E"/>
+              <a:srgbClr val="E9D9B6"/>
             </a:solidFill>
             <a:prstDash val="solid"/>
           </a:ln>
@@ -10682,14 +11109,14 @@
       </p:sp>
       <p:sp>
         <p:nvSpPr>
-          <p:cNvPr id="3" name="qlabel"/>
+          <p:cNvPr id="6" name="money_head"/>
           <p:cNvSpPr txBox="1"/>
           <p:nvPr/>
         </p:nvSpPr>
         <p:spPr>
           <a:xfrm>
-            <a:off x="457200" y="320040"/>
-            <a:ext cx="8229600" cy="365760"/>
+            <a:off x="5989320" y="1371600"/>
+            <a:ext cx="2560320" cy="365760"/>
           </a:xfrm>
           <a:prstGeom prst="rect">
             <a:avLst/>
@@ -10698,34 +11125,34 @@
           <a:ln/>
         </p:spPr>
         <p:txBody>
-          <a:bodyPr wrap="square" lIns="0" tIns="0" rIns="0" bIns="0" rtlCol="0" anchor="t"/>
-          <a:lstStyle/>
-          <a:p>
-            <a:pPr algn="ctr" indent="0" marL="0">
-              <a:buNone/>
-            </a:pPr>
-            <a:r>
-              <a:rPr lang="en-US" sz="1300" b="1" dirty="0">
+          <a:bodyPr wrap="square" lIns="1016" tIns="1016" rIns="1016" bIns="1016" rtlCol="0" anchor="t"/>
+          <a:lstStyle/>
+          <a:p>
+            <a:pPr indent="0" marL="0">
+              <a:buNone/>
+            </a:pPr>
+            <a:r>
+              <a:rPr lang="en-US" sz="1500" b="1" dirty="0">
                 <a:solidFill>
                   <a:schemeClr val="accent2"/>
                 </a:solidFill>
               </a:rPr>
-              <a:t>ワークの前に</a:t>
-            </a:r>
-            <a:endParaRPr lang="en-US" sz="1300" dirty="0"/>
-          </a:p>
-        </p:txBody>
-      </p:sp>
-      <p:sp>
-        <p:nvSpPr>
-          <p:cNvPr id="4" name="pre_main"/>
+              <a:t>お金で言うと…</a:t>
+            </a:r>
+            <a:endParaRPr lang="en-US" sz="1500" dirty="0"/>
+          </a:p>
+        </p:txBody>
+      </p:sp>
+      <p:sp>
+        <p:nvSpPr>
+          <p:cNvPr id="7" name="money_body"/>
           <p:cNvSpPr txBox="1"/>
           <p:nvPr/>
         </p:nvSpPr>
         <p:spPr>
           <a:xfrm>
-            <a:off x="731520" y="1097280"/>
-            <a:ext cx="7680960" cy="1280160"/>
+            <a:off x="5989320" y="1783080"/>
+            <a:ext cx="2560320" cy="2217877"/>
           </a:xfrm>
           <a:prstGeom prst="rect">
             <a:avLst/>
@@ -10734,114 +11161,41 @@
           <a:ln/>
         </p:spPr>
         <p:txBody>
-          <a:bodyPr wrap="square" lIns="1016" tIns="1016" rIns="1016" bIns="1016" rtlCol="0" anchor="ctr"/>
-          <a:lstStyle/>
-          <a:p>
-            <a:pPr algn="ctr" indent="0" marL="0">
-              <a:buNone/>
-            </a:pPr>
-            <a:r>
-              <a:rPr lang="en-US" sz="2800" b="1" dirty="0">
-                <a:solidFill>
-                  <a:schemeClr val="tx2"/>
-                </a:solidFill>
-                <a:latin typeface="Yu Mincho" pitchFamily="34" charset="0"/>
-                <a:ea typeface="Yu Mincho" pitchFamily="34" charset="-122"/>
-                <a:cs typeface="Yu Mincho" pitchFamily="34" charset="-120"/>
-              </a:rPr>
-              <a:t>今回、一番大きいと感じる思い込みに</a:t>
-            </a:r>
-            <a:endParaRPr lang="en-US" sz="2800" dirty="0"/>
-          </a:p>
-          <a:p>
-            <a:pPr algn="ctr" indent="0" marL="0">
-              <a:buNone/>
-            </a:pPr>
-            <a:r>
-              <a:rPr lang="en-US" sz="2800" b="1" dirty="0">
-                <a:solidFill>
-                  <a:schemeClr val="tx2"/>
-                </a:solidFill>
-                <a:latin typeface="Yu Mincho" pitchFamily="34" charset="0"/>
-                <a:ea typeface="Yu Mincho" pitchFamily="34" charset="-122"/>
-                <a:cs typeface="Yu Mincho" pitchFamily="34" charset="-120"/>
-              </a:rPr>
-              <a:t>向き合っていきます</a:t>
-            </a:r>
-            <a:endParaRPr lang="en-US" sz="2800" dirty="0"/>
-          </a:p>
-        </p:txBody>
-      </p:sp>
-      <p:sp>
-        <p:nvSpPr>
-          <p:cNvPr id="5" name="pre_sub"/>
-          <p:cNvSpPr txBox="1"/>
-          <p:nvPr/>
-        </p:nvSpPr>
-        <p:spPr>
-          <a:xfrm>
-            <a:off x="731520" y="2606040"/>
-            <a:ext cx="7680960" cy="1371600"/>
-          </a:xfrm>
-          <a:prstGeom prst="rect">
-            <a:avLst/>
-          </a:prstGeom>
-          <a:noFill/>
-          <a:ln/>
-        </p:spPr>
-        <p:txBody>
           <a:bodyPr wrap="square" lIns="1016" tIns="1016" rIns="1016" bIns="1016" rtlCol="0" anchor="t"/>
           <a:lstStyle/>
           <a:p>
-            <a:pPr algn="ctr" indent="0" marL="0">
-              <a:lnSpc>
-                <a:spcPct val="130000"/>
-              </a:lnSpc>
-              <a:buNone/>
-            </a:pPr>
-            <a:r>
-              <a:rPr lang="en-US" sz="1600" dirty="0">
+            <a:pPr indent="0" marL="0">
+              <a:spcAft>
+                <a:spcPts val="600"/>
+              </a:spcAft>
+              <a:buNone/>
+            </a:pPr>
+            <a:r>
+              <a:rPr lang="en-US" sz="1400" dirty="0">
                 <a:solidFill>
                   <a:schemeClr val="tx1"/>
                 </a:solidFill>
               </a:rPr>
-              <a:t>ただ、それが整理されると、次の思い込みや感情に気づくこともあります。</a:t>
-            </a:r>
-            <a:endParaRPr lang="en-US" sz="1600" dirty="0"/>
-          </a:p>
-          <a:p>
-            <a:pPr algn="ctr" indent="0" marL="0">
-              <a:lnSpc>
-                <a:spcPct val="130000"/>
-              </a:lnSpc>
-              <a:buNone/>
-            </a:pPr>
-            <a:r>
-              <a:rPr lang="en-US" sz="1600" dirty="0">
+              <a:t>怒りや悲しみが出てきても大丈夫。</a:t>
+            </a:r>
+            <a:endParaRPr lang="en-US" sz="1400" dirty="0"/>
+          </a:p>
+          <a:p>
+            <a:pPr indent="0" marL="0">
+              <a:spcAft>
+                <a:spcPts val="600"/>
+              </a:spcAft>
+              <a:buNone/>
+            </a:pPr>
+            <a:r>
+              <a:rPr lang="en-US" sz="1400" dirty="0">
                 <a:solidFill>
                   <a:schemeClr val="tx1"/>
                 </a:solidFill>
               </a:rPr>
-              <a:t>だからこそ、一度で終わりではなく、</a:t>
-            </a:r>
-            <a:endParaRPr lang="en-US" sz="1600" dirty="0"/>
-          </a:p>
-          <a:p>
-            <a:pPr algn="ctr" indent="0" marL="0">
-              <a:lnSpc>
-                <a:spcPct val="130000"/>
-              </a:lnSpc>
-              <a:buNone/>
-            </a:pPr>
-            <a:r>
-              <a:rPr lang="en-US" sz="1600" dirty="0">
-                <a:solidFill>
-                  <a:schemeClr val="tx1"/>
-                </a:solidFill>
-              </a:rPr>
-              <a:t>自分自身で繰り返し向き合っていくことが大切です。</a:t>
-            </a:r>
-            <a:endParaRPr lang="en-US" sz="1600" dirty="0"/>
+              <a:t>それは消化が進んでいるサインです。</a:t>
+            </a:r>
+            <a:endParaRPr lang="en-US" sz="1400" dirty="0"/>
           </a:p>
         </p:txBody>
       </p:sp>
@@ -10917,40 +11271,16 @@
       </p:grpSpPr>
       <p:sp>
         <p:nvSpPr>
-          <p:cNvPr id="2" name="misenai_band"/>
+          <p:cNvPr id="2" name="Text 0"/>
           <p:cNvSpPr/>
-          <p:nvPr/>
-        </p:nvSpPr>
-        <p:spPr>
-          <a:xfrm>
-            <a:off x="457200" y="182880"/>
-            <a:ext cx="8229600" cy="502920"/>
-          </a:xfrm>
-          <a:prstGeom prst="roundRect">
-            <a:avLst>
-              <a:gd name="adj" fmla="val 18182"/>
-            </a:avLst>
-          </a:prstGeom>
-          <a:solidFill>
-            <a:srgbClr val="8C6A34"/>
-          </a:solidFill>
-          <a:ln/>
-        </p:spPr>
-        <p:txBody>
-          <a:bodyPr/>
-          <a:p/>
-        </p:txBody>
-      </p:sp>
-      <p:sp>
-        <p:nvSpPr>
-          <p:cNvPr id="3" name="misenai"/>
-          <p:cNvSpPr txBox="1"/>
-          <p:nvPr/>
-        </p:nvSpPr>
-        <p:spPr>
-          <a:xfrm>
-            <a:off x="457200" y="182880"/>
-            <a:ext cx="8229600" cy="502920"/>
+          <p:nvPr>
+            <p:ph idx="100" type="title" hasCustomPrompt="1"/>
+          </p:nvPr>
+        </p:nvSpPr>
+        <p:spPr>
+          <a:xfrm>
+            <a:off x="731520" y="1828800"/>
+            <a:ext cx="7680960" cy="914400"/>
           </a:xfrm>
           <a:prstGeom prst="rect">
             <a:avLst/>
@@ -10959,50 +11289,14 @@
           <a:ln/>
         </p:spPr>
         <p:txBody>
-          <a:bodyPr wrap="square" lIns="0" tIns="0" rIns="0" bIns="0" rtlCol="0" anchor="ctr"/>
+          <a:bodyPr wrap="square" rtlCol="0" anchor="ctr"/>
           <a:lstStyle/>
           <a:p>
             <a:pPr algn="ctr" indent="0" marL="0">
               <a:buNone/>
             </a:pPr>
             <a:r>
-              <a:rPr lang="en-US" sz="1800" b="1" dirty="0">
-                <a:solidFill>
-                  <a:schemeClr val="bg1"/>
-                </a:solidFill>
-              </a:rPr>
-              <a:t>【共有停止】</a:t>
-            </a:r>
-            <a:endParaRPr lang="en-US" sz="1800" dirty="0"/>
-          </a:p>
-        </p:txBody>
-      </p:sp>
-      <p:sp>
-        <p:nvSpPr>
-          <p:cNvPr id="4" name="facil_title"/>
-          <p:cNvSpPr txBox="1"/>
-          <p:nvPr/>
-        </p:nvSpPr>
-        <p:spPr>
-          <a:xfrm>
-            <a:off x="457200" y="777240"/>
-            <a:ext cx="8229600" cy="411480"/>
-          </a:xfrm>
-          <a:prstGeom prst="rect">
-            <a:avLst/>
-          </a:prstGeom>
-          <a:noFill/>
-          <a:ln/>
-        </p:spPr>
-        <p:txBody>
-          <a:bodyPr wrap="square" lIns="0" tIns="0" rIns="0" bIns="0" rtlCol="0" anchor="t"/>
-          <a:lstStyle/>
-          <a:p>
-            <a:pPr indent="0" marL="0">
-              <a:buNone/>
-            </a:pPr>
-            <a:r>
-              <a:rPr lang="en-US" sz="2200" b="1" dirty="0">
+              <a:rPr lang="en-US" sz="3600" b="1" dirty="0">
                 <a:solidFill>
                   <a:schemeClr val="accent2"/>
                 </a:solidFill>
@@ -11010,53 +11304,24 @@
                 <a:ea typeface="Yu Mincho" pitchFamily="34" charset="-122"/>
                 <a:cs typeface="Yu Mincho" pitchFamily="34" charset="-120"/>
               </a:rPr>
-              <a:t>STEP 1〜2 の進め方</a:t>
-            </a:r>
-            <a:endParaRPr lang="en-US" sz="2200" dirty="0"/>
-          </a:p>
-        </p:txBody>
-      </p:sp>
-      <p:sp>
-        <p:nvSpPr>
-          <p:cNvPr id="5" name="facil_card"/>
+              <a:t>ワーク　思い込みを書き換える</a:t>
+            </a:r>
+            <a:endParaRPr lang="en-US" sz="3600" dirty="0"/>
+          </a:p>
+        </p:txBody>
+      </p:sp>
+      <p:sp>
+        <p:nvSpPr>
+          <p:cNvPr id="3" name="Text 0"/>
           <p:cNvSpPr/>
-          <p:nvPr/>
-        </p:nvSpPr>
-        <p:spPr>
-          <a:xfrm>
-            <a:off x="457200" y="1188720"/>
-            <a:ext cx="5394960" cy="3383280"/>
-          </a:xfrm>
-          <a:prstGeom prst="roundRect">
-            <a:avLst>
-              <a:gd name="adj" fmla="val 3243"/>
-            </a:avLst>
-          </a:prstGeom>
-          <a:solidFill>
-            <a:srgbClr val="FFF8E8"/>
-          </a:solidFill>
-          <a:ln w="9525">
-            <a:solidFill>
-              <a:srgbClr val="E9D9B6"/>
-            </a:solidFill>
-            <a:prstDash val="solid"/>
-          </a:ln>
-        </p:spPr>
-        <p:txBody>
-          <a:bodyPr/>
-          <a:p/>
-        </p:txBody>
-      </p:sp>
-      <p:sp>
-        <p:nvSpPr>
-          <p:cNvPr id="6" name="facil_list"/>
-          <p:cNvSpPr txBox="1"/>
-          <p:nvPr/>
-        </p:nvSpPr>
-        <p:spPr>
-          <a:xfrm>
-            <a:off x="594360" y="1280160"/>
-            <a:ext cx="5120640" cy="3200400"/>
+          <p:nvPr>
+            <p:ph idx="101" type="body" hasCustomPrompt="1"/>
+          </p:nvPr>
+        </p:nvSpPr>
+        <p:spPr>
+          <a:xfrm>
+            <a:off x="731520" y="2788920"/>
+            <a:ext cx="7680960" cy="822960"/>
           </a:xfrm>
           <a:prstGeom prst="rect">
             <a:avLst/>
@@ -11065,190 +11330,21 @@
           <a:ln/>
         </p:spPr>
         <p:txBody>
-          <a:bodyPr wrap="square" lIns="1016" tIns="1016" rIns="1016" bIns="1016" rtlCol="0" anchor="t"/>
-          <a:lstStyle/>
-          <a:p>
-            <a:pPr marL="342900" indent="-342900">
-              <a:spcAft>
-                <a:spcPts val="300"/>
-              </a:spcAft>
-              <a:buSzPct val="100000"/>
-              <a:buFont typeface="+mj-lt"/>
-              <a:buAutoNum type="arabicPeriod" startAt="1"/>
-            </a:pPr>
-            <a:r>
-              <a:rPr lang="en-US" sz="1200" dirty="0">
+          <a:bodyPr wrap="square" rtlCol="0" anchor="t"/>
+          <a:lstStyle/>
+          <a:p>
+            <a:pPr algn="ctr" indent="0" marL="0">
+              <a:buNone/>
+            </a:pPr>
+            <a:r>
+              <a:rPr lang="en-US" sz="1600" dirty="0">
                 <a:solidFill>
                   <a:schemeClr val="tx1"/>
                 </a:solidFill>
               </a:rPr>
-              <a:t>穴埋め「お金とは、＿」「お金を受け取る私は、＿」→本人の言葉を打ち込む</a:t>
-            </a:r>
-            <a:endParaRPr lang="en-US" sz="1200" dirty="0"/>
-          </a:p>
-          <a:p>
-            <a:pPr marL="342900" indent="-342900">
-              <a:spcAft>
-                <a:spcPts val="300"/>
-              </a:spcAft>
-              <a:buSzPct val="100000"/>
-              <a:buFont typeface="+mj-lt"/>
-              <a:buAutoNum type="arabicPeriod" startAt="1"/>
-            </a:pPr>
-            <a:r>
-              <a:rPr lang="en-US" sz="1200" dirty="0">
-                <a:solidFill>
-                  <a:schemeClr val="tx1"/>
-                </a:solidFill>
-              </a:rPr>
-              <a:t>「その言葉は、守っている？選択を狭めている？」</a:t>
-            </a:r>
-            <a:endParaRPr lang="en-US" sz="1200" dirty="0"/>
-          </a:p>
-          <a:p>
-            <a:pPr marL="342900" indent="-342900">
-              <a:spcAft>
-                <a:spcPts val="300"/>
-              </a:spcAft>
-              <a:buSzPct val="100000"/>
-              <a:buFont typeface="+mj-lt"/>
-              <a:buAutoNum type="arabicPeriod" startAt="1"/>
-            </a:pPr>
-            <a:r>
-              <a:rPr lang="en-US" sz="1200" dirty="0">
-                <a:solidFill>
-                  <a:schemeClr val="tx1"/>
-                </a:solidFill>
-              </a:rPr>
-              <a:t>すごい質問「何があなたをそう思わせるのですか？」（見える・色・聞こえる・体の感じ）</a:t>
-            </a:r>
-            <a:endParaRPr lang="en-US" sz="1200" dirty="0"/>
-          </a:p>
-          <a:p>
-            <a:pPr marL="342900" indent="-342900">
-              <a:spcAft>
-                <a:spcPts val="300"/>
-              </a:spcAft>
-              <a:buSzPct val="100000"/>
-              <a:buFont typeface="+mj-lt"/>
-              <a:buAutoNum type="arabicPeriod" startAt="1"/>
-            </a:pPr>
-            <a:r>
-              <a:rPr lang="en-US" sz="1200" dirty="0">
-                <a:solidFill>
-                  <a:schemeClr val="tx1"/>
-                </a:solidFill>
-              </a:rPr>
-              <a:t>1階層目を5つ以上 → 表に打ち込み、100点満点で点数</a:t>
-            </a:r>
-            <a:endParaRPr lang="en-US" sz="1200" dirty="0"/>
-          </a:p>
-          <a:p>
-            <a:pPr marL="342900" indent="-342900">
-              <a:spcAft>
-                <a:spcPts val="300"/>
-              </a:spcAft>
-              <a:buSzPct val="100000"/>
-              <a:buFont typeface="+mj-lt"/>
-              <a:buAutoNum type="arabicPeriod" startAt="1"/>
-            </a:pPr>
-            <a:r>
-              <a:rPr lang="en-US" sz="1200" dirty="0">
-                <a:solidFill>
-                  <a:schemeClr val="tx1"/>
-                </a:solidFill>
-              </a:rPr>
-              <a:t>1階層目で一番強いものを軸に、2階層目も同じ質問で（全部で10個くらい）</a:t>
-            </a:r>
-            <a:endParaRPr lang="en-US" sz="1200" dirty="0"/>
-          </a:p>
-          <a:p>
-            <a:pPr marL="342900" indent="-342900">
-              <a:spcAft>
-                <a:spcPts val="300"/>
-              </a:spcAft>
-              <a:buSzPct val="100000"/>
-              <a:buFont typeface="+mj-lt"/>
-              <a:buAutoNum type="arabicPeriod" startAt="1"/>
-            </a:pPr>
-            <a:r>
-              <a:rPr lang="en-US" sz="1200" dirty="0">
-                <a:solidFill>
-                  <a:schemeClr val="tx1"/>
-                </a:solidFill>
-              </a:rPr>
-              <a:t>点数がわからない時はOリング・筋肉反射</a:t>
-            </a:r>
-            <a:endParaRPr lang="en-US" sz="1200" dirty="0"/>
-          </a:p>
-        </p:txBody>
-      </p:sp>
-      <p:pic>
-        <p:nvPicPr>
-          <p:cNvPr id="7" name="Image 0" descr="ガイドブック">    </p:cNvPr>
-          <p:cNvPicPr>
-            <a:picLocks noChangeAspect="1"/>
-          </p:cNvPicPr>
-          <p:nvPr/>
-        </p:nvPicPr>
-        <p:blipFill>
-          <a:blip r:embed="rId1"/>
-          <a:stretch>
-            <a:fillRect/>
-          </a:stretch>
-        </p:blipFill>
-        <p:spPr>
-          <a:xfrm>
-            <a:off x="6126480" y="1188720"/>
-            <a:ext cx="2377440" cy="3364992"/>
-          </a:xfrm>
-          <a:prstGeom prst="rect">
-            <a:avLst/>
-          </a:prstGeom>
-        </p:spPr>
-      </p:pic>
-      <p:sp>
-        <p:nvSpPr>
-          <p:cNvPr id="25" name="Slide Number Placeholder 0"/>
-          <p:cNvSpPr>
-            <a:spLocks noGrp="1"/>
-          </p:cNvSpPr>
-          <p:nvPr>
-            <p:ph type="sldNum" sz="quarter" idx="4294967295"/>
-          </p:nvPr>
-        </p:nvSpPr>
-        <p:spPr>
-          <a:xfrm>
-            <a:off x="8229600" y="4754880"/>
-            <a:ext cx="457200" cy="274320"/>
-          </a:xfrm>
-          <a:prstGeom prst="rect">
-            <a:avLst/>
-          </a:prstGeom>
-          <a:extLst>
-            <a:ext uri="{C572A759-6A51-4108-AA02-DFA0A04FC94B}">
-              <ma14:wrappingTextBoxFlag xmlns:ma14="http://schemas.microsoft.com/office/mac/drawingml/2011/main" val="0"/>
-            </a:ext>
-          </a:extLst>
-        </p:spPr>
-        <p:txBody>
-          <a:bodyPr/>
-          <a:lstStyle>
-            <a:lvl1pPr>
-              <a:defRPr sz="900">
-                <a:solidFill>
-                  <a:srgbClr val="B08A4E"/>
-                </a:solidFill>
-              </a:defRPr>
-            </a:lvl1pPr>
-          </a:lstStyle>
-          <a:p>
-            <a:pPr algn="r"/>
-            <a:fld id="{F7021451-1387-4CA6-816F-3879F97B5CBC}" type="slidenum">
-              <a:rPr b="0" lang="en-US"/>
-              <a:t>26</a:t>
-            </a:fld>
-            <a:endParaRPr lang="en-US"/>
+              <a:t>思い込みが生まれた場面に戻って、書き換えていきます（35〜75分）</a:t>
+            </a:r>
+            <a:endParaRPr lang="en-US" sz="1600" dirty="0"/>
           </a:p>
         </p:txBody>
       </p:sp>
@@ -11333,7 +11429,7 @@
                   <a:schemeClr val="accent2"/>
                 </a:solidFill>
               </a:rPr>
-              <a:t>STEP 1　お金の思い込みを言葉にする</a:t>
+              <a:t>ワークの前に</a:t>
             </a:r>
             <a:endParaRPr lang="en-US" sz="1300" dirty="0"/>
           </a:p>
@@ -11341,14 +11437,14 @@
       </p:sp>
       <p:sp>
         <p:nvSpPr>
-          <p:cNvPr id="4" name="fill1"/>
+          <p:cNvPr id="4" name="pre_main"/>
           <p:cNvSpPr txBox="1"/>
           <p:nvPr/>
         </p:nvSpPr>
         <p:spPr>
           <a:xfrm>
-            <a:off x="731520" y="1188720"/>
-            <a:ext cx="7680960" cy="822960"/>
+            <a:off x="731520" y="1097280"/>
+            <a:ext cx="7680960" cy="1280160"/>
           </a:xfrm>
           <a:prstGeom prst="rect">
             <a:avLst/>
@@ -11364,7 +11460,7 @@
               <a:buNone/>
             </a:pPr>
             <a:r>
-              <a:rPr lang="en-US" sz="3000" b="1" dirty="0">
+              <a:rPr lang="en-US" sz="2800" b="1" dirty="0">
                 <a:solidFill>
                   <a:schemeClr val="tx2"/>
                 </a:solidFill>
@@ -11372,38 +11468,16 @@
                 <a:ea typeface="Yu Mincho" pitchFamily="34" charset="-122"/>
                 <a:cs typeface="Yu Mincho" pitchFamily="34" charset="-120"/>
               </a:rPr>
-              <a:t>「お金とは、＿＿＿＿＿＿＿＿」</a:t>
-            </a:r>
-            <a:endParaRPr lang="en-US" sz="3000" dirty="0"/>
-          </a:p>
-        </p:txBody>
-      </p:sp>
-      <p:sp>
-        <p:nvSpPr>
-          <p:cNvPr id="5" name="fill2"/>
-          <p:cNvSpPr txBox="1"/>
-          <p:nvPr/>
-        </p:nvSpPr>
-        <p:spPr>
-          <a:xfrm>
-            <a:off x="731520" y="2103120"/>
-            <a:ext cx="7680960" cy="822960"/>
-          </a:xfrm>
-          <a:prstGeom prst="rect">
-            <a:avLst/>
-          </a:prstGeom>
-          <a:noFill/>
-          <a:ln/>
-        </p:spPr>
-        <p:txBody>
-          <a:bodyPr wrap="square" lIns="1016" tIns="1016" rIns="1016" bIns="1016" rtlCol="0" anchor="ctr"/>
-          <a:lstStyle/>
+              <a:t>今回、一番大きいと感じる思い込みに</a:t>
+            </a:r>
+            <a:endParaRPr lang="en-US" sz="2800" dirty="0"/>
+          </a:p>
           <a:p>
             <a:pPr algn="ctr" indent="0" marL="0">
               <a:buNone/>
             </a:pPr>
             <a:r>
-              <a:rPr lang="en-US" sz="3000" b="1" dirty="0">
+              <a:rPr lang="en-US" sz="2800" b="1" dirty="0">
                 <a:solidFill>
                   <a:schemeClr val="tx2"/>
                 </a:solidFill>
@@ -11411,22 +11485,22 @@
                 <a:ea typeface="Yu Mincho" pitchFamily="34" charset="-122"/>
                 <a:cs typeface="Yu Mincho" pitchFamily="34" charset="-120"/>
               </a:rPr>
-              <a:t>「お金を受け取る私は、＿＿＿＿＿＿＿＿」</a:t>
-            </a:r>
-            <a:endParaRPr lang="en-US" sz="3000" dirty="0"/>
-          </a:p>
-        </p:txBody>
-      </p:sp>
-      <p:sp>
-        <p:nvSpPr>
-          <p:cNvPr id="6" name="fill_hint"/>
+              <a:t>向き合っていきます</a:t>
+            </a:r>
+            <a:endParaRPr lang="en-US" sz="2800" dirty="0"/>
+          </a:p>
+        </p:txBody>
+      </p:sp>
+      <p:sp>
+        <p:nvSpPr>
+          <p:cNvPr id="5" name="pre_sub"/>
           <p:cNvSpPr txBox="1"/>
           <p:nvPr/>
         </p:nvSpPr>
         <p:spPr>
           <a:xfrm>
-            <a:off x="731520" y="3200400"/>
-            <a:ext cx="7680960" cy="457200"/>
+            <a:off x="731520" y="2606040"/>
+            <a:ext cx="7680960" cy="1371600"/>
           </a:xfrm>
           <a:prstGeom prst="rect">
             <a:avLst/>
@@ -11439,17 +11513,54 @@
           <a:lstStyle/>
           <a:p>
             <a:pPr algn="ctr" indent="0" marL="0">
-              <a:buNone/>
-            </a:pPr>
-            <a:r>
-              <a:rPr lang="en-US" sz="1500" dirty="0">
-                <a:solidFill>
-                  <a:schemeClr val="accent2"/>
-                </a:solidFill>
-              </a:rPr>
-              <a:t>正解を探さず、浮かんだ言葉をそのまま</a:t>
-            </a:r>
-            <a:endParaRPr lang="en-US" sz="1500" dirty="0"/>
+              <a:lnSpc>
+                <a:spcPct val="130000"/>
+              </a:lnSpc>
+              <a:buNone/>
+            </a:pPr>
+            <a:r>
+              <a:rPr lang="en-US" sz="1600" dirty="0">
+                <a:solidFill>
+                  <a:schemeClr val="tx1"/>
+                </a:solidFill>
+              </a:rPr>
+              <a:t>ただ、それが整理されると、次の思い込みや感情に気づくこともあります。</a:t>
+            </a:r>
+            <a:endParaRPr lang="en-US" sz="1600" dirty="0"/>
+          </a:p>
+          <a:p>
+            <a:pPr algn="ctr" indent="0" marL="0">
+              <a:lnSpc>
+                <a:spcPct val="130000"/>
+              </a:lnSpc>
+              <a:buNone/>
+            </a:pPr>
+            <a:r>
+              <a:rPr lang="en-US" sz="1600" dirty="0">
+                <a:solidFill>
+                  <a:schemeClr val="tx1"/>
+                </a:solidFill>
+              </a:rPr>
+              <a:t>だからこそ、一度で終わりではなく、</a:t>
+            </a:r>
+            <a:endParaRPr lang="en-US" sz="1600" dirty="0"/>
+          </a:p>
+          <a:p>
+            <a:pPr algn="ctr" indent="0" marL="0">
+              <a:lnSpc>
+                <a:spcPct val="130000"/>
+              </a:lnSpc>
+              <a:buNone/>
+            </a:pPr>
+            <a:r>
+              <a:rPr lang="en-US" sz="1600" dirty="0">
+                <a:solidFill>
+                  <a:schemeClr val="tx1"/>
+                </a:solidFill>
+              </a:rPr>
+              <a:t>自分自身で繰り返し向き合っていくことが大切です。</a:t>
+            </a:r>
+            <a:endParaRPr lang="en-US" sz="1600" dirty="0"/>
           </a:p>
         </p:txBody>
       </p:sp>
@@ -11525,21 +11636,127 @@
       </p:grpSpPr>
       <p:sp>
         <p:nvSpPr>
-          <p:cNvPr id="2" name="frame"/>
+          <p:cNvPr id="2" name="misenai_band"/>
           <p:cNvSpPr/>
           <p:nvPr/>
         </p:nvSpPr>
         <p:spPr>
           <a:xfrm>
-            <a:off x="228600" y="137160"/>
-            <a:ext cx="8686800" cy="4526280"/>
-          </a:xfrm>
-          <a:prstGeom prst="rect">
-            <a:avLst/>
-          </a:prstGeom>
-          <a:ln w="12700">
+            <a:off x="457200" y="182880"/>
+            <a:ext cx="8229600" cy="502920"/>
+          </a:xfrm>
+          <a:prstGeom prst="roundRect">
+            <a:avLst>
+              <a:gd name="adj" fmla="val 18182"/>
+            </a:avLst>
+          </a:prstGeom>
+          <a:solidFill>
+            <a:srgbClr val="8C6A34"/>
+          </a:solidFill>
+          <a:ln/>
+        </p:spPr>
+        <p:txBody>
+          <a:bodyPr/>
+          <a:p/>
+        </p:txBody>
+      </p:sp>
+      <p:sp>
+        <p:nvSpPr>
+          <p:cNvPr id="3" name="misenai"/>
+          <p:cNvSpPr txBox="1"/>
+          <p:nvPr/>
+        </p:nvSpPr>
+        <p:spPr>
+          <a:xfrm>
+            <a:off x="457200" y="182880"/>
+            <a:ext cx="8229600" cy="502920"/>
+          </a:xfrm>
+          <a:prstGeom prst="rect">
+            <a:avLst/>
+          </a:prstGeom>
+          <a:noFill/>
+          <a:ln/>
+        </p:spPr>
+        <p:txBody>
+          <a:bodyPr wrap="square" lIns="0" tIns="0" rIns="0" bIns="0" rtlCol="0" anchor="ctr"/>
+          <a:lstStyle/>
+          <a:p>
+            <a:pPr algn="ctr" indent="0" marL="0">
+              <a:buNone/>
+            </a:pPr>
+            <a:r>
+              <a:rPr lang="en-US" sz="1800" b="1" dirty="0">
+                <a:solidFill>
+                  <a:schemeClr val="bg1"/>
+                </a:solidFill>
+              </a:rPr>
+              <a:t>【共有停止】</a:t>
+            </a:r>
+            <a:endParaRPr lang="en-US" sz="1800" dirty="0"/>
+          </a:p>
+        </p:txBody>
+      </p:sp>
+      <p:sp>
+        <p:nvSpPr>
+          <p:cNvPr id="4" name="facil_title"/>
+          <p:cNvSpPr txBox="1"/>
+          <p:nvPr/>
+        </p:nvSpPr>
+        <p:spPr>
+          <a:xfrm>
+            <a:off x="457200" y="777240"/>
+            <a:ext cx="8229600" cy="411480"/>
+          </a:xfrm>
+          <a:prstGeom prst="rect">
+            <a:avLst/>
+          </a:prstGeom>
+          <a:noFill/>
+          <a:ln/>
+        </p:spPr>
+        <p:txBody>
+          <a:bodyPr wrap="square" lIns="0" tIns="0" rIns="0" bIns="0" rtlCol="0" anchor="t"/>
+          <a:lstStyle/>
+          <a:p>
+            <a:pPr indent="0" marL="0">
+              <a:buNone/>
+            </a:pPr>
+            <a:r>
+              <a:rPr lang="en-US" sz="2200" b="1" dirty="0">
+                <a:solidFill>
+                  <a:schemeClr val="accent2"/>
+                </a:solidFill>
+                <a:latin typeface="Yu Mincho" pitchFamily="34" charset="0"/>
+                <a:ea typeface="Yu Mincho" pitchFamily="34" charset="-122"/>
+                <a:cs typeface="Yu Mincho" pitchFamily="34" charset="-120"/>
+              </a:rPr>
+              <a:t>STEP 1〜2 の進め方</a:t>
+            </a:r>
+            <a:endParaRPr lang="en-US" sz="2200" dirty="0"/>
+          </a:p>
+        </p:txBody>
+      </p:sp>
+      <p:sp>
+        <p:nvSpPr>
+          <p:cNvPr id="5" name="facil_card"/>
+          <p:cNvSpPr/>
+          <p:nvPr/>
+        </p:nvSpPr>
+        <p:spPr>
+          <a:xfrm>
+            <a:off x="457200" y="1188720"/>
+            <a:ext cx="5394960" cy="3383280"/>
+          </a:xfrm>
+          <a:prstGeom prst="roundRect">
+            <a:avLst>
+              <a:gd name="adj" fmla="val 3243"/>
+            </a:avLst>
+          </a:prstGeom>
+          <a:solidFill>
+            <a:srgbClr val="FFF8E8"/>
+          </a:solidFill>
+          <a:ln w="9525">
             <a:solidFill>
-              <a:srgbClr val="B08A4E"/>
+              <a:srgbClr val="E9D9B6"/>
             </a:solidFill>
             <a:prstDash val="solid"/>
           </a:ln>
@@ -11551,14 +11768,14 @@
       </p:sp>
       <p:sp>
         <p:nvSpPr>
-          <p:cNvPr id="3" name="qlabel"/>
+          <p:cNvPr id="6" name="facil_list"/>
           <p:cNvSpPr txBox="1"/>
           <p:nvPr/>
         </p:nvSpPr>
         <p:spPr>
           <a:xfrm>
-            <a:off x="457200" y="320040"/>
-            <a:ext cx="8229600" cy="365760"/>
+            <a:off x="594360" y="1280160"/>
+            <a:ext cx="5120640" cy="3200400"/>
           </a:xfrm>
           <a:prstGeom prst="rect">
             <a:avLst/>
@@ -11567,99 +11784,148 @@
           <a:ln/>
         </p:spPr>
         <p:txBody>
-          <a:bodyPr wrap="square" lIns="0" tIns="0" rIns="0" bIns="0" rtlCol="0" anchor="t"/>
-          <a:lstStyle/>
-          <a:p>
-            <a:pPr algn="ctr" indent="0" marL="0">
-              <a:buNone/>
-            </a:pPr>
-            <a:r>
-              <a:rPr lang="en-US" sz="1300" b="1" dirty="0">
-                <a:solidFill>
-                  <a:schemeClr val="accent2"/>
-                </a:solidFill>
-              </a:rPr>
-              <a:t>STEP 1</a:t>
-            </a:r>
-            <a:endParaRPr lang="en-US" sz="1300" dirty="0"/>
-          </a:p>
-        </p:txBody>
-      </p:sp>
-      <p:sp>
-        <p:nvSpPr>
-          <p:cNvPr id="4" name="Text 0"/>
-          <p:cNvSpPr/>
-          <p:nvPr>
-            <p:ph idx="100" type="title" hasCustomPrompt="1"/>
-          </p:nvPr>
-        </p:nvSpPr>
-        <p:spPr>
-          <a:xfrm>
-            <a:off x="914400" y="1554480"/>
-            <a:ext cx="7315200" cy="1554480"/>
-          </a:xfrm>
-          <a:prstGeom prst="rect">
-            <a:avLst/>
-          </a:prstGeom>
-          <a:noFill/>
-          <a:ln/>
-        </p:spPr>
-        <p:txBody>
-          <a:bodyPr wrap="square" rtlCol="0" anchor="ctr"/>
-          <a:lstStyle/>
-          <a:p>
-            <a:pPr algn="ctr" indent="0" marL="0">
-              <a:buNone/>
-            </a:pPr>
-            <a:r>
-              <a:rPr lang="en-US" sz="3200" b="1" dirty="0">
-                <a:solidFill>
-                  <a:schemeClr val="tx2"/>
-                </a:solidFill>
-                <a:latin typeface="Yu Mincho" pitchFamily="34" charset="0"/>
-                <a:ea typeface="Yu Mincho" pitchFamily="34" charset="-122"/>
-                <a:cs typeface="Yu Mincho" pitchFamily="34" charset="-120"/>
-              </a:rPr>
-              <a:t>その言葉は、今のあなたを</a:t>
-            </a:r>
-            <a:endParaRPr lang="en-US" sz="3200" dirty="0"/>
-          </a:p>
-          <a:p>
-            <a:pPr algn="ctr" indent="0" marL="0">
-              <a:buNone/>
-            </a:pPr>
-            <a:r>
-              <a:rPr lang="en-US" sz="3200" b="1" dirty="0">
-                <a:solidFill>
-                  <a:schemeClr val="tx2"/>
-                </a:solidFill>
-                <a:latin typeface="Yu Mincho" pitchFamily="34" charset="0"/>
-                <a:ea typeface="Yu Mincho" pitchFamily="34" charset="-122"/>
-                <a:cs typeface="Yu Mincho" pitchFamily="34" charset="-120"/>
-              </a:rPr>
-              <a:t>守っていますか？</a:t>
-            </a:r>
-            <a:endParaRPr lang="en-US" sz="3200" dirty="0"/>
-          </a:p>
-          <a:p>
-            <a:pPr algn="ctr" indent="0" marL="0">
-              <a:buNone/>
-            </a:pPr>
-            <a:r>
-              <a:rPr lang="en-US" sz="3200" b="1" dirty="0">
-                <a:solidFill>
-                  <a:schemeClr val="tx2"/>
-                </a:solidFill>
-                <a:latin typeface="Yu Mincho" pitchFamily="34" charset="0"/>
-                <a:ea typeface="Yu Mincho" pitchFamily="34" charset="-122"/>
-                <a:cs typeface="Yu Mincho" pitchFamily="34" charset="-120"/>
-              </a:rPr>
-              <a:t>それとも、選択を狭めていますか？</a:t>
-            </a:r>
-            <a:endParaRPr lang="en-US" sz="3200" dirty="0"/>
-          </a:p>
-        </p:txBody>
-      </p:sp>
+          <a:bodyPr wrap="square" lIns="1016" tIns="1016" rIns="1016" bIns="1016" rtlCol="0" anchor="t"/>
+          <a:lstStyle/>
+          <a:p>
+            <a:pPr marL="342900" indent="-342900">
+              <a:spcAft>
+                <a:spcPts val="300"/>
+              </a:spcAft>
+              <a:buSzPct val="100000"/>
+              <a:buFont typeface="+mj-lt"/>
+              <a:buAutoNum type="arabicPeriod" startAt="1"/>
+            </a:pPr>
+            <a:r>
+              <a:rPr lang="en-US" sz="1200" dirty="0">
+                <a:solidFill>
+                  <a:schemeClr val="tx1"/>
+                </a:solidFill>
+              </a:rPr>
+              <a:t>穴埋め「お金とは、＿」「お金を受け取る私は、＿」→本人の言葉を打ち込む</a:t>
+            </a:r>
+            <a:endParaRPr lang="en-US" sz="1200" dirty="0"/>
+          </a:p>
+          <a:p>
+            <a:pPr marL="342900" indent="-342900">
+              <a:spcAft>
+                <a:spcPts val="300"/>
+              </a:spcAft>
+              <a:buSzPct val="100000"/>
+              <a:buFont typeface="+mj-lt"/>
+              <a:buAutoNum type="arabicPeriod" startAt="1"/>
+            </a:pPr>
+            <a:r>
+              <a:rPr lang="en-US" sz="1200" dirty="0">
+                <a:solidFill>
+                  <a:schemeClr val="tx1"/>
+                </a:solidFill>
+              </a:rPr>
+              <a:t>「その言葉は、守っている？選択を狭めている？」</a:t>
+            </a:r>
+            <a:endParaRPr lang="en-US" sz="1200" dirty="0"/>
+          </a:p>
+          <a:p>
+            <a:pPr marL="342900" indent="-342900">
+              <a:spcAft>
+                <a:spcPts val="300"/>
+              </a:spcAft>
+              <a:buSzPct val="100000"/>
+              <a:buFont typeface="+mj-lt"/>
+              <a:buAutoNum type="arabicPeriod" startAt="1"/>
+            </a:pPr>
+            <a:r>
+              <a:rPr lang="en-US" sz="1200" dirty="0">
+                <a:solidFill>
+                  <a:schemeClr val="tx1"/>
+                </a:solidFill>
+              </a:rPr>
+              <a:t>すごい質問「何があなたをそう思わせるのですか？」（見える・色・聞こえる・体の感じ）</a:t>
+            </a:r>
+            <a:endParaRPr lang="en-US" sz="1200" dirty="0"/>
+          </a:p>
+          <a:p>
+            <a:pPr marL="342900" indent="-342900">
+              <a:spcAft>
+                <a:spcPts val="300"/>
+              </a:spcAft>
+              <a:buSzPct val="100000"/>
+              <a:buFont typeface="+mj-lt"/>
+              <a:buAutoNum type="arabicPeriod" startAt="1"/>
+            </a:pPr>
+            <a:r>
+              <a:rPr lang="en-US" sz="1200" dirty="0">
+                <a:solidFill>
+                  <a:schemeClr val="tx1"/>
+                </a:solidFill>
+              </a:rPr>
+              <a:t>1階層目を5つ以上 → 表に打ち込み、100点満点で点数</a:t>
+            </a:r>
+            <a:endParaRPr lang="en-US" sz="1200" dirty="0"/>
+          </a:p>
+          <a:p>
+            <a:pPr marL="342900" indent="-342900">
+              <a:spcAft>
+                <a:spcPts val="300"/>
+              </a:spcAft>
+              <a:buSzPct val="100000"/>
+              <a:buFont typeface="+mj-lt"/>
+              <a:buAutoNum type="arabicPeriod" startAt="1"/>
+            </a:pPr>
+            <a:r>
+              <a:rPr lang="en-US" sz="1200" dirty="0">
+                <a:solidFill>
+                  <a:schemeClr val="tx1"/>
+                </a:solidFill>
+              </a:rPr>
+              <a:t>1階層目で一番強いものを軸に、2階層目も同じ質問で（全部で10個くらい）</a:t>
+            </a:r>
+            <a:endParaRPr lang="en-US" sz="1200" dirty="0"/>
+          </a:p>
+          <a:p>
+            <a:pPr marL="342900" indent="-342900">
+              <a:spcAft>
+                <a:spcPts val="300"/>
+              </a:spcAft>
+              <a:buSzPct val="100000"/>
+              <a:buFont typeface="+mj-lt"/>
+              <a:buAutoNum type="arabicPeriod" startAt="1"/>
+            </a:pPr>
+            <a:r>
+              <a:rPr lang="en-US" sz="1200" dirty="0">
+                <a:solidFill>
+                  <a:schemeClr val="tx1"/>
+                </a:solidFill>
+              </a:rPr>
+              <a:t>点数がわからない時はOリング・筋肉反射</a:t>
+            </a:r>
+            <a:endParaRPr lang="en-US" sz="1200" dirty="0"/>
+          </a:p>
+        </p:txBody>
+      </p:sp>
+      <p:pic>
+        <p:nvPicPr>
+          <p:cNvPr id="7" name="Image 0" descr="ガイドブック">    </p:cNvPr>
+          <p:cNvPicPr>
+            <a:picLocks noChangeAspect="1"/>
+          </p:cNvPicPr>
+          <p:nvPr/>
+        </p:nvPicPr>
+        <p:blipFill>
+          <a:blip r:embed="rId1"/>
+          <a:stretch>
+            <a:fillRect/>
+          </a:stretch>
+        </p:blipFill>
+        <p:spPr>
+          <a:xfrm>
+            <a:off x="6126480" y="1188720"/>
+            <a:ext cx="2377440" cy="3364992"/>
+          </a:xfrm>
+          <a:prstGeom prst="rect">
+            <a:avLst/>
+          </a:prstGeom>
+        </p:spPr>
+      </p:pic>
       <p:sp>
         <p:nvSpPr>
           <p:cNvPr id="25" name="Slide Number Placeholder 0"/>
@@ -11786,7 +12052,7 @@
                   <a:schemeClr val="accent2"/>
                 </a:solidFill>
               </a:rPr>
-              <a:t>STEP 1　すごい質問</a:t>
+              <a:t>STEP 1　お金の思い込みを言葉にする</a:t>
             </a:r>
             <a:endParaRPr lang="en-US" sz="1300" dirty="0"/>
           </a:p>
@@ -11794,16 +12060,14 @@
       </p:sp>
       <p:sp>
         <p:nvSpPr>
-          <p:cNvPr id="4" name="Text 0"/>
-          <p:cNvSpPr/>
-          <p:nvPr>
-            <p:ph idx="100" type="title" hasCustomPrompt="1"/>
-          </p:nvPr>
-        </p:nvSpPr>
-        <p:spPr>
-          <a:xfrm>
-            <a:off x="914400" y="1554480"/>
-            <a:ext cx="7315200" cy="1554480"/>
+          <p:cNvPr id="4" name="fill1"/>
+          <p:cNvSpPr txBox="1"/>
+          <p:nvPr/>
+        </p:nvSpPr>
+        <p:spPr>
+          <a:xfrm>
+            <a:off x="731520" y="1188720"/>
+            <a:ext cx="7680960" cy="822960"/>
           </a:xfrm>
           <a:prstGeom prst="rect">
             <a:avLst/>
@@ -11812,14 +12076,14 @@
           <a:ln/>
         </p:spPr>
         <p:txBody>
-          <a:bodyPr wrap="square" rtlCol="0" anchor="ctr"/>
+          <a:bodyPr wrap="square" lIns="1016" tIns="1016" rIns="1016" bIns="1016" rtlCol="0" anchor="ctr"/>
           <a:lstStyle/>
           <a:p>
             <a:pPr algn="ctr" indent="0" marL="0">
               <a:buNone/>
             </a:pPr>
             <a:r>
-              <a:rPr lang="en-US" sz="3200" b="1" dirty="0">
+              <a:rPr lang="en-US" sz="3000" b="1" dirty="0">
                 <a:solidFill>
                   <a:schemeClr val="tx2"/>
                 </a:solidFill>
@@ -11827,16 +12091,38 @@
                 <a:ea typeface="Yu Mincho" pitchFamily="34" charset="-122"/>
                 <a:cs typeface="Yu Mincho" pitchFamily="34" charset="-120"/>
               </a:rPr>
-              <a:t>何があなたを</a:t>
-            </a:r>
-            <a:endParaRPr lang="en-US" sz="3200" dirty="0"/>
-          </a:p>
+              <a:t>「お金とは、＿＿＿＿＿＿＿＿」</a:t>
+            </a:r>
+            <a:endParaRPr lang="en-US" sz="3000" dirty="0"/>
+          </a:p>
+        </p:txBody>
+      </p:sp>
+      <p:sp>
+        <p:nvSpPr>
+          <p:cNvPr id="5" name="fill2"/>
+          <p:cNvSpPr txBox="1"/>
+          <p:nvPr/>
+        </p:nvSpPr>
+        <p:spPr>
+          <a:xfrm>
+            <a:off x="731520" y="2103120"/>
+            <a:ext cx="7680960" cy="822960"/>
+          </a:xfrm>
+          <a:prstGeom prst="rect">
+            <a:avLst/>
+          </a:prstGeom>
+          <a:noFill/>
+          <a:ln/>
+        </p:spPr>
+        <p:txBody>
+          <a:bodyPr wrap="square" lIns="1016" tIns="1016" rIns="1016" bIns="1016" rtlCol="0" anchor="ctr"/>
+          <a:lstStyle/>
           <a:p>
             <a:pPr algn="ctr" indent="0" marL="0">
               <a:buNone/>
             </a:pPr>
             <a:r>
-              <a:rPr lang="en-US" sz="3200" b="1" dirty="0">
+              <a:rPr lang="en-US" sz="3000" b="1" dirty="0">
                 <a:solidFill>
                   <a:schemeClr val="tx2"/>
                 </a:solidFill>
@@ -11844,24 +12130,22 @@
                 <a:ea typeface="Yu Mincho" pitchFamily="34" charset="-122"/>
                 <a:cs typeface="Yu Mincho" pitchFamily="34" charset="-120"/>
               </a:rPr>
-              <a:t>そう思わせるのですか？</a:t>
-            </a:r>
-            <a:endParaRPr lang="en-US" sz="3200" dirty="0"/>
-          </a:p>
-        </p:txBody>
-      </p:sp>
-      <p:sp>
-        <p:nvSpPr>
-          <p:cNvPr id="5" name="Text 0"/>
-          <p:cNvSpPr/>
-          <p:nvPr>
-            <p:ph idx="101" type="body" hasCustomPrompt="1"/>
-          </p:nvPr>
-        </p:nvSpPr>
-        <p:spPr>
-          <a:xfrm>
-            <a:off x="914400" y="3200400"/>
-            <a:ext cx="7315200" cy="731520"/>
+              <a:t>「お金を受け取る私は、＿＿＿＿＿＿＿＿」</a:t>
+            </a:r>
+            <a:endParaRPr lang="en-US" sz="3000" dirty="0"/>
+          </a:p>
+        </p:txBody>
+      </p:sp>
+      <p:sp>
+        <p:nvSpPr>
+          <p:cNvPr id="6" name="fill_hint"/>
+          <p:cNvSpPr txBox="1"/>
+          <p:nvPr/>
+        </p:nvSpPr>
+        <p:spPr>
+          <a:xfrm>
+            <a:off x="731520" y="3200400"/>
+            <a:ext cx="7680960" cy="457200"/>
           </a:xfrm>
           <a:prstGeom prst="rect">
             <a:avLst/>
@@ -11870,7 +12154,7 @@
           <a:ln/>
         </p:spPr>
         <p:txBody>
-          <a:bodyPr wrap="square" rtlCol="0" anchor="t"/>
+          <a:bodyPr wrap="square" lIns="1016" tIns="1016" rIns="1016" bIns="1016" rtlCol="0" anchor="t"/>
           <a:lstStyle/>
           <a:p>
             <a:pPr algn="ctr" indent="0" marL="0">
@@ -11882,21 +12166,7 @@
                   <a:schemeClr val="accent2"/>
                 </a:solidFill>
               </a:rPr>
-              <a:t>何が見えますか？　どんな色ですか？</a:t>
-            </a:r>
-            <a:endParaRPr lang="en-US" sz="1500" dirty="0"/>
-          </a:p>
-          <a:p>
-            <a:pPr algn="ctr" indent="0" marL="0">
-              <a:buNone/>
-            </a:pPr>
-            <a:r>
-              <a:rPr lang="en-US" sz="1500" dirty="0">
-                <a:solidFill>
-                  <a:schemeClr val="accent2"/>
-                </a:solidFill>
-              </a:rPr>
-              <a:t>何が聞こえますか？　体はどんな感じがしますか？</a:t>
+              <a:t>正解を探さず、浮かんだ言葉をそのまま</a:t>
             </a:r>
             <a:endParaRPr lang="en-US" sz="1500" dirty="0"/>
           </a:p>
@@ -12444,16 +12714,40 @@
       </p:grpSpPr>
       <p:sp>
         <p:nvSpPr>
-          <p:cNvPr id="2" name="Text 0"/>
+          <p:cNvPr id="2" name="frame"/>
           <p:cNvSpPr/>
-          <p:nvPr>
-            <p:ph idx="100" type="title" hasCustomPrompt="1"/>
-          </p:nvPr>
-        </p:nvSpPr>
-        <p:spPr>
-          <a:xfrm>
-            <a:off x="457200" y="457200"/>
-            <a:ext cx="8229600" cy="594360"/>
+          <p:nvPr/>
+        </p:nvSpPr>
+        <p:spPr>
+          <a:xfrm>
+            <a:off x="228600" y="137160"/>
+            <a:ext cx="8686800" cy="4526280"/>
+          </a:xfrm>
+          <a:prstGeom prst="rect">
+            <a:avLst/>
+          </a:prstGeom>
+          <a:ln w="12700">
+            <a:solidFill>
+              <a:srgbClr val="B08A4E"/>
+            </a:solidFill>
+            <a:prstDash val="solid"/>
+          </a:ln>
+        </p:spPr>
+        <p:txBody>
+          <a:bodyPr/>
+          <a:p/>
+        </p:txBody>
+      </p:sp>
+      <p:sp>
+        <p:nvSpPr>
+          <p:cNvPr id="3" name="qlabel"/>
+          <p:cNvSpPr txBox="1"/>
+          <p:nvPr/>
+        </p:nvSpPr>
+        <p:spPr>
+          <a:xfrm>
+            <a:off x="457200" y="320040"/>
+            <a:ext cx="8229600" cy="365760"/>
           </a:xfrm>
           <a:prstGeom prst="rect">
             <a:avLst/>
@@ -12462,21 +12756,446 @@
           <a:ln/>
         </p:spPr>
         <p:txBody>
-          <a:bodyPr wrap="square" lIns="0" tIns="0" rIns="0" bIns="0" rtlCol="0" anchor="ctr"/>
-          <a:lstStyle/>
-          <a:p>
-            <a:pPr algn="l" indent="0" marL="0">
-              <a:buNone/>
-            </a:pPr>
-            <a:r>
-              <a:rPr lang="en-US" sz="2400" b="1" dirty="0">
+          <a:bodyPr wrap="square" lIns="0" tIns="0" rIns="0" bIns="0" rtlCol="0" anchor="t"/>
+          <a:lstStyle/>
+          <a:p>
+            <a:pPr algn="ctr" indent="0" marL="0">
+              <a:buNone/>
+            </a:pPr>
+            <a:r>
+              <a:rPr lang="en-US" sz="1300" b="1" dirty="0">
                 <a:solidFill>
                   <a:schemeClr val="accent2"/>
+                </a:solidFill>
+              </a:rPr>
+              <a:t>STEP 1</a:t>
+            </a:r>
+            <a:endParaRPr lang="en-US" sz="1300" dirty="0"/>
+          </a:p>
+        </p:txBody>
+      </p:sp>
+      <p:sp>
+        <p:nvSpPr>
+          <p:cNvPr id="4" name="Text 0"/>
+          <p:cNvSpPr/>
+          <p:nvPr>
+            <p:ph idx="100" type="title" hasCustomPrompt="1"/>
+          </p:nvPr>
+        </p:nvSpPr>
+        <p:spPr>
+          <a:xfrm>
+            <a:off x="914400" y="1554480"/>
+            <a:ext cx="7315200" cy="1554480"/>
+          </a:xfrm>
+          <a:prstGeom prst="rect">
+            <a:avLst/>
+          </a:prstGeom>
+          <a:noFill/>
+          <a:ln/>
+        </p:spPr>
+        <p:txBody>
+          <a:bodyPr wrap="square" rtlCol="0" anchor="ctr"/>
+          <a:lstStyle/>
+          <a:p>
+            <a:pPr algn="ctr" indent="0" marL="0">
+              <a:buNone/>
+            </a:pPr>
+            <a:r>
+              <a:rPr lang="en-US" sz="3200" b="1" dirty="0">
+                <a:solidFill>
+                  <a:schemeClr val="tx2"/>
                 </a:solidFill>
                 <a:latin typeface="Yu Mincho" pitchFamily="34" charset="0"/>
                 <a:ea typeface="Yu Mincho" pitchFamily="34" charset="-122"/>
                 <a:cs typeface="Yu Mincho" pitchFamily="34" charset="-120"/>
               </a:rPr>
+              <a:t>その言葉は、今のあなたを</a:t>
+            </a:r>
+            <a:endParaRPr lang="en-US" sz="3200" dirty="0"/>
+          </a:p>
+          <a:p>
+            <a:pPr algn="ctr" indent="0" marL="0">
+              <a:buNone/>
+            </a:pPr>
+            <a:r>
+              <a:rPr lang="en-US" sz="3200" b="1" dirty="0">
+                <a:solidFill>
+                  <a:schemeClr val="tx2"/>
+                </a:solidFill>
+                <a:latin typeface="Yu Mincho" pitchFamily="34" charset="0"/>
+                <a:ea typeface="Yu Mincho" pitchFamily="34" charset="-122"/>
+                <a:cs typeface="Yu Mincho" pitchFamily="34" charset="-120"/>
+              </a:rPr>
+              <a:t>守っていますか？</a:t>
+            </a:r>
+            <a:endParaRPr lang="en-US" sz="3200" dirty="0"/>
+          </a:p>
+          <a:p>
+            <a:pPr algn="ctr" indent="0" marL="0">
+              <a:buNone/>
+            </a:pPr>
+            <a:r>
+              <a:rPr lang="en-US" sz="3200" b="1" dirty="0">
+                <a:solidFill>
+                  <a:schemeClr val="tx2"/>
+                </a:solidFill>
+                <a:latin typeface="Yu Mincho" pitchFamily="34" charset="0"/>
+                <a:ea typeface="Yu Mincho" pitchFamily="34" charset="-122"/>
+                <a:cs typeface="Yu Mincho" pitchFamily="34" charset="-120"/>
+              </a:rPr>
+              <a:t>それとも、選択を狭めていますか？</a:t>
+            </a:r>
+            <a:endParaRPr lang="en-US" sz="3200" dirty="0"/>
+          </a:p>
+        </p:txBody>
+      </p:sp>
+      <p:sp>
+        <p:nvSpPr>
+          <p:cNvPr id="25" name="Slide Number Placeholder 0"/>
+          <p:cNvSpPr>
+            <a:spLocks noGrp="1"/>
+          </p:cNvSpPr>
+          <p:nvPr>
+            <p:ph type="sldNum" sz="quarter" idx="4294967295"/>
+          </p:nvPr>
+        </p:nvSpPr>
+        <p:spPr>
+          <a:xfrm>
+            <a:off x="8229600" y="4754880"/>
+            <a:ext cx="457200" cy="274320"/>
+          </a:xfrm>
+          <a:prstGeom prst="rect">
+            <a:avLst/>
+          </a:prstGeom>
+          <a:extLst>
+            <a:ext uri="{C572A759-6A51-4108-AA02-DFA0A04FC94B}">
+              <ma14:wrappingTextBoxFlag xmlns:ma14="http://schemas.microsoft.com/office/mac/drawingml/2011/main" val="0"/>
+            </a:ext>
+          </a:extLst>
+        </p:spPr>
+        <p:txBody>
+          <a:bodyPr/>
+          <a:lstStyle>
+            <a:lvl1pPr>
+              <a:defRPr sz="900">
+                <a:solidFill>
+                  <a:srgbClr val="B08A4E"/>
+                </a:solidFill>
+              </a:defRPr>
+            </a:lvl1pPr>
+          </a:lstStyle>
+          <a:p>
+            <a:pPr algn="r"/>
+            <a:fld id="{F7021451-1387-4CA6-816F-3879F97B5CBC}" type="slidenum">
+              <a:rPr b="0" lang="en-US"/>
+              <a:t>30</a:t>
+            </a:fld>
+            <a:endParaRPr lang="en-US"/>
+          </a:p>
+        </p:txBody>
+      </p:sp>
+    </p:spTree>
+  </p:cSld>
+  <p:clrMapOvr>
+    <a:masterClrMapping/>
+  </p:clrMapOvr>
+</p:sld>
+</file>
+
+<file path=ppt/slides/slide31.xml><?xml version="1.0" encoding="utf-8"?>
+<p:sld xmlns:a="http://schemas.openxmlformats.org/drawingml/2006/main" xmlns:r="http://schemas.openxmlformats.org/officeDocument/2006/relationships" xmlns:p="http://schemas.openxmlformats.org/presentationml/2006/main">
+  <p:cSld name="Slide 31">
+    <p:spTree>
+      <p:nvGrpSpPr>
+        <p:cNvPr id="1" name=""/>
+        <p:cNvGrpSpPr/>
+        <p:nvPr/>
+      </p:nvGrpSpPr>
+      <p:grpSpPr>
+        <a:xfrm>
+          <a:off x="0" y="0"/>
+          <a:ext cx="0" cy="0"/>
+          <a:chOff x="0" y="0"/>
+          <a:chExt cx="0" cy="0"/>
+        </a:xfrm>
+      </p:grpSpPr>
+      <p:sp>
+        <p:nvSpPr>
+          <p:cNvPr id="2" name="frame"/>
+          <p:cNvSpPr/>
+          <p:nvPr/>
+        </p:nvSpPr>
+        <p:spPr>
+          <a:xfrm>
+            <a:off x="228600" y="137160"/>
+            <a:ext cx="8686800" cy="4526280"/>
+          </a:xfrm>
+          <a:prstGeom prst="rect">
+            <a:avLst/>
+          </a:prstGeom>
+          <a:ln w="12700">
+            <a:solidFill>
+              <a:srgbClr val="B08A4E"/>
+            </a:solidFill>
+            <a:prstDash val="solid"/>
+          </a:ln>
+        </p:spPr>
+        <p:txBody>
+          <a:bodyPr/>
+          <a:p/>
+        </p:txBody>
+      </p:sp>
+      <p:sp>
+        <p:nvSpPr>
+          <p:cNvPr id="3" name="qlabel"/>
+          <p:cNvSpPr txBox="1"/>
+          <p:nvPr/>
+        </p:nvSpPr>
+        <p:spPr>
+          <a:xfrm>
+            <a:off x="457200" y="320040"/>
+            <a:ext cx="8229600" cy="365760"/>
+          </a:xfrm>
+          <a:prstGeom prst="rect">
+            <a:avLst/>
+          </a:prstGeom>
+          <a:noFill/>
+          <a:ln/>
+        </p:spPr>
+        <p:txBody>
+          <a:bodyPr wrap="square" lIns="0" tIns="0" rIns="0" bIns="0" rtlCol="0" anchor="t"/>
+          <a:lstStyle/>
+          <a:p>
+            <a:pPr algn="ctr" indent="0" marL="0">
+              <a:buNone/>
+            </a:pPr>
+            <a:r>
+              <a:rPr lang="en-US" sz="1300" b="1" dirty="0">
+                <a:solidFill>
+                  <a:schemeClr val="accent2"/>
+                </a:solidFill>
+              </a:rPr>
+              <a:t>STEP 1　すごい質問</a:t>
+            </a:r>
+            <a:endParaRPr lang="en-US" sz="1300" dirty="0"/>
+          </a:p>
+        </p:txBody>
+      </p:sp>
+      <p:sp>
+        <p:nvSpPr>
+          <p:cNvPr id="4" name="Text 0"/>
+          <p:cNvSpPr/>
+          <p:nvPr>
+            <p:ph idx="100" type="title" hasCustomPrompt="1"/>
+          </p:nvPr>
+        </p:nvSpPr>
+        <p:spPr>
+          <a:xfrm>
+            <a:off x="914400" y="1554480"/>
+            <a:ext cx="7315200" cy="1554480"/>
+          </a:xfrm>
+          <a:prstGeom prst="rect">
+            <a:avLst/>
+          </a:prstGeom>
+          <a:noFill/>
+          <a:ln/>
+        </p:spPr>
+        <p:txBody>
+          <a:bodyPr wrap="square" rtlCol="0" anchor="ctr"/>
+          <a:lstStyle/>
+          <a:p>
+            <a:pPr algn="ctr" indent="0" marL="0">
+              <a:buNone/>
+            </a:pPr>
+            <a:r>
+              <a:rPr lang="en-US" sz="3200" b="1" dirty="0">
+                <a:solidFill>
+                  <a:schemeClr val="tx2"/>
+                </a:solidFill>
+                <a:latin typeface="Yu Mincho" pitchFamily="34" charset="0"/>
+                <a:ea typeface="Yu Mincho" pitchFamily="34" charset="-122"/>
+                <a:cs typeface="Yu Mincho" pitchFamily="34" charset="-120"/>
+              </a:rPr>
+              <a:t>何があなたを</a:t>
+            </a:r>
+            <a:endParaRPr lang="en-US" sz="3200" dirty="0"/>
+          </a:p>
+          <a:p>
+            <a:pPr algn="ctr" indent="0" marL="0">
+              <a:buNone/>
+            </a:pPr>
+            <a:r>
+              <a:rPr lang="en-US" sz="3200" b="1" dirty="0">
+                <a:solidFill>
+                  <a:schemeClr val="tx2"/>
+                </a:solidFill>
+                <a:latin typeface="Yu Mincho" pitchFamily="34" charset="0"/>
+                <a:ea typeface="Yu Mincho" pitchFamily="34" charset="-122"/>
+                <a:cs typeface="Yu Mincho" pitchFamily="34" charset="-120"/>
+              </a:rPr>
+              <a:t>そう思わせるのですか？</a:t>
+            </a:r>
+            <a:endParaRPr lang="en-US" sz="3200" dirty="0"/>
+          </a:p>
+        </p:txBody>
+      </p:sp>
+      <p:sp>
+        <p:nvSpPr>
+          <p:cNvPr id="5" name="Text 0"/>
+          <p:cNvSpPr/>
+          <p:nvPr>
+            <p:ph idx="101" type="body" hasCustomPrompt="1"/>
+          </p:nvPr>
+        </p:nvSpPr>
+        <p:spPr>
+          <a:xfrm>
+            <a:off x="914400" y="3200400"/>
+            <a:ext cx="7315200" cy="731520"/>
+          </a:xfrm>
+          <a:prstGeom prst="rect">
+            <a:avLst/>
+          </a:prstGeom>
+          <a:noFill/>
+          <a:ln/>
+        </p:spPr>
+        <p:txBody>
+          <a:bodyPr wrap="square" rtlCol="0" anchor="t"/>
+          <a:lstStyle/>
+          <a:p>
+            <a:pPr algn="ctr" indent="0" marL="0">
+              <a:buNone/>
+            </a:pPr>
+            <a:r>
+              <a:rPr lang="en-US" sz="1500" dirty="0">
+                <a:solidFill>
+                  <a:schemeClr val="accent2"/>
+                </a:solidFill>
+              </a:rPr>
+              <a:t>何が見えますか？　どんな色ですか？</a:t>
+            </a:r>
+            <a:endParaRPr lang="en-US" sz="1500" dirty="0"/>
+          </a:p>
+          <a:p>
+            <a:pPr algn="ctr" indent="0" marL="0">
+              <a:buNone/>
+            </a:pPr>
+            <a:r>
+              <a:rPr lang="en-US" sz="1500" dirty="0">
+                <a:solidFill>
+                  <a:schemeClr val="accent2"/>
+                </a:solidFill>
+              </a:rPr>
+              <a:t>何が聞こえますか？　体はどんな感じがしますか？</a:t>
+            </a:r>
+            <a:endParaRPr lang="en-US" sz="1500" dirty="0"/>
+          </a:p>
+        </p:txBody>
+      </p:sp>
+      <p:sp>
+        <p:nvSpPr>
+          <p:cNvPr id="25" name="Slide Number Placeholder 0"/>
+          <p:cNvSpPr>
+            <a:spLocks noGrp="1"/>
+          </p:cNvSpPr>
+          <p:nvPr>
+            <p:ph type="sldNum" sz="quarter" idx="4294967295"/>
+          </p:nvPr>
+        </p:nvSpPr>
+        <p:spPr>
+          <a:xfrm>
+            <a:off x="8229600" y="4754880"/>
+            <a:ext cx="457200" cy="274320"/>
+          </a:xfrm>
+          <a:prstGeom prst="rect">
+            <a:avLst/>
+          </a:prstGeom>
+          <a:extLst>
+            <a:ext uri="{C572A759-6A51-4108-AA02-DFA0A04FC94B}">
+              <ma14:wrappingTextBoxFlag xmlns:ma14="http://schemas.microsoft.com/office/mac/drawingml/2011/main" val="0"/>
+            </a:ext>
+          </a:extLst>
+        </p:spPr>
+        <p:txBody>
+          <a:bodyPr/>
+          <a:lstStyle>
+            <a:lvl1pPr>
+              <a:defRPr sz="900">
+                <a:solidFill>
+                  <a:srgbClr val="B08A4E"/>
+                </a:solidFill>
+              </a:defRPr>
+            </a:lvl1pPr>
+          </a:lstStyle>
+          <a:p>
+            <a:pPr algn="r"/>
+            <a:fld id="{F7021451-1387-4CA6-816F-3879F97B5CBC}" type="slidenum">
+              <a:rPr b="0" lang="en-US"/>
+              <a:t>31</a:t>
+            </a:fld>
+            <a:endParaRPr lang="en-US"/>
+          </a:p>
+        </p:txBody>
+      </p:sp>
+    </p:spTree>
+  </p:cSld>
+  <p:clrMapOvr>
+    <a:masterClrMapping/>
+  </p:clrMapOvr>
+</p:sld>
+</file>
+
+<file path=ppt/slides/slide32.xml><?xml version="1.0" encoding="utf-8"?>
+<p:sld xmlns:a="http://schemas.openxmlformats.org/drawingml/2006/main" xmlns:r="http://schemas.openxmlformats.org/officeDocument/2006/relationships" xmlns:p="http://schemas.openxmlformats.org/presentationml/2006/main">
+  <p:cSld name="Slide 32">
+    <p:spTree>
+      <p:nvGrpSpPr>
+        <p:cNvPr id="1" name=""/>
+        <p:cNvGrpSpPr/>
+        <p:nvPr/>
+      </p:nvGrpSpPr>
+      <p:grpSpPr>
+        <a:xfrm>
+          <a:off x="0" y="0"/>
+          <a:ext cx="0" cy="0"/>
+          <a:chOff x="0" y="0"/>
+          <a:chExt cx="0" cy="0"/>
+        </a:xfrm>
+      </p:grpSpPr>
+      <p:sp>
+        <p:nvSpPr>
+          <p:cNvPr id="2" name="Text 0"/>
+          <p:cNvSpPr/>
+          <p:nvPr>
+            <p:ph idx="100" type="title" hasCustomPrompt="1"/>
+          </p:nvPr>
+        </p:nvSpPr>
+        <p:spPr>
+          <a:xfrm>
+            <a:off x="457200" y="457200"/>
+            <a:ext cx="8229600" cy="594360"/>
+          </a:xfrm>
+          <a:prstGeom prst="rect">
+            <a:avLst/>
+          </a:prstGeom>
+          <a:noFill/>
+          <a:ln/>
+        </p:spPr>
+        <p:txBody>
+          <a:bodyPr wrap="square" lIns="0" tIns="0" rIns="0" bIns="0" rtlCol="0" anchor="ctr"/>
+          <a:lstStyle/>
+          <a:p>
+            <a:pPr algn="l" indent="0" marL="0">
+              <a:buNone/>
+            </a:pPr>
+            <a:r>
+              <a:rPr lang="en-US" sz="2400" b="1" dirty="0">
+                <a:solidFill>
+                  <a:schemeClr val="accent2"/>
+                </a:solidFill>
+                <a:latin typeface="Yu Mincho" pitchFamily="34" charset="0"/>
+                <a:ea typeface="Yu Mincho" pitchFamily="34" charset="-122"/>
+                <a:cs typeface="Yu Mincho" pitchFamily="34" charset="-120"/>
+              </a:rPr>
               <a:t>STEP 2　思い込みに点数をつける（100点満点）</a:t>
             </a:r>
             <a:endParaRPr lang="en-US" sz="2400" dirty="0"/>
@@ -12485,7 +13204,7 @@
       </p:sp>
       <p:graphicFrame>
         <p:nvGraphicFramePr>
-          <p:cNvPr id="31" name="Table 0"/>
+          <p:cNvPr id="33" name="Table 0"/>
           <p:cNvGraphicFramePr>
             <a:graphicFrameLocks noGrp="1"/>
           </p:cNvGraphicFramePr>
@@ -14612,615 +15331,6 @@
             <a:pPr algn="r"/>
             <a:fld id="{F7021451-1387-4CA6-816F-3879F97B5CBC}" type="slidenum">
               <a:rPr b="0" lang="en-US"/>
-              <a:t>30</a:t>
-            </a:fld>
-            <a:endParaRPr lang="en-US"/>
-          </a:p>
-        </p:txBody>
-      </p:sp>
-    </p:spTree>
-  </p:cSld>
-  <p:clrMapOvr>
-    <a:masterClrMapping/>
-  </p:clrMapOvr>
-</p:sld>
-</file>
-
-<file path=ppt/slides/slide31.xml><?xml version="1.0" encoding="utf-8"?>
-<p:sld xmlns:a="http://schemas.openxmlformats.org/drawingml/2006/main" xmlns:r="http://schemas.openxmlformats.org/officeDocument/2006/relationships" xmlns:p="http://schemas.openxmlformats.org/presentationml/2006/main">
-  <p:cSld name="Slide 31">
-    <p:spTree>
-      <p:nvGrpSpPr>
-        <p:cNvPr id="1" name=""/>
-        <p:cNvGrpSpPr/>
-        <p:nvPr/>
-      </p:nvGrpSpPr>
-      <p:grpSpPr>
-        <a:xfrm>
-          <a:off x="0" y="0"/>
-          <a:ext cx="0" cy="0"/>
-          <a:chOff x="0" y="0"/>
-          <a:chExt cx="0" cy="0"/>
-        </a:xfrm>
-      </p:grpSpPr>
-      <p:sp>
-        <p:nvSpPr>
-          <p:cNvPr id="2" name="misenai_band"/>
-          <p:cNvSpPr/>
-          <p:nvPr/>
-        </p:nvSpPr>
-        <p:spPr>
-          <a:xfrm>
-            <a:off x="457200" y="182880"/>
-            <a:ext cx="8229600" cy="502920"/>
-          </a:xfrm>
-          <a:prstGeom prst="roundRect">
-            <a:avLst>
-              <a:gd name="adj" fmla="val 18182"/>
-            </a:avLst>
-          </a:prstGeom>
-          <a:solidFill>
-            <a:srgbClr val="8C6A34"/>
-          </a:solidFill>
-          <a:ln/>
-        </p:spPr>
-        <p:txBody>
-          <a:bodyPr/>
-          <a:p/>
-        </p:txBody>
-      </p:sp>
-      <p:sp>
-        <p:nvSpPr>
-          <p:cNvPr id="3" name="misenai"/>
-          <p:cNvSpPr txBox="1"/>
-          <p:nvPr/>
-        </p:nvSpPr>
-        <p:spPr>
-          <a:xfrm>
-            <a:off x="457200" y="182880"/>
-            <a:ext cx="8229600" cy="502920"/>
-          </a:xfrm>
-          <a:prstGeom prst="rect">
-            <a:avLst/>
-          </a:prstGeom>
-          <a:noFill/>
-          <a:ln/>
-        </p:spPr>
-        <p:txBody>
-          <a:bodyPr wrap="square" lIns="0" tIns="0" rIns="0" bIns="0" rtlCol="0" anchor="ctr"/>
-          <a:lstStyle/>
-          <a:p>
-            <a:pPr algn="ctr" indent="0" marL="0">
-              <a:buNone/>
-            </a:pPr>
-            <a:r>
-              <a:rPr lang="en-US" sz="1800" b="1" dirty="0">
-                <a:solidFill>
-                  <a:schemeClr val="bg1"/>
-                </a:solidFill>
-              </a:rPr>
-              <a:t>【共有停止】</a:t>
-            </a:r>
-            <a:endParaRPr lang="en-US" sz="1800" dirty="0"/>
-          </a:p>
-        </p:txBody>
-      </p:sp>
-      <p:sp>
-        <p:nvSpPr>
-          <p:cNvPr id="4" name="facil_title"/>
-          <p:cNvSpPr txBox="1"/>
-          <p:nvPr/>
-        </p:nvSpPr>
-        <p:spPr>
-          <a:xfrm>
-            <a:off x="457200" y="777240"/>
-            <a:ext cx="8229600" cy="411480"/>
-          </a:xfrm>
-          <a:prstGeom prst="rect">
-            <a:avLst/>
-          </a:prstGeom>
-          <a:noFill/>
-          <a:ln/>
-        </p:spPr>
-        <p:txBody>
-          <a:bodyPr wrap="square" lIns="0" tIns="0" rIns="0" bIns="0" rtlCol="0" anchor="t"/>
-          <a:lstStyle/>
-          <a:p>
-            <a:pPr indent="0" marL="0">
-              <a:buNone/>
-            </a:pPr>
-            <a:r>
-              <a:rPr lang="en-US" sz="2200" b="1" dirty="0">
-                <a:solidFill>
-                  <a:schemeClr val="accent2"/>
-                </a:solidFill>
-                <a:latin typeface="Yu Mincho" pitchFamily="34" charset="0"/>
-                <a:ea typeface="Yu Mincho" pitchFamily="34" charset="-122"/>
-                <a:cs typeface="Yu Mincho" pitchFamily="34" charset="-120"/>
-              </a:rPr>
-              <a:t>STEP 3〜4 の進め方</a:t>
-            </a:r>
-            <a:endParaRPr lang="en-US" sz="2200" dirty="0"/>
-          </a:p>
-        </p:txBody>
-      </p:sp>
-      <p:sp>
-        <p:nvSpPr>
-          <p:cNvPr id="5" name="facil_card"/>
-          <p:cNvSpPr/>
-          <p:nvPr/>
-        </p:nvSpPr>
-        <p:spPr>
-          <a:xfrm>
-            <a:off x="457200" y="1188720"/>
-            <a:ext cx="5394960" cy="3383280"/>
-          </a:xfrm>
-          <a:prstGeom prst="roundRect">
-            <a:avLst>
-              <a:gd name="adj" fmla="val 3243"/>
-            </a:avLst>
-          </a:prstGeom>
-          <a:solidFill>
-            <a:srgbClr val="FFF8E8"/>
-          </a:solidFill>
-          <a:ln w="9525">
-            <a:solidFill>
-              <a:srgbClr val="E9D9B6"/>
-            </a:solidFill>
-            <a:prstDash val="solid"/>
-          </a:ln>
-        </p:spPr>
-        <p:txBody>
-          <a:bodyPr/>
-          <a:p/>
-        </p:txBody>
-      </p:sp>
-      <p:sp>
-        <p:nvSpPr>
-          <p:cNvPr id="6" name="facil_list"/>
-          <p:cNvSpPr txBox="1"/>
-          <p:nvPr/>
-        </p:nvSpPr>
-        <p:spPr>
-          <a:xfrm>
-            <a:off x="594360" y="1280160"/>
-            <a:ext cx="5120640" cy="3200400"/>
-          </a:xfrm>
-          <a:prstGeom prst="rect">
-            <a:avLst/>
-          </a:prstGeom>
-          <a:noFill/>
-          <a:ln/>
-        </p:spPr>
-        <p:txBody>
-          <a:bodyPr wrap="square" lIns="1016" tIns="1016" rIns="1016" bIns="1016" rtlCol="0" anchor="t"/>
-          <a:lstStyle/>
-          <a:p>
-            <a:pPr marL="342900" indent="-342900">
-              <a:spcAft>
-                <a:spcPts val="300"/>
-              </a:spcAft>
-              <a:buSzPct val="100000"/>
-              <a:buFont typeface="+mj-lt"/>
-              <a:buAutoNum type="arabicPeriod" startAt="1"/>
-            </a:pPr>
-            <a:r>
-              <a:rPr lang="en-US" sz="1200" dirty="0">
-                <a:solidFill>
-                  <a:schemeClr val="tx1"/>
-                </a:solidFill>
-              </a:rPr>
-              <a:t>点数の高い上位3つに印 → 一番邪魔している思い込みを1つ（Oリング可）</a:t>
-            </a:r>
-            <a:endParaRPr lang="en-US" sz="1200" dirty="0"/>
-          </a:p>
-          <a:p>
-            <a:pPr marL="342900" indent="-342900">
-              <a:spcAft>
-                <a:spcPts val="300"/>
-              </a:spcAft>
-              <a:buSzPct val="100000"/>
-              <a:buFont typeface="+mj-lt"/>
-              <a:buAutoNum type="arabicPeriod" startAt="1"/>
-            </a:pPr>
-            <a:r>
-              <a:rPr lang="en-US" sz="1200" dirty="0">
-                <a:solidFill>
-                  <a:schemeClr val="tx1"/>
-                </a:solidFill>
-              </a:rPr>
-              <a:t>確認「ゆるんだら、目標達成によい影響が出そう？」</a:t>
-            </a:r>
-            <a:endParaRPr lang="en-US" sz="1200" dirty="0"/>
-          </a:p>
-          <a:p>
-            <a:pPr marL="342900" indent="-342900">
-              <a:spcAft>
-                <a:spcPts val="300"/>
-              </a:spcAft>
-              <a:buSzPct val="100000"/>
-              <a:buFont typeface="+mj-lt"/>
-              <a:buAutoNum type="arabicPeriod" startAt="1"/>
-            </a:pPr>
-            <a:r>
-              <a:rPr lang="en-US" sz="1200" dirty="0">
-                <a:solidFill>
-                  <a:schemeClr val="tx1"/>
-                </a:solidFill>
-              </a:rPr>
-              <a:t>今の自分の場所に立ち、今の気持ちを話してもらう</a:t>
-            </a:r>
-            <a:endParaRPr lang="en-US" sz="1200" dirty="0"/>
-          </a:p>
-          <a:p>
-            <a:pPr marL="342900" indent="-342900">
-              <a:spcAft>
-                <a:spcPts val="300"/>
-              </a:spcAft>
-              <a:buSzPct val="100000"/>
-              <a:buFont typeface="+mj-lt"/>
-              <a:buAutoNum type="arabicPeriod" startAt="1"/>
-            </a:pPr>
-            <a:r>
-              <a:rPr lang="en-US" sz="1200" dirty="0">
-                <a:solidFill>
-                  <a:schemeClr val="tx1"/>
-                </a:solidFill>
-              </a:rPr>
-              <a:t>思い込みが生まれた過去の場面へ（見える・色・聞こえる・体の感じ）</a:t>
-            </a:r>
-            <a:endParaRPr lang="en-US" sz="1200" dirty="0"/>
-          </a:p>
-          <a:p>
-            <a:pPr marL="342900" indent="-342900">
-              <a:spcAft>
-                <a:spcPts val="300"/>
-              </a:spcAft>
-              <a:buSzPct val="100000"/>
-              <a:buFont typeface="+mj-lt"/>
-              <a:buAutoNum type="arabicPeriod" startAt="1"/>
-            </a:pPr>
-            <a:r>
-              <a:rPr lang="en-US" sz="1200" dirty="0">
-                <a:solidFill>
-                  <a:schemeClr val="tx1"/>
-                </a:solidFill>
-              </a:rPr>
-              <a:t>その場所から出て外から見る「本当はどうして欲しかった？」「本当はどうしたかった？」</a:t>
-            </a:r>
-            <a:endParaRPr lang="en-US" sz="1200" dirty="0"/>
-          </a:p>
-          <a:p>
-            <a:pPr marL="342900" indent="-342900">
-              <a:spcAft>
-                <a:spcPts val="300"/>
-              </a:spcAft>
-              <a:buSzPct val="100000"/>
-              <a:buFont typeface="+mj-lt"/>
-              <a:buAutoNum type="arabicPeriod" startAt="1"/>
-            </a:pPr>
-            <a:r>
-              <a:rPr lang="en-US" sz="1200" dirty="0">
-                <a:solidFill>
-                  <a:schemeClr val="tx1"/>
-                </a:solidFill>
-              </a:rPr>
-              <a:t>もう一度戻って、言いたかったことを全部吐き出す（100％出たか？）</a:t>
-            </a:r>
-            <a:endParaRPr lang="en-US" sz="1200" dirty="0"/>
-          </a:p>
-          <a:p>
-            <a:pPr marL="342900" indent="-342900">
-              <a:spcAft>
-                <a:spcPts val="300"/>
-              </a:spcAft>
-              <a:buSzPct val="100000"/>
-              <a:buFont typeface="+mj-lt"/>
-              <a:buAutoNum type="arabicPeriod" startAt="1"/>
-            </a:pPr>
-            <a:r>
-              <a:rPr lang="en-US" sz="1200" dirty="0">
-                <a:solidFill>
-                  <a:schemeClr val="tx1"/>
-                </a:solidFill>
-              </a:rPr>
-              <a:t>苦しくなったら止めて息を吐き切る。ポジ変しない</a:t>
-            </a:r>
-            <a:endParaRPr lang="en-US" sz="1200" dirty="0"/>
-          </a:p>
-        </p:txBody>
-      </p:sp>
-      <p:pic>
-        <p:nvPicPr>
-          <p:cNvPr id="7" name="Image 0" descr="ガイドブック">    </p:cNvPr>
-          <p:cNvPicPr>
-            <a:picLocks noChangeAspect="1"/>
-          </p:cNvPicPr>
-          <p:nvPr/>
-        </p:nvPicPr>
-        <p:blipFill>
-          <a:blip r:embed="rId1"/>
-          <a:stretch>
-            <a:fillRect/>
-          </a:stretch>
-        </p:blipFill>
-        <p:spPr>
-          <a:xfrm>
-            <a:off x="6126480" y="1188720"/>
-            <a:ext cx="2377440" cy="3364992"/>
-          </a:xfrm>
-          <a:prstGeom prst="rect">
-            <a:avLst/>
-          </a:prstGeom>
-        </p:spPr>
-      </p:pic>
-      <p:sp>
-        <p:nvSpPr>
-          <p:cNvPr id="25" name="Slide Number Placeholder 0"/>
-          <p:cNvSpPr>
-            <a:spLocks noGrp="1"/>
-          </p:cNvSpPr>
-          <p:nvPr>
-            <p:ph type="sldNum" sz="quarter" idx="4294967295"/>
-          </p:nvPr>
-        </p:nvSpPr>
-        <p:spPr>
-          <a:xfrm>
-            <a:off x="8229600" y="4754880"/>
-            <a:ext cx="457200" cy="274320"/>
-          </a:xfrm>
-          <a:prstGeom prst="rect">
-            <a:avLst/>
-          </a:prstGeom>
-          <a:extLst>
-            <a:ext uri="{C572A759-6A51-4108-AA02-DFA0A04FC94B}">
-              <ma14:wrappingTextBoxFlag xmlns:ma14="http://schemas.microsoft.com/office/mac/drawingml/2011/main" val="0"/>
-            </a:ext>
-          </a:extLst>
-        </p:spPr>
-        <p:txBody>
-          <a:bodyPr/>
-          <a:lstStyle>
-            <a:lvl1pPr>
-              <a:defRPr sz="900">
-                <a:solidFill>
-                  <a:srgbClr val="B08A4E"/>
-                </a:solidFill>
-              </a:defRPr>
-            </a:lvl1pPr>
-          </a:lstStyle>
-          <a:p>
-            <a:pPr algn="r"/>
-            <a:fld id="{F7021451-1387-4CA6-816F-3879F97B5CBC}" type="slidenum">
-              <a:rPr b="0" lang="en-US"/>
-              <a:t>31</a:t>
-            </a:fld>
-            <a:endParaRPr lang="en-US"/>
-          </a:p>
-        </p:txBody>
-      </p:sp>
-    </p:spTree>
-  </p:cSld>
-  <p:clrMapOvr>
-    <a:masterClrMapping/>
-  </p:clrMapOvr>
-</p:sld>
-</file>
-
-<file path=ppt/slides/slide32.xml><?xml version="1.0" encoding="utf-8"?>
-<p:sld xmlns:a="http://schemas.openxmlformats.org/drawingml/2006/main" xmlns:r="http://schemas.openxmlformats.org/officeDocument/2006/relationships" xmlns:p="http://schemas.openxmlformats.org/presentationml/2006/main">
-  <p:cSld name="Slide 32">
-    <p:spTree>
-      <p:nvGrpSpPr>
-        <p:cNvPr id="1" name=""/>
-        <p:cNvGrpSpPr/>
-        <p:nvPr/>
-      </p:nvGrpSpPr>
-      <p:grpSpPr>
-        <a:xfrm>
-          <a:off x="0" y="0"/>
-          <a:ext cx="0" cy="0"/>
-          <a:chOff x="0" y="0"/>
-          <a:chExt cx="0" cy="0"/>
-        </a:xfrm>
-      </p:grpSpPr>
-      <p:sp>
-        <p:nvSpPr>
-          <p:cNvPr id="2" name="frame"/>
-          <p:cNvSpPr/>
-          <p:nvPr/>
-        </p:nvSpPr>
-        <p:spPr>
-          <a:xfrm>
-            <a:off x="228600" y="137160"/>
-            <a:ext cx="8686800" cy="4526280"/>
-          </a:xfrm>
-          <a:prstGeom prst="rect">
-            <a:avLst/>
-          </a:prstGeom>
-          <a:ln w="12700">
-            <a:solidFill>
-              <a:srgbClr val="B08A4E"/>
-            </a:solidFill>
-            <a:prstDash val="solid"/>
-          </a:ln>
-        </p:spPr>
-        <p:txBody>
-          <a:bodyPr/>
-          <a:p/>
-        </p:txBody>
-      </p:sp>
-      <p:sp>
-        <p:nvSpPr>
-          <p:cNvPr id="3" name="qlabel"/>
-          <p:cNvSpPr txBox="1"/>
-          <p:nvPr/>
-        </p:nvSpPr>
-        <p:spPr>
-          <a:xfrm>
-            <a:off x="457200" y="320040"/>
-            <a:ext cx="8229600" cy="365760"/>
-          </a:xfrm>
-          <a:prstGeom prst="rect">
-            <a:avLst/>
-          </a:prstGeom>
-          <a:noFill/>
-          <a:ln/>
-        </p:spPr>
-        <p:txBody>
-          <a:bodyPr wrap="square" lIns="0" tIns="0" rIns="0" bIns="0" rtlCol="0" anchor="t"/>
-          <a:lstStyle/>
-          <a:p>
-            <a:pPr algn="ctr" indent="0" marL="0">
-              <a:buNone/>
-            </a:pPr>
-            <a:r>
-              <a:rPr lang="en-US" sz="1300" b="1" dirty="0">
-                <a:solidFill>
-                  <a:schemeClr val="accent2"/>
-                </a:solidFill>
-              </a:rPr>
-              <a:t>STEP 3</a:t>
-            </a:r>
-            <a:endParaRPr lang="en-US" sz="1300" dirty="0"/>
-          </a:p>
-        </p:txBody>
-      </p:sp>
-      <p:sp>
-        <p:nvSpPr>
-          <p:cNvPr id="4" name="Text 0"/>
-          <p:cNvSpPr/>
-          <p:nvPr>
-            <p:ph idx="100" type="title" hasCustomPrompt="1"/>
-          </p:nvPr>
-        </p:nvSpPr>
-        <p:spPr>
-          <a:xfrm>
-            <a:off x="914400" y="1554480"/>
-            <a:ext cx="7315200" cy="1554480"/>
-          </a:xfrm>
-          <a:prstGeom prst="rect">
-            <a:avLst/>
-          </a:prstGeom>
-          <a:noFill/>
-          <a:ln/>
-        </p:spPr>
-        <p:txBody>
-          <a:bodyPr wrap="square" rtlCol="0" anchor="ctr"/>
-          <a:lstStyle/>
-          <a:p>
-            <a:pPr algn="ctr" indent="0" marL="0">
-              <a:buNone/>
-            </a:pPr>
-            <a:r>
-              <a:rPr lang="en-US" sz="3200" b="1" dirty="0">
-                <a:solidFill>
-                  <a:schemeClr val="tx2"/>
-                </a:solidFill>
-                <a:latin typeface="Yu Mincho" pitchFamily="34" charset="0"/>
-                <a:ea typeface="Yu Mincho" pitchFamily="34" charset="-122"/>
-                <a:cs typeface="Yu Mincho" pitchFamily="34" charset="-120"/>
-              </a:rPr>
-              <a:t>一番、邪魔している思い込みは</a:t>
-            </a:r>
-            <a:endParaRPr lang="en-US" sz="3200" dirty="0"/>
-          </a:p>
-          <a:p>
-            <a:pPr algn="ctr" indent="0" marL="0">
-              <a:buNone/>
-            </a:pPr>
-            <a:r>
-              <a:rPr lang="en-US" sz="3200" b="1" dirty="0">
-                <a:solidFill>
-                  <a:schemeClr val="tx2"/>
-                </a:solidFill>
-                <a:latin typeface="Yu Mincho" pitchFamily="34" charset="0"/>
-                <a:ea typeface="Yu Mincho" pitchFamily="34" charset="-122"/>
-                <a:cs typeface="Yu Mincho" pitchFamily="34" charset="-120"/>
-              </a:rPr>
-              <a:t>どれですか？</a:t>
-            </a:r>
-            <a:endParaRPr lang="en-US" sz="3200" dirty="0"/>
-          </a:p>
-        </p:txBody>
-      </p:sp>
-      <p:sp>
-        <p:nvSpPr>
-          <p:cNvPr id="5" name="Text 0"/>
-          <p:cNvSpPr/>
-          <p:nvPr>
-            <p:ph idx="101" type="body" hasCustomPrompt="1"/>
-          </p:nvPr>
-        </p:nvSpPr>
-        <p:spPr>
-          <a:xfrm>
-            <a:off x="914400" y="3200400"/>
-            <a:ext cx="7315200" cy="731520"/>
-          </a:xfrm>
-          <a:prstGeom prst="rect">
-            <a:avLst/>
-          </a:prstGeom>
-          <a:noFill/>
-          <a:ln/>
-        </p:spPr>
-        <p:txBody>
-          <a:bodyPr wrap="square" rtlCol="0" anchor="t"/>
-          <a:lstStyle/>
-          <a:p>
-            <a:pPr algn="ctr" indent="0" marL="0">
-              <a:buNone/>
-            </a:pPr>
-            <a:r>
-              <a:rPr lang="en-US" sz="1500" dirty="0">
-                <a:solidFill>
-                  <a:schemeClr val="accent2"/>
-                </a:solidFill>
-              </a:rPr>
-              <a:t>点数の高い上位3つの中から、1つ選びます</a:t>
-            </a:r>
-            <a:endParaRPr lang="en-US" sz="1500" dirty="0"/>
-          </a:p>
-        </p:txBody>
-      </p:sp>
-      <p:sp>
-        <p:nvSpPr>
-          <p:cNvPr id="25" name="Slide Number Placeholder 0"/>
-          <p:cNvSpPr>
-            <a:spLocks noGrp="1"/>
-          </p:cNvSpPr>
-          <p:nvPr>
-            <p:ph type="sldNum" sz="quarter" idx="4294967295"/>
-          </p:nvPr>
-        </p:nvSpPr>
-        <p:spPr>
-          <a:xfrm>
-            <a:off x="8229600" y="4754880"/>
-            <a:ext cx="457200" cy="274320"/>
-          </a:xfrm>
-          <a:prstGeom prst="rect">
-            <a:avLst/>
-          </a:prstGeom>
-          <a:extLst>
-            <a:ext uri="{C572A759-6A51-4108-AA02-DFA0A04FC94B}">
-              <ma14:wrappingTextBoxFlag xmlns:ma14="http://schemas.microsoft.com/office/mac/drawingml/2011/main" val="0"/>
-            </a:ext>
-          </a:extLst>
-        </p:spPr>
-        <p:txBody>
-          <a:bodyPr/>
-          <a:lstStyle>
-            <a:lvl1pPr>
-              <a:defRPr sz="900">
-                <a:solidFill>
-                  <a:srgbClr val="B08A4E"/>
-                </a:solidFill>
-              </a:defRPr>
-            </a:lvl1pPr>
-          </a:lstStyle>
-          <a:p>
-            <a:pPr algn="r"/>
-            <a:fld id="{F7021451-1387-4CA6-816F-3879F97B5CBC}" type="slidenum">
-              <a:rPr b="0" lang="en-US"/>
               <a:t>32</a:t>
             </a:fld>
             <a:endParaRPr lang="en-US"/>
@@ -15254,21 +15364,127 @@
       </p:grpSpPr>
       <p:sp>
         <p:nvSpPr>
-          <p:cNvPr id="2" name="frame"/>
+          <p:cNvPr id="2" name="misenai_band"/>
           <p:cNvSpPr/>
           <p:nvPr/>
         </p:nvSpPr>
         <p:spPr>
           <a:xfrm>
-            <a:off x="228600" y="137160"/>
-            <a:ext cx="8686800" cy="4526280"/>
-          </a:xfrm>
-          <a:prstGeom prst="rect">
-            <a:avLst/>
-          </a:prstGeom>
-          <a:ln w="12700">
+            <a:off x="457200" y="182880"/>
+            <a:ext cx="8229600" cy="502920"/>
+          </a:xfrm>
+          <a:prstGeom prst="roundRect">
+            <a:avLst>
+              <a:gd name="adj" fmla="val 18182"/>
+            </a:avLst>
+          </a:prstGeom>
+          <a:solidFill>
+            <a:srgbClr val="8C6A34"/>
+          </a:solidFill>
+          <a:ln/>
+        </p:spPr>
+        <p:txBody>
+          <a:bodyPr/>
+          <a:p/>
+        </p:txBody>
+      </p:sp>
+      <p:sp>
+        <p:nvSpPr>
+          <p:cNvPr id="3" name="misenai"/>
+          <p:cNvSpPr txBox="1"/>
+          <p:nvPr/>
+        </p:nvSpPr>
+        <p:spPr>
+          <a:xfrm>
+            <a:off x="457200" y="182880"/>
+            <a:ext cx="8229600" cy="502920"/>
+          </a:xfrm>
+          <a:prstGeom prst="rect">
+            <a:avLst/>
+          </a:prstGeom>
+          <a:noFill/>
+          <a:ln/>
+        </p:spPr>
+        <p:txBody>
+          <a:bodyPr wrap="square" lIns="0" tIns="0" rIns="0" bIns="0" rtlCol="0" anchor="ctr"/>
+          <a:lstStyle/>
+          <a:p>
+            <a:pPr algn="ctr" indent="0" marL="0">
+              <a:buNone/>
+            </a:pPr>
+            <a:r>
+              <a:rPr lang="en-US" sz="1800" b="1" dirty="0">
+                <a:solidFill>
+                  <a:schemeClr val="bg1"/>
+                </a:solidFill>
+              </a:rPr>
+              <a:t>【共有停止】</a:t>
+            </a:r>
+            <a:endParaRPr lang="en-US" sz="1800" dirty="0"/>
+          </a:p>
+        </p:txBody>
+      </p:sp>
+      <p:sp>
+        <p:nvSpPr>
+          <p:cNvPr id="4" name="facil_title"/>
+          <p:cNvSpPr txBox="1"/>
+          <p:nvPr/>
+        </p:nvSpPr>
+        <p:spPr>
+          <a:xfrm>
+            <a:off x="457200" y="777240"/>
+            <a:ext cx="8229600" cy="411480"/>
+          </a:xfrm>
+          <a:prstGeom prst="rect">
+            <a:avLst/>
+          </a:prstGeom>
+          <a:noFill/>
+          <a:ln/>
+        </p:spPr>
+        <p:txBody>
+          <a:bodyPr wrap="square" lIns="0" tIns="0" rIns="0" bIns="0" rtlCol="0" anchor="t"/>
+          <a:lstStyle/>
+          <a:p>
+            <a:pPr indent="0" marL="0">
+              <a:buNone/>
+            </a:pPr>
+            <a:r>
+              <a:rPr lang="en-US" sz="2200" b="1" dirty="0">
+                <a:solidFill>
+                  <a:schemeClr val="accent2"/>
+                </a:solidFill>
+                <a:latin typeface="Yu Mincho" pitchFamily="34" charset="0"/>
+                <a:ea typeface="Yu Mincho" pitchFamily="34" charset="-122"/>
+                <a:cs typeface="Yu Mincho" pitchFamily="34" charset="-120"/>
+              </a:rPr>
+              <a:t>STEP 3〜4 の進め方</a:t>
+            </a:r>
+            <a:endParaRPr lang="en-US" sz="2200" dirty="0"/>
+          </a:p>
+        </p:txBody>
+      </p:sp>
+      <p:sp>
+        <p:nvSpPr>
+          <p:cNvPr id="5" name="facil_card"/>
+          <p:cNvSpPr/>
+          <p:nvPr/>
+        </p:nvSpPr>
+        <p:spPr>
+          <a:xfrm>
+            <a:off x="457200" y="1188720"/>
+            <a:ext cx="5394960" cy="3383280"/>
+          </a:xfrm>
+          <a:prstGeom prst="roundRect">
+            <a:avLst>
+              <a:gd name="adj" fmla="val 3243"/>
+            </a:avLst>
+          </a:prstGeom>
+          <a:solidFill>
+            <a:srgbClr val="FFF8E8"/>
+          </a:solidFill>
+          <a:ln w="9525">
             <a:solidFill>
-              <a:srgbClr val="B08A4E"/>
+              <a:srgbClr val="E9D9B6"/>
             </a:solidFill>
             <a:prstDash val="solid"/>
           </a:ln>
@@ -15280,14 +15496,14 @@
       </p:sp>
       <p:sp>
         <p:nvSpPr>
-          <p:cNvPr id="3" name="qlabel"/>
+          <p:cNvPr id="6" name="facil_list"/>
           <p:cNvSpPr txBox="1"/>
           <p:nvPr/>
         </p:nvSpPr>
         <p:spPr>
           <a:xfrm>
-            <a:off x="457200" y="320040"/>
-            <a:ext cx="8229600" cy="365760"/>
+            <a:off x="594360" y="1280160"/>
+            <a:ext cx="5120640" cy="3200400"/>
           </a:xfrm>
           <a:prstGeom prst="rect">
             <a:avLst/>
@@ -15296,99 +15512,167 @@
           <a:ln/>
         </p:spPr>
         <p:txBody>
-          <a:bodyPr wrap="square" lIns="0" tIns="0" rIns="0" bIns="0" rtlCol="0" anchor="t"/>
-          <a:lstStyle/>
-          <a:p>
-            <a:pPr algn="ctr" indent="0" marL="0">
-              <a:buNone/>
-            </a:pPr>
-            <a:r>
-              <a:rPr lang="en-US" sz="1300" b="1" dirty="0">
-                <a:solidFill>
-                  <a:schemeClr val="accent2"/>
-                </a:solidFill>
-              </a:rPr>
-              <a:t>STEP 3　確認の質問</a:t>
-            </a:r>
-            <a:endParaRPr lang="en-US" sz="1300" dirty="0"/>
-          </a:p>
-        </p:txBody>
-      </p:sp>
-      <p:sp>
-        <p:nvSpPr>
-          <p:cNvPr id="4" name="Text 0"/>
-          <p:cNvSpPr/>
-          <p:nvPr>
-            <p:ph idx="100" type="title" hasCustomPrompt="1"/>
-          </p:nvPr>
-        </p:nvSpPr>
-        <p:spPr>
-          <a:xfrm>
-            <a:off x="914400" y="1554480"/>
-            <a:ext cx="7315200" cy="1554480"/>
-          </a:xfrm>
-          <a:prstGeom prst="rect">
-            <a:avLst/>
-          </a:prstGeom>
-          <a:noFill/>
-          <a:ln/>
-        </p:spPr>
-        <p:txBody>
-          <a:bodyPr wrap="square" rtlCol="0" anchor="ctr"/>
-          <a:lstStyle/>
-          <a:p>
-            <a:pPr algn="ctr" indent="0" marL="0">
-              <a:buNone/>
-            </a:pPr>
-            <a:r>
-              <a:rPr lang="en-US" sz="3200" b="1" dirty="0">
-                <a:solidFill>
-                  <a:schemeClr val="tx2"/>
-                </a:solidFill>
-                <a:latin typeface="Yu Mincho" pitchFamily="34" charset="0"/>
-                <a:ea typeface="Yu Mincho" pitchFamily="34" charset="-122"/>
-                <a:cs typeface="Yu Mincho" pitchFamily="34" charset="-120"/>
-              </a:rPr>
-              <a:t>その思い込みが“ゆるんだら”、</a:t>
-            </a:r>
-            <a:endParaRPr lang="en-US" sz="3200" dirty="0"/>
-          </a:p>
-          <a:p>
-            <a:pPr algn="ctr" indent="0" marL="0">
-              <a:buNone/>
-            </a:pPr>
-            <a:r>
-              <a:rPr lang="en-US" sz="3200" b="1" dirty="0">
-                <a:solidFill>
-                  <a:schemeClr val="tx2"/>
-                </a:solidFill>
-                <a:latin typeface="Yu Mincho" pitchFamily="34" charset="0"/>
-                <a:ea typeface="Yu Mincho" pitchFamily="34" charset="-122"/>
-                <a:cs typeface="Yu Mincho" pitchFamily="34" charset="-120"/>
-              </a:rPr>
-              <a:t>目標達成によい影響が</a:t>
-            </a:r>
-            <a:endParaRPr lang="en-US" sz="3200" dirty="0"/>
-          </a:p>
-          <a:p>
-            <a:pPr algn="ctr" indent="0" marL="0">
-              <a:buNone/>
-            </a:pPr>
-            <a:r>
-              <a:rPr lang="en-US" sz="3200" b="1" dirty="0">
-                <a:solidFill>
-                  <a:schemeClr val="tx2"/>
-                </a:solidFill>
-                <a:latin typeface="Yu Mincho" pitchFamily="34" charset="0"/>
-                <a:ea typeface="Yu Mincho" pitchFamily="34" charset="-122"/>
-                <a:cs typeface="Yu Mincho" pitchFamily="34" charset="-120"/>
-              </a:rPr>
-              <a:t>出そうですか？</a:t>
-            </a:r>
-            <a:endParaRPr lang="en-US" sz="3200" dirty="0"/>
-          </a:p>
-        </p:txBody>
-      </p:sp>
+          <a:bodyPr wrap="square" lIns="1016" tIns="1016" rIns="1016" bIns="1016" rtlCol="0" anchor="t"/>
+          <a:lstStyle/>
+          <a:p>
+            <a:pPr marL="342900" indent="-342900">
+              <a:spcAft>
+                <a:spcPts val="300"/>
+              </a:spcAft>
+              <a:buSzPct val="100000"/>
+              <a:buFont typeface="+mj-lt"/>
+              <a:buAutoNum type="arabicPeriod" startAt="1"/>
+            </a:pPr>
+            <a:r>
+              <a:rPr lang="en-US" sz="1200" dirty="0">
+                <a:solidFill>
+                  <a:schemeClr val="tx1"/>
+                </a:solidFill>
+              </a:rPr>
+              <a:t>点数の高い上位3つに印 → 一番邪魔している思い込みを1つ（Oリング可）</a:t>
+            </a:r>
+            <a:endParaRPr lang="en-US" sz="1200" dirty="0"/>
+          </a:p>
+          <a:p>
+            <a:pPr marL="342900" indent="-342900">
+              <a:spcAft>
+                <a:spcPts val="300"/>
+              </a:spcAft>
+              <a:buSzPct val="100000"/>
+              <a:buFont typeface="+mj-lt"/>
+              <a:buAutoNum type="arabicPeriod" startAt="1"/>
+            </a:pPr>
+            <a:r>
+              <a:rPr lang="en-US" sz="1200" dirty="0">
+                <a:solidFill>
+                  <a:schemeClr val="tx1"/>
+                </a:solidFill>
+              </a:rPr>
+              <a:t>確認「ゆるんだら、目標達成によい影響が出そう？」</a:t>
+            </a:r>
+            <a:endParaRPr lang="en-US" sz="1200" dirty="0"/>
+          </a:p>
+          <a:p>
+            <a:pPr marL="342900" indent="-342900">
+              <a:spcAft>
+                <a:spcPts val="300"/>
+              </a:spcAft>
+              <a:buSzPct val="100000"/>
+              <a:buFont typeface="+mj-lt"/>
+              <a:buAutoNum type="arabicPeriod" startAt="1"/>
+            </a:pPr>
+            <a:r>
+              <a:rPr lang="en-US" sz="1200" dirty="0">
+                <a:solidFill>
+                  <a:schemeClr val="tx1"/>
+                </a:solidFill>
+              </a:rPr>
+              <a:t>今の自分の場所に立ち、今の気持ちを話してもらう</a:t>
+            </a:r>
+            <a:endParaRPr lang="en-US" sz="1200" dirty="0"/>
+          </a:p>
+          <a:p>
+            <a:pPr marL="342900" indent="-342900">
+              <a:spcAft>
+                <a:spcPts val="300"/>
+              </a:spcAft>
+              <a:buSzPct val="100000"/>
+              <a:buFont typeface="+mj-lt"/>
+              <a:buAutoNum type="arabicPeriod" startAt="1"/>
+            </a:pPr>
+            <a:r>
+              <a:rPr lang="en-US" sz="1200" dirty="0">
+                <a:solidFill>
+                  <a:schemeClr val="tx1"/>
+                </a:solidFill>
+              </a:rPr>
+              <a:t>思い込みが生まれた過去の場面へ（見える・色・聞こえる・体の感じ）</a:t>
+            </a:r>
+            <a:endParaRPr lang="en-US" sz="1200" dirty="0"/>
+          </a:p>
+          <a:p>
+            <a:pPr marL="342900" indent="-342900">
+              <a:spcAft>
+                <a:spcPts val="300"/>
+              </a:spcAft>
+              <a:buSzPct val="100000"/>
+              <a:buFont typeface="+mj-lt"/>
+              <a:buAutoNum type="arabicPeriod" startAt="1"/>
+            </a:pPr>
+            <a:r>
+              <a:rPr lang="en-US" sz="1200" dirty="0">
+                <a:solidFill>
+                  <a:schemeClr val="tx1"/>
+                </a:solidFill>
+              </a:rPr>
+              <a:t>その場所から出て外から見る「本当はどうして欲しかった？」「本当はどうしたかった？」</a:t>
+            </a:r>
+            <a:endParaRPr lang="en-US" sz="1200" dirty="0"/>
+          </a:p>
+          <a:p>
+            <a:pPr marL="342900" indent="-342900">
+              <a:spcAft>
+                <a:spcPts val="300"/>
+              </a:spcAft>
+              <a:buSzPct val="100000"/>
+              <a:buFont typeface="+mj-lt"/>
+              <a:buAutoNum type="arabicPeriod" startAt="1"/>
+            </a:pPr>
+            <a:r>
+              <a:rPr lang="en-US" sz="1200" dirty="0">
+                <a:solidFill>
+                  <a:schemeClr val="tx1"/>
+                </a:solidFill>
+              </a:rPr>
+              <a:t>もう一度戻って、言いたかったことを全部吐き出す（100％出たか？）</a:t>
+            </a:r>
+            <a:endParaRPr lang="en-US" sz="1200" dirty="0"/>
+          </a:p>
+          <a:p>
+            <a:pPr marL="342900" indent="-342900">
+              <a:spcAft>
+                <a:spcPts val="300"/>
+              </a:spcAft>
+              <a:buSzPct val="100000"/>
+              <a:buFont typeface="+mj-lt"/>
+              <a:buAutoNum type="arabicPeriod" startAt="1"/>
+            </a:pPr>
+            <a:r>
+              <a:rPr lang="en-US" sz="1200" dirty="0">
+                <a:solidFill>
+                  <a:schemeClr val="tx1"/>
+                </a:solidFill>
+              </a:rPr>
+              <a:t>苦しくなったら止めて息を吐き切る。ポジ変しない</a:t>
+            </a:r>
+            <a:endParaRPr lang="en-US" sz="1200" dirty="0"/>
+          </a:p>
+        </p:txBody>
+      </p:sp>
+      <p:pic>
+        <p:nvPicPr>
+          <p:cNvPr id="7" name="Image 0" descr="ガイドブック">    </p:cNvPr>
+          <p:cNvPicPr>
+            <a:picLocks noChangeAspect="1"/>
+          </p:cNvPicPr>
+          <p:nvPr/>
+        </p:nvPicPr>
+        <p:blipFill>
+          <a:blip r:embed="rId1"/>
+          <a:stretch>
+            <a:fillRect/>
+          </a:stretch>
+        </p:blipFill>
+        <p:spPr>
+          <a:xfrm>
+            <a:off x="6126480" y="1188720"/>
+            <a:ext cx="2377440" cy="3364992"/>
+          </a:xfrm>
+          <a:prstGeom prst="rect">
+            <a:avLst/>
+          </a:prstGeom>
+        </p:spPr>
+      </p:pic>
       <p:sp>
         <p:nvSpPr>
           <p:cNvPr id="25" name="Slide Number Placeholder 0"/>
@@ -15515,7 +15799,7 @@
                   <a:schemeClr val="accent2"/>
                 </a:solidFill>
               </a:rPr>
-              <a:t>STEP 4</a:t>
+              <a:t>STEP 3</a:t>
             </a:r>
             <a:endParaRPr lang="en-US" sz="1300" dirty="0"/>
           </a:p>
@@ -15556,7 +15840,7 @@
                 <a:ea typeface="Yu Mincho" pitchFamily="34" charset="-122"/>
                 <a:cs typeface="Yu Mincho" pitchFamily="34" charset="-120"/>
               </a:rPr>
-              <a:t>その思い込みが生まれた場面に</a:t>
+              <a:t>一番、邪魔している思い込みは</a:t>
             </a:r>
             <a:endParaRPr lang="en-US" sz="3200" dirty="0"/>
           </a:p>
@@ -15573,7 +15857,7 @@
                 <a:ea typeface="Yu Mincho" pitchFamily="34" charset="-122"/>
                 <a:cs typeface="Yu Mincho" pitchFamily="34" charset="-120"/>
               </a:rPr>
-              <a:t>戻ってみましょう</a:t>
+              <a:t>どれですか？</a:t>
             </a:r>
             <a:endParaRPr lang="en-US" sz="3200" dirty="0"/>
           </a:p>
@@ -15611,21 +15895,7 @@
                   <a:schemeClr val="accent2"/>
                 </a:solidFill>
               </a:rPr>
-              <a:t>何が見えますか？　どんな色ですか？</a:t>
-            </a:r>
-            <a:endParaRPr lang="en-US" sz="1500" dirty="0"/>
-          </a:p>
-          <a:p>
-            <a:pPr algn="ctr" indent="0" marL="0">
-              <a:buNone/>
-            </a:pPr>
-            <a:r>
-              <a:rPr lang="en-US" sz="1500" dirty="0">
-                <a:solidFill>
-                  <a:schemeClr val="accent2"/>
-                </a:solidFill>
-              </a:rPr>
-              <a:t>何が聞こえますか？　体はどんな感じがしますか？</a:t>
+              <a:t>点数の高い上位3つの中から、1つ選びます</a:t>
             </a:r>
             <a:endParaRPr lang="en-US" sz="1500" dirty="0"/>
           </a:p>
@@ -15757,7 +16027,7 @@
                   <a:schemeClr val="accent2"/>
                 </a:solidFill>
               </a:rPr>
-              <a:t>STEP 4　外から見ながら</a:t>
+              <a:t>STEP 3　確認の質問</a:t>
             </a:r>
             <a:endParaRPr lang="en-US" sz="1300" dirty="0"/>
           </a:p>
@@ -15798,7 +16068,7 @@
                 <a:ea typeface="Yu Mincho" pitchFamily="34" charset="-122"/>
                 <a:cs typeface="Yu Mincho" pitchFamily="34" charset="-120"/>
               </a:rPr>
-              <a:t>本当は、</a:t>
+              <a:t>その思い込みが“ゆるんだら”、</a:t>
             </a:r>
             <a:endParaRPr lang="en-US" sz="3200" dirty="0"/>
           </a:p>
@@ -15815,47 +16085,26 @@
                 <a:ea typeface="Yu Mincho" pitchFamily="34" charset="-122"/>
                 <a:cs typeface="Yu Mincho" pitchFamily="34" charset="-120"/>
               </a:rPr>
-              <a:t>どうして欲しかったの？</a:t>
+              <a:t>目標達成によい影響が</a:t>
             </a:r>
             <a:endParaRPr lang="en-US" sz="3200" dirty="0"/>
           </a:p>
-        </p:txBody>
-      </p:sp>
-      <p:sp>
-        <p:nvSpPr>
-          <p:cNvPr id="5" name="Text 0"/>
-          <p:cNvSpPr/>
-          <p:nvPr>
-            <p:ph idx="101" type="body" hasCustomPrompt="1"/>
-          </p:nvPr>
-        </p:nvSpPr>
-        <p:spPr>
-          <a:xfrm>
-            <a:off x="914400" y="3200400"/>
-            <a:ext cx="7315200" cy="731520"/>
-          </a:xfrm>
-          <a:prstGeom prst="rect">
-            <a:avLst/>
-          </a:prstGeom>
-          <a:noFill/>
-          <a:ln/>
-        </p:spPr>
-        <p:txBody>
-          <a:bodyPr wrap="square" rtlCol="0" anchor="t"/>
-          <a:lstStyle/>
           <a:p>
             <a:pPr algn="ctr" indent="0" marL="0">
               <a:buNone/>
             </a:pPr>
             <a:r>
-              <a:rPr lang="en-US" sz="1500" dirty="0">
-                <a:solidFill>
-                  <a:schemeClr val="accent2"/>
-                </a:solidFill>
-              </a:rPr>
-              <a:t>「満たされていない想い」を、言葉にしていきます</a:t>
-            </a:r>
-            <a:endParaRPr lang="en-US" sz="1500" dirty="0"/>
+              <a:rPr lang="en-US" sz="3200" b="1" dirty="0">
+                <a:solidFill>
+                  <a:schemeClr val="tx2"/>
+                </a:solidFill>
+                <a:latin typeface="Yu Mincho" pitchFamily="34" charset="0"/>
+                <a:ea typeface="Yu Mincho" pitchFamily="34" charset="-122"/>
+                <a:cs typeface="Yu Mincho" pitchFamily="34" charset="-120"/>
+              </a:rPr>
+              <a:t>出そうですか？</a:t>
+            </a:r>
+            <a:endParaRPr lang="en-US" sz="3200" dirty="0"/>
           </a:p>
         </p:txBody>
       </p:sp>
@@ -15985,7 +16234,7 @@
                   <a:schemeClr val="accent2"/>
                 </a:solidFill>
               </a:rPr>
-              <a:t>STEP 4　外から見ながら</a:t>
+              <a:t>STEP 4</a:t>
             </a:r>
             <a:endParaRPr lang="en-US" sz="1300" dirty="0"/>
           </a:p>
@@ -16026,7 +16275,7 @@
                 <a:ea typeface="Yu Mincho" pitchFamily="34" charset="-122"/>
                 <a:cs typeface="Yu Mincho" pitchFamily="34" charset="-120"/>
               </a:rPr>
-              <a:t>本当は、</a:t>
+              <a:t>その思い込みが生まれた場面に</a:t>
             </a:r>
             <a:endParaRPr lang="en-US" sz="3200" dirty="0"/>
           </a:p>
@@ -16043,9 +16292,61 @@
                 <a:ea typeface="Yu Mincho" pitchFamily="34" charset="-122"/>
                 <a:cs typeface="Yu Mincho" pitchFamily="34" charset="-120"/>
               </a:rPr>
-              <a:t>どうしたかったの？</a:t>
+              <a:t>戻ってみましょう</a:t>
             </a:r>
             <a:endParaRPr lang="en-US" sz="3200" dirty="0"/>
+          </a:p>
+        </p:txBody>
+      </p:sp>
+      <p:sp>
+        <p:nvSpPr>
+          <p:cNvPr id="5" name="Text 0"/>
+          <p:cNvSpPr/>
+          <p:nvPr>
+            <p:ph idx="101" type="body" hasCustomPrompt="1"/>
+          </p:nvPr>
+        </p:nvSpPr>
+        <p:spPr>
+          <a:xfrm>
+            <a:off x="914400" y="3200400"/>
+            <a:ext cx="7315200" cy="731520"/>
+          </a:xfrm>
+          <a:prstGeom prst="rect">
+            <a:avLst/>
+          </a:prstGeom>
+          <a:noFill/>
+          <a:ln/>
+        </p:spPr>
+        <p:txBody>
+          <a:bodyPr wrap="square" rtlCol="0" anchor="t"/>
+          <a:lstStyle/>
+          <a:p>
+            <a:pPr algn="ctr" indent="0" marL="0">
+              <a:buNone/>
+            </a:pPr>
+            <a:r>
+              <a:rPr lang="en-US" sz="1500" dirty="0">
+                <a:solidFill>
+                  <a:schemeClr val="accent2"/>
+                </a:solidFill>
+              </a:rPr>
+              <a:t>何が見えますか？　どんな色ですか？</a:t>
+            </a:r>
+            <a:endParaRPr lang="en-US" sz="1500" dirty="0"/>
+          </a:p>
+          <a:p>
+            <a:pPr algn="ctr" indent="0" marL="0">
+              <a:buNone/>
+            </a:pPr>
+            <a:r>
+              <a:rPr lang="en-US" sz="1500" dirty="0">
+                <a:solidFill>
+                  <a:schemeClr val="accent2"/>
+                </a:solidFill>
+              </a:rPr>
+              <a:t>何が聞こえますか？　体はどんな感じがしますか？</a:t>
+            </a:r>
+            <a:endParaRPr lang="en-US" sz="1500" dirty="0"/>
           </a:p>
         </p:txBody>
       </p:sp>
@@ -16175,7 +16476,7 @@
                   <a:schemeClr val="accent2"/>
                 </a:solidFill>
               </a:rPr>
-              <a:t>STEP 4　もう一度その場所に戻って</a:t>
+              <a:t>STEP 4　外から見ながら</a:t>
             </a:r>
             <a:endParaRPr lang="en-US" sz="1300" dirty="0"/>
           </a:p>
@@ -16216,7 +16517,7 @@
                 <a:ea typeface="Yu Mincho" pitchFamily="34" charset="-122"/>
                 <a:cs typeface="Yu Mincho" pitchFamily="34" charset="-120"/>
               </a:rPr>
-              <a:t>あの時のあなたへ、</a:t>
+              <a:t>本当は、</a:t>
             </a:r>
             <a:endParaRPr lang="en-US" sz="3200" dirty="0"/>
           </a:p>
@@ -16233,7 +16534,7 @@
                 <a:ea typeface="Yu Mincho" pitchFamily="34" charset="-122"/>
                 <a:cs typeface="Yu Mincho" pitchFamily="34" charset="-120"/>
               </a:rPr>
-              <a:t>＿＿＿＿＿＿＿＿</a:t>
+              <a:t>どうして欲しかったの？</a:t>
             </a:r>
             <a:endParaRPr lang="en-US" sz="3200" dirty="0"/>
           </a:p>
@@ -16271,7 +16572,7 @@
                   <a:schemeClr val="accent2"/>
                 </a:solidFill>
               </a:rPr>
-              <a:t>苦しくなったら、いったん止めて、息を吐き切りましょう</a:t>
+              <a:t>「満たされていない想い」を、言葉にしていきます</a:t>
             </a:r>
             <a:endParaRPr lang="en-US" sz="1500" dirty="0"/>
           </a:p>
@@ -16349,24 +16650,24 @@
       </p:grpSpPr>
       <p:sp>
         <p:nvSpPr>
-          <p:cNvPr id="2" name="misenai_band"/>
+          <p:cNvPr id="2" name="frame"/>
           <p:cNvSpPr/>
           <p:nvPr/>
         </p:nvSpPr>
         <p:spPr>
           <a:xfrm>
-            <a:off x="457200" y="182880"/>
-            <a:ext cx="8229600" cy="502920"/>
-          </a:xfrm>
-          <a:prstGeom prst="roundRect">
-            <a:avLst>
-              <a:gd name="adj" fmla="val 18182"/>
-            </a:avLst>
-          </a:prstGeom>
-          <a:solidFill>
-            <a:srgbClr val="8C6A34"/>
-          </a:solidFill>
-          <a:ln/>
+            <a:off x="228600" y="137160"/>
+            <a:ext cx="8686800" cy="4526280"/>
+          </a:xfrm>
+          <a:prstGeom prst="rect">
+            <a:avLst/>
+          </a:prstGeom>
+          <a:ln w="12700">
+            <a:solidFill>
+              <a:srgbClr val="B08A4E"/>
+            </a:solidFill>
+            <a:prstDash val="solid"/>
+          </a:ln>
         </p:spPr>
         <p:txBody>
           <a:bodyPr/>
@@ -16375,14 +16676,14 @@
       </p:sp>
       <p:sp>
         <p:nvSpPr>
-          <p:cNvPr id="3" name="misenai"/>
+          <p:cNvPr id="3" name="qlabel"/>
           <p:cNvSpPr txBox="1"/>
           <p:nvPr/>
         </p:nvSpPr>
         <p:spPr>
           <a:xfrm>
-            <a:off x="457200" y="182880"/>
-            <a:ext cx="8229600" cy="502920"/>
+            <a:off x="457200" y="320040"/>
+            <a:ext cx="8229600" cy="365760"/>
           </a:xfrm>
           <a:prstGeom prst="rect">
             <a:avLst/>
@@ -16391,34 +16692,36 @@
           <a:ln/>
         </p:spPr>
         <p:txBody>
-          <a:bodyPr wrap="square" lIns="0" tIns="0" rIns="0" bIns="0" rtlCol="0" anchor="ctr"/>
+          <a:bodyPr wrap="square" lIns="0" tIns="0" rIns="0" bIns="0" rtlCol="0" anchor="t"/>
           <a:lstStyle/>
           <a:p>
             <a:pPr algn="ctr" indent="0" marL="0">
               <a:buNone/>
             </a:pPr>
             <a:r>
-              <a:rPr lang="en-US" sz="1800" b="1" dirty="0">
-                <a:solidFill>
-                  <a:schemeClr val="bg1"/>
-                </a:solidFill>
-              </a:rPr>
-              <a:t>【共有停止】</a:t>
-            </a:r>
-            <a:endParaRPr lang="en-US" sz="1800" dirty="0"/>
-          </a:p>
-        </p:txBody>
-      </p:sp>
-      <p:sp>
-        <p:nvSpPr>
-          <p:cNvPr id="4" name="facil_title"/>
-          <p:cNvSpPr txBox="1"/>
-          <p:nvPr/>
-        </p:nvSpPr>
-        <p:spPr>
-          <a:xfrm>
-            <a:off x="457200" y="777240"/>
-            <a:ext cx="8229600" cy="411480"/>
+              <a:rPr lang="en-US" sz="1300" b="1" dirty="0">
+                <a:solidFill>
+                  <a:schemeClr val="accent2"/>
+                </a:solidFill>
+              </a:rPr>
+              <a:t>STEP 4　外から見ながら</a:t>
+            </a:r>
+            <a:endParaRPr lang="en-US" sz="1300" dirty="0"/>
+          </a:p>
+        </p:txBody>
+      </p:sp>
+      <p:sp>
+        <p:nvSpPr>
+          <p:cNvPr id="4" name="Text 0"/>
+          <p:cNvSpPr/>
+          <p:nvPr>
+            <p:ph idx="100" type="title" hasCustomPrompt="1"/>
+          </p:nvPr>
+        </p:nvSpPr>
+        <p:spPr>
+          <a:xfrm>
+            <a:off x="914400" y="1554480"/>
+            <a:ext cx="7315200" cy="1554480"/>
           </a:xfrm>
           <a:prstGeom prst="rect">
             <a:avLst/>
@@ -16427,142 +16730,44 @@
           <a:ln/>
         </p:spPr>
         <p:txBody>
-          <a:bodyPr wrap="square" lIns="0" tIns="0" rIns="0" bIns="0" rtlCol="0" anchor="t"/>
-          <a:lstStyle/>
-          <a:p>
-            <a:pPr indent="0" marL="0">
-              <a:buNone/>
-            </a:pPr>
-            <a:r>
-              <a:rPr lang="en-US" sz="2200" b="1" dirty="0">
-                <a:solidFill>
-                  <a:schemeClr val="accent2"/>
+          <a:bodyPr wrap="square" rtlCol="0" anchor="ctr"/>
+          <a:lstStyle/>
+          <a:p>
+            <a:pPr algn="ctr" indent="0" marL="0">
+              <a:buNone/>
+            </a:pPr>
+            <a:r>
+              <a:rPr lang="en-US" sz="3200" b="1" dirty="0">
+                <a:solidFill>
+                  <a:schemeClr val="tx2"/>
                 </a:solidFill>
                 <a:latin typeface="Yu Mincho" pitchFamily="34" charset="0"/>
                 <a:ea typeface="Yu Mincho" pitchFamily="34" charset="-122"/>
                 <a:cs typeface="Yu Mincho" pitchFamily="34" charset="-120"/>
               </a:rPr>
-              <a:t>STEP 5 の進め方（理想の未来へ）</a:t>
-            </a:r>
-            <a:endParaRPr lang="en-US" sz="2200" dirty="0"/>
-          </a:p>
-        </p:txBody>
-      </p:sp>
-      <p:sp>
-        <p:nvSpPr>
-          <p:cNvPr id="5" name="facil_card"/>
-          <p:cNvSpPr/>
-          <p:nvPr/>
-        </p:nvSpPr>
-        <p:spPr>
-          <a:xfrm>
-            <a:off x="457200" y="1188720"/>
-            <a:ext cx="5394960" cy="3383280"/>
-          </a:xfrm>
-          <a:prstGeom prst="roundRect">
-            <a:avLst>
-              <a:gd name="adj" fmla="val 3243"/>
-            </a:avLst>
-          </a:prstGeom>
-          <a:solidFill>
-            <a:srgbClr val="FFF8E8"/>
-          </a:solidFill>
-          <a:ln w="9525">
-            <a:solidFill>
-              <a:srgbClr val="E9D9B6"/>
-            </a:solidFill>
-            <a:prstDash val="solid"/>
-          </a:ln>
-        </p:spPr>
-        <p:txBody>
-          <a:bodyPr/>
-          <a:p/>
-        </p:txBody>
-      </p:sp>
-      <p:sp>
-        <p:nvSpPr>
-          <p:cNvPr id="6" name="facil_list"/>
-          <p:cNvSpPr txBox="1"/>
-          <p:nvPr/>
-        </p:nvSpPr>
-        <p:spPr>
-          <a:xfrm>
-            <a:off x="594360" y="1280160"/>
-            <a:ext cx="5120640" cy="3200400"/>
-          </a:xfrm>
-          <a:prstGeom prst="rect">
-            <a:avLst/>
-          </a:prstGeom>
-          <a:noFill/>
-          <a:ln/>
-        </p:spPr>
-        <p:txBody>
-          <a:bodyPr wrap="square" lIns="1016" tIns="1016" rIns="1016" bIns="1016" rtlCol="0" anchor="t"/>
-          <a:lstStyle/>
-          <a:p>
-            <a:pPr marL="342900" indent="-342900">
-              <a:spcAft>
-                <a:spcPts val="300"/>
-              </a:spcAft>
-              <a:buSzPct val="100000"/>
-              <a:buFont typeface="+mj-lt"/>
-              <a:buAutoNum type="arabicPeriod" startAt="1"/>
-            </a:pPr>
-            <a:r>
-              <a:rPr lang="en-US" sz="1200" dirty="0">
-                <a:solidFill>
-                  <a:schemeClr val="tx1"/>
-                </a:solidFill>
-              </a:rPr>
-              <a:t>大成功している理想の未来の自分へ（見える・色・聞こえる・体の感じを2倍・3倍に）</a:t>
-            </a:r>
-            <a:endParaRPr lang="en-US" sz="1200" dirty="0"/>
-          </a:p>
-          <a:p>
-            <a:pPr marL="342900" indent="-342900">
-              <a:spcAft>
-                <a:spcPts val="300"/>
-              </a:spcAft>
-              <a:buSzPct val="100000"/>
-              <a:buFont typeface="+mj-lt"/>
-              <a:buAutoNum type="arabicPeriod" startAt="1"/>
-            </a:pPr>
-            <a:r>
-              <a:rPr lang="en-US" sz="1200" dirty="0">
-                <a:solidFill>
-                  <a:schemeClr val="tx1"/>
-                </a:solidFill>
-              </a:rPr>
-              <a:t>「これから選びたいお金の考え」を本人の言葉で決める（由香が打ち込む）</a:t>
-            </a:r>
-            <a:endParaRPr lang="en-US" sz="1200" dirty="0"/>
-          </a:p>
-        </p:txBody>
-      </p:sp>
-      <p:pic>
-        <p:nvPicPr>
-          <p:cNvPr id="7" name="Image 0" descr="ガイドブック">    </p:cNvPr>
-          <p:cNvPicPr>
-            <a:picLocks noChangeAspect="1"/>
-          </p:cNvPicPr>
-          <p:nvPr/>
-        </p:nvPicPr>
-        <p:blipFill>
-          <a:blip r:embed="rId1"/>
-          <a:stretch>
-            <a:fillRect/>
-          </a:stretch>
-        </p:blipFill>
-        <p:spPr>
-          <a:xfrm>
-            <a:off x="6126480" y="1188720"/>
-            <a:ext cx="2377440" cy="3364992"/>
-          </a:xfrm>
-          <a:prstGeom prst="rect">
-            <a:avLst/>
-          </a:prstGeom>
-        </p:spPr>
-      </p:pic>
+              <a:t>本当は、</a:t>
+            </a:r>
+            <a:endParaRPr lang="en-US" sz="3200" dirty="0"/>
+          </a:p>
+          <a:p>
+            <a:pPr algn="ctr" indent="0" marL="0">
+              <a:buNone/>
+            </a:pPr>
+            <a:r>
+              <a:rPr lang="en-US" sz="3200" b="1" dirty="0">
+                <a:solidFill>
+                  <a:schemeClr val="tx2"/>
+                </a:solidFill>
+                <a:latin typeface="Yu Mincho" pitchFamily="34" charset="0"/>
+                <a:ea typeface="Yu Mincho" pitchFamily="34" charset="-122"/>
+                <a:cs typeface="Yu Mincho" pitchFamily="34" charset="-120"/>
+              </a:rPr>
+              <a:t>どうしたかったの？</a:t>
+            </a:r>
+            <a:endParaRPr lang="en-US" sz="3200" dirty="0"/>
+          </a:p>
+        </p:txBody>
+      </p:sp>
       <p:sp>
         <p:nvSpPr>
           <p:cNvPr id="25" name="Slide Number Placeholder 0"/>
@@ -16689,7 +16894,7 @@
                   <a:schemeClr val="accent2"/>
                 </a:solidFill>
               </a:rPr>
-              <a:t>STEP 5　理想の未来から</a:t>
+              <a:t>STEP 4　理想のあなた</a:t>
             </a:r>
             <a:endParaRPr lang="en-US" sz="1300" dirty="0"/>
           </a:p>
@@ -16730,7 +16935,7 @@
                 <a:ea typeface="Yu Mincho" pitchFamily="34" charset="-122"/>
                 <a:cs typeface="Yu Mincho" pitchFamily="34" charset="-120"/>
               </a:rPr>
-              <a:t>大成功しているあなたには、</a:t>
+              <a:t>理想のあなたを</a:t>
             </a:r>
             <a:endParaRPr lang="en-US" sz="3200" dirty="0"/>
           </a:p>
@@ -16747,24 +16952,7 @@
                 <a:ea typeface="Yu Mincho" pitchFamily="34" charset="-122"/>
                 <a:cs typeface="Yu Mincho" pitchFamily="34" charset="-120"/>
               </a:rPr>
-              <a:t>何が見えて、どんな色で、</a:t>
-            </a:r>
-            <a:endParaRPr lang="en-US" sz="3200" dirty="0"/>
-          </a:p>
-          <a:p>
-            <a:pPr algn="ctr" indent="0" marL="0">
-              <a:buNone/>
-            </a:pPr>
-            <a:r>
-              <a:rPr lang="en-US" sz="3200" b="1" dirty="0">
-                <a:solidFill>
-                  <a:schemeClr val="tx2"/>
-                </a:solidFill>
-                <a:latin typeface="Yu Mincho" pitchFamily="34" charset="0"/>
-                <a:ea typeface="Yu Mincho" pitchFamily="34" charset="-122"/>
-                <a:cs typeface="Yu Mincho" pitchFamily="34" charset="-120"/>
-              </a:rPr>
-              <a:t>何が聞こえますか？</a:t>
+              <a:t>思い浮かべてください</a:t>
             </a:r>
             <a:endParaRPr lang="en-US" sz="3200" dirty="0"/>
           </a:p>
@@ -16802,7 +16990,7 @@
                   <a:schemeClr val="accent2"/>
                 </a:solidFill>
               </a:rPr>
-              <a:t>体はどんな感じがしますか？</a:t>
+              <a:t>どんなあなたですか？</a:t>
             </a:r>
             <a:endParaRPr lang="en-US" sz="1500" dirty="0"/>
           </a:p>
@@ -16998,16 +17186,40 @@
       </p:grpSpPr>
       <p:sp>
         <p:nvSpPr>
-          <p:cNvPr id="2" name="Text 0"/>
+          <p:cNvPr id="2" name="frame"/>
           <p:cNvSpPr/>
-          <p:nvPr>
-            <p:ph idx="100" type="title" hasCustomPrompt="1"/>
-          </p:nvPr>
-        </p:nvSpPr>
-        <p:spPr>
-          <a:xfrm>
-            <a:off x="457200" y="457200"/>
-            <a:ext cx="8229600" cy="594360"/>
+          <p:nvPr/>
+        </p:nvSpPr>
+        <p:spPr>
+          <a:xfrm>
+            <a:off x="228600" y="137160"/>
+            <a:ext cx="8686800" cy="4526280"/>
+          </a:xfrm>
+          <a:prstGeom prst="rect">
+            <a:avLst/>
+          </a:prstGeom>
+          <a:ln w="12700">
+            <a:solidFill>
+              <a:srgbClr val="B08A4E"/>
+            </a:solidFill>
+            <a:prstDash val="solid"/>
+          </a:ln>
+        </p:spPr>
+        <p:txBody>
+          <a:bodyPr/>
+          <a:p/>
+        </p:txBody>
+      </p:sp>
+      <p:sp>
+        <p:nvSpPr>
+          <p:cNvPr id="3" name="qlabel"/>
+          <p:cNvSpPr txBox="1"/>
+          <p:nvPr/>
+        </p:nvSpPr>
+        <p:spPr>
+          <a:xfrm>
+            <a:off x="457200" y="320040"/>
+            <a:ext cx="8229600" cy="365760"/>
           </a:xfrm>
           <a:prstGeom prst="rect">
             <a:avLst/>
@@ -17016,68 +17228,94 @@
           <a:ln/>
         </p:spPr>
         <p:txBody>
-          <a:bodyPr wrap="square" lIns="0" tIns="0" rIns="0" bIns="0" rtlCol="0" anchor="ctr"/>
-          <a:lstStyle/>
-          <a:p>
-            <a:pPr algn="l" indent="0" marL="0">
-              <a:buNone/>
-            </a:pPr>
-            <a:r>
-              <a:rPr lang="en-US" sz="2400" b="1" dirty="0">
+          <a:bodyPr wrap="square" lIns="0" tIns="0" rIns="0" bIns="0" rtlCol="0" anchor="t"/>
+          <a:lstStyle/>
+          <a:p>
+            <a:pPr algn="ctr" indent="0" marL="0">
+              <a:buNone/>
+            </a:pPr>
+            <a:r>
+              <a:rPr lang="en-US" sz="1300" b="1" dirty="0">
                 <a:solidFill>
                   <a:schemeClr val="accent2"/>
+                </a:solidFill>
+              </a:rPr>
+              <a:t>STEP 4　理想のあなたから</a:t>
+            </a:r>
+            <a:endParaRPr lang="en-US" sz="1300" dirty="0"/>
+          </a:p>
+        </p:txBody>
+      </p:sp>
+      <p:sp>
+        <p:nvSpPr>
+          <p:cNvPr id="4" name="Text 0"/>
+          <p:cNvSpPr/>
+          <p:nvPr>
+            <p:ph idx="100" type="title" hasCustomPrompt="1"/>
+          </p:nvPr>
+        </p:nvSpPr>
+        <p:spPr>
+          <a:xfrm>
+            <a:off x="914400" y="1554480"/>
+            <a:ext cx="7315200" cy="1554480"/>
+          </a:xfrm>
+          <a:prstGeom prst="rect">
+            <a:avLst/>
+          </a:prstGeom>
+          <a:noFill/>
+          <a:ln/>
+        </p:spPr>
+        <p:txBody>
+          <a:bodyPr wrap="square" rtlCol="0" anchor="ctr"/>
+          <a:lstStyle/>
+          <a:p>
+            <a:pPr algn="ctr" indent="0" marL="0">
+              <a:buNone/>
+            </a:pPr>
+            <a:r>
+              <a:rPr lang="en-US" sz="3200" b="1" dirty="0">
+                <a:solidFill>
+                  <a:schemeClr val="tx2"/>
                 </a:solidFill>
                 <a:latin typeface="Yu Mincho" pitchFamily="34" charset="0"/>
                 <a:ea typeface="Yu Mincho" pitchFamily="34" charset="-122"/>
                 <a:cs typeface="Yu Mincho" pitchFamily="34" charset="-120"/>
               </a:rPr>
-              <a:t>これから選びたい、お金の考え</a:t>
-            </a:r>
-            <a:endParaRPr lang="en-US" sz="2400" dirty="0"/>
-          </a:p>
-        </p:txBody>
-      </p:sp>
-      <p:sp>
-        <p:nvSpPr>
-          <p:cNvPr id="3" name="old_card"/>
+              <a:t>あの時のあなたへ、</a:t>
+            </a:r>
+            <a:endParaRPr lang="en-US" sz="3200" dirty="0"/>
+          </a:p>
+          <a:p>
+            <a:pPr algn="ctr" indent="0" marL="0">
+              <a:buNone/>
+            </a:pPr>
+            <a:r>
+              <a:rPr lang="en-US" sz="3200" b="1" dirty="0">
+                <a:solidFill>
+                  <a:schemeClr val="tx2"/>
+                </a:solidFill>
+                <a:latin typeface="Yu Mincho" pitchFamily="34" charset="0"/>
+                <a:ea typeface="Yu Mincho" pitchFamily="34" charset="-122"/>
+                <a:cs typeface="Yu Mincho" pitchFamily="34" charset="-120"/>
+              </a:rPr>
+              <a:t>＿＿＿＿＿＿＿＿</a:t>
+            </a:r>
+            <a:endParaRPr lang="en-US" sz="3200" dirty="0"/>
+          </a:p>
+        </p:txBody>
+      </p:sp>
+      <p:sp>
+        <p:nvSpPr>
+          <p:cNvPr id="5" name="Text 0"/>
           <p:cNvSpPr/>
-          <p:nvPr/>
-        </p:nvSpPr>
-        <p:spPr>
-          <a:xfrm>
-            <a:off x="457200" y="1280160"/>
-            <a:ext cx="3977640" cy="2468880"/>
-          </a:xfrm>
-          <a:prstGeom prst="roundRect">
-            <a:avLst>
-              <a:gd name="adj" fmla="val 4444"/>
-            </a:avLst>
-          </a:prstGeom>
-          <a:solidFill>
-            <a:srgbClr val="FDFAF4"/>
-          </a:solidFill>
-          <a:ln w="9525">
-            <a:solidFill>
-              <a:srgbClr val="E9D9B6"/>
-            </a:solidFill>
-            <a:prstDash val="solid"/>
-          </a:ln>
-        </p:spPr>
-        <p:txBody>
-          <a:bodyPr/>
-          <a:p/>
-        </p:txBody>
-      </p:sp>
-      <p:sp>
-        <p:nvSpPr>
-          <p:cNvPr id="4" name="old_head"/>
-          <p:cNvSpPr txBox="1"/>
-          <p:nvPr/>
-        </p:nvSpPr>
-        <p:spPr>
-          <a:xfrm>
-            <a:off x="640080" y="1417320"/>
-            <a:ext cx="3657600" cy="365760"/>
+          <p:nvPr>
+            <p:ph idx="101" type="body" hasCustomPrompt="1"/>
+          </p:nvPr>
+        </p:nvSpPr>
+        <p:spPr>
+          <a:xfrm>
+            <a:off x="914400" y="3200400"/>
+            <a:ext cx="7315200" cy="731520"/>
           </a:xfrm>
           <a:prstGeom prst="rect">
             <a:avLst/>
@@ -17086,180 +17324,21 @@
           <a:ln/>
         </p:spPr>
         <p:txBody>
-          <a:bodyPr wrap="square" lIns="1016" tIns="1016" rIns="1016" bIns="1016" rtlCol="0" anchor="t"/>
-          <a:lstStyle/>
-          <a:p>
-            <a:pPr indent="0" marL="0">
-              <a:buNone/>
-            </a:pPr>
-            <a:r>
-              <a:rPr lang="en-US" sz="1600" b="1" dirty="0">
+          <a:bodyPr wrap="square" rtlCol="0" anchor="t"/>
+          <a:lstStyle/>
+          <a:p>
+            <a:pPr algn="ctr" indent="0" marL="0">
+              <a:buNone/>
+            </a:pPr>
+            <a:r>
+              <a:rPr lang="en-US" sz="1500" dirty="0">
                 <a:solidFill>
                   <a:schemeClr val="accent2"/>
                 </a:solidFill>
               </a:rPr>
-              <a:t>今までの考え</a:t>
-            </a:r>
-            <a:endParaRPr lang="en-US" sz="1600" dirty="0"/>
-          </a:p>
-        </p:txBody>
-      </p:sp>
-      <p:sp>
-        <p:nvSpPr>
-          <p:cNvPr id="5" name="old_body"/>
-          <p:cNvSpPr txBox="1"/>
-          <p:nvPr/>
-        </p:nvSpPr>
-        <p:spPr>
-          <a:xfrm>
-            <a:off x="640080" y="1874520"/>
-            <a:ext cx="3657600" cy="1737360"/>
-          </a:xfrm>
-          <a:prstGeom prst="rect">
-            <a:avLst/>
-          </a:prstGeom>
-          <a:noFill/>
-          <a:ln/>
-        </p:spPr>
-        <p:txBody>
-          <a:bodyPr wrap="square" lIns="1016" tIns="1016" rIns="1016" bIns="1016" rtlCol="0" anchor="t"/>
-          <a:lstStyle/>
-          <a:p>
-            <a:pPr indent="0" marL="0">
-              <a:buNone/>
-            </a:pPr>
-            <a:endParaRPr lang="en-US" sz="1800" dirty="0"/>
-          </a:p>
-        </p:txBody>
-      </p:sp>
-      <p:sp>
-        <p:nvSpPr>
-          <p:cNvPr id="6" name="new_card"/>
-          <p:cNvSpPr/>
-          <p:nvPr/>
-        </p:nvSpPr>
-        <p:spPr>
-          <a:xfrm>
-            <a:off x="4709160" y="1280160"/>
-            <a:ext cx="3977640" cy="2468880"/>
-          </a:xfrm>
-          <a:prstGeom prst="roundRect">
-            <a:avLst>
-              <a:gd name="adj" fmla="val 4444"/>
-            </a:avLst>
-          </a:prstGeom>
-          <a:solidFill>
-            <a:srgbClr val="F8EBEE"/>
-          </a:solidFill>
-          <a:ln w="9525">
-            <a:solidFill>
-              <a:srgbClr val="E9D9B6"/>
-            </a:solidFill>
-            <a:prstDash val="solid"/>
-          </a:ln>
-        </p:spPr>
-        <p:txBody>
-          <a:bodyPr/>
-          <a:p/>
-        </p:txBody>
-      </p:sp>
-      <p:sp>
-        <p:nvSpPr>
-          <p:cNvPr id="7" name="new_head"/>
-          <p:cNvSpPr txBox="1"/>
-          <p:nvPr/>
-        </p:nvSpPr>
-        <p:spPr>
-          <a:xfrm>
-            <a:off x="4892040" y="1417320"/>
-            <a:ext cx="3657600" cy="365760"/>
-          </a:xfrm>
-          <a:prstGeom prst="rect">
-            <a:avLst/>
-          </a:prstGeom>
-          <a:noFill/>
-          <a:ln/>
-        </p:spPr>
-        <p:txBody>
-          <a:bodyPr wrap="square" lIns="1016" tIns="1016" rIns="1016" bIns="1016" rtlCol="0" anchor="t"/>
-          <a:lstStyle/>
-          <a:p>
-            <a:pPr indent="0" marL="0">
-              <a:buNone/>
-            </a:pPr>
-            <a:r>
-              <a:rPr lang="en-US" sz="1600" b="1" dirty="0">
-                <a:solidFill>
-                  <a:schemeClr val="accent2"/>
-                </a:solidFill>
-              </a:rPr>
-              <a:t>これから選びたい考え</a:t>
-            </a:r>
-            <a:endParaRPr lang="en-US" sz="1600" dirty="0"/>
-          </a:p>
-        </p:txBody>
-      </p:sp>
-      <p:sp>
-        <p:nvSpPr>
-          <p:cNvPr id="8" name="new_body"/>
-          <p:cNvSpPr txBox="1"/>
-          <p:nvPr/>
-        </p:nvSpPr>
-        <p:spPr>
-          <a:xfrm>
-            <a:off x="4892040" y="1874520"/>
-            <a:ext cx="3657600" cy="1737360"/>
-          </a:xfrm>
-          <a:prstGeom prst="rect">
-            <a:avLst/>
-          </a:prstGeom>
-          <a:noFill/>
-          <a:ln/>
-        </p:spPr>
-        <p:txBody>
-          <a:bodyPr wrap="square" lIns="1016" tIns="1016" rIns="1016" bIns="1016" rtlCol="0" anchor="t"/>
-          <a:lstStyle/>
-          <a:p>
-            <a:pPr indent="0" marL="0">
-              <a:buNone/>
-            </a:pPr>
-            <a:endParaRPr lang="en-US" sz="1800" dirty="0"/>
-          </a:p>
-        </p:txBody>
-      </p:sp>
-      <p:sp>
-        <p:nvSpPr>
-          <p:cNvPr id="9" name="new_note"/>
-          <p:cNvSpPr txBox="1"/>
-          <p:nvPr/>
-        </p:nvSpPr>
-        <p:spPr>
-          <a:xfrm>
-            <a:off x="457200" y="3931920"/>
-            <a:ext cx="8229600" cy="411480"/>
-          </a:xfrm>
-          <a:prstGeom prst="rect">
-            <a:avLst/>
-          </a:prstGeom>
-          <a:noFill/>
-          <a:ln/>
-        </p:spPr>
-        <p:txBody>
-          <a:bodyPr wrap="square" lIns="1016" tIns="1016" rIns="1016" bIns="1016" rtlCol="0" anchor="t"/>
-          <a:lstStyle/>
-          <a:p>
-            <a:pPr indent="0" marL="0">
-              <a:buNone/>
-            </a:pPr>
-            <a:r>
-              <a:rPr lang="en-US" sz="1400" dirty="0">
-                <a:solidFill>
-                  <a:schemeClr val="tx1"/>
-                </a:solidFill>
-              </a:rPr>
-              <a:t>無理にポジティブな言葉にせず、自分が納得できる言葉で</a:t>
-            </a:r>
-            <a:endParaRPr lang="en-US" sz="1400" dirty="0"/>
+              <a:t>苦しくなったら、いったん止めて、息を吐き切りましょう</a:t>
+            </a:r>
+            <a:endParaRPr lang="en-US" sz="1500" dirty="0"/>
           </a:p>
         </p:txBody>
       </p:sp>
@@ -17335,16 +17414,40 @@
       </p:grpSpPr>
       <p:sp>
         <p:nvSpPr>
-          <p:cNvPr id="2" name="Text 0"/>
+          <p:cNvPr id="2" name="misenai_band"/>
           <p:cNvSpPr/>
-          <p:nvPr>
-            <p:ph idx="100" type="title" hasCustomPrompt="1"/>
-          </p:nvPr>
-        </p:nvSpPr>
-        <p:spPr>
-          <a:xfrm>
-            <a:off x="731520" y="1828800"/>
-            <a:ext cx="7680960" cy="914400"/>
+          <p:nvPr/>
+        </p:nvSpPr>
+        <p:spPr>
+          <a:xfrm>
+            <a:off x="457200" y="182880"/>
+            <a:ext cx="8229600" cy="502920"/>
+          </a:xfrm>
+          <a:prstGeom prst="roundRect">
+            <a:avLst>
+              <a:gd name="adj" fmla="val 18182"/>
+            </a:avLst>
+          </a:prstGeom>
+          <a:solidFill>
+            <a:srgbClr val="8C6A34"/>
+          </a:solidFill>
+          <a:ln/>
+        </p:spPr>
+        <p:txBody>
+          <a:bodyPr/>
+          <a:p/>
+        </p:txBody>
+      </p:sp>
+      <p:sp>
+        <p:nvSpPr>
+          <p:cNvPr id="3" name="misenai"/>
+          <p:cNvSpPr txBox="1"/>
+          <p:nvPr/>
+        </p:nvSpPr>
+        <p:spPr>
+          <a:xfrm>
+            <a:off x="457200" y="182880"/>
+            <a:ext cx="8229600" cy="502920"/>
           </a:xfrm>
           <a:prstGeom prst="rect">
             <a:avLst/>
@@ -17353,14 +17456,50 @@
           <a:ln/>
         </p:spPr>
         <p:txBody>
-          <a:bodyPr wrap="square" rtlCol="0" anchor="ctr"/>
+          <a:bodyPr wrap="square" lIns="0" tIns="0" rIns="0" bIns="0" rtlCol="0" anchor="ctr"/>
           <a:lstStyle/>
           <a:p>
             <a:pPr algn="ctr" indent="0" marL="0">
               <a:buNone/>
             </a:pPr>
             <a:r>
-              <a:rPr lang="en-US" sz="3600" b="1" dirty="0">
+              <a:rPr lang="en-US" sz="1800" b="1" dirty="0">
+                <a:solidFill>
+                  <a:schemeClr val="bg1"/>
+                </a:solidFill>
+              </a:rPr>
+              <a:t>【共有停止】</a:t>
+            </a:r>
+            <a:endParaRPr lang="en-US" sz="1800" dirty="0"/>
+          </a:p>
+        </p:txBody>
+      </p:sp>
+      <p:sp>
+        <p:nvSpPr>
+          <p:cNvPr id="4" name="facil_title"/>
+          <p:cNvSpPr txBox="1"/>
+          <p:nvPr/>
+        </p:nvSpPr>
+        <p:spPr>
+          <a:xfrm>
+            <a:off x="457200" y="777240"/>
+            <a:ext cx="8229600" cy="411480"/>
+          </a:xfrm>
+          <a:prstGeom prst="rect">
+            <a:avLst/>
+          </a:prstGeom>
+          <a:noFill/>
+          <a:ln/>
+        </p:spPr>
+        <p:txBody>
+          <a:bodyPr wrap="square" lIns="0" tIns="0" rIns="0" bIns="0" rtlCol="0" anchor="t"/>
+          <a:lstStyle/>
+          <a:p>
+            <a:pPr indent="0" marL="0">
+              <a:buNone/>
+            </a:pPr>
+            <a:r>
+              <a:rPr lang="en-US" sz="2200" b="1" dirty="0">
                 <a:solidFill>
                   <a:schemeClr val="accent2"/>
                 </a:solidFill>
@@ -17368,24 +17507,53 @@
                 <a:ea typeface="Yu Mincho" pitchFamily="34" charset="-122"/>
                 <a:cs typeface="Yu Mincho" pitchFamily="34" charset="-120"/>
               </a:rPr>
-              <a:t>エネルギーで取り除く</a:t>
-            </a:r>
-            <a:endParaRPr lang="en-US" sz="3600" dirty="0"/>
-          </a:p>
-        </p:txBody>
-      </p:sp>
-      <p:sp>
-        <p:nvSpPr>
-          <p:cNvPr id="3" name="Text 0"/>
+              <a:t>STEP 5 の進め方（理想の未来へ）</a:t>
+            </a:r>
+            <a:endParaRPr lang="en-US" sz="2200" dirty="0"/>
+          </a:p>
+        </p:txBody>
+      </p:sp>
+      <p:sp>
+        <p:nvSpPr>
+          <p:cNvPr id="5" name="facil_card"/>
           <p:cNvSpPr/>
-          <p:nvPr>
-            <p:ph idx="101" type="body" hasCustomPrompt="1"/>
-          </p:nvPr>
-        </p:nvSpPr>
-        <p:spPr>
-          <a:xfrm>
-            <a:off x="731520" y="2788920"/>
-            <a:ext cx="7680960" cy="822960"/>
+          <p:nvPr/>
+        </p:nvSpPr>
+        <p:spPr>
+          <a:xfrm>
+            <a:off x="457200" y="1188720"/>
+            <a:ext cx="5394960" cy="3383280"/>
+          </a:xfrm>
+          <a:prstGeom prst="roundRect">
+            <a:avLst>
+              <a:gd name="adj" fmla="val 3243"/>
+            </a:avLst>
+          </a:prstGeom>
+          <a:solidFill>
+            <a:srgbClr val="FFF8E8"/>
+          </a:solidFill>
+          <a:ln w="9525">
+            <a:solidFill>
+              <a:srgbClr val="E9D9B6"/>
+            </a:solidFill>
+            <a:prstDash val="solid"/>
+          </a:ln>
+        </p:spPr>
+        <p:txBody>
+          <a:bodyPr/>
+          <a:p/>
+        </p:txBody>
+      </p:sp>
+      <p:sp>
+        <p:nvSpPr>
+          <p:cNvPr id="6" name="facil_list"/>
+          <p:cNvSpPr txBox="1"/>
+          <p:nvPr/>
+        </p:nvSpPr>
+        <p:spPr>
+          <a:xfrm>
+            <a:off x="594360" y="1280160"/>
+            <a:ext cx="5120640" cy="3200400"/>
           </a:xfrm>
           <a:prstGeom prst="rect">
             <a:avLst/>
@@ -17394,35 +17562,114 @@
           <a:ln/>
         </p:spPr>
         <p:txBody>
-          <a:bodyPr wrap="square" rtlCol="0" anchor="t"/>
-          <a:lstStyle/>
-          <a:p>
-            <a:pPr algn="ctr" indent="0" marL="0">
-              <a:buNone/>
-            </a:pPr>
-            <a:r>
-              <a:rPr lang="en-US" sz="1600" dirty="0">
+          <a:bodyPr wrap="square" lIns="1016" tIns="1016" rIns="1016" bIns="1016" rtlCol="0" anchor="t"/>
+          <a:lstStyle/>
+          <a:p>
+            <a:pPr marL="342900" indent="-342900">
+              <a:spcAft>
+                <a:spcPts val="300"/>
+              </a:spcAft>
+              <a:buSzPct val="100000"/>
+              <a:buFont typeface="+mj-lt"/>
+              <a:buAutoNum type="arabicPeriod" startAt="1"/>
+            </a:pPr>
+            <a:r>
+              <a:rPr lang="en-US" sz="1200" dirty="0">
                 <a:solidFill>
                   <a:schemeClr val="tx1"/>
                 </a:solidFill>
               </a:rPr>
-              <a:t>残っているものを、やさしく手放していきます（75〜85分）</a:t>
-            </a:r>
-            <a:endParaRPr lang="en-US" sz="1600" dirty="0"/>
-          </a:p>
-          <a:p>
-            <a:pPr algn="ctr" indent="0" marL="0">
-              <a:buNone/>
-            </a:pPr>
-            <a:r>
-              <a:rPr lang="en-US" sz="1600" dirty="0">
+              <a:t>大成功している理想の未来の自分へ（見える・色・聞こえる・体の感じを2倍・3倍に）</a:t>
+            </a:r>
+            <a:endParaRPr lang="en-US" sz="1200" dirty="0"/>
+          </a:p>
+          <a:p>
+            <a:pPr marL="342900" indent="-342900">
+              <a:spcAft>
+                <a:spcPts val="300"/>
+              </a:spcAft>
+              <a:buSzPct val="100000"/>
+              <a:buFont typeface="+mj-lt"/>
+              <a:buAutoNum type="arabicPeriod" startAt="1"/>
+            </a:pPr>
+            <a:r>
+              <a:rPr lang="en-US" sz="1200" dirty="0">
                 <a:solidFill>
                   <a:schemeClr val="tx1"/>
                 </a:solidFill>
               </a:rPr>
-              <a:t>はじめる前に、今の気持ちと体の感じを確かめます。終わったら、感じたことを言葉にしてみましょう</a:t>
-            </a:r>
-            <a:endParaRPr lang="en-US" sz="1600" dirty="0"/>
+              <a:t>「これから選びたいお金の考え」を本人の言葉で決める（由香が打ち込む）</a:t>
+            </a:r>
+            <a:endParaRPr lang="en-US" sz="1200" dirty="0"/>
+          </a:p>
+        </p:txBody>
+      </p:sp>
+      <p:pic>
+        <p:nvPicPr>
+          <p:cNvPr id="7" name="Image 0" descr="ガイドブック">    </p:cNvPr>
+          <p:cNvPicPr>
+            <a:picLocks noChangeAspect="1"/>
+          </p:cNvPicPr>
+          <p:nvPr/>
+        </p:nvPicPr>
+        <p:blipFill>
+          <a:blip r:embed="rId1"/>
+          <a:stretch>
+            <a:fillRect/>
+          </a:stretch>
+        </p:blipFill>
+        <p:spPr>
+          <a:xfrm>
+            <a:off x="6126480" y="1188720"/>
+            <a:ext cx="2377440" cy="3364992"/>
+          </a:xfrm>
+          <a:prstGeom prst="rect">
+            <a:avLst/>
+          </a:prstGeom>
+        </p:spPr>
+      </p:pic>
+      <p:sp>
+        <p:nvSpPr>
+          <p:cNvPr id="25" name="Slide Number Placeholder 0"/>
+          <p:cNvSpPr>
+            <a:spLocks noGrp="1"/>
+          </p:cNvSpPr>
+          <p:nvPr>
+            <p:ph type="sldNum" sz="quarter" idx="4294967295"/>
+          </p:nvPr>
+        </p:nvSpPr>
+        <p:spPr>
+          <a:xfrm>
+            <a:off x="8229600" y="4754880"/>
+            <a:ext cx="457200" cy="274320"/>
+          </a:xfrm>
+          <a:prstGeom prst="rect">
+            <a:avLst/>
+          </a:prstGeom>
+          <a:extLst>
+            <a:ext uri="{C572A759-6A51-4108-AA02-DFA0A04FC94B}">
+              <ma14:wrappingTextBoxFlag xmlns:ma14="http://schemas.microsoft.com/office/mac/drawingml/2011/main" val="0"/>
+            </a:ext>
+          </a:extLst>
+        </p:spPr>
+        <p:txBody>
+          <a:bodyPr/>
+          <a:lstStyle>
+            <a:lvl1pPr>
+              <a:defRPr sz="900">
+                <a:solidFill>
+                  <a:srgbClr val="B08A4E"/>
+                </a:solidFill>
+              </a:defRPr>
+            </a:lvl1pPr>
+          </a:lstStyle>
+          <a:p>
+            <a:pPr algn="r"/>
+            <a:fld id="{F7021451-1387-4CA6-816F-3879F97B5CBC}" type="slidenum">
+              <a:rPr b="0" lang="en-US"/>
+              <a:t>41</a:t>
+            </a:fld>
+            <a:endParaRPr lang="en-US"/>
           </a:p>
         </p:txBody>
       </p:sp>
@@ -17453,16 +17700,40 @@
       </p:grpSpPr>
       <p:sp>
         <p:nvSpPr>
-          <p:cNvPr id="2" name="Text 0"/>
+          <p:cNvPr id="2" name="frame"/>
           <p:cNvSpPr/>
-          <p:nvPr>
-            <p:ph idx="100" type="title" hasCustomPrompt="1"/>
-          </p:nvPr>
-        </p:nvSpPr>
-        <p:spPr>
-          <a:xfrm>
-            <a:off x="457200" y="457200"/>
-            <a:ext cx="8229600" cy="594360"/>
+          <p:nvPr/>
+        </p:nvSpPr>
+        <p:spPr>
+          <a:xfrm>
+            <a:off x="228600" y="137160"/>
+            <a:ext cx="8686800" cy="4526280"/>
+          </a:xfrm>
+          <a:prstGeom prst="rect">
+            <a:avLst/>
+          </a:prstGeom>
+          <a:ln w="12700">
+            <a:solidFill>
+              <a:srgbClr val="B08A4E"/>
+            </a:solidFill>
+            <a:prstDash val="solid"/>
+          </a:ln>
+        </p:spPr>
+        <p:txBody>
+          <a:bodyPr/>
+          <a:p/>
+        </p:txBody>
+      </p:sp>
+      <p:sp>
+        <p:nvSpPr>
+          <p:cNvPr id="3" name="qlabel"/>
+          <p:cNvSpPr txBox="1"/>
+          <p:nvPr/>
+        </p:nvSpPr>
+        <p:spPr>
+          <a:xfrm>
+            <a:off x="457200" y="320040"/>
+            <a:ext cx="8229600" cy="365760"/>
           </a:xfrm>
           <a:prstGeom prst="rect">
             <a:avLst/>
@@ -17471,21 +17742,697 @@
           <a:ln/>
         </p:spPr>
         <p:txBody>
-          <a:bodyPr wrap="square" lIns="0" tIns="0" rIns="0" bIns="0" rtlCol="0" anchor="ctr"/>
-          <a:lstStyle/>
-          <a:p>
-            <a:pPr algn="l" indent="0" marL="0">
-              <a:buNone/>
-            </a:pPr>
-            <a:r>
-              <a:rPr lang="en-US" sz="2400" b="1" dirty="0">
+          <a:bodyPr wrap="square" lIns="0" tIns="0" rIns="0" bIns="0" rtlCol="0" anchor="t"/>
+          <a:lstStyle/>
+          <a:p>
+            <a:pPr algn="ctr" indent="0" marL="0">
+              <a:buNone/>
+            </a:pPr>
+            <a:r>
+              <a:rPr lang="en-US" sz="1300" b="1" dirty="0">
                 <a:solidFill>
                   <a:schemeClr val="accent2"/>
+                </a:solidFill>
+              </a:rPr>
+              <a:t>STEP 5　理想の未来から</a:t>
+            </a:r>
+            <a:endParaRPr lang="en-US" sz="1300" dirty="0"/>
+          </a:p>
+        </p:txBody>
+      </p:sp>
+      <p:sp>
+        <p:nvSpPr>
+          <p:cNvPr id="4" name="Text 0"/>
+          <p:cNvSpPr/>
+          <p:nvPr>
+            <p:ph idx="100" type="title" hasCustomPrompt="1"/>
+          </p:nvPr>
+        </p:nvSpPr>
+        <p:spPr>
+          <a:xfrm>
+            <a:off x="914400" y="1554480"/>
+            <a:ext cx="7315200" cy="1554480"/>
+          </a:xfrm>
+          <a:prstGeom prst="rect">
+            <a:avLst/>
+          </a:prstGeom>
+          <a:noFill/>
+          <a:ln/>
+        </p:spPr>
+        <p:txBody>
+          <a:bodyPr wrap="square" rtlCol="0" anchor="ctr"/>
+          <a:lstStyle/>
+          <a:p>
+            <a:pPr algn="ctr" indent="0" marL="0">
+              <a:buNone/>
+            </a:pPr>
+            <a:r>
+              <a:rPr lang="en-US" sz="3200" b="1" dirty="0">
+                <a:solidFill>
+                  <a:schemeClr val="tx2"/>
                 </a:solidFill>
                 <a:latin typeface="Yu Mincho" pitchFamily="34" charset="0"/>
                 <a:ea typeface="Yu Mincho" pitchFamily="34" charset="-122"/>
                 <a:cs typeface="Yu Mincho" pitchFamily="34" charset="-120"/>
               </a:rPr>
+              <a:t>大成功しているあなたには、</a:t>
+            </a:r>
+            <a:endParaRPr lang="en-US" sz="3200" dirty="0"/>
+          </a:p>
+          <a:p>
+            <a:pPr algn="ctr" indent="0" marL="0">
+              <a:buNone/>
+            </a:pPr>
+            <a:r>
+              <a:rPr lang="en-US" sz="3200" b="1" dirty="0">
+                <a:solidFill>
+                  <a:schemeClr val="tx2"/>
+                </a:solidFill>
+                <a:latin typeface="Yu Mincho" pitchFamily="34" charset="0"/>
+                <a:ea typeface="Yu Mincho" pitchFamily="34" charset="-122"/>
+                <a:cs typeface="Yu Mincho" pitchFamily="34" charset="-120"/>
+              </a:rPr>
+              <a:t>何が見えて、どんな色で、</a:t>
+            </a:r>
+            <a:endParaRPr lang="en-US" sz="3200" dirty="0"/>
+          </a:p>
+          <a:p>
+            <a:pPr algn="ctr" indent="0" marL="0">
+              <a:buNone/>
+            </a:pPr>
+            <a:r>
+              <a:rPr lang="en-US" sz="3200" b="1" dirty="0">
+                <a:solidFill>
+                  <a:schemeClr val="tx2"/>
+                </a:solidFill>
+                <a:latin typeface="Yu Mincho" pitchFamily="34" charset="0"/>
+                <a:ea typeface="Yu Mincho" pitchFamily="34" charset="-122"/>
+                <a:cs typeface="Yu Mincho" pitchFamily="34" charset="-120"/>
+              </a:rPr>
+              <a:t>何が聞こえますか？</a:t>
+            </a:r>
+            <a:endParaRPr lang="en-US" sz="3200" dirty="0"/>
+          </a:p>
+        </p:txBody>
+      </p:sp>
+      <p:sp>
+        <p:nvSpPr>
+          <p:cNvPr id="5" name="Text 0"/>
+          <p:cNvSpPr/>
+          <p:nvPr>
+            <p:ph idx="101" type="body" hasCustomPrompt="1"/>
+          </p:nvPr>
+        </p:nvSpPr>
+        <p:spPr>
+          <a:xfrm>
+            <a:off x="914400" y="3200400"/>
+            <a:ext cx="7315200" cy="731520"/>
+          </a:xfrm>
+          <a:prstGeom prst="rect">
+            <a:avLst/>
+          </a:prstGeom>
+          <a:noFill/>
+          <a:ln/>
+        </p:spPr>
+        <p:txBody>
+          <a:bodyPr wrap="square" rtlCol="0" anchor="t"/>
+          <a:lstStyle/>
+          <a:p>
+            <a:pPr algn="ctr" indent="0" marL="0">
+              <a:buNone/>
+            </a:pPr>
+            <a:r>
+              <a:rPr lang="en-US" sz="1500" dirty="0">
+                <a:solidFill>
+                  <a:schemeClr val="accent2"/>
+                </a:solidFill>
+              </a:rPr>
+              <a:t>体はどんな感じがしますか？</a:t>
+            </a:r>
+            <a:endParaRPr lang="en-US" sz="1500" dirty="0"/>
+          </a:p>
+        </p:txBody>
+      </p:sp>
+      <p:sp>
+        <p:nvSpPr>
+          <p:cNvPr id="25" name="Slide Number Placeholder 0"/>
+          <p:cNvSpPr>
+            <a:spLocks noGrp="1"/>
+          </p:cNvSpPr>
+          <p:nvPr>
+            <p:ph type="sldNum" sz="quarter" idx="4294967295"/>
+          </p:nvPr>
+        </p:nvSpPr>
+        <p:spPr>
+          <a:xfrm>
+            <a:off x="8229600" y="4754880"/>
+            <a:ext cx="457200" cy="274320"/>
+          </a:xfrm>
+          <a:prstGeom prst="rect">
+            <a:avLst/>
+          </a:prstGeom>
+          <a:extLst>
+            <a:ext uri="{C572A759-6A51-4108-AA02-DFA0A04FC94B}">
+              <ma14:wrappingTextBoxFlag xmlns:ma14="http://schemas.microsoft.com/office/mac/drawingml/2011/main" val="0"/>
+            </a:ext>
+          </a:extLst>
+        </p:spPr>
+        <p:txBody>
+          <a:bodyPr/>
+          <a:lstStyle>
+            <a:lvl1pPr>
+              <a:defRPr sz="900">
+                <a:solidFill>
+                  <a:srgbClr val="B08A4E"/>
+                </a:solidFill>
+              </a:defRPr>
+            </a:lvl1pPr>
+          </a:lstStyle>
+          <a:p>
+            <a:pPr algn="r"/>
+            <a:fld id="{F7021451-1387-4CA6-816F-3879F97B5CBC}" type="slidenum">
+              <a:rPr b="0" lang="en-US"/>
+              <a:t>42</a:t>
+            </a:fld>
+            <a:endParaRPr lang="en-US"/>
+          </a:p>
+        </p:txBody>
+      </p:sp>
+    </p:spTree>
+  </p:cSld>
+  <p:clrMapOvr>
+    <a:masterClrMapping/>
+  </p:clrMapOvr>
+</p:sld>
+</file>
+
+<file path=ppt/slides/slide43.xml><?xml version="1.0" encoding="utf-8"?>
+<p:sld xmlns:a="http://schemas.openxmlformats.org/drawingml/2006/main" xmlns:r="http://schemas.openxmlformats.org/officeDocument/2006/relationships" xmlns:p="http://schemas.openxmlformats.org/presentationml/2006/main">
+  <p:cSld name="Slide 43">
+    <p:spTree>
+      <p:nvGrpSpPr>
+        <p:cNvPr id="1" name=""/>
+        <p:cNvGrpSpPr/>
+        <p:nvPr/>
+      </p:nvGrpSpPr>
+      <p:grpSpPr>
+        <a:xfrm>
+          <a:off x="0" y="0"/>
+          <a:ext cx="0" cy="0"/>
+          <a:chOff x="0" y="0"/>
+          <a:chExt cx="0" cy="0"/>
+        </a:xfrm>
+      </p:grpSpPr>
+      <p:sp>
+        <p:nvSpPr>
+          <p:cNvPr id="2" name="Text 0"/>
+          <p:cNvSpPr/>
+          <p:nvPr>
+            <p:ph idx="100" type="title" hasCustomPrompt="1"/>
+          </p:nvPr>
+        </p:nvSpPr>
+        <p:spPr>
+          <a:xfrm>
+            <a:off x="457200" y="457200"/>
+            <a:ext cx="8229600" cy="594360"/>
+          </a:xfrm>
+          <a:prstGeom prst="rect">
+            <a:avLst/>
+          </a:prstGeom>
+          <a:noFill/>
+          <a:ln/>
+        </p:spPr>
+        <p:txBody>
+          <a:bodyPr wrap="square" lIns="0" tIns="0" rIns="0" bIns="0" rtlCol="0" anchor="ctr"/>
+          <a:lstStyle/>
+          <a:p>
+            <a:pPr algn="l" indent="0" marL="0">
+              <a:buNone/>
+            </a:pPr>
+            <a:r>
+              <a:rPr lang="en-US" sz="2400" b="1" dirty="0">
+                <a:solidFill>
+                  <a:schemeClr val="accent2"/>
+                </a:solidFill>
+                <a:latin typeface="Yu Mincho" pitchFamily="34" charset="0"/>
+                <a:ea typeface="Yu Mincho" pitchFamily="34" charset="-122"/>
+                <a:cs typeface="Yu Mincho" pitchFamily="34" charset="-120"/>
+              </a:rPr>
+              <a:t>これから選びたい、お金の考え</a:t>
+            </a:r>
+            <a:endParaRPr lang="en-US" sz="2400" dirty="0"/>
+          </a:p>
+        </p:txBody>
+      </p:sp>
+      <p:sp>
+        <p:nvSpPr>
+          <p:cNvPr id="3" name="old_card"/>
+          <p:cNvSpPr/>
+          <p:nvPr/>
+        </p:nvSpPr>
+        <p:spPr>
+          <a:xfrm>
+            <a:off x="457200" y="1280160"/>
+            <a:ext cx="3977640" cy="2468880"/>
+          </a:xfrm>
+          <a:prstGeom prst="roundRect">
+            <a:avLst>
+              <a:gd name="adj" fmla="val 4444"/>
+            </a:avLst>
+          </a:prstGeom>
+          <a:solidFill>
+            <a:srgbClr val="FDFAF4"/>
+          </a:solidFill>
+          <a:ln w="9525">
+            <a:solidFill>
+              <a:srgbClr val="E9D9B6"/>
+            </a:solidFill>
+            <a:prstDash val="solid"/>
+          </a:ln>
+        </p:spPr>
+        <p:txBody>
+          <a:bodyPr/>
+          <a:p/>
+        </p:txBody>
+      </p:sp>
+      <p:sp>
+        <p:nvSpPr>
+          <p:cNvPr id="4" name="old_head"/>
+          <p:cNvSpPr txBox="1"/>
+          <p:nvPr/>
+        </p:nvSpPr>
+        <p:spPr>
+          <a:xfrm>
+            <a:off x="640080" y="1417320"/>
+            <a:ext cx="3657600" cy="365760"/>
+          </a:xfrm>
+          <a:prstGeom prst="rect">
+            <a:avLst/>
+          </a:prstGeom>
+          <a:noFill/>
+          <a:ln/>
+        </p:spPr>
+        <p:txBody>
+          <a:bodyPr wrap="square" lIns="1016" tIns="1016" rIns="1016" bIns="1016" rtlCol="0" anchor="t"/>
+          <a:lstStyle/>
+          <a:p>
+            <a:pPr indent="0" marL="0">
+              <a:buNone/>
+            </a:pPr>
+            <a:r>
+              <a:rPr lang="en-US" sz="1600" b="1" dirty="0">
+                <a:solidFill>
+                  <a:schemeClr val="accent2"/>
+                </a:solidFill>
+              </a:rPr>
+              <a:t>今までの考え</a:t>
+            </a:r>
+            <a:endParaRPr lang="en-US" sz="1600" dirty="0"/>
+          </a:p>
+        </p:txBody>
+      </p:sp>
+      <p:sp>
+        <p:nvSpPr>
+          <p:cNvPr id="5" name="old_body"/>
+          <p:cNvSpPr txBox="1"/>
+          <p:nvPr/>
+        </p:nvSpPr>
+        <p:spPr>
+          <a:xfrm>
+            <a:off x="640080" y="1874520"/>
+            <a:ext cx="3657600" cy="1737360"/>
+          </a:xfrm>
+          <a:prstGeom prst="rect">
+            <a:avLst/>
+          </a:prstGeom>
+          <a:noFill/>
+          <a:ln/>
+        </p:spPr>
+        <p:txBody>
+          <a:bodyPr wrap="square" lIns="1016" tIns="1016" rIns="1016" bIns="1016" rtlCol="0" anchor="t"/>
+          <a:lstStyle/>
+          <a:p>
+            <a:pPr indent="0" marL="0">
+              <a:buNone/>
+            </a:pPr>
+            <a:endParaRPr lang="en-US" sz="1800" dirty="0"/>
+          </a:p>
+        </p:txBody>
+      </p:sp>
+      <p:sp>
+        <p:nvSpPr>
+          <p:cNvPr id="6" name="new_card"/>
+          <p:cNvSpPr/>
+          <p:nvPr/>
+        </p:nvSpPr>
+        <p:spPr>
+          <a:xfrm>
+            <a:off x="4709160" y="1280160"/>
+            <a:ext cx="3977640" cy="2468880"/>
+          </a:xfrm>
+          <a:prstGeom prst="roundRect">
+            <a:avLst>
+              <a:gd name="adj" fmla="val 4444"/>
+            </a:avLst>
+          </a:prstGeom>
+          <a:solidFill>
+            <a:srgbClr val="F8EBEE"/>
+          </a:solidFill>
+          <a:ln w="9525">
+            <a:solidFill>
+              <a:srgbClr val="E9D9B6"/>
+            </a:solidFill>
+            <a:prstDash val="solid"/>
+          </a:ln>
+        </p:spPr>
+        <p:txBody>
+          <a:bodyPr/>
+          <a:p/>
+        </p:txBody>
+      </p:sp>
+      <p:sp>
+        <p:nvSpPr>
+          <p:cNvPr id="7" name="new_head"/>
+          <p:cNvSpPr txBox="1"/>
+          <p:nvPr/>
+        </p:nvSpPr>
+        <p:spPr>
+          <a:xfrm>
+            <a:off x="4892040" y="1417320"/>
+            <a:ext cx="3657600" cy="365760"/>
+          </a:xfrm>
+          <a:prstGeom prst="rect">
+            <a:avLst/>
+          </a:prstGeom>
+          <a:noFill/>
+          <a:ln/>
+        </p:spPr>
+        <p:txBody>
+          <a:bodyPr wrap="square" lIns="1016" tIns="1016" rIns="1016" bIns="1016" rtlCol="0" anchor="t"/>
+          <a:lstStyle/>
+          <a:p>
+            <a:pPr indent="0" marL="0">
+              <a:buNone/>
+            </a:pPr>
+            <a:r>
+              <a:rPr lang="en-US" sz="1600" b="1" dirty="0">
+                <a:solidFill>
+                  <a:schemeClr val="accent2"/>
+                </a:solidFill>
+              </a:rPr>
+              <a:t>これから選びたい考え</a:t>
+            </a:r>
+            <a:endParaRPr lang="en-US" sz="1600" dirty="0"/>
+          </a:p>
+        </p:txBody>
+      </p:sp>
+      <p:sp>
+        <p:nvSpPr>
+          <p:cNvPr id="8" name="new_body"/>
+          <p:cNvSpPr txBox="1"/>
+          <p:nvPr/>
+        </p:nvSpPr>
+        <p:spPr>
+          <a:xfrm>
+            <a:off x="4892040" y="1874520"/>
+            <a:ext cx="3657600" cy="1737360"/>
+          </a:xfrm>
+          <a:prstGeom prst="rect">
+            <a:avLst/>
+          </a:prstGeom>
+          <a:noFill/>
+          <a:ln/>
+        </p:spPr>
+        <p:txBody>
+          <a:bodyPr wrap="square" lIns="1016" tIns="1016" rIns="1016" bIns="1016" rtlCol="0" anchor="t"/>
+          <a:lstStyle/>
+          <a:p>
+            <a:pPr indent="0" marL="0">
+              <a:buNone/>
+            </a:pPr>
+            <a:endParaRPr lang="en-US" sz="1800" dirty="0"/>
+          </a:p>
+        </p:txBody>
+      </p:sp>
+      <p:sp>
+        <p:nvSpPr>
+          <p:cNvPr id="9" name="new_note"/>
+          <p:cNvSpPr txBox="1"/>
+          <p:nvPr/>
+        </p:nvSpPr>
+        <p:spPr>
+          <a:xfrm>
+            <a:off x="457200" y="3931920"/>
+            <a:ext cx="8229600" cy="411480"/>
+          </a:xfrm>
+          <a:prstGeom prst="rect">
+            <a:avLst/>
+          </a:prstGeom>
+          <a:noFill/>
+          <a:ln/>
+        </p:spPr>
+        <p:txBody>
+          <a:bodyPr wrap="square" lIns="1016" tIns="1016" rIns="1016" bIns="1016" rtlCol="0" anchor="t"/>
+          <a:lstStyle/>
+          <a:p>
+            <a:pPr indent="0" marL="0">
+              <a:buNone/>
+            </a:pPr>
+            <a:r>
+              <a:rPr lang="en-US" sz="1400" dirty="0">
+                <a:solidFill>
+                  <a:schemeClr val="tx1"/>
+                </a:solidFill>
+              </a:rPr>
+              <a:t>無理にポジティブな言葉にせず、自分が納得できる言葉で</a:t>
+            </a:r>
+            <a:endParaRPr lang="en-US" sz="1400" dirty="0"/>
+          </a:p>
+        </p:txBody>
+      </p:sp>
+      <p:sp>
+        <p:nvSpPr>
+          <p:cNvPr id="25" name="Slide Number Placeholder 0"/>
+          <p:cNvSpPr>
+            <a:spLocks noGrp="1"/>
+          </p:cNvSpPr>
+          <p:nvPr>
+            <p:ph type="sldNum" sz="quarter" idx="4294967295"/>
+          </p:nvPr>
+        </p:nvSpPr>
+        <p:spPr>
+          <a:xfrm>
+            <a:off x="8229600" y="4754880"/>
+            <a:ext cx="457200" cy="274320"/>
+          </a:xfrm>
+          <a:prstGeom prst="rect">
+            <a:avLst/>
+          </a:prstGeom>
+          <a:extLst>
+            <a:ext uri="{C572A759-6A51-4108-AA02-DFA0A04FC94B}">
+              <ma14:wrappingTextBoxFlag xmlns:ma14="http://schemas.microsoft.com/office/mac/drawingml/2011/main" val="0"/>
+            </a:ext>
+          </a:extLst>
+        </p:spPr>
+        <p:txBody>
+          <a:bodyPr/>
+          <a:lstStyle>
+            <a:lvl1pPr>
+              <a:defRPr sz="900">
+                <a:solidFill>
+                  <a:srgbClr val="B08A4E"/>
+                </a:solidFill>
+              </a:defRPr>
+            </a:lvl1pPr>
+          </a:lstStyle>
+          <a:p>
+            <a:pPr algn="r"/>
+            <a:fld id="{F7021451-1387-4CA6-816F-3879F97B5CBC}" type="slidenum">
+              <a:rPr b="0" lang="en-US"/>
+              <a:t>43</a:t>
+            </a:fld>
+            <a:endParaRPr lang="en-US"/>
+          </a:p>
+        </p:txBody>
+      </p:sp>
+    </p:spTree>
+  </p:cSld>
+  <p:clrMapOvr>
+    <a:masterClrMapping/>
+  </p:clrMapOvr>
+</p:sld>
+</file>
+
+<file path=ppt/slides/slide44.xml><?xml version="1.0" encoding="utf-8"?>
+<p:sld xmlns:a="http://schemas.openxmlformats.org/drawingml/2006/main" xmlns:r="http://schemas.openxmlformats.org/officeDocument/2006/relationships" xmlns:p="http://schemas.openxmlformats.org/presentationml/2006/main">
+  <p:cSld name="Slide 44">
+    <p:spTree>
+      <p:nvGrpSpPr>
+        <p:cNvPr id="1" name=""/>
+        <p:cNvGrpSpPr/>
+        <p:nvPr/>
+      </p:nvGrpSpPr>
+      <p:grpSpPr>
+        <a:xfrm>
+          <a:off x="0" y="0"/>
+          <a:ext cx="0" cy="0"/>
+          <a:chOff x="0" y="0"/>
+          <a:chExt cx="0" cy="0"/>
+        </a:xfrm>
+      </p:grpSpPr>
+      <p:sp>
+        <p:nvSpPr>
+          <p:cNvPr id="2" name="Text 0"/>
+          <p:cNvSpPr/>
+          <p:nvPr>
+            <p:ph idx="100" type="title" hasCustomPrompt="1"/>
+          </p:nvPr>
+        </p:nvSpPr>
+        <p:spPr>
+          <a:xfrm>
+            <a:off x="731520" y="1828800"/>
+            <a:ext cx="7680960" cy="914400"/>
+          </a:xfrm>
+          <a:prstGeom prst="rect">
+            <a:avLst/>
+          </a:prstGeom>
+          <a:noFill/>
+          <a:ln/>
+        </p:spPr>
+        <p:txBody>
+          <a:bodyPr wrap="square" rtlCol="0" anchor="ctr"/>
+          <a:lstStyle/>
+          <a:p>
+            <a:pPr algn="ctr" indent="0" marL="0">
+              <a:buNone/>
+            </a:pPr>
+            <a:r>
+              <a:rPr lang="en-US" sz="3600" b="1" dirty="0">
+                <a:solidFill>
+                  <a:schemeClr val="accent2"/>
+                </a:solidFill>
+                <a:latin typeface="Yu Mincho" pitchFamily="34" charset="0"/>
+                <a:ea typeface="Yu Mincho" pitchFamily="34" charset="-122"/>
+                <a:cs typeface="Yu Mincho" pitchFamily="34" charset="-120"/>
+              </a:rPr>
+              <a:t>エネルギーで取り除く</a:t>
+            </a:r>
+            <a:endParaRPr lang="en-US" sz="3600" dirty="0"/>
+          </a:p>
+        </p:txBody>
+      </p:sp>
+      <p:sp>
+        <p:nvSpPr>
+          <p:cNvPr id="3" name="Text 0"/>
+          <p:cNvSpPr/>
+          <p:nvPr>
+            <p:ph idx="101" type="body" hasCustomPrompt="1"/>
+          </p:nvPr>
+        </p:nvSpPr>
+        <p:spPr>
+          <a:xfrm>
+            <a:off x="731520" y="2788920"/>
+            <a:ext cx="7680960" cy="822960"/>
+          </a:xfrm>
+          <a:prstGeom prst="rect">
+            <a:avLst/>
+          </a:prstGeom>
+          <a:noFill/>
+          <a:ln/>
+        </p:spPr>
+        <p:txBody>
+          <a:bodyPr wrap="square" rtlCol="0" anchor="t"/>
+          <a:lstStyle/>
+          <a:p>
+            <a:pPr algn="ctr" indent="0" marL="0">
+              <a:buNone/>
+            </a:pPr>
+            <a:r>
+              <a:rPr lang="en-US" sz="1600" dirty="0">
+                <a:solidFill>
+                  <a:schemeClr val="tx1"/>
+                </a:solidFill>
+              </a:rPr>
+              <a:t>残っているものを、やさしく手放していきます（75〜85分）</a:t>
+            </a:r>
+            <a:endParaRPr lang="en-US" sz="1600" dirty="0"/>
+          </a:p>
+          <a:p>
+            <a:pPr algn="ctr" indent="0" marL="0">
+              <a:buNone/>
+            </a:pPr>
+            <a:r>
+              <a:rPr lang="en-US" sz="1600" dirty="0">
+                <a:solidFill>
+                  <a:schemeClr val="tx1"/>
+                </a:solidFill>
+              </a:rPr>
+              <a:t>はじめる前に、今の気持ちと体の感じを確かめます。終わったら、感じたことを言葉にしてみましょう</a:t>
+            </a:r>
+            <a:endParaRPr lang="en-US" sz="1600" dirty="0"/>
+          </a:p>
+        </p:txBody>
+      </p:sp>
+    </p:spTree>
+  </p:cSld>
+  <p:clrMapOvr>
+    <a:masterClrMapping/>
+  </p:clrMapOvr>
+</p:sld>
+</file>
+
+<file path=ppt/slides/slide45.xml><?xml version="1.0" encoding="utf-8"?>
+<p:sld xmlns:a="http://schemas.openxmlformats.org/drawingml/2006/main" xmlns:r="http://schemas.openxmlformats.org/officeDocument/2006/relationships" xmlns:p="http://schemas.openxmlformats.org/presentationml/2006/main">
+  <p:cSld name="Slide 45">
+    <p:spTree>
+      <p:nvGrpSpPr>
+        <p:cNvPr id="1" name=""/>
+        <p:cNvGrpSpPr/>
+        <p:nvPr/>
+      </p:nvGrpSpPr>
+      <p:grpSpPr>
+        <a:xfrm>
+          <a:off x="0" y="0"/>
+          <a:ext cx="0" cy="0"/>
+          <a:chOff x="0" y="0"/>
+          <a:chExt cx="0" cy="0"/>
+        </a:xfrm>
+      </p:grpSpPr>
+      <p:sp>
+        <p:nvSpPr>
+          <p:cNvPr id="2" name="Text 0"/>
+          <p:cNvSpPr/>
+          <p:nvPr>
+            <p:ph idx="100" type="title" hasCustomPrompt="1"/>
+          </p:nvPr>
+        </p:nvSpPr>
+        <p:spPr>
+          <a:xfrm>
+            <a:off x="457200" y="457200"/>
+            <a:ext cx="8229600" cy="594360"/>
+          </a:xfrm>
+          <a:prstGeom prst="rect">
+            <a:avLst/>
+          </a:prstGeom>
+          <a:noFill/>
+          <a:ln/>
+        </p:spPr>
+        <p:txBody>
+          <a:bodyPr wrap="square" lIns="0" tIns="0" rIns="0" bIns="0" rtlCol="0" anchor="ctr"/>
+          <a:lstStyle/>
+          <a:p>
+            <a:pPr algn="l" indent="0" marL="0">
+              <a:buNone/>
+            </a:pPr>
+            <a:r>
+              <a:rPr lang="en-US" sz="2400" b="1" dirty="0">
+                <a:solidFill>
+                  <a:schemeClr val="accent2"/>
+                </a:solidFill>
+                <a:latin typeface="Yu Mincho" pitchFamily="34" charset="0"/>
+                <a:ea typeface="Yu Mincho" pitchFamily="34" charset="-122"/>
+                <a:cs typeface="Yu Mincho" pitchFamily="34" charset="-120"/>
+              </a:rPr>
               <a:t>点数をつけ直してみましょう</a:t>
             </a:r>
             <a:endParaRPr lang="en-US" sz="2400" dirty="0"/>
@@ -17494,7 +18441,7 @@
       </p:sp>
       <p:graphicFrame>
         <p:nvGraphicFramePr>
-          <p:cNvPr id="43" name="Table 0"/>
+          <p:cNvPr id="46" name="Table 0"/>
           <p:cNvGraphicFramePr>
             <a:graphicFrameLocks noGrp="1"/>
           </p:cNvGraphicFramePr>
@@ -18278,7 +19225,7 @@
             <a:pPr algn="r"/>
             <a:fld id="{F7021451-1387-4CA6-816F-3879F97B5CBC}" type="slidenum">
               <a:rPr b="0" lang="en-US"/>
-              <a:t>42</a:t>
+              <a:t>45</a:t>
             </a:fld>
             <a:endParaRPr lang="en-US"/>
           </a:p>
@@ -18292,9 +19239,9 @@
 </p:sld>
 </file>
 
-<file path=ppt/slides/slide43.xml><?xml version="1.0" encoding="utf-8"?>
+<file path=ppt/slides/slide46.xml><?xml version="1.0" encoding="utf-8"?>
 <p:sld xmlns:a="http://schemas.openxmlformats.org/drawingml/2006/main" xmlns:r="http://schemas.openxmlformats.org/officeDocument/2006/relationships" xmlns:p="http://schemas.openxmlformats.org/presentationml/2006/main">
-  <p:cSld name="Slide 43">
+  <p:cSld name="Slide 46">
     <p:spTree>
       <p:nvGrpSpPr>
         <p:cNvPr id="1" name=""/>
@@ -18485,7 +19432,7 @@
             <a:pPr algn="r"/>
             <a:fld id="{F7021451-1387-4CA6-816F-3879F97B5CBC}" type="slidenum">
               <a:rPr b="0" lang="en-US"/>
-              <a:t>43</a:t>
+              <a:t>46</a:t>
             </a:fld>
             <a:endParaRPr lang="en-US"/>
           </a:p>
@@ -18499,9 +19446,9 @@
 </p:sld>
 </file>
 
-<file path=ppt/slides/slide44.xml><?xml version="1.0" encoding="utf-8"?>
+<file path=ppt/slides/slide47.xml><?xml version="1.0" encoding="utf-8"?>
 <p:sld xmlns:a="http://schemas.openxmlformats.org/drawingml/2006/main" xmlns:r="http://schemas.openxmlformats.org/officeDocument/2006/relationships" xmlns:p="http://schemas.openxmlformats.org/presentationml/2006/main">
-  <p:cSld name="Slide 44">
+  <p:cSld name="Slide 47">
     <p:spTree>
       <p:nvGrpSpPr>
         <p:cNvPr id="1" name=""/>
@@ -19039,7 +19986,7 @@
             <a:pPr algn="r"/>
             <a:fld id="{F7021451-1387-4CA6-816F-3879F97B5CBC}" type="slidenum">
               <a:rPr b="0" lang="en-US"/>
-              <a:t>44</a:t>
+              <a:t>47</a:t>
             </a:fld>
             <a:endParaRPr lang="en-US"/>
           </a:p>
@@ -19053,9 +20000,9 @@
 </p:sld>
 </file>
 
-<file path=ppt/slides/slide45.xml><?xml version="1.0" encoding="utf-8"?>
+<file path=ppt/slides/slide48.xml><?xml version="1.0" encoding="utf-8"?>
 <p:sld xmlns:a="http://schemas.openxmlformats.org/drawingml/2006/main" xmlns:r="http://schemas.openxmlformats.org/officeDocument/2006/relationships" xmlns:p="http://schemas.openxmlformats.org/presentationml/2006/main">
-  <p:cSld name="Slide 45">
+  <p:cSld name="Slide 48">
     <p:spTree>
       <p:nvGrpSpPr>
         <p:cNvPr id="1" name=""/>
@@ -19284,7 +20231,7 @@
             <a:pPr algn="r"/>
             <a:fld id="{F7021451-1387-4CA6-816F-3879F97B5CBC}" type="slidenum">
               <a:rPr b="0" lang="en-US"/>
-              <a:t>45</a:t>
+              <a:t>48</a:t>
             </a:fld>
             <a:endParaRPr lang="en-US"/>
           </a:p>
@@ -19298,9 +20245,9 @@
 </p:sld>
 </file>
 
-<file path=ppt/slides/slide46.xml><?xml version="1.0" encoding="utf-8"?>
+<file path=ppt/slides/slide49.xml><?xml version="1.0" encoding="utf-8"?>
 <p:sld xmlns:a="http://schemas.openxmlformats.org/drawingml/2006/main" xmlns:r="http://schemas.openxmlformats.org/officeDocument/2006/relationships" xmlns:p="http://schemas.openxmlformats.org/presentationml/2006/main">
-  <p:cSld name="Slide 46">
+  <p:cSld name="Slide 49">
     <p:spTree>
       <p:nvGrpSpPr>
         <p:cNvPr id="1" name=""/>
@@ -19347,9 +20294,237 @@
 </p:sld>
 </file>
 
-<file path=ppt/slides/slide47.xml><?xml version="1.0" encoding="utf-8"?>
+<file path=ppt/slides/slide5.xml><?xml version="1.0" encoding="utf-8"?>
 <p:sld xmlns:a="http://schemas.openxmlformats.org/drawingml/2006/main" xmlns:r="http://schemas.openxmlformats.org/officeDocument/2006/relationships" xmlns:p="http://schemas.openxmlformats.org/presentationml/2006/main">
-  <p:cSld name="Slide 47">
+  <p:cSld name="Slide 5">
+    <p:spTree>
+      <p:nvGrpSpPr>
+        <p:cNvPr id="1" name=""/>
+        <p:cNvGrpSpPr/>
+        <p:nvPr/>
+      </p:nvGrpSpPr>
+      <p:grpSpPr>
+        <a:xfrm>
+          <a:off x="0" y="0"/>
+          <a:ext cx="0" cy="0"/>
+          <a:chOff x="0" y="0"/>
+          <a:chExt cx="0" cy="0"/>
+        </a:xfrm>
+      </p:grpSpPr>
+      <p:sp>
+        <p:nvSpPr>
+          <p:cNvPr id="2" name="frame"/>
+          <p:cNvSpPr/>
+          <p:nvPr/>
+        </p:nvSpPr>
+        <p:spPr>
+          <a:xfrm>
+            <a:off x="228600" y="137160"/>
+            <a:ext cx="8686800" cy="4526280"/>
+          </a:xfrm>
+          <a:prstGeom prst="rect">
+            <a:avLst/>
+          </a:prstGeom>
+          <a:ln w="12700">
+            <a:solidFill>
+              <a:srgbClr val="B08A4E"/>
+            </a:solidFill>
+            <a:prstDash val="solid"/>
+          </a:ln>
+        </p:spPr>
+        <p:txBody>
+          <a:bodyPr/>
+          <a:p/>
+        </p:txBody>
+      </p:sp>
+      <p:sp>
+        <p:nvSpPr>
+          <p:cNvPr id="3" name="qlabel"/>
+          <p:cNvSpPr txBox="1"/>
+          <p:nvPr/>
+        </p:nvSpPr>
+        <p:spPr>
+          <a:xfrm>
+            <a:off x="457200" y="320040"/>
+            <a:ext cx="8229600" cy="365760"/>
+          </a:xfrm>
+          <a:prstGeom prst="rect">
+            <a:avLst/>
+          </a:prstGeom>
+          <a:noFill/>
+          <a:ln/>
+        </p:spPr>
+        <p:txBody>
+          <a:bodyPr wrap="square" lIns="0" tIns="0" rIns="0" bIns="0" rtlCol="0" anchor="t"/>
+          <a:lstStyle/>
+          <a:p>
+            <a:pPr algn="ctr" indent="0" marL="0">
+              <a:buNone/>
+            </a:pPr>
+            <a:r>
+              <a:rPr lang="en-US" sz="1300" b="1" dirty="0">
+                <a:solidFill>
+                  <a:schemeClr val="accent2"/>
+                </a:solidFill>
+              </a:rPr>
+              <a:t>どのような事でお悩みですか？</a:t>
+            </a:r>
+            <a:endParaRPr lang="en-US" sz="1300" dirty="0"/>
+          </a:p>
+        </p:txBody>
+      </p:sp>
+      <p:sp>
+        <p:nvSpPr>
+          <p:cNvPr id="4" name="Text 0"/>
+          <p:cNvSpPr/>
+          <p:nvPr>
+            <p:ph idx="100" type="title" hasCustomPrompt="1"/>
+          </p:nvPr>
+        </p:nvSpPr>
+        <p:spPr>
+          <a:xfrm>
+            <a:off x="914400" y="1554480"/>
+            <a:ext cx="7315200" cy="1554480"/>
+          </a:xfrm>
+          <a:prstGeom prst="rect">
+            <a:avLst/>
+          </a:prstGeom>
+          <a:noFill/>
+          <a:ln/>
+        </p:spPr>
+        <p:txBody>
+          <a:bodyPr wrap="square" rtlCol="0" anchor="ctr"/>
+          <a:lstStyle/>
+          <a:p>
+            <a:pPr algn="ctr" indent="0" marL="0">
+              <a:buNone/>
+            </a:pPr>
+            <a:r>
+              <a:rPr lang="en-US" sz="3200" b="1" dirty="0">
+                <a:solidFill>
+                  <a:schemeClr val="tx2"/>
+                </a:solidFill>
+                <a:latin typeface="Yu Mincho" pitchFamily="34" charset="0"/>
+                <a:ea typeface="Yu Mincho" pitchFamily="34" charset="-122"/>
+                <a:cs typeface="Yu Mincho" pitchFamily="34" charset="-120"/>
+              </a:rPr>
+              <a:t>お悩みの内容を</a:t>
+            </a:r>
+            <a:endParaRPr lang="en-US" sz="3200" dirty="0"/>
+          </a:p>
+          <a:p>
+            <a:pPr algn="ctr" indent="0" marL="0">
+              <a:buNone/>
+            </a:pPr>
+            <a:r>
+              <a:rPr lang="en-US" sz="3200" b="1" dirty="0">
+                <a:solidFill>
+                  <a:schemeClr val="tx2"/>
+                </a:solidFill>
+                <a:latin typeface="Yu Mincho" pitchFamily="34" charset="0"/>
+                <a:ea typeface="Yu Mincho" pitchFamily="34" charset="-122"/>
+                <a:cs typeface="Yu Mincho" pitchFamily="34" charset="-120"/>
+              </a:rPr>
+              <a:t>おしえてください</a:t>
+            </a:r>
+            <a:endParaRPr lang="en-US" sz="3200" dirty="0"/>
+          </a:p>
+        </p:txBody>
+      </p:sp>
+      <p:sp>
+        <p:nvSpPr>
+          <p:cNvPr id="5" name="Text 0"/>
+          <p:cNvSpPr/>
+          <p:nvPr>
+            <p:ph idx="101" type="body" hasCustomPrompt="1"/>
+          </p:nvPr>
+        </p:nvSpPr>
+        <p:spPr>
+          <a:xfrm>
+            <a:off x="914400" y="3200400"/>
+            <a:ext cx="7315200" cy="731520"/>
+          </a:xfrm>
+          <a:prstGeom prst="rect">
+            <a:avLst/>
+          </a:prstGeom>
+          <a:noFill/>
+          <a:ln/>
+        </p:spPr>
+        <p:txBody>
+          <a:bodyPr wrap="square" rtlCol="0" anchor="t"/>
+          <a:lstStyle/>
+          <a:p>
+            <a:pPr algn="ctr" indent="0" marL="0">
+              <a:buNone/>
+            </a:pPr>
+            <a:r>
+              <a:rPr lang="en-US" sz="1500" dirty="0">
+                <a:solidFill>
+                  <a:schemeClr val="accent2"/>
+                </a:solidFill>
+              </a:rPr>
+              <a:t>直感で大丈夫です</a:t>
+            </a:r>
+            <a:endParaRPr lang="en-US" sz="1500" dirty="0"/>
+          </a:p>
+        </p:txBody>
+      </p:sp>
+      <p:sp>
+        <p:nvSpPr>
+          <p:cNvPr id="25" name="Slide Number Placeholder 0"/>
+          <p:cNvSpPr>
+            <a:spLocks noGrp="1"/>
+          </p:cNvSpPr>
+          <p:nvPr>
+            <p:ph type="sldNum" sz="quarter" idx="4294967295"/>
+          </p:nvPr>
+        </p:nvSpPr>
+        <p:spPr>
+          <a:xfrm>
+            <a:off x="8229600" y="4754880"/>
+            <a:ext cx="457200" cy="274320"/>
+          </a:xfrm>
+          <a:prstGeom prst="rect">
+            <a:avLst/>
+          </a:prstGeom>
+          <a:extLst>
+            <a:ext uri="{C572A759-6A51-4108-AA02-DFA0A04FC94B}">
+              <ma14:wrappingTextBoxFlag xmlns:ma14="http://schemas.microsoft.com/office/mac/drawingml/2011/main" val="0"/>
+            </a:ext>
+          </a:extLst>
+        </p:spPr>
+        <p:txBody>
+          <a:bodyPr/>
+          <a:lstStyle>
+            <a:lvl1pPr>
+              <a:defRPr sz="900">
+                <a:solidFill>
+                  <a:srgbClr val="B08A4E"/>
+                </a:solidFill>
+              </a:defRPr>
+            </a:lvl1pPr>
+          </a:lstStyle>
+          <a:p>
+            <a:pPr algn="r"/>
+            <a:fld id="{F7021451-1387-4CA6-816F-3879F97B5CBC}" type="slidenum">
+              <a:rPr b="0" lang="en-US"/>
+              <a:t>5</a:t>
+            </a:fld>
+            <a:endParaRPr lang="en-US"/>
+          </a:p>
+        </p:txBody>
+      </p:sp>
+    </p:spTree>
+  </p:cSld>
+  <p:clrMapOvr>
+    <a:masterClrMapping/>
+  </p:clrMapOvr>
+</p:sld>
+</file>
+
+<file path=ppt/slides/slide50.xml><?xml version="1.0" encoding="utf-8"?>
+<p:sld xmlns:a="http://schemas.openxmlformats.org/drawingml/2006/main" xmlns:r="http://schemas.openxmlformats.org/officeDocument/2006/relationships" xmlns:p="http://schemas.openxmlformats.org/presentationml/2006/main">
+  <p:cSld name="Slide 50">
     <p:spTree>
       <p:nvGrpSpPr>
         <p:cNvPr id="1" name=""/>
@@ -19489,234 +20664,6 @@
 </p:sld>
 </file>
 
-<file path=ppt/slides/slide5.xml><?xml version="1.0" encoding="utf-8"?>
-<p:sld xmlns:a="http://schemas.openxmlformats.org/drawingml/2006/main" xmlns:r="http://schemas.openxmlformats.org/officeDocument/2006/relationships" xmlns:p="http://schemas.openxmlformats.org/presentationml/2006/main">
-  <p:cSld name="Slide 5">
-    <p:spTree>
-      <p:nvGrpSpPr>
-        <p:cNvPr id="1" name=""/>
-        <p:cNvGrpSpPr/>
-        <p:nvPr/>
-      </p:nvGrpSpPr>
-      <p:grpSpPr>
-        <a:xfrm>
-          <a:off x="0" y="0"/>
-          <a:ext cx="0" cy="0"/>
-          <a:chOff x="0" y="0"/>
-          <a:chExt cx="0" cy="0"/>
-        </a:xfrm>
-      </p:grpSpPr>
-      <p:sp>
-        <p:nvSpPr>
-          <p:cNvPr id="2" name="frame"/>
-          <p:cNvSpPr/>
-          <p:nvPr/>
-        </p:nvSpPr>
-        <p:spPr>
-          <a:xfrm>
-            <a:off x="228600" y="137160"/>
-            <a:ext cx="8686800" cy="4526280"/>
-          </a:xfrm>
-          <a:prstGeom prst="rect">
-            <a:avLst/>
-          </a:prstGeom>
-          <a:ln w="12700">
-            <a:solidFill>
-              <a:srgbClr val="B08A4E"/>
-            </a:solidFill>
-            <a:prstDash val="solid"/>
-          </a:ln>
-        </p:spPr>
-        <p:txBody>
-          <a:bodyPr/>
-          <a:p/>
-        </p:txBody>
-      </p:sp>
-      <p:sp>
-        <p:nvSpPr>
-          <p:cNvPr id="3" name="qlabel"/>
-          <p:cNvSpPr txBox="1"/>
-          <p:nvPr/>
-        </p:nvSpPr>
-        <p:spPr>
-          <a:xfrm>
-            <a:off x="457200" y="320040"/>
-            <a:ext cx="8229600" cy="365760"/>
-          </a:xfrm>
-          <a:prstGeom prst="rect">
-            <a:avLst/>
-          </a:prstGeom>
-          <a:noFill/>
-          <a:ln/>
-        </p:spPr>
-        <p:txBody>
-          <a:bodyPr wrap="square" lIns="0" tIns="0" rIns="0" bIns="0" rtlCol="0" anchor="t"/>
-          <a:lstStyle/>
-          <a:p>
-            <a:pPr algn="ctr" indent="0" marL="0">
-              <a:buNone/>
-            </a:pPr>
-            <a:r>
-              <a:rPr lang="en-US" sz="1300" b="1" dirty="0">
-                <a:solidFill>
-                  <a:schemeClr val="accent2"/>
-                </a:solidFill>
-              </a:rPr>
-              <a:t>どのような事でお悩みですか？</a:t>
-            </a:r>
-            <a:endParaRPr lang="en-US" sz="1300" dirty="0"/>
-          </a:p>
-        </p:txBody>
-      </p:sp>
-      <p:sp>
-        <p:nvSpPr>
-          <p:cNvPr id="4" name="Text 0"/>
-          <p:cNvSpPr/>
-          <p:nvPr>
-            <p:ph idx="100" type="title" hasCustomPrompt="1"/>
-          </p:nvPr>
-        </p:nvSpPr>
-        <p:spPr>
-          <a:xfrm>
-            <a:off x="914400" y="1554480"/>
-            <a:ext cx="7315200" cy="1554480"/>
-          </a:xfrm>
-          <a:prstGeom prst="rect">
-            <a:avLst/>
-          </a:prstGeom>
-          <a:noFill/>
-          <a:ln/>
-        </p:spPr>
-        <p:txBody>
-          <a:bodyPr wrap="square" rtlCol="0" anchor="ctr"/>
-          <a:lstStyle/>
-          <a:p>
-            <a:pPr algn="ctr" indent="0" marL="0">
-              <a:buNone/>
-            </a:pPr>
-            <a:r>
-              <a:rPr lang="en-US" sz="3200" b="1" dirty="0">
-                <a:solidFill>
-                  <a:schemeClr val="tx2"/>
-                </a:solidFill>
-                <a:latin typeface="Yu Mincho" pitchFamily="34" charset="0"/>
-                <a:ea typeface="Yu Mincho" pitchFamily="34" charset="-122"/>
-                <a:cs typeface="Yu Mincho" pitchFamily="34" charset="-120"/>
-              </a:rPr>
-              <a:t>お悩みの内容を</a:t>
-            </a:r>
-            <a:endParaRPr lang="en-US" sz="3200" dirty="0"/>
-          </a:p>
-          <a:p>
-            <a:pPr algn="ctr" indent="0" marL="0">
-              <a:buNone/>
-            </a:pPr>
-            <a:r>
-              <a:rPr lang="en-US" sz="3200" b="1" dirty="0">
-                <a:solidFill>
-                  <a:schemeClr val="tx2"/>
-                </a:solidFill>
-                <a:latin typeface="Yu Mincho" pitchFamily="34" charset="0"/>
-                <a:ea typeface="Yu Mincho" pitchFamily="34" charset="-122"/>
-                <a:cs typeface="Yu Mincho" pitchFamily="34" charset="-120"/>
-              </a:rPr>
-              <a:t>おしえてください</a:t>
-            </a:r>
-            <a:endParaRPr lang="en-US" sz="3200" dirty="0"/>
-          </a:p>
-        </p:txBody>
-      </p:sp>
-      <p:sp>
-        <p:nvSpPr>
-          <p:cNvPr id="5" name="Text 0"/>
-          <p:cNvSpPr/>
-          <p:nvPr>
-            <p:ph idx="101" type="body" hasCustomPrompt="1"/>
-          </p:nvPr>
-        </p:nvSpPr>
-        <p:spPr>
-          <a:xfrm>
-            <a:off x="914400" y="3200400"/>
-            <a:ext cx="7315200" cy="731520"/>
-          </a:xfrm>
-          <a:prstGeom prst="rect">
-            <a:avLst/>
-          </a:prstGeom>
-          <a:noFill/>
-          <a:ln/>
-        </p:spPr>
-        <p:txBody>
-          <a:bodyPr wrap="square" rtlCol="0" anchor="t"/>
-          <a:lstStyle/>
-          <a:p>
-            <a:pPr algn="ctr" indent="0" marL="0">
-              <a:buNone/>
-            </a:pPr>
-            <a:r>
-              <a:rPr lang="en-US" sz="1500" dirty="0">
-                <a:solidFill>
-                  <a:schemeClr val="accent2"/>
-                </a:solidFill>
-              </a:rPr>
-              <a:t>直感で大丈夫です</a:t>
-            </a:r>
-            <a:endParaRPr lang="en-US" sz="1500" dirty="0"/>
-          </a:p>
-        </p:txBody>
-      </p:sp>
-      <p:sp>
-        <p:nvSpPr>
-          <p:cNvPr id="25" name="Slide Number Placeholder 0"/>
-          <p:cNvSpPr>
-            <a:spLocks noGrp="1"/>
-          </p:cNvSpPr>
-          <p:nvPr>
-            <p:ph type="sldNum" sz="quarter" idx="4294967295"/>
-          </p:nvPr>
-        </p:nvSpPr>
-        <p:spPr>
-          <a:xfrm>
-            <a:off x="8229600" y="4754880"/>
-            <a:ext cx="457200" cy="274320"/>
-          </a:xfrm>
-          <a:prstGeom prst="rect">
-            <a:avLst/>
-          </a:prstGeom>
-          <a:extLst>
-            <a:ext uri="{C572A759-6A51-4108-AA02-DFA0A04FC94B}">
-              <ma14:wrappingTextBoxFlag xmlns:ma14="http://schemas.microsoft.com/office/mac/drawingml/2011/main" val="0"/>
-            </a:ext>
-          </a:extLst>
-        </p:spPr>
-        <p:txBody>
-          <a:bodyPr/>
-          <a:lstStyle>
-            <a:lvl1pPr>
-              <a:defRPr sz="900">
-                <a:solidFill>
-                  <a:srgbClr val="B08A4E"/>
-                </a:solidFill>
-              </a:defRPr>
-            </a:lvl1pPr>
-          </a:lstStyle>
-          <a:p>
-            <a:pPr algn="r"/>
-            <a:fld id="{F7021451-1387-4CA6-816F-3879F97B5CBC}" type="slidenum">
-              <a:rPr b="0" lang="en-US"/>
-              <a:t>5</a:t>
-            </a:fld>
-            <a:endParaRPr lang="en-US"/>
-          </a:p>
-        </p:txBody>
-      </p:sp>
-    </p:spTree>
-  </p:cSld>
-  <p:clrMapOvr>
-    <a:masterClrMapping/>
-  </p:clrMapOvr>
-</p:sld>
-</file>
-
 <file path=ppt/slides/slide6.xml><?xml version="1.0" encoding="utf-8"?>
 <p:sld xmlns:a="http://schemas.openxmlformats.org/drawingml/2006/main" xmlns:r="http://schemas.openxmlformats.org/officeDocument/2006/relationships" xmlns:p="http://schemas.openxmlformats.org/presentationml/2006/main">
   <p:cSld name="Slide 6">
@@ -20381,7 +21328,7 @@
                   <a:schemeClr val="accent2"/>
                 </a:solidFill>
               </a:rPr>
-              <a:t>問題の心理状況：幼少期の影響</a:t>
+              <a:t>ゴールデンエイジ</a:t>
             </a:r>
             <a:endParaRPr lang="en-US" sz="1300" dirty="0"/>
           </a:p>
@@ -20422,7 +21369,7 @@
                 <a:ea typeface="Yu Mincho" pitchFamily="34" charset="-122"/>
                 <a:cs typeface="Yu Mincho" pitchFamily="34" charset="-120"/>
               </a:rPr>
-              <a:t>どのような</a:t>
+              <a:t>子どもの頃に</a:t>
             </a:r>
             <a:endParaRPr lang="en-US" sz="3200" dirty="0"/>
           </a:p>
@@ -20439,7 +21386,24 @@
                 <a:ea typeface="Yu Mincho" pitchFamily="34" charset="-122"/>
                 <a:cs typeface="Yu Mincho" pitchFamily="34" charset="-120"/>
               </a:rPr>
-              <a:t>お子さんでしたか？</a:t>
+              <a:t>見たこと・聞いたことが、</a:t>
+            </a:r>
+            <a:endParaRPr lang="en-US" sz="3200" dirty="0"/>
+          </a:p>
+          <a:p>
+            <a:pPr algn="ctr" indent="0" marL="0">
+              <a:buNone/>
+            </a:pPr>
+            <a:r>
+              <a:rPr lang="en-US" sz="3200" b="1" dirty="0">
+                <a:solidFill>
+                  <a:schemeClr val="tx2"/>
+                </a:solidFill>
+                <a:latin typeface="Yu Mincho" pitchFamily="34" charset="0"/>
+                <a:ea typeface="Yu Mincho" pitchFamily="34" charset="-122"/>
+                <a:cs typeface="Yu Mincho" pitchFamily="34" charset="-120"/>
+              </a:rPr>
+              <a:t>今の「当たり前」になりやすい</a:t>
             </a:r>
             <a:endParaRPr lang="en-US" sz="3200" dirty="0"/>
           </a:p>
@@ -20477,7 +21441,7 @@
                   <a:schemeClr val="accent2"/>
                 </a:solidFill>
               </a:rPr>
-              <a:t>私たちの問題は、幼少期の影響を受けていることが多いです</a:t>
+              <a:t>この大切な時期を「ゴールデンエイジ」と呼びます</a:t>
             </a:r>
             <a:endParaRPr lang="en-US" sz="1500" dirty="0"/>
           </a:p>

--- a/20_Projects/海音_心体の調律/単発/仁部あきえさん/20261028_仁部あきえさん_お金のブロック単発セッション.pptx
+++ b/20_Projects/海音_心体の調律/単発/仁部あきえさん/20261028_仁部あきえさん_お金のブロック単発セッション.pptx
@@ -52,12 +52,9 @@
     <p:sldId id="300" r:id="rId46"/>
     <p:sldId id="301" r:id="rId47"/>
     <p:sldId id="302" r:id="rId48"/>
-    <p:sldId id="303" r:id="rId49"/>
-    <p:sldId id="304" r:id="rId50"/>
-    <p:sldId id="305" r:id="rId51"/>
   </p:sldIdLst>
   <p:notesMasterIdLst>
-    <p:notesMasterId r:id="rId52"/>
+    <p:notesMasterId r:id="rId49"/>
   </p:notesMasterIdLst>
   <p:sldSz cx="9144000" cy="5143500"/>
   <p:notesSz cx="5143500" cy="9144000"/>
@@ -156,14 +153,14 @@
   <p:extLst>
     <p:ext uri="{521415D9-36F7-43E2-AB2F-B90AF26B5E84}">
       <p14:sectionLst xmlns:p14="http://schemas.microsoft.com/office/powerpoint/2010/main">
-        <p14:section name="はじめに" id="{d0cac06e-906d-6021-e1e4-4d7f773f100e}">
+        <p14:section name="はじめに" id="{90993fca-79d3-449f-e53f-63bfe8932d3f}">
           <p14:sldIdLst>
             <p14:sldId id="256"/>
             <p14:sldId id="257"/>
             <p14:sldId id="258"/>
           </p14:sldIdLst>
         </p14:section>
-        <p14:section name="第1部 魂の傷を聴く" id="{eddc714c-afaa-b959-45c3-2d96981615d7}">
+        <p14:section name="第1部 魂の傷を聴く" id="{99e2d81a-974f-286f-4a69-d8f581d0a990}">
           <p14:sldIdLst>
             <p14:sldId id="259"/>
             <p14:sldId id="260"/>
@@ -179,7 +176,7 @@
             <p14:sldId id="270"/>
           </p14:sldIdLst>
         </p14:section>
-        <p14:section name="第2部 頭の構造を知る" id="{51247acd-4ad0-caec-f7e5-e54a33cb2d17}">
+        <p14:section name="第2部 頭の構造を知る" id="{73ea247f-e104-bef5-9889-bc875963250f}">
           <p14:sldIdLst>
             <p14:sldId id="271"/>
             <p14:sldId id="272"/>
@@ -193,7 +190,7 @@
             <p14:sldId id="280"/>
           </p14:sldIdLst>
         </p14:section>
-        <p14:section name="ワーク 思い込みを書き換える" id="{e5cc6f21-c594-09ad-bba9-21a9fc39b0d1}">
+        <p14:section name="ワーク 思い込みを書き換える" id="{81fbbcc0-fd8e-0eb7-fe24-3316db1926e5}">
           <p14:sldIdLst>
             <p14:sldId id="281"/>
             <p14:sldId id="282"/>
@@ -211,23 +208,20 @@
             <p14:sldId id="294"/>
             <p14:sldId id="295"/>
             <p14:sldId id="296"/>
-            <p14:sldId id="297"/>
-            <p14:sldId id="298"/>
           </p14:sldIdLst>
         </p14:section>
-        <p14:section name="エネルギー" id="{40e4ae45-d2be-1820-2065-db5ee4916db6}">
+        <p14:section name="エネルギー" id="{96118eeb-6b7d-a72b-0706-c5ce2ddacccd}">
           <p14:sldIdLst>
-            <p14:sldId id="299"/>
+            <p14:sldId id="297"/>
           </p14:sldIdLst>
         </p14:section>
-        <p14:section name="まとめ" id="{8043cf5a-6f2c-b32d-8851-a39ef9177907}">
+        <p14:section name="まとめ" id="{ab3a8c17-2ed0-202a-e9c3-309e3f6043ad}">
           <p14:sldIdLst>
+            <p14:sldId id="298"/>
+            <p14:sldId id="299"/>
             <p14:sldId id="300"/>
             <p14:sldId id="301"/>
             <p14:sldId id="302"/>
-            <p14:sldId id="303"/>
-            <p14:sldId id="304"/>
-            <p14:sldId id="305"/>
           </p14:sldIdLst>
         </p14:section>
       </p14:sectionLst>
@@ -3714,7 +3708,7 @@
           <a:p>
             <a:r>
               <a:rPr lang="en-US" dirty="0"/>
-              <a:t>見せないスライド。画面共有を止めてから読む。読んだら次のスライドで共有を再開。</a:t>
+              <a:t>由香が本人の言葉をそのまま打ち込む。言葉は本人が決める（由香が作らない）。</a:t>
             </a:r>
             <a:endParaRPr lang="en-US" dirty="0"/>
           </a:p>
@@ -3802,7 +3796,7 @@
           <a:p>
             <a:r>
               <a:rPr lang="en-US" dirty="0"/>
-              <a:t>見える・聞こえる・体の感じを2倍・3倍に大きくしていく。5次元・現在ポジションで具体的に何をしているかも聴く。</a:t>
+              <a:t>ワークで残ったものをエネルギーで取り除く。</a:t>
             </a:r>
             <a:endParaRPr lang="en-US" dirty="0"/>
           </a:p>
@@ -3890,7 +3884,7 @@
           <a:p>
             <a:r>
               <a:rPr lang="en-US" dirty="0"/>
-              <a:t>由香が本人の言葉をそのまま打ち込む。言葉は本人が決める（由香が作らない）。</a:t>
+              <a:t>第1部の「1〜10で言うと、今どの段階ですか？」で聞いた数字と比べる。由香が＿＿に打ち込む。</a:t>
             </a:r>
             <a:endParaRPr lang="en-US" dirty="0"/>
           </a:p>
@@ -3978,7 +3972,7 @@
           <a:p>
             <a:r>
               <a:rPr lang="en-US" dirty="0"/>
-              <a:t>ワークで残ったものをエネルギーで取り除く。</a:t>
+              <a:t>本人の言葉で言ってもらう。</a:t>
             </a:r>
             <a:endParaRPr lang="en-US" dirty="0"/>
           </a:p>
@@ -4066,7 +4060,7 @@
           <a:p>
             <a:r>
               <a:rPr lang="en-US" dirty="0"/>
-              <a:t>はじめの点数といまの点数を並べて、変化を目で見てもらう。終わったらこのスライドを画像にしてLINEで送れる。</a:t>
+              <a:t>「一度で終わりではなく、繰り返し向き合う」につなげる。</a:t>
             </a:r>
             <a:endParaRPr lang="en-US" dirty="0"/>
           </a:p>
@@ -4154,7 +4148,7 @@
           <a:p>
             <a:r>
               <a:rPr lang="en-US" dirty="0"/>
-              <a:t>本人の言葉で言ってもらう。</a:t>
+              <a:t>すべての土台は絶対的安心感。「何をやっても、やらなくても大丈夫」「嫌なことをやめても、愛される」。</a:t>
             </a:r>
             <a:endParaRPr lang="en-US" dirty="0"/>
           </a:p>
@@ -4242,7 +4236,7 @@
           <a:p>
             <a:r>
               <a:rPr lang="en-US" dirty="0"/>
-              <a:t>3つを1つずつ聴いて、由香が各カードの下に本人の言葉を打ち込む。最初の一歩は、明日できるくらい小さいことでOK。</a:t>
+              <a:t>終了。1週間後にLINEで「その後いかがですか？」と連絡する。</a:t>
             </a:r>
             <a:endParaRPr lang="en-US" dirty="0"/>
           </a:p>
@@ -4266,182 +4260,6 @@
             <a:fld id="{F7021451-1387-4CA6-816F-3879F97B5CBC}" type="slidenum">
               <a:rPr lang="en-US"/>
               <a:t>47</a:t>
-            </a:fld>
-            <a:endParaRPr lang="en-US"/>
-          </a:p>
-        </p:txBody>
-      </p:sp>
-    </p:spTree>
-    <p:extLst>
-      <p:ext uri="{BB962C8B-B14F-4D97-AF65-F5344CB8AC3E}">
-        <p14:creationId xmlns:p14="http://schemas.microsoft.com/office/powerpoint/2010/main" val="1024086991"/>
-      </p:ext>
-    </p:extLst>
-  </p:cSld>
-  <p:clrMapOvr>
-    <a:masterClrMapping/>
-  </p:clrMapOvr>
-</p:notes>
-</file>
-
-<file path=ppt/notesSlides/notesSlide48.xml><?xml version="1.0" encoding="utf-8"?>
-<p:notes xmlns:a="http://schemas.openxmlformats.org/drawingml/2006/main" xmlns:r="http://schemas.openxmlformats.org/officeDocument/2006/relationships" xmlns:p="http://schemas.openxmlformats.org/presentationml/2006/main">
-  <p:cSld>
-    <p:spTree>
-      <p:nvGrpSpPr>
-        <p:cNvPr id="1" name=""/>
-        <p:cNvGrpSpPr/>
-        <p:nvPr/>
-      </p:nvGrpSpPr>
-      <p:grpSpPr>
-        <a:xfrm>
-          <a:off x="0" y="0"/>
-          <a:ext cx="0" cy="0"/>
-          <a:chOff x="0" y="0"/>
-          <a:chExt cx="0" cy="0"/>
-        </a:xfrm>
-      </p:grpSpPr>
-      <p:sp>
-        <p:nvSpPr>
-          <p:cNvPr id="2" name="Slide Image Placeholder 1"/>
-          <p:cNvSpPr>
-            <a:spLocks noGrp="1" noRot="1" noChangeAspect="1"/>
-          </p:cNvSpPr>
-          <p:nvPr>
-            <p:ph type="sldImg"/>
-          </p:nvPr>
-        </p:nvSpPr>
-        <p:spPr/>
-      </p:sp>
-      <p:sp>
-        <p:nvSpPr>
-          <p:cNvPr id="3" name="Notes Placeholder 2"/>
-          <p:cNvSpPr>
-            <a:spLocks noGrp="1"/>
-          </p:cNvSpPr>
-          <p:nvPr>
-            <p:ph type="body" idx="1"/>
-          </p:nvPr>
-        </p:nvSpPr>
-        <p:spPr/>
-        <p:txBody>
-          <a:bodyPr/>
-          <a:lstStyle/>
-          <a:p>
-            <a:r>
-              <a:rPr lang="en-US" dirty="0"/>
-              <a:t>「一度で終わりではなく、繰り返し向き合う」につなげる。</a:t>
-            </a:r>
-            <a:endParaRPr lang="en-US" dirty="0"/>
-          </a:p>
-        </p:txBody>
-      </p:sp>
-      <p:sp>
-        <p:nvSpPr>
-          <p:cNvPr id="4" name="Slide Number Placeholder 3"/>
-          <p:cNvSpPr>
-            <a:spLocks noGrp="1"/>
-          </p:cNvSpPr>
-          <p:nvPr>
-            <p:ph type="sldNum" sz="quarter" idx="10"/>
-          </p:nvPr>
-        </p:nvSpPr>
-        <p:spPr/>
-        <p:txBody>
-          <a:bodyPr/>
-          <a:lstStyle/>
-          <a:p>
-            <a:fld id="{F7021451-1387-4CA6-816F-3879F97B5CBC}" type="slidenum">
-              <a:rPr lang="en-US"/>
-              <a:t>48</a:t>
-            </a:fld>
-            <a:endParaRPr lang="en-US"/>
-          </a:p>
-        </p:txBody>
-      </p:sp>
-    </p:spTree>
-    <p:extLst>
-      <p:ext uri="{BB962C8B-B14F-4D97-AF65-F5344CB8AC3E}">
-        <p14:creationId xmlns:p14="http://schemas.microsoft.com/office/powerpoint/2010/main" val="1024086991"/>
-      </p:ext>
-    </p:extLst>
-  </p:cSld>
-  <p:clrMapOvr>
-    <a:masterClrMapping/>
-  </p:clrMapOvr>
-</p:notes>
-</file>
-
-<file path=ppt/notesSlides/notesSlide49.xml><?xml version="1.0" encoding="utf-8"?>
-<p:notes xmlns:a="http://schemas.openxmlformats.org/drawingml/2006/main" xmlns:r="http://schemas.openxmlformats.org/officeDocument/2006/relationships" xmlns:p="http://schemas.openxmlformats.org/presentationml/2006/main">
-  <p:cSld>
-    <p:spTree>
-      <p:nvGrpSpPr>
-        <p:cNvPr id="1" name=""/>
-        <p:cNvGrpSpPr/>
-        <p:nvPr/>
-      </p:nvGrpSpPr>
-      <p:grpSpPr>
-        <a:xfrm>
-          <a:off x="0" y="0"/>
-          <a:ext cx="0" cy="0"/>
-          <a:chOff x="0" y="0"/>
-          <a:chExt cx="0" cy="0"/>
-        </a:xfrm>
-      </p:grpSpPr>
-      <p:sp>
-        <p:nvSpPr>
-          <p:cNvPr id="2" name="Slide Image Placeholder 1"/>
-          <p:cNvSpPr>
-            <a:spLocks noGrp="1" noRot="1" noChangeAspect="1"/>
-          </p:cNvSpPr>
-          <p:nvPr>
-            <p:ph type="sldImg"/>
-          </p:nvPr>
-        </p:nvSpPr>
-        <p:spPr/>
-      </p:sp>
-      <p:sp>
-        <p:nvSpPr>
-          <p:cNvPr id="3" name="Notes Placeholder 2"/>
-          <p:cNvSpPr>
-            <a:spLocks noGrp="1"/>
-          </p:cNvSpPr>
-          <p:nvPr>
-            <p:ph type="body" idx="1"/>
-          </p:nvPr>
-        </p:nvSpPr>
-        <p:spPr/>
-        <p:txBody>
-          <a:bodyPr/>
-          <a:lstStyle/>
-          <a:p>
-            <a:r>
-              <a:rPr lang="en-US" dirty="0"/>
-              <a:t>すべての土台は絶対的安心感。「何をやっても、やらなくても大丈夫」「嫌なことをやめても、愛される」。</a:t>
-            </a:r>
-            <a:endParaRPr lang="en-US" dirty="0"/>
-          </a:p>
-        </p:txBody>
-      </p:sp>
-      <p:sp>
-        <p:nvSpPr>
-          <p:cNvPr id="4" name="Slide Number Placeholder 3"/>
-          <p:cNvSpPr>
-            <a:spLocks noGrp="1"/>
-          </p:cNvSpPr>
-          <p:nvPr>
-            <p:ph type="sldNum" sz="quarter" idx="10"/>
-          </p:nvPr>
-        </p:nvSpPr>
-        <p:spPr/>
-        <p:txBody>
-          <a:bodyPr/>
-          <a:lstStyle/>
-          <a:p>
-            <a:fld id="{F7021451-1387-4CA6-816F-3879F97B5CBC}" type="slidenum">
-              <a:rPr lang="en-US"/>
-              <a:t>49</a:t>
             </a:fld>
             <a:endParaRPr lang="en-US"/>
           </a:p>
@@ -4530,94 +4348,6 @@
             <a:fld id="{F7021451-1387-4CA6-816F-3879F97B5CBC}" type="slidenum">
               <a:rPr lang="en-US"/>
               <a:t>5</a:t>
-            </a:fld>
-            <a:endParaRPr lang="en-US"/>
-          </a:p>
-        </p:txBody>
-      </p:sp>
-    </p:spTree>
-    <p:extLst>
-      <p:ext uri="{BB962C8B-B14F-4D97-AF65-F5344CB8AC3E}">
-        <p14:creationId xmlns:p14="http://schemas.microsoft.com/office/powerpoint/2010/main" val="1024086991"/>
-      </p:ext>
-    </p:extLst>
-  </p:cSld>
-  <p:clrMapOvr>
-    <a:masterClrMapping/>
-  </p:clrMapOvr>
-</p:notes>
-</file>
-
-<file path=ppt/notesSlides/notesSlide50.xml><?xml version="1.0" encoding="utf-8"?>
-<p:notes xmlns:a="http://schemas.openxmlformats.org/drawingml/2006/main" xmlns:r="http://schemas.openxmlformats.org/officeDocument/2006/relationships" xmlns:p="http://schemas.openxmlformats.org/presentationml/2006/main">
-  <p:cSld>
-    <p:spTree>
-      <p:nvGrpSpPr>
-        <p:cNvPr id="1" name=""/>
-        <p:cNvGrpSpPr/>
-        <p:nvPr/>
-      </p:nvGrpSpPr>
-      <p:grpSpPr>
-        <a:xfrm>
-          <a:off x="0" y="0"/>
-          <a:ext cx="0" cy="0"/>
-          <a:chOff x="0" y="0"/>
-          <a:chExt cx="0" cy="0"/>
-        </a:xfrm>
-      </p:grpSpPr>
-      <p:sp>
-        <p:nvSpPr>
-          <p:cNvPr id="2" name="Slide Image Placeholder 1"/>
-          <p:cNvSpPr>
-            <a:spLocks noGrp="1" noRot="1" noChangeAspect="1"/>
-          </p:cNvSpPr>
-          <p:nvPr>
-            <p:ph type="sldImg"/>
-          </p:nvPr>
-        </p:nvSpPr>
-        <p:spPr/>
-      </p:sp>
-      <p:sp>
-        <p:nvSpPr>
-          <p:cNvPr id="3" name="Notes Placeholder 2"/>
-          <p:cNvSpPr>
-            <a:spLocks noGrp="1"/>
-          </p:cNvSpPr>
-          <p:nvPr>
-            <p:ph type="body" idx="1"/>
-          </p:nvPr>
-        </p:nvSpPr>
-        <p:spPr/>
-        <p:txBody>
-          <a:bodyPr/>
-          <a:lstStyle/>
-          <a:p>
-            <a:r>
-              <a:rPr lang="en-US" dirty="0"/>
-              <a:t>終了。1週間後にLINEで「その後いかがですか？」と連絡する。</a:t>
-            </a:r>
-            <a:endParaRPr lang="en-US" dirty="0"/>
-          </a:p>
-        </p:txBody>
-      </p:sp>
-      <p:sp>
-        <p:nvSpPr>
-          <p:cNvPr id="4" name="Slide Number Placeholder 3"/>
-          <p:cNvSpPr>
-            <a:spLocks noGrp="1"/>
-          </p:cNvSpPr>
-          <p:nvPr>
-            <p:ph type="sldNum" sz="quarter" idx="10"/>
-          </p:nvPr>
-        </p:nvSpPr>
-        <p:spPr/>
-        <p:txBody>
-          <a:bodyPr/>
-          <a:lstStyle/>
-          <a:p>
-            <a:fld id="{F7021451-1387-4CA6-816F-3879F97B5CBC}" type="slidenum">
-              <a:rPr lang="en-US"/>
-              <a:t>50</a:t>
             </a:fld>
             <a:endParaRPr lang="en-US"/>
           </a:p>
@@ -9004,7 +8734,7 @@
                   <a:schemeClr val="tx1"/>
                 </a:solidFill>
               </a:rPr>
-              <a:t>点数を</a:t>
+              <a:t>変化を</a:t>
             </a:r>
             <a:endParaRPr lang="en-US" sz="1400" dirty="0"/>
           </a:p>
@@ -9018,7 +8748,7 @@
                   <a:schemeClr val="tx1"/>
                 </a:solidFill>
               </a:rPr>
-              <a:t>つけ直す</a:t>
+              <a:t>確かめる</a:t>
             </a:r>
             <a:endParaRPr lang="en-US" sz="1400" dirty="0"/>
           </a:p>
@@ -15529,7 +15259,7 @@
                   <a:schemeClr val="tx1"/>
                 </a:solidFill>
               </a:rPr>
-              <a:t>点数の高い上位3つに印 → 一番邪魔している思い込みを1つ（Oリング可）</a:t>
+              <a:t>上位3つに印 → 一番邪魔している思い込みを1つ（Oリング可）</a:t>
             </a:r>
             <a:endParaRPr lang="en-US" sz="1200" dirty="0"/>
           </a:p>
@@ -15548,7 +15278,7 @@
                   <a:schemeClr val="tx1"/>
                 </a:solidFill>
               </a:rPr>
-              <a:t>確認「ゆるんだら、目標達成によい影響が出そう？」</a:t>
+              <a:t>確認「ゆるんだら、よい影響が出そう？」</a:t>
             </a:r>
             <a:endParaRPr lang="en-US" sz="1200" dirty="0"/>
           </a:p>
@@ -15567,7 +15297,7 @@
                   <a:schemeClr val="tx1"/>
                 </a:solidFill>
               </a:rPr>
-              <a:t>今の自分の場所に立ち、今の気持ちを話してもらう</a:t>
+              <a:t>思い込みが生まれた場面へ（見える・色・聞こえる・体の感じ）</a:t>
             </a:r>
             <a:endParaRPr lang="en-US" sz="1200" dirty="0"/>
           </a:p>
@@ -15586,7 +15316,7 @@
                   <a:schemeClr val="tx1"/>
                 </a:solidFill>
               </a:rPr>
-              <a:t>思い込みが生まれた過去の場面へ（見える・色・聞こえる・体の感じ）</a:t>
+              <a:t>外から見る「本当はどうして欲しかった？」「本当はどうしたかった？」</a:t>
             </a:r>
             <a:endParaRPr lang="en-US" sz="1200" dirty="0"/>
           </a:p>
@@ -15605,7 +15335,7 @@
                   <a:schemeClr val="tx1"/>
                 </a:solidFill>
               </a:rPr>
-              <a:t>その場所から出て外から見る「本当はどうして欲しかった？」「本当はどうしたかった？」</a:t>
+              <a:t>理想のあなたを思い浮かべる「どんなあなたですか？」</a:t>
             </a:r>
             <a:endParaRPr lang="en-US" sz="1200" dirty="0"/>
           </a:p>
@@ -15624,7 +15354,7 @@
                   <a:schemeClr val="tx1"/>
                 </a:solidFill>
               </a:rPr>
-              <a:t>もう一度戻って、言いたかったことを全部吐き出す（100％出たか？）</a:t>
+              <a:t>理想のあなたから「あの時のあなたへ、＿」→「伝えてみて、どんな気持ち？」</a:t>
             </a:r>
             <a:endParaRPr lang="en-US" sz="1200" dirty="0"/>
           </a:p>
@@ -15643,7 +15373,7 @@
                   <a:schemeClr val="tx1"/>
                 </a:solidFill>
               </a:rPr>
-              <a:t>苦しくなったら止めて息を吐き切る。ポジ変しない</a:t>
+              <a:t>「これから選びたいお金の考え」を本人の言葉で（由香が打ち込む）</a:t>
             </a:r>
             <a:endParaRPr lang="en-US" sz="1200" dirty="0"/>
           </a:p>
@@ -16348,6 +16078,20 @@
             </a:r>
             <a:endParaRPr lang="en-US" sz="1500" dirty="0"/>
           </a:p>
+          <a:p>
+            <a:pPr algn="ctr" indent="0" marL="0">
+              <a:buNone/>
+            </a:pPr>
+            <a:r>
+              <a:rPr lang="en-US" sz="1500" dirty="0">
+                <a:solidFill>
+                  <a:schemeClr val="accent2"/>
+                </a:solidFill>
+              </a:rPr>
+              <a:t>苦しくなったら、いったん止めて、息を吐き切りましょう</a:t>
+            </a:r>
+            <a:endParaRPr lang="en-US" sz="1500" dirty="0"/>
+          </a:p>
         </p:txBody>
       </p:sp>
       <p:sp>
@@ -17336,7 +17080,7 @@
                   <a:schemeClr val="accent2"/>
                 </a:solidFill>
               </a:rPr>
-              <a:t>苦しくなったら、いったん止めて、息を吐き切りましょう</a:t>
+              <a:t>伝えてみて、どんな気持ちですか？</a:t>
             </a:r>
             <a:endParaRPr lang="en-US" sz="1500" dirty="0"/>
           </a:p>
@@ -17414,40 +17158,16 @@
       </p:grpSpPr>
       <p:sp>
         <p:nvSpPr>
-          <p:cNvPr id="2" name="misenai_band"/>
+          <p:cNvPr id="2" name="Text 0"/>
           <p:cNvSpPr/>
-          <p:nvPr/>
-        </p:nvSpPr>
-        <p:spPr>
-          <a:xfrm>
-            <a:off x="457200" y="182880"/>
-            <a:ext cx="8229600" cy="502920"/>
-          </a:xfrm>
-          <a:prstGeom prst="roundRect">
-            <a:avLst>
-              <a:gd name="adj" fmla="val 18182"/>
-            </a:avLst>
-          </a:prstGeom>
-          <a:solidFill>
-            <a:srgbClr val="8C6A34"/>
-          </a:solidFill>
-          <a:ln/>
-        </p:spPr>
-        <p:txBody>
-          <a:bodyPr/>
-          <a:p/>
-        </p:txBody>
-      </p:sp>
-      <p:sp>
-        <p:nvSpPr>
-          <p:cNvPr id="3" name="misenai"/>
-          <p:cNvSpPr txBox="1"/>
-          <p:nvPr/>
-        </p:nvSpPr>
-        <p:spPr>
-          <a:xfrm>
-            <a:off x="457200" y="182880"/>
-            <a:ext cx="8229600" cy="502920"/>
+          <p:nvPr>
+            <p:ph idx="100" type="title" hasCustomPrompt="1"/>
+          </p:nvPr>
+        </p:nvSpPr>
+        <p:spPr>
+          <a:xfrm>
+            <a:off x="457200" y="457200"/>
+            <a:ext cx="8229600" cy="594360"/>
           </a:xfrm>
           <a:prstGeom prst="rect">
             <a:avLst/>
@@ -17459,47 +17179,11 @@
           <a:bodyPr wrap="square" lIns="0" tIns="0" rIns="0" bIns="0" rtlCol="0" anchor="ctr"/>
           <a:lstStyle/>
           <a:p>
-            <a:pPr algn="ctr" indent="0" marL="0">
-              <a:buNone/>
-            </a:pPr>
-            <a:r>
-              <a:rPr lang="en-US" sz="1800" b="1" dirty="0">
-                <a:solidFill>
-                  <a:schemeClr val="bg1"/>
-                </a:solidFill>
-              </a:rPr>
-              <a:t>【共有停止】</a:t>
-            </a:r>
-            <a:endParaRPr lang="en-US" sz="1800" dirty="0"/>
-          </a:p>
-        </p:txBody>
-      </p:sp>
-      <p:sp>
-        <p:nvSpPr>
-          <p:cNvPr id="4" name="facil_title"/>
-          <p:cNvSpPr txBox="1"/>
-          <p:nvPr/>
-        </p:nvSpPr>
-        <p:spPr>
-          <a:xfrm>
-            <a:off x="457200" y="777240"/>
-            <a:ext cx="8229600" cy="411480"/>
-          </a:xfrm>
-          <a:prstGeom prst="rect">
-            <a:avLst/>
-          </a:prstGeom>
-          <a:noFill/>
-          <a:ln/>
-        </p:spPr>
-        <p:txBody>
-          <a:bodyPr wrap="square" lIns="0" tIns="0" rIns="0" bIns="0" rtlCol="0" anchor="t"/>
-          <a:lstStyle/>
-          <a:p>
-            <a:pPr indent="0" marL="0">
-              <a:buNone/>
-            </a:pPr>
-            <a:r>
-              <a:rPr lang="en-US" sz="2200" b="1" dirty="0">
+            <a:pPr algn="l" indent="0" marL="0">
+              <a:buNone/>
+            </a:pPr>
+            <a:r>
+              <a:rPr lang="en-US" sz="2400" b="1" dirty="0">
                 <a:solidFill>
                   <a:schemeClr val="accent2"/>
                 </a:solidFill>
@@ -17507,30 +17191,30 @@
                 <a:ea typeface="Yu Mincho" pitchFamily="34" charset="-122"/>
                 <a:cs typeface="Yu Mincho" pitchFamily="34" charset="-120"/>
               </a:rPr>
-              <a:t>STEP 5 の進め方（理想の未来へ）</a:t>
-            </a:r>
-            <a:endParaRPr lang="en-US" sz="2200" dirty="0"/>
-          </a:p>
-        </p:txBody>
-      </p:sp>
-      <p:sp>
-        <p:nvSpPr>
-          <p:cNvPr id="5" name="facil_card"/>
+              <a:t>これから選びたい、お金の考え</a:t>
+            </a:r>
+            <a:endParaRPr lang="en-US" sz="2400" dirty="0"/>
+          </a:p>
+        </p:txBody>
+      </p:sp>
+      <p:sp>
+        <p:nvSpPr>
+          <p:cNvPr id="3" name="old_card"/>
           <p:cNvSpPr/>
           <p:nvPr/>
         </p:nvSpPr>
         <p:spPr>
           <a:xfrm>
-            <a:off x="457200" y="1188720"/>
-            <a:ext cx="5394960" cy="3383280"/>
+            <a:off x="457200" y="1280160"/>
+            <a:ext cx="3977640" cy="2468880"/>
           </a:xfrm>
           <a:prstGeom prst="roundRect">
             <a:avLst>
-              <a:gd name="adj" fmla="val 3243"/>
+              <a:gd name="adj" fmla="val 4444"/>
             </a:avLst>
           </a:prstGeom>
           <a:solidFill>
-            <a:srgbClr val="FFF8E8"/>
+            <a:srgbClr val="FDFAF4"/>
           </a:solidFill>
           <a:ln w="9525">
             <a:solidFill>
@@ -17546,14 +17230,14 @@
       </p:sp>
       <p:sp>
         <p:nvSpPr>
-          <p:cNvPr id="6" name="facil_list"/>
+          <p:cNvPr id="4" name="old_head"/>
           <p:cNvSpPr txBox="1"/>
           <p:nvPr/>
         </p:nvSpPr>
         <p:spPr>
           <a:xfrm>
-            <a:off x="594360" y="1280160"/>
-            <a:ext cx="5120640" cy="3200400"/>
+            <a:off x="640080" y="1417320"/>
+            <a:ext cx="3657600" cy="365760"/>
           </a:xfrm>
           <a:prstGeom prst="rect">
             <a:avLst/>
@@ -17565,69 +17249,180 @@
           <a:bodyPr wrap="square" lIns="1016" tIns="1016" rIns="1016" bIns="1016" rtlCol="0" anchor="t"/>
           <a:lstStyle/>
           <a:p>
-            <a:pPr marL="342900" indent="-342900">
-              <a:spcAft>
-                <a:spcPts val="300"/>
-              </a:spcAft>
-              <a:buSzPct val="100000"/>
-              <a:buFont typeface="+mj-lt"/>
-              <a:buAutoNum type="arabicPeriod" startAt="1"/>
-            </a:pPr>
-            <a:r>
-              <a:rPr lang="en-US" sz="1200" dirty="0">
+            <a:pPr indent="0" marL="0">
+              <a:buNone/>
+            </a:pPr>
+            <a:r>
+              <a:rPr lang="en-US" sz="1600" b="1" dirty="0">
+                <a:solidFill>
+                  <a:schemeClr val="accent2"/>
+                </a:solidFill>
+              </a:rPr>
+              <a:t>今までの考え</a:t>
+            </a:r>
+            <a:endParaRPr lang="en-US" sz="1600" dirty="0"/>
+          </a:p>
+        </p:txBody>
+      </p:sp>
+      <p:sp>
+        <p:nvSpPr>
+          <p:cNvPr id="5" name="old_body"/>
+          <p:cNvSpPr txBox="1"/>
+          <p:nvPr/>
+        </p:nvSpPr>
+        <p:spPr>
+          <a:xfrm>
+            <a:off x="640080" y="1874520"/>
+            <a:ext cx="3657600" cy="1737360"/>
+          </a:xfrm>
+          <a:prstGeom prst="rect">
+            <a:avLst/>
+          </a:prstGeom>
+          <a:noFill/>
+          <a:ln/>
+        </p:spPr>
+        <p:txBody>
+          <a:bodyPr wrap="square" lIns="1016" tIns="1016" rIns="1016" bIns="1016" rtlCol="0" anchor="t"/>
+          <a:lstStyle/>
+          <a:p>
+            <a:pPr indent="0" marL="0">
+              <a:buNone/>
+            </a:pPr>
+            <a:endParaRPr lang="en-US" sz="1800" dirty="0"/>
+          </a:p>
+        </p:txBody>
+      </p:sp>
+      <p:sp>
+        <p:nvSpPr>
+          <p:cNvPr id="6" name="new_card"/>
+          <p:cNvSpPr/>
+          <p:nvPr/>
+        </p:nvSpPr>
+        <p:spPr>
+          <a:xfrm>
+            <a:off x="4709160" y="1280160"/>
+            <a:ext cx="3977640" cy="2468880"/>
+          </a:xfrm>
+          <a:prstGeom prst="roundRect">
+            <a:avLst>
+              <a:gd name="adj" fmla="val 4444"/>
+            </a:avLst>
+          </a:prstGeom>
+          <a:solidFill>
+            <a:srgbClr val="F8EBEE"/>
+          </a:solidFill>
+          <a:ln w="9525">
+            <a:solidFill>
+              <a:srgbClr val="E9D9B6"/>
+            </a:solidFill>
+            <a:prstDash val="solid"/>
+          </a:ln>
+        </p:spPr>
+        <p:txBody>
+          <a:bodyPr/>
+          <a:p/>
+        </p:txBody>
+      </p:sp>
+      <p:sp>
+        <p:nvSpPr>
+          <p:cNvPr id="7" name="new_head"/>
+          <p:cNvSpPr txBox="1"/>
+          <p:nvPr/>
+        </p:nvSpPr>
+        <p:spPr>
+          <a:xfrm>
+            <a:off x="4892040" y="1417320"/>
+            <a:ext cx="3657600" cy="365760"/>
+          </a:xfrm>
+          <a:prstGeom prst="rect">
+            <a:avLst/>
+          </a:prstGeom>
+          <a:noFill/>
+          <a:ln/>
+        </p:spPr>
+        <p:txBody>
+          <a:bodyPr wrap="square" lIns="1016" tIns="1016" rIns="1016" bIns="1016" rtlCol="0" anchor="t"/>
+          <a:lstStyle/>
+          <a:p>
+            <a:pPr indent="0" marL="0">
+              <a:buNone/>
+            </a:pPr>
+            <a:r>
+              <a:rPr lang="en-US" sz="1600" b="1" dirty="0">
+                <a:solidFill>
+                  <a:schemeClr val="accent2"/>
+                </a:solidFill>
+              </a:rPr>
+              <a:t>これから選びたい考え</a:t>
+            </a:r>
+            <a:endParaRPr lang="en-US" sz="1600" dirty="0"/>
+          </a:p>
+        </p:txBody>
+      </p:sp>
+      <p:sp>
+        <p:nvSpPr>
+          <p:cNvPr id="8" name="new_body"/>
+          <p:cNvSpPr txBox="1"/>
+          <p:nvPr/>
+        </p:nvSpPr>
+        <p:spPr>
+          <a:xfrm>
+            <a:off x="4892040" y="1874520"/>
+            <a:ext cx="3657600" cy="1737360"/>
+          </a:xfrm>
+          <a:prstGeom prst="rect">
+            <a:avLst/>
+          </a:prstGeom>
+          <a:noFill/>
+          <a:ln/>
+        </p:spPr>
+        <p:txBody>
+          <a:bodyPr wrap="square" lIns="1016" tIns="1016" rIns="1016" bIns="1016" rtlCol="0" anchor="t"/>
+          <a:lstStyle/>
+          <a:p>
+            <a:pPr indent="0" marL="0">
+              <a:buNone/>
+            </a:pPr>
+            <a:endParaRPr lang="en-US" sz="1800" dirty="0"/>
+          </a:p>
+        </p:txBody>
+      </p:sp>
+      <p:sp>
+        <p:nvSpPr>
+          <p:cNvPr id="9" name="new_note"/>
+          <p:cNvSpPr txBox="1"/>
+          <p:nvPr/>
+        </p:nvSpPr>
+        <p:spPr>
+          <a:xfrm>
+            <a:off x="457200" y="3931920"/>
+            <a:ext cx="8229600" cy="411480"/>
+          </a:xfrm>
+          <a:prstGeom prst="rect">
+            <a:avLst/>
+          </a:prstGeom>
+          <a:noFill/>
+          <a:ln/>
+        </p:spPr>
+        <p:txBody>
+          <a:bodyPr wrap="square" lIns="1016" tIns="1016" rIns="1016" bIns="1016" rtlCol="0" anchor="t"/>
+          <a:lstStyle/>
+          <a:p>
+            <a:pPr indent="0" marL="0">
+              <a:buNone/>
+            </a:pPr>
+            <a:r>
+              <a:rPr lang="en-US" sz="1400" dirty="0">
                 <a:solidFill>
                   <a:schemeClr val="tx1"/>
                 </a:solidFill>
               </a:rPr>
-              <a:t>大成功している理想の未来の自分へ（見える・色・聞こえる・体の感じを2倍・3倍に）</a:t>
-            </a:r>
-            <a:endParaRPr lang="en-US" sz="1200" dirty="0"/>
-          </a:p>
-          <a:p>
-            <a:pPr marL="342900" indent="-342900">
-              <a:spcAft>
-                <a:spcPts val="300"/>
-              </a:spcAft>
-              <a:buSzPct val="100000"/>
-              <a:buFont typeface="+mj-lt"/>
-              <a:buAutoNum type="arabicPeriod" startAt="1"/>
-            </a:pPr>
-            <a:r>
-              <a:rPr lang="en-US" sz="1200" dirty="0">
-                <a:solidFill>
-                  <a:schemeClr val="tx1"/>
-                </a:solidFill>
-              </a:rPr>
-              <a:t>「これから選びたいお金の考え」を本人の言葉で決める（由香が打ち込む）</a:t>
-            </a:r>
-            <a:endParaRPr lang="en-US" sz="1200" dirty="0"/>
-          </a:p>
-        </p:txBody>
-      </p:sp>
-      <p:pic>
-        <p:nvPicPr>
-          <p:cNvPr id="7" name="Image 0" descr="ガイドブック">    </p:cNvPr>
-          <p:cNvPicPr>
-            <a:picLocks noChangeAspect="1"/>
-          </p:cNvPicPr>
-          <p:nvPr/>
-        </p:nvPicPr>
-        <p:blipFill>
-          <a:blip r:embed="rId1"/>
-          <a:stretch>
-            <a:fillRect/>
-          </a:stretch>
-        </p:blipFill>
-        <p:spPr>
-          <a:xfrm>
-            <a:off x="6126480" y="1188720"/>
-            <a:ext cx="2377440" cy="3364992"/>
-          </a:xfrm>
-          <a:prstGeom prst="rect">
-            <a:avLst/>
-          </a:prstGeom>
-        </p:spPr>
-      </p:pic>
+              <a:t>無理にポジティブな言葉にせず、自分が納得できる言葉で</a:t>
+            </a:r>
+            <a:endParaRPr lang="en-US" sz="1400" dirty="0"/>
+          </a:p>
+        </p:txBody>
+      </p:sp>
       <p:sp>
         <p:nvSpPr>
           <p:cNvPr id="25" name="Slide Number Placeholder 0"/>
@@ -17700,40 +17495,16 @@
       </p:grpSpPr>
       <p:sp>
         <p:nvSpPr>
-          <p:cNvPr id="2" name="frame"/>
+          <p:cNvPr id="2" name="Text 0"/>
           <p:cNvSpPr/>
-          <p:nvPr/>
-        </p:nvSpPr>
-        <p:spPr>
-          <a:xfrm>
-            <a:off x="228600" y="137160"/>
-            <a:ext cx="8686800" cy="4526280"/>
-          </a:xfrm>
-          <a:prstGeom prst="rect">
-            <a:avLst/>
-          </a:prstGeom>
-          <a:ln w="12700">
-            <a:solidFill>
-              <a:srgbClr val="B08A4E"/>
-            </a:solidFill>
-            <a:prstDash val="solid"/>
-          </a:ln>
-        </p:spPr>
-        <p:txBody>
-          <a:bodyPr/>
-          <a:p/>
-        </p:txBody>
-      </p:sp>
-      <p:sp>
-        <p:nvSpPr>
-          <p:cNvPr id="3" name="qlabel"/>
-          <p:cNvSpPr txBox="1"/>
-          <p:nvPr/>
-        </p:nvSpPr>
-        <p:spPr>
-          <a:xfrm>
-            <a:off x="457200" y="320040"/>
-            <a:ext cx="8229600" cy="365760"/>
+          <p:nvPr>
+            <p:ph idx="100" type="title" hasCustomPrompt="1"/>
+          </p:nvPr>
+        </p:nvSpPr>
+        <p:spPr>
+          <a:xfrm>
+            <a:off x="731520" y="1828800"/>
+            <a:ext cx="7680960" cy="914400"/>
           </a:xfrm>
           <a:prstGeom prst="rect">
             <a:avLst/>
@@ -17742,102 +17513,30 @@
           <a:ln/>
         </p:spPr>
         <p:txBody>
-          <a:bodyPr wrap="square" lIns="0" tIns="0" rIns="0" bIns="0" rtlCol="0" anchor="t"/>
+          <a:bodyPr wrap="square" rtlCol="0" anchor="ctr"/>
           <a:lstStyle/>
           <a:p>
             <a:pPr algn="ctr" indent="0" marL="0">
               <a:buNone/>
             </a:pPr>
             <a:r>
-              <a:rPr lang="en-US" sz="1300" b="1" dirty="0">
+              <a:rPr lang="en-US" sz="3600" b="1" dirty="0">
                 <a:solidFill>
                   <a:schemeClr val="accent2"/>
-                </a:solidFill>
-              </a:rPr>
-              <a:t>STEP 5　理想の未来から</a:t>
-            </a:r>
-            <a:endParaRPr lang="en-US" sz="1300" dirty="0"/>
-          </a:p>
-        </p:txBody>
-      </p:sp>
-      <p:sp>
-        <p:nvSpPr>
-          <p:cNvPr id="4" name="Text 0"/>
-          <p:cNvSpPr/>
-          <p:nvPr>
-            <p:ph idx="100" type="title" hasCustomPrompt="1"/>
-          </p:nvPr>
-        </p:nvSpPr>
-        <p:spPr>
-          <a:xfrm>
-            <a:off x="914400" y="1554480"/>
-            <a:ext cx="7315200" cy="1554480"/>
-          </a:xfrm>
-          <a:prstGeom prst="rect">
-            <a:avLst/>
-          </a:prstGeom>
-          <a:noFill/>
-          <a:ln/>
-        </p:spPr>
-        <p:txBody>
-          <a:bodyPr wrap="square" rtlCol="0" anchor="ctr"/>
-          <a:lstStyle/>
-          <a:p>
-            <a:pPr algn="ctr" indent="0" marL="0">
-              <a:buNone/>
-            </a:pPr>
-            <a:r>
-              <a:rPr lang="en-US" sz="3200" b="1" dirty="0">
-                <a:solidFill>
-                  <a:schemeClr val="tx2"/>
                 </a:solidFill>
                 <a:latin typeface="Yu Mincho" pitchFamily="34" charset="0"/>
                 <a:ea typeface="Yu Mincho" pitchFamily="34" charset="-122"/>
                 <a:cs typeface="Yu Mincho" pitchFamily="34" charset="-120"/>
               </a:rPr>
-              <a:t>大成功しているあなたには、</a:t>
-            </a:r>
-            <a:endParaRPr lang="en-US" sz="3200" dirty="0"/>
-          </a:p>
-          <a:p>
-            <a:pPr algn="ctr" indent="0" marL="0">
-              <a:buNone/>
-            </a:pPr>
-            <a:r>
-              <a:rPr lang="en-US" sz="3200" b="1" dirty="0">
-                <a:solidFill>
-                  <a:schemeClr val="tx2"/>
-                </a:solidFill>
-                <a:latin typeface="Yu Mincho" pitchFamily="34" charset="0"/>
-                <a:ea typeface="Yu Mincho" pitchFamily="34" charset="-122"/>
-                <a:cs typeface="Yu Mincho" pitchFamily="34" charset="-120"/>
-              </a:rPr>
-              <a:t>何が見えて、どんな色で、</a:t>
-            </a:r>
-            <a:endParaRPr lang="en-US" sz="3200" dirty="0"/>
-          </a:p>
-          <a:p>
-            <a:pPr algn="ctr" indent="0" marL="0">
-              <a:buNone/>
-            </a:pPr>
-            <a:r>
-              <a:rPr lang="en-US" sz="3200" b="1" dirty="0">
-                <a:solidFill>
-                  <a:schemeClr val="tx2"/>
-                </a:solidFill>
-                <a:latin typeface="Yu Mincho" pitchFamily="34" charset="0"/>
-                <a:ea typeface="Yu Mincho" pitchFamily="34" charset="-122"/>
-                <a:cs typeface="Yu Mincho" pitchFamily="34" charset="-120"/>
-              </a:rPr>
-              <a:t>何が聞こえますか？</a:t>
-            </a:r>
-            <a:endParaRPr lang="en-US" sz="3200" dirty="0"/>
-          </a:p>
-        </p:txBody>
-      </p:sp>
-      <p:sp>
-        <p:nvSpPr>
-          <p:cNvPr id="5" name="Text 0"/>
+              <a:t>エネルギーで取り除く</a:t>
+            </a:r>
+            <a:endParaRPr lang="en-US" sz="3600" dirty="0"/>
+          </a:p>
+        </p:txBody>
+      </p:sp>
+      <p:sp>
+        <p:nvSpPr>
+          <p:cNvPr id="3" name="Text 0"/>
           <p:cNvSpPr/>
           <p:nvPr>
             <p:ph idx="101" type="body" hasCustomPrompt="1"/>
@@ -17845,8 +17544,8 @@
         </p:nvSpPr>
         <p:spPr>
           <a:xfrm>
-            <a:off x="914400" y="3200400"/>
-            <a:ext cx="7315200" cy="731520"/>
+            <a:off x="731520" y="2788920"/>
+            <a:ext cx="7680960" cy="822960"/>
           </a:xfrm>
           <a:prstGeom prst="rect">
             <a:avLst/>
@@ -17862,59 +17561,28 @@
               <a:buNone/>
             </a:pPr>
             <a:r>
-              <a:rPr lang="en-US" sz="1500" dirty="0">
-                <a:solidFill>
-                  <a:schemeClr val="accent2"/>
-                </a:solidFill>
-              </a:rPr>
-              <a:t>体はどんな感じがしますか？</a:t>
-            </a:r>
-            <a:endParaRPr lang="en-US" sz="1500" dirty="0"/>
-          </a:p>
-        </p:txBody>
-      </p:sp>
-      <p:sp>
-        <p:nvSpPr>
-          <p:cNvPr id="25" name="Slide Number Placeholder 0"/>
-          <p:cNvSpPr>
-            <a:spLocks noGrp="1"/>
-          </p:cNvSpPr>
-          <p:nvPr>
-            <p:ph type="sldNum" sz="quarter" idx="4294967295"/>
-          </p:nvPr>
-        </p:nvSpPr>
-        <p:spPr>
-          <a:xfrm>
-            <a:off x="8229600" y="4754880"/>
-            <a:ext cx="457200" cy="274320"/>
-          </a:xfrm>
-          <a:prstGeom prst="rect">
-            <a:avLst/>
-          </a:prstGeom>
-          <a:extLst>
-            <a:ext uri="{C572A759-6A51-4108-AA02-DFA0A04FC94B}">
-              <ma14:wrappingTextBoxFlag xmlns:ma14="http://schemas.microsoft.com/office/mac/drawingml/2011/main" val="0"/>
-            </a:ext>
-          </a:extLst>
-        </p:spPr>
-        <p:txBody>
-          <a:bodyPr/>
-          <a:lstStyle>
-            <a:lvl1pPr>
-              <a:defRPr sz="900">
-                <a:solidFill>
-                  <a:srgbClr val="B08A4E"/>
-                </a:solidFill>
-              </a:defRPr>
-            </a:lvl1pPr>
-          </a:lstStyle>
-          <a:p>
-            <a:pPr algn="r"/>
-            <a:fld id="{F7021451-1387-4CA6-816F-3879F97B5CBC}" type="slidenum">
-              <a:rPr b="0" lang="en-US"/>
-              <a:t>42</a:t>
-            </a:fld>
-            <a:endParaRPr lang="en-US"/>
+              <a:rPr lang="en-US" sz="1600" dirty="0">
+                <a:solidFill>
+                  <a:schemeClr val="tx1"/>
+                </a:solidFill>
+              </a:rPr>
+              <a:t>残っているものを、やさしく手放していきます（75〜85分）</a:t>
+            </a:r>
+            <a:endParaRPr lang="en-US" sz="1600" dirty="0"/>
+          </a:p>
+          <a:p>
+            <a:pPr algn="ctr" indent="0" marL="0">
+              <a:buNone/>
+            </a:pPr>
+            <a:r>
+              <a:rPr lang="en-US" sz="1600" dirty="0">
+                <a:solidFill>
+                  <a:schemeClr val="tx1"/>
+                </a:solidFill>
+              </a:rPr>
+              <a:t>はじめる前に、今の気持ちと体の感じを確かめます。終わったら、感じたことを言葉にしてみましょう</a:t>
+            </a:r>
+            <a:endParaRPr lang="en-US" sz="1600" dirty="0"/>
           </a:p>
         </p:txBody>
       </p:sp>
@@ -17945,16 +17613,40 @@
       </p:grpSpPr>
       <p:sp>
         <p:nvSpPr>
-          <p:cNvPr id="2" name="Text 0"/>
+          <p:cNvPr id="2" name="frame"/>
           <p:cNvSpPr/>
-          <p:nvPr>
-            <p:ph idx="100" type="title" hasCustomPrompt="1"/>
-          </p:nvPr>
-        </p:nvSpPr>
-        <p:spPr>
-          <a:xfrm>
-            <a:off x="457200" y="457200"/>
-            <a:ext cx="8229600" cy="594360"/>
+          <p:nvPr/>
+        </p:nvSpPr>
+        <p:spPr>
+          <a:xfrm>
+            <a:off x="228600" y="137160"/>
+            <a:ext cx="8686800" cy="4526280"/>
+          </a:xfrm>
+          <a:prstGeom prst="rect">
+            <a:avLst/>
+          </a:prstGeom>
+          <a:ln w="12700">
+            <a:solidFill>
+              <a:srgbClr val="B08A4E"/>
+            </a:solidFill>
+            <a:prstDash val="solid"/>
+          </a:ln>
+        </p:spPr>
+        <p:txBody>
+          <a:bodyPr/>
+          <a:p/>
+        </p:txBody>
+      </p:sp>
+      <p:sp>
+        <p:nvSpPr>
+          <p:cNvPr id="3" name="qlabel"/>
+          <p:cNvSpPr txBox="1"/>
+          <p:nvPr/>
+        </p:nvSpPr>
+        <p:spPr>
+          <a:xfrm>
+            <a:off x="457200" y="320040"/>
+            <a:ext cx="8229600" cy="365760"/>
           </a:xfrm>
           <a:prstGeom prst="rect">
             <a:avLst/>
@@ -17963,68 +17655,111 @@
           <a:ln/>
         </p:spPr>
         <p:txBody>
-          <a:bodyPr wrap="square" lIns="0" tIns="0" rIns="0" bIns="0" rtlCol="0" anchor="ctr"/>
-          <a:lstStyle/>
-          <a:p>
-            <a:pPr algn="l" indent="0" marL="0">
-              <a:buNone/>
-            </a:pPr>
-            <a:r>
-              <a:rPr lang="en-US" sz="2400" b="1" dirty="0">
+          <a:bodyPr wrap="square" lIns="0" tIns="0" rIns="0" bIns="0" rtlCol="0" anchor="t"/>
+          <a:lstStyle/>
+          <a:p>
+            <a:pPr algn="ctr" indent="0" marL="0">
+              <a:buNone/>
+            </a:pPr>
+            <a:r>
+              <a:rPr lang="en-US" sz="1300" b="1" dirty="0">
                 <a:solidFill>
                   <a:schemeClr val="accent2"/>
+                </a:solidFill>
+              </a:rPr>
+              <a:t>ふり返り</a:t>
+            </a:r>
+            <a:endParaRPr lang="en-US" sz="1300" dirty="0"/>
+          </a:p>
+        </p:txBody>
+      </p:sp>
+      <p:sp>
+        <p:nvSpPr>
+          <p:cNvPr id="4" name="Text 0"/>
+          <p:cNvSpPr/>
+          <p:nvPr>
+            <p:ph idx="100" type="title" hasCustomPrompt="1"/>
+          </p:nvPr>
+        </p:nvSpPr>
+        <p:spPr>
+          <a:xfrm>
+            <a:off x="914400" y="1554480"/>
+            <a:ext cx="7315200" cy="1554480"/>
+          </a:xfrm>
+          <a:prstGeom prst="rect">
+            <a:avLst/>
+          </a:prstGeom>
+          <a:noFill/>
+          <a:ln/>
+        </p:spPr>
+        <p:txBody>
+          <a:bodyPr wrap="square" rtlCol="0" anchor="ctr"/>
+          <a:lstStyle/>
+          <a:p>
+            <a:pPr algn="ctr" indent="0" marL="0">
+              <a:buNone/>
+            </a:pPr>
+            <a:r>
+              <a:rPr lang="en-US" sz="3200" b="1" dirty="0">
+                <a:solidFill>
+                  <a:schemeClr val="tx2"/>
                 </a:solidFill>
                 <a:latin typeface="Yu Mincho" pitchFamily="34" charset="0"/>
                 <a:ea typeface="Yu Mincho" pitchFamily="34" charset="-122"/>
                 <a:cs typeface="Yu Mincho" pitchFamily="34" charset="-120"/>
               </a:rPr>
-              <a:t>これから選びたい、お金の考え</a:t>
-            </a:r>
-            <a:endParaRPr lang="en-US" sz="2400" dirty="0"/>
-          </a:p>
-        </p:txBody>
-      </p:sp>
-      <p:sp>
-        <p:nvSpPr>
-          <p:cNvPr id="3" name="old_card"/>
+              <a:t>最初に「1〜10」で聞いた</a:t>
+            </a:r>
+            <a:endParaRPr lang="en-US" sz="3200" dirty="0"/>
+          </a:p>
+          <a:p>
+            <a:pPr algn="ctr" indent="0" marL="0">
+              <a:buNone/>
+            </a:pPr>
+            <a:r>
+              <a:rPr lang="en-US" sz="3200" b="1" dirty="0">
+                <a:solidFill>
+                  <a:schemeClr val="tx2"/>
+                </a:solidFill>
+                <a:latin typeface="Yu Mincho" pitchFamily="34" charset="0"/>
+                <a:ea typeface="Yu Mincho" pitchFamily="34" charset="-122"/>
+                <a:cs typeface="Yu Mincho" pitchFamily="34" charset="-120"/>
+              </a:rPr>
+              <a:t>今の段階は、</a:t>
+            </a:r>
+            <a:endParaRPr lang="en-US" sz="3200" dirty="0"/>
+          </a:p>
+          <a:p>
+            <a:pPr algn="ctr" indent="0" marL="0">
+              <a:buNone/>
+            </a:pPr>
+            <a:r>
+              <a:rPr lang="en-US" sz="3200" b="1" dirty="0">
+                <a:solidFill>
+                  <a:schemeClr val="tx2"/>
+                </a:solidFill>
+                <a:latin typeface="Yu Mincho" pitchFamily="34" charset="0"/>
+                <a:ea typeface="Yu Mincho" pitchFamily="34" charset="-122"/>
+                <a:cs typeface="Yu Mincho" pitchFamily="34" charset="-120"/>
+              </a:rPr>
+              <a:t>いまどのくらいですか？</a:t>
+            </a:r>
+            <a:endParaRPr lang="en-US" sz="3200" dirty="0"/>
+          </a:p>
+        </p:txBody>
+      </p:sp>
+      <p:sp>
+        <p:nvSpPr>
+          <p:cNvPr id="5" name="Text 0"/>
           <p:cNvSpPr/>
-          <p:nvPr/>
-        </p:nvSpPr>
-        <p:spPr>
-          <a:xfrm>
-            <a:off x="457200" y="1280160"/>
-            <a:ext cx="3977640" cy="2468880"/>
-          </a:xfrm>
-          <a:prstGeom prst="roundRect">
-            <a:avLst>
-              <a:gd name="adj" fmla="val 4444"/>
-            </a:avLst>
-          </a:prstGeom>
-          <a:solidFill>
-            <a:srgbClr val="FDFAF4"/>
-          </a:solidFill>
-          <a:ln w="9525">
-            <a:solidFill>
-              <a:srgbClr val="E9D9B6"/>
-            </a:solidFill>
-            <a:prstDash val="solid"/>
-          </a:ln>
-        </p:spPr>
-        <p:txBody>
-          <a:bodyPr/>
-          <a:p/>
-        </p:txBody>
-      </p:sp>
-      <p:sp>
-        <p:nvSpPr>
-          <p:cNvPr id="4" name="old_head"/>
-          <p:cNvSpPr txBox="1"/>
-          <p:nvPr/>
-        </p:nvSpPr>
-        <p:spPr>
-          <a:xfrm>
-            <a:off x="640080" y="1417320"/>
-            <a:ext cx="3657600" cy="365760"/>
+          <p:nvPr>
+            <p:ph idx="101" type="body" hasCustomPrompt="1"/>
+          </p:nvPr>
+        </p:nvSpPr>
+        <p:spPr>
+          <a:xfrm>
+            <a:off x="914400" y="3200400"/>
+            <a:ext cx="7315200" cy="731520"/>
           </a:xfrm>
           <a:prstGeom prst="rect">
             <a:avLst/>
@@ -18033,180 +17768,21 @@
           <a:ln/>
         </p:spPr>
         <p:txBody>
-          <a:bodyPr wrap="square" lIns="1016" tIns="1016" rIns="1016" bIns="1016" rtlCol="0" anchor="t"/>
-          <a:lstStyle/>
-          <a:p>
-            <a:pPr indent="0" marL="0">
-              <a:buNone/>
-            </a:pPr>
-            <a:r>
-              <a:rPr lang="en-US" sz="1600" b="1" dirty="0">
+          <a:bodyPr wrap="square" rtlCol="0" anchor="t"/>
+          <a:lstStyle/>
+          <a:p>
+            <a:pPr algn="ctr" indent="0" marL="0">
+              <a:buNone/>
+            </a:pPr>
+            <a:r>
+              <a:rPr lang="en-US" sz="1500" dirty="0">
                 <a:solidFill>
                   <a:schemeClr val="accent2"/>
                 </a:solidFill>
               </a:rPr>
-              <a:t>今までの考え</a:t>
-            </a:r>
-            <a:endParaRPr lang="en-US" sz="1600" dirty="0"/>
-          </a:p>
-        </p:txBody>
-      </p:sp>
-      <p:sp>
-        <p:nvSpPr>
-          <p:cNvPr id="5" name="old_body"/>
-          <p:cNvSpPr txBox="1"/>
-          <p:nvPr/>
-        </p:nvSpPr>
-        <p:spPr>
-          <a:xfrm>
-            <a:off x="640080" y="1874520"/>
-            <a:ext cx="3657600" cy="1737360"/>
-          </a:xfrm>
-          <a:prstGeom prst="rect">
-            <a:avLst/>
-          </a:prstGeom>
-          <a:noFill/>
-          <a:ln/>
-        </p:spPr>
-        <p:txBody>
-          <a:bodyPr wrap="square" lIns="1016" tIns="1016" rIns="1016" bIns="1016" rtlCol="0" anchor="t"/>
-          <a:lstStyle/>
-          <a:p>
-            <a:pPr indent="0" marL="0">
-              <a:buNone/>
-            </a:pPr>
-            <a:endParaRPr lang="en-US" sz="1800" dirty="0"/>
-          </a:p>
-        </p:txBody>
-      </p:sp>
-      <p:sp>
-        <p:nvSpPr>
-          <p:cNvPr id="6" name="new_card"/>
-          <p:cNvSpPr/>
-          <p:nvPr/>
-        </p:nvSpPr>
-        <p:spPr>
-          <a:xfrm>
-            <a:off x="4709160" y="1280160"/>
-            <a:ext cx="3977640" cy="2468880"/>
-          </a:xfrm>
-          <a:prstGeom prst="roundRect">
-            <a:avLst>
-              <a:gd name="adj" fmla="val 4444"/>
-            </a:avLst>
-          </a:prstGeom>
-          <a:solidFill>
-            <a:srgbClr val="F8EBEE"/>
-          </a:solidFill>
-          <a:ln w="9525">
-            <a:solidFill>
-              <a:srgbClr val="E9D9B6"/>
-            </a:solidFill>
-            <a:prstDash val="solid"/>
-          </a:ln>
-        </p:spPr>
-        <p:txBody>
-          <a:bodyPr/>
-          <a:p/>
-        </p:txBody>
-      </p:sp>
-      <p:sp>
-        <p:nvSpPr>
-          <p:cNvPr id="7" name="new_head"/>
-          <p:cNvSpPr txBox="1"/>
-          <p:nvPr/>
-        </p:nvSpPr>
-        <p:spPr>
-          <a:xfrm>
-            <a:off x="4892040" y="1417320"/>
-            <a:ext cx="3657600" cy="365760"/>
-          </a:xfrm>
-          <a:prstGeom prst="rect">
-            <a:avLst/>
-          </a:prstGeom>
-          <a:noFill/>
-          <a:ln/>
-        </p:spPr>
-        <p:txBody>
-          <a:bodyPr wrap="square" lIns="1016" tIns="1016" rIns="1016" bIns="1016" rtlCol="0" anchor="t"/>
-          <a:lstStyle/>
-          <a:p>
-            <a:pPr indent="0" marL="0">
-              <a:buNone/>
-            </a:pPr>
-            <a:r>
-              <a:rPr lang="en-US" sz="1600" b="1" dirty="0">
-                <a:solidFill>
-                  <a:schemeClr val="accent2"/>
-                </a:solidFill>
-              </a:rPr>
-              <a:t>これから選びたい考え</a:t>
-            </a:r>
-            <a:endParaRPr lang="en-US" sz="1600" dirty="0"/>
-          </a:p>
-        </p:txBody>
-      </p:sp>
-      <p:sp>
-        <p:nvSpPr>
-          <p:cNvPr id="8" name="new_body"/>
-          <p:cNvSpPr txBox="1"/>
-          <p:nvPr/>
-        </p:nvSpPr>
-        <p:spPr>
-          <a:xfrm>
-            <a:off x="4892040" y="1874520"/>
-            <a:ext cx="3657600" cy="1737360"/>
-          </a:xfrm>
-          <a:prstGeom prst="rect">
-            <a:avLst/>
-          </a:prstGeom>
-          <a:noFill/>
-          <a:ln/>
-        </p:spPr>
-        <p:txBody>
-          <a:bodyPr wrap="square" lIns="1016" tIns="1016" rIns="1016" bIns="1016" rtlCol="0" anchor="t"/>
-          <a:lstStyle/>
-          <a:p>
-            <a:pPr indent="0" marL="0">
-              <a:buNone/>
-            </a:pPr>
-            <a:endParaRPr lang="en-US" sz="1800" dirty="0"/>
-          </a:p>
-        </p:txBody>
-      </p:sp>
-      <p:sp>
-        <p:nvSpPr>
-          <p:cNvPr id="9" name="new_note"/>
-          <p:cNvSpPr txBox="1"/>
-          <p:nvPr/>
-        </p:nvSpPr>
-        <p:spPr>
-          <a:xfrm>
-            <a:off x="457200" y="3931920"/>
-            <a:ext cx="8229600" cy="411480"/>
-          </a:xfrm>
-          <a:prstGeom prst="rect">
-            <a:avLst/>
-          </a:prstGeom>
-          <a:noFill/>
-          <a:ln/>
-        </p:spPr>
-        <p:txBody>
-          <a:bodyPr wrap="square" lIns="1016" tIns="1016" rIns="1016" bIns="1016" rtlCol="0" anchor="t"/>
-          <a:lstStyle/>
-          <a:p>
-            <a:pPr indent="0" marL="0">
-              <a:buNone/>
-            </a:pPr>
-            <a:r>
-              <a:rPr lang="en-US" sz="1400" dirty="0">
-                <a:solidFill>
-                  <a:schemeClr val="tx1"/>
-                </a:solidFill>
-              </a:rPr>
-              <a:t>無理にポジティブな言葉にせず、自分が納得できる言葉で</a:t>
-            </a:r>
-            <a:endParaRPr lang="en-US" sz="1400" dirty="0"/>
+              <a:t>はじめ：＿＿　→　いま：＿＿</a:t>
+            </a:r>
+            <a:endParaRPr lang="en-US" sz="1500" dirty="0"/>
           </a:p>
         </p:txBody>
       </p:sp>
@@ -18282,16 +17858,40 @@
       </p:grpSpPr>
       <p:sp>
         <p:nvSpPr>
-          <p:cNvPr id="2" name="Text 0"/>
+          <p:cNvPr id="2" name="frame"/>
           <p:cNvSpPr/>
-          <p:nvPr>
-            <p:ph idx="100" type="title" hasCustomPrompt="1"/>
-          </p:nvPr>
-        </p:nvSpPr>
-        <p:spPr>
-          <a:xfrm>
-            <a:off x="731520" y="1828800"/>
-            <a:ext cx="7680960" cy="914400"/>
+          <p:nvPr/>
+        </p:nvSpPr>
+        <p:spPr>
+          <a:xfrm>
+            <a:off x="228600" y="137160"/>
+            <a:ext cx="8686800" cy="4526280"/>
+          </a:xfrm>
+          <a:prstGeom prst="rect">
+            <a:avLst/>
+          </a:prstGeom>
+          <a:ln w="12700">
+            <a:solidFill>
+              <a:srgbClr val="B08A4E"/>
+            </a:solidFill>
+            <a:prstDash val="solid"/>
+          </a:ln>
+        </p:spPr>
+        <p:txBody>
+          <a:bodyPr/>
+          <a:p/>
+        </p:txBody>
+      </p:sp>
+      <p:sp>
+        <p:nvSpPr>
+          <p:cNvPr id="3" name="qlabel"/>
+          <p:cNvSpPr txBox="1"/>
+          <p:nvPr/>
+        </p:nvSpPr>
+        <p:spPr>
+          <a:xfrm>
+            <a:off x="457200" y="320040"/>
+            <a:ext cx="8229600" cy="365760"/>
           </a:xfrm>
           <a:prstGeom prst="rect">
             <a:avLst/>
@@ -18300,6 +17900,44 @@
           <a:ln/>
         </p:spPr>
         <p:txBody>
+          <a:bodyPr wrap="square" lIns="0" tIns="0" rIns="0" bIns="0" rtlCol="0" anchor="t"/>
+          <a:lstStyle/>
+          <a:p>
+            <a:pPr algn="ctr" indent="0" marL="0">
+              <a:buNone/>
+            </a:pPr>
+            <a:r>
+              <a:rPr lang="en-US" sz="1300" b="1" dirty="0">
+                <a:solidFill>
+                  <a:schemeClr val="accent2"/>
+                </a:solidFill>
+              </a:rPr>
+              <a:t>ふり返り</a:t>
+            </a:r>
+            <a:endParaRPr lang="en-US" sz="1300" dirty="0"/>
+          </a:p>
+        </p:txBody>
+      </p:sp>
+      <p:sp>
+        <p:nvSpPr>
+          <p:cNvPr id="4" name="Text 0"/>
+          <p:cNvSpPr/>
+          <p:nvPr>
+            <p:ph idx="100" type="title" hasCustomPrompt="1"/>
+          </p:nvPr>
+        </p:nvSpPr>
+        <p:spPr>
+          <a:xfrm>
+            <a:off x="914400" y="1554480"/>
+            <a:ext cx="7315200" cy="1554480"/>
+          </a:xfrm>
+          <a:prstGeom prst="rect">
+            <a:avLst/>
+          </a:prstGeom>
+          <a:noFill/>
+          <a:ln/>
+        </p:spPr>
+        <p:txBody>
           <a:bodyPr wrap="square" rtlCol="0" anchor="ctr"/>
           <a:lstStyle/>
           <a:p>
@@ -18307,23 +17945,57 @@
               <a:buNone/>
             </a:pPr>
             <a:r>
-              <a:rPr lang="en-US" sz="3600" b="1" dirty="0">
-                <a:solidFill>
-                  <a:schemeClr val="accent2"/>
+              <a:rPr lang="en-US" sz="3200" b="1" dirty="0">
+                <a:solidFill>
+                  <a:schemeClr val="tx2"/>
                 </a:solidFill>
                 <a:latin typeface="Yu Mincho" pitchFamily="34" charset="0"/>
                 <a:ea typeface="Yu Mincho" pitchFamily="34" charset="-122"/>
                 <a:cs typeface="Yu Mincho" pitchFamily="34" charset="-120"/>
               </a:rPr>
-              <a:t>エネルギーで取り除く</a:t>
-            </a:r>
-            <a:endParaRPr lang="en-US" sz="3600" dirty="0"/>
-          </a:p>
-        </p:txBody>
-      </p:sp>
-      <p:sp>
-        <p:nvSpPr>
-          <p:cNvPr id="3" name="Text 0"/>
+              <a:t>今日、いちばん</a:t>
+            </a:r>
+            <a:endParaRPr lang="en-US" sz="3200" dirty="0"/>
+          </a:p>
+          <a:p>
+            <a:pPr algn="ctr" indent="0" marL="0">
+              <a:buNone/>
+            </a:pPr>
+            <a:r>
+              <a:rPr lang="en-US" sz="3200" b="1" dirty="0">
+                <a:solidFill>
+                  <a:schemeClr val="tx2"/>
+                </a:solidFill>
+                <a:latin typeface="Yu Mincho" pitchFamily="34" charset="0"/>
+                <a:ea typeface="Yu Mincho" pitchFamily="34" charset="-122"/>
+                <a:cs typeface="Yu Mincho" pitchFamily="34" charset="-120"/>
+              </a:rPr>
+              <a:t>変わったと感じることは</a:t>
+            </a:r>
+            <a:endParaRPr lang="en-US" sz="3200" dirty="0"/>
+          </a:p>
+          <a:p>
+            <a:pPr algn="ctr" indent="0" marL="0">
+              <a:buNone/>
+            </a:pPr>
+            <a:r>
+              <a:rPr lang="en-US" sz="3200" b="1" dirty="0">
+                <a:solidFill>
+                  <a:schemeClr val="tx2"/>
+                </a:solidFill>
+                <a:latin typeface="Yu Mincho" pitchFamily="34" charset="0"/>
+                <a:ea typeface="Yu Mincho" pitchFamily="34" charset="-122"/>
+                <a:cs typeface="Yu Mincho" pitchFamily="34" charset="-120"/>
+              </a:rPr>
+              <a:t>何ですか？</a:t>
+            </a:r>
+            <a:endParaRPr lang="en-US" sz="3200" dirty="0"/>
+          </a:p>
+        </p:txBody>
+      </p:sp>
+      <p:sp>
+        <p:nvSpPr>
+          <p:cNvPr id="5" name="Text 0"/>
           <p:cNvSpPr/>
           <p:nvPr>
             <p:ph idx="101" type="body" hasCustomPrompt="1"/>
@@ -18331,8 +18003,8 @@
         </p:nvSpPr>
         <p:spPr>
           <a:xfrm>
-            <a:off x="731520" y="2788920"/>
-            <a:ext cx="7680960" cy="822960"/>
+            <a:off x="914400" y="3200400"/>
+            <a:ext cx="7315200" cy="731520"/>
           </a:xfrm>
           <a:prstGeom prst="rect">
             <a:avLst/>
@@ -18348,28 +18020,59 @@
               <a:buNone/>
             </a:pPr>
             <a:r>
-              <a:rPr lang="en-US" sz="1600" dirty="0">
-                <a:solidFill>
-                  <a:schemeClr val="tx1"/>
-                </a:solidFill>
-              </a:rPr>
-              <a:t>残っているものを、やさしく手放していきます（75〜85分）</a:t>
-            </a:r>
-            <a:endParaRPr lang="en-US" sz="1600" dirty="0"/>
-          </a:p>
-          <a:p>
-            <a:pPr algn="ctr" indent="0" marL="0">
-              <a:buNone/>
-            </a:pPr>
-            <a:r>
-              <a:rPr lang="en-US" sz="1600" dirty="0">
-                <a:solidFill>
-                  <a:schemeClr val="tx1"/>
-                </a:solidFill>
-              </a:rPr>
-              <a:t>はじめる前に、今の気持ちと体の感じを確かめます。終わったら、感じたことを言葉にしてみましょう</a:t>
-            </a:r>
-            <a:endParaRPr lang="en-US" sz="1600" dirty="0"/>
+              <a:rPr lang="en-US" sz="1500" dirty="0">
+                <a:solidFill>
+                  <a:schemeClr val="accent2"/>
+                </a:solidFill>
+              </a:rPr>
+              <a:t>それが、今日持ち帰るものです</a:t>
+            </a:r>
+            <a:endParaRPr lang="en-US" sz="1500" dirty="0"/>
+          </a:p>
+        </p:txBody>
+      </p:sp>
+      <p:sp>
+        <p:nvSpPr>
+          <p:cNvPr id="25" name="Slide Number Placeholder 0"/>
+          <p:cNvSpPr>
+            <a:spLocks noGrp="1"/>
+          </p:cNvSpPr>
+          <p:nvPr>
+            <p:ph type="sldNum" sz="quarter" idx="4294967295"/>
+          </p:nvPr>
+        </p:nvSpPr>
+        <p:spPr>
+          <a:xfrm>
+            <a:off x="8229600" y="4754880"/>
+            <a:ext cx="457200" cy="274320"/>
+          </a:xfrm>
+          <a:prstGeom prst="rect">
+            <a:avLst/>
+          </a:prstGeom>
+          <a:extLst>
+            <a:ext uri="{C572A759-6A51-4108-AA02-DFA0A04FC94B}">
+              <ma14:wrappingTextBoxFlag xmlns:ma14="http://schemas.microsoft.com/office/mac/drawingml/2011/main" val="0"/>
+            </a:ext>
+          </a:extLst>
+        </p:spPr>
+        <p:txBody>
+          <a:bodyPr/>
+          <a:lstStyle>
+            <a:lvl1pPr>
+              <a:defRPr sz="900">
+                <a:solidFill>
+                  <a:srgbClr val="B08A4E"/>
+                </a:solidFill>
+              </a:defRPr>
+            </a:lvl1pPr>
+          </a:lstStyle>
+          <a:p>
+            <a:pPr algn="r"/>
+            <a:fld id="{F7021451-1387-4CA6-816F-3879F97B5CBC}" type="slidenum">
+              <a:rPr b="0" lang="en-US"/>
+              <a:t>44</a:t>
+            </a:fld>
+            <a:endParaRPr lang="en-US"/>
           </a:p>
         </p:txBody>
       </p:sp>
@@ -18400,16 +18103,40 @@
       </p:grpSpPr>
       <p:sp>
         <p:nvSpPr>
-          <p:cNvPr id="2" name="Text 0"/>
+          <p:cNvPr id="2" name="frame"/>
           <p:cNvSpPr/>
-          <p:nvPr>
-            <p:ph idx="100" type="title" hasCustomPrompt="1"/>
-          </p:nvPr>
-        </p:nvSpPr>
-        <p:spPr>
-          <a:xfrm>
-            <a:off x="457200" y="457200"/>
-            <a:ext cx="8229600" cy="594360"/>
+          <p:nvPr/>
+        </p:nvSpPr>
+        <p:spPr>
+          <a:xfrm>
+            <a:off x="228600" y="137160"/>
+            <a:ext cx="8686800" cy="4526280"/>
+          </a:xfrm>
+          <a:prstGeom prst="rect">
+            <a:avLst/>
+          </a:prstGeom>
+          <a:ln w="12700">
+            <a:solidFill>
+              <a:srgbClr val="B08A4E"/>
+            </a:solidFill>
+            <a:prstDash val="solid"/>
+          </a:ln>
+        </p:spPr>
+        <p:txBody>
+          <a:bodyPr/>
+          <a:p/>
+        </p:txBody>
+      </p:sp>
+      <p:sp>
+        <p:nvSpPr>
+          <p:cNvPr id="3" name="qlabel"/>
+          <p:cNvSpPr txBox="1"/>
+          <p:nvPr/>
+        </p:nvSpPr>
+        <p:spPr>
+          <a:xfrm>
+            <a:off x="457200" y="320040"/>
+            <a:ext cx="8229600" cy="365760"/>
           </a:xfrm>
           <a:prstGeom prst="rect">
             <a:avLst/>
@@ -18418,774 +18145,137 @@
           <a:ln/>
         </p:spPr>
         <p:txBody>
-          <a:bodyPr wrap="square" lIns="0" tIns="0" rIns="0" bIns="0" rtlCol="0" anchor="ctr"/>
-          <a:lstStyle/>
-          <a:p>
-            <a:pPr algn="l" indent="0" marL="0">
-              <a:buNone/>
-            </a:pPr>
-            <a:r>
-              <a:rPr lang="en-US" sz="2400" b="1" dirty="0">
+          <a:bodyPr wrap="square" lIns="0" tIns="0" rIns="0" bIns="0" rtlCol="0" anchor="t"/>
+          <a:lstStyle/>
+          <a:p>
+            <a:pPr algn="ctr" indent="0" marL="0">
+              <a:buNone/>
+            </a:pPr>
+            <a:r>
+              <a:rPr lang="en-US" sz="1300" b="1" dirty="0">
                 <a:solidFill>
                   <a:schemeClr val="accent2"/>
+                </a:solidFill>
+              </a:rPr>
+              <a:t>これから</a:t>
+            </a:r>
+            <a:endParaRPr lang="en-US" sz="1300" dirty="0"/>
+          </a:p>
+        </p:txBody>
+      </p:sp>
+      <p:sp>
+        <p:nvSpPr>
+          <p:cNvPr id="4" name="Text 0"/>
+          <p:cNvSpPr/>
+          <p:nvPr>
+            <p:ph idx="100" type="title" hasCustomPrompt="1"/>
+          </p:nvPr>
+        </p:nvSpPr>
+        <p:spPr>
+          <a:xfrm>
+            <a:off x="914400" y="1554480"/>
+            <a:ext cx="7315200" cy="1554480"/>
+          </a:xfrm>
+          <a:prstGeom prst="rect">
+            <a:avLst/>
+          </a:prstGeom>
+          <a:noFill/>
+          <a:ln/>
+        </p:spPr>
+        <p:txBody>
+          <a:bodyPr wrap="square" rtlCol="0" anchor="ctr"/>
+          <a:lstStyle/>
+          <a:p>
+            <a:pPr algn="ctr" indent="0" marL="0">
+              <a:buNone/>
+            </a:pPr>
+            <a:r>
+              <a:rPr lang="en-US" sz="3200" b="1" dirty="0">
+                <a:solidFill>
+                  <a:schemeClr val="tx2"/>
                 </a:solidFill>
                 <a:latin typeface="Yu Mincho" pitchFamily="34" charset="0"/>
                 <a:ea typeface="Yu Mincho" pitchFamily="34" charset="-122"/>
                 <a:cs typeface="Yu Mincho" pitchFamily="34" charset="-120"/>
               </a:rPr>
-              <a:t>点数をつけ直してみましょう</a:t>
-            </a:r>
-            <a:endParaRPr lang="en-US" sz="2400" dirty="0"/>
-          </a:p>
-        </p:txBody>
-      </p:sp>
-      <p:graphicFrame>
-        <p:nvGraphicFramePr>
-          <p:cNvPr id="46" name="Table 0"/>
-          <p:cNvGraphicFramePr>
-            <a:graphicFrameLocks noGrp="1"/>
-          </p:cNvGraphicFramePr>
-          <p:nvPr>
-            <p:extLst>
-              <p:ext uri="{D42A27DB-BD31-4B8C-83A1-F6EECF244321}">
-                <p14:modId xmlns:p14="http://schemas.microsoft.com/office/powerpoint/2010/main" val="1579011935"/>
-              </p:ext>
-            </p:extLst>
-          </p:nvPr>
-        </p:nvGraphicFramePr>
-        <p:xfrm>
-          <a:off x="457200" y="1280160"/>
-          <a:ext cx="8229600" cy="914400"/>
-        </p:xfrm>
-        <a:graphic>
-          <a:graphicData uri="http://schemas.openxmlformats.org/drawingml/2006/table">
-            <a:tbl>
-              <a:tblPr/>
-              <a:tblGrid>
-                <a:gridCol w="5120640"/>
-                <a:gridCol w="1554480"/>
-                <a:gridCol w="1554480"/>
-              </a:tblGrid>
-              <a:tr h="594360">
-                <a:tc>
-                  <a:txBody>
-                    <a:bodyPr/>
-                    <a:lstStyle/>
-                    <a:p>
-                      <a:pPr algn="ctr" indent="0" marL="0">
-                        <a:buNone/>
-                      </a:pPr>
-                      <a:r>
-                        <a:rPr lang="en-US" sz="1400" b="1" dirty="0">
-                          <a:solidFill>
-                            <a:srgbClr val="FFFFFF"/>
-                          </a:solidFill>
-                        </a:rPr>
-                        <a:t>上位3つの思い込み</a:t>
-                      </a:r>
-                      <a:endParaRPr lang="en-US" sz="1400" dirty="0"/>
-                    </a:p>
-                  </a:txBody>
-                  <a:tcPr marL="91440" marR="91440" marT="45720" marB="45720" anchor="ctr">
-                    <a:lnL w="9525" cap="flat" cmpd="sng" algn="ctr">
-                      <a:solidFill>
-                        <a:srgbClr val="E9D9B6"/>
-                      </a:solidFill>
-                      <a:prstDash val="solid"/>
-                      <a:round/>
-                      <a:headEnd type="none" w="med" len="med"/>
-                      <a:tailEnd type="none" w="med" len="med"/>
-                    </a:lnL>
-                    <a:lnR w="9525" cap="flat" cmpd="sng" algn="ctr">
-                      <a:solidFill>
-                        <a:srgbClr val="E9D9B6"/>
-                      </a:solidFill>
-                      <a:prstDash val="solid"/>
-                      <a:round/>
-                      <a:headEnd type="none" w="med" len="med"/>
-                      <a:tailEnd type="none" w="med" len="med"/>
-                    </a:lnR>
-                    <a:lnT w="9525" cap="flat" cmpd="sng" algn="ctr">
-                      <a:solidFill>
-                        <a:srgbClr val="E9D9B6"/>
-                      </a:solidFill>
-                      <a:prstDash val="solid"/>
-                      <a:round/>
-                      <a:headEnd type="none" w="med" len="med"/>
-                      <a:tailEnd type="none" w="med" len="med"/>
-                    </a:lnT>
-                    <a:lnB w="9525" cap="flat" cmpd="sng" algn="ctr">
-                      <a:solidFill>
-                        <a:srgbClr val="E9D9B6"/>
-                      </a:solidFill>
-                      <a:prstDash val="solid"/>
-                      <a:round/>
-                      <a:headEnd type="none" w="med" len="med"/>
-                      <a:tailEnd type="none" w="med" len="med"/>
-                    </a:lnB>
-                    <a:solidFill>
-                      <a:srgbClr val="B08A4E"/>
-                    </a:solidFill>
-                  </a:tcPr>
-                </a:tc>
-                <a:tc>
-                  <a:txBody>
-                    <a:bodyPr/>
-                    <a:lstStyle/>
-                    <a:p>
-                      <a:pPr algn="ctr" indent="0" marL="0">
-                        <a:buNone/>
-                      </a:pPr>
-                      <a:r>
-                        <a:rPr lang="en-US" sz="1400" b="1" dirty="0">
-                          <a:solidFill>
-                            <a:srgbClr val="FFFFFF"/>
-                          </a:solidFill>
-                        </a:rPr>
-                        <a:t>はじめ</a:t>
-                      </a:r>
-                      <a:endParaRPr lang="en-US" sz="1400" dirty="0"/>
-                    </a:p>
-                  </a:txBody>
-                  <a:tcPr marL="91440" marR="91440" marT="45720" marB="45720" anchor="ctr">
-                    <a:lnL w="9525" cap="flat" cmpd="sng" algn="ctr">
-                      <a:solidFill>
-                        <a:srgbClr val="E9D9B6"/>
-                      </a:solidFill>
-                      <a:prstDash val="solid"/>
-                      <a:round/>
-                      <a:headEnd type="none" w="med" len="med"/>
-                      <a:tailEnd type="none" w="med" len="med"/>
-                    </a:lnL>
-                    <a:lnR w="9525" cap="flat" cmpd="sng" algn="ctr">
-                      <a:solidFill>
-                        <a:srgbClr val="E9D9B6"/>
-                      </a:solidFill>
-                      <a:prstDash val="solid"/>
-                      <a:round/>
-                      <a:headEnd type="none" w="med" len="med"/>
-                      <a:tailEnd type="none" w="med" len="med"/>
-                    </a:lnR>
-                    <a:lnT w="9525" cap="flat" cmpd="sng" algn="ctr">
-                      <a:solidFill>
-                        <a:srgbClr val="E9D9B6"/>
-                      </a:solidFill>
-                      <a:prstDash val="solid"/>
-                      <a:round/>
-                      <a:headEnd type="none" w="med" len="med"/>
-                      <a:tailEnd type="none" w="med" len="med"/>
-                    </a:lnT>
-                    <a:lnB w="9525" cap="flat" cmpd="sng" algn="ctr">
-                      <a:solidFill>
-                        <a:srgbClr val="E9D9B6"/>
-                      </a:solidFill>
-                      <a:prstDash val="solid"/>
-                      <a:round/>
-                      <a:headEnd type="none" w="med" len="med"/>
-                      <a:tailEnd type="none" w="med" len="med"/>
-                    </a:lnB>
-                    <a:solidFill>
-                      <a:srgbClr val="B08A4E"/>
-                    </a:solidFill>
-                  </a:tcPr>
-                </a:tc>
-                <a:tc>
-                  <a:txBody>
-                    <a:bodyPr/>
-                    <a:lstStyle/>
-                    <a:p>
-                      <a:pPr algn="ctr" indent="0" marL="0">
-                        <a:buNone/>
-                      </a:pPr>
-                      <a:r>
-                        <a:rPr lang="en-US" sz="1400" b="1" dirty="0">
-                          <a:solidFill>
-                            <a:srgbClr val="FFFFFF"/>
-                          </a:solidFill>
-                        </a:rPr>
-                        <a:t>いま</a:t>
-                      </a:r>
-                      <a:endParaRPr lang="en-US" sz="1400" dirty="0"/>
-                    </a:p>
-                  </a:txBody>
-                  <a:tcPr marL="91440" marR="91440" marT="45720" marB="45720" anchor="ctr">
-                    <a:lnL w="9525" cap="flat" cmpd="sng" algn="ctr">
-                      <a:solidFill>
-                        <a:srgbClr val="E9D9B6"/>
-                      </a:solidFill>
-                      <a:prstDash val="solid"/>
-                      <a:round/>
-                      <a:headEnd type="none" w="med" len="med"/>
-                      <a:tailEnd type="none" w="med" len="med"/>
-                    </a:lnL>
-                    <a:lnR w="9525" cap="flat" cmpd="sng" algn="ctr">
-                      <a:solidFill>
-                        <a:srgbClr val="E9D9B6"/>
-                      </a:solidFill>
-                      <a:prstDash val="solid"/>
-                      <a:round/>
-                      <a:headEnd type="none" w="med" len="med"/>
-                      <a:tailEnd type="none" w="med" len="med"/>
-                    </a:lnR>
-                    <a:lnT w="9525" cap="flat" cmpd="sng" algn="ctr">
-                      <a:solidFill>
-                        <a:srgbClr val="E9D9B6"/>
-                      </a:solidFill>
-                      <a:prstDash val="solid"/>
-                      <a:round/>
-                      <a:headEnd type="none" w="med" len="med"/>
-                      <a:tailEnd type="none" w="med" len="med"/>
-                    </a:lnT>
-                    <a:lnB w="9525" cap="flat" cmpd="sng" algn="ctr">
-                      <a:solidFill>
-                        <a:srgbClr val="E9D9B6"/>
-                      </a:solidFill>
-                      <a:prstDash val="solid"/>
-                      <a:round/>
-                      <a:headEnd type="none" w="med" len="med"/>
-                      <a:tailEnd type="none" w="med" len="med"/>
-                    </a:lnB>
-                    <a:solidFill>
-                      <a:srgbClr val="B08A4E"/>
-                    </a:solidFill>
-                  </a:tcPr>
-                </a:tc>
-              </a:tr>
-              <a:tr h="594360">
-                <a:tc>
-                  <a:txBody>
-                    <a:bodyPr/>
-                    <a:lstStyle/>
-                    <a:p>
-                      <a:pPr indent="0" marL="0">
-                        <a:buNone/>
-                      </a:pPr>
-                      <a:endParaRPr lang="en-US" sz="1400" dirty="0"/>
-                    </a:p>
-                  </a:txBody>
-                  <a:tcPr marL="91440" marR="91440" marT="45720" marB="45720">
-                    <a:lnL w="9525" cap="flat" cmpd="sng" algn="ctr">
-                      <a:solidFill>
-                        <a:srgbClr val="E9D9B6"/>
-                      </a:solidFill>
-                      <a:prstDash val="solid"/>
-                      <a:round/>
-                      <a:headEnd type="none" w="med" len="med"/>
-                      <a:tailEnd type="none" w="med" len="med"/>
-                    </a:lnL>
-                    <a:lnR w="9525" cap="flat" cmpd="sng" algn="ctr">
-                      <a:solidFill>
-                        <a:srgbClr val="E9D9B6"/>
-                      </a:solidFill>
-                      <a:prstDash val="solid"/>
-                      <a:round/>
-                      <a:headEnd type="none" w="med" len="med"/>
-                      <a:tailEnd type="none" w="med" len="med"/>
-                    </a:lnR>
-                    <a:lnT w="9525" cap="flat" cmpd="sng" algn="ctr">
-                      <a:solidFill>
-                        <a:srgbClr val="E9D9B6"/>
-                      </a:solidFill>
-                      <a:prstDash val="solid"/>
-                      <a:round/>
-                      <a:headEnd type="none" w="med" len="med"/>
-                      <a:tailEnd type="none" w="med" len="med"/>
-                    </a:lnT>
-                    <a:lnB w="9525" cap="flat" cmpd="sng" algn="ctr">
-                      <a:solidFill>
-                        <a:srgbClr val="E9D9B6"/>
-                      </a:solidFill>
-                      <a:prstDash val="solid"/>
-                      <a:round/>
-                      <a:headEnd type="none" w="med" len="med"/>
-                      <a:tailEnd type="none" w="med" len="med"/>
-                    </a:lnB>
-                    <a:solidFill>
-                      <a:srgbClr val="FFFFFF"/>
-                    </a:solidFill>
-                  </a:tcPr>
-                </a:tc>
-                <a:tc>
-                  <a:txBody>
-                    <a:bodyPr/>
-                    <a:lstStyle/>
-                    <a:p>
-                      <a:pPr algn="r" indent="0" marL="0">
-                        <a:buNone/>
-                      </a:pPr>
-                      <a:r>
-                        <a:rPr lang="en-US" sz="1400" dirty="0">
-                          <a:solidFill>
-                            <a:srgbClr val="B08A4E"/>
-                          </a:solidFill>
-                        </a:rPr>
-                        <a:t>／100</a:t>
-                      </a:r>
-                      <a:endParaRPr lang="en-US" sz="1400" dirty="0"/>
-                    </a:p>
-                  </a:txBody>
-                  <a:tcPr marL="91440" marR="91440" marT="45720" marB="45720">
-                    <a:lnL w="9525" cap="flat" cmpd="sng" algn="ctr">
-                      <a:solidFill>
-                        <a:srgbClr val="E9D9B6"/>
-                      </a:solidFill>
-                      <a:prstDash val="solid"/>
-                      <a:round/>
-                      <a:headEnd type="none" w="med" len="med"/>
-                      <a:tailEnd type="none" w="med" len="med"/>
-                    </a:lnL>
-                    <a:lnR w="9525" cap="flat" cmpd="sng" algn="ctr">
-                      <a:solidFill>
-                        <a:srgbClr val="E9D9B6"/>
-                      </a:solidFill>
-                      <a:prstDash val="solid"/>
-                      <a:round/>
-                      <a:headEnd type="none" w="med" len="med"/>
-                      <a:tailEnd type="none" w="med" len="med"/>
-                    </a:lnR>
-                    <a:lnT w="9525" cap="flat" cmpd="sng" algn="ctr">
-                      <a:solidFill>
-                        <a:srgbClr val="E9D9B6"/>
-                      </a:solidFill>
-                      <a:prstDash val="solid"/>
-                      <a:round/>
-                      <a:headEnd type="none" w="med" len="med"/>
-                      <a:tailEnd type="none" w="med" len="med"/>
-                    </a:lnT>
-                    <a:lnB w="9525" cap="flat" cmpd="sng" algn="ctr">
-                      <a:solidFill>
-                        <a:srgbClr val="E9D9B6"/>
-                      </a:solidFill>
-                      <a:prstDash val="solid"/>
-                      <a:round/>
-                      <a:headEnd type="none" w="med" len="med"/>
-                      <a:tailEnd type="none" w="med" len="med"/>
-                    </a:lnB>
-                    <a:solidFill>
-                      <a:srgbClr val="FFFFFF"/>
-                    </a:solidFill>
-                  </a:tcPr>
-                </a:tc>
-                <a:tc>
-                  <a:txBody>
-                    <a:bodyPr/>
-                    <a:lstStyle/>
-                    <a:p>
-                      <a:pPr algn="r" indent="0" marL="0">
-                        <a:buNone/>
-                      </a:pPr>
-                      <a:r>
-                        <a:rPr lang="en-US" sz="1400" dirty="0">
-                          <a:solidFill>
-                            <a:srgbClr val="B08A4E"/>
-                          </a:solidFill>
-                        </a:rPr>
-                        <a:t>／100</a:t>
-                      </a:r>
-                      <a:endParaRPr lang="en-US" sz="1400" dirty="0"/>
-                    </a:p>
-                  </a:txBody>
-                  <a:tcPr marL="91440" marR="91440" marT="45720" marB="45720">
-                    <a:lnL w="9525" cap="flat" cmpd="sng" algn="ctr">
-                      <a:solidFill>
-                        <a:srgbClr val="E9D9B6"/>
-                      </a:solidFill>
-                      <a:prstDash val="solid"/>
-                      <a:round/>
-                      <a:headEnd type="none" w="med" len="med"/>
-                      <a:tailEnd type="none" w="med" len="med"/>
-                    </a:lnL>
-                    <a:lnR w="9525" cap="flat" cmpd="sng" algn="ctr">
-                      <a:solidFill>
-                        <a:srgbClr val="E9D9B6"/>
-                      </a:solidFill>
-                      <a:prstDash val="solid"/>
-                      <a:round/>
-                      <a:headEnd type="none" w="med" len="med"/>
-                      <a:tailEnd type="none" w="med" len="med"/>
-                    </a:lnR>
-                    <a:lnT w="9525" cap="flat" cmpd="sng" algn="ctr">
-                      <a:solidFill>
-                        <a:srgbClr val="E9D9B6"/>
-                      </a:solidFill>
-                      <a:prstDash val="solid"/>
-                      <a:round/>
-                      <a:headEnd type="none" w="med" len="med"/>
-                      <a:tailEnd type="none" w="med" len="med"/>
-                    </a:lnT>
-                    <a:lnB w="9525" cap="flat" cmpd="sng" algn="ctr">
-                      <a:solidFill>
-                        <a:srgbClr val="E9D9B6"/>
-                      </a:solidFill>
-                      <a:prstDash val="solid"/>
-                      <a:round/>
-                      <a:headEnd type="none" w="med" len="med"/>
-                      <a:tailEnd type="none" w="med" len="med"/>
-                    </a:lnB>
-                    <a:solidFill>
-                      <a:srgbClr val="FFFFFF"/>
-                    </a:solidFill>
-                  </a:tcPr>
-                </a:tc>
-              </a:tr>
-              <a:tr h="594360">
-                <a:tc>
-                  <a:txBody>
-                    <a:bodyPr/>
-                    <a:lstStyle/>
-                    <a:p>
-                      <a:pPr indent="0" marL="0">
-                        <a:buNone/>
-                      </a:pPr>
-                      <a:endParaRPr lang="en-US" sz="1400" dirty="0"/>
-                    </a:p>
-                  </a:txBody>
-                  <a:tcPr marL="91440" marR="91440" marT="45720" marB="45720">
-                    <a:lnL w="9525" cap="flat" cmpd="sng" algn="ctr">
-                      <a:solidFill>
-                        <a:srgbClr val="E9D9B6"/>
-                      </a:solidFill>
-                      <a:prstDash val="solid"/>
-                      <a:round/>
-                      <a:headEnd type="none" w="med" len="med"/>
-                      <a:tailEnd type="none" w="med" len="med"/>
-                    </a:lnL>
-                    <a:lnR w="9525" cap="flat" cmpd="sng" algn="ctr">
-                      <a:solidFill>
-                        <a:srgbClr val="E9D9B6"/>
-                      </a:solidFill>
-                      <a:prstDash val="solid"/>
-                      <a:round/>
-                      <a:headEnd type="none" w="med" len="med"/>
-                      <a:tailEnd type="none" w="med" len="med"/>
-                    </a:lnR>
-                    <a:lnT w="9525" cap="flat" cmpd="sng" algn="ctr">
-                      <a:solidFill>
-                        <a:srgbClr val="E9D9B6"/>
-                      </a:solidFill>
-                      <a:prstDash val="solid"/>
-                      <a:round/>
-                      <a:headEnd type="none" w="med" len="med"/>
-                      <a:tailEnd type="none" w="med" len="med"/>
-                    </a:lnT>
-                    <a:lnB w="9525" cap="flat" cmpd="sng" algn="ctr">
-                      <a:solidFill>
-                        <a:srgbClr val="E9D9B6"/>
-                      </a:solidFill>
-                      <a:prstDash val="solid"/>
-                      <a:round/>
-                      <a:headEnd type="none" w="med" len="med"/>
-                      <a:tailEnd type="none" w="med" len="med"/>
-                    </a:lnB>
-                    <a:solidFill>
-                      <a:srgbClr val="FFFFFF"/>
-                    </a:solidFill>
-                  </a:tcPr>
-                </a:tc>
-                <a:tc>
-                  <a:txBody>
-                    <a:bodyPr/>
-                    <a:lstStyle/>
-                    <a:p>
-                      <a:pPr algn="r" indent="0" marL="0">
-                        <a:buNone/>
-                      </a:pPr>
-                      <a:r>
-                        <a:rPr lang="en-US" sz="1400" dirty="0">
-                          <a:solidFill>
-                            <a:srgbClr val="B08A4E"/>
-                          </a:solidFill>
-                        </a:rPr>
-                        <a:t>／100</a:t>
-                      </a:r>
-                      <a:endParaRPr lang="en-US" sz="1400" dirty="0"/>
-                    </a:p>
-                  </a:txBody>
-                  <a:tcPr marL="91440" marR="91440" marT="45720" marB="45720">
-                    <a:lnL w="9525" cap="flat" cmpd="sng" algn="ctr">
-                      <a:solidFill>
-                        <a:srgbClr val="E9D9B6"/>
-                      </a:solidFill>
-                      <a:prstDash val="solid"/>
-                      <a:round/>
-                      <a:headEnd type="none" w="med" len="med"/>
-                      <a:tailEnd type="none" w="med" len="med"/>
-                    </a:lnL>
-                    <a:lnR w="9525" cap="flat" cmpd="sng" algn="ctr">
-                      <a:solidFill>
-                        <a:srgbClr val="E9D9B6"/>
-                      </a:solidFill>
-                      <a:prstDash val="solid"/>
-                      <a:round/>
-                      <a:headEnd type="none" w="med" len="med"/>
-                      <a:tailEnd type="none" w="med" len="med"/>
-                    </a:lnR>
-                    <a:lnT w="9525" cap="flat" cmpd="sng" algn="ctr">
-                      <a:solidFill>
-                        <a:srgbClr val="E9D9B6"/>
-                      </a:solidFill>
-                      <a:prstDash val="solid"/>
-                      <a:round/>
-                      <a:headEnd type="none" w="med" len="med"/>
-                      <a:tailEnd type="none" w="med" len="med"/>
-                    </a:lnT>
-                    <a:lnB w="9525" cap="flat" cmpd="sng" algn="ctr">
-                      <a:solidFill>
-                        <a:srgbClr val="E9D9B6"/>
-                      </a:solidFill>
-                      <a:prstDash val="solid"/>
-                      <a:round/>
-                      <a:headEnd type="none" w="med" len="med"/>
-                      <a:tailEnd type="none" w="med" len="med"/>
-                    </a:lnB>
-                    <a:solidFill>
-                      <a:srgbClr val="FFFFFF"/>
-                    </a:solidFill>
-                  </a:tcPr>
-                </a:tc>
-                <a:tc>
-                  <a:txBody>
-                    <a:bodyPr/>
-                    <a:lstStyle/>
-                    <a:p>
-                      <a:pPr algn="r" indent="0" marL="0">
-                        <a:buNone/>
-                      </a:pPr>
-                      <a:r>
-                        <a:rPr lang="en-US" sz="1400" dirty="0">
-                          <a:solidFill>
-                            <a:srgbClr val="B08A4E"/>
-                          </a:solidFill>
-                        </a:rPr>
-                        <a:t>／100</a:t>
-                      </a:r>
-                      <a:endParaRPr lang="en-US" sz="1400" dirty="0"/>
-                    </a:p>
-                  </a:txBody>
-                  <a:tcPr marL="91440" marR="91440" marT="45720" marB="45720">
-                    <a:lnL w="9525" cap="flat" cmpd="sng" algn="ctr">
-                      <a:solidFill>
-                        <a:srgbClr val="E9D9B6"/>
-                      </a:solidFill>
-                      <a:prstDash val="solid"/>
-                      <a:round/>
-                      <a:headEnd type="none" w="med" len="med"/>
-                      <a:tailEnd type="none" w="med" len="med"/>
-                    </a:lnL>
-                    <a:lnR w="9525" cap="flat" cmpd="sng" algn="ctr">
-                      <a:solidFill>
-                        <a:srgbClr val="E9D9B6"/>
-                      </a:solidFill>
-                      <a:prstDash val="solid"/>
-                      <a:round/>
-                      <a:headEnd type="none" w="med" len="med"/>
-                      <a:tailEnd type="none" w="med" len="med"/>
-                    </a:lnR>
-                    <a:lnT w="9525" cap="flat" cmpd="sng" algn="ctr">
-                      <a:solidFill>
-                        <a:srgbClr val="E9D9B6"/>
-                      </a:solidFill>
-                      <a:prstDash val="solid"/>
-                      <a:round/>
-                      <a:headEnd type="none" w="med" len="med"/>
-                      <a:tailEnd type="none" w="med" len="med"/>
-                    </a:lnT>
-                    <a:lnB w="9525" cap="flat" cmpd="sng" algn="ctr">
-                      <a:solidFill>
-                        <a:srgbClr val="E9D9B6"/>
-                      </a:solidFill>
-                      <a:prstDash val="solid"/>
-                      <a:round/>
-                      <a:headEnd type="none" w="med" len="med"/>
-                      <a:tailEnd type="none" w="med" len="med"/>
-                    </a:lnB>
-                    <a:solidFill>
-                      <a:srgbClr val="FFFFFF"/>
-                    </a:solidFill>
-                  </a:tcPr>
-                </a:tc>
-              </a:tr>
-              <a:tr h="594360">
-                <a:tc>
-                  <a:txBody>
-                    <a:bodyPr/>
-                    <a:lstStyle/>
-                    <a:p>
-                      <a:pPr indent="0" marL="0">
-                        <a:buNone/>
-                      </a:pPr>
-                      <a:endParaRPr lang="en-US" sz="1400" dirty="0"/>
-                    </a:p>
-                  </a:txBody>
-                  <a:tcPr marL="91440" marR="91440" marT="45720" marB="45720">
-                    <a:lnL w="9525" cap="flat" cmpd="sng" algn="ctr">
-                      <a:solidFill>
-                        <a:srgbClr val="E9D9B6"/>
-                      </a:solidFill>
-                      <a:prstDash val="solid"/>
-                      <a:round/>
-                      <a:headEnd type="none" w="med" len="med"/>
-                      <a:tailEnd type="none" w="med" len="med"/>
-                    </a:lnL>
-                    <a:lnR w="9525" cap="flat" cmpd="sng" algn="ctr">
-                      <a:solidFill>
-                        <a:srgbClr val="E9D9B6"/>
-                      </a:solidFill>
-                      <a:prstDash val="solid"/>
-                      <a:round/>
-                      <a:headEnd type="none" w="med" len="med"/>
-                      <a:tailEnd type="none" w="med" len="med"/>
-                    </a:lnR>
-                    <a:lnT w="9525" cap="flat" cmpd="sng" algn="ctr">
-                      <a:solidFill>
-                        <a:srgbClr val="E9D9B6"/>
-                      </a:solidFill>
-                      <a:prstDash val="solid"/>
-                      <a:round/>
-                      <a:headEnd type="none" w="med" len="med"/>
-                      <a:tailEnd type="none" w="med" len="med"/>
-                    </a:lnT>
-                    <a:lnB w="9525" cap="flat" cmpd="sng" algn="ctr">
-                      <a:solidFill>
-                        <a:srgbClr val="E9D9B6"/>
-                      </a:solidFill>
-                      <a:prstDash val="solid"/>
-                      <a:round/>
-                      <a:headEnd type="none" w="med" len="med"/>
-                      <a:tailEnd type="none" w="med" len="med"/>
-                    </a:lnB>
-                    <a:solidFill>
-                      <a:srgbClr val="FFFFFF"/>
-                    </a:solidFill>
-                  </a:tcPr>
-                </a:tc>
-                <a:tc>
-                  <a:txBody>
-                    <a:bodyPr/>
-                    <a:lstStyle/>
-                    <a:p>
-                      <a:pPr algn="r" indent="0" marL="0">
-                        <a:buNone/>
-                      </a:pPr>
-                      <a:r>
-                        <a:rPr lang="en-US" sz="1400" dirty="0">
-                          <a:solidFill>
-                            <a:srgbClr val="B08A4E"/>
-                          </a:solidFill>
-                        </a:rPr>
-                        <a:t>／100</a:t>
-                      </a:r>
-                      <a:endParaRPr lang="en-US" sz="1400" dirty="0"/>
-                    </a:p>
-                  </a:txBody>
-                  <a:tcPr marL="91440" marR="91440" marT="45720" marB="45720">
-                    <a:lnL w="9525" cap="flat" cmpd="sng" algn="ctr">
-                      <a:solidFill>
-                        <a:srgbClr val="E9D9B6"/>
-                      </a:solidFill>
-                      <a:prstDash val="solid"/>
-                      <a:round/>
-                      <a:headEnd type="none" w="med" len="med"/>
-                      <a:tailEnd type="none" w="med" len="med"/>
-                    </a:lnL>
-                    <a:lnR w="9525" cap="flat" cmpd="sng" algn="ctr">
-                      <a:solidFill>
-                        <a:srgbClr val="E9D9B6"/>
-                      </a:solidFill>
-                      <a:prstDash val="solid"/>
-                      <a:round/>
-                      <a:headEnd type="none" w="med" len="med"/>
-                      <a:tailEnd type="none" w="med" len="med"/>
-                    </a:lnR>
-                    <a:lnT w="9525" cap="flat" cmpd="sng" algn="ctr">
-                      <a:solidFill>
-                        <a:srgbClr val="E9D9B6"/>
-                      </a:solidFill>
-                      <a:prstDash val="solid"/>
-                      <a:round/>
-                      <a:headEnd type="none" w="med" len="med"/>
-                      <a:tailEnd type="none" w="med" len="med"/>
-                    </a:lnT>
-                    <a:lnB w="9525" cap="flat" cmpd="sng" algn="ctr">
-                      <a:solidFill>
-                        <a:srgbClr val="E9D9B6"/>
-                      </a:solidFill>
-                      <a:prstDash val="solid"/>
-                      <a:round/>
-                      <a:headEnd type="none" w="med" len="med"/>
-                      <a:tailEnd type="none" w="med" len="med"/>
-                    </a:lnB>
-                    <a:solidFill>
-                      <a:srgbClr val="FFFFFF"/>
-                    </a:solidFill>
-                  </a:tcPr>
-                </a:tc>
-                <a:tc>
-                  <a:txBody>
-                    <a:bodyPr/>
-                    <a:lstStyle/>
-                    <a:p>
-                      <a:pPr algn="r" indent="0" marL="0">
-                        <a:buNone/>
-                      </a:pPr>
-                      <a:r>
-                        <a:rPr lang="en-US" sz="1400" dirty="0">
-                          <a:solidFill>
-                            <a:srgbClr val="B08A4E"/>
-                          </a:solidFill>
-                        </a:rPr>
-                        <a:t>／100</a:t>
-                      </a:r>
-                      <a:endParaRPr lang="en-US" sz="1400" dirty="0"/>
-                    </a:p>
-                  </a:txBody>
-                  <a:tcPr marL="91440" marR="91440" marT="45720" marB="45720">
-                    <a:lnL w="9525" cap="flat" cmpd="sng" algn="ctr">
-                      <a:solidFill>
-                        <a:srgbClr val="E9D9B6"/>
-                      </a:solidFill>
-                      <a:prstDash val="solid"/>
-                      <a:round/>
-                      <a:headEnd type="none" w="med" len="med"/>
-                      <a:tailEnd type="none" w="med" len="med"/>
-                    </a:lnL>
-                    <a:lnR w="9525" cap="flat" cmpd="sng" algn="ctr">
-                      <a:solidFill>
-                        <a:srgbClr val="E9D9B6"/>
-                      </a:solidFill>
-                      <a:prstDash val="solid"/>
-                      <a:round/>
-                      <a:headEnd type="none" w="med" len="med"/>
-                      <a:tailEnd type="none" w="med" len="med"/>
-                    </a:lnR>
-                    <a:lnT w="9525" cap="flat" cmpd="sng" algn="ctr">
-                      <a:solidFill>
-                        <a:srgbClr val="E9D9B6"/>
-                      </a:solidFill>
-                      <a:prstDash val="solid"/>
-                      <a:round/>
-                      <a:headEnd type="none" w="med" len="med"/>
-                      <a:tailEnd type="none" w="med" len="med"/>
-                    </a:lnT>
-                    <a:lnB w="9525" cap="flat" cmpd="sng" algn="ctr">
-                      <a:solidFill>
-                        <a:srgbClr val="E9D9B6"/>
-                      </a:solidFill>
-                      <a:prstDash val="solid"/>
-                      <a:round/>
-                      <a:headEnd type="none" w="med" len="med"/>
-                      <a:tailEnd type="none" w="med" len="med"/>
-                    </a:lnB>
-                    <a:solidFill>
-                      <a:srgbClr val="FFFFFF"/>
-                    </a:solidFill>
-                  </a:tcPr>
-                </a:tc>
-              </a:tr>
-            </a:tbl>
-          </a:graphicData>
-        </a:graphic>
-      </p:graphicFrame>
+              <a:t>次に同じ感情が出てきたら、</a:t>
+            </a:r>
+            <a:endParaRPr lang="en-US" sz="3200" dirty="0"/>
+          </a:p>
+          <a:p>
+            <a:pPr algn="ctr" indent="0" marL="0">
+              <a:buNone/>
+            </a:pPr>
+            <a:r>
+              <a:rPr lang="en-US" sz="3200" b="1" dirty="0">
+                <a:solidFill>
+                  <a:schemeClr val="tx2"/>
+                </a:solidFill>
+                <a:latin typeface="Yu Mincho" pitchFamily="34" charset="0"/>
+                <a:ea typeface="Yu Mincho" pitchFamily="34" charset="-122"/>
+                <a:cs typeface="Yu Mincho" pitchFamily="34" charset="-120"/>
+              </a:rPr>
+              <a:t>自分にどんな言葉を</a:t>
+            </a:r>
+            <a:endParaRPr lang="en-US" sz="3200" dirty="0"/>
+          </a:p>
+          <a:p>
+            <a:pPr algn="ctr" indent="0" marL="0">
+              <a:buNone/>
+            </a:pPr>
+            <a:r>
+              <a:rPr lang="en-US" sz="3200" b="1" dirty="0">
+                <a:solidFill>
+                  <a:schemeClr val="tx2"/>
+                </a:solidFill>
+                <a:latin typeface="Yu Mincho" pitchFamily="34" charset="0"/>
+                <a:ea typeface="Yu Mincho" pitchFamily="34" charset="-122"/>
+                <a:cs typeface="Yu Mincho" pitchFamily="34" charset="-120"/>
+              </a:rPr>
+              <a:t>かけてあげたいですか？</a:t>
+            </a:r>
+            <a:endParaRPr lang="en-US" sz="3200" dirty="0"/>
+          </a:p>
+        </p:txBody>
+      </p:sp>
+      <p:sp>
+        <p:nvSpPr>
+          <p:cNvPr id="5" name="Text 0"/>
+          <p:cNvSpPr/>
+          <p:nvPr>
+            <p:ph idx="101" type="body" hasCustomPrompt="1"/>
+          </p:nvPr>
+        </p:nvSpPr>
+        <p:spPr>
+          <a:xfrm>
+            <a:off x="914400" y="3200400"/>
+            <a:ext cx="7315200" cy="731520"/>
+          </a:xfrm>
+          <a:prstGeom prst="rect">
+            <a:avLst/>
+          </a:prstGeom>
+          <a:noFill/>
+          <a:ln/>
+        </p:spPr>
+        <p:txBody>
+          <a:bodyPr wrap="square" rtlCol="0" anchor="t"/>
+          <a:lstStyle/>
+          <a:p>
+            <a:pPr algn="ctr" indent="0" marL="0">
+              <a:buNone/>
+            </a:pPr>
+            <a:r>
+              <a:rPr lang="en-US" sz="1500" dirty="0">
+                <a:solidFill>
+                  <a:schemeClr val="accent2"/>
+                </a:solidFill>
+              </a:rPr>
+              <a:t>気づいたら、責めずに見つめる。そして、今の自分で選び直す</a:t>
+            </a:r>
+            <a:endParaRPr lang="en-US" sz="1500" dirty="0"/>
+          </a:p>
+        </p:txBody>
+      </p:sp>
       <p:sp>
         <p:nvSpPr>
           <p:cNvPr id="25" name="Slide Number Placeholder 0"/>
@@ -19242,1012 +18332,6 @@
 <file path=ppt/slides/slide46.xml><?xml version="1.0" encoding="utf-8"?>
 <p:sld xmlns:a="http://schemas.openxmlformats.org/drawingml/2006/main" xmlns:r="http://schemas.openxmlformats.org/officeDocument/2006/relationships" xmlns:p="http://schemas.openxmlformats.org/presentationml/2006/main">
   <p:cSld name="Slide 46">
-    <p:spTree>
-      <p:nvGrpSpPr>
-        <p:cNvPr id="1" name=""/>
-        <p:cNvGrpSpPr/>
-        <p:nvPr/>
-      </p:nvGrpSpPr>
-      <p:grpSpPr>
-        <a:xfrm>
-          <a:off x="0" y="0"/>
-          <a:ext cx="0" cy="0"/>
-          <a:chOff x="0" y="0"/>
-          <a:chExt cx="0" cy="0"/>
-        </a:xfrm>
-      </p:grpSpPr>
-      <p:sp>
-        <p:nvSpPr>
-          <p:cNvPr id="2" name="frame"/>
-          <p:cNvSpPr/>
-          <p:nvPr/>
-        </p:nvSpPr>
-        <p:spPr>
-          <a:xfrm>
-            <a:off x="228600" y="137160"/>
-            <a:ext cx="8686800" cy="4526280"/>
-          </a:xfrm>
-          <a:prstGeom prst="rect">
-            <a:avLst/>
-          </a:prstGeom>
-          <a:ln w="12700">
-            <a:solidFill>
-              <a:srgbClr val="B08A4E"/>
-            </a:solidFill>
-            <a:prstDash val="solid"/>
-          </a:ln>
-        </p:spPr>
-        <p:txBody>
-          <a:bodyPr/>
-          <a:p/>
-        </p:txBody>
-      </p:sp>
-      <p:sp>
-        <p:nvSpPr>
-          <p:cNvPr id="3" name="qlabel"/>
-          <p:cNvSpPr txBox="1"/>
-          <p:nvPr/>
-        </p:nvSpPr>
-        <p:spPr>
-          <a:xfrm>
-            <a:off x="457200" y="320040"/>
-            <a:ext cx="8229600" cy="365760"/>
-          </a:xfrm>
-          <a:prstGeom prst="rect">
-            <a:avLst/>
-          </a:prstGeom>
-          <a:noFill/>
-          <a:ln/>
-        </p:spPr>
-        <p:txBody>
-          <a:bodyPr wrap="square" lIns="0" tIns="0" rIns="0" bIns="0" rtlCol="0" anchor="t"/>
-          <a:lstStyle/>
-          <a:p>
-            <a:pPr algn="ctr" indent="0" marL="0">
-              <a:buNone/>
-            </a:pPr>
-            <a:r>
-              <a:rPr lang="en-US" sz="1300" b="1" dirty="0">
-                <a:solidFill>
-                  <a:schemeClr val="accent2"/>
-                </a:solidFill>
-              </a:rPr>
-              <a:t>ふり返り</a:t>
-            </a:r>
-            <a:endParaRPr lang="en-US" sz="1300" dirty="0"/>
-          </a:p>
-        </p:txBody>
-      </p:sp>
-      <p:sp>
-        <p:nvSpPr>
-          <p:cNvPr id="4" name="Text 0"/>
-          <p:cNvSpPr/>
-          <p:nvPr>
-            <p:ph idx="100" type="title" hasCustomPrompt="1"/>
-          </p:nvPr>
-        </p:nvSpPr>
-        <p:spPr>
-          <a:xfrm>
-            <a:off x="914400" y="1554480"/>
-            <a:ext cx="7315200" cy="1554480"/>
-          </a:xfrm>
-          <a:prstGeom prst="rect">
-            <a:avLst/>
-          </a:prstGeom>
-          <a:noFill/>
-          <a:ln/>
-        </p:spPr>
-        <p:txBody>
-          <a:bodyPr wrap="square" rtlCol="0" anchor="ctr"/>
-          <a:lstStyle/>
-          <a:p>
-            <a:pPr algn="ctr" indent="0" marL="0">
-              <a:buNone/>
-            </a:pPr>
-            <a:r>
-              <a:rPr lang="en-US" sz="3200" b="1" dirty="0">
-                <a:solidFill>
-                  <a:schemeClr val="tx2"/>
-                </a:solidFill>
-                <a:latin typeface="Yu Mincho" pitchFamily="34" charset="0"/>
-                <a:ea typeface="Yu Mincho" pitchFamily="34" charset="-122"/>
-                <a:cs typeface="Yu Mincho" pitchFamily="34" charset="-120"/>
-              </a:rPr>
-              <a:t>今日、いちばん</a:t>
-            </a:r>
-            <a:endParaRPr lang="en-US" sz="3200" dirty="0"/>
-          </a:p>
-          <a:p>
-            <a:pPr algn="ctr" indent="0" marL="0">
-              <a:buNone/>
-            </a:pPr>
-            <a:r>
-              <a:rPr lang="en-US" sz="3200" b="1" dirty="0">
-                <a:solidFill>
-                  <a:schemeClr val="tx2"/>
-                </a:solidFill>
-                <a:latin typeface="Yu Mincho" pitchFamily="34" charset="0"/>
-                <a:ea typeface="Yu Mincho" pitchFamily="34" charset="-122"/>
-                <a:cs typeface="Yu Mincho" pitchFamily="34" charset="-120"/>
-              </a:rPr>
-              <a:t>変わったと感じることは</a:t>
-            </a:r>
-            <a:endParaRPr lang="en-US" sz="3200" dirty="0"/>
-          </a:p>
-          <a:p>
-            <a:pPr algn="ctr" indent="0" marL="0">
-              <a:buNone/>
-            </a:pPr>
-            <a:r>
-              <a:rPr lang="en-US" sz="3200" b="1" dirty="0">
-                <a:solidFill>
-                  <a:schemeClr val="tx2"/>
-                </a:solidFill>
-                <a:latin typeface="Yu Mincho" pitchFamily="34" charset="0"/>
-                <a:ea typeface="Yu Mincho" pitchFamily="34" charset="-122"/>
-                <a:cs typeface="Yu Mincho" pitchFamily="34" charset="-120"/>
-              </a:rPr>
-              <a:t>何ですか？</a:t>
-            </a:r>
-            <a:endParaRPr lang="en-US" sz="3200" dirty="0"/>
-          </a:p>
-        </p:txBody>
-      </p:sp>
-      <p:sp>
-        <p:nvSpPr>
-          <p:cNvPr id="25" name="Slide Number Placeholder 0"/>
-          <p:cNvSpPr>
-            <a:spLocks noGrp="1"/>
-          </p:cNvSpPr>
-          <p:nvPr>
-            <p:ph type="sldNum" sz="quarter" idx="4294967295"/>
-          </p:nvPr>
-        </p:nvSpPr>
-        <p:spPr>
-          <a:xfrm>
-            <a:off x="8229600" y="4754880"/>
-            <a:ext cx="457200" cy="274320"/>
-          </a:xfrm>
-          <a:prstGeom prst="rect">
-            <a:avLst/>
-          </a:prstGeom>
-          <a:extLst>
-            <a:ext uri="{C572A759-6A51-4108-AA02-DFA0A04FC94B}">
-              <ma14:wrappingTextBoxFlag xmlns:ma14="http://schemas.microsoft.com/office/mac/drawingml/2011/main" val="0"/>
-            </a:ext>
-          </a:extLst>
-        </p:spPr>
-        <p:txBody>
-          <a:bodyPr/>
-          <a:lstStyle>
-            <a:lvl1pPr>
-              <a:defRPr sz="900">
-                <a:solidFill>
-                  <a:srgbClr val="B08A4E"/>
-                </a:solidFill>
-              </a:defRPr>
-            </a:lvl1pPr>
-          </a:lstStyle>
-          <a:p>
-            <a:pPr algn="r"/>
-            <a:fld id="{F7021451-1387-4CA6-816F-3879F97B5CBC}" type="slidenum">
-              <a:rPr b="0" lang="en-US"/>
-              <a:t>46</a:t>
-            </a:fld>
-            <a:endParaRPr lang="en-US"/>
-          </a:p>
-        </p:txBody>
-      </p:sp>
-    </p:spTree>
-  </p:cSld>
-  <p:clrMapOvr>
-    <a:masterClrMapping/>
-  </p:clrMapOvr>
-</p:sld>
-</file>
-
-<file path=ppt/slides/slide47.xml><?xml version="1.0" encoding="utf-8"?>
-<p:sld xmlns:a="http://schemas.openxmlformats.org/drawingml/2006/main" xmlns:r="http://schemas.openxmlformats.org/officeDocument/2006/relationships" xmlns:p="http://schemas.openxmlformats.org/presentationml/2006/main">
-  <p:cSld name="Slide 47">
-    <p:spTree>
-      <p:nvGrpSpPr>
-        <p:cNvPr id="1" name=""/>
-        <p:cNvGrpSpPr/>
-        <p:nvPr/>
-      </p:nvGrpSpPr>
-      <p:grpSpPr>
-        <a:xfrm>
-          <a:off x="0" y="0"/>
-          <a:ext cx="0" cy="0"/>
-          <a:chOff x="0" y="0"/>
-          <a:chExt cx="0" cy="0"/>
-        </a:xfrm>
-      </p:grpSpPr>
-      <p:sp>
-        <p:nvSpPr>
-          <p:cNvPr id="2" name="Text 0"/>
-          <p:cNvSpPr/>
-          <p:nvPr>
-            <p:ph idx="100" type="title" hasCustomPrompt="1"/>
-          </p:nvPr>
-        </p:nvSpPr>
-        <p:spPr>
-          <a:xfrm>
-            <a:off x="457200" y="457200"/>
-            <a:ext cx="8229600" cy="594360"/>
-          </a:xfrm>
-          <a:prstGeom prst="rect">
-            <a:avLst/>
-          </a:prstGeom>
-          <a:noFill/>
-          <a:ln/>
-        </p:spPr>
-        <p:txBody>
-          <a:bodyPr wrap="square" lIns="0" tIns="0" rIns="0" bIns="0" rtlCol="0" anchor="ctr"/>
-          <a:lstStyle/>
-          <a:p>
-            <a:pPr algn="l" indent="0" marL="0">
-              <a:buNone/>
-            </a:pPr>
-            <a:r>
-              <a:rPr lang="en-US" sz="2400" b="1" dirty="0">
-                <a:solidFill>
-                  <a:schemeClr val="accent2"/>
-                </a:solidFill>
-                <a:latin typeface="Yu Mincho" pitchFamily="34" charset="0"/>
-                <a:ea typeface="Yu Mincho" pitchFamily="34" charset="-122"/>
-                <a:cs typeface="Yu Mincho" pitchFamily="34" charset="-120"/>
-              </a:rPr>
-              <a:t>これからのお金との関係</a:t>
-            </a:r>
-            <a:endParaRPr lang="en-US" sz="2400" dirty="0"/>
-          </a:p>
-        </p:txBody>
-      </p:sp>
-      <p:sp>
-        <p:nvSpPr>
-          <p:cNvPr id="3" name="rel_lead"/>
-          <p:cNvSpPr txBox="1"/>
-          <p:nvPr/>
-        </p:nvSpPr>
-        <p:spPr>
-          <a:xfrm>
-            <a:off x="457200" y="1097280"/>
-            <a:ext cx="8229600" cy="411480"/>
-          </a:xfrm>
-          <a:prstGeom prst="rect">
-            <a:avLst/>
-          </a:prstGeom>
-          <a:noFill/>
-          <a:ln/>
-        </p:spPr>
-        <p:txBody>
-          <a:bodyPr wrap="square" lIns="0" tIns="0" rIns="0" bIns="0" rtlCol="0" anchor="t"/>
-          <a:lstStyle/>
-          <a:p>
-            <a:pPr indent="0" marL="0">
-              <a:buNone/>
-            </a:pPr>
-            <a:r>
-              <a:rPr lang="en-US" sz="1600" dirty="0">
-                <a:solidFill>
-                  <a:schemeClr val="tx1"/>
-                </a:solidFill>
-              </a:rPr>
-              <a:t>お金について、これからどんな気持ちで選択したいですか？</a:t>
-            </a:r>
-            <a:endParaRPr lang="en-US" sz="1600" dirty="0"/>
-          </a:p>
-        </p:txBody>
-      </p:sp>
-      <p:sp>
-        <p:nvSpPr>
-          <p:cNvPr id="4" name="rel_card0"/>
-          <p:cNvSpPr/>
-          <p:nvPr/>
-        </p:nvSpPr>
-        <p:spPr>
-          <a:xfrm>
-            <a:off x="457200" y="1691640"/>
-            <a:ext cx="2596896" cy="2697480"/>
-          </a:xfrm>
-          <a:prstGeom prst="roundRect">
-            <a:avLst>
-              <a:gd name="adj" fmla="val 4225"/>
-            </a:avLst>
-          </a:prstGeom>
-          <a:solidFill>
-            <a:srgbClr val="EFE8F6"/>
-          </a:solidFill>
-          <a:ln w="9525">
-            <a:solidFill>
-              <a:srgbClr val="E9D9B6"/>
-            </a:solidFill>
-            <a:prstDash val="solid"/>
-          </a:ln>
-        </p:spPr>
-        <p:txBody>
-          <a:bodyPr/>
-          <a:p/>
-        </p:txBody>
-      </p:sp>
-      <p:sp>
-        <p:nvSpPr>
-          <p:cNvPr id="5" name="rel_head0"/>
-          <p:cNvSpPr txBox="1"/>
-          <p:nvPr/>
-        </p:nvSpPr>
-        <p:spPr>
-          <a:xfrm>
-            <a:off x="594360" y="1810512"/>
-            <a:ext cx="2331720" cy="365760"/>
-          </a:xfrm>
-          <a:prstGeom prst="rect">
-            <a:avLst/>
-          </a:prstGeom>
-          <a:noFill/>
-          <a:ln/>
-        </p:spPr>
-        <p:txBody>
-          <a:bodyPr wrap="square" lIns="1016" tIns="1016" rIns="1016" bIns="1016" rtlCol="0" anchor="t"/>
-          <a:lstStyle/>
-          <a:p>
-            <a:pPr indent="0" marL="0">
-              <a:buNone/>
-            </a:pPr>
-            <a:r>
-              <a:rPr lang="en-US" sz="1700" b="1" dirty="0">
-                <a:solidFill>
-                  <a:schemeClr val="accent2"/>
-                </a:solidFill>
-              </a:rPr>
-              <a:t>これからの気持ち</a:t>
-            </a:r>
-            <a:endParaRPr lang="en-US" sz="1700" dirty="0"/>
-          </a:p>
-        </p:txBody>
-      </p:sp>
-      <p:sp>
-        <p:nvSpPr>
-          <p:cNvPr id="6" name="rel_hint0"/>
-          <p:cNvSpPr txBox="1"/>
-          <p:nvPr/>
-        </p:nvSpPr>
-        <p:spPr>
-          <a:xfrm>
-            <a:off x="594360" y="2194560"/>
-            <a:ext cx="2331720" cy="548640"/>
-          </a:xfrm>
-          <a:prstGeom prst="rect">
-            <a:avLst/>
-          </a:prstGeom>
-          <a:noFill/>
-          <a:ln/>
-        </p:spPr>
-        <p:txBody>
-          <a:bodyPr wrap="square" lIns="1016" tIns="1016" rIns="1016" bIns="1016" rtlCol="0" anchor="t"/>
-          <a:lstStyle/>
-          <a:p>
-            <a:pPr indent="0" marL="0">
-              <a:buNone/>
-            </a:pPr>
-            <a:r>
-              <a:rPr lang="en-US" sz="1300" dirty="0">
-                <a:solidFill>
-                  <a:schemeClr val="tx1"/>
-                </a:solidFill>
-              </a:rPr>
-              <a:t>安心・納得・自由など</a:t>
-            </a:r>
-            <a:endParaRPr lang="en-US" sz="1300" dirty="0"/>
-          </a:p>
-        </p:txBody>
-      </p:sp>
-      <p:sp>
-        <p:nvSpPr>
-          <p:cNvPr id="7" name="rel_body0"/>
-          <p:cNvSpPr txBox="1"/>
-          <p:nvPr/>
-        </p:nvSpPr>
-        <p:spPr>
-          <a:xfrm>
-            <a:off x="594360" y="2788920"/>
-            <a:ext cx="2331720" cy="1463040"/>
-          </a:xfrm>
-          <a:prstGeom prst="rect">
-            <a:avLst/>
-          </a:prstGeom>
-          <a:noFill/>
-          <a:ln/>
-        </p:spPr>
-        <p:txBody>
-          <a:bodyPr wrap="square" lIns="1016" tIns="1016" rIns="1016" bIns="1016" rtlCol="0" anchor="t"/>
-          <a:lstStyle/>
-          <a:p>
-            <a:pPr indent="0" marL="0">
-              <a:buNone/>
-            </a:pPr>
-            <a:endParaRPr lang="en-US" sz="1600" dirty="0"/>
-          </a:p>
-        </p:txBody>
-      </p:sp>
-      <p:sp>
-        <p:nvSpPr>
-          <p:cNvPr id="8" name="rel_card1"/>
-          <p:cNvSpPr/>
-          <p:nvPr/>
-        </p:nvSpPr>
-        <p:spPr>
-          <a:xfrm>
-            <a:off x="3273552" y="1691640"/>
-            <a:ext cx="2596896" cy="2697480"/>
-          </a:xfrm>
-          <a:prstGeom prst="roundRect">
-            <a:avLst>
-              <a:gd name="adj" fmla="val 4225"/>
-            </a:avLst>
-          </a:prstGeom>
-          <a:solidFill>
-            <a:srgbClr val="F8EBEE"/>
-          </a:solidFill>
-          <a:ln w="9525">
-            <a:solidFill>
-              <a:srgbClr val="E9D9B6"/>
-            </a:solidFill>
-            <a:prstDash val="solid"/>
-          </a:ln>
-        </p:spPr>
-        <p:txBody>
-          <a:bodyPr/>
-          <a:p/>
-        </p:txBody>
-      </p:sp>
-      <p:sp>
-        <p:nvSpPr>
-          <p:cNvPr id="9" name="rel_head1"/>
-          <p:cNvSpPr txBox="1"/>
-          <p:nvPr/>
-        </p:nvSpPr>
-        <p:spPr>
-          <a:xfrm>
-            <a:off x="3410712" y="1810512"/>
-            <a:ext cx="2331720" cy="365760"/>
-          </a:xfrm>
-          <a:prstGeom prst="rect">
-            <a:avLst/>
-          </a:prstGeom>
-          <a:noFill/>
-          <a:ln/>
-        </p:spPr>
-        <p:txBody>
-          <a:bodyPr wrap="square" lIns="1016" tIns="1016" rIns="1016" bIns="1016" rtlCol="0" anchor="t"/>
-          <a:lstStyle/>
-          <a:p>
-            <a:pPr indent="0" marL="0">
-              <a:buNone/>
-            </a:pPr>
-            <a:r>
-              <a:rPr lang="en-US" sz="1700" b="1" dirty="0">
-                <a:solidFill>
-                  <a:schemeClr val="accent2"/>
-                </a:solidFill>
-              </a:rPr>
-              <a:t>未来の自分</a:t>
-            </a:r>
-            <a:endParaRPr lang="en-US" sz="1700" dirty="0"/>
-          </a:p>
-        </p:txBody>
-      </p:sp>
-      <p:sp>
-        <p:nvSpPr>
-          <p:cNvPr id="10" name="rel_hint1"/>
-          <p:cNvSpPr txBox="1"/>
-          <p:nvPr/>
-        </p:nvSpPr>
-        <p:spPr>
-          <a:xfrm>
-            <a:off x="3410712" y="2194560"/>
-            <a:ext cx="2331720" cy="548640"/>
-          </a:xfrm>
-          <a:prstGeom prst="rect">
-            <a:avLst/>
-          </a:prstGeom>
-          <a:noFill/>
-          <a:ln/>
-        </p:spPr>
-        <p:txBody>
-          <a:bodyPr wrap="square" lIns="1016" tIns="1016" rIns="1016" bIns="1016" rtlCol="0" anchor="t"/>
-          <a:lstStyle/>
-          <a:p>
-            <a:pPr indent="0" marL="0">
-              <a:buNone/>
-            </a:pPr>
-            <a:r>
-              <a:rPr lang="en-US" sz="1300" dirty="0">
-                <a:solidFill>
-                  <a:schemeClr val="tx1"/>
-                </a:solidFill>
-              </a:rPr>
-              <a:t>どんな表情をしている？</a:t>
-            </a:r>
-            <a:endParaRPr lang="en-US" sz="1300" dirty="0"/>
-          </a:p>
-        </p:txBody>
-      </p:sp>
-      <p:sp>
-        <p:nvSpPr>
-          <p:cNvPr id="11" name="rel_body1"/>
-          <p:cNvSpPr txBox="1"/>
-          <p:nvPr/>
-        </p:nvSpPr>
-        <p:spPr>
-          <a:xfrm>
-            <a:off x="3410712" y="2788920"/>
-            <a:ext cx="2331720" cy="1463040"/>
-          </a:xfrm>
-          <a:prstGeom prst="rect">
-            <a:avLst/>
-          </a:prstGeom>
-          <a:noFill/>
-          <a:ln/>
-        </p:spPr>
-        <p:txBody>
-          <a:bodyPr wrap="square" lIns="1016" tIns="1016" rIns="1016" bIns="1016" rtlCol="0" anchor="t"/>
-          <a:lstStyle/>
-          <a:p>
-            <a:pPr indent="0" marL="0">
-              <a:buNone/>
-            </a:pPr>
-            <a:endParaRPr lang="en-US" sz="1600" dirty="0"/>
-          </a:p>
-        </p:txBody>
-      </p:sp>
-      <p:sp>
-        <p:nvSpPr>
-          <p:cNvPr id="12" name="rel_card2"/>
-          <p:cNvSpPr/>
-          <p:nvPr/>
-        </p:nvSpPr>
-        <p:spPr>
-          <a:xfrm>
-            <a:off x="6089904" y="1691640"/>
-            <a:ext cx="2596896" cy="2697480"/>
-          </a:xfrm>
-          <a:prstGeom prst="roundRect">
-            <a:avLst>
-              <a:gd name="adj" fmla="val 4225"/>
-            </a:avLst>
-          </a:prstGeom>
-          <a:solidFill>
-            <a:srgbClr val="E6F3EF"/>
-          </a:solidFill>
-          <a:ln w="9525">
-            <a:solidFill>
-              <a:srgbClr val="E9D9B6"/>
-            </a:solidFill>
-            <a:prstDash val="solid"/>
-          </a:ln>
-        </p:spPr>
-        <p:txBody>
-          <a:bodyPr/>
-          <a:p/>
-        </p:txBody>
-      </p:sp>
-      <p:sp>
-        <p:nvSpPr>
-          <p:cNvPr id="13" name="rel_head2"/>
-          <p:cNvSpPr txBox="1"/>
-          <p:nvPr/>
-        </p:nvSpPr>
-        <p:spPr>
-          <a:xfrm>
-            <a:off x="6227064" y="1810512"/>
-            <a:ext cx="2331720" cy="365760"/>
-          </a:xfrm>
-          <a:prstGeom prst="rect">
-            <a:avLst/>
-          </a:prstGeom>
-          <a:noFill/>
-          <a:ln/>
-        </p:spPr>
-        <p:txBody>
-          <a:bodyPr wrap="square" lIns="1016" tIns="1016" rIns="1016" bIns="1016" rtlCol="0" anchor="t"/>
-          <a:lstStyle/>
-          <a:p>
-            <a:pPr indent="0" marL="0">
-              <a:buNone/>
-            </a:pPr>
-            <a:r>
-              <a:rPr lang="en-US" sz="1700" b="1" dirty="0">
-                <a:solidFill>
-                  <a:schemeClr val="accent2"/>
-                </a:solidFill>
-              </a:rPr>
-              <a:t>最初の一歩</a:t>
-            </a:r>
-            <a:endParaRPr lang="en-US" sz="1700" dirty="0"/>
-          </a:p>
-        </p:txBody>
-      </p:sp>
-      <p:sp>
-        <p:nvSpPr>
-          <p:cNvPr id="14" name="rel_hint2"/>
-          <p:cNvSpPr txBox="1"/>
-          <p:nvPr/>
-        </p:nvSpPr>
-        <p:spPr>
-          <a:xfrm>
-            <a:off x="6227064" y="2194560"/>
-            <a:ext cx="2331720" cy="548640"/>
-          </a:xfrm>
-          <a:prstGeom prst="rect">
-            <a:avLst/>
-          </a:prstGeom>
-          <a:noFill/>
-          <a:ln/>
-        </p:spPr>
-        <p:txBody>
-          <a:bodyPr wrap="square" lIns="1016" tIns="1016" rIns="1016" bIns="1016" rtlCol="0" anchor="t"/>
-          <a:lstStyle/>
-          <a:p>
-            <a:pPr indent="0" marL="0">
-              <a:buNone/>
-            </a:pPr>
-            <a:r>
-              <a:rPr lang="en-US" sz="1300" dirty="0">
-                <a:solidFill>
-                  <a:schemeClr val="tx1"/>
-                </a:solidFill>
-              </a:rPr>
-              <a:t>今日、持ち帰るもの</a:t>
-            </a:r>
-            <a:endParaRPr lang="en-US" sz="1300" dirty="0"/>
-          </a:p>
-          <a:p>
-            <a:pPr indent="0" marL="0">
-              <a:buNone/>
-            </a:pPr>
-            <a:r>
-              <a:rPr lang="en-US" sz="1300" dirty="0">
-                <a:solidFill>
-                  <a:schemeClr val="tx1"/>
-                </a:solidFill>
-              </a:rPr>
-              <a:t>明日できる小さなこと</a:t>
-            </a:r>
-            <a:endParaRPr lang="en-US" sz="1300" dirty="0"/>
-          </a:p>
-        </p:txBody>
-      </p:sp>
-      <p:sp>
-        <p:nvSpPr>
-          <p:cNvPr id="15" name="rel_body2"/>
-          <p:cNvSpPr txBox="1"/>
-          <p:nvPr/>
-        </p:nvSpPr>
-        <p:spPr>
-          <a:xfrm>
-            <a:off x="6227064" y="2788920"/>
-            <a:ext cx="2331720" cy="1463040"/>
-          </a:xfrm>
-          <a:prstGeom prst="rect">
-            <a:avLst/>
-          </a:prstGeom>
-          <a:noFill/>
-          <a:ln/>
-        </p:spPr>
-        <p:txBody>
-          <a:bodyPr wrap="square" lIns="1016" tIns="1016" rIns="1016" bIns="1016" rtlCol="0" anchor="t"/>
-          <a:lstStyle/>
-          <a:p>
-            <a:pPr indent="0" marL="0">
-              <a:buNone/>
-            </a:pPr>
-            <a:endParaRPr lang="en-US" sz="1600" dirty="0"/>
-          </a:p>
-        </p:txBody>
-      </p:sp>
-      <p:sp>
-        <p:nvSpPr>
-          <p:cNvPr id="25" name="Slide Number Placeholder 0"/>
-          <p:cNvSpPr>
-            <a:spLocks noGrp="1"/>
-          </p:cNvSpPr>
-          <p:nvPr>
-            <p:ph type="sldNum" sz="quarter" idx="4294967295"/>
-          </p:nvPr>
-        </p:nvSpPr>
-        <p:spPr>
-          <a:xfrm>
-            <a:off x="8229600" y="4754880"/>
-            <a:ext cx="457200" cy="274320"/>
-          </a:xfrm>
-          <a:prstGeom prst="rect">
-            <a:avLst/>
-          </a:prstGeom>
-          <a:extLst>
-            <a:ext uri="{C572A759-6A51-4108-AA02-DFA0A04FC94B}">
-              <ma14:wrappingTextBoxFlag xmlns:ma14="http://schemas.microsoft.com/office/mac/drawingml/2011/main" val="0"/>
-            </a:ext>
-          </a:extLst>
-        </p:spPr>
-        <p:txBody>
-          <a:bodyPr/>
-          <a:lstStyle>
-            <a:lvl1pPr>
-              <a:defRPr sz="900">
-                <a:solidFill>
-                  <a:srgbClr val="B08A4E"/>
-                </a:solidFill>
-              </a:defRPr>
-            </a:lvl1pPr>
-          </a:lstStyle>
-          <a:p>
-            <a:pPr algn="r"/>
-            <a:fld id="{F7021451-1387-4CA6-816F-3879F97B5CBC}" type="slidenum">
-              <a:rPr b="0" lang="en-US"/>
-              <a:t>47</a:t>
-            </a:fld>
-            <a:endParaRPr lang="en-US"/>
-          </a:p>
-        </p:txBody>
-      </p:sp>
-    </p:spTree>
-  </p:cSld>
-  <p:clrMapOvr>
-    <a:masterClrMapping/>
-  </p:clrMapOvr>
-</p:sld>
-</file>
-
-<file path=ppt/slides/slide48.xml><?xml version="1.0" encoding="utf-8"?>
-<p:sld xmlns:a="http://schemas.openxmlformats.org/drawingml/2006/main" xmlns:r="http://schemas.openxmlformats.org/officeDocument/2006/relationships" xmlns:p="http://schemas.openxmlformats.org/presentationml/2006/main">
-  <p:cSld name="Slide 48">
-    <p:spTree>
-      <p:nvGrpSpPr>
-        <p:cNvPr id="1" name=""/>
-        <p:cNvGrpSpPr/>
-        <p:nvPr/>
-      </p:nvGrpSpPr>
-      <p:grpSpPr>
-        <a:xfrm>
-          <a:off x="0" y="0"/>
-          <a:ext cx="0" cy="0"/>
-          <a:chOff x="0" y="0"/>
-          <a:chExt cx="0" cy="0"/>
-        </a:xfrm>
-      </p:grpSpPr>
-      <p:sp>
-        <p:nvSpPr>
-          <p:cNvPr id="2" name="frame"/>
-          <p:cNvSpPr/>
-          <p:nvPr/>
-        </p:nvSpPr>
-        <p:spPr>
-          <a:xfrm>
-            <a:off x="228600" y="137160"/>
-            <a:ext cx="8686800" cy="4526280"/>
-          </a:xfrm>
-          <a:prstGeom prst="rect">
-            <a:avLst/>
-          </a:prstGeom>
-          <a:ln w="12700">
-            <a:solidFill>
-              <a:srgbClr val="B08A4E"/>
-            </a:solidFill>
-            <a:prstDash val="solid"/>
-          </a:ln>
-        </p:spPr>
-        <p:txBody>
-          <a:bodyPr/>
-          <a:p/>
-        </p:txBody>
-      </p:sp>
-      <p:sp>
-        <p:nvSpPr>
-          <p:cNvPr id="3" name="qlabel"/>
-          <p:cNvSpPr txBox="1"/>
-          <p:nvPr/>
-        </p:nvSpPr>
-        <p:spPr>
-          <a:xfrm>
-            <a:off x="457200" y="320040"/>
-            <a:ext cx="8229600" cy="365760"/>
-          </a:xfrm>
-          <a:prstGeom prst="rect">
-            <a:avLst/>
-          </a:prstGeom>
-          <a:noFill/>
-          <a:ln/>
-        </p:spPr>
-        <p:txBody>
-          <a:bodyPr wrap="square" lIns="0" tIns="0" rIns="0" bIns="0" rtlCol="0" anchor="t"/>
-          <a:lstStyle/>
-          <a:p>
-            <a:pPr algn="ctr" indent="0" marL="0">
-              <a:buNone/>
-            </a:pPr>
-            <a:r>
-              <a:rPr lang="en-US" sz="1300" b="1" dirty="0">
-                <a:solidFill>
-                  <a:schemeClr val="accent2"/>
-                </a:solidFill>
-              </a:rPr>
-              <a:t>これから</a:t>
-            </a:r>
-            <a:endParaRPr lang="en-US" sz="1300" dirty="0"/>
-          </a:p>
-        </p:txBody>
-      </p:sp>
-      <p:sp>
-        <p:nvSpPr>
-          <p:cNvPr id="4" name="Text 0"/>
-          <p:cNvSpPr/>
-          <p:nvPr>
-            <p:ph idx="100" type="title" hasCustomPrompt="1"/>
-          </p:nvPr>
-        </p:nvSpPr>
-        <p:spPr>
-          <a:xfrm>
-            <a:off x="914400" y="1554480"/>
-            <a:ext cx="7315200" cy="1554480"/>
-          </a:xfrm>
-          <a:prstGeom prst="rect">
-            <a:avLst/>
-          </a:prstGeom>
-          <a:noFill/>
-          <a:ln/>
-        </p:spPr>
-        <p:txBody>
-          <a:bodyPr wrap="square" rtlCol="0" anchor="ctr"/>
-          <a:lstStyle/>
-          <a:p>
-            <a:pPr algn="ctr" indent="0" marL="0">
-              <a:buNone/>
-            </a:pPr>
-            <a:r>
-              <a:rPr lang="en-US" sz="3200" b="1" dirty="0">
-                <a:solidFill>
-                  <a:schemeClr val="tx2"/>
-                </a:solidFill>
-                <a:latin typeface="Yu Mincho" pitchFamily="34" charset="0"/>
-                <a:ea typeface="Yu Mincho" pitchFamily="34" charset="-122"/>
-                <a:cs typeface="Yu Mincho" pitchFamily="34" charset="-120"/>
-              </a:rPr>
-              <a:t>次に同じ感情が出てきたら、</a:t>
-            </a:r>
-            <a:endParaRPr lang="en-US" sz="3200" dirty="0"/>
-          </a:p>
-          <a:p>
-            <a:pPr algn="ctr" indent="0" marL="0">
-              <a:buNone/>
-            </a:pPr>
-            <a:r>
-              <a:rPr lang="en-US" sz="3200" b="1" dirty="0">
-                <a:solidFill>
-                  <a:schemeClr val="tx2"/>
-                </a:solidFill>
-                <a:latin typeface="Yu Mincho" pitchFamily="34" charset="0"/>
-                <a:ea typeface="Yu Mincho" pitchFamily="34" charset="-122"/>
-                <a:cs typeface="Yu Mincho" pitchFamily="34" charset="-120"/>
-              </a:rPr>
-              <a:t>自分にどんな言葉を</a:t>
-            </a:r>
-            <a:endParaRPr lang="en-US" sz="3200" dirty="0"/>
-          </a:p>
-          <a:p>
-            <a:pPr algn="ctr" indent="0" marL="0">
-              <a:buNone/>
-            </a:pPr>
-            <a:r>
-              <a:rPr lang="en-US" sz="3200" b="1" dirty="0">
-                <a:solidFill>
-                  <a:schemeClr val="tx2"/>
-                </a:solidFill>
-                <a:latin typeface="Yu Mincho" pitchFamily="34" charset="0"/>
-                <a:ea typeface="Yu Mincho" pitchFamily="34" charset="-122"/>
-                <a:cs typeface="Yu Mincho" pitchFamily="34" charset="-120"/>
-              </a:rPr>
-              <a:t>かけてあげたいですか？</a:t>
-            </a:r>
-            <a:endParaRPr lang="en-US" sz="3200" dirty="0"/>
-          </a:p>
-        </p:txBody>
-      </p:sp>
-      <p:sp>
-        <p:nvSpPr>
-          <p:cNvPr id="5" name="Text 0"/>
-          <p:cNvSpPr/>
-          <p:nvPr>
-            <p:ph idx="101" type="body" hasCustomPrompt="1"/>
-          </p:nvPr>
-        </p:nvSpPr>
-        <p:spPr>
-          <a:xfrm>
-            <a:off x="914400" y="3200400"/>
-            <a:ext cx="7315200" cy="731520"/>
-          </a:xfrm>
-          <a:prstGeom prst="rect">
-            <a:avLst/>
-          </a:prstGeom>
-          <a:noFill/>
-          <a:ln/>
-        </p:spPr>
-        <p:txBody>
-          <a:bodyPr wrap="square" rtlCol="0" anchor="t"/>
-          <a:lstStyle/>
-          <a:p>
-            <a:pPr algn="ctr" indent="0" marL="0">
-              <a:buNone/>
-            </a:pPr>
-            <a:r>
-              <a:rPr lang="en-US" sz="1500" dirty="0">
-                <a:solidFill>
-                  <a:schemeClr val="accent2"/>
-                </a:solidFill>
-              </a:rPr>
-              <a:t>気づいたら、責めずに見つめる。そして、今の自分で選び直す</a:t>
-            </a:r>
-            <a:endParaRPr lang="en-US" sz="1500" dirty="0"/>
-          </a:p>
-        </p:txBody>
-      </p:sp>
-      <p:sp>
-        <p:nvSpPr>
-          <p:cNvPr id="25" name="Slide Number Placeholder 0"/>
-          <p:cNvSpPr>
-            <a:spLocks noGrp="1"/>
-          </p:cNvSpPr>
-          <p:nvPr>
-            <p:ph type="sldNum" sz="quarter" idx="4294967295"/>
-          </p:nvPr>
-        </p:nvSpPr>
-        <p:spPr>
-          <a:xfrm>
-            <a:off x="8229600" y="4754880"/>
-            <a:ext cx="457200" cy="274320"/>
-          </a:xfrm>
-          <a:prstGeom prst="rect">
-            <a:avLst/>
-          </a:prstGeom>
-          <a:extLst>
-            <a:ext uri="{C572A759-6A51-4108-AA02-DFA0A04FC94B}">
-              <ma14:wrappingTextBoxFlag xmlns:ma14="http://schemas.microsoft.com/office/mac/drawingml/2011/main" val="0"/>
-            </a:ext>
-          </a:extLst>
-        </p:spPr>
-        <p:txBody>
-          <a:bodyPr/>
-          <a:lstStyle>
-            <a:lvl1pPr>
-              <a:defRPr sz="900">
-                <a:solidFill>
-                  <a:srgbClr val="B08A4E"/>
-                </a:solidFill>
-              </a:defRPr>
-            </a:lvl1pPr>
-          </a:lstStyle>
-          <a:p>
-            <a:pPr algn="r"/>
-            <a:fld id="{F7021451-1387-4CA6-816F-3879F97B5CBC}" type="slidenum">
-              <a:rPr b="0" lang="en-US"/>
-              <a:t>48</a:t>
-            </a:fld>
-            <a:endParaRPr lang="en-US"/>
-          </a:p>
-        </p:txBody>
-      </p:sp>
-    </p:spTree>
-  </p:cSld>
-  <p:clrMapOvr>
-    <a:masterClrMapping/>
-  </p:clrMapOvr>
-</p:sld>
-</file>
-
-<file path=ppt/slides/slide49.xml><?xml version="1.0" encoding="utf-8"?>
-<p:sld xmlns:a="http://schemas.openxmlformats.org/drawingml/2006/main" xmlns:r="http://schemas.openxmlformats.org/officeDocument/2006/relationships" xmlns:p="http://schemas.openxmlformats.org/presentationml/2006/main">
-  <p:cSld name="Slide 49">
     <p:spTree>
       <p:nvGrpSpPr>
         <p:cNvPr id="1" name=""/>
@@ -20294,237 +18378,9 @@
 </p:sld>
 </file>
 
-<file path=ppt/slides/slide5.xml><?xml version="1.0" encoding="utf-8"?>
+<file path=ppt/slides/slide47.xml><?xml version="1.0" encoding="utf-8"?>
 <p:sld xmlns:a="http://schemas.openxmlformats.org/drawingml/2006/main" xmlns:r="http://schemas.openxmlformats.org/officeDocument/2006/relationships" xmlns:p="http://schemas.openxmlformats.org/presentationml/2006/main">
-  <p:cSld name="Slide 5">
-    <p:spTree>
-      <p:nvGrpSpPr>
-        <p:cNvPr id="1" name=""/>
-        <p:cNvGrpSpPr/>
-        <p:nvPr/>
-      </p:nvGrpSpPr>
-      <p:grpSpPr>
-        <a:xfrm>
-          <a:off x="0" y="0"/>
-          <a:ext cx="0" cy="0"/>
-          <a:chOff x="0" y="0"/>
-          <a:chExt cx="0" cy="0"/>
-        </a:xfrm>
-      </p:grpSpPr>
-      <p:sp>
-        <p:nvSpPr>
-          <p:cNvPr id="2" name="frame"/>
-          <p:cNvSpPr/>
-          <p:nvPr/>
-        </p:nvSpPr>
-        <p:spPr>
-          <a:xfrm>
-            <a:off x="228600" y="137160"/>
-            <a:ext cx="8686800" cy="4526280"/>
-          </a:xfrm>
-          <a:prstGeom prst="rect">
-            <a:avLst/>
-          </a:prstGeom>
-          <a:ln w="12700">
-            <a:solidFill>
-              <a:srgbClr val="B08A4E"/>
-            </a:solidFill>
-            <a:prstDash val="solid"/>
-          </a:ln>
-        </p:spPr>
-        <p:txBody>
-          <a:bodyPr/>
-          <a:p/>
-        </p:txBody>
-      </p:sp>
-      <p:sp>
-        <p:nvSpPr>
-          <p:cNvPr id="3" name="qlabel"/>
-          <p:cNvSpPr txBox="1"/>
-          <p:nvPr/>
-        </p:nvSpPr>
-        <p:spPr>
-          <a:xfrm>
-            <a:off x="457200" y="320040"/>
-            <a:ext cx="8229600" cy="365760"/>
-          </a:xfrm>
-          <a:prstGeom prst="rect">
-            <a:avLst/>
-          </a:prstGeom>
-          <a:noFill/>
-          <a:ln/>
-        </p:spPr>
-        <p:txBody>
-          <a:bodyPr wrap="square" lIns="0" tIns="0" rIns="0" bIns="0" rtlCol="0" anchor="t"/>
-          <a:lstStyle/>
-          <a:p>
-            <a:pPr algn="ctr" indent="0" marL="0">
-              <a:buNone/>
-            </a:pPr>
-            <a:r>
-              <a:rPr lang="en-US" sz="1300" b="1" dirty="0">
-                <a:solidFill>
-                  <a:schemeClr val="accent2"/>
-                </a:solidFill>
-              </a:rPr>
-              <a:t>どのような事でお悩みですか？</a:t>
-            </a:r>
-            <a:endParaRPr lang="en-US" sz="1300" dirty="0"/>
-          </a:p>
-        </p:txBody>
-      </p:sp>
-      <p:sp>
-        <p:nvSpPr>
-          <p:cNvPr id="4" name="Text 0"/>
-          <p:cNvSpPr/>
-          <p:nvPr>
-            <p:ph idx="100" type="title" hasCustomPrompt="1"/>
-          </p:nvPr>
-        </p:nvSpPr>
-        <p:spPr>
-          <a:xfrm>
-            <a:off x="914400" y="1554480"/>
-            <a:ext cx="7315200" cy="1554480"/>
-          </a:xfrm>
-          <a:prstGeom prst="rect">
-            <a:avLst/>
-          </a:prstGeom>
-          <a:noFill/>
-          <a:ln/>
-        </p:spPr>
-        <p:txBody>
-          <a:bodyPr wrap="square" rtlCol="0" anchor="ctr"/>
-          <a:lstStyle/>
-          <a:p>
-            <a:pPr algn="ctr" indent="0" marL="0">
-              <a:buNone/>
-            </a:pPr>
-            <a:r>
-              <a:rPr lang="en-US" sz="3200" b="1" dirty="0">
-                <a:solidFill>
-                  <a:schemeClr val="tx2"/>
-                </a:solidFill>
-                <a:latin typeface="Yu Mincho" pitchFamily="34" charset="0"/>
-                <a:ea typeface="Yu Mincho" pitchFamily="34" charset="-122"/>
-                <a:cs typeface="Yu Mincho" pitchFamily="34" charset="-120"/>
-              </a:rPr>
-              <a:t>お悩みの内容を</a:t>
-            </a:r>
-            <a:endParaRPr lang="en-US" sz="3200" dirty="0"/>
-          </a:p>
-          <a:p>
-            <a:pPr algn="ctr" indent="0" marL="0">
-              <a:buNone/>
-            </a:pPr>
-            <a:r>
-              <a:rPr lang="en-US" sz="3200" b="1" dirty="0">
-                <a:solidFill>
-                  <a:schemeClr val="tx2"/>
-                </a:solidFill>
-                <a:latin typeface="Yu Mincho" pitchFamily="34" charset="0"/>
-                <a:ea typeface="Yu Mincho" pitchFamily="34" charset="-122"/>
-                <a:cs typeface="Yu Mincho" pitchFamily="34" charset="-120"/>
-              </a:rPr>
-              <a:t>おしえてください</a:t>
-            </a:r>
-            <a:endParaRPr lang="en-US" sz="3200" dirty="0"/>
-          </a:p>
-        </p:txBody>
-      </p:sp>
-      <p:sp>
-        <p:nvSpPr>
-          <p:cNvPr id="5" name="Text 0"/>
-          <p:cNvSpPr/>
-          <p:nvPr>
-            <p:ph idx="101" type="body" hasCustomPrompt="1"/>
-          </p:nvPr>
-        </p:nvSpPr>
-        <p:spPr>
-          <a:xfrm>
-            <a:off x="914400" y="3200400"/>
-            <a:ext cx="7315200" cy="731520"/>
-          </a:xfrm>
-          <a:prstGeom prst="rect">
-            <a:avLst/>
-          </a:prstGeom>
-          <a:noFill/>
-          <a:ln/>
-        </p:spPr>
-        <p:txBody>
-          <a:bodyPr wrap="square" rtlCol="0" anchor="t"/>
-          <a:lstStyle/>
-          <a:p>
-            <a:pPr algn="ctr" indent="0" marL="0">
-              <a:buNone/>
-            </a:pPr>
-            <a:r>
-              <a:rPr lang="en-US" sz="1500" dirty="0">
-                <a:solidFill>
-                  <a:schemeClr val="accent2"/>
-                </a:solidFill>
-              </a:rPr>
-              <a:t>直感で大丈夫です</a:t>
-            </a:r>
-            <a:endParaRPr lang="en-US" sz="1500" dirty="0"/>
-          </a:p>
-        </p:txBody>
-      </p:sp>
-      <p:sp>
-        <p:nvSpPr>
-          <p:cNvPr id="25" name="Slide Number Placeholder 0"/>
-          <p:cNvSpPr>
-            <a:spLocks noGrp="1"/>
-          </p:cNvSpPr>
-          <p:nvPr>
-            <p:ph type="sldNum" sz="quarter" idx="4294967295"/>
-          </p:nvPr>
-        </p:nvSpPr>
-        <p:spPr>
-          <a:xfrm>
-            <a:off x="8229600" y="4754880"/>
-            <a:ext cx="457200" cy="274320"/>
-          </a:xfrm>
-          <a:prstGeom prst="rect">
-            <a:avLst/>
-          </a:prstGeom>
-          <a:extLst>
-            <a:ext uri="{C572A759-6A51-4108-AA02-DFA0A04FC94B}">
-              <ma14:wrappingTextBoxFlag xmlns:ma14="http://schemas.microsoft.com/office/mac/drawingml/2011/main" val="0"/>
-            </a:ext>
-          </a:extLst>
-        </p:spPr>
-        <p:txBody>
-          <a:bodyPr/>
-          <a:lstStyle>
-            <a:lvl1pPr>
-              <a:defRPr sz="900">
-                <a:solidFill>
-                  <a:srgbClr val="B08A4E"/>
-                </a:solidFill>
-              </a:defRPr>
-            </a:lvl1pPr>
-          </a:lstStyle>
-          <a:p>
-            <a:pPr algn="r"/>
-            <a:fld id="{F7021451-1387-4CA6-816F-3879F97B5CBC}" type="slidenum">
-              <a:rPr b="0" lang="en-US"/>
-              <a:t>5</a:t>
-            </a:fld>
-            <a:endParaRPr lang="en-US"/>
-          </a:p>
-        </p:txBody>
-      </p:sp>
-    </p:spTree>
-  </p:cSld>
-  <p:clrMapOvr>
-    <a:masterClrMapping/>
-  </p:clrMapOvr>
-</p:sld>
-</file>
-
-<file path=ppt/slides/slide50.xml><?xml version="1.0" encoding="utf-8"?>
-<p:sld xmlns:a="http://schemas.openxmlformats.org/drawingml/2006/main" xmlns:r="http://schemas.openxmlformats.org/officeDocument/2006/relationships" xmlns:p="http://schemas.openxmlformats.org/presentationml/2006/main">
-  <p:cSld name="Slide 50">
+  <p:cSld name="Slide 47">
     <p:spTree>
       <p:nvGrpSpPr>
         <p:cNvPr id="1" name=""/>
@@ -20653,6 +18509,234 @@
               <a:t>海音（かのん）〜心体の調律〜　髙橋 由香</a:t>
             </a:r>
             <a:endParaRPr lang="en-US" sz="1600" dirty="0"/>
+          </a:p>
+        </p:txBody>
+      </p:sp>
+    </p:spTree>
+  </p:cSld>
+  <p:clrMapOvr>
+    <a:masterClrMapping/>
+  </p:clrMapOvr>
+</p:sld>
+</file>
+
+<file path=ppt/slides/slide5.xml><?xml version="1.0" encoding="utf-8"?>
+<p:sld xmlns:a="http://schemas.openxmlformats.org/drawingml/2006/main" xmlns:r="http://schemas.openxmlformats.org/officeDocument/2006/relationships" xmlns:p="http://schemas.openxmlformats.org/presentationml/2006/main">
+  <p:cSld name="Slide 5">
+    <p:spTree>
+      <p:nvGrpSpPr>
+        <p:cNvPr id="1" name=""/>
+        <p:cNvGrpSpPr/>
+        <p:nvPr/>
+      </p:nvGrpSpPr>
+      <p:grpSpPr>
+        <a:xfrm>
+          <a:off x="0" y="0"/>
+          <a:ext cx="0" cy="0"/>
+          <a:chOff x="0" y="0"/>
+          <a:chExt cx="0" cy="0"/>
+        </a:xfrm>
+      </p:grpSpPr>
+      <p:sp>
+        <p:nvSpPr>
+          <p:cNvPr id="2" name="frame"/>
+          <p:cNvSpPr/>
+          <p:nvPr/>
+        </p:nvSpPr>
+        <p:spPr>
+          <a:xfrm>
+            <a:off x="228600" y="137160"/>
+            <a:ext cx="8686800" cy="4526280"/>
+          </a:xfrm>
+          <a:prstGeom prst="rect">
+            <a:avLst/>
+          </a:prstGeom>
+          <a:ln w="12700">
+            <a:solidFill>
+              <a:srgbClr val="B08A4E"/>
+            </a:solidFill>
+            <a:prstDash val="solid"/>
+          </a:ln>
+        </p:spPr>
+        <p:txBody>
+          <a:bodyPr/>
+          <a:p/>
+        </p:txBody>
+      </p:sp>
+      <p:sp>
+        <p:nvSpPr>
+          <p:cNvPr id="3" name="qlabel"/>
+          <p:cNvSpPr txBox="1"/>
+          <p:nvPr/>
+        </p:nvSpPr>
+        <p:spPr>
+          <a:xfrm>
+            <a:off x="457200" y="320040"/>
+            <a:ext cx="8229600" cy="365760"/>
+          </a:xfrm>
+          <a:prstGeom prst="rect">
+            <a:avLst/>
+          </a:prstGeom>
+          <a:noFill/>
+          <a:ln/>
+        </p:spPr>
+        <p:txBody>
+          <a:bodyPr wrap="square" lIns="0" tIns="0" rIns="0" bIns="0" rtlCol="0" anchor="t"/>
+          <a:lstStyle/>
+          <a:p>
+            <a:pPr algn="ctr" indent="0" marL="0">
+              <a:buNone/>
+            </a:pPr>
+            <a:r>
+              <a:rPr lang="en-US" sz="1300" b="1" dirty="0">
+                <a:solidFill>
+                  <a:schemeClr val="accent2"/>
+                </a:solidFill>
+              </a:rPr>
+              <a:t>どのような事でお悩みですか？</a:t>
+            </a:r>
+            <a:endParaRPr lang="en-US" sz="1300" dirty="0"/>
+          </a:p>
+        </p:txBody>
+      </p:sp>
+      <p:sp>
+        <p:nvSpPr>
+          <p:cNvPr id="4" name="Text 0"/>
+          <p:cNvSpPr/>
+          <p:nvPr>
+            <p:ph idx="100" type="title" hasCustomPrompt="1"/>
+          </p:nvPr>
+        </p:nvSpPr>
+        <p:spPr>
+          <a:xfrm>
+            <a:off x="914400" y="1554480"/>
+            <a:ext cx="7315200" cy="1554480"/>
+          </a:xfrm>
+          <a:prstGeom prst="rect">
+            <a:avLst/>
+          </a:prstGeom>
+          <a:noFill/>
+          <a:ln/>
+        </p:spPr>
+        <p:txBody>
+          <a:bodyPr wrap="square" rtlCol="0" anchor="ctr"/>
+          <a:lstStyle/>
+          <a:p>
+            <a:pPr algn="ctr" indent="0" marL="0">
+              <a:buNone/>
+            </a:pPr>
+            <a:r>
+              <a:rPr lang="en-US" sz="3200" b="1" dirty="0">
+                <a:solidFill>
+                  <a:schemeClr val="tx2"/>
+                </a:solidFill>
+                <a:latin typeface="Yu Mincho" pitchFamily="34" charset="0"/>
+                <a:ea typeface="Yu Mincho" pitchFamily="34" charset="-122"/>
+                <a:cs typeface="Yu Mincho" pitchFamily="34" charset="-120"/>
+              </a:rPr>
+              <a:t>お悩みの内容を</a:t>
+            </a:r>
+            <a:endParaRPr lang="en-US" sz="3200" dirty="0"/>
+          </a:p>
+          <a:p>
+            <a:pPr algn="ctr" indent="0" marL="0">
+              <a:buNone/>
+            </a:pPr>
+            <a:r>
+              <a:rPr lang="en-US" sz="3200" b="1" dirty="0">
+                <a:solidFill>
+                  <a:schemeClr val="tx2"/>
+                </a:solidFill>
+                <a:latin typeface="Yu Mincho" pitchFamily="34" charset="0"/>
+                <a:ea typeface="Yu Mincho" pitchFamily="34" charset="-122"/>
+                <a:cs typeface="Yu Mincho" pitchFamily="34" charset="-120"/>
+              </a:rPr>
+              <a:t>おしえてください</a:t>
+            </a:r>
+            <a:endParaRPr lang="en-US" sz="3200" dirty="0"/>
+          </a:p>
+        </p:txBody>
+      </p:sp>
+      <p:sp>
+        <p:nvSpPr>
+          <p:cNvPr id="5" name="Text 0"/>
+          <p:cNvSpPr/>
+          <p:nvPr>
+            <p:ph idx="101" type="body" hasCustomPrompt="1"/>
+          </p:nvPr>
+        </p:nvSpPr>
+        <p:spPr>
+          <a:xfrm>
+            <a:off x="914400" y="3200400"/>
+            <a:ext cx="7315200" cy="731520"/>
+          </a:xfrm>
+          <a:prstGeom prst="rect">
+            <a:avLst/>
+          </a:prstGeom>
+          <a:noFill/>
+          <a:ln/>
+        </p:spPr>
+        <p:txBody>
+          <a:bodyPr wrap="square" rtlCol="0" anchor="t"/>
+          <a:lstStyle/>
+          <a:p>
+            <a:pPr algn="ctr" indent="0" marL="0">
+              <a:buNone/>
+            </a:pPr>
+            <a:r>
+              <a:rPr lang="en-US" sz="1500" dirty="0">
+                <a:solidFill>
+                  <a:schemeClr val="accent2"/>
+                </a:solidFill>
+              </a:rPr>
+              <a:t>直感で大丈夫です</a:t>
+            </a:r>
+            <a:endParaRPr lang="en-US" sz="1500" dirty="0"/>
+          </a:p>
+        </p:txBody>
+      </p:sp>
+      <p:sp>
+        <p:nvSpPr>
+          <p:cNvPr id="25" name="Slide Number Placeholder 0"/>
+          <p:cNvSpPr>
+            <a:spLocks noGrp="1"/>
+          </p:cNvSpPr>
+          <p:nvPr>
+            <p:ph type="sldNum" sz="quarter" idx="4294967295"/>
+          </p:nvPr>
+        </p:nvSpPr>
+        <p:spPr>
+          <a:xfrm>
+            <a:off x="8229600" y="4754880"/>
+            <a:ext cx="457200" cy="274320"/>
+          </a:xfrm>
+          <a:prstGeom prst="rect">
+            <a:avLst/>
+          </a:prstGeom>
+          <a:extLst>
+            <a:ext uri="{C572A759-6A51-4108-AA02-DFA0A04FC94B}">
+              <ma14:wrappingTextBoxFlag xmlns:ma14="http://schemas.microsoft.com/office/mac/drawingml/2011/main" val="0"/>
+            </a:ext>
+          </a:extLst>
+        </p:spPr>
+        <p:txBody>
+          <a:bodyPr/>
+          <a:lstStyle>
+            <a:lvl1pPr>
+              <a:defRPr sz="900">
+                <a:solidFill>
+                  <a:srgbClr val="B08A4E"/>
+                </a:solidFill>
+              </a:defRPr>
+            </a:lvl1pPr>
+          </a:lstStyle>
+          <a:p>
+            <a:pPr algn="r"/>
+            <a:fld id="{F7021451-1387-4CA6-816F-3879F97B5CBC}" type="slidenum">
+              <a:rPr b="0" lang="en-US"/>
+              <a:t>5</a:t>
+            </a:fld>
+            <a:endParaRPr lang="en-US"/>
           </a:p>
         </p:txBody>
       </p:sp>

--- a/20_Projects/海音_心体の調律/単発/仁部あきえさん/20261028_仁部あきえさん_お金のブロック単発セッション.pptx
+++ b/20_Projects/海音_心体の調律/単発/仁部あきえさん/20261028_仁部あきえさん_お金のブロック単発セッション.pptx
@@ -4,6 +4,9 @@
   <p:sldMasterIdLst>
     <p:sldMasterId id="2147483648" r:id="rId1"/>
   </p:sldMasterIdLst>
+  <p:notesMasterIdLst>
+    <p:notesMasterId r:id="rId49"/>
+  </p:notesMasterIdLst>
   <p:sldIdLst>
     <p:sldId id="256" r:id="rId2"/>
     <p:sldId id="257" r:id="rId3"/>
@@ -53,10 +56,7 @@
     <p:sldId id="301" r:id="rId47"/>
     <p:sldId id="302" r:id="rId48"/>
   </p:sldIdLst>
-  <p:notesMasterIdLst>
-    <p:notesMasterId r:id="rId49"/>
-  </p:notesMasterIdLst>
-  <p:sldSz cx="9144000" cy="5143500"/>
+  <p:sldSz cx="9144000" cy="5143500" type="screen16x9"/>
   <p:notesSz cx="5143500" cy="9144000"/>
   <p:defaultTextStyle>
     <a:lvl1pPr marL="0" algn="l" defTabSz="914400" rtl="0" eaLnBrk="1" latinLnBrk="0" hangingPunct="1">
@@ -153,14 +153,14 @@
   <p:extLst>
     <p:ext uri="{521415D9-36F7-43E2-AB2F-B90AF26B5E84}">
       <p14:sectionLst xmlns:p14="http://schemas.microsoft.com/office/powerpoint/2010/main">
-        <p14:section name="はじめに" id="{90993fca-79d3-449f-e53f-63bfe8932d3f}">
+        <p14:section name="はじめに" id="{90993FCA-79D3-449F-E53F-63BFE8932D3F}">
           <p14:sldIdLst>
             <p14:sldId id="256"/>
             <p14:sldId id="257"/>
             <p14:sldId id="258"/>
           </p14:sldIdLst>
         </p14:section>
-        <p14:section name="第1部 魂の傷を聴く" id="{99e2d81a-974f-286f-4a69-d8f581d0a990}">
+        <p14:section name="第1部 魂の傷を聴く" id="{99E2D81A-974F-286F-4A69-D8F581D0A990}">
           <p14:sldIdLst>
             <p14:sldId id="259"/>
             <p14:sldId id="260"/>
@@ -176,7 +176,7 @@
             <p14:sldId id="270"/>
           </p14:sldIdLst>
         </p14:section>
-        <p14:section name="第2部 頭の構造を知る" id="{73ea247f-e104-bef5-9889-bc875963250f}">
+        <p14:section name="第2部 頭の構造を知る" id="{73EA247F-E104-BEF5-9889-BC875963250F}">
           <p14:sldIdLst>
             <p14:sldId id="271"/>
             <p14:sldId id="272"/>
@@ -190,7 +190,7 @@
             <p14:sldId id="280"/>
           </p14:sldIdLst>
         </p14:section>
-        <p14:section name="ワーク 思い込みを書き換える" id="{81fbbcc0-fd8e-0eb7-fe24-3316db1926e5}">
+        <p14:section name="ワーク 思い込みを書き換える" id="{81FBBCC0-FD8E-0EB7-FE24-3316DB1926E5}">
           <p14:sldIdLst>
             <p14:sldId id="281"/>
             <p14:sldId id="282"/>
@@ -210,12 +210,12 @@
             <p14:sldId id="296"/>
           </p14:sldIdLst>
         </p14:section>
-        <p14:section name="エネルギー" id="{96118eeb-6b7d-a72b-0706-c5ce2ddacccd}">
+        <p14:section name="エネルギー" id="{96118EEB-6B7D-A72B-0706-C5CE2DDACCCD}">
           <p14:sldIdLst>
             <p14:sldId id="297"/>
           </p14:sldIdLst>
         </p14:section>
-        <p14:section name="まとめ" id="{ab3a8c17-2ed0-202a-e9c3-309e3f6043ad}">
+        <p14:section name="まとめ" id="{AB3A8C17-2ED0-202A-E9C3-309E3F6043AD}">
           <p14:sldIdLst>
             <p14:sldId id="298"/>
             <p14:sldId id="299"/>
@@ -255,241 +255,17 @@
           <a:chExt cx="0" cy="0"/>
         </a:xfrm>
       </p:grpSpPr>
-      <p:sp>
-        <p:nvSpPr>
-          <p:cNvPr id="2" name="Header Placeholder 1"/>
-          <p:cNvSpPr>
-            <a:spLocks noGrp="1"/>
-          </p:cNvSpPr>
-          <p:nvPr>
-            <p:ph type="hdr" sz="quarter"/>
-          </p:nvPr>
-        </p:nvSpPr>
-        <p:spPr>
-          <a:xfrm>
-            <a:off x="0" y="0"/>
-            <a:ext cx="2971800" cy="458788"/>
-          </a:xfrm>
-          <a:prstGeom prst="rect">
-            <a:avLst/>
-          </a:prstGeom>
-        </p:spPr>
-        <p:txBody>
-          <a:bodyPr vert="horz" lIns="91440" tIns="45720" rIns="91440" bIns="45720" rtlCol="0"/>
-          <a:lstStyle>
-            <a:lvl1pPr algn="l">
-              <a:defRPr sz="1200"/>
-            </a:lvl1pPr>
-          </a:lstStyle>
-          <a:p>
-            <a:endParaRPr lang="en-US"/>
-          </a:p>
-        </p:txBody>
-      </p:sp>
-      <p:sp>
-        <p:nvSpPr>
-          <p:cNvPr id="3" name="Date Placeholder 2"/>
-          <p:cNvSpPr>
-            <a:spLocks noGrp="1"/>
-          </p:cNvSpPr>
-          <p:nvPr>
-            <p:ph type="dt" idx="1"/>
-          </p:nvPr>
-        </p:nvSpPr>
-        <p:spPr>
-          <a:xfrm>
-            <a:off x="3884613" y="0"/>
-            <a:ext cx="2971800" cy="458788"/>
-          </a:xfrm>
-          <a:prstGeom prst="rect">
-            <a:avLst/>
-          </a:prstGeom>
-        </p:spPr>
-        <p:txBody>
-          <a:bodyPr vert="horz" lIns="91440" tIns="45720" rIns="91440" bIns="45720" rtlCol="0"/>
-          <a:lstStyle>
-            <a:lvl1pPr algn="r">
-              <a:defRPr sz="1200"/>
-            </a:lvl1pPr>
-          </a:lstStyle>
-          <a:p>
-            <a:fld id="{5282F153-3F37-0F45-9E97-73ACFA13230C}" type="datetimeFigureOut">
-              <a:rPr lang="en-US"/>
-              <a:t>7/23/19</a:t>
-            </a:fld>
-            <a:endParaRPr lang="en-US"/>
-          </a:p>
-        </p:txBody>
-      </p:sp>
-      <p:sp>
-        <p:nvSpPr>
-          <p:cNvPr id="4" name="Slide Image Placeholder 3"/>
-          <p:cNvSpPr>
-            <a:spLocks noGrp="1" noRot="1" noChangeAspect="1"/>
-          </p:cNvSpPr>
-          <p:nvPr>
-            <p:ph type="sldImg" idx="2"/>
-          </p:nvPr>
-        </p:nvSpPr>
-        <p:spPr>
-          <a:xfrm>
-            <a:off x="685800" y="1143000"/>
-            <a:ext cx="5486400" cy="3086100"/>
-          </a:xfrm>
-          <a:prstGeom prst="rect">
-            <a:avLst/>
-          </a:prstGeom>
-          <a:noFill/>
-          <a:ln w="12700">
-            <a:solidFill>
-              <a:prstClr val="black"/>
-            </a:solidFill>
-          </a:ln>
-        </p:spPr>
-        <p:txBody>
-          <a:bodyPr vert="horz" lIns="91440" tIns="45720" rIns="91440" bIns="45720" rtlCol="0" anchor="ctr"/>
-          <a:lstStyle/>
-          <a:p>
-            <a:endParaRPr lang="en-US"/>
-          </a:p>
-        </p:txBody>
-      </p:sp>
-      <p:sp>
-        <p:nvSpPr>
-          <p:cNvPr id="5" name="Notes Placeholder 4"/>
-          <p:cNvSpPr>
-            <a:spLocks noGrp="1"/>
-          </p:cNvSpPr>
-          <p:nvPr>
-            <p:ph type="body" sz="quarter" idx="3"/>
-          </p:nvPr>
-        </p:nvSpPr>
-        <p:spPr>
-          <a:xfrm>
-            <a:off x="685800" y="4400550"/>
-            <a:ext cx="5486400" cy="3600450"/>
-          </a:xfrm>
-          <a:prstGeom prst="rect">
-            <a:avLst/>
-          </a:prstGeom>
-        </p:spPr>
-        <p:txBody>
-          <a:bodyPr vert="horz" lIns="91440" tIns="45720" rIns="91440" bIns="45720" rtlCol="0"/>
-          <a:lstStyle/>
-          <a:p>
-            <a:pPr lvl="0"/>
-            <a:r>
-              <a:rPr lang="en-US"/>
-              <a:t>Click to edit Master text styles</a:t>
-            </a:r>
-          </a:p>
-          <a:p>
-            <a:pPr lvl="1"/>
-            <a:r>
-              <a:rPr lang="en-US"/>
-              <a:t>Second level</a:t>
-            </a:r>
-          </a:p>
-          <a:p>
-            <a:pPr lvl="2"/>
-            <a:r>
-              <a:rPr lang="en-US"/>
-              <a:t>Third level</a:t>
-            </a:r>
-          </a:p>
-          <a:p>
-            <a:pPr lvl="3"/>
-            <a:r>
-              <a:rPr lang="en-US"/>
-              <a:t>Fourth level</a:t>
-            </a:r>
-          </a:p>
-          <a:p>
-            <a:pPr lvl="4"/>
-            <a:r>
-              <a:rPr lang="en-US"/>
-              <a:t>Fifth level</a:t>
-            </a:r>
-          </a:p>
-        </p:txBody>
-      </p:sp>
-      <p:sp>
-        <p:nvSpPr>
-          <p:cNvPr id="6" name="Footer Placeholder 5"/>
-          <p:cNvSpPr>
-            <a:spLocks noGrp="1"/>
-          </p:cNvSpPr>
-          <p:nvPr>
-            <p:ph type="ftr" sz="quarter" idx="4"/>
-          </p:nvPr>
-        </p:nvSpPr>
-        <p:spPr>
-          <a:xfrm>
-            <a:off x="0" y="8685213"/>
-            <a:ext cx="2971800" cy="458787"/>
-          </a:xfrm>
-          <a:prstGeom prst="rect">
-            <a:avLst/>
-          </a:prstGeom>
-        </p:spPr>
-        <p:txBody>
-          <a:bodyPr vert="horz" lIns="91440" tIns="45720" rIns="91440" bIns="45720" rtlCol="0" anchor="b"/>
-          <a:lstStyle>
-            <a:lvl1pPr algn="l">
-              <a:defRPr sz="1200"/>
-            </a:lvl1pPr>
-          </a:lstStyle>
-          <a:p>
-            <a:endParaRPr lang="en-US"/>
-          </a:p>
-        </p:txBody>
-      </p:sp>
-      <p:sp>
-        <p:nvSpPr>
-          <p:cNvPr id="7" name="Slide Number Placeholder 6"/>
-          <p:cNvSpPr>
-            <a:spLocks noGrp="1"/>
-          </p:cNvSpPr>
-          <p:nvPr>
-            <p:ph type="sldNum" sz="quarter" idx="5"/>
-          </p:nvPr>
-        </p:nvSpPr>
-        <p:spPr>
-          <a:xfrm>
-            <a:off x="3884613" y="8685213"/>
-            <a:ext cx="2971800" cy="458787"/>
-          </a:xfrm>
-          <a:prstGeom prst="rect">
-            <a:avLst/>
-          </a:prstGeom>
-        </p:spPr>
-        <p:txBody>
-          <a:bodyPr vert="horz" lIns="91440" tIns="45720" rIns="91440" bIns="45720" rtlCol="0" anchor="b"/>
-          <a:lstStyle>
-            <a:lvl1pPr algn="r">
-              <a:defRPr sz="1200"/>
-            </a:lvl1pPr>
-          </a:lstStyle>
-          <a:p>
-            <a:fld id="{CE5E9CC1-C706-0F49-92D6-E571CC5EEA8F}" type="slidenum">
-              <a:rPr lang="en-US"/>
-              <a:t>‹#›</a:t>
-            </a:fld>
-            <a:endParaRPr lang="en-US"/>
-          </a:p>
-        </p:txBody>
-      </p:sp>
     </p:spTree>
     <p:extLst>
       <p:ext uri="{BB962C8B-B14F-4D97-AF65-F5344CB8AC3E}">
-        <p14:creationId xmlns:p14="http://schemas.microsoft.com/office/powerpoint/2010/main" val="1024086991"/>
+        <p14:creationId xmlns:p14="http://schemas.microsoft.com/office/powerpoint/2010/main" val="3428566753"/>
       </p:ext>
     </p:extLst>
   </p:cSld>
   <p:clrMap bg1="lt1" tx1="dk1" bg2="lt2" tx2="dk2" accent1="accent1" accent2="accent2" accent3="accent3" accent4="accent4" accent5="accent5" accent6="accent6" hlink="hlink" folHlink="folHlink"/>
   <p:notesStyle>
     <a:lvl1pPr marL="0" algn="l" defTabSz="914400" rtl="0" eaLnBrk="1" latinLnBrk="0" hangingPunct="1">
-      <a:defRPr sz="1200" kern="1200">
+      <a:defRPr kumimoji="1" sz="1200" kern="1200">
         <a:solidFill>
           <a:schemeClr val="tx1"/>
         </a:solidFill>
@@ -499,7 +275,7 @@
       </a:defRPr>
     </a:lvl1pPr>
     <a:lvl2pPr marL="457200" algn="l" defTabSz="914400" rtl="0" eaLnBrk="1" latinLnBrk="0" hangingPunct="1">
-      <a:defRPr sz="1200" kern="1200">
+      <a:defRPr kumimoji="1" sz="1200" kern="1200">
         <a:solidFill>
           <a:schemeClr val="tx1"/>
         </a:solidFill>
@@ -509,7 +285,7 @@
       </a:defRPr>
     </a:lvl2pPr>
     <a:lvl3pPr marL="914400" algn="l" defTabSz="914400" rtl="0" eaLnBrk="1" latinLnBrk="0" hangingPunct="1">
-      <a:defRPr sz="1200" kern="1200">
+      <a:defRPr kumimoji="1" sz="1200" kern="1200">
         <a:solidFill>
           <a:schemeClr val="tx1"/>
         </a:solidFill>
@@ -519,7 +295,7 @@
       </a:defRPr>
     </a:lvl3pPr>
     <a:lvl4pPr marL="1371600" algn="l" defTabSz="914400" rtl="0" eaLnBrk="1" latinLnBrk="0" hangingPunct="1">
-      <a:defRPr sz="1200" kern="1200">
+      <a:defRPr kumimoji="1" sz="1200" kern="1200">
         <a:solidFill>
           <a:schemeClr val="tx1"/>
         </a:solidFill>
@@ -529,7 +305,7 @@
       </a:defRPr>
     </a:lvl4pPr>
     <a:lvl5pPr marL="1828800" algn="l" defTabSz="914400" rtl="0" eaLnBrk="1" latinLnBrk="0" hangingPunct="1">
-      <a:defRPr sz="1200" kern="1200">
+      <a:defRPr kumimoji="1" sz="1200" kern="1200">
         <a:solidFill>
           <a:schemeClr val="tx1"/>
         </a:solidFill>
@@ -539,7 +315,7 @@
       </a:defRPr>
     </a:lvl5pPr>
     <a:lvl6pPr marL="2286000" algn="l" defTabSz="914400" rtl="0" eaLnBrk="1" latinLnBrk="0" hangingPunct="1">
-      <a:defRPr sz="1200" kern="1200">
+      <a:defRPr kumimoji="1" sz="1200" kern="1200">
         <a:solidFill>
           <a:schemeClr val="tx1"/>
         </a:solidFill>
@@ -549,7 +325,7 @@
       </a:defRPr>
     </a:lvl6pPr>
     <a:lvl7pPr marL="2743200" algn="l" defTabSz="914400" rtl="0" eaLnBrk="1" latinLnBrk="0" hangingPunct="1">
-      <a:defRPr sz="1200" kern="1200">
+      <a:defRPr kumimoji="1" sz="1200" kern="1200">
         <a:solidFill>
           <a:schemeClr val="tx1"/>
         </a:solidFill>
@@ -559,7 +335,7 @@
       </a:defRPr>
     </a:lvl7pPr>
     <a:lvl8pPr marL="3200400" algn="l" defTabSz="914400" rtl="0" eaLnBrk="1" latinLnBrk="0" hangingPunct="1">
-      <a:defRPr sz="1200" kern="1200">
+      <a:defRPr kumimoji="1" sz="1200" kern="1200">
         <a:solidFill>
           <a:schemeClr val="tx1"/>
         </a:solidFill>
@@ -569,7 +345,7 @@
       </a:defRPr>
     </a:lvl8pPr>
     <a:lvl9pPr marL="3657600" algn="l" defTabSz="914400" rtl="0" eaLnBrk="1" latinLnBrk="0" hangingPunct="1">
-      <a:defRPr sz="1200" kern="1200">
+      <a:defRPr kumimoji="1" sz="1200" kern="1200">
         <a:solidFill>
           <a:schemeClr val="tx1"/>
         </a:solidFill>
@@ -630,7 +406,6 @@
               <a:rPr lang="en-US" dirty="0"/>
               <a:t>開始。今日は90分で、講座→お話→ワーク→エネルギーの順に進めることを伝える。書くのは由香が画面の中で行うので、仁部さんは話すこと・感じることに集中してOKと伝える。</a:t>
             </a:r>
-            <a:endParaRPr lang="en-US" dirty="0"/>
           </a:p>
         </p:txBody>
       </p:sp>
@@ -718,7 +493,6 @@
               <a:rPr lang="en-US" dirty="0"/>
               <a:t>本人のOKをもらってから、幼少期の質問へ。</a:t>
             </a:r>
-            <a:endParaRPr lang="en-US" dirty="0"/>
           </a:p>
         </p:txBody>
       </p:sp>
@@ -802,10 +576,6 @@
           <a:bodyPr/>
           <a:lstStyle/>
           <a:p>
-            <a:r>
-              <a:rPr lang="en-US" dirty="0"/>
-              <a:t/>
-            </a:r>
             <a:endParaRPr lang="en-US" dirty="0"/>
           </a:p>
         </p:txBody>
@@ -894,7 +664,6 @@
               <a:rPr lang="en-US" dirty="0"/>
               <a:t>お父さんのお酒・家にお金を入れない・毎日の大喧嘩の話が出たら、ワークの場面候補としてメモ。</a:t>
             </a:r>
-            <a:endParaRPr lang="en-US" dirty="0"/>
           </a:p>
         </p:txBody>
       </p:sp>
@@ -982,7 +751,6 @@
               <a:rPr lang="en-US" dirty="0"/>
               <a:t>ここは特にゆっくり。出てきた言葉はワークのSTEP4で使える。</a:t>
             </a:r>
-            <a:endParaRPr lang="en-US" dirty="0"/>
           </a:p>
         </p:txBody>
       </p:sp>
@@ -1070,7 +838,6 @@
               <a:rPr lang="en-US" dirty="0"/>
               <a:t>仁部さんが話してくれたエピソード。怖かった？悲しかった？怒り？寂しさ？と、気持ちに名前をつける手伝いをする。</a:t>
             </a:r>
-            <a:endParaRPr lang="en-US" dirty="0"/>
           </a:p>
         </p:txBody>
       </p:sp>
@@ -1158,7 +925,6 @@
               <a:rPr lang="en-US" dirty="0"/>
               <a:t>聴いたお話を受け取ってから、講座へ。講座の途中で、いま聴いた話（お父さんのお酒・両親の喧嘩など）につなげて話す。</a:t>
             </a:r>
-            <a:endParaRPr lang="en-US" dirty="0"/>
           </a:p>
         </p:txBody>
       </p:sp>
@@ -1246,7 +1012,6 @@
               <a:rPr lang="en-US" dirty="0"/>
               <a:t>ここから15分。1枚ずつの説明ではなく、ひとつのお話としてつなげて話す。</a:t>
             </a:r>
-            <a:endParaRPr lang="en-US" dirty="0"/>
           </a:p>
         </p:txBody>
       </p:sp>
@@ -1334,7 +1099,6 @@
               <a:rPr lang="en-US" dirty="0"/>
               <a:t>物語の入り口。第1部で聴いた仁部さんの話を受けて「それはあなたの意志が弱いからではなく、頭（脳）の仕組みだから」と伝えて、次へ。</a:t>
             </a:r>
-            <a:endParaRPr lang="en-US" dirty="0"/>
           </a:p>
         </p:txBody>
       </p:sp>
@@ -1422,7 +1186,6 @@
               <a:rPr lang="en-US" dirty="0"/>
               <a:t>感情がないと行動は起きない。理性はエネルギーを使う。理論は後付け。→だから、お金の行動を変えるには、理屈ではなく感情に触れる必要がある。次は、その感情を動かしている脳の3つのクセ。</a:t>
             </a:r>
-            <a:endParaRPr lang="en-US" dirty="0"/>
           </a:p>
         </p:txBody>
       </p:sp>
@@ -1510,7 +1273,6 @@
               <a:rPr lang="en-US" dirty="0"/>
               <a:t>言葉だけを見せて、少し間を置く。「ピンクの象を想像しないでください」と言ってから次のスライドへ。</a:t>
             </a:r>
-            <a:endParaRPr lang="en-US" dirty="0"/>
           </a:p>
         </p:txBody>
       </p:sp>
@@ -1598,7 +1360,6 @@
               <a:rPr lang="en-US" dirty="0"/>
               <a:t>全体の流れ。質問は1つずつゆっくり聴いていく。</a:t>
             </a:r>
-            <a:endParaRPr lang="en-US" dirty="0"/>
           </a:p>
         </p:txBody>
       </p:sp>
@@ -1686,7 +1447,6 @@
               <a:rPr lang="en-US" dirty="0"/>
               <a:t>ピンクの象を想像しないでください→想像してしまう。脳は否定語を受け付けない。新しいことを嫌い、変わらない言い訳を上手に作る。</a:t>
             </a:r>
-            <a:endParaRPr lang="en-US" dirty="0"/>
           </a:p>
         </p:txBody>
       </p:sp>
@@ -1774,7 +1534,6 @@
               <a:rPr lang="en-US" dirty="0"/>
               <a:t>強い出来事はトラウマ化して、タグ付きファイルとして保存される。脳は過去のマイナス体験を一般化して未来を予測する。→第1部で聴いたお父さん・お母さんの話は、ここにつながる。では、その強い思いはいつ刻まれるのか？</a:t>
             </a:r>
-            <a:endParaRPr lang="en-US" dirty="0"/>
           </a:p>
         </p:txBody>
       </p:sp>
@@ -1862,7 +1621,6 @@
               <a:rPr lang="en-US" dirty="0"/>
               <a:t>第1部で少し話したゴールデンエイジの、くわしい話。言われ方・見てきたことが、そのまま今の基準になっている。由香さんの言葉で補足する。</a:t>
             </a:r>
-            <a:endParaRPr lang="en-US" dirty="0"/>
           </a:p>
         </p:txBody>
       </p:sp>
@@ -1950,7 +1708,6 @@
               <a:rPr lang="en-US" dirty="0"/>
               <a:t>メロンちょっと食べた→この人の「ちょっと」はどのくらい？　普通＝当たり前は人それぞれ。みんなの当たり前は同じではない。</a:t>
             </a:r>
-            <a:endParaRPr lang="en-US" dirty="0"/>
           </a:p>
         </p:txBody>
       </p:sp>
@@ -2038,7 +1795,6 @@
               <a:rPr lang="en-US" dirty="0"/>
               <a:t>ネガティブ＝情報の入れ替えができない、自分の正しさに固執する。ポジティブ＝入れ替えができる、他の正しさを認められる。</a:t>
             </a:r>
-            <a:endParaRPr lang="en-US" dirty="0"/>
           </a:p>
         </p:txBody>
       </p:sp>
@@ -2126,7 +1882,6 @@
               <a:rPr lang="en-US" dirty="0"/>
               <a:t>焦り・無価値観→嫉妬・怒り→悲しみ→絶対的安心感。「だから、今から感じ切るワークをしましょう」とワークへ。スキップせずに順番に感じることで癒える。無理にポジティブに変えない（ポジ変禁止）。</a:t>
             </a:r>
-            <a:endParaRPr lang="en-US" dirty="0"/>
           </a:p>
         </p:txBody>
       </p:sp>
@@ -2214,7 +1969,6 @@
               <a:rPr lang="en-US" dirty="0"/>
               <a:t>アートシフトワーク その18（エフィカシーを上げる5次元タイムライン）。画面では「5次元」「VAK」「ポジション」の言葉は使わない。ここから40分。思い込みは20個ではなく、1階層目5つ＋2階層目まで（10個くらい）にしぼる。書き込みは由香が画面の表に打ち込む。</a:t>
             </a:r>
-            <a:endParaRPr lang="en-US" dirty="0"/>
           </a:p>
         </p:txBody>
       </p:sp>
@@ -2302,7 +2056,6 @@
               <a:rPr lang="en-US" dirty="0"/>
               <a:t>ワークに入る前に伝える。今日で全部終わらせようとしなくていい、というメッセージ。</a:t>
             </a:r>
-            <a:endParaRPr lang="en-US" dirty="0"/>
           </a:p>
         </p:txBody>
       </p:sp>
@@ -2390,7 +2143,6 @@
               <a:rPr lang="en-US" dirty="0"/>
               <a:t>見せないスライド。画面共有を止めてから読む。読んだら次のスライドで共有を再開。</a:t>
             </a:r>
-            <a:endParaRPr lang="en-US" dirty="0"/>
           </a:p>
         </p:txBody>
       </p:sp>
@@ -2478,7 +2230,6 @@
               <a:rPr lang="en-US" dirty="0"/>
               <a:t>由香が＿＿の所に本人の言葉を打ち込む。ここで出た言葉が、思い込みの入口（ガイドブックの「私は〇〇を達成したい！ただ…」の代わり）。</a:t>
             </a:r>
-            <a:endParaRPr lang="en-US" dirty="0"/>
           </a:p>
         </p:txBody>
       </p:sp>
@@ -2566,7 +2317,6 @@
               <a:rPr lang="en-US" dirty="0"/>
               <a:t>はじめに安心を渡す。今日の目標は「一つ気づいて、一つ持ち帰る」。最後の「最初の一歩」が持ち帰るものになる。</a:t>
             </a:r>
-            <a:endParaRPr lang="en-US" dirty="0"/>
           </a:p>
         </p:txBody>
       </p:sp>
@@ -2654,7 +2404,6 @@
               <a:rPr lang="en-US" dirty="0"/>
               <a:t>どちらでもOK。守ってくれていたなら、まずそれを認めてから次へ。</a:t>
             </a:r>
-            <a:endParaRPr lang="en-US" dirty="0"/>
           </a:p>
         </p:txBody>
       </p:sp>
@@ -2742,7 +2491,6 @@
               <a:rPr lang="en-US" dirty="0"/>
               <a:t>1階層目を5つ以上。出てきたものは次の表に打ち込む。</a:t>
             </a:r>
-            <a:endParaRPr lang="en-US" dirty="0"/>
           </a:p>
         </p:txBody>
       </p:sp>
@@ -2830,7 +2578,6 @@
               <a:rPr lang="en-US" dirty="0"/>
               <a:t>由香が画面共有したまま表に打ち込む。仁部さんは話すだけでOK。10個くらい出たら次へ。1階層目で一番強いものを軸に、2階層目も同じ質問で出す。点数がわからない時はOリング・筋肉反射で。例：情報発信が魅力的でない50点／批判されるのが嫌だ75点。</a:t>
             </a:r>
-            <a:endParaRPr lang="en-US" dirty="0"/>
           </a:p>
         </p:txBody>
       </p:sp>
@@ -2918,7 +2665,6 @@
               <a:rPr lang="en-US" dirty="0"/>
               <a:t>見せないスライド。画面共有を止めてから読む。読んだら次のスライドで共有を再開。</a:t>
             </a:r>
-            <a:endParaRPr lang="en-US" dirty="0"/>
           </a:p>
         </p:txBody>
       </p:sp>
@@ -3006,7 +2752,6 @@
               <a:rPr lang="en-US" dirty="0"/>
               <a:t>表の上位3つに印をつける→その中で一番邪魔しているものを1つ。判断できない時はOリング・筋肉反射で。</a:t>
             </a:r>
-            <a:endParaRPr lang="en-US" dirty="0"/>
           </a:p>
         </p:txBody>
       </p:sp>
@@ -3094,7 +2839,6 @@
               <a:rPr lang="en-US" dirty="0"/>
               <a:t>YESなら、その思い込みでSTEP4へ。</a:t>
             </a:r>
-            <a:endParaRPr lang="en-US" dirty="0"/>
           </a:p>
         </p:txBody>
       </p:sp>
@@ -3182,7 +2926,6 @@
               <a:rPr lang="en-US" dirty="0"/>
               <a:t>手順：①今の自分の場所に立ち、今の気持ちを話す ②思い込みが生まれた過去の場面へ移動し、見える・色・聞こえる・体の感じで話す ③その場所から出て、自分を外から見る→次の2つの質問 ④もう一度その場所に戻り、全部吐き出す。VAKという言葉は使わない。お父さんのお酒・両親の喧嘩の場面が出る可能性が高い。感情が強く出たら止めて呼吸に戻す。ポジ変をしない。</a:t>
             </a:r>
-            <a:endParaRPr lang="en-US" dirty="0"/>
           </a:p>
         </p:txBody>
       </p:sp>
@@ -3270,7 +3013,6 @@
               <a:rPr lang="en-US" dirty="0"/>
               <a:t>ポジションの外から、子どもの頃の自分を見ながら。</a:t>
             </a:r>
-            <a:endParaRPr lang="en-US" dirty="0"/>
           </a:p>
         </p:txBody>
       </p:sp>
@@ -3354,10 +3096,6 @@
           <a:bodyPr/>
           <a:lstStyle/>
           <a:p>
-            <a:r>
-              <a:rPr lang="en-US" dirty="0"/>
-              <a:t/>
-            </a:r>
             <a:endParaRPr lang="en-US" dirty="0"/>
           </a:p>
         </p:txBody>
@@ -3446,7 +3184,6 @@
               <a:rPr lang="en-US" dirty="0"/>
               <a:t>見える・色・聞こえる・体の感じで、理想の自分をはっきりさせる。その理想のあなたから、次のスライドで「あの時のあなた」に言葉をかける。</a:t>
             </a:r>
-            <a:endParaRPr lang="en-US" dirty="0"/>
           </a:p>
         </p:txBody>
       </p:sp>
@@ -3534,7 +3271,6 @@
               <a:rPr lang="en-US" dirty="0"/>
               <a:t>ここから20分。1問ずつ、ゆっくり聴く。</a:t>
             </a:r>
-            <a:endParaRPr lang="en-US" dirty="0"/>
           </a:p>
         </p:txBody>
       </p:sp>
@@ -3622,7 +3358,6 @@
               <a:rPr lang="en-US" dirty="0"/>
               <a:t>＿＿に本人の言葉を打ち込む。言いたかったことを全部吐き出す（100％出たか？）。怒鳴る・泣く・大声を出す・体を大きく動かす・殴るなどしてOK。相手が聞いてくれている・謝っているイメージで。出し切るまで待つ。</a:t>
             </a:r>
-            <a:endParaRPr lang="en-US" dirty="0"/>
           </a:p>
         </p:txBody>
       </p:sp>
@@ -3710,7 +3445,6 @@
               <a:rPr lang="en-US" dirty="0"/>
               <a:t>由香が本人の言葉をそのまま打ち込む。言葉は本人が決める（由香が作らない）。</a:t>
             </a:r>
-            <a:endParaRPr lang="en-US" dirty="0"/>
           </a:p>
         </p:txBody>
       </p:sp>
@@ -3798,7 +3532,6 @@
               <a:rPr lang="en-US" dirty="0"/>
               <a:t>ワークで残ったものをエネルギーで取り除く。</a:t>
             </a:r>
-            <a:endParaRPr lang="en-US" dirty="0"/>
           </a:p>
         </p:txBody>
       </p:sp>
@@ -3886,7 +3619,6 @@
               <a:rPr lang="en-US" dirty="0"/>
               <a:t>第1部の「1〜10で言うと、今どの段階ですか？」で聞いた数字と比べる。由香が＿＿に打ち込む。</a:t>
             </a:r>
-            <a:endParaRPr lang="en-US" dirty="0"/>
           </a:p>
         </p:txBody>
       </p:sp>
@@ -3974,7 +3706,6 @@
               <a:rPr lang="en-US" dirty="0"/>
               <a:t>本人の言葉で言ってもらう。</a:t>
             </a:r>
-            <a:endParaRPr lang="en-US" dirty="0"/>
           </a:p>
         </p:txBody>
       </p:sp>
@@ -4062,7 +3793,6 @@
               <a:rPr lang="en-US" dirty="0"/>
               <a:t>「一度で終わりではなく、繰り返し向き合う」につなげる。</a:t>
             </a:r>
-            <a:endParaRPr lang="en-US" dirty="0"/>
           </a:p>
         </p:txBody>
       </p:sp>
@@ -4150,7 +3880,6 @@
               <a:rPr lang="en-US" dirty="0"/>
               <a:t>すべての土台は絶対的安心感。「何をやっても、やらなくても大丈夫」「嫌なことをやめても、愛される」。</a:t>
             </a:r>
-            <a:endParaRPr lang="en-US" dirty="0"/>
           </a:p>
         </p:txBody>
       </p:sp>
@@ -4238,7 +3967,6 @@
               <a:rPr lang="en-US" dirty="0"/>
               <a:t>終了。1週間後にLINEで「その後いかがですか？」と連絡する。</a:t>
             </a:r>
-            <a:endParaRPr lang="en-US" dirty="0"/>
           </a:p>
         </p:txBody>
       </p:sp>
@@ -4326,7 +4054,6 @@
               <a:rPr lang="en-US" dirty="0"/>
               <a:t>お金のブロックについて、本人の言葉で。</a:t>
             </a:r>
-            <a:endParaRPr lang="en-US" dirty="0"/>
           </a:p>
         </p:txBody>
       </p:sp>
@@ -4410,10 +4137,6 @@
           <a:bodyPr/>
           <a:lstStyle/>
           <a:p>
-            <a:r>
-              <a:rPr lang="en-US" dirty="0"/>
-              <a:t/>
-            </a:r>
             <a:endParaRPr lang="en-US" dirty="0"/>
           </a:p>
         </p:txBody>
@@ -4502,7 +4225,6 @@
               <a:rPr lang="en-US" dirty="0"/>
               <a:t>数字をメモしておく（最後の変化の確認にも使える）。</a:t>
             </a:r>
-            <a:endParaRPr lang="en-US" dirty="0"/>
           </a:p>
         </p:txBody>
       </p:sp>
@@ -4586,10 +4308,6 @@
           <a:bodyPr/>
           <a:lstStyle/>
           <a:p>
-            <a:r>
-              <a:rPr lang="en-US" dirty="0"/>
-              <a:t/>
-            </a:r>
             <a:endParaRPr lang="en-US" dirty="0"/>
           </a:p>
         </p:txBody>
@@ -4678,7 +4396,6 @@
               <a:rPr lang="en-US" dirty="0"/>
               <a:t>ここでは短く一言だけ。くわしくは第2部の「ゴールデンエイジ」のスライドで話す。</a:t>
             </a:r>
-            <a:endParaRPr lang="en-US" dirty="0"/>
           </a:p>
         </p:txBody>
       </p:sp>
@@ -4754,7 +4471,7 @@
     <p:bg>
       <p:bgPr>
         <a:blipFill dpi="0" rotWithShape="1">
-          <a:blip r:embed="rId1">
+          <a:blip r:embed="rId2">
             <a:lum/>
           </a:blip>
           <a:srcRect/>
@@ -4782,9 +4499,11 @@
       <p:sp>
         <p:nvSpPr>
           <p:cNvPr id="2" name="Text 0"/>
-          <p:cNvSpPr/>
-          <p:nvPr>
-            <p:ph idx="100" type="title" hasCustomPrompt="1"/>
+          <p:cNvSpPr>
+            <a:spLocks noGrp="1"/>
+          </p:cNvSpPr>
+          <p:nvPr>
+            <p:ph type="title" idx="100" hasCustomPrompt="1"/>
           </p:nvPr>
         </p:nvSpPr>
         <p:spPr>
@@ -4801,7 +4520,7 @@
         <p:txBody>
           <a:bodyPr wrap="square" rtlCol="0"/>
           <a:lstStyle>
-            <a:lvl1pPr algn="ctr" indent="0" marL="0">
+            <a:lvl1pPr marL="0" indent="0" algn="ctr">
               <a:buNone/>
               <a:defRPr lang="en-US" sz="3800" b="1" dirty="0">
                 <a:solidFill>
@@ -4814,7 +4533,7 @@
             </a:lvl1pPr>
           </a:lstStyle>
           <a:p>
-            <a:pPr algn="ctr" indent="0" marL="0">
+            <a:pPr marL="0" indent="0" algn="ctr">
               <a:buNone/>
             </a:pPr>
             <a:endParaRPr lang="en-US" sz="3800" dirty="0"/>
@@ -4824,9 +4543,11 @@
       <p:sp>
         <p:nvSpPr>
           <p:cNvPr id="3" name="Text 0"/>
-          <p:cNvSpPr/>
-          <p:nvPr>
-            <p:ph idx="101" type="body" hasCustomPrompt="1"/>
+          <p:cNvSpPr>
+            <a:spLocks noGrp="1"/>
+          </p:cNvSpPr>
+          <p:nvPr>
+            <p:ph type="body" idx="101" hasCustomPrompt="1"/>
           </p:nvPr>
         </p:nvSpPr>
         <p:spPr>
@@ -4843,7 +4564,7 @@
         <p:txBody>
           <a:bodyPr wrap="square" rtlCol="0"/>
           <a:lstStyle>
-            <a:lvl1pPr algn="ctr" indent="0" marL="0">
+            <a:lvl1pPr marL="0" indent="0" algn="ctr">
               <a:buNone/>
               <a:defRPr lang="en-US" sz="1600" b="1" dirty="0">
                 <a:solidFill>
@@ -4853,7 +4574,7 @@
             </a:lvl1pPr>
           </a:lstStyle>
           <a:p>
-            <a:pPr algn="ctr" indent="0" marL="0">
+            <a:pPr marL="0" indent="0" algn="ctr">
               <a:buNone/>
             </a:pPr>
             <a:endParaRPr lang="en-US" sz="1600" dirty="0"/>
@@ -4874,7 +4595,7 @@
     <p:bg>
       <p:bgPr>
         <a:blipFill dpi="0" rotWithShape="1">
-          <a:blip r:embed="rId1">
+          <a:blip r:embed="rId2">
             <a:lum/>
           </a:blip>
           <a:srcRect/>
@@ -4902,9 +4623,11 @@
       <p:sp>
         <p:nvSpPr>
           <p:cNvPr id="2" name="Text 0"/>
-          <p:cNvSpPr/>
-          <p:nvPr>
-            <p:ph idx="100" type="title" hasCustomPrompt="1"/>
+          <p:cNvSpPr>
+            <a:spLocks noGrp="1"/>
+          </p:cNvSpPr>
+          <p:nvPr>
+            <p:ph type="title" idx="100" hasCustomPrompt="1"/>
           </p:nvPr>
         </p:nvSpPr>
         <p:spPr>
@@ -4921,7 +4644,7 @@
         <p:txBody>
           <a:bodyPr wrap="square" rtlCol="0"/>
           <a:lstStyle>
-            <a:lvl1pPr algn="ctr" indent="0" marL="0">
+            <a:lvl1pPr marL="0" indent="0" algn="ctr">
               <a:buNone/>
               <a:defRPr lang="en-US" sz="3600" b="1" dirty="0">
                 <a:solidFill>
@@ -4934,7 +4657,7 @@
             </a:lvl1pPr>
           </a:lstStyle>
           <a:p>
-            <a:pPr algn="ctr" indent="0" marL="0">
+            <a:pPr marL="0" indent="0" algn="ctr">
               <a:buNone/>
             </a:pPr>
             <a:endParaRPr lang="en-US" sz="3600" dirty="0"/>
@@ -4944,9 +4667,11 @@
       <p:sp>
         <p:nvSpPr>
           <p:cNvPr id="3" name="Text 0"/>
-          <p:cNvSpPr/>
-          <p:nvPr>
-            <p:ph idx="101" type="body" hasCustomPrompt="1"/>
+          <p:cNvSpPr>
+            <a:spLocks noGrp="1"/>
+          </p:cNvSpPr>
+          <p:nvPr>
+            <p:ph type="body" idx="101" hasCustomPrompt="1"/>
           </p:nvPr>
         </p:nvSpPr>
         <p:spPr>
@@ -4963,7 +4688,7 @@
         <p:txBody>
           <a:bodyPr wrap="square" rtlCol="0"/>
           <a:lstStyle>
-            <a:lvl1pPr algn="ctr" indent="0" marL="0">
+            <a:lvl1pPr marL="0" indent="0" algn="ctr">
               <a:buNone/>
               <a:defRPr lang="en-US" sz="1600" dirty="0">
                 <a:solidFill>
@@ -4973,7 +4698,7 @@
             </a:lvl1pPr>
           </a:lstStyle>
           <a:p>
-            <a:pPr algn="ctr" indent="0" marL="0">
+            <a:pPr marL="0" indent="0" algn="ctr">
               <a:buNone/>
             </a:pPr>
             <a:endParaRPr lang="en-US" sz="1600" dirty="0"/>
@@ -4996,6 +4721,7 @@
         <a:solidFill>
           <a:srgbClr val="FFFFFF"/>
         </a:solidFill>
+        <a:effectLst/>
       </p:bgPr>
     </p:bg>
     <p:spTree>
@@ -5015,9 +4741,11 @@
       <p:sp>
         <p:nvSpPr>
           <p:cNvPr id="2" name="Text 0"/>
-          <p:cNvSpPr/>
-          <p:nvPr>
-            <p:ph idx="100" type="title" hasCustomPrompt="1"/>
+          <p:cNvSpPr>
+            <a:spLocks noGrp="1"/>
+          </p:cNvSpPr>
+          <p:nvPr>
+            <p:ph type="title" idx="100" hasCustomPrompt="1"/>
           </p:nvPr>
         </p:nvSpPr>
         <p:spPr>
@@ -5034,7 +4762,7 @@
         <p:txBody>
           <a:bodyPr wrap="square" rtlCol="0"/>
           <a:lstStyle>
-            <a:lvl1pPr algn="l" indent="0" marL="0">
+            <a:lvl1pPr marL="0" indent="0" algn="l">
               <a:buNone/>
               <a:defRPr lang="en-US" sz="2400" b="1" dirty="0">
                 <a:solidFill>
@@ -5047,7 +4775,7 @@
             </a:lvl1pPr>
           </a:lstStyle>
           <a:p>
-            <a:pPr algn="l" indent="0" marL="0">
+            <a:pPr marL="0" indent="0" algn="l">
               <a:buNone/>
             </a:pPr>
             <a:endParaRPr lang="en-US" sz="2400" dirty="0"/>
@@ -5075,7 +4803,7 @@
           <a:bodyPr wrap="square" lIns="0" tIns="0" rIns="0" bIns="0" rtlCol="0" anchor="ctr"/>
           <a:lstStyle/>
           <a:p>
-            <a:pPr indent="0" marL="0">
+            <a:pPr marL="0" indent="0">
               <a:buNone/>
             </a:pPr>
             <a:r>
@@ -5110,7 +4838,7 @@
           </a:prstGeom>
           <a:extLst>
             <a:ext uri="{C572A759-6A51-4108-AA02-DFA0A04FC94B}">
-              <ma14:wrappingTextBoxFlag xmlns:ma14="http://schemas.microsoft.com/office/mac/drawingml/2011/main" val="0"/>
+              <ma14:wrappingTextBoxFlag xmlns:ma14="http://schemas.microsoft.com/office/mac/drawingml/2011/main" xmlns="" val="0"/>
             </a:ext>
           </a:extLst>
         </p:spPr>
@@ -5128,8 +4856,8 @@
           <a:p>
             <a:pPr algn="r"/>
             <a:fld id="{F7021451-1387-4CA6-816F-3879F97B5CBC}" type="slidenum">
-              <a:rPr b="0" lang="en-US"/>
-              <a:t>1004</a:t>
+              <a:rPr lang="en-US" b="0"/>
+              <a:t>‹#›</a:t>
             </a:fld>
             <a:endParaRPr lang="en-US"/>
           </a:p>
@@ -5149,7 +4877,7 @@
     <p:bg>
       <p:bgPr>
         <a:blipFill dpi="0" rotWithShape="1">
-          <a:blip r:embed="rId1">
+          <a:blip r:embed="rId2">
             <a:lum/>
           </a:blip>
           <a:srcRect/>
@@ -5177,9 +4905,11 @@
       <p:sp>
         <p:nvSpPr>
           <p:cNvPr id="2" name="Text 0"/>
-          <p:cNvSpPr/>
-          <p:nvPr>
-            <p:ph idx="100" type="title" hasCustomPrompt="1"/>
+          <p:cNvSpPr>
+            <a:spLocks noGrp="1"/>
+          </p:cNvSpPr>
+          <p:nvPr>
+            <p:ph type="title" idx="100" hasCustomPrompt="1"/>
           </p:nvPr>
         </p:nvSpPr>
         <p:spPr>
@@ -5196,7 +4926,7 @@
         <p:txBody>
           <a:bodyPr wrap="square" rtlCol="0"/>
           <a:lstStyle>
-            <a:lvl1pPr algn="ctr" indent="0" marL="0">
+            <a:lvl1pPr marL="0" indent="0" algn="ctr">
               <a:buNone/>
               <a:defRPr lang="en-US" sz="3200" b="1" dirty="0">
                 <a:solidFill>
@@ -5209,7 +4939,7 @@
             </a:lvl1pPr>
           </a:lstStyle>
           <a:p>
-            <a:pPr algn="ctr" indent="0" marL="0">
+            <a:pPr marL="0" indent="0" algn="ctr">
               <a:buNone/>
             </a:pPr>
             <a:endParaRPr lang="en-US" sz="3200" dirty="0"/>
@@ -5219,9 +4949,11 @@
       <p:sp>
         <p:nvSpPr>
           <p:cNvPr id="3" name="Text 0"/>
-          <p:cNvSpPr/>
-          <p:nvPr>
-            <p:ph idx="101" type="body" hasCustomPrompt="1"/>
+          <p:cNvSpPr>
+            <a:spLocks noGrp="1"/>
+          </p:cNvSpPr>
+          <p:nvPr>
+            <p:ph type="body" idx="101" hasCustomPrompt="1"/>
           </p:nvPr>
         </p:nvSpPr>
         <p:spPr>
@@ -5238,7 +4970,7 @@
         <p:txBody>
           <a:bodyPr wrap="square" rtlCol="0"/>
           <a:lstStyle>
-            <a:lvl1pPr algn="ctr" indent="0" marL="0">
+            <a:lvl1pPr marL="0" indent="0" algn="ctr">
               <a:buNone/>
               <a:defRPr lang="en-US" sz="1500" dirty="0">
                 <a:solidFill>
@@ -5248,7 +4980,7 @@
             </a:lvl1pPr>
           </a:lstStyle>
           <a:p>
-            <a:pPr algn="ctr" indent="0" marL="0">
+            <a:pPr marL="0" indent="0" algn="ctr">
               <a:buNone/>
             </a:pPr>
             <a:endParaRPr lang="en-US" sz="1500" dirty="0"/>
@@ -5276,7 +5008,7 @@
           <a:bodyPr wrap="square" lIns="0" tIns="0" rIns="0" bIns="0" rtlCol="0" anchor="ctr"/>
           <a:lstStyle/>
           <a:p>
-            <a:pPr indent="0" marL="0">
+            <a:pPr marL="0" indent="0">
               <a:buNone/>
             </a:pPr>
             <a:r>
@@ -5311,7 +5043,7 @@
           </a:prstGeom>
           <a:extLst>
             <a:ext uri="{C572A759-6A51-4108-AA02-DFA0A04FC94B}">
-              <ma14:wrappingTextBoxFlag xmlns:ma14="http://schemas.microsoft.com/office/mac/drawingml/2011/main" val="0"/>
+              <ma14:wrappingTextBoxFlag xmlns:ma14="http://schemas.microsoft.com/office/mac/drawingml/2011/main" xmlns="" val="0"/>
             </a:ext>
           </a:extLst>
         </p:spPr>
@@ -5329,8 +5061,8 @@
           <a:p>
             <a:pPr algn="r"/>
             <a:fld id="{F7021451-1387-4CA6-816F-3879F97B5CBC}" type="slidenum">
-              <a:rPr b="0" lang="en-US"/>
-              <a:t>1005</a:t>
+              <a:rPr lang="en-US" b="0"/>
+              <a:t>‹#›</a:t>
             </a:fld>
             <a:endParaRPr lang="en-US"/>
           </a:p>
@@ -5352,6 +5084,7 @@
         <a:solidFill>
           <a:srgbClr val="FFFFFF"/>
         </a:solidFill>
+        <a:effectLst/>
       </p:bgPr>
     </p:bg>
     <p:spTree>
@@ -5379,6 +5112,11 @@
 <file path=ppt/slideMasters/slideMaster1.xml><?xml version="1.0" encoding="utf-8"?>
 <p:sldMaster xmlns:a="http://schemas.openxmlformats.org/drawingml/2006/main" xmlns:r="http://schemas.openxmlformats.org/officeDocument/2006/relationships" xmlns:p="http://schemas.openxmlformats.org/presentationml/2006/main">
   <p:cSld>
+    <p:bg>
+      <p:bgRef idx="1001">
+        <a:schemeClr val="bg1"/>
+      </p:bgRef>
+    </p:bg>
     <p:spTree>
       <p:nvGrpSpPr>
         <p:cNvPr id="1" name=""/>
@@ -5413,7 +5151,7 @@
           </a:prstGeom>
           <a:extLst>
             <a:ext uri="{C572A759-6A51-4108-AA02-DFA0A04FC94B}">
-              <ma14:wrappingTextBoxFlag xmlns:ma14="http://schemas.microsoft.com/office/mac/drawingml/2011/main" val="0"/>
+              <ma14:wrappingTextBoxFlag xmlns:ma14="http://schemas.microsoft.com/office/mac/drawingml/2011/main" xmlns="" val="0"/>
             </a:ext>
           </a:extLst>
         </p:spPr>
@@ -5431,8 +5169,8 @@
           <a:p>
             <a:pPr algn="r"/>
             <a:fld id="{F7021451-1387-4CA6-816F-3879F97B5CBC}" type="slidenum">
-              <a:rPr b="0" lang="en-US"/>
-              <a:t>null</a:t>
+              <a:rPr lang="en-US" b="0"/>
+              <a:t>‹#›</a:t>
             </a:fld>
             <a:endParaRPr lang="en-US"/>
           </a:p>
@@ -5722,14 +5460,14 @@
       </p:grpSpPr>
       <p:pic>
         <p:nvPicPr>
-          <p:cNvPr id="2" name="Image 0" descr="海音ロゴ">    </p:cNvPr>
+          <p:cNvPr id="2" name="Image 0" descr="海音ロゴ"/>
           <p:cNvPicPr>
             <a:picLocks noChangeAspect="1"/>
           </p:cNvPicPr>
           <p:nvPr/>
         </p:nvPicPr>
         <p:blipFill>
-          <a:blip r:embed="rId1"/>
+          <a:blip r:embed="rId3"/>
           <a:stretch>
             <a:fillRect/>
           </a:stretch>
@@ -5747,9 +5485,11 @@
       <p:sp>
         <p:nvSpPr>
           <p:cNvPr id="3" name="Text 0"/>
-          <p:cNvSpPr/>
-          <p:nvPr>
-            <p:ph idx="100" type="title" hasCustomPrompt="1"/>
+          <p:cNvSpPr>
+            <a:spLocks noGrp="1"/>
+          </p:cNvSpPr>
+          <p:nvPr>
+            <p:ph type="title" idx="100" hasCustomPrompt="1"/>
           </p:nvPr>
         </p:nvSpPr>
         <p:spPr>
@@ -5767,7 +5507,7 @@
           <a:bodyPr wrap="square" rtlCol="0" anchor="ctr"/>
           <a:lstStyle/>
           <a:p>
-            <a:pPr algn="ctr" indent="0" marL="0">
+            <a:pPr marL="0" indent="0" algn="ctr">
               <a:buNone/>
             </a:pPr>
             <a:r>
@@ -5784,7 +5524,7 @@
             <a:endParaRPr lang="en-US" sz="3800" dirty="0"/>
           </a:p>
           <a:p>
-            <a:pPr algn="ctr" indent="0" marL="0">
+            <a:pPr marL="0" indent="0" algn="ctr">
               <a:buNone/>
             </a:pPr>
             <a:r>
@@ -5805,9 +5545,11 @@
       <p:sp>
         <p:nvSpPr>
           <p:cNvPr id="4" name="Text 0"/>
-          <p:cNvSpPr/>
-          <p:nvPr>
-            <p:ph idx="101" type="body" hasCustomPrompt="1"/>
+          <p:cNvSpPr>
+            <a:spLocks noGrp="1"/>
+          </p:cNvSpPr>
+          <p:nvPr>
+            <p:ph type="body" idx="101" hasCustomPrompt="1"/>
           </p:nvPr>
         </p:nvSpPr>
         <p:spPr>
@@ -5825,7 +5567,7 @@
           <a:bodyPr wrap="square" rtlCol="0" anchor="t"/>
           <a:lstStyle/>
           <a:p>
-            <a:pPr algn="ctr" indent="0" marL="0">
+            <a:pPr marL="0" indent="0" algn="ctr">
               <a:buNone/>
             </a:pPr>
             <a:r>
@@ -5839,7 +5581,7 @@
             <a:endParaRPr lang="en-US" sz="1600" dirty="0"/>
           </a:p>
           <a:p>
-            <a:pPr algn="ctr" indent="0" marL="0">
+            <a:pPr marL="0" indent="0" algn="ctr">
               <a:buNone/>
             </a:pPr>
             <a:r>
@@ -5902,7 +5644,10 @@
         </p:spPr>
         <p:txBody>
           <a:bodyPr/>
-          <a:p/>
+          <a:lstStyle/>
+          <a:p>
+            <a:endParaRPr/>
+          </a:p>
         </p:txBody>
       </p:sp>
       <p:sp>
@@ -5926,7 +5671,7 @@
           <a:bodyPr wrap="square" lIns="0" tIns="0" rIns="0" bIns="0" rtlCol="0" anchor="t"/>
           <a:lstStyle/>
           <a:p>
-            <a:pPr algn="ctr" indent="0" marL="0">
+            <a:pPr marL="0" indent="0" algn="ctr">
               <a:buNone/>
             </a:pPr>
             <a:r>
@@ -5944,9 +5689,11 @@
       <p:sp>
         <p:nvSpPr>
           <p:cNvPr id="4" name="Text 0"/>
-          <p:cNvSpPr/>
-          <p:nvPr>
-            <p:ph idx="100" type="title" hasCustomPrompt="1"/>
+          <p:cNvSpPr>
+            <a:spLocks noGrp="1"/>
+          </p:cNvSpPr>
+          <p:nvPr>
+            <p:ph type="title" idx="100" hasCustomPrompt="1"/>
           </p:nvPr>
         </p:nvSpPr>
         <p:spPr>
@@ -5964,7 +5711,7 @@
           <a:bodyPr wrap="square" rtlCol="0" anchor="ctr"/>
           <a:lstStyle/>
           <a:p>
-            <a:pPr algn="ctr" indent="0" marL="0">
+            <a:pPr marL="0" indent="0" algn="ctr">
               <a:buNone/>
             </a:pPr>
             <a:r>
@@ -5981,7 +5728,7 @@
             <a:endParaRPr lang="en-US" sz="3200" dirty="0"/>
           </a:p>
           <a:p>
-            <a:pPr algn="ctr" indent="0" marL="0">
+            <a:pPr marL="0" indent="0" algn="ctr">
               <a:buNone/>
             </a:pPr>
             <a:r>
@@ -5998,7 +5745,7 @@
             <a:endParaRPr lang="en-US" sz="3200" dirty="0"/>
           </a:p>
           <a:p>
-            <a:pPr algn="ctr" indent="0" marL="0">
+            <a:pPr marL="0" indent="0" algn="ctr">
               <a:buNone/>
             </a:pPr>
             <a:r>
@@ -6019,9 +5766,11 @@
       <p:sp>
         <p:nvSpPr>
           <p:cNvPr id="5" name="Text 0"/>
-          <p:cNvSpPr/>
-          <p:nvPr>
-            <p:ph idx="101" type="body" hasCustomPrompt="1"/>
+          <p:cNvSpPr>
+            <a:spLocks noGrp="1"/>
+          </p:cNvSpPr>
+          <p:nvPr>
+            <p:ph type="body" idx="101" hasCustomPrompt="1"/>
           </p:nvPr>
         </p:nvSpPr>
         <p:spPr>
@@ -6039,7 +5788,7 @@
           <a:bodyPr wrap="square" rtlCol="0" anchor="t"/>
           <a:lstStyle/>
           <a:p>
-            <a:pPr algn="ctr" indent="0" marL="0">
+            <a:pPr marL="0" indent="0" algn="ctr">
               <a:buNone/>
             </a:pPr>
             <a:r>
@@ -6053,7 +5802,7 @@
             <a:endParaRPr lang="en-US" sz="1500" dirty="0"/>
           </a:p>
           <a:p>
-            <a:pPr algn="ctr" indent="0" marL="0">
+            <a:pPr marL="0" indent="0" algn="ctr">
               <a:buNone/>
             </a:pPr>
             <a:r>
@@ -6088,7 +5837,7 @@
           </a:prstGeom>
           <a:extLst>
             <a:ext uri="{C572A759-6A51-4108-AA02-DFA0A04FC94B}">
-              <ma14:wrappingTextBoxFlag xmlns:ma14="http://schemas.microsoft.com/office/mac/drawingml/2011/main" val="0"/>
+              <ma14:wrappingTextBoxFlag xmlns:ma14="http://schemas.microsoft.com/office/mac/drawingml/2011/main" xmlns="" val="0"/>
             </a:ext>
           </a:extLst>
         </p:spPr>
@@ -6106,7 +5855,7 @@
           <a:p>
             <a:pPr algn="r"/>
             <a:fld id="{F7021451-1387-4CA6-816F-3879F97B5CBC}" type="slidenum">
-              <a:rPr b="0" lang="en-US"/>
+              <a:rPr lang="en-US" b="0"/>
               <a:t>10</a:t>
             </a:fld>
             <a:endParaRPr lang="en-US"/>
@@ -6161,7 +5910,10 @@
         </p:spPr>
         <p:txBody>
           <a:bodyPr/>
-          <a:p/>
+          <a:lstStyle/>
+          <a:p>
+            <a:endParaRPr/>
+          </a:p>
         </p:txBody>
       </p:sp>
       <p:sp>
@@ -6185,7 +5937,7 @@
           <a:bodyPr wrap="square" lIns="0" tIns="0" rIns="0" bIns="0" rtlCol="0" anchor="t"/>
           <a:lstStyle/>
           <a:p>
-            <a:pPr algn="ctr" indent="0" marL="0">
+            <a:pPr marL="0" indent="0" algn="ctr">
               <a:buNone/>
             </a:pPr>
             <a:r>
@@ -6203,9 +5955,11 @@
       <p:sp>
         <p:nvSpPr>
           <p:cNvPr id="4" name="Text 0"/>
-          <p:cNvSpPr/>
-          <p:nvPr>
-            <p:ph idx="100" type="title" hasCustomPrompt="1"/>
+          <p:cNvSpPr>
+            <a:spLocks noGrp="1"/>
+          </p:cNvSpPr>
+          <p:nvPr>
+            <p:ph type="title" idx="100" hasCustomPrompt="1"/>
           </p:nvPr>
         </p:nvSpPr>
         <p:spPr>
@@ -6223,7 +5977,7 @@
           <a:bodyPr wrap="square" rtlCol="0" anchor="ctr"/>
           <a:lstStyle/>
           <a:p>
-            <a:pPr algn="ctr" indent="0" marL="0">
+            <a:pPr marL="0" indent="0" algn="ctr">
               <a:buNone/>
             </a:pPr>
             <a:r>
@@ -6240,7 +5994,7 @@
             <a:endParaRPr lang="en-US" sz="3200" dirty="0"/>
           </a:p>
           <a:p>
-            <a:pPr algn="ctr" indent="0" marL="0">
+            <a:pPr marL="0" indent="0" algn="ctr">
               <a:buNone/>
             </a:pPr>
             <a:r>
@@ -6278,7 +6032,7 @@
           </a:prstGeom>
           <a:extLst>
             <a:ext uri="{C572A759-6A51-4108-AA02-DFA0A04FC94B}">
-              <ma14:wrappingTextBoxFlag xmlns:ma14="http://schemas.microsoft.com/office/mac/drawingml/2011/main" val="0"/>
+              <ma14:wrappingTextBoxFlag xmlns:ma14="http://schemas.microsoft.com/office/mac/drawingml/2011/main" xmlns="" val="0"/>
             </a:ext>
           </a:extLst>
         </p:spPr>
@@ -6296,7 +6050,7 @@
           <a:p>
             <a:pPr algn="r"/>
             <a:fld id="{F7021451-1387-4CA6-816F-3879F97B5CBC}" type="slidenum">
-              <a:rPr b="0" lang="en-US"/>
+              <a:rPr lang="en-US" b="0"/>
               <a:t>11</a:t>
             </a:fld>
             <a:endParaRPr lang="en-US"/>
@@ -6351,7 +6105,10 @@
         </p:spPr>
         <p:txBody>
           <a:bodyPr/>
-          <a:p/>
+          <a:lstStyle/>
+          <a:p>
+            <a:endParaRPr/>
+          </a:p>
         </p:txBody>
       </p:sp>
       <p:sp>
@@ -6375,7 +6132,7 @@
           <a:bodyPr wrap="square" lIns="0" tIns="0" rIns="0" bIns="0" rtlCol="0" anchor="t"/>
           <a:lstStyle/>
           <a:p>
-            <a:pPr algn="ctr" indent="0" marL="0">
+            <a:pPr marL="0" indent="0" algn="ctr">
               <a:buNone/>
             </a:pPr>
             <a:r>
@@ -6393,9 +6150,11 @@
       <p:sp>
         <p:nvSpPr>
           <p:cNvPr id="4" name="Text 0"/>
-          <p:cNvSpPr/>
-          <p:nvPr>
-            <p:ph idx="100" type="title" hasCustomPrompt="1"/>
+          <p:cNvSpPr>
+            <a:spLocks noGrp="1"/>
+          </p:cNvSpPr>
+          <p:nvPr>
+            <p:ph type="title" idx="100" hasCustomPrompt="1"/>
           </p:nvPr>
         </p:nvSpPr>
         <p:spPr>
@@ -6413,7 +6172,7 @@
           <a:bodyPr wrap="square" rtlCol="0" anchor="ctr"/>
           <a:lstStyle/>
           <a:p>
-            <a:pPr algn="ctr" indent="0" marL="0">
+            <a:pPr marL="0" indent="0" algn="ctr">
               <a:buNone/>
             </a:pPr>
             <a:r>
@@ -6430,7 +6189,7 @@
             <a:endParaRPr lang="en-US" sz="3200" dirty="0"/>
           </a:p>
           <a:p>
-            <a:pPr algn="ctr" indent="0" marL="0">
+            <a:pPr marL="0" indent="0" algn="ctr">
               <a:buNone/>
             </a:pPr>
             <a:r>
@@ -6468,7 +6227,7 @@
           </a:prstGeom>
           <a:extLst>
             <a:ext uri="{C572A759-6A51-4108-AA02-DFA0A04FC94B}">
-              <ma14:wrappingTextBoxFlag xmlns:ma14="http://schemas.microsoft.com/office/mac/drawingml/2011/main" val="0"/>
+              <ma14:wrappingTextBoxFlag xmlns:ma14="http://schemas.microsoft.com/office/mac/drawingml/2011/main" xmlns="" val="0"/>
             </a:ext>
           </a:extLst>
         </p:spPr>
@@ -6486,7 +6245,7 @@
           <a:p>
             <a:pPr algn="r"/>
             <a:fld id="{F7021451-1387-4CA6-816F-3879F97B5CBC}" type="slidenum">
-              <a:rPr b="0" lang="en-US"/>
+              <a:rPr lang="en-US" b="0"/>
               <a:t>12</a:t>
             </a:fld>
             <a:endParaRPr lang="en-US"/>
@@ -6541,7 +6300,10 @@
         </p:spPr>
         <p:txBody>
           <a:bodyPr/>
-          <a:p/>
+          <a:lstStyle/>
+          <a:p>
+            <a:endParaRPr/>
+          </a:p>
         </p:txBody>
       </p:sp>
       <p:sp>
@@ -6565,7 +6327,7 @@
           <a:bodyPr wrap="square" lIns="0" tIns="0" rIns="0" bIns="0" rtlCol="0" anchor="t"/>
           <a:lstStyle/>
           <a:p>
-            <a:pPr algn="ctr" indent="0" marL="0">
+            <a:pPr marL="0" indent="0" algn="ctr">
               <a:buNone/>
             </a:pPr>
             <a:r>
@@ -6583,9 +6345,11 @@
       <p:sp>
         <p:nvSpPr>
           <p:cNvPr id="4" name="Text 0"/>
-          <p:cNvSpPr/>
-          <p:nvPr>
-            <p:ph idx="100" type="title" hasCustomPrompt="1"/>
+          <p:cNvSpPr>
+            <a:spLocks noGrp="1"/>
+          </p:cNvSpPr>
+          <p:nvPr>
+            <p:ph type="title" idx="100" hasCustomPrompt="1"/>
           </p:nvPr>
         </p:nvSpPr>
         <p:spPr>
@@ -6603,7 +6367,7 @@
           <a:bodyPr wrap="square" rtlCol="0" anchor="ctr"/>
           <a:lstStyle/>
           <a:p>
-            <a:pPr algn="ctr" indent="0" marL="0">
+            <a:pPr marL="0" indent="0" algn="ctr">
               <a:buNone/>
             </a:pPr>
             <a:r>
@@ -6620,7 +6384,7 @@
             <a:endParaRPr lang="en-US" sz="3200" dirty="0"/>
           </a:p>
           <a:p>
-            <a:pPr algn="ctr" indent="0" marL="0">
+            <a:pPr marL="0" indent="0" algn="ctr">
               <a:buNone/>
             </a:pPr>
             <a:r>
@@ -6658,7 +6422,7 @@
           </a:prstGeom>
           <a:extLst>
             <a:ext uri="{C572A759-6A51-4108-AA02-DFA0A04FC94B}">
-              <ma14:wrappingTextBoxFlag xmlns:ma14="http://schemas.microsoft.com/office/mac/drawingml/2011/main" val="0"/>
+              <ma14:wrappingTextBoxFlag xmlns:ma14="http://schemas.microsoft.com/office/mac/drawingml/2011/main" xmlns="" val="0"/>
             </a:ext>
           </a:extLst>
         </p:spPr>
@@ -6676,7 +6440,7 @@
           <a:p>
             <a:pPr algn="r"/>
             <a:fld id="{F7021451-1387-4CA6-816F-3879F97B5CBC}" type="slidenum">
-              <a:rPr b="0" lang="en-US"/>
+              <a:rPr lang="en-US" b="0"/>
               <a:t>13</a:t>
             </a:fld>
             <a:endParaRPr lang="en-US"/>
@@ -6731,7 +6495,10 @@
         </p:spPr>
         <p:txBody>
           <a:bodyPr/>
-          <a:p/>
+          <a:lstStyle/>
+          <a:p>
+            <a:endParaRPr/>
+          </a:p>
         </p:txBody>
       </p:sp>
       <p:sp>
@@ -6755,7 +6522,7 @@
           <a:bodyPr wrap="square" lIns="0" tIns="0" rIns="0" bIns="0" rtlCol="0" anchor="t"/>
           <a:lstStyle/>
           <a:p>
-            <a:pPr algn="ctr" indent="0" marL="0">
+            <a:pPr marL="0" indent="0" algn="ctr">
               <a:buNone/>
             </a:pPr>
             <a:r>
@@ -6773,9 +6540,11 @@
       <p:sp>
         <p:nvSpPr>
           <p:cNvPr id="4" name="Text 0"/>
-          <p:cNvSpPr/>
-          <p:nvPr>
-            <p:ph idx="100" type="title" hasCustomPrompt="1"/>
+          <p:cNvSpPr>
+            <a:spLocks noGrp="1"/>
+          </p:cNvSpPr>
+          <p:nvPr>
+            <p:ph type="title" idx="100" hasCustomPrompt="1"/>
           </p:nvPr>
         </p:nvSpPr>
         <p:spPr>
@@ -6793,7 +6562,7 @@
           <a:bodyPr wrap="square" rtlCol="0" anchor="ctr"/>
           <a:lstStyle/>
           <a:p>
-            <a:pPr algn="ctr" indent="0" marL="0">
+            <a:pPr marL="0" indent="0" algn="ctr">
               <a:buNone/>
             </a:pPr>
             <a:r>
@@ -6810,7 +6579,7 @@
             <a:endParaRPr lang="en-US" sz="3200" dirty="0"/>
           </a:p>
           <a:p>
-            <a:pPr algn="ctr" indent="0" marL="0">
+            <a:pPr marL="0" indent="0" algn="ctr">
               <a:buNone/>
             </a:pPr>
             <a:r>
@@ -6827,7 +6596,7 @@
             <a:endParaRPr lang="en-US" sz="3200" dirty="0"/>
           </a:p>
           <a:p>
-            <a:pPr algn="ctr" indent="0" marL="0">
+            <a:pPr marL="0" indent="0" algn="ctr">
               <a:buNone/>
             </a:pPr>
             <a:r>
@@ -6848,9 +6617,11 @@
       <p:sp>
         <p:nvSpPr>
           <p:cNvPr id="5" name="Text 0"/>
-          <p:cNvSpPr/>
-          <p:nvPr>
-            <p:ph idx="101" type="body" hasCustomPrompt="1"/>
+          <p:cNvSpPr>
+            <a:spLocks noGrp="1"/>
+          </p:cNvSpPr>
+          <p:nvPr>
+            <p:ph type="body" idx="101" hasCustomPrompt="1"/>
           </p:nvPr>
         </p:nvSpPr>
         <p:spPr>
@@ -6868,7 +6639,7 @@
           <a:bodyPr wrap="square" rtlCol="0" anchor="t"/>
           <a:lstStyle/>
           <a:p>
-            <a:pPr algn="ctr" indent="0" marL="0">
+            <a:pPr marL="0" indent="0" algn="ctr">
               <a:buNone/>
             </a:pPr>
             <a:r>
@@ -6903,7 +6674,7 @@
           </a:prstGeom>
           <a:extLst>
             <a:ext uri="{C572A759-6A51-4108-AA02-DFA0A04FC94B}">
-              <ma14:wrappingTextBoxFlag xmlns:ma14="http://schemas.microsoft.com/office/mac/drawingml/2011/main" val="0"/>
+              <ma14:wrappingTextBoxFlag xmlns:ma14="http://schemas.microsoft.com/office/mac/drawingml/2011/main" xmlns="" val="0"/>
             </a:ext>
           </a:extLst>
         </p:spPr>
@@ -6921,7 +6692,7 @@
           <a:p>
             <a:pPr algn="r"/>
             <a:fld id="{F7021451-1387-4CA6-816F-3879F97B5CBC}" type="slidenum">
-              <a:rPr b="0" lang="en-US"/>
+              <a:rPr lang="en-US" b="0"/>
               <a:t>14</a:t>
             </a:fld>
             <a:endParaRPr lang="en-US"/>
@@ -6976,7 +6747,10 @@
         </p:spPr>
         <p:txBody>
           <a:bodyPr/>
-          <a:p/>
+          <a:lstStyle/>
+          <a:p>
+            <a:endParaRPr/>
+          </a:p>
         </p:txBody>
       </p:sp>
       <p:sp>
@@ -7000,7 +6774,7 @@
           <a:bodyPr wrap="square" lIns="0" tIns="0" rIns="0" bIns="0" rtlCol="0" anchor="t"/>
           <a:lstStyle/>
           <a:p>
-            <a:pPr algn="ctr" indent="0" marL="0">
+            <a:pPr marL="0" indent="0" algn="ctr">
               <a:buNone/>
             </a:pPr>
             <a:r>
@@ -7018,9 +6792,11 @@
       <p:sp>
         <p:nvSpPr>
           <p:cNvPr id="4" name="Text 0"/>
-          <p:cNvSpPr/>
-          <p:nvPr>
-            <p:ph idx="100" type="title" hasCustomPrompt="1"/>
+          <p:cNvSpPr>
+            <a:spLocks noGrp="1"/>
+          </p:cNvSpPr>
+          <p:nvPr>
+            <p:ph type="title" idx="100" hasCustomPrompt="1"/>
           </p:nvPr>
         </p:nvSpPr>
         <p:spPr>
@@ -7038,7 +6814,7 @@
           <a:bodyPr wrap="square" rtlCol="0" anchor="ctr"/>
           <a:lstStyle/>
           <a:p>
-            <a:pPr algn="ctr" indent="0" marL="0">
+            <a:pPr marL="0" indent="0" algn="ctr">
               <a:buNone/>
             </a:pPr>
             <a:r>
@@ -7055,7 +6831,7 @@
             <a:endParaRPr lang="en-US" sz="3200" dirty="0"/>
           </a:p>
           <a:p>
-            <a:pPr algn="ctr" indent="0" marL="0">
+            <a:pPr marL="0" indent="0" algn="ctr">
               <a:buNone/>
             </a:pPr>
             <a:r>
@@ -7076,9 +6852,11 @@
       <p:sp>
         <p:nvSpPr>
           <p:cNvPr id="5" name="Text 0"/>
-          <p:cNvSpPr/>
-          <p:nvPr>
-            <p:ph idx="101" type="body" hasCustomPrompt="1"/>
+          <p:cNvSpPr>
+            <a:spLocks noGrp="1"/>
+          </p:cNvSpPr>
+          <p:nvPr>
+            <p:ph type="body" idx="101" hasCustomPrompt="1"/>
           </p:nvPr>
         </p:nvSpPr>
         <p:spPr>
@@ -7096,7 +6874,7 @@
           <a:bodyPr wrap="square" rtlCol="0" anchor="t"/>
           <a:lstStyle/>
           <a:p>
-            <a:pPr algn="ctr" indent="0" marL="0">
+            <a:pPr marL="0" indent="0" algn="ctr">
               <a:buNone/>
             </a:pPr>
             <a:r>
@@ -7131,7 +6909,7 @@
           </a:prstGeom>
           <a:extLst>
             <a:ext uri="{C572A759-6A51-4108-AA02-DFA0A04FC94B}">
-              <ma14:wrappingTextBoxFlag xmlns:ma14="http://schemas.microsoft.com/office/mac/drawingml/2011/main" val="0"/>
+              <ma14:wrappingTextBoxFlag xmlns:ma14="http://schemas.microsoft.com/office/mac/drawingml/2011/main" xmlns="" val="0"/>
             </a:ext>
           </a:extLst>
         </p:spPr>
@@ -7149,7 +6927,7 @@
           <a:p>
             <a:pPr algn="r"/>
             <a:fld id="{F7021451-1387-4CA6-816F-3879F97B5CBC}" type="slidenum">
-              <a:rPr b="0" lang="en-US"/>
+              <a:rPr lang="en-US" b="0"/>
               <a:t>15</a:t>
             </a:fld>
             <a:endParaRPr lang="en-US"/>
@@ -7184,9 +6962,11 @@
       <p:sp>
         <p:nvSpPr>
           <p:cNvPr id="2" name="Text 0"/>
-          <p:cNvSpPr/>
-          <p:nvPr>
-            <p:ph idx="100" type="title" hasCustomPrompt="1"/>
+          <p:cNvSpPr>
+            <a:spLocks noGrp="1"/>
+          </p:cNvSpPr>
+          <p:nvPr>
+            <p:ph type="title" idx="100" hasCustomPrompt="1"/>
           </p:nvPr>
         </p:nvSpPr>
         <p:spPr>
@@ -7204,7 +6984,7 @@
           <a:bodyPr wrap="square" rtlCol="0" anchor="ctr"/>
           <a:lstStyle/>
           <a:p>
-            <a:pPr algn="ctr" indent="0" marL="0">
+            <a:pPr marL="0" indent="0" algn="ctr">
               <a:buNone/>
             </a:pPr>
             <a:r>
@@ -7225,9 +7005,11 @@
       <p:sp>
         <p:nvSpPr>
           <p:cNvPr id="3" name="Text 0"/>
-          <p:cNvSpPr/>
-          <p:nvPr>
-            <p:ph idx="101" type="body" hasCustomPrompt="1"/>
+          <p:cNvSpPr>
+            <a:spLocks noGrp="1"/>
+          </p:cNvSpPr>
+          <p:nvPr>
+            <p:ph type="body" idx="101" hasCustomPrompt="1"/>
           </p:nvPr>
         </p:nvSpPr>
         <p:spPr>
@@ -7245,7 +7027,7 @@
           <a:bodyPr wrap="square" rtlCol="0" anchor="t"/>
           <a:lstStyle/>
           <a:p>
-            <a:pPr algn="ctr" indent="0" marL="0">
+            <a:pPr marL="0" indent="0" algn="ctr">
               <a:buNone/>
             </a:pPr>
             <a:r>
@@ -7308,7 +7090,10 @@
         </p:spPr>
         <p:txBody>
           <a:bodyPr/>
-          <a:p/>
+          <a:lstStyle/>
+          <a:p>
+            <a:endParaRPr/>
+          </a:p>
         </p:txBody>
       </p:sp>
       <p:sp>
@@ -7332,7 +7117,7 @@
           <a:bodyPr wrap="square" lIns="0" tIns="0" rIns="0" bIns="0" rtlCol="0" anchor="t"/>
           <a:lstStyle/>
           <a:p>
-            <a:pPr algn="ctr" indent="0" marL="0">
+            <a:pPr marL="0" indent="0" algn="ctr">
               <a:buNone/>
             </a:pPr>
             <a:r>
@@ -7350,9 +7135,11 @@
       <p:sp>
         <p:nvSpPr>
           <p:cNvPr id="4" name="Text 0"/>
-          <p:cNvSpPr/>
-          <p:nvPr>
-            <p:ph idx="100" type="title" hasCustomPrompt="1"/>
+          <p:cNvSpPr>
+            <a:spLocks noGrp="1"/>
+          </p:cNvSpPr>
+          <p:nvPr>
+            <p:ph type="title" idx="100" hasCustomPrompt="1"/>
           </p:nvPr>
         </p:nvSpPr>
         <p:spPr>
@@ -7370,7 +7157,7 @@
           <a:bodyPr wrap="square" rtlCol="0" anchor="ctr"/>
           <a:lstStyle/>
           <a:p>
-            <a:pPr algn="ctr" indent="0" marL="0">
+            <a:pPr marL="0" indent="0" algn="ctr">
               <a:buNone/>
             </a:pPr>
             <a:r>
@@ -7387,7 +7174,7 @@
             <a:endParaRPr lang="en-US" sz="3200" dirty="0"/>
           </a:p>
           <a:p>
-            <a:pPr algn="ctr" indent="0" marL="0">
+            <a:pPr marL="0" indent="0" algn="ctr">
               <a:buNone/>
             </a:pPr>
             <a:r>
@@ -7404,7 +7191,7 @@
             <a:endParaRPr lang="en-US" sz="3200" dirty="0"/>
           </a:p>
           <a:p>
-            <a:pPr algn="ctr" indent="0" marL="0">
+            <a:pPr marL="0" indent="0" algn="ctr">
               <a:buNone/>
             </a:pPr>
             <a:r>
@@ -7425,9 +7212,11 @@
       <p:sp>
         <p:nvSpPr>
           <p:cNvPr id="5" name="Text 0"/>
-          <p:cNvSpPr/>
-          <p:nvPr>
-            <p:ph idx="101" type="body" hasCustomPrompt="1"/>
+          <p:cNvSpPr>
+            <a:spLocks noGrp="1"/>
+          </p:cNvSpPr>
+          <p:nvPr>
+            <p:ph type="body" idx="101" hasCustomPrompt="1"/>
           </p:nvPr>
         </p:nvSpPr>
         <p:spPr>
@@ -7445,7 +7234,7 @@
           <a:bodyPr wrap="square" rtlCol="0" anchor="t"/>
           <a:lstStyle/>
           <a:p>
-            <a:pPr algn="ctr" indent="0" marL="0">
+            <a:pPr marL="0" indent="0" algn="ctr">
               <a:buNone/>
             </a:pPr>
             <a:r>
@@ -7480,7 +7269,7 @@
           </a:prstGeom>
           <a:extLst>
             <a:ext uri="{C572A759-6A51-4108-AA02-DFA0A04FC94B}">
-              <ma14:wrappingTextBoxFlag xmlns:ma14="http://schemas.microsoft.com/office/mac/drawingml/2011/main" val="0"/>
+              <ma14:wrappingTextBoxFlag xmlns:ma14="http://schemas.microsoft.com/office/mac/drawingml/2011/main" xmlns="" val="0"/>
             </a:ext>
           </a:extLst>
         </p:spPr>
@@ -7498,7 +7287,7 @@
           <a:p>
             <a:pPr algn="r"/>
             <a:fld id="{F7021451-1387-4CA6-816F-3879F97B5CBC}" type="slidenum">
-              <a:rPr b="0" lang="en-US"/>
+              <a:rPr lang="en-US" b="0"/>
               <a:t>17</a:t>
             </a:fld>
             <a:endParaRPr lang="en-US"/>
@@ -7551,7 +7340,7 @@
           <a:bodyPr wrap="square" lIns="0" tIns="0" rIns="0" bIns="0" rtlCol="0" anchor="t"/>
           <a:lstStyle/>
           <a:p>
-            <a:pPr indent="0" marL="0">
+            <a:pPr marL="0" indent="0">
               <a:buNone/>
             </a:pPr>
             <a:r>
@@ -7569,9 +7358,11 @@
       <p:sp>
         <p:nvSpPr>
           <p:cNvPr id="3" name="Text 0"/>
-          <p:cNvSpPr/>
-          <p:nvPr>
-            <p:ph idx="100" type="title" hasCustomPrompt="1"/>
+          <p:cNvSpPr>
+            <a:spLocks noGrp="1"/>
+          </p:cNvSpPr>
+          <p:nvPr>
+            <p:ph type="title" idx="100" hasCustomPrompt="1"/>
           </p:nvPr>
         </p:nvSpPr>
         <p:spPr>
@@ -7589,7 +7380,7 @@
           <a:bodyPr wrap="square" lIns="0" tIns="0" rIns="0" bIns="0" rtlCol="0" anchor="ctr"/>
           <a:lstStyle/>
           <a:p>
-            <a:pPr algn="l" indent="0" marL="0">
+            <a:pPr marL="0" indent="0" algn="l">
               <a:buNone/>
             </a:pPr>
             <a:r>
@@ -7609,14 +7400,14 @@
       </p:sp>
       <p:pic>
         <p:nvPicPr>
-          <p:cNvPr id="4" name="Image 0" descr="講座スライド">    </p:cNvPr>
+          <p:cNvPr id="4" name="Image 0" descr="講座スライド"/>
           <p:cNvPicPr>
             <a:picLocks noChangeAspect="1"/>
           </p:cNvPicPr>
           <p:nvPr/>
         </p:nvPicPr>
         <p:blipFill>
-          <a:blip r:embed="rId1"/>
+          <a:blip r:embed="rId3"/>
           <a:stretch>
             <a:fillRect/>
           </a:stretch>
@@ -7659,7 +7450,10 @@
         </p:spPr>
         <p:txBody>
           <a:bodyPr/>
-          <a:p/>
+          <a:lstStyle/>
+          <a:p>
+            <a:endParaRPr/>
+          </a:p>
         </p:txBody>
       </p:sp>
       <p:sp>
@@ -7683,7 +7477,7 @@
           <a:bodyPr wrap="square" lIns="1016" tIns="1016" rIns="1016" bIns="1016" rtlCol="0" anchor="t"/>
           <a:lstStyle/>
           <a:p>
-            <a:pPr indent="0" marL="0">
+            <a:pPr marL="0" indent="0">
               <a:buNone/>
             </a:pPr>
             <a:r>
@@ -7719,7 +7513,7 @@
           <a:bodyPr wrap="square" lIns="1016" tIns="1016" rIns="1016" bIns="1016" rtlCol="0" anchor="t"/>
           <a:lstStyle/>
           <a:p>
-            <a:pPr indent="0" marL="0">
+            <a:pPr marL="0" indent="0">
               <a:spcAft>
                 <a:spcPts val="600"/>
               </a:spcAft>
@@ -7736,7 +7530,7 @@
             <a:endParaRPr lang="en-US" sz="1400" dirty="0"/>
           </a:p>
           <a:p>
-            <a:pPr indent="0" marL="0">
+            <a:pPr marL="0" indent="0">
               <a:spcAft>
                 <a:spcPts val="600"/>
               </a:spcAft>
@@ -7774,7 +7568,7 @@
           </a:prstGeom>
           <a:extLst>
             <a:ext uri="{C572A759-6A51-4108-AA02-DFA0A04FC94B}">
-              <ma14:wrappingTextBoxFlag xmlns:ma14="http://schemas.microsoft.com/office/mac/drawingml/2011/main" val="0"/>
+              <ma14:wrappingTextBoxFlag xmlns:ma14="http://schemas.microsoft.com/office/mac/drawingml/2011/main" xmlns="" val="0"/>
             </a:ext>
           </a:extLst>
         </p:spPr>
@@ -7792,7 +7586,7 @@
           <a:p>
             <a:pPr algn="r"/>
             <a:fld id="{F7021451-1387-4CA6-816F-3879F97B5CBC}" type="slidenum">
-              <a:rPr b="0" lang="en-US"/>
+              <a:rPr lang="en-US" b="0"/>
               <a:t>18</a:t>
             </a:fld>
             <a:endParaRPr lang="en-US"/>
@@ -7847,15 +7641,20 @@
         </p:spPr>
         <p:txBody>
           <a:bodyPr/>
-          <a:p/>
+          <a:lstStyle/>
+          <a:p>
+            <a:endParaRPr/>
+          </a:p>
         </p:txBody>
       </p:sp>
       <p:sp>
         <p:nvSpPr>
           <p:cNvPr id="3" name="Text 0"/>
-          <p:cNvSpPr/>
-          <p:nvPr>
-            <p:ph idx="100" type="title" hasCustomPrompt="1"/>
+          <p:cNvSpPr>
+            <a:spLocks noGrp="1"/>
+          </p:cNvSpPr>
+          <p:nvPr>
+            <p:ph type="title" idx="100" hasCustomPrompt="1"/>
           </p:nvPr>
         </p:nvSpPr>
         <p:spPr>
@@ -7873,7 +7672,7 @@
           <a:bodyPr wrap="square" rtlCol="0" anchor="ctr"/>
           <a:lstStyle/>
           <a:p>
-            <a:pPr algn="ctr" indent="0" marL="0">
+            <a:pPr marL="0" indent="0" algn="ctr">
               <a:buNone/>
             </a:pPr>
             <a:r>
@@ -7911,7 +7710,7 @@
           </a:prstGeom>
           <a:extLst>
             <a:ext uri="{C572A759-6A51-4108-AA02-DFA0A04FC94B}">
-              <ma14:wrappingTextBoxFlag xmlns:ma14="http://schemas.microsoft.com/office/mac/drawingml/2011/main" val="0"/>
+              <ma14:wrappingTextBoxFlag xmlns:ma14="http://schemas.microsoft.com/office/mac/drawingml/2011/main" xmlns="" val="0"/>
             </a:ext>
           </a:extLst>
         </p:spPr>
@@ -7929,7 +7728,7 @@
           <a:p>
             <a:pPr algn="r"/>
             <a:fld id="{F7021451-1387-4CA6-816F-3879F97B5CBC}" type="slidenum">
-              <a:rPr b="0" lang="en-US"/>
+              <a:rPr lang="en-US" b="0"/>
               <a:t>19</a:t>
             </a:fld>
             <a:endParaRPr lang="en-US"/>
@@ -7964,9 +7763,11 @@
       <p:sp>
         <p:nvSpPr>
           <p:cNvPr id="2" name="Text 0"/>
-          <p:cNvSpPr/>
-          <p:nvPr>
-            <p:ph idx="100" type="title" hasCustomPrompt="1"/>
+          <p:cNvSpPr>
+            <a:spLocks noGrp="1"/>
+          </p:cNvSpPr>
+          <p:nvPr>
+            <p:ph type="title" idx="100" hasCustomPrompt="1"/>
           </p:nvPr>
         </p:nvSpPr>
         <p:spPr>
@@ -7984,7 +7785,7 @@
           <a:bodyPr wrap="square" lIns="0" tIns="0" rIns="0" bIns="0" rtlCol="0" anchor="ctr"/>
           <a:lstStyle/>
           <a:p>
-            <a:pPr algn="l" indent="0" marL="0">
+            <a:pPr marL="0" indent="0" algn="l">
               <a:buNone/>
             </a:pPr>
             <a:r>
@@ -8030,7 +7831,10 @@
         </p:spPr>
         <p:txBody>
           <a:bodyPr/>
-          <a:p/>
+          <a:lstStyle/>
+          <a:p>
+            <a:endParaRPr/>
+          </a:p>
         </p:txBody>
       </p:sp>
       <p:sp>
@@ -8054,7 +7858,7 @@
           <a:bodyPr wrap="square" lIns="1016" tIns="1016" rIns="1016" bIns="1016" rtlCol="0" anchor="t"/>
           <a:lstStyle/>
           <a:p>
-            <a:pPr algn="ctr" indent="0" marL="0">
+            <a:pPr marL="0" indent="0" algn="ctr">
               <a:buNone/>
             </a:pPr>
             <a:r>
@@ -8090,7 +7894,7 @@
           <a:bodyPr wrap="square" lIns="1016" tIns="1016" rIns="1016" bIns="1016" rtlCol="0" anchor="t"/>
           <a:lstStyle/>
           <a:p>
-            <a:pPr algn="ctr" indent="0" marL="0">
+            <a:pPr marL="0" indent="0" algn="ctr">
               <a:buNone/>
             </a:pPr>
             <a:r>
@@ -8129,7 +7933,7 @@
           <a:bodyPr wrap="square" lIns="1016" tIns="1016" rIns="1016" bIns="1016" rtlCol="0" anchor="t"/>
           <a:lstStyle/>
           <a:p>
-            <a:pPr algn="ctr" indent="0" marL="0">
+            <a:pPr marL="0" indent="0" algn="ctr">
               <a:buNone/>
             </a:pPr>
             <a:r>
@@ -8172,7 +7976,10 @@
         </p:spPr>
         <p:txBody>
           <a:bodyPr/>
-          <a:p/>
+          <a:lstStyle/>
+          <a:p>
+            <a:endParaRPr/>
+          </a:p>
         </p:txBody>
       </p:sp>
       <p:sp>
@@ -8196,7 +8003,7 @@
           <a:bodyPr wrap="square" lIns="1016" tIns="1016" rIns="1016" bIns="1016" rtlCol="0" anchor="t"/>
           <a:lstStyle/>
           <a:p>
-            <a:pPr algn="ctr" indent="0" marL="0">
+            <a:pPr marL="0" indent="0" algn="ctr">
               <a:buNone/>
             </a:pPr>
             <a:r>
@@ -8232,7 +8039,7 @@
           <a:bodyPr wrap="square" lIns="1016" tIns="1016" rIns="1016" bIns="1016" rtlCol="0" anchor="t"/>
           <a:lstStyle/>
           <a:p>
-            <a:pPr algn="ctr" indent="0" marL="0">
+            <a:pPr marL="0" indent="0" algn="ctr">
               <a:buNone/>
             </a:pPr>
             <a:r>
@@ -8271,7 +8078,7 @@
           <a:bodyPr wrap="square" lIns="1016" tIns="1016" rIns="1016" bIns="1016" rtlCol="0" anchor="t"/>
           <a:lstStyle/>
           <a:p>
-            <a:pPr algn="ctr" indent="0" marL="0">
+            <a:pPr marL="0" indent="0" algn="ctr">
               <a:buNone/>
             </a:pPr>
             <a:r>
@@ -8314,7 +8121,10 @@
         </p:spPr>
         <p:txBody>
           <a:bodyPr/>
-          <a:p/>
+          <a:lstStyle/>
+          <a:p>
+            <a:endParaRPr/>
+          </a:p>
         </p:txBody>
       </p:sp>
       <p:sp>
@@ -8338,7 +8148,7 @@
           <a:bodyPr wrap="square" lIns="1016" tIns="1016" rIns="1016" bIns="1016" rtlCol="0" anchor="t"/>
           <a:lstStyle/>
           <a:p>
-            <a:pPr algn="ctr" indent="0" marL="0">
+            <a:pPr marL="0" indent="0" algn="ctr">
               <a:buNone/>
             </a:pPr>
             <a:r>
@@ -8374,7 +8184,7 @@
           <a:bodyPr wrap="square" lIns="1016" tIns="1016" rIns="1016" bIns="1016" rtlCol="0" anchor="t"/>
           <a:lstStyle/>
           <a:p>
-            <a:pPr algn="ctr" indent="0" marL="0">
+            <a:pPr marL="0" indent="0" algn="ctr">
               <a:buNone/>
             </a:pPr>
             <a:r>
@@ -8413,7 +8223,7 @@
           <a:bodyPr wrap="square" lIns="1016" tIns="1016" rIns="1016" bIns="1016" rtlCol="0" anchor="t"/>
           <a:lstStyle/>
           <a:p>
-            <a:pPr algn="ctr" indent="0" marL="0">
+            <a:pPr marL="0" indent="0" algn="ctr">
               <a:buNone/>
             </a:pPr>
             <a:r>
@@ -8427,7 +8237,7 @@
             <a:endParaRPr lang="en-US" sz="1400" dirty="0"/>
           </a:p>
           <a:p>
-            <a:pPr algn="ctr" indent="0" marL="0">
+            <a:pPr marL="0" indent="0" algn="ctr">
               <a:buNone/>
             </a:pPr>
             <a:r>
@@ -8470,7 +8280,10 @@
         </p:spPr>
         <p:txBody>
           <a:bodyPr/>
-          <a:p/>
+          <a:lstStyle/>
+          <a:p>
+            <a:endParaRPr/>
+          </a:p>
         </p:txBody>
       </p:sp>
       <p:sp>
@@ -8494,7 +8307,7 @@
           <a:bodyPr wrap="square" lIns="1016" tIns="1016" rIns="1016" bIns="1016" rtlCol="0" anchor="t"/>
           <a:lstStyle/>
           <a:p>
-            <a:pPr algn="ctr" indent="0" marL="0">
+            <a:pPr marL="0" indent="0" algn="ctr">
               <a:buNone/>
             </a:pPr>
             <a:r>
@@ -8530,7 +8343,7 @@
           <a:bodyPr wrap="square" lIns="1016" tIns="1016" rIns="1016" bIns="1016" rtlCol="0" anchor="t"/>
           <a:lstStyle/>
           <a:p>
-            <a:pPr algn="ctr" indent="0" marL="0">
+            <a:pPr marL="0" indent="0" algn="ctr">
               <a:buNone/>
             </a:pPr>
             <a:r>
@@ -8569,7 +8382,7 @@
           <a:bodyPr wrap="square" lIns="1016" tIns="1016" rIns="1016" bIns="1016" rtlCol="0" anchor="t"/>
           <a:lstStyle/>
           <a:p>
-            <a:pPr algn="ctr" indent="0" marL="0">
+            <a:pPr marL="0" indent="0" algn="ctr">
               <a:buNone/>
             </a:pPr>
             <a:r>
@@ -8583,7 +8396,7 @@
             <a:endParaRPr lang="en-US" sz="1400" dirty="0"/>
           </a:p>
           <a:p>
-            <a:pPr algn="ctr" indent="0" marL="0">
+            <a:pPr marL="0" indent="0" algn="ctr">
               <a:buNone/>
             </a:pPr>
             <a:r>
@@ -8626,7 +8439,10 @@
         </p:spPr>
         <p:txBody>
           <a:bodyPr/>
-          <a:p/>
+          <a:lstStyle/>
+          <a:p>
+            <a:endParaRPr/>
+          </a:p>
         </p:txBody>
       </p:sp>
       <p:sp>
@@ -8650,7 +8466,7 @@
           <a:bodyPr wrap="square" lIns="1016" tIns="1016" rIns="1016" bIns="1016" rtlCol="0" anchor="t"/>
           <a:lstStyle/>
           <a:p>
-            <a:pPr algn="ctr" indent="0" marL="0">
+            <a:pPr marL="0" indent="0" algn="ctr">
               <a:buNone/>
             </a:pPr>
             <a:r>
@@ -8686,7 +8502,7 @@
           <a:bodyPr wrap="square" lIns="1016" tIns="1016" rIns="1016" bIns="1016" rtlCol="0" anchor="t"/>
           <a:lstStyle/>
           <a:p>
-            <a:pPr algn="ctr" indent="0" marL="0">
+            <a:pPr marL="0" indent="0" algn="ctr">
               <a:buNone/>
             </a:pPr>
             <a:r>
@@ -8725,7 +8541,7 @@
           <a:bodyPr wrap="square" lIns="1016" tIns="1016" rIns="1016" bIns="1016" rtlCol="0" anchor="t"/>
           <a:lstStyle/>
           <a:p>
-            <a:pPr algn="ctr" indent="0" marL="0">
+            <a:pPr marL="0" indent="0" algn="ctr">
               <a:buNone/>
             </a:pPr>
             <a:r>
@@ -8739,7 +8555,7 @@
             <a:endParaRPr lang="en-US" sz="1400" dirty="0"/>
           </a:p>
           <a:p>
-            <a:pPr algn="ctr" indent="0" marL="0">
+            <a:pPr marL="0" indent="0" algn="ctr">
               <a:buNone/>
             </a:pPr>
             <a:r>
@@ -8774,7 +8590,7 @@
           </a:prstGeom>
           <a:extLst>
             <a:ext uri="{C572A759-6A51-4108-AA02-DFA0A04FC94B}">
-              <ma14:wrappingTextBoxFlag xmlns:ma14="http://schemas.microsoft.com/office/mac/drawingml/2011/main" val="0"/>
+              <ma14:wrappingTextBoxFlag xmlns:ma14="http://schemas.microsoft.com/office/mac/drawingml/2011/main" xmlns="" val="0"/>
             </a:ext>
           </a:extLst>
         </p:spPr>
@@ -8792,7 +8608,7 @@
           <a:p>
             <a:pPr algn="r"/>
             <a:fld id="{F7021451-1387-4CA6-816F-3879F97B5CBC}" type="slidenum">
-              <a:rPr b="0" lang="en-US"/>
+              <a:rPr lang="en-US" b="0"/>
               <a:t>2</a:t>
             </a:fld>
             <a:endParaRPr lang="en-US"/>
@@ -8845,7 +8661,7 @@
           <a:bodyPr wrap="square" lIns="0" tIns="0" rIns="0" bIns="0" rtlCol="0" anchor="t"/>
           <a:lstStyle/>
           <a:p>
-            <a:pPr indent="0" marL="0">
+            <a:pPr marL="0" indent="0">
               <a:buNone/>
             </a:pPr>
             <a:r>
@@ -8863,9 +8679,11 @@
       <p:sp>
         <p:nvSpPr>
           <p:cNvPr id="3" name="Text 0"/>
-          <p:cNvSpPr/>
-          <p:nvPr>
-            <p:ph idx="100" type="title" hasCustomPrompt="1"/>
+          <p:cNvSpPr>
+            <a:spLocks noGrp="1"/>
+          </p:cNvSpPr>
+          <p:nvPr>
+            <p:ph type="title" idx="100" hasCustomPrompt="1"/>
           </p:nvPr>
         </p:nvSpPr>
         <p:spPr>
@@ -8883,7 +8701,7 @@
           <a:bodyPr wrap="square" lIns="0" tIns="0" rIns="0" bIns="0" rtlCol="0" anchor="ctr"/>
           <a:lstStyle/>
           <a:p>
-            <a:pPr algn="l" indent="0" marL="0">
+            <a:pPr marL="0" indent="0" algn="l">
               <a:buNone/>
             </a:pPr>
             <a:r>
@@ -8903,14 +8721,14 @@
       </p:sp>
       <p:pic>
         <p:nvPicPr>
-          <p:cNvPr id="4" name="Image 0" descr="講座スライド">    </p:cNvPr>
+          <p:cNvPr id="4" name="Image 0" descr="講座スライド"/>
           <p:cNvPicPr>
             <a:picLocks noChangeAspect="1"/>
           </p:cNvPicPr>
           <p:nvPr/>
         </p:nvPicPr>
         <p:blipFill>
-          <a:blip r:embed="rId1"/>
+          <a:blip r:embed="rId3"/>
           <a:stretch>
             <a:fillRect/>
           </a:stretch>
@@ -8953,7 +8771,10 @@
         </p:spPr>
         <p:txBody>
           <a:bodyPr/>
-          <a:p/>
+          <a:lstStyle/>
+          <a:p>
+            <a:endParaRPr/>
+          </a:p>
         </p:txBody>
       </p:sp>
       <p:sp>
@@ -8977,7 +8798,7 @@
           <a:bodyPr wrap="square" lIns="1016" tIns="1016" rIns="1016" bIns="1016" rtlCol="0" anchor="t"/>
           <a:lstStyle/>
           <a:p>
-            <a:pPr indent="0" marL="0">
+            <a:pPr marL="0" indent="0">
               <a:buNone/>
             </a:pPr>
             <a:r>
@@ -9013,7 +8834,7 @@
           <a:bodyPr wrap="square" lIns="1016" tIns="1016" rIns="1016" bIns="1016" rtlCol="0" anchor="t"/>
           <a:lstStyle/>
           <a:p>
-            <a:pPr indent="0" marL="0">
+            <a:pPr marL="0" indent="0">
               <a:spcAft>
                 <a:spcPts val="600"/>
               </a:spcAft>
@@ -9051,7 +8872,7 @@
           </a:prstGeom>
           <a:extLst>
             <a:ext uri="{C572A759-6A51-4108-AA02-DFA0A04FC94B}">
-              <ma14:wrappingTextBoxFlag xmlns:ma14="http://schemas.microsoft.com/office/mac/drawingml/2011/main" val="0"/>
+              <ma14:wrappingTextBoxFlag xmlns:ma14="http://schemas.microsoft.com/office/mac/drawingml/2011/main" xmlns="" val="0"/>
             </a:ext>
           </a:extLst>
         </p:spPr>
@@ -9069,7 +8890,7 @@
           <a:p>
             <a:pPr algn="r"/>
             <a:fld id="{F7021451-1387-4CA6-816F-3879F97B5CBC}" type="slidenum">
-              <a:rPr b="0" lang="en-US"/>
+              <a:rPr lang="en-US" b="0"/>
               <a:t>20</a:t>
             </a:fld>
             <a:endParaRPr lang="en-US"/>
@@ -9122,7 +8943,7 @@
           <a:bodyPr wrap="square" lIns="0" tIns="0" rIns="0" bIns="0" rtlCol="0" anchor="t"/>
           <a:lstStyle/>
           <a:p>
-            <a:pPr indent="0" marL="0">
+            <a:pPr marL="0" indent="0">
               <a:buNone/>
             </a:pPr>
             <a:r>
@@ -9140,9 +8961,11 @@
       <p:sp>
         <p:nvSpPr>
           <p:cNvPr id="3" name="Text 0"/>
-          <p:cNvSpPr/>
-          <p:nvPr>
-            <p:ph idx="100" type="title" hasCustomPrompt="1"/>
+          <p:cNvSpPr>
+            <a:spLocks noGrp="1"/>
+          </p:cNvSpPr>
+          <p:nvPr>
+            <p:ph type="title" idx="100" hasCustomPrompt="1"/>
           </p:nvPr>
         </p:nvSpPr>
         <p:spPr>
@@ -9160,7 +8983,7 @@
           <a:bodyPr wrap="square" lIns="0" tIns="0" rIns="0" bIns="0" rtlCol="0" anchor="ctr"/>
           <a:lstStyle/>
           <a:p>
-            <a:pPr algn="l" indent="0" marL="0">
+            <a:pPr marL="0" indent="0" algn="l">
               <a:buNone/>
             </a:pPr>
             <a:r>
@@ -9180,14 +9003,14 @@
       </p:sp>
       <p:pic>
         <p:nvPicPr>
-          <p:cNvPr id="4" name="Image 0" descr="講座スライド">    </p:cNvPr>
+          <p:cNvPr id="4" name="Image 0" descr="講座スライド"/>
           <p:cNvPicPr>
             <a:picLocks noChangeAspect="1"/>
           </p:cNvPicPr>
           <p:nvPr/>
         </p:nvPicPr>
         <p:blipFill>
-          <a:blip r:embed="rId1"/>
+          <a:blip r:embed="rId3"/>
           <a:stretch>
             <a:fillRect/>
           </a:stretch>
@@ -9230,7 +9053,10 @@
         </p:spPr>
         <p:txBody>
           <a:bodyPr/>
-          <a:p/>
+          <a:lstStyle/>
+          <a:p>
+            <a:endParaRPr/>
+          </a:p>
         </p:txBody>
       </p:sp>
       <p:sp>
@@ -9254,7 +9080,7 @@
           <a:bodyPr wrap="square" lIns="1016" tIns="1016" rIns="1016" bIns="1016" rtlCol="0" anchor="t"/>
           <a:lstStyle/>
           <a:p>
-            <a:pPr indent="0" marL="0">
+            <a:pPr marL="0" indent="0">
               <a:buNone/>
             </a:pPr>
             <a:r>
@@ -9290,7 +9116,7 @@
           <a:bodyPr wrap="square" lIns="1016" tIns="1016" rIns="1016" bIns="1016" rtlCol="0" anchor="t"/>
           <a:lstStyle/>
           <a:p>
-            <a:pPr indent="0" marL="0">
+            <a:pPr marL="0" indent="0">
               <a:spcAft>
                 <a:spcPts val="600"/>
               </a:spcAft>
@@ -9328,7 +9154,7 @@
           </a:prstGeom>
           <a:extLst>
             <a:ext uri="{C572A759-6A51-4108-AA02-DFA0A04FC94B}">
-              <ma14:wrappingTextBoxFlag xmlns:ma14="http://schemas.microsoft.com/office/mac/drawingml/2011/main" val="0"/>
+              <ma14:wrappingTextBoxFlag xmlns:ma14="http://schemas.microsoft.com/office/mac/drawingml/2011/main" xmlns="" val="0"/>
             </a:ext>
           </a:extLst>
         </p:spPr>
@@ -9346,7 +9172,7 @@
           <a:p>
             <a:pPr algn="r"/>
             <a:fld id="{F7021451-1387-4CA6-816F-3879F97B5CBC}" type="slidenum">
-              <a:rPr b="0" lang="en-US"/>
+              <a:rPr lang="en-US" b="0"/>
               <a:t>21</a:t>
             </a:fld>
             <a:endParaRPr lang="en-US"/>
@@ -9399,7 +9225,7 @@
           <a:bodyPr wrap="square" lIns="0" tIns="0" rIns="0" bIns="0" rtlCol="0" anchor="t"/>
           <a:lstStyle/>
           <a:p>
-            <a:pPr indent="0" marL="0">
+            <a:pPr marL="0" indent="0">
               <a:buNone/>
             </a:pPr>
             <a:r>
@@ -9417,9 +9243,11 @@
       <p:sp>
         <p:nvSpPr>
           <p:cNvPr id="3" name="Text 0"/>
-          <p:cNvSpPr/>
-          <p:nvPr>
-            <p:ph idx="100" type="title" hasCustomPrompt="1"/>
+          <p:cNvSpPr>
+            <a:spLocks noGrp="1"/>
+          </p:cNvSpPr>
+          <p:nvPr>
+            <p:ph type="title" idx="100" hasCustomPrompt="1"/>
           </p:nvPr>
         </p:nvSpPr>
         <p:spPr>
@@ -9437,7 +9265,7 @@
           <a:bodyPr wrap="square" lIns="0" tIns="0" rIns="0" bIns="0" rtlCol="0" anchor="ctr"/>
           <a:lstStyle/>
           <a:p>
-            <a:pPr algn="l" indent="0" marL="0">
+            <a:pPr marL="0" indent="0" algn="l">
               <a:buNone/>
             </a:pPr>
             <a:r>
@@ -9483,7 +9311,10 @@
         </p:spPr>
         <p:txBody>
           <a:bodyPr/>
-          <a:p/>
+          <a:lstStyle/>
+          <a:p>
+            <a:endParaRPr/>
+          </a:p>
         </p:txBody>
       </p:sp>
       <p:sp>
@@ -9507,7 +9338,10 @@
         </p:spPr>
         <p:txBody>
           <a:bodyPr/>
-          <a:p/>
+          <a:lstStyle/>
+          <a:p>
+            <a:endParaRPr/>
+          </a:p>
         </p:txBody>
       </p:sp>
       <p:sp>
@@ -9531,7 +9365,7 @@
           <a:bodyPr wrap="square" lIns="0" tIns="0" rIns="0" bIns="0" rtlCol="0" anchor="ctr"/>
           <a:lstStyle/>
           <a:p>
-            <a:pPr algn="ctr" indent="0" marL="0">
+            <a:pPr marL="0" indent="0" algn="ctr">
               <a:buNone/>
             </a:pPr>
             <a:r>
@@ -9567,7 +9401,7 @@
           <a:bodyPr wrap="square" lIns="1016" tIns="1016" rIns="1016" bIns="1016" rtlCol="0" anchor="t"/>
           <a:lstStyle/>
           <a:p>
-            <a:pPr indent="0" marL="0">
+            <a:pPr marL="0" indent="0">
               <a:buNone/>
             </a:pPr>
             <a:r>
@@ -9603,7 +9437,7 @@
           <a:bodyPr wrap="square" lIns="1016" tIns="1016" rIns="1016" bIns="1016" rtlCol="0" anchor="t"/>
           <a:lstStyle/>
           <a:p>
-            <a:pPr indent="0" marL="0">
+            <a:pPr marL="0" indent="0">
               <a:buNone/>
             </a:pPr>
             <a:r>
@@ -9646,7 +9480,10 @@
         </p:spPr>
         <p:txBody>
           <a:bodyPr/>
-          <a:p/>
+          <a:lstStyle/>
+          <a:p>
+            <a:endParaRPr/>
+          </a:p>
         </p:txBody>
       </p:sp>
       <p:sp>
@@ -9670,7 +9507,10 @@
         </p:spPr>
         <p:txBody>
           <a:bodyPr/>
-          <a:p/>
+          <a:lstStyle/>
+          <a:p>
+            <a:endParaRPr/>
+          </a:p>
         </p:txBody>
       </p:sp>
       <p:sp>
@@ -9694,7 +9534,7 @@
           <a:bodyPr wrap="square" lIns="0" tIns="0" rIns="0" bIns="0" rtlCol="0" anchor="ctr"/>
           <a:lstStyle/>
           <a:p>
-            <a:pPr algn="ctr" indent="0" marL="0">
+            <a:pPr marL="0" indent="0" algn="ctr">
               <a:buNone/>
             </a:pPr>
             <a:r>
@@ -9730,7 +9570,7 @@
           <a:bodyPr wrap="square" lIns="1016" tIns="1016" rIns="1016" bIns="1016" rtlCol="0" anchor="t"/>
           <a:lstStyle/>
           <a:p>
-            <a:pPr indent="0" marL="0">
+            <a:pPr marL="0" indent="0">
               <a:buNone/>
             </a:pPr>
             <a:r>
@@ -9766,7 +9606,7 @@
           <a:bodyPr wrap="square" lIns="1016" tIns="1016" rIns="1016" bIns="1016" rtlCol="0" anchor="t"/>
           <a:lstStyle/>
           <a:p>
-            <a:pPr indent="0" marL="0">
+            <a:pPr marL="0" indent="0">
               <a:buNone/>
             </a:pPr>
             <a:r>
@@ -9809,7 +9649,10 @@
         </p:spPr>
         <p:txBody>
           <a:bodyPr/>
-          <a:p/>
+          <a:lstStyle/>
+          <a:p>
+            <a:endParaRPr/>
+          </a:p>
         </p:txBody>
       </p:sp>
       <p:sp>
@@ -9833,7 +9676,10 @@
         </p:spPr>
         <p:txBody>
           <a:bodyPr/>
-          <a:p/>
+          <a:lstStyle/>
+          <a:p>
+            <a:endParaRPr/>
+          </a:p>
         </p:txBody>
       </p:sp>
       <p:sp>
@@ -9857,7 +9703,7 @@
           <a:bodyPr wrap="square" lIns="0" tIns="0" rIns="0" bIns="0" rtlCol="0" anchor="ctr"/>
           <a:lstStyle/>
           <a:p>
-            <a:pPr algn="ctr" indent="0" marL="0">
+            <a:pPr marL="0" indent="0" algn="ctr">
               <a:buNone/>
             </a:pPr>
             <a:r>
@@ -9893,7 +9739,7 @@
           <a:bodyPr wrap="square" lIns="1016" tIns="1016" rIns="1016" bIns="1016" rtlCol="0" anchor="t"/>
           <a:lstStyle/>
           <a:p>
-            <a:pPr indent="0" marL="0">
+            <a:pPr marL="0" indent="0">
               <a:buNone/>
             </a:pPr>
             <a:r>
@@ -9929,7 +9775,7 @@
           <a:bodyPr wrap="square" lIns="1016" tIns="1016" rIns="1016" bIns="1016" rtlCol="0" anchor="t"/>
           <a:lstStyle/>
           <a:p>
-            <a:pPr indent="0" marL="0">
+            <a:pPr marL="0" indent="0">
               <a:buNone/>
             </a:pPr>
             <a:r>
@@ -9972,7 +9818,10 @@
         </p:spPr>
         <p:txBody>
           <a:bodyPr/>
-          <a:p/>
+          <a:lstStyle/>
+          <a:p>
+            <a:endParaRPr/>
+          </a:p>
         </p:txBody>
       </p:sp>
       <p:sp>
@@ -9996,7 +9845,7 @@
           <a:bodyPr wrap="square" lIns="1016" tIns="1016" rIns="1016" bIns="1016" rtlCol="0" anchor="t"/>
           <a:lstStyle/>
           <a:p>
-            <a:pPr indent="0" marL="0">
+            <a:pPr marL="0" indent="0">
               <a:buNone/>
             </a:pPr>
             <a:r>
@@ -10032,7 +9881,7 @@
           <a:bodyPr wrap="square" lIns="1016" tIns="1016" rIns="1016" bIns="1016" rtlCol="0" anchor="t"/>
           <a:lstStyle/>
           <a:p>
-            <a:pPr indent="0" marL="0">
+            <a:pPr marL="0" indent="0">
               <a:buNone/>
             </a:pPr>
             <a:r>
@@ -10067,7 +9916,7 @@
           </a:prstGeom>
           <a:extLst>
             <a:ext uri="{C572A759-6A51-4108-AA02-DFA0A04FC94B}">
-              <ma14:wrappingTextBoxFlag xmlns:ma14="http://schemas.microsoft.com/office/mac/drawingml/2011/main" val="0"/>
+              <ma14:wrappingTextBoxFlag xmlns:ma14="http://schemas.microsoft.com/office/mac/drawingml/2011/main" xmlns="" val="0"/>
             </a:ext>
           </a:extLst>
         </p:spPr>
@@ -10085,7 +9934,7 @@
           <a:p>
             <a:pPr algn="r"/>
             <a:fld id="{F7021451-1387-4CA6-816F-3879F97B5CBC}" type="slidenum">
-              <a:rPr b="0" lang="en-US"/>
+              <a:rPr lang="en-US" b="0"/>
               <a:t>22</a:t>
             </a:fld>
             <a:endParaRPr lang="en-US"/>
@@ -10138,7 +9987,7 @@
           <a:bodyPr wrap="square" lIns="0" tIns="0" rIns="0" bIns="0" rtlCol="0" anchor="t"/>
           <a:lstStyle/>
           <a:p>
-            <a:pPr indent="0" marL="0">
+            <a:pPr marL="0" indent="0">
               <a:buNone/>
             </a:pPr>
             <a:r>
@@ -10156,9 +10005,11 @@
       <p:sp>
         <p:nvSpPr>
           <p:cNvPr id="3" name="Text 0"/>
-          <p:cNvSpPr/>
-          <p:nvPr>
-            <p:ph idx="100" type="title" hasCustomPrompt="1"/>
+          <p:cNvSpPr>
+            <a:spLocks noGrp="1"/>
+          </p:cNvSpPr>
+          <p:nvPr>
+            <p:ph type="title" idx="100" hasCustomPrompt="1"/>
           </p:nvPr>
         </p:nvSpPr>
         <p:spPr>
@@ -10176,7 +10027,7 @@
           <a:bodyPr wrap="square" lIns="0" tIns="0" rIns="0" bIns="0" rtlCol="0" anchor="ctr"/>
           <a:lstStyle/>
           <a:p>
-            <a:pPr algn="l" indent="0" marL="0">
+            <a:pPr marL="0" indent="0" algn="l">
               <a:buNone/>
             </a:pPr>
             <a:r>
@@ -10196,14 +10047,14 @@
       </p:sp>
       <p:pic>
         <p:nvPicPr>
-          <p:cNvPr id="4" name="Image 0" descr="講座スライド">    </p:cNvPr>
+          <p:cNvPr id="4" name="Image 0" descr="講座スライド"/>
           <p:cNvPicPr>
             <a:picLocks noChangeAspect="1"/>
           </p:cNvPicPr>
           <p:nvPr/>
         </p:nvPicPr>
         <p:blipFill>
-          <a:blip r:embed="rId1"/>
+          <a:blip r:embed="rId3"/>
           <a:stretch>
             <a:fillRect/>
           </a:stretch>
@@ -10246,7 +10097,10 @@
         </p:spPr>
         <p:txBody>
           <a:bodyPr/>
-          <a:p/>
+          <a:lstStyle/>
+          <a:p>
+            <a:endParaRPr/>
+          </a:p>
         </p:txBody>
       </p:sp>
       <p:sp>
@@ -10270,7 +10124,7 @@
           <a:bodyPr wrap="square" lIns="1016" tIns="1016" rIns="1016" bIns="1016" rtlCol="0" anchor="t"/>
           <a:lstStyle/>
           <a:p>
-            <a:pPr indent="0" marL="0">
+            <a:pPr marL="0" indent="0">
               <a:buNone/>
             </a:pPr>
             <a:r>
@@ -10306,7 +10160,7 @@
           <a:bodyPr wrap="square" lIns="1016" tIns="1016" rIns="1016" bIns="1016" rtlCol="0" anchor="t"/>
           <a:lstStyle/>
           <a:p>
-            <a:pPr indent="0" marL="0">
+            <a:pPr marL="0" indent="0">
               <a:spcAft>
                 <a:spcPts val="600"/>
               </a:spcAft>
@@ -10323,7 +10177,7 @@
             <a:endParaRPr lang="en-US" sz="1400" dirty="0"/>
           </a:p>
           <a:p>
-            <a:pPr indent="0" marL="0">
+            <a:pPr marL="0" indent="0">
               <a:spcAft>
                 <a:spcPts val="600"/>
               </a:spcAft>
@@ -10361,7 +10215,7 @@
           </a:prstGeom>
           <a:extLst>
             <a:ext uri="{C572A759-6A51-4108-AA02-DFA0A04FC94B}">
-              <ma14:wrappingTextBoxFlag xmlns:ma14="http://schemas.microsoft.com/office/mac/drawingml/2011/main" val="0"/>
+              <ma14:wrappingTextBoxFlag xmlns:ma14="http://schemas.microsoft.com/office/mac/drawingml/2011/main" xmlns="" val="0"/>
             </a:ext>
           </a:extLst>
         </p:spPr>
@@ -10379,7 +10233,7 @@
           <a:p>
             <a:pPr algn="r"/>
             <a:fld id="{F7021451-1387-4CA6-816F-3879F97B5CBC}" type="slidenum">
-              <a:rPr b="0" lang="en-US"/>
+              <a:rPr lang="en-US" b="0"/>
               <a:t>23</a:t>
             </a:fld>
             <a:endParaRPr lang="en-US"/>
@@ -10432,7 +10286,7 @@
           <a:bodyPr wrap="square" lIns="0" tIns="0" rIns="0" bIns="0" rtlCol="0" anchor="t"/>
           <a:lstStyle/>
           <a:p>
-            <a:pPr indent="0" marL="0">
+            <a:pPr marL="0" indent="0">
               <a:buNone/>
             </a:pPr>
             <a:r>
@@ -10450,9 +10304,11 @@
       <p:sp>
         <p:nvSpPr>
           <p:cNvPr id="3" name="Text 0"/>
-          <p:cNvSpPr/>
-          <p:nvPr>
-            <p:ph idx="100" type="title" hasCustomPrompt="1"/>
+          <p:cNvSpPr>
+            <a:spLocks noGrp="1"/>
+          </p:cNvSpPr>
+          <p:nvPr>
+            <p:ph type="title" idx="100" hasCustomPrompt="1"/>
           </p:nvPr>
         </p:nvSpPr>
         <p:spPr>
@@ -10470,7 +10326,7 @@
           <a:bodyPr wrap="square" lIns="0" tIns="0" rIns="0" bIns="0" rtlCol="0" anchor="ctr"/>
           <a:lstStyle/>
           <a:p>
-            <a:pPr algn="l" indent="0" marL="0">
+            <a:pPr marL="0" indent="0" algn="l">
               <a:buNone/>
             </a:pPr>
             <a:r>
@@ -10490,14 +10346,14 @@
       </p:sp>
       <p:pic>
         <p:nvPicPr>
-          <p:cNvPr id="4" name="Image 0" descr="講座スライド">    </p:cNvPr>
+          <p:cNvPr id="4" name="Image 0" descr="講座スライド"/>
           <p:cNvPicPr>
             <a:picLocks noChangeAspect="1"/>
           </p:cNvPicPr>
           <p:nvPr/>
         </p:nvPicPr>
         <p:blipFill>
-          <a:blip r:embed="rId1"/>
+          <a:blip r:embed="rId3"/>
           <a:stretch>
             <a:fillRect/>
           </a:stretch>
@@ -10540,7 +10396,10 @@
         </p:spPr>
         <p:txBody>
           <a:bodyPr/>
-          <a:p/>
+          <a:lstStyle/>
+          <a:p>
+            <a:endParaRPr/>
+          </a:p>
         </p:txBody>
       </p:sp>
       <p:sp>
@@ -10564,7 +10423,7 @@
           <a:bodyPr wrap="square" lIns="1016" tIns="1016" rIns="1016" bIns="1016" rtlCol="0" anchor="t"/>
           <a:lstStyle/>
           <a:p>
-            <a:pPr indent="0" marL="0">
+            <a:pPr marL="0" indent="0">
               <a:buNone/>
             </a:pPr>
             <a:r>
@@ -10600,7 +10459,7 @@
           <a:bodyPr wrap="square" lIns="1016" tIns="1016" rIns="1016" bIns="1016" rtlCol="0" anchor="t"/>
           <a:lstStyle/>
           <a:p>
-            <a:pPr indent="0" marL="0">
+            <a:pPr marL="0" indent="0">
               <a:spcAft>
                 <a:spcPts val="600"/>
               </a:spcAft>
@@ -10617,7 +10476,7 @@
             <a:endParaRPr lang="en-US" sz="1400" dirty="0"/>
           </a:p>
           <a:p>
-            <a:pPr indent="0" marL="0">
+            <a:pPr marL="0" indent="0">
               <a:spcAft>
                 <a:spcPts val="600"/>
               </a:spcAft>
@@ -10655,7 +10514,7 @@
           </a:prstGeom>
           <a:extLst>
             <a:ext uri="{C572A759-6A51-4108-AA02-DFA0A04FC94B}">
-              <ma14:wrappingTextBoxFlag xmlns:ma14="http://schemas.microsoft.com/office/mac/drawingml/2011/main" val="0"/>
+              <ma14:wrappingTextBoxFlag xmlns:ma14="http://schemas.microsoft.com/office/mac/drawingml/2011/main" xmlns="" val="0"/>
             </a:ext>
           </a:extLst>
         </p:spPr>
@@ -10673,7 +10532,7 @@
           <a:p>
             <a:pPr algn="r"/>
             <a:fld id="{F7021451-1387-4CA6-816F-3879F97B5CBC}" type="slidenum">
-              <a:rPr b="0" lang="en-US"/>
+              <a:rPr lang="en-US" b="0"/>
               <a:t>24</a:t>
             </a:fld>
             <a:endParaRPr lang="en-US"/>
@@ -10726,7 +10585,7 @@
           <a:bodyPr wrap="square" lIns="0" tIns="0" rIns="0" bIns="0" rtlCol="0" anchor="t"/>
           <a:lstStyle/>
           <a:p>
-            <a:pPr indent="0" marL="0">
+            <a:pPr marL="0" indent="0">
               <a:buNone/>
             </a:pPr>
             <a:r>
@@ -10744,9 +10603,11 @@
       <p:sp>
         <p:nvSpPr>
           <p:cNvPr id="3" name="Text 0"/>
-          <p:cNvSpPr/>
-          <p:nvPr>
-            <p:ph idx="100" type="title" hasCustomPrompt="1"/>
+          <p:cNvSpPr>
+            <a:spLocks noGrp="1"/>
+          </p:cNvSpPr>
+          <p:nvPr>
+            <p:ph type="title" idx="100" hasCustomPrompt="1"/>
           </p:nvPr>
         </p:nvSpPr>
         <p:spPr>
@@ -10764,7 +10625,7 @@
           <a:bodyPr wrap="square" lIns="0" tIns="0" rIns="0" bIns="0" rtlCol="0" anchor="ctr"/>
           <a:lstStyle/>
           <a:p>
-            <a:pPr algn="l" indent="0" marL="0">
+            <a:pPr marL="0" indent="0" algn="l">
               <a:buNone/>
             </a:pPr>
             <a:r>
@@ -10784,14 +10645,14 @@
       </p:sp>
       <p:pic>
         <p:nvPicPr>
-          <p:cNvPr id="4" name="Image 0" descr="講座スライド">    </p:cNvPr>
+          <p:cNvPr id="4" name="Image 0" descr="講座スライド"/>
           <p:cNvPicPr>
             <a:picLocks noChangeAspect="1"/>
           </p:cNvPicPr>
           <p:nvPr/>
         </p:nvPicPr>
         <p:blipFill>
-          <a:blip r:embed="rId1"/>
+          <a:blip r:embed="rId3"/>
           <a:stretch>
             <a:fillRect/>
           </a:stretch>
@@ -10834,7 +10695,10 @@
         </p:spPr>
         <p:txBody>
           <a:bodyPr/>
-          <a:p/>
+          <a:lstStyle/>
+          <a:p>
+            <a:endParaRPr/>
+          </a:p>
         </p:txBody>
       </p:sp>
       <p:sp>
@@ -10858,7 +10722,7 @@
           <a:bodyPr wrap="square" lIns="1016" tIns="1016" rIns="1016" bIns="1016" rtlCol="0" anchor="t"/>
           <a:lstStyle/>
           <a:p>
-            <a:pPr indent="0" marL="0">
+            <a:pPr marL="0" indent="0">
               <a:buNone/>
             </a:pPr>
             <a:r>
@@ -10894,7 +10758,7 @@
           <a:bodyPr wrap="square" lIns="1016" tIns="1016" rIns="1016" bIns="1016" rtlCol="0" anchor="t"/>
           <a:lstStyle/>
           <a:p>
-            <a:pPr indent="0" marL="0">
+            <a:pPr marL="0" indent="0">
               <a:spcAft>
                 <a:spcPts val="600"/>
               </a:spcAft>
@@ -10911,7 +10775,7 @@
             <a:endParaRPr lang="en-US" sz="1400" dirty="0"/>
           </a:p>
           <a:p>
-            <a:pPr indent="0" marL="0">
+            <a:pPr marL="0" indent="0">
               <a:spcAft>
                 <a:spcPts val="600"/>
               </a:spcAft>
@@ -10949,7 +10813,7 @@
           </a:prstGeom>
           <a:extLst>
             <a:ext uri="{C572A759-6A51-4108-AA02-DFA0A04FC94B}">
-              <ma14:wrappingTextBoxFlag xmlns:ma14="http://schemas.microsoft.com/office/mac/drawingml/2011/main" val="0"/>
+              <ma14:wrappingTextBoxFlag xmlns:ma14="http://schemas.microsoft.com/office/mac/drawingml/2011/main" xmlns="" val="0"/>
             </a:ext>
           </a:extLst>
         </p:spPr>
@@ -10967,7 +10831,7 @@
           <a:p>
             <a:pPr algn="r"/>
             <a:fld id="{F7021451-1387-4CA6-816F-3879F97B5CBC}" type="slidenum">
-              <a:rPr b="0" lang="en-US"/>
+              <a:rPr lang="en-US" b="0"/>
               <a:t>25</a:t>
             </a:fld>
             <a:endParaRPr lang="en-US"/>
@@ -11002,9 +10866,11 @@
       <p:sp>
         <p:nvSpPr>
           <p:cNvPr id="2" name="Text 0"/>
-          <p:cNvSpPr/>
-          <p:nvPr>
-            <p:ph idx="100" type="title" hasCustomPrompt="1"/>
+          <p:cNvSpPr>
+            <a:spLocks noGrp="1"/>
+          </p:cNvSpPr>
+          <p:nvPr>
+            <p:ph type="title" idx="100" hasCustomPrompt="1"/>
           </p:nvPr>
         </p:nvSpPr>
         <p:spPr>
@@ -11022,7 +10888,7 @@
           <a:bodyPr wrap="square" rtlCol="0" anchor="ctr"/>
           <a:lstStyle/>
           <a:p>
-            <a:pPr algn="ctr" indent="0" marL="0">
+            <a:pPr marL="0" indent="0" algn="ctr">
               <a:buNone/>
             </a:pPr>
             <a:r>
@@ -11043,9 +10909,11 @@
       <p:sp>
         <p:nvSpPr>
           <p:cNvPr id="3" name="Text 0"/>
-          <p:cNvSpPr/>
-          <p:nvPr>
-            <p:ph idx="101" type="body" hasCustomPrompt="1"/>
+          <p:cNvSpPr>
+            <a:spLocks noGrp="1"/>
+          </p:cNvSpPr>
+          <p:nvPr>
+            <p:ph type="body" idx="101" hasCustomPrompt="1"/>
           </p:nvPr>
         </p:nvSpPr>
         <p:spPr>
@@ -11063,7 +10931,7 @@
           <a:bodyPr wrap="square" rtlCol="0" anchor="t"/>
           <a:lstStyle/>
           <a:p>
-            <a:pPr algn="ctr" indent="0" marL="0">
+            <a:pPr marL="0" indent="0" algn="ctr">
               <a:buNone/>
             </a:pPr>
             <a:r>
@@ -11126,7 +10994,10 @@
         </p:spPr>
         <p:txBody>
           <a:bodyPr/>
-          <a:p/>
+          <a:lstStyle/>
+          <a:p>
+            <a:endParaRPr/>
+          </a:p>
         </p:txBody>
       </p:sp>
       <p:sp>
@@ -11150,7 +11021,7 @@
           <a:bodyPr wrap="square" lIns="0" tIns="0" rIns="0" bIns="0" rtlCol="0" anchor="t"/>
           <a:lstStyle/>
           <a:p>
-            <a:pPr algn="ctr" indent="0" marL="0">
+            <a:pPr marL="0" indent="0" algn="ctr">
               <a:buNone/>
             </a:pPr>
             <a:r>
@@ -11186,7 +11057,7 @@
           <a:bodyPr wrap="square" lIns="1016" tIns="1016" rIns="1016" bIns="1016" rtlCol="0" anchor="ctr"/>
           <a:lstStyle/>
           <a:p>
-            <a:pPr algn="ctr" indent="0" marL="0">
+            <a:pPr marL="0" indent="0" algn="ctr">
               <a:buNone/>
             </a:pPr>
             <a:r>
@@ -11203,7 +11074,7 @@
             <a:endParaRPr lang="en-US" sz="2800" dirty="0"/>
           </a:p>
           <a:p>
-            <a:pPr algn="ctr" indent="0" marL="0">
+            <a:pPr marL="0" indent="0" algn="ctr">
               <a:buNone/>
             </a:pPr>
             <a:r>
@@ -11242,7 +11113,7 @@
           <a:bodyPr wrap="square" lIns="1016" tIns="1016" rIns="1016" bIns="1016" rtlCol="0" anchor="t"/>
           <a:lstStyle/>
           <a:p>
-            <a:pPr algn="ctr" indent="0" marL="0">
+            <a:pPr marL="0" indent="0" algn="ctr">
               <a:lnSpc>
                 <a:spcPct val="130000"/>
               </a:lnSpc>
@@ -11259,7 +11130,7 @@
             <a:endParaRPr lang="en-US" sz="1600" dirty="0"/>
           </a:p>
           <a:p>
-            <a:pPr algn="ctr" indent="0" marL="0">
+            <a:pPr marL="0" indent="0" algn="ctr">
               <a:lnSpc>
                 <a:spcPct val="130000"/>
               </a:lnSpc>
@@ -11276,7 +11147,7 @@
             <a:endParaRPr lang="en-US" sz="1600" dirty="0"/>
           </a:p>
           <a:p>
-            <a:pPr algn="ctr" indent="0" marL="0">
+            <a:pPr marL="0" indent="0" algn="ctr">
               <a:lnSpc>
                 <a:spcPct val="130000"/>
               </a:lnSpc>
@@ -11314,7 +11185,7 @@
           </a:prstGeom>
           <a:extLst>
             <a:ext uri="{C572A759-6A51-4108-AA02-DFA0A04FC94B}">
-              <ma14:wrappingTextBoxFlag xmlns:ma14="http://schemas.microsoft.com/office/mac/drawingml/2011/main" val="0"/>
+              <ma14:wrappingTextBoxFlag xmlns:ma14="http://schemas.microsoft.com/office/mac/drawingml/2011/main" xmlns="" val="0"/>
             </a:ext>
           </a:extLst>
         </p:spPr>
@@ -11332,7 +11203,7 @@
           <a:p>
             <a:pPr algn="r"/>
             <a:fld id="{F7021451-1387-4CA6-816F-3879F97B5CBC}" type="slidenum">
-              <a:rPr b="0" lang="en-US"/>
+              <a:rPr lang="en-US" b="0"/>
               <a:t>27</a:t>
             </a:fld>
             <a:endParaRPr lang="en-US"/>
@@ -11387,7 +11258,10 @@
         </p:spPr>
         <p:txBody>
           <a:bodyPr/>
-          <a:p/>
+          <a:lstStyle/>
+          <a:p>
+            <a:endParaRPr/>
+          </a:p>
         </p:txBody>
       </p:sp>
       <p:sp>
@@ -11411,7 +11285,7 @@
           <a:bodyPr wrap="square" lIns="0" tIns="0" rIns="0" bIns="0" rtlCol="0" anchor="ctr"/>
           <a:lstStyle/>
           <a:p>
-            <a:pPr algn="ctr" indent="0" marL="0">
+            <a:pPr marL="0" indent="0" algn="ctr">
               <a:buNone/>
             </a:pPr>
             <a:r>
@@ -11447,7 +11321,7 @@
           <a:bodyPr wrap="square" lIns="0" tIns="0" rIns="0" bIns="0" rtlCol="0" anchor="t"/>
           <a:lstStyle/>
           <a:p>
-            <a:pPr indent="0" marL="0">
+            <a:pPr marL="0" indent="0">
               <a:buNone/>
             </a:pPr>
             <a:r>
@@ -11493,7 +11367,10 @@
         </p:spPr>
         <p:txBody>
           <a:bodyPr/>
-          <a:p/>
+          <a:lstStyle/>
+          <a:p>
+            <a:endParaRPr/>
+          </a:p>
         </p:txBody>
       </p:sp>
       <p:sp>
@@ -11523,7 +11400,7 @@
               </a:spcAft>
               <a:buSzPct val="100000"/>
               <a:buFont typeface="+mj-lt"/>
-              <a:buAutoNum type="arabicPeriod" startAt="1"/>
+              <a:buAutoNum type="arabicPeriod"/>
             </a:pPr>
             <a:r>
               <a:rPr lang="en-US" sz="1200" dirty="0">
@@ -11542,7 +11419,7 @@
               </a:spcAft>
               <a:buSzPct val="100000"/>
               <a:buFont typeface="+mj-lt"/>
-              <a:buAutoNum type="arabicPeriod" startAt="1"/>
+              <a:buAutoNum type="arabicPeriod"/>
             </a:pPr>
             <a:r>
               <a:rPr lang="en-US" sz="1200" dirty="0">
@@ -11561,7 +11438,7 @@
               </a:spcAft>
               <a:buSzPct val="100000"/>
               <a:buFont typeface="+mj-lt"/>
-              <a:buAutoNum type="arabicPeriod" startAt="1"/>
+              <a:buAutoNum type="arabicPeriod"/>
             </a:pPr>
             <a:r>
               <a:rPr lang="en-US" sz="1200" dirty="0">
@@ -11580,7 +11457,7 @@
               </a:spcAft>
               <a:buSzPct val="100000"/>
               <a:buFont typeface="+mj-lt"/>
-              <a:buAutoNum type="arabicPeriod" startAt="1"/>
+              <a:buAutoNum type="arabicPeriod"/>
             </a:pPr>
             <a:r>
               <a:rPr lang="en-US" sz="1200" dirty="0">
@@ -11599,7 +11476,7 @@
               </a:spcAft>
               <a:buSzPct val="100000"/>
               <a:buFont typeface="+mj-lt"/>
-              <a:buAutoNum type="arabicPeriod" startAt="1"/>
+              <a:buAutoNum type="arabicPeriod"/>
             </a:pPr>
             <a:r>
               <a:rPr lang="en-US" sz="1200" dirty="0">
@@ -11618,7 +11495,7 @@
               </a:spcAft>
               <a:buSzPct val="100000"/>
               <a:buFont typeface="+mj-lt"/>
-              <a:buAutoNum type="arabicPeriod" startAt="1"/>
+              <a:buAutoNum type="arabicPeriod"/>
             </a:pPr>
             <a:r>
               <a:rPr lang="en-US" sz="1200" dirty="0">
@@ -11634,14 +11511,14 @@
       </p:sp>
       <p:pic>
         <p:nvPicPr>
-          <p:cNvPr id="7" name="Image 0" descr="ガイドブック">    </p:cNvPr>
+          <p:cNvPr id="7" name="Image 0" descr="ガイドブック"/>
           <p:cNvPicPr>
             <a:picLocks noChangeAspect="1"/>
           </p:cNvPicPr>
           <p:nvPr/>
         </p:nvPicPr>
         <p:blipFill>
-          <a:blip r:embed="rId1"/>
+          <a:blip r:embed="rId3"/>
           <a:stretch>
             <a:fillRect/>
           </a:stretch>
@@ -11676,7 +11553,7 @@
           </a:prstGeom>
           <a:extLst>
             <a:ext uri="{C572A759-6A51-4108-AA02-DFA0A04FC94B}">
-              <ma14:wrappingTextBoxFlag xmlns:ma14="http://schemas.microsoft.com/office/mac/drawingml/2011/main" val="0"/>
+              <ma14:wrappingTextBoxFlag xmlns:ma14="http://schemas.microsoft.com/office/mac/drawingml/2011/main" xmlns="" val="0"/>
             </a:ext>
           </a:extLst>
         </p:spPr>
@@ -11694,7 +11571,7 @@
           <a:p>
             <a:pPr algn="r"/>
             <a:fld id="{F7021451-1387-4CA6-816F-3879F97B5CBC}" type="slidenum">
-              <a:rPr b="0" lang="en-US"/>
+              <a:rPr lang="en-US" b="0"/>
               <a:t>28</a:t>
             </a:fld>
             <a:endParaRPr lang="en-US"/>
@@ -11749,7 +11626,10 @@
         </p:spPr>
         <p:txBody>
           <a:bodyPr/>
-          <a:p/>
+          <a:lstStyle/>
+          <a:p>
+            <a:endParaRPr/>
+          </a:p>
         </p:txBody>
       </p:sp>
       <p:sp>
@@ -11773,7 +11653,7 @@
           <a:bodyPr wrap="square" lIns="0" tIns="0" rIns="0" bIns="0" rtlCol="0" anchor="t"/>
           <a:lstStyle/>
           <a:p>
-            <a:pPr algn="ctr" indent="0" marL="0">
+            <a:pPr marL="0" indent="0" algn="ctr">
               <a:buNone/>
             </a:pPr>
             <a:r>
@@ -11809,7 +11689,7 @@
           <a:bodyPr wrap="square" lIns="1016" tIns="1016" rIns="1016" bIns="1016" rtlCol="0" anchor="ctr"/>
           <a:lstStyle/>
           <a:p>
-            <a:pPr algn="ctr" indent="0" marL="0">
+            <a:pPr marL="0" indent="0" algn="ctr">
               <a:buNone/>
             </a:pPr>
             <a:r>
@@ -11848,7 +11728,7 @@
           <a:bodyPr wrap="square" lIns="1016" tIns="1016" rIns="1016" bIns="1016" rtlCol="0" anchor="ctr"/>
           <a:lstStyle/>
           <a:p>
-            <a:pPr algn="ctr" indent="0" marL="0">
+            <a:pPr marL="0" indent="0" algn="ctr">
               <a:buNone/>
             </a:pPr>
             <a:r>
@@ -11887,7 +11767,7 @@
           <a:bodyPr wrap="square" lIns="1016" tIns="1016" rIns="1016" bIns="1016" rtlCol="0" anchor="t"/>
           <a:lstStyle/>
           <a:p>
-            <a:pPr algn="ctr" indent="0" marL="0">
+            <a:pPr marL="0" indent="0" algn="ctr">
               <a:buNone/>
             </a:pPr>
             <a:r>
@@ -11922,7 +11802,7 @@
           </a:prstGeom>
           <a:extLst>
             <a:ext uri="{C572A759-6A51-4108-AA02-DFA0A04FC94B}">
-              <ma14:wrappingTextBoxFlag xmlns:ma14="http://schemas.microsoft.com/office/mac/drawingml/2011/main" val="0"/>
+              <ma14:wrappingTextBoxFlag xmlns:ma14="http://schemas.microsoft.com/office/mac/drawingml/2011/main" xmlns="" val="0"/>
             </a:ext>
           </a:extLst>
         </p:spPr>
@@ -11940,7 +11820,7 @@
           <a:p>
             <a:pPr algn="r"/>
             <a:fld id="{F7021451-1387-4CA6-816F-3879F97B5CBC}" type="slidenum">
-              <a:rPr b="0" lang="en-US"/>
+              <a:rPr lang="en-US" b="0"/>
               <a:t>29</a:t>
             </a:fld>
             <a:endParaRPr lang="en-US"/>
@@ -11975,9 +11855,11 @@
       <p:sp>
         <p:nvSpPr>
           <p:cNvPr id="2" name="Text 0"/>
-          <p:cNvSpPr/>
-          <p:nvPr>
-            <p:ph idx="100" type="title" hasCustomPrompt="1"/>
+          <p:cNvSpPr>
+            <a:spLocks noGrp="1"/>
+          </p:cNvSpPr>
+          <p:nvPr>
+            <p:ph type="title" idx="100" hasCustomPrompt="1"/>
           </p:nvPr>
         </p:nvSpPr>
         <p:spPr>
@@ -11995,7 +11877,7 @@
           <a:bodyPr wrap="square" lIns="0" tIns="0" rIns="0" bIns="0" rtlCol="0" anchor="ctr"/>
           <a:lstStyle/>
           <a:p>
-            <a:pPr algn="l" indent="0" marL="0">
+            <a:pPr marL="0" indent="0" algn="l">
               <a:buNone/>
             </a:pPr>
             <a:r>
@@ -12034,7 +11916,7 @@
           <a:bodyPr wrap="square" lIns="0" tIns="0" rIns="0" bIns="0" rtlCol="0" anchor="t"/>
           <a:lstStyle/>
           <a:p>
-            <a:pPr indent="0" marL="0">
+            <a:pPr marL="0" indent="0">
               <a:buNone/>
             </a:pPr>
             <a:r>
@@ -12077,7 +11959,10 @@
         </p:spPr>
         <p:txBody>
           <a:bodyPr/>
-          <a:p/>
+          <a:lstStyle/>
+          <a:p>
+            <a:endParaRPr/>
+          </a:p>
         </p:txBody>
       </p:sp>
       <p:sp>
@@ -12101,7 +11986,7 @@
           <a:bodyPr wrap="square" lIns="1016" tIns="1016" rIns="1016" bIns="1016" rtlCol="0" anchor="t"/>
           <a:lstStyle/>
           <a:p>
-            <a:pPr indent="0" marL="0">
+            <a:pPr marL="0" indent="0">
               <a:buNone/>
             </a:pPr>
             <a:r>
@@ -12137,7 +12022,7 @@
           <a:bodyPr wrap="square" lIns="1016" tIns="1016" rIns="1016" bIns="1016" rtlCol="0" anchor="t"/>
           <a:lstStyle/>
           <a:p>
-            <a:pPr indent="0" marL="0">
+            <a:pPr marL="0" indent="0">
               <a:buNone/>
             </a:pPr>
             <a:r>
@@ -12180,7 +12065,10 @@
         </p:spPr>
         <p:txBody>
           <a:bodyPr/>
-          <a:p/>
+          <a:lstStyle/>
+          <a:p>
+            <a:endParaRPr/>
+          </a:p>
         </p:txBody>
       </p:sp>
       <p:sp>
@@ -12204,7 +12092,7 @@
           <a:bodyPr wrap="square" lIns="1016" tIns="1016" rIns="1016" bIns="1016" rtlCol="0" anchor="t"/>
           <a:lstStyle/>
           <a:p>
-            <a:pPr indent="0" marL="0">
+            <a:pPr marL="0" indent="0">
               <a:buNone/>
             </a:pPr>
             <a:r>
@@ -12240,7 +12128,7 @@
           <a:bodyPr wrap="square" lIns="1016" tIns="1016" rIns="1016" bIns="1016" rtlCol="0" anchor="t"/>
           <a:lstStyle/>
           <a:p>
-            <a:pPr indent="0" marL="0">
+            <a:pPr marL="0" indent="0">
               <a:buNone/>
             </a:pPr>
             <a:r>
@@ -12283,7 +12171,10 @@
         </p:spPr>
         <p:txBody>
           <a:bodyPr/>
-          <a:p/>
+          <a:lstStyle/>
+          <a:p>
+            <a:endParaRPr/>
+          </a:p>
         </p:txBody>
       </p:sp>
       <p:sp>
@@ -12307,7 +12198,7 @@
           <a:bodyPr wrap="square" lIns="1016" tIns="1016" rIns="1016" bIns="1016" rtlCol="0" anchor="t"/>
           <a:lstStyle/>
           <a:p>
-            <a:pPr indent="0" marL="0">
+            <a:pPr marL="0" indent="0">
               <a:buNone/>
             </a:pPr>
             <a:r>
@@ -12343,7 +12234,7 @@
           <a:bodyPr wrap="square" lIns="1016" tIns="1016" rIns="1016" bIns="1016" rtlCol="0" anchor="t"/>
           <a:lstStyle/>
           <a:p>
-            <a:pPr indent="0" marL="0">
+            <a:pPr marL="0" indent="0">
               <a:buNone/>
             </a:pPr>
             <a:r>
@@ -12357,7 +12248,7 @@
             <a:endParaRPr lang="en-US" sz="1600" dirty="0"/>
           </a:p>
           <a:p>
-            <a:pPr indent="0" marL="0">
+            <a:pPr marL="0" indent="0">
               <a:buNone/>
             </a:pPr>
             <a:r>
@@ -12392,7 +12283,7 @@
           </a:prstGeom>
           <a:extLst>
             <a:ext uri="{C572A759-6A51-4108-AA02-DFA0A04FC94B}">
-              <ma14:wrappingTextBoxFlag xmlns:ma14="http://schemas.microsoft.com/office/mac/drawingml/2011/main" val="0"/>
+              <ma14:wrappingTextBoxFlag xmlns:ma14="http://schemas.microsoft.com/office/mac/drawingml/2011/main" xmlns="" val="0"/>
             </a:ext>
           </a:extLst>
         </p:spPr>
@@ -12410,7 +12301,7 @@
           <a:p>
             <a:pPr algn="r"/>
             <a:fld id="{F7021451-1387-4CA6-816F-3879F97B5CBC}" type="slidenum">
-              <a:rPr b="0" lang="en-US"/>
+              <a:rPr lang="en-US" b="0"/>
               <a:t>3</a:t>
             </a:fld>
             <a:endParaRPr lang="en-US"/>
@@ -12465,7 +12356,10 @@
         </p:spPr>
         <p:txBody>
           <a:bodyPr/>
-          <a:p/>
+          <a:lstStyle/>
+          <a:p>
+            <a:endParaRPr/>
+          </a:p>
         </p:txBody>
       </p:sp>
       <p:sp>
@@ -12489,7 +12383,7 @@
           <a:bodyPr wrap="square" lIns="0" tIns="0" rIns="0" bIns="0" rtlCol="0" anchor="t"/>
           <a:lstStyle/>
           <a:p>
-            <a:pPr algn="ctr" indent="0" marL="0">
+            <a:pPr marL="0" indent="0" algn="ctr">
               <a:buNone/>
             </a:pPr>
             <a:r>
@@ -12507,9 +12401,11 @@
       <p:sp>
         <p:nvSpPr>
           <p:cNvPr id="4" name="Text 0"/>
-          <p:cNvSpPr/>
-          <p:nvPr>
-            <p:ph idx="100" type="title" hasCustomPrompt="1"/>
+          <p:cNvSpPr>
+            <a:spLocks noGrp="1"/>
+          </p:cNvSpPr>
+          <p:nvPr>
+            <p:ph type="title" idx="100" hasCustomPrompt="1"/>
           </p:nvPr>
         </p:nvSpPr>
         <p:spPr>
@@ -12527,7 +12423,7 @@
           <a:bodyPr wrap="square" rtlCol="0" anchor="ctr"/>
           <a:lstStyle/>
           <a:p>
-            <a:pPr algn="ctr" indent="0" marL="0">
+            <a:pPr marL="0" indent="0" algn="ctr">
               <a:buNone/>
             </a:pPr>
             <a:r>
@@ -12544,7 +12440,7 @@
             <a:endParaRPr lang="en-US" sz="3200" dirty="0"/>
           </a:p>
           <a:p>
-            <a:pPr algn="ctr" indent="0" marL="0">
+            <a:pPr marL="0" indent="0" algn="ctr">
               <a:buNone/>
             </a:pPr>
             <a:r>
@@ -12561,7 +12457,7 @@
             <a:endParaRPr lang="en-US" sz="3200" dirty="0"/>
           </a:p>
           <a:p>
-            <a:pPr algn="ctr" indent="0" marL="0">
+            <a:pPr marL="0" indent="0" algn="ctr">
               <a:buNone/>
             </a:pPr>
             <a:r>
@@ -12599,7 +12495,7 @@
           </a:prstGeom>
           <a:extLst>
             <a:ext uri="{C572A759-6A51-4108-AA02-DFA0A04FC94B}">
-              <ma14:wrappingTextBoxFlag xmlns:ma14="http://schemas.microsoft.com/office/mac/drawingml/2011/main" val="0"/>
+              <ma14:wrappingTextBoxFlag xmlns:ma14="http://schemas.microsoft.com/office/mac/drawingml/2011/main" xmlns="" val="0"/>
             </a:ext>
           </a:extLst>
         </p:spPr>
@@ -12617,7 +12513,7 @@
           <a:p>
             <a:pPr algn="r"/>
             <a:fld id="{F7021451-1387-4CA6-816F-3879F97B5CBC}" type="slidenum">
-              <a:rPr b="0" lang="en-US"/>
+              <a:rPr lang="en-US" b="0"/>
               <a:t>30</a:t>
             </a:fld>
             <a:endParaRPr lang="en-US"/>
@@ -12672,7 +12568,10 @@
         </p:spPr>
         <p:txBody>
           <a:bodyPr/>
-          <a:p/>
+          <a:lstStyle/>
+          <a:p>
+            <a:endParaRPr/>
+          </a:p>
         </p:txBody>
       </p:sp>
       <p:sp>
@@ -12696,7 +12595,7 @@
           <a:bodyPr wrap="square" lIns="0" tIns="0" rIns="0" bIns="0" rtlCol="0" anchor="t"/>
           <a:lstStyle/>
           <a:p>
-            <a:pPr algn="ctr" indent="0" marL="0">
+            <a:pPr marL="0" indent="0" algn="ctr">
               <a:buNone/>
             </a:pPr>
             <a:r>
@@ -12714,9 +12613,11 @@
       <p:sp>
         <p:nvSpPr>
           <p:cNvPr id="4" name="Text 0"/>
-          <p:cNvSpPr/>
-          <p:nvPr>
-            <p:ph idx="100" type="title" hasCustomPrompt="1"/>
+          <p:cNvSpPr>
+            <a:spLocks noGrp="1"/>
+          </p:cNvSpPr>
+          <p:nvPr>
+            <p:ph type="title" idx="100" hasCustomPrompt="1"/>
           </p:nvPr>
         </p:nvSpPr>
         <p:spPr>
@@ -12734,7 +12635,7 @@
           <a:bodyPr wrap="square" rtlCol="0" anchor="ctr"/>
           <a:lstStyle/>
           <a:p>
-            <a:pPr algn="ctr" indent="0" marL="0">
+            <a:pPr marL="0" indent="0" algn="ctr">
               <a:buNone/>
             </a:pPr>
             <a:r>
@@ -12751,7 +12652,7 @@
             <a:endParaRPr lang="en-US" sz="3200" dirty="0"/>
           </a:p>
           <a:p>
-            <a:pPr algn="ctr" indent="0" marL="0">
+            <a:pPr marL="0" indent="0" algn="ctr">
               <a:buNone/>
             </a:pPr>
             <a:r>
@@ -12772,9 +12673,11 @@
       <p:sp>
         <p:nvSpPr>
           <p:cNvPr id="5" name="Text 0"/>
-          <p:cNvSpPr/>
-          <p:nvPr>
-            <p:ph idx="101" type="body" hasCustomPrompt="1"/>
+          <p:cNvSpPr>
+            <a:spLocks noGrp="1"/>
+          </p:cNvSpPr>
+          <p:nvPr>
+            <p:ph type="body" idx="101" hasCustomPrompt="1"/>
           </p:nvPr>
         </p:nvSpPr>
         <p:spPr>
@@ -12792,7 +12695,7 @@
           <a:bodyPr wrap="square" rtlCol="0" anchor="t"/>
           <a:lstStyle/>
           <a:p>
-            <a:pPr algn="ctr" indent="0" marL="0">
+            <a:pPr marL="0" indent="0" algn="ctr">
               <a:buNone/>
             </a:pPr>
             <a:r>
@@ -12806,7 +12709,7 @@
             <a:endParaRPr lang="en-US" sz="1500" dirty="0"/>
           </a:p>
           <a:p>
-            <a:pPr algn="ctr" indent="0" marL="0">
+            <a:pPr marL="0" indent="0" algn="ctr">
               <a:buNone/>
             </a:pPr>
             <a:r>
@@ -12841,7 +12744,7 @@
           </a:prstGeom>
           <a:extLst>
             <a:ext uri="{C572A759-6A51-4108-AA02-DFA0A04FC94B}">
-              <ma14:wrappingTextBoxFlag xmlns:ma14="http://schemas.microsoft.com/office/mac/drawingml/2011/main" val="0"/>
+              <ma14:wrappingTextBoxFlag xmlns:ma14="http://schemas.microsoft.com/office/mac/drawingml/2011/main" xmlns="" val="0"/>
             </a:ext>
           </a:extLst>
         </p:spPr>
@@ -12859,7 +12762,7 @@
           <a:p>
             <a:pPr algn="r"/>
             <a:fld id="{F7021451-1387-4CA6-816F-3879F97B5CBC}" type="slidenum">
-              <a:rPr b="0" lang="en-US"/>
+              <a:rPr lang="en-US" b="0"/>
               <a:t>31</a:t>
             </a:fld>
             <a:endParaRPr lang="en-US"/>
@@ -12894,9 +12797,11 @@
       <p:sp>
         <p:nvSpPr>
           <p:cNvPr id="2" name="Text 0"/>
-          <p:cNvSpPr/>
-          <p:nvPr>
-            <p:ph idx="100" type="title" hasCustomPrompt="1"/>
+          <p:cNvSpPr>
+            <a:spLocks noGrp="1"/>
+          </p:cNvSpPr>
+          <p:nvPr>
+            <p:ph type="title" idx="100" hasCustomPrompt="1"/>
           </p:nvPr>
         </p:nvSpPr>
         <p:spPr>
@@ -12914,7 +12819,7 @@
           <a:bodyPr wrap="square" lIns="0" tIns="0" rIns="0" bIns="0" rtlCol="0" anchor="ctr"/>
           <a:lstStyle/>
           <a:p>
-            <a:pPr algn="l" indent="0" marL="0">
+            <a:pPr marL="0" indent="0" algn="l">
               <a:buNone/>
             </a:pPr>
             <a:r>
@@ -12948,16 +12853,34 @@
         </p:nvGraphicFramePr>
         <p:xfrm>
           <a:off x="457200" y="1188720"/>
-          <a:ext cx="5303520" cy="914400"/>
+          <a:ext cx="5303520" cy="3319272"/>
         </p:xfrm>
         <a:graphic>
           <a:graphicData uri="http://schemas.openxmlformats.org/drawingml/2006/table">
             <a:tbl>
               <a:tblPr/>
               <a:tblGrid>
-                <a:gridCol w="548640"/>
-                <a:gridCol w="3749040"/>
-                <a:gridCol w="1005840"/>
+                <a:gridCol w="548640">
+                  <a:extLst>
+                    <a:ext uri="{9D8B030D-6E8A-4147-A177-3AD203B41FA5}">
+                      <a16:colId xmlns:a16="http://schemas.microsoft.com/office/drawing/2014/main" val="20000"/>
+                    </a:ext>
+                  </a:extLst>
+                </a:gridCol>
+                <a:gridCol w="3749040">
+                  <a:extLst>
+                    <a:ext uri="{9D8B030D-6E8A-4147-A177-3AD203B41FA5}">
+                      <a16:colId xmlns:a16="http://schemas.microsoft.com/office/drawing/2014/main" val="20001"/>
+                    </a:ext>
+                  </a:extLst>
+                </a:gridCol>
+                <a:gridCol w="1005840">
+                  <a:extLst>
+                    <a:ext uri="{9D8B030D-6E8A-4147-A177-3AD203B41FA5}">
+                      <a16:colId xmlns:a16="http://schemas.microsoft.com/office/drawing/2014/main" val="20002"/>
+                    </a:ext>
+                  </a:extLst>
+                </a:gridCol>
               </a:tblGrid>
               <a:tr h="301752">
                 <a:tc>
@@ -12965,7 +12888,7 @@
                     <a:bodyPr/>
                     <a:lstStyle/>
                     <a:p>
-                      <a:pPr algn="ctr" indent="0" marL="0">
+                      <a:pPr marL="0" indent="0" algn="ctr">
                         <a:buNone/>
                       </a:pPr>
                       <a:r>
@@ -12979,7 +12902,7 @@
                       <a:endParaRPr lang="en-US" sz="1300" dirty="0"/>
                     </a:p>
                   </a:txBody>
-                  <a:tcPr marL="91440" marR="91440" marT="45720" marB="45720" anchor="ctr">
+                  <a:tcPr anchor="ctr">
                     <a:lnL w="9525" cap="flat" cmpd="sng" algn="ctr">
                       <a:solidFill>
                         <a:srgbClr val="E9D9B6"/>
@@ -13026,7 +12949,7 @@
                     <a:bodyPr/>
                     <a:lstStyle/>
                     <a:p>
-                      <a:pPr algn="ctr" indent="0" marL="0">
+                      <a:pPr marL="0" indent="0" algn="ctr">
                         <a:buNone/>
                       </a:pPr>
                       <a:r>
@@ -13040,7 +12963,7 @@
                       <a:endParaRPr lang="en-US" sz="1300" dirty="0"/>
                     </a:p>
                   </a:txBody>
-                  <a:tcPr marL="91440" marR="91440" marT="45720" marB="45720" anchor="ctr">
+                  <a:tcPr anchor="ctr">
                     <a:lnL w="9525" cap="flat" cmpd="sng" algn="ctr">
                       <a:solidFill>
                         <a:srgbClr val="E9D9B6"/>
@@ -13087,7 +13010,7 @@
                     <a:bodyPr/>
                     <a:lstStyle/>
                     <a:p>
-                      <a:pPr algn="ctr" indent="0" marL="0">
+                      <a:pPr marL="0" indent="0" algn="ctr">
                         <a:buNone/>
                       </a:pPr>
                       <a:r>
@@ -13101,7 +13024,7 @@
                       <a:endParaRPr lang="en-US" sz="1300" dirty="0"/>
                     </a:p>
                   </a:txBody>
-                  <a:tcPr marL="91440" marR="91440" marT="45720" marB="45720" anchor="ctr">
+                  <a:tcPr anchor="ctr">
                     <a:lnL w="9525" cap="flat" cmpd="sng" algn="ctr">
                       <a:solidFill>
                         <a:srgbClr val="E9D9B6"/>
@@ -13143,6 +13066,11 @@
                     </a:solidFill>
                   </a:tcPr>
                 </a:tc>
+                <a:extLst>
+                  <a:ext uri="{0D108BD9-81ED-4DB2-BD59-A6C34878D82A}">
+                    <a16:rowId xmlns:a16="http://schemas.microsoft.com/office/drawing/2014/main" val="10000"/>
+                  </a:ext>
+                </a:extLst>
               </a:tr>
               <a:tr h="301752">
                 <a:tc>
@@ -13150,7 +13078,7 @@
                     <a:bodyPr/>
                     <a:lstStyle/>
                     <a:p>
-                      <a:pPr algn="ctr" indent="0" marL="0">
+                      <a:pPr marL="0" indent="0" algn="ctr">
                         <a:buNone/>
                       </a:pPr>
                       <a:r>
@@ -13164,7 +13092,7 @@
                       <a:endParaRPr lang="en-US" sz="1300" dirty="0"/>
                     </a:p>
                   </a:txBody>
-                  <a:tcPr marL="91440" marR="91440" marT="45720" marB="45720">
+                  <a:tcPr>
                     <a:lnL w="9525" cap="flat" cmpd="sng" algn="ctr">
                       <a:solidFill>
                         <a:srgbClr val="E9D9B6"/>
@@ -13211,13 +13139,13 @@
                     <a:bodyPr/>
                     <a:lstStyle/>
                     <a:p>
-                      <a:pPr indent="0" marL="0">
+                      <a:pPr marL="0" indent="0">
                         <a:buNone/>
                       </a:pPr>
                       <a:endParaRPr lang="en-US" sz="1300" dirty="0"/>
                     </a:p>
                   </a:txBody>
-                  <a:tcPr marL="91440" marR="91440" marT="45720" marB="45720">
+                  <a:tcPr>
                     <a:lnL w="9525" cap="flat" cmpd="sng" algn="ctr">
                       <a:solidFill>
                         <a:srgbClr val="E9D9B6"/>
@@ -13264,7 +13192,7 @@
                     <a:bodyPr/>
                     <a:lstStyle/>
                     <a:p>
-                      <a:pPr algn="r" indent="0" marL="0">
+                      <a:pPr marL="0" indent="0" algn="r">
                         <a:buNone/>
                       </a:pPr>
                       <a:r>
@@ -13278,7 +13206,7 @@
                       <a:endParaRPr lang="en-US" sz="1300" dirty="0"/>
                     </a:p>
                   </a:txBody>
-                  <a:tcPr marL="91440" marR="91440" marT="45720" marB="45720">
+                  <a:tcPr>
                     <a:lnL w="9525" cap="flat" cmpd="sng" algn="ctr">
                       <a:solidFill>
                         <a:srgbClr val="E9D9B6"/>
@@ -13320,6 +13248,11 @@
                     </a:solidFill>
                   </a:tcPr>
                 </a:tc>
+                <a:extLst>
+                  <a:ext uri="{0D108BD9-81ED-4DB2-BD59-A6C34878D82A}">
+                    <a16:rowId xmlns:a16="http://schemas.microsoft.com/office/drawing/2014/main" val="10001"/>
+                  </a:ext>
+                </a:extLst>
               </a:tr>
               <a:tr h="301752">
                 <a:tc>
@@ -13327,7 +13260,7 @@
                     <a:bodyPr/>
                     <a:lstStyle/>
                     <a:p>
-                      <a:pPr algn="ctr" indent="0" marL="0">
+                      <a:pPr marL="0" indent="0" algn="ctr">
                         <a:buNone/>
                       </a:pPr>
                       <a:r>
@@ -13341,7 +13274,7 @@
                       <a:endParaRPr lang="en-US" sz="1300" dirty="0"/>
                     </a:p>
                   </a:txBody>
-                  <a:tcPr marL="91440" marR="91440" marT="45720" marB="45720">
+                  <a:tcPr>
                     <a:lnL w="9525" cap="flat" cmpd="sng" algn="ctr">
                       <a:solidFill>
                         <a:srgbClr val="E9D9B6"/>
@@ -13388,13 +13321,13 @@
                     <a:bodyPr/>
                     <a:lstStyle/>
                     <a:p>
-                      <a:pPr indent="0" marL="0">
+                      <a:pPr marL="0" indent="0">
                         <a:buNone/>
                       </a:pPr>
                       <a:endParaRPr lang="en-US" sz="1300" dirty="0"/>
                     </a:p>
                   </a:txBody>
-                  <a:tcPr marL="91440" marR="91440" marT="45720" marB="45720">
+                  <a:tcPr>
                     <a:lnL w="9525" cap="flat" cmpd="sng" algn="ctr">
                       <a:solidFill>
                         <a:srgbClr val="E9D9B6"/>
@@ -13441,7 +13374,7 @@
                     <a:bodyPr/>
                     <a:lstStyle/>
                     <a:p>
-                      <a:pPr algn="r" indent="0" marL="0">
+                      <a:pPr marL="0" indent="0" algn="r">
                         <a:buNone/>
                       </a:pPr>
                       <a:r>
@@ -13455,7 +13388,7 @@
                       <a:endParaRPr lang="en-US" sz="1300" dirty="0"/>
                     </a:p>
                   </a:txBody>
-                  <a:tcPr marL="91440" marR="91440" marT="45720" marB="45720">
+                  <a:tcPr>
                     <a:lnL w="9525" cap="flat" cmpd="sng" algn="ctr">
                       <a:solidFill>
                         <a:srgbClr val="E9D9B6"/>
@@ -13497,6 +13430,11 @@
                     </a:solidFill>
                   </a:tcPr>
                 </a:tc>
+                <a:extLst>
+                  <a:ext uri="{0D108BD9-81ED-4DB2-BD59-A6C34878D82A}">
+                    <a16:rowId xmlns:a16="http://schemas.microsoft.com/office/drawing/2014/main" val="10002"/>
+                  </a:ext>
+                </a:extLst>
               </a:tr>
               <a:tr h="301752">
                 <a:tc>
@@ -13504,7 +13442,7 @@
                     <a:bodyPr/>
                     <a:lstStyle/>
                     <a:p>
-                      <a:pPr algn="ctr" indent="0" marL="0">
+                      <a:pPr marL="0" indent="0" algn="ctr">
                         <a:buNone/>
                       </a:pPr>
                       <a:r>
@@ -13518,7 +13456,7 @@
                       <a:endParaRPr lang="en-US" sz="1300" dirty="0"/>
                     </a:p>
                   </a:txBody>
-                  <a:tcPr marL="91440" marR="91440" marT="45720" marB="45720">
+                  <a:tcPr>
                     <a:lnL w="9525" cap="flat" cmpd="sng" algn="ctr">
                       <a:solidFill>
                         <a:srgbClr val="E9D9B6"/>
@@ -13565,13 +13503,13 @@
                     <a:bodyPr/>
                     <a:lstStyle/>
                     <a:p>
-                      <a:pPr indent="0" marL="0">
+                      <a:pPr marL="0" indent="0">
                         <a:buNone/>
                       </a:pPr>
                       <a:endParaRPr lang="en-US" sz="1300" dirty="0"/>
                     </a:p>
                   </a:txBody>
-                  <a:tcPr marL="91440" marR="91440" marT="45720" marB="45720">
+                  <a:tcPr>
                     <a:lnL w="9525" cap="flat" cmpd="sng" algn="ctr">
                       <a:solidFill>
                         <a:srgbClr val="E9D9B6"/>
@@ -13618,7 +13556,7 @@
                     <a:bodyPr/>
                     <a:lstStyle/>
                     <a:p>
-                      <a:pPr algn="r" indent="0" marL="0">
+                      <a:pPr marL="0" indent="0" algn="r">
                         <a:buNone/>
                       </a:pPr>
                       <a:r>
@@ -13632,7 +13570,7 @@
                       <a:endParaRPr lang="en-US" sz="1300" dirty="0"/>
                     </a:p>
                   </a:txBody>
-                  <a:tcPr marL="91440" marR="91440" marT="45720" marB="45720">
+                  <a:tcPr>
                     <a:lnL w="9525" cap="flat" cmpd="sng" algn="ctr">
                       <a:solidFill>
                         <a:srgbClr val="E9D9B6"/>
@@ -13674,6 +13612,11 @@
                     </a:solidFill>
                   </a:tcPr>
                 </a:tc>
+                <a:extLst>
+                  <a:ext uri="{0D108BD9-81ED-4DB2-BD59-A6C34878D82A}">
+                    <a16:rowId xmlns:a16="http://schemas.microsoft.com/office/drawing/2014/main" val="10003"/>
+                  </a:ext>
+                </a:extLst>
               </a:tr>
               <a:tr h="301752">
                 <a:tc>
@@ -13681,7 +13624,7 @@
                     <a:bodyPr/>
                     <a:lstStyle/>
                     <a:p>
-                      <a:pPr algn="ctr" indent="0" marL="0">
+                      <a:pPr marL="0" indent="0" algn="ctr">
                         <a:buNone/>
                       </a:pPr>
                       <a:r>
@@ -13695,7 +13638,7 @@
                       <a:endParaRPr lang="en-US" sz="1300" dirty="0"/>
                     </a:p>
                   </a:txBody>
-                  <a:tcPr marL="91440" marR="91440" marT="45720" marB="45720">
+                  <a:tcPr>
                     <a:lnL w="9525" cap="flat" cmpd="sng" algn="ctr">
                       <a:solidFill>
                         <a:srgbClr val="E9D9B6"/>
@@ -13742,13 +13685,13 @@
                     <a:bodyPr/>
                     <a:lstStyle/>
                     <a:p>
-                      <a:pPr indent="0" marL="0">
+                      <a:pPr marL="0" indent="0">
                         <a:buNone/>
                       </a:pPr>
                       <a:endParaRPr lang="en-US" sz="1300" dirty="0"/>
                     </a:p>
                   </a:txBody>
-                  <a:tcPr marL="91440" marR="91440" marT="45720" marB="45720">
+                  <a:tcPr>
                     <a:lnL w="9525" cap="flat" cmpd="sng" algn="ctr">
                       <a:solidFill>
                         <a:srgbClr val="E9D9B6"/>
@@ -13795,7 +13738,7 @@
                     <a:bodyPr/>
                     <a:lstStyle/>
                     <a:p>
-                      <a:pPr algn="r" indent="0" marL="0">
+                      <a:pPr marL="0" indent="0" algn="r">
                         <a:buNone/>
                       </a:pPr>
                       <a:r>
@@ -13809,7 +13752,7 @@
                       <a:endParaRPr lang="en-US" sz="1300" dirty="0"/>
                     </a:p>
                   </a:txBody>
-                  <a:tcPr marL="91440" marR="91440" marT="45720" marB="45720">
+                  <a:tcPr>
                     <a:lnL w="9525" cap="flat" cmpd="sng" algn="ctr">
                       <a:solidFill>
                         <a:srgbClr val="E9D9B6"/>
@@ -13851,6 +13794,11 @@
                     </a:solidFill>
                   </a:tcPr>
                 </a:tc>
+                <a:extLst>
+                  <a:ext uri="{0D108BD9-81ED-4DB2-BD59-A6C34878D82A}">
+                    <a16:rowId xmlns:a16="http://schemas.microsoft.com/office/drawing/2014/main" val="10004"/>
+                  </a:ext>
+                </a:extLst>
               </a:tr>
               <a:tr h="301752">
                 <a:tc>
@@ -13858,7 +13806,7 @@
                     <a:bodyPr/>
                     <a:lstStyle/>
                     <a:p>
-                      <a:pPr algn="ctr" indent="0" marL="0">
+                      <a:pPr marL="0" indent="0" algn="ctr">
                         <a:buNone/>
                       </a:pPr>
                       <a:r>
@@ -13872,7 +13820,7 @@
                       <a:endParaRPr lang="en-US" sz="1300" dirty="0"/>
                     </a:p>
                   </a:txBody>
-                  <a:tcPr marL="91440" marR="91440" marT="45720" marB="45720">
+                  <a:tcPr>
                     <a:lnL w="9525" cap="flat" cmpd="sng" algn="ctr">
                       <a:solidFill>
                         <a:srgbClr val="E9D9B6"/>
@@ -13919,13 +13867,13 @@
                     <a:bodyPr/>
                     <a:lstStyle/>
                     <a:p>
-                      <a:pPr indent="0" marL="0">
+                      <a:pPr marL="0" indent="0">
                         <a:buNone/>
                       </a:pPr>
                       <a:endParaRPr lang="en-US" sz="1300" dirty="0"/>
                     </a:p>
                   </a:txBody>
-                  <a:tcPr marL="91440" marR="91440" marT="45720" marB="45720">
+                  <a:tcPr>
                     <a:lnL w="9525" cap="flat" cmpd="sng" algn="ctr">
                       <a:solidFill>
                         <a:srgbClr val="E9D9B6"/>
@@ -13972,7 +13920,7 @@
                     <a:bodyPr/>
                     <a:lstStyle/>
                     <a:p>
-                      <a:pPr algn="r" indent="0" marL="0">
+                      <a:pPr marL="0" indent="0" algn="r">
                         <a:buNone/>
                       </a:pPr>
                       <a:r>
@@ -13986,7 +13934,7 @@
                       <a:endParaRPr lang="en-US" sz="1300" dirty="0"/>
                     </a:p>
                   </a:txBody>
-                  <a:tcPr marL="91440" marR="91440" marT="45720" marB="45720">
+                  <a:tcPr>
                     <a:lnL w="9525" cap="flat" cmpd="sng" algn="ctr">
                       <a:solidFill>
                         <a:srgbClr val="E9D9B6"/>
@@ -14028,6 +13976,11 @@
                     </a:solidFill>
                   </a:tcPr>
                 </a:tc>
+                <a:extLst>
+                  <a:ext uri="{0D108BD9-81ED-4DB2-BD59-A6C34878D82A}">
+                    <a16:rowId xmlns:a16="http://schemas.microsoft.com/office/drawing/2014/main" val="10005"/>
+                  </a:ext>
+                </a:extLst>
               </a:tr>
               <a:tr h="301752">
                 <a:tc>
@@ -14035,7 +13988,7 @@
                     <a:bodyPr/>
                     <a:lstStyle/>
                     <a:p>
-                      <a:pPr algn="ctr" indent="0" marL="0">
+                      <a:pPr marL="0" indent="0" algn="ctr">
                         <a:buNone/>
                       </a:pPr>
                       <a:r>
@@ -14049,7 +14002,7 @@
                       <a:endParaRPr lang="en-US" sz="1300" dirty="0"/>
                     </a:p>
                   </a:txBody>
-                  <a:tcPr marL="91440" marR="91440" marT="45720" marB="45720">
+                  <a:tcPr>
                     <a:lnL w="9525" cap="flat" cmpd="sng" algn="ctr">
                       <a:solidFill>
                         <a:srgbClr val="E9D9B6"/>
@@ -14096,13 +14049,13 @@
                     <a:bodyPr/>
                     <a:lstStyle/>
                     <a:p>
-                      <a:pPr indent="0" marL="0">
+                      <a:pPr marL="0" indent="0">
                         <a:buNone/>
                       </a:pPr>
                       <a:endParaRPr lang="en-US" sz="1300" dirty="0"/>
                     </a:p>
                   </a:txBody>
-                  <a:tcPr marL="91440" marR="91440" marT="45720" marB="45720">
+                  <a:tcPr>
                     <a:lnL w="9525" cap="flat" cmpd="sng" algn="ctr">
                       <a:solidFill>
                         <a:srgbClr val="E9D9B6"/>
@@ -14149,7 +14102,7 @@
                     <a:bodyPr/>
                     <a:lstStyle/>
                     <a:p>
-                      <a:pPr algn="r" indent="0" marL="0">
+                      <a:pPr marL="0" indent="0" algn="r">
                         <a:buNone/>
                       </a:pPr>
                       <a:r>
@@ -14163,7 +14116,7 @@
                       <a:endParaRPr lang="en-US" sz="1300" dirty="0"/>
                     </a:p>
                   </a:txBody>
-                  <a:tcPr marL="91440" marR="91440" marT="45720" marB="45720">
+                  <a:tcPr>
                     <a:lnL w="9525" cap="flat" cmpd="sng" algn="ctr">
                       <a:solidFill>
                         <a:srgbClr val="E9D9B6"/>
@@ -14205,6 +14158,11 @@
                     </a:solidFill>
                   </a:tcPr>
                 </a:tc>
+                <a:extLst>
+                  <a:ext uri="{0D108BD9-81ED-4DB2-BD59-A6C34878D82A}">
+                    <a16:rowId xmlns:a16="http://schemas.microsoft.com/office/drawing/2014/main" val="10006"/>
+                  </a:ext>
+                </a:extLst>
               </a:tr>
               <a:tr h="301752">
                 <a:tc>
@@ -14212,7 +14170,7 @@
                     <a:bodyPr/>
                     <a:lstStyle/>
                     <a:p>
-                      <a:pPr algn="ctr" indent="0" marL="0">
+                      <a:pPr marL="0" indent="0" algn="ctr">
                         <a:buNone/>
                       </a:pPr>
                       <a:r>
@@ -14226,7 +14184,7 @@
                       <a:endParaRPr lang="en-US" sz="1300" dirty="0"/>
                     </a:p>
                   </a:txBody>
-                  <a:tcPr marL="91440" marR="91440" marT="45720" marB="45720">
+                  <a:tcPr>
                     <a:lnL w="9525" cap="flat" cmpd="sng" algn="ctr">
                       <a:solidFill>
                         <a:srgbClr val="E9D9B6"/>
@@ -14273,13 +14231,13 @@
                     <a:bodyPr/>
                     <a:lstStyle/>
                     <a:p>
-                      <a:pPr indent="0" marL="0">
+                      <a:pPr marL="0" indent="0">
                         <a:buNone/>
                       </a:pPr>
                       <a:endParaRPr lang="en-US" sz="1300" dirty="0"/>
                     </a:p>
                   </a:txBody>
-                  <a:tcPr marL="91440" marR="91440" marT="45720" marB="45720">
+                  <a:tcPr>
                     <a:lnL w="9525" cap="flat" cmpd="sng" algn="ctr">
                       <a:solidFill>
                         <a:srgbClr val="E9D9B6"/>
@@ -14326,7 +14284,7 @@
                     <a:bodyPr/>
                     <a:lstStyle/>
                     <a:p>
-                      <a:pPr algn="r" indent="0" marL="0">
+                      <a:pPr marL="0" indent="0" algn="r">
                         <a:buNone/>
                       </a:pPr>
                       <a:r>
@@ -14340,7 +14298,7 @@
                       <a:endParaRPr lang="en-US" sz="1300" dirty="0"/>
                     </a:p>
                   </a:txBody>
-                  <a:tcPr marL="91440" marR="91440" marT="45720" marB="45720">
+                  <a:tcPr>
                     <a:lnL w="9525" cap="flat" cmpd="sng" algn="ctr">
                       <a:solidFill>
                         <a:srgbClr val="E9D9B6"/>
@@ -14382,6 +14340,11 @@
                     </a:solidFill>
                   </a:tcPr>
                 </a:tc>
+                <a:extLst>
+                  <a:ext uri="{0D108BD9-81ED-4DB2-BD59-A6C34878D82A}">
+                    <a16:rowId xmlns:a16="http://schemas.microsoft.com/office/drawing/2014/main" val="10007"/>
+                  </a:ext>
+                </a:extLst>
               </a:tr>
               <a:tr h="301752">
                 <a:tc>
@@ -14389,7 +14352,7 @@
                     <a:bodyPr/>
                     <a:lstStyle/>
                     <a:p>
-                      <a:pPr algn="ctr" indent="0" marL="0">
+                      <a:pPr marL="0" indent="0" algn="ctr">
                         <a:buNone/>
                       </a:pPr>
                       <a:r>
@@ -14403,7 +14366,7 @@
                       <a:endParaRPr lang="en-US" sz="1300" dirty="0"/>
                     </a:p>
                   </a:txBody>
-                  <a:tcPr marL="91440" marR="91440" marT="45720" marB="45720">
+                  <a:tcPr>
                     <a:lnL w="9525" cap="flat" cmpd="sng" algn="ctr">
                       <a:solidFill>
                         <a:srgbClr val="E9D9B6"/>
@@ -14450,13 +14413,13 @@
                     <a:bodyPr/>
                     <a:lstStyle/>
                     <a:p>
-                      <a:pPr indent="0" marL="0">
+                      <a:pPr marL="0" indent="0">
                         <a:buNone/>
                       </a:pPr>
                       <a:endParaRPr lang="en-US" sz="1300" dirty="0"/>
                     </a:p>
                   </a:txBody>
-                  <a:tcPr marL="91440" marR="91440" marT="45720" marB="45720">
+                  <a:tcPr>
                     <a:lnL w="9525" cap="flat" cmpd="sng" algn="ctr">
                       <a:solidFill>
                         <a:srgbClr val="E9D9B6"/>
@@ -14503,7 +14466,7 @@
                     <a:bodyPr/>
                     <a:lstStyle/>
                     <a:p>
-                      <a:pPr algn="r" indent="0" marL="0">
+                      <a:pPr marL="0" indent="0" algn="r">
                         <a:buNone/>
                       </a:pPr>
                       <a:r>
@@ -14517,7 +14480,7 @@
                       <a:endParaRPr lang="en-US" sz="1300" dirty="0"/>
                     </a:p>
                   </a:txBody>
-                  <a:tcPr marL="91440" marR="91440" marT="45720" marB="45720">
+                  <a:tcPr>
                     <a:lnL w="9525" cap="flat" cmpd="sng" algn="ctr">
                       <a:solidFill>
                         <a:srgbClr val="E9D9B6"/>
@@ -14559,6 +14522,11 @@
                     </a:solidFill>
                   </a:tcPr>
                 </a:tc>
+                <a:extLst>
+                  <a:ext uri="{0D108BD9-81ED-4DB2-BD59-A6C34878D82A}">
+                    <a16:rowId xmlns:a16="http://schemas.microsoft.com/office/drawing/2014/main" val="10008"/>
+                  </a:ext>
+                </a:extLst>
               </a:tr>
               <a:tr h="301752">
                 <a:tc>
@@ -14566,7 +14534,7 @@
                     <a:bodyPr/>
                     <a:lstStyle/>
                     <a:p>
-                      <a:pPr algn="ctr" indent="0" marL="0">
+                      <a:pPr marL="0" indent="0" algn="ctr">
                         <a:buNone/>
                       </a:pPr>
                       <a:r>
@@ -14580,7 +14548,7 @@
                       <a:endParaRPr lang="en-US" sz="1300" dirty="0"/>
                     </a:p>
                   </a:txBody>
-                  <a:tcPr marL="91440" marR="91440" marT="45720" marB="45720">
+                  <a:tcPr>
                     <a:lnL w="9525" cap="flat" cmpd="sng" algn="ctr">
                       <a:solidFill>
                         <a:srgbClr val="E9D9B6"/>
@@ -14627,13 +14595,13 @@
                     <a:bodyPr/>
                     <a:lstStyle/>
                     <a:p>
-                      <a:pPr indent="0" marL="0">
+                      <a:pPr marL="0" indent="0">
                         <a:buNone/>
                       </a:pPr>
                       <a:endParaRPr lang="en-US" sz="1300" dirty="0"/>
                     </a:p>
                   </a:txBody>
-                  <a:tcPr marL="91440" marR="91440" marT="45720" marB="45720">
+                  <a:tcPr>
                     <a:lnL w="9525" cap="flat" cmpd="sng" algn="ctr">
                       <a:solidFill>
                         <a:srgbClr val="E9D9B6"/>
@@ -14680,7 +14648,7 @@
                     <a:bodyPr/>
                     <a:lstStyle/>
                     <a:p>
-                      <a:pPr algn="r" indent="0" marL="0">
+                      <a:pPr marL="0" indent="0" algn="r">
                         <a:buNone/>
                       </a:pPr>
                       <a:r>
@@ -14694,7 +14662,7 @@
                       <a:endParaRPr lang="en-US" sz="1300" dirty="0"/>
                     </a:p>
                   </a:txBody>
-                  <a:tcPr marL="91440" marR="91440" marT="45720" marB="45720">
+                  <a:tcPr>
                     <a:lnL w="9525" cap="flat" cmpd="sng" algn="ctr">
                       <a:solidFill>
                         <a:srgbClr val="E9D9B6"/>
@@ -14736,6 +14704,11 @@
                     </a:solidFill>
                   </a:tcPr>
                 </a:tc>
+                <a:extLst>
+                  <a:ext uri="{0D108BD9-81ED-4DB2-BD59-A6C34878D82A}">
+                    <a16:rowId xmlns:a16="http://schemas.microsoft.com/office/drawing/2014/main" val="10009"/>
+                  </a:ext>
+                </a:extLst>
               </a:tr>
               <a:tr h="301752">
                 <a:tc>
@@ -14743,7 +14716,7 @@
                     <a:bodyPr/>
                     <a:lstStyle/>
                     <a:p>
-                      <a:pPr algn="ctr" indent="0" marL="0">
+                      <a:pPr marL="0" indent="0" algn="ctr">
                         <a:buNone/>
                       </a:pPr>
                       <a:r>
@@ -14757,7 +14730,7 @@
                       <a:endParaRPr lang="en-US" sz="1300" dirty="0"/>
                     </a:p>
                   </a:txBody>
-                  <a:tcPr marL="91440" marR="91440" marT="45720" marB="45720">
+                  <a:tcPr>
                     <a:lnL w="9525" cap="flat" cmpd="sng" algn="ctr">
                       <a:solidFill>
                         <a:srgbClr val="E9D9B6"/>
@@ -14804,13 +14777,13 @@
                     <a:bodyPr/>
                     <a:lstStyle/>
                     <a:p>
-                      <a:pPr indent="0" marL="0">
+                      <a:pPr marL="0" indent="0">
                         <a:buNone/>
                       </a:pPr>
                       <a:endParaRPr lang="en-US" sz="1300" dirty="0"/>
                     </a:p>
                   </a:txBody>
-                  <a:tcPr marL="91440" marR="91440" marT="45720" marB="45720">
+                  <a:tcPr>
                     <a:lnL w="9525" cap="flat" cmpd="sng" algn="ctr">
                       <a:solidFill>
                         <a:srgbClr val="E9D9B6"/>
@@ -14857,7 +14830,7 @@
                     <a:bodyPr/>
                     <a:lstStyle/>
                     <a:p>
-                      <a:pPr algn="r" indent="0" marL="0">
+                      <a:pPr marL="0" indent="0" algn="r">
                         <a:buNone/>
                       </a:pPr>
                       <a:r>
@@ -14871,7 +14844,7 @@
                       <a:endParaRPr lang="en-US" sz="1300" dirty="0"/>
                     </a:p>
                   </a:txBody>
-                  <a:tcPr marL="91440" marR="91440" marT="45720" marB="45720">
+                  <a:tcPr>
                     <a:lnL w="9525" cap="flat" cmpd="sng" algn="ctr">
                       <a:solidFill>
                         <a:srgbClr val="E9D9B6"/>
@@ -14913,6 +14886,11 @@
                     </a:solidFill>
                   </a:tcPr>
                 </a:tc>
+                <a:extLst>
+                  <a:ext uri="{0D108BD9-81ED-4DB2-BD59-A6C34878D82A}">
+                    <a16:rowId xmlns:a16="http://schemas.microsoft.com/office/drawing/2014/main" val="10010"/>
+                  </a:ext>
+                </a:extLst>
               </a:tr>
             </a:tbl>
           </a:graphicData>
@@ -14946,7 +14924,10 @@
         </p:spPr>
         <p:txBody>
           <a:bodyPr/>
-          <a:p/>
+          <a:lstStyle/>
+          <a:p>
+            <a:endParaRPr/>
+          </a:p>
         </p:txBody>
       </p:sp>
       <p:sp>
@@ -14970,7 +14951,7 @@
           <a:bodyPr wrap="square" lIns="1016" tIns="1016" rIns="1016" bIns="1016" rtlCol="0" anchor="t"/>
           <a:lstStyle/>
           <a:p>
-            <a:pPr indent="0" marL="0">
+            <a:pPr marL="0" indent="0">
               <a:spcAft>
                 <a:spcPts val="1000"/>
               </a:spcAft>
@@ -14987,7 +14968,7 @@
             <a:endParaRPr lang="en-US" sz="1400" dirty="0"/>
           </a:p>
           <a:p>
-            <a:pPr indent="0" marL="0">
+            <a:pPr marL="0" indent="0">
               <a:spcAft>
                 <a:spcPts val="1000"/>
               </a:spcAft>
@@ -15004,7 +14985,7 @@
             <a:endParaRPr lang="en-US" sz="1400" dirty="0"/>
           </a:p>
           <a:p>
-            <a:pPr indent="0" marL="0">
+            <a:pPr marL="0" indent="0">
               <a:spcAft>
                 <a:spcPts val="1000"/>
               </a:spcAft>
@@ -15042,7 +15023,7 @@
           </a:prstGeom>
           <a:extLst>
             <a:ext uri="{C572A759-6A51-4108-AA02-DFA0A04FC94B}">
-              <ma14:wrappingTextBoxFlag xmlns:ma14="http://schemas.microsoft.com/office/mac/drawingml/2011/main" val="0"/>
+              <ma14:wrappingTextBoxFlag xmlns:ma14="http://schemas.microsoft.com/office/mac/drawingml/2011/main" xmlns="" val="0"/>
             </a:ext>
           </a:extLst>
         </p:spPr>
@@ -15060,7 +15041,7 @@
           <a:p>
             <a:pPr algn="r"/>
             <a:fld id="{F7021451-1387-4CA6-816F-3879F97B5CBC}" type="slidenum">
-              <a:rPr b="0" lang="en-US"/>
+              <a:rPr lang="en-US" b="0"/>
               <a:t>32</a:t>
             </a:fld>
             <a:endParaRPr lang="en-US"/>
@@ -15115,7 +15096,10 @@
         </p:spPr>
         <p:txBody>
           <a:bodyPr/>
-          <a:p/>
+          <a:lstStyle/>
+          <a:p>
+            <a:endParaRPr/>
+          </a:p>
         </p:txBody>
       </p:sp>
       <p:sp>
@@ -15139,7 +15123,7 @@
           <a:bodyPr wrap="square" lIns="0" tIns="0" rIns="0" bIns="0" rtlCol="0" anchor="ctr"/>
           <a:lstStyle/>
           <a:p>
-            <a:pPr algn="ctr" indent="0" marL="0">
+            <a:pPr marL="0" indent="0" algn="ctr">
               <a:buNone/>
             </a:pPr>
             <a:r>
@@ -15175,7 +15159,7 @@
           <a:bodyPr wrap="square" lIns="0" tIns="0" rIns="0" bIns="0" rtlCol="0" anchor="t"/>
           <a:lstStyle/>
           <a:p>
-            <a:pPr indent="0" marL="0">
+            <a:pPr marL="0" indent="0">
               <a:buNone/>
             </a:pPr>
             <a:r>
@@ -15221,7 +15205,10 @@
         </p:spPr>
         <p:txBody>
           <a:bodyPr/>
-          <a:p/>
+          <a:lstStyle/>
+          <a:p>
+            <a:endParaRPr/>
+          </a:p>
         </p:txBody>
       </p:sp>
       <p:sp>
@@ -15251,7 +15238,7 @@
               </a:spcAft>
               <a:buSzPct val="100000"/>
               <a:buFont typeface="+mj-lt"/>
-              <a:buAutoNum type="arabicPeriod" startAt="1"/>
+              <a:buAutoNum type="arabicPeriod"/>
             </a:pPr>
             <a:r>
               <a:rPr lang="en-US" sz="1200" dirty="0">
@@ -15270,7 +15257,7 @@
               </a:spcAft>
               <a:buSzPct val="100000"/>
               <a:buFont typeface="+mj-lt"/>
-              <a:buAutoNum type="arabicPeriod" startAt="1"/>
+              <a:buAutoNum type="arabicPeriod"/>
             </a:pPr>
             <a:r>
               <a:rPr lang="en-US" sz="1200" dirty="0">
@@ -15289,7 +15276,7 @@
               </a:spcAft>
               <a:buSzPct val="100000"/>
               <a:buFont typeface="+mj-lt"/>
-              <a:buAutoNum type="arabicPeriod" startAt="1"/>
+              <a:buAutoNum type="arabicPeriod"/>
             </a:pPr>
             <a:r>
               <a:rPr lang="en-US" sz="1200" dirty="0">
@@ -15308,7 +15295,7 @@
               </a:spcAft>
               <a:buSzPct val="100000"/>
               <a:buFont typeface="+mj-lt"/>
-              <a:buAutoNum type="arabicPeriod" startAt="1"/>
+              <a:buAutoNum type="arabicPeriod"/>
             </a:pPr>
             <a:r>
               <a:rPr lang="en-US" sz="1200" dirty="0">
@@ -15327,7 +15314,7 @@
               </a:spcAft>
               <a:buSzPct val="100000"/>
               <a:buFont typeface="+mj-lt"/>
-              <a:buAutoNum type="arabicPeriod" startAt="1"/>
+              <a:buAutoNum type="arabicPeriod"/>
             </a:pPr>
             <a:r>
               <a:rPr lang="en-US" sz="1200" dirty="0">
@@ -15346,7 +15333,7 @@
               </a:spcAft>
               <a:buSzPct val="100000"/>
               <a:buFont typeface="+mj-lt"/>
-              <a:buAutoNum type="arabicPeriod" startAt="1"/>
+              <a:buAutoNum type="arabicPeriod"/>
             </a:pPr>
             <a:r>
               <a:rPr lang="en-US" sz="1200" dirty="0">
@@ -15365,7 +15352,7 @@
               </a:spcAft>
               <a:buSzPct val="100000"/>
               <a:buFont typeface="+mj-lt"/>
-              <a:buAutoNum type="arabicPeriod" startAt="1"/>
+              <a:buAutoNum type="arabicPeriod"/>
             </a:pPr>
             <a:r>
               <a:rPr lang="en-US" sz="1200" dirty="0">
@@ -15381,14 +15368,14 @@
       </p:sp>
       <p:pic>
         <p:nvPicPr>
-          <p:cNvPr id="7" name="Image 0" descr="ガイドブック">    </p:cNvPr>
+          <p:cNvPr id="7" name="Image 0" descr="ガイドブック"/>
           <p:cNvPicPr>
             <a:picLocks noChangeAspect="1"/>
           </p:cNvPicPr>
           <p:nvPr/>
         </p:nvPicPr>
         <p:blipFill>
-          <a:blip r:embed="rId1"/>
+          <a:blip r:embed="rId3"/>
           <a:stretch>
             <a:fillRect/>
           </a:stretch>
@@ -15423,7 +15410,7 @@
           </a:prstGeom>
           <a:extLst>
             <a:ext uri="{C572A759-6A51-4108-AA02-DFA0A04FC94B}">
-              <ma14:wrappingTextBoxFlag xmlns:ma14="http://schemas.microsoft.com/office/mac/drawingml/2011/main" val="0"/>
+              <ma14:wrappingTextBoxFlag xmlns:ma14="http://schemas.microsoft.com/office/mac/drawingml/2011/main" xmlns="" val="0"/>
             </a:ext>
           </a:extLst>
         </p:spPr>
@@ -15441,7 +15428,7 @@
           <a:p>
             <a:pPr algn="r"/>
             <a:fld id="{F7021451-1387-4CA6-816F-3879F97B5CBC}" type="slidenum">
-              <a:rPr b="0" lang="en-US"/>
+              <a:rPr lang="en-US" b="0"/>
               <a:t>33</a:t>
             </a:fld>
             <a:endParaRPr lang="en-US"/>
@@ -15496,7 +15483,10 @@
         </p:spPr>
         <p:txBody>
           <a:bodyPr/>
-          <a:p/>
+          <a:lstStyle/>
+          <a:p>
+            <a:endParaRPr/>
+          </a:p>
         </p:txBody>
       </p:sp>
       <p:sp>
@@ -15520,7 +15510,7 @@
           <a:bodyPr wrap="square" lIns="0" tIns="0" rIns="0" bIns="0" rtlCol="0" anchor="t"/>
           <a:lstStyle/>
           <a:p>
-            <a:pPr algn="ctr" indent="0" marL="0">
+            <a:pPr marL="0" indent="0" algn="ctr">
               <a:buNone/>
             </a:pPr>
             <a:r>
@@ -15538,9 +15528,11 @@
       <p:sp>
         <p:nvSpPr>
           <p:cNvPr id="4" name="Text 0"/>
-          <p:cNvSpPr/>
-          <p:nvPr>
-            <p:ph idx="100" type="title" hasCustomPrompt="1"/>
+          <p:cNvSpPr>
+            <a:spLocks noGrp="1"/>
+          </p:cNvSpPr>
+          <p:nvPr>
+            <p:ph type="title" idx="100" hasCustomPrompt="1"/>
           </p:nvPr>
         </p:nvSpPr>
         <p:spPr>
@@ -15558,7 +15550,7 @@
           <a:bodyPr wrap="square" rtlCol="0" anchor="ctr"/>
           <a:lstStyle/>
           <a:p>
-            <a:pPr algn="ctr" indent="0" marL="0">
+            <a:pPr marL="0" indent="0" algn="ctr">
               <a:buNone/>
             </a:pPr>
             <a:r>
@@ -15575,7 +15567,7 @@
             <a:endParaRPr lang="en-US" sz="3200" dirty="0"/>
           </a:p>
           <a:p>
-            <a:pPr algn="ctr" indent="0" marL="0">
+            <a:pPr marL="0" indent="0" algn="ctr">
               <a:buNone/>
             </a:pPr>
             <a:r>
@@ -15596,9 +15588,11 @@
       <p:sp>
         <p:nvSpPr>
           <p:cNvPr id="5" name="Text 0"/>
-          <p:cNvSpPr/>
-          <p:nvPr>
-            <p:ph idx="101" type="body" hasCustomPrompt="1"/>
+          <p:cNvSpPr>
+            <a:spLocks noGrp="1"/>
+          </p:cNvSpPr>
+          <p:nvPr>
+            <p:ph type="body" idx="101" hasCustomPrompt="1"/>
           </p:nvPr>
         </p:nvSpPr>
         <p:spPr>
@@ -15616,7 +15610,7 @@
           <a:bodyPr wrap="square" rtlCol="0" anchor="t"/>
           <a:lstStyle/>
           <a:p>
-            <a:pPr algn="ctr" indent="0" marL="0">
+            <a:pPr marL="0" indent="0" algn="ctr">
               <a:buNone/>
             </a:pPr>
             <a:r>
@@ -15651,7 +15645,7 @@
           </a:prstGeom>
           <a:extLst>
             <a:ext uri="{C572A759-6A51-4108-AA02-DFA0A04FC94B}">
-              <ma14:wrappingTextBoxFlag xmlns:ma14="http://schemas.microsoft.com/office/mac/drawingml/2011/main" val="0"/>
+              <ma14:wrappingTextBoxFlag xmlns:ma14="http://schemas.microsoft.com/office/mac/drawingml/2011/main" xmlns="" val="0"/>
             </a:ext>
           </a:extLst>
         </p:spPr>
@@ -15669,7 +15663,7 @@
           <a:p>
             <a:pPr algn="r"/>
             <a:fld id="{F7021451-1387-4CA6-816F-3879F97B5CBC}" type="slidenum">
-              <a:rPr b="0" lang="en-US"/>
+              <a:rPr lang="en-US" b="0"/>
               <a:t>34</a:t>
             </a:fld>
             <a:endParaRPr lang="en-US"/>
@@ -15724,7 +15718,10 @@
         </p:spPr>
         <p:txBody>
           <a:bodyPr/>
-          <a:p/>
+          <a:lstStyle/>
+          <a:p>
+            <a:endParaRPr/>
+          </a:p>
         </p:txBody>
       </p:sp>
       <p:sp>
@@ -15748,7 +15745,7 @@
           <a:bodyPr wrap="square" lIns="0" tIns="0" rIns="0" bIns="0" rtlCol="0" anchor="t"/>
           <a:lstStyle/>
           <a:p>
-            <a:pPr algn="ctr" indent="0" marL="0">
+            <a:pPr marL="0" indent="0" algn="ctr">
               <a:buNone/>
             </a:pPr>
             <a:r>
@@ -15766,9 +15763,11 @@
       <p:sp>
         <p:nvSpPr>
           <p:cNvPr id="4" name="Text 0"/>
-          <p:cNvSpPr/>
-          <p:nvPr>
-            <p:ph idx="100" type="title" hasCustomPrompt="1"/>
+          <p:cNvSpPr>
+            <a:spLocks noGrp="1"/>
+          </p:cNvSpPr>
+          <p:nvPr>
+            <p:ph type="title" idx="100" hasCustomPrompt="1"/>
           </p:nvPr>
         </p:nvSpPr>
         <p:spPr>
@@ -15786,11 +15785,11 @@
           <a:bodyPr wrap="square" rtlCol="0" anchor="ctr"/>
           <a:lstStyle/>
           <a:p>
-            <a:pPr algn="ctr" indent="0" marL="0">
-              <a:buNone/>
-            </a:pPr>
-            <a:r>
-              <a:rPr lang="en-US" sz="3200" b="1" dirty="0">
+            <a:pPr marL="0" indent="0" algn="ctr">
+              <a:buNone/>
+            </a:pPr>
+            <a:r>
+              <a:rPr lang="en-US" sz="3200" b="1" dirty="0" err="1">
                 <a:solidFill>
                   <a:schemeClr val="tx2"/>
                 </a:solidFill>
@@ -15798,14 +15797,8 @@
                 <a:ea typeface="Yu Mincho" pitchFamily="34" charset="-122"/>
                 <a:cs typeface="Yu Mincho" pitchFamily="34" charset="-120"/>
               </a:rPr>
-              <a:t>その思い込みが“ゆるんだら”、</a:t>
-            </a:r>
-            <a:endParaRPr lang="en-US" sz="3200" dirty="0"/>
-          </a:p>
-          <a:p>
-            <a:pPr algn="ctr" indent="0" marL="0">
-              <a:buNone/>
-            </a:pPr>
+              <a:t>その思いが“ゆるんだら</a:t>
+            </a:r>
             <a:r>
               <a:rPr lang="en-US" sz="3200" b="1" dirty="0">
                 <a:solidFill>
@@ -15815,12 +15808,12 @@
                 <a:ea typeface="Yu Mincho" pitchFamily="34" charset="-122"/>
                 <a:cs typeface="Yu Mincho" pitchFamily="34" charset="-120"/>
               </a:rPr>
-              <a:t>目標達成によい影響が</a:t>
+              <a:t>”、</a:t>
             </a:r>
             <a:endParaRPr lang="en-US" sz="3200" dirty="0"/>
           </a:p>
           <a:p>
-            <a:pPr algn="ctr" indent="0" marL="0">
+            <a:pPr marL="0" indent="0" algn="ctr">
               <a:buNone/>
             </a:pPr>
             <a:r>
@@ -15832,6 +15825,23 @@
                 <a:ea typeface="Yu Mincho" pitchFamily="34" charset="-122"/>
                 <a:cs typeface="Yu Mincho" pitchFamily="34" charset="-120"/>
               </a:rPr>
+              <a:t>目標達成によい影響が</a:t>
+            </a:r>
+            <a:endParaRPr lang="en-US" sz="3200" dirty="0"/>
+          </a:p>
+          <a:p>
+            <a:pPr marL="0" indent="0" algn="ctr">
+              <a:buNone/>
+            </a:pPr>
+            <a:r>
+              <a:rPr lang="en-US" sz="3200" b="1" dirty="0">
+                <a:solidFill>
+                  <a:schemeClr val="tx2"/>
+                </a:solidFill>
+                <a:latin typeface="Yu Mincho" pitchFamily="34" charset="0"/>
+                <a:ea typeface="Yu Mincho" pitchFamily="34" charset="-122"/>
+                <a:cs typeface="Yu Mincho" pitchFamily="34" charset="-120"/>
+              </a:rPr>
               <a:t>出そうですか？</a:t>
             </a:r>
             <a:endParaRPr lang="en-US" sz="3200" dirty="0"/>
@@ -15858,7 +15868,7 @@
           </a:prstGeom>
           <a:extLst>
             <a:ext uri="{C572A759-6A51-4108-AA02-DFA0A04FC94B}">
-              <ma14:wrappingTextBoxFlag xmlns:ma14="http://schemas.microsoft.com/office/mac/drawingml/2011/main" val="0"/>
+              <ma14:wrappingTextBoxFlag xmlns:ma14="http://schemas.microsoft.com/office/mac/drawingml/2011/main" xmlns="" val="0"/>
             </a:ext>
           </a:extLst>
         </p:spPr>
@@ -15876,7 +15886,7 @@
           <a:p>
             <a:pPr algn="r"/>
             <a:fld id="{F7021451-1387-4CA6-816F-3879F97B5CBC}" type="slidenum">
-              <a:rPr b="0" lang="en-US"/>
+              <a:rPr lang="en-US" b="0"/>
               <a:t>35</a:t>
             </a:fld>
             <a:endParaRPr lang="en-US"/>
@@ -15931,7 +15941,10 @@
         </p:spPr>
         <p:txBody>
           <a:bodyPr/>
-          <a:p/>
+          <a:lstStyle/>
+          <a:p>
+            <a:endParaRPr/>
+          </a:p>
         </p:txBody>
       </p:sp>
       <p:sp>
@@ -15955,7 +15968,7 @@
           <a:bodyPr wrap="square" lIns="0" tIns="0" rIns="0" bIns="0" rtlCol="0" anchor="t"/>
           <a:lstStyle/>
           <a:p>
-            <a:pPr algn="ctr" indent="0" marL="0">
+            <a:pPr marL="0" indent="0" algn="ctr">
               <a:buNone/>
             </a:pPr>
             <a:r>
@@ -15973,9 +15986,11 @@
       <p:sp>
         <p:nvSpPr>
           <p:cNvPr id="4" name="Text 0"/>
-          <p:cNvSpPr/>
-          <p:nvPr>
-            <p:ph idx="100" type="title" hasCustomPrompt="1"/>
+          <p:cNvSpPr>
+            <a:spLocks noGrp="1"/>
+          </p:cNvSpPr>
+          <p:nvPr>
+            <p:ph type="title" idx="100" hasCustomPrompt="1"/>
           </p:nvPr>
         </p:nvSpPr>
         <p:spPr>
@@ -15993,7 +16008,7 @@
           <a:bodyPr wrap="square" rtlCol="0" anchor="ctr"/>
           <a:lstStyle/>
           <a:p>
-            <a:pPr algn="ctr" indent="0" marL="0">
+            <a:pPr marL="0" indent="0" algn="ctr">
               <a:buNone/>
             </a:pPr>
             <a:r>
@@ -16010,7 +16025,7 @@
             <a:endParaRPr lang="en-US" sz="3200" dirty="0"/>
           </a:p>
           <a:p>
-            <a:pPr algn="ctr" indent="0" marL="0">
+            <a:pPr marL="0" indent="0" algn="ctr">
               <a:buNone/>
             </a:pPr>
             <a:r>
@@ -16031,9 +16046,11 @@
       <p:sp>
         <p:nvSpPr>
           <p:cNvPr id="5" name="Text 0"/>
-          <p:cNvSpPr/>
-          <p:nvPr>
-            <p:ph idx="101" type="body" hasCustomPrompt="1"/>
+          <p:cNvSpPr>
+            <a:spLocks noGrp="1"/>
+          </p:cNvSpPr>
+          <p:nvPr>
+            <p:ph type="body" idx="101" hasCustomPrompt="1"/>
           </p:nvPr>
         </p:nvSpPr>
         <p:spPr>
@@ -16051,7 +16068,7 @@
           <a:bodyPr wrap="square" rtlCol="0" anchor="t"/>
           <a:lstStyle/>
           <a:p>
-            <a:pPr algn="ctr" indent="0" marL="0">
+            <a:pPr marL="0" indent="0" algn="ctr">
               <a:buNone/>
             </a:pPr>
             <a:r>
@@ -16065,7 +16082,7 @@
             <a:endParaRPr lang="en-US" sz="1500" dirty="0"/>
           </a:p>
           <a:p>
-            <a:pPr algn="ctr" indent="0" marL="0">
+            <a:pPr marL="0" indent="0" algn="ctr">
               <a:buNone/>
             </a:pPr>
             <a:r>
@@ -16079,7 +16096,7 @@
             <a:endParaRPr lang="en-US" sz="1500" dirty="0"/>
           </a:p>
           <a:p>
-            <a:pPr algn="ctr" indent="0" marL="0">
+            <a:pPr marL="0" indent="0" algn="ctr">
               <a:buNone/>
             </a:pPr>
             <a:r>
@@ -16114,7 +16131,7 @@
           </a:prstGeom>
           <a:extLst>
             <a:ext uri="{C572A759-6A51-4108-AA02-DFA0A04FC94B}">
-              <ma14:wrappingTextBoxFlag xmlns:ma14="http://schemas.microsoft.com/office/mac/drawingml/2011/main" val="0"/>
+              <ma14:wrappingTextBoxFlag xmlns:ma14="http://schemas.microsoft.com/office/mac/drawingml/2011/main" xmlns="" val="0"/>
             </a:ext>
           </a:extLst>
         </p:spPr>
@@ -16132,7 +16149,7 @@
           <a:p>
             <a:pPr algn="r"/>
             <a:fld id="{F7021451-1387-4CA6-816F-3879F97B5CBC}" type="slidenum">
-              <a:rPr b="0" lang="en-US"/>
+              <a:rPr lang="en-US" b="0"/>
               <a:t>36</a:t>
             </a:fld>
             <a:endParaRPr lang="en-US"/>
@@ -16187,7 +16204,10 @@
         </p:spPr>
         <p:txBody>
           <a:bodyPr/>
-          <a:p/>
+          <a:lstStyle/>
+          <a:p>
+            <a:endParaRPr/>
+          </a:p>
         </p:txBody>
       </p:sp>
       <p:sp>
@@ -16211,7 +16231,7 @@
           <a:bodyPr wrap="square" lIns="0" tIns="0" rIns="0" bIns="0" rtlCol="0" anchor="t"/>
           <a:lstStyle/>
           <a:p>
-            <a:pPr algn="ctr" indent="0" marL="0">
+            <a:pPr marL="0" indent="0" algn="ctr">
               <a:buNone/>
             </a:pPr>
             <a:r>
@@ -16229,9 +16249,11 @@
       <p:sp>
         <p:nvSpPr>
           <p:cNvPr id="4" name="Text 0"/>
-          <p:cNvSpPr/>
-          <p:nvPr>
-            <p:ph idx="100" type="title" hasCustomPrompt="1"/>
+          <p:cNvSpPr>
+            <a:spLocks noGrp="1"/>
+          </p:cNvSpPr>
+          <p:nvPr>
+            <p:ph type="title" idx="100" hasCustomPrompt="1"/>
           </p:nvPr>
         </p:nvSpPr>
         <p:spPr>
@@ -16249,7 +16271,7 @@
           <a:bodyPr wrap="square" rtlCol="0" anchor="ctr"/>
           <a:lstStyle/>
           <a:p>
-            <a:pPr algn="ctr" indent="0" marL="0">
+            <a:pPr marL="0" indent="0" algn="ctr">
               <a:buNone/>
             </a:pPr>
             <a:r>
@@ -16266,7 +16288,7 @@
             <a:endParaRPr lang="en-US" sz="3200" dirty="0"/>
           </a:p>
           <a:p>
-            <a:pPr algn="ctr" indent="0" marL="0">
+            <a:pPr marL="0" indent="0" algn="ctr">
               <a:buNone/>
             </a:pPr>
             <a:r>
@@ -16287,9 +16309,11 @@
       <p:sp>
         <p:nvSpPr>
           <p:cNvPr id="5" name="Text 0"/>
-          <p:cNvSpPr/>
-          <p:nvPr>
-            <p:ph idx="101" type="body" hasCustomPrompt="1"/>
+          <p:cNvSpPr>
+            <a:spLocks noGrp="1"/>
+          </p:cNvSpPr>
+          <p:nvPr>
+            <p:ph type="body" idx="101" hasCustomPrompt="1"/>
           </p:nvPr>
         </p:nvSpPr>
         <p:spPr>
@@ -16307,7 +16331,7 @@
           <a:bodyPr wrap="square" rtlCol="0" anchor="t"/>
           <a:lstStyle/>
           <a:p>
-            <a:pPr algn="ctr" indent="0" marL="0">
+            <a:pPr marL="0" indent="0" algn="ctr">
               <a:buNone/>
             </a:pPr>
             <a:r>
@@ -16342,7 +16366,7 @@
           </a:prstGeom>
           <a:extLst>
             <a:ext uri="{C572A759-6A51-4108-AA02-DFA0A04FC94B}">
-              <ma14:wrappingTextBoxFlag xmlns:ma14="http://schemas.microsoft.com/office/mac/drawingml/2011/main" val="0"/>
+              <ma14:wrappingTextBoxFlag xmlns:ma14="http://schemas.microsoft.com/office/mac/drawingml/2011/main" xmlns="" val="0"/>
             </a:ext>
           </a:extLst>
         </p:spPr>
@@ -16360,7 +16384,7 @@
           <a:p>
             <a:pPr algn="r"/>
             <a:fld id="{F7021451-1387-4CA6-816F-3879F97B5CBC}" type="slidenum">
-              <a:rPr b="0" lang="en-US"/>
+              <a:rPr lang="en-US" b="0"/>
               <a:t>37</a:t>
             </a:fld>
             <a:endParaRPr lang="en-US"/>
@@ -16415,7 +16439,10 @@
         </p:spPr>
         <p:txBody>
           <a:bodyPr/>
-          <a:p/>
+          <a:lstStyle/>
+          <a:p>
+            <a:endParaRPr/>
+          </a:p>
         </p:txBody>
       </p:sp>
       <p:sp>
@@ -16439,7 +16466,7 @@
           <a:bodyPr wrap="square" lIns="0" tIns="0" rIns="0" bIns="0" rtlCol="0" anchor="t"/>
           <a:lstStyle/>
           <a:p>
-            <a:pPr algn="ctr" indent="0" marL="0">
+            <a:pPr marL="0" indent="0" algn="ctr">
               <a:buNone/>
             </a:pPr>
             <a:r>
@@ -16457,9 +16484,11 @@
       <p:sp>
         <p:nvSpPr>
           <p:cNvPr id="4" name="Text 0"/>
-          <p:cNvSpPr/>
-          <p:nvPr>
-            <p:ph idx="100" type="title" hasCustomPrompt="1"/>
+          <p:cNvSpPr>
+            <a:spLocks noGrp="1"/>
+          </p:cNvSpPr>
+          <p:nvPr>
+            <p:ph type="title" idx="100" hasCustomPrompt="1"/>
           </p:nvPr>
         </p:nvSpPr>
         <p:spPr>
@@ -16477,7 +16506,7 @@
           <a:bodyPr wrap="square" rtlCol="0" anchor="ctr"/>
           <a:lstStyle/>
           <a:p>
-            <a:pPr algn="ctr" indent="0" marL="0">
+            <a:pPr marL="0" indent="0" algn="ctr">
               <a:buNone/>
             </a:pPr>
             <a:r>
@@ -16494,11 +16523,11 @@
             <a:endParaRPr lang="en-US" sz="3200" dirty="0"/>
           </a:p>
           <a:p>
-            <a:pPr algn="ctr" indent="0" marL="0">
-              <a:buNone/>
-            </a:pPr>
-            <a:r>
-              <a:rPr lang="en-US" sz="3200" b="1" dirty="0">
+            <a:pPr marL="0" indent="0" algn="ctr">
+              <a:buNone/>
+            </a:pPr>
+            <a:r>
+              <a:rPr lang="en-US" sz="3200" b="1" dirty="0" err="1">
                 <a:solidFill>
                   <a:schemeClr val="tx2"/>
                 </a:solidFill>
@@ -16506,7 +16535,49 @@
                 <a:ea typeface="Yu Mincho" pitchFamily="34" charset="-122"/>
                 <a:cs typeface="Yu Mincho" pitchFamily="34" charset="-120"/>
               </a:rPr>
-              <a:t>どうしたかったの？</a:t>
+              <a:t>どうしたかったの</a:t>
+            </a:r>
+            <a:r>
+              <a:rPr lang="en-US" sz="3200" b="1" dirty="0">
+                <a:solidFill>
+                  <a:schemeClr val="tx2"/>
+                </a:solidFill>
+                <a:latin typeface="Yu Mincho" pitchFamily="34" charset="0"/>
+                <a:ea typeface="Yu Mincho" pitchFamily="34" charset="-122"/>
+                <a:cs typeface="Yu Mincho" pitchFamily="34" charset="-120"/>
+              </a:rPr>
+              <a:t>？</a:t>
+            </a:r>
+            <a:br>
+              <a:rPr lang="en-US" sz="3200" b="1" dirty="0">
+                <a:solidFill>
+                  <a:schemeClr val="tx2"/>
+                </a:solidFill>
+                <a:latin typeface="Yu Mincho" pitchFamily="34" charset="0"/>
+                <a:ea typeface="Yu Mincho" pitchFamily="34" charset="-122"/>
+                <a:cs typeface="Yu Mincho" pitchFamily="34" charset="-120"/>
+              </a:rPr>
+            </a:br>
+            <a:br>
+              <a:rPr lang="en-US" sz="3200" b="1" dirty="0">
+                <a:solidFill>
+                  <a:schemeClr val="tx2"/>
+                </a:solidFill>
+                <a:latin typeface="Yu Mincho" pitchFamily="34" charset="0"/>
+                <a:ea typeface="Yu Mincho" pitchFamily="34" charset="-122"/>
+                <a:cs typeface="Yu Mincho" pitchFamily="34" charset="-120"/>
+              </a:rPr>
+            </a:br>
+            <a:r>
+              <a:rPr lang="ja-JP" altLang="en-US" sz="3200" b="1" dirty="0">
+                <a:solidFill>
+                  <a:schemeClr val="tx2"/>
+                </a:solidFill>
+                <a:latin typeface="Yu Mincho" pitchFamily="34" charset="0"/>
+                <a:ea typeface="Yu Mincho" pitchFamily="34" charset="-122"/>
+                <a:cs typeface="Yu Mincho" pitchFamily="34" charset="-120"/>
+              </a:rPr>
+              <a:t>相手の中にも入ってみる？</a:t>
             </a:r>
             <a:endParaRPr lang="en-US" sz="3200" dirty="0"/>
           </a:p>
@@ -16532,7 +16603,7 @@
           </a:prstGeom>
           <a:extLst>
             <a:ext uri="{C572A759-6A51-4108-AA02-DFA0A04FC94B}">
-              <ma14:wrappingTextBoxFlag xmlns:ma14="http://schemas.microsoft.com/office/mac/drawingml/2011/main" val="0"/>
+              <ma14:wrappingTextBoxFlag xmlns:ma14="http://schemas.microsoft.com/office/mac/drawingml/2011/main" xmlns="" val="0"/>
             </a:ext>
           </a:extLst>
         </p:spPr>
@@ -16550,7 +16621,7 @@
           <a:p>
             <a:pPr algn="r"/>
             <a:fld id="{F7021451-1387-4CA6-816F-3879F97B5CBC}" type="slidenum">
-              <a:rPr b="0" lang="en-US"/>
+              <a:rPr lang="en-US" b="0"/>
               <a:t>38</a:t>
             </a:fld>
             <a:endParaRPr lang="en-US"/>
@@ -16605,7 +16676,10 @@
         </p:spPr>
         <p:txBody>
           <a:bodyPr/>
-          <a:p/>
+          <a:lstStyle/>
+          <a:p>
+            <a:endParaRPr/>
+          </a:p>
         </p:txBody>
       </p:sp>
       <p:sp>
@@ -16629,7 +16703,7 @@
           <a:bodyPr wrap="square" lIns="0" tIns="0" rIns="0" bIns="0" rtlCol="0" anchor="t"/>
           <a:lstStyle/>
           <a:p>
-            <a:pPr algn="ctr" indent="0" marL="0">
+            <a:pPr marL="0" indent="0" algn="ctr">
               <a:buNone/>
             </a:pPr>
             <a:r>
@@ -16647,9 +16721,11 @@
       <p:sp>
         <p:nvSpPr>
           <p:cNvPr id="4" name="Text 0"/>
-          <p:cNvSpPr/>
-          <p:nvPr>
-            <p:ph idx="100" type="title" hasCustomPrompt="1"/>
+          <p:cNvSpPr>
+            <a:spLocks noGrp="1"/>
+          </p:cNvSpPr>
+          <p:nvPr>
+            <p:ph type="title" idx="100" hasCustomPrompt="1"/>
           </p:nvPr>
         </p:nvSpPr>
         <p:spPr>
@@ -16667,7 +16743,7 @@
           <a:bodyPr wrap="square" rtlCol="0" anchor="ctr"/>
           <a:lstStyle/>
           <a:p>
-            <a:pPr algn="ctr" indent="0" marL="0">
+            <a:pPr marL="0" indent="0" algn="ctr">
               <a:buNone/>
             </a:pPr>
             <a:r>
@@ -16684,7 +16760,7 @@
             <a:endParaRPr lang="en-US" sz="3200" dirty="0"/>
           </a:p>
           <a:p>
-            <a:pPr algn="ctr" indent="0" marL="0">
+            <a:pPr marL="0" indent="0" algn="ctr">
               <a:buNone/>
             </a:pPr>
             <a:r>
@@ -16705,9 +16781,11 @@
       <p:sp>
         <p:nvSpPr>
           <p:cNvPr id="5" name="Text 0"/>
-          <p:cNvSpPr/>
-          <p:nvPr>
-            <p:ph idx="101" type="body" hasCustomPrompt="1"/>
+          <p:cNvSpPr>
+            <a:spLocks noGrp="1"/>
+          </p:cNvSpPr>
+          <p:nvPr>
+            <p:ph type="body" idx="101" hasCustomPrompt="1"/>
           </p:nvPr>
         </p:nvSpPr>
         <p:spPr>
@@ -16725,7 +16803,7 @@
           <a:bodyPr wrap="square" rtlCol="0" anchor="t"/>
           <a:lstStyle/>
           <a:p>
-            <a:pPr algn="ctr" indent="0" marL="0">
+            <a:pPr marL="0" indent="0" algn="ctr">
               <a:buNone/>
             </a:pPr>
             <a:r>
@@ -16760,7 +16838,7 @@
           </a:prstGeom>
           <a:extLst>
             <a:ext uri="{C572A759-6A51-4108-AA02-DFA0A04FC94B}">
-              <ma14:wrappingTextBoxFlag xmlns:ma14="http://schemas.microsoft.com/office/mac/drawingml/2011/main" val="0"/>
+              <ma14:wrappingTextBoxFlag xmlns:ma14="http://schemas.microsoft.com/office/mac/drawingml/2011/main" xmlns="" val="0"/>
             </a:ext>
           </a:extLst>
         </p:spPr>
@@ -16778,7 +16856,7 @@
           <a:p>
             <a:pPr algn="r"/>
             <a:fld id="{F7021451-1387-4CA6-816F-3879F97B5CBC}" type="slidenum">
-              <a:rPr b="0" lang="en-US"/>
+              <a:rPr lang="en-US" b="0"/>
               <a:t>39</a:t>
             </a:fld>
             <a:endParaRPr lang="en-US"/>
@@ -16813,9 +16891,11 @@
       <p:sp>
         <p:nvSpPr>
           <p:cNvPr id="2" name="Text 0"/>
-          <p:cNvSpPr/>
-          <p:nvPr>
-            <p:ph idx="100" type="title" hasCustomPrompt="1"/>
+          <p:cNvSpPr>
+            <a:spLocks noGrp="1"/>
+          </p:cNvSpPr>
+          <p:nvPr>
+            <p:ph type="title" idx="100" hasCustomPrompt="1"/>
           </p:nvPr>
         </p:nvSpPr>
         <p:spPr>
@@ -16833,7 +16913,7 @@
           <a:bodyPr wrap="square" rtlCol="0" anchor="ctr"/>
           <a:lstStyle/>
           <a:p>
-            <a:pPr algn="ctr" indent="0" marL="0">
+            <a:pPr marL="0" indent="0" algn="ctr">
               <a:buNone/>
             </a:pPr>
             <a:r>
@@ -16854,9 +16934,11 @@
       <p:sp>
         <p:nvSpPr>
           <p:cNvPr id="3" name="Text 0"/>
-          <p:cNvSpPr/>
-          <p:nvPr>
-            <p:ph idx="101" type="body" hasCustomPrompt="1"/>
+          <p:cNvSpPr>
+            <a:spLocks noGrp="1"/>
+          </p:cNvSpPr>
+          <p:nvPr>
+            <p:ph type="body" idx="101" hasCustomPrompt="1"/>
           </p:nvPr>
         </p:nvSpPr>
         <p:spPr>
@@ -16874,7 +16956,7 @@
           <a:bodyPr wrap="square" rtlCol="0" anchor="t"/>
           <a:lstStyle/>
           <a:p>
-            <a:pPr algn="ctr" indent="0" marL="0">
+            <a:pPr marL="0" indent="0" algn="ctr">
               <a:buNone/>
             </a:pPr>
             <a:r>
@@ -16888,7 +16970,7 @@
             <a:endParaRPr lang="en-US" sz="1600" dirty="0"/>
           </a:p>
           <a:p>
-            <a:pPr algn="ctr" indent="0" marL="0">
+            <a:pPr marL="0" indent="0" algn="ctr">
               <a:buNone/>
             </a:pPr>
             <a:r>
@@ -16951,7 +17033,10 @@
         </p:spPr>
         <p:txBody>
           <a:bodyPr/>
-          <a:p/>
+          <a:lstStyle/>
+          <a:p>
+            <a:endParaRPr/>
+          </a:p>
         </p:txBody>
       </p:sp>
       <p:sp>
@@ -16975,7 +17060,7 @@
           <a:bodyPr wrap="square" lIns="0" tIns="0" rIns="0" bIns="0" rtlCol="0" anchor="t"/>
           <a:lstStyle/>
           <a:p>
-            <a:pPr algn="ctr" indent="0" marL="0">
+            <a:pPr marL="0" indent="0" algn="ctr">
               <a:buNone/>
             </a:pPr>
             <a:r>
@@ -16993,9 +17078,11 @@
       <p:sp>
         <p:nvSpPr>
           <p:cNvPr id="4" name="Text 0"/>
-          <p:cNvSpPr/>
-          <p:nvPr>
-            <p:ph idx="100" type="title" hasCustomPrompt="1"/>
+          <p:cNvSpPr>
+            <a:spLocks noGrp="1"/>
+          </p:cNvSpPr>
+          <p:nvPr>
+            <p:ph type="title" idx="100" hasCustomPrompt="1"/>
           </p:nvPr>
         </p:nvSpPr>
         <p:spPr>
@@ -17013,7 +17100,7 @@
           <a:bodyPr wrap="square" rtlCol="0" anchor="ctr"/>
           <a:lstStyle/>
           <a:p>
-            <a:pPr algn="ctr" indent="0" marL="0">
+            <a:pPr marL="0" indent="0" algn="ctr">
               <a:buNone/>
             </a:pPr>
             <a:r>
@@ -17030,7 +17117,7 @@
             <a:endParaRPr lang="en-US" sz="3200" dirty="0"/>
           </a:p>
           <a:p>
-            <a:pPr algn="ctr" indent="0" marL="0">
+            <a:pPr marL="0" indent="0" algn="ctr">
               <a:buNone/>
             </a:pPr>
             <a:r>
@@ -17051,9 +17138,11 @@
       <p:sp>
         <p:nvSpPr>
           <p:cNvPr id="5" name="Text 0"/>
-          <p:cNvSpPr/>
-          <p:nvPr>
-            <p:ph idx="101" type="body" hasCustomPrompt="1"/>
+          <p:cNvSpPr>
+            <a:spLocks noGrp="1"/>
+          </p:cNvSpPr>
+          <p:nvPr>
+            <p:ph type="body" idx="101" hasCustomPrompt="1"/>
           </p:nvPr>
         </p:nvSpPr>
         <p:spPr>
@@ -17071,7 +17160,7 @@
           <a:bodyPr wrap="square" rtlCol="0" anchor="t"/>
           <a:lstStyle/>
           <a:p>
-            <a:pPr algn="ctr" indent="0" marL="0">
+            <a:pPr marL="0" indent="0" algn="ctr">
               <a:buNone/>
             </a:pPr>
             <a:r>
@@ -17106,7 +17195,7 @@
           </a:prstGeom>
           <a:extLst>
             <a:ext uri="{C572A759-6A51-4108-AA02-DFA0A04FC94B}">
-              <ma14:wrappingTextBoxFlag xmlns:ma14="http://schemas.microsoft.com/office/mac/drawingml/2011/main" val="0"/>
+              <ma14:wrappingTextBoxFlag xmlns:ma14="http://schemas.microsoft.com/office/mac/drawingml/2011/main" xmlns="" val="0"/>
             </a:ext>
           </a:extLst>
         </p:spPr>
@@ -17124,7 +17213,7 @@
           <a:p>
             <a:pPr algn="r"/>
             <a:fld id="{F7021451-1387-4CA6-816F-3879F97B5CBC}" type="slidenum">
-              <a:rPr b="0" lang="en-US"/>
+              <a:rPr lang="en-US" b="0"/>
               <a:t>40</a:t>
             </a:fld>
             <a:endParaRPr lang="en-US"/>
@@ -17159,9 +17248,11 @@
       <p:sp>
         <p:nvSpPr>
           <p:cNvPr id="2" name="Text 0"/>
-          <p:cNvSpPr/>
-          <p:nvPr>
-            <p:ph idx="100" type="title" hasCustomPrompt="1"/>
+          <p:cNvSpPr>
+            <a:spLocks noGrp="1"/>
+          </p:cNvSpPr>
+          <p:nvPr>
+            <p:ph type="title" idx="100" hasCustomPrompt="1"/>
           </p:nvPr>
         </p:nvSpPr>
         <p:spPr>
@@ -17179,7 +17270,7 @@
           <a:bodyPr wrap="square" lIns="0" tIns="0" rIns="0" bIns="0" rtlCol="0" anchor="ctr"/>
           <a:lstStyle/>
           <a:p>
-            <a:pPr algn="l" indent="0" marL="0">
+            <a:pPr marL="0" indent="0" algn="l">
               <a:buNone/>
             </a:pPr>
             <a:r>
@@ -17225,7 +17316,10 @@
         </p:spPr>
         <p:txBody>
           <a:bodyPr/>
-          <a:p/>
+          <a:lstStyle/>
+          <a:p>
+            <a:endParaRPr/>
+          </a:p>
         </p:txBody>
       </p:sp>
       <p:sp>
@@ -17249,7 +17343,7 @@
           <a:bodyPr wrap="square" lIns="1016" tIns="1016" rIns="1016" bIns="1016" rtlCol="0" anchor="t"/>
           <a:lstStyle/>
           <a:p>
-            <a:pPr indent="0" marL="0">
+            <a:pPr marL="0" indent="0">
               <a:buNone/>
             </a:pPr>
             <a:r>
@@ -17285,7 +17379,7 @@
           <a:bodyPr wrap="square" lIns="1016" tIns="1016" rIns="1016" bIns="1016" rtlCol="0" anchor="t"/>
           <a:lstStyle/>
           <a:p>
-            <a:pPr indent="0" marL="0">
+            <a:pPr marL="0" indent="0">
               <a:buNone/>
             </a:pPr>
             <a:endParaRPr lang="en-US" sz="1800" dirty="0"/>
@@ -17320,7 +17414,10 @@
         </p:spPr>
         <p:txBody>
           <a:bodyPr/>
-          <a:p/>
+          <a:lstStyle/>
+          <a:p>
+            <a:endParaRPr/>
+          </a:p>
         </p:txBody>
       </p:sp>
       <p:sp>
@@ -17344,7 +17441,7 @@
           <a:bodyPr wrap="square" lIns="1016" tIns="1016" rIns="1016" bIns="1016" rtlCol="0" anchor="t"/>
           <a:lstStyle/>
           <a:p>
-            <a:pPr indent="0" marL="0">
+            <a:pPr marL="0" indent="0">
               <a:buNone/>
             </a:pPr>
             <a:r>
@@ -17380,7 +17477,7 @@
           <a:bodyPr wrap="square" lIns="1016" tIns="1016" rIns="1016" bIns="1016" rtlCol="0" anchor="t"/>
           <a:lstStyle/>
           <a:p>
-            <a:pPr indent="0" marL="0">
+            <a:pPr marL="0" indent="0">
               <a:buNone/>
             </a:pPr>
             <a:endParaRPr lang="en-US" sz="1800" dirty="0"/>
@@ -17408,7 +17505,7 @@
           <a:bodyPr wrap="square" lIns="1016" tIns="1016" rIns="1016" bIns="1016" rtlCol="0" anchor="t"/>
           <a:lstStyle/>
           <a:p>
-            <a:pPr indent="0" marL="0">
+            <a:pPr marL="0" indent="0">
               <a:buNone/>
             </a:pPr>
             <a:r>
@@ -17443,7 +17540,7 @@
           </a:prstGeom>
           <a:extLst>
             <a:ext uri="{C572A759-6A51-4108-AA02-DFA0A04FC94B}">
-              <ma14:wrappingTextBoxFlag xmlns:ma14="http://schemas.microsoft.com/office/mac/drawingml/2011/main" val="0"/>
+              <ma14:wrappingTextBoxFlag xmlns:ma14="http://schemas.microsoft.com/office/mac/drawingml/2011/main" xmlns="" val="0"/>
             </a:ext>
           </a:extLst>
         </p:spPr>
@@ -17461,7 +17558,7 @@
           <a:p>
             <a:pPr algn="r"/>
             <a:fld id="{F7021451-1387-4CA6-816F-3879F97B5CBC}" type="slidenum">
-              <a:rPr b="0" lang="en-US"/>
+              <a:rPr lang="en-US" b="0"/>
               <a:t>41</a:t>
             </a:fld>
             <a:endParaRPr lang="en-US"/>
@@ -17496,9 +17593,11 @@
       <p:sp>
         <p:nvSpPr>
           <p:cNvPr id="2" name="Text 0"/>
-          <p:cNvSpPr/>
-          <p:nvPr>
-            <p:ph idx="100" type="title" hasCustomPrompt="1"/>
+          <p:cNvSpPr>
+            <a:spLocks noGrp="1"/>
+          </p:cNvSpPr>
+          <p:nvPr>
+            <p:ph type="title" idx="100" hasCustomPrompt="1"/>
           </p:nvPr>
         </p:nvSpPr>
         <p:spPr>
@@ -17516,7 +17615,7 @@
           <a:bodyPr wrap="square" rtlCol="0" anchor="ctr"/>
           <a:lstStyle/>
           <a:p>
-            <a:pPr algn="ctr" indent="0" marL="0">
+            <a:pPr marL="0" indent="0" algn="ctr">
               <a:buNone/>
             </a:pPr>
             <a:r>
@@ -17537,9 +17636,11 @@
       <p:sp>
         <p:nvSpPr>
           <p:cNvPr id="3" name="Text 0"/>
-          <p:cNvSpPr/>
-          <p:nvPr>
-            <p:ph idx="101" type="body" hasCustomPrompt="1"/>
+          <p:cNvSpPr>
+            <a:spLocks noGrp="1"/>
+          </p:cNvSpPr>
+          <p:nvPr>
+            <p:ph type="body" idx="101" hasCustomPrompt="1"/>
           </p:nvPr>
         </p:nvSpPr>
         <p:spPr>
@@ -17557,7 +17658,7 @@
           <a:bodyPr wrap="square" rtlCol="0" anchor="t"/>
           <a:lstStyle/>
           <a:p>
-            <a:pPr algn="ctr" indent="0" marL="0">
+            <a:pPr marL="0" indent="0" algn="ctr">
               <a:buNone/>
             </a:pPr>
             <a:r>
@@ -17571,7 +17672,7 @@
             <a:endParaRPr lang="en-US" sz="1600" dirty="0"/>
           </a:p>
           <a:p>
-            <a:pPr algn="ctr" indent="0" marL="0">
+            <a:pPr marL="0" indent="0" algn="ctr">
               <a:buNone/>
             </a:pPr>
             <a:r>
@@ -17634,7 +17735,10 @@
         </p:spPr>
         <p:txBody>
           <a:bodyPr/>
-          <a:p/>
+          <a:lstStyle/>
+          <a:p>
+            <a:endParaRPr/>
+          </a:p>
         </p:txBody>
       </p:sp>
       <p:sp>
@@ -17658,7 +17762,7 @@
           <a:bodyPr wrap="square" lIns="0" tIns="0" rIns="0" bIns="0" rtlCol="0" anchor="t"/>
           <a:lstStyle/>
           <a:p>
-            <a:pPr algn="ctr" indent="0" marL="0">
+            <a:pPr marL="0" indent="0" algn="ctr">
               <a:buNone/>
             </a:pPr>
             <a:r>
@@ -17676,9 +17780,11 @@
       <p:sp>
         <p:nvSpPr>
           <p:cNvPr id="4" name="Text 0"/>
-          <p:cNvSpPr/>
-          <p:nvPr>
-            <p:ph idx="100" type="title" hasCustomPrompt="1"/>
+          <p:cNvSpPr>
+            <a:spLocks noGrp="1"/>
+          </p:cNvSpPr>
+          <p:nvPr>
+            <p:ph type="title" idx="100" hasCustomPrompt="1"/>
           </p:nvPr>
         </p:nvSpPr>
         <p:spPr>
@@ -17696,7 +17802,7 @@
           <a:bodyPr wrap="square" rtlCol="0" anchor="ctr"/>
           <a:lstStyle/>
           <a:p>
-            <a:pPr algn="ctr" indent="0" marL="0">
+            <a:pPr marL="0" indent="0" algn="ctr">
               <a:buNone/>
             </a:pPr>
             <a:r>
@@ -17713,7 +17819,7 @@
             <a:endParaRPr lang="en-US" sz="3200" dirty="0"/>
           </a:p>
           <a:p>
-            <a:pPr algn="ctr" indent="0" marL="0">
+            <a:pPr marL="0" indent="0" algn="ctr">
               <a:buNone/>
             </a:pPr>
             <a:r>
@@ -17730,7 +17836,7 @@
             <a:endParaRPr lang="en-US" sz="3200" dirty="0"/>
           </a:p>
           <a:p>
-            <a:pPr algn="ctr" indent="0" marL="0">
+            <a:pPr marL="0" indent="0" algn="ctr">
               <a:buNone/>
             </a:pPr>
             <a:r>
@@ -17751,9 +17857,11 @@
       <p:sp>
         <p:nvSpPr>
           <p:cNvPr id="5" name="Text 0"/>
-          <p:cNvSpPr/>
-          <p:nvPr>
-            <p:ph idx="101" type="body" hasCustomPrompt="1"/>
+          <p:cNvSpPr>
+            <a:spLocks noGrp="1"/>
+          </p:cNvSpPr>
+          <p:nvPr>
+            <p:ph type="body" idx="101" hasCustomPrompt="1"/>
           </p:nvPr>
         </p:nvSpPr>
         <p:spPr>
@@ -17771,7 +17879,7 @@
           <a:bodyPr wrap="square" rtlCol="0" anchor="t"/>
           <a:lstStyle/>
           <a:p>
-            <a:pPr algn="ctr" indent="0" marL="0">
+            <a:pPr marL="0" indent="0" algn="ctr">
               <a:buNone/>
             </a:pPr>
             <a:r>
@@ -17806,7 +17914,7 @@
           </a:prstGeom>
           <a:extLst>
             <a:ext uri="{C572A759-6A51-4108-AA02-DFA0A04FC94B}">
-              <ma14:wrappingTextBoxFlag xmlns:ma14="http://schemas.microsoft.com/office/mac/drawingml/2011/main" val="0"/>
+              <ma14:wrappingTextBoxFlag xmlns:ma14="http://schemas.microsoft.com/office/mac/drawingml/2011/main" xmlns="" val="0"/>
             </a:ext>
           </a:extLst>
         </p:spPr>
@@ -17824,7 +17932,7 @@
           <a:p>
             <a:pPr algn="r"/>
             <a:fld id="{F7021451-1387-4CA6-816F-3879F97B5CBC}" type="slidenum">
-              <a:rPr b="0" lang="en-US"/>
+              <a:rPr lang="en-US" b="0"/>
               <a:t>43</a:t>
             </a:fld>
             <a:endParaRPr lang="en-US"/>
@@ -17879,7 +17987,10 @@
         </p:spPr>
         <p:txBody>
           <a:bodyPr/>
-          <a:p/>
+          <a:lstStyle/>
+          <a:p>
+            <a:endParaRPr/>
+          </a:p>
         </p:txBody>
       </p:sp>
       <p:sp>
@@ -17903,7 +18014,7 @@
           <a:bodyPr wrap="square" lIns="0" tIns="0" rIns="0" bIns="0" rtlCol="0" anchor="t"/>
           <a:lstStyle/>
           <a:p>
-            <a:pPr algn="ctr" indent="0" marL="0">
+            <a:pPr marL="0" indent="0" algn="ctr">
               <a:buNone/>
             </a:pPr>
             <a:r>
@@ -17921,9 +18032,11 @@
       <p:sp>
         <p:nvSpPr>
           <p:cNvPr id="4" name="Text 0"/>
-          <p:cNvSpPr/>
-          <p:nvPr>
-            <p:ph idx="100" type="title" hasCustomPrompt="1"/>
+          <p:cNvSpPr>
+            <a:spLocks noGrp="1"/>
+          </p:cNvSpPr>
+          <p:nvPr>
+            <p:ph type="title" idx="100" hasCustomPrompt="1"/>
           </p:nvPr>
         </p:nvSpPr>
         <p:spPr>
@@ -17941,7 +18054,7 @@
           <a:bodyPr wrap="square" rtlCol="0" anchor="ctr"/>
           <a:lstStyle/>
           <a:p>
-            <a:pPr algn="ctr" indent="0" marL="0">
+            <a:pPr marL="0" indent="0" algn="ctr">
               <a:buNone/>
             </a:pPr>
             <a:r>
@@ -17958,7 +18071,7 @@
             <a:endParaRPr lang="en-US" sz="3200" dirty="0"/>
           </a:p>
           <a:p>
-            <a:pPr algn="ctr" indent="0" marL="0">
+            <a:pPr marL="0" indent="0" algn="ctr">
               <a:buNone/>
             </a:pPr>
             <a:r>
@@ -17975,7 +18088,7 @@
             <a:endParaRPr lang="en-US" sz="3200" dirty="0"/>
           </a:p>
           <a:p>
-            <a:pPr algn="ctr" indent="0" marL="0">
+            <a:pPr marL="0" indent="0" algn="ctr">
               <a:buNone/>
             </a:pPr>
             <a:r>
@@ -17996,9 +18109,11 @@
       <p:sp>
         <p:nvSpPr>
           <p:cNvPr id="5" name="Text 0"/>
-          <p:cNvSpPr/>
-          <p:nvPr>
-            <p:ph idx="101" type="body" hasCustomPrompt="1"/>
+          <p:cNvSpPr>
+            <a:spLocks noGrp="1"/>
+          </p:cNvSpPr>
+          <p:nvPr>
+            <p:ph type="body" idx="101" hasCustomPrompt="1"/>
           </p:nvPr>
         </p:nvSpPr>
         <p:spPr>
@@ -18016,7 +18131,7 @@
           <a:bodyPr wrap="square" rtlCol="0" anchor="t"/>
           <a:lstStyle/>
           <a:p>
-            <a:pPr algn="ctr" indent="0" marL="0">
+            <a:pPr marL="0" indent="0" algn="ctr">
               <a:buNone/>
             </a:pPr>
             <a:r>
@@ -18051,7 +18166,7 @@
           </a:prstGeom>
           <a:extLst>
             <a:ext uri="{C572A759-6A51-4108-AA02-DFA0A04FC94B}">
-              <ma14:wrappingTextBoxFlag xmlns:ma14="http://schemas.microsoft.com/office/mac/drawingml/2011/main" val="0"/>
+              <ma14:wrappingTextBoxFlag xmlns:ma14="http://schemas.microsoft.com/office/mac/drawingml/2011/main" xmlns="" val="0"/>
             </a:ext>
           </a:extLst>
         </p:spPr>
@@ -18069,7 +18184,7 @@
           <a:p>
             <a:pPr algn="r"/>
             <a:fld id="{F7021451-1387-4CA6-816F-3879F97B5CBC}" type="slidenum">
-              <a:rPr b="0" lang="en-US"/>
+              <a:rPr lang="en-US" b="0"/>
               <a:t>44</a:t>
             </a:fld>
             <a:endParaRPr lang="en-US"/>
@@ -18124,7 +18239,10 @@
         </p:spPr>
         <p:txBody>
           <a:bodyPr/>
-          <a:p/>
+          <a:lstStyle/>
+          <a:p>
+            <a:endParaRPr/>
+          </a:p>
         </p:txBody>
       </p:sp>
       <p:sp>
@@ -18148,7 +18266,7 @@
           <a:bodyPr wrap="square" lIns="0" tIns="0" rIns="0" bIns="0" rtlCol="0" anchor="t"/>
           <a:lstStyle/>
           <a:p>
-            <a:pPr algn="ctr" indent="0" marL="0">
+            <a:pPr marL="0" indent="0" algn="ctr">
               <a:buNone/>
             </a:pPr>
             <a:r>
@@ -18166,9 +18284,11 @@
       <p:sp>
         <p:nvSpPr>
           <p:cNvPr id="4" name="Text 0"/>
-          <p:cNvSpPr/>
-          <p:nvPr>
-            <p:ph idx="100" type="title" hasCustomPrompt="1"/>
+          <p:cNvSpPr>
+            <a:spLocks noGrp="1"/>
+          </p:cNvSpPr>
+          <p:nvPr>
+            <p:ph type="title" idx="100" hasCustomPrompt="1"/>
           </p:nvPr>
         </p:nvSpPr>
         <p:spPr>
@@ -18186,7 +18306,7 @@
           <a:bodyPr wrap="square" rtlCol="0" anchor="ctr"/>
           <a:lstStyle/>
           <a:p>
-            <a:pPr algn="ctr" indent="0" marL="0">
+            <a:pPr marL="0" indent="0" algn="ctr">
               <a:buNone/>
             </a:pPr>
             <a:r>
@@ -18203,7 +18323,7 @@
             <a:endParaRPr lang="en-US" sz="3200" dirty="0"/>
           </a:p>
           <a:p>
-            <a:pPr algn="ctr" indent="0" marL="0">
+            <a:pPr marL="0" indent="0" algn="ctr">
               <a:buNone/>
             </a:pPr>
             <a:r>
@@ -18220,7 +18340,7 @@
             <a:endParaRPr lang="en-US" sz="3200" dirty="0"/>
           </a:p>
           <a:p>
-            <a:pPr algn="ctr" indent="0" marL="0">
+            <a:pPr marL="0" indent="0" algn="ctr">
               <a:buNone/>
             </a:pPr>
             <a:r>
@@ -18241,9 +18361,11 @@
       <p:sp>
         <p:nvSpPr>
           <p:cNvPr id="5" name="Text 0"/>
-          <p:cNvSpPr/>
-          <p:nvPr>
-            <p:ph idx="101" type="body" hasCustomPrompt="1"/>
+          <p:cNvSpPr>
+            <a:spLocks noGrp="1"/>
+          </p:cNvSpPr>
+          <p:nvPr>
+            <p:ph type="body" idx="101" hasCustomPrompt="1"/>
           </p:nvPr>
         </p:nvSpPr>
         <p:spPr>
@@ -18261,7 +18383,7 @@
           <a:bodyPr wrap="square" rtlCol="0" anchor="t"/>
           <a:lstStyle/>
           <a:p>
-            <a:pPr algn="ctr" indent="0" marL="0">
+            <a:pPr marL="0" indent="0" algn="ctr">
               <a:buNone/>
             </a:pPr>
             <a:r>
@@ -18296,7 +18418,7 @@
           </a:prstGeom>
           <a:extLst>
             <a:ext uri="{C572A759-6A51-4108-AA02-DFA0A04FC94B}">
-              <ma14:wrappingTextBoxFlag xmlns:ma14="http://schemas.microsoft.com/office/mac/drawingml/2011/main" val="0"/>
+              <ma14:wrappingTextBoxFlag xmlns:ma14="http://schemas.microsoft.com/office/mac/drawingml/2011/main" xmlns="" val="0"/>
             </a:ext>
           </a:extLst>
         </p:spPr>
@@ -18314,7 +18436,7 @@
           <a:p>
             <a:pPr algn="r"/>
             <a:fld id="{F7021451-1387-4CA6-816F-3879F97B5CBC}" type="slidenum">
-              <a:rPr b="0" lang="en-US"/>
+              <a:rPr lang="en-US" b="0"/>
               <a:t>45</a:t>
             </a:fld>
             <a:endParaRPr lang="en-US"/>
@@ -18348,14 +18470,14 @@
       </p:grpSpPr>
       <p:pic>
         <p:nvPicPr>
-          <p:cNvPr id="2" name="Image 0" descr="絶対的安心感">    </p:cNvPr>
+          <p:cNvPr id="2" name="Image 0" descr="絶対的安心感"/>
           <p:cNvPicPr>
             <a:picLocks noChangeAspect="1"/>
           </p:cNvPicPr>
           <p:nvPr/>
         </p:nvPicPr>
         <p:blipFill>
-          <a:blip r:embed="rId1"/>
+          <a:blip r:embed="rId3"/>
           <a:stretch>
             <a:fillRect/>
           </a:stretch>
@@ -18397,14 +18519,14 @@
       </p:grpSpPr>
       <p:pic>
         <p:nvPicPr>
-          <p:cNvPr id="2" name="Image 0" descr="海音ロゴ">    </p:cNvPr>
+          <p:cNvPr id="2" name="Image 0" descr="海音ロゴ"/>
           <p:cNvPicPr>
             <a:picLocks noChangeAspect="1"/>
           </p:cNvPicPr>
           <p:nvPr/>
         </p:nvPicPr>
         <p:blipFill>
-          <a:blip r:embed="rId1"/>
+          <a:blip r:embed="rId3"/>
           <a:stretch>
             <a:fillRect/>
           </a:stretch>
@@ -18422,9 +18544,11 @@
       <p:sp>
         <p:nvSpPr>
           <p:cNvPr id="3" name="Text 0"/>
-          <p:cNvSpPr/>
-          <p:nvPr>
-            <p:ph idx="100" type="title" hasCustomPrompt="1"/>
+          <p:cNvSpPr>
+            <a:spLocks noGrp="1"/>
+          </p:cNvSpPr>
+          <p:nvPr>
+            <p:ph type="title" idx="100" hasCustomPrompt="1"/>
           </p:nvPr>
         </p:nvSpPr>
         <p:spPr>
@@ -18442,7 +18566,7 @@
           <a:bodyPr wrap="square" rtlCol="0" anchor="ctr"/>
           <a:lstStyle/>
           <a:p>
-            <a:pPr algn="ctr" indent="0" marL="0">
+            <a:pPr marL="0" indent="0" algn="ctr">
               <a:buNone/>
             </a:pPr>
             <a:r>
@@ -18463,9 +18587,11 @@
       <p:sp>
         <p:nvSpPr>
           <p:cNvPr id="4" name="Text 0"/>
-          <p:cNvSpPr/>
-          <p:nvPr>
-            <p:ph idx="101" type="body" hasCustomPrompt="1"/>
+          <p:cNvSpPr>
+            <a:spLocks noGrp="1"/>
+          </p:cNvSpPr>
+          <p:nvPr>
+            <p:ph type="body" idx="101" hasCustomPrompt="1"/>
           </p:nvPr>
         </p:nvSpPr>
         <p:spPr>
@@ -18483,7 +18609,7 @@
           <a:bodyPr wrap="square" rtlCol="0" anchor="t"/>
           <a:lstStyle/>
           <a:p>
-            <a:pPr algn="ctr" indent="0" marL="0">
+            <a:pPr marL="0" indent="0" algn="ctr">
               <a:buNone/>
             </a:pPr>
             <a:r>
@@ -18497,7 +18623,7 @@
             <a:endParaRPr lang="en-US" sz="1600" dirty="0"/>
           </a:p>
           <a:p>
-            <a:pPr algn="ctr" indent="0" marL="0">
+            <a:pPr marL="0" indent="0" algn="ctr">
               <a:buNone/>
             </a:pPr>
             <a:r>
@@ -18560,7 +18686,10 @@
         </p:spPr>
         <p:txBody>
           <a:bodyPr/>
-          <a:p/>
+          <a:lstStyle/>
+          <a:p>
+            <a:endParaRPr/>
+          </a:p>
         </p:txBody>
       </p:sp>
       <p:sp>
@@ -18584,7 +18713,7 @@
           <a:bodyPr wrap="square" lIns="0" tIns="0" rIns="0" bIns="0" rtlCol="0" anchor="t"/>
           <a:lstStyle/>
           <a:p>
-            <a:pPr algn="ctr" indent="0" marL="0">
+            <a:pPr marL="0" indent="0" algn="ctr">
               <a:buNone/>
             </a:pPr>
             <a:r>
@@ -18602,9 +18731,11 @@
       <p:sp>
         <p:nvSpPr>
           <p:cNvPr id="4" name="Text 0"/>
-          <p:cNvSpPr/>
-          <p:nvPr>
-            <p:ph idx="100" type="title" hasCustomPrompt="1"/>
+          <p:cNvSpPr>
+            <a:spLocks noGrp="1"/>
+          </p:cNvSpPr>
+          <p:nvPr>
+            <p:ph type="title" idx="100" hasCustomPrompt="1"/>
           </p:nvPr>
         </p:nvSpPr>
         <p:spPr>
@@ -18622,7 +18753,7 @@
           <a:bodyPr wrap="square" rtlCol="0" anchor="ctr"/>
           <a:lstStyle/>
           <a:p>
-            <a:pPr algn="ctr" indent="0" marL="0">
+            <a:pPr marL="0" indent="0" algn="ctr">
               <a:buNone/>
             </a:pPr>
             <a:r>
@@ -18639,7 +18770,7 @@
             <a:endParaRPr lang="en-US" sz="3200" dirty="0"/>
           </a:p>
           <a:p>
-            <a:pPr algn="ctr" indent="0" marL="0">
+            <a:pPr marL="0" indent="0" algn="ctr">
               <a:buNone/>
             </a:pPr>
             <a:r>
@@ -18660,9 +18791,11 @@
       <p:sp>
         <p:nvSpPr>
           <p:cNvPr id="5" name="Text 0"/>
-          <p:cNvSpPr/>
-          <p:nvPr>
-            <p:ph idx="101" type="body" hasCustomPrompt="1"/>
+          <p:cNvSpPr>
+            <a:spLocks noGrp="1"/>
+          </p:cNvSpPr>
+          <p:nvPr>
+            <p:ph type="body" idx="101" hasCustomPrompt="1"/>
           </p:nvPr>
         </p:nvSpPr>
         <p:spPr>
@@ -18680,7 +18813,7 @@
           <a:bodyPr wrap="square" rtlCol="0" anchor="t"/>
           <a:lstStyle/>
           <a:p>
-            <a:pPr algn="ctr" indent="0" marL="0">
+            <a:pPr marL="0" indent="0" algn="ctr">
               <a:buNone/>
             </a:pPr>
             <a:r>
@@ -18715,7 +18848,7 @@
           </a:prstGeom>
           <a:extLst>
             <a:ext uri="{C572A759-6A51-4108-AA02-DFA0A04FC94B}">
-              <ma14:wrappingTextBoxFlag xmlns:ma14="http://schemas.microsoft.com/office/mac/drawingml/2011/main" val="0"/>
+              <ma14:wrappingTextBoxFlag xmlns:ma14="http://schemas.microsoft.com/office/mac/drawingml/2011/main" xmlns="" val="0"/>
             </a:ext>
           </a:extLst>
         </p:spPr>
@@ -18733,7 +18866,7 @@
           <a:p>
             <a:pPr algn="r"/>
             <a:fld id="{F7021451-1387-4CA6-816F-3879F97B5CBC}" type="slidenum">
-              <a:rPr b="0" lang="en-US"/>
+              <a:rPr lang="en-US" b="0"/>
               <a:t>5</a:t>
             </a:fld>
             <a:endParaRPr lang="en-US"/>
@@ -18788,7 +18921,10 @@
         </p:spPr>
         <p:txBody>
           <a:bodyPr/>
-          <a:p/>
+          <a:lstStyle/>
+          <a:p>
+            <a:endParaRPr/>
+          </a:p>
         </p:txBody>
       </p:sp>
       <p:sp>
@@ -18812,7 +18948,7 @@
           <a:bodyPr wrap="square" lIns="0" tIns="0" rIns="0" bIns="0" rtlCol="0" anchor="t"/>
           <a:lstStyle/>
           <a:p>
-            <a:pPr algn="ctr" indent="0" marL="0">
+            <a:pPr marL="0" indent="0" algn="ctr">
               <a:buNone/>
             </a:pPr>
             <a:r>
@@ -18830,9 +18966,11 @@
       <p:sp>
         <p:nvSpPr>
           <p:cNvPr id="4" name="Text 0"/>
-          <p:cNvSpPr/>
-          <p:nvPr>
-            <p:ph idx="100" type="title" hasCustomPrompt="1"/>
+          <p:cNvSpPr>
+            <a:spLocks noGrp="1"/>
+          </p:cNvSpPr>
+          <p:nvPr>
+            <p:ph type="title" idx="100" hasCustomPrompt="1"/>
           </p:nvPr>
         </p:nvSpPr>
         <p:spPr>
@@ -18850,7 +18988,7 @@
           <a:bodyPr wrap="square" rtlCol="0" anchor="ctr"/>
           <a:lstStyle/>
           <a:p>
-            <a:pPr algn="ctr" indent="0" marL="0">
+            <a:pPr marL="0" indent="0" algn="ctr">
               <a:buNone/>
             </a:pPr>
             <a:r>
@@ -18871,9 +19009,11 @@
       <p:sp>
         <p:nvSpPr>
           <p:cNvPr id="5" name="Text 0"/>
-          <p:cNvSpPr/>
-          <p:nvPr>
-            <p:ph idx="101" type="body" hasCustomPrompt="1"/>
+          <p:cNvSpPr>
+            <a:spLocks noGrp="1"/>
+          </p:cNvSpPr>
+          <p:nvPr>
+            <p:ph type="body" idx="101" hasCustomPrompt="1"/>
           </p:nvPr>
         </p:nvSpPr>
         <p:spPr>
@@ -18891,7 +19031,7 @@
           <a:bodyPr wrap="square" rtlCol="0" anchor="t"/>
           <a:lstStyle/>
           <a:p>
-            <a:pPr algn="ctr" indent="0" marL="0">
+            <a:pPr marL="0" indent="0" algn="ctr">
               <a:buNone/>
             </a:pPr>
             <a:r>
@@ -18926,7 +19066,7 @@
           </a:prstGeom>
           <a:extLst>
             <a:ext uri="{C572A759-6A51-4108-AA02-DFA0A04FC94B}">
-              <ma14:wrappingTextBoxFlag xmlns:ma14="http://schemas.microsoft.com/office/mac/drawingml/2011/main" val="0"/>
+              <ma14:wrappingTextBoxFlag xmlns:ma14="http://schemas.microsoft.com/office/mac/drawingml/2011/main" xmlns="" val="0"/>
             </a:ext>
           </a:extLst>
         </p:spPr>
@@ -18944,7 +19084,7 @@
           <a:p>
             <a:pPr algn="r"/>
             <a:fld id="{F7021451-1387-4CA6-816F-3879F97B5CBC}" type="slidenum">
-              <a:rPr b="0" lang="en-US"/>
+              <a:rPr lang="en-US" b="0"/>
               <a:t>6</a:t>
             </a:fld>
             <a:endParaRPr lang="en-US"/>
@@ -18999,7 +19139,10 @@
         </p:spPr>
         <p:txBody>
           <a:bodyPr/>
-          <a:p/>
+          <a:lstStyle/>
+          <a:p>
+            <a:endParaRPr/>
+          </a:p>
         </p:txBody>
       </p:sp>
       <p:sp>
@@ -19023,7 +19166,7 @@
           <a:bodyPr wrap="square" lIns="0" tIns="0" rIns="0" bIns="0" rtlCol="0" anchor="t"/>
           <a:lstStyle/>
           <a:p>
-            <a:pPr algn="ctr" indent="0" marL="0">
+            <a:pPr marL="0" indent="0" algn="ctr">
               <a:buNone/>
             </a:pPr>
             <a:r>
@@ -19041,9 +19184,11 @@
       <p:sp>
         <p:nvSpPr>
           <p:cNvPr id="4" name="Text 0"/>
-          <p:cNvSpPr/>
-          <p:nvPr>
-            <p:ph idx="100" type="title" hasCustomPrompt="1"/>
+          <p:cNvSpPr>
+            <a:spLocks noGrp="1"/>
+          </p:cNvSpPr>
+          <p:nvPr>
+            <p:ph type="title" idx="100" hasCustomPrompt="1"/>
           </p:nvPr>
         </p:nvSpPr>
         <p:spPr>
@@ -19061,7 +19206,7 @@
           <a:bodyPr wrap="square" rtlCol="0" anchor="ctr"/>
           <a:lstStyle/>
           <a:p>
-            <a:pPr algn="ctr" indent="0" marL="0">
+            <a:pPr marL="0" indent="0" algn="ctr">
               <a:buNone/>
             </a:pPr>
             <a:r>
@@ -19078,7 +19223,7 @@
             <a:endParaRPr lang="en-US" sz="3200" dirty="0"/>
           </a:p>
           <a:p>
-            <a:pPr algn="ctr" indent="0" marL="0">
+            <a:pPr marL="0" indent="0" algn="ctr">
               <a:buNone/>
             </a:pPr>
             <a:r>
@@ -19116,7 +19261,7 @@
           </a:prstGeom>
           <a:extLst>
             <a:ext uri="{C572A759-6A51-4108-AA02-DFA0A04FC94B}">
-              <ma14:wrappingTextBoxFlag xmlns:ma14="http://schemas.microsoft.com/office/mac/drawingml/2011/main" val="0"/>
+              <ma14:wrappingTextBoxFlag xmlns:ma14="http://schemas.microsoft.com/office/mac/drawingml/2011/main" xmlns="" val="0"/>
             </a:ext>
           </a:extLst>
         </p:spPr>
@@ -19134,7 +19279,7 @@
           <a:p>
             <a:pPr algn="r"/>
             <a:fld id="{F7021451-1387-4CA6-816F-3879F97B5CBC}" type="slidenum">
-              <a:rPr b="0" lang="en-US"/>
+              <a:rPr lang="en-US" b="0"/>
               <a:t>7</a:t>
             </a:fld>
             <a:endParaRPr lang="en-US"/>
@@ -19189,7 +19334,10 @@
         </p:spPr>
         <p:txBody>
           <a:bodyPr/>
-          <a:p/>
+          <a:lstStyle/>
+          <a:p>
+            <a:endParaRPr/>
+          </a:p>
         </p:txBody>
       </p:sp>
       <p:sp>
@@ -19213,7 +19361,7 @@
           <a:bodyPr wrap="square" lIns="0" tIns="0" rIns="0" bIns="0" rtlCol="0" anchor="t"/>
           <a:lstStyle/>
           <a:p>
-            <a:pPr algn="ctr" indent="0" marL="0">
+            <a:pPr marL="0" indent="0" algn="ctr">
               <a:buNone/>
             </a:pPr>
             <a:r>
@@ -19231,9 +19379,11 @@
       <p:sp>
         <p:nvSpPr>
           <p:cNvPr id="4" name="Text 0"/>
-          <p:cNvSpPr/>
-          <p:nvPr>
-            <p:ph idx="100" type="title" hasCustomPrompt="1"/>
+          <p:cNvSpPr>
+            <a:spLocks noGrp="1"/>
+          </p:cNvSpPr>
+          <p:nvPr>
+            <p:ph type="title" idx="100" hasCustomPrompt="1"/>
           </p:nvPr>
         </p:nvSpPr>
         <p:spPr>
@@ -19251,7 +19401,7 @@
           <a:bodyPr wrap="square" rtlCol="0" anchor="ctr"/>
           <a:lstStyle/>
           <a:p>
-            <a:pPr algn="ctr" indent="0" marL="0">
+            <a:pPr marL="0" indent="0" algn="ctr">
               <a:buNone/>
             </a:pPr>
             <a:r>
@@ -19268,7 +19418,7 @@
             <a:endParaRPr lang="en-US" sz="3200" dirty="0"/>
           </a:p>
           <a:p>
-            <a:pPr algn="ctr" indent="0" marL="0">
+            <a:pPr marL="0" indent="0" algn="ctr">
               <a:buNone/>
             </a:pPr>
             <a:r>
@@ -19306,7 +19456,7 @@
           </a:prstGeom>
           <a:extLst>
             <a:ext uri="{C572A759-6A51-4108-AA02-DFA0A04FC94B}">
-              <ma14:wrappingTextBoxFlag xmlns:ma14="http://schemas.microsoft.com/office/mac/drawingml/2011/main" val="0"/>
+              <ma14:wrappingTextBoxFlag xmlns:ma14="http://schemas.microsoft.com/office/mac/drawingml/2011/main" xmlns="" val="0"/>
             </a:ext>
           </a:extLst>
         </p:spPr>
@@ -19324,7 +19474,7 @@
           <a:p>
             <a:pPr algn="r"/>
             <a:fld id="{F7021451-1387-4CA6-816F-3879F97B5CBC}" type="slidenum">
-              <a:rPr b="0" lang="en-US"/>
+              <a:rPr lang="en-US" b="0"/>
               <a:t>8</a:t>
             </a:fld>
             <a:endParaRPr lang="en-US"/>
@@ -19379,7 +19529,10 @@
         </p:spPr>
         <p:txBody>
           <a:bodyPr/>
-          <a:p/>
+          <a:lstStyle/>
+          <a:p>
+            <a:endParaRPr/>
+          </a:p>
         </p:txBody>
       </p:sp>
       <p:sp>
@@ -19403,7 +19556,7 @@
           <a:bodyPr wrap="square" lIns="0" tIns="0" rIns="0" bIns="0" rtlCol="0" anchor="t"/>
           <a:lstStyle/>
           <a:p>
-            <a:pPr algn="ctr" indent="0" marL="0">
+            <a:pPr marL="0" indent="0" algn="ctr">
               <a:buNone/>
             </a:pPr>
             <a:r>
@@ -19421,9 +19574,11 @@
       <p:sp>
         <p:nvSpPr>
           <p:cNvPr id="4" name="Text 0"/>
-          <p:cNvSpPr/>
-          <p:nvPr>
-            <p:ph idx="100" type="title" hasCustomPrompt="1"/>
+          <p:cNvSpPr>
+            <a:spLocks noGrp="1"/>
+          </p:cNvSpPr>
+          <p:nvPr>
+            <p:ph type="title" idx="100" hasCustomPrompt="1"/>
           </p:nvPr>
         </p:nvSpPr>
         <p:spPr>
@@ -19441,7 +19596,7 @@
           <a:bodyPr wrap="square" rtlCol="0" anchor="ctr"/>
           <a:lstStyle/>
           <a:p>
-            <a:pPr algn="ctr" indent="0" marL="0">
+            <a:pPr marL="0" indent="0" algn="ctr">
               <a:buNone/>
             </a:pPr>
             <a:r>
@@ -19458,7 +19613,7 @@
             <a:endParaRPr lang="en-US" sz="3200" dirty="0"/>
           </a:p>
           <a:p>
-            <a:pPr algn="ctr" indent="0" marL="0">
+            <a:pPr marL="0" indent="0" algn="ctr">
               <a:buNone/>
             </a:pPr>
             <a:r>
@@ -19475,7 +19630,7 @@
             <a:endParaRPr lang="en-US" sz="3200" dirty="0"/>
           </a:p>
           <a:p>
-            <a:pPr algn="ctr" indent="0" marL="0">
+            <a:pPr marL="0" indent="0" algn="ctr">
               <a:buNone/>
             </a:pPr>
             <a:r>
@@ -19496,9 +19651,11 @@
       <p:sp>
         <p:nvSpPr>
           <p:cNvPr id="5" name="Text 0"/>
-          <p:cNvSpPr/>
-          <p:nvPr>
-            <p:ph idx="101" type="body" hasCustomPrompt="1"/>
+          <p:cNvSpPr>
+            <a:spLocks noGrp="1"/>
+          </p:cNvSpPr>
+          <p:nvPr>
+            <p:ph type="body" idx="101" hasCustomPrompt="1"/>
           </p:nvPr>
         </p:nvSpPr>
         <p:spPr>
@@ -19516,7 +19673,7 @@
           <a:bodyPr wrap="square" rtlCol="0" anchor="t"/>
           <a:lstStyle/>
           <a:p>
-            <a:pPr algn="ctr" indent="0" marL="0">
+            <a:pPr marL="0" indent="0" algn="ctr">
               <a:buNone/>
             </a:pPr>
             <a:r>
@@ -19551,7 +19708,7 @@
           </a:prstGeom>
           <a:extLst>
             <a:ext uri="{C572A759-6A51-4108-AA02-DFA0A04FC94B}">
-              <ma14:wrappingTextBoxFlag xmlns:ma14="http://schemas.microsoft.com/office/mac/drawingml/2011/main" val="0"/>
+              <ma14:wrappingTextBoxFlag xmlns:ma14="http://schemas.microsoft.com/office/mac/drawingml/2011/main" xmlns="" val="0"/>
             </a:ext>
           </a:extLst>
         </p:spPr>
@@ -19569,7 +19726,7 @@
           <a:p>
             <a:pPr algn="r"/>
             <a:fld id="{F7021451-1387-4CA6-816F-3879F97B5CBC}" type="slidenum">
-              <a:rPr b="0" lang="en-US"/>
+              <a:rPr lang="en-US" b="0"/>
               <a:t>9</a:t>
             </a:fld>
             <a:endParaRPr lang="en-US"/>
@@ -19877,4 +20034,319 @@
     </a:ext>
   </a:extLst>
 </a:theme>
+</file>
+
+<file path=ppt/theme/theme2.xml><?xml version="1.0" encoding="utf-8"?>
+<a:theme xmlns:a="http://schemas.openxmlformats.org/drawingml/2006/main" name="Office テーマ">
+  <a:themeElements>
+    <a:clrScheme name="Office">
+      <a:dk1>
+        <a:sysClr val="windowText" lastClr="000000"/>
+      </a:dk1>
+      <a:lt1>
+        <a:sysClr val="window" lastClr="FFFFFF"/>
+      </a:lt1>
+      <a:dk2>
+        <a:srgbClr val="0E2841"/>
+      </a:dk2>
+      <a:lt2>
+        <a:srgbClr val="E8E8E8"/>
+      </a:lt2>
+      <a:accent1>
+        <a:srgbClr val="156082"/>
+      </a:accent1>
+      <a:accent2>
+        <a:srgbClr val="E97132"/>
+      </a:accent2>
+      <a:accent3>
+        <a:srgbClr val="196B24"/>
+      </a:accent3>
+      <a:accent4>
+        <a:srgbClr val="0F9ED5"/>
+      </a:accent4>
+      <a:accent5>
+        <a:srgbClr val="A02B93"/>
+      </a:accent5>
+      <a:accent6>
+        <a:srgbClr val="4EA72E"/>
+      </a:accent6>
+      <a:hlink>
+        <a:srgbClr val="467886"/>
+      </a:hlink>
+      <a:folHlink>
+        <a:srgbClr val="96607D"/>
+      </a:folHlink>
+    </a:clrScheme>
+    <a:fontScheme name="Office">
+      <a:majorFont>
+        <a:latin typeface="游ゴシック Light" panose="02110004020202020204"/>
+        <a:ea typeface=""/>
+        <a:cs typeface=""/>
+        <a:font script="Jpan" typeface="游ゴシック Light"/>
+        <a:font script="Hang" typeface="맑은 고딕"/>
+        <a:font script="Hans" typeface="等线 Light"/>
+        <a:font script="Hant" typeface="新細明體"/>
+        <a:font script="Arab" typeface="Times New Roman"/>
+        <a:font script="Hebr" typeface="Times New Roman"/>
+        <a:font script="Thai" typeface="Angsana New"/>
+        <a:font script="Ethi" typeface="Nyala"/>
+        <a:font script="Beng" typeface="Vrinda"/>
+        <a:font script="Gujr" typeface="Shruti"/>
+        <a:font script="Khmr" typeface="MoolBoran"/>
+        <a:font script="Knda" typeface="Tunga"/>
+        <a:font script="Guru" typeface="Raavi"/>
+        <a:font script="Cans" typeface="Euphemia"/>
+        <a:font script="Cher" typeface="Plantagenet Cherokee"/>
+        <a:font script="Yiii" typeface="Microsoft Yi Baiti"/>
+        <a:font script="Tibt" typeface="Microsoft Himalaya"/>
+        <a:font script="Thaa" typeface="MV Boli"/>
+        <a:font script="Deva" typeface="Mangal"/>
+        <a:font script="Telu" typeface="Gautami"/>
+        <a:font script="Taml" typeface="Latha"/>
+        <a:font script="Syrc" typeface="Estrangelo Edessa"/>
+        <a:font script="Orya" typeface="Kalinga"/>
+        <a:font script="Mlym" typeface="Kartika"/>
+        <a:font script="Laoo" typeface="DokChampa"/>
+        <a:font script="Sinh" typeface="Iskoola Pota"/>
+        <a:font script="Mong" typeface="Mongolian Baiti"/>
+        <a:font script="Viet" typeface="Times New Roman"/>
+        <a:font script="Uigh" typeface="Microsoft Uighur"/>
+        <a:font script="Geor" typeface="Sylfaen"/>
+        <a:font script="Armn" typeface="Arial"/>
+        <a:font script="Bugi" typeface="Leelawadee UI"/>
+        <a:font script="Bopo" typeface="Microsoft JhengHei"/>
+        <a:font script="Java" typeface="Javanese Text"/>
+        <a:font script="Lisu" typeface="Segoe UI"/>
+        <a:font script="Mymr" typeface="Myanmar Text"/>
+        <a:font script="Nkoo" typeface="Ebrima"/>
+        <a:font script="Olck" typeface="Nirmala UI"/>
+        <a:font script="Osma" typeface="Ebrima"/>
+        <a:font script="Phag" typeface="Phagspa"/>
+        <a:font script="Syrn" typeface="Estrangelo Edessa"/>
+        <a:font script="Syrj" typeface="Estrangelo Edessa"/>
+        <a:font script="Syre" typeface="Estrangelo Edessa"/>
+        <a:font script="Sora" typeface="Nirmala UI"/>
+        <a:font script="Tale" typeface="Microsoft Tai Le"/>
+        <a:font script="Talu" typeface="Microsoft New Tai Lue"/>
+        <a:font script="Tfng" typeface="Ebrima"/>
+      </a:majorFont>
+      <a:minorFont>
+        <a:latin typeface="游ゴシック" panose="02110004020202020204"/>
+        <a:ea typeface=""/>
+        <a:cs typeface=""/>
+        <a:font script="Jpan" typeface="游ゴシック"/>
+        <a:font script="Hang" typeface="맑은 고딕"/>
+        <a:font script="Hans" typeface="等线"/>
+        <a:font script="Hant" typeface="新細明體"/>
+        <a:font script="Arab" typeface="Arial"/>
+        <a:font script="Hebr" typeface="Arial"/>
+        <a:font script="Thai" typeface="Cordia New"/>
+        <a:font script="Ethi" typeface="Nyala"/>
+        <a:font script="Beng" typeface="Vrinda"/>
+        <a:font script="Gujr" typeface="Shruti"/>
+        <a:font script="Khmr" typeface="DaunPenh"/>
+        <a:font script="Knda" typeface="Tunga"/>
+        <a:font script="Guru" typeface="Raavi"/>
+        <a:font script="Cans" typeface="Euphemia"/>
+        <a:font script="Cher" typeface="Plantagenet Cherokee"/>
+        <a:font script="Yiii" typeface="Microsoft Yi Baiti"/>
+        <a:font script="Tibt" typeface="Microsoft Himalaya"/>
+        <a:font script="Thaa" typeface="MV Boli"/>
+        <a:font script="Deva" typeface="Mangal"/>
+        <a:font script="Telu" typeface="Gautami"/>
+        <a:font script="Taml" typeface="Latha"/>
+        <a:font script="Syrc" typeface="Estrangelo Edessa"/>
+        <a:font script="Orya" typeface="Kalinga"/>
+        <a:font script="Mlym" typeface="Kartika"/>
+        <a:font script="Laoo" typeface="DokChampa"/>
+        <a:font script="Sinh" typeface="Iskoola Pota"/>
+        <a:font script="Mong" typeface="Mongolian Baiti"/>
+        <a:font script="Viet" typeface="Arial"/>
+        <a:font script="Uigh" typeface="Microsoft Uighur"/>
+        <a:font script="Geor" typeface="Sylfaen"/>
+        <a:font script="Armn" typeface="Arial"/>
+        <a:font script="Bugi" typeface="Leelawadee UI"/>
+        <a:font script="Bopo" typeface="Microsoft JhengHei"/>
+        <a:font script="Java" typeface="Javanese Text"/>
+        <a:font script="Lisu" typeface="Segoe UI"/>
+        <a:font script="Mymr" typeface="Myanmar Text"/>
+        <a:font script="Nkoo" typeface="Ebrima"/>
+        <a:font script="Olck" typeface="Nirmala UI"/>
+        <a:font script="Osma" typeface="Ebrima"/>
+        <a:font script="Phag" typeface="Phagspa"/>
+        <a:font script="Syrn" typeface="Estrangelo Edessa"/>
+        <a:font script="Syrj" typeface="Estrangelo Edessa"/>
+        <a:font script="Syre" typeface="Estrangelo Edessa"/>
+        <a:font script="Sora" typeface="Nirmala UI"/>
+        <a:font script="Tale" typeface="Microsoft Tai Le"/>
+        <a:font script="Talu" typeface="Microsoft New Tai Lue"/>
+        <a:font script="Tfng" typeface="Ebrima"/>
+      </a:minorFont>
+    </a:fontScheme>
+    <a:fmtScheme name="Office">
+      <a:fillStyleLst>
+        <a:solidFill>
+          <a:schemeClr val="phClr"/>
+        </a:solidFill>
+        <a:gradFill rotWithShape="1">
+          <a:gsLst>
+            <a:gs pos="0">
+              <a:schemeClr val="phClr">
+                <a:lumMod val="110000"/>
+                <a:satMod val="105000"/>
+                <a:tint val="67000"/>
+              </a:schemeClr>
+            </a:gs>
+            <a:gs pos="50000">
+              <a:schemeClr val="phClr">
+                <a:lumMod val="105000"/>
+                <a:satMod val="103000"/>
+                <a:tint val="73000"/>
+              </a:schemeClr>
+            </a:gs>
+            <a:gs pos="100000">
+              <a:schemeClr val="phClr">
+                <a:lumMod val="105000"/>
+                <a:satMod val="109000"/>
+                <a:tint val="81000"/>
+              </a:schemeClr>
+            </a:gs>
+          </a:gsLst>
+          <a:lin ang="5400000" scaled="0"/>
+        </a:gradFill>
+        <a:gradFill rotWithShape="1">
+          <a:gsLst>
+            <a:gs pos="0">
+              <a:schemeClr val="phClr">
+                <a:satMod val="103000"/>
+                <a:lumMod val="102000"/>
+                <a:tint val="94000"/>
+              </a:schemeClr>
+            </a:gs>
+            <a:gs pos="50000">
+              <a:schemeClr val="phClr">
+                <a:satMod val="110000"/>
+                <a:lumMod val="100000"/>
+                <a:shade val="100000"/>
+              </a:schemeClr>
+            </a:gs>
+            <a:gs pos="100000">
+              <a:schemeClr val="phClr">
+                <a:lumMod val="99000"/>
+                <a:satMod val="120000"/>
+                <a:shade val="78000"/>
+              </a:schemeClr>
+            </a:gs>
+          </a:gsLst>
+          <a:lin ang="5400000" scaled="0"/>
+        </a:gradFill>
+      </a:fillStyleLst>
+      <a:lnStyleLst>
+        <a:ln w="12700" cap="flat" cmpd="sng" algn="ctr">
+          <a:solidFill>
+            <a:schemeClr val="phClr"/>
+          </a:solidFill>
+          <a:prstDash val="solid"/>
+          <a:miter lim="800000"/>
+        </a:ln>
+        <a:ln w="19050" cap="flat" cmpd="sng" algn="ctr">
+          <a:solidFill>
+            <a:schemeClr val="phClr"/>
+          </a:solidFill>
+          <a:prstDash val="solid"/>
+          <a:miter lim="800000"/>
+        </a:ln>
+        <a:ln w="25400" cap="flat" cmpd="sng" algn="ctr">
+          <a:solidFill>
+            <a:schemeClr val="phClr"/>
+          </a:solidFill>
+          <a:prstDash val="solid"/>
+          <a:miter lim="800000"/>
+        </a:ln>
+      </a:lnStyleLst>
+      <a:effectStyleLst>
+        <a:effectStyle>
+          <a:effectLst/>
+        </a:effectStyle>
+        <a:effectStyle>
+          <a:effectLst/>
+        </a:effectStyle>
+        <a:effectStyle>
+          <a:effectLst>
+            <a:outerShdw blurRad="57150" dist="19050" dir="5400000" algn="ctr" rotWithShape="0">
+              <a:srgbClr val="000000">
+                <a:alpha val="63000"/>
+              </a:srgbClr>
+            </a:outerShdw>
+          </a:effectLst>
+        </a:effectStyle>
+      </a:effectStyleLst>
+      <a:bgFillStyleLst>
+        <a:solidFill>
+          <a:schemeClr val="phClr"/>
+        </a:solidFill>
+        <a:solidFill>
+          <a:schemeClr val="phClr">
+            <a:tint val="95000"/>
+            <a:satMod val="170000"/>
+          </a:schemeClr>
+        </a:solidFill>
+        <a:gradFill rotWithShape="1">
+          <a:gsLst>
+            <a:gs pos="0">
+              <a:schemeClr val="phClr">
+                <a:tint val="93000"/>
+                <a:satMod val="150000"/>
+                <a:shade val="98000"/>
+                <a:lumMod val="102000"/>
+              </a:schemeClr>
+            </a:gs>
+            <a:gs pos="50000">
+              <a:schemeClr val="phClr">
+                <a:tint val="98000"/>
+                <a:satMod val="130000"/>
+                <a:shade val="90000"/>
+                <a:lumMod val="103000"/>
+              </a:schemeClr>
+            </a:gs>
+            <a:gs pos="100000">
+              <a:schemeClr val="phClr">
+                <a:shade val="63000"/>
+                <a:satMod val="120000"/>
+              </a:schemeClr>
+            </a:gs>
+          </a:gsLst>
+          <a:lin ang="5400000" scaled="0"/>
+        </a:gradFill>
+      </a:bgFillStyleLst>
+    </a:fmtScheme>
+  </a:themeElements>
+  <a:objectDefaults>
+    <a:lnDef>
+      <a:spPr/>
+      <a:bodyPr/>
+      <a:lstStyle/>
+      <a:style>
+        <a:lnRef idx="2">
+          <a:schemeClr val="accent1"/>
+        </a:lnRef>
+        <a:fillRef idx="0">
+          <a:schemeClr val="accent1"/>
+        </a:fillRef>
+        <a:effectRef idx="1">
+          <a:schemeClr val="accent1"/>
+        </a:effectRef>
+        <a:fontRef idx="minor">
+          <a:schemeClr val="tx1"/>
+        </a:fontRef>
+      </a:style>
+    </a:lnDef>
+  </a:objectDefaults>
+  <a:extraClrSchemeLst/>
+  <a:extLst>
+    <a:ext uri="{05A4C25C-085E-4340-85A3-A5531E510DB2}">
+      <thm15:themeFamily xmlns:thm15="http://schemas.microsoft.com/office/thememl/2012/main" name="Office Theme" id="{2E142A2C-CD16-42D6-873A-C26D2A0506FA}" vid="{1BDDFF52-6CD6-40A5-AB3C-68EB2F1E4D0A}"/>
+    </a:ext>
+  </a:extLst>
+</a:theme>
 </file>
--- a/20_Projects/海音_心体の調律/単発/仁部あきえさん/20261028_仁部あきえさん_お金のブロック単発セッション.pptx
+++ b/20_Projects/海音_心体の調律/単発/仁部あきえさん/20261028_仁部あきえさん_お金のブロック単発セッション.pptx
@@ -4,9 +4,6 @@
   <p:sldMasterIdLst>
     <p:sldMasterId id="2147483648" r:id="rId1"/>
   </p:sldMasterIdLst>
-  <p:notesMasterIdLst>
-    <p:notesMasterId r:id="rId49"/>
-  </p:notesMasterIdLst>
   <p:sldIdLst>
     <p:sldId id="256" r:id="rId2"/>
     <p:sldId id="257" r:id="rId3"/>
@@ -55,8 +52,12 @@
     <p:sldId id="300" r:id="rId46"/>
     <p:sldId id="301" r:id="rId47"/>
     <p:sldId id="302" r:id="rId48"/>
+    <p:sldId id="303" r:id="rId49"/>
   </p:sldIdLst>
-  <p:sldSz cx="9144000" cy="5143500" type="screen16x9"/>
+  <p:notesMasterIdLst>
+    <p:notesMasterId r:id="rId50"/>
+  </p:notesMasterIdLst>
+  <p:sldSz cx="9144000" cy="5143500"/>
   <p:notesSz cx="5143500" cy="9144000"/>
   <p:defaultTextStyle>
     <a:lvl1pPr marL="0" algn="l" defTabSz="914400" rtl="0" eaLnBrk="1" latinLnBrk="0" hangingPunct="1">
@@ -153,14 +154,14 @@
   <p:extLst>
     <p:ext uri="{521415D9-36F7-43E2-AB2F-B90AF26B5E84}">
       <p14:sectionLst xmlns:p14="http://schemas.microsoft.com/office/powerpoint/2010/main">
-        <p14:section name="はじめに" id="{90993FCA-79D3-449F-E53F-63BFE8932D3F}">
+        <p14:section name="はじめに" id="{7af57940-bbe6-5cf3-7e41-2786a1b87abf}">
           <p14:sldIdLst>
             <p14:sldId id="256"/>
             <p14:sldId id="257"/>
             <p14:sldId id="258"/>
           </p14:sldIdLst>
         </p14:section>
-        <p14:section name="第1部 魂の傷を聴く" id="{99E2D81A-974F-286F-4A69-D8F581D0A990}">
+        <p14:section name="第1部 魂の傷を聴く" id="{13cf408c-378f-119b-0871-685115f2d750}">
           <p14:sldIdLst>
             <p14:sldId id="259"/>
             <p14:sldId id="260"/>
@@ -176,7 +177,7 @@
             <p14:sldId id="270"/>
           </p14:sldIdLst>
         </p14:section>
-        <p14:section name="第2部 頭の構造を知る" id="{73EA247F-E104-BEF5-9889-BC875963250F}">
+        <p14:section name="第2部 頭の構造を知る" id="{c77977bd-e80c-f6b0-28f3-b71a09cb14aa}">
           <p14:sldIdLst>
             <p14:sldId id="271"/>
             <p14:sldId id="272"/>
@@ -190,7 +191,7 @@
             <p14:sldId id="280"/>
           </p14:sldIdLst>
         </p14:section>
-        <p14:section name="ワーク 思い込みを書き換える" id="{81FBBCC0-FD8E-0EB7-FE24-3316DB1926E5}">
+        <p14:section name="ワーク 思い込みを書き換える" id="{b8090378-0635-5dc1-75bc-471a9a83f5ba}">
           <p14:sldIdLst>
             <p14:sldId id="281"/>
             <p14:sldId id="282"/>
@@ -210,18 +211,19 @@
             <p14:sldId id="296"/>
           </p14:sldIdLst>
         </p14:section>
-        <p14:section name="エネルギー" id="{96118EEB-6B7D-A72B-0706-C5CE2DDACCCD}">
+        <p14:section name="エネルギー" id="{35b50227-3997-a25b-0eb9-3237bd52aa88}">
           <p14:sldIdLst>
             <p14:sldId id="297"/>
           </p14:sldIdLst>
         </p14:section>
-        <p14:section name="まとめ" id="{AB3A8C17-2ED0-202A-E9C3-309E3F6043AD}">
+        <p14:section name="まとめ" id="{cbeb59ed-23ab-af74-9254-78927b270854}">
           <p14:sldIdLst>
             <p14:sldId id="298"/>
             <p14:sldId id="299"/>
             <p14:sldId id="300"/>
             <p14:sldId id="301"/>
             <p14:sldId id="302"/>
+            <p14:sldId id="303"/>
           </p14:sldIdLst>
         </p14:section>
       </p14:sectionLst>
@@ -255,17 +257,241 @@
           <a:chExt cx="0" cy="0"/>
         </a:xfrm>
       </p:grpSpPr>
+      <p:sp>
+        <p:nvSpPr>
+          <p:cNvPr id="2" name="Header Placeholder 1"/>
+          <p:cNvSpPr>
+            <a:spLocks noGrp="1"/>
+          </p:cNvSpPr>
+          <p:nvPr>
+            <p:ph type="hdr" sz="quarter"/>
+          </p:nvPr>
+        </p:nvSpPr>
+        <p:spPr>
+          <a:xfrm>
+            <a:off x="0" y="0"/>
+            <a:ext cx="2971800" cy="458788"/>
+          </a:xfrm>
+          <a:prstGeom prst="rect">
+            <a:avLst/>
+          </a:prstGeom>
+        </p:spPr>
+        <p:txBody>
+          <a:bodyPr vert="horz" lIns="91440" tIns="45720" rIns="91440" bIns="45720" rtlCol="0"/>
+          <a:lstStyle>
+            <a:lvl1pPr algn="l">
+              <a:defRPr sz="1200"/>
+            </a:lvl1pPr>
+          </a:lstStyle>
+          <a:p>
+            <a:endParaRPr lang="en-US"/>
+          </a:p>
+        </p:txBody>
+      </p:sp>
+      <p:sp>
+        <p:nvSpPr>
+          <p:cNvPr id="3" name="Date Placeholder 2"/>
+          <p:cNvSpPr>
+            <a:spLocks noGrp="1"/>
+          </p:cNvSpPr>
+          <p:nvPr>
+            <p:ph type="dt" idx="1"/>
+          </p:nvPr>
+        </p:nvSpPr>
+        <p:spPr>
+          <a:xfrm>
+            <a:off x="3884613" y="0"/>
+            <a:ext cx="2971800" cy="458788"/>
+          </a:xfrm>
+          <a:prstGeom prst="rect">
+            <a:avLst/>
+          </a:prstGeom>
+        </p:spPr>
+        <p:txBody>
+          <a:bodyPr vert="horz" lIns="91440" tIns="45720" rIns="91440" bIns="45720" rtlCol="0"/>
+          <a:lstStyle>
+            <a:lvl1pPr algn="r">
+              <a:defRPr sz="1200"/>
+            </a:lvl1pPr>
+          </a:lstStyle>
+          <a:p>
+            <a:fld id="{5282F153-3F37-0F45-9E97-73ACFA13230C}" type="datetimeFigureOut">
+              <a:rPr lang="en-US"/>
+              <a:t>7/23/19</a:t>
+            </a:fld>
+            <a:endParaRPr lang="en-US"/>
+          </a:p>
+        </p:txBody>
+      </p:sp>
+      <p:sp>
+        <p:nvSpPr>
+          <p:cNvPr id="4" name="Slide Image Placeholder 3"/>
+          <p:cNvSpPr>
+            <a:spLocks noGrp="1" noRot="1" noChangeAspect="1"/>
+          </p:cNvSpPr>
+          <p:nvPr>
+            <p:ph type="sldImg" idx="2"/>
+          </p:nvPr>
+        </p:nvSpPr>
+        <p:spPr>
+          <a:xfrm>
+            <a:off x="685800" y="1143000"/>
+            <a:ext cx="5486400" cy="3086100"/>
+          </a:xfrm>
+          <a:prstGeom prst="rect">
+            <a:avLst/>
+          </a:prstGeom>
+          <a:noFill/>
+          <a:ln w="12700">
+            <a:solidFill>
+              <a:prstClr val="black"/>
+            </a:solidFill>
+          </a:ln>
+        </p:spPr>
+        <p:txBody>
+          <a:bodyPr vert="horz" lIns="91440" tIns="45720" rIns="91440" bIns="45720" rtlCol="0" anchor="ctr"/>
+          <a:lstStyle/>
+          <a:p>
+            <a:endParaRPr lang="en-US"/>
+          </a:p>
+        </p:txBody>
+      </p:sp>
+      <p:sp>
+        <p:nvSpPr>
+          <p:cNvPr id="5" name="Notes Placeholder 4"/>
+          <p:cNvSpPr>
+            <a:spLocks noGrp="1"/>
+          </p:cNvSpPr>
+          <p:nvPr>
+            <p:ph type="body" sz="quarter" idx="3"/>
+          </p:nvPr>
+        </p:nvSpPr>
+        <p:spPr>
+          <a:xfrm>
+            <a:off x="685800" y="4400550"/>
+            <a:ext cx="5486400" cy="3600450"/>
+          </a:xfrm>
+          <a:prstGeom prst="rect">
+            <a:avLst/>
+          </a:prstGeom>
+        </p:spPr>
+        <p:txBody>
+          <a:bodyPr vert="horz" lIns="91440" tIns="45720" rIns="91440" bIns="45720" rtlCol="0"/>
+          <a:lstStyle/>
+          <a:p>
+            <a:pPr lvl="0"/>
+            <a:r>
+              <a:rPr lang="en-US"/>
+              <a:t>Click to edit Master text styles</a:t>
+            </a:r>
+          </a:p>
+          <a:p>
+            <a:pPr lvl="1"/>
+            <a:r>
+              <a:rPr lang="en-US"/>
+              <a:t>Second level</a:t>
+            </a:r>
+          </a:p>
+          <a:p>
+            <a:pPr lvl="2"/>
+            <a:r>
+              <a:rPr lang="en-US"/>
+              <a:t>Third level</a:t>
+            </a:r>
+          </a:p>
+          <a:p>
+            <a:pPr lvl="3"/>
+            <a:r>
+              <a:rPr lang="en-US"/>
+              <a:t>Fourth level</a:t>
+            </a:r>
+          </a:p>
+          <a:p>
+            <a:pPr lvl="4"/>
+            <a:r>
+              <a:rPr lang="en-US"/>
+              <a:t>Fifth level</a:t>
+            </a:r>
+          </a:p>
+        </p:txBody>
+      </p:sp>
+      <p:sp>
+        <p:nvSpPr>
+          <p:cNvPr id="6" name="Footer Placeholder 5"/>
+          <p:cNvSpPr>
+            <a:spLocks noGrp="1"/>
+          </p:cNvSpPr>
+          <p:nvPr>
+            <p:ph type="ftr" sz="quarter" idx="4"/>
+          </p:nvPr>
+        </p:nvSpPr>
+        <p:spPr>
+          <a:xfrm>
+            <a:off x="0" y="8685213"/>
+            <a:ext cx="2971800" cy="458787"/>
+          </a:xfrm>
+          <a:prstGeom prst="rect">
+            <a:avLst/>
+          </a:prstGeom>
+        </p:spPr>
+        <p:txBody>
+          <a:bodyPr vert="horz" lIns="91440" tIns="45720" rIns="91440" bIns="45720" rtlCol="0" anchor="b"/>
+          <a:lstStyle>
+            <a:lvl1pPr algn="l">
+              <a:defRPr sz="1200"/>
+            </a:lvl1pPr>
+          </a:lstStyle>
+          <a:p>
+            <a:endParaRPr lang="en-US"/>
+          </a:p>
+        </p:txBody>
+      </p:sp>
+      <p:sp>
+        <p:nvSpPr>
+          <p:cNvPr id="7" name="Slide Number Placeholder 6"/>
+          <p:cNvSpPr>
+            <a:spLocks noGrp="1"/>
+          </p:cNvSpPr>
+          <p:nvPr>
+            <p:ph type="sldNum" sz="quarter" idx="5"/>
+          </p:nvPr>
+        </p:nvSpPr>
+        <p:spPr>
+          <a:xfrm>
+            <a:off x="3884613" y="8685213"/>
+            <a:ext cx="2971800" cy="458787"/>
+          </a:xfrm>
+          <a:prstGeom prst="rect">
+            <a:avLst/>
+          </a:prstGeom>
+        </p:spPr>
+        <p:txBody>
+          <a:bodyPr vert="horz" lIns="91440" tIns="45720" rIns="91440" bIns="45720" rtlCol="0" anchor="b"/>
+          <a:lstStyle>
+            <a:lvl1pPr algn="r">
+              <a:defRPr sz="1200"/>
+            </a:lvl1pPr>
+          </a:lstStyle>
+          <a:p>
+            <a:fld id="{CE5E9CC1-C706-0F49-92D6-E571CC5EEA8F}" type="slidenum">
+              <a:rPr lang="en-US"/>
+              <a:t>‹#›</a:t>
+            </a:fld>
+            <a:endParaRPr lang="en-US"/>
+          </a:p>
+        </p:txBody>
+      </p:sp>
     </p:spTree>
     <p:extLst>
       <p:ext uri="{BB962C8B-B14F-4D97-AF65-F5344CB8AC3E}">
-        <p14:creationId xmlns:p14="http://schemas.microsoft.com/office/powerpoint/2010/main" val="3428566753"/>
+        <p14:creationId xmlns:p14="http://schemas.microsoft.com/office/powerpoint/2010/main" val="1024086991"/>
       </p:ext>
     </p:extLst>
   </p:cSld>
   <p:clrMap bg1="lt1" tx1="dk1" bg2="lt2" tx2="dk2" accent1="accent1" accent2="accent2" accent3="accent3" accent4="accent4" accent5="accent5" accent6="accent6" hlink="hlink" folHlink="folHlink"/>
   <p:notesStyle>
     <a:lvl1pPr marL="0" algn="l" defTabSz="914400" rtl="0" eaLnBrk="1" latinLnBrk="0" hangingPunct="1">
-      <a:defRPr kumimoji="1" sz="1200" kern="1200">
+      <a:defRPr sz="1200" kern="1200">
         <a:solidFill>
           <a:schemeClr val="tx1"/>
         </a:solidFill>
@@ -275,7 +501,7 @@
       </a:defRPr>
     </a:lvl1pPr>
     <a:lvl2pPr marL="457200" algn="l" defTabSz="914400" rtl="0" eaLnBrk="1" latinLnBrk="0" hangingPunct="1">
-      <a:defRPr kumimoji="1" sz="1200" kern="1200">
+      <a:defRPr sz="1200" kern="1200">
         <a:solidFill>
           <a:schemeClr val="tx1"/>
         </a:solidFill>
@@ -285,7 +511,7 @@
       </a:defRPr>
     </a:lvl2pPr>
     <a:lvl3pPr marL="914400" algn="l" defTabSz="914400" rtl="0" eaLnBrk="1" latinLnBrk="0" hangingPunct="1">
-      <a:defRPr kumimoji="1" sz="1200" kern="1200">
+      <a:defRPr sz="1200" kern="1200">
         <a:solidFill>
           <a:schemeClr val="tx1"/>
         </a:solidFill>
@@ -295,7 +521,7 @@
       </a:defRPr>
     </a:lvl3pPr>
     <a:lvl4pPr marL="1371600" algn="l" defTabSz="914400" rtl="0" eaLnBrk="1" latinLnBrk="0" hangingPunct="1">
-      <a:defRPr kumimoji="1" sz="1200" kern="1200">
+      <a:defRPr sz="1200" kern="1200">
         <a:solidFill>
           <a:schemeClr val="tx1"/>
         </a:solidFill>
@@ -305,7 +531,7 @@
       </a:defRPr>
     </a:lvl4pPr>
     <a:lvl5pPr marL="1828800" algn="l" defTabSz="914400" rtl="0" eaLnBrk="1" latinLnBrk="0" hangingPunct="1">
-      <a:defRPr kumimoji="1" sz="1200" kern="1200">
+      <a:defRPr sz="1200" kern="1200">
         <a:solidFill>
           <a:schemeClr val="tx1"/>
         </a:solidFill>
@@ -315,7 +541,7 @@
       </a:defRPr>
     </a:lvl5pPr>
     <a:lvl6pPr marL="2286000" algn="l" defTabSz="914400" rtl="0" eaLnBrk="1" latinLnBrk="0" hangingPunct="1">
-      <a:defRPr kumimoji="1" sz="1200" kern="1200">
+      <a:defRPr sz="1200" kern="1200">
         <a:solidFill>
           <a:schemeClr val="tx1"/>
         </a:solidFill>
@@ -325,7 +551,7 @@
       </a:defRPr>
     </a:lvl6pPr>
     <a:lvl7pPr marL="2743200" algn="l" defTabSz="914400" rtl="0" eaLnBrk="1" latinLnBrk="0" hangingPunct="1">
-      <a:defRPr kumimoji="1" sz="1200" kern="1200">
+      <a:defRPr sz="1200" kern="1200">
         <a:solidFill>
           <a:schemeClr val="tx1"/>
         </a:solidFill>
@@ -335,7 +561,7 @@
       </a:defRPr>
     </a:lvl7pPr>
     <a:lvl8pPr marL="3200400" algn="l" defTabSz="914400" rtl="0" eaLnBrk="1" latinLnBrk="0" hangingPunct="1">
-      <a:defRPr kumimoji="1" sz="1200" kern="1200">
+      <a:defRPr sz="1200" kern="1200">
         <a:solidFill>
           <a:schemeClr val="tx1"/>
         </a:solidFill>
@@ -345,7 +571,7 @@
       </a:defRPr>
     </a:lvl8pPr>
     <a:lvl9pPr marL="3657600" algn="l" defTabSz="914400" rtl="0" eaLnBrk="1" latinLnBrk="0" hangingPunct="1">
-      <a:defRPr kumimoji="1" sz="1200" kern="1200">
+      <a:defRPr sz="1200" kern="1200">
         <a:solidFill>
           <a:schemeClr val="tx1"/>
         </a:solidFill>
@@ -406,6 +632,7 @@
               <a:rPr lang="en-US" dirty="0"/>
               <a:t>開始。今日は90分で、講座→お話→ワーク→エネルギーの順に進めることを伝える。書くのは由香が画面の中で行うので、仁部さんは話すこと・感じることに集中してOKと伝える。</a:t>
             </a:r>
+            <a:endParaRPr lang="en-US" dirty="0"/>
           </a:p>
         </p:txBody>
       </p:sp>
@@ -493,6 +720,7 @@
               <a:rPr lang="en-US" dirty="0"/>
               <a:t>本人のOKをもらってから、幼少期の質問へ。</a:t>
             </a:r>
+            <a:endParaRPr lang="en-US" dirty="0"/>
           </a:p>
         </p:txBody>
       </p:sp>
@@ -576,6 +804,10 @@
           <a:bodyPr/>
           <a:lstStyle/>
           <a:p>
+            <a:r>
+              <a:rPr lang="en-US" dirty="0"/>
+              <a:t/>
+            </a:r>
             <a:endParaRPr lang="en-US" dirty="0"/>
           </a:p>
         </p:txBody>
@@ -664,6 +896,7 @@
               <a:rPr lang="en-US" dirty="0"/>
               <a:t>お父さんのお酒・家にお金を入れない・毎日の大喧嘩の話が出たら、ワークの場面候補としてメモ。</a:t>
             </a:r>
+            <a:endParaRPr lang="en-US" dirty="0"/>
           </a:p>
         </p:txBody>
       </p:sp>
@@ -751,6 +984,7 @@
               <a:rPr lang="en-US" dirty="0"/>
               <a:t>ここは特にゆっくり。出てきた言葉はワークのSTEP4で使える。</a:t>
             </a:r>
+            <a:endParaRPr lang="en-US" dirty="0"/>
           </a:p>
         </p:txBody>
       </p:sp>
@@ -838,6 +1072,7 @@
               <a:rPr lang="en-US" dirty="0"/>
               <a:t>仁部さんが話してくれたエピソード。怖かった？悲しかった？怒り？寂しさ？と、気持ちに名前をつける手伝いをする。</a:t>
             </a:r>
+            <a:endParaRPr lang="en-US" dirty="0"/>
           </a:p>
         </p:txBody>
       </p:sp>
@@ -925,6 +1160,7 @@
               <a:rPr lang="en-US" dirty="0"/>
               <a:t>聴いたお話を受け取ってから、講座へ。講座の途中で、いま聴いた話（お父さんのお酒・両親の喧嘩など）につなげて話す。</a:t>
             </a:r>
+            <a:endParaRPr lang="en-US" dirty="0"/>
           </a:p>
         </p:txBody>
       </p:sp>
@@ -1012,6 +1248,7 @@
               <a:rPr lang="en-US" dirty="0"/>
               <a:t>ここから15分。1枚ずつの説明ではなく、ひとつのお話としてつなげて話す。</a:t>
             </a:r>
+            <a:endParaRPr lang="en-US" dirty="0"/>
           </a:p>
         </p:txBody>
       </p:sp>
@@ -1099,6 +1336,7 @@
               <a:rPr lang="en-US" dirty="0"/>
               <a:t>物語の入り口。第1部で聴いた仁部さんの話を受けて「それはあなたの意志が弱いからではなく、頭（脳）の仕組みだから」と伝えて、次へ。</a:t>
             </a:r>
+            <a:endParaRPr lang="en-US" dirty="0"/>
           </a:p>
         </p:txBody>
       </p:sp>
@@ -1186,6 +1424,7 @@
               <a:rPr lang="en-US" dirty="0"/>
               <a:t>感情がないと行動は起きない。理性はエネルギーを使う。理論は後付け。→だから、お金の行動を変えるには、理屈ではなく感情に触れる必要がある。次は、その感情を動かしている脳の3つのクセ。</a:t>
             </a:r>
+            <a:endParaRPr lang="en-US" dirty="0"/>
           </a:p>
         </p:txBody>
       </p:sp>
@@ -1273,6 +1512,7 @@
               <a:rPr lang="en-US" dirty="0"/>
               <a:t>言葉だけを見せて、少し間を置く。「ピンクの象を想像しないでください」と言ってから次のスライドへ。</a:t>
             </a:r>
+            <a:endParaRPr lang="en-US" dirty="0"/>
           </a:p>
         </p:txBody>
       </p:sp>
@@ -1360,6 +1600,7 @@
               <a:rPr lang="en-US" dirty="0"/>
               <a:t>全体の流れ。質問は1つずつゆっくり聴いていく。</a:t>
             </a:r>
+            <a:endParaRPr lang="en-US" dirty="0"/>
           </a:p>
         </p:txBody>
       </p:sp>
@@ -1447,6 +1688,7 @@
               <a:rPr lang="en-US" dirty="0"/>
               <a:t>ピンクの象を想像しないでください→想像してしまう。脳は否定語を受け付けない。新しいことを嫌い、変わらない言い訳を上手に作る。</a:t>
             </a:r>
+            <a:endParaRPr lang="en-US" dirty="0"/>
           </a:p>
         </p:txBody>
       </p:sp>
@@ -1534,6 +1776,7 @@
               <a:rPr lang="en-US" dirty="0"/>
               <a:t>強い出来事はトラウマ化して、タグ付きファイルとして保存される。脳は過去のマイナス体験を一般化して未来を予測する。→第1部で聴いたお父さん・お母さんの話は、ここにつながる。では、その強い思いはいつ刻まれるのか？</a:t>
             </a:r>
+            <a:endParaRPr lang="en-US" dirty="0"/>
           </a:p>
         </p:txBody>
       </p:sp>
@@ -1621,6 +1864,7 @@
               <a:rPr lang="en-US" dirty="0"/>
               <a:t>第1部で少し話したゴールデンエイジの、くわしい話。言われ方・見てきたことが、そのまま今の基準になっている。由香さんの言葉で補足する。</a:t>
             </a:r>
+            <a:endParaRPr lang="en-US" dirty="0"/>
           </a:p>
         </p:txBody>
       </p:sp>
@@ -1708,6 +1952,7 @@
               <a:rPr lang="en-US" dirty="0"/>
               <a:t>メロンちょっと食べた→この人の「ちょっと」はどのくらい？　普通＝当たり前は人それぞれ。みんなの当たり前は同じではない。</a:t>
             </a:r>
+            <a:endParaRPr lang="en-US" dirty="0"/>
           </a:p>
         </p:txBody>
       </p:sp>
@@ -1795,6 +2040,7 @@
               <a:rPr lang="en-US" dirty="0"/>
               <a:t>ネガティブ＝情報の入れ替えができない、自分の正しさに固執する。ポジティブ＝入れ替えができる、他の正しさを認められる。</a:t>
             </a:r>
+            <a:endParaRPr lang="en-US" dirty="0"/>
           </a:p>
         </p:txBody>
       </p:sp>
@@ -1882,6 +2128,7 @@
               <a:rPr lang="en-US" dirty="0"/>
               <a:t>焦り・無価値観→嫉妬・怒り→悲しみ→絶対的安心感。「だから、今から感じ切るワークをしましょう」とワークへ。スキップせずに順番に感じることで癒える。無理にポジティブに変えない（ポジ変禁止）。</a:t>
             </a:r>
+            <a:endParaRPr lang="en-US" dirty="0"/>
           </a:p>
         </p:txBody>
       </p:sp>
@@ -1969,6 +2216,7 @@
               <a:rPr lang="en-US" dirty="0"/>
               <a:t>アートシフトワーク その18（エフィカシーを上げる5次元タイムライン）。画面では「5次元」「VAK」「ポジション」の言葉は使わない。ここから40分。思い込みは20個ではなく、1階層目5つ＋2階層目まで（10個くらい）にしぼる。書き込みは由香が画面の表に打ち込む。</a:t>
             </a:r>
+            <a:endParaRPr lang="en-US" dirty="0"/>
           </a:p>
         </p:txBody>
       </p:sp>
@@ -2056,6 +2304,7 @@
               <a:rPr lang="en-US" dirty="0"/>
               <a:t>ワークに入る前に伝える。今日で全部終わらせようとしなくていい、というメッセージ。</a:t>
             </a:r>
+            <a:endParaRPr lang="en-US" dirty="0"/>
           </a:p>
         </p:txBody>
       </p:sp>
@@ -2143,6 +2392,7 @@
               <a:rPr lang="en-US" dirty="0"/>
               <a:t>見せないスライド。画面共有を止めてから読む。読んだら次のスライドで共有を再開。</a:t>
             </a:r>
+            <a:endParaRPr lang="en-US" dirty="0"/>
           </a:p>
         </p:txBody>
       </p:sp>
@@ -2230,6 +2480,7 @@
               <a:rPr lang="en-US" dirty="0"/>
               <a:t>由香が＿＿の所に本人の言葉を打ち込む。ここで出た言葉が、思い込みの入口（ガイドブックの「私は〇〇を達成したい！ただ…」の代わり）。</a:t>
             </a:r>
+            <a:endParaRPr lang="en-US" dirty="0"/>
           </a:p>
         </p:txBody>
       </p:sp>
@@ -2317,6 +2568,7 @@
               <a:rPr lang="en-US" dirty="0"/>
               <a:t>はじめに安心を渡す。今日の目標は「一つ気づいて、一つ持ち帰る」。最後の「最初の一歩」が持ち帰るものになる。</a:t>
             </a:r>
+            <a:endParaRPr lang="en-US" dirty="0"/>
           </a:p>
         </p:txBody>
       </p:sp>
@@ -2404,6 +2656,7 @@
               <a:rPr lang="en-US" dirty="0"/>
               <a:t>どちらでもOK。守ってくれていたなら、まずそれを認めてから次へ。</a:t>
             </a:r>
+            <a:endParaRPr lang="en-US" dirty="0"/>
           </a:p>
         </p:txBody>
       </p:sp>
@@ -2491,6 +2744,7 @@
               <a:rPr lang="en-US" dirty="0"/>
               <a:t>1階層目を5つ以上。出てきたものは次の表に打ち込む。</a:t>
             </a:r>
+            <a:endParaRPr lang="en-US" dirty="0"/>
           </a:p>
         </p:txBody>
       </p:sp>
@@ -2578,6 +2832,7 @@
               <a:rPr lang="en-US" dirty="0"/>
               <a:t>由香が画面共有したまま表に打ち込む。仁部さんは話すだけでOK。10個くらい出たら次へ。1階層目で一番強いものを軸に、2階層目も同じ質問で出す。点数がわからない時はOリング・筋肉反射で。例：情報発信が魅力的でない50点／批判されるのが嫌だ75点。</a:t>
             </a:r>
+            <a:endParaRPr lang="en-US" dirty="0"/>
           </a:p>
         </p:txBody>
       </p:sp>
@@ -2665,6 +2920,7 @@
               <a:rPr lang="en-US" dirty="0"/>
               <a:t>見せないスライド。画面共有を止めてから読む。読んだら次のスライドで共有を再開。</a:t>
             </a:r>
+            <a:endParaRPr lang="en-US" dirty="0"/>
           </a:p>
         </p:txBody>
       </p:sp>
@@ -2752,6 +3008,7 @@
               <a:rPr lang="en-US" dirty="0"/>
               <a:t>表の上位3つに印をつける→その中で一番邪魔しているものを1つ。判断できない時はOリング・筋肉反射で。</a:t>
             </a:r>
+            <a:endParaRPr lang="en-US" dirty="0"/>
           </a:p>
         </p:txBody>
       </p:sp>
@@ -2839,6 +3096,7 @@
               <a:rPr lang="en-US" dirty="0"/>
               <a:t>YESなら、その思い込みでSTEP4へ。</a:t>
             </a:r>
+            <a:endParaRPr lang="en-US" dirty="0"/>
           </a:p>
         </p:txBody>
       </p:sp>
@@ -2926,6 +3184,7 @@
               <a:rPr lang="en-US" dirty="0"/>
               <a:t>手順：①今の自分の場所に立ち、今の気持ちを話す ②思い込みが生まれた過去の場面へ移動し、見える・色・聞こえる・体の感じで話す ③その場所から出て、自分を外から見る→次の2つの質問 ④もう一度その場所に戻り、全部吐き出す。VAKという言葉は使わない。お父さんのお酒・両親の喧嘩の場面が出る可能性が高い。感情が強く出たら止めて呼吸に戻す。ポジ変をしない。</a:t>
             </a:r>
+            <a:endParaRPr lang="en-US" dirty="0"/>
           </a:p>
         </p:txBody>
       </p:sp>
@@ -3013,6 +3272,7 @@
               <a:rPr lang="en-US" dirty="0"/>
               <a:t>ポジションの外から、子どもの頃の自分を見ながら。</a:t>
             </a:r>
+            <a:endParaRPr lang="en-US" dirty="0"/>
           </a:p>
         </p:txBody>
       </p:sp>
@@ -3096,6 +3356,10 @@
           <a:bodyPr/>
           <a:lstStyle/>
           <a:p>
+            <a:r>
+              <a:rPr lang="en-US" dirty="0"/>
+              <a:t/>
+            </a:r>
             <a:endParaRPr lang="en-US" dirty="0"/>
           </a:p>
         </p:txBody>
@@ -3184,6 +3448,7 @@
               <a:rPr lang="en-US" dirty="0"/>
               <a:t>見える・色・聞こえる・体の感じで、理想の自分をはっきりさせる。その理想のあなたから、次のスライドで「あの時のあなた」に言葉をかける。</a:t>
             </a:r>
+            <a:endParaRPr lang="en-US" dirty="0"/>
           </a:p>
         </p:txBody>
       </p:sp>
@@ -3271,6 +3536,7 @@
               <a:rPr lang="en-US" dirty="0"/>
               <a:t>ここから20分。1問ずつ、ゆっくり聴く。</a:t>
             </a:r>
+            <a:endParaRPr lang="en-US" dirty="0"/>
           </a:p>
         </p:txBody>
       </p:sp>
@@ -3358,6 +3624,7 @@
               <a:rPr lang="en-US" dirty="0"/>
               <a:t>＿＿に本人の言葉を打ち込む。言いたかったことを全部吐き出す（100％出たか？）。怒鳴る・泣く・大声を出す・体を大きく動かす・殴るなどしてOK。相手が聞いてくれている・謝っているイメージで。出し切るまで待つ。</a:t>
             </a:r>
+            <a:endParaRPr lang="en-US" dirty="0"/>
           </a:p>
         </p:txBody>
       </p:sp>
@@ -3445,6 +3712,7 @@
               <a:rPr lang="en-US" dirty="0"/>
               <a:t>由香が本人の言葉をそのまま打ち込む。言葉は本人が決める（由香が作らない）。</a:t>
             </a:r>
+            <a:endParaRPr lang="en-US" dirty="0"/>
           </a:p>
         </p:txBody>
       </p:sp>
@@ -3532,6 +3800,7 @@
               <a:rPr lang="en-US" dirty="0"/>
               <a:t>ワークで残ったものをエネルギーで取り除く。</a:t>
             </a:r>
+            <a:endParaRPr lang="en-US" dirty="0"/>
           </a:p>
         </p:txBody>
       </p:sp>
@@ -3619,6 +3888,7 @@
               <a:rPr lang="en-US" dirty="0"/>
               <a:t>第1部の「1〜10で言うと、今どの段階ですか？」で聞いた数字と比べる。由香が＿＿に打ち込む。</a:t>
             </a:r>
+            <a:endParaRPr lang="en-US" dirty="0"/>
           </a:p>
         </p:txBody>
       </p:sp>
@@ -3706,6 +3976,7 @@
               <a:rPr lang="en-US" dirty="0"/>
               <a:t>本人の言葉で言ってもらう。</a:t>
             </a:r>
+            <a:endParaRPr lang="en-US" dirty="0"/>
           </a:p>
         </p:txBody>
       </p:sp>
@@ -3793,6 +4064,7 @@
               <a:rPr lang="en-US" dirty="0"/>
               <a:t>「一度で終わりではなく、繰り返し向き合う」につなげる。</a:t>
             </a:r>
+            <a:endParaRPr lang="en-US" dirty="0"/>
           </a:p>
         </p:txBody>
       </p:sp>
@@ -3878,8 +4150,9 @@
           <a:p>
             <a:r>
               <a:rPr lang="en-US" dirty="0"/>
-              <a:t>すべての土台は絶対的安心感。「何をやっても、やらなくても大丈夫」「嫌なことをやめても、愛される」。</a:t>
-            </a:r>
+              <a:t>由香さんの言葉。一度で外れなくても失敗ではなく、ほどいている途中だと伝える。</a:t>
+            </a:r>
+            <a:endParaRPr lang="en-US" dirty="0"/>
           </a:p>
         </p:txBody>
       </p:sp>
@@ -3965,8 +4238,9 @@
           <a:p>
             <a:r>
               <a:rPr lang="en-US" dirty="0"/>
-              <a:t>終了。1週間後にLINEで「その後いかがですか？」と連絡する。</a:t>
-            </a:r>
+              <a:t>すべての土台は絶対的安心感。「何をやっても、やらなくても大丈夫」「嫌なことをやめても、愛される」。</a:t>
+            </a:r>
+            <a:endParaRPr lang="en-US" dirty="0"/>
           </a:p>
         </p:txBody>
       </p:sp>
@@ -3988,6 +4262,94 @@
             <a:fld id="{F7021451-1387-4CA6-816F-3879F97B5CBC}" type="slidenum">
               <a:rPr lang="en-US"/>
               <a:t>47</a:t>
+            </a:fld>
+            <a:endParaRPr lang="en-US"/>
+          </a:p>
+        </p:txBody>
+      </p:sp>
+    </p:spTree>
+    <p:extLst>
+      <p:ext uri="{BB962C8B-B14F-4D97-AF65-F5344CB8AC3E}">
+        <p14:creationId xmlns:p14="http://schemas.microsoft.com/office/powerpoint/2010/main" val="1024086991"/>
+      </p:ext>
+    </p:extLst>
+  </p:cSld>
+  <p:clrMapOvr>
+    <a:masterClrMapping/>
+  </p:clrMapOvr>
+</p:notes>
+</file>
+
+<file path=ppt/notesSlides/notesSlide48.xml><?xml version="1.0" encoding="utf-8"?>
+<p:notes xmlns:a="http://schemas.openxmlformats.org/drawingml/2006/main" xmlns:r="http://schemas.openxmlformats.org/officeDocument/2006/relationships" xmlns:p="http://schemas.openxmlformats.org/presentationml/2006/main">
+  <p:cSld>
+    <p:spTree>
+      <p:nvGrpSpPr>
+        <p:cNvPr id="1" name=""/>
+        <p:cNvGrpSpPr/>
+        <p:nvPr/>
+      </p:nvGrpSpPr>
+      <p:grpSpPr>
+        <a:xfrm>
+          <a:off x="0" y="0"/>
+          <a:ext cx="0" cy="0"/>
+          <a:chOff x="0" y="0"/>
+          <a:chExt cx="0" cy="0"/>
+        </a:xfrm>
+      </p:grpSpPr>
+      <p:sp>
+        <p:nvSpPr>
+          <p:cNvPr id="2" name="Slide Image Placeholder 1"/>
+          <p:cNvSpPr>
+            <a:spLocks noGrp="1" noRot="1" noChangeAspect="1"/>
+          </p:cNvSpPr>
+          <p:nvPr>
+            <p:ph type="sldImg"/>
+          </p:nvPr>
+        </p:nvSpPr>
+        <p:spPr/>
+      </p:sp>
+      <p:sp>
+        <p:nvSpPr>
+          <p:cNvPr id="3" name="Notes Placeholder 2"/>
+          <p:cNvSpPr>
+            <a:spLocks noGrp="1"/>
+          </p:cNvSpPr>
+          <p:nvPr>
+            <p:ph type="body" idx="1"/>
+          </p:nvPr>
+        </p:nvSpPr>
+        <p:spPr/>
+        <p:txBody>
+          <a:bodyPr/>
+          <a:lstStyle/>
+          <a:p>
+            <a:r>
+              <a:rPr lang="en-US" dirty="0"/>
+              <a:t>終了。1週間後にLINEで「その後いかがですか？」と連絡する。</a:t>
+            </a:r>
+            <a:endParaRPr lang="en-US" dirty="0"/>
+          </a:p>
+        </p:txBody>
+      </p:sp>
+      <p:sp>
+        <p:nvSpPr>
+          <p:cNvPr id="4" name="Slide Number Placeholder 3"/>
+          <p:cNvSpPr>
+            <a:spLocks noGrp="1"/>
+          </p:cNvSpPr>
+          <p:nvPr>
+            <p:ph type="sldNum" sz="quarter" idx="10"/>
+          </p:nvPr>
+        </p:nvSpPr>
+        <p:spPr/>
+        <p:txBody>
+          <a:bodyPr/>
+          <a:lstStyle/>
+          <a:p>
+            <a:fld id="{F7021451-1387-4CA6-816F-3879F97B5CBC}" type="slidenum">
+              <a:rPr lang="en-US"/>
+              <a:t>48</a:t>
             </a:fld>
             <a:endParaRPr lang="en-US"/>
           </a:p>
@@ -4054,6 +4416,7 @@
               <a:rPr lang="en-US" dirty="0"/>
               <a:t>お金のブロックについて、本人の言葉で。</a:t>
             </a:r>
+            <a:endParaRPr lang="en-US" dirty="0"/>
           </a:p>
         </p:txBody>
       </p:sp>
@@ -4137,6 +4500,10 @@
           <a:bodyPr/>
           <a:lstStyle/>
           <a:p>
+            <a:r>
+              <a:rPr lang="en-US" dirty="0"/>
+              <a:t/>
+            </a:r>
             <a:endParaRPr lang="en-US" dirty="0"/>
           </a:p>
         </p:txBody>
@@ -4225,6 +4592,7 @@
               <a:rPr lang="en-US" dirty="0"/>
               <a:t>数字をメモしておく（最後の変化の確認にも使える）。</a:t>
             </a:r>
+            <a:endParaRPr lang="en-US" dirty="0"/>
           </a:p>
         </p:txBody>
       </p:sp>
@@ -4308,6 +4676,10 @@
           <a:bodyPr/>
           <a:lstStyle/>
           <a:p>
+            <a:r>
+              <a:rPr lang="en-US" dirty="0"/>
+              <a:t/>
+            </a:r>
             <a:endParaRPr lang="en-US" dirty="0"/>
           </a:p>
         </p:txBody>
@@ -4396,6 +4768,7 @@
               <a:rPr lang="en-US" dirty="0"/>
               <a:t>ここでは短く一言だけ。くわしくは第2部の「ゴールデンエイジ」のスライドで話す。</a:t>
             </a:r>
+            <a:endParaRPr lang="en-US" dirty="0"/>
           </a:p>
         </p:txBody>
       </p:sp>
@@ -4471,7 +4844,7 @@
     <p:bg>
       <p:bgPr>
         <a:blipFill dpi="0" rotWithShape="1">
-          <a:blip r:embed="rId2">
+          <a:blip r:embed="rId1">
             <a:lum/>
           </a:blip>
           <a:srcRect/>
@@ -4499,11 +4872,9 @@
       <p:sp>
         <p:nvSpPr>
           <p:cNvPr id="2" name="Text 0"/>
-          <p:cNvSpPr>
-            <a:spLocks noGrp="1"/>
-          </p:cNvSpPr>
-          <p:nvPr>
-            <p:ph type="title" idx="100" hasCustomPrompt="1"/>
+          <p:cNvSpPr/>
+          <p:nvPr>
+            <p:ph idx="100" type="title" hasCustomPrompt="1"/>
           </p:nvPr>
         </p:nvSpPr>
         <p:spPr>
@@ -4520,7 +4891,7 @@
         <p:txBody>
           <a:bodyPr wrap="square" rtlCol="0"/>
           <a:lstStyle>
-            <a:lvl1pPr marL="0" indent="0" algn="ctr">
+            <a:lvl1pPr algn="ctr" indent="0" marL="0">
               <a:buNone/>
               <a:defRPr lang="en-US" sz="3800" b="1" dirty="0">
                 <a:solidFill>
@@ -4533,7 +4904,7 @@
             </a:lvl1pPr>
           </a:lstStyle>
           <a:p>
-            <a:pPr marL="0" indent="0" algn="ctr">
+            <a:pPr algn="ctr" indent="0" marL="0">
               <a:buNone/>
             </a:pPr>
             <a:endParaRPr lang="en-US" sz="3800" dirty="0"/>
@@ -4543,11 +4914,9 @@
       <p:sp>
         <p:nvSpPr>
           <p:cNvPr id="3" name="Text 0"/>
-          <p:cNvSpPr>
-            <a:spLocks noGrp="1"/>
-          </p:cNvSpPr>
-          <p:nvPr>
-            <p:ph type="body" idx="101" hasCustomPrompt="1"/>
+          <p:cNvSpPr/>
+          <p:nvPr>
+            <p:ph idx="101" type="body" hasCustomPrompt="1"/>
           </p:nvPr>
         </p:nvSpPr>
         <p:spPr>
@@ -4564,7 +4933,7 @@
         <p:txBody>
           <a:bodyPr wrap="square" rtlCol="0"/>
           <a:lstStyle>
-            <a:lvl1pPr marL="0" indent="0" algn="ctr">
+            <a:lvl1pPr algn="ctr" indent="0" marL="0">
               <a:buNone/>
               <a:defRPr lang="en-US" sz="1600" b="1" dirty="0">
                 <a:solidFill>
@@ -4574,7 +4943,7 @@
             </a:lvl1pPr>
           </a:lstStyle>
           <a:p>
-            <a:pPr marL="0" indent="0" algn="ctr">
+            <a:pPr algn="ctr" indent="0" marL="0">
               <a:buNone/>
             </a:pPr>
             <a:endParaRPr lang="en-US" sz="1600" dirty="0"/>
@@ -4595,7 +4964,7 @@
     <p:bg>
       <p:bgPr>
         <a:blipFill dpi="0" rotWithShape="1">
-          <a:blip r:embed="rId2">
+          <a:blip r:embed="rId1">
             <a:lum/>
           </a:blip>
           <a:srcRect/>
@@ -4623,11 +4992,9 @@
       <p:sp>
         <p:nvSpPr>
           <p:cNvPr id="2" name="Text 0"/>
-          <p:cNvSpPr>
-            <a:spLocks noGrp="1"/>
-          </p:cNvSpPr>
-          <p:nvPr>
-            <p:ph type="title" idx="100" hasCustomPrompt="1"/>
+          <p:cNvSpPr/>
+          <p:nvPr>
+            <p:ph idx="100" type="title" hasCustomPrompt="1"/>
           </p:nvPr>
         </p:nvSpPr>
         <p:spPr>
@@ -4644,7 +5011,7 @@
         <p:txBody>
           <a:bodyPr wrap="square" rtlCol="0"/>
           <a:lstStyle>
-            <a:lvl1pPr marL="0" indent="0" algn="ctr">
+            <a:lvl1pPr algn="ctr" indent="0" marL="0">
               <a:buNone/>
               <a:defRPr lang="en-US" sz="3600" b="1" dirty="0">
                 <a:solidFill>
@@ -4657,7 +5024,7 @@
             </a:lvl1pPr>
           </a:lstStyle>
           <a:p>
-            <a:pPr marL="0" indent="0" algn="ctr">
+            <a:pPr algn="ctr" indent="0" marL="0">
               <a:buNone/>
             </a:pPr>
             <a:endParaRPr lang="en-US" sz="3600" dirty="0"/>
@@ -4667,11 +5034,9 @@
       <p:sp>
         <p:nvSpPr>
           <p:cNvPr id="3" name="Text 0"/>
-          <p:cNvSpPr>
-            <a:spLocks noGrp="1"/>
-          </p:cNvSpPr>
-          <p:nvPr>
-            <p:ph type="body" idx="101" hasCustomPrompt="1"/>
+          <p:cNvSpPr/>
+          <p:nvPr>
+            <p:ph idx="101" type="body" hasCustomPrompt="1"/>
           </p:nvPr>
         </p:nvSpPr>
         <p:spPr>
@@ -4688,7 +5053,7 @@
         <p:txBody>
           <a:bodyPr wrap="square" rtlCol="0"/>
           <a:lstStyle>
-            <a:lvl1pPr marL="0" indent="0" algn="ctr">
+            <a:lvl1pPr algn="ctr" indent="0" marL="0">
               <a:buNone/>
               <a:defRPr lang="en-US" sz="1600" dirty="0">
                 <a:solidFill>
@@ -4698,7 +5063,7 @@
             </a:lvl1pPr>
           </a:lstStyle>
           <a:p>
-            <a:pPr marL="0" indent="0" algn="ctr">
+            <a:pPr algn="ctr" indent="0" marL="0">
               <a:buNone/>
             </a:pPr>
             <a:endParaRPr lang="en-US" sz="1600" dirty="0"/>
@@ -4721,7 +5086,6 @@
         <a:solidFill>
           <a:srgbClr val="FFFFFF"/>
         </a:solidFill>
-        <a:effectLst/>
       </p:bgPr>
     </p:bg>
     <p:spTree>
@@ -4741,11 +5105,9 @@
       <p:sp>
         <p:nvSpPr>
           <p:cNvPr id="2" name="Text 0"/>
-          <p:cNvSpPr>
-            <a:spLocks noGrp="1"/>
-          </p:cNvSpPr>
-          <p:nvPr>
-            <p:ph type="title" idx="100" hasCustomPrompt="1"/>
+          <p:cNvSpPr/>
+          <p:nvPr>
+            <p:ph idx="100" type="title" hasCustomPrompt="1"/>
           </p:nvPr>
         </p:nvSpPr>
         <p:spPr>
@@ -4762,7 +5124,7 @@
         <p:txBody>
           <a:bodyPr wrap="square" rtlCol="0"/>
           <a:lstStyle>
-            <a:lvl1pPr marL="0" indent="0" algn="l">
+            <a:lvl1pPr algn="l" indent="0" marL="0">
               <a:buNone/>
               <a:defRPr lang="en-US" sz="2400" b="1" dirty="0">
                 <a:solidFill>
@@ -4775,7 +5137,7 @@
             </a:lvl1pPr>
           </a:lstStyle>
           <a:p>
-            <a:pPr marL="0" indent="0" algn="l">
+            <a:pPr algn="l" indent="0" marL="0">
               <a:buNone/>
             </a:pPr>
             <a:endParaRPr lang="en-US" sz="2400" dirty="0"/>
@@ -4803,7 +5165,7 @@
           <a:bodyPr wrap="square" lIns="0" tIns="0" rIns="0" bIns="0" rtlCol="0" anchor="ctr"/>
           <a:lstStyle/>
           <a:p>
-            <a:pPr marL="0" indent="0">
+            <a:pPr indent="0" marL="0">
               <a:buNone/>
             </a:pPr>
             <a:r>
@@ -4838,7 +5200,7 @@
           </a:prstGeom>
           <a:extLst>
             <a:ext uri="{C572A759-6A51-4108-AA02-DFA0A04FC94B}">
-              <ma14:wrappingTextBoxFlag xmlns:ma14="http://schemas.microsoft.com/office/mac/drawingml/2011/main" xmlns="" val="0"/>
+              <ma14:wrappingTextBoxFlag xmlns:ma14="http://schemas.microsoft.com/office/mac/drawingml/2011/main" val="0"/>
             </a:ext>
           </a:extLst>
         </p:spPr>
@@ -4856,8 +5218,8 @@
           <a:p>
             <a:pPr algn="r"/>
             <a:fld id="{F7021451-1387-4CA6-816F-3879F97B5CBC}" type="slidenum">
-              <a:rPr lang="en-US" b="0"/>
-              <a:t>‹#›</a:t>
+              <a:rPr b="0" lang="en-US"/>
+              <a:t>1004</a:t>
             </a:fld>
             <a:endParaRPr lang="en-US"/>
           </a:p>
@@ -4877,7 +5239,7 @@
     <p:bg>
       <p:bgPr>
         <a:blipFill dpi="0" rotWithShape="1">
-          <a:blip r:embed="rId2">
+          <a:blip r:embed="rId1">
             <a:lum/>
           </a:blip>
           <a:srcRect/>
@@ -4905,11 +5267,9 @@
       <p:sp>
         <p:nvSpPr>
           <p:cNvPr id="2" name="Text 0"/>
-          <p:cNvSpPr>
-            <a:spLocks noGrp="1"/>
-          </p:cNvSpPr>
-          <p:nvPr>
-            <p:ph type="title" idx="100" hasCustomPrompt="1"/>
+          <p:cNvSpPr/>
+          <p:nvPr>
+            <p:ph idx="100" type="title" hasCustomPrompt="1"/>
           </p:nvPr>
         </p:nvSpPr>
         <p:spPr>
@@ -4926,7 +5286,7 @@
         <p:txBody>
           <a:bodyPr wrap="square" rtlCol="0"/>
           <a:lstStyle>
-            <a:lvl1pPr marL="0" indent="0" algn="ctr">
+            <a:lvl1pPr algn="ctr" indent="0" marL="0">
               <a:buNone/>
               <a:defRPr lang="en-US" sz="3200" b="1" dirty="0">
                 <a:solidFill>
@@ -4939,7 +5299,7 @@
             </a:lvl1pPr>
           </a:lstStyle>
           <a:p>
-            <a:pPr marL="0" indent="0" algn="ctr">
+            <a:pPr algn="ctr" indent="0" marL="0">
               <a:buNone/>
             </a:pPr>
             <a:endParaRPr lang="en-US" sz="3200" dirty="0"/>
@@ -4949,11 +5309,9 @@
       <p:sp>
         <p:nvSpPr>
           <p:cNvPr id="3" name="Text 0"/>
-          <p:cNvSpPr>
-            <a:spLocks noGrp="1"/>
-          </p:cNvSpPr>
-          <p:nvPr>
-            <p:ph type="body" idx="101" hasCustomPrompt="1"/>
+          <p:cNvSpPr/>
+          <p:nvPr>
+            <p:ph idx="101" type="body" hasCustomPrompt="1"/>
           </p:nvPr>
         </p:nvSpPr>
         <p:spPr>
@@ -4970,7 +5328,7 @@
         <p:txBody>
           <a:bodyPr wrap="square" rtlCol="0"/>
           <a:lstStyle>
-            <a:lvl1pPr marL="0" indent="0" algn="ctr">
+            <a:lvl1pPr algn="ctr" indent="0" marL="0">
               <a:buNone/>
               <a:defRPr lang="en-US" sz="1500" dirty="0">
                 <a:solidFill>
@@ -4980,7 +5338,7 @@
             </a:lvl1pPr>
           </a:lstStyle>
           <a:p>
-            <a:pPr marL="0" indent="0" algn="ctr">
+            <a:pPr algn="ctr" indent="0" marL="0">
               <a:buNone/>
             </a:pPr>
             <a:endParaRPr lang="en-US" sz="1500" dirty="0"/>
@@ -5008,7 +5366,7 @@
           <a:bodyPr wrap="square" lIns="0" tIns="0" rIns="0" bIns="0" rtlCol="0" anchor="ctr"/>
           <a:lstStyle/>
           <a:p>
-            <a:pPr marL="0" indent="0">
+            <a:pPr indent="0" marL="0">
               <a:buNone/>
             </a:pPr>
             <a:r>
@@ -5043,7 +5401,7 @@
           </a:prstGeom>
           <a:extLst>
             <a:ext uri="{C572A759-6A51-4108-AA02-DFA0A04FC94B}">
-              <ma14:wrappingTextBoxFlag xmlns:ma14="http://schemas.microsoft.com/office/mac/drawingml/2011/main" xmlns="" val="0"/>
+              <ma14:wrappingTextBoxFlag xmlns:ma14="http://schemas.microsoft.com/office/mac/drawingml/2011/main" val="0"/>
             </a:ext>
           </a:extLst>
         </p:spPr>
@@ -5061,8 +5419,8 @@
           <a:p>
             <a:pPr algn="r"/>
             <a:fld id="{F7021451-1387-4CA6-816F-3879F97B5CBC}" type="slidenum">
-              <a:rPr lang="en-US" b="0"/>
-              <a:t>‹#›</a:t>
+              <a:rPr b="0" lang="en-US"/>
+              <a:t>1005</a:t>
             </a:fld>
             <a:endParaRPr lang="en-US"/>
           </a:p>
@@ -5084,7 +5442,6 @@
         <a:solidFill>
           <a:srgbClr val="FFFFFF"/>
         </a:solidFill>
-        <a:effectLst/>
       </p:bgPr>
     </p:bg>
     <p:spTree>
@@ -5112,11 +5469,6 @@
 <file path=ppt/slideMasters/slideMaster1.xml><?xml version="1.0" encoding="utf-8"?>
 <p:sldMaster xmlns:a="http://schemas.openxmlformats.org/drawingml/2006/main" xmlns:r="http://schemas.openxmlformats.org/officeDocument/2006/relationships" xmlns:p="http://schemas.openxmlformats.org/presentationml/2006/main">
   <p:cSld>
-    <p:bg>
-      <p:bgRef idx="1001">
-        <a:schemeClr val="bg1"/>
-      </p:bgRef>
-    </p:bg>
     <p:spTree>
       <p:nvGrpSpPr>
         <p:cNvPr id="1" name=""/>
@@ -5151,7 +5503,7 @@
           </a:prstGeom>
           <a:extLst>
             <a:ext uri="{C572A759-6A51-4108-AA02-DFA0A04FC94B}">
-              <ma14:wrappingTextBoxFlag xmlns:ma14="http://schemas.microsoft.com/office/mac/drawingml/2011/main" xmlns="" val="0"/>
+              <ma14:wrappingTextBoxFlag xmlns:ma14="http://schemas.microsoft.com/office/mac/drawingml/2011/main" val="0"/>
             </a:ext>
           </a:extLst>
         </p:spPr>
@@ -5169,8 +5521,8 @@
           <a:p>
             <a:pPr algn="r"/>
             <a:fld id="{F7021451-1387-4CA6-816F-3879F97B5CBC}" type="slidenum">
-              <a:rPr lang="en-US" b="0"/>
-              <a:t>‹#›</a:t>
+              <a:rPr b="0" lang="en-US"/>
+              <a:t>null</a:t>
             </a:fld>
             <a:endParaRPr lang="en-US"/>
           </a:p>
@@ -5460,14 +5812,14 @@
       </p:grpSpPr>
       <p:pic>
         <p:nvPicPr>
-          <p:cNvPr id="2" name="Image 0" descr="海音ロゴ"/>
+          <p:cNvPr id="2" name="Image 0" descr="海音ロゴ">    </p:cNvPr>
           <p:cNvPicPr>
             <a:picLocks noChangeAspect="1"/>
           </p:cNvPicPr>
           <p:nvPr/>
         </p:nvPicPr>
         <p:blipFill>
-          <a:blip r:embed="rId3"/>
+          <a:blip r:embed="rId1"/>
           <a:stretch>
             <a:fillRect/>
           </a:stretch>
@@ -5485,11 +5837,9 @@
       <p:sp>
         <p:nvSpPr>
           <p:cNvPr id="3" name="Text 0"/>
-          <p:cNvSpPr>
-            <a:spLocks noGrp="1"/>
-          </p:cNvSpPr>
-          <p:nvPr>
-            <p:ph type="title" idx="100" hasCustomPrompt="1"/>
+          <p:cNvSpPr/>
+          <p:nvPr>
+            <p:ph idx="100" type="title" hasCustomPrompt="1"/>
           </p:nvPr>
         </p:nvSpPr>
         <p:spPr>
@@ -5507,7 +5857,7 @@
           <a:bodyPr wrap="square" rtlCol="0" anchor="ctr"/>
           <a:lstStyle/>
           <a:p>
-            <a:pPr marL="0" indent="0" algn="ctr">
+            <a:pPr algn="ctr" indent="0" marL="0">
               <a:buNone/>
             </a:pPr>
             <a:r>
@@ -5524,7 +5874,7 @@
             <a:endParaRPr lang="en-US" sz="3800" dirty="0"/>
           </a:p>
           <a:p>
-            <a:pPr marL="0" indent="0" algn="ctr">
+            <a:pPr algn="ctr" indent="0" marL="0">
               <a:buNone/>
             </a:pPr>
             <a:r>
@@ -5545,11 +5895,9 @@
       <p:sp>
         <p:nvSpPr>
           <p:cNvPr id="4" name="Text 0"/>
-          <p:cNvSpPr>
-            <a:spLocks noGrp="1"/>
-          </p:cNvSpPr>
-          <p:nvPr>
-            <p:ph type="body" idx="101" hasCustomPrompt="1"/>
+          <p:cNvSpPr/>
+          <p:nvPr>
+            <p:ph idx="101" type="body" hasCustomPrompt="1"/>
           </p:nvPr>
         </p:nvSpPr>
         <p:spPr>
@@ -5567,7 +5915,7 @@
           <a:bodyPr wrap="square" rtlCol="0" anchor="t"/>
           <a:lstStyle/>
           <a:p>
-            <a:pPr marL="0" indent="0" algn="ctr">
+            <a:pPr algn="ctr" indent="0" marL="0">
               <a:buNone/>
             </a:pPr>
             <a:r>
@@ -5581,7 +5929,7 @@
             <a:endParaRPr lang="en-US" sz="1600" dirty="0"/>
           </a:p>
           <a:p>
-            <a:pPr marL="0" indent="0" algn="ctr">
+            <a:pPr algn="ctr" indent="0" marL="0">
               <a:buNone/>
             </a:pPr>
             <a:r>
@@ -5644,10 +5992,7 @@
         </p:spPr>
         <p:txBody>
           <a:bodyPr/>
-          <a:lstStyle/>
-          <a:p>
-            <a:endParaRPr/>
-          </a:p>
+          <a:p/>
         </p:txBody>
       </p:sp>
       <p:sp>
@@ -5671,7 +6016,7 @@
           <a:bodyPr wrap="square" lIns="0" tIns="0" rIns="0" bIns="0" rtlCol="0" anchor="t"/>
           <a:lstStyle/>
           <a:p>
-            <a:pPr marL="0" indent="0" algn="ctr">
+            <a:pPr algn="ctr" indent="0" marL="0">
               <a:buNone/>
             </a:pPr>
             <a:r>
@@ -5689,11 +6034,9 @@
       <p:sp>
         <p:nvSpPr>
           <p:cNvPr id="4" name="Text 0"/>
-          <p:cNvSpPr>
-            <a:spLocks noGrp="1"/>
-          </p:cNvSpPr>
-          <p:nvPr>
-            <p:ph type="title" idx="100" hasCustomPrompt="1"/>
+          <p:cNvSpPr/>
+          <p:nvPr>
+            <p:ph idx="100" type="title" hasCustomPrompt="1"/>
           </p:nvPr>
         </p:nvSpPr>
         <p:spPr>
@@ -5711,7 +6054,7 @@
           <a:bodyPr wrap="square" rtlCol="0" anchor="ctr"/>
           <a:lstStyle/>
           <a:p>
-            <a:pPr marL="0" indent="0" algn="ctr">
+            <a:pPr algn="ctr" indent="0" marL="0">
               <a:buNone/>
             </a:pPr>
             <a:r>
@@ -5728,7 +6071,7 @@
             <a:endParaRPr lang="en-US" sz="3200" dirty="0"/>
           </a:p>
           <a:p>
-            <a:pPr marL="0" indent="0" algn="ctr">
+            <a:pPr algn="ctr" indent="0" marL="0">
               <a:buNone/>
             </a:pPr>
             <a:r>
@@ -5745,7 +6088,7 @@
             <a:endParaRPr lang="en-US" sz="3200" dirty="0"/>
           </a:p>
           <a:p>
-            <a:pPr marL="0" indent="0" algn="ctr">
+            <a:pPr algn="ctr" indent="0" marL="0">
               <a:buNone/>
             </a:pPr>
             <a:r>
@@ -5766,11 +6109,9 @@
       <p:sp>
         <p:nvSpPr>
           <p:cNvPr id="5" name="Text 0"/>
-          <p:cNvSpPr>
-            <a:spLocks noGrp="1"/>
-          </p:cNvSpPr>
-          <p:nvPr>
-            <p:ph type="body" idx="101" hasCustomPrompt="1"/>
+          <p:cNvSpPr/>
+          <p:nvPr>
+            <p:ph idx="101" type="body" hasCustomPrompt="1"/>
           </p:nvPr>
         </p:nvSpPr>
         <p:spPr>
@@ -5788,7 +6129,7 @@
           <a:bodyPr wrap="square" rtlCol="0" anchor="t"/>
           <a:lstStyle/>
           <a:p>
-            <a:pPr marL="0" indent="0" algn="ctr">
+            <a:pPr algn="ctr" indent="0" marL="0">
               <a:buNone/>
             </a:pPr>
             <a:r>
@@ -5802,7 +6143,7 @@
             <a:endParaRPr lang="en-US" sz="1500" dirty="0"/>
           </a:p>
           <a:p>
-            <a:pPr marL="0" indent="0" algn="ctr">
+            <a:pPr algn="ctr" indent="0" marL="0">
               <a:buNone/>
             </a:pPr>
             <a:r>
@@ -5837,7 +6178,7 @@
           </a:prstGeom>
           <a:extLst>
             <a:ext uri="{C572A759-6A51-4108-AA02-DFA0A04FC94B}">
-              <ma14:wrappingTextBoxFlag xmlns:ma14="http://schemas.microsoft.com/office/mac/drawingml/2011/main" xmlns="" val="0"/>
+              <ma14:wrappingTextBoxFlag xmlns:ma14="http://schemas.microsoft.com/office/mac/drawingml/2011/main" val="0"/>
             </a:ext>
           </a:extLst>
         </p:spPr>
@@ -5855,7 +6196,7 @@
           <a:p>
             <a:pPr algn="r"/>
             <a:fld id="{F7021451-1387-4CA6-816F-3879F97B5CBC}" type="slidenum">
-              <a:rPr lang="en-US" b="0"/>
+              <a:rPr b="0" lang="en-US"/>
               <a:t>10</a:t>
             </a:fld>
             <a:endParaRPr lang="en-US"/>
@@ -5910,10 +6251,7 @@
         </p:spPr>
         <p:txBody>
           <a:bodyPr/>
-          <a:lstStyle/>
-          <a:p>
-            <a:endParaRPr/>
-          </a:p>
+          <a:p/>
         </p:txBody>
       </p:sp>
       <p:sp>
@@ -5937,7 +6275,7 @@
           <a:bodyPr wrap="square" lIns="0" tIns="0" rIns="0" bIns="0" rtlCol="0" anchor="t"/>
           <a:lstStyle/>
           <a:p>
-            <a:pPr marL="0" indent="0" algn="ctr">
+            <a:pPr algn="ctr" indent="0" marL="0">
               <a:buNone/>
             </a:pPr>
             <a:r>
@@ -5955,11 +6293,9 @@
       <p:sp>
         <p:nvSpPr>
           <p:cNvPr id="4" name="Text 0"/>
-          <p:cNvSpPr>
-            <a:spLocks noGrp="1"/>
-          </p:cNvSpPr>
-          <p:nvPr>
-            <p:ph type="title" idx="100" hasCustomPrompt="1"/>
+          <p:cNvSpPr/>
+          <p:nvPr>
+            <p:ph idx="100" type="title" hasCustomPrompt="1"/>
           </p:nvPr>
         </p:nvSpPr>
         <p:spPr>
@@ -5977,7 +6313,7 @@
           <a:bodyPr wrap="square" rtlCol="0" anchor="ctr"/>
           <a:lstStyle/>
           <a:p>
-            <a:pPr marL="0" indent="0" algn="ctr">
+            <a:pPr algn="ctr" indent="0" marL="0">
               <a:buNone/>
             </a:pPr>
             <a:r>
@@ -5994,7 +6330,7 @@
             <a:endParaRPr lang="en-US" sz="3200" dirty="0"/>
           </a:p>
           <a:p>
-            <a:pPr marL="0" indent="0" algn="ctr">
+            <a:pPr algn="ctr" indent="0" marL="0">
               <a:buNone/>
             </a:pPr>
             <a:r>
@@ -6032,7 +6368,7 @@
           </a:prstGeom>
           <a:extLst>
             <a:ext uri="{C572A759-6A51-4108-AA02-DFA0A04FC94B}">
-              <ma14:wrappingTextBoxFlag xmlns:ma14="http://schemas.microsoft.com/office/mac/drawingml/2011/main" xmlns="" val="0"/>
+              <ma14:wrappingTextBoxFlag xmlns:ma14="http://schemas.microsoft.com/office/mac/drawingml/2011/main" val="0"/>
             </a:ext>
           </a:extLst>
         </p:spPr>
@@ -6050,7 +6386,7 @@
           <a:p>
             <a:pPr algn="r"/>
             <a:fld id="{F7021451-1387-4CA6-816F-3879F97B5CBC}" type="slidenum">
-              <a:rPr lang="en-US" b="0"/>
+              <a:rPr b="0" lang="en-US"/>
               <a:t>11</a:t>
             </a:fld>
             <a:endParaRPr lang="en-US"/>
@@ -6105,10 +6441,7 @@
         </p:spPr>
         <p:txBody>
           <a:bodyPr/>
-          <a:lstStyle/>
-          <a:p>
-            <a:endParaRPr/>
-          </a:p>
+          <a:p/>
         </p:txBody>
       </p:sp>
       <p:sp>
@@ -6132,7 +6465,7 @@
           <a:bodyPr wrap="square" lIns="0" tIns="0" rIns="0" bIns="0" rtlCol="0" anchor="t"/>
           <a:lstStyle/>
           <a:p>
-            <a:pPr marL="0" indent="0" algn="ctr">
+            <a:pPr algn="ctr" indent="0" marL="0">
               <a:buNone/>
             </a:pPr>
             <a:r>
@@ -6150,11 +6483,9 @@
       <p:sp>
         <p:nvSpPr>
           <p:cNvPr id="4" name="Text 0"/>
-          <p:cNvSpPr>
-            <a:spLocks noGrp="1"/>
-          </p:cNvSpPr>
-          <p:nvPr>
-            <p:ph type="title" idx="100" hasCustomPrompt="1"/>
+          <p:cNvSpPr/>
+          <p:nvPr>
+            <p:ph idx="100" type="title" hasCustomPrompt="1"/>
           </p:nvPr>
         </p:nvSpPr>
         <p:spPr>
@@ -6172,7 +6503,7 @@
           <a:bodyPr wrap="square" rtlCol="0" anchor="ctr"/>
           <a:lstStyle/>
           <a:p>
-            <a:pPr marL="0" indent="0" algn="ctr">
+            <a:pPr algn="ctr" indent="0" marL="0">
               <a:buNone/>
             </a:pPr>
             <a:r>
@@ -6189,7 +6520,7 @@
             <a:endParaRPr lang="en-US" sz="3200" dirty="0"/>
           </a:p>
           <a:p>
-            <a:pPr marL="0" indent="0" algn="ctr">
+            <a:pPr algn="ctr" indent="0" marL="0">
               <a:buNone/>
             </a:pPr>
             <a:r>
@@ -6227,7 +6558,7 @@
           </a:prstGeom>
           <a:extLst>
             <a:ext uri="{C572A759-6A51-4108-AA02-DFA0A04FC94B}">
-              <ma14:wrappingTextBoxFlag xmlns:ma14="http://schemas.microsoft.com/office/mac/drawingml/2011/main" xmlns="" val="0"/>
+              <ma14:wrappingTextBoxFlag xmlns:ma14="http://schemas.microsoft.com/office/mac/drawingml/2011/main" val="0"/>
             </a:ext>
           </a:extLst>
         </p:spPr>
@@ -6245,7 +6576,7 @@
           <a:p>
             <a:pPr algn="r"/>
             <a:fld id="{F7021451-1387-4CA6-816F-3879F97B5CBC}" type="slidenum">
-              <a:rPr lang="en-US" b="0"/>
+              <a:rPr b="0" lang="en-US"/>
               <a:t>12</a:t>
             </a:fld>
             <a:endParaRPr lang="en-US"/>
@@ -6300,10 +6631,7 @@
         </p:spPr>
         <p:txBody>
           <a:bodyPr/>
-          <a:lstStyle/>
-          <a:p>
-            <a:endParaRPr/>
-          </a:p>
+          <a:p/>
         </p:txBody>
       </p:sp>
       <p:sp>
@@ -6327,7 +6655,7 @@
           <a:bodyPr wrap="square" lIns="0" tIns="0" rIns="0" bIns="0" rtlCol="0" anchor="t"/>
           <a:lstStyle/>
           <a:p>
-            <a:pPr marL="0" indent="0" algn="ctr">
+            <a:pPr algn="ctr" indent="0" marL="0">
               <a:buNone/>
             </a:pPr>
             <a:r>
@@ -6345,11 +6673,9 @@
       <p:sp>
         <p:nvSpPr>
           <p:cNvPr id="4" name="Text 0"/>
-          <p:cNvSpPr>
-            <a:spLocks noGrp="1"/>
-          </p:cNvSpPr>
-          <p:nvPr>
-            <p:ph type="title" idx="100" hasCustomPrompt="1"/>
+          <p:cNvSpPr/>
+          <p:nvPr>
+            <p:ph idx="100" type="title" hasCustomPrompt="1"/>
           </p:nvPr>
         </p:nvSpPr>
         <p:spPr>
@@ -6367,7 +6693,7 @@
           <a:bodyPr wrap="square" rtlCol="0" anchor="ctr"/>
           <a:lstStyle/>
           <a:p>
-            <a:pPr marL="0" indent="0" algn="ctr">
+            <a:pPr algn="ctr" indent="0" marL="0">
               <a:buNone/>
             </a:pPr>
             <a:r>
@@ -6384,7 +6710,7 @@
             <a:endParaRPr lang="en-US" sz="3200" dirty="0"/>
           </a:p>
           <a:p>
-            <a:pPr marL="0" indent="0" algn="ctr">
+            <a:pPr algn="ctr" indent="0" marL="0">
               <a:buNone/>
             </a:pPr>
             <a:r>
@@ -6422,7 +6748,7 @@
           </a:prstGeom>
           <a:extLst>
             <a:ext uri="{C572A759-6A51-4108-AA02-DFA0A04FC94B}">
-              <ma14:wrappingTextBoxFlag xmlns:ma14="http://schemas.microsoft.com/office/mac/drawingml/2011/main" xmlns="" val="0"/>
+              <ma14:wrappingTextBoxFlag xmlns:ma14="http://schemas.microsoft.com/office/mac/drawingml/2011/main" val="0"/>
             </a:ext>
           </a:extLst>
         </p:spPr>
@@ -6440,7 +6766,7 @@
           <a:p>
             <a:pPr algn="r"/>
             <a:fld id="{F7021451-1387-4CA6-816F-3879F97B5CBC}" type="slidenum">
-              <a:rPr lang="en-US" b="0"/>
+              <a:rPr b="0" lang="en-US"/>
               <a:t>13</a:t>
             </a:fld>
             <a:endParaRPr lang="en-US"/>
@@ -6495,10 +6821,7 @@
         </p:spPr>
         <p:txBody>
           <a:bodyPr/>
-          <a:lstStyle/>
-          <a:p>
-            <a:endParaRPr/>
-          </a:p>
+          <a:p/>
         </p:txBody>
       </p:sp>
       <p:sp>
@@ -6522,7 +6845,7 @@
           <a:bodyPr wrap="square" lIns="0" tIns="0" rIns="0" bIns="0" rtlCol="0" anchor="t"/>
           <a:lstStyle/>
           <a:p>
-            <a:pPr marL="0" indent="0" algn="ctr">
+            <a:pPr algn="ctr" indent="0" marL="0">
               <a:buNone/>
             </a:pPr>
             <a:r>
@@ -6540,11 +6863,9 @@
       <p:sp>
         <p:nvSpPr>
           <p:cNvPr id="4" name="Text 0"/>
-          <p:cNvSpPr>
-            <a:spLocks noGrp="1"/>
-          </p:cNvSpPr>
-          <p:nvPr>
-            <p:ph type="title" idx="100" hasCustomPrompt="1"/>
+          <p:cNvSpPr/>
+          <p:nvPr>
+            <p:ph idx="100" type="title" hasCustomPrompt="1"/>
           </p:nvPr>
         </p:nvSpPr>
         <p:spPr>
@@ -6562,7 +6883,7 @@
           <a:bodyPr wrap="square" rtlCol="0" anchor="ctr"/>
           <a:lstStyle/>
           <a:p>
-            <a:pPr marL="0" indent="0" algn="ctr">
+            <a:pPr algn="ctr" indent="0" marL="0">
               <a:buNone/>
             </a:pPr>
             <a:r>
@@ -6579,7 +6900,7 @@
             <a:endParaRPr lang="en-US" sz="3200" dirty="0"/>
           </a:p>
           <a:p>
-            <a:pPr marL="0" indent="0" algn="ctr">
+            <a:pPr algn="ctr" indent="0" marL="0">
               <a:buNone/>
             </a:pPr>
             <a:r>
@@ -6596,7 +6917,7 @@
             <a:endParaRPr lang="en-US" sz="3200" dirty="0"/>
           </a:p>
           <a:p>
-            <a:pPr marL="0" indent="0" algn="ctr">
+            <a:pPr algn="ctr" indent="0" marL="0">
               <a:buNone/>
             </a:pPr>
             <a:r>
@@ -6617,11 +6938,9 @@
       <p:sp>
         <p:nvSpPr>
           <p:cNvPr id="5" name="Text 0"/>
-          <p:cNvSpPr>
-            <a:spLocks noGrp="1"/>
-          </p:cNvSpPr>
-          <p:nvPr>
-            <p:ph type="body" idx="101" hasCustomPrompt="1"/>
+          <p:cNvSpPr/>
+          <p:nvPr>
+            <p:ph idx="101" type="body" hasCustomPrompt="1"/>
           </p:nvPr>
         </p:nvSpPr>
         <p:spPr>
@@ -6639,7 +6958,7 @@
           <a:bodyPr wrap="square" rtlCol="0" anchor="t"/>
           <a:lstStyle/>
           <a:p>
-            <a:pPr marL="0" indent="0" algn="ctr">
+            <a:pPr algn="ctr" indent="0" marL="0">
               <a:buNone/>
             </a:pPr>
             <a:r>
@@ -6674,7 +6993,7 @@
           </a:prstGeom>
           <a:extLst>
             <a:ext uri="{C572A759-6A51-4108-AA02-DFA0A04FC94B}">
-              <ma14:wrappingTextBoxFlag xmlns:ma14="http://schemas.microsoft.com/office/mac/drawingml/2011/main" xmlns="" val="0"/>
+              <ma14:wrappingTextBoxFlag xmlns:ma14="http://schemas.microsoft.com/office/mac/drawingml/2011/main" val="0"/>
             </a:ext>
           </a:extLst>
         </p:spPr>
@@ -6692,7 +7011,7 @@
           <a:p>
             <a:pPr algn="r"/>
             <a:fld id="{F7021451-1387-4CA6-816F-3879F97B5CBC}" type="slidenum">
-              <a:rPr lang="en-US" b="0"/>
+              <a:rPr b="0" lang="en-US"/>
               <a:t>14</a:t>
             </a:fld>
             <a:endParaRPr lang="en-US"/>
@@ -6747,10 +7066,7 @@
         </p:spPr>
         <p:txBody>
           <a:bodyPr/>
-          <a:lstStyle/>
-          <a:p>
-            <a:endParaRPr/>
-          </a:p>
+          <a:p/>
         </p:txBody>
       </p:sp>
       <p:sp>
@@ -6774,7 +7090,7 @@
           <a:bodyPr wrap="square" lIns="0" tIns="0" rIns="0" bIns="0" rtlCol="0" anchor="t"/>
           <a:lstStyle/>
           <a:p>
-            <a:pPr marL="0" indent="0" algn="ctr">
+            <a:pPr algn="ctr" indent="0" marL="0">
               <a:buNone/>
             </a:pPr>
             <a:r>
@@ -6792,11 +7108,9 @@
       <p:sp>
         <p:nvSpPr>
           <p:cNvPr id="4" name="Text 0"/>
-          <p:cNvSpPr>
-            <a:spLocks noGrp="1"/>
-          </p:cNvSpPr>
-          <p:nvPr>
-            <p:ph type="title" idx="100" hasCustomPrompt="1"/>
+          <p:cNvSpPr/>
+          <p:nvPr>
+            <p:ph idx="100" type="title" hasCustomPrompt="1"/>
           </p:nvPr>
         </p:nvSpPr>
         <p:spPr>
@@ -6814,7 +7128,7 @@
           <a:bodyPr wrap="square" rtlCol="0" anchor="ctr"/>
           <a:lstStyle/>
           <a:p>
-            <a:pPr marL="0" indent="0" algn="ctr">
+            <a:pPr algn="ctr" indent="0" marL="0">
               <a:buNone/>
             </a:pPr>
             <a:r>
@@ -6831,7 +7145,7 @@
             <a:endParaRPr lang="en-US" sz="3200" dirty="0"/>
           </a:p>
           <a:p>
-            <a:pPr marL="0" indent="0" algn="ctr">
+            <a:pPr algn="ctr" indent="0" marL="0">
               <a:buNone/>
             </a:pPr>
             <a:r>
@@ -6852,11 +7166,9 @@
       <p:sp>
         <p:nvSpPr>
           <p:cNvPr id="5" name="Text 0"/>
-          <p:cNvSpPr>
-            <a:spLocks noGrp="1"/>
-          </p:cNvSpPr>
-          <p:nvPr>
-            <p:ph type="body" idx="101" hasCustomPrompt="1"/>
+          <p:cNvSpPr/>
+          <p:nvPr>
+            <p:ph idx="101" type="body" hasCustomPrompt="1"/>
           </p:nvPr>
         </p:nvSpPr>
         <p:spPr>
@@ -6874,7 +7186,7 @@
           <a:bodyPr wrap="square" rtlCol="0" anchor="t"/>
           <a:lstStyle/>
           <a:p>
-            <a:pPr marL="0" indent="0" algn="ctr">
+            <a:pPr algn="ctr" indent="0" marL="0">
               <a:buNone/>
             </a:pPr>
             <a:r>
@@ -6909,7 +7221,7 @@
           </a:prstGeom>
           <a:extLst>
             <a:ext uri="{C572A759-6A51-4108-AA02-DFA0A04FC94B}">
-              <ma14:wrappingTextBoxFlag xmlns:ma14="http://schemas.microsoft.com/office/mac/drawingml/2011/main" xmlns="" val="0"/>
+              <ma14:wrappingTextBoxFlag xmlns:ma14="http://schemas.microsoft.com/office/mac/drawingml/2011/main" val="0"/>
             </a:ext>
           </a:extLst>
         </p:spPr>
@@ -6927,7 +7239,7 @@
           <a:p>
             <a:pPr algn="r"/>
             <a:fld id="{F7021451-1387-4CA6-816F-3879F97B5CBC}" type="slidenum">
-              <a:rPr lang="en-US" b="0"/>
+              <a:rPr b="0" lang="en-US"/>
               <a:t>15</a:t>
             </a:fld>
             <a:endParaRPr lang="en-US"/>
@@ -6962,11 +7274,9 @@
       <p:sp>
         <p:nvSpPr>
           <p:cNvPr id="2" name="Text 0"/>
-          <p:cNvSpPr>
-            <a:spLocks noGrp="1"/>
-          </p:cNvSpPr>
-          <p:nvPr>
-            <p:ph type="title" idx="100" hasCustomPrompt="1"/>
+          <p:cNvSpPr/>
+          <p:nvPr>
+            <p:ph idx="100" type="title" hasCustomPrompt="1"/>
           </p:nvPr>
         </p:nvSpPr>
         <p:spPr>
@@ -6984,7 +7294,7 @@
           <a:bodyPr wrap="square" rtlCol="0" anchor="ctr"/>
           <a:lstStyle/>
           <a:p>
-            <a:pPr marL="0" indent="0" algn="ctr">
+            <a:pPr algn="ctr" indent="0" marL="0">
               <a:buNone/>
             </a:pPr>
             <a:r>
@@ -7005,11 +7315,9 @@
       <p:sp>
         <p:nvSpPr>
           <p:cNvPr id="3" name="Text 0"/>
-          <p:cNvSpPr>
-            <a:spLocks noGrp="1"/>
-          </p:cNvSpPr>
-          <p:nvPr>
-            <p:ph type="body" idx="101" hasCustomPrompt="1"/>
+          <p:cNvSpPr/>
+          <p:nvPr>
+            <p:ph idx="101" type="body" hasCustomPrompt="1"/>
           </p:nvPr>
         </p:nvSpPr>
         <p:spPr>
@@ -7027,7 +7335,7 @@
           <a:bodyPr wrap="square" rtlCol="0" anchor="t"/>
           <a:lstStyle/>
           <a:p>
-            <a:pPr marL="0" indent="0" algn="ctr">
+            <a:pPr algn="ctr" indent="0" marL="0">
               <a:buNone/>
             </a:pPr>
             <a:r>
@@ -7090,10 +7398,7 @@
         </p:spPr>
         <p:txBody>
           <a:bodyPr/>
-          <a:lstStyle/>
-          <a:p>
-            <a:endParaRPr/>
-          </a:p>
+          <a:p/>
         </p:txBody>
       </p:sp>
       <p:sp>
@@ -7117,7 +7422,7 @@
           <a:bodyPr wrap="square" lIns="0" tIns="0" rIns="0" bIns="0" rtlCol="0" anchor="t"/>
           <a:lstStyle/>
           <a:p>
-            <a:pPr marL="0" indent="0" algn="ctr">
+            <a:pPr algn="ctr" indent="0" marL="0">
               <a:buNone/>
             </a:pPr>
             <a:r>
@@ -7135,11 +7440,9 @@
       <p:sp>
         <p:nvSpPr>
           <p:cNvPr id="4" name="Text 0"/>
-          <p:cNvSpPr>
-            <a:spLocks noGrp="1"/>
-          </p:cNvSpPr>
-          <p:nvPr>
-            <p:ph type="title" idx="100" hasCustomPrompt="1"/>
+          <p:cNvSpPr/>
+          <p:nvPr>
+            <p:ph idx="100" type="title" hasCustomPrompt="1"/>
           </p:nvPr>
         </p:nvSpPr>
         <p:spPr>
@@ -7157,7 +7460,7 @@
           <a:bodyPr wrap="square" rtlCol="0" anchor="ctr"/>
           <a:lstStyle/>
           <a:p>
-            <a:pPr marL="0" indent="0" algn="ctr">
+            <a:pPr algn="ctr" indent="0" marL="0">
               <a:buNone/>
             </a:pPr>
             <a:r>
@@ -7174,7 +7477,7 @@
             <a:endParaRPr lang="en-US" sz="3200" dirty="0"/>
           </a:p>
           <a:p>
-            <a:pPr marL="0" indent="0" algn="ctr">
+            <a:pPr algn="ctr" indent="0" marL="0">
               <a:buNone/>
             </a:pPr>
             <a:r>
@@ -7191,7 +7494,7 @@
             <a:endParaRPr lang="en-US" sz="3200" dirty="0"/>
           </a:p>
           <a:p>
-            <a:pPr marL="0" indent="0" algn="ctr">
+            <a:pPr algn="ctr" indent="0" marL="0">
               <a:buNone/>
             </a:pPr>
             <a:r>
@@ -7212,11 +7515,9 @@
       <p:sp>
         <p:nvSpPr>
           <p:cNvPr id="5" name="Text 0"/>
-          <p:cNvSpPr>
-            <a:spLocks noGrp="1"/>
-          </p:cNvSpPr>
-          <p:nvPr>
-            <p:ph type="body" idx="101" hasCustomPrompt="1"/>
+          <p:cNvSpPr/>
+          <p:nvPr>
+            <p:ph idx="101" type="body" hasCustomPrompt="1"/>
           </p:nvPr>
         </p:nvSpPr>
         <p:spPr>
@@ -7234,7 +7535,7 @@
           <a:bodyPr wrap="square" rtlCol="0" anchor="t"/>
           <a:lstStyle/>
           <a:p>
-            <a:pPr marL="0" indent="0" algn="ctr">
+            <a:pPr algn="ctr" indent="0" marL="0">
               <a:buNone/>
             </a:pPr>
             <a:r>
@@ -7269,7 +7570,7 @@
           </a:prstGeom>
           <a:extLst>
             <a:ext uri="{C572A759-6A51-4108-AA02-DFA0A04FC94B}">
-              <ma14:wrappingTextBoxFlag xmlns:ma14="http://schemas.microsoft.com/office/mac/drawingml/2011/main" xmlns="" val="0"/>
+              <ma14:wrappingTextBoxFlag xmlns:ma14="http://schemas.microsoft.com/office/mac/drawingml/2011/main" val="0"/>
             </a:ext>
           </a:extLst>
         </p:spPr>
@@ -7287,7 +7588,7 @@
           <a:p>
             <a:pPr algn="r"/>
             <a:fld id="{F7021451-1387-4CA6-816F-3879F97B5CBC}" type="slidenum">
-              <a:rPr lang="en-US" b="0"/>
+              <a:rPr b="0" lang="en-US"/>
               <a:t>17</a:t>
             </a:fld>
             <a:endParaRPr lang="en-US"/>
@@ -7340,7 +7641,7 @@
           <a:bodyPr wrap="square" lIns="0" tIns="0" rIns="0" bIns="0" rtlCol="0" anchor="t"/>
           <a:lstStyle/>
           <a:p>
-            <a:pPr marL="0" indent="0">
+            <a:pPr indent="0" marL="0">
               <a:buNone/>
             </a:pPr>
             <a:r>
@@ -7358,11 +7659,9 @@
       <p:sp>
         <p:nvSpPr>
           <p:cNvPr id="3" name="Text 0"/>
-          <p:cNvSpPr>
-            <a:spLocks noGrp="1"/>
-          </p:cNvSpPr>
-          <p:nvPr>
-            <p:ph type="title" idx="100" hasCustomPrompt="1"/>
+          <p:cNvSpPr/>
+          <p:nvPr>
+            <p:ph idx="100" type="title" hasCustomPrompt="1"/>
           </p:nvPr>
         </p:nvSpPr>
         <p:spPr>
@@ -7380,7 +7679,7 @@
           <a:bodyPr wrap="square" lIns="0" tIns="0" rIns="0" bIns="0" rtlCol="0" anchor="ctr"/>
           <a:lstStyle/>
           <a:p>
-            <a:pPr marL="0" indent="0" algn="l">
+            <a:pPr algn="l" indent="0" marL="0">
               <a:buNone/>
             </a:pPr>
             <a:r>
@@ -7400,14 +7699,14 @@
       </p:sp>
       <p:pic>
         <p:nvPicPr>
-          <p:cNvPr id="4" name="Image 0" descr="講座スライド"/>
+          <p:cNvPr id="4" name="Image 0" descr="講座スライド">    </p:cNvPr>
           <p:cNvPicPr>
             <a:picLocks noChangeAspect="1"/>
           </p:cNvPicPr>
           <p:nvPr/>
         </p:nvPicPr>
         <p:blipFill>
-          <a:blip r:embed="rId3"/>
+          <a:blip r:embed="rId1"/>
           <a:stretch>
             <a:fillRect/>
           </a:stretch>
@@ -7450,10 +7749,7 @@
         </p:spPr>
         <p:txBody>
           <a:bodyPr/>
-          <a:lstStyle/>
-          <a:p>
-            <a:endParaRPr/>
-          </a:p>
+          <a:p/>
         </p:txBody>
       </p:sp>
       <p:sp>
@@ -7477,7 +7773,7 @@
           <a:bodyPr wrap="square" lIns="1016" tIns="1016" rIns="1016" bIns="1016" rtlCol="0" anchor="t"/>
           <a:lstStyle/>
           <a:p>
-            <a:pPr marL="0" indent="0">
+            <a:pPr indent="0" marL="0">
               <a:buNone/>
             </a:pPr>
             <a:r>
@@ -7513,7 +7809,7 @@
           <a:bodyPr wrap="square" lIns="1016" tIns="1016" rIns="1016" bIns="1016" rtlCol="0" anchor="t"/>
           <a:lstStyle/>
           <a:p>
-            <a:pPr marL="0" indent="0">
+            <a:pPr indent="0" marL="0">
               <a:spcAft>
                 <a:spcPts val="600"/>
               </a:spcAft>
@@ -7530,7 +7826,7 @@
             <a:endParaRPr lang="en-US" sz="1400" dirty="0"/>
           </a:p>
           <a:p>
-            <a:pPr marL="0" indent="0">
+            <a:pPr indent="0" marL="0">
               <a:spcAft>
                 <a:spcPts val="600"/>
               </a:spcAft>
@@ -7568,7 +7864,7 @@
           </a:prstGeom>
           <a:extLst>
             <a:ext uri="{C572A759-6A51-4108-AA02-DFA0A04FC94B}">
-              <ma14:wrappingTextBoxFlag xmlns:ma14="http://schemas.microsoft.com/office/mac/drawingml/2011/main" xmlns="" val="0"/>
+              <ma14:wrappingTextBoxFlag xmlns:ma14="http://schemas.microsoft.com/office/mac/drawingml/2011/main" val="0"/>
             </a:ext>
           </a:extLst>
         </p:spPr>
@@ -7586,7 +7882,7 @@
           <a:p>
             <a:pPr algn="r"/>
             <a:fld id="{F7021451-1387-4CA6-816F-3879F97B5CBC}" type="slidenum">
-              <a:rPr lang="en-US" b="0"/>
+              <a:rPr b="0" lang="en-US"/>
               <a:t>18</a:t>
             </a:fld>
             <a:endParaRPr lang="en-US"/>
@@ -7641,20 +7937,15 @@
         </p:spPr>
         <p:txBody>
           <a:bodyPr/>
-          <a:lstStyle/>
-          <a:p>
-            <a:endParaRPr/>
-          </a:p>
+          <a:p/>
         </p:txBody>
       </p:sp>
       <p:sp>
         <p:nvSpPr>
           <p:cNvPr id="3" name="Text 0"/>
-          <p:cNvSpPr>
-            <a:spLocks noGrp="1"/>
-          </p:cNvSpPr>
-          <p:nvPr>
-            <p:ph type="title" idx="100" hasCustomPrompt="1"/>
+          <p:cNvSpPr/>
+          <p:nvPr>
+            <p:ph idx="100" type="title" hasCustomPrompt="1"/>
           </p:nvPr>
         </p:nvSpPr>
         <p:spPr>
@@ -7672,7 +7963,7 @@
           <a:bodyPr wrap="square" rtlCol="0" anchor="ctr"/>
           <a:lstStyle/>
           <a:p>
-            <a:pPr marL="0" indent="0" algn="ctr">
+            <a:pPr algn="ctr" indent="0" marL="0">
               <a:buNone/>
             </a:pPr>
             <a:r>
@@ -7710,7 +8001,7 @@
           </a:prstGeom>
           <a:extLst>
             <a:ext uri="{C572A759-6A51-4108-AA02-DFA0A04FC94B}">
-              <ma14:wrappingTextBoxFlag xmlns:ma14="http://schemas.microsoft.com/office/mac/drawingml/2011/main" xmlns="" val="0"/>
+              <ma14:wrappingTextBoxFlag xmlns:ma14="http://schemas.microsoft.com/office/mac/drawingml/2011/main" val="0"/>
             </a:ext>
           </a:extLst>
         </p:spPr>
@@ -7728,7 +8019,7 @@
           <a:p>
             <a:pPr algn="r"/>
             <a:fld id="{F7021451-1387-4CA6-816F-3879F97B5CBC}" type="slidenum">
-              <a:rPr lang="en-US" b="0"/>
+              <a:rPr b="0" lang="en-US"/>
               <a:t>19</a:t>
             </a:fld>
             <a:endParaRPr lang="en-US"/>
@@ -7763,11 +8054,9 @@
       <p:sp>
         <p:nvSpPr>
           <p:cNvPr id="2" name="Text 0"/>
-          <p:cNvSpPr>
-            <a:spLocks noGrp="1"/>
-          </p:cNvSpPr>
-          <p:nvPr>
-            <p:ph type="title" idx="100" hasCustomPrompt="1"/>
+          <p:cNvSpPr/>
+          <p:nvPr>
+            <p:ph idx="100" type="title" hasCustomPrompt="1"/>
           </p:nvPr>
         </p:nvSpPr>
         <p:spPr>
@@ -7785,7 +8074,7 @@
           <a:bodyPr wrap="square" lIns="0" tIns="0" rIns="0" bIns="0" rtlCol="0" anchor="ctr"/>
           <a:lstStyle/>
           <a:p>
-            <a:pPr marL="0" indent="0" algn="l">
+            <a:pPr algn="l" indent="0" marL="0">
               <a:buNone/>
             </a:pPr>
             <a:r>
@@ -7831,10 +8120,7 @@
         </p:spPr>
         <p:txBody>
           <a:bodyPr/>
-          <a:lstStyle/>
-          <a:p>
-            <a:endParaRPr/>
-          </a:p>
+          <a:p/>
         </p:txBody>
       </p:sp>
       <p:sp>
@@ -7858,7 +8144,7 @@
           <a:bodyPr wrap="square" lIns="1016" tIns="1016" rIns="1016" bIns="1016" rtlCol="0" anchor="t"/>
           <a:lstStyle/>
           <a:p>
-            <a:pPr marL="0" indent="0" algn="ctr">
+            <a:pPr algn="ctr" indent="0" marL="0">
               <a:buNone/>
             </a:pPr>
             <a:r>
@@ -7894,7 +8180,7 @@
           <a:bodyPr wrap="square" lIns="1016" tIns="1016" rIns="1016" bIns="1016" rtlCol="0" anchor="t"/>
           <a:lstStyle/>
           <a:p>
-            <a:pPr marL="0" indent="0" algn="ctr">
+            <a:pPr algn="ctr" indent="0" marL="0">
               <a:buNone/>
             </a:pPr>
             <a:r>
@@ -7933,7 +8219,7 @@
           <a:bodyPr wrap="square" lIns="1016" tIns="1016" rIns="1016" bIns="1016" rtlCol="0" anchor="t"/>
           <a:lstStyle/>
           <a:p>
-            <a:pPr marL="0" indent="0" algn="ctr">
+            <a:pPr algn="ctr" indent="0" marL="0">
               <a:buNone/>
             </a:pPr>
             <a:r>
@@ -7976,10 +8262,7 @@
         </p:spPr>
         <p:txBody>
           <a:bodyPr/>
-          <a:lstStyle/>
-          <a:p>
-            <a:endParaRPr/>
-          </a:p>
+          <a:p/>
         </p:txBody>
       </p:sp>
       <p:sp>
@@ -8003,7 +8286,7 @@
           <a:bodyPr wrap="square" lIns="1016" tIns="1016" rIns="1016" bIns="1016" rtlCol="0" anchor="t"/>
           <a:lstStyle/>
           <a:p>
-            <a:pPr marL="0" indent="0" algn="ctr">
+            <a:pPr algn="ctr" indent="0" marL="0">
               <a:buNone/>
             </a:pPr>
             <a:r>
@@ -8039,7 +8322,7 @@
           <a:bodyPr wrap="square" lIns="1016" tIns="1016" rIns="1016" bIns="1016" rtlCol="0" anchor="t"/>
           <a:lstStyle/>
           <a:p>
-            <a:pPr marL="0" indent="0" algn="ctr">
+            <a:pPr algn="ctr" indent="0" marL="0">
               <a:buNone/>
             </a:pPr>
             <a:r>
@@ -8078,7 +8361,7 @@
           <a:bodyPr wrap="square" lIns="1016" tIns="1016" rIns="1016" bIns="1016" rtlCol="0" anchor="t"/>
           <a:lstStyle/>
           <a:p>
-            <a:pPr marL="0" indent="0" algn="ctr">
+            <a:pPr algn="ctr" indent="0" marL="0">
               <a:buNone/>
             </a:pPr>
             <a:r>
@@ -8121,10 +8404,7 @@
         </p:spPr>
         <p:txBody>
           <a:bodyPr/>
-          <a:lstStyle/>
-          <a:p>
-            <a:endParaRPr/>
-          </a:p>
+          <a:p/>
         </p:txBody>
       </p:sp>
       <p:sp>
@@ -8148,7 +8428,7 @@
           <a:bodyPr wrap="square" lIns="1016" tIns="1016" rIns="1016" bIns="1016" rtlCol="0" anchor="t"/>
           <a:lstStyle/>
           <a:p>
-            <a:pPr marL="0" indent="0" algn="ctr">
+            <a:pPr algn="ctr" indent="0" marL="0">
               <a:buNone/>
             </a:pPr>
             <a:r>
@@ -8184,7 +8464,7 @@
           <a:bodyPr wrap="square" lIns="1016" tIns="1016" rIns="1016" bIns="1016" rtlCol="0" anchor="t"/>
           <a:lstStyle/>
           <a:p>
-            <a:pPr marL="0" indent="0" algn="ctr">
+            <a:pPr algn="ctr" indent="0" marL="0">
               <a:buNone/>
             </a:pPr>
             <a:r>
@@ -8223,7 +8503,7 @@
           <a:bodyPr wrap="square" lIns="1016" tIns="1016" rIns="1016" bIns="1016" rtlCol="0" anchor="t"/>
           <a:lstStyle/>
           <a:p>
-            <a:pPr marL="0" indent="0" algn="ctr">
+            <a:pPr algn="ctr" indent="0" marL="0">
               <a:buNone/>
             </a:pPr>
             <a:r>
@@ -8237,7 +8517,7 @@
             <a:endParaRPr lang="en-US" sz="1400" dirty="0"/>
           </a:p>
           <a:p>
-            <a:pPr marL="0" indent="0" algn="ctr">
+            <a:pPr algn="ctr" indent="0" marL="0">
               <a:buNone/>
             </a:pPr>
             <a:r>
@@ -8280,10 +8560,7 @@
         </p:spPr>
         <p:txBody>
           <a:bodyPr/>
-          <a:lstStyle/>
-          <a:p>
-            <a:endParaRPr/>
-          </a:p>
+          <a:p/>
         </p:txBody>
       </p:sp>
       <p:sp>
@@ -8307,7 +8584,7 @@
           <a:bodyPr wrap="square" lIns="1016" tIns="1016" rIns="1016" bIns="1016" rtlCol="0" anchor="t"/>
           <a:lstStyle/>
           <a:p>
-            <a:pPr marL="0" indent="0" algn="ctr">
+            <a:pPr algn="ctr" indent="0" marL="0">
               <a:buNone/>
             </a:pPr>
             <a:r>
@@ -8343,7 +8620,7 @@
           <a:bodyPr wrap="square" lIns="1016" tIns="1016" rIns="1016" bIns="1016" rtlCol="0" anchor="t"/>
           <a:lstStyle/>
           <a:p>
-            <a:pPr marL="0" indent="0" algn="ctr">
+            <a:pPr algn="ctr" indent="0" marL="0">
               <a:buNone/>
             </a:pPr>
             <a:r>
@@ -8382,7 +8659,7 @@
           <a:bodyPr wrap="square" lIns="1016" tIns="1016" rIns="1016" bIns="1016" rtlCol="0" anchor="t"/>
           <a:lstStyle/>
           <a:p>
-            <a:pPr marL="0" indent="0" algn="ctr">
+            <a:pPr algn="ctr" indent="0" marL="0">
               <a:buNone/>
             </a:pPr>
             <a:r>
@@ -8396,7 +8673,7 @@
             <a:endParaRPr lang="en-US" sz="1400" dirty="0"/>
           </a:p>
           <a:p>
-            <a:pPr marL="0" indent="0" algn="ctr">
+            <a:pPr algn="ctr" indent="0" marL="0">
               <a:buNone/>
             </a:pPr>
             <a:r>
@@ -8439,10 +8716,7 @@
         </p:spPr>
         <p:txBody>
           <a:bodyPr/>
-          <a:lstStyle/>
-          <a:p>
-            <a:endParaRPr/>
-          </a:p>
+          <a:p/>
         </p:txBody>
       </p:sp>
       <p:sp>
@@ -8466,7 +8740,7 @@
           <a:bodyPr wrap="square" lIns="1016" tIns="1016" rIns="1016" bIns="1016" rtlCol="0" anchor="t"/>
           <a:lstStyle/>
           <a:p>
-            <a:pPr marL="0" indent="0" algn="ctr">
+            <a:pPr algn="ctr" indent="0" marL="0">
               <a:buNone/>
             </a:pPr>
             <a:r>
@@ -8502,7 +8776,7 @@
           <a:bodyPr wrap="square" lIns="1016" tIns="1016" rIns="1016" bIns="1016" rtlCol="0" anchor="t"/>
           <a:lstStyle/>
           <a:p>
-            <a:pPr marL="0" indent="0" algn="ctr">
+            <a:pPr algn="ctr" indent="0" marL="0">
               <a:buNone/>
             </a:pPr>
             <a:r>
@@ -8541,7 +8815,7 @@
           <a:bodyPr wrap="square" lIns="1016" tIns="1016" rIns="1016" bIns="1016" rtlCol="0" anchor="t"/>
           <a:lstStyle/>
           <a:p>
-            <a:pPr marL="0" indent="0" algn="ctr">
+            <a:pPr algn="ctr" indent="0" marL="0">
               <a:buNone/>
             </a:pPr>
             <a:r>
@@ -8555,7 +8829,7 @@
             <a:endParaRPr lang="en-US" sz="1400" dirty="0"/>
           </a:p>
           <a:p>
-            <a:pPr marL="0" indent="0" algn="ctr">
+            <a:pPr algn="ctr" indent="0" marL="0">
               <a:buNone/>
             </a:pPr>
             <a:r>
@@ -8590,7 +8864,7 @@
           </a:prstGeom>
           <a:extLst>
             <a:ext uri="{C572A759-6A51-4108-AA02-DFA0A04FC94B}">
-              <ma14:wrappingTextBoxFlag xmlns:ma14="http://schemas.microsoft.com/office/mac/drawingml/2011/main" xmlns="" val="0"/>
+              <ma14:wrappingTextBoxFlag xmlns:ma14="http://schemas.microsoft.com/office/mac/drawingml/2011/main" val="0"/>
             </a:ext>
           </a:extLst>
         </p:spPr>
@@ -8608,7 +8882,7 @@
           <a:p>
             <a:pPr algn="r"/>
             <a:fld id="{F7021451-1387-4CA6-816F-3879F97B5CBC}" type="slidenum">
-              <a:rPr lang="en-US" b="0"/>
+              <a:rPr b="0" lang="en-US"/>
               <a:t>2</a:t>
             </a:fld>
             <a:endParaRPr lang="en-US"/>
@@ -8661,7 +8935,7 @@
           <a:bodyPr wrap="square" lIns="0" tIns="0" rIns="0" bIns="0" rtlCol="0" anchor="t"/>
           <a:lstStyle/>
           <a:p>
-            <a:pPr marL="0" indent="0">
+            <a:pPr indent="0" marL="0">
               <a:buNone/>
             </a:pPr>
             <a:r>
@@ -8679,11 +8953,9 @@
       <p:sp>
         <p:nvSpPr>
           <p:cNvPr id="3" name="Text 0"/>
-          <p:cNvSpPr>
-            <a:spLocks noGrp="1"/>
-          </p:cNvSpPr>
-          <p:nvPr>
-            <p:ph type="title" idx="100" hasCustomPrompt="1"/>
+          <p:cNvSpPr/>
+          <p:nvPr>
+            <p:ph idx="100" type="title" hasCustomPrompt="1"/>
           </p:nvPr>
         </p:nvSpPr>
         <p:spPr>
@@ -8701,7 +8973,7 @@
           <a:bodyPr wrap="square" lIns="0" tIns="0" rIns="0" bIns="0" rtlCol="0" anchor="ctr"/>
           <a:lstStyle/>
           <a:p>
-            <a:pPr marL="0" indent="0" algn="l">
+            <a:pPr algn="l" indent="0" marL="0">
               <a:buNone/>
             </a:pPr>
             <a:r>
@@ -8721,14 +8993,14 @@
       </p:sp>
       <p:pic>
         <p:nvPicPr>
-          <p:cNvPr id="4" name="Image 0" descr="講座スライド"/>
+          <p:cNvPr id="4" name="Image 0" descr="講座スライド">    </p:cNvPr>
           <p:cNvPicPr>
             <a:picLocks noChangeAspect="1"/>
           </p:cNvPicPr>
           <p:nvPr/>
         </p:nvPicPr>
         <p:blipFill>
-          <a:blip r:embed="rId3"/>
+          <a:blip r:embed="rId1"/>
           <a:stretch>
             <a:fillRect/>
           </a:stretch>
@@ -8771,10 +9043,7 @@
         </p:spPr>
         <p:txBody>
           <a:bodyPr/>
-          <a:lstStyle/>
-          <a:p>
-            <a:endParaRPr/>
-          </a:p>
+          <a:p/>
         </p:txBody>
       </p:sp>
       <p:sp>
@@ -8798,7 +9067,7 @@
           <a:bodyPr wrap="square" lIns="1016" tIns="1016" rIns="1016" bIns="1016" rtlCol="0" anchor="t"/>
           <a:lstStyle/>
           <a:p>
-            <a:pPr marL="0" indent="0">
+            <a:pPr indent="0" marL="0">
               <a:buNone/>
             </a:pPr>
             <a:r>
@@ -8834,7 +9103,7 @@
           <a:bodyPr wrap="square" lIns="1016" tIns="1016" rIns="1016" bIns="1016" rtlCol="0" anchor="t"/>
           <a:lstStyle/>
           <a:p>
-            <a:pPr marL="0" indent="0">
+            <a:pPr indent="0" marL="0">
               <a:spcAft>
                 <a:spcPts val="600"/>
               </a:spcAft>
@@ -8872,7 +9141,7 @@
           </a:prstGeom>
           <a:extLst>
             <a:ext uri="{C572A759-6A51-4108-AA02-DFA0A04FC94B}">
-              <ma14:wrappingTextBoxFlag xmlns:ma14="http://schemas.microsoft.com/office/mac/drawingml/2011/main" xmlns="" val="0"/>
+              <ma14:wrappingTextBoxFlag xmlns:ma14="http://schemas.microsoft.com/office/mac/drawingml/2011/main" val="0"/>
             </a:ext>
           </a:extLst>
         </p:spPr>
@@ -8890,7 +9159,7 @@
           <a:p>
             <a:pPr algn="r"/>
             <a:fld id="{F7021451-1387-4CA6-816F-3879F97B5CBC}" type="slidenum">
-              <a:rPr lang="en-US" b="0"/>
+              <a:rPr b="0" lang="en-US"/>
               <a:t>20</a:t>
             </a:fld>
             <a:endParaRPr lang="en-US"/>
@@ -8943,7 +9212,7 @@
           <a:bodyPr wrap="square" lIns="0" tIns="0" rIns="0" bIns="0" rtlCol="0" anchor="t"/>
           <a:lstStyle/>
           <a:p>
-            <a:pPr marL="0" indent="0">
+            <a:pPr indent="0" marL="0">
               <a:buNone/>
             </a:pPr>
             <a:r>
@@ -8961,11 +9230,9 @@
       <p:sp>
         <p:nvSpPr>
           <p:cNvPr id="3" name="Text 0"/>
-          <p:cNvSpPr>
-            <a:spLocks noGrp="1"/>
-          </p:cNvSpPr>
-          <p:nvPr>
-            <p:ph type="title" idx="100" hasCustomPrompt="1"/>
+          <p:cNvSpPr/>
+          <p:nvPr>
+            <p:ph idx="100" type="title" hasCustomPrompt="1"/>
           </p:nvPr>
         </p:nvSpPr>
         <p:spPr>
@@ -8983,7 +9250,7 @@
           <a:bodyPr wrap="square" lIns="0" tIns="0" rIns="0" bIns="0" rtlCol="0" anchor="ctr"/>
           <a:lstStyle/>
           <a:p>
-            <a:pPr marL="0" indent="0" algn="l">
+            <a:pPr algn="l" indent="0" marL="0">
               <a:buNone/>
             </a:pPr>
             <a:r>
@@ -9003,14 +9270,14 @@
       </p:sp>
       <p:pic>
         <p:nvPicPr>
-          <p:cNvPr id="4" name="Image 0" descr="講座スライド"/>
+          <p:cNvPr id="4" name="Image 0" descr="講座スライド">    </p:cNvPr>
           <p:cNvPicPr>
             <a:picLocks noChangeAspect="1"/>
           </p:cNvPicPr>
           <p:nvPr/>
         </p:nvPicPr>
         <p:blipFill>
-          <a:blip r:embed="rId3"/>
+          <a:blip r:embed="rId1"/>
           <a:stretch>
             <a:fillRect/>
           </a:stretch>
@@ -9053,10 +9320,7 @@
         </p:spPr>
         <p:txBody>
           <a:bodyPr/>
-          <a:lstStyle/>
-          <a:p>
-            <a:endParaRPr/>
-          </a:p>
+          <a:p/>
         </p:txBody>
       </p:sp>
       <p:sp>
@@ -9080,7 +9344,7 @@
           <a:bodyPr wrap="square" lIns="1016" tIns="1016" rIns="1016" bIns="1016" rtlCol="0" anchor="t"/>
           <a:lstStyle/>
           <a:p>
-            <a:pPr marL="0" indent="0">
+            <a:pPr indent="0" marL="0">
               <a:buNone/>
             </a:pPr>
             <a:r>
@@ -9116,7 +9380,7 @@
           <a:bodyPr wrap="square" lIns="1016" tIns="1016" rIns="1016" bIns="1016" rtlCol="0" anchor="t"/>
           <a:lstStyle/>
           <a:p>
-            <a:pPr marL="0" indent="0">
+            <a:pPr indent="0" marL="0">
               <a:spcAft>
                 <a:spcPts val="600"/>
               </a:spcAft>
@@ -9154,7 +9418,7 @@
           </a:prstGeom>
           <a:extLst>
             <a:ext uri="{C572A759-6A51-4108-AA02-DFA0A04FC94B}">
-              <ma14:wrappingTextBoxFlag xmlns:ma14="http://schemas.microsoft.com/office/mac/drawingml/2011/main" xmlns="" val="0"/>
+              <ma14:wrappingTextBoxFlag xmlns:ma14="http://schemas.microsoft.com/office/mac/drawingml/2011/main" val="0"/>
             </a:ext>
           </a:extLst>
         </p:spPr>
@@ -9172,7 +9436,7 @@
           <a:p>
             <a:pPr algn="r"/>
             <a:fld id="{F7021451-1387-4CA6-816F-3879F97B5CBC}" type="slidenum">
-              <a:rPr lang="en-US" b="0"/>
+              <a:rPr b="0" lang="en-US"/>
               <a:t>21</a:t>
             </a:fld>
             <a:endParaRPr lang="en-US"/>
@@ -9225,7 +9489,7 @@
           <a:bodyPr wrap="square" lIns="0" tIns="0" rIns="0" bIns="0" rtlCol="0" anchor="t"/>
           <a:lstStyle/>
           <a:p>
-            <a:pPr marL="0" indent="0">
+            <a:pPr indent="0" marL="0">
               <a:buNone/>
             </a:pPr>
             <a:r>
@@ -9243,11 +9507,9 @@
       <p:sp>
         <p:nvSpPr>
           <p:cNvPr id="3" name="Text 0"/>
-          <p:cNvSpPr>
-            <a:spLocks noGrp="1"/>
-          </p:cNvSpPr>
-          <p:nvPr>
-            <p:ph type="title" idx="100" hasCustomPrompt="1"/>
+          <p:cNvSpPr/>
+          <p:nvPr>
+            <p:ph idx="100" type="title" hasCustomPrompt="1"/>
           </p:nvPr>
         </p:nvSpPr>
         <p:spPr>
@@ -9265,7 +9527,7 @@
           <a:bodyPr wrap="square" lIns="0" tIns="0" rIns="0" bIns="0" rtlCol="0" anchor="ctr"/>
           <a:lstStyle/>
           <a:p>
-            <a:pPr marL="0" indent="0" algn="l">
+            <a:pPr algn="l" indent="0" marL="0">
               <a:buNone/>
             </a:pPr>
             <a:r>
@@ -9311,10 +9573,7 @@
         </p:spPr>
         <p:txBody>
           <a:bodyPr/>
-          <a:lstStyle/>
-          <a:p>
-            <a:endParaRPr/>
-          </a:p>
+          <a:p/>
         </p:txBody>
       </p:sp>
       <p:sp>
@@ -9338,10 +9597,7 @@
         </p:spPr>
         <p:txBody>
           <a:bodyPr/>
-          <a:lstStyle/>
-          <a:p>
-            <a:endParaRPr/>
-          </a:p>
+          <a:p/>
         </p:txBody>
       </p:sp>
       <p:sp>
@@ -9365,7 +9621,7 @@
           <a:bodyPr wrap="square" lIns="0" tIns="0" rIns="0" bIns="0" rtlCol="0" anchor="ctr"/>
           <a:lstStyle/>
           <a:p>
-            <a:pPr marL="0" indent="0" algn="ctr">
+            <a:pPr algn="ctr" indent="0" marL="0">
               <a:buNone/>
             </a:pPr>
             <a:r>
@@ -9401,7 +9657,7 @@
           <a:bodyPr wrap="square" lIns="1016" tIns="1016" rIns="1016" bIns="1016" rtlCol="0" anchor="t"/>
           <a:lstStyle/>
           <a:p>
-            <a:pPr marL="0" indent="0">
+            <a:pPr indent="0" marL="0">
               <a:buNone/>
             </a:pPr>
             <a:r>
@@ -9437,7 +9693,7 @@
           <a:bodyPr wrap="square" lIns="1016" tIns="1016" rIns="1016" bIns="1016" rtlCol="0" anchor="t"/>
           <a:lstStyle/>
           <a:p>
-            <a:pPr marL="0" indent="0">
+            <a:pPr indent="0" marL="0">
               <a:buNone/>
             </a:pPr>
             <a:r>
@@ -9480,10 +9736,7 @@
         </p:spPr>
         <p:txBody>
           <a:bodyPr/>
-          <a:lstStyle/>
-          <a:p>
-            <a:endParaRPr/>
-          </a:p>
+          <a:p/>
         </p:txBody>
       </p:sp>
       <p:sp>
@@ -9507,10 +9760,7 @@
         </p:spPr>
         <p:txBody>
           <a:bodyPr/>
-          <a:lstStyle/>
-          <a:p>
-            <a:endParaRPr/>
-          </a:p>
+          <a:p/>
         </p:txBody>
       </p:sp>
       <p:sp>
@@ -9534,7 +9784,7 @@
           <a:bodyPr wrap="square" lIns="0" tIns="0" rIns="0" bIns="0" rtlCol="0" anchor="ctr"/>
           <a:lstStyle/>
           <a:p>
-            <a:pPr marL="0" indent="0" algn="ctr">
+            <a:pPr algn="ctr" indent="0" marL="0">
               <a:buNone/>
             </a:pPr>
             <a:r>
@@ -9570,7 +9820,7 @@
           <a:bodyPr wrap="square" lIns="1016" tIns="1016" rIns="1016" bIns="1016" rtlCol="0" anchor="t"/>
           <a:lstStyle/>
           <a:p>
-            <a:pPr marL="0" indent="0">
+            <a:pPr indent="0" marL="0">
               <a:buNone/>
             </a:pPr>
             <a:r>
@@ -9606,7 +9856,7 @@
           <a:bodyPr wrap="square" lIns="1016" tIns="1016" rIns="1016" bIns="1016" rtlCol="0" anchor="t"/>
           <a:lstStyle/>
           <a:p>
-            <a:pPr marL="0" indent="0">
+            <a:pPr indent="0" marL="0">
               <a:buNone/>
             </a:pPr>
             <a:r>
@@ -9649,10 +9899,7 @@
         </p:spPr>
         <p:txBody>
           <a:bodyPr/>
-          <a:lstStyle/>
-          <a:p>
-            <a:endParaRPr/>
-          </a:p>
+          <a:p/>
         </p:txBody>
       </p:sp>
       <p:sp>
@@ -9676,10 +9923,7 @@
         </p:spPr>
         <p:txBody>
           <a:bodyPr/>
-          <a:lstStyle/>
-          <a:p>
-            <a:endParaRPr/>
-          </a:p>
+          <a:p/>
         </p:txBody>
       </p:sp>
       <p:sp>
@@ -9703,7 +9947,7 @@
           <a:bodyPr wrap="square" lIns="0" tIns="0" rIns="0" bIns="0" rtlCol="0" anchor="ctr"/>
           <a:lstStyle/>
           <a:p>
-            <a:pPr marL="0" indent="0" algn="ctr">
+            <a:pPr algn="ctr" indent="0" marL="0">
               <a:buNone/>
             </a:pPr>
             <a:r>
@@ -9739,7 +9983,7 @@
           <a:bodyPr wrap="square" lIns="1016" tIns="1016" rIns="1016" bIns="1016" rtlCol="0" anchor="t"/>
           <a:lstStyle/>
           <a:p>
-            <a:pPr marL="0" indent="0">
+            <a:pPr indent="0" marL="0">
               <a:buNone/>
             </a:pPr>
             <a:r>
@@ -9775,7 +10019,7 @@
           <a:bodyPr wrap="square" lIns="1016" tIns="1016" rIns="1016" bIns="1016" rtlCol="0" anchor="t"/>
           <a:lstStyle/>
           <a:p>
-            <a:pPr marL="0" indent="0">
+            <a:pPr indent="0" marL="0">
               <a:buNone/>
             </a:pPr>
             <a:r>
@@ -9818,10 +10062,7 @@
         </p:spPr>
         <p:txBody>
           <a:bodyPr/>
-          <a:lstStyle/>
-          <a:p>
-            <a:endParaRPr/>
-          </a:p>
+          <a:p/>
         </p:txBody>
       </p:sp>
       <p:sp>
@@ -9845,7 +10086,7 @@
           <a:bodyPr wrap="square" lIns="1016" tIns="1016" rIns="1016" bIns="1016" rtlCol="0" anchor="t"/>
           <a:lstStyle/>
           <a:p>
-            <a:pPr marL="0" indent="0">
+            <a:pPr indent="0" marL="0">
               <a:buNone/>
             </a:pPr>
             <a:r>
@@ -9881,7 +10122,7 @@
           <a:bodyPr wrap="square" lIns="1016" tIns="1016" rIns="1016" bIns="1016" rtlCol="0" anchor="t"/>
           <a:lstStyle/>
           <a:p>
-            <a:pPr marL="0" indent="0">
+            <a:pPr indent="0" marL="0">
               <a:buNone/>
             </a:pPr>
             <a:r>
@@ -9916,7 +10157,7 @@
           </a:prstGeom>
           <a:extLst>
             <a:ext uri="{C572A759-6A51-4108-AA02-DFA0A04FC94B}">
-              <ma14:wrappingTextBoxFlag xmlns:ma14="http://schemas.microsoft.com/office/mac/drawingml/2011/main" xmlns="" val="0"/>
+              <ma14:wrappingTextBoxFlag xmlns:ma14="http://schemas.microsoft.com/office/mac/drawingml/2011/main" val="0"/>
             </a:ext>
           </a:extLst>
         </p:spPr>
@@ -9934,7 +10175,7 @@
           <a:p>
             <a:pPr algn="r"/>
             <a:fld id="{F7021451-1387-4CA6-816F-3879F97B5CBC}" type="slidenum">
-              <a:rPr lang="en-US" b="0"/>
+              <a:rPr b="0" lang="en-US"/>
               <a:t>22</a:t>
             </a:fld>
             <a:endParaRPr lang="en-US"/>
@@ -9987,7 +10228,7 @@
           <a:bodyPr wrap="square" lIns="0" tIns="0" rIns="0" bIns="0" rtlCol="0" anchor="t"/>
           <a:lstStyle/>
           <a:p>
-            <a:pPr marL="0" indent="0">
+            <a:pPr indent="0" marL="0">
               <a:buNone/>
             </a:pPr>
             <a:r>
@@ -10005,11 +10246,9 @@
       <p:sp>
         <p:nvSpPr>
           <p:cNvPr id="3" name="Text 0"/>
-          <p:cNvSpPr>
-            <a:spLocks noGrp="1"/>
-          </p:cNvSpPr>
-          <p:nvPr>
-            <p:ph type="title" idx="100" hasCustomPrompt="1"/>
+          <p:cNvSpPr/>
+          <p:nvPr>
+            <p:ph idx="100" type="title" hasCustomPrompt="1"/>
           </p:nvPr>
         </p:nvSpPr>
         <p:spPr>
@@ -10027,7 +10266,7 @@
           <a:bodyPr wrap="square" lIns="0" tIns="0" rIns="0" bIns="0" rtlCol="0" anchor="ctr"/>
           <a:lstStyle/>
           <a:p>
-            <a:pPr marL="0" indent="0" algn="l">
+            <a:pPr algn="l" indent="0" marL="0">
               <a:buNone/>
             </a:pPr>
             <a:r>
@@ -10047,14 +10286,14 @@
       </p:sp>
       <p:pic>
         <p:nvPicPr>
-          <p:cNvPr id="4" name="Image 0" descr="講座スライド"/>
+          <p:cNvPr id="4" name="Image 0" descr="講座スライド">    </p:cNvPr>
           <p:cNvPicPr>
             <a:picLocks noChangeAspect="1"/>
           </p:cNvPicPr>
           <p:nvPr/>
         </p:nvPicPr>
         <p:blipFill>
-          <a:blip r:embed="rId3"/>
+          <a:blip r:embed="rId1"/>
           <a:stretch>
             <a:fillRect/>
           </a:stretch>
@@ -10097,10 +10336,7 @@
         </p:spPr>
         <p:txBody>
           <a:bodyPr/>
-          <a:lstStyle/>
-          <a:p>
-            <a:endParaRPr/>
-          </a:p>
+          <a:p/>
         </p:txBody>
       </p:sp>
       <p:sp>
@@ -10124,7 +10360,7 @@
           <a:bodyPr wrap="square" lIns="1016" tIns="1016" rIns="1016" bIns="1016" rtlCol="0" anchor="t"/>
           <a:lstStyle/>
           <a:p>
-            <a:pPr marL="0" indent="0">
+            <a:pPr indent="0" marL="0">
               <a:buNone/>
             </a:pPr>
             <a:r>
@@ -10160,7 +10396,7 @@
           <a:bodyPr wrap="square" lIns="1016" tIns="1016" rIns="1016" bIns="1016" rtlCol="0" anchor="t"/>
           <a:lstStyle/>
           <a:p>
-            <a:pPr marL="0" indent="0">
+            <a:pPr indent="0" marL="0">
               <a:spcAft>
                 <a:spcPts val="600"/>
               </a:spcAft>
@@ -10177,7 +10413,7 @@
             <a:endParaRPr lang="en-US" sz="1400" dirty="0"/>
           </a:p>
           <a:p>
-            <a:pPr marL="0" indent="0">
+            <a:pPr indent="0" marL="0">
               <a:spcAft>
                 <a:spcPts val="600"/>
               </a:spcAft>
@@ -10215,7 +10451,7 @@
           </a:prstGeom>
           <a:extLst>
             <a:ext uri="{C572A759-6A51-4108-AA02-DFA0A04FC94B}">
-              <ma14:wrappingTextBoxFlag xmlns:ma14="http://schemas.microsoft.com/office/mac/drawingml/2011/main" xmlns="" val="0"/>
+              <ma14:wrappingTextBoxFlag xmlns:ma14="http://schemas.microsoft.com/office/mac/drawingml/2011/main" val="0"/>
             </a:ext>
           </a:extLst>
         </p:spPr>
@@ -10233,7 +10469,7 @@
           <a:p>
             <a:pPr algn="r"/>
             <a:fld id="{F7021451-1387-4CA6-816F-3879F97B5CBC}" type="slidenum">
-              <a:rPr lang="en-US" b="0"/>
+              <a:rPr b="0" lang="en-US"/>
               <a:t>23</a:t>
             </a:fld>
             <a:endParaRPr lang="en-US"/>
@@ -10286,7 +10522,7 @@
           <a:bodyPr wrap="square" lIns="0" tIns="0" rIns="0" bIns="0" rtlCol="0" anchor="t"/>
           <a:lstStyle/>
           <a:p>
-            <a:pPr marL="0" indent="0">
+            <a:pPr indent="0" marL="0">
               <a:buNone/>
             </a:pPr>
             <a:r>
@@ -10304,11 +10540,9 @@
       <p:sp>
         <p:nvSpPr>
           <p:cNvPr id="3" name="Text 0"/>
-          <p:cNvSpPr>
-            <a:spLocks noGrp="1"/>
-          </p:cNvSpPr>
-          <p:nvPr>
-            <p:ph type="title" idx="100" hasCustomPrompt="1"/>
+          <p:cNvSpPr/>
+          <p:nvPr>
+            <p:ph idx="100" type="title" hasCustomPrompt="1"/>
           </p:nvPr>
         </p:nvSpPr>
         <p:spPr>
@@ -10326,7 +10560,7 @@
           <a:bodyPr wrap="square" lIns="0" tIns="0" rIns="0" bIns="0" rtlCol="0" anchor="ctr"/>
           <a:lstStyle/>
           <a:p>
-            <a:pPr marL="0" indent="0" algn="l">
+            <a:pPr algn="l" indent="0" marL="0">
               <a:buNone/>
             </a:pPr>
             <a:r>
@@ -10346,14 +10580,14 @@
       </p:sp>
       <p:pic>
         <p:nvPicPr>
-          <p:cNvPr id="4" name="Image 0" descr="講座スライド"/>
+          <p:cNvPr id="4" name="Image 0" descr="講座スライド">    </p:cNvPr>
           <p:cNvPicPr>
             <a:picLocks noChangeAspect="1"/>
           </p:cNvPicPr>
           <p:nvPr/>
         </p:nvPicPr>
         <p:blipFill>
-          <a:blip r:embed="rId3"/>
+          <a:blip r:embed="rId1"/>
           <a:stretch>
             <a:fillRect/>
           </a:stretch>
@@ -10396,10 +10630,7 @@
         </p:spPr>
         <p:txBody>
           <a:bodyPr/>
-          <a:lstStyle/>
-          <a:p>
-            <a:endParaRPr/>
-          </a:p>
+          <a:p/>
         </p:txBody>
       </p:sp>
       <p:sp>
@@ -10423,7 +10654,7 @@
           <a:bodyPr wrap="square" lIns="1016" tIns="1016" rIns="1016" bIns="1016" rtlCol="0" anchor="t"/>
           <a:lstStyle/>
           <a:p>
-            <a:pPr marL="0" indent="0">
+            <a:pPr indent="0" marL="0">
               <a:buNone/>
             </a:pPr>
             <a:r>
@@ -10459,7 +10690,7 @@
           <a:bodyPr wrap="square" lIns="1016" tIns="1016" rIns="1016" bIns="1016" rtlCol="0" anchor="t"/>
           <a:lstStyle/>
           <a:p>
-            <a:pPr marL="0" indent="0">
+            <a:pPr indent="0" marL="0">
               <a:spcAft>
                 <a:spcPts val="600"/>
               </a:spcAft>
@@ -10476,7 +10707,7 @@
             <a:endParaRPr lang="en-US" sz="1400" dirty="0"/>
           </a:p>
           <a:p>
-            <a:pPr marL="0" indent="0">
+            <a:pPr indent="0" marL="0">
               <a:spcAft>
                 <a:spcPts val="600"/>
               </a:spcAft>
@@ -10514,7 +10745,7 @@
           </a:prstGeom>
           <a:extLst>
             <a:ext uri="{C572A759-6A51-4108-AA02-DFA0A04FC94B}">
-              <ma14:wrappingTextBoxFlag xmlns:ma14="http://schemas.microsoft.com/office/mac/drawingml/2011/main" xmlns="" val="0"/>
+              <ma14:wrappingTextBoxFlag xmlns:ma14="http://schemas.microsoft.com/office/mac/drawingml/2011/main" val="0"/>
             </a:ext>
           </a:extLst>
         </p:spPr>
@@ -10532,7 +10763,7 @@
           <a:p>
             <a:pPr algn="r"/>
             <a:fld id="{F7021451-1387-4CA6-816F-3879F97B5CBC}" type="slidenum">
-              <a:rPr lang="en-US" b="0"/>
+              <a:rPr b="0" lang="en-US"/>
               <a:t>24</a:t>
             </a:fld>
             <a:endParaRPr lang="en-US"/>
@@ -10585,7 +10816,7 @@
           <a:bodyPr wrap="square" lIns="0" tIns="0" rIns="0" bIns="0" rtlCol="0" anchor="t"/>
           <a:lstStyle/>
           <a:p>
-            <a:pPr marL="0" indent="0">
+            <a:pPr indent="0" marL="0">
               <a:buNone/>
             </a:pPr>
             <a:r>
@@ -10603,11 +10834,9 @@
       <p:sp>
         <p:nvSpPr>
           <p:cNvPr id="3" name="Text 0"/>
-          <p:cNvSpPr>
-            <a:spLocks noGrp="1"/>
-          </p:cNvSpPr>
-          <p:nvPr>
-            <p:ph type="title" idx="100" hasCustomPrompt="1"/>
+          <p:cNvSpPr/>
+          <p:nvPr>
+            <p:ph idx="100" type="title" hasCustomPrompt="1"/>
           </p:nvPr>
         </p:nvSpPr>
         <p:spPr>
@@ -10625,7 +10854,7 @@
           <a:bodyPr wrap="square" lIns="0" tIns="0" rIns="0" bIns="0" rtlCol="0" anchor="ctr"/>
           <a:lstStyle/>
           <a:p>
-            <a:pPr marL="0" indent="0" algn="l">
+            <a:pPr algn="l" indent="0" marL="0">
               <a:buNone/>
             </a:pPr>
             <a:r>
@@ -10645,14 +10874,14 @@
       </p:sp>
       <p:pic>
         <p:nvPicPr>
-          <p:cNvPr id="4" name="Image 0" descr="講座スライド"/>
+          <p:cNvPr id="4" name="Image 0" descr="講座スライド">    </p:cNvPr>
           <p:cNvPicPr>
             <a:picLocks noChangeAspect="1"/>
           </p:cNvPicPr>
           <p:nvPr/>
         </p:nvPicPr>
         <p:blipFill>
-          <a:blip r:embed="rId3"/>
+          <a:blip r:embed="rId1"/>
           <a:stretch>
             <a:fillRect/>
           </a:stretch>
@@ -10695,10 +10924,7 @@
         </p:spPr>
         <p:txBody>
           <a:bodyPr/>
-          <a:lstStyle/>
-          <a:p>
-            <a:endParaRPr/>
-          </a:p>
+          <a:p/>
         </p:txBody>
       </p:sp>
       <p:sp>
@@ -10722,7 +10948,7 @@
           <a:bodyPr wrap="square" lIns="1016" tIns="1016" rIns="1016" bIns="1016" rtlCol="0" anchor="t"/>
           <a:lstStyle/>
           <a:p>
-            <a:pPr marL="0" indent="0">
+            <a:pPr indent="0" marL="0">
               <a:buNone/>
             </a:pPr>
             <a:r>
@@ -10758,7 +10984,7 @@
           <a:bodyPr wrap="square" lIns="1016" tIns="1016" rIns="1016" bIns="1016" rtlCol="0" anchor="t"/>
           <a:lstStyle/>
           <a:p>
-            <a:pPr marL="0" indent="0">
+            <a:pPr indent="0" marL="0">
               <a:spcAft>
                 <a:spcPts val="600"/>
               </a:spcAft>
@@ -10775,7 +11001,7 @@
             <a:endParaRPr lang="en-US" sz="1400" dirty="0"/>
           </a:p>
           <a:p>
-            <a:pPr marL="0" indent="0">
+            <a:pPr indent="0" marL="0">
               <a:spcAft>
                 <a:spcPts val="600"/>
               </a:spcAft>
@@ -10813,7 +11039,7 @@
           </a:prstGeom>
           <a:extLst>
             <a:ext uri="{C572A759-6A51-4108-AA02-DFA0A04FC94B}">
-              <ma14:wrappingTextBoxFlag xmlns:ma14="http://schemas.microsoft.com/office/mac/drawingml/2011/main" xmlns="" val="0"/>
+              <ma14:wrappingTextBoxFlag xmlns:ma14="http://schemas.microsoft.com/office/mac/drawingml/2011/main" val="0"/>
             </a:ext>
           </a:extLst>
         </p:spPr>
@@ -10831,7 +11057,7 @@
           <a:p>
             <a:pPr algn="r"/>
             <a:fld id="{F7021451-1387-4CA6-816F-3879F97B5CBC}" type="slidenum">
-              <a:rPr lang="en-US" b="0"/>
+              <a:rPr b="0" lang="en-US"/>
               <a:t>25</a:t>
             </a:fld>
             <a:endParaRPr lang="en-US"/>
@@ -10866,11 +11092,9 @@
       <p:sp>
         <p:nvSpPr>
           <p:cNvPr id="2" name="Text 0"/>
-          <p:cNvSpPr>
-            <a:spLocks noGrp="1"/>
-          </p:cNvSpPr>
-          <p:nvPr>
-            <p:ph type="title" idx="100" hasCustomPrompt="1"/>
+          <p:cNvSpPr/>
+          <p:nvPr>
+            <p:ph idx="100" type="title" hasCustomPrompt="1"/>
           </p:nvPr>
         </p:nvSpPr>
         <p:spPr>
@@ -10888,7 +11112,7 @@
           <a:bodyPr wrap="square" rtlCol="0" anchor="ctr"/>
           <a:lstStyle/>
           <a:p>
-            <a:pPr marL="0" indent="0" algn="ctr">
+            <a:pPr algn="ctr" indent="0" marL="0">
               <a:buNone/>
             </a:pPr>
             <a:r>
@@ -10909,11 +11133,9 @@
       <p:sp>
         <p:nvSpPr>
           <p:cNvPr id="3" name="Text 0"/>
-          <p:cNvSpPr>
-            <a:spLocks noGrp="1"/>
-          </p:cNvSpPr>
-          <p:nvPr>
-            <p:ph type="body" idx="101" hasCustomPrompt="1"/>
+          <p:cNvSpPr/>
+          <p:nvPr>
+            <p:ph idx="101" type="body" hasCustomPrompt="1"/>
           </p:nvPr>
         </p:nvSpPr>
         <p:spPr>
@@ -10931,7 +11153,7 @@
           <a:bodyPr wrap="square" rtlCol="0" anchor="t"/>
           <a:lstStyle/>
           <a:p>
-            <a:pPr marL="0" indent="0" algn="ctr">
+            <a:pPr algn="ctr" indent="0" marL="0">
               <a:buNone/>
             </a:pPr>
             <a:r>
@@ -10994,10 +11216,7 @@
         </p:spPr>
         <p:txBody>
           <a:bodyPr/>
-          <a:lstStyle/>
-          <a:p>
-            <a:endParaRPr/>
-          </a:p>
+          <a:p/>
         </p:txBody>
       </p:sp>
       <p:sp>
@@ -11021,7 +11240,7 @@
           <a:bodyPr wrap="square" lIns="0" tIns="0" rIns="0" bIns="0" rtlCol="0" anchor="t"/>
           <a:lstStyle/>
           <a:p>
-            <a:pPr marL="0" indent="0" algn="ctr">
+            <a:pPr algn="ctr" indent="0" marL="0">
               <a:buNone/>
             </a:pPr>
             <a:r>
@@ -11057,7 +11276,7 @@
           <a:bodyPr wrap="square" lIns="1016" tIns="1016" rIns="1016" bIns="1016" rtlCol="0" anchor="ctr"/>
           <a:lstStyle/>
           <a:p>
-            <a:pPr marL="0" indent="0" algn="ctr">
+            <a:pPr algn="ctr" indent="0" marL="0">
               <a:buNone/>
             </a:pPr>
             <a:r>
@@ -11074,7 +11293,7 @@
             <a:endParaRPr lang="en-US" sz="2800" dirty="0"/>
           </a:p>
           <a:p>
-            <a:pPr marL="0" indent="0" algn="ctr">
+            <a:pPr algn="ctr" indent="0" marL="0">
               <a:buNone/>
             </a:pPr>
             <a:r>
@@ -11113,7 +11332,7 @@
           <a:bodyPr wrap="square" lIns="1016" tIns="1016" rIns="1016" bIns="1016" rtlCol="0" anchor="t"/>
           <a:lstStyle/>
           <a:p>
-            <a:pPr marL="0" indent="0" algn="ctr">
+            <a:pPr algn="ctr" indent="0" marL="0">
               <a:lnSpc>
                 <a:spcPct val="130000"/>
               </a:lnSpc>
@@ -11130,7 +11349,7 @@
             <a:endParaRPr lang="en-US" sz="1600" dirty="0"/>
           </a:p>
           <a:p>
-            <a:pPr marL="0" indent="0" algn="ctr">
+            <a:pPr algn="ctr" indent="0" marL="0">
               <a:lnSpc>
                 <a:spcPct val="130000"/>
               </a:lnSpc>
@@ -11147,7 +11366,7 @@
             <a:endParaRPr lang="en-US" sz="1600" dirty="0"/>
           </a:p>
           <a:p>
-            <a:pPr marL="0" indent="0" algn="ctr">
+            <a:pPr algn="ctr" indent="0" marL="0">
               <a:lnSpc>
                 <a:spcPct val="130000"/>
               </a:lnSpc>
@@ -11185,7 +11404,7 @@
           </a:prstGeom>
           <a:extLst>
             <a:ext uri="{C572A759-6A51-4108-AA02-DFA0A04FC94B}">
-              <ma14:wrappingTextBoxFlag xmlns:ma14="http://schemas.microsoft.com/office/mac/drawingml/2011/main" xmlns="" val="0"/>
+              <ma14:wrappingTextBoxFlag xmlns:ma14="http://schemas.microsoft.com/office/mac/drawingml/2011/main" val="0"/>
             </a:ext>
           </a:extLst>
         </p:spPr>
@@ -11203,7 +11422,7 @@
           <a:p>
             <a:pPr algn="r"/>
             <a:fld id="{F7021451-1387-4CA6-816F-3879F97B5CBC}" type="slidenum">
-              <a:rPr lang="en-US" b="0"/>
+              <a:rPr b="0" lang="en-US"/>
               <a:t>27</a:t>
             </a:fld>
             <a:endParaRPr lang="en-US"/>
@@ -11258,10 +11477,7 @@
         </p:spPr>
         <p:txBody>
           <a:bodyPr/>
-          <a:lstStyle/>
-          <a:p>
-            <a:endParaRPr/>
-          </a:p>
+          <a:p/>
         </p:txBody>
       </p:sp>
       <p:sp>
@@ -11285,7 +11501,7 @@
           <a:bodyPr wrap="square" lIns="0" tIns="0" rIns="0" bIns="0" rtlCol="0" anchor="ctr"/>
           <a:lstStyle/>
           <a:p>
-            <a:pPr marL="0" indent="0" algn="ctr">
+            <a:pPr algn="ctr" indent="0" marL="0">
               <a:buNone/>
             </a:pPr>
             <a:r>
@@ -11321,7 +11537,7 @@
           <a:bodyPr wrap="square" lIns="0" tIns="0" rIns="0" bIns="0" rtlCol="0" anchor="t"/>
           <a:lstStyle/>
           <a:p>
-            <a:pPr marL="0" indent="0">
+            <a:pPr indent="0" marL="0">
               <a:buNone/>
             </a:pPr>
             <a:r>
@@ -11367,10 +11583,7 @@
         </p:spPr>
         <p:txBody>
           <a:bodyPr/>
-          <a:lstStyle/>
-          <a:p>
-            <a:endParaRPr/>
-          </a:p>
+          <a:p/>
         </p:txBody>
       </p:sp>
       <p:sp>
@@ -11400,7 +11613,7 @@
               </a:spcAft>
               <a:buSzPct val="100000"/>
               <a:buFont typeface="+mj-lt"/>
-              <a:buAutoNum type="arabicPeriod"/>
+              <a:buAutoNum type="arabicPeriod" startAt="1"/>
             </a:pPr>
             <a:r>
               <a:rPr lang="en-US" sz="1200" dirty="0">
@@ -11419,7 +11632,7 @@
               </a:spcAft>
               <a:buSzPct val="100000"/>
               <a:buFont typeface="+mj-lt"/>
-              <a:buAutoNum type="arabicPeriod"/>
+              <a:buAutoNum type="arabicPeriod" startAt="1"/>
             </a:pPr>
             <a:r>
               <a:rPr lang="en-US" sz="1200" dirty="0">
@@ -11438,7 +11651,7 @@
               </a:spcAft>
               <a:buSzPct val="100000"/>
               <a:buFont typeface="+mj-lt"/>
-              <a:buAutoNum type="arabicPeriod"/>
+              <a:buAutoNum type="arabicPeriod" startAt="1"/>
             </a:pPr>
             <a:r>
               <a:rPr lang="en-US" sz="1200" dirty="0">
@@ -11457,7 +11670,7 @@
               </a:spcAft>
               <a:buSzPct val="100000"/>
               <a:buFont typeface="+mj-lt"/>
-              <a:buAutoNum type="arabicPeriod"/>
+              <a:buAutoNum type="arabicPeriod" startAt="1"/>
             </a:pPr>
             <a:r>
               <a:rPr lang="en-US" sz="1200" dirty="0">
@@ -11476,7 +11689,7 @@
               </a:spcAft>
               <a:buSzPct val="100000"/>
               <a:buFont typeface="+mj-lt"/>
-              <a:buAutoNum type="arabicPeriod"/>
+              <a:buAutoNum type="arabicPeriod" startAt="1"/>
             </a:pPr>
             <a:r>
               <a:rPr lang="en-US" sz="1200" dirty="0">
@@ -11495,7 +11708,7 @@
               </a:spcAft>
               <a:buSzPct val="100000"/>
               <a:buFont typeface="+mj-lt"/>
-              <a:buAutoNum type="arabicPeriod"/>
+              <a:buAutoNum type="arabicPeriod" startAt="1"/>
             </a:pPr>
             <a:r>
               <a:rPr lang="en-US" sz="1200" dirty="0">
@@ -11511,14 +11724,14 @@
       </p:sp>
       <p:pic>
         <p:nvPicPr>
-          <p:cNvPr id="7" name="Image 0" descr="ガイドブック"/>
+          <p:cNvPr id="7" name="Image 0" descr="ガイドブック">    </p:cNvPr>
           <p:cNvPicPr>
             <a:picLocks noChangeAspect="1"/>
           </p:cNvPicPr>
           <p:nvPr/>
         </p:nvPicPr>
         <p:blipFill>
-          <a:blip r:embed="rId3"/>
+          <a:blip r:embed="rId1"/>
           <a:stretch>
             <a:fillRect/>
           </a:stretch>
@@ -11553,7 +11766,7 @@
           </a:prstGeom>
           <a:extLst>
             <a:ext uri="{C572A759-6A51-4108-AA02-DFA0A04FC94B}">
-              <ma14:wrappingTextBoxFlag xmlns:ma14="http://schemas.microsoft.com/office/mac/drawingml/2011/main" xmlns="" val="0"/>
+              <ma14:wrappingTextBoxFlag xmlns:ma14="http://schemas.microsoft.com/office/mac/drawingml/2011/main" val="0"/>
             </a:ext>
           </a:extLst>
         </p:spPr>
@@ -11571,7 +11784,7 @@
           <a:p>
             <a:pPr algn="r"/>
             <a:fld id="{F7021451-1387-4CA6-816F-3879F97B5CBC}" type="slidenum">
-              <a:rPr lang="en-US" b="0"/>
+              <a:rPr b="0" lang="en-US"/>
               <a:t>28</a:t>
             </a:fld>
             <a:endParaRPr lang="en-US"/>
@@ -11626,10 +11839,7 @@
         </p:spPr>
         <p:txBody>
           <a:bodyPr/>
-          <a:lstStyle/>
-          <a:p>
-            <a:endParaRPr/>
-          </a:p>
+          <a:p/>
         </p:txBody>
       </p:sp>
       <p:sp>
@@ -11653,7 +11863,7 @@
           <a:bodyPr wrap="square" lIns="0" tIns="0" rIns="0" bIns="0" rtlCol="0" anchor="t"/>
           <a:lstStyle/>
           <a:p>
-            <a:pPr marL="0" indent="0" algn="ctr">
+            <a:pPr algn="ctr" indent="0" marL="0">
               <a:buNone/>
             </a:pPr>
             <a:r>
@@ -11689,7 +11899,7 @@
           <a:bodyPr wrap="square" lIns="1016" tIns="1016" rIns="1016" bIns="1016" rtlCol="0" anchor="ctr"/>
           <a:lstStyle/>
           <a:p>
-            <a:pPr marL="0" indent="0" algn="ctr">
+            <a:pPr algn="ctr" indent="0" marL="0">
               <a:buNone/>
             </a:pPr>
             <a:r>
@@ -11728,7 +11938,7 @@
           <a:bodyPr wrap="square" lIns="1016" tIns="1016" rIns="1016" bIns="1016" rtlCol="0" anchor="ctr"/>
           <a:lstStyle/>
           <a:p>
-            <a:pPr marL="0" indent="0" algn="ctr">
+            <a:pPr algn="ctr" indent="0" marL="0">
               <a:buNone/>
             </a:pPr>
             <a:r>
@@ -11767,7 +11977,7 @@
           <a:bodyPr wrap="square" lIns="1016" tIns="1016" rIns="1016" bIns="1016" rtlCol="0" anchor="t"/>
           <a:lstStyle/>
           <a:p>
-            <a:pPr marL="0" indent="0" algn="ctr">
+            <a:pPr algn="ctr" indent="0" marL="0">
               <a:buNone/>
             </a:pPr>
             <a:r>
@@ -11802,7 +12012,7 @@
           </a:prstGeom>
           <a:extLst>
             <a:ext uri="{C572A759-6A51-4108-AA02-DFA0A04FC94B}">
-              <ma14:wrappingTextBoxFlag xmlns:ma14="http://schemas.microsoft.com/office/mac/drawingml/2011/main" xmlns="" val="0"/>
+              <ma14:wrappingTextBoxFlag xmlns:ma14="http://schemas.microsoft.com/office/mac/drawingml/2011/main" val="0"/>
             </a:ext>
           </a:extLst>
         </p:spPr>
@@ -11820,7 +12030,7 @@
           <a:p>
             <a:pPr algn="r"/>
             <a:fld id="{F7021451-1387-4CA6-816F-3879F97B5CBC}" type="slidenum">
-              <a:rPr lang="en-US" b="0"/>
+              <a:rPr b="0" lang="en-US"/>
               <a:t>29</a:t>
             </a:fld>
             <a:endParaRPr lang="en-US"/>
@@ -11855,11 +12065,9 @@
       <p:sp>
         <p:nvSpPr>
           <p:cNvPr id="2" name="Text 0"/>
-          <p:cNvSpPr>
-            <a:spLocks noGrp="1"/>
-          </p:cNvSpPr>
-          <p:nvPr>
-            <p:ph type="title" idx="100" hasCustomPrompt="1"/>
+          <p:cNvSpPr/>
+          <p:nvPr>
+            <p:ph idx="100" type="title" hasCustomPrompt="1"/>
           </p:nvPr>
         </p:nvSpPr>
         <p:spPr>
@@ -11877,7 +12085,7 @@
           <a:bodyPr wrap="square" lIns="0" tIns="0" rIns="0" bIns="0" rtlCol="0" anchor="ctr"/>
           <a:lstStyle/>
           <a:p>
-            <a:pPr marL="0" indent="0" algn="l">
+            <a:pPr algn="l" indent="0" marL="0">
               <a:buNone/>
             </a:pPr>
             <a:r>
@@ -11916,7 +12124,7 @@
           <a:bodyPr wrap="square" lIns="0" tIns="0" rIns="0" bIns="0" rtlCol="0" anchor="t"/>
           <a:lstStyle/>
           <a:p>
-            <a:pPr marL="0" indent="0">
+            <a:pPr indent="0" marL="0">
               <a:buNone/>
             </a:pPr>
             <a:r>
@@ -11959,10 +12167,7 @@
         </p:spPr>
         <p:txBody>
           <a:bodyPr/>
-          <a:lstStyle/>
-          <a:p>
-            <a:endParaRPr/>
-          </a:p>
+          <a:p/>
         </p:txBody>
       </p:sp>
       <p:sp>
@@ -11986,7 +12191,7 @@
           <a:bodyPr wrap="square" lIns="1016" tIns="1016" rIns="1016" bIns="1016" rtlCol="0" anchor="t"/>
           <a:lstStyle/>
           <a:p>
-            <a:pPr marL="0" indent="0">
+            <a:pPr indent="0" marL="0">
               <a:buNone/>
             </a:pPr>
             <a:r>
@@ -12022,7 +12227,7 @@
           <a:bodyPr wrap="square" lIns="1016" tIns="1016" rIns="1016" bIns="1016" rtlCol="0" anchor="t"/>
           <a:lstStyle/>
           <a:p>
-            <a:pPr marL="0" indent="0">
+            <a:pPr indent="0" marL="0">
               <a:buNone/>
             </a:pPr>
             <a:r>
@@ -12065,10 +12270,7 @@
         </p:spPr>
         <p:txBody>
           <a:bodyPr/>
-          <a:lstStyle/>
-          <a:p>
-            <a:endParaRPr/>
-          </a:p>
+          <a:p/>
         </p:txBody>
       </p:sp>
       <p:sp>
@@ -12092,7 +12294,7 @@
           <a:bodyPr wrap="square" lIns="1016" tIns="1016" rIns="1016" bIns="1016" rtlCol="0" anchor="t"/>
           <a:lstStyle/>
           <a:p>
-            <a:pPr marL="0" indent="0">
+            <a:pPr indent="0" marL="0">
               <a:buNone/>
             </a:pPr>
             <a:r>
@@ -12128,7 +12330,7 @@
           <a:bodyPr wrap="square" lIns="1016" tIns="1016" rIns="1016" bIns="1016" rtlCol="0" anchor="t"/>
           <a:lstStyle/>
           <a:p>
-            <a:pPr marL="0" indent="0">
+            <a:pPr indent="0" marL="0">
               <a:buNone/>
             </a:pPr>
             <a:r>
@@ -12171,10 +12373,7 @@
         </p:spPr>
         <p:txBody>
           <a:bodyPr/>
-          <a:lstStyle/>
-          <a:p>
-            <a:endParaRPr/>
-          </a:p>
+          <a:p/>
         </p:txBody>
       </p:sp>
       <p:sp>
@@ -12198,7 +12397,7 @@
           <a:bodyPr wrap="square" lIns="1016" tIns="1016" rIns="1016" bIns="1016" rtlCol="0" anchor="t"/>
           <a:lstStyle/>
           <a:p>
-            <a:pPr marL="0" indent="0">
+            <a:pPr indent="0" marL="0">
               <a:buNone/>
             </a:pPr>
             <a:r>
@@ -12234,7 +12433,7 @@
           <a:bodyPr wrap="square" lIns="1016" tIns="1016" rIns="1016" bIns="1016" rtlCol="0" anchor="t"/>
           <a:lstStyle/>
           <a:p>
-            <a:pPr marL="0" indent="0">
+            <a:pPr indent="0" marL="0">
               <a:buNone/>
             </a:pPr>
             <a:r>
@@ -12248,7 +12447,7 @@
             <a:endParaRPr lang="en-US" sz="1600" dirty="0"/>
           </a:p>
           <a:p>
-            <a:pPr marL="0" indent="0">
+            <a:pPr indent="0" marL="0">
               <a:buNone/>
             </a:pPr>
             <a:r>
@@ -12283,7 +12482,7 @@
           </a:prstGeom>
           <a:extLst>
             <a:ext uri="{C572A759-6A51-4108-AA02-DFA0A04FC94B}">
-              <ma14:wrappingTextBoxFlag xmlns:ma14="http://schemas.microsoft.com/office/mac/drawingml/2011/main" xmlns="" val="0"/>
+              <ma14:wrappingTextBoxFlag xmlns:ma14="http://schemas.microsoft.com/office/mac/drawingml/2011/main" val="0"/>
             </a:ext>
           </a:extLst>
         </p:spPr>
@@ -12301,7 +12500,7 @@
           <a:p>
             <a:pPr algn="r"/>
             <a:fld id="{F7021451-1387-4CA6-816F-3879F97B5CBC}" type="slidenum">
-              <a:rPr lang="en-US" b="0"/>
+              <a:rPr b="0" lang="en-US"/>
               <a:t>3</a:t>
             </a:fld>
             <a:endParaRPr lang="en-US"/>
@@ -12356,10 +12555,7 @@
         </p:spPr>
         <p:txBody>
           <a:bodyPr/>
-          <a:lstStyle/>
-          <a:p>
-            <a:endParaRPr/>
-          </a:p>
+          <a:p/>
         </p:txBody>
       </p:sp>
       <p:sp>
@@ -12383,7 +12579,7 @@
           <a:bodyPr wrap="square" lIns="0" tIns="0" rIns="0" bIns="0" rtlCol="0" anchor="t"/>
           <a:lstStyle/>
           <a:p>
-            <a:pPr marL="0" indent="0" algn="ctr">
+            <a:pPr algn="ctr" indent="0" marL="0">
               <a:buNone/>
             </a:pPr>
             <a:r>
@@ -12401,11 +12597,9 @@
       <p:sp>
         <p:nvSpPr>
           <p:cNvPr id="4" name="Text 0"/>
-          <p:cNvSpPr>
-            <a:spLocks noGrp="1"/>
-          </p:cNvSpPr>
-          <p:nvPr>
-            <p:ph type="title" idx="100" hasCustomPrompt="1"/>
+          <p:cNvSpPr/>
+          <p:nvPr>
+            <p:ph idx="100" type="title" hasCustomPrompt="1"/>
           </p:nvPr>
         </p:nvSpPr>
         <p:spPr>
@@ -12423,7 +12617,7 @@
           <a:bodyPr wrap="square" rtlCol="0" anchor="ctr"/>
           <a:lstStyle/>
           <a:p>
-            <a:pPr marL="0" indent="0" algn="ctr">
+            <a:pPr algn="ctr" indent="0" marL="0">
               <a:buNone/>
             </a:pPr>
             <a:r>
@@ -12440,7 +12634,7 @@
             <a:endParaRPr lang="en-US" sz="3200" dirty="0"/>
           </a:p>
           <a:p>
-            <a:pPr marL="0" indent="0" algn="ctr">
+            <a:pPr algn="ctr" indent="0" marL="0">
               <a:buNone/>
             </a:pPr>
             <a:r>
@@ -12457,7 +12651,7 @@
             <a:endParaRPr lang="en-US" sz="3200" dirty="0"/>
           </a:p>
           <a:p>
-            <a:pPr marL="0" indent="0" algn="ctr">
+            <a:pPr algn="ctr" indent="0" marL="0">
               <a:buNone/>
             </a:pPr>
             <a:r>
@@ -12495,7 +12689,7 @@
           </a:prstGeom>
           <a:extLst>
             <a:ext uri="{C572A759-6A51-4108-AA02-DFA0A04FC94B}">
-              <ma14:wrappingTextBoxFlag xmlns:ma14="http://schemas.microsoft.com/office/mac/drawingml/2011/main" xmlns="" val="0"/>
+              <ma14:wrappingTextBoxFlag xmlns:ma14="http://schemas.microsoft.com/office/mac/drawingml/2011/main" val="0"/>
             </a:ext>
           </a:extLst>
         </p:spPr>
@@ -12513,7 +12707,7 @@
           <a:p>
             <a:pPr algn="r"/>
             <a:fld id="{F7021451-1387-4CA6-816F-3879F97B5CBC}" type="slidenum">
-              <a:rPr lang="en-US" b="0"/>
+              <a:rPr b="0" lang="en-US"/>
               <a:t>30</a:t>
             </a:fld>
             <a:endParaRPr lang="en-US"/>
@@ -12568,10 +12762,7 @@
         </p:spPr>
         <p:txBody>
           <a:bodyPr/>
-          <a:lstStyle/>
-          <a:p>
-            <a:endParaRPr/>
-          </a:p>
+          <a:p/>
         </p:txBody>
       </p:sp>
       <p:sp>
@@ -12595,7 +12786,7 @@
           <a:bodyPr wrap="square" lIns="0" tIns="0" rIns="0" bIns="0" rtlCol="0" anchor="t"/>
           <a:lstStyle/>
           <a:p>
-            <a:pPr marL="0" indent="0" algn="ctr">
+            <a:pPr algn="ctr" indent="0" marL="0">
               <a:buNone/>
             </a:pPr>
             <a:r>
@@ -12613,11 +12804,9 @@
       <p:sp>
         <p:nvSpPr>
           <p:cNvPr id="4" name="Text 0"/>
-          <p:cNvSpPr>
-            <a:spLocks noGrp="1"/>
-          </p:cNvSpPr>
-          <p:nvPr>
-            <p:ph type="title" idx="100" hasCustomPrompt="1"/>
+          <p:cNvSpPr/>
+          <p:nvPr>
+            <p:ph idx="100" type="title" hasCustomPrompt="1"/>
           </p:nvPr>
         </p:nvSpPr>
         <p:spPr>
@@ -12635,7 +12824,7 @@
           <a:bodyPr wrap="square" rtlCol="0" anchor="ctr"/>
           <a:lstStyle/>
           <a:p>
-            <a:pPr marL="0" indent="0" algn="ctr">
+            <a:pPr algn="ctr" indent="0" marL="0">
               <a:buNone/>
             </a:pPr>
             <a:r>
@@ -12652,7 +12841,7 @@
             <a:endParaRPr lang="en-US" sz="3200" dirty="0"/>
           </a:p>
           <a:p>
-            <a:pPr marL="0" indent="0" algn="ctr">
+            <a:pPr algn="ctr" indent="0" marL="0">
               <a:buNone/>
             </a:pPr>
             <a:r>
@@ -12673,11 +12862,9 @@
       <p:sp>
         <p:nvSpPr>
           <p:cNvPr id="5" name="Text 0"/>
-          <p:cNvSpPr>
-            <a:spLocks noGrp="1"/>
-          </p:cNvSpPr>
-          <p:nvPr>
-            <p:ph type="body" idx="101" hasCustomPrompt="1"/>
+          <p:cNvSpPr/>
+          <p:nvPr>
+            <p:ph idx="101" type="body" hasCustomPrompt="1"/>
           </p:nvPr>
         </p:nvSpPr>
         <p:spPr>
@@ -12695,7 +12882,7 @@
           <a:bodyPr wrap="square" rtlCol="0" anchor="t"/>
           <a:lstStyle/>
           <a:p>
-            <a:pPr marL="0" indent="0" algn="ctr">
+            <a:pPr algn="ctr" indent="0" marL="0">
               <a:buNone/>
             </a:pPr>
             <a:r>
@@ -12709,7 +12896,7 @@
             <a:endParaRPr lang="en-US" sz="1500" dirty="0"/>
           </a:p>
           <a:p>
-            <a:pPr marL="0" indent="0" algn="ctr">
+            <a:pPr algn="ctr" indent="0" marL="0">
               <a:buNone/>
             </a:pPr>
             <a:r>
@@ -12744,7 +12931,7 @@
           </a:prstGeom>
           <a:extLst>
             <a:ext uri="{C572A759-6A51-4108-AA02-DFA0A04FC94B}">
-              <ma14:wrappingTextBoxFlag xmlns:ma14="http://schemas.microsoft.com/office/mac/drawingml/2011/main" xmlns="" val="0"/>
+              <ma14:wrappingTextBoxFlag xmlns:ma14="http://schemas.microsoft.com/office/mac/drawingml/2011/main" val="0"/>
             </a:ext>
           </a:extLst>
         </p:spPr>
@@ -12762,7 +12949,7 @@
           <a:p>
             <a:pPr algn="r"/>
             <a:fld id="{F7021451-1387-4CA6-816F-3879F97B5CBC}" type="slidenum">
-              <a:rPr lang="en-US" b="0"/>
+              <a:rPr b="0" lang="en-US"/>
               <a:t>31</a:t>
             </a:fld>
             <a:endParaRPr lang="en-US"/>
@@ -12797,11 +12984,9 @@
       <p:sp>
         <p:nvSpPr>
           <p:cNvPr id="2" name="Text 0"/>
-          <p:cNvSpPr>
-            <a:spLocks noGrp="1"/>
-          </p:cNvSpPr>
-          <p:nvPr>
-            <p:ph type="title" idx="100" hasCustomPrompt="1"/>
+          <p:cNvSpPr/>
+          <p:nvPr>
+            <p:ph idx="100" type="title" hasCustomPrompt="1"/>
           </p:nvPr>
         </p:nvSpPr>
         <p:spPr>
@@ -12819,7 +13004,7 @@
           <a:bodyPr wrap="square" lIns="0" tIns="0" rIns="0" bIns="0" rtlCol="0" anchor="ctr"/>
           <a:lstStyle/>
           <a:p>
-            <a:pPr marL="0" indent="0" algn="l">
+            <a:pPr algn="l" indent="0" marL="0">
               <a:buNone/>
             </a:pPr>
             <a:r>
@@ -12853,34 +13038,16 @@
         </p:nvGraphicFramePr>
         <p:xfrm>
           <a:off x="457200" y="1188720"/>
-          <a:ext cx="5303520" cy="3319272"/>
+          <a:ext cx="5303520" cy="914400"/>
         </p:xfrm>
         <a:graphic>
           <a:graphicData uri="http://schemas.openxmlformats.org/drawingml/2006/table">
             <a:tbl>
               <a:tblPr/>
               <a:tblGrid>
-                <a:gridCol w="548640">
-                  <a:extLst>
-                    <a:ext uri="{9D8B030D-6E8A-4147-A177-3AD203B41FA5}">
-                      <a16:colId xmlns:a16="http://schemas.microsoft.com/office/drawing/2014/main" val="20000"/>
-                    </a:ext>
-                  </a:extLst>
-                </a:gridCol>
-                <a:gridCol w="3749040">
-                  <a:extLst>
-                    <a:ext uri="{9D8B030D-6E8A-4147-A177-3AD203B41FA5}">
-                      <a16:colId xmlns:a16="http://schemas.microsoft.com/office/drawing/2014/main" val="20001"/>
-                    </a:ext>
-                  </a:extLst>
-                </a:gridCol>
-                <a:gridCol w="1005840">
-                  <a:extLst>
-                    <a:ext uri="{9D8B030D-6E8A-4147-A177-3AD203B41FA5}">
-                      <a16:colId xmlns:a16="http://schemas.microsoft.com/office/drawing/2014/main" val="20002"/>
-                    </a:ext>
-                  </a:extLst>
-                </a:gridCol>
+                <a:gridCol w="548640"/>
+                <a:gridCol w="3749040"/>
+                <a:gridCol w="1005840"/>
               </a:tblGrid>
               <a:tr h="301752">
                 <a:tc>
@@ -12888,7 +13055,7 @@
                     <a:bodyPr/>
                     <a:lstStyle/>
                     <a:p>
-                      <a:pPr marL="0" indent="0" algn="ctr">
+                      <a:pPr algn="ctr" indent="0" marL="0">
                         <a:buNone/>
                       </a:pPr>
                       <a:r>
@@ -12902,7 +13069,7 @@
                       <a:endParaRPr lang="en-US" sz="1300" dirty="0"/>
                     </a:p>
                   </a:txBody>
-                  <a:tcPr anchor="ctr">
+                  <a:tcPr marL="91440" marR="91440" marT="45720" marB="45720" anchor="ctr">
                     <a:lnL w="9525" cap="flat" cmpd="sng" algn="ctr">
                       <a:solidFill>
                         <a:srgbClr val="E9D9B6"/>
@@ -12949,7 +13116,7 @@
                     <a:bodyPr/>
                     <a:lstStyle/>
                     <a:p>
-                      <a:pPr marL="0" indent="0" algn="ctr">
+                      <a:pPr algn="ctr" indent="0" marL="0">
                         <a:buNone/>
                       </a:pPr>
                       <a:r>
@@ -12963,7 +13130,7 @@
                       <a:endParaRPr lang="en-US" sz="1300" dirty="0"/>
                     </a:p>
                   </a:txBody>
-                  <a:tcPr anchor="ctr">
+                  <a:tcPr marL="91440" marR="91440" marT="45720" marB="45720" anchor="ctr">
                     <a:lnL w="9525" cap="flat" cmpd="sng" algn="ctr">
                       <a:solidFill>
                         <a:srgbClr val="E9D9B6"/>
@@ -13010,7 +13177,7 @@
                     <a:bodyPr/>
                     <a:lstStyle/>
                     <a:p>
-                      <a:pPr marL="0" indent="0" algn="ctr">
+                      <a:pPr algn="ctr" indent="0" marL="0">
                         <a:buNone/>
                       </a:pPr>
                       <a:r>
@@ -13024,7 +13191,7 @@
                       <a:endParaRPr lang="en-US" sz="1300" dirty="0"/>
                     </a:p>
                   </a:txBody>
-                  <a:tcPr anchor="ctr">
+                  <a:tcPr marL="91440" marR="91440" marT="45720" marB="45720" anchor="ctr">
                     <a:lnL w="9525" cap="flat" cmpd="sng" algn="ctr">
                       <a:solidFill>
                         <a:srgbClr val="E9D9B6"/>
@@ -13066,11 +13233,6 @@
                     </a:solidFill>
                   </a:tcPr>
                 </a:tc>
-                <a:extLst>
-                  <a:ext uri="{0D108BD9-81ED-4DB2-BD59-A6C34878D82A}">
-                    <a16:rowId xmlns:a16="http://schemas.microsoft.com/office/drawing/2014/main" val="10000"/>
-                  </a:ext>
-                </a:extLst>
               </a:tr>
               <a:tr h="301752">
                 <a:tc>
@@ -13078,7 +13240,7 @@
                     <a:bodyPr/>
                     <a:lstStyle/>
                     <a:p>
-                      <a:pPr marL="0" indent="0" algn="ctr">
+                      <a:pPr algn="ctr" indent="0" marL="0">
                         <a:buNone/>
                       </a:pPr>
                       <a:r>
@@ -13092,7 +13254,7 @@
                       <a:endParaRPr lang="en-US" sz="1300" dirty="0"/>
                     </a:p>
                   </a:txBody>
-                  <a:tcPr>
+                  <a:tcPr marL="91440" marR="91440" marT="45720" marB="45720">
                     <a:lnL w="9525" cap="flat" cmpd="sng" algn="ctr">
                       <a:solidFill>
                         <a:srgbClr val="E9D9B6"/>
@@ -13139,13 +13301,13 @@
                     <a:bodyPr/>
                     <a:lstStyle/>
                     <a:p>
-                      <a:pPr marL="0" indent="0">
+                      <a:pPr indent="0" marL="0">
                         <a:buNone/>
                       </a:pPr>
                       <a:endParaRPr lang="en-US" sz="1300" dirty="0"/>
                     </a:p>
                   </a:txBody>
-                  <a:tcPr>
+                  <a:tcPr marL="91440" marR="91440" marT="45720" marB="45720">
                     <a:lnL w="9525" cap="flat" cmpd="sng" algn="ctr">
                       <a:solidFill>
                         <a:srgbClr val="E9D9B6"/>
@@ -13192,7 +13354,7 @@
                     <a:bodyPr/>
                     <a:lstStyle/>
                     <a:p>
-                      <a:pPr marL="0" indent="0" algn="r">
+                      <a:pPr algn="r" indent="0" marL="0">
                         <a:buNone/>
                       </a:pPr>
                       <a:r>
@@ -13206,7 +13368,7 @@
                       <a:endParaRPr lang="en-US" sz="1300" dirty="0"/>
                     </a:p>
                   </a:txBody>
-                  <a:tcPr>
+                  <a:tcPr marL="91440" marR="91440" marT="45720" marB="45720">
                     <a:lnL w="9525" cap="flat" cmpd="sng" algn="ctr">
                       <a:solidFill>
                         <a:srgbClr val="E9D9B6"/>
@@ -13248,11 +13410,6 @@
                     </a:solidFill>
                   </a:tcPr>
                 </a:tc>
-                <a:extLst>
-                  <a:ext uri="{0D108BD9-81ED-4DB2-BD59-A6C34878D82A}">
-                    <a16:rowId xmlns:a16="http://schemas.microsoft.com/office/drawing/2014/main" val="10001"/>
-                  </a:ext>
-                </a:extLst>
               </a:tr>
               <a:tr h="301752">
                 <a:tc>
@@ -13260,7 +13417,7 @@
                     <a:bodyPr/>
                     <a:lstStyle/>
                     <a:p>
-                      <a:pPr marL="0" indent="0" algn="ctr">
+                      <a:pPr algn="ctr" indent="0" marL="0">
                         <a:buNone/>
                       </a:pPr>
                       <a:r>
@@ -13274,7 +13431,7 @@
                       <a:endParaRPr lang="en-US" sz="1300" dirty="0"/>
                     </a:p>
                   </a:txBody>
-                  <a:tcPr>
+                  <a:tcPr marL="91440" marR="91440" marT="45720" marB="45720">
                     <a:lnL w="9525" cap="flat" cmpd="sng" algn="ctr">
                       <a:solidFill>
                         <a:srgbClr val="E9D9B6"/>
@@ -13321,13 +13478,13 @@
                     <a:bodyPr/>
                     <a:lstStyle/>
                     <a:p>
-                      <a:pPr marL="0" indent="0">
+                      <a:pPr indent="0" marL="0">
                         <a:buNone/>
                       </a:pPr>
                       <a:endParaRPr lang="en-US" sz="1300" dirty="0"/>
                     </a:p>
                   </a:txBody>
-                  <a:tcPr>
+                  <a:tcPr marL="91440" marR="91440" marT="45720" marB="45720">
                     <a:lnL w="9525" cap="flat" cmpd="sng" algn="ctr">
                       <a:solidFill>
                         <a:srgbClr val="E9D9B6"/>
@@ -13374,7 +13531,7 @@
                     <a:bodyPr/>
                     <a:lstStyle/>
                     <a:p>
-                      <a:pPr marL="0" indent="0" algn="r">
+                      <a:pPr algn="r" indent="0" marL="0">
                         <a:buNone/>
                       </a:pPr>
                       <a:r>
@@ -13388,7 +13545,7 @@
                       <a:endParaRPr lang="en-US" sz="1300" dirty="0"/>
                     </a:p>
                   </a:txBody>
-                  <a:tcPr>
+                  <a:tcPr marL="91440" marR="91440" marT="45720" marB="45720">
                     <a:lnL w="9525" cap="flat" cmpd="sng" algn="ctr">
                       <a:solidFill>
                         <a:srgbClr val="E9D9B6"/>
@@ -13430,11 +13587,6 @@
                     </a:solidFill>
                   </a:tcPr>
                 </a:tc>
-                <a:extLst>
-                  <a:ext uri="{0D108BD9-81ED-4DB2-BD59-A6C34878D82A}">
-                    <a16:rowId xmlns:a16="http://schemas.microsoft.com/office/drawing/2014/main" val="10002"/>
-                  </a:ext>
-                </a:extLst>
               </a:tr>
               <a:tr h="301752">
                 <a:tc>
@@ -13442,7 +13594,7 @@
                     <a:bodyPr/>
                     <a:lstStyle/>
                     <a:p>
-                      <a:pPr marL="0" indent="0" algn="ctr">
+                      <a:pPr algn="ctr" indent="0" marL="0">
                         <a:buNone/>
                       </a:pPr>
                       <a:r>
@@ -13456,7 +13608,7 @@
                       <a:endParaRPr lang="en-US" sz="1300" dirty="0"/>
                     </a:p>
                   </a:txBody>
-                  <a:tcPr>
+                  <a:tcPr marL="91440" marR="91440" marT="45720" marB="45720">
                     <a:lnL w="9525" cap="flat" cmpd="sng" algn="ctr">
                       <a:solidFill>
                         <a:srgbClr val="E9D9B6"/>
@@ -13503,13 +13655,13 @@
                     <a:bodyPr/>
                     <a:lstStyle/>
                     <a:p>
-                      <a:pPr marL="0" indent="0">
+                      <a:pPr indent="0" marL="0">
                         <a:buNone/>
                       </a:pPr>
                       <a:endParaRPr lang="en-US" sz="1300" dirty="0"/>
                     </a:p>
                   </a:txBody>
-                  <a:tcPr>
+                  <a:tcPr marL="91440" marR="91440" marT="45720" marB="45720">
                     <a:lnL w="9525" cap="flat" cmpd="sng" algn="ctr">
                       <a:solidFill>
                         <a:srgbClr val="E9D9B6"/>
@@ -13556,7 +13708,7 @@
                     <a:bodyPr/>
                     <a:lstStyle/>
                     <a:p>
-                      <a:pPr marL="0" indent="0" algn="r">
+                      <a:pPr algn="r" indent="0" marL="0">
                         <a:buNone/>
                       </a:pPr>
                       <a:r>
@@ -13570,7 +13722,7 @@
                       <a:endParaRPr lang="en-US" sz="1300" dirty="0"/>
                     </a:p>
                   </a:txBody>
-                  <a:tcPr>
+                  <a:tcPr marL="91440" marR="91440" marT="45720" marB="45720">
                     <a:lnL w="9525" cap="flat" cmpd="sng" algn="ctr">
                       <a:solidFill>
                         <a:srgbClr val="E9D9B6"/>
@@ -13612,11 +13764,6 @@
                     </a:solidFill>
                   </a:tcPr>
                 </a:tc>
-                <a:extLst>
-                  <a:ext uri="{0D108BD9-81ED-4DB2-BD59-A6C34878D82A}">
-                    <a16:rowId xmlns:a16="http://schemas.microsoft.com/office/drawing/2014/main" val="10003"/>
-                  </a:ext>
-                </a:extLst>
               </a:tr>
               <a:tr h="301752">
                 <a:tc>
@@ -13624,7 +13771,7 @@
                     <a:bodyPr/>
                     <a:lstStyle/>
                     <a:p>
-                      <a:pPr marL="0" indent="0" algn="ctr">
+                      <a:pPr algn="ctr" indent="0" marL="0">
                         <a:buNone/>
                       </a:pPr>
                       <a:r>
@@ -13638,7 +13785,7 @@
                       <a:endParaRPr lang="en-US" sz="1300" dirty="0"/>
                     </a:p>
                   </a:txBody>
-                  <a:tcPr>
+                  <a:tcPr marL="91440" marR="91440" marT="45720" marB="45720">
                     <a:lnL w="9525" cap="flat" cmpd="sng" algn="ctr">
                       <a:solidFill>
                         <a:srgbClr val="E9D9B6"/>
@@ -13685,13 +13832,13 @@
                     <a:bodyPr/>
                     <a:lstStyle/>
                     <a:p>
-                      <a:pPr marL="0" indent="0">
+                      <a:pPr indent="0" marL="0">
                         <a:buNone/>
                       </a:pPr>
                       <a:endParaRPr lang="en-US" sz="1300" dirty="0"/>
                     </a:p>
                   </a:txBody>
-                  <a:tcPr>
+                  <a:tcPr marL="91440" marR="91440" marT="45720" marB="45720">
                     <a:lnL w="9525" cap="flat" cmpd="sng" algn="ctr">
                       <a:solidFill>
                         <a:srgbClr val="E9D9B6"/>
@@ -13738,7 +13885,7 @@
                     <a:bodyPr/>
                     <a:lstStyle/>
                     <a:p>
-                      <a:pPr marL="0" indent="0" algn="r">
+                      <a:pPr algn="r" indent="0" marL="0">
                         <a:buNone/>
                       </a:pPr>
                       <a:r>
@@ -13752,7 +13899,7 @@
                       <a:endParaRPr lang="en-US" sz="1300" dirty="0"/>
                     </a:p>
                   </a:txBody>
-                  <a:tcPr>
+                  <a:tcPr marL="91440" marR="91440" marT="45720" marB="45720">
                     <a:lnL w="9525" cap="flat" cmpd="sng" algn="ctr">
                       <a:solidFill>
                         <a:srgbClr val="E9D9B6"/>
@@ -13794,11 +13941,6 @@
                     </a:solidFill>
                   </a:tcPr>
                 </a:tc>
-                <a:extLst>
-                  <a:ext uri="{0D108BD9-81ED-4DB2-BD59-A6C34878D82A}">
-                    <a16:rowId xmlns:a16="http://schemas.microsoft.com/office/drawing/2014/main" val="10004"/>
-                  </a:ext>
-                </a:extLst>
               </a:tr>
               <a:tr h="301752">
                 <a:tc>
@@ -13806,7 +13948,7 @@
                     <a:bodyPr/>
                     <a:lstStyle/>
                     <a:p>
-                      <a:pPr marL="0" indent="0" algn="ctr">
+                      <a:pPr algn="ctr" indent="0" marL="0">
                         <a:buNone/>
                       </a:pPr>
                       <a:r>
@@ -13820,7 +13962,7 @@
                       <a:endParaRPr lang="en-US" sz="1300" dirty="0"/>
                     </a:p>
                   </a:txBody>
-                  <a:tcPr>
+                  <a:tcPr marL="91440" marR="91440" marT="45720" marB="45720">
                     <a:lnL w="9525" cap="flat" cmpd="sng" algn="ctr">
                       <a:solidFill>
                         <a:srgbClr val="E9D9B6"/>
@@ -13867,13 +14009,13 @@
                     <a:bodyPr/>
                     <a:lstStyle/>
                     <a:p>
-                      <a:pPr marL="0" indent="0">
+                      <a:pPr indent="0" marL="0">
                         <a:buNone/>
                       </a:pPr>
                       <a:endParaRPr lang="en-US" sz="1300" dirty="0"/>
                     </a:p>
                   </a:txBody>
-                  <a:tcPr>
+                  <a:tcPr marL="91440" marR="91440" marT="45720" marB="45720">
                     <a:lnL w="9525" cap="flat" cmpd="sng" algn="ctr">
                       <a:solidFill>
                         <a:srgbClr val="E9D9B6"/>
@@ -13920,7 +14062,7 @@
                     <a:bodyPr/>
                     <a:lstStyle/>
                     <a:p>
-                      <a:pPr marL="0" indent="0" algn="r">
+                      <a:pPr algn="r" indent="0" marL="0">
                         <a:buNone/>
                       </a:pPr>
                       <a:r>
@@ -13934,7 +14076,7 @@
                       <a:endParaRPr lang="en-US" sz="1300" dirty="0"/>
                     </a:p>
                   </a:txBody>
-                  <a:tcPr>
+                  <a:tcPr marL="91440" marR="91440" marT="45720" marB="45720">
                     <a:lnL w="9525" cap="flat" cmpd="sng" algn="ctr">
                       <a:solidFill>
                         <a:srgbClr val="E9D9B6"/>
@@ -13976,11 +14118,6 @@
                     </a:solidFill>
                   </a:tcPr>
                 </a:tc>
-                <a:extLst>
-                  <a:ext uri="{0D108BD9-81ED-4DB2-BD59-A6C34878D82A}">
-                    <a16:rowId xmlns:a16="http://schemas.microsoft.com/office/drawing/2014/main" val="10005"/>
-                  </a:ext>
-                </a:extLst>
               </a:tr>
               <a:tr h="301752">
                 <a:tc>
@@ -13988,7 +14125,7 @@
                     <a:bodyPr/>
                     <a:lstStyle/>
                     <a:p>
-                      <a:pPr marL="0" indent="0" algn="ctr">
+                      <a:pPr algn="ctr" indent="0" marL="0">
                         <a:buNone/>
                       </a:pPr>
                       <a:r>
@@ -14002,7 +14139,7 @@
                       <a:endParaRPr lang="en-US" sz="1300" dirty="0"/>
                     </a:p>
                   </a:txBody>
-                  <a:tcPr>
+                  <a:tcPr marL="91440" marR="91440" marT="45720" marB="45720">
                     <a:lnL w="9525" cap="flat" cmpd="sng" algn="ctr">
                       <a:solidFill>
                         <a:srgbClr val="E9D9B6"/>
@@ -14049,13 +14186,13 @@
                     <a:bodyPr/>
                     <a:lstStyle/>
                     <a:p>
-                      <a:pPr marL="0" indent="0">
+                      <a:pPr indent="0" marL="0">
                         <a:buNone/>
                       </a:pPr>
                       <a:endParaRPr lang="en-US" sz="1300" dirty="0"/>
                     </a:p>
                   </a:txBody>
-                  <a:tcPr>
+                  <a:tcPr marL="91440" marR="91440" marT="45720" marB="45720">
                     <a:lnL w="9525" cap="flat" cmpd="sng" algn="ctr">
                       <a:solidFill>
                         <a:srgbClr val="E9D9B6"/>
@@ -14102,7 +14239,7 @@
                     <a:bodyPr/>
                     <a:lstStyle/>
                     <a:p>
-                      <a:pPr marL="0" indent="0" algn="r">
+                      <a:pPr algn="r" indent="0" marL="0">
                         <a:buNone/>
                       </a:pPr>
                       <a:r>
@@ -14116,7 +14253,7 @@
                       <a:endParaRPr lang="en-US" sz="1300" dirty="0"/>
                     </a:p>
                   </a:txBody>
-                  <a:tcPr>
+                  <a:tcPr marL="91440" marR="91440" marT="45720" marB="45720">
                     <a:lnL w="9525" cap="flat" cmpd="sng" algn="ctr">
                       <a:solidFill>
                         <a:srgbClr val="E9D9B6"/>
@@ -14158,11 +14295,6 @@
                     </a:solidFill>
                   </a:tcPr>
                 </a:tc>
-                <a:extLst>
-                  <a:ext uri="{0D108BD9-81ED-4DB2-BD59-A6C34878D82A}">
-                    <a16:rowId xmlns:a16="http://schemas.microsoft.com/office/drawing/2014/main" val="10006"/>
-                  </a:ext>
-                </a:extLst>
               </a:tr>
               <a:tr h="301752">
                 <a:tc>
@@ -14170,7 +14302,7 @@
                     <a:bodyPr/>
                     <a:lstStyle/>
                     <a:p>
-                      <a:pPr marL="0" indent="0" algn="ctr">
+                      <a:pPr algn="ctr" indent="0" marL="0">
                         <a:buNone/>
                       </a:pPr>
                       <a:r>
@@ -14184,7 +14316,7 @@
                       <a:endParaRPr lang="en-US" sz="1300" dirty="0"/>
                     </a:p>
                   </a:txBody>
-                  <a:tcPr>
+                  <a:tcPr marL="91440" marR="91440" marT="45720" marB="45720">
                     <a:lnL w="9525" cap="flat" cmpd="sng" algn="ctr">
                       <a:solidFill>
                         <a:srgbClr val="E9D9B6"/>
@@ -14231,13 +14363,13 @@
                     <a:bodyPr/>
                     <a:lstStyle/>
                     <a:p>
-                      <a:pPr marL="0" indent="0">
+                      <a:pPr indent="0" marL="0">
                         <a:buNone/>
                       </a:pPr>
                       <a:endParaRPr lang="en-US" sz="1300" dirty="0"/>
                     </a:p>
                   </a:txBody>
-                  <a:tcPr>
+                  <a:tcPr marL="91440" marR="91440" marT="45720" marB="45720">
                     <a:lnL w="9525" cap="flat" cmpd="sng" algn="ctr">
                       <a:solidFill>
                         <a:srgbClr val="E9D9B6"/>
@@ -14284,7 +14416,7 @@
                     <a:bodyPr/>
                     <a:lstStyle/>
                     <a:p>
-                      <a:pPr marL="0" indent="0" algn="r">
+                      <a:pPr algn="r" indent="0" marL="0">
                         <a:buNone/>
                       </a:pPr>
                       <a:r>
@@ -14298,7 +14430,7 @@
                       <a:endParaRPr lang="en-US" sz="1300" dirty="0"/>
                     </a:p>
                   </a:txBody>
-                  <a:tcPr>
+                  <a:tcPr marL="91440" marR="91440" marT="45720" marB="45720">
                     <a:lnL w="9525" cap="flat" cmpd="sng" algn="ctr">
                       <a:solidFill>
                         <a:srgbClr val="E9D9B6"/>
@@ -14340,11 +14472,6 @@
                     </a:solidFill>
                   </a:tcPr>
                 </a:tc>
-                <a:extLst>
-                  <a:ext uri="{0D108BD9-81ED-4DB2-BD59-A6C34878D82A}">
-                    <a16:rowId xmlns:a16="http://schemas.microsoft.com/office/drawing/2014/main" val="10007"/>
-                  </a:ext>
-                </a:extLst>
               </a:tr>
               <a:tr h="301752">
                 <a:tc>
@@ -14352,7 +14479,7 @@
                     <a:bodyPr/>
                     <a:lstStyle/>
                     <a:p>
-                      <a:pPr marL="0" indent="0" algn="ctr">
+                      <a:pPr algn="ctr" indent="0" marL="0">
                         <a:buNone/>
                       </a:pPr>
                       <a:r>
@@ -14366,7 +14493,7 @@
                       <a:endParaRPr lang="en-US" sz="1300" dirty="0"/>
                     </a:p>
                   </a:txBody>
-                  <a:tcPr>
+                  <a:tcPr marL="91440" marR="91440" marT="45720" marB="45720">
                     <a:lnL w="9525" cap="flat" cmpd="sng" algn="ctr">
                       <a:solidFill>
                         <a:srgbClr val="E9D9B6"/>
@@ -14413,13 +14540,13 @@
                     <a:bodyPr/>
                     <a:lstStyle/>
                     <a:p>
-                      <a:pPr marL="0" indent="0">
+                      <a:pPr indent="0" marL="0">
                         <a:buNone/>
                       </a:pPr>
                       <a:endParaRPr lang="en-US" sz="1300" dirty="0"/>
                     </a:p>
                   </a:txBody>
-                  <a:tcPr>
+                  <a:tcPr marL="91440" marR="91440" marT="45720" marB="45720">
                     <a:lnL w="9525" cap="flat" cmpd="sng" algn="ctr">
                       <a:solidFill>
                         <a:srgbClr val="E9D9B6"/>
@@ -14466,7 +14593,7 @@
                     <a:bodyPr/>
                     <a:lstStyle/>
                     <a:p>
-                      <a:pPr marL="0" indent="0" algn="r">
+                      <a:pPr algn="r" indent="0" marL="0">
                         <a:buNone/>
                       </a:pPr>
                       <a:r>
@@ -14480,7 +14607,7 @@
                       <a:endParaRPr lang="en-US" sz="1300" dirty="0"/>
                     </a:p>
                   </a:txBody>
-                  <a:tcPr>
+                  <a:tcPr marL="91440" marR="91440" marT="45720" marB="45720">
                     <a:lnL w="9525" cap="flat" cmpd="sng" algn="ctr">
                       <a:solidFill>
                         <a:srgbClr val="E9D9B6"/>
@@ -14522,11 +14649,6 @@
                     </a:solidFill>
                   </a:tcPr>
                 </a:tc>
-                <a:extLst>
-                  <a:ext uri="{0D108BD9-81ED-4DB2-BD59-A6C34878D82A}">
-                    <a16:rowId xmlns:a16="http://schemas.microsoft.com/office/drawing/2014/main" val="10008"/>
-                  </a:ext>
-                </a:extLst>
               </a:tr>
               <a:tr h="301752">
                 <a:tc>
@@ -14534,7 +14656,7 @@
                     <a:bodyPr/>
                     <a:lstStyle/>
                     <a:p>
-                      <a:pPr marL="0" indent="0" algn="ctr">
+                      <a:pPr algn="ctr" indent="0" marL="0">
                         <a:buNone/>
                       </a:pPr>
                       <a:r>
@@ -14548,7 +14670,7 @@
                       <a:endParaRPr lang="en-US" sz="1300" dirty="0"/>
                     </a:p>
                   </a:txBody>
-                  <a:tcPr>
+                  <a:tcPr marL="91440" marR="91440" marT="45720" marB="45720">
                     <a:lnL w="9525" cap="flat" cmpd="sng" algn="ctr">
                       <a:solidFill>
                         <a:srgbClr val="E9D9B6"/>
@@ -14595,13 +14717,13 @@
                     <a:bodyPr/>
                     <a:lstStyle/>
                     <a:p>
-                      <a:pPr marL="0" indent="0">
+                      <a:pPr indent="0" marL="0">
                         <a:buNone/>
                       </a:pPr>
                       <a:endParaRPr lang="en-US" sz="1300" dirty="0"/>
                     </a:p>
                   </a:txBody>
-                  <a:tcPr>
+                  <a:tcPr marL="91440" marR="91440" marT="45720" marB="45720">
                     <a:lnL w="9525" cap="flat" cmpd="sng" algn="ctr">
                       <a:solidFill>
                         <a:srgbClr val="E9D9B6"/>
@@ -14648,7 +14770,7 @@
                     <a:bodyPr/>
                     <a:lstStyle/>
                     <a:p>
-                      <a:pPr marL="0" indent="0" algn="r">
+                      <a:pPr algn="r" indent="0" marL="0">
                         <a:buNone/>
                       </a:pPr>
                       <a:r>
@@ -14662,7 +14784,7 @@
                       <a:endParaRPr lang="en-US" sz="1300" dirty="0"/>
                     </a:p>
                   </a:txBody>
-                  <a:tcPr>
+                  <a:tcPr marL="91440" marR="91440" marT="45720" marB="45720">
                     <a:lnL w="9525" cap="flat" cmpd="sng" algn="ctr">
                       <a:solidFill>
                         <a:srgbClr val="E9D9B6"/>
@@ -14704,11 +14826,6 @@
                     </a:solidFill>
                   </a:tcPr>
                 </a:tc>
-                <a:extLst>
-                  <a:ext uri="{0D108BD9-81ED-4DB2-BD59-A6C34878D82A}">
-                    <a16:rowId xmlns:a16="http://schemas.microsoft.com/office/drawing/2014/main" val="10009"/>
-                  </a:ext>
-                </a:extLst>
               </a:tr>
               <a:tr h="301752">
                 <a:tc>
@@ -14716,7 +14833,7 @@
                     <a:bodyPr/>
                     <a:lstStyle/>
                     <a:p>
-                      <a:pPr marL="0" indent="0" algn="ctr">
+                      <a:pPr algn="ctr" indent="0" marL="0">
                         <a:buNone/>
                       </a:pPr>
                       <a:r>
@@ -14730,7 +14847,7 @@
                       <a:endParaRPr lang="en-US" sz="1300" dirty="0"/>
                     </a:p>
                   </a:txBody>
-                  <a:tcPr>
+                  <a:tcPr marL="91440" marR="91440" marT="45720" marB="45720">
                     <a:lnL w="9525" cap="flat" cmpd="sng" algn="ctr">
                       <a:solidFill>
                         <a:srgbClr val="E9D9B6"/>
@@ -14777,13 +14894,13 @@
                     <a:bodyPr/>
                     <a:lstStyle/>
                     <a:p>
-                      <a:pPr marL="0" indent="0">
+                      <a:pPr indent="0" marL="0">
                         <a:buNone/>
                       </a:pPr>
                       <a:endParaRPr lang="en-US" sz="1300" dirty="0"/>
                     </a:p>
                   </a:txBody>
-                  <a:tcPr>
+                  <a:tcPr marL="91440" marR="91440" marT="45720" marB="45720">
                     <a:lnL w="9525" cap="flat" cmpd="sng" algn="ctr">
                       <a:solidFill>
                         <a:srgbClr val="E9D9B6"/>
@@ -14830,7 +14947,7 @@
                     <a:bodyPr/>
                     <a:lstStyle/>
                     <a:p>
-                      <a:pPr marL="0" indent="0" algn="r">
+                      <a:pPr algn="r" indent="0" marL="0">
                         <a:buNone/>
                       </a:pPr>
                       <a:r>
@@ -14844,7 +14961,7 @@
                       <a:endParaRPr lang="en-US" sz="1300" dirty="0"/>
                     </a:p>
                   </a:txBody>
-                  <a:tcPr>
+                  <a:tcPr marL="91440" marR="91440" marT="45720" marB="45720">
                     <a:lnL w="9525" cap="flat" cmpd="sng" algn="ctr">
                       <a:solidFill>
                         <a:srgbClr val="E9D9B6"/>
@@ -14886,11 +15003,6 @@
                     </a:solidFill>
                   </a:tcPr>
                 </a:tc>
-                <a:extLst>
-                  <a:ext uri="{0D108BD9-81ED-4DB2-BD59-A6C34878D82A}">
-                    <a16:rowId xmlns:a16="http://schemas.microsoft.com/office/drawing/2014/main" val="10010"/>
-                  </a:ext>
-                </a:extLst>
               </a:tr>
             </a:tbl>
           </a:graphicData>
@@ -14924,10 +15036,7 @@
         </p:spPr>
         <p:txBody>
           <a:bodyPr/>
-          <a:lstStyle/>
-          <a:p>
-            <a:endParaRPr/>
-          </a:p>
+          <a:p/>
         </p:txBody>
       </p:sp>
       <p:sp>
@@ -14951,7 +15060,7 @@
           <a:bodyPr wrap="square" lIns="1016" tIns="1016" rIns="1016" bIns="1016" rtlCol="0" anchor="t"/>
           <a:lstStyle/>
           <a:p>
-            <a:pPr marL="0" indent="0">
+            <a:pPr indent="0" marL="0">
               <a:spcAft>
                 <a:spcPts val="1000"/>
               </a:spcAft>
@@ -14968,7 +15077,7 @@
             <a:endParaRPr lang="en-US" sz="1400" dirty="0"/>
           </a:p>
           <a:p>
-            <a:pPr marL="0" indent="0">
+            <a:pPr indent="0" marL="0">
               <a:spcAft>
                 <a:spcPts val="1000"/>
               </a:spcAft>
@@ -14985,7 +15094,7 @@
             <a:endParaRPr lang="en-US" sz="1400" dirty="0"/>
           </a:p>
           <a:p>
-            <a:pPr marL="0" indent="0">
+            <a:pPr indent="0" marL="0">
               <a:spcAft>
                 <a:spcPts val="1000"/>
               </a:spcAft>
@@ -15023,7 +15132,7 @@
           </a:prstGeom>
           <a:extLst>
             <a:ext uri="{C572A759-6A51-4108-AA02-DFA0A04FC94B}">
-              <ma14:wrappingTextBoxFlag xmlns:ma14="http://schemas.microsoft.com/office/mac/drawingml/2011/main" xmlns="" val="0"/>
+              <ma14:wrappingTextBoxFlag xmlns:ma14="http://schemas.microsoft.com/office/mac/drawingml/2011/main" val="0"/>
             </a:ext>
           </a:extLst>
         </p:spPr>
@@ -15041,7 +15150,7 @@
           <a:p>
             <a:pPr algn="r"/>
             <a:fld id="{F7021451-1387-4CA6-816F-3879F97B5CBC}" type="slidenum">
-              <a:rPr lang="en-US" b="0"/>
+              <a:rPr b="0" lang="en-US"/>
               <a:t>32</a:t>
             </a:fld>
             <a:endParaRPr lang="en-US"/>
@@ -15096,10 +15205,7 @@
         </p:spPr>
         <p:txBody>
           <a:bodyPr/>
-          <a:lstStyle/>
-          <a:p>
-            <a:endParaRPr/>
-          </a:p>
+          <a:p/>
         </p:txBody>
       </p:sp>
       <p:sp>
@@ -15123,7 +15229,7 @@
           <a:bodyPr wrap="square" lIns="0" tIns="0" rIns="0" bIns="0" rtlCol="0" anchor="ctr"/>
           <a:lstStyle/>
           <a:p>
-            <a:pPr marL="0" indent="0" algn="ctr">
+            <a:pPr algn="ctr" indent="0" marL="0">
               <a:buNone/>
             </a:pPr>
             <a:r>
@@ -15159,7 +15265,7 @@
           <a:bodyPr wrap="square" lIns="0" tIns="0" rIns="0" bIns="0" rtlCol="0" anchor="t"/>
           <a:lstStyle/>
           <a:p>
-            <a:pPr marL="0" indent="0">
+            <a:pPr indent="0" marL="0">
               <a:buNone/>
             </a:pPr>
             <a:r>
@@ -15205,10 +15311,7 @@
         </p:spPr>
         <p:txBody>
           <a:bodyPr/>
-          <a:lstStyle/>
-          <a:p>
-            <a:endParaRPr/>
-          </a:p>
+          <a:p/>
         </p:txBody>
       </p:sp>
       <p:sp>
@@ -15238,7 +15341,7 @@
               </a:spcAft>
               <a:buSzPct val="100000"/>
               <a:buFont typeface="+mj-lt"/>
-              <a:buAutoNum type="arabicPeriod"/>
+              <a:buAutoNum type="arabicPeriod" startAt="1"/>
             </a:pPr>
             <a:r>
               <a:rPr lang="en-US" sz="1200" dirty="0">
@@ -15257,7 +15360,7 @@
               </a:spcAft>
               <a:buSzPct val="100000"/>
               <a:buFont typeface="+mj-lt"/>
-              <a:buAutoNum type="arabicPeriod"/>
+              <a:buAutoNum type="arabicPeriod" startAt="1"/>
             </a:pPr>
             <a:r>
               <a:rPr lang="en-US" sz="1200" dirty="0">
@@ -15276,7 +15379,7 @@
               </a:spcAft>
               <a:buSzPct val="100000"/>
               <a:buFont typeface="+mj-lt"/>
-              <a:buAutoNum type="arabicPeriod"/>
+              <a:buAutoNum type="arabicPeriod" startAt="1"/>
             </a:pPr>
             <a:r>
               <a:rPr lang="en-US" sz="1200" dirty="0">
@@ -15295,7 +15398,7 @@
               </a:spcAft>
               <a:buSzPct val="100000"/>
               <a:buFont typeface="+mj-lt"/>
-              <a:buAutoNum type="arabicPeriod"/>
+              <a:buAutoNum type="arabicPeriod" startAt="1"/>
             </a:pPr>
             <a:r>
               <a:rPr lang="en-US" sz="1200" dirty="0">
@@ -15314,7 +15417,7 @@
               </a:spcAft>
               <a:buSzPct val="100000"/>
               <a:buFont typeface="+mj-lt"/>
-              <a:buAutoNum type="arabicPeriod"/>
+              <a:buAutoNum type="arabicPeriod" startAt="1"/>
             </a:pPr>
             <a:r>
               <a:rPr lang="en-US" sz="1200" dirty="0">
@@ -15333,7 +15436,7 @@
               </a:spcAft>
               <a:buSzPct val="100000"/>
               <a:buFont typeface="+mj-lt"/>
-              <a:buAutoNum type="arabicPeriod"/>
+              <a:buAutoNum type="arabicPeriod" startAt="1"/>
             </a:pPr>
             <a:r>
               <a:rPr lang="en-US" sz="1200" dirty="0">
@@ -15352,7 +15455,7 @@
               </a:spcAft>
               <a:buSzPct val="100000"/>
               <a:buFont typeface="+mj-lt"/>
-              <a:buAutoNum type="arabicPeriod"/>
+              <a:buAutoNum type="arabicPeriod" startAt="1"/>
             </a:pPr>
             <a:r>
               <a:rPr lang="en-US" sz="1200" dirty="0">
@@ -15368,14 +15471,14 @@
       </p:sp>
       <p:pic>
         <p:nvPicPr>
-          <p:cNvPr id="7" name="Image 0" descr="ガイドブック"/>
+          <p:cNvPr id="7" name="Image 0" descr="ガイドブック">    </p:cNvPr>
           <p:cNvPicPr>
             <a:picLocks noChangeAspect="1"/>
           </p:cNvPicPr>
           <p:nvPr/>
         </p:nvPicPr>
         <p:blipFill>
-          <a:blip r:embed="rId3"/>
+          <a:blip r:embed="rId1"/>
           <a:stretch>
             <a:fillRect/>
           </a:stretch>
@@ -15410,7 +15513,7 @@
           </a:prstGeom>
           <a:extLst>
             <a:ext uri="{C572A759-6A51-4108-AA02-DFA0A04FC94B}">
-              <ma14:wrappingTextBoxFlag xmlns:ma14="http://schemas.microsoft.com/office/mac/drawingml/2011/main" xmlns="" val="0"/>
+              <ma14:wrappingTextBoxFlag xmlns:ma14="http://schemas.microsoft.com/office/mac/drawingml/2011/main" val="0"/>
             </a:ext>
           </a:extLst>
         </p:spPr>
@@ -15428,7 +15531,7 @@
           <a:p>
             <a:pPr algn="r"/>
             <a:fld id="{F7021451-1387-4CA6-816F-3879F97B5CBC}" type="slidenum">
-              <a:rPr lang="en-US" b="0"/>
+              <a:rPr b="0" lang="en-US"/>
               <a:t>33</a:t>
             </a:fld>
             <a:endParaRPr lang="en-US"/>
@@ -15483,10 +15586,7 @@
         </p:spPr>
         <p:txBody>
           <a:bodyPr/>
-          <a:lstStyle/>
-          <a:p>
-            <a:endParaRPr/>
-          </a:p>
+          <a:p/>
         </p:txBody>
       </p:sp>
       <p:sp>
@@ -15510,7 +15610,7 @@
           <a:bodyPr wrap="square" lIns="0" tIns="0" rIns="0" bIns="0" rtlCol="0" anchor="t"/>
           <a:lstStyle/>
           <a:p>
-            <a:pPr marL="0" indent="0" algn="ctr">
+            <a:pPr algn="ctr" indent="0" marL="0">
               <a:buNone/>
             </a:pPr>
             <a:r>
@@ -15528,11 +15628,9 @@
       <p:sp>
         <p:nvSpPr>
           <p:cNvPr id="4" name="Text 0"/>
-          <p:cNvSpPr>
-            <a:spLocks noGrp="1"/>
-          </p:cNvSpPr>
-          <p:nvPr>
-            <p:ph type="title" idx="100" hasCustomPrompt="1"/>
+          <p:cNvSpPr/>
+          <p:nvPr>
+            <p:ph idx="100" type="title" hasCustomPrompt="1"/>
           </p:nvPr>
         </p:nvSpPr>
         <p:spPr>
@@ -15550,7 +15648,7 @@
           <a:bodyPr wrap="square" rtlCol="0" anchor="ctr"/>
           <a:lstStyle/>
           <a:p>
-            <a:pPr marL="0" indent="0" algn="ctr">
+            <a:pPr algn="ctr" indent="0" marL="0">
               <a:buNone/>
             </a:pPr>
             <a:r>
@@ -15567,7 +15665,7 @@
             <a:endParaRPr lang="en-US" sz="3200" dirty="0"/>
           </a:p>
           <a:p>
-            <a:pPr marL="0" indent="0" algn="ctr">
+            <a:pPr algn="ctr" indent="0" marL="0">
               <a:buNone/>
             </a:pPr>
             <a:r>
@@ -15588,11 +15686,9 @@
       <p:sp>
         <p:nvSpPr>
           <p:cNvPr id="5" name="Text 0"/>
-          <p:cNvSpPr>
-            <a:spLocks noGrp="1"/>
-          </p:cNvSpPr>
-          <p:nvPr>
-            <p:ph type="body" idx="101" hasCustomPrompt="1"/>
+          <p:cNvSpPr/>
+          <p:nvPr>
+            <p:ph idx="101" type="body" hasCustomPrompt="1"/>
           </p:nvPr>
         </p:nvSpPr>
         <p:spPr>
@@ -15610,7 +15706,7 @@
           <a:bodyPr wrap="square" rtlCol="0" anchor="t"/>
           <a:lstStyle/>
           <a:p>
-            <a:pPr marL="0" indent="0" algn="ctr">
+            <a:pPr algn="ctr" indent="0" marL="0">
               <a:buNone/>
             </a:pPr>
             <a:r>
@@ -15645,7 +15741,7 @@
           </a:prstGeom>
           <a:extLst>
             <a:ext uri="{C572A759-6A51-4108-AA02-DFA0A04FC94B}">
-              <ma14:wrappingTextBoxFlag xmlns:ma14="http://schemas.microsoft.com/office/mac/drawingml/2011/main" xmlns="" val="0"/>
+              <ma14:wrappingTextBoxFlag xmlns:ma14="http://schemas.microsoft.com/office/mac/drawingml/2011/main" val="0"/>
             </a:ext>
           </a:extLst>
         </p:spPr>
@@ -15663,7 +15759,7 @@
           <a:p>
             <a:pPr algn="r"/>
             <a:fld id="{F7021451-1387-4CA6-816F-3879F97B5CBC}" type="slidenum">
-              <a:rPr lang="en-US" b="0"/>
+              <a:rPr b="0" lang="en-US"/>
               <a:t>34</a:t>
             </a:fld>
             <a:endParaRPr lang="en-US"/>
@@ -15718,10 +15814,7 @@
         </p:spPr>
         <p:txBody>
           <a:bodyPr/>
-          <a:lstStyle/>
-          <a:p>
-            <a:endParaRPr/>
-          </a:p>
+          <a:p/>
         </p:txBody>
       </p:sp>
       <p:sp>
@@ -15745,7 +15838,7 @@
           <a:bodyPr wrap="square" lIns="0" tIns="0" rIns="0" bIns="0" rtlCol="0" anchor="t"/>
           <a:lstStyle/>
           <a:p>
-            <a:pPr marL="0" indent="0" algn="ctr">
+            <a:pPr algn="ctr" indent="0" marL="0">
               <a:buNone/>
             </a:pPr>
             <a:r>
@@ -15763,11 +15856,9 @@
       <p:sp>
         <p:nvSpPr>
           <p:cNvPr id="4" name="Text 0"/>
-          <p:cNvSpPr>
-            <a:spLocks noGrp="1"/>
-          </p:cNvSpPr>
-          <p:nvPr>
-            <p:ph type="title" idx="100" hasCustomPrompt="1"/>
+          <p:cNvSpPr/>
+          <p:nvPr>
+            <p:ph idx="100" type="title" hasCustomPrompt="1"/>
           </p:nvPr>
         </p:nvSpPr>
         <p:spPr>
@@ -15785,11 +15876,11 @@
           <a:bodyPr wrap="square" rtlCol="0" anchor="ctr"/>
           <a:lstStyle/>
           <a:p>
-            <a:pPr marL="0" indent="0" algn="ctr">
-              <a:buNone/>
-            </a:pPr>
-            <a:r>
-              <a:rPr lang="en-US" sz="3200" b="1" dirty="0" err="1">
+            <a:pPr algn="ctr" indent="0" marL="0">
+              <a:buNone/>
+            </a:pPr>
+            <a:r>
+              <a:rPr lang="en-US" sz="3200" b="1" dirty="0">
                 <a:solidFill>
                   <a:schemeClr val="tx2"/>
                 </a:solidFill>
@@ -15797,8 +15888,14 @@
                 <a:ea typeface="Yu Mincho" pitchFamily="34" charset="-122"/>
                 <a:cs typeface="Yu Mincho" pitchFamily="34" charset="-120"/>
               </a:rPr>
-              <a:t>その思いが“ゆるんだら</a:t>
-            </a:r>
+              <a:t>その思いが“ゆるんだら”、</a:t>
+            </a:r>
+            <a:endParaRPr lang="en-US" sz="3200" dirty="0"/>
+          </a:p>
+          <a:p>
+            <a:pPr algn="ctr" indent="0" marL="0">
+              <a:buNone/>
+            </a:pPr>
             <a:r>
               <a:rPr lang="en-US" sz="3200" b="1" dirty="0">
                 <a:solidFill>
@@ -15808,29 +15905,12 @@
                 <a:ea typeface="Yu Mincho" pitchFamily="34" charset="-122"/>
                 <a:cs typeface="Yu Mincho" pitchFamily="34" charset="-120"/>
               </a:rPr>
-              <a:t>”、</a:t>
+              <a:t>目標達成によい影響が</a:t>
             </a:r>
             <a:endParaRPr lang="en-US" sz="3200" dirty="0"/>
           </a:p>
           <a:p>
-            <a:pPr marL="0" indent="0" algn="ctr">
-              <a:buNone/>
-            </a:pPr>
-            <a:r>
-              <a:rPr lang="en-US" sz="3200" b="1" dirty="0">
-                <a:solidFill>
-                  <a:schemeClr val="tx2"/>
-                </a:solidFill>
-                <a:latin typeface="Yu Mincho" pitchFamily="34" charset="0"/>
-                <a:ea typeface="Yu Mincho" pitchFamily="34" charset="-122"/>
-                <a:cs typeface="Yu Mincho" pitchFamily="34" charset="-120"/>
-              </a:rPr>
-              <a:t>目標達成によい影響が</a:t>
-            </a:r>
-            <a:endParaRPr lang="en-US" sz="3200" dirty="0"/>
-          </a:p>
-          <a:p>
-            <a:pPr marL="0" indent="0" algn="ctr">
+            <a:pPr algn="ctr" indent="0" marL="0">
               <a:buNone/>
             </a:pPr>
             <a:r>
@@ -15868,7 +15948,7 @@
           </a:prstGeom>
           <a:extLst>
             <a:ext uri="{C572A759-6A51-4108-AA02-DFA0A04FC94B}">
-              <ma14:wrappingTextBoxFlag xmlns:ma14="http://schemas.microsoft.com/office/mac/drawingml/2011/main" xmlns="" val="0"/>
+              <ma14:wrappingTextBoxFlag xmlns:ma14="http://schemas.microsoft.com/office/mac/drawingml/2011/main" val="0"/>
             </a:ext>
           </a:extLst>
         </p:spPr>
@@ -15886,7 +15966,7 @@
           <a:p>
             <a:pPr algn="r"/>
             <a:fld id="{F7021451-1387-4CA6-816F-3879F97B5CBC}" type="slidenum">
-              <a:rPr lang="en-US" b="0"/>
+              <a:rPr b="0" lang="en-US"/>
               <a:t>35</a:t>
             </a:fld>
             <a:endParaRPr lang="en-US"/>
@@ -15941,10 +16021,7 @@
         </p:spPr>
         <p:txBody>
           <a:bodyPr/>
-          <a:lstStyle/>
-          <a:p>
-            <a:endParaRPr/>
-          </a:p>
+          <a:p/>
         </p:txBody>
       </p:sp>
       <p:sp>
@@ -15968,7 +16045,7 @@
           <a:bodyPr wrap="square" lIns="0" tIns="0" rIns="0" bIns="0" rtlCol="0" anchor="t"/>
           <a:lstStyle/>
           <a:p>
-            <a:pPr marL="0" indent="0" algn="ctr">
+            <a:pPr algn="ctr" indent="0" marL="0">
               <a:buNone/>
             </a:pPr>
             <a:r>
@@ -15986,11 +16063,9 @@
       <p:sp>
         <p:nvSpPr>
           <p:cNvPr id="4" name="Text 0"/>
-          <p:cNvSpPr>
-            <a:spLocks noGrp="1"/>
-          </p:cNvSpPr>
-          <p:nvPr>
-            <p:ph type="title" idx="100" hasCustomPrompt="1"/>
+          <p:cNvSpPr/>
+          <p:nvPr>
+            <p:ph idx="100" type="title" hasCustomPrompt="1"/>
           </p:nvPr>
         </p:nvSpPr>
         <p:spPr>
@@ -16008,7 +16083,7 @@
           <a:bodyPr wrap="square" rtlCol="0" anchor="ctr"/>
           <a:lstStyle/>
           <a:p>
-            <a:pPr marL="0" indent="0" algn="ctr">
+            <a:pPr algn="ctr" indent="0" marL="0">
               <a:buNone/>
             </a:pPr>
             <a:r>
@@ -16025,7 +16100,7 @@
             <a:endParaRPr lang="en-US" sz="3200" dirty="0"/>
           </a:p>
           <a:p>
-            <a:pPr marL="0" indent="0" algn="ctr">
+            <a:pPr algn="ctr" indent="0" marL="0">
               <a:buNone/>
             </a:pPr>
             <a:r>
@@ -16046,11 +16121,9 @@
       <p:sp>
         <p:nvSpPr>
           <p:cNvPr id="5" name="Text 0"/>
-          <p:cNvSpPr>
-            <a:spLocks noGrp="1"/>
-          </p:cNvSpPr>
-          <p:nvPr>
-            <p:ph type="body" idx="101" hasCustomPrompt="1"/>
+          <p:cNvSpPr/>
+          <p:nvPr>
+            <p:ph idx="101" type="body" hasCustomPrompt="1"/>
           </p:nvPr>
         </p:nvSpPr>
         <p:spPr>
@@ -16068,7 +16141,7 @@
           <a:bodyPr wrap="square" rtlCol="0" anchor="t"/>
           <a:lstStyle/>
           <a:p>
-            <a:pPr marL="0" indent="0" algn="ctr">
+            <a:pPr algn="ctr" indent="0" marL="0">
               <a:buNone/>
             </a:pPr>
             <a:r>
@@ -16082,7 +16155,7 @@
             <a:endParaRPr lang="en-US" sz="1500" dirty="0"/>
           </a:p>
           <a:p>
-            <a:pPr marL="0" indent="0" algn="ctr">
+            <a:pPr algn="ctr" indent="0" marL="0">
               <a:buNone/>
             </a:pPr>
             <a:r>
@@ -16096,7 +16169,7 @@
             <a:endParaRPr lang="en-US" sz="1500" dirty="0"/>
           </a:p>
           <a:p>
-            <a:pPr marL="0" indent="0" algn="ctr">
+            <a:pPr algn="ctr" indent="0" marL="0">
               <a:buNone/>
             </a:pPr>
             <a:r>
@@ -16131,7 +16204,7 @@
           </a:prstGeom>
           <a:extLst>
             <a:ext uri="{C572A759-6A51-4108-AA02-DFA0A04FC94B}">
-              <ma14:wrappingTextBoxFlag xmlns:ma14="http://schemas.microsoft.com/office/mac/drawingml/2011/main" xmlns="" val="0"/>
+              <ma14:wrappingTextBoxFlag xmlns:ma14="http://schemas.microsoft.com/office/mac/drawingml/2011/main" val="0"/>
             </a:ext>
           </a:extLst>
         </p:spPr>
@@ -16149,7 +16222,7 @@
           <a:p>
             <a:pPr algn="r"/>
             <a:fld id="{F7021451-1387-4CA6-816F-3879F97B5CBC}" type="slidenum">
-              <a:rPr lang="en-US" b="0"/>
+              <a:rPr b="0" lang="en-US"/>
               <a:t>36</a:t>
             </a:fld>
             <a:endParaRPr lang="en-US"/>
@@ -16204,10 +16277,7 @@
         </p:spPr>
         <p:txBody>
           <a:bodyPr/>
-          <a:lstStyle/>
-          <a:p>
-            <a:endParaRPr/>
-          </a:p>
+          <a:p/>
         </p:txBody>
       </p:sp>
       <p:sp>
@@ -16231,7 +16301,7 @@
           <a:bodyPr wrap="square" lIns="0" tIns="0" rIns="0" bIns="0" rtlCol="0" anchor="t"/>
           <a:lstStyle/>
           <a:p>
-            <a:pPr marL="0" indent="0" algn="ctr">
+            <a:pPr algn="ctr" indent="0" marL="0">
               <a:buNone/>
             </a:pPr>
             <a:r>
@@ -16249,11 +16319,9 @@
       <p:sp>
         <p:nvSpPr>
           <p:cNvPr id="4" name="Text 0"/>
-          <p:cNvSpPr>
-            <a:spLocks noGrp="1"/>
-          </p:cNvSpPr>
-          <p:nvPr>
-            <p:ph type="title" idx="100" hasCustomPrompt="1"/>
+          <p:cNvSpPr/>
+          <p:nvPr>
+            <p:ph idx="100" type="title" hasCustomPrompt="1"/>
           </p:nvPr>
         </p:nvSpPr>
         <p:spPr>
@@ -16271,7 +16339,7 @@
           <a:bodyPr wrap="square" rtlCol="0" anchor="ctr"/>
           <a:lstStyle/>
           <a:p>
-            <a:pPr marL="0" indent="0" algn="ctr">
+            <a:pPr algn="ctr" indent="0" marL="0">
               <a:buNone/>
             </a:pPr>
             <a:r>
@@ -16288,7 +16356,7 @@
             <a:endParaRPr lang="en-US" sz="3200" dirty="0"/>
           </a:p>
           <a:p>
-            <a:pPr marL="0" indent="0" algn="ctr">
+            <a:pPr algn="ctr" indent="0" marL="0">
               <a:buNone/>
             </a:pPr>
             <a:r>
@@ -16309,11 +16377,9 @@
       <p:sp>
         <p:nvSpPr>
           <p:cNvPr id="5" name="Text 0"/>
-          <p:cNvSpPr>
-            <a:spLocks noGrp="1"/>
-          </p:cNvSpPr>
-          <p:nvPr>
-            <p:ph type="body" idx="101" hasCustomPrompt="1"/>
+          <p:cNvSpPr/>
+          <p:nvPr>
+            <p:ph idx="101" type="body" hasCustomPrompt="1"/>
           </p:nvPr>
         </p:nvSpPr>
         <p:spPr>
@@ -16331,7 +16397,7 @@
           <a:bodyPr wrap="square" rtlCol="0" anchor="t"/>
           <a:lstStyle/>
           <a:p>
-            <a:pPr marL="0" indent="0" algn="ctr">
+            <a:pPr algn="ctr" indent="0" marL="0">
               <a:buNone/>
             </a:pPr>
             <a:r>
@@ -16366,7 +16432,7 @@
           </a:prstGeom>
           <a:extLst>
             <a:ext uri="{C572A759-6A51-4108-AA02-DFA0A04FC94B}">
-              <ma14:wrappingTextBoxFlag xmlns:ma14="http://schemas.microsoft.com/office/mac/drawingml/2011/main" xmlns="" val="0"/>
+              <ma14:wrappingTextBoxFlag xmlns:ma14="http://schemas.microsoft.com/office/mac/drawingml/2011/main" val="0"/>
             </a:ext>
           </a:extLst>
         </p:spPr>
@@ -16384,7 +16450,7 @@
           <a:p>
             <a:pPr algn="r"/>
             <a:fld id="{F7021451-1387-4CA6-816F-3879F97B5CBC}" type="slidenum">
-              <a:rPr lang="en-US" b="0"/>
+              <a:rPr b="0" lang="en-US"/>
               <a:t>37</a:t>
             </a:fld>
             <a:endParaRPr lang="en-US"/>
@@ -16439,10 +16505,7 @@
         </p:spPr>
         <p:txBody>
           <a:bodyPr/>
-          <a:lstStyle/>
-          <a:p>
-            <a:endParaRPr/>
-          </a:p>
+          <a:p/>
         </p:txBody>
       </p:sp>
       <p:sp>
@@ -16466,7 +16529,7 @@
           <a:bodyPr wrap="square" lIns="0" tIns="0" rIns="0" bIns="0" rtlCol="0" anchor="t"/>
           <a:lstStyle/>
           <a:p>
-            <a:pPr marL="0" indent="0" algn="ctr">
+            <a:pPr algn="ctr" indent="0" marL="0">
               <a:buNone/>
             </a:pPr>
             <a:r>
@@ -16484,11 +16547,9 @@
       <p:sp>
         <p:nvSpPr>
           <p:cNvPr id="4" name="Text 0"/>
-          <p:cNvSpPr>
-            <a:spLocks noGrp="1"/>
-          </p:cNvSpPr>
-          <p:nvPr>
-            <p:ph type="title" idx="100" hasCustomPrompt="1"/>
+          <p:cNvSpPr/>
+          <p:nvPr>
+            <p:ph idx="100" type="title" hasCustomPrompt="1"/>
           </p:nvPr>
         </p:nvSpPr>
         <p:spPr>
@@ -16506,7 +16567,7 @@
           <a:bodyPr wrap="square" rtlCol="0" anchor="ctr"/>
           <a:lstStyle/>
           <a:p>
-            <a:pPr marL="0" indent="0" algn="ctr">
+            <a:pPr algn="ctr" indent="0" marL="0">
               <a:buNone/>
             </a:pPr>
             <a:r>
@@ -16523,11 +16584,11 @@
             <a:endParaRPr lang="en-US" sz="3200" dirty="0"/>
           </a:p>
           <a:p>
-            <a:pPr marL="0" indent="0" algn="ctr">
-              <a:buNone/>
-            </a:pPr>
-            <a:r>
-              <a:rPr lang="en-US" sz="3200" b="1" dirty="0" err="1">
+            <a:pPr algn="ctr" indent="0" marL="0">
+              <a:buNone/>
+            </a:pPr>
+            <a:r>
+              <a:rPr lang="en-US" sz="3200" b="1" dirty="0">
                 <a:solidFill>
                   <a:schemeClr val="tx2"/>
                 </a:solidFill>
@@ -16535,51 +16596,47 @@
                 <a:ea typeface="Yu Mincho" pitchFamily="34" charset="-122"/>
                 <a:cs typeface="Yu Mincho" pitchFamily="34" charset="-120"/>
               </a:rPr>
-              <a:t>どうしたかったの</a:t>
-            </a:r>
-            <a:r>
-              <a:rPr lang="en-US" sz="3200" b="1" dirty="0">
-                <a:solidFill>
-                  <a:schemeClr val="tx2"/>
-                </a:solidFill>
-                <a:latin typeface="Yu Mincho" pitchFamily="34" charset="0"/>
-                <a:ea typeface="Yu Mincho" pitchFamily="34" charset="-122"/>
-                <a:cs typeface="Yu Mincho" pitchFamily="34" charset="-120"/>
-              </a:rPr>
-              <a:t>？</a:t>
-            </a:r>
-            <a:br>
-              <a:rPr lang="en-US" sz="3200" b="1" dirty="0">
-                <a:solidFill>
-                  <a:schemeClr val="tx2"/>
-                </a:solidFill>
-                <a:latin typeface="Yu Mincho" pitchFamily="34" charset="0"/>
-                <a:ea typeface="Yu Mincho" pitchFamily="34" charset="-122"/>
-                <a:cs typeface="Yu Mincho" pitchFamily="34" charset="-120"/>
-              </a:rPr>
-            </a:br>
-            <a:br>
-              <a:rPr lang="en-US" sz="3200" b="1" dirty="0">
-                <a:solidFill>
-                  <a:schemeClr val="tx2"/>
-                </a:solidFill>
-                <a:latin typeface="Yu Mincho" pitchFamily="34" charset="0"/>
-                <a:ea typeface="Yu Mincho" pitchFamily="34" charset="-122"/>
-                <a:cs typeface="Yu Mincho" pitchFamily="34" charset="-120"/>
-              </a:rPr>
-            </a:br>
-            <a:r>
-              <a:rPr lang="ja-JP" altLang="en-US" sz="3200" b="1" dirty="0">
-                <a:solidFill>
-                  <a:schemeClr val="tx2"/>
-                </a:solidFill>
-                <a:latin typeface="Yu Mincho" pitchFamily="34" charset="0"/>
-                <a:ea typeface="Yu Mincho" pitchFamily="34" charset="-122"/>
-                <a:cs typeface="Yu Mincho" pitchFamily="34" charset="-120"/>
+              <a:t>どうしたかったの？</a:t>
+            </a:r>
+            <a:endParaRPr lang="en-US" sz="3200" dirty="0"/>
+          </a:p>
+        </p:txBody>
+      </p:sp>
+      <p:sp>
+        <p:nvSpPr>
+          <p:cNvPr id="5" name="Text 0"/>
+          <p:cNvSpPr/>
+          <p:nvPr>
+            <p:ph idx="101" type="body" hasCustomPrompt="1"/>
+          </p:nvPr>
+        </p:nvSpPr>
+        <p:spPr>
+          <a:xfrm>
+            <a:off x="914400" y="3200400"/>
+            <a:ext cx="7315200" cy="731520"/>
+          </a:xfrm>
+          <a:prstGeom prst="rect">
+            <a:avLst/>
+          </a:prstGeom>
+          <a:noFill/>
+          <a:ln/>
+        </p:spPr>
+        <p:txBody>
+          <a:bodyPr wrap="square" rtlCol="0" anchor="t"/>
+          <a:lstStyle/>
+          <a:p>
+            <a:pPr algn="ctr" indent="0" marL="0">
+              <a:buNone/>
+            </a:pPr>
+            <a:r>
+              <a:rPr lang="en-US" sz="1500" dirty="0">
+                <a:solidFill>
+                  <a:schemeClr val="accent2"/>
+                </a:solidFill>
               </a:rPr>
               <a:t>相手の中にも入ってみる？</a:t>
             </a:r>
-            <a:endParaRPr lang="en-US" sz="3200" dirty="0"/>
+            <a:endParaRPr lang="en-US" sz="1500" dirty="0"/>
           </a:p>
         </p:txBody>
       </p:sp>
@@ -16603,7 +16660,7 @@
           </a:prstGeom>
           <a:extLst>
             <a:ext uri="{C572A759-6A51-4108-AA02-DFA0A04FC94B}">
-              <ma14:wrappingTextBoxFlag xmlns:ma14="http://schemas.microsoft.com/office/mac/drawingml/2011/main" xmlns="" val="0"/>
+              <ma14:wrappingTextBoxFlag xmlns:ma14="http://schemas.microsoft.com/office/mac/drawingml/2011/main" val="0"/>
             </a:ext>
           </a:extLst>
         </p:spPr>
@@ -16621,7 +16678,7 @@
           <a:p>
             <a:pPr algn="r"/>
             <a:fld id="{F7021451-1387-4CA6-816F-3879F97B5CBC}" type="slidenum">
-              <a:rPr lang="en-US" b="0"/>
+              <a:rPr b="0" lang="en-US"/>
               <a:t>38</a:t>
             </a:fld>
             <a:endParaRPr lang="en-US"/>
@@ -16676,10 +16733,7 @@
         </p:spPr>
         <p:txBody>
           <a:bodyPr/>
-          <a:lstStyle/>
-          <a:p>
-            <a:endParaRPr/>
-          </a:p>
+          <a:p/>
         </p:txBody>
       </p:sp>
       <p:sp>
@@ -16703,7 +16757,7 @@
           <a:bodyPr wrap="square" lIns="0" tIns="0" rIns="0" bIns="0" rtlCol="0" anchor="t"/>
           <a:lstStyle/>
           <a:p>
-            <a:pPr marL="0" indent="0" algn="ctr">
+            <a:pPr algn="ctr" indent="0" marL="0">
               <a:buNone/>
             </a:pPr>
             <a:r>
@@ -16721,11 +16775,9 @@
       <p:sp>
         <p:nvSpPr>
           <p:cNvPr id="4" name="Text 0"/>
-          <p:cNvSpPr>
-            <a:spLocks noGrp="1"/>
-          </p:cNvSpPr>
-          <p:nvPr>
-            <p:ph type="title" idx="100" hasCustomPrompt="1"/>
+          <p:cNvSpPr/>
+          <p:nvPr>
+            <p:ph idx="100" type="title" hasCustomPrompt="1"/>
           </p:nvPr>
         </p:nvSpPr>
         <p:spPr>
@@ -16743,7 +16795,7 @@
           <a:bodyPr wrap="square" rtlCol="0" anchor="ctr"/>
           <a:lstStyle/>
           <a:p>
-            <a:pPr marL="0" indent="0" algn="ctr">
+            <a:pPr algn="ctr" indent="0" marL="0">
               <a:buNone/>
             </a:pPr>
             <a:r>
@@ -16760,7 +16812,7 @@
             <a:endParaRPr lang="en-US" sz="3200" dirty="0"/>
           </a:p>
           <a:p>
-            <a:pPr marL="0" indent="0" algn="ctr">
+            <a:pPr algn="ctr" indent="0" marL="0">
               <a:buNone/>
             </a:pPr>
             <a:r>
@@ -16781,11 +16833,9 @@
       <p:sp>
         <p:nvSpPr>
           <p:cNvPr id="5" name="Text 0"/>
-          <p:cNvSpPr>
-            <a:spLocks noGrp="1"/>
-          </p:cNvSpPr>
-          <p:nvPr>
-            <p:ph type="body" idx="101" hasCustomPrompt="1"/>
+          <p:cNvSpPr/>
+          <p:nvPr>
+            <p:ph idx="101" type="body" hasCustomPrompt="1"/>
           </p:nvPr>
         </p:nvSpPr>
         <p:spPr>
@@ -16803,7 +16853,7 @@
           <a:bodyPr wrap="square" rtlCol="0" anchor="t"/>
           <a:lstStyle/>
           <a:p>
-            <a:pPr marL="0" indent="0" algn="ctr">
+            <a:pPr algn="ctr" indent="0" marL="0">
               <a:buNone/>
             </a:pPr>
             <a:r>
@@ -16838,7 +16888,7 @@
           </a:prstGeom>
           <a:extLst>
             <a:ext uri="{C572A759-6A51-4108-AA02-DFA0A04FC94B}">
-              <ma14:wrappingTextBoxFlag xmlns:ma14="http://schemas.microsoft.com/office/mac/drawingml/2011/main" xmlns="" val="0"/>
+              <ma14:wrappingTextBoxFlag xmlns:ma14="http://schemas.microsoft.com/office/mac/drawingml/2011/main" val="0"/>
             </a:ext>
           </a:extLst>
         </p:spPr>
@@ -16856,7 +16906,7 @@
           <a:p>
             <a:pPr algn="r"/>
             <a:fld id="{F7021451-1387-4CA6-816F-3879F97B5CBC}" type="slidenum">
-              <a:rPr lang="en-US" b="0"/>
+              <a:rPr b="0" lang="en-US"/>
               <a:t>39</a:t>
             </a:fld>
             <a:endParaRPr lang="en-US"/>
@@ -16891,11 +16941,9 @@
       <p:sp>
         <p:nvSpPr>
           <p:cNvPr id="2" name="Text 0"/>
-          <p:cNvSpPr>
-            <a:spLocks noGrp="1"/>
-          </p:cNvSpPr>
-          <p:nvPr>
-            <p:ph type="title" idx="100" hasCustomPrompt="1"/>
+          <p:cNvSpPr/>
+          <p:nvPr>
+            <p:ph idx="100" type="title" hasCustomPrompt="1"/>
           </p:nvPr>
         </p:nvSpPr>
         <p:spPr>
@@ -16913,7 +16961,7 @@
           <a:bodyPr wrap="square" rtlCol="0" anchor="ctr"/>
           <a:lstStyle/>
           <a:p>
-            <a:pPr marL="0" indent="0" algn="ctr">
+            <a:pPr algn="ctr" indent="0" marL="0">
               <a:buNone/>
             </a:pPr>
             <a:r>
@@ -16934,11 +16982,9 @@
       <p:sp>
         <p:nvSpPr>
           <p:cNvPr id="3" name="Text 0"/>
-          <p:cNvSpPr>
-            <a:spLocks noGrp="1"/>
-          </p:cNvSpPr>
-          <p:nvPr>
-            <p:ph type="body" idx="101" hasCustomPrompt="1"/>
+          <p:cNvSpPr/>
+          <p:nvPr>
+            <p:ph idx="101" type="body" hasCustomPrompt="1"/>
           </p:nvPr>
         </p:nvSpPr>
         <p:spPr>
@@ -16956,7 +17002,7 @@
           <a:bodyPr wrap="square" rtlCol="0" anchor="t"/>
           <a:lstStyle/>
           <a:p>
-            <a:pPr marL="0" indent="0" algn="ctr">
+            <a:pPr algn="ctr" indent="0" marL="0">
               <a:buNone/>
             </a:pPr>
             <a:r>
@@ -16970,7 +17016,7 @@
             <a:endParaRPr lang="en-US" sz="1600" dirty="0"/>
           </a:p>
           <a:p>
-            <a:pPr marL="0" indent="0" algn="ctr">
+            <a:pPr algn="ctr" indent="0" marL="0">
               <a:buNone/>
             </a:pPr>
             <a:r>
@@ -17033,10 +17079,7 @@
         </p:spPr>
         <p:txBody>
           <a:bodyPr/>
-          <a:lstStyle/>
-          <a:p>
-            <a:endParaRPr/>
-          </a:p>
+          <a:p/>
         </p:txBody>
       </p:sp>
       <p:sp>
@@ -17060,7 +17103,7 @@
           <a:bodyPr wrap="square" lIns="0" tIns="0" rIns="0" bIns="0" rtlCol="0" anchor="t"/>
           <a:lstStyle/>
           <a:p>
-            <a:pPr marL="0" indent="0" algn="ctr">
+            <a:pPr algn="ctr" indent="0" marL="0">
               <a:buNone/>
             </a:pPr>
             <a:r>
@@ -17078,11 +17121,9 @@
       <p:sp>
         <p:nvSpPr>
           <p:cNvPr id="4" name="Text 0"/>
-          <p:cNvSpPr>
-            <a:spLocks noGrp="1"/>
-          </p:cNvSpPr>
-          <p:nvPr>
-            <p:ph type="title" idx="100" hasCustomPrompt="1"/>
+          <p:cNvSpPr/>
+          <p:nvPr>
+            <p:ph idx="100" type="title" hasCustomPrompt="1"/>
           </p:nvPr>
         </p:nvSpPr>
         <p:spPr>
@@ -17100,7 +17141,7 @@
           <a:bodyPr wrap="square" rtlCol="0" anchor="ctr"/>
           <a:lstStyle/>
           <a:p>
-            <a:pPr marL="0" indent="0" algn="ctr">
+            <a:pPr algn="ctr" indent="0" marL="0">
               <a:buNone/>
             </a:pPr>
             <a:r>
@@ -17117,7 +17158,7 @@
             <a:endParaRPr lang="en-US" sz="3200" dirty="0"/>
           </a:p>
           <a:p>
-            <a:pPr marL="0" indent="0" algn="ctr">
+            <a:pPr algn="ctr" indent="0" marL="0">
               <a:buNone/>
             </a:pPr>
             <a:r>
@@ -17138,11 +17179,9 @@
       <p:sp>
         <p:nvSpPr>
           <p:cNvPr id="5" name="Text 0"/>
-          <p:cNvSpPr>
-            <a:spLocks noGrp="1"/>
-          </p:cNvSpPr>
-          <p:nvPr>
-            <p:ph type="body" idx="101" hasCustomPrompt="1"/>
+          <p:cNvSpPr/>
+          <p:nvPr>
+            <p:ph idx="101" type="body" hasCustomPrompt="1"/>
           </p:nvPr>
         </p:nvSpPr>
         <p:spPr>
@@ -17160,7 +17199,7 @@
           <a:bodyPr wrap="square" rtlCol="0" anchor="t"/>
           <a:lstStyle/>
           <a:p>
-            <a:pPr marL="0" indent="0" algn="ctr">
+            <a:pPr algn="ctr" indent="0" marL="0">
               <a:buNone/>
             </a:pPr>
             <a:r>
@@ -17195,7 +17234,7 @@
           </a:prstGeom>
           <a:extLst>
             <a:ext uri="{C572A759-6A51-4108-AA02-DFA0A04FC94B}">
-              <ma14:wrappingTextBoxFlag xmlns:ma14="http://schemas.microsoft.com/office/mac/drawingml/2011/main" xmlns="" val="0"/>
+              <ma14:wrappingTextBoxFlag xmlns:ma14="http://schemas.microsoft.com/office/mac/drawingml/2011/main" val="0"/>
             </a:ext>
           </a:extLst>
         </p:spPr>
@@ -17213,7 +17252,7 @@
           <a:p>
             <a:pPr algn="r"/>
             <a:fld id="{F7021451-1387-4CA6-816F-3879F97B5CBC}" type="slidenum">
-              <a:rPr lang="en-US" b="0"/>
+              <a:rPr b="0" lang="en-US"/>
               <a:t>40</a:t>
             </a:fld>
             <a:endParaRPr lang="en-US"/>
@@ -17248,11 +17287,9 @@
       <p:sp>
         <p:nvSpPr>
           <p:cNvPr id="2" name="Text 0"/>
-          <p:cNvSpPr>
-            <a:spLocks noGrp="1"/>
-          </p:cNvSpPr>
-          <p:nvPr>
-            <p:ph type="title" idx="100" hasCustomPrompt="1"/>
+          <p:cNvSpPr/>
+          <p:nvPr>
+            <p:ph idx="100" type="title" hasCustomPrompt="1"/>
           </p:nvPr>
         </p:nvSpPr>
         <p:spPr>
@@ -17270,7 +17307,7 @@
           <a:bodyPr wrap="square" lIns="0" tIns="0" rIns="0" bIns="0" rtlCol="0" anchor="ctr"/>
           <a:lstStyle/>
           <a:p>
-            <a:pPr marL="0" indent="0" algn="l">
+            <a:pPr algn="l" indent="0" marL="0">
               <a:buNone/>
             </a:pPr>
             <a:r>
@@ -17316,10 +17353,7 @@
         </p:spPr>
         <p:txBody>
           <a:bodyPr/>
-          <a:lstStyle/>
-          <a:p>
-            <a:endParaRPr/>
-          </a:p>
+          <a:p/>
         </p:txBody>
       </p:sp>
       <p:sp>
@@ -17343,7 +17377,7 @@
           <a:bodyPr wrap="square" lIns="1016" tIns="1016" rIns="1016" bIns="1016" rtlCol="0" anchor="t"/>
           <a:lstStyle/>
           <a:p>
-            <a:pPr marL="0" indent="0">
+            <a:pPr indent="0" marL="0">
               <a:buNone/>
             </a:pPr>
             <a:r>
@@ -17379,7 +17413,7 @@
           <a:bodyPr wrap="square" lIns="1016" tIns="1016" rIns="1016" bIns="1016" rtlCol="0" anchor="t"/>
           <a:lstStyle/>
           <a:p>
-            <a:pPr marL="0" indent="0">
+            <a:pPr indent="0" marL="0">
               <a:buNone/>
             </a:pPr>
             <a:endParaRPr lang="en-US" sz="1800" dirty="0"/>
@@ -17414,10 +17448,7 @@
         </p:spPr>
         <p:txBody>
           <a:bodyPr/>
-          <a:lstStyle/>
-          <a:p>
-            <a:endParaRPr/>
-          </a:p>
+          <a:p/>
         </p:txBody>
       </p:sp>
       <p:sp>
@@ -17441,7 +17472,7 @@
           <a:bodyPr wrap="square" lIns="1016" tIns="1016" rIns="1016" bIns="1016" rtlCol="0" anchor="t"/>
           <a:lstStyle/>
           <a:p>
-            <a:pPr marL="0" indent="0">
+            <a:pPr indent="0" marL="0">
               <a:buNone/>
             </a:pPr>
             <a:r>
@@ -17477,7 +17508,7 @@
           <a:bodyPr wrap="square" lIns="1016" tIns="1016" rIns="1016" bIns="1016" rtlCol="0" anchor="t"/>
           <a:lstStyle/>
           <a:p>
-            <a:pPr marL="0" indent="0">
+            <a:pPr indent="0" marL="0">
               <a:buNone/>
             </a:pPr>
             <a:endParaRPr lang="en-US" sz="1800" dirty="0"/>
@@ -17505,7 +17536,7 @@
           <a:bodyPr wrap="square" lIns="1016" tIns="1016" rIns="1016" bIns="1016" rtlCol="0" anchor="t"/>
           <a:lstStyle/>
           <a:p>
-            <a:pPr marL="0" indent="0">
+            <a:pPr indent="0" marL="0">
               <a:buNone/>
             </a:pPr>
             <a:r>
@@ -17540,7 +17571,7 @@
           </a:prstGeom>
           <a:extLst>
             <a:ext uri="{C572A759-6A51-4108-AA02-DFA0A04FC94B}">
-              <ma14:wrappingTextBoxFlag xmlns:ma14="http://schemas.microsoft.com/office/mac/drawingml/2011/main" xmlns="" val="0"/>
+              <ma14:wrappingTextBoxFlag xmlns:ma14="http://schemas.microsoft.com/office/mac/drawingml/2011/main" val="0"/>
             </a:ext>
           </a:extLst>
         </p:spPr>
@@ -17558,7 +17589,7 @@
           <a:p>
             <a:pPr algn="r"/>
             <a:fld id="{F7021451-1387-4CA6-816F-3879F97B5CBC}" type="slidenum">
-              <a:rPr lang="en-US" b="0"/>
+              <a:rPr b="0" lang="en-US"/>
               <a:t>41</a:t>
             </a:fld>
             <a:endParaRPr lang="en-US"/>
@@ -17593,11 +17624,9 @@
       <p:sp>
         <p:nvSpPr>
           <p:cNvPr id="2" name="Text 0"/>
-          <p:cNvSpPr>
-            <a:spLocks noGrp="1"/>
-          </p:cNvSpPr>
-          <p:nvPr>
-            <p:ph type="title" idx="100" hasCustomPrompt="1"/>
+          <p:cNvSpPr/>
+          <p:nvPr>
+            <p:ph idx="100" type="title" hasCustomPrompt="1"/>
           </p:nvPr>
         </p:nvSpPr>
         <p:spPr>
@@ -17615,7 +17644,7 @@
           <a:bodyPr wrap="square" rtlCol="0" anchor="ctr"/>
           <a:lstStyle/>
           <a:p>
-            <a:pPr marL="0" indent="0" algn="ctr">
+            <a:pPr algn="ctr" indent="0" marL="0">
               <a:buNone/>
             </a:pPr>
             <a:r>
@@ -17636,11 +17665,9 @@
       <p:sp>
         <p:nvSpPr>
           <p:cNvPr id="3" name="Text 0"/>
-          <p:cNvSpPr>
-            <a:spLocks noGrp="1"/>
-          </p:cNvSpPr>
-          <p:nvPr>
-            <p:ph type="body" idx="101" hasCustomPrompt="1"/>
+          <p:cNvSpPr/>
+          <p:nvPr>
+            <p:ph idx="101" type="body" hasCustomPrompt="1"/>
           </p:nvPr>
         </p:nvSpPr>
         <p:spPr>
@@ -17658,7 +17685,7 @@
           <a:bodyPr wrap="square" rtlCol="0" anchor="t"/>
           <a:lstStyle/>
           <a:p>
-            <a:pPr marL="0" indent="0" algn="ctr">
+            <a:pPr algn="ctr" indent="0" marL="0">
               <a:buNone/>
             </a:pPr>
             <a:r>
@@ -17672,7 +17699,7 @@
             <a:endParaRPr lang="en-US" sz="1600" dirty="0"/>
           </a:p>
           <a:p>
-            <a:pPr marL="0" indent="0" algn="ctr">
+            <a:pPr algn="ctr" indent="0" marL="0">
               <a:buNone/>
             </a:pPr>
             <a:r>
@@ -17735,10 +17762,7 @@
         </p:spPr>
         <p:txBody>
           <a:bodyPr/>
-          <a:lstStyle/>
-          <a:p>
-            <a:endParaRPr/>
-          </a:p>
+          <a:p/>
         </p:txBody>
       </p:sp>
       <p:sp>
@@ -17762,7 +17786,7 @@
           <a:bodyPr wrap="square" lIns="0" tIns="0" rIns="0" bIns="0" rtlCol="0" anchor="t"/>
           <a:lstStyle/>
           <a:p>
-            <a:pPr marL="0" indent="0" algn="ctr">
+            <a:pPr algn="ctr" indent="0" marL="0">
               <a:buNone/>
             </a:pPr>
             <a:r>
@@ -17780,11 +17804,9 @@
       <p:sp>
         <p:nvSpPr>
           <p:cNvPr id="4" name="Text 0"/>
-          <p:cNvSpPr>
-            <a:spLocks noGrp="1"/>
-          </p:cNvSpPr>
-          <p:nvPr>
-            <p:ph type="title" idx="100" hasCustomPrompt="1"/>
+          <p:cNvSpPr/>
+          <p:nvPr>
+            <p:ph idx="100" type="title" hasCustomPrompt="1"/>
           </p:nvPr>
         </p:nvSpPr>
         <p:spPr>
@@ -17802,7 +17824,7 @@
           <a:bodyPr wrap="square" rtlCol="0" anchor="ctr"/>
           <a:lstStyle/>
           <a:p>
-            <a:pPr marL="0" indent="0" algn="ctr">
+            <a:pPr algn="ctr" indent="0" marL="0">
               <a:buNone/>
             </a:pPr>
             <a:r>
@@ -17819,7 +17841,7 @@
             <a:endParaRPr lang="en-US" sz="3200" dirty="0"/>
           </a:p>
           <a:p>
-            <a:pPr marL="0" indent="0" algn="ctr">
+            <a:pPr algn="ctr" indent="0" marL="0">
               <a:buNone/>
             </a:pPr>
             <a:r>
@@ -17836,7 +17858,7 @@
             <a:endParaRPr lang="en-US" sz="3200" dirty="0"/>
           </a:p>
           <a:p>
-            <a:pPr marL="0" indent="0" algn="ctr">
+            <a:pPr algn="ctr" indent="0" marL="0">
               <a:buNone/>
             </a:pPr>
             <a:r>
@@ -17857,11 +17879,9 @@
       <p:sp>
         <p:nvSpPr>
           <p:cNvPr id="5" name="Text 0"/>
-          <p:cNvSpPr>
-            <a:spLocks noGrp="1"/>
-          </p:cNvSpPr>
-          <p:nvPr>
-            <p:ph type="body" idx="101" hasCustomPrompt="1"/>
+          <p:cNvSpPr/>
+          <p:nvPr>
+            <p:ph idx="101" type="body" hasCustomPrompt="1"/>
           </p:nvPr>
         </p:nvSpPr>
         <p:spPr>
@@ -17879,7 +17899,7 @@
           <a:bodyPr wrap="square" rtlCol="0" anchor="t"/>
           <a:lstStyle/>
           <a:p>
-            <a:pPr marL="0" indent="0" algn="ctr">
+            <a:pPr algn="ctr" indent="0" marL="0">
               <a:buNone/>
             </a:pPr>
             <a:r>
@@ -17914,7 +17934,7 @@
           </a:prstGeom>
           <a:extLst>
             <a:ext uri="{C572A759-6A51-4108-AA02-DFA0A04FC94B}">
-              <ma14:wrappingTextBoxFlag xmlns:ma14="http://schemas.microsoft.com/office/mac/drawingml/2011/main" xmlns="" val="0"/>
+              <ma14:wrappingTextBoxFlag xmlns:ma14="http://schemas.microsoft.com/office/mac/drawingml/2011/main" val="0"/>
             </a:ext>
           </a:extLst>
         </p:spPr>
@@ -17932,7 +17952,7 @@
           <a:p>
             <a:pPr algn="r"/>
             <a:fld id="{F7021451-1387-4CA6-816F-3879F97B5CBC}" type="slidenum">
-              <a:rPr lang="en-US" b="0"/>
+              <a:rPr b="0" lang="en-US"/>
               <a:t>43</a:t>
             </a:fld>
             <a:endParaRPr lang="en-US"/>
@@ -17987,10 +18007,7 @@
         </p:spPr>
         <p:txBody>
           <a:bodyPr/>
-          <a:lstStyle/>
-          <a:p>
-            <a:endParaRPr/>
-          </a:p>
+          <a:p/>
         </p:txBody>
       </p:sp>
       <p:sp>
@@ -18014,7 +18031,7 @@
           <a:bodyPr wrap="square" lIns="0" tIns="0" rIns="0" bIns="0" rtlCol="0" anchor="t"/>
           <a:lstStyle/>
           <a:p>
-            <a:pPr marL="0" indent="0" algn="ctr">
+            <a:pPr algn="ctr" indent="0" marL="0">
               <a:buNone/>
             </a:pPr>
             <a:r>
@@ -18032,11 +18049,9 @@
       <p:sp>
         <p:nvSpPr>
           <p:cNvPr id="4" name="Text 0"/>
-          <p:cNvSpPr>
-            <a:spLocks noGrp="1"/>
-          </p:cNvSpPr>
-          <p:nvPr>
-            <p:ph type="title" idx="100" hasCustomPrompt="1"/>
+          <p:cNvSpPr/>
+          <p:nvPr>
+            <p:ph idx="100" type="title" hasCustomPrompt="1"/>
           </p:nvPr>
         </p:nvSpPr>
         <p:spPr>
@@ -18054,7 +18069,7 @@
           <a:bodyPr wrap="square" rtlCol="0" anchor="ctr"/>
           <a:lstStyle/>
           <a:p>
-            <a:pPr marL="0" indent="0" algn="ctr">
+            <a:pPr algn="ctr" indent="0" marL="0">
               <a:buNone/>
             </a:pPr>
             <a:r>
@@ -18071,7 +18086,7 @@
             <a:endParaRPr lang="en-US" sz="3200" dirty="0"/>
           </a:p>
           <a:p>
-            <a:pPr marL="0" indent="0" algn="ctr">
+            <a:pPr algn="ctr" indent="0" marL="0">
               <a:buNone/>
             </a:pPr>
             <a:r>
@@ -18088,7 +18103,7 @@
             <a:endParaRPr lang="en-US" sz="3200" dirty="0"/>
           </a:p>
           <a:p>
-            <a:pPr marL="0" indent="0" algn="ctr">
+            <a:pPr algn="ctr" indent="0" marL="0">
               <a:buNone/>
             </a:pPr>
             <a:r>
@@ -18109,11 +18124,9 @@
       <p:sp>
         <p:nvSpPr>
           <p:cNvPr id="5" name="Text 0"/>
-          <p:cNvSpPr>
-            <a:spLocks noGrp="1"/>
-          </p:cNvSpPr>
-          <p:nvPr>
-            <p:ph type="body" idx="101" hasCustomPrompt="1"/>
+          <p:cNvSpPr/>
+          <p:nvPr>
+            <p:ph idx="101" type="body" hasCustomPrompt="1"/>
           </p:nvPr>
         </p:nvSpPr>
         <p:spPr>
@@ -18131,7 +18144,7 @@
           <a:bodyPr wrap="square" rtlCol="0" anchor="t"/>
           <a:lstStyle/>
           <a:p>
-            <a:pPr marL="0" indent="0" algn="ctr">
+            <a:pPr algn="ctr" indent="0" marL="0">
               <a:buNone/>
             </a:pPr>
             <a:r>
@@ -18166,7 +18179,7 @@
           </a:prstGeom>
           <a:extLst>
             <a:ext uri="{C572A759-6A51-4108-AA02-DFA0A04FC94B}">
-              <ma14:wrappingTextBoxFlag xmlns:ma14="http://schemas.microsoft.com/office/mac/drawingml/2011/main" xmlns="" val="0"/>
+              <ma14:wrappingTextBoxFlag xmlns:ma14="http://schemas.microsoft.com/office/mac/drawingml/2011/main" val="0"/>
             </a:ext>
           </a:extLst>
         </p:spPr>
@@ -18184,7 +18197,7 @@
           <a:p>
             <a:pPr algn="r"/>
             <a:fld id="{F7021451-1387-4CA6-816F-3879F97B5CBC}" type="slidenum">
-              <a:rPr lang="en-US" b="0"/>
+              <a:rPr b="0" lang="en-US"/>
               <a:t>44</a:t>
             </a:fld>
             <a:endParaRPr lang="en-US"/>
@@ -18239,10 +18252,7 @@
         </p:spPr>
         <p:txBody>
           <a:bodyPr/>
-          <a:lstStyle/>
-          <a:p>
-            <a:endParaRPr/>
-          </a:p>
+          <a:p/>
         </p:txBody>
       </p:sp>
       <p:sp>
@@ -18266,7 +18276,7 @@
           <a:bodyPr wrap="square" lIns="0" tIns="0" rIns="0" bIns="0" rtlCol="0" anchor="t"/>
           <a:lstStyle/>
           <a:p>
-            <a:pPr marL="0" indent="0" algn="ctr">
+            <a:pPr algn="ctr" indent="0" marL="0">
               <a:buNone/>
             </a:pPr>
             <a:r>
@@ -18284,11 +18294,9 @@
       <p:sp>
         <p:nvSpPr>
           <p:cNvPr id="4" name="Text 0"/>
-          <p:cNvSpPr>
-            <a:spLocks noGrp="1"/>
-          </p:cNvSpPr>
-          <p:nvPr>
-            <p:ph type="title" idx="100" hasCustomPrompt="1"/>
+          <p:cNvSpPr/>
+          <p:nvPr>
+            <p:ph idx="100" type="title" hasCustomPrompt="1"/>
           </p:nvPr>
         </p:nvSpPr>
         <p:spPr>
@@ -18306,7 +18314,7 @@
           <a:bodyPr wrap="square" rtlCol="0" anchor="ctr"/>
           <a:lstStyle/>
           <a:p>
-            <a:pPr marL="0" indent="0" algn="ctr">
+            <a:pPr algn="ctr" indent="0" marL="0">
               <a:buNone/>
             </a:pPr>
             <a:r>
@@ -18323,7 +18331,7 @@
             <a:endParaRPr lang="en-US" sz="3200" dirty="0"/>
           </a:p>
           <a:p>
-            <a:pPr marL="0" indent="0" algn="ctr">
+            <a:pPr algn="ctr" indent="0" marL="0">
               <a:buNone/>
             </a:pPr>
             <a:r>
@@ -18340,7 +18348,7 @@
             <a:endParaRPr lang="en-US" sz="3200" dirty="0"/>
           </a:p>
           <a:p>
-            <a:pPr marL="0" indent="0" algn="ctr">
+            <a:pPr algn="ctr" indent="0" marL="0">
               <a:buNone/>
             </a:pPr>
             <a:r>
@@ -18361,11 +18369,9 @@
       <p:sp>
         <p:nvSpPr>
           <p:cNvPr id="5" name="Text 0"/>
-          <p:cNvSpPr>
-            <a:spLocks noGrp="1"/>
-          </p:cNvSpPr>
-          <p:nvPr>
-            <p:ph type="body" idx="101" hasCustomPrompt="1"/>
+          <p:cNvSpPr/>
+          <p:nvPr>
+            <p:ph idx="101" type="body" hasCustomPrompt="1"/>
           </p:nvPr>
         </p:nvSpPr>
         <p:spPr>
@@ -18383,7 +18389,7 @@
           <a:bodyPr wrap="square" rtlCol="0" anchor="t"/>
           <a:lstStyle/>
           <a:p>
-            <a:pPr marL="0" indent="0" algn="ctr">
+            <a:pPr algn="ctr" indent="0" marL="0">
               <a:buNone/>
             </a:pPr>
             <a:r>
@@ -18418,7 +18424,7 @@
           </a:prstGeom>
           <a:extLst>
             <a:ext uri="{C572A759-6A51-4108-AA02-DFA0A04FC94B}">
-              <ma14:wrappingTextBoxFlag xmlns:ma14="http://schemas.microsoft.com/office/mac/drawingml/2011/main" xmlns="" val="0"/>
+              <ma14:wrappingTextBoxFlag xmlns:ma14="http://schemas.microsoft.com/office/mac/drawingml/2011/main" val="0"/>
             </a:ext>
           </a:extLst>
         </p:spPr>
@@ -18436,7 +18442,7 @@
           <a:p>
             <a:pPr algn="r"/>
             <a:fld id="{F7021451-1387-4CA6-816F-3879F97B5CBC}" type="slidenum">
-              <a:rPr lang="en-US" b="0"/>
+              <a:rPr b="0" lang="en-US"/>
               <a:t>45</a:t>
             </a:fld>
             <a:endParaRPr lang="en-US"/>
@@ -18468,30 +18474,115 @@
           <a:chExt cx="0" cy="0"/>
         </a:xfrm>
       </p:grpSpPr>
-      <p:pic>
-        <p:nvPicPr>
-          <p:cNvPr id="2" name="Image 0" descr="絶対的安心感"/>
-          <p:cNvPicPr>
-            <a:picLocks noChangeAspect="1"/>
-          </p:cNvPicPr>
+      <p:sp>
+        <p:nvSpPr>
+          <p:cNvPr id="2" name="magic_main"/>
+          <p:cNvSpPr txBox="1"/>
           <p:nvPr/>
-        </p:nvPicPr>
-        <p:blipFill>
-          <a:blip r:embed="rId3"/>
-          <a:stretch>
-            <a:fillRect/>
-          </a:stretch>
-        </p:blipFill>
-        <p:spPr>
-          <a:xfrm>
-            <a:off x="0" y="20003"/>
-            <a:ext cx="9144000" cy="5103495"/>
-          </a:xfrm>
-          <a:prstGeom prst="rect">
-            <a:avLst/>
-          </a:prstGeom>
-        </p:spPr>
-      </p:pic>
+        </p:nvSpPr>
+        <p:spPr>
+          <a:xfrm>
+            <a:off x="548640" y="1005840"/>
+            <a:ext cx="8046720" cy="2103120"/>
+          </a:xfrm>
+          <a:prstGeom prst="rect">
+            <a:avLst/>
+          </a:prstGeom>
+          <a:noFill/>
+          <a:ln/>
+        </p:spPr>
+        <p:txBody>
+          <a:bodyPr wrap="square" lIns="1016" tIns="1016" rIns="1016" bIns="1016" rtlCol="0" anchor="ctr"/>
+          <a:lstStyle/>
+          <a:p>
+            <a:pPr algn="ctr" indent="0" marL="0">
+              <a:buNone/>
+            </a:pPr>
+            <a:r>
+              <a:rPr lang="en-US" sz="3400" b="1" dirty="0">
+                <a:solidFill>
+                  <a:schemeClr val="tx2"/>
+                </a:solidFill>
+                <a:latin typeface="Yu Mincho" pitchFamily="34" charset="0"/>
+                <a:ea typeface="Yu Mincho" pitchFamily="34" charset="-122"/>
+                <a:cs typeface="Yu Mincho" pitchFamily="34" charset="-120"/>
+              </a:rPr>
+              <a:t>根深いものは、</a:t>
+            </a:r>
+            <a:endParaRPr lang="en-US" sz="3400" dirty="0"/>
+          </a:p>
+          <a:p>
+            <a:pPr algn="ctr" indent="0" marL="0">
+              <a:buNone/>
+            </a:pPr>
+            <a:r>
+              <a:rPr lang="en-US" sz="3400" b="1" dirty="0">
+                <a:solidFill>
+                  <a:schemeClr val="tx2"/>
+                </a:solidFill>
+                <a:latin typeface="Yu Mincho" pitchFamily="34" charset="0"/>
+                <a:ea typeface="Yu Mincho" pitchFamily="34" charset="-122"/>
+                <a:cs typeface="Yu Mincho" pitchFamily="34" charset="-120"/>
+              </a:rPr>
+              <a:t>何度も何度も</a:t>
+            </a:r>
+            <a:endParaRPr lang="en-US" sz="3400" dirty="0"/>
+          </a:p>
+          <a:p>
+            <a:pPr algn="ctr" indent="0" marL="0">
+              <a:buNone/>
+            </a:pPr>
+            <a:r>
+              <a:rPr lang="en-US" sz="3400" b="1" dirty="0">
+                <a:solidFill>
+                  <a:schemeClr val="tx2"/>
+                </a:solidFill>
+                <a:latin typeface="Yu Mincho" pitchFamily="34" charset="0"/>
+                <a:ea typeface="Yu Mincho" pitchFamily="34" charset="-122"/>
+                <a:cs typeface="Yu Mincho" pitchFamily="34" charset="-120"/>
+              </a:rPr>
+              <a:t>自分に魔法をかけて、とっていく</a:t>
+            </a:r>
+            <a:endParaRPr lang="en-US" sz="3400" dirty="0"/>
+          </a:p>
+        </p:txBody>
+      </p:sp>
+      <p:sp>
+        <p:nvSpPr>
+          <p:cNvPr id="3" name="magic_sub"/>
+          <p:cNvSpPr txBox="1"/>
+          <p:nvPr/>
+        </p:nvSpPr>
+        <p:spPr>
+          <a:xfrm>
+            <a:off x="731520" y="3246120"/>
+            <a:ext cx="7680960" cy="548640"/>
+          </a:xfrm>
+          <a:prstGeom prst="rect">
+            <a:avLst/>
+          </a:prstGeom>
+          <a:noFill/>
+          <a:ln/>
+        </p:spPr>
+        <p:txBody>
+          <a:bodyPr wrap="square" lIns="1016" tIns="1016" rIns="1016" bIns="1016" rtlCol="0" anchor="ctr"/>
+          <a:lstStyle/>
+          <a:p>
+            <a:pPr algn="ctr" indent="0" marL="0">
+              <a:buNone/>
+            </a:pPr>
+            <a:r>
+              <a:rPr lang="en-US" sz="1800" b="1" dirty="0">
+                <a:solidFill>
+                  <a:schemeClr val="tx2"/>
+                </a:solidFill>
+              </a:rPr>
+              <a:t>あなたが自分にかける言葉が、魔法になります</a:t>
+            </a:r>
+            <a:endParaRPr lang="en-US" sz="1800" dirty="0"/>
+          </a:p>
+        </p:txBody>
+      </p:sp>
     </p:spTree>
   </p:cSld>
   <p:clrMapOvr>
@@ -18519,20 +18610,69 @@
       </p:grpSpPr>
       <p:pic>
         <p:nvPicPr>
-          <p:cNvPr id="2" name="Image 0" descr="海音ロゴ"/>
+          <p:cNvPr id="2" name="Image 0" descr="絶対的安心感">    </p:cNvPr>
           <p:cNvPicPr>
             <a:picLocks noChangeAspect="1"/>
           </p:cNvPicPr>
           <p:nvPr/>
         </p:nvPicPr>
         <p:blipFill>
-          <a:blip r:embed="rId3"/>
+          <a:blip r:embed="rId1"/>
           <a:stretch>
             <a:fillRect/>
           </a:stretch>
         </p:blipFill>
         <p:spPr>
           <a:xfrm>
+            <a:off x="0" y="20003"/>
+            <a:ext cx="9144000" cy="5103495"/>
+          </a:xfrm>
+          <a:prstGeom prst="rect">
+            <a:avLst/>
+          </a:prstGeom>
+        </p:spPr>
+      </p:pic>
+    </p:spTree>
+  </p:cSld>
+  <p:clrMapOvr>
+    <a:masterClrMapping/>
+  </p:clrMapOvr>
+</p:sld>
+</file>
+
+<file path=ppt/slides/slide48.xml><?xml version="1.0" encoding="utf-8"?>
+<p:sld xmlns:a="http://schemas.openxmlformats.org/drawingml/2006/main" xmlns:r="http://schemas.openxmlformats.org/officeDocument/2006/relationships" xmlns:p="http://schemas.openxmlformats.org/presentationml/2006/main">
+  <p:cSld name="Slide 48">
+    <p:spTree>
+      <p:nvGrpSpPr>
+        <p:cNvPr id="1" name=""/>
+        <p:cNvGrpSpPr/>
+        <p:nvPr/>
+      </p:nvGrpSpPr>
+      <p:grpSpPr>
+        <a:xfrm>
+          <a:off x="0" y="0"/>
+          <a:ext cx="0" cy="0"/>
+          <a:chOff x="0" y="0"/>
+          <a:chExt cx="0" cy="0"/>
+        </a:xfrm>
+      </p:grpSpPr>
+      <p:pic>
+        <p:nvPicPr>
+          <p:cNvPr id="2" name="Image 0" descr="海音ロゴ">    </p:cNvPr>
+          <p:cNvPicPr>
+            <a:picLocks noChangeAspect="1"/>
+          </p:cNvPicPr>
+          <p:nvPr/>
+        </p:nvPicPr>
+        <p:blipFill>
+          <a:blip r:embed="rId1"/>
+          <a:stretch>
+            <a:fillRect/>
+          </a:stretch>
+        </p:blipFill>
+        <p:spPr>
+          <a:xfrm>
             <a:off x="4069080" y="411480"/>
             <a:ext cx="1005840" cy="973836"/>
           </a:xfrm>
@@ -18544,11 +18684,9 @@
       <p:sp>
         <p:nvSpPr>
           <p:cNvPr id="3" name="Text 0"/>
-          <p:cNvSpPr>
-            <a:spLocks noGrp="1"/>
-          </p:cNvSpPr>
-          <p:nvPr>
-            <p:ph type="title" idx="100" hasCustomPrompt="1"/>
+          <p:cNvSpPr/>
+          <p:nvPr>
+            <p:ph idx="100" type="title" hasCustomPrompt="1"/>
           </p:nvPr>
         </p:nvSpPr>
         <p:spPr>
@@ -18566,7 +18704,7 @@
           <a:bodyPr wrap="square" rtlCol="0" anchor="ctr"/>
           <a:lstStyle/>
           <a:p>
-            <a:pPr marL="0" indent="0" algn="ctr">
+            <a:pPr algn="ctr" indent="0" marL="0">
               <a:buNone/>
             </a:pPr>
             <a:r>
@@ -18587,11 +18725,9 @@
       <p:sp>
         <p:nvSpPr>
           <p:cNvPr id="4" name="Text 0"/>
-          <p:cNvSpPr>
-            <a:spLocks noGrp="1"/>
-          </p:cNvSpPr>
-          <p:nvPr>
-            <p:ph type="body" idx="101" hasCustomPrompt="1"/>
+          <p:cNvSpPr/>
+          <p:nvPr>
+            <p:ph idx="101" type="body" hasCustomPrompt="1"/>
           </p:nvPr>
         </p:nvSpPr>
         <p:spPr>
@@ -18609,7 +18745,7 @@
           <a:bodyPr wrap="square" rtlCol="0" anchor="t"/>
           <a:lstStyle/>
           <a:p>
-            <a:pPr marL="0" indent="0" algn="ctr">
+            <a:pPr algn="ctr" indent="0" marL="0">
               <a:buNone/>
             </a:pPr>
             <a:r>
@@ -18623,7 +18759,7 @@
             <a:endParaRPr lang="en-US" sz="1600" dirty="0"/>
           </a:p>
           <a:p>
-            <a:pPr marL="0" indent="0" algn="ctr">
+            <a:pPr algn="ctr" indent="0" marL="0">
               <a:buNone/>
             </a:pPr>
             <a:r>
@@ -18686,10 +18822,7 @@
         </p:spPr>
         <p:txBody>
           <a:bodyPr/>
-          <a:lstStyle/>
-          <a:p>
-            <a:endParaRPr/>
-          </a:p>
+          <a:p/>
         </p:txBody>
       </p:sp>
       <p:sp>
@@ -18713,7 +18846,7 @@
           <a:bodyPr wrap="square" lIns="0" tIns="0" rIns="0" bIns="0" rtlCol="0" anchor="t"/>
           <a:lstStyle/>
           <a:p>
-            <a:pPr marL="0" indent="0" algn="ctr">
+            <a:pPr algn="ctr" indent="0" marL="0">
               <a:buNone/>
             </a:pPr>
             <a:r>
@@ -18731,11 +18864,9 @@
       <p:sp>
         <p:nvSpPr>
           <p:cNvPr id="4" name="Text 0"/>
-          <p:cNvSpPr>
-            <a:spLocks noGrp="1"/>
-          </p:cNvSpPr>
-          <p:nvPr>
-            <p:ph type="title" idx="100" hasCustomPrompt="1"/>
+          <p:cNvSpPr/>
+          <p:nvPr>
+            <p:ph idx="100" type="title" hasCustomPrompt="1"/>
           </p:nvPr>
         </p:nvSpPr>
         <p:spPr>
@@ -18753,7 +18884,7 @@
           <a:bodyPr wrap="square" rtlCol="0" anchor="ctr"/>
           <a:lstStyle/>
           <a:p>
-            <a:pPr marL="0" indent="0" algn="ctr">
+            <a:pPr algn="ctr" indent="0" marL="0">
               <a:buNone/>
             </a:pPr>
             <a:r>
@@ -18770,7 +18901,7 @@
             <a:endParaRPr lang="en-US" sz="3200" dirty="0"/>
           </a:p>
           <a:p>
-            <a:pPr marL="0" indent="0" algn="ctr">
+            <a:pPr algn="ctr" indent="0" marL="0">
               <a:buNone/>
             </a:pPr>
             <a:r>
@@ -18791,11 +18922,9 @@
       <p:sp>
         <p:nvSpPr>
           <p:cNvPr id="5" name="Text 0"/>
-          <p:cNvSpPr>
-            <a:spLocks noGrp="1"/>
-          </p:cNvSpPr>
-          <p:nvPr>
-            <p:ph type="body" idx="101" hasCustomPrompt="1"/>
+          <p:cNvSpPr/>
+          <p:nvPr>
+            <p:ph idx="101" type="body" hasCustomPrompt="1"/>
           </p:nvPr>
         </p:nvSpPr>
         <p:spPr>
@@ -18813,7 +18942,7 @@
           <a:bodyPr wrap="square" rtlCol="0" anchor="t"/>
           <a:lstStyle/>
           <a:p>
-            <a:pPr marL="0" indent="0" algn="ctr">
+            <a:pPr algn="ctr" indent="0" marL="0">
               <a:buNone/>
             </a:pPr>
             <a:r>
@@ -18848,7 +18977,7 @@
           </a:prstGeom>
           <a:extLst>
             <a:ext uri="{C572A759-6A51-4108-AA02-DFA0A04FC94B}">
-              <ma14:wrappingTextBoxFlag xmlns:ma14="http://schemas.microsoft.com/office/mac/drawingml/2011/main" xmlns="" val="0"/>
+              <ma14:wrappingTextBoxFlag xmlns:ma14="http://schemas.microsoft.com/office/mac/drawingml/2011/main" val="0"/>
             </a:ext>
           </a:extLst>
         </p:spPr>
@@ -18866,7 +18995,7 @@
           <a:p>
             <a:pPr algn="r"/>
             <a:fld id="{F7021451-1387-4CA6-816F-3879F97B5CBC}" type="slidenum">
-              <a:rPr lang="en-US" b="0"/>
+              <a:rPr b="0" lang="en-US"/>
               <a:t>5</a:t>
             </a:fld>
             <a:endParaRPr lang="en-US"/>
@@ -18921,10 +19050,7 @@
         </p:spPr>
         <p:txBody>
           <a:bodyPr/>
-          <a:lstStyle/>
-          <a:p>
-            <a:endParaRPr/>
-          </a:p>
+          <a:p/>
         </p:txBody>
       </p:sp>
       <p:sp>
@@ -18948,7 +19074,7 @@
           <a:bodyPr wrap="square" lIns="0" tIns="0" rIns="0" bIns="0" rtlCol="0" anchor="t"/>
           <a:lstStyle/>
           <a:p>
-            <a:pPr marL="0" indent="0" algn="ctr">
+            <a:pPr algn="ctr" indent="0" marL="0">
               <a:buNone/>
             </a:pPr>
             <a:r>
@@ -18966,11 +19092,9 @@
       <p:sp>
         <p:nvSpPr>
           <p:cNvPr id="4" name="Text 0"/>
-          <p:cNvSpPr>
-            <a:spLocks noGrp="1"/>
-          </p:cNvSpPr>
-          <p:nvPr>
-            <p:ph type="title" idx="100" hasCustomPrompt="1"/>
+          <p:cNvSpPr/>
+          <p:nvPr>
+            <p:ph idx="100" type="title" hasCustomPrompt="1"/>
           </p:nvPr>
         </p:nvSpPr>
         <p:spPr>
@@ -18988,7 +19112,7 @@
           <a:bodyPr wrap="square" rtlCol="0" anchor="ctr"/>
           <a:lstStyle/>
           <a:p>
-            <a:pPr marL="0" indent="0" algn="ctr">
+            <a:pPr algn="ctr" indent="0" marL="0">
               <a:buNone/>
             </a:pPr>
             <a:r>
@@ -19009,11 +19133,9 @@
       <p:sp>
         <p:nvSpPr>
           <p:cNvPr id="5" name="Text 0"/>
-          <p:cNvSpPr>
-            <a:spLocks noGrp="1"/>
-          </p:cNvSpPr>
-          <p:nvPr>
-            <p:ph type="body" idx="101" hasCustomPrompt="1"/>
+          <p:cNvSpPr/>
+          <p:nvPr>
+            <p:ph idx="101" type="body" hasCustomPrompt="1"/>
           </p:nvPr>
         </p:nvSpPr>
         <p:spPr>
@@ -19031,7 +19153,7 @@
           <a:bodyPr wrap="square" rtlCol="0" anchor="t"/>
           <a:lstStyle/>
           <a:p>
-            <a:pPr marL="0" indent="0" algn="ctr">
+            <a:pPr algn="ctr" indent="0" marL="0">
               <a:buNone/>
             </a:pPr>
             <a:r>
@@ -19066,7 +19188,7 @@
           </a:prstGeom>
           <a:extLst>
             <a:ext uri="{C572A759-6A51-4108-AA02-DFA0A04FC94B}">
-              <ma14:wrappingTextBoxFlag xmlns:ma14="http://schemas.microsoft.com/office/mac/drawingml/2011/main" xmlns="" val="0"/>
+              <ma14:wrappingTextBoxFlag xmlns:ma14="http://schemas.microsoft.com/office/mac/drawingml/2011/main" val="0"/>
             </a:ext>
           </a:extLst>
         </p:spPr>
@@ -19084,7 +19206,7 @@
           <a:p>
             <a:pPr algn="r"/>
             <a:fld id="{F7021451-1387-4CA6-816F-3879F97B5CBC}" type="slidenum">
-              <a:rPr lang="en-US" b="0"/>
+              <a:rPr b="0" lang="en-US"/>
               <a:t>6</a:t>
             </a:fld>
             <a:endParaRPr lang="en-US"/>
@@ -19139,10 +19261,7 @@
         </p:spPr>
         <p:txBody>
           <a:bodyPr/>
-          <a:lstStyle/>
-          <a:p>
-            <a:endParaRPr/>
-          </a:p>
+          <a:p/>
         </p:txBody>
       </p:sp>
       <p:sp>
@@ -19166,7 +19285,7 @@
           <a:bodyPr wrap="square" lIns="0" tIns="0" rIns="0" bIns="0" rtlCol="0" anchor="t"/>
           <a:lstStyle/>
           <a:p>
-            <a:pPr marL="0" indent="0" algn="ctr">
+            <a:pPr algn="ctr" indent="0" marL="0">
               <a:buNone/>
             </a:pPr>
             <a:r>
@@ -19184,11 +19303,9 @@
       <p:sp>
         <p:nvSpPr>
           <p:cNvPr id="4" name="Text 0"/>
-          <p:cNvSpPr>
-            <a:spLocks noGrp="1"/>
-          </p:cNvSpPr>
-          <p:nvPr>
-            <p:ph type="title" idx="100" hasCustomPrompt="1"/>
+          <p:cNvSpPr/>
+          <p:nvPr>
+            <p:ph idx="100" type="title" hasCustomPrompt="1"/>
           </p:nvPr>
         </p:nvSpPr>
         <p:spPr>
@@ -19206,7 +19323,7 @@
           <a:bodyPr wrap="square" rtlCol="0" anchor="ctr"/>
           <a:lstStyle/>
           <a:p>
-            <a:pPr marL="0" indent="0" algn="ctr">
+            <a:pPr algn="ctr" indent="0" marL="0">
               <a:buNone/>
             </a:pPr>
             <a:r>
@@ -19223,7 +19340,7 @@
             <a:endParaRPr lang="en-US" sz="3200" dirty="0"/>
           </a:p>
           <a:p>
-            <a:pPr marL="0" indent="0" algn="ctr">
+            <a:pPr algn="ctr" indent="0" marL="0">
               <a:buNone/>
             </a:pPr>
             <a:r>
@@ -19261,7 +19378,7 @@
           </a:prstGeom>
           <a:extLst>
             <a:ext uri="{C572A759-6A51-4108-AA02-DFA0A04FC94B}">
-              <ma14:wrappingTextBoxFlag xmlns:ma14="http://schemas.microsoft.com/office/mac/drawingml/2011/main" xmlns="" val="0"/>
+              <ma14:wrappingTextBoxFlag xmlns:ma14="http://schemas.microsoft.com/office/mac/drawingml/2011/main" val="0"/>
             </a:ext>
           </a:extLst>
         </p:spPr>
@@ -19279,7 +19396,7 @@
           <a:p>
             <a:pPr algn="r"/>
             <a:fld id="{F7021451-1387-4CA6-816F-3879F97B5CBC}" type="slidenum">
-              <a:rPr lang="en-US" b="0"/>
+              <a:rPr b="0" lang="en-US"/>
               <a:t>7</a:t>
             </a:fld>
             <a:endParaRPr lang="en-US"/>
@@ -19334,10 +19451,7 @@
         </p:spPr>
         <p:txBody>
           <a:bodyPr/>
-          <a:lstStyle/>
-          <a:p>
-            <a:endParaRPr/>
-          </a:p>
+          <a:p/>
         </p:txBody>
       </p:sp>
       <p:sp>
@@ -19361,7 +19475,7 @@
           <a:bodyPr wrap="square" lIns="0" tIns="0" rIns="0" bIns="0" rtlCol="0" anchor="t"/>
           <a:lstStyle/>
           <a:p>
-            <a:pPr marL="0" indent="0" algn="ctr">
+            <a:pPr algn="ctr" indent="0" marL="0">
               <a:buNone/>
             </a:pPr>
             <a:r>
@@ -19379,11 +19493,9 @@
       <p:sp>
         <p:nvSpPr>
           <p:cNvPr id="4" name="Text 0"/>
-          <p:cNvSpPr>
-            <a:spLocks noGrp="1"/>
-          </p:cNvSpPr>
-          <p:nvPr>
-            <p:ph type="title" idx="100" hasCustomPrompt="1"/>
+          <p:cNvSpPr/>
+          <p:nvPr>
+            <p:ph idx="100" type="title" hasCustomPrompt="1"/>
           </p:nvPr>
         </p:nvSpPr>
         <p:spPr>
@@ -19401,7 +19513,7 @@
           <a:bodyPr wrap="square" rtlCol="0" anchor="ctr"/>
           <a:lstStyle/>
           <a:p>
-            <a:pPr marL="0" indent="0" algn="ctr">
+            <a:pPr algn="ctr" indent="0" marL="0">
               <a:buNone/>
             </a:pPr>
             <a:r>
@@ -19418,7 +19530,7 @@
             <a:endParaRPr lang="en-US" sz="3200" dirty="0"/>
           </a:p>
           <a:p>
-            <a:pPr marL="0" indent="0" algn="ctr">
+            <a:pPr algn="ctr" indent="0" marL="0">
               <a:buNone/>
             </a:pPr>
             <a:r>
@@ -19456,7 +19568,7 @@
           </a:prstGeom>
           <a:extLst>
             <a:ext uri="{C572A759-6A51-4108-AA02-DFA0A04FC94B}">
-              <ma14:wrappingTextBoxFlag xmlns:ma14="http://schemas.microsoft.com/office/mac/drawingml/2011/main" xmlns="" val="0"/>
+              <ma14:wrappingTextBoxFlag xmlns:ma14="http://schemas.microsoft.com/office/mac/drawingml/2011/main" val="0"/>
             </a:ext>
           </a:extLst>
         </p:spPr>
@@ -19474,7 +19586,7 @@
           <a:p>
             <a:pPr algn="r"/>
             <a:fld id="{F7021451-1387-4CA6-816F-3879F97B5CBC}" type="slidenum">
-              <a:rPr lang="en-US" b="0"/>
+              <a:rPr b="0" lang="en-US"/>
               <a:t>8</a:t>
             </a:fld>
             <a:endParaRPr lang="en-US"/>
@@ -19529,10 +19641,7 @@
         </p:spPr>
         <p:txBody>
           <a:bodyPr/>
-          <a:lstStyle/>
-          <a:p>
-            <a:endParaRPr/>
-          </a:p>
+          <a:p/>
         </p:txBody>
       </p:sp>
       <p:sp>
@@ -19556,7 +19665,7 @@
           <a:bodyPr wrap="square" lIns="0" tIns="0" rIns="0" bIns="0" rtlCol="0" anchor="t"/>
           <a:lstStyle/>
           <a:p>
-            <a:pPr marL="0" indent="0" algn="ctr">
+            <a:pPr algn="ctr" indent="0" marL="0">
               <a:buNone/>
             </a:pPr>
             <a:r>
@@ -19574,11 +19683,9 @@
       <p:sp>
         <p:nvSpPr>
           <p:cNvPr id="4" name="Text 0"/>
-          <p:cNvSpPr>
-            <a:spLocks noGrp="1"/>
-          </p:cNvSpPr>
-          <p:nvPr>
-            <p:ph type="title" idx="100" hasCustomPrompt="1"/>
+          <p:cNvSpPr/>
+          <p:nvPr>
+            <p:ph idx="100" type="title" hasCustomPrompt="1"/>
           </p:nvPr>
         </p:nvSpPr>
         <p:spPr>
@@ -19596,7 +19703,7 @@
           <a:bodyPr wrap="square" rtlCol="0" anchor="ctr"/>
           <a:lstStyle/>
           <a:p>
-            <a:pPr marL="0" indent="0" algn="ctr">
+            <a:pPr algn="ctr" indent="0" marL="0">
               <a:buNone/>
             </a:pPr>
             <a:r>
@@ -19613,7 +19720,7 @@
             <a:endParaRPr lang="en-US" sz="3200" dirty="0"/>
           </a:p>
           <a:p>
-            <a:pPr marL="0" indent="0" algn="ctr">
+            <a:pPr algn="ctr" indent="0" marL="0">
               <a:buNone/>
             </a:pPr>
             <a:r>
@@ -19630,7 +19737,7 @@
             <a:endParaRPr lang="en-US" sz="3200" dirty="0"/>
           </a:p>
           <a:p>
-            <a:pPr marL="0" indent="0" algn="ctr">
+            <a:pPr algn="ctr" indent="0" marL="0">
               <a:buNone/>
             </a:pPr>
             <a:r>
@@ -19651,11 +19758,9 @@
       <p:sp>
         <p:nvSpPr>
           <p:cNvPr id="5" name="Text 0"/>
-          <p:cNvSpPr>
-            <a:spLocks noGrp="1"/>
-          </p:cNvSpPr>
-          <p:nvPr>
-            <p:ph type="body" idx="101" hasCustomPrompt="1"/>
+          <p:cNvSpPr/>
+          <p:nvPr>
+            <p:ph idx="101" type="body" hasCustomPrompt="1"/>
           </p:nvPr>
         </p:nvSpPr>
         <p:spPr>
@@ -19673,7 +19778,7 @@
           <a:bodyPr wrap="square" rtlCol="0" anchor="t"/>
           <a:lstStyle/>
           <a:p>
-            <a:pPr marL="0" indent="0" algn="ctr">
+            <a:pPr algn="ctr" indent="0" marL="0">
               <a:buNone/>
             </a:pPr>
             <a:r>
@@ -19708,7 +19813,7 @@
           </a:prstGeom>
           <a:extLst>
             <a:ext uri="{C572A759-6A51-4108-AA02-DFA0A04FC94B}">
-              <ma14:wrappingTextBoxFlag xmlns:ma14="http://schemas.microsoft.com/office/mac/drawingml/2011/main" xmlns="" val="0"/>
+              <ma14:wrappingTextBoxFlag xmlns:ma14="http://schemas.microsoft.com/office/mac/drawingml/2011/main" val="0"/>
             </a:ext>
           </a:extLst>
         </p:spPr>
@@ -19726,7 +19831,7 @@
           <a:p>
             <a:pPr algn="r"/>
             <a:fld id="{F7021451-1387-4CA6-816F-3879F97B5CBC}" type="slidenum">
-              <a:rPr lang="en-US" b="0"/>
+              <a:rPr b="0" lang="en-US"/>
               <a:t>9</a:t>
             </a:fld>
             <a:endParaRPr lang="en-US"/>
@@ -20034,319 +20139,4 @@
     </a:ext>
   </a:extLst>
 </a:theme>
-</file>
-
-<file path=ppt/theme/theme2.xml><?xml version="1.0" encoding="utf-8"?>
-<a:theme xmlns:a="http://schemas.openxmlformats.org/drawingml/2006/main" name="Office テーマ">
-  <a:themeElements>
-    <a:clrScheme name="Office">
-      <a:dk1>
-        <a:sysClr val="windowText" lastClr="000000"/>
-      </a:dk1>
-      <a:lt1>
-        <a:sysClr val="window" lastClr="FFFFFF"/>
-      </a:lt1>
-      <a:dk2>
-        <a:srgbClr val="0E2841"/>
-      </a:dk2>
-      <a:lt2>
-        <a:srgbClr val="E8E8E8"/>
-      </a:lt2>
-      <a:accent1>
-        <a:srgbClr val="156082"/>
-      </a:accent1>
-      <a:accent2>
-        <a:srgbClr val="E97132"/>
-      </a:accent2>
-      <a:accent3>
-        <a:srgbClr val="196B24"/>
-      </a:accent3>
-      <a:accent4>
-        <a:srgbClr val="0F9ED5"/>
-      </a:accent4>
-      <a:accent5>
-        <a:srgbClr val="A02B93"/>
-      </a:accent5>
-      <a:accent6>
-        <a:srgbClr val="4EA72E"/>
-      </a:accent6>
-      <a:hlink>
-        <a:srgbClr val="467886"/>
-      </a:hlink>
-      <a:folHlink>
-        <a:srgbClr val="96607D"/>
-      </a:folHlink>
-    </a:clrScheme>
-    <a:fontScheme name="Office">
-      <a:majorFont>
-        <a:latin typeface="游ゴシック Light" panose="02110004020202020204"/>
-        <a:ea typeface=""/>
-        <a:cs typeface=""/>
-        <a:font script="Jpan" typeface="游ゴシック Light"/>
-        <a:font script="Hang" typeface="맑은 고딕"/>
-        <a:font script="Hans" typeface="等线 Light"/>
-        <a:font script="Hant" typeface="新細明體"/>
-        <a:font script="Arab" typeface="Times New Roman"/>
-        <a:font script="Hebr" typeface="Times New Roman"/>
-        <a:font script="Thai" typeface="Angsana New"/>
-        <a:font script="Ethi" typeface="Nyala"/>
-        <a:font script="Beng" typeface="Vrinda"/>
-        <a:font script="Gujr" typeface="Shruti"/>
-        <a:font script="Khmr" typeface="MoolBoran"/>
-        <a:font script="Knda" typeface="Tunga"/>
-        <a:font script="Guru" typeface="Raavi"/>
-        <a:font script="Cans" typeface="Euphemia"/>
-        <a:font script="Cher" typeface="Plantagenet Cherokee"/>
-        <a:font script="Yiii" typeface="Microsoft Yi Baiti"/>
-        <a:font script="Tibt" typeface="Microsoft Himalaya"/>
-        <a:font script="Thaa" typeface="MV Boli"/>
-        <a:font script="Deva" typeface="Mangal"/>
-        <a:font script="Telu" typeface="Gautami"/>
-        <a:font script="Taml" typeface="Latha"/>
-        <a:font script="Syrc" typeface="Estrangelo Edessa"/>
-        <a:font script="Orya" typeface="Kalinga"/>
-        <a:font script="Mlym" typeface="Kartika"/>
-        <a:font script="Laoo" typeface="DokChampa"/>
-        <a:font script="Sinh" typeface="Iskoola Pota"/>
-        <a:font script="Mong" typeface="Mongolian Baiti"/>
-        <a:font script="Viet" typeface="Times New Roman"/>
-        <a:font script="Uigh" typeface="Microsoft Uighur"/>
-        <a:font script="Geor" typeface="Sylfaen"/>
-        <a:font script="Armn" typeface="Arial"/>
-        <a:font script="Bugi" typeface="Leelawadee UI"/>
-        <a:font script="Bopo" typeface="Microsoft JhengHei"/>
-        <a:font script="Java" typeface="Javanese Text"/>
-        <a:font script="Lisu" typeface="Segoe UI"/>
-        <a:font script="Mymr" typeface="Myanmar Text"/>
-        <a:font script="Nkoo" typeface="Ebrima"/>
-        <a:font script="Olck" typeface="Nirmala UI"/>
-        <a:font script="Osma" typeface="Ebrima"/>
-        <a:font script="Phag" typeface="Phagspa"/>
-        <a:font script="Syrn" typeface="Estrangelo Edessa"/>
-        <a:font script="Syrj" typeface="Estrangelo Edessa"/>
-        <a:font script="Syre" typeface="Estrangelo Edessa"/>
-        <a:font script="Sora" typeface="Nirmala UI"/>
-        <a:font script="Tale" typeface="Microsoft Tai Le"/>
-        <a:font script="Talu" typeface="Microsoft New Tai Lue"/>
-        <a:font script="Tfng" typeface="Ebrima"/>
-      </a:majorFont>
-      <a:minorFont>
-        <a:latin typeface="游ゴシック" panose="02110004020202020204"/>
-        <a:ea typeface=""/>
-        <a:cs typeface=""/>
-        <a:font script="Jpan" typeface="游ゴシック"/>
-        <a:font script="Hang" typeface="맑은 고딕"/>
-        <a:font script="Hans" typeface="等线"/>
-        <a:font script="Hant" typeface="新細明體"/>
-        <a:font script="Arab" typeface="Arial"/>
-        <a:font script="Hebr" typeface="Arial"/>
-        <a:font script="Thai" typeface="Cordia New"/>
-        <a:font script="Ethi" typeface="Nyala"/>
-        <a:font script="Beng" typeface="Vrinda"/>
-        <a:font script="Gujr" typeface="Shruti"/>
-        <a:font script="Khmr" typeface="DaunPenh"/>
-        <a:font script="Knda" typeface="Tunga"/>
-        <a:font script="Guru" typeface="Raavi"/>
-        <a:font script="Cans" typeface="Euphemia"/>
-        <a:font script="Cher" typeface="Plantagenet Cherokee"/>
-        <a:font script="Yiii" typeface="Microsoft Yi Baiti"/>
-        <a:font script="Tibt" typeface="Microsoft Himalaya"/>
-        <a:font script="Thaa" typeface="MV Boli"/>
-        <a:font script="Deva" typeface="Mangal"/>
-        <a:font script="Telu" typeface="Gautami"/>
-        <a:font script="Taml" typeface="Latha"/>
-        <a:font script="Syrc" typeface="Estrangelo Edessa"/>
-        <a:font script="Orya" typeface="Kalinga"/>
-        <a:font script="Mlym" typeface="Kartika"/>
-        <a:font script="Laoo" typeface="DokChampa"/>
-        <a:font script="Sinh" typeface="Iskoola Pota"/>
-        <a:font script="Mong" typeface="Mongolian Baiti"/>
-        <a:font script="Viet" typeface="Arial"/>
-        <a:font script="Uigh" typeface="Microsoft Uighur"/>
-        <a:font script="Geor" typeface="Sylfaen"/>
-        <a:font script="Armn" typeface="Arial"/>
-        <a:font script="Bugi" typeface="Leelawadee UI"/>
-        <a:font script="Bopo" typeface="Microsoft JhengHei"/>
-        <a:font script="Java" typeface="Javanese Text"/>
-        <a:font script="Lisu" typeface="Segoe UI"/>
-        <a:font script="Mymr" typeface="Myanmar Text"/>
-        <a:font script="Nkoo" typeface="Ebrima"/>
-        <a:font script="Olck" typeface="Nirmala UI"/>
-        <a:font script="Osma" typeface="Ebrima"/>
-        <a:font script="Phag" typeface="Phagspa"/>
-        <a:font script="Syrn" typeface="Estrangelo Edessa"/>
-        <a:font script="Syrj" typeface="Estrangelo Edessa"/>
-        <a:font script="Syre" typeface="Estrangelo Edessa"/>
-        <a:font script="Sora" typeface="Nirmala UI"/>
-        <a:font script="Tale" typeface="Microsoft Tai Le"/>
-        <a:font script="Talu" typeface="Microsoft New Tai Lue"/>
-        <a:font script="Tfng" typeface="Ebrima"/>
-      </a:minorFont>
-    </a:fontScheme>
-    <a:fmtScheme name="Office">
-      <a:fillStyleLst>
-        <a:solidFill>
-          <a:schemeClr val="phClr"/>
-        </a:solidFill>
-        <a:gradFill rotWithShape="1">
-          <a:gsLst>
-            <a:gs pos="0">
-              <a:schemeClr val="phClr">
-                <a:lumMod val="110000"/>
-                <a:satMod val="105000"/>
-                <a:tint val="67000"/>
-              </a:schemeClr>
-            </a:gs>
-            <a:gs pos="50000">
-              <a:schemeClr val="phClr">
-                <a:lumMod val="105000"/>
-                <a:satMod val="103000"/>
-                <a:tint val="73000"/>
-              </a:schemeClr>
-            </a:gs>
-            <a:gs pos="100000">
-              <a:schemeClr val="phClr">
-                <a:lumMod val="105000"/>
-                <a:satMod val="109000"/>
-                <a:tint val="81000"/>
-              </a:schemeClr>
-            </a:gs>
-          </a:gsLst>
-          <a:lin ang="5400000" scaled="0"/>
-        </a:gradFill>
-        <a:gradFill rotWithShape="1">
-          <a:gsLst>
-            <a:gs pos="0">
-              <a:schemeClr val="phClr">
-                <a:satMod val="103000"/>
-                <a:lumMod val="102000"/>
-                <a:tint val="94000"/>
-              </a:schemeClr>
-            </a:gs>
-            <a:gs pos="50000">
-              <a:schemeClr val="phClr">
-                <a:satMod val="110000"/>
-                <a:lumMod val="100000"/>
-                <a:shade val="100000"/>
-              </a:schemeClr>
-            </a:gs>
-            <a:gs pos="100000">
-              <a:schemeClr val="phClr">
-                <a:lumMod val="99000"/>
-                <a:satMod val="120000"/>
-                <a:shade val="78000"/>
-              </a:schemeClr>
-            </a:gs>
-          </a:gsLst>
-          <a:lin ang="5400000" scaled="0"/>
-        </a:gradFill>
-      </a:fillStyleLst>
-      <a:lnStyleLst>
-        <a:ln w="12700" cap="flat" cmpd="sng" algn="ctr">
-          <a:solidFill>
-            <a:schemeClr val="phClr"/>
-          </a:solidFill>
-          <a:prstDash val="solid"/>
-          <a:miter lim="800000"/>
-        </a:ln>
-        <a:ln w="19050" cap="flat" cmpd="sng" algn="ctr">
-          <a:solidFill>
-            <a:schemeClr val="phClr"/>
-          </a:solidFill>
-          <a:prstDash val="solid"/>
-          <a:miter lim="800000"/>
-        </a:ln>
-        <a:ln w="25400" cap="flat" cmpd="sng" algn="ctr">
-          <a:solidFill>
-            <a:schemeClr val="phClr"/>
-          </a:solidFill>
-          <a:prstDash val="solid"/>
-          <a:miter lim="800000"/>
-        </a:ln>
-      </a:lnStyleLst>
-      <a:effectStyleLst>
-        <a:effectStyle>
-          <a:effectLst/>
-        </a:effectStyle>
-        <a:effectStyle>
-          <a:effectLst/>
-        </a:effectStyle>
-        <a:effectStyle>
-          <a:effectLst>
-            <a:outerShdw blurRad="57150" dist="19050" dir="5400000" algn="ctr" rotWithShape="0">
-              <a:srgbClr val="000000">
-                <a:alpha val="63000"/>
-              </a:srgbClr>
-            </a:outerShdw>
-          </a:effectLst>
-        </a:effectStyle>
-      </a:effectStyleLst>
-      <a:bgFillStyleLst>
-        <a:solidFill>
-          <a:schemeClr val="phClr"/>
-        </a:solidFill>
-        <a:solidFill>
-          <a:schemeClr val="phClr">
-            <a:tint val="95000"/>
-            <a:satMod val="170000"/>
-          </a:schemeClr>
-        </a:solidFill>
-        <a:gradFill rotWithShape="1">
-          <a:gsLst>
-            <a:gs pos="0">
-              <a:schemeClr val="phClr">
-                <a:tint val="93000"/>
-                <a:satMod val="150000"/>
-                <a:shade val="98000"/>
-                <a:lumMod val="102000"/>
-              </a:schemeClr>
-            </a:gs>
-            <a:gs pos="50000">
-              <a:schemeClr val="phClr">
-                <a:tint val="98000"/>
-                <a:satMod val="130000"/>
-                <a:shade val="90000"/>
-                <a:lumMod val="103000"/>
-              </a:schemeClr>
-            </a:gs>
-            <a:gs pos="100000">
-              <a:schemeClr val="phClr">
-                <a:shade val="63000"/>
-                <a:satMod val="120000"/>
-              </a:schemeClr>
-            </a:gs>
-          </a:gsLst>
-          <a:lin ang="5400000" scaled="0"/>
-        </a:gradFill>
-      </a:bgFillStyleLst>
-    </a:fmtScheme>
-  </a:themeElements>
-  <a:objectDefaults>
-    <a:lnDef>
-      <a:spPr/>
-      <a:bodyPr/>
-      <a:lstStyle/>
-      <a:style>
-        <a:lnRef idx="2">
-          <a:schemeClr val="accent1"/>
-        </a:lnRef>
-        <a:fillRef idx="0">
-          <a:schemeClr val="accent1"/>
-        </a:fillRef>
-        <a:effectRef idx="1">
-          <a:schemeClr val="accent1"/>
-        </a:effectRef>
-        <a:fontRef idx="minor">
-          <a:schemeClr val="tx1"/>
-        </a:fontRef>
-      </a:style>
-    </a:lnDef>
-  </a:objectDefaults>
-  <a:extraClrSchemeLst/>
-  <a:extLst>
-    <a:ext uri="{05A4C25C-085E-4340-85A3-A5531E510DB2}">
-      <thm15:themeFamily xmlns:thm15="http://schemas.microsoft.com/office/thememl/2012/main" name="Office Theme" id="{2E142A2C-CD16-42D6-873A-C26D2A0506FA}" vid="{1BDDFF52-6CD6-40A5-AB3C-68EB2F1E4D0A}"/>
-    </a:ext>
-  </a:extLst>
-</a:theme>
 </file>